--- a/figures/figures.pptx
+++ b/figures/figures.pptx
@@ -5,13 +5,14 @@
     <p:sldMasterId id="2147483660" r:id="rId1"/>
   </p:sldMasterIdLst>
   <p:notesMasterIdLst>
-    <p:notesMasterId r:id="rId6"/>
+    <p:notesMasterId r:id="rId7"/>
   </p:notesMasterIdLst>
   <p:sldIdLst>
     <p:sldId id="258" r:id="rId2"/>
     <p:sldId id="256" r:id="rId3"/>
-    <p:sldId id="259" r:id="rId4"/>
-    <p:sldId id="257" r:id="rId5"/>
+    <p:sldId id="260" r:id="rId4"/>
+    <p:sldId id="259" r:id="rId5"/>
+    <p:sldId id="257" r:id="rId6"/>
   </p:sldIdLst>
   <p:sldSz cx="12192000" cy="6858000"/>
   <p:notesSz cx="6858000" cy="9144000"/>
@@ -121,6 +122,7 @@
         <p14:section name="Chapter 1" id="{4FFEF0E2-5833-4089-8860-99F4B2E194C0}">
           <p14:sldIdLst>
             <p14:sldId id="256"/>
+            <p14:sldId id="260"/>
             <p14:sldId id="259"/>
           </p14:sldIdLst>
         </p14:section>
@@ -220,7 +222,7 @@
           <a:p>
             <a:fld id="{DAABB0E5-6D8D-4DEE-B75F-67010CF2307C}" type="datetimeFigureOut">
               <a:rPr lang="en-US" smtClean="0"/>
-              <a:t>1/26/2026</a:t>
+              <a:t>1/31/2026</a:t>
             </a:fld>
             <a:endParaRPr lang="en-US"/>
           </a:p>
@@ -755,7 +757,7 @@
           <a:p>
             <a:fld id="{1D549D2C-39EA-4769-BF7E-31FE52D82078}" type="slidenum">
               <a:rPr lang="en-US" smtClean="0"/>
-              <a:t>3</a:t>
+              <a:t>4</a:t>
             </a:fld>
             <a:endParaRPr lang="en-US"/>
           </a:p>
@@ -905,7 +907,7 @@
           <a:p>
             <a:fld id="{B84C5C40-2055-49AF-9028-5DA79E75E391}" type="datetimeFigureOut">
               <a:rPr lang="en-US" smtClean="0"/>
-              <a:t>1/26/2026</a:t>
+              <a:t>1/31/2026</a:t>
             </a:fld>
             <a:endParaRPr lang="en-US"/>
           </a:p>
@@ -1075,7 +1077,7 @@
           <a:p>
             <a:fld id="{B84C5C40-2055-49AF-9028-5DA79E75E391}" type="datetimeFigureOut">
               <a:rPr lang="en-US" smtClean="0"/>
-              <a:t>1/26/2026</a:t>
+              <a:t>1/31/2026</a:t>
             </a:fld>
             <a:endParaRPr lang="en-US"/>
           </a:p>
@@ -1255,7 +1257,7 @@
           <a:p>
             <a:fld id="{B84C5C40-2055-49AF-9028-5DA79E75E391}" type="datetimeFigureOut">
               <a:rPr lang="en-US" smtClean="0"/>
-              <a:t>1/26/2026</a:t>
+              <a:t>1/31/2026</a:t>
             </a:fld>
             <a:endParaRPr lang="en-US"/>
           </a:p>
@@ -1425,7 +1427,7 @@
           <a:p>
             <a:fld id="{B84C5C40-2055-49AF-9028-5DA79E75E391}" type="datetimeFigureOut">
               <a:rPr lang="en-US" smtClean="0"/>
-              <a:t>1/26/2026</a:t>
+              <a:t>1/31/2026</a:t>
             </a:fld>
             <a:endParaRPr lang="en-US"/>
           </a:p>
@@ -1671,7 +1673,7 @@
           <a:p>
             <a:fld id="{B84C5C40-2055-49AF-9028-5DA79E75E391}" type="datetimeFigureOut">
               <a:rPr lang="en-US" smtClean="0"/>
-              <a:t>1/26/2026</a:t>
+              <a:t>1/31/2026</a:t>
             </a:fld>
             <a:endParaRPr lang="en-US"/>
           </a:p>
@@ -1903,7 +1905,7 @@
           <a:p>
             <a:fld id="{B84C5C40-2055-49AF-9028-5DA79E75E391}" type="datetimeFigureOut">
               <a:rPr lang="en-US" smtClean="0"/>
-              <a:t>1/26/2026</a:t>
+              <a:t>1/31/2026</a:t>
             </a:fld>
             <a:endParaRPr lang="en-US"/>
           </a:p>
@@ -2270,7 +2272,7 @@
           <a:p>
             <a:fld id="{B84C5C40-2055-49AF-9028-5DA79E75E391}" type="datetimeFigureOut">
               <a:rPr lang="en-US" smtClean="0"/>
-              <a:t>1/26/2026</a:t>
+              <a:t>1/31/2026</a:t>
             </a:fld>
             <a:endParaRPr lang="en-US"/>
           </a:p>
@@ -2388,7 +2390,7 @@
           <a:p>
             <a:fld id="{B84C5C40-2055-49AF-9028-5DA79E75E391}" type="datetimeFigureOut">
               <a:rPr lang="en-US" smtClean="0"/>
-              <a:t>1/26/2026</a:t>
+              <a:t>1/31/2026</a:t>
             </a:fld>
             <a:endParaRPr lang="en-US"/>
           </a:p>
@@ -2483,7 +2485,7 @@
           <a:p>
             <a:fld id="{B84C5C40-2055-49AF-9028-5DA79E75E391}" type="datetimeFigureOut">
               <a:rPr lang="en-US" smtClean="0"/>
-              <a:t>1/26/2026</a:t>
+              <a:t>1/31/2026</a:t>
             </a:fld>
             <a:endParaRPr lang="en-US"/>
           </a:p>
@@ -2760,7 +2762,7 @@
           <a:p>
             <a:fld id="{B84C5C40-2055-49AF-9028-5DA79E75E391}" type="datetimeFigureOut">
               <a:rPr lang="en-US" smtClean="0"/>
-              <a:t>1/26/2026</a:t>
+              <a:t>1/31/2026</a:t>
             </a:fld>
             <a:endParaRPr lang="en-US"/>
           </a:p>
@@ -3017,7 +3019,7 @@
           <a:p>
             <a:fld id="{B84C5C40-2055-49AF-9028-5DA79E75E391}" type="datetimeFigureOut">
               <a:rPr lang="en-US" smtClean="0"/>
-              <a:t>1/26/2026</a:t>
+              <a:t>1/31/2026</a:t>
             </a:fld>
             <a:endParaRPr lang="en-US"/>
           </a:p>
@@ -3230,7 +3232,7 @@
           <a:p>
             <a:fld id="{B84C5C40-2055-49AF-9028-5DA79E75E391}" type="datetimeFigureOut">
               <a:rPr lang="en-US" smtClean="0"/>
-              <a:t>1/26/2026</a:t>
+              <a:t>1/31/2026</a:t>
             </a:fld>
             <a:endParaRPr lang="en-US"/>
           </a:p>
@@ -4355,6 +4357,659 @@
       </p:grpSpPr>
       <p:sp>
         <p:nvSpPr>
+          <p:cNvPr id="2" name="Rectangle: Rounded Corners 1">
+            <a:extLst>
+              <a:ext uri="{FF2B5EF4-FFF2-40B4-BE49-F238E27FC236}">
+                <a16:creationId xmlns:a16="http://schemas.microsoft.com/office/drawing/2014/main" id="{ED732446-F0F6-0ACF-647A-3BC33E7C3D60}"/>
+              </a:ext>
+            </a:extLst>
+          </p:cNvPr>
+          <p:cNvSpPr/>
+          <p:nvPr/>
+        </p:nvSpPr>
+        <p:spPr>
+          <a:xfrm>
+            <a:off x="962567" y="281940"/>
+            <a:ext cx="10552099" cy="6187439"/>
+          </a:xfrm>
+          <a:prstGeom prst="roundRect">
+            <a:avLst>
+              <a:gd name="adj" fmla="val 5234"/>
+            </a:avLst>
+          </a:prstGeom>
+          <a:solidFill>
+            <a:schemeClr val="bg1"/>
+          </a:solidFill>
+          <a:ln>
+            <a:solidFill>
+              <a:schemeClr val="tx1"/>
+            </a:solidFill>
+          </a:ln>
+        </p:spPr>
+        <p:style>
+          <a:lnRef idx="2">
+            <a:schemeClr val="accent1">
+              <a:shade val="15000"/>
+            </a:schemeClr>
+          </a:lnRef>
+          <a:fillRef idx="1">
+            <a:schemeClr val="accent1"/>
+          </a:fillRef>
+          <a:effectRef idx="0">
+            <a:schemeClr val="accent1"/>
+          </a:effectRef>
+          <a:fontRef idx="minor">
+            <a:schemeClr val="lt1"/>
+          </a:fontRef>
+        </p:style>
+        <p:txBody>
+          <a:bodyPr rtlCol="0" anchor="t"/>
+          <a:lstStyle/>
+          <a:p>
+            <a:pPr algn="ctr"/>
+            <a:r>
+              <a:rPr lang="en-US" dirty="0">
+                <a:solidFill>
+                  <a:schemeClr val="tx1"/>
+                </a:solidFill>
+              </a:rPr>
+              <a:t>Example Models</a:t>
+            </a:r>
+          </a:p>
+        </p:txBody>
+      </p:sp>
+      <p:sp>
+        <p:nvSpPr>
+          <p:cNvPr id="3" name="Rectangle: Rounded Corners 2">
+            <a:extLst>
+              <a:ext uri="{FF2B5EF4-FFF2-40B4-BE49-F238E27FC236}">
+                <a16:creationId xmlns:a16="http://schemas.microsoft.com/office/drawing/2014/main" id="{5574ED1F-143F-F0C3-860B-D1D1A94B8038}"/>
+              </a:ext>
+            </a:extLst>
+          </p:cNvPr>
+          <p:cNvSpPr/>
+          <p:nvPr/>
+        </p:nvSpPr>
+        <p:spPr>
+          <a:xfrm>
+            <a:off x="4778916" y="1188720"/>
+            <a:ext cx="2634168" cy="2335531"/>
+          </a:xfrm>
+          <a:prstGeom prst="roundRect">
+            <a:avLst/>
+          </a:prstGeom>
+          <a:solidFill>
+            <a:srgbClr val="E5F1F8"/>
+          </a:solidFill>
+          <a:ln>
+            <a:solidFill>
+              <a:schemeClr val="tx1"/>
+            </a:solidFill>
+          </a:ln>
+        </p:spPr>
+        <p:style>
+          <a:lnRef idx="2">
+            <a:schemeClr val="accent1">
+              <a:shade val="15000"/>
+            </a:schemeClr>
+          </a:lnRef>
+          <a:fillRef idx="1">
+            <a:schemeClr val="accent1"/>
+          </a:fillRef>
+          <a:effectRef idx="0">
+            <a:schemeClr val="accent1"/>
+          </a:effectRef>
+          <a:fontRef idx="minor">
+            <a:schemeClr val="lt1"/>
+          </a:fontRef>
+        </p:style>
+        <p:txBody>
+          <a:bodyPr rtlCol="0" anchor="t"/>
+          <a:lstStyle/>
+          <a:p>
+            <a:pPr algn="ctr"/>
+            <a:r>
+              <a:rPr lang="en-US" dirty="0">
+                <a:solidFill>
+                  <a:schemeClr val="tx1"/>
+                </a:solidFill>
+              </a:rPr>
+              <a:t>Anthropic</a:t>
+            </a:r>
+          </a:p>
+        </p:txBody>
+      </p:sp>
+      <p:sp>
+        <p:nvSpPr>
+          <p:cNvPr id="4" name="Rectangle: Rounded Corners 3">
+            <a:extLst>
+              <a:ext uri="{FF2B5EF4-FFF2-40B4-BE49-F238E27FC236}">
+                <a16:creationId xmlns:a16="http://schemas.microsoft.com/office/drawing/2014/main" id="{CB92B3E5-A0FB-4F52-03FE-A3994B4A676E}"/>
+              </a:ext>
+            </a:extLst>
+          </p:cNvPr>
+          <p:cNvSpPr/>
+          <p:nvPr/>
+        </p:nvSpPr>
+        <p:spPr>
+          <a:xfrm>
+            <a:off x="1553658" y="1188720"/>
+            <a:ext cx="2634168" cy="2335531"/>
+          </a:xfrm>
+          <a:prstGeom prst="roundRect">
+            <a:avLst/>
+          </a:prstGeom>
+          <a:solidFill>
+            <a:srgbClr val="E5F1F8"/>
+          </a:solidFill>
+          <a:ln>
+            <a:solidFill>
+              <a:schemeClr val="tx1"/>
+            </a:solidFill>
+          </a:ln>
+        </p:spPr>
+        <p:style>
+          <a:lnRef idx="2">
+            <a:schemeClr val="accent1">
+              <a:shade val="15000"/>
+            </a:schemeClr>
+          </a:lnRef>
+          <a:fillRef idx="1">
+            <a:schemeClr val="accent1"/>
+          </a:fillRef>
+          <a:effectRef idx="0">
+            <a:schemeClr val="accent1"/>
+          </a:effectRef>
+          <a:fontRef idx="minor">
+            <a:schemeClr val="lt1"/>
+          </a:fontRef>
+        </p:style>
+        <p:txBody>
+          <a:bodyPr rtlCol="0" anchor="t"/>
+          <a:lstStyle/>
+          <a:p>
+            <a:pPr algn="ctr"/>
+            <a:r>
+              <a:rPr lang="en-US" dirty="0">
+                <a:solidFill>
+                  <a:schemeClr val="tx1"/>
+                </a:solidFill>
+              </a:rPr>
+              <a:t>Azure OpenAI</a:t>
+            </a:r>
+          </a:p>
+        </p:txBody>
+      </p:sp>
+      <p:sp>
+        <p:nvSpPr>
+          <p:cNvPr id="5" name="Rectangle: Rounded Corners 4">
+            <a:extLst>
+              <a:ext uri="{FF2B5EF4-FFF2-40B4-BE49-F238E27FC236}">
+                <a16:creationId xmlns:a16="http://schemas.microsoft.com/office/drawing/2014/main" id="{ACE8A258-9DE7-F4AF-1449-211286E0D11E}"/>
+              </a:ext>
+            </a:extLst>
+          </p:cNvPr>
+          <p:cNvSpPr/>
+          <p:nvPr/>
+        </p:nvSpPr>
+        <p:spPr>
+          <a:xfrm>
+            <a:off x="8004174" y="1188720"/>
+            <a:ext cx="2634168" cy="2335531"/>
+          </a:xfrm>
+          <a:prstGeom prst="roundRect">
+            <a:avLst/>
+          </a:prstGeom>
+          <a:solidFill>
+            <a:srgbClr val="E5F1F8"/>
+          </a:solidFill>
+          <a:ln>
+            <a:solidFill>
+              <a:schemeClr val="tx1"/>
+            </a:solidFill>
+          </a:ln>
+        </p:spPr>
+        <p:style>
+          <a:lnRef idx="2">
+            <a:schemeClr val="accent1">
+              <a:shade val="15000"/>
+            </a:schemeClr>
+          </a:lnRef>
+          <a:fillRef idx="1">
+            <a:schemeClr val="accent1"/>
+          </a:fillRef>
+          <a:effectRef idx="0">
+            <a:schemeClr val="accent1"/>
+          </a:effectRef>
+          <a:fontRef idx="minor">
+            <a:schemeClr val="lt1"/>
+          </a:fontRef>
+        </p:style>
+        <p:txBody>
+          <a:bodyPr rtlCol="0" anchor="t"/>
+          <a:lstStyle/>
+          <a:p>
+            <a:pPr algn="ctr"/>
+            <a:r>
+              <a:rPr lang="en-US" dirty="0">
+                <a:solidFill>
+                  <a:schemeClr val="tx1"/>
+                </a:solidFill>
+              </a:rPr>
+              <a:t>Microsoft</a:t>
+            </a:r>
+          </a:p>
+        </p:txBody>
+      </p:sp>
+      <p:sp>
+        <p:nvSpPr>
+          <p:cNvPr id="6" name="Rectangle: Rounded Corners 5">
+            <a:extLst>
+              <a:ext uri="{FF2B5EF4-FFF2-40B4-BE49-F238E27FC236}">
+                <a16:creationId xmlns:a16="http://schemas.microsoft.com/office/drawing/2014/main" id="{417ADCD0-E7DE-9B18-898C-7D55B783F694}"/>
+              </a:ext>
+            </a:extLst>
+          </p:cNvPr>
+          <p:cNvSpPr/>
+          <p:nvPr/>
+        </p:nvSpPr>
+        <p:spPr>
+          <a:xfrm>
+            <a:off x="4778916" y="3653789"/>
+            <a:ext cx="2634168" cy="2335531"/>
+          </a:xfrm>
+          <a:prstGeom prst="roundRect">
+            <a:avLst/>
+          </a:prstGeom>
+          <a:solidFill>
+            <a:srgbClr val="E5F1F8"/>
+          </a:solidFill>
+          <a:ln>
+            <a:solidFill>
+              <a:schemeClr val="tx1"/>
+            </a:solidFill>
+          </a:ln>
+        </p:spPr>
+        <p:style>
+          <a:lnRef idx="2">
+            <a:schemeClr val="accent1">
+              <a:shade val="15000"/>
+            </a:schemeClr>
+          </a:lnRef>
+          <a:fillRef idx="1">
+            <a:schemeClr val="accent1"/>
+          </a:fillRef>
+          <a:effectRef idx="0">
+            <a:schemeClr val="accent1"/>
+          </a:effectRef>
+          <a:fontRef idx="minor">
+            <a:schemeClr val="lt1"/>
+          </a:fontRef>
+        </p:style>
+        <p:txBody>
+          <a:bodyPr rtlCol="0" anchor="t"/>
+          <a:lstStyle/>
+          <a:p>
+            <a:pPr algn="ctr"/>
+            <a:r>
+              <a:rPr lang="en-US" dirty="0">
+                <a:solidFill>
+                  <a:schemeClr val="tx1"/>
+                </a:solidFill>
+              </a:rPr>
+              <a:t>Mistral AI</a:t>
+            </a:r>
+          </a:p>
+        </p:txBody>
+      </p:sp>
+      <p:sp>
+        <p:nvSpPr>
+          <p:cNvPr id="7" name="Rectangle: Rounded Corners 6">
+            <a:extLst>
+              <a:ext uri="{FF2B5EF4-FFF2-40B4-BE49-F238E27FC236}">
+                <a16:creationId xmlns:a16="http://schemas.microsoft.com/office/drawing/2014/main" id="{A55125DD-7A11-66B1-DDF5-ECD5D6C1F69B}"/>
+              </a:ext>
+            </a:extLst>
+          </p:cNvPr>
+          <p:cNvSpPr/>
+          <p:nvPr/>
+        </p:nvSpPr>
+        <p:spPr>
+          <a:xfrm>
+            <a:off x="1553658" y="3653789"/>
+            <a:ext cx="2634168" cy="2335531"/>
+          </a:xfrm>
+          <a:prstGeom prst="roundRect">
+            <a:avLst/>
+          </a:prstGeom>
+          <a:solidFill>
+            <a:srgbClr val="E5F1F8"/>
+          </a:solidFill>
+          <a:ln>
+            <a:solidFill>
+              <a:schemeClr val="tx1"/>
+            </a:solidFill>
+          </a:ln>
+        </p:spPr>
+        <p:style>
+          <a:lnRef idx="2">
+            <a:schemeClr val="accent1">
+              <a:shade val="15000"/>
+            </a:schemeClr>
+          </a:lnRef>
+          <a:fillRef idx="1">
+            <a:schemeClr val="accent1"/>
+          </a:fillRef>
+          <a:effectRef idx="0">
+            <a:schemeClr val="accent1"/>
+          </a:effectRef>
+          <a:fontRef idx="minor">
+            <a:schemeClr val="lt1"/>
+          </a:fontRef>
+        </p:style>
+        <p:txBody>
+          <a:bodyPr rtlCol="0" anchor="t"/>
+          <a:lstStyle/>
+          <a:p>
+            <a:pPr algn="ctr"/>
+            <a:r>
+              <a:rPr lang="en-US" dirty="0">
+                <a:solidFill>
+                  <a:schemeClr val="tx1"/>
+                </a:solidFill>
+              </a:rPr>
+              <a:t>Meta</a:t>
+            </a:r>
+          </a:p>
+        </p:txBody>
+      </p:sp>
+      <p:sp>
+        <p:nvSpPr>
+          <p:cNvPr id="8" name="Rectangle: Rounded Corners 7">
+            <a:extLst>
+              <a:ext uri="{FF2B5EF4-FFF2-40B4-BE49-F238E27FC236}">
+                <a16:creationId xmlns:a16="http://schemas.microsoft.com/office/drawing/2014/main" id="{4D8433B6-E222-52DE-3420-6BC81E4D9945}"/>
+              </a:ext>
+            </a:extLst>
+          </p:cNvPr>
+          <p:cNvSpPr/>
+          <p:nvPr/>
+        </p:nvSpPr>
+        <p:spPr>
+          <a:xfrm>
+            <a:off x="8004174" y="3653789"/>
+            <a:ext cx="2634168" cy="2335531"/>
+          </a:xfrm>
+          <a:prstGeom prst="roundRect">
+            <a:avLst/>
+          </a:prstGeom>
+          <a:solidFill>
+            <a:srgbClr val="E5F1F8"/>
+          </a:solidFill>
+          <a:ln>
+            <a:solidFill>
+              <a:schemeClr val="tx1"/>
+            </a:solidFill>
+          </a:ln>
+        </p:spPr>
+        <p:style>
+          <a:lnRef idx="2">
+            <a:schemeClr val="accent1">
+              <a:shade val="15000"/>
+            </a:schemeClr>
+          </a:lnRef>
+          <a:fillRef idx="1">
+            <a:schemeClr val="accent1"/>
+          </a:fillRef>
+          <a:effectRef idx="0">
+            <a:schemeClr val="accent1"/>
+          </a:effectRef>
+          <a:fontRef idx="minor">
+            <a:schemeClr val="lt1"/>
+          </a:fontRef>
+        </p:style>
+        <p:txBody>
+          <a:bodyPr rtlCol="0" anchor="t"/>
+          <a:lstStyle/>
+          <a:p>
+            <a:pPr algn="ctr"/>
+            <a:r>
+              <a:rPr lang="en-US" dirty="0">
+                <a:solidFill>
+                  <a:schemeClr val="tx1"/>
+                </a:solidFill>
+              </a:rPr>
+              <a:t>DeepSeek</a:t>
+            </a:r>
+          </a:p>
+        </p:txBody>
+      </p:sp>
+      <p:sp>
+        <p:nvSpPr>
+          <p:cNvPr id="10" name="Rectangle: Rounded Corners 9">
+            <a:extLst>
+              <a:ext uri="{FF2B5EF4-FFF2-40B4-BE49-F238E27FC236}">
+                <a16:creationId xmlns:a16="http://schemas.microsoft.com/office/drawing/2014/main" id="{02E5EA1C-587E-4A45-E606-F67DF515B407}"/>
+              </a:ext>
+            </a:extLst>
+          </p:cNvPr>
+          <p:cNvSpPr/>
+          <p:nvPr/>
+        </p:nvSpPr>
+        <p:spPr>
+          <a:xfrm>
+            <a:off x="1790700" y="1882140"/>
+            <a:ext cx="2111892" cy="322508"/>
+          </a:xfrm>
+          <a:prstGeom prst="roundRect">
+            <a:avLst>
+              <a:gd name="adj" fmla="val 50000"/>
+            </a:avLst>
+          </a:prstGeom>
+          <a:solidFill>
+            <a:srgbClr val="B2D4EB"/>
+          </a:solidFill>
+          <a:ln>
+            <a:solidFill>
+              <a:schemeClr val="tx1"/>
+            </a:solidFill>
+          </a:ln>
+        </p:spPr>
+        <p:style>
+          <a:lnRef idx="2">
+            <a:schemeClr val="accent1">
+              <a:shade val="15000"/>
+            </a:schemeClr>
+          </a:lnRef>
+          <a:fillRef idx="1">
+            <a:schemeClr val="accent1"/>
+          </a:fillRef>
+          <a:effectRef idx="0">
+            <a:schemeClr val="accent1"/>
+          </a:effectRef>
+          <a:fontRef idx="minor">
+            <a:schemeClr val="lt1"/>
+          </a:fontRef>
+        </p:style>
+        <p:txBody>
+          <a:bodyPr rtlCol="0" anchor="ctr"/>
+          <a:lstStyle/>
+          <a:p>
+            <a:pPr algn="ctr"/>
+            <a:r>
+              <a:rPr lang="en-US" dirty="0" err="1">
+                <a:solidFill>
+                  <a:schemeClr val="tx1"/>
+                </a:solidFill>
+              </a:rPr>
+              <a:t>gpt</a:t>
+            </a:r>
+            <a:endParaRPr lang="en-US" i="1" dirty="0">
+              <a:solidFill>
+                <a:schemeClr val="tx1"/>
+              </a:solidFill>
+            </a:endParaRPr>
+          </a:p>
+        </p:txBody>
+      </p:sp>
+      <p:sp>
+        <p:nvSpPr>
+          <p:cNvPr id="11" name="Rectangle: Rounded Corners 10">
+            <a:extLst>
+              <a:ext uri="{FF2B5EF4-FFF2-40B4-BE49-F238E27FC236}">
+                <a16:creationId xmlns:a16="http://schemas.microsoft.com/office/drawing/2014/main" id="{E11D9861-1EDA-793B-0AA0-18BFA52ACCE4}"/>
+              </a:ext>
+            </a:extLst>
+          </p:cNvPr>
+          <p:cNvSpPr/>
+          <p:nvPr/>
+        </p:nvSpPr>
+        <p:spPr>
+          <a:xfrm>
+            <a:off x="1790700" y="2380687"/>
+            <a:ext cx="2111892" cy="322508"/>
+          </a:xfrm>
+          <a:prstGeom prst="roundRect">
+            <a:avLst>
+              <a:gd name="adj" fmla="val 50000"/>
+            </a:avLst>
+          </a:prstGeom>
+          <a:solidFill>
+            <a:srgbClr val="B2D4EB"/>
+          </a:solidFill>
+          <a:ln>
+            <a:solidFill>
+              <a:schemeClr val="tx1"/>
+            </a:solidFill>
+          </a:ln>
+        </p:spPr>
+        <p:style>
+          <a:lnRef idx="2">
+            <a:schemeClr val="accent1">
+              <a:shade val="15000"/>
+            </a:schemeClr>
+          </a:lnRef>
+          <a:fillRef idx="1">
+            <a:schemeClr val="accent1"/>
+          </a:fillRef>
+          <a:effectRef idx="0">
+            <a:schemeClr val="accent1"/>
+          </a:effectRef>
+          <a:fontRef idx="minor">
+            <a:schemeClr val="lt1"/>
+          </a:fontRef>
+        </p:style>
+        <p:txBody>
+          <a:bodyPr rtlCol="0" anchor="ctr"/>
+          <a:lstStyle/>
+          <a:p>
+            <a:pPr algn="ctr"/>
+            <a:r>
+              <a:rPr lang="en-US" dirty="0">
+                <a:solidFill>
+                  <a:schemeClr val="tx1"/>
+                </a:solidFill>
+              </a:rPr>
+              <a:t>o</a:t>
+            </a:r>
+          </a:p>
+        </p:txBody>
+      </p:sp>
+      <p:sp>
+        <p:nvSpPr>
+          <p:cNvPr id="12" name="Rectangle: Rounded Corners 11">
+            <a:extLst>
+              <a:ext uri="{FF2B5EF4-FFF2-40B4-BE49-F238E27FC236}">
+                <a16:creationId xmlns:a16="http://schemas.microsoft.com/office/drawing/2014/main" id="{46BFDC7A-CED3-C375-66E6-683B9E52EDD1}"/>
+              </a:ext>
+            </a:extLst>
+          </p:cNvPr>
+          <p:cNvSpPr/>
+          <p:nvPr/>
+        </p:nvSpPr>
+        <p:spPr>
+          <a:xfrm>
+            <a:off x="1790700" y="2879234"/>
+            <a:ext cx="2111892" cy="322508"/>
+          </a:xfrm>
+          <a:prstGeom prst="roundRect">
+            <a:avLst>
+              <a:gd name="adj" fmla="val 50000"/>
+            </a:avLst>
+          </a:prstGeom>
+          <a:solidFill>
+            <a:srgbClr val="B2D4EB"/>
+          </a:solidFill>
+          <a:ln>
+            <a:solidFill>
+              <a:schemeClr val="tx1"/>
+            </a:solidFill>
+          </a:ln>
+        </p:spPr>
+        <p:style>
+          <a:lnRef idx="2">
+            <a:schemeClr val="accent1">
+              <a:shade val="15000"/>
+            </a:schemeClr>
+          </a:lnRef>
+          <a:fillRef idx="1">
+            <a:schemeClr val="accent1"/>
+          </a:fillRef>
+          <a:effectRef idx="0">
+            <a:schemeClr val="accent1"/>
+          </a:effectRef>
+          <a:fontRef idx="minor">
+            <a:schemeClr val="lt1"/>
+          </a:fontRef>
+        </p:style>
+        <p:txBody>
+          <a:bodyPr rtlCol="0" anchor="ctr"/>
+          <a:lstStyle/>
+          <a:p>
+            <a:pPr algn="ctr"/>
+            <a:r>
+              <a:rPr lang="en-US" dirty="0">
+                <a:solidFill>
+                  <a:schemeClr val="tx1"/>
+                </a:solidFill>
+              </a:rPr>
+              <a:t>sora</a:t>
+            </a:r>
+          </a:p>
+        </p:txBody>
+      </p:sp>
+    </p:spTree>
+    <p:extLst>
+      <p:ext uri="{BB962C8B-B14F-4D97-AF65-F5344CB8AC3E}">
+        <p14:creationId xmlns:p14="http://schemas.microsoft.com/office/powerpoint/2010/main" val="2145715379"/>
+      </p:ext>
+    </p:extLst>
+  </p:cSld>
+  <p:clrMapOvr>
+    <a:masterClrMapping/>
+  </p:clrMapOvr>
+</p:sld>
+</file>
+
+<file path=ppt/slides/slide4.xml><?xml version="1.0" encoding="utf-8"?>
+<p:sld xmlns:a="http://schemas.openxmlformats.org/drawingml/2006/main" xmlns:r="http://schemas.openxmlformats.org/officeDocument/2006/relationships" xmlns:p="http://schemas.openxmlformats.org/presentationml/2006/main">
+  <p:cSld>
+    <p:spTree>
+      <p:nvGrpSpPr>
+        <p:cNvPr id="1" name=""/>
+        <p:cNvGrpSpPr/>
+        <p:nvPr/>
+      </p:nvGrpSpPr>
+      <p:grpSpPr>
+        <a:xfrm>
+          <a:off x="0" y="0"/>
+          <a:ext cx="0" cy="0"/>
+          <a:chOff x="0" y="0"/>
+          <a:chExt cx="0" cy="0"/>
+        </a:xfrm>
+      </p:grpSpPr>
+      <p:sp>
+        <p:nvSpPr>
           <p:cNvPr id="5" name="TextBox 4">
             <a:extLst>
               <a:ext uri="{FF2B5EF4-FFF2-40B4-BE49-F238E27FC236}">
@@ -4472,7 +5127,7 @@
 </p:sld>
 </file>
 
-<file path=ppt/slides/slide4.xml><?xml version="1.0" encoding="utf-8"?>
+<file path=ppt/slides/slide5.xml><?xml version="1.0" encoding="utf-8"?>
 <p:sld xmlns:a="http://schemas.openxmlformats.org/drawingml/2006/main" xmlns:r="http://schemas.openxmlformats.org/officeDocument/2006/relationships" xmlns:p="http://schemas.openxmlformats.org/presentationml/2006/main">
   <p:cSld>
     <p:spTree>

--- a/figures/figures.pptx
+++ b/figures/figures.pptx
@@ -5,14 +5,15 @@
     <p:sldMasterId id="2147483660" r:id="rId1"/>
   </p:sldMasterIdLst>
   <p:notesMasterIdLst>
-    <p:notesMasterId r:id="rId7"/>
+    <p:notesMasterId r:id="rId8"/>
   </p:notesMasterIdLst>
   <p:sldIdLst>
     <p:sldId id="258" r:id="rId2"/>
     <p:sldId id="256" r:id="rId3"/>
     <p:sldId id="260" r:id="rId4"/>
     <p:sldId id="259" r:id="rId5"/>
-    <p:sldId id="257" r:id="rId6"/>
+    <p:sldId id="261" r:id="rId6"/>
+    <p:sldId id="257" r:id="rId7"/>
   </p:sldIdLst>
   <p:sldSz cx="12192000" cy="6858000"/>
   <p:notesSz cx="6858000" cy="9144000"/>
@@ -126,6 +127,11 @@
             <p14:sldId id="259"/>
           </p14:sldIdLst>
         </p14:section>
+        <p14:section name="Chapter 2" id="{D332562B-3ADB-4CCE-A1B8-55DF9B490E3B}">
+          <p14:sldIdLst>
+            <p14:sldId id="261"/>
+          </p14:sldIdLst>
+        </p14:section>
         <p14:section name="Examples" id="{2CEADF37-2C1D-4DE6-BB08-5D838E707A13}">
           <p14:sldIdLst>
             <p14:sldId id="257"/>
@@ -222,7 +228,7 @@
           <a:p>
             <a:fld id="{DAABB0E5-6D8D-4DEE-B75F-67010CF2307C}" type="datetimeFigureOut">
               <a:rPr lang="en-US" smtClean="0"/>
-              <a:t>1/31/2026</a:t>
+              <a:t>2/6/2026</a:t>
             </a:fld>
             <a:endParaRPr lang="en-US"/>
           </a:p>
@@ -907,7 +913,7 @@
           <a:p>
             <a:fld id="{B84C5C40-2055-49AF-9028-5DA79E75E391}" type="datetimeFigureOut">
               <a:rPr lang="en-US" smtClean="0"/>
-              <a:t>1/31/2026</a:t>
+              <a:t>2/6/2026</a:t>
             </a:fld>
             <a:endParaRPr lang="en-US"/>
           </a:p>
@@ -1077,7 +1083,7 @@
           <a:p>
             <a:fld id="{B84C5C40-2055-49AF-9028-5DA79E75E391}" type="datetimeFigureOut">
               <a:rPr lang="en-US" smtClean="0"/>
-              <a:t>1/31/2026</a:t>
+              <a:t>2/6/2026</a:t>
             </a:fld>
             <a:endParaRPr lang="en-US"/>
           </a:p>
@@ -1257,7 +1263,7 @@
           <a:p>
             <a:fld id="{B84C5C40-2055-49AF-9028-5DA79E75E391}" type="datetimeFigureOut">
               <a:rPr lang="en-US" smtClean="0"/>
-              <a:t>1/31/2026</a:t>
+              <a:t>2/6/2026</a:t>
             </a:fld>
             <a:endParaRPr lang="en-US"/>
           </a:p>
@@ -1427,7 +1433,7 @@
           <a:p>
             <a:fld id="{B84C5C40-2055-49AF-9028-5DA79E75E391}" type="datetimeFigureOut">
               <a:rPr lang="en-US" smtClean="0"/>
-              <a:t>1/31/2026</a:t>
+              <a:t>2/6/2026</a:t>
             </a:fld>
             <a:endParaRPr lang="en-US"/>
           </a:p>
@@ -1673,7 +1679,7 @@
           <a:p>
             <a:fld id="{B84C5C40-2055-49AF-9028-5DA79E75E391}" type="datetimeFigureOut">
               <a:rPr lang="en-US" smtClean="0"/>
-              <a:t>1/31/2026</a:t>
+              <a:t>2/6/2026</a:t>
             </a:fld>
             <a:endParaRPr lang="en-US"/>
           </a:p>
@@ -1905,7 +1911,7 @@
           <a:p>
             <a:fld id="{B84C5C40-2055-49AF-9028-5DA79E75E391}" type="datetimeFigureOut">
               <a:rPr lang="en-US" smtClean="0"/>
-              <a:t>1/31/2026</a:t>
+              <a:t>2/6/2026</a:t>
             </a:fld>
             <a:endParaRPr lang="en-US"/>
           </a:p>
@@ -2272,7 +2278,7 @@
           <a:p>
             <a:fld id="{B84C5C40-2055-49AF-9028-5DA79E75E391}" type="datetimeFigureOut">
               <a:rPr lang="en-US" smtClean="0"/>
-              <a:t>1/31/2026</a:t>
+              <a:t>2/6/2026</a:t>
             </a:fld>
             <a:endParaRPr lang="en-US"/>
           </a:p>
@@ -2390,7 +2396,7 @@
           <a:p>
             <a:fld id="{B84C5C40-2055-49AF-9028-5DA79E75E391}" type="datetimeFigureOut">
               <a:rPr lang="en-US" smtClean="0"/>
-              <a:t>1/31/2026</a:t>
+              <a:t>2/6/2026</a:t>
             </a:fld>
             <a:endParaRPr lang="en-US"/>
           </a:p>
@@ -2485,7 +2491,7 @@
           <a:p>
             <a:fld id="{B84C5C40-2055-49AF-9028-5DA79E75E391}" type="datetimeFigureOut">
               <a:rPr lang="en-US" smtClean="0"/>
-              <a:t>1/31/2026</a:t>
+              <a:t>2/6/2026</a:t>
             </a:fld>
             <a:endParaRPr lang="en-US"/>
           </a:p>
@@ -2762,7 +2768,7 @@
           <a:p>
             <a:fld id="{B84C5C40-2055-49AF-9028-5DA79E75E391}" type="datetimeFigureOut">
               <a:rPr lang="en-US" smtClean="0"/>
-              <a:t>1/31/2026</a:t>
+              <a:t>2/6/2026</a:t>
             </a:fld>
             <a:endParaRPr lang="en-US"/>
           </a:p>
@@ -3019,7 +3025,7 @@
           <a:p>
             <a:fld id="{B84C5C40-2055-49AF-9028-5DA79E75E391}" type="datetimeFigureOut">
               <a:rPr lang="en-US" smtClean="0"/>
-              <a:t>1/31/2026</a:t>
+              <a:t>2/6/2026</a:t>
             </a:fld>
             <a:endParaRPr lang="en-US"/>
           </a:p>
@@ -3232,7 +3238,7 @@
           <a:p>
             <a:fld id="{B84C5C40-2055-49AF-9028-5DA79E75E391}" type="datetimeFigureOut">
               <a:rPr lang="en-US" smtClean="0"/>
-              <a:t>1/31/2026</a:t>
+              <a:t>2/6/2026</a:t>
             </a:fld>
             <a:endParaRPr lang="en-US"/>
           </a:p>
@@ -5128,6 +5134,740 @@
 </file>
 
 <file path=ppt/slides/slide5.xml><?xml version="1.0" encoding="utf-8"?>
+<p:sld xmlns:a="http://schemas.openxmlformats.org/drawingml/2006/main" xmlns:r="http://schemas.openxmlformats.org/officeDocument/2006/relationships" xmlns:p="http://schemas.openxmlformats.org/presentationml/2006/main">
+  <p:cSld>
+    <p:spTree>
+      <p:nvGrpSpPr>
+        <p:cNvPr id="1" name="">
+          <a:extLst>
+            <a:ext uri="{FF2B5EF4-FFF2-40B4-BE49-F238E27FC236}">
+              <a16:creationId xmlns:a16="http://schemas.microsoft.com/office/drawing/2014/main" id="{B8650F46-8669-8B2D-7690-E25DD2E636E0}"/>
+            </a:ext>
+          </a:extLst>
+        </p:cNvPr>
+        <p:cNvGrpSpPr/>
+        <p:nvPr/>
+      </p:nvGrpSpPr>
+      <p:grpSpPr>
+        <a:xfrm>
+          <a:off x="0" y="0"/>
+          <a:ext cx="0" cy="0"/>
+          <a:chOff x="0" y="0"/>
+          <a:chExt cx="0" cy="0"/>
+        </a:xfrm>
+      </p:grpSpPr>
+      <p:sp>
+        <p:nvSpPr>
+          <p:cNvPr id="31" name="Rectangle 30">
+            <a:extLst>
+              <a:ext uri="{FF2B5EF4-FFF2-40B4-BE49-F238E27FC236}">
+                <a16:creationId xmlns:a16="http://schemas.microsoft.com/office/drawing/2014/main" id="{1641B2C3-3E54-CFD6-A752-0AC425AFFCA6}"/>
+              </a:ext>
+            </a:extLst>
+          </p:cNvPr>
+          <p:cNvSpPr/>
+          <p:nvPr/>
+        </p:nvSpPr>
+        <p:spPr>
+          <a:xfrm>
+            <a:off x="8482515" y="2718435"/>
+            <a:ext cx="247650" cy="247650"/>
+          </a:xfrm>
+          <a:prstGeom prst="rect">
+            <a:avLst/>
+          </a:prstGeom>
+        </p:spPr>
+        <p:style>
+          <a:lnRef idx="2">
+            <a:schemeClr val="accent1">
+              <a:shade val="15000"/>
+            </a:schemeClr>
+          </a:lnRef>
+          <a:fillRef idx="1">
+            <a:schemeClr val="accent1"/>
+          </a:fillRef>
+          <a:effectRef idx="0">
+            <a:schemeClr val="accent1"/>
+          </a:effectRef>
+          <a:fontRef idx="minor">
+            <a:schemeClr val="lt1"/>
+          </a:fontRef>
+        </p:style>
+        <p:txBody>
+          <a:bodyPr rtlCol="0" anchor="ctr"/>
+          <a:lstStyle/>
+          <a:p>
+            <a:pPr algn="ctr"/>
+            <a:endParaRPr lang="en-US"/>
+          </a:p>
+        </p:txBody>
+      </p:sp>
+      <p:sp>
+        <p:nvSpPr>
+          <p:cNvPr id="2" name="Rectangle: Rounded Corners 1">
+            <a:extLst>
+              <a:ext uri="{FF2B5EF4-FFF2-40B4-BE49-F238E27FC236}">
+                <a16:creationId xmlns:a16="http://schemas.microsoft.com/office/drawing/2014/main" id="{E84DF503-3BC6-84E0-6FFB-3B32B203E1CB}"/>
+              </a:ext>
+            </a:extLst>
+          </p:cNvPr>
+          <p:cNvSpPr/>
+          <p:nvPr/>
+        </p:nvSpPr>
+        <p:spPr>
+          <a:xfrm>
+            <a:off x="819950" y="617219"/>
+            <a:ext cx="10552099" cy="1485901"/>
+          </a:xfrm>
+          <a:prstGeom prst="roundRect">
+            <a:avLst>
+              <a:gd name="adj" fmla="val 5234"/>
+            </a:avLst>
+          </a:prstGeom>
+          <a:solidFill>
+            <a:schemeClr val="bg1"/>
+          </a:solidFill>
+          <a:ln>
+            <a:solidFill>
+              <a:schemeClr val="tx1"/>
+            </a:solidFill>
+          </a:ln>
+        </p:spPr>
+        <p:style>
+          <a:lnRef idx="2">
+            <a:schemeClr val="accent1">
+              <a:shade val="15000"/>
+            </a:schemeClr>
+          </a:lnRef>
+          <a:fillRef idx="1">
+            <a:schemeClr val="accent1"/>
+          </a:fillRef>
+          <a:effectRef idx="0">
+            <a:schemeClr val="accent1"/>
+          </a:effectRef>
+          <a:fontRef idx="minor">
+            <a:schemeClr val="lt1"/>
+          </a:fontRef>
+        </p:style>
+        <p:txBody>
+          <a:bodyPr rtlCol="0" anchor="t"/>
+          <a:lstStyle/>
+          <a:p>
+            <a:pPr algn="ctr"/>
+            <a:r>
+              <a:rPr lang="en-US" dirty="0">
+                <a:solidFill>
+                  <a:schemeClr val="tx1"/>
+                </a:solidFill>
+              </a:rPr>
+              <a:t>MCP Host (AI Application)</a:t>
+            </a:r>
+          </a:p>
+        </p:txBody>
+      </p:sp>
+      <p:sp>
+        <p:nvSpPr>
+          <p:cNvPr id="4" name="Rectangle: Rounded Corners 3">
+            <a:extLst>
+              <a:ext uri="{FF2B5EF4-FFF2-40B4-BE49-F238E27FC236}">
+                <a16:creationId xmlns:a16="http://schemas.microsoft.com/office/drawing/2014/main" id="{93675B45-9C5A-DB3C-5478-881C7B1BD00F}"/>
+              </a:ext>
+            </a:extLst>
+          </p:cNvPr>
+          <p:cNvSpPr/>
+          <p:nvPr/>
+        </p:nvSpPr>
+        <p:spPr>
+          <a:xfrm>
+            <a:off x="1553658" y="1188721"/>
+            <a:ext cx="2634168" cy="525780"/>
+          </a:xfrm>
+          <a:prstGeom prst="roundRect">
+            <a:avLst/>
+          </a:prstGeom>
+          <a:solidFill>
+            <a:srgbClr val="E5F1F8"/>
+          </a:solidFill>
+          <a:ln>
+            <a:solidFill>
+              <a:schemeClr val="tx1"/>
+            </a:solidFill>
+          </a:ln>
+        </p:spPr>
+        <p:style>
+          <a:lnRef idx="2">
+            <a:schemeClr val="accent1">
+              <a:shade val="15000"/>
+            </a:schemeClr>
+          </a:lnRef>
+          <a:fillRef idx="1">
+            <a:schemeClr val="accent1"/>
+          </a:fillRef>
+          <a:effectRef idx="0">
+            <a:schemeClr val="accent1"/>
+          </a:effectRef>
+          <a:fontRef idx="minor">
+            <a:schemeClr val="lt1"/>
+          </a:fontRef>
+        </p:style>
+        <p:txBody>
+          <a:bodyPr rtlCol="0" anchor="ctr"/>
+          <a:lstStyle/>
+          <a:p>
+            <a:pPr algn="ctr"/>
+            <a:r>
+              <a:rPr lang="en-US" dirty="0">
+                <a:solidFill>
+                  <a:schemeClr val="tx1"/>
+                </a:solidFill>
+              </a:rPr>
+              <a:t>MCP Client 1</a:t>
+            </a:r>
+          </a:p>
+        </p:txBody>
+      </p:sp>
+      <p:sp>
+        <p:nvSpPr>
+          <p:cNvPr id="9" name="Rectangle: Rounded Corners 8">
+            <a:extLst>
+              <a:ext uri="{FF2B5EF4-FFF2-40B4-BE49-F238E27FC236}">
+                <a16:creationId xmlns:a16="http://schemas.microsoft.com/office/drawing/2014/main" id="{4E726389-504C-D4C8-91C7-AF40D8E5E559}"/>
+              </a:ext>
+            </a:extLst>
+          </p:cNvPr>
+          <p:cNvSpPr/>
+          <p:nvPr/>
+        </p:nvSpPr>
+        <p:spPr>
+          <a:xfrm>
+            <a:off x="4778915" y="1188721"/>
+            <a:ext cx="2634168" cy="525780"/>
+          </a:xfrm>
+          <a:prstGeom prst="roundRect">
+            <a:avLst/>
+          </a:prstGeom>
+          <a:solidFill>
+            <a:srgbClr val="E5F1F8"/>
+          </a:solidFill>
+          <a:ln>
+            <a:solidFill>
+              <a:schemeClr val="tx1"/>
+            </a:solidFill>
+          </a:ln>
+        </p:spPr>
+        <p:style>
+          <a:lnRef idx="2">
+            <a:schemeClr val="accent1">
+              <a:shade val="15000"/>
+            </a:schemeClr>
+          </a:lnRef>
+          <a:fillRef idx="1">
+            <a:schemeClr val="accent1"/>
+          </a:fillRef>
+          <a:effectRef idx="0">
+            <a:schemeClr val="accent1"/>
+          </a:effectRef>
+          <a:fontRef idx="minor">
+            <a:schemeClr val="lt1"/>
+          </a:fontRef>
+        </p:style>
+        <p:txBody>
+          <a:bodyPr rtlCol="0" anchor="ctr"/>
+          <a:lstStyle/>
+          <a:p>
+            <a:pPr algn="ctr"/>
+            <a:r>
+              <a:rPr lang="en-US" dirty="0">
+                <a:solidFill>
+                  <a:schemeClr val="tx1"/>
+                </a:solidFill>
+              </a:rPr>
+              <a:t>MCP Client 2</a:t>
+            </a:r>
+          </a:p>
+        </p:txBody>
+      </p:sp>
+      <p:sp>
+        <p:nvSpPr>
+          <p:cNvPr id="13" name="Rectangle: Rounded Corners 12">
+            <a:extLst>
+              <a:ext uri="{FF2B5EF4-FFF2-40B4-BE49-F238E27FC236}">
+                <a16:creationId xmlns:a16="http://schemas.microsoft.com/office/drawing/2014/main" id="{A6FC3ABB-2BFB-C405-42FE-2ED02F4EA5C4}"/>
+              </a:ext>
+            </a:extLst>
+          </p:cNvPr>
+          <p:cNvSpPr/>
+          <p:nvPr/>
+        </p:nvSpPr>
+        <p:spPr>
+          <a:xfrm>
+            <a:off x="8004174" y="1188721"/>
+            <a:ext cx="2634168" cy="525780"/>
+          </a:xfrm>
+          <a:prstGeom prst="roundRect">
+            <a:avLst/>
+          </a:prstGeom>
+          <a:solidFill>
+            <a:srgbClr val="E5F1F8"/>
+          </a:solidFill>
+          <a:ln>
+            <a:solidFill>
+              <a:schemeClr val="tx1"/>
+            </a:solidFill>
+          </a:ln>
+        </p:spPr>
+        <p:style>
+          <a:lnRef idx="2">
+            <a:schemeClr val="accent1">
+              <a:shade val="15000"/>
+            </a:schemeClr>
+          </a:lnRef>
+          <a:fillRef idx="1">
+            <a:schemeClr val="accent1"/>
+          </a:fillRef>
+          <a:effectRef idx="0">
+            <a:schemeClr val="accent1"/>
+          </a:effectRef>
+          <a:fontRef idx="minor">
+            <a:schemeClr val="lt1"/>
+          </a:fontRef>
+        </p:style>
+        <p:txBody>
+          <a:bodyPr rtlCol="0" anchor="ctr"/>
+          <a:lstStyle/>
+          <a:p>
+            <a:pPr algn="ctr"/>
+            <a:r>
+              <a:rPr lang="en-US" dirty="0">
+                <a:solidFill>
+                  <a:schemeClr val="tx1"/>
+                </a:solidFill>
+              </a:rPr>
+              <a:t>MCP Client 2</a:t>
+            </a:r>
+          </a:p>
+        </p:txBody>
+      </p:sp>
+      <p:sp>
+        <p:nvSpPr>
+          <p:cNvPr id="15" name="Rectangle: Rounded Corners 14">
+            <a:extLst>
+              <a:ext uri="{FF2B5EF4-FFF2-40B4-BE49-F238E27FC236}">
+                <a16:creationId xmlns:a16="http://schemas.microsoft.com/office/drawing/2014/main" id="{6F4543D6-02D0-038C-12A8-DB37F7A273CE}"/>
+              </a:ext>
+            </a:extLst>
+          </p:cNvPr>
+          <p:cNvSpPr/>
+          <p:nvPr/>
+        </p:nvSpPr>
+        <p:spPr>
+          <a:xfrm>
+            <a:off x="1553658" y="2718435"/>
+            <a:ext cx="2634168" cy="796290"/>
+          </a:xfrm>
+          <a:prstGeom prst="roundRect">
+            <a:avLst/>
+          </a:prstGeom>
+          <a:solidFill>
+            <a:srgbClr val="B2D4EB"/>
+          </a:solidFill>
+          <a:ln>
+            <a:solidFill>
+              <a:schemeClr val="tx1"/>
+            </a:solidFill>
+          </a:ln>
+        </p:spPr>
+        <p:style>
+          <a:lnRef idx="2">
+            <a:schemeClr val="accent1">
+              <a:shade val="15000"/>
+            </a:schemeClr>
+          </a:lnRef>
+          <a:fillRef idx="1">
+            <a:schemeClr val="accent1"/>
+          </a:fillRef>
+          <a:effectRef idx="0">
+            <a:schemeClr val="accent1"/>
+          </a:effectRef>
+          <a:fontRef idx="minor">
+            <a:schemeClr val="lt1"/>
+          </a:fontRef>
+        </p:style>
+        <p:txBody>
+          <a:bodyPr rtlCol="0" anchor="ctr"/>
+          <a:lstStyle/>
+          <a:p>
+            <a:pPr algn="ctr"/>
+            <a:r>
+              <a:rPr lang="en-US" dirty="0">
+                <a:solidFill>
+                  <a:schemeClr val="tx1"/>
+                </a:solidFill>
+              </a:rPr>
+              <a:t>MCP Server A</a:t>
+            </a:r>
+          </a:p>
+          <a:p>
+            <a:pPr algn="ctr"/>
+            <a:r>
+              <a:rPr lang="en-US" dirty="0">
+                <a:solidFill>
+                  <a:schemeClr val="tx1"/>
+                </a:solidFill>
+              </a:rPr>
+              <a:t>Local Filesystem</a:t>
+            </a:r>
+          </a:p>
+        </p:txBody>
+      </p:sp>
+      <p:sp>
+        <p:nvSpPr>
+          <p:cNvPr id="16" name="Rectangle: Rounded Corners 15">
+            <a:extLst>
+              <a:ext uri="{FF2B5EF4-FFF2-40B4-BE49-F238E27FC236}">
+                <a16:creationId xmlns:a16="http://schemas.microsoft.com/office/drawing/2014/main" id="{578DD490-0572-9417-BBD7-3FF5F8A9E3D8}"/>
+              </a:ext>
+            </a:extLst>
+          </p:cNvPr>
+          <p:cNvSpPr/>
+          <p:nvPr/>
+        </p:nvSpPr>
+        <p:spPr>
+          <a:xfrm>
+            <a:off x="4778915" y="2718435"/>
+            <a:ext cx="2634168" cy="796290"/>
+          </a:xfrm>
+          <a:prstGeom prst="roundRect">
+            <a:avLst/>
+          </a:prstGeom>
+          <a:solidFill>
+            <a:srgbClr val="B2D4EB"/>
+          </a:solidFill>
+          <a:ln>
+            <a:solidFill>
+              <a:schemeClr val="tx1"/>
+            </a:solidFill>
+          </a:ln>
+        </p:spPr>
+        <p:style>
+          <a:lnRef idx="2">
+            <a:schemeClr val="accent1">
+              <a:shade val="15000"/>
+            </a:schemeClr>
+          </a:lnRef>
+          <a:fillRef idx="1">
+            <a:schemeClr val="accent1"/>
+          </a:fillRef>
+          <a:effectRef idx="0">
+            <a:schemeClr val="accent1"/>
+          </a:effectRef>
+          <a:fontRef idx="minor">
+            <a:schemeClr val="lt1"/>
+          </a:fontRef>
+        </p:style>
+        <p:txBody>
+          <a:bodyPr rtlCol="0" anchor="ctr"/>
+          <a:lstStyle/>
+          <a:p>
+            <a:pPr algn="ctr"/>
+            <a:r>
+              <a:rPr lang="en-US" dirty="0">
+                <a:solidFill>
+                  <a:schemeClr val="tx1"/>
+                </a:solidFill>
+              </a:rPr>
+              <a:t>MCP Server B</a:t>
+            </a:r>
+          </a:p>
+          <a:p>
+            <a:pPr algn="ctr"/>
+            <a:r>
+              <a:rPr lang="en-US" dirty="0">
+                <a:solidFill>
+                  <a:schemeClr val="tx1"/>
+                </a:solidFill>
+              </a:rPr>
+              <a:t>Remote Database</a:t>
+            </a:r>
+          </a:p>
+        </p:txBody>
+      </p:sp>
+      <p:sp>
+        <p:nvSpPr>
+          <p:cNvPr id="17" name="Rectangle: Rounded Corners 16">
+            <a:extLst>
+              <a:ext uri="{FF2B5EF4-FFF2-40B4-BE49-F238E27FC236}">
+                <a16:creationId xmlns:a16="http://schemas.microsoft.com/office/drawing/2014/main" id="{04622E36-7A33-D496-1202-F85F8B8E5A75}"/>
+              </a:ext>
+            </a:extLst>
+          </p:cNvPr>
+          <p:cNvSpPr/>
+          <p:nvPr/>
+        </p:nvSpPr>
+        <p:spPr>
+          <a:xfrm>
+            <a:off x="8004172" y="2718435"/>
+            <a:ext cx="2634168" cy="796290"/>
+          </a:xfrm>
+          <a:prstGeom prst="roundRect">
+            <a:avLst/>
+          </a:prstGeom>
+          <a:solidFill>
+            <a:srgbClr val="B2D4EB"/>
+          </a:solidFill>
+          <a:ln>
+            <a:solidFill>
+              <a:schemeClr val="tx1"/>
+            </a:solidFill>
+          </a:ln>
+        </p:spPr>
+        <p:style>
+          <a:lnRef idx="2">
+            <a:schemeClr val="accent1">
+              <a:shade val="15000"/>
+            </a:schemeClr>
+          </a:lnRef>
+          <a:fillRef idx="1">
+            <a:schemeClr val="accent1"/>
+          </a:fillRef>
+          <a:effectRef idx="0">
+            <a:schemeClr val="accent1"/>
+          </a:effectRef>
+          <a:fontRef idx="minor">
+            <a:schemeClr val="lt1"/>
+          </a:fontRef>
+        </p:style>
+        <p:txBody>
+          <a:bodyPr rtlCol="0" anchor="ctr"/>
+          <a:lstStyle/>
+          <a:p>
+            <a:pPr algn="ctr"/>
+            <a:r>
+              <a:rPr lang="en-US" dirty="0">
+                <a:solidFill>
+                  <a:schemeClr val="tx1"/>
+                </a:solidFill>
+              </a:rPr>
+              <a:t>MCP Server C</a:t>
+            </a:r>
+          </a:p>
+          <a:p>
+            <a:pPr algn="ctr"/>
+            <a:r>
+              <a:rPr lang="en-US" dirty="0">
+                <a:solidFill>
+                  <a:schemeClr val="tx1"/>
+                </a:solidFill>
+              </a:rPr>
+              <a:t>Remote API</a:t>
+            </a:r>
+          </a:p>
+        </p:txBody>
+      </p:sp>
+      <p:cxnSp>
+        <p:nvCxnSpPr>
+          <p:cNvPr id="18" name="Straight Arrow Connector 17">
+            <a:extLst>
+              <a:ext uri="{FF2B5EF4-FFF2-40B4-BE49-F238E27FC236}">
+                <a16:creationId xmlns:a16="http://schemas.microsoft.com/office/drawing/2014/main" id="{BD059445-29E0-0BB8-E8BA-0013ADBA930C}"/>
+              </a:ext>
+            </a:extLst>
+          </p:cNvPr>
+          <p:cNvCxnSpPr>
+            <a:cxnSpLocks/>
+            <a:stCxn id="4" idx="2"/>
+            <a:endCxn id="15" idx="0"/>
+          </p:cNvCxnSpPr>
+          <p:nvPr/>
+        </p:nvCxnSpPr>
+        <p:spPr>
+          <a:xfrm>
+            <a:off x="2870742" y="1714501"/>
+            <a:ext cx="0" cy="1003934"/>
+          </a:xfrm>
+          <a:prstGeom prst="straightConnector1">
+            <a:avLst/>
+          </a:prstGeom>
+          <a:ln>
+            <a:solidFill>
+              <a:schemeClr val="tx1"/>
+            </a:solidFill>
+            <a:prstDash val="sysDash"/>
+            <a:tailEnd type="triangle" w="lg" len="lg"/>
+          </a:ln>
+        </p:spPr>
+        <p:style>
+          <a:lnRef idx="2">
+            <a:schemeClr val="accent1"/>
+          </a:lnRef>
+          <a:fillRef idx="0">
+            <a:schemeClr val="accent1"/>
+          </a:fillRef>
+          <a:effectRef idx="1">
+            <a:schemeClr val="accent1"/>
+          </a:effectRef>
+          <a:fontRef idx="minor">
+            <a:schemeClr val="tx1"/>
+          </a:fontRef>
+        </p:style>
+      </p:cxnSp>
+      <p:cxnSp>
+        <p:nvCxnSpPr>
+          <p:cNvPr id="21" name="Straight Arrow Connector 20">
+            <a:extLst>
+              <a:ext uri="{FF2B5EF4-FFF2-40B4-BE49-F238E27FC236}">
+                <a16:creationId xmlns:a16="http://schemas.microsoft.com/office/drawing/2014/main" id="{B67BB8C0-5CB6-3A94-820B-418CFFCE9D38}"/>
+              </a:ext>
+            </a:extLst>
+          </p:cNvPr>
+          <p:cNvCxnSpPr>
+            <a:cxnSpLocks/>
+            <a:stCxn id="9" idx="2"/>
+            <a:endCxn id="16" idx="0"/>
+          </p:cNvCxnSpPr>
+          <p:nvPr/>
+        </p:nvCxnSpPr>
+        <p:spPr>
+          <a:xfrm>
+            <a:off x="6095999" y="1714501"/>
+            <a:ext cx="0" cy="1003934"/>
+          </a:xfrm>
+          <a:prstGeom prst="straightConnector1">
+            <a:avLst/>
+          </a:prstGeom>
+          <a:ln>
+            <a:solidFill>
+              <a:schemeClr val="tx1"/>
+            </a:solidFill>
+            <a:prstDash val="sysDash"/>
+            <a:tailEnd type="triangle" w="lg" len="lg"/>
+          </a:ln>
+        </p:spPr>
+        <p:style>
+          <a:lnRef idx="2">
+            <a:schemeClr val="accent1"/>
+          </a:lnRef>
+          <a:fillRef idx="0">
+            <a:schemeClr val="accent1"/>
+          </a:fillRef>
+          <a:effectRef idx="1">
+            <a:schemeClr val="accent1"/>
+          </a:effectRef>
+          <a:fontRef idx="minor">
+            <a:schemeClr val="tx1"/>
+          </a:fontRef>
+        </p:style>
+      </p:cxnSp>
+      <p:cxnSp>
+        <p:nvCxnSpPr>
+          <p:cNvPr id="24" name="Straight Arrow Connector 23">
+            <a:extLst>
+              <a:ext uri="{FF2B5EF4-FFF2-40B4-BE49-F238E27FC236}">
+                <a16:creationId xmlns:a16="http://schemas.microsoft.com/office/drawing/2014/main" id="{7FEBFCBE-6607-A910-FF7B-C1762F4684EF}"/>
+              </a:ext>
+            </a:extLst>
+          </p:cNvPr>
+          <p:cNvCxnSpPr>
+            <a:cxnSpLocks/>
+            <a:stCxn id="13" idx="2"/>
+            <a:endCxn id="17" idx="0"/>
+          </p:cNvCxnSpPr>
+          <p:nvPr/>
+        </p:nvCxnSpPr>
+        <p:spPr>
+          <a:xfrm flipH="1">
+            <a:off x="9321256" y="1714501"/>
+            <a:ext cx="2" cy="1003934"/>
+          </a:xfrm>
+          <a:prstGeom prst="straightConnector1">
+            <a:avLst/>
+          </a:prstGeom>
+          <a:ln>
+            <a:solidFill>
+              <a:schemeClr val="tx1"/>
+            </a:solidFill>
+            <a:prstDash val="sysDash"/>
+            <a:tailEnd type="triangle" w="lg" len="lg"/>
+          </a:ln>
+        </p:spPr>
+        <p:style>
+          <a:lnRef idx="2">
+            <a:schemeClr val="accent1"/>
+          </a:lnRef>
+          <a:fillRef idx="0">
+            <a:schemeClr val="accent1"/>
+          </a:fillRef>
+          <a:effectRef idx="1">
+            <a:schemeClr val="accent1"/>
+          </a:effectRef>
+          <a:fontRef idx="minor">
+            <a:schemeClr val="tx1"/>
+          </a:fontRef>
+        </p:style>
+      </p:cxnSp>
+      <p:cxnSp>
+        <p:nvCxnSpPr>
+          <p:cNvPr id="28" name="Connector: Elbow 27">
+            <a:extLst>
+              <a:ext uri="{FF2B5EF4-FFF2-40B4-BE49-F238E27FC236}">
+                <a16:creationId xmlns:a16="http://schemas.microsoft.com/office/drawing/2014/main" id="{CE37A76D-0F39-82E2-974B-B04FAACABE32}"/>
+              </a:ext>
+            </a:extLst>
+          </p:cNvPr>
+          <p:cNvCxnSpPr>
+            <a:cxnSpLocks/>
+            <a:stCxn id="9" idx="2"/>
+            <a:endCxn id="31" idx="0"/>
+          </p:cNvCxnSpPr>
+          <p:nvPr/>
+        </p:nvCxnSpPr>
+        <p:spPr>
+          <a:xfrm rot="16200000" flipH="1">
+            <a:off x="6849202" y="961297"/>
+            <a:ext cx="1003934" cy="2510341"/>
+          </a:xfrm>
+          <a:prstGeom prst="bentConnector3">
+            <a:avLst>
+              <a:gd name="adj1" fmla="val 61385"/>
+            </a:avLst>
+          </a:prstGeom>
+          <a:ln>
+            <a:solidFill>
+              <a:schemeClr val="tx1"/>
+            </a:solidFill>
+            <a:prstDash val="sysDash"/>
+            <a:tailEnd type="triangle" w="lg" len="lg"/>
+          </a:ln>
+        </p:spPr>
+        <p:style>
+          <a:lnRef idx="2">
+            <a:schemeClr val="accent1"/>
+          </a:lnRef>
+          <a:fillRef idx="0">
+            <a:schemeClr val="accent1"/>
+          </a:fillRef>
+          <a:effectRef idx="1">
+            <a:schemeClr val="accent1"/>
+          </a:effectRef>
+          <a:fontRef idx="minor">
+            <a:schemeClr val="tx1"/>
+          </a:fontRef>
+        </p:style>
+      </p:cxnSp>
+    </p:spTree>
+    <p:extLst>
+      <p:ext uri="{BB962C8B-B14F-4D97-AF65-F5344CB8AC3E}">
+        <p14:creationId xmlns:p14="http://schemas.microsoft.com/office/powerpoint/2010/main" val="836248043"/>
+      </p:ext>
+    </p:extLst>
+  </p:cSld>
+  <p:clrMapOvr>
+    <a:masterClrMapping/>
+  </p:clrMapOvr>
+</p:sld>
+</file>
+
+<file path=ppt/slides/slide6.xml><?xml version="1.0" encoding="utf-8"?>
 <p:sld xmlns:a="http://schemas.openxmlformats.org/drawingml/2006/main" xmlns:r="http://schemas.openxmlformats.org/officeDocument/2006/relationships" xmlns:p="http://schemas.openxmlformats.org/presentationml/2006/main">
   <p:cSld>
     <p:spTree>

--- a/figures/figures.pptx
+++ b/figures/figures.pptx
@@ -5,15 +5,17 @@
     <p:sldMasterId id="2147483660" r:id="rId1"/>
   </p:sldMasterIdLst>
   <p:notesMasterIdLst>
-    <p:notesMasterId r:id="rId8"/>
+    <p:notesMasterId r:id="rId10"/>
   </p:notesMasterIdLst>
   <p:sldIdLst>
     <p:sldId id="258" r:id="rId2"/>
     <p:sldId id="256" r:id="rId3"/>
-    <p:sldId id="260" r:id="rId4"/>
-    <p:sldId id="259" r:id="rId5"/>
-    <p:sldId id="261" r:id="rId6"/>
-    <p:sldId id="257" r:id="rId7"/>
+    <p:sldId id="262" r:id="rId4"/>
+    <p:sldId id="263" r:id="rId5"/>
+    <p:sldId id="260" r:id="rId6"/>
+    <p:sldId id="259" r:id="rId7"/>
+    <p:sldId id="261" r:id="rId8"/>
+    <p:sldId id="257" r:id="rId9"/>
   </p:sldIdLst>
   <p:sldSz cx="12192000" cy="6858000"/>
   <p:notesSz cx="6858000" cy="9144000"/>
@@ -123,6 +125,8 @@
         <p14:section name="Chapter 1" id="{4FFEF0E2-5833-4089-8860-99F4B2E194C0}">
           <p14:sldIdLst>
             <p14:sldId id="256"/>
+            <p14:sldId id="262"/>
+            <p14:sldId id="263"/>
             <p14:sldId id="260"/>
             <p14:sldId id="259"/>
           </p14:sldIdLst>
@@ -228,7 +232,7 @@
           <a:p>
             <a:fld id="{DAABB0E5-6D8D-4DEE-B75F-67010CF2307C}" type="datetimeFigureOut">
               <a:rPr lang="en-US" smtClean="0"/>
-              <a:t>2/6/2026</a:t>
+              <a:t>2/12/2026</a:t>
             </a:fld>
             <a:endParaRPr lang="en-US"/>
           </a:p>
@@ -763,7 +767,7 @@
           <a:p>
             <a:fld id="{1D549D2C-39EA-4769-BF7E-31FE52D82078}" type="slidenum">
               <a:rPr lang="en-US" smtClean="0"/>
-              <a:t>4</a:t>
+              <a:t>6</a:t>
             </a:fld>
             <a:endParaRPr lang="en-US"/>
           </a:p>
@@ -913,7 +917,7 @@
           <a:p>
             <a:fld id="{B84C5C40-2055-49AF-9028-5DA79E75E391}" type="datetimeFigureOut">
               <a:rPr lang="en-US" smtClean="0"/>
-              <a:t>2/6/2026</a:t>
+              <a:t>2/12/2026</a:t>
             </a:fld>
             <a:endParaRPr lang="en-US"/>
           </a:p>
@@ -1083,7 +1087,7 @@
           <a:p>
             <a:fld id="{B84C5C40-2055-49AF-9028-5DA79E75E391}" type="datetimeFigureOut">
               <a:rPr lang="en-US" smtClean="0"/>
-              <a:t>2/6/2026</a:t>
+              <a:t>2/12/2026</a:t>
             </a:fld>
             <a:endParaRPr lang="en-US"/>
           </a:p>
@@ -1263,7 +1267,7 @@
           <a:p>
             <a:fld id="{B84C5C40-2055-49AF-9028-5DA79E75E391}" type="datetimeFigureOut">
               <a:rPr lang="en-US" smtClean="0"/>
-              <a:t>2/6/2026</a:t>
+              <a:t>2/12/2026</a:t>
             </a:fld>
             <a:endParaRPr lang="en-US"/>
           </a:p>
@@ -1433,7 +1437,7 @@
           <a:p>
             <a:fld id="{B84C5C40-2055-49AF-9028-5DA79E75E391}" type="datetimeFigureOut">
               <a:rPr lang="en-US" smtClean="0"/>
-              <a:t>2/6/2026</a:t>
+              <a:t>2/12/2026</a:t>
             </a:fld>
             <a:endParaRPr lang="en-US"/>
           </a:p>
@@ -1679,7 +1683,7 @@
           <a:p>
             <a:fld id="{B84C5C40-2055-49AF-9028-5DA79E75E391}" type="datetimeFigureOut">
               <a:rPr lang="en-US" smtClean="0"/>
-              <a:t>2/6/2026</a:t>
+              <a:t>2/12/2026</a:t>
             </a:fld>
             <a:endParaRPr lang="en-US"/>
           </a:p>
@@ -1911,7 +1915,7 @@
           <a:p>
             <a:fld id="{B84C5C40-2055-49AF-9028-5DA79E75E391}" type="datetimeFigureOut">
               <a:rPr lang="en-US" smtClean="0"/>
-              <a:t>2/6/2026</a:t>
+              <a:t>2/12/2026</a:t>
             </a:fld>
             <a:endParaRPr lang="en-US"/>
           </a:p>
@@ -2278,7 +2282,7 @@
           <a:p>
             <a:fld id="{B84C5C40-2055-49AF-9028-5DA79E75E391}" type="datetimeFigureOut">
               <a:rPr lang="en-US" smtClean="0"/>
-              <a:t>2/6/2026</a:t>
+              <a:t>2/12/2026</a:t>
             </a:fld>
             <a:endParaRPr lang="en-US"/>
           </a:p>
@@ -2396,7 +2400,7 @@
           <a:p>
             <a:fld id="{B84C5C40-2055-49AF-9028-5DA79E75E391}" type="datetimeFigureOut">
               <a:rPr lang="en-US" smtClean="0"/>
-              <a:t>2/6/2026</a:t>
+              <a:t>2/12/2026</a:t>
             </a:fld>
             <a:endParaRPr lang="en-US"/>
           </a:p>
@@ -2491,7 +2495,7 @@
           <a:p>
             <a:fld id="{B84C5C40-2055-49AF-9028-5DA79E75E391}" type="datetimeFigureOut">
               <a:rPr lang="en-US" smtClean="0"/>
-              <a:t>2/6/2026</a:t>
+              <a:t>2/12/2026</a:t>
             </a:fld>
             <a:endParaRPr lang="en-US"/>
           </a:p>
@@ -2768,7 +2772,7 @@
           <a:p>
             <a:fld id="{B84C5C40-2055-49AF-9028-5DA79E75E391}" type="datetimeFigureOut">
               <a:rPr lang="en-US" smtClean="0"/>
-              <a:t>2/6/2026</a:t>
+              <a:t>2/12/2026</a:t>
             </a:fld>
             <a:endParaRPr lang="en-US"/>
           </a:p>
@@ -3025,7 +3029,7 @@
           <a:p>
             <a:fld id="{B84C5C40-2055-49AF-9028-5DA79E75E391}" type="datetimeFigureOut">
               <a:rPr lang="en-US" smtClean="0"/>
-              <a:t>2/6/2026</a:t>
+              <a:t>2/12/2026</a:t>
             </a:fld>
             <a:endParaRPr lang="en-US"/>
           </a:p>
@@ -3238,7 +3242,7 @@
           <a:p>
             <a:fld id="{B84C5C40-2055-49AF-9028-5DA79E75E391}" type="datetimeFigureOut">
               <a:rPr lang="en-US" smtClean="0"/>
-              <a:t>2/6/2026</a:t>
+              <a:t>2/12/2026</a:t>
             </a:fld>
             <a:endParaRPr lang="en-US"/>
           </a:p>
@@ -4366,7 +4370,7 @@
           <p:cNvPr id="2" name="Rectangle: Rounded Corners 1">
             <a:extLst>
               <a:ext uri="{FF2B5EF4-FFF2-40B4-BE49-F238E27FC236}">
-                <a16:creationId xmlns:a16="http://schemas.microsoft.com/office/drawing/2014/main" id="{ED732446-F0F6-0ACF-647A-3BC33E7C3D60}"/>
+                <a16:creationId xmlns:a16="http://schemas.microsoft.com/office/drawing/2014/main" id="{B093A9C9-AC19-13DF-070B-47915CA16540}"/>
               </a:ext>
             </a:extLst>
           </p:cNvPr>
@@ -4375,8 +4379,8 @@
         </p:nvSpPr>
         <p:spPr>
           <a:xfrm>
-            <a:off x="962567" y="281940"/>
-            <a:ext cx="10552099" cy="6187439"/>
+            <a:off x="2933281" y="496097"/>
+            <a:ext cx="6325438" cy="974563"/>
           </a:xfrm>
           <a:prstGeom prst="roundRect">
             <a:avLst>
@@ -4409,7 +4413,7 @@
           </a:fontRef>
         </p:style>
         <p:txBody>
-          <a:bodyPr rtlCol="0" anchor="t"/>
+          <a:bodyPr rtlCol="0" anchor="ctr"/>
           <a:lstStyle/>
           <a:p>
             <a:pPr algn="ctr"/>
@@ -4419,7 +4423,7 @@
                   <a:schemeClr val="tx1"/>
                 </a:solidFill>
               </a:rPr>
-              <a:t>Example Models</a:t>
+              <a:t>Retrieval Agents: Query analysis and planning</a:t>
             </a:r>
           </a:p>
         </p:txBody>
@@ -4429,7 +4433,7 @@
           <p:cNvPr id="3" name="Rectangle: Rounded Corners 2">
             <a:extLst>
               <a:ext uri="{FF2B5EF4-FFF2-40B4-BE49-F238E27FC236}">
-                <a16:creationId xmlns:a16="http://schemas.microsoft.com/office/drawing/2014/main" id="{5574ED1F-143F-F0C3-860B-D1D1A94B8038}"/>
+                <a16:creationId xmlns:a16="http://schemas.microsoft.com/office/drawing/2014/main" id="{1872BA75-F1E5-3FE4-8499-99490E2C15B3}"/>
               </a:ext>
             </a:extLst>
           </p:cNvPr>
@@ -4438,379 +4442,11 @@
         </p:nvSpPr>
         <p:spPr>
           <a:xfrm>
-            <a:off x="4778916" y="1188720"/>
-            <a:ext cx="2634168" cy="2335531"/>
+            <a:off x="4805537" y="311431"/>
+            <a:ext cx="2580925" cy="369332"/>
           </a:xfrm>
           <a:prstGeom prst="roundRect">
             <a:avLst/>
-          </a:prstGeom>
-          <a:solidFill>
-            <a:srgbClr val="E5F1F8"/>
-          </a:solidFill>
-          <a:ln>
-            <a:solidFill>
-              <a:schemeClr val="tx1"/>
-            </a:solidFill>
-          </a:ln>
-        </p:spPr>
-        <p:style>
-          <a:lnRef idx="2">
-            <a:schemeClr val="accent1">
-              <a:shade val="15000"/>
-            </a:schemeClr>
-          </a:lnRef>
-          <a:fillRef idx="1">
-            <a:schemeClr val="accent1"/>
-          </a:fillRef>
-          <a:effectRef idx="0">
-            <a:schemeClr val="accent1"/>
-          </a:effectRef>
-          <a:fontRef idx="minor">
-            <a:schemeClr val="lt1"/>
-          </a:fontRef>
-        </p:style>
-        <p:txBody>
-          <a:bodyPr rtlCol="0" anchor="t"/>
-          <a:lstStyle/>
-          <a:p>
-            <a:pPr algn="ctr"/>
-            <a:r>
-              <a:rPr lang="en-US" dirty="0">
-                <a:solidFill>
-                  <a:schemeClr val="tx1"/>
-                </a:solidFill>
-              </a:rPr>
-              <a:t>Anthropic</a:t>
-            </a:r>
-          </a:p>
-        </p:txBody>
-      </p:sp>
-      <p:sp>
-        <p:nvSpPr>
-          <p:cNvPr id="4" name="Rectangle: Rounded Corners 3">
-            <a:extLst>
-              <a:ext uri="{FF2B5EF4-FFF2-40B4-BE49-F238E27FC236}">
-                <a16:creationId xmlns:a16="http://schemas.microsoft.com/office/drawing/2014/main" id="{CB92B3E5-A0FB-4F52-03FE-A3994B4A676E}"/>
-              </a:ext>
-            </a:extLst>
-          </p:cNvPr>
-          <p:cNvSpPr/>
-          <p:nvPr/>
-        </p:nvSpPr>
-        <p:spPr>
-          <a:xfrm>
-            <a:off x="1553658" y="1188720"/>
-            <a:ext cx="2634168" cy="2335531"/>
-          </a:xfrm>
-          <a:prstGeom prst="roundRect">
-            <a:avLst/>
-          </a:prstGeom>
-          <a:solidFill>
-            <a:srgbClr val="E5F1F8"/>
-          </a:solidFill>
-          <a:ln>
-            <a:solidFill>
-              <a:schemeClr val="tx1"/>
-            </a:solidFill>
-          </a:ln>
-        </p:spPr>
-        <p:style>
-          <a:lnRef idx="2">
-            <a:schemeClr val="accent1">
-              <a:shade val="15000"/>
-            </a:schemeClr>
-          </a:lnRef>
-          <a:fillRef idx="1">
-            <a:schemeClr val="accent1"/>
-          </a:fillRef>
-          <a:effectRef idx="0">
-            <a:schemeClr val="accent1"/>
-          </a:effectRef>
-          <a:fontRef idx="minor">
-            <a:schemeClr val="lt1"/>
-          </a:fontRef>
-        </p:style>
-        <p:txBody>
-          <a:bodyPr rtlCol="0" anchor="t"/>
-          <a:lstStyle/>
-          <a:p>
-            <a:pPr algn="ctr"/>
-            <a:r>
-              <a:rPr lang="en-US" dirty="0">
-                <a:solidFill>
-                  <a:schemeClr val="tx1"/>
-                </a:solidFill>
-              </a:rPr>
-              <a:t>Azure OpenAI</a:t>
-            </a:r>
-          </a:p>
-        </p:txBody>
-      </p:sp>
-      <p:sp>
-        <p:nvSpPr>
-          <p:cNvPr id="5" name="Rectangle: Rounded Corners 4">
-            <a:extLst>
-              <a:ext uri="{FF2B5EF4-FFF2-40B4-BE49-F238E27FC236}">
-                <a16:creationId xmlns:a16="http://schemas.microsoft.com/office/drawing/2014/main" id="{ACE8A258-9DE7-F4AF-1449-211286E0D11E}"/>
-              </a:ext>
-            </a:extLst>
-          </p:cNvPr>
-          <p:cNvSpPr/>
-          <p:nvPr/>
-        </p:nvSpPr>
-        <p:spPr>
-          <a:xfrm>
-            <a:off x="8004174" y="1188720"/>
-            <a:ext cx="2634168" cy="2335531"/>
-          </a:xfrm>
-          <a:prstGeom prst="roundRect">
-            <a:avLst/>
-          </a:prstGeom>
-          <a:solidFill>
-            <a:srgbClr val="E5F1F8"/>
-          </a:solidFill>
-          <a:ln>
-            <a:solidFill>
-              <a:schemeClr val="tx1"/>
-            </a:solidFill>
-          </a:ln>
-        </p:spPr>
-        <p:style>
-          <a:lnRef idx="2">
-            <a:schemeClr val="accent1">
-              <a:shade val="15000"/>
-            </a:schemeClr>
-          </a:lnRef>
-          <a:fillRef idx="1">
-            <a:schemeClr val="accent1"/>
-          </a:fillRef>
-          <a:effectRef idx="0">
-            <a:schemeClr val="accent1"/>
-          </a:effectRef>
-          <a:fontRef idx="minor">
-            <a:schemeClr val="lt1"/>
-          </a:fontRef>
-        </p:style>
-        <p:txBody>
-          <a:bodyPr rtlCol="0" anchor="t"/>
-          <a:lstStyle/>
-          <a:p>
-            <a:pPr algn="ctr"/>
-            <a:r>
-              <a:rPr lang="en-US" dirty="0">
-                <a:solidFill>
-                  <a:schemeClr val="tx1"/>
-                </a:solidFill>
-              </a:rPr>
-              <a:t>Microsoft</a:t>
-            </a:r>
-          </a:p>
-        </p:txBody>
-      </p:sp>
-      <p:sp>
-        <p:nvSpPr>
-          <p:cNvPr id="6" name="Rectangle: Rounded Corners 5">
-            <a:extLst>
-              <a:ext uri="{FF2B5EF4-FFF2-40B4-BE49-F238E27FC236}">
-                <a16:creationId xmlns:a16="http://schemas.microsoft.com/office/drawing/2014/main" id="{417ADCD0-E7DE-9B18-898C-7D55B783F694}"/>
-              </a:ext>
-            </a:extLst>
-          </p:cNvPr>
-          <p:cNvSpPr/>
-          <p:nvPr/>
-        </p:nvSpPr>
-        <p:spPr>
-          <a:xfrm>
-            <a:off x="4778916" y="3653789"/>
-            <a:ext cx="2634168" cy="2335531"/>
-          </a:xfrm>
-          <a:prstGeom prst="roundRect">
-            <a:avLst/>
-          </a:prstGeom>
-          <a:solidFill>
-            <a:srgbClr val="E5F1F8"/>
-          </a:solidFill>
-          <a:ln>
-            <a:solidFill>
-              <a:schemeClr val="tx1"/>
-            </a:solidFill>
-          </a:ln>
-        </p:spPr>
-        <p:style>
-          <a:lnRef idx="2">
-            <a:schemeClr val="accent1">
-              <a:shade val="15000"/>
-            </a:schemeClr>
-          </a:lnRef>
-          <a:fillRef idx="1">
-            <a:schemeClr val="accent1"/>
-          </a:fillRef>
-          <a:effectRef idx="0">
-            <a:schemeClr val="accent1"/>
-          </a:effectRef>
-          <a:fontRef idx="minor">
-            <a:schemeClr val="lt1"/>
-          </a:fontRef>
-        </p:style>
-        <p:txBody>
-          <a:bodyPr rtlCol="0" anchor="t"/>
-          <a:lstStyle/>
-          <a:p>
-            <a:pPr algn="ctr"/>
-            <a:r>
-              <a:rPr lang="en-US" dirty="0">
-                <a:solidFill>
-                  <a:schemeClr val="tx1"/>
-                </a:solidFill>
-              </a:rPr>
-              <a:t>Mistral AI</a:t>
-            </a:r>
-          </a:p>
-        </p:txBody>
-      </p:sp>
-      <p:sp>
-        <p:nvSpPr>
-          <p:cNvPr id="7" name="Rectangle: Rounded Corners 6">
-            <a:extLst>
-              <a:ext uri="{FF2B5EF4-FFF2-40B4-BE49-F238E27FC236}">
-                <a16:creationId xmlns:a16="http://schemas.microsoft.com/office/drawing/2014/main" id="{A55125DD-7A11-66B1-DDF5-ECD5D6C1F69B}"/>
-              </a:ext>
-            </a:extLst>
-          </p:cNvPr>
-          <p:cNvSpPr/>
-          <p:nvPr/>
-        </p:nvSpPr>
-        <p:spPr>
-          <a:xfrm>
-            <a:off x="1553658" y="3653789"/>
-            <a:ext cx="2634168" cy="2335531"/>
-          </a:xfrm>
-          <a:prstGeom prst="roundRect">
-            <a:avLst/>
-          </a:prstGeom>
-          <a:solidFill>
-            <a:srgbClr val="E5F1F8"/>
-          </a:solidFill>
-          <a:ln>
-            <a:solidFill>
-              <a:schemeClr val="tx1"/>
-            </a:solidFill>
-          </a:ln>
-        </p:spPr>
-        <p:style>
-          <a:lnRef idx="2">
-            <a:schemeClr val="accent1">
-              <a:shade val="15000"/>
-            </a:schemeClr>
-          </a:lnRef>
-          <a:fillRef idx="1">
-            <a:schemeClr val="accent1"/>
-          </a:fillRef>
-          <a:effectRef idx="0">
-            <a:schemeClr val="accent1"/>
-          </a:effectRef>
-          <a:fontRef idx="minor">
-            <a:schemeClr val="lt1"/>
-          </a:fontRef>
-        </p:style>
-        <p:txBody>
-          <a:bodyPr rtlCol="0" anchor="t"/>
-          <a:lstStyle/>
-          <a:p>
-            <a:pPr algn="ctr"/>
-            <a:r>
-              <a:rPr lang="en-US" dirty="0">
-                <a:solidFill>
-                  <a:schemeClr val="tx1"/>
-                </a:solidFill>
-              </a:rPr>
-              <a:t>Meta</a:t>
-            </a:r>
-          </a:p>
-        </p:txBody>
-      </p:sp>
-      <p:sp>
-        <p:nvSpPr>
-          <p:cNvPr id="8" name="Rectangle: Rounded Corners 7">
-            <a:extLst>
-              <a:ext uri="{FF2B5EF4-FFF2-40B4-BE49-F238E27FC236}">
-                <a16:creationId xmlns:a16="http://schemas.microsoft.com/office/drawing/2014/main" id="{4D8433B6-E222-52DE-3420-6BC81E4D9945}"/>
-              </a:ext>
-            </a:extLst>
-          </p:cNvPr>
-          <p:cNvSpPr/>
-          <p:nvPr/>
-        </p:nvSpPr>
-        <p:spPr>
-          <a:xfrm>
-            <a:off x="8004174" y="3653789"/>
-            <a:ext cx="2634168" cy="2335531"/>
-          </a:xfrm>
-          <a:prstGeom prst="roundRect">
-            <a:avLst/>
-          </a:prstGeom>
-          <a:solidFill>
-            <a:srgbClr val="E5F1F8"/>
-          </a:solidFill>
-          <a:ln>
-            <a:solidFill>
-              <a:schemeClr val="tx1"/>
-            </a:solidFill>
-          </a:ln>
-        </p:spPr>
-        <p:style>
-          <a:lnRef idx="2">
-            <a:schemeClr val="accent1">
-              <a:shade val="15000"/>
-            </a:schemeClr>
-          </a:lnRef>
-          <a:fillRef idx="1">
-            <a:schemeClr val="accent1"/>
-          </a:fillRef>
-          <a:effectRef idx="0">
-            <a:schemeClr val="accent1"/>
-          </a:effectRef>
-          <a:fontRef idx="minor">
-            <a:schemeClr val="lt1"/>
-          </a:fontRef>
-        </p:style>
-        <p:txBody>
-          <a:bodyPr rtlCol="0" anchor="t"/>
-          <a:lstStyle/>
-          <a:p>
-            <a:pPr algn="ctr"/>
-            <a:r>
-              <a:rPr lang="en-US" dirty="0">
-                <a:solidFill>
-                  <a:schemeClr val="tx1"/>
-                </a:solidFill>
-              </a:rPr>
-              <a:t>DeepSeek</a:t>
-            </a:r>
-          </a:p>
-        </p:txBody>
-      </p:sp>
-      <p:sp>
-        <p:nvSpPr>
-          <p:cNvPr id="10" name="Rectangle: Rounded Corners 9">
-            <a:extLst>
-              <a:ext uri="{FF2B5EF4-FFF2-40B4-BE49-F238E27FC236}">
-                <a16:creationId xmlns:a16="http://schemas.microsoft.com/office/drawing/2014/main" id="{02E5EA1C-587E-4A45-E606-F67DF515B407}"/>
-              </a:ext>
-            </a:extLst>
-          </p:cNvPr>
-          <p:cNvSpPr/>
-          <p:nvPr/>
-        </p:nvSpPr>
-        <p:spPr>
-          <a:xfrm>
-            <a:off x="1790700" y="1882140"/>
-            <a:ext cx="2111892" cy="322508"/>
-          </a:xfrm>
-          <a:prstGeom prst="roundRect">
-            <a:avLst>
-              <a:gd name="adj" fmla="val 50000"/>
-            </a:avLst>
           </a:prstGeom>
           <a:solidFill>
             <a:srgbClr val="B2D4EB"/>
@@ -4843,12 +4479,12 @@
           <a:p>
             <a:pPr algn="ctr"/>
             <a:r>
-              <a:rPr lang="en-US" dirty="0" err="1">
+              <a:rPr lang="en-US" dirty="0">
                 <a:solidFill>
                   <a:schemeClr val="tx1"/>
                 </a:solidFill>
               </a:rPr>
-              <a:t>gpt</a:t>
+              <a:t>Agent Layer</a:t>
             </a:r>
             <a:endParaRPr lang="en-US" i="1" dirty="0">
               <a:solidFill>
@@ -4860,10 +4496,10 @@
       </p:sp>
       <p:sp>
         <p:nvSpPr>
-          <p:cNvPr id="11" name="Rectangle: Rounded Corners 10">
+          <p:cNvPr id="5" name="Rectangle: Rounded Corners 4">
             <a:extLst>
               <a:ext uri="{FF2B5EF4-FFF2-40B4-BE49-F238E27FC236}">
-                <a16:creationId xmlns:a16="http://schemas.microsoft.com/office/drawing/2014/main" id="{E11D9861-1EDA-793B-0AA0-18BFA52ACCE4}"/>
+                <a16:creationId xmlns:a16="http://schemas.microsoft.com/office/drawing/2014/main" id="{3854ADE8-F06B-9F26-91C2-3A9892E48DAE}"/>
               </a:ext>
             </a:extLst>
           </p:cNvPr>
@@ -4872,13 +4508,71 @@
         </p:nvSpPr>
         <p:spPr>
           <a:xfrm>
-            <a:off x="1790700" y="2380687"/>
-            <a:ext cx="2111892" cy="322508"/>
+            <a:off x="2933281" y="1839992"/>
+            <a:ext cx="6325438" cy="974563"/>
           </a:xfrm>
           <a:prstGeom prst="roundRect">
             <a:avLst>
-              <a:gd name="adj" fmla="val 50000"/>
+              <a:gd name="adj" fmla="val 5234"/>
             </a:avLst>
+          </a:prstGeom>
+          <a:solidFill>
+            <a:schemeClr val="bg1"/>
+          </a:solidFill>
+          <a:ln>
+            <a:solidFill>
+              <a:schemeClr val="tx1"/>
+            </a:solidFill>
+          </a:ln>
+        </p:spPr>
+        <p:style>
+          <a:lnRef idx="2">
+            <a:schemeClr val="accent1">
+              <a:shade val="15000"/>
+            </a:schemeClr>
+          </a:lnRef>
+          <a:fillRef idx="1">
+            <a:schemeClr val="accent1"/>
+          </a:fillRef>
+          <a:effectRef idx="0">
+            <a:schemeClr val="accent1"/>
+          </a:effectRef>
+          <a:fontRef idx="minor">
+            <a:schemeClr val="lt1"/>
+          </a:fontRef>
+        </p:style>
+        <p:txBody>
+          <a:bodyPr rtlCol="0" anchor="ctr"/>
+          <a:lstStyle/>
+          <a:p>
+            <a:pPr algn="ctr"/>
+            <a:endParaRPr lang="en-US" dirty="0">
+              <a:solidFill>
+                <a:schemeClr val="tx1"/>
+              </a:solidFill>
+            </a:endParaRPr>
+          </a:p>
+        </p:txBody>
+      </p:sp>
+      <p:sp>
+        <p:nvSpPr>
+          <p:cNvPr id="6" name="Rectangle: Rounded Corners 5">
+            <a:extLst>
+              <a:ext uri="{FF2B5EF4-FFF2-40B4-BE49-F238E27FC236}">
+                <a16:creationId xmlns:a16="http://schemas.microsoft.com/office/drawing/2014/main" id="{0CD6471B-9868-9E31-CDE5-11FB5406EC6D}"/>
+              </a:ext>
+            </a:extLst>
+          </p:cNvPr>
+          <p:cNvSpPr/>
+          <p:nvPr/>
+        </p:nvSpPr>
+        <p:spPr>
+          <a:xfrm>
+            <a:off x="4805537" y="1655326"/>
+            <a:ext cx="2580925" cy="369332"/>
+          </a:xfrm>
+          <a:prstGeom prst="roundRect">
+            <a:avLst/>
           </a:prstGeom>
           <a:solidFill>
             <a:srgbClr val="B2D4EB"/>
@@ -4916,17 +4610,22 @@
                   <a:schemeClr val="tx1"/>
                 </a:solidFill>
               </a:rPr>
-              <a:t>o</a:t>
-            </a:r>
-          </a:p>
-        </p:txBody>
-      </p:sp>
-      <p:sp>
-        <p:nvSpPr>
-          <p:cNvPr id="12" name="Rectangle: Rounded Corners 11">
+              <a:t>Router Layer</a:t>
+            </a:r>
+            <a:endParaRPr lang="en-US" i="1" dirty="0">
+              <a:solidFill>
+                <a:schemeClr val="tx1"/>
+              </a:solidFill>
+            </a:endParaRPr>
+          </a:p>
+        </p:txBody>
+      </p:sp>
+      <p:sp>
+        <p:nvSpPr>
+          <p:cNvPr id="7" name="Rectangle: Rounded Corners 6">
             <a:extLst>
               <a:ext uri="{FF2B5EF4-FFF2-40B4-BE49-F238E27FC236}">
-                <a16:creationId xmlns:a16="http://schemas.microsoft.com/office/drawing/2014/main" id="{46BFDC7A-CED3-C375-66E6-683B9E52EDD1}"/>
+                <a16:creationId xmlns:a16="http://schemas.microsoft.com/office/drawing/2014/main" id="{FEBB63F4-ED09-21FE-8751-04E01AFF0D06}"/>
               </a:ext>
             </a:extLst>
           </p:cNvPr>
@@ -4935,13 +4634,71 @@
         </p:nvSpPr>
         <p:spPr>
           <a:xfrm>
-            <a:off x="1790700" y="2879234"/>
-            <a:ext cx="2111892" cy="322508"/>
+            <a:off x="2933281" y="3183887"/>
+            <a:ext cx="6325438" cy="974563"/>
           </a:xfrm>
           <a:prstGeom prst="roundRect">
             <a:avLst>
-              <a:gd name="adj" fmla="val 50000"/>
+              <a:gd name="adj" fmla="val 5234"/>
             </a:avLst>
+          </a:prstGeom>
+          <a:solidFill>
+            <a:schemeClr val="bg1"/>
+          </a:solidFill>
+          <a:ln>
+            <a:solidFill>
+              <a:schemeClr val="tx1"/>
+            </a:solidFill>
+          </a:ln>
+        </p:spPr>
+        <p:style>
+          <a:lnRef idx="2">
+            <a:schemeClr val="accent1">
+              <a:shade val="15000"/>
+            </a:schemeClr>
+          </a:lnRef>
+          <a:fillRef idx="1">
+            <a:schemeClr val="accent1"/>
+          </a:fillRef>
+          <a:effectRef idx="0">
+            <a:schemeClr val="accent1"/>
+          </a:effectRef>
+          <a:fontRef idx="minor">
+            <a:schemeClr val="lt1"/>
+          </a:fontRef>
+        </p:style>
+        <p:txBody>
+          <a:bodyPr rtlCol="0" anchor="ctr"/>
+          <a:lstStyle/>
+          <a:p>
+            <a:pPr algn="ctr"/>
+            <a:endParaRPr lang="en-US" dirty="0">
+              <a:solidFill>
+                <a:schemeClr val="tx1"/>
+              </a:solidFill>
+            </a:endParaRPr>
+          </a:p>
+        </p:txBody>
+      </p:sp>
+      <p:sp>
+        <p:nvSpPr>
+          <p:cNvPr id="8" name="Rectangle: Rounded Corners 7">
+            <a:extLst>
+              <a:ext uri="{FF2B5EF4-FFF2-40B4-BE49-F238E27FC236}">
+                <a16:creationId xmlns:a16="http://schemas.microsoft.com/office/drawing/2014/main" id="{64887E38-DD48-A03C-B28D-2E196FFD81D6}"/>
+              </a:ext>
+            </a:extLst>
+          </p:cNvPr>
+          <p:cNvSpPr/>
+          <p:nvPr/>
+        </p:nvSpPr>
+        <p:spPr>
+          <a:xfrm>
+            <a:off x="4805537" y="2999221"/>
+            <a:ext cx="2580925" cy="369332"/>
+          </a:xfrm>
+          <a:prstGeom prst="roundRect">
+            <a:avLst/>
           </a:prstGeom>
           <a:solidFill>
             <a:srgbClr val="B2D4EB"/>
@@ -4979,15 +4736,797 @@
                   <a:schemeClr val="tx1"/>
                 </a:solidFill>
               </a:rPr>
-              <a:t>sora</a:t>
-            </a:r>
-          </a:p>
-        </p:txBody>
-      </p:sp>
+              <a:t>Tool Layer</a:t>
+            </a:r>
+            <a:endParaRPr lang="en-US" i="1" dirty="0">
+              <a:solidFill>
+                <a:schemeClr val="tx1"/>
+              </a:solidFill>
+            </a:endParaRPr>
+          </a:p>
+        </p:txBody>
+      </p:sp>
+      <p:sp>
+        <p:nvSpPr>
+          <p:cNvPr id="9" name="Rectangle: Rounded Corners 8">
+            <a:extLst>
+              <a:ext uri="{FF2B5EF4-FFF2-40B4-BE49-F238E27FC236}">
+                <a16:creationId xmlns:a16="http://schemas.microsoft.com/office/drawing/2014/main" id="{61179975-6D14-9A73-F6AF-EB48BB4B01D5}"/>
+              </a:ext>
+            </a:extLst>
+          </p:cNvPr>
+          <p:cNvSpPr/>
+          <p:nvPr/>
+        </p:nvSpPr>
+        <p:spPr>
+          <a:xfrm>
+            <a:off x="2933281" y="4527782"/>
+            <a:ext cx="6325438" cy="974563"/>
+          </a:xfrm>
+          <a:prstGeom prst="roundRect">
+            <a:avLst>
+              <a:gd name="adj" fmla="val 5234"/>
+            </a:avLst>
+          </a:prstGeom>
+          <a:solidFill>
+            <a:schemeClr val="bg1"/>
+          </a:solidFill>
+          <a:ln>
+            <a:solidFill>
+              <a:schemeClr val="tx1"/>
+            </a:solidFill>
+          </a:ln>
+        </p:spPr>
+        <p:style>
+          <a:lnRef idx="2">
+            <a:schemeClr val="accent1">
+              <a:shade val="15000"/>
+            </a:schemeClr>
+          </a:lnRef>
+          <a:fillRef idx="1">
+            <a:schemeClr val="accent1"/>
+          </a:fillRef>
+          <a:effectRef idx="0">
+            <a:schemeClr val="accent1"/>
+          </a:effectRef>
+          <a:fontRef idx="minor">
+            <a:schemeClr val="lt1"/>
+          </a:fontRef>
+        </p:style>
+        <p:txBody>
+          <a:bodyPr rtlCol="0" anchor="ctr"/>
+          <a:lstStyle/>
+          <a:p>
+            <a:pPr algn="ctr"/>
+            <a:endParaRPr lang="en-US" dirty="0">
+              <a:solidFill>
+                <a:schemeClr val="tx1"/>
+              </a:solidFill>
+            </a:endParaRPr>
+          </a:p>
+        </p:txBody>
+      </p:sp>
+      <p:sp>
+        <p:nvSpPr>
+          <p:cNvPr id="10" name="Rectangle: Rounded Corners 9">
+            <a:extLst>
+              <a:ext uri="{FF2B5EF4-FFF2-40B4-BE49-F238E27FC236}">
+                <a16:creationId xmlns:a16="http://schemas.microsoft.com/office/drawing/2014/main" id="{A87A8A04-A0EB-0635-5D50-4C591A01FD85}"/>
+              </a:ext>
+            </a:extLst>
+          </p:cNvPr>
+          <p:cNvSpPr/>
+          <p:nvPr/>
+        </p:nvSpPr>
+        <p:spPr>
+          <a:xfrm>
+            <a:off x="4805537" y="4343116"/>
+            <a:ext cx="2580925" cy="369332"/>
+          </a:xfrm>
+          <a:prstGeom prst="roundRect">
+            <a:avLst/>
+          </a:prstGeom>
+          <a:solidFill>
+            <a:srgbClr val="B2D4EB"/>
+          </a:solidFill>
+          <a:ln>
+            <a:solidFill>
+              <a:schemeClr val="tx1"/>
+            </a:solidFill>
+          </a:ln>
+        </p:spPr>
+        <p:style>
+          <a:lnRef idx="2">
+            <a:schemeClr val="accent1">
+              <a:shade val="15000"/>
+            </a:schemeClr>
+          </a:lnRef>
+          <a:fillRef idx="1">
+            <a:schemeClr val="accent1"/>
+          </a:fillRef>
+          <a:effectRef idx="0">
+            <a:schemeClr val="accent1"/>
+          </a:effectRef>
+          <a:fontRef idx="minor">
+            <a:schemeClr val="lt1"/>
+          </a:fontRef>
+        </p:style>
+        <p:txBody>
+          <a:bodyPr rtlCol="0" anchor="ctr"/>
+          <a:lstStyle/>
+          <a:p>
+            <a:pPr algn="ctr"/>
+            <a:r>
+              <a:rPr lang="en-US" dirty="0">
+                <a:solidFill>
+                  <a:schemeClr val="tx1"/>
+                </a:solidFill>
+              </a:rPr>
+              <a:t>Results Layer</a:t>
+            </a:r>
+            <a:endParaRPr lang="en-US" i="1" dirty="0">
+              <a:solidFill>
+                <a:schemeClr val="tx1"/>
+              </a:solidFill>
+            </a:endParaRPr>
+          </a:p>
+        </p:txBody>
+      </p:sp>
+      <p:sp>
+        <p:nvSpPr>
+          <p:cNvPr id="11" name="Rectangle: Rounded Corners 10">
+            <a:extLst>
+              <a:ext uri="{FF2B5EF4-FFF2-40B4-BE49-F238E27FC236}">
+                <a16:creationId xmlns:a16="http://schemas.microsoft.com/office/drawing/2014/main" id="{F5DF5948-C971-4B39-A3BE-2153A8EEA636}"/>
+              </a:ext>
+            </a:extLst>
+          </p:cNvPr>
+          <p:cNvSpPr/>
+          <p:nvPr/>
+        </p:nvSpPr>
+        <p:spPr>
+          <a:xfrm>
+            <a:off x="2933281" y="5687011"/>
+            <a:ext cx="6325438" cy="369332"/>
+          </a:xfrm>
+          <a:prstGeom prst="roundRect">
+            <a:avLst/>
+          </a:prstGeom>
+          <a:solidFill>
+            <a:srgbClr val="B2D4EB"/>
+          </a:solidFill>
+          <a:ln>
+            <a:solidFill>
+              <a:schemeClr val="tx1"/>
+            </a:solidFill>
+          </a:ln>
+        </p:spPr>
+        <p:style>
+          <a:lnRef idx="2">
+            <a:schemeClr val="accent1">
+              <a:shade val="15000"/>
+            </a:schemeClr>
+          </a:lnRef>
+          <a:fillRef idx="1">
+            <a:schemeClr val="accent1"/>
+          </a:fillRef>
+          <a:effectRef idx="0">
+            <a:schemeClr val="accent1"/>
+          </a:effectRef>
+          <a:fontRef idx="minor">
+            <a:schemeClr val="lt1"/>
+          </a:fontRef>
+        </p:style>
+        <p:txBody>
+          <a:bodyPr rtlCol="0" anchor="ctr"/>
+          <a:lstStyle/>
+          <a:p>
+            <a:pPr algn="ctr"/>
+            <a:r>
+              <a:rPr lang="en-US" dirty="0">
+                <a:solidFill>
+                  <a:schemeClr val="tx1"/>
+                </a:solidFill>
+              </a:rPr>
+              <a:t>LLM Integration: Response Synthesis and Answering</a:t>
+            </a:r>
+            <a:endParaRPr lang="en-US" i="1" dirty="0">
+              <a:solidFill>
+                <a:schemeClr val="tx1"/>
+              </a:solidFill>
+            </a:endParaRPr>
+          </a:p>
+        </p:txBody>
+      </p:sp>
+      <p:graphicFrame>
+        <p:nvGraphicFramePr>
+          <p:cNvPr id="12" name="Table 11">
+            <a:extLst>
+              <a:ext uri="{FF2B5EF4-FFF2-40B4-BE49-F238E27FC236}">
+                <a16:creationId xmlns:a16="http://schemas.microsoft.com/office/drawing/2014/main" id="{488841C4-B7C7-9477-522B-816A130D4639}"/>
+              </a:ext>
+            </a:extLst>
+          </p:cNvPr>
+          <p:cNvGraphicFramePr>
+            <a:graphicFrameLocks noGrp="1"/>
+          </p:cNvGraphicFramePr>
+          <p:nvPr>
+            <p:extLst>
+              <p:ext uri="{D42A27DB-BD31-4B8C-83A1-F6EECF244321}">
+                <p14:modId xmlns:p14="http://schemas.microsoft.com/office/powerpoint/2010/main" val="1502256614"/>
+              </p:ext>
+            </p:extLst>
+          </p:nvPr>
+        </p:nvGraphicFramePr>
+        <p:xfrm>
+          <a:off x="3122928" y="2099566"/>
+          <a:ext cx="5946141" cy="640080"/>
+        </p:xfrm>
+        <a:graphic>
+          <a:graphicData uri="http://schemas.openxmlformats.org/drawingml/2006/table">
+            <a:tbl>
+              <a:tblPr firstRow="1" bandRow="1">
+                <a:tableStyleId>{5C22544A-7EE6-4342-B048-85BDC9FD1C3A}</a:tableStyleId>
+              </a:tblPr>
+              <a:tblGrid>
+                <a:gridCol w="1982047">
+                  <a:extLst>
+                    <a:ext uri="{9D8B030D-6E8A-4147-A177-3AD203B41FA5}">
+                      <a16:colId xmlns:a16="http://schemas.microsoft.com/office/drawing/2014/main" val="3167127258"/>
+                    </a:ext>
+                  </a:extLst>
+                </a:gridCol>
+                <a:gridCol w="1982047">
+                  <a:extLst>
+                    <a:ext uri="{9D8B030D-6E8A-4147-A177-3AD203B41FA5}">
+                      <a16:colId xmlns:a16="http://schemas.microsoft.com/office/drawing/2014/main" val="1913894467"/>
+                    </a:ext>
+                  </a:extLst>
+                </a:gridCol>
+                <a:gridCol w="1982047">
+                  <a:extLst>
+                    <a:ext uri="{9D8B030D-6E8A-4147-A177-3AD203B41FA5}">
+                      <a16:colId xmlns:a16="http://schemas.microsoft.com/office/drawing/2014/main" val="304178738"/>
+                    </a:ext>
+                  </a:extLst>
+                </a:gridCol>
+              </a:tblGrid>
+              <a:tr h="370840">
+                <a:tc>
+                  <a:txBody>
+                    <a:bodyPr/>
+                    <a:lstStyle/>
+                    <a:p>
+                      <a:pPr algn="ctr"/>
+                      <a:r>
+                        <a:rPr lang="en-US" dirty="0">
+                          <a:solidFill>
+                            <a:sysClr val="windowText" lastClr="000000"/>
+                          </a:solidFill>
+                        </a:rPr>
+                        <a:t>SQL DB:</a:t>
+                      </a:r>
+                    </a:p>
+                    <a:p>
+                      <a:pPr algn="ctr"/>
+                      <a:r>
+                        <a:rPr lang="en-US" b="0" dirty="0">
+                          <a:solidFill>
+                            <a:sysClr val="windowText" lastClr="000000"/>
+                          </a:solidFill>
+                        </a:rPr>
+                        <a:t>Patient Data</a:t>
+                      </a:r>
+                    </a:p>
+                  </a:txBody>
+                  <a:tcPr anchor="ctr">
+                    <a:lnL w="12700" cmpd="sng">
+                      <a:noFill/>
+                    </a:lnL>
+                    <a:lnR w="12700" cmpd="sng">
+                      <a:noFill/>
+                    </a:lnR>
+                    <a:lnT w="12700" cmpd="sng">
+                      <a:noFill/>
+                    </a:lnT>
+                    <a:lnB w="38100" cmpd="sng">
+                      <a:noFill/>
+                    </a:lnB>
+                    <a:lnTlToBr w="12700" cmpd="sng">
+                      <a:noFill/>
+                      <a:prstDash val="solid"/>
+                    </a:lnTlToBr>
+                    <a:lnBlToTr w="12700" cmpd="sng">
+                      <a:noFill/>
+                      <a:prstDash val="solid"/>
+                    </a:lnBlToTr>
+                    <a:noFill/>
+                  </a:tcPr>
+                </a:tc>
+                <a:tc>
+                  <a:txBody>
+                    <a:bodyPr/>
+                    <a:lstStyle/>
+                    <a:p>
+                      <a:pPr algn="ctr"/>
+                      <a:r>
+                        <a:rPr lang="en-US" dirty="0">
+                          <a:solidFill>
+                            <a:sysClr val="windowText" lastClr="000000"/>
+                          </a:solidFill>
+                        </a:rPr>
+                        <a:t>Vector DB:</a:t>
+                      </a:r>
+                    </a:p>
+                    <a:p>
+                      <a:pPr algn="ctr"/>
+                      <a:r>
+                        <a:rPr lang="en-US" b="0" dirty="0">
+                          <a:solidFill>
+                            <a:sysClr val="windowText" lastClr="000000"/>
+                          </a:solidFill>
+                        </a:rPr>
+                        <a:t>JSON Data</a:t>
+                      </a:r>
+                    </a:p>
+                  </a:txBody>
+                  <a:tcPr anchor="ctr">
+                    <a:lnL w="12700" cmpd="sng">
+                      <a:noFill/>
+                    </a:lnL>
+                    <a:lnR w="12700" cmpd="sng">
+                      <a:noFill/>
+                    </a:lnR>
+                    <a:lnT w="12700" cmpd="sng">
+                      <a:noFill/>
+                    </a:lnT>
+                    <a:lnB w="38100" cmpd="sng">
+                      <a:noFill/>
+                    </a:lnB>
+                    <a:lnTlToBr w="12700" cmpd="sng">
+                      <a:noFill/>
+                      <a:prstDash val="solid"/>
+                    </a:lnTlToBr>
+                    <a:lnBlToTr w="12700" cmpd="sng">
+                      <a:noFill/>
+                      <a:prstDash val="solid"/>
+                    </a:lnBlToTr>
+                    <a:noFill/>
+                  </a:tcPr>
+                </a:tc>
+                <a:tc>
+                  <a:txBody>
+                    <a:bodyPr/>
+                    <a:lstStyle/>
+                    <a:p>
+                      <a:pPr algn="ctr"/>
+                      <a:r>
+                        <a:rPr lang="en-US" dirty="0">
+                          <a:solidFill>
+                            <a:sysClr val="windowText" lastClr="000000"/>
+                          </a:solidFill>
+                        </a:rPr>
+                        <a:t>Web Search:</a:t>
+                      </a:r>
+                    </a:p>
+                    <a:p>
+                      <a:pPr algn="ctr"/>
+                      <a:r>
+                        <a:rPr lang="en-US" b="0" dirty="0">
+                          <a:solidFill>
+                            <a:sysClr val="windowText" lastClr="000000"/>
+                          </a:solidFill>
+                        </a:rPr>
+                        <a:t>Latest Data</a:t>
+                      </a:r>
+                    </a:p>
+                  </a:txBody>
+                  <a:tcPr anchor="ctr">
+                    <a:lnL w="12700" cmpd="sng">
+                      <a:noFill/>
+                    </a:lnL>
+                    <a:lnR w="12700" cmpd="sng">
+                      <a:noFill/>
+                    </a:lnR>
+                    <a:lnT w="12700" cmpd="sng">
+                      <a:noFill/>
+                    </a:lnT>
+                    <a:lnB w="38100" cmpd="sng">
+                      <a:noFill/>
+                    </a:lnB>
+                    <a:lnTlToBr w="12700" cmpd="sng">
+                      <a:noFill/>
+                      <a:prstDash val="solid"/>
+                    </a:lnTlToBr>
+                    <a:lnBlToTr w="12700" cmpd="sng">
+                      <a:noFill/>
+                      <a:prstDash val="solid"/>
+                    </a:lnBlToTr>
+                    <a:noFill/>
+                  </a:tcPr>
+                </a:tc>
+                <a:extLst>
+                  <a:ext uri="{0D108BD9-81ED-4DB2-BD59-A6C34878D82A}">
+                    <a16:rowId xmlns:a16="http://schemas.microsoft.com/office/drawing/2014/main" val="2068122310"/>
+                  </a:ext>
+                </a:extLst>
+              </a:tr>
+            </a:tbl>
+          </a:graphicData>
+        </a:graphic>
+      </p:graphicFrame>
+      <p:graphicFrame>
+        <p:nvGraphicFramePr>
+          <p:cNvPr id="13" name="Table 12">
+            <a:extLst>
+              <a:ext uri="{FF2B5EF4-FFF2-40B4-BE49-F238E27FC236}">
+                <a16:creationId xmlns:a16="http://schemas.microsoft.com/office/drawing/2014/main" id="{F7701C1B-CC03-0FF1-A238-E5DE6E423CF0}"/>
+              </a:ext>
+            </a:extLst>
+          </p:cNvPr>
+          <p:cNvGraphicFramePr>
+            <a:graphicFrameLocks noGrp="1"/>
+          </p:cNvGraphicFramePr>
+          <p:nvPr>
+            <p:extLst>
+              <p:ext uri="{D42A27DB-BD31-4B8C-83A1-F6EECF244321}">
+                <p14:modId xmlns:p14="http://schemas.microsoft.com/office/powerpoint/2010/main" val="2692346733"/>
+              </p:ext>
+            </p:extLst>
+          </p:nvPr>
+        </p:nvGraphicFramePr>
+        <p:xfrm>
+          <a:off x="3122927" y="3552465"/>
+          <a:ext cx="5946141" cy="370840"/>
+        </p:xfrm>
+        <a:graphic>
+          <a:graphicData uri="http://schemas.openxmlformats.org/drawingml/2006/table">
+            <a:tbl>
+              <a:tblPr firstRow="1" bandRow="1">
+                <a:tableStyleId>{5C22544A-7EE6-4342-B048-85BDC9FD1C3A}</a:tableStyleId>
+              </a:tblPr>
+              <a:tblGrid>
+                <a:gridCol w="1982047">
+                  <a:extLst>
+                    <a:ext uri="{9D8B030D-6E8A-4147-A177-3AD203B41FA5}">
+                      <a16:colId xmlns:a16="http://schemas.microsoft.com/office/drawing/2014/main" val="3167127258"/>
+                    </a:ext>
+                  </a:extLst>
+                </a:gridCol>
+                <a:gridCol w="1982047">
+                  <a:extLst>
+                    <a:ext uri="{9D8B030D-6E8A-4147-A177-3AD203B41FA5}">
+                      <a16:colId xmlns:a16="http://schemas.microsoft.com/office/drawing/2014/main" val="1913894467"/>
+                    </a:ext>
+                  </a:extLst>
+                </a:gridCol>
+                <a:gridCol w="1982047">
+                  <a:extLst>
+                    <a:ext uri="{9D8B030D-6E8A-4147-A177-3AD203B41FA5}">
+                      <a16:colId xmlns:a16="http://schemas.microsoft.com/office/drawing/2014/main" val="304178738"/>
+                    </a:ext>
+                  </a:extLst>
+                </a:gridCol>
+              </a:tblGrid>
+              <a:tr h="370840">
+                <a:tc>
+                  <a:txBody>
+                    <a:bodyPr/>
+                    <a:lstStyle/>
+                    <a:p>
+                      <a:pPr algn="ctr"/>
+                      <a:r>
+                        <a:rPr lang="en-US" b="0" dirty="0">
+                          <a:solidFill>
+                            <a:sysClr val="windowText" lastClr="000000"/>
+                          </a:solidFill>
+                        </a:rPr>
+                        <a:t>SQL DB Tool</a:t>
+                      </a:r>
+                    </a:p>
+                  </a:txBody>
+                  <a:tcPr anchor="ctr">
+                    <a:lnL w="12700" cmpd="sng">
+                      <a:noFill/>
+                    </a:lnL>
+                    <a:lnR w="12700" cmpd="sng">
+                      <a:noFill/>
+                    </a:lnR>
+                    <a:lnT w="12700" cmpd="sng">
+                      <a:noFill/>
+                    </a:lnT>
+                    <a:lnB w="38100" cmpd="sng">
+                      <a:noFill/>
+                    </a:lnB>
+                    <a:lnTlToBr w="12700" cmpd="sng">
+                      <a:noFill/>
+                      <a:prstDash val="solid"/>
+                    </a:lnTlToBr>
+                    <a:lnBlToTr w="12700" cmpd="sng">
+                      <a:noFill/>
+                      <a:prstDash val="solid"/>
+                    </a:lnBlToTr>
+                    <a:noFill/>
+                  </a:tcPr>
+                </a:tc>
+                <a:tc>
+                  <a:txBody>
+                    <a:bodyPr/>
+                    <a:lstStyle/>
+                    <a:p>
+                      <a:pPr algn="ctr"/>
+                      <a:r>
+                        <a:rPr lang="en-US" b="0" dirty="0">
+                          <a:solidFill>
+                            <a:sysClr val="windowText" lastClr="000000"/>
+                          </a:solidFill>
+                        </a:rPr>
+                        <a:t>Cosmos DB Tool</a:t>
+                      </a:r>
+                    </a:p>
+                  </a:txBody>
+                  <a:tcPr anchor="ctr">
+                    <a:lnL w="12700" cmpd="sng">
+                      <a:noFill/>
+                    </a:lnL>
+                    <a:lnR w="12700" cmpd="sng">
+                      <a:noFill/>
+                    </a:lnR>
+                    <a:lnT w="12700" cmpd="sng">
+                      <a:noFill/>
+                    </a:lnT>
+                    <a:lnB w="38100" cmpd="sng">
+                      <a:noFill/>
+                    </a:lnB>
+                    <a:lnTlToBr w="12700" cmpd="sng">
+                      <a:noFill/>
+                      <a:prstDash val="solid"/>
+                    </a:lnTlToBr>
+                    <a:lnBlToTr w="12700" cmpd="sng">
+                      <a:noFill/>
+                      <a:prstDash val="solid"/>
+                    </a:lnBlToTr>
+                    <a:noFill/>
+                  </a:tcPr>
+                </a:tc>
+                <a:tc>
+                  <a:txBody>
+                    <a:bodyPr/>
+                    <a:lstStyle/>
+                    <a:p>
+                      <a:pPr algn="ctr"/>
+                      <a:r>
+                        <a:rPr lang="en-US" b="0" dirty="0">
+                          <a:solidFill>
+                            <a:sysClr val="windowText" lastClr="000000"/>
+                          </a:solidFill>
+                        </a:rPr>
+                        <a:t>Web Search Tool</a:t>
+                      </a:r>
+                    </a:p>
+                  </a:txBody>
+                  <a:tcPr anchor="ctr">
+                    <a:lnL w="12700" cmpd="sng">
+                      <a:noFill/>
+                    </a:lnL>
+                    <a:lnR w="12700" cmpd="sng">
+                      <a:noFill/>
+                    </a:lnR>
+                    <a:lnT w="12700" cmpd="sng">
+                      <a:noFill/>
+                    </a:lnT>
+                    <a:lnB w="38100" cmpd="sng">
+                      <a:noFill/>
+                    </a:lnB>
+                    <a:lnTlToBr w="12700" cmpd="sng">
+                      <a:noFill/>
+                      <a:prstDash val="solid"/>
+                    </a:lnTlToBr>
+                    <a:lnBlToTr w="12700" cmpd="sng">
+                      <a:noFill/>
+                      <a:prstDash val="solid"/>
+                    </a:lnBlToTr>
+                    <a:noFill/>
+                  </a:tcPr>
+                </a:tc>
+                <a:extLst>
+                  <a:ext uri="{0D108BD9-81ED-4DB2-BD59-A6C34878D82A}">
+                    <a16:rowId xmlns:a16="http://schemas.microsoft.com/office/drawing/2014/main" val="2068122310"/>
+                  </a:ext>
+                </a:extLst>
+              </a:tr>
+            </a:tbl>
+          </a:graphicData>
+        </a:graphic>
+      </p:graphicFrame>
+      <p:graphicFrame>
+        <p:nvGraphicFramePr>
+          <p:cNvPr id="14" name="Table 13">
+            <a:extLst>
+              <a:ext uri="{FF2B5EF4-FFF2-40B4-BE49-F238E27FC236}">
+                <a16:creationId xmlns:a16="http://schemas.microsoft.com/office/drawing/2014/main" id="{A600B530-2DEF-F4FD-A3B5-2DF7667730DC}"/>
+              </a:ext>
+            </a:extLst>
+          </p:cNvPr>
+          <p:cNvGraphicFramePr>
+            <a:graphicFrameLocks noGrp="1"/>
+          </p:cNvGraphicFramePr>
+          <p:nvPr>
+            <p:extLst>
+              <p:ext uri="{D42A27DB-BD31-4B8C-83A1-F6EECF244321}">
+                <p14:modId xmlns:p14="http://schemas.microsoft.com/office/powerpoint/2010/main" val="1853539689"/>
+              </p:ext>
+            </p:extLst>
+          </p:nvPr>
+        </p:nvGraphicFramePr>
+        <p:xfrm>
+          <a:off x="3122926" y="4897114"/>
+          <a:ext cx="5946141" cy="370840"/>
+        </p:xfrm>
+        <a:graphic>
+          <a:graphicData uri="http://schemas.openxmlformats.org/drawingml/2006/table">
+            <a:tbl>
+              <a:tblPr firstRow="1" bandRow="1">
+                <a:tableStyleId>{5C22544A-7EE6-4342-B048-85BDC9FD1C3A}</a:tableStyleId>
+              </a:tblPr>
+              <a:tblGrid>
+                <a:gridCol w="1982047">
+                  <a:extLst>
+                    <a:ext uri="{9D8B030D-6E8A-4147-A177-3AD203B41FA5}">
+                      <a16:colId xmlns:a16="http://schemas.microsoft.com/office/drawing/2014/main" val="3167127258"/>
+                    </a:ext>
+                  </a:extLst>
+                </a:gridCol>
+                <a:gridCol w="1982047">
+                  <a:extLst>
+                    <a:ext uri="{9D8B030D-6E8A-4147-A177-3AD203B41FA5}">
+                      <a16:colId xmlns:a16="http://schemas.microsoft.com/office/drawing/2014/main" val="1913894467"/>
+                    </a:ext>
+                  </a:extLst>
+                </a:gridCol>
+                <a:gridCol w="1982047">
+                  <a:extLst>
+                    <a:ext uri="{9D8B030D-6E8A-4147-A177-3AD203B41FA5}">
+                      <a16:colId xmlns:a16="http://schemas.microsoft.com/office/drawing/2014/main" val="304178738"/>
+                    </a:ext>
+                  </a:extLst>
+                </a:gridCol>
+              </a:tblGrid>
+              <a:tr h="370840">
+                <a:tc>
+                  <a:txBody>
+                    <a:bodyPr/>
+                    <a:lstStyle/>
+                    <a:p>
+                      <a:pPr algn="ctr"/>
+                      <a:r>
+                        <a:rPr lang="en-US" b="0" dirty="0">
+                          <a:solidFill>
+                            <a:sysClr val="windowText" lastClr="000000"/>
+                          </a:solidFill>
+                        </a:rPr>
+                        <a:t>SQL DB results</a:t>
+                      </a:r>
+                    </a:p>
+                  </a:txBody>
+                  <a:tcPr anchor="ctr">
+                    <a:lnL w="12700" cmpd="sng">
+                      <a:noFill/>
+                    </a:lnL>
+                    <a:lnR w="12700" cmpd="sng">
+                      <a:noFill/>
+                    </a:lnR>
+                    <a:lnT w="12700" cmpd="sng">
+                      <a:noFill/>
+                    </a:lnT>
+                    <a:lnB w="38100" cmpd="sng">
+                      <a:noFill/>
+                    </a:lnB>
+                    <a:lnTlToBr w="12700" cmpd="sng">
+                      <a:noFill/>
+                      <a:prstDash val="solid"/>
+                    </a:lnTlToBr>
+                    <a:lnBlToTr w="12700" cmpd="sng">
+                      <a:noFill/>
+                      <a:prstDash val="solid"/>
+                    </a:lnBlToTr>
+                    <a:noFill/>
+                  </a:tcPr>
+                </a:tc>
+                <a:tc>
+                  <a:txBody>
+                    <a:bodyPr/>
+                    <a:lstStyle/>
+                    <a:p>
+                      <a:pPr algn="ctr"/>
+                      <a:r>
+                        <a:rPr lang="en-US" b="0" dirty="0">
+                          <a:solidFill>
+                            <a:sysClr val="windowText" lastClr="000000"/>
+                          </a:solidFill>
+                        </a:rPr>
+                        <a:t>Vector search results</a:t>
+                      </a:r>
+                    </a:p>
+                  </a:txBody>
+                  <a:tcPr anchor="ctr">
+                    <a:lnL w="12700" cmpd="sng">
+                      <a:noFill/>
+                    </a:lnL>
+                    <a:lnR w="12700" cmpd="sng">
+                      <a:noFill/>
+                    </a:lnR>
+                    <a:lnT w="12700" cmpd="sng">
+                      <a:noFill/>
+                    </a:lnT>
+                    <a:lnB w="38100" cmpd="sng">
+                      <a:noFill/>
+                    </a:lnB>
+                    <a:lnTlToBr w="12700" cmpd="sng">
+                      <a:noFill/>
+                      <a:prstDash val="solid"/>
+                    </a:lnTlToBr>
+                    <a:lnBlToTr w="12700" cmpd="sng">
+                      <a:noFill/>
+                      <a:prstDash val="solid"/>
+                    </a:lnBlToTr>
+                    <a:noFill/>
+                  </a:tcPr>
+                </a:tc>
+                <a:tc>
+                  <a:txBody>
+                    <a:bodyPr/>
+                    <a:lstStyle/>
+                    <a:p>
+                      <a:pPr algn="ctr"/>
+                      <a:r>
+                        <a:rPr lang="en-US" b="0" dirty="0">
+                          <a:solidFill>
+                            <a:sysClr val="windowText" lastClr="000000"/>
+                          </a:solidFill>
+                        </a:rPr>
+                        <a:t>Web search results</a:t>
+                      </a:r>
+                    </a:p>
+                  </a:txBody>
+                  <a:tcPr anchor="ctr">
+                    <a:lnL w="12700" cmpd="sng">
+                      <a:noFill/>
+                    </a:lnL>
+                    <a:lnR w="12700" cmpd="sng">
+                      <a:noFill/>
+                    </a:lnR>
+                    <a:lnT w="12700" cmpd="sng">
+                      <a:noFill/>
+                    </a:lnT>
+                    <a:lnB w="38100" cmpd="sng">
+                      <a:noFill/>
+                    </a:lnB>
+                    <a:lnTlToBr w="12700" cmpd="sng">
+                      <a:noFill/>
+                      <a:prstDash val="solid"/>
+                    </a:lnTlToBr>
+                    <a:lnBlToTr w="12700" cmpd="sng">
+                      <a:noFill/>
+                      <a:prstDash val="solid"/>
+                    </a:lnBlToTr>
+                    <a:noFill/>
+                  </a:tcPr>
+                </a:tc>
+                <a:extLst>
+                  <a:ext uri="{0D108BD9-81ED-4DB2-BD59-A6C34878D82A}">
+                    <a16:rowId xmlns:a16="http://schemas.microsoft.com/office/drawing/2014/main" val="2068122310"/>
+                  </a:ext>
+                </a:extLst>
+              </a:tr>
+            </a:tbl>
+          </a:graphicData>
+        </a:graphic>
+      </p:graphicFrame>
     </p:spTree>
     <p:extLst>
       <p:ext uri="{BB962C8B-B14F-4D97-AF65-F5344CB8AC3E}">
-        <p14:creationId xmlns:p14="http://schemas.microsoft.com/office/powerpoint/2010/main" val="2145715379"/>
+        <p14:creationId xmlns:p14="http://schemas.microsoft.com/office/powerpoint/2010/main" val="3488000674"/>
       </p:ext>
     </p:extLst>
   </p:cSld>
@@ -5016,6 +5555,1755 @@
       </p:grpSpPr>
       <p:sp>
         <p:nvSpPr>
+          <p:cNvPr id="2" name="Rectangle: Rounded Corners 1">
+            <a:extLst>
+              <a:ext uri="{FF2B5EF4-FFF2-40B4-BE49-F238E27FC236}">
+                <a16:creationId xmlns:a16="http://schemas.microsoft.com/office/drawing/2014/main" id="{2373B790-295F-D9C9-ECAF-274F835713B8}"/>
+              </a:ext>
+            </a:extLst>
+          </p:cNvPr>
+          <p:cNvSpPr/>
+          <p:nvPr/>
+        </p:nvSpPr>
+        <p:spPr>
+          <a:xfrm>
+            <a:off x="1683600" y="1280957"/>
+            <a:ext cx="8633879" cy="3298663"/>
+          </a:xfrm>
+          <a:prstGeom prst="roundRect">
+            <a:avLst>
+              <a:gd name="adj" fmla="val 5234"/>
+            </a:avLst>
+          </a:prstGeom>
+          <a:solidFill>
+            <a:schemeClr val="bg1"/>
+          </a:solidFill>
+          <a:ln>
+            <a:solidFill>
+              <a:schemeClr val="tx1"/>
+            </a:solidFill>
+          </a:ln>
+        </p:spPr>
+        <p:style>
+          <a:lnRef idx="2">
+            <a:schemeClr val="accent1">
+              <a:shade val="15000"/>
+            </a:schemeClr>
+          </a:lnRef>
+          <a:fillRef idx="1">
+            <a:schemeClr val="accent1"/>
+          </a:fillRef>
+          <a:effectRef idx="0">
+            <a:schemeClr val="accent1"/>
+          </a:effectRef>
+          <a:fontRef idx="minor">
+            <a:schemeClr val="lt1"/>
+          </a:fontRef>
+        </p:style>
+        <p:txBody>
+          <a:bodyPr rtlCol="0" anchor="ctr"/>
+          <a:lstStyle/>
+          <a:p>
+            <a:pPr algn="ctr"/>
+            <a:endParaRPr lang="en-US" dirty="0">
+              <a:solidFill>
+                <a:schemeClr val="tx1"/>
+              </a:solidFill>
+            </a:endParaRPr>
+          </a:p>
+        </p:txBody>
+      </p:sp>
+      <p:sp>
+        <p:nvSpPr>
+          <p:cNvPr id="3" name="Rectangle: Rounded Corners 2">
+            <a:extLst>
+              <a:ext uri="{FF2B5EF4-FFF2-40B4-BE49-F238E27FC236}">
+                <a16:creationId xmlns:a16="http://schemas.microsoft.com/office/drawing/2014/main" id="{AF807674-F982-3E42-18FF-10D7E9818E10}"/>
+              </a:ext>
+            </a:extLst>
+          </p:cNvPr>
+          <p:cNvSpPr/>
+          <p:nvPr/>
+        </p:nvSpPr>
+        <p:spPr>
+          <a:xfrm>
+            <a:off x="3993377" y="4394954"/>
+            <a:ext cx="4014323" cy="369332"/>
+          </a:xfrm>
+          <a:prstGeom prst="roundRect">
+            <a:avLst/>
+          </a:prstGeom>
+          <a:solidFill>
+            <a:srgbClr val="B2D4EB"/>
+          </a:solidFill>
+          <a:ln>
+            <a:solidFill>
+              <a:schemeClr val="tx1"/>
+            </a:solidFill>
+          </a:ln>
+        </p:spPr>
+        <p:style>
+          <a:lnRef idx="2">
+            <a:schemeClr val="accent1">
+              <a:shade val="15000"/>
+            </a:schemeClr>
+          </a:lnRef>
+          <a:fillRef idx="1">
+            <a:schemeClr val="accent1"/>
+          </a:fillRef>
+          <a:effectRef idx="0">
+            <a:schemeClr val="accent1"/>
+          </a:effectRef>
+          <a:fontRef idx="minor">
+            <a:schemeClr val="lt1"/>
+          </a:fontRef>
+        </p:style>
+        <p:txBody>
+          <a:bodyPr rtlCol="0" anchor="ctr"/>
+          <a:lstStyle/>
+          <a:p>
+            <a:pPr algn="ctr"/>
+            <a:r>
+              <a:rPr lang="en-US" dirty="0">
+                <a:solidFill>
+                  <a:schemeClr val="tx1"/>
+                </a:solidFill>
+              </a:rPr>
+              <a:t>Security, Compliance, and Governance</a:t>
+            </a:r>
+            <a:endParaRPr lang="en-US" i="1" dirty="0">
+              <a:solidFill>
+                <a:schemeClr val="tx1"/>
+              </a:solidFill>
+            </a:endParaRPr>
+          </a:p>
+        </p:txBody>
+      </p:sp>
+      <p:sp>
+        <p:nvSpPr>
+          <p:cNvPr id="4" name="Rectangle: Rounded Corners 3">
+            <a:extLst>
+              <a:ext uri="{FF2B5EF4-FFF2-40B4-BE49-F238E27FC236}">
+                <a16:creationId xmlns:a16="http://schemas.microsoft.com/office/drawing/2014/main" id="{6504FE7B-F946-B4E5-5540-DCBF24C5EE02}"/>
+              </a:ext>
+            </a:extLst>
+          </p:cNvPr>
+          <p:cNvSpPr/>
+          <p:nvPr/>
+        </p:nvSpPr>
+        <p:spPr>
+          <a:xfrm>
+            <a:off x="2120712" y="1629580"/>
+            <a:ext cx="1097280" cy="1097280"/>
+          </a:xfrm>
+          <a:prstGeom prst="roundRect">
+            <a:avLst/>
+          </a:prstGeom>
+          <a:solidFill>
+            <a:srgbClr val="E5F1F8"/>
+          </a:solidFill>
+          <a:ln>
+            <a:solidFill>
+              <a:schemeClr val="tx1"/>
+            </a:solidFill>
+          </a:ln>
+        </p:spPr>
+        <p:style>
+          <a:lnRef idx="2">
+            <a:schemeClr val="accent1">
+              <a:shade val="15000"/>
+            </a:schemeClr>
+          </a:lnRef>
+          <a:fillRef idx="1">
+            <a:schemeClr val="accent1"/>
+          </a:fillRef>
+          <a:effectRef idx="0">
+            <a:schemeClr val="accent1"/>
+          </a:effectRef>
+          <a:fontRef idx="minor">
+            <a:schemeClr val="lt1"/>
+          </a:fontRef>
+        </p:style>
+        <p:txBody>
+          <a:bodyPr rtlCol="0" anchor="b"/>
+          <a:lstStyle/>
+          <a:p>
+            <a:pPr algn="ctr"/>
+            <a:r>
+              <a:rPr lang="en-US" dirty="0">
+                <a:solidFill>
+                  <a:schemeClr val="tx1"/>
+                </a:solidFill>
+              </a:rPr>
+              <a:t>Models</a:t>
+            </a:r>
+          </a:p>
+        </p:txBody>
+      </p:sp>
+      <p:sp>
+        <p:nvSpPr>
+          <p:cNvPr id="5" name="Rectangle: Rounded Corners 4">
+            <a:extLst>
+              <a:ext uri="{FF2B5EF4-FFF2-40B4-BE49-F238E27FC236}">
+                <a16:creationId xmlns:a16="http://schemas.microsoft.com/office/drawing/2014/main" id="{CCD72E2D-BA5E-4BD0-251B-D709E59BA6AA}"/>
+              </a:ext>
+            </a:extLst>
+          </p:cNvPr>
+          <p:cNvSpPr/>
+          <p:nvPr/>
+        </p:nvSpPr>
+        <p:spPr>
+          <a:xfrm>
+            <a:off x="5547360" y="1629580"/>
+            <a:ext cx="1097280" cy="1097280"/>
+          </a:xfrm>
+          <a:prstGeom prst="roundRect">
+            <a:avLst/>
+          </a:prstGeom>
+          <a:solidFill>
+            <a:srgbClr val="E5F1F8"/>
+          </a:solidFill>
+          <a:ln>
+            <a:solidFill>
+              <a:schemeClr val="tx1"/>
+            </a:solidFill>
+          </a:ln>
+        </p:spPr>
+        <p:style>
+          <a:lnRef idx="2">
+            <a:schemeClr val="accent1">
+              <a:shade val="15000"/>
+            </a:schemeClr>
+          </a:lnRef>
+          <a:fillRef idx="1">
+            <a:schemeClr val="accent1"/>
+          </a:fillRef>
+          <a:effectRef idx="0">
+            <a:schemeClr val="accent1"/>
+          </a:effectRef>
+          <a:fontRef idx="minor">
+            <a:schemeClr val="lt1"/>
+          </a:fontRef>
+        </p:style>
+        <p:txBody>
+          <a:bodyPr rtlCol="0" anchor="b"/>
+          <a:lstStyle/>
+          <a:p>
+            <a:pPr algn="ctr"/>
+            <a:r>
+              <a:rPr lang="en-US" dirty="0">
+                <a:solidFill>
+                  <a:schemeClr val="tx1"/>
+                </a:solidFill>
+              </a:rPr>
+              <a:t>IQ</a:t>
+            </a:r>
+          </a:p>
+        </p:txBody>
+      </p:sp>
+      <p:sp>
+        <p:nvSpPr>
+          <p:cNvPr id="6" name="Rectangle: Rounded Corners 5">
+            <a:extLst>
+              <a:ext uri="{FF2B5EF4-FFF2-40B4-BE49-F238E27FC236}">
+                <a16:creationId xmlns:a16="http://schemas.microsoft.com/office/drawing/2014/main" id="{8A00E6D5-7A21-352C-E165-8534FCB5922A}"/>
+              </a:ext>
+            </a:extLst>
+          </p:cNvPr>
+          <p:cNvSpPr/>
+          <p:nvPr/>
+        </p:nvSpPr>
+        <p:spPr>
+          <a:xfrm>
+            <a:off x="3834036" y="1629580"/>
+            <a:ext cx="1097280" cy="1097280"/>
+          </a:xfrm>
+          <a:prstGeom prst="roundRect">
+            <a:avLst/>
+          </a:prstGeom>
+          <a:solidFill>
+            <a:srgbClr val="E5F1F8"/>
+          </a:solidFill>
+          <a:ln>
+            <a:solidFill>
+              <a:schemeClr val="tx1"/>
+            </a:solidFill>
+          </a:ln>
+        </p:spPr>
+        <p:style>
+          <a:lnRef idx="2">
+            <a:schemeClr val="accent1">
+              <a:shade val="15000"/>
+            </a:schemeClr>
+          </a:lnRef>
+          <a:fillRef idx="1">
+            <a:schemeClr val="accent1"/>
+          </a:fillRef>
+          <a:effectRef idx="0">
+            <a:schemeClr val="accent1"/>
+          </a:effectRef>
+          <a:fontRef idx="minor">
+            <a:schemeClr val="lt1"/>
+          </a:fontRef>
+        </p:style>
+        <p:txBody>
+          <a:bodyPr rtlCol="0" anchor="b"/>
+          <a:lstStyle/>
+          <a:p>
+            <a:pPr algn="ctr"/>
+            <a:r>
+              <a:rPr lang="en-US" dirty="0">
+                <a:solidFill>
+                  <a:schemeClr val="tx1"/>
+                </a:solidFill>
+              </a:rPr>
+              <a:t>Agents</a:t>
+            </a:r>
+          </a:p>
+        </p:txBody>
+      </p:sp>
+      <p:sp>
+        <p:nvSpPr>
+          <p:cNvPr id="7" name="Rectangle: Rounded Corners 6">
+            <a:extLst>
+              <a:ext uri="{FF2B5EF4-FFF2-40B4-BE49-F238E27FC236}">
+                <a16:creationId xmlns:a16="http://schemas.microsoft.com/office/drawing/2014/main" id="{FEFF2ADF-7ABC-2B4F-15DA-147A653CA05E}"/>
+              </a:ext>
+            </a:extLst>
+          </p:cNvPr>
+          <p:cNvSpPr/>
+          <p:nvPr/>
+        </p:nvSpPr>
+        <p:spPr>
+          <a:xfrm>
+            <a:off x="7260684" y="1629580"/>
+            <a:ext cx="1097280" cy="1097280"/>
+          </a:xfrm>
+          <a:prstGeom prst="roundRect">
+            <a:avLst/>
+          </a:prstGeom>
+          <a:solidFill>
+            <a:srgbClr val="E5F1F8"/>
+          </a:solidFill>
+          <a:ln>
+            <a:solidFill>
+              <a:schemeClr val="tx1"/>
+            </a:solidFill>
+          </a:ln>
+        </p:spPr>
+        <p:style>
+          <a:lnRef idx="2">
+            <a:schemeClr val="accent1">
+              <a:shade val="15000"/>
+            </a:schemeClr>
+          </a:lnRef>
+          <a:fillRef idx="1">
+            <a:schemeClr val="accent1"/>
+          </a:fillRef>
+          <a:effectRef idx="0">
+            <a:schemeClr val="accent1"/>
+          </a:effectRef>
+          <a:fontRef idx="minor">
+            <a:schemeClr val="lt1"/>
+          </a:fontRef>
+        </p:style>
+        <p:txBody>
+          <a:bodyPr rtlCol="0" anchor="b"/>
+          <a:lstStyle/>
+          <a:p>
+            <a:pPr algn="ctr"/>
+            <a:r>
+              <a:rPr lang="en-US" dirty="0">
+                <a:solidFill>
+                  <a:schemeClr val="tx1"/>
+                </a:solidFill>
+              </a:rPr>
+              <a:t>Tools</a:t>
+            </a:r>
+          </a:p>
+        </p:txBody>
+      </p:sp>
+      <p:sp>
+        <p:nvSpPr>
+          <p:cNvPr id="8" name="Rectangle: Rounded Corners 7">
+            <a:extLst>
+              <a:ext uri="{FF2B5EF4-FFF2-40B4-BE49-F238E27FC236}">
+                <a16:creationId xmlns:a16="http://schemas.microsoft.com/office/drawing/2014/main" id="{B911A12B-43CF-B03D-9C15-EC0C073F267F}"/>
+              </a:ext>
+            </a:extLst>
+          </p:cNvPr>
+          <p:cNvSpPr/>
+          <p:nvPr/>
+        </p:nvSpPr>
+        <p:spPr>
+          <a:xfrm>
+            <a:off x="8974008" y="1629580"/>
+            <a:ext cx="1097280" cy="1097280"/>
+          </a:xfrm>
+          <a:prstGeom prst="roundRect">
+            <a:avLst/>
+          </a:prstGeom>
+          <a:solidFill>
+            <a:srgbClr val="E5F1F8"/>
+          </a:solidFill>
+          <a:ln>
+            <a:solidFill>
+              <a:schemeClr val="tx1"/>
+            </a:solidFill>
+          </a:ln>
+        </p:spPr>
+        <p:style>
+          <a:lnRef idx="2">
+            <a:schemeClr val="accent1">
+              <a:shade val="15000"/>
+            </a:schemeClr>
+          </a:lnRef>
+          <a:fillRef idx="1">
+            <a:schemeClr val="accent1"/>
+          </a:fillRef>
+          <a:effectRef idx="0">
+            <a:schemeClr val="accent1"/>
+          </a:effectRef>
+          <a:fontRef idx="minor">
+            <a:schemeClr val="lt1"/>
+          </a:fontRef>
+        </p:style>
+        <p:txBody>
+          <a:bodyPr rtlCol="0" anchor="b"/>
+          <a:lstStyle/>
+          <a:p>
+            <a:pPr algn="ctr"/>
+            <a:r>
+              <a:rPr lang="en-US" dirty="0">
+                <a:solidFill>
+                  <a:schemeClr val="tx1"/>
+                </a:solidFill>
+              </a:rPr>
+              <a:t>Local</a:t>
+            </a:r>
+          </a:p>
+        </p:txBody>
+      </p:sp>
+      <p:sp>
+        <p:nvSpPr>
+          <p:cNvPr id="9" name="Rectangle: Rounded Corners 8">
+            <a:extLst>
+              <a:ext uri="{FF2B5EF4-FFF2-40B4-BE49-F238E27FC236}">
+                <a16:creationId xmlns:a16="http://schemas.microsoft.com/office/drawing/2014/main" id="{29E82D6B-67A5-FB5E-86C8-E494906EBA72}"/>
+              </a:ext>
+            </a:extLst>
+          </p:cNvPr>
+          <p:cNvSpPr/>
+          <p:nvPr/>
+        </p:nvSpPr>
+        <p:spPr>
+          <a:xfrm>
+            <a:off x="2120712" y="3075483"/>
+            <a:ext cx="7950576" cy="521732"/>
+          </a:xfrm>
+          <a:prstGeom prst="roundRect">
+            <a:avLst/>
+          </a:prstGeom>
+          <a:solidFill>
+            <a:srgbClr val="E5F1F8"/>
+          </a:solidFill>
+          <a:ln>
+            <a:solidFill>
+              <a:schemeClr val="tx1"/>
+            </a:solidFill>
+          </a:ln>
+        </p:spPr>
+        <p:style>
+          <a:lnRef idx="2">
+            <a:schemeClr val="accent1">
+              <a:shade val="15000"/>
+            </a:schemeClr>
+          </a:lnRef>
+          <a:fillRef idx="1">
+            <a:schemeClr val="accent1"/>
+          </a:fillRef>
+          <a:effectRef idx="0">
+            <a:schemeClr val="accent1"/>
+          </a:effectRef>
+          <a:fontRef idx="minor">
+            <a:schemeClr val="lt1"/>
+          </a:fontRef>
+        </p:style>
+        <p:txBody>
+          <a:bodyPr rtlCol="0" anchor="ctr"/>
+          <a:lstStyle/>
+          <a:p>
+            <a:pPr algn="ctr"/>
+            <a:r>
+              <a:rPr lang="en-US" dirty="0">
+                <a:solidFill>
+                  <a:schemeClr val="tx1"/>
+                </a:solidFill>
+              </a:rPr>
+              <a:t>Control Plane</a:t>
+            </a:r>
+          </a:p>
+        </p:txBody>
+      </p:sp>
+      <p:sp>
+        <p:nvSpPr>
+          <p:cNvPr id="10" name="Rectangle: Rounded Corners 9">
+            <a:extLst>
+              <a:ext uri="{FF2B5EF4-FFF2-40B4-BE49-F238E27FC236}">
+                <a16:creationId xmlns:a16="http://schemas.microsoft.com/office/drawing/2014/main" id="{B8A0002D-68DE-F2E3-7AE8-155E2AE2F385}"/>
+              </a:ext>
+            </a:extLst>
+          </p:cNvPr>
+          <p:cNvSpPr/>
+          <p:nvPr/>
+        </p:nvSpPr>
+        <p:spPr>
+          <a:xfrm>
+            <a:off x="2120712" y="3903751"/>
+            <a:ext cx="1097280" cy="369332"/>
+          </a:xfrm>
+          <a:prstGeom prst="roundRect">
+            <a:avLst>
+              <a:gd name="adj" fmla="val 50000"/>
+            </a:avLst>
+          </a:prstGeom>
+          <a:solidFill>
+            <a:srgbClr val="B2D4EB"/>
+          </a:solidFill>
+          <a:ln>
+            <a:solidFill>
+              <a:schemeClr val="tx1"/>
+            </a:solidFill>
+          </a:ln>
+        </p:spPr>
+        <p:style>
+          <a:lnRef idx="2">
+            <a:schemeClr val="accent1">
+              <a:shade val="15000"/>
+            </a:schemeClr>
+          </a:lnRef>
+          <a:fillRef idx="1">
+            <a:schemeClr val="accent1"/>
+          </a:fillRef>
+          <a:effectRef idx="0">
+            <a:schemeClr val="accent1"/>
+          </a:effectRef>
+          <a:fontRef idx="minor">
+            <a:schemeClr val="lt1"/>
+          </a:fontRef>
+        </p:style>
+        <p:txBody>
+          <a:bodyPr rtlCol="0" anchor="ctr"/>
+          <a:lstStyle/>
+          <a:p>
+            <a:pPr algn="ctr"/>
+            <a:r>
+              <a:rPr lang="en-US" dirty="0">
+                <a:solidFill>
+                  <a:schemeClr val="tx1"/>
+                </a:solidFill>
+              </a:rPr>
+              <a:t>Cloud</a:t>
+            </a:r>
+            <a:endParaRPr lang="en-US" i="1" dirty="0">
+              <a:solidFill>
+                <a:schemeClr val="tx1"/>
+              </a:solidFill>
+            </a:endParaRPr>
+          </a:p>
+        </p:txBody>
+      </p:sp>
+      <p:sp>
+        <p:nvSpPr>
+          <p:cNvPr id="11" name="Rectangle: Rounded Corners 10">
+            <a:extLst>
+              <a:ext uri="{FF2B5EF4-FFF2-40B4-BE49-F238E27FC236}">
+                <a16:creationId xmlns:a16="http://schemas.microsoft.com/office/drawing/2014/main" id="{275A5F02-D45E-7075-0A8E-DE47614A9350}"/>
+              </a:ext>
+            </a:extLst>
+          </p:cNvPr>
+          <p:cNvSpPr/>
+          <p:nvPr/>
+        </p:nvSpPr>
+        <p:spPr>
+          <a:xfrm>
+            <a:off x="8974008" y="3900228"/>
+            <a:ext cx="1097280" cy="369332"/>
+          </a:xfrm>
+          <a:prstGeom prst="roundRect">
+            <a:avLst>
+              <a:gd name="adj" fmla="val 50000"/>
+            </a:avLst>
+          </a:prstGeom>
+          <a:solidFill>
+            <a:srgbClr val="B2D4EB"/>
+          </a:solidFill>
+          <a:ln>
+            <a:solidFill>
+              <a:schemeClr val="tx1"/>
+            </a:solidFill>
+          </a:ln>
+        </p:spPr>
+        <p:style>
+          <a:lnRef idx="2">
+            <a:schemeClr val="accent1">
+              <a:shade val="15000"/>
+            </a:schemeClr>
+          </a:lnRef>
+          <a:fillRef idx="1">
+            <a:schemeClr val="accent1"/>
+          </a:fillRef>
+          <a:effectRef idx="0">
+            <a:schemeClr val="accent1"/>
+          </a:effectRef>
+          <a:fontRef idx="minor">
+            <a:schemeClr val="lt1"/>
+          </a:fontRef>
+        </p:style>
+        <p:txBody>
+          <a:bodyPr rtlCol="0" anchor="ctr"/>
+          <a:lstStyle/>
+          <a:p>
+            <a:pPr algn="ctr"/>
+            <a:r>
+              <a:rPr lang="en-US" dirty="0">
+                <a:solidFill>
+                  <a:schemeClr val="tx1"/>
+                </a:solidFill>
+              </a:rPr>
+              <a:t>Edge</a:t>
+            </a:r>
+            <a:endParaRPr lang="en-US" i="1" dirty="0">
+              <a:solidFill>
+                <a:schemeClr val="tx1"/>
+              </a:solidFill>
+            </a:endParaRPr>
+          </a:p>
+        </p:txBody>
+      </p:sp>
+      <p:cxnSp>
+        <p:nvCxnSpPr>
+          <p:cNvPr id="12" name="Straight Arrow Connector 11">
+            <a:extLst>
+              <a:ext uri="{FF2B5EF4-FFF2-40B4-BE49-F238E27FC236}">
+                <a16:creationId xmlns:a16="http://schemas.microsoft.com/office/drawing/2014/main" id="{059E589C-158C-8464-335B-8E038EB59CAF}"/>
+              </a:ext>
+            </a:extLst>
+          </p:cNvPr>
+          <p:cNvCxnSpPr>
+            <a:cxnSpLocks/>
+            <a:stCxn id="10" idx="3"/>
+            <a:endCxn id="11" idx="1"/>
+          </p:cNvCxnSpPr>
+          <p:nvPr/>
+        </p:nvCxnSpPr>
+        <p:spPr>
+          <a:xfrm flipV="1">
+            <a:off x="3217992" y="4084894"/>
+            <a:ext cx="5756016" cy="3523"/>
+          </a:xfrm>
+          <a:prstGeom prst="straightConnector1">
+            <a:avLst/>
+          </a:prstGeom>
+          <a:ln>
+            <a:solidFill>
+              <a:schemeClr val="tx1"/>
+            </a:solidFill>
+            <a:prstDash val="solid"/>
+            <a:headEnd type="triangle" w="lg" len="lg"/>
+            <a:tailEnd type="triangle" w="lg" len="lg"/>
+          </a:ln>
+        </p:spPr>
+        <p:style>
+          <a:lnRef idx="2">
+            <a:schemeClr val="accent1"/>
+          </a:lnRef>
+          <a:fillRef idx="0">
+            <a:schemeClr val="accent1"/>
+          </a:fillRef>
+          <a:effectRef idx="1">
+            <a:schemeClr val="accent1"/>
+          </a:effectRef>
+          <a:fontRef idx="minor">
+            <a:schemeClr val="tx1"/>
+          </a:fontRef>
+        </p:style>
+      </p:cxnSp>
+      <p:pic>
+        <p:nvPicPr>
+          <p:cNvPr id="1030" name="Picture 6">
+            <a:extLst>
+              <a:ext uri="{FF2B5EF4-FFF2-40B4-BE49-F238E27FC236}">
+                <a16:creationId xmlns:a16="http://schemas.microsoft.com/office/drawing/2014/main" id="{8D6EF364-A0CD-1E0B-E3D9-D7610B0BA01B}"/>
+              </a:ext>
+            </a:extLst>
+          </p:cNvPr>
+          <p:cNvPicPr>
+            <a:picLocks noChangeAspect="1" noChangeArrowheads="1"/>
+          </p:cNvPicPr>
+          <p:nvPr/>
+        </p:nvPicPr>
+        <p:blipFill>
+          <a:blip r:embed="rId2">
+            <a:extLst>
+              <a:ext uri="{28A0092B-C50C-407E-A947-70E740481C1C}">
+                <a14:useLocalDpi xmlns:a14="http://schemas.microsoft.com/office/drawing/2010/main" val="0"/>
+              </a:ext>
+            </a:extLst>
+          </a:blip>
+          <a:srcRect/>
+          <a:stretch>
+            <a:fillRect/>
+          </a:stretch>
+        </p:blipFill>
+        <p:spPr bwMode="auto">
+          <a:xfrm>
+            <a:off x="2326452" y="1698160"/>
+            <a:ext cx="685800" cy="685800"/>
+          </a:xfrm>
+          <a:prstGeom prst="rect">
+            <a:avLst/>
+          </a:prstGeom>
+          <a:noFill/>
+          <a:extLst>
+            <a:ext uri="{909E8E84-426E-40DD-AFC4-6F175D3DCCD1}">
+              <a14:hiddenFill xmlns:a14="http://schemas.microsoft.com/office/drawing/2010/main">
+                <a:solidFill>
+                  <a:srgbClr val="FFFFFF"/>
+                </a:solidFill>
+              </a14:hiddenFill>
+            </a:ext>
+          </a:extLst>
+        </p:spPr>
+      </p:pic>
+      <p:pic>
+        <p:nvPicPr>
+          <p:cNvPr id="1034" name="Picture 10">
+            <a:extLst>
+              <a:ext uri="{FF2B5EF4-FFF2-40B4-BE49-F238E27FC236}">
+                <a16:creationId xmlns:a16="http://schemas.microsoft.com/office/drawing/2014/main" id="{584812A5-BC6A-1A0C-EC5F-293C5EE9341F}"/>
+              </a:ext>
+            </a:extLst>
+          </p:cNvPr>
+          <p:cNvPicPr>
+            <a:picLocks noChangeAspect="1" noChangeArrowheads="1"/>
+          </p:cNvPicPr>
+          <p:nvPr/>
+        </p:nvPicPr>
+        <p:blipFill>
+          <a:blip r:embed="rId3">
+            <a:extLst>
+              <a:ext uri="{28A0092B-C50C-407E-A947-70E740481C1C}">
+                <a14:useLocalDpi xmlns:a14="http://schemas.microsoft.com/office/drawing/2010/main" val="0"/>
+              </a:ext>
+            </a:extLst>
+          </a:blip>
+          <a:srcRect/>
+          <a:stretch>
+            <a:fillRect/>
+          </a:stretch>
+        </p:blipFill>
+        <p:spPr bwMode="auto">
+          <a:xfrm>
+            <a:off x="5753100" y="1698160"/>
+            <a:ext cx="685800" cy="685800"/>
+          </a:xfrm>
+          <a:prstGeom prst="rect">
+            <a:avLst/>
+          </a:prstGeom>
+          <a:noFill/>
+          <a:extLst>
+            <a:ext uri="{909E8E84-426E-40DD-AFC4-6F175D3DCCD1}">
+              <a14:hiddenFill xmlns:a14="http://schemas.microsoft.com/office/drawing/2010/main">
+                <a:solidFill>
+                  <a:srgbClr val="FFFFFF"/>
+                </a:solidFill>
+              </a14:hiddenFill>
+            </a:ext>
+          </a:extLst>
+        </p:spPr>
+      </p:pic>
+      <p:sp>
+        <p:nvSpPr>
+          <p:cNvPr id="16" name="TextBox 15">
+            <a:extLst>
+              <a:ext uri="{FF2B5EF4-FFF2-40B4-BE49-F238E27FC236}">
+                <a16:creationId xmlns:a16="http://schemas.microsoft.com/office/drawing/2014/main" id="{75C2BE62-4319-90A2-F77A-43FBCCB45A92}"/>
+              </a:ext>
+            </a:extLst>
+          </p:cNvPr>
+          <p:cNvSpPr txBox="1"/>
+          <p:nvPr/>
+        </p:nvSpPr>
+        <p:spPr>
+          <a:xfrm>
+            <a:off x="169992" y="6374146"/>
+            <a:ext cx="6096000" cy="369332"/>
+          </a:xfrm>
+          <a:prstGeom prst="rect">
+            <a:avLst/>
+          </a:prstGeom>
+          <a:noFill/>
+        </p:spPr>
+        <p:txBody>
+          <a:bodyPr wrap="square">
+            <a:spAutoFit/>
+          </a:bodyPr>
+          <a:lstStyle/>
+          <a:p>
+            <a:r>
+              <a:rPr lang="en-US" dirty="0">
+                <a:hlinkClick r:id="rId4"/>
+              </a:rPr>
+              <a:t>Microsoft Foundry documentation | Microsoft Learn</a:t>
+            </a:r>
+            <a:endParaRPr lang="en-US" dirty="0"/>
+          </a:p>
+        </p:txBody>
+      </p:sp>
+      <p:pic>
+        <p:nvPicPr>
+          <p:cNvPr id="1036" name="Picture 12">
+            <a:extLst>
+              <a:ext uri="{FF2B5EF4-FFF2-40B4-BE49-F238E27FC236}">
+                <a16:creationId xmlns:a16="http://schemas.microsoft.com/office/drawing/2014/main" id="{2C06DA4A-A0CA-3F11-FBF2-7675DC8920F6}"/>
+              </a:ext>
+            </a:extLst>
+          </p:cNvPr>
+          <p:cNvPicPr>
+            <a:picLocks noChangeAspect="1" noChangeArrowheads="1"/>
+          </p:cNvPicPr>
+          <p:nvPr/>
+        </p:nvPicPr>
+        <p:blipFill>
+          <a:blip r:embed="rId5">
+            <a:extLst>
+              <a:ext uri="{28A0092B-C50C-407E-A947-70E740481C1C}">
+                <a14:useLocalDpi xmlns:a14="http://schemas.microsoft.com/office/drawing/2010/main" val="0"/>
+              </a:ext>
+            </a:extLst>
+          </a:blip>
+          <a:srcRect/>
+          <a:stretch>
+            <a:fillRect/>
+          </a:stretch>
+        </p:blipFill>
+        <p:spPr bwMode="auto">
+          <a:xfrm>
+            <a:off x="9179748" y="1698160"/>
+            <a:ext cx="685800" cy="685800"/>
+          </a:xfrm>
+          <a:prstGeom prst="rect">
+            <a:avLst/>
+          </a:prstGeom>
+          <a:noFill/>
+          <a:extLst>
+            <a:ext uri="{909E8E84-426E-40DD-AFC4-6F175D3DCCD1}">
+              <a14:hiddenFill xmlns:a14="http://schemas.microsoft.com/office/drawing/2010/main">
+                <a:solidFill>
+                  <a:srgbClr val="FFFFFF"/>
+                </a:solidFill>
+              </a14:hiddenFill>
+            </a:ext>
+          </a:extLst>
+        </p:spPr>
+      </p:pic>
+      <p:pic>
+        <p:nvPicPr>
+          <p:cNvPr id="1038" name="Picture 14">
+            <a:extLst>
+              <a:ext uri="{FF2B5EF4-FFF2-40B4-BE49-F238E27FC236}">
+                <a16:creationId xmlns:a16="http://schemas.microsoft.com/office/drawing/2014/main" id="{BBE57FCA-085E-B37C-A718-A5115481F51F}"/>
+              </a:ext>
+            </a:extLst>
+          </p:cNvPr>
+          <p:cNvPicPr>
+            <a:picLocks noChangeAspect="1" noChangeArrowheads="1"/>
+          </p:cNvPicPr>
+          <p:nvPr/>
+        </p:nvPicPr>
+        <p:blipFill>
+          <a:blip r:embed="rId6">
+            <a:extLst>
+              <a:ext uri="{28A0092B-C50C-407E-A947-70E740481C1C}">
+                <a14:useLocalDpi xmlns:a14="http://schemas.microsoft.com/office/drawing/2010/main" val="0"/>
+              </a:ext>
+            </a:extLst>
+          </a:blip>
+          <a:srcRect/>
+          <a:stretch>
+            <a:fillRect/>
+          </a:stretch>
+        </p:blipFill>
+        <p:spPr bwMode="auto">
+          <a:xfrm>
+            <a:off x="7466424" y="1698160"/>
+            <a:ext cx="685800" cy="685800"/>
+          </a:xfrm>
+          <a:prstGeom prst="rect">
+            <a:avLst/>
+          </a:prstGeom>
+          <a:noFill/>
+          <a:extLst>
+            <a:ext uri="{909E8E84-426E-40DD-AFC4-6F175D3DCCD1}">
+              <a14:hiddenFill xmlns:a14="http://schemas.microsoft.com/office/drawing/2010/main">
+                <a:solidFill>
+                  <a:srgbClr val="FFFFFF"/>
+                </a:solidFill>
+              </a14:hiddenFill>
+            </a:ext>
+          </a:extLst>
+        </p:spPr>
+      </p:pic>
+      <p:pic>
+        <p:nvPicPr>
+          <p:cNvPr id="21" name="Graphic 20">
+            <a:extLst>
+              <a:ext uri="{FF2B5EF4-FFF2-40B4-BE49-F238E27FC236}">
+                <a16:creationId xmlns:a16="http://schemas.microsoft.com/office/drawing/2014/main" id="{4DCAAB39-A56E-0DEE-C6B4-7E5D07F0EEB0}"/>
+              </a:ext>
+            </a:extLst>
+          </p:cNvPr>
+          <p:cNvPicPr>
+            <a:picLocks noChangeAspect="1"/>
+          </p:cNvPicPr>
+          <p:nvPr/>
+        </p:nvPicPr>
+        <p:blipFill>
+          <a:blip r:embed="rId7">
+            <a:extLst>
+              <a:ext uri="{96DAC541-7B7A-43D3-8B79-37D633B846F1}">
+                <asvg:svgBlip xmlns:asvg="http://schemas.microsoft.com/office/drawing/2016/SVG/main" r:embed="rId8"/>
+              </a:ext>
+            </a:extLst>
+          </a:blip>
+          <a:stretch>
+            <a:fillRect/>
+          </a:stretch>
+        </p:blipFill>
+        <p:spPr>
+          <a:xfrm>
+            <a:off x="5005387" y="3107749"/>
+            <a:ext cx="457200" cy="457200"/>
+          </a:xfrm>
+          <a:prstGeom prst="rect">
+            <a:avLst/>
+          </a:prstGeom>
+        </p:spPr>
+      </p:pic>
+      <p:pic>
+        <p:nvPicPr>
+          <p:cNvPr id="23" name="Graphic 22">
+            <a:extLst>
+              <a:ext uri="{FF2B5EF4-FFF2-40B4-BE49-F238E27FC236}">
+                <a16:creationId xmlns:a16="http://schemas.microsoft.com/office/drawing/2014/main" id="{9F45F68D-2016-AE28-5FB4-29299FA72985}"/>
+              </a:ext>
+            </a:extLst>
+          </p:cNvPr>
+          <p:cNvPicPr>
+            <a:picLocks noChangeAspect="1"/>
+          </p:cNvPicPr>
+          <p:nvPr/>
+        </p:nvPicPr>
+        <p:blipFill>
+          <a:blip r:embed="rId9">
+            <a:extLst>
+              <a:ext uri="{96DAC541-7B7A-43D3-8B79-37D633B846F1}">
+                <asvg:svgBlip xmlns:asvg="http://schemas.microsoft.com/office/drawing/2016/SVG/main" r:embed="rId10"/>
+              </a:ext>
+            </a:extLst>
+          </a:blip>
+          <a:stretch>
+            <a:fillRect/>
+          </a:stretch>
+        </p:blipFill>
+        <p:spPr>
+          <a:xfrm>
+            <a:off x="4039776" y="1698160"/>
+            <a:ext cx="685800" cy="685800"/>
+          </a:xfrm>
+          <a:prstGeom prst="rect">
+            <a:avLst/>
+          </a:prstGeom>
+        </p:spPr>
+      </p:pic>
+      <p:grpSp>
+        <p:nvGrpSpPr>
+          <p:cNvPr id="27" name="Group 26">
+            <a:extLst>
+              <a:ext uri="{FF2B5EF4-FFF2-40B4-BE49-F238E27FC236}">
+                <a16:creationId xmlns:a16="http://schemas.microsoft.com/office/drawing/2014/main" id="{220717FD-C295-A74B-1DD9-B84C288BFAF5}"/>
+              </a:ext>
+            </a:extLst>
+          </p:cNvPr>
+          <p:cNvGrpSpPr/>
+          <p:nvPr/>
+        </p:nvGrpSpPr>
+        <p:grpSpPr>
+          <a:xfrm>
+            <a:off x="4468860" y="550330"/>
+            <a:ext cx="3254280" cy="685800"/>
+            <a:chOff x="4558421" y="553105"/>
+            <a:chExt cx="3254280" cy="685800"/>
+          </a:xfrm>
+        </p:grpSpPr>
+        <p:pic>
+          <p:nvPicPr>
+            <p:cNvPr id="25" name="Picture 24">
+              <a:extLst>
+                <a:ext uri="{FF2B5EF4-FFF2-40B4-BE49-F238E27FC236}">
+                  <a16:creationId xmlns:a16="http://schemas.microsoft.com/office/drawing/2014/main" id="{637A2444-6EF1-C6ED-5009-47471D8E1AFB}"/>
+                </a:ext>
+              </a:extLst>
+            </p:cNvPr>
+            <p:cNvPicPr>
+              <a:picLocks noChangeAspect="1"/>
+            </p:cNvPicPr>
+            <p:nvPr/>
+          </p:nvPicPr>
+          <p:blipFill>
+            <a:blip r:embed="rId11">
+              <a:extLst>
+                <a:ext uri="{28A0092B-C50C-407E-A947-70E740481C1C}">
+                  <a14:useLocalDpi xmlns:a14="http://schemas.microsoft.com/office/drawing/2010/main" val="0"/>
+                </a:ext>
+              </a:extLst>
+            </a:blip>
+            <a:stretch>
+              <a:fillRect/>
+            </a:stretch>
+          </p:blipFill>
+          <p:spPr>
+            <a:xfrm>
+              <a:off x="4558421" y="553105"/>
+              <a:ext cx="750646" cy="685800"/>
+            </a:xfrm>
+            <a:prstGeom prst="rect">
+              <a:avLst/>
+            </a:prstGeom>
+          </p:spPr>
+        </p:pic>
+        <p:sp>
+          <p:nvSpPr>
+            <p:cNvPr id="26" name="TextBox 25">
+              <a:extLst>
+                <a:ext uri="{FF2B5EF4-FFF2-40B4-BE49-F238E27FC236}">
+                  <a16:creationId xmlns:a16="http://schemas.microsoft.com/office/drawing/2014/main" id="{AF52B155-53E9-CC0C-9CB8-93574EE705D4}"/>
+                </a:ext>
+              </a:extLst>
+            </p:cNvPr>
+            <p:cNvSpPr txBox="1"/>
+            <p:nvPr/>
+          </p:nvSpPr>
+          <p:spPr>
+            <a:xfrm>
+              <a:off x="5309067" y="634395"/>
+              <a:ext cx="2503634" cy="523220"/>
+            </a:xfrm>
+            <a:prstGeom prst="rect">
+              <a:avLst/>
+            </a:prstGeom>
+            <a:noFill/>
+          </p:spPr>
+          <p:txBody>
+            <a:bodyPr wrap="none" rtlCol="0">
+              <a:spAutoFit/>
+            </a:bodyPr>
+            <a:lstStyle/>
+            <a:p>
+              <a:r>
+                <a:rPr lang="en-US" sz="2800" dirty="0"/>
+                <a:t>Microsoft Foundry</a:t>
+              </a:r>
+            </a:p>
+          </p:txBody>
+        </p:sp>
+      </p:grpSp>
+    </p:spTree>
+    <p:extLst>
+      <p:ext uri="{BB962C8B-B14F-4D97-AF65-F5344CB8AC3E}">
+        <p14:creationId xmlns:p14="http://schemas.microsoft.com/office/powerpoint/2010/main" val="71902365"/>
+      </p:ext>
+    </p:extLst>
+  </p:cSld>
+  <p:clrMapOvr>
+    <a:masterClrMapping/>
+  </p:clrMapOvr>
+</p:sld>
+</file>
+
+<file path=ppt/slides/slide5.xml><?xml version="1.0" encoding="utf-8"?>
+<p:sld xmlns:a="http://schemas.openxmlformats.org/drawingml/2006/main" xmlns:r="http://schemas.openxmlformats.org/officeDocument/2006/relationships" xmlns:p="http://schemas.openxmlformats.org/presentationml/2006/main">
+  <p:cSld>
+    <p:spTree>
+      <p:nvGrpSpPr>
+        <p:cNvPr id="1" name=""/>
+        <p:cNvGrpSpPr/>
+        <p:nvPr/>
+      </p:nvGrpSpPr>
+      <p:grpSpPr>
+        <a:xfrm>
+          <a:off x="0" y="0"/>
+          <a:ext cx="0" cy="0"/>
+          <a:chOff x="0" y="0"/>
+          <a:chExt cx="0" cy="0"/>
+        </a:xfrm>
+      </p:grpSpPr>
+      <p:sp>
+        <p:nvSpPr>
+          <p:cNvPr id="2" name="Rectangle: Rounded Corners 1">
+            <a:extLst>
+              <a:ext uri="{FF2B5EF4-FFF2-40B4-BE49-F238E27FC236}">
+                <a16:creationId xmlns:a16="http://schemas.microsoft.com/office/drawing/2014/main" id="{ED732446-F0F6-0ACF-647A-3BC33E7C3D60}"/>
+              </a:ext>
+            </a:extLst>
+          </p:cNvPr>
+          <p:cNvSpPr/>
+          <p:nvPr/>
+        </p:nvSpPr>
+        <p:spPr>
+          <a:xfrm>
+            <a:off x="962567" y="281940"/>
+            <a:ext cx="10552099" cy="6187439"/>
+          </a:xfrm>
+          <a:prstGeom prst="roundRect">
+            <a:avLst>
+              <a:gd name="adj" fmla="val 5234"/>
+            </a:avLst>
+          </a:prstGeom>
+          <a:solidFill>
+            <a:schemeClr val="bg1"/>
+          </a:solidFill>
+          <a:ln>
+            <a:solidFill>
+              <a:schemeClr val="tx1"/>
+            </a:solidFill>
+          </a:ln>
+        </p:spPr>
+        <p:style>
+          <a:lnRef idx="2">
+            <a:schemeClr val="accent1">
+              <a:shade val="15000"/>
+            </a:schemeClr>
+          </a:lnRef>
+          <a:fillRef idx="1">
+            <a:schemeClr val="accent1"/>
+          </a:fillRef>
+          <a:effectRef idx="0">
+            <a:schemeClr val="accent1"/>
+          </a:effectRef>
+          <a:fontRef idx="minor">
+            <a:schemeClr val="lt1"/>
+          </a:fontRef>
+        </p:style>
+        <p:txBody>
+          <a:bodyPr rtlCol="0" anchor="t"/>
+          <a:lstStyle/>
+          <a:p>
+            <a:pPr algn="ctr"/>
+            <a:r>
+              <a:rPr lang="en-US" dirty="0">
+                <a:solidFill>
+                  <a:schemeClr val="tx1"/>
+                </a:solidFill>
+              </a:rPr>
+              <a:t>Example Models</a:t>
+            </a:r>
+          </a:p>
+        </p:txBody>
+      </p:sp>
+      <p:sp>
+        <p:nvSpPr>
+          <p:cNvPr id="3" name="Rectangle: Rounded Corners 2">
+            <a:extLst>
+              <a:ext uri="{FF2B5EF4-FFF2-40B4-BE49-F238E27FC236}">
+                <a16:creationId xmlns:a16="http://schemas.microsoft.com/office/drawing/2014/main" id="{5574ED1F-143F-F0C3-860B-D1D1A94B8038}"/>
+              </a:ext>
+            </a:extLst>
+          </p:cNvPr>
+          <p:cNvSpPr/>
+          <p:nvPr/>
+        </p:nvSpPr>
+        <p:spPr>
+          <a:xfrm>
+            <a:off x="4778916" y="1188720"/>
+            <a:ext cx="2634168" cy="2335531"/>
+          </a:xfrm>
+          <a:prstGeom prst="roundRect">
+            <a:avLst/>
+          </a:prstGeom>
+          <a:solidFill>
+            <a:srgbClr val="E5F1F8"/>
+          </a:solidFill>
+          <a:ln>
+            <a:solidFill>
+              <a:schemeClr val="tx1"/>
+            </a:solidFill>
+          </a:ln>
+        </p:spPr>
+        <p:style>
+          <a:lnRef idx="2">
+            <a:schemeClr val="accent1">
+              <a:shade val="15000"/>
+            </a:schemeClr>
+          </a:lnRef>
+          <a:fillRef idx="1">
+            <a:schemeClr val="accent1"/>
+          </a:fillRef>
+          <a:effectRef idx="0">
+            <a:schemeClr val="accent1"/>
+          </a:effectRef>
+          <a:fontRef idx="minor">
+            <a:schemeClr val="lt1"/>
+          </a:fontRef>
+        </p:style>
+        <p:txBody>
+          <a:bodyPr rtlCol="0" anchor="t"/>
+          <a:lstStyle/>
+          <a:p>
+            <a:pPr algn="ctr"/>
+            <a:r>
+              <a:rPr lang="en-US" dirty="0">
+                <a:solidFill>
+                  <a:schemeClr val="tx1"/>
+                </a:solidFill>
+              </a:rPr>
+              <a:t>Anthropic</a:t>
+            </a:r>
+          </a:p>
+        </p:txBody>
+      </p:sp>
+      <p:sp>
+        <p:nvSpPr>
+          <p:cNvPr id="4" name="Rectangle: Rounded Corners 3">
+            <a:extLst>
+              <a:ext uri="{FF2B5EF4-FFF2-40B4-BE49-F238E27FC236}">
+                <a16:creationId xmlns:a16="http://schemas.microsoft.com/office/drawing/2014/main" id="{CB92B3E5-A0FB-4F52-03FE-A3994B4A676E}"/>
+              </a:ext>
+            </a:extLst>
+          </p:cNvPr>
+          <p:cNvSpPr/>
+          <p:nvPr/>
+        </p:nvSpPr>
+        <p:spPr>
+          <a:xfrm>
+            <a:off x="1553658" y="1188720"/>
+            <a:ext cx="2634168" cy="2335531"/>
+          </a:xfrm>
+          <a:prstGeom prst="roundRect">
+            <a:avLst/>
+          </a:prstGeom>
+          <a:solidFill>
+            <a:srgbClr val="E5F1F8"/>
+          </a:solidFill>
+          <a:ln>
+            <a:solidFill>
+              <a:schemeClr val="tx1"/>
+            </a:solidFill>
+          </a:ln>
+        </p:spPr>
+        <p:style>
+          <a:lnRef idx="2">
+            <a:schemeClr val="accent1">
+              <a:shade val="15000"/>
+            </a:schemeClr>
+          </a:lnRef>
+          <a:fillRef idx="1">
+            <a:schemeClr val="accent1"/>
+          </a:fillRef>
+          <a:effectRef idx="0">
+            <a:schemeClr val="accent1"/>
+          </a:effectRef>
+          <a:fontRef idx="minor">
+            <a:schemeClr val="lt1"/>
+          </a:fontRef>
+        </p:style>
+        <p:txBody>
+          <a:bodyPr rtlCol="0" anchor="t"/>
+          <a:lstStyle/>
+          <a:p>
+            <a:pPr algn="ctr"/>
+            <a:r>
+              <a:rPr lang="en-US" dirty="0">
+                <a:solidFill>
+                  <a:schemeClr val="tx1"/>
+                </a:solidFill>
+              </a:rPr>
+              <a:t>Azure OpenAI</a:t>
+            </a:r>
+          </a:p>
+        </p:txBody>
+      </p:sp>
+      <p:sp>
+        <p:nvSpPr>
+          <p:cNvPr id="5" name="Rectangle: Rounded Corners 4">
+            <a:extLst>
+              <a:ext uri="{FF2B5EF4-FFF2-40B4-BE49-F238E27FC236}">
+                <a16:creationId xmlns:a16="http://schemas.microsoft.com/office/drawing/2014/main" id="{ACE8A258-9DE7-F4AF-1449-211286E0D11E}"/>
+              </a:ext>
+            </a:extLst>
+          </p:cNvPr>
+          <p:cNvSpPr/>
+          <p:nvPr/>
+        </p:nvSpPr>
+        <p:spPr>
+          <a:xfrm>
+            <a:off x="8004174" y="1188720"/>
+            <a:ext cx="2634168" cy="2335531"/>
+          </a:xfrm>
+          <a:prstGeom prst="roundRect">
+            <a:avLst/>
+          </a:prstGeom>
+          <a:solidFill>
+            <a:srgbClr val="E5F1F8"/>
+          </a:solidFill>
+          <a:ln>
+            <a:solidFill>
+              <a:schemeClr val="tx1"/>
+            </a:solidFill>
+          </a:ln>
+        </p:spPr>
+        <p:style>
+          <a:lnRef idx="2">
+            <a:schemeClr val="accent1">
+              <a:shade val="15000"/>
+            </a:schemeClr>
+          </a:lnRef>
+          <a:fillRef idx="1">
+            <a:schemeClr val="accent1"/>
+          </a:fillRef>
+          <a:effectRef idx="0">
+            <a:schemeClr val="accent1"/>
+          </a:effectRef>
+          <a:fontRef idx="minor">
+            <a:schemeClr val="lt1"/>
+          </a:fontRef>
+        </p:style>
+        <p:txBody>
+          <a:bodyPr rtlCol="0" anchor="t"/>
+          <a:lstStyle/>
+          <a:p>
+            <a:pPr algn="ctr"/>
+            <a:r>
+              <a:rPr lang="en-US" dirty="0">
+                <a:solidFill>
+                  <a:schemeClr val="tx1"/>
+                </a:solidFill>
+              </a:rPr>
+              <a:t>Microsoft</a:t>
+            </a:r>
+          </a:p>
+        </p:txBody>
+      </p:sp>
+      <p:sp>
+        <p:nvSpPr>
+          <p:cNvPr id="6" name="Rectangle: Rounded Corners 5">
+            <a:extLst>
+              <a:ext uri="{FF2B5EF4-FFF2-40B4-BE49-F238E27FC236}">
+                <a16:creationId xmlns:a16="http://schemas.microsoft.com/office/drawing/2014/main" id="{417ADCD0-E7DE-9B18-898C-7D55B783F694}"/>
+              </a:ext>
+            </a:extLst>
+          </p:cNvPr>
+          <p:cNvSpPr/>
+          <p:nvPr/>
+        </p:nvSpPr>
+        <p:spPr>
+          <a:xfrm>
+            <a:off x="4778916" y="3653789"/>
+            <a:ext cx="2634168" cy="2335531"/>
+          </a:xfrm>
+          <a:prstGeom prst="roundRect">
+            <a:avLst/>
+          </a:prstGeom>
+          <a:solidFill>
+            <a:srgbClr val="E5F1F8"/>
+          </a:solidFill>
+          <a:ln>
+            <a:solidFill>
+              <a:schemeClr val="tx1"/>
+            </a:solidFill>
+          </a:ln>
+        </p:spPr>
+        <p:style>
+          <a:lnRef idx="2">
+            <a:schemeClr val="accent1">
+              <a:shade val="15000"/>
+            </a:schemeClr>
+          </a:lnRef>
+          <a:fillRef idx="1">
+            <a:schemeClr val="accent1"/>
+          </a:fillRef>
+          <a:effectRef idx="0">
+            <a:schemeClr val="accent1"/>
+          </a:effectRef>
+          <a:fontRef idx="minor">
+            <a:schemeClr val="lt1"/>
+          </a:fontRef>
+        </p:style>
+        <p:txBody>
+          <a:bodyPr rtlCol="0" anchor="t"/>
+          <a:lstStyle/>
+          <a:p>
+            <a:pPr algn="ctr"/>
+            <a:r>
+              <a:rPr lang="en-US" dirty="0">
+                <a:solidFill>
+                  <a:schemeClr val="tx1"/>
+                </a:solidFill>
+              </a:rPr>
+              <a:t>Mistral AI</a:t>
+            </a:r>
+          </a:p>
+        </p:txBody>
+      </p:sp>
+      <p:sp>
+        <p:nvSpPr>
+          <p:cNvPr id="7" name="Rectangle: Rounded Corners 6">
+            <a:extLst>
+              <a:ext uri="{FF2B5EF4-FFF2-40B4-BE49-F238E27FC236}">
+                <a16:creationId xmlns:a16="http://schemas.microsoft.com/office/drawing/2014/main" id="{A55125DD-7A11-66B1-DDF5-ECD5D6C1F69B}"/>
+              </a:ext>
+            </a:extLst>
+          </p:cNvPr>
+          <p:cNvSpPr/>
+          <p:nvPr/>
+        </p:nvSpPr>
+        <p:spPr>
+          <a:xfrm>
+            <a:off x="1553658" y="3653789"/>
+            <a:ext cx="2634168" cy="2335531"/>
+          </a:xfrm>
+          <a:prstGeom prst="roundRect">
+            <a:avLst/>
+          </a:prstGeom>
+          <a:solidFill>
+            <a:srgbClr val="E5F1F8"/>
+          </a:solidFill>
+          <a:ln>
+            <a:solidFill>
+              <a:schemeClr val="tx1"/>
+            </a:solidFill>
+          </a:ln>
+        </p:spPr>
+        <p:style>
+          <a:lnRef idx="2">
+            <a:schemeClr val="accent1">
+              <a:shade val="15000"/>
+            </a:schemeClr>
+          </a:lnRef>
+          <a:fillRef idx="1">
+            <a:schemeClr val="accent1"/>
+          </a:fillRef>
+          <a:effectRef idx="0">
+            <a:schemeClr val="accent1"/>
+          </a:effectRef>
+          <a:fontRef idx="minor">
+            <a:schemeClr val="lt1"/>
+          </a:fontRef>
+        </p:style>
+        <p:txBody>
+          <a:bodyPr rtlCol="0" anchor="t"/>
+          <a:lstStyle/>
+          <a:p>
+            <a:pPr algn="ctr"/>
+            <a:r>
+              <a:rPr lang="en-US" dirty="0">
+                <a:solidFill>
+                  <a:schemeClr val="tx1"/>
+                </a:solidFill>
+              </a:rPr>
+              <a:t>Meta</a:t>
+            </a:r>
+          </a:p>
+        </p:txBody>
+      </p:sp>
+      <p:sp>
+        <p:nvSpPr>
+          <p:cNvPr id="8" name="Rectangle: Rounded Corners 7">
+            <a:extLst>
+              <a:ext uri="{FF2B5EF4-FFF2-40B4-BE49-F238E27FC236}">
+                <a16:creationId xmlns:a16="http://schemas.microsoft.com/office/drawing/2014/main" id="{4D8433B6-E222-52DE-3420-6BC81E4D9945}"/>
+              </a:ext>
+            </a:extLst>
+          </p:cNvPr>
+          <p:cNvSpPr/>
+          <p:nvPr/>
+        </p:nvSpPr>
+        <p:spPr>
+          <a:xfrm>
+            <a:off x="8004174" y="3653789"/>
+            <a:ext cx="2634168" cy="2335531"/>
+          </a:xfrm>
+          <a:prstGeom prst="roundRect">
+            <a:avLst/>
+          </a:prstGeom>
+          <a:solidFill>
+            <a:srgbClr val="E5F1F8"/>
+          </a:solidFill>
+          <a:ln>
+            <a:solidFill>
+              <a:schemeClr val="tx1"/>
+            </a:solidFill>
+          </a:ln>
+        </p:spPr>
+        <p:style>
+          <a:lnRef idx="2">
+            <a:schemeClr val="accent1">
+              <a:shade val="15000"/>
+            </a:schemeClr>
+          </a:lnRef>
+          <a:fillRef idx="1">
+            <a:schemeClr val="accent1"/>
+          </a:fillRef>
+          <a:effectRef idx="0">
+            <a:schemeClr val="accent1"/>
+          </a:effectRef>
+          <a:fontRef idx="minor">
+            <a:schemeClr val="lt1"/>
+          </a:fontRef>
+        </p:style>
+        <p:txBody>
+          <a:bodyPr rtlCol="0" anchor="t"/>
+          <a:lstStyle/>
+          <a:p>
+            <a:pPr algn="ctr"/>
+            <a:r>
+              <a:rPr lang="en-US" dirty="0">
+                <a:solidFill>
+                  <a:schemeClr val="tx1"/>
+                </a:solidFill>
+              </a:rPr>
+              <a:t>DeepSeek</a:t>
+            </a:r>
+          </a:p>
+        </p:txBody>
+      </p:sp>
+      <p:sp>
+        <p:nvSpPr>
+          <p:cNvPr id="10" name="Rectangle: Rounded Corners 9">
+            <a:extLst>
+              <a:ext uri="{FF2B5EF4-FFF2-40B4-BE49-F238E27FC236}">
+                <a16:creationId xmlns:a16="http://schemas.microsoft.com/office/drawing/2014/main" id="{02E5EA1C-587E-4A45-E606-F67DF515B407}"/>
+              </a:ext>
+            </a:extLst>
+          </p:cNvPr>
+          <p:cNvSpPr/>
+          <p:nvPr/>
+        </p:nvSpPr>
+        <p:spPr>
+          <a:xfrm>
+            <a:off x="1790700" y="1882140"/>
+            <a:ext cx="2111892" cy="322508"/>
+          </a:xfrm>
+          <a:prstGeom prst="roundRect">
+            <a:avLst>
+              <a:gd name="adj" fmla="val 50000"/>
+            </a:avLst>
+          </a:prstGeom>
+          <a:solidFill>
+            <a:srgbClr val="B2D4EB"/>
+          </a:solidFill>
+          <a:ln>
+            <a:solidFill>
+              <a:schemeClr val="tx1"/>
+            </a:solidFill>
+          </a:ln>
+        </p:spPr>
+        <p:style>
+          <a:lnRef idx="2">
+            <a:schemeClr val="accent1">
+              <a:shade val="15000"/>
+            </a:schemeClr>
+          </a:lnRef>
+          <a:fillRef idx="1">
+            <a:schemeClr val="accent1"/>
+          </a:fillRef>
+          <a:effectRef idx="0">
+            <a:schemeClr val="accent1"/>
+          </a:effectRef>
+          <a:fontRef idx="minor">
+            <a:schemeClr val="lt1"/>
+          </a:fontRef>
+        </p:style>
+        <p:txBody>
+          <a:bodyPr rtlCol="0" anchor="ctr"/>
+          <a:lstStyle/>
+          <a:p>
+            <a:pPr algn="ctr"/>
+            <a:r>
+              <a:rPr lang="en-US" dirty="0" err="1">
+                <a:solidFill>
+                  <a:schemeClr val="tx1"/>
+                </a:solidFill>
+              </a:rPr>
+              <a:t>gpt</a:t>
+            </a:r>
+            <a:endParaRPr lang="en-US" i="1" dirty="0">
+              <a:solidFill>
+                <a:schemeClr val="tx1"/>
+              </a:solidFill>
+            </a:endParaRPr>
+          </a:p>
+        </p:txBody>
+      </p:sp>
+      <p:sp>
+        <p:nvSpPr>
+          <p:cNvPr id="11" name="Rectangle: Rounded Corners 10">
+            <a:extLst>
+              <a:ext uri="{FF2B5EF4-FFF2-40B4-BE49-F238E27FC236}">
+                <a16:creationId xmlns:a16="http://schemas.microsoft.com/office/drawing/2014/main" id="{E11D9861-1EDA-793B-0AA0-18BFA52ACCE4}"/>
+              </a:ext>
+            </a:extLst>
+          </p:cNvPr>
+          <p:cNvSpPr/>
+          <p:nvPr/>
+        </p:nvSpPr>
+        <p:spPr>
+          <a:xfrm>
+            <a:off x="1790700" y="2380687"/>
+            <a:ext cx="2111892" cy="322508"/>
+          </a:xfrm>
+          <a:prstGeom prst="roundRect">
+            <a:avLst>
+              <a:gd name="adj" fmla="val 50000"/>
+            </a:avLst>
+          </a:prstGeom>
+          <a:solidFill>
+            <a:srgbClr val="B2D4EB"/>
+          </a:solidFill>
+          <a:ln>
+            <a:solidFill>
+              <a:schemeClr val="tx1"/>
+            </a:solidFill>
+          </a:ln>
+        </p:spPr>
+        <p:style>
+          <a:lnRef idx="2">
+            <a:schemeClr val="accent1">
+              <a:shade val="15000"/>
+            </a:schemeClr>
+          </a:lnRef>
+          <a:fillRef idx="1">
+            <a:schemeClr val="accent1"/>
+          </a:fillRef>
+          <a:effectRef idx="0">
+            <a:schemeClr val="accent1"/>
+          </a:effectRef>
+          <a:fontRef idx="minor">
+            <a:schemeClr val="lt1"/>
+          </a:fontRef>
+        </p:style>
+        <p:txBody>
+          <a:bodyPr rtlCol="0" anchor="ctr"/>
+          <a:lstStyle/>
+          <a:p>
+            <a:pPr algn="ctr"/>
+            <a:r>
+              <a:rPr lang="en-US" dirty="0">
+                <a:solidFill>
+                  <a:schemeClr val="tx1"/>
+                </a:solidFill>
+              </a:rPr>
+              <a:t>o</a:t>
+            </a:r>
+          </a:p>
+        </p:txBody>
+      </p:sp>
+      <p:sp>
+        <p:nvSpPr>
+          <p:cNvPr id="12" name="Rectangle: Rounded Corners 11">
+            <a:extLst>
+              <a:ext uri="{FF2B5EF4-FFF2-40B4-BE49-F238E27FC236}">
+                <a16:creationId xmlns:a16="http://schemas.microsoft.com/office/drawing/2014/main" id="{46BFDC7A-CED3-C375-66E6-683B9E52EDD1}"/>
+              </a:ext>
+            </a:extLst>
+          </p:cNvPr>
+          <p:cNvSpPr/>
+          <p:nvPr/>
+        </p:nvSpPr>
+        <p:spPr>
+          <a:xfrm>
+            <a:off x="1790700" y="2879234"/>
+            <a:ext cx="2111892" cy="322508"/>
+          </a:xfrm>
+          <a:prstGeom prst="roundRect">
+            <a:avLst>
+              <a:gd name="adj" fmla="val 50000"/>
+            </a:avLst>
+          </a:prstGeom>
+          <a:solidFill>
+            <a:srgbClr val="B2D4EB"/>
+          </a:solidFill>
+          <a:ln>
+            <a:solidFill>
+              <a:schemeClr val="tx1"/>
+            </a:solidFill>
+          </a:ln>
+        </p:spPr>
+        <p:style>
+          <a:lnRef idx="2">
+            <a:schemeClr val="accent1">
+              <a:shade val="15000"/>
+            </a:schemeClr>
+          </a:lnRef>
+          <a:fillRef idx="1">
+            <a:schemeClr val="accent1"/>
+          </a:fillRef>
+          <a:effectRef idx="0">
+            <a:schemeClr val="accent1"/>
+          </a:effectRef>
+          <a:fontRef idx="minor">
+            <a:schemeClr val="lt1"/>
+          </a:fontRef>
+        </p:style>
+        <p:txBody>
+          <a:bodyPr rtlCol="0" anchor="ctr"/>
+          <a:lstStyle/>
+          <a:p>
+            <a:pPr algn="ctr"/>
+            <a:r>
+              <a:rPr lang="en-US" dirty="0">
+                <a:solidFill>
+                  <a:schemeClr val="tx1"/>
+                </a:solidFill>
+              </a:rPr>
+              <a:t>sora</a:t>
+            </a:r>
+          </a:p>
+        </p:txBody>
+      </p:sp>
+    </p:spTree>
+    <p:extLst>
+      <p:ext uri="{BB962C8B-B14F-4D97-AF65-F5344CB8AC3E}">
+        <p14:creationId xmlns:p14="http://schemas.microsoft.com/office/powerpoint/2010/main" val="2145715379"/>
+      </p:ext>
+    </p:extLst>
+  </p:cSld>
+  <p:clrMapOvr>
+    <a:masterClrMapping/>
+  </p:clrMapOvr>
+</p:sld>
+</file>
+
+<file path=ppt/slides/slide6.xml><?xml version="1.0" encoding="utf-8"?>
+<p:sld xmlns:a="http://schemas.openxmlformats.org/drawingml/2006/main" xmlns:r="http://schemas.openxmlformats.org/officeDocument/2006/relationships" xmlns:p="http://schemas.openxmlformats.org/presentationml/2006/main">
+  <p:cSld>
+    <p:spTree>
+      <p:nvGrpSpPr>
+        <p:cNvPr id="1" name=""/>
+        <p:cNvGrpSpPr/>
+        <p:nvPr/>
+      </p:nvGrpSpPr>
+      <p:grpSpPr>
+        <a:xfrm>
+          <a:off x="0" y="0"/>
+          <a:ext cx="0" cy="0"/>
+          <a:chOff x="0" y="0"/>
+          <a:chExt cx="0" cy="0"/>
+        </a:xfrm>
+      </p:grpSpPr>
+      <p:sp>
+        <p:nvSpPr>
           <p:cNvPr id="5" name="TextBox 4">
             <a:extLst>
               <a:ext uri="{FF2B5EF4-FFF2-40B4-BE49-F238E27FC236}">
@@ -5133,7 +7421,7 @@
 </p:sld>
 </file>
 
-<file path=ppt/slides/slide5.xml><?xml version="1.0" encoding="utf-8"?>
+<file path=ppt/slides/slide7.xml><?xml version="1.0" encoding="utf-8"?>
 <p:sld xmlns:a="http://schemas.openxmlformats.org/drawingml/2006/main" xmlns:r="http://schemas.openxmlformats.org/officeDocument/2006/relationships" xmlns:p="http://schemas.openxmlformats.org/presentationml/2006/main">
   <p:cSld>
     <p:spTree>
@@ -5867,7 +8155,7 @@
 </p:sld>
 </file>
 
-<file path=ppt/slides/slide6.xml><?xml version="1.0" encoding="utf-8"?>
+<file path=ppt/slides/slide8.xml><?xml version="1.0" encoding="utf-8"?>
 <p:sld xmlns:a="http://schemas.openxmlformats.org/drawingml/2006/main" xmlns:r="http://schemas.openxmlformats.org/officeDocument/2006/relationships" xmlns:p="http://schemas.openxmlformats.org/presentationml/2006/main">
   <p:cSld>
     <p:spTree>

--- a/figures/figures.pptx
+++ b/figures/figures.pptx
@@ -5,17 +5,21 @@
     <p:sldMasterId id="2147483660" r:id="rId1"/>
   </p:sldMasterIdLst>
   <p:notesMasterIdLst>
-    <p:notesMasterId r:id="rId10"/>
+    <p:notesMasterId r:id="rId14"/>
   </p:notesMasterIdLst>
   <p:sldIdLst>
     <p:sldId id="258" r:id="rId2"/>
     <p:sldId id="256" r:id="rId3"/>
-    <p:sldId id="262" r:id="rId4"/>
-    <p:sldId id="263" r:id="rId5"/>
-    <p:sldId id="260" r:id="rId6"/>
-    <p:sldId id="259" r:id="rId7"/>
-    <p:sldId id="261" r:id="rId8"/>
-    <p:sldId id="257" r:id="rId9"/>
+    <p:sldId id="263" r:id="rId4"/>
+    <p:sldId id="260" r:id="rId5"/>
+    <p:sldId id="259" r:id="rId6"/>
+    <p:sldId id="261" r:id="rId7"/>
+    <p:sldId id="262" r:id="rId8"/>
+    <p:sldId id="264" r:id="rId9"/>
+    <p:sldId id="265" r:id="rId10"/>
+    <p:sldId id="266" r:id="rId11"/>
+    <p:sldId id="267" r:id="rId12"/>
+    <p:sldId id="257" r:id="rId13"/>
   </p:sldIdLst>
   <p:sldSz cx="12192000" cy="6858000"/>
   <p:notesSz cx="6858000" cy="9144000"/>
@@ -122,18 +126,34 @@
             <p14:sldId id="258"/>
           </p14:sldIdLst>
         </p14:section>
-        <p14:section name="Chapter 1" id="{4FFEF0E2-5833-4089-8860-99F4B2E194C0}">
+        <p14:section name="Introduction" id="{33616E34-919B-4477-A71B-4790522F5760}">
           <p14:sldIdLst>
             <p14:sldId id="256"/>
-            <p14:sldId id="262"/>
             <p14:sldId id="263"/>
+          </p14:sldIdLst>
+        </p14:section>
+        <p14:section name="Model Deployment" id="{4FFEF0E2-5833-4089-8860-99F4B2E194C0}">
+          <p14:sldIdLst>
             <p14:sldId id="260"/>
             <p14:sldId id="259"/>
           </p14:sldIdLst>
         </p14:section>
-        <p14:section name="Chapter 2" id="{D332562B-3ADB-4CCE-A1B8-55DF9B490E3B}">
+        <p14:section name="Agent Deployment" id="{D332562B-3ADB-4CCE-A1B8-55DF9B490E3B}">
           <p14:sldIdLst>
             <p14:sldId id="261"/>
+          </p14:sldIdLst>
+        </p14:section>
+        <p14:section name="Knowledge Bases" id="{06E034E2-AFC7-4A28-B1B0-B4E2903C9A55}">
+          <p14:sldIdLst>
+            <p14:sldId id="262"/>
+            <p14:sldId id="264"/>
+          </p14:sldIdLst>
+        </p14:section>
+        <p14:section name="Fine-Tuning" id="{0654DAA0-6DAF-4D93-901D-DE1F25DE20A5}">
+          <p14:sldIdLst>
+            <p14:sldId id="265"/>
+            <p14:sldId id="266"/>
+            <p14:sldId id="267"/>
           </p14:sldIdLst>
         </p14:section>
         <p14:section name="Examples" id="{2CEADF37-2C1D-4DE6-BB08-5D838E707A13}">
@@ -232,7 +252,7 @@
           <a:p>
             <a:fld id="{DAABB0E5-6D8D-4DEE-B75F-67010CF2307C}" type="datetimeFigureOut">
               <a:rPr lang="en-US" smtClean="0"/>
-              <a:t>2/12/2026</a:t>
+              <a:t>2/19/2026</a:t>
             </a:fld>
             <a:endParaRPr lang="en-US"/>
           </a:p>
@@ -767,7 +787,7 @@
           <a:p>
             <a:fld id="{1D549D2C-39EA-4769-BF7E-31FE52D82078}" type="slidenum">
               <a:rPr lang="en-US" smtClean="0"/>
-              <a:t>6</a:t>
+              <a:t>5</a:t>
             </a:fld>
             <a:endParaRPr lang="en-US"/>
           </a:p>
@@ -917,7 +937,7 @@
           <a:p>
             <a:fld id="{B84C5C40-2055-49AF-9028-5DA79E75E391}" type="datetimeFigureOut">
               <a:rPr lang="en-US" smtClean="0"/>
-              <a:t>2/12/2026</a:t>
+              <a:t>2/19/2026</a:t>
             </a:fld>
             <a:endParaRPr lang="en-US"/>
           </a:p>
@@ -1087,7 +1107,7 @@
           <a:p>
             <a:fld id="{B84C5C40-2055-49AF-9028-5DA79E75E391}" type="datetimeFigureOut">
               <a:rPr lang="en-US" smtClean="0"/>
-              <a:t>2/12/2026</a:t>
+              <a:t>2/19/2026</a:t>
             </a:fld>
             <a:endParaRPr lang="en-US"/>
           </a:p>
@@ -1267,7 +1287,7 @@
           <a:p>
             <a:fld id="{B84C5C40-2055-49AF-9028-5DA79E75E391}" type="datetimeFigureOut">
               <a:rPr lang="en-US" smtClean="0"/>
-              <a:t>2/12/2026</a:t>
+              <a:t>2/19/2026</a:t>
             </a:fld>
             <a:endParaRPr lang="en-US"/>
           </a:p>
@@ -1437,7 +1457,7 @@
           <a:p>
             <a:fld id="{B84C5C40-2055-49AF-9028-5DA79E75E391}" type="datetimeFigureOut">
               <a:rPr lang="en-US" smtClean="0"/>
-              <a:t>2/12/2026</a:t>
+              <a:t>2/19/2026</a:t>
             </a:fld>
             <a:endParaRPr lang="en-US"/>
           </a:p>
@@ -1683,7 +1703,7 @@
           <a:p>
             <a:fld id="{B84C5C40-2055-49AF-9028-5DA79E75E391}" type="datetimeFigureOut">
               <a:rPr lang="en-US" smtClean="0"/>
-              <a:t>2/12/2026</a:t>
+              <a:t>2/19/2026</a:t>
             </a:fld>
             <a:endParaRPr lang="en-US"/>
           </a:p>
@@ -1915,7 +1935,7 @@
           <a:p>
             <a:fld id="{B84C5C40-2055-49AF-9028-5DA79E75E391}" type="datetimeFigureOut">
               <a:rPr lang="en-US" smtClean="0"/>
-              <a:t>2/12/2026</a:t>
+              <a:t>2/19/2026</a:t>
             </a:fld>
             <a:endParaRPr lang="en-US"/>
           </a:p>
@@ -2282,7 +2302,7 @@
           <a:p>
             <a:fld id="{B84C5C40-2055-49AF-9028-5DA79E75E391}" type="datetimeFigureOut">
               <a:rPr lang="en-US" smtClean="0"/>
-              <a:t>2/12/2026</a:t>
+              <a:t>2/19/2026</a:t>
             </a:fld>
             <a:endParaRPr lang="en-US"/>
           </a:p>
@@ -2400,7 +2420,7 @@
           <a:p>
             <a:fld id="{B84C5C40-2055-49AF-9028-5DA79E75E391}" type="datetimeFigureOut">
               <a:rPr lang="en-US" smtClean="0"/>
-              <a:t>2/12/2026</a:t>
+              <a:t>2/19/2026</a:t>
             </a:fld>
             <a:endParaRPr lang="en-US"/>
           </a:p>
@@ -2495,7 +2515,7 @@
           <a:p>
             <a:fld id="{B84C5C40-2055-49AF-9028-5DA79E75E391}" type="datetimeFigureOut">
               <a:rPr lang="en-US" smtClean="0"/>
-              <a:t>2/12/2026</a:t>
+              <a:t>2/19/2026</a:t>
             </a:fld>
             <a:endParaRPr lang="en-US"/>
           </a:p>
@@ -2772,7 +2792,7 @@
           <a:p>
             <a:fld id="{B84C5C40-2055-49AF-9028-5DA79E75E391}" type="datetimeFigureOut">
               <a:rPr lang="en-US" smtClean="0"/>
-              <a:t>2/12/2026</a:t>
+              <a:t>2/19/2026</a:t>
             </a:fld>
             <a:endParaRPr lang="en-US"/>
           </a:p>
@@ -3029,7 +3049,7 @@
           <a:p>
             <a:fld id="{B84C5C40-2055-49AF-9028-5DA79E75E391}" type="datetimeFigureOut">
               <a:rPr lang="en-US" smtClean="0"/>
-              <a:t>2/12/2026</a:t>
+              <a:t>2/19/2026</a:t>
             </a:fld>
             <a:endParaRPr lang="en-US"/>
           </a:p>
@@ -3242,7 +3262,7 @@
           <a:p>
             <a:fld id="{B84C5C40-2055-49AF-9028-5DA79E75E391}" type="datetimeFigureOut">
               <a:rPr lang="en-US" smtClean="0"/>
-              <a:t>2/12/2026</a:t>
+              <a:t>2/19/2026</a:t>
             </a:fld>
             <a:endParaRPr lang="en-US"/>
           </a:p>
@@ -3718,6 +3738,255 @@
 </p:sld>
 </file>
 
+<file path=ppt/slides/slide10.xml><?xml version="1.0" encoding="utf-8"?>
+<p:sld xmlns:a="http://schemas.openxmlformats.org/drawingml/2006/main" xmlns:r="http://schemas.openxmlformats.org/officeDocument/2006/relationships" xmlns:p="http://schemas.openxmlformats.org/presentationml/2006/main">
+  <p:cSld>
+    <p:spTree>
+      <p:nvGrpSpPr>
+        <p:cNvPr id="1" name=""/>
+        <p:cNvGrpSpPr/>
+        <p:nvPr/>
+      </p:nvGrpSpPr>
+      <p:grpSpPr>
+        <a:xfrm>
+          <a:off x="0" y="0"/>
+          <a:ext cx="0" cy="0"/>
+          <a:chOff x="0" y="0"/>
+          <a:chExt cx="0" cy="0"/>
+        </a:xfrm>
+      </p:grpSpPr>
+    </p:spTree>
+    <p:extLst>
+      <p:ext uri="{BB962C8B-B14F-4D97-AF65-F5344CB8AC3E}">
+        <p14:creationId xmlns:p14="http://schemas.microsoft.com/office/powerpoint/2010/main" val="3058180586"/>
+      </p:ext>
+    </p:extLst>
+  </p:cSld>
+  <p:clrMapOvr>
+    <a:masterClrMapping/>
+  </p:clrMapOvr>
+</p:sld>
+</file>
+
+<file path=ppt/slides/slide11.xml><?xml version="1.0" encoding="utf-8"?>
+<p:sld xmlns:a="http://schemas.openxmlformats.org/drawingml/2006/main" xmlns:r="http://schemas.openxmlformats.org/officeDocument/2006/relationships" xmlns:p="http://schemas.openxmlformats.org/presentationml/2006/main">
+  <p:cSld>
+    <p:spTree>
+      <p:nvGrpSpPr>
+        <p:cNvPr id="1" name=""/>
+        <p:cNvGrpSpPr/>
+        <p:nvPr/>
+      </p:nvGrpSpPr>
+      <p:grpSpPr>
+        <a:xfrm>
+          <a:off x="0" y="0"/>
+          <a:ext cx="0" cy="0"/>
+          <a:chOff x="0" y="0"/>
+          <a:chExt cx="0" cy="0"/>
+        </a:xfrm>
+      </p:grpSpPr>
+      <p:pic>
+        <p:nvPicPr>
+          <p:cNvPr id="3" name="Picture 2">
+            <a:extLst>
+              <a:ext uri="{FF2B5EF4-FFF2-40B4-BE49-F238E27FC236}">
+                <a16:creationId xmlns:a16="http://schemas.microsoft.com/office/drawing/2014/main" id="{D6A42420-8E3C-777D-C41A-540741D913CD}"/>
+              </a:ext>
+            </a:extLst>
+          </p:cNvPr>
+          <p:cNvPicPr>
+            <a:picLocks noChangeAspect="1"/>
+          </p:cNvPicPr>
+          <p:nvPr/>
+        </p:nvPicPr>
+        <p:blipFill>
+          <a:blip r:embed="rId2"/>
+          <a:stretch>
+            <a:fillRect/>
+          </a:stretch>
+        </p:blipFill>
+        <p:spPr>
+          <a:xfrm>
+            <a:off x="0" y="7451"/>
+            <a:ext cx="12192000" cy="6843098"/>
+          </a:xfrm>
+          <a:prstGeom prst="rect">
+            <a:avLst/>
+          </a:prstGeom>
+        </p:spPr>
+      </p:pic>
+    </p:spTree>
+    <p:extLst>
+      <p:ext uri="{BB962C8B-B14F-4D97-AF65-F5344CB8AC3E}">
+        <p14:creationId xmlns:p14="http://schemas.microsoft.com/office/powerpoint/2010/main" val="3996994306"/>
+      </p:ext>
+    </p:extLst>
+  </p:cSld>
+  <p:clrMapOvr>
+    <a:masterClrMapping/>
+  </p:clrMapOvr>
+</p:sld>
+</file>
+
+<file path=ppt/slides/slide12.xml><?xml version="1.0" encoding="utf-8"?>
+<p:sld xmlns:a="http://schemas.openxmlformats.org/drawingml/2006/main" xmlns:r="http://schemas.openxmlformats.org/officeDocument/2006/relationships" xmlns:p="http://schemas.openxmlformats.org/presentationml/2006/main">
+  <p:cSld>
+    <p:spTree>
+      <p:nvGrpSpPr>
+        <p:cNvPr id="1" name=""/>
+        <p:cNvGrpSpPr/>
+        <p:nvPr/>
+      </p:nvGrpSpPr>
+      <p:grpSpPr>
+        <a:xfrm>
+          <a:off x="0" y="0"/>
+          <a:ext cx="0" cy="0"/>
+          <a:chOff x="0" y="0"/>
+          <a:chExt cx="0" cy="0"/>
+        </a:xfrm>
+      </p:grpSpPr>
+      <p:pic>
+        <p:nvPicPr>
+          <p:cNvPr id="1026" name="Picture 2">
+            <a:extLst>
+              <a:ext uri="{FF2B5EF4-FFF2-40B4-BE49-F238E27FC236}">
+                <a16:creationId xmlns:a16="http://schemas.microsoft.com/office/drawing/2014/main" id="{5F0DECF4-D97F-50C4-2BC6-FF6779833085}"/>
+              </a:ext>
+            </a:extLst>
+          </p:cNvPr>
+          <p:cNvPicPr>
+            <a:picLocks noChangeAspect="1" noChangeArrowheads="1"/>
+          </p:cNvPicPr>
+          <p:nvPr/>
+        </p:nvPicPr>
+        <p:blipFill>
+          <a:blip r:embed="rId2">
+            <a:extLst>
+              <a:ext uri="{28A0092B-C50C-407E-A947-70E740481C1C}">
+                <a14:useLocalDpi xmlns:a14="http://schemas.microsoft.com/office/drawing/2010/main" val="0"/>
+              </a:ext>
+            </a:extLst>
+          </a:blip>
+          <a:srcRect/>
+          <a:stretch>
+            <a:fillRect/>
+          </a:stretch>
+        </p:blipFill>
+        <p:spPr bwMode="auto">
+          <a:xfrm>
+            <a:off x="0" y="0"/>
+            <a:ext cx="5349875" cy="6858000"/>
+          </a:xfrm>
+          <a:prstGeom prst="rect">
+            <a:avLst/>
+          </a:prstGeom>
+          <a:noFill/>
+          <a:extLst>
+            <a:ext uri="{909E8E84-426E-40DD-AFC4-6F175D3DCCD1}">
+              <a14:hiddenFill xmlns:a14="http://schemas.microsoft.com/office/drawing/2010/main">
+                <a:solidFill>
+                  <a:srgbClr val="FFFFFF"/>
+                </a:solidFill>
+              </a14:hiddenFill>
+            </a:ext>
+          </a:extLst>
+        </p:spPr>
+      </p:pic>
+      <p:sp>
+        <p:nvSpPr>
+          <p:cNvPr id="5" name="TextBox 4">
+            <a:extLst>
+              <a:ext uri="{FF2B5EF4-FFF2-40B4-BE49-F238E27FC236}">
+                <a16:creationId xmlns:a16="http://schemas.microsoft.com/office/drawing/2014/main" id="{BDD578BC-5D7D-5C4C-8F29-72399D893A54}"/>
+              </a:ext>
+            </a:extLst>
+          </p:cNvPr>
+          <p:cNvSpPr txBox="1"/>
+          <p:nvPr/>
+        </p:nvSpPr>
+        <p:spPr>
+          <a:xfrm>
+            <a:off x="5920557" y="385224"/>
+            <a:ext cx="6097136" cy="646331"/>
+          </a:xfrm>
+          <a:prstGeom prst="rect">
+            <a:avLst/>
+          </a:prstGeom>
+          <a:noFill/>
+        </p:spPr>
+        <p:txBody>
+          <a:bodyPr wrap="square">
+            <a:spAutoFit/>
+          </a:bodyPr>
+          <a:lstStyle/>
+          <a:p>
+            <a:r>
+              <a:rPr lang="en-US" dirty="0"/>
+              <a:t>Style Guide: </a:t>
+            </a:r>
+            <a:r>
+              <a:rPr lang="en-US" dirty="0">
+                <a:hlinkClick r:id="rId3"/>
+              </a:rPr>
+              <a:t>https://oreillymedia.github.io/production-resources/illustrations/</a:t>
+            </a:r>
+            <a:r>
+              <a:rPr lang="en-US" dirty="0"/>
+              <a:t> </a:t>
+            </a:r>
+          </a:p>
+        </p:txBody>
+      </p:sp>
+      <p:sp>
+        <p:nvSpPr>
+          <p:cNvPr id="6" name="TextBox 5">
+            <a:extLst>
+              <a:ext uri="{FF2B5EF4-FFF2-40B4-BE49-F238E27FC236}">
+                <a16:creationId xmlns:a16="http://schemas.microsoft.com/office/drawing/2014/main" id="{73738677-70D9-CDFB-3CCB-A0A1A69FA2EC}"/>
+              </a:ext>
+            </a:extLst>
+          </p:cNvPr>
+          <p:cNvSpPr txBox="1"/>
+          <p:nvPr/>
+        </p:nvSpPr>
+        <p:spPr>
+          <a:xfrm>
+            <a:off x="7173532" y="1822360"/>
+            <a:ext cx="3167342" cy="369332"/>
+          </a:xfrm>
+          <a:prstGeom prst="rect">
+            <a:avLst/>
+          </a:prstGeom>
+          <a:noFill/>
+        </p:spPr>
+        <p:txBody>
+          <a:bodyPr wrap="none" rtlCol="0">
+            <a:spAutoFit/>
+          </a:bodyPr>
+          <a:lstStyle/>
+          <a:p>
+            <a:r>
+              <a:rPr lang="en-US" dirty="0">
+                <a:latin typeface="Guardian Sans Cond Medium" panose="020B0603030202060203" pitchFamily="34" charset="0"/>
+              </a:rPr>
+              <a:t>Fonts: Guardian Sans Cond Medium </a:t>
+            </a:r>
+          </a:p>
+        </p:txBody>
+      </p:sp>
+    </p:spTree>
+    <p:extLst>
+      <p:ext uri="{BB962C8B-B14F-4D97-AF65-F5344CB8AC3E}">
+        <p14:creationId xmlns:p14="http://schemas.microsoft.com/office/powerpoint/2010/main" val="1650268167"/>
+      </p:ext>
+    </p:extLst>
+  </p:cSld>
+  <p:clrMapOvr>
+    <a:masterClrMapping/>
+  </p:clrMapOvr>
+</p:sld>
+</file>
+
 <file path=ppt/slides/slide2.xml><?xml version="1.0" encoding="utf-8"?>
 <p:sld xmlns:a="http://schemas.openxmlformats.org/drawingml/2006/main" xmlns:r="http://schemas.openxmlformats.org/officeDocument/2006/relationships" xmlns:p="http://schemas.openxmlformats.org/presentationml/2006/main">
   <p:cSld>
@@ -4349,6 +4618,2625 @@
 </file>
 
 <file path=ppt/slides/slide3.xml><?xml version="1.0" encoding="utf-8"?>
+<p:sld xmlns:a="http://schemas.openxmlformats.org/drawingml/2006/main" xmlns:r="http://schemas.openxmlformats.org/officeDocument/2006/relationships" xmlns:p="http://schemas.openxmlformats.org/presentationml/2006/main">
+  <p:cSld>
+    <p:spTree>
+      <p:nvGrpSpPr>
+        <p:cNvPr id="1" name=""/>
+        <p:cNvGrpSpPr/>
+        <p:nvPr/>
+      </p:nvGrpSpPr>
+      <p:grpSpPr>
+        <a:xfrm>
+          <a:off x="0" y="0"/>
+          <a:ext cx="0" cy="0"/>
+          <a:chOff x="0" y="0"/>
+          <a:chExt cx="0" cy="0"/>
+        </a:xfrm>
+      </p:grpSpPr>
+      <p:sp>
+        <p:nvSpPr>
+          <p:cNvPr id="2" name="Rectangle: Rounded Corners 1">
+            <a:extLst>
+              <a:ext uri="{FF2B5EF4-FFF2-40B4-BE49-F238E27FC236}">
+                <a16:creationId xmlns:a16="http://schemas.microsoft.com/office/drawing/2014/main" id="{2373B790-295F-D9C9-ECAF-274F835713B8}"/>
+              </a:ext>
+            </a:extLst>
+          </p:cNvPr>
+          <p:cNvSpPr/>
+          <p:nvPr/>
+        </p:nvSpPr>
+        <p:spPr>
+          <a:xfrm>
+            <a:off x="1683600" y="1280957"/>
+            <a:ext cx="8633879" cy="3298663"/>
+          </a:xfrm>
+          <a:prstGeom prst="roundRect">
+            <a:avLst>
+              <a:gd name="adj" fmla="val 5234"/>
+            </a:avLst>
+          </a:prstGeom>
+          <a:solidFill>
+            <a:schemeClr val="bg1"/>
+          </a:solidFill>
+          <a:ln>
+            <a:solidFill>
+              <a:schemeClr val="tx1"/>
+            </a:solidFill>
+          </a:ln>
+        </p:spPr>
+        <p:style>
+          <a:lnRef idx="2">
+            <a:schemeClr val="accent1">
+              <a:shade val="15000"/>
+            </a:schemeClr>
+          </a:lnRef>
+          <a:fillRef idx="1">
+            <a:schemeClr val="accent1"/>
+          </a:fillRef>
+          <a:effectRef idx="0">
+            <a:schemeClr val="accent1"/>
+          </a:effectRef>
+          <a:fontRef idx="minor">
+            <a:schemeClr val="lt1"/>
+          </a:fontRef>
+        </p:style>
+        <p:txBody>
+          <a:bodyPr rtlCol="0" anchor="ctr"/>
+          <a:lstStyle/>
+          <a:p>
+            <a:pPr algn="ctr"/>
+            <a:endParaRPr lang="en-US" dirty="0">
+              <a:solidFill>
+                <a:schemeClr val="tx1"/>
+              </a:solidFill>
+            </a:endParaRPr>
+          </a:p>
+        </p:txBody>
+      </p:sp>
+      <p:sp>
+        <p:nvSpPr>
+          <p:cNvPr id="3" name="Rectangle: Rounded Corners 2">
+            <a:extLst>
+              <a:ext uri="{FF2B5EF4-FFF2-40B4-BE49-F238E27FC236}">
+                <a16:creationId xmlns:a16="http://schemas.microsoft.com/office/drawing/2014/main" id="{AF807674-F982-3E42-18FF-10D7E9818E10}"/>
+              </a:ext>
+            </a:extLst>
+          </p:cNvPr>
+          <p:cNvSpPr/>
+          <p:nvPr/>
+        </p:nvSpPr>
+        <p:spPr>
+          <a:xfrm>
+            <a:off x="3993377" y="4394954"/>
+            <a:ext cx="4014323" cy="369332"/>
+          </a:xfrm>
+          <a:prstGeom prst="roundRect">
+            <a:avLst/>
+          </a:prstGeom>
+          <a:solidFill>
+            <a:srgbClr val="B2D4EB"/>
+          </a:solidFill>
+          <a:ln>
+            <a:solidFill>
+              <a:schemeClr val="tx1"/>
+            </a:solidFill>
+          </a:ln>
+        </p:spPr>
+        <p:style>
+          <a:lnRef idx="2">
+            <a:schemeClr val="accent1">
+              <a:shade val="15000"/>
+            </a:schemeClr>
+          </a:lnRef>
+          <a:fillRef idx="1">
+            <a:schemeClr val="accent1"/>
+          </a:fillRef>
+          <a:effectRef idx="0">
+            <a:schemeClr val="accent1"/>
+          </a:effectRef>
+          <a:fontRef idx="minor">
+            <a:schemeClr val="lt1"/>
+          </a:fontRef>
+        </p:style>
+        <p:txBody>
+          <a:bodyPr rtlCol="0" anchor="ctr"/>
+          <a:lstStyle/>
+          <a:p>
+            <a:pPr algn="ctr"/>
+            <a:r>
+              <a:rPr lang="en-US" dirty="0">
+                <a:solidFill>
+                  <a:schemeClr val="tx1"/>
+                </a:solidFill>
+              </a:rPr>
+              <a:t>Security, Compliance, and Governance</a:t>
+            </a:r>
+            <a:endParaRPr lang="en-US" i="1" dirty="0">
+              <a:solidFill>
+                <a:schemeClr val="tx1"/>
+              </a:solidFill>
+            </a:endParaRPr>
+          </a:p>
+        </p:txBody>
+      </p:sp>
+      <p:sp>
+        <p:nvSpPr>
+          <p:cNvPr id="4" name="Rectangle: Rounded Corners 3">
+            <a:extLst>
+              <a:ext uri="{FF2B5EF4-FFF2-40B4-BE49-F238E27FC236}">
+                <a16:creationId xmlns:a16="http://schemas.microsoft.com/office/drawing/2014/main" id="{6504FE7B-F946-B4E5-5540-DCBF24C5EE02}"/>
+              </a:ext>
+            </a:extLst>
+          </p:cNvPr>
+          <p:cNvSpPr/>
+          <p:nvPr/>
+        </p:nvSpPr>
+        <p:spPr>
+          <a:xfrm>
+            <a:off x="2120712" y="1629580"/>
+            <a:ext cx="1097280" cy="1097280"/>
+          </a:xfrm>
+          <a:prstGeom prst="roundRect">
+            <a:avLst/>
+          </a:prstGeom>
+          <a:solidFill>
+            <a:srgbClr val="E5F1F8"/>
+          </a:solidFill>
+          <a:ln>
+            <a:solidFill>
+              <a:schemeClr val="tx1"/>
+            </a:solidFill>
+          </a:ln>
+        </p:spPr>
+        <p:style>
+          <a:lnRef idx="2">
+            <a:schemeClr val="accent1">
+              <a:shade val="15000"/>
+            </a:schemeClr>
+          </a:lnRef>
+          <a:fillRef idx="1">
+            <a:schemeClr val="accent1"/>
+          </a:fillRef>
+          <a:effectRef idx="0">
+            <a:schemeClr val="accent1"/>
+          </a:effectRef>
+          <a:fontRef idx="minor">
+            <a:schemeClr val="lt1"/>
+          </a:fontRef>
+        </p:style>
+        <p:txBody>
+          <a:bodyPr rtlCol="0" anchor="b"/>
+          <a:lstStyle/>
+          <a:p>
+            <a:pPr algn="ctr"/>
+            <a:r>
+              <a:rPr lang="en-US" dirty="0">
+                <a:solidFill>
+                  <a:schemeClr val="tx1"/>
+                </a:solidFill>
+              </a:rPr>
+              <a:t>Models</a:t>
+            </a:r>
+          </a:p>
+        </p:txBody>
+      </p:sp>
+      <p:sp>
+        <p:nvSpPr>
+          <p:cNvPr id="5" name="Rectangle: Rounded Corners 4">
+            <a:extLst>
+              <a:ext uri="{FF2B5EF4-FFF2-40B4-BE49-F238E27FC236}">
+                <a16:creationId xmlns:a16="http://schemas.microsoft.com/office/drawing/2014/main" id="{CCD72E2D-BA5E-4BD0-251B-D709E59BA6AA}"/>
+              </a:ext>
+            </a:extLst>
+          </p:cNvPr>
+          <p:cNvSpPr/>
+          <p:nvPr/>
+        </p:nvSpPr>
+        <p:spPr>
+          <a:xfrm>
+            <a:off x="5547360" y="1629580"/>
+            <a:ext cx="1097280" cy="1097280"/>
+          </a:xfrm>
+          <a:prstGeom prst="roundRect">
+            <a:avLst/>
+          </a:prstGeom>
+          <a:solidFill>
+            <a:srgbClr val="E5F1F8"/>
+          </a:solidFill>
+          <a:ln>
+            <a:solidFill>
+              <a:schemeClr val="tx1"/>
+            </a:solidFill>
+          </a:ln>
+        </p:spPr>
+        <p:style>
+          <a:lnRef idx="2">
+            <a:schemeClr val="accent1">
+              <a:shade val="15000"/>
+            </a:schemeClr>
+          </a:lnRef>
+          <a:fillRef idx="1">
+            <a:schemeClr val="accent1"/>
+          </a:fillRef>
+          <a:effectRef idx="0">
+            <a:schemeClr val="accent1"/>
+          </a:effectRef>
+          <a:fontRef idx="minor">
+            <a:schemeClr val="lt1"/>
+          </a:fontRef>
+        </p:style>
+        <p:txBody>
+          <a:bodyPr rtlCol="0" anchor="b"/>
+          <a:lstStyle/>
+          <a:p>
+            <a:pPr algn="ctr"/>
+            <a:r>
+              <a:rPr lang="en-US" dirty="0">
+                <a:solidFill>
+                  <a:schemeClr val="tx1"/>
+                </a:solidFill>
+              </a:rPr>
+              <a:t>IQ</a:t>
+            </a:r>
+          </a:p>
+        </p:txBody>
+      </p:sp>
+      <p:sp>
+        <p:nvSpPr>
+          <p:cNvPr id="6" name="Rectangle: Rounded Corners 5">
+            <a:extLst>
+              <a:ext uri="{FF2B5EF4-FFF2-40B4-BE49-F238E27FC236}">
+                <a16:creationId xmlns:a16="http://schemas.microsoft.com/office/drawing/2014/main" id="{8A00E6D5-7A21-352C-E165-8534FCB5922A}"/>
+              </a:ext>
+            </a:extLst>
+          </p:cNvPr>
+          <p:cNvSpPr/>
+          <p:nvPr/>
+        </p:nvSpPr>
+        <p:spPr>
+          <a:xfrm>
+            <a:off x="3834036" y="1629580"/>
+            <a:ext cx="1097280" cy="1097280"/>
+          </a:xfrm>
+          <a:prstGeom prst="roundRect">
+            <a:avLst/>
+          </a:prstGeom>
+          <a:solidFill>
+            <a:srgbClr val="E5F1F8"/>
+          </a:solidFill>
+          <a:ln>
+            <a:solidFill>
+              <a:schemeClr val="tx1"/>
+            </a:solidFill>
+          </a:ln>
+        </p:spPr>
+        <p:style>
+          <a:lnRef idx="2">
+            <a:schemeClr val="accent1">
+              <a:shade val="15000"/>
+            </a:schemeClr>
+          </a:lnRef>
+          <a:fillRef idx="1">
+            <a:schemeClr val="accent1"/>
+          </a:fillRef>
+          <a:effectRef idx="0">
+            <a:schemeClr val="accent1"/>
+          </a:effectRef>
+          <a:fontRef idx="minor">
+            <a:schemeClr val="lt1"/>
+          </a:fontRef>
+        </p:style>
+        <p:txBody>
+          <a:bodyPr rtlCol="0" anchor="b"/>
+          <a:lstStyle/>
+          <a:p>
+            <a:pPr algn="ctr"/>
+            <a:r>
+              <a:rPr lang="en-US" dirty="0">
+                <a:solidFill>
+                  <a:schemeClr val="tx1"/>
+                </a:solidFill>
+              </a:rPr>
+              <a:t>Agents</a:t>
+            </a:r>
+          </a:p>
+        </p:txBody>
+      </p:sp>
+      <p:sp>
+        <p:nvSpPr>
+          <p:cNvPr id="7" name="Rectangle: Rounded Corners 6">
+            <a:extLst>
+              <a:ext uri="{FF2B5EF4-FFF2-40B4-BE49-F238E27FC236}">
+                <a16:creationId xmlns:a16="http://schemas.microsoft.com/office/drawing/2014/main" id="{FEFF2ADF-7ABC-2B4F-15DA-147A653CA05E}"/>
+              </a:ext>
+            </a:extLst>
+          </p:cNvPr>
+          <p:cNvSpPr/>
+          <p:nvPr/>
+        </p:nvSpPr>
+        <p:spPr>
+          <a:xfrm>
+            <a:off x="7260684" y="1629580"/>
+            <a:ext cx="1097280" cy="1097280"/>
+          </a:xfrm>
+          <a:prstGeom prst="roundRect">
+            <a:avLst/>
+          </a:prstGeom>
+          <a:solidFill>
+            <a:srgbClr val="E5F1F8"/>
+          </a:solidFill>
+          <a:ln>
+            <a:solidFill>
+              <a:schemeClr val="tx1"/>
+            </a:solidFill>
+          </a:ln>
+        </p:spPr>
+        <p:style>
+          <a:lnRef idx="2">
+            <a:schemeClr val="accent1">
+              <a:shade val="15000"/>
+            </a:schemeClr>
+          </a:lnRef>
+          <a:fillRef idx="1">
+            <a:schemeClr val="accent1"/>
+          </a:fillRef>
+          <a:effectRef idx="0">
+            <a:schemeClr val="accent1"/>
+          </a:effectRef>
+          <a:fontRef idx="minor">
+            <a:schemeClr val="lt1"/>
+          </a:fontRef>
+        </p:style>
+        <p:txBody>
+          <a:bodyPr rtlCol="0" anchor="b"/>
+          <a:lstStyle/>
+          <a:p>
+            <a:pPr algn="ctr"/>
+            <a:r>
+              <a:rPr lang="en-US" dirty="0">
+                <a:solidFill>
+                  <a:schemeClr val="tx1"/>
+                </a:solidFill>
+              </a:rPr>
+              <a:t>Tools</a:t>
+            </a:r>
+          </a:p>
+        </p:txBody>
+      </p:sp>
+      <p:sp>
+        <p:nvSpPr>
+          <p:cNvPr id="8" name="Rectangle: Rounded Corners 7">
+            <a:extLst>
+              <a:ext uri="{FF2B5EF4-FFF2-40B4-BE49-F238E27FC236}">
+                <a16:creationId xmlns:a16="http://schemas.microsoft.com/office/drawing/2014/main" id="{B911A12B-43CF-B03D-9C15-EC0C073F267F}"/>
+              </a:ext>
+            </a:extLst>
+          </p:cNvPr>
+          <p:cNvSpPr/>
+          <p:nvPr/>
+        </p:nvSpPr>
+        <p:spPr>
+          <a:xfrm>
+            <a:off x="8974008" y="1629580"/>
+            <a:ext cx="1097280" cy="1097280"/>
+          </a:xfrm>
+          <a:prstGeom prst="roundRect">
+            <a:avLst/>
+          </a:prstGeom>
+          <a:solidFill>
+            <a:srgbClr val="E5F1F8"/>
+          </a:solidFill>
+          <a:ln>
+            <a:solidFill>
+              <a:schemeClr val="tx1"/>
+            </a:solidFill>
+          </a:ln>
+        </p:spPr>
+        <p:style>
+          <a:lnRef idx="2">
+            <a:schemeClr val="accent1">
+              <a:shade val="15000"/>
+            </a:schemeClr>
+          </a:lnRef>
+          <a:fillRef idx="1">
+            <a:schemeClr val="accent1"/>
+          </a:fillRef>
+          <a:effectRef idx="0">
+            <a:schemeClr val="accent1"/>
+          </a:effectRef>
+          <a:fontRef idx="minor">
+            <a:schemeClr val="lt1"/>
+          </a:fontRef>
+        </p:style>
+        <p:txBody>
+          <a:bodyPr rtlCol="0" anchor="b"/>
+          <a:lstStyle/>
+          <a:p>
+            <a:pPr algn="ctr"/>
+            <a:r>
+              <a:rPr lang="en-US" dirty="0">
+                <a:solidFill>
+                  <a:schemeClr val="tx1"/>
+                </a:solidFill>
+              </a:rPr>
+              <a:t>Local</a:t>
+            </a:r>
+          </a:p>
+        </p:txBody>
+      </p:sp>
+      <p:sp>
+        <p:nvSpPr>
+          <p:cNvPr id="9" name="Rectangle: Rounded Corners 8">
+            <a:extLst>
+              <a:ext uri="{FF2B5EF4-FFF2-40B4-BE49-F238E27FC236}">
+                <a16:creationId xmlns:a16="http://schemas.microsoft.com/office/drawing/2014/main" id="{29E82D6B-67A5-FB5E-86C8-E494906EBA72}"/>
+              </a:ext>
+            </a:extLst>
+          </p:cNvPr>
+          <p:cNvSpPr/>
+          <p:nvPr/>
+        </p:nvSpPr>
+        <p:spPr>
+          <a:xfrm>
+            <a:off x="2120712" y="3075483"/>
+            <a:ext cx="7950576" cy="521732"/>
+          </a:xfrm>
+          <a:prstGeom prst="roundRect">
+            <a:avLst/>
+          </a:prstGeom>
+          <a:solidFill>
+            <a:srgbClr val="E5F1F8"/>
+          </a:solidFill>
+          <a:ln>
+            <a:solidFill>
+              <a:schemeClr val="tx1"/>
+            </a:solidFill>
+          </a:ln>
+        </p:spPr>
+        <p:style>
+          <a:lnRef idx="2">
+            <a:schemeClr val="accent1">
+              <a:shade val="15000"/>
+            </a:schemeClr>
+          </a:lnRef>
+          <a:fillRef idx="1">
+            <a:schemeClr val="accent1"/>
+          </a:fillRef>
+          <a:effectRef idx="0">
+            <a:schemeClr val="accent1"/>
+          </a:effectRef>
+          <a:fontRef idx="minor">
+            <a:schemeClr val="lt1"/>
+          </a:fontRef>
+        </p:style>
+        <p:txBody>
+          <a:bodyPr rtlCol="0" anchor="ctr"/>
+          <a:lstStyle/>
+          <a:p>
+            <a:pPr algn="ctr"/>
+            <a:r>
+              <a:rPr lang="en-US" dirty="0">
+                <a:solidFill>
+                  <a:schemeClr val="tx1"/>
+                </a:solidFill>
+              </a:rPr>
+              <a:t>Control Plane</a:t>
+            </a:r>
+          </a:p>
+        </p:txBody>
+      </p:sp>
+      <p:sp>
+        <p:nvSpPr>
+          <p:cNvPr id="10" name="Rectangle: Rounded Corners 9">
+            <a:extLst>
+              <a:ext uri="{FF2B5EF4-FFF2-40B4-BE49-F238E27FC236}">
+                <a16:creationId xmlns:a16="http://schemas.microsoft.com/office/drawing/2014/main" id="{B8A0002D-68DE-F2E3-7AE8-155E2AE2F385}"/>
+              </a:ext>
+            </a:extLst>
+          </p:cNvPr>
+          <p:cNvSpPr/>
+          <p:nvPr/>
+        </p:nvSpPr>
+        <p:spPr>
+          <a:xfrm>
+            <a:off x="2120712" y="3903751"/>
+            <a:ext cx="1097280" cy="369332"/>
+          </a:xfrm>
+          <a:prstGeom prst="roundRect">
+            <a:avLst>
+              <a:gd name="adj" fmla="val 50000"/>
+            </a:avLst>
+          </a:prstGeom>
+          <a:solidFill>
+            <a:srgbClr val="B2D4EB"/>
+          </a:solidFill>
+          <a:ln>
+            <a:solidFill>
+              <a:schemeClr val="tx1"/>
+            </a:solidFill>
+          </a:ln>
+        </p:spPr>
+        <p:style>
+          <a:lnRef idx="2">
+            <a:schemeClr val="accent1">
+              <a:shade val="15000"/>
+            </a:schemeClr>
+          </a:lnRef>
+          <a:fillRef idx="1">
+            <a:schemeClr val="accent1"/>
+          </a:fillRef>
+          <a:effectRef idx="0">
+            <a:schemeClr val="accent1"/>
+          </a:effectRef>
+          <a:fontRef idx="minor">
+            <a:schemeClr val="lt1"/>
+          </a:fontRef>
+        </p:style>
+        <p:txBody>
+          <a:bodyPr rtlCol="0" anchor="ctr"/>
+          <a:lstStyle/>
+          <a:p>
+            <a:pPr algn="ctr"/>
+            <a:r>
+              <a:rPr lang="en-US" dirty="0">
+                <a:solidFill>
+                  <a:schemeClr val="tx1"/>
+                </a:solidFill>
+              </a:rPr>
+              <a:t>Cloud</a:t>
+            </a:r>
+            <a:endParaRPr lang="en-US" i="1" dirty="0">
+              <a:solidFill>
+                <a:schemeClr val="tx1"/>
+              </a:solidFill>
+            </a:endParaRPr>
+          </a:p>
+        </p:txBody>
+      </p:sp>
+      <p:sp>
+        <p:nvSpPr>
+          <p:cNvPr id="11" name="Rectangle: Rounded Corners 10">
+            <a:extLst>
+              <a:ext uri="{FF2B5EF4-FFF2-40B4-BE49-F238E27FC236}">
+                <a16:creationId xmlns:a16="http://schemas.microsoft.com/office/drawing/2014/main" id="{275A5F02-D45E-7075-0A8E-DE47614A9350}"/>
+              </a:ext>
+            </a:extLst>
+          </p:cNvPr>
+          <p:cNvSpPr/>
+          <p:nvPr/>
+        </p:nvSpPr>
+        <p:spPr>
+          <a:xfrm>
+            <a:off x="8974008" y="3900228"/>
+            <a:ext cx="1097280" cy="369332"/>
+          </a:xfrm>
+          <a:prstGeom prst="roundRect">
+            <a:avLst>
+              <a:gd name="adj" fmla="val 50000"/>
+            </a:avLst>
+          </a:prstGeom>
+          <a:solidFill>
+            <a:srgbClr val="B2D4EB"/>
+          </a:solidFill>
+          <a:ln>
+            <a:solidFill>
+              <a:schemeClr val="tx1"/>
+            </a:solidFill>
+          </a:ln>
+        </p:spPr>
+        <p:style>
+          <a:lnRef idx="2">
+            <a:schemeClr val="accent1">
+              <a:shade val="15000"/>
+            </a:schemeClr>
+          </a:lnRef>
+          <a:fillRef idx="1">
+            <a:schemeClr val="accent1"/>
+          </a:fillRef>
+          <a:effectRef idx="0">
+            <a:schemeClr val="accent1"/>
+          </a:effectRef>
+          <a:fontRef idx="minor">
+            <a:schemeClr val="lt1"/>
+          </a:fontRef>
+        </p:style>
+        <p:txBody>
+          <a:bodyPr rtlCol="0" anchor="ctr"/>
+          <a:lstStyle/>
+          <a:p>
+            <a:pPr algn="ctr"/>
+            <a:r>
+              <a:rPr lang="en-US" dirty="0">
+                <a:solidFill>
+                  <a:schemeClr val="tx1"/>
+                </a:solidFill>
+              </a:rPr>
+              <a:t>Edge</a:t>
+            </a:r>
+            <a:endParaRPr lang="en-US" i="1" dirty="0">
+              <a:solidFill>
+                <a:schemeClr val="tx1"/>
+              </a:solidFill>
+            </a:endParaRPr>
+          </a:p>
+        </p:txBody>
+      </p:sp>
+      <p:cxnSp>
+        <p:nvCxnSpPr>
+          <p:cNvPr id="12" name="Straight Arrow Connector 11">
+            <a:extLst>
+              <a:ext uri="{FF2B5EF4-FFF2-40B4-BE49-F238E27FC236}">
+                <a16:creationId xmlns:a16="http://schemas.microsoft.com/office/drawing/2014/main" id="{059E589C-158C-8464-335B-8E038EB59CAF}"/>
+              </a:ext>
+            </a:extLst>
+          </p:cNvPr>
+          <p:cNvCxnSpPr>
+            <a:cxnSpLocks/>
+            <a:stCxn id="10" idx="3"/>
+            <a:endCxn id="11" idx="1"/>
+          </p:cNvCxnSpPr>
+          <p:nvPr/>
+        </p:nvCxnSpPr>
+        <p:spPr>
+          <a:xfrm flipV="1">
+            <a:off x="3217992" y="4084894"/>
+            <a:ext cx="5756016" cy="3523"/>
+          </a:xfrm>
+          <a:prstGeom prst="straightConnector1">
+            <a:avLst/>
+          </a:prstGeom>
+          <a:ln>
+            <a:solidFill>
+              <a:schemeClr val="tx1"/>
+            </a:solidFill>
+            <a:prstDash val="solid"/>
+            <a:headEnd type="triangle" w="lg" len="lg"/>
+            <a:tailEnd type="triangle" w="lg" len="lg"/>
+          </a:ln>
+        </p:spPr>
+        <p:style>
+          <a:lnRef idx="2">
+            <a:schemeClr val="accent1"/>
+          </a:lnRef>
+          <a:fillRef idx="0">
+            <a:schemeClr val="accent1"/>
+          </a:fillRef>
+          <a:effectRef idx="1">
+            <a:schemeClr val="accent1"/>
+          </a:effectRef>
+          <a:fontRef idx="minor">
+            <a:schemeClr val="tx1"/>
+          </a:fontRef>
+        </p:style>
+      </p:cxnSp>
+      <p:pic>
+        <p:nvPicPr>
+          <p:cNvPr id="1030" name="Picture 6">
+            <a:extLst>
+              <a:ext uri="{FF2B5EF4-FFF2-40B4-BE49-F238E27FC236}">
+                <a16:creationId xmlns:a16="http://schemas.microsoft.com/office/drawing/2014/main" id="{8D6EF364-A0CD-1E0B-E3D9-D7610B0BA01B}"/>
+              </a:ext>
+            </a:extLst>
+          </p:cNvPr>
+          <p:cNvPicPr>
+            <a:picLocks noChangeAspect="1" noChangeArrowheads="1"/>
+          </p:cNvPicPr>
+          <p:nvPr/>
+        </p:nvPicPr>
+        <p:blipFill>
+          <a:blip r:embed="rId2">
+            <a:extLst>
+              <a:ext uri="{28A0092B-C50C-407E-A947-70E740481C1C}">
+                <a14:useLocalDpi xmlns:a14="http://schemas.microsoft.com/office/drawing/2010/main" val="0"/>
+              </a:ext>
+            </a:extLst>
+          </a:blip>
+          <a:srcRect/>
+          <a:stretch>
+            <a:fillRect/>
+          </a:stretch>
+        </p:blipFill>
+        <p:spPr bwMode="auto">
+          <a:xfrm>
+            <a:off x="2326452" y="1698160"/>
+            <a:ext cx="685800" cy="685800"/>
+          </a:xfrm>
+          <a:prstGeom prst="rect">
+            <a:avLst/>
+          </a:prstGeom>
+          <a:noFill/>
+          <a:extLst>
+            <a:ext uri="{909E8E84-426E-40DD-AFC4-6F175D3DCCD1}">
+              <a14:hiddenFill xmlns:a14="http://schemas.microsoft.com/office/drawing/2010/main">
+                <a:solidFill>
+                  <a:srgbClr val="FFFFFF"/>
+                </a:solidFill>
+              </a14:hiddenFill>
+            </a:ext>
+          </a:extLst>
+        </p:spPr>
+      </p:pic>
+      <p:pic>
+        <p:nvPicPr>
+          <p:cNvPr id="1034" name="Picture 10">
+            <a:extLst>
+              <a:ext uri="{FF2B5EF4-FFF2-40B4-BE49-F238E27FC236}">
+                <a16:creationId xmlns:a16="http://schemas.microsoft.com/office/drawing/2014/main" id="{584812A5-BC6A-1A0C-EC5F-293C5EE9341F}"/>
+              </a:ext>
+            </a:extLst>
+          </p:cNvPr>
+          <p:cNvPicPr>
+            <a:picLocks noChangeAspect="1" noChangeArrowheads="1"/>
+          </p:cNvPicPr>
+          <p:nvPr/>
+        </p:nvPicPr>
+        <p:blipFill>
+          <a:blip r:embed="rId3">
+            <a:extLst>
+              <a:ext uri="{28A0092B-C50C-407E-A947-70E740481C1C}">
+                <a14:useLocalDpi xmlns:a14="http://schemas.microsoft.com/office/drawing/2010/main" val="0"/>
+              </a:ext>
+            </a:extLst>
+          </a:blip>
+          <a:srcRect/>
+          <a:stretch>
+            <a:fillRect/>
+          </a:stretch>
+        </p:blipFill>
+        <p:spPr bwMode="auto">
+          <a:xfrm>
+            <a:off x="5753100" y="1698160"/>
+            <a:ext cx="685800" cy="685800"/>
+          </a:xfrm>
+          <a:prstGeom prst="rect">
+            <a:avLst/>
+          </a:prstGeom>
+          <a:noFill/>
+          <a:extLst>
+            <a:ext uri="{909E8E84-426E-40DD-AFC4-6F175D3DCCD1}">
+              <a14:hiddenFill xmlns:a14="http://schemas.microsoft.com/office/drawing/2010/main">
+                <a:solidFill>
+                  <a:srgbClr val="FFFFFF"/>
+                </a:solidFill>
+              </a14:hiddenFill>
+            </a:ext>
+          </a:extLst>
+        </p:spPr>
+      </p:pic>
+      <p:sp>
+        <p:nvSpPr>
+          <p:cNvPr id="16" name="TextBox 15">
+            <a:extLst>
+              <a:ext uri="{FF2B5EF4-FFF2-40B4-BE49-F238E27FC236}">
+                <a16:creationId xmlns:a16="http://schemas.microsoft.com/office/drawing/2014/main" id="{75C2BE62-4319-90A2-F77A-43FBCCB45A92}"/>
+              </a:ext>
+            </a:extLst>
+          </p:cNvPr>
+          <p:cNvSpPr txBox="1"/>
+          <p:nvPr/>
+        </p:nvSpPr>
+        <p:spPr>
+          <a:xfrm>
+            <a:off x="169992" y="6374146"/>
+            <a:ext cx="6096000" cy="369332"/>
+          </a:xfrm>
+          <a:prstGeom prst="rect">
+            <a:avLst/>
+          </a:prstGeom>
+          <a:noFill/>
+        </p:spPr>
+        <p:txBody>
+          <a:bodyPr wrap="square">
+            <a:spAutoFit/>
+          </a:bodyPr>
+          <a:lstStyle/>
+          <a:p>
+            <a:r>
+              <a:rPr lang="en-US" dirty="0">
+                <a:hlinkClick r:id="rId4"/>
+              </a:rPr>
+              <a:t>Microsoft Foundry documentation | Microsoft Learn</a:t>
+            </a:r>
+            <a:endParaRPr lang="en-US" dirty="0"/>
+          </a:p>
+        </p:txBody>
+      </p:sp>
+      <p:pic>
+        <p:nvPicPr>
+          <p:cNvPr id="1036" name="Picture 12">
+            <a:extLst>
+              <a:ext uri="{FF2B5EF4-FFF2-40B4-BE49-F238E27FC236}">
+                <a16:creationId xmlns:a16="http://schemas.microsoft.com/office/drawing/2014/main" id="{2C06DA4A-A0CA-3F11-FBF2-7675DC8920F6}"/>
+              </a:ext>
+            </a:extLst>
+          </p:cNvPr>
+          <p:cNvPicPr>
+            <a:picLocks noChangeAspect="1" noChangeArrowheads="1"/>
+          </p:cNvPicPr>
+          <p:nvPr/>
+        </p:nvPicPr>
+        <p:blipFill>
+          <a:blip r:embed="rId5">
+            <a:extLst>
+              <a:ext uri="{28A0092B-C50C-407E-A947-70E740481C1C}">
+                <a14:useLocalDpi xmlns:a14="http://schemas.microsoft.com/office/drawing/2010/main" val="0"/>
+              </a:ext>
+            </a:extLst>
+          </a:blip>
+          <a:srcRect/>
+          <a:stretch>
+            <a:fillRect/>
+          </a:stretch>
+        </p:blipFill>
+        <p:spPr bwMode="auto">
+          <a:xfrm>
+            <a:off x="9179748" y="1698160"/>
+            <a:ext cx="685800" cy="685800"/>
+          </a:xfrm>
+          <a:prstGeom prst="rect">
+            <a:avLst/>
+          </a:prstGeom>
+          <a:noFill/>
+          <a:extLst>
+            <a:ext uri="{909E8E84-426E-40DD-AFC4-6F175D3DCCD1}">
+              <a14:hiddenFill xmlns:a14="http://schemas.microsoft.com/office/drawing/2010/main">
+                <a:solidFill>
+                  <a:srgbClr val="FFFFFF"/>
+                </a:solidFill>
+              </a14:hiddenFill>
+            </a:ext>
+          </a:extLst>
+        </p:spPr>
+      </p:pic>
+      <p:pic>
+        <p:nvPicPr>
+          <p:cNvPr id="1038" name="Picture 14">
+            <a:extLst>
+              <a:ext uri="{FF2B5EF4-FFF2-40B4-BE49-F238E27FC236}">
+                <a16:creationId xmlns:a16="http://schemas.microsoft.com/office/drawing/2014/main" id="{BBE57FCA-085E-B37C-A718-A5115481F51F}"/>
+              </a:ext>
+            </a:extLst>
+          </p:cNvPr>
+          <p:cNvPicPr>
+            <a:picLocks noChangeAspect="1" noChangeArrowheads="1"/>
+          </p:cNvPicPr>
+          <p:nvPr/>
+        </p:nvPicPr>
+        <p:blipFill>
+          <a:blip r:embed="rId6">
+            <a:extLst>
+              <a:ext uri="{28A0092B-C50C-407E-A947-70E740481C1C}">
+                <a14:useLocalDpi xmlns:a14="http://schemas.microsoft.com/office/drawing/2010/main" val="0"/>
+              </a:ext>
+            </a:extLst>
+          </a:blip>
+          <a:srcRect/>
+          <a:stretch>
+            <a:fillRect/>
+          </a:stretch>
+        </p:blipFill>
+        <p:spPr bwMode="auto">
+          <a:xfrm>
+            <a:off x="7466424" y="1698160"/>
+            <a:ext cx="685800" cy="685800"/>
+          </a:xfrm>
+          <a:prstGeom prst="rect">
+            <a:avLst/>
+          </a:prstGeom>
+          <a:noFill/>
+          <a:extLst>
+            <a:ext uri="{909E8E84-426E-40DD-AFC4-6F175D3DCCD1}">
+              <a14:hiddenFill xmlns:a14="http://schemas.microsoft.com/office/drawing/2010/main">
+                <a:solidFill>
+                  <a:srgbClr val="FFFFFF"/>
+                </a:solidFill>
+              </a14:hiddenFill>
+            </a:ext>
+          </a:extLst>
+        </p:spPr>
+      </p:pic>
+      <p:pic>
+        <p:nvPicPr>
+          <p:cNvPr id="21" name="Graphic 20">
+            <a:extLst>
+              <a:ext uri="{FF2B5EF4-FFF2-40B4-BE49-F238E27FC236}">
+                <a16:creationId xmlns:a16="http://schemas.microsoft.com/office/drawing/2014/main" id="{4DCAAB39-A56E-0DEE-C6B4-7E5D07F0EEB0}"/>
+              </a:ext>
+            </a:extLst>
+          </p:cNvPr>
+          <p:cNvPicPr>
+            <a:picLocks noChangeAspect="1"/>
+          </p:cNvPicPr>
+          <p:nvPr/>
+        </p:nvPicPr>
+        <p:blipFill>
+          <a:blip r:embed="rId7">
+            <a:extLst>
+              <a:ext uri="{96DAC541-7B7A-43D3-8B79-37D633B846F1}">
+                <asvg:svgBlip xmlns:asvg="http://schemas.microsoft.com/office/drawing/2016/SVG/main" r:embed="rId8"/>
+              </a:ext>
+            </a:extLst>
+          </a:blip>
+          <a:stretch>
+            <a:fillRect/>
+          </a:stretch>
+        </p:blipFill>
+        <p:spPr>
+          <a:xfrm>
+            <a:off x="5005387" y="3107749"/>
+            <a:ext cx="457200" cy="457200"/>
+          </a:xfrm>
+          <a:prstGeom prst="rect">
+            <a:avLst/>
+          </a:prstGeom>
+        </p:spPr>
+      </p:pic>
+      <p:pic>
+        <p:nvPicPr>
+          <p:cNvPr id="23" name="Graphic 22">
+            <a:extLst>
+              <a:ext uri="{FF2B5EF4-FFF2-40B4-BE49-F238E27FC236}">
+                <a16:creationId xmlns:a16="http://schemas.microsoft.com/office/drawing/2014/main" id="{9F45F68D-2016-AE28-5FB4-29299FA72985}"/>
+              </a:ext>
+            </a:extLst>
+          </p:cNvPr>
+          <p:cNvPicPr>
+            <a:picLocks noChangeAspect="1"/>
+          </p:cNvPicPr>
+          <p:nvPr/>
+        </p:nvPicPr>
+        <p:blipFill>
+          <a:blip r:embed="rId9">
+            <a:extLst>
+              <a:ext uri="{96DAC541-7B7A-43D3-8B79-37D633B846F1}">
+                <asvg:svgBlip xmlns:asvg="http://schemas.microsoft.com/office/drawing/2016/SVG/main" r:embed="rId10"/>
+              </a:ext>
+            </a:extLst>
+          </a:blip>
+          <a:stretch>
+            <a:fillRect/>
+          </a:stretch>
+        </p:blipFill>
+        <p:spPr>
+          <a:xfrm>
+            <a:off x="4039776" y="1698160"/>
+            <a:ext cx="685800" cy="685800"/>
+          </a:xfrm>
+          <a:prstGeom prst="rect">
+            <a:avLst/>
+          </a:prstGeom>
+        </p:spPr>
+      </p:pic>
+      <p:grpSp>
+        <p:nvGrpSpPr>
+          <p:cNvPr id="27" name="Group 26">
+            <a:extLst>
+              <a:ext uri="{FF2B5EF4-FFF2-40B4-BE49-F238E27FC236}">
+                <a16:creationId xmlns:a16="http://schemas.microsoft.com/office/drawing/2014/main" id="{220717FD-C295-A74B-1DD9-B84C288BFAF5}"/>
+              </a:ext>
+            </a:extLst>
+          </p:cNvPr>
+          <p:cNvGrpSpPr/>
+          <p:nvPr/>
+        </p:nvGrpSpPr>
+        <p:grpSpPr>
+          <a:xfrm>
+            <a:off x="4468860" y="550330"/>
+            <a:ext cx="3254280" cy="685800"/>
+            <a:chOff x="4558421" y="553105"/>
+            <a:chExt cx="3254280" cy="685800"/>
+          </a:xfrm>
+        </p:grpSpPr>
+        <p:pic>
+          <p:nvPicPr>
+            <p:cNvPr id="25" name="Picture 24">
+              <a:extLst>
+                <a:ext uri="{FF2B5EF4-FFF2-40B4-BE49-F238E27FC236}">
+                  <a16:creationId xmlns:a16="http://schemas.microsoft.com/office/drawing/2014/main" id="{637A2444-6EF1-C6ED-5009-47471D8E1AFB}"/>
+                </a:ext>
+              </a:extLst>
+            </p:cNvPr>
+            <p:cNvPicPr>
+              <a:picLocks noChangeAspect="1"/>
+            </p:cNvPicPr>
+            <p:nvPr/>
+          </p:nvPicPr>
+          <p:blipFill>
+            <a:blip r:embed="rId11">
+              <a:extLst>
+                <a:ext uri="{28A0092B-C50C-407E-A947-70E740481C1C}">
+                  <a14:useLocalDpi xmlns:a14="http://schemas.microsoft.com/office/drawing/2010/main" val="0"/>
+                </a:ext>
+              </a:extLst>
+            </a:blip>
+            <a:stretch>
+              <a:fillRect/>
+            </a:stretch>
+          </p:blipFill>
+          <p:spPr>
+            <a:xfrm>
+              <a:off x="4558421" y="553105"/>
+              <a:ext cx="750646" cy="685800"/>
+            </a:xfrm>
+            <a:prstGeom prst="rect">
+              <a:avLst/>
+            </a:prstGeom>
+          </p:spPr>
+        </p:pic>
+        <p:sp>
+          <p:nvSpPr>
+            <p:cNvPr id="26" name="TextBox 25">
+              <a:extLst>
+                <a:ext uri="{FF2B5EF4-FFF2-40B4-BE49-F238E27FC236}">
+                  <a16:creationId xmlns:a16="http://schemas.microsoft.com/office/drawing/2014/main" id="{AF52B155-53E9-CC0C-9CB8-93574EE705D4}"/>
+                </a:ext>
+              </a:extLst>
+            </p:cNvPr>
+            <p:cNvSpPr txBox="1"/>
+            <p:nvPr/>
+          </p:nvSpPr>
+          <p:spPr>
+            <a:xfrm>
+              <a:off x="5309067" y="634395"/>
+              <a:ext cx="2503634" cy="523220"/>
+            </a:xfrm>
+            <a:prstGeom prst="rect">
+              <a:avLst/>
+            </a:prstGeom>
+            <a:noFill/>
+          </p:spPr>
+          <p:txBody>
+            <a:bodyPr wrap="none" rtlCol="0">
+              <a:spAutoFit/>
+            </a:bodyPr>
+            <a:lstStyle/>
+            <a:p>
+              <a:r>
+                <a:rPr lang="en-US" sz="2800" dirty="0"/>
+                <a:t>Microsoft Foundry</a:t>
+              </a:r>
+            </a:p>
+          </p:txBody>
+        </p:sp>
+      </p:grpSp>
+    </p:spTree>
+    <p:extLst>
+      <p:ext uri="{BB962C8B-B14F-4D97-AF65-F5344CB8AC3E}">
+        <p14:creationId xmlns:p14="http://schemas.microsoft.com/office/powerpoint/2010/main" val="71902365"/>
+      </p:ext>
+    </p:extLst>
+  </p:cSld>
+  <p:clrMapOvr>
+    <a:masterClrMapping/>
+  </p:clrMapOvr>
+</p:sld>
+</file>
+
+<file path=ppt/slides/slide4.xml><?xml version="1.0" encoding="utf-8"?>
+<p:sld xmlns:a="http://schemas.openxmlformats.org/drawingml/2006/main" xmlns:r="http://schemas.openxmlformats.org/officeDocument/2006/relationships" xmlns:p="http://schemas.openxmlformats.org/presentationml/2006/main">
+  <p:cSld>
+    <p:spTree>
+      <p:nvGrpSpPr>
+        <p:cNvPr id="1" name=""/>
+        <p:cNvGrpSpPr/>
+        <p:nvPr/>
+      </p:nvGrpSpPr>
+      <p:grpSpPr>
+        <a:xfrm>
+          <a:off x="0" y="0"/>
+          <a:ext cx="0" cy="0"/>
+          <a:chOff x="0" y="0"/>
+          <a:chExt cx="0" cy="0"/>
+        </a:xfrm>
+      </p:grpSpPr>
+      <p:sp>
+        <p:nvSpPr>
+          <p:cNvPr id="2" name="Rectangle: Rounded Corners 1">
+            <a:extLst>
+              <a:ext uri="{FF2B5EF4-FFF2-40B4-BE49-F238E27FC236}">
+                <a16:creationId xmlns:a16="http://schemas.microsoft.com/office/drawing/2014/main" id="{ED732446-F0F6-0ACF-647A-3BC33E7C3D60}"/>
+              </a:ext>
+            </a:extLst>
+          </p:cNvPr>
+          <p:cNvSpPr/>
+          <p:nvPr/>
+        </p:nvSpPr>
+        <p:spPr>
+          <a:xfrm>
+            <a:off x="962567" y="281940"/>
+            <a:ext cx="10552099" cy="6187439"/>
+          </a:xfrm>
+          <a:prstGeom prst="roundRect">
+            <a:avLst>
+              <a:gd name="adj" fmla="val 5234"/>
+            </a:avLst>
+          </a:prstGeom>
+          <a:solidFill>
+            <a:schemeClr val="bg1"/>
+          </a:solidFill>
+          <a:ln>
+            <a:solidFill>
+              <a:schemeClr val="tx1"/>
+            </a:solidFill>
+          </a:ln>
+        </p:spPr>
+        <p:style>
+          <a:lnRef idx="2">
+            <a:schemeClr val="accent1">
+              <a:shade val="15000"/>
+            </a:schemeClr>
+          </a:lnRef>
+          <a:fillRef idx="1">
+            <a:schemeClr val="accent1"/>
+          </a:fillRef>
+          <a:effectRef idx="0">
+            <a:schemeClr val="accent1"/>
+          </a:effectRef>
+          <a:fontRef idx="minor">
+            <a:schemeClr val="lt1"/>
+          </a:fontRef>
+        </p:style>
+        <p:txBody>
+          <a:bodyPr rtlCol="0" anchor="t"/>
+          <a:lstStyle/>
+          <a:p>
+            <a:pPr algn="ctr"/>
+            <a:r>
+              <a:rPr lang="en-US" dirty="0">
+                <a:solidFill>
+                  <a:schemeClr val="tx1"/>
+                </a:solidFill>
+              </a:rPr>
+              <a:t>Example Models</a:t>
+            </a:r>
+          </a:p>
+        </p:txBody>
+      </p:sp>
+      <p:sp>
+        <p:nvSpPr>
+          <p:cNvPr id="3" name="Rectangle: Rounded Corners 2">
+            <a:extLst>
+              <a:ext uri="{FF2B5EF4-FFF2-40B4-BE49-F238E27FC236}">
+                <a16:creationId xmlns:a16="http://schemas.microsoft.com/office/drawing/2014/main" id="{5574ED1F-143F-F0C3-860B-D1D1A94B8038}"/>
+              </a:ext>
+            </a:extLst>
+          </p:cNvPr>
+          <p:cNvSpPr/>
+          <p:nvPr/>
+        </p:nvSpPr>
+        <p:spPr>
+          <a:xfrm>
+            <a:off x="4778916" y="1188720"/>
+            <a:ext cx="2634168" cy="2335531"/>
+          </a:xfrm>
+          <a:prstGeom prst="roundRect">
+            <a:avLst/>
+          </a:prstGeom>
+          <a:solidFill>
+            <a:srgbClr val="E5F1F8"/>
+          </a:solidFill>
+          <a:ln>
+            <a:solidFill>
+              <a:schemeClr val="tx1"/>
+            </a:solidFill>
+          </a:ln>
+        </p:spPr>
+        <p:style>
+          <a:lnRef idx="2">
+            <a:schemeClr val="accent1">
+              <a:shade val="15000"/>
+            </a:schemeClr>
+          </a:lnRef>
+          <a:fillRef idx="1">
+            <a:schemeClr val="accent1"/>
+          </a:fillRef>
+          <a:effectRef idx="0">
+            <a:schemeClr val="accent1"/>
+          </a:effectRef>
+          <a:fontRef idx="minor">
+            <a:schemeClr val="lt1"/>
+          </a:fontRef>
+        </p:style>
+        <p:txBody>
+          <a:bodyPr rtlCol="0" anchor="t"/>
+          <a:lstStyle/>
+          <a:p>
+            <a:pPr algn="ctr"/>
+            <a:r>
+              <a:rPr lang="en-US" dirty="0">
+                <a:solidFill>
+                  <a:schemeClr val="tx1"/>
+                </a:solidFill>
+              </a:rPr>
+              <a:t>Anthropic</a:t>
+            </a:r>
+          </a:p>
+        </p:txBody>
+      </p:sp>
+      <p:sp>
+        <p:nvSpPr>
+          <p:cNvPr id="4" name="Rectangle: Rounded Corners 3">
+            <a:extLst>
+              <a:ext uri="{FF2B5EF4-FFF2-40B4-BE49-F238E27FC236}">
+                <a16:creationId xmlns:a16="http://schemas.microsoft.com/office/drawing/2014/main" id="{CB92B3E5-A0FB-4F52-03FE-A3994B4A676E}"/>
+              </a:ext>
+            </a:extLst>
+          </p:cNvPr>
+          <p:cNvSpPr/>
+          <p:nvPr/>
+        </p:nvSpPr>
+        <p:spPr>
+          <a:xfrm>
+            <a:off x="1553658" y="1188720"/>
+            <a:ext cx="2634168" cy="2335531"/>
+          </a:xfrm>
+          <a:prstGeom prst="roundRect">
+            <a:avLst/>
+          </a:prstGeom>
+          <a:solidFill>
+            <a:srgbClr val="E5F1F8"/>
+          </a:solidFill>
+          <a:ln>
+            <a:solidFill>
+              <a:schemeClr val="tx1"/>
+            </a:solidFill>
+          </a:ln>
+        </p:spPr>
+        <p:style>
+          <a:lnRef idx="2">
+            <a:schemeClr val="accent1">
+              <a:shade val="15000"/>
+            </a:schemeClr>
+          </a:lnRef>
+          <a:fillRef idx="1">
+            <a:schemeClr val="accent1"/>
+          </a:fillRef>
+          <a:effectRef idx="0">
+            <a:schemeClr val="accent1"/>
+          </a:effectRef>
+          <a:fontRef idx="minor">
+            <a:schemeClr val="lt1"/>
+          </a:fontRef>
+        </p:style>
+        <p:txBody>
+          <a:bodyPr rtlCol="0" anchor="t"/>
+          <a:lstStyle/>
+          <a:p>
+            <a:pPr algn="ctr"/>
+            <a:r>
+              <a:rPr lang="en-US" dirty="0">
+                <a:solidFill>
+                  <a:schemeClr val="tx1"/>
+                </a:solidFill>
+              </a:rPr>
+              <a:t>Azure OpenAI</a:t>
+            </a:r>
+          </a:p>
+        </p:txBody>
+      </p:sp>
+      <p:sp>
+        <p:nvSpPr>
+          <p:cNvPr id="5" name="Rectangle: Rounded Corners 4">
+            <a:extLst>
+              <a:ext uri="{FF2B5EF4-FFF2-40B4-BE49-F238E27FC236}">
+                <a16:creationId xmlns:a16="http://schemas.microsoft.com/office/drawing/2014/main" id="{ACE8A258-9DE7-F4AF-1449-211286E0D11E}"/>
+              </a:ext>
+            </a:extLst>
+          </p:cNvPr>
+          <p:cNvSpPr/>
+          <p:nvPr/>
+        </p:nvSpPr>
+        <p:spPr>
+          <a:xfrm>
+            <a:off x="8004174" y="1188720"/>
+            <a:ext cx="2634168" cy="2335531"/>
+          </a:xfrm>
+          <a:prstGeom prst="roundRect">
+            <a:avLst/>
+          </a:prstGeom>
+          <a:solidFill>
+            <a:srgbClr val="E5F1F8"/>
+          </a:solidFill>
+          <a:ln>
+            <a:solidFill>
+              <a:schemeClr val="tx1"/>
+            </a:solidFill>
+          </a:ln>
+        </p:spPr>
+        <p:style>
+          <a:lnRef idx="2">
+            <a:schemeClr val="accent1">
+              <a:shade val="15000"/>
+            </a:schemeClr>
+          </a:lnRef>
+          <a:fillRef idx="1">
+            <a:schemeClr val="accent1"/>
+          </a:fillRef>
+          <a:effectRef idx="0">
+            <a:schemeClr val="accent1"/>
+          </a:effectRef>
+          <a:fontRef idx="minor">
+            <a:schemeClr val="lt1"/>
+          </a:fontRef>
+        </p:style>
+        <p:txBody>
+          <a:bodyPr rtlCol="0" anchor="t"/>
+          <a:lstStyle/>
+          <a:p>
+            <a:pPr algn="ctr"/>
+            <a:r>
+              <a:rPr lang="en-US" dirty="0">
+                <a:solidFill>
+                  <a:schemeClr val="tx1"/>
+                </a:solidFill>
+              </a:rPr>
+              <a:t>Microsoft</a:t>
+            </a:r>
+          </a:p>
+        </p:txBody>
+      </p:sp>
+      <p:sp>
+        <p:nvSpPr>
+          <p:cNvPr id="6" name="Rectangle: Rounded Corners 5">
+            <a:extLst>
+              <a:ext uri="{FF2B5EF4-FFF2-40B4-BE49-F238E27FC236}">
+                <a16:creationId xmlns:a16="http://schemas.microsoft.com/office/drawing/2014/main" id="{417ADCD0-E7DE-9B18-898C-7D55B783F694}"/>
+              </a:ext>
+            </a:extLst>
+          </p:cNvPr>
+          <p:cNvSpPr/>
+          <p:nvPr/>
+        </p:nvSpPr>
+        <p:spPr>
+          <a:xfrm>
+            <a:off x="4778916" y="3653789"/>
+            <a:ext cx="2634168" cy="2335531"/>
+          </a:xfrm>
+          <a:prstGeom prst="roundRect">
+            <a:avLst/>
+          </a:prstGeom>
+          <a:solidFill>
+            <a:srgbClr val="E5F1F8"/>
+          </a:solidFill>
+          <a:ln>
+            <a:solidFill>
+              <a:schemeClr val="tx1"/>
+            </a:solidFill>
+          </a:ln>
+        </p:spPr>
+        <p:style>
+          <a:lnRef idx="2">
+            <a:schemeClr val="accent1">
+              <a:shade val="15000"/>
+            </a:schemeClr>
+          </a:lnRef>
+          <a:fillRef idx="1">
+            <a:schemeClr val="accent1"/>
+          </a:fillRef>
+          <a:effectRef idx="0">
+            <a:schemeClr val="accent1"/>
+          </a:effectRef>
+          <a:fontRef idx="minor">
+            <a:schemeClr val="lt1"/>
+          </a:fontRef>
+        </p:style>
+        <p:txBody>
+          <a:bodyPr rtlCol="0" anchor="t"/>
+          <a:lstStyle/>
+          <a:p>
+            <a:pPr algn="ctr"/>
+            <a:r>
+              <a:rPr lang="en-US" dirty="0">
+                <a:solidFill>
+                  <a:schemeClr val="tx1"/>
+                </a:solidFill>
+              </a:rPr>
+              <a:t>Mistral AI</a:t>
+            </a:r>
+          </a:p>
+        </p:txBody>
+      </p:sp>
+      <p:sp>
+        <p:nvSpPr>
+          <p:cNvPr id="7" name="Rectangle: Rounded Corners 6">
+            <a:extLst>
+              <a:ext uri="{FF2B5EF4-FFF2-40B4-BE49-F238E27FC236}">
+                <a16:creationId xmlns:a16="http://schemas.microsoft.com/office/drawing/2014/main" id="{A55125DD-7A11-66B1-DDF5-ECD5D6C1F69B}"/>
+              </a:ext>
+            </a:extLst>
+          </p:cNvPr>
+          <p:cNvSpPr/>
+          <p:nvPr/>
+        </p:nvSpPr>
+        <p:spPr>
+          <a:xfrm>
+            <a:off x="1553658" y="3653789"/>
+            <a:ext cx="2634168" cy="2335531"/>
+          </a:xfrm>
+          <a:prstGeom prst="roundRect">
+            <a:avLst/>
+          </a:prstGeom>
+          <a:solidFill>
+            <a:srgbClr val="E5F1F8"/>
+          </a:solidFill>
+          <a:ln>
+            <a:solidFill>
+              <a:schemeClr val="tx1"/>
+            </a:solidFill>
+          </a:ln>
+        </p:spPr>
+        <p:style>
+          <a:lnRef idx="2">
+            <a:schemeClr val="accent1">
+              <a:shade val="15000"/>
+            </a:schemeClr>
+          </a:lnRef>
+          <a:fillRef idx="1">
+            <a:schemeClr val="accent1"/>
+          </a:fillRef>
+          <a:effectRef idx="0">
+            <a:schemeClr val="accent1"/>
+          </a:effectRef>
+          <a:fontRef idx="minor">
+            <a:schemeClr val="lt1"/>
+          </a:fontRef>
+        </p:style>
+        <p:txBody>
+          <a:bodyPr rtlCol="0" anchor="t"/>
+          <a:lstStyle/>
+          <a:p>
+            <a:pPr algn="ctr"/>
+            <a:r>
+              <a:rPr lang="en-US" dirty="0">
+                <a:solidFill>
+                  <a:schemeClr val="tx1"/>
+                </a:solidFill>
+              </a:rPr>
+              <a:t>Meta</a:t>
+            </a:r>
+          </a:p>
+        </p:txBody>
+      </p:sp>
+      <p:sp>
+        <p:nvSpPr>
+          <p:cNvPr id="8" name="Rectangle: Rounded Corners 7">
+            <a:extLst>
+              <a:ext uri="{FF2B5EF4-FFF2-40B4-BE49-F238E27FC236}">
+                <a16:creationId xmlns:a16="http://schemas.microsoft.com/office/drawing/2014/main" id="{4D8433B6-E222-52DE-3420-6BC81E4D9945}"/>
+              </a:ext>
+            </a:extLst>
+          </p:cNvPr>
+          <p:cNvSpPr/>
+          <p:nvPr/>
+        </p:nvSpPr>
+        <p:spPr>
+          <a:xfrm>
+            <a:off x="8004174" y="3653789"/>
+            <a:ext cx="2634168" cy="2335531"/>
+          </a:xfrm>
+          <a:prstGeom prst="roundRect">
+            <a:avLst/>
+          </a:prstGeom>
+          <a:solidFill>
+            <a:srgbClr val="E5F1F8"/>
+          </a:solidFill>
+          <a:ln>
+            <a:solidFill>
+              <a:schemeClr val="tx1"/>
+            </a:solidFill>
+          </a:ln>
+        </p:spPr>
+        <p:style>
+          <a:lnRef idx="2">
+            <a:schemeClr val="accent1">
+              <a:shade val="15000"/>
+            </a:schemeClr>
+          </a:lnRef>
+          <a:fillRef idx="1">
+            <a:schemeClr val="accent1"/>
+          </a:fillRef>
+          <a:effectRef idx="0">
+            <a:schemeClr val="accent1"/>
+          </a:effectRef>
+          <a:fontRef idx="minor">
+            <a:schemeClr val="lt1"/>
+          </a:fontRef>
+        </p:style>
+        <p:txBody>
+          <a:bodyPr rtlCol="0" anchor="t"/>
+          <a:lstStyle/>
+          <a:p>
+            <a:pPr algn="ctr"/>
+            <a:r>
+              <a:rPr lang="en-US" dirty="0">
+                <a:solidFill>
+                  <a:schemeClr val="tx1"/>
+                </a:solidFill>
+              </a:rPr>
+              <a:t>DeepSeek</a:t>
+            </a:r>
+          </a:p>
+        </p:txBody>
+      </p:sp>
+      <p:sp>
+        <p:nvSpPr>
+          <p:cNvPr id="10" name="Rectangle: Rounded Corners 9">
+            <a:extLst>
+              <a:ext uri="{FF2B5EF4-FFF2-40B4-BE49-F238E27FC236}">
+                <a16:creationId xmlns:a16="http://schemas.microsoft.com/office/drawing/2014/main" id="{02E5EA1C-587E-4A45-E606-F67DF515B407}"/>
+              </a:ext>
+            </a:extLst>
+          </p:cNvPr>
+          <p:cNvSpPr/>
+          <p:nvPr/>
+        </p:nvSpPr>
+        <p:spPr>
+          <a:xfrm>
+            <a:off x="1790700" y="1882140"/>
+            <a:ext cx="2111892" cy="322508"/>
+          </a:xfrm>
+          <a:prstGeom prst="roundRect">
+            <a:avLst>
+              <a:gd name="adj" fmla="val 50000"/>
+            </a:avLst>
+          </a:prstGeom>
+          <a:solidFill>
+            <a:srgbClr val="B2D4EB"/>
+          </a:solidFill>
+          <a:ln>
+            <a:solidFill>
+              <a:schemeClr val="tx1"/>
+            </a:solidFill>
+          </a:ln>
+        </p:spPr>
+        <p:style>
+          <a:lnRef idx="2">
+            <a:schemeClr val="accent1">
+              <a:shade val="15000"/>
+            </a:schemeClr>
+          </a:lnRef>
+          <a:fillRef idx="1">
+            <a:schemeClr val="accent1"/>
+          </a:fillRef>
+          <a:effectRef idx="0">
+            <a:schemeClr val="accent1"/>
+          </a:effectRef>
+          <a:fontRef idx="minor">
+            <a:schemeClr val="lt1"/>
+          </a:fontRef>
+        </p:style>
+        <p:txBody>
+          <a:bodyPr rtlCol="0" anchor="ctr"/>
+          <a:lstStyle/>
+          <a:p>
+            <a:pPr algn="ctr"/>
+            <a:r>
+              <a:rPr lang="en-US" dirty="0" err="1">
+                <a:solidFill>
+                  <a:schemeClr val="tx1"/>
+                </a:solidFill>
+              </a:rPr>
+              <a:t>gpt</a:t>
+            </a:r>
+            <a:endParaRPr lang="en-US" i="1" dirty="0">
+              <a:solidFill>
+                <a:schemeClr val="tx1"/>
+              </a:solidFill>
+            </a:endParaRPr>
+          </a:p>
+        </p:txBody>
+      </p:sp>
+      <p:sp>
+        <p:nvSpPr>
+          <p:cNvPr id="11" name="Rectangle: Rounded Corners 10">
+            <a:extLst>
+              <a:ext uri="{FF2B5EF4-FFF2-40B4-BE49-F238E27FC236}">
+                <a16:creationId xmlns:a16="http://schemas.microsoft.com/office/drawing/2014/main" id="{E11D9861-1EDA-793B-0AA0-18BFA52ACCE4}"/>
+              </a:ext>
+            </a:extLst>
+          </p:cNvPr>
+          <p:cNvSpPr/>
+          <p:nvPr/>
+        </p:nvSpPr>
+        <p:spPr>
+          <a:xfrm>
+            <a:off x="1790700" y="2380687"/>
+            <a:ext cx="2111892" cy="322508"/>
+          </a:xfrm>
+          <a:prstGeom prst="roundRect">
+            <a:avLst>
+              <a:gd name="adj" fmla="val 50000"/>
+            </a:avLst>
+          </a:prstGeom>
+          <a:solidFill>
+            <a:srgbClr val="B2D4EB"/>
+          </a:solidFill>
+          <a:ln>
+            <a:solidFill>
+              <a:schemeClr val="tx1"/>
+            </a:solidFill>
+          </a:ln>
+        </p:spPr>
+        <p:style>
+          <a:lnRef idx="2">
+            <a:schemeClr val="accent1">
+              <a:shade val="15000"/>
+            </a:schemeClr>
+          </a:lnRef>
+          <a:fillRef idx="1">
+            <a:schemeClr val="accent1"/>
+          </a:fillRef>
+          <a:effectRef idx="0">
+            <a:schemeClr val="accent1"/>
+          </a:effectRef>
+          <a:fontRef idx="minor">
+            <a:schemeClr val="lt1"/>
+          </a:fontRef>
+        </p:style>
+        <p:txBody>
+          <a:bodyPr rtlCol="0" anchor="ctr"/>
+          <a:lstStyle/>
+          <a:p>
+            <a:pPr algn="ctr"/>
+            <a:r>
+              <a:rPr lang="en-US" dirty="0">
+                <a:solidFill>
+                  <a:schemeClr val="tx1"/>
+                </a:solidFill>
+              </a:rPr>
+              <a:t>o</a:t>
+            </a:r>
+          </a:p>
+        </p:txBody>
+      </p:sp>
+      <p:sp>
+        <p:nvSpPr>
+          <p:cNvPr id="12" name="Rectangle: Rounded Corners 11">
+            <a:extLst>
+              <a:ext uri="{FF2B5EF4-FFF2-40B4-BE49-F238E27FC236}">
+                <a16:creationId xmlns:a16="http://schemas.microsoft.com/office/drawing/2014/main" id="{46BFDC7A-CED3-C375-66E6-683B9E52EDD1}"/>
+              </a:ext>
+            </a:extLst>
+          </p:cNvPr>
+          <p:cNvSpPr/>
+          <p:nvPr/>
+        </p:nvSpPr>
+        <p:spPr>
+          <a:xfrm>
+            <a:off x="1790700" y="2879234"/>
+            <a:ext cx="2111892" cy="322508"/>
+          </a:xfrm>
+          <a:prstGeom prst="roundRect">
+            <a:avLst>
+              <a:gd name="adj" fmla="val 50000"/>
+            </a:avLst>
+          </a:prstGeom>
+          <a:solidFill>
+            <a:srgbClr val="B2D4EB"/>
+          </a:solidFill>
+          <a:ln>
+            <a:solidFill>
+              <a:schemeClr val="tx1"/>
+            </a:solidFill>
+          </a:ln>
+        </p:spPr>
+        <p:style>
+          <a:lnRef idx="2">
+            <a:schemeClr val="accent1">
+              <a:shade val="15000"/>
+            </a:schemeClr>
+          </a:lnRef>
+          <a:fillRef idx="1">
+            <a:schemeClr val="accent1"/>
+          </a:fillRef>
+          <a:effectRef idx="0">
+            <a:schemeClr val="accent1"/>
+          </a:effectRef>
+          <a:fontRef idx="minor">
+            <a:schemeClr val="lt1"/>
+          </a:fontRef>
+        </p:style>
+        <p:txBody>
+          <a:bodyPr rtlCol="0" anchor="ctr"/>
+          <a:lstStyle/>
+          <a:p>
+            <a:pPr algn="ctr"/>
+            <a:r>
+              <a:rPr lang="en-US" dirty="0">
+                <a:solidFill>
+                  <a:schemeClr val="tx1"/>
+                </a:solidFill>
+              </a:rPr>
+              <a:t>sora</a:t>
+            </a:r>
+          </a:p>
+        </p:txBody>
+      </p:sp>
+    </p:spTree>
+    <p:extLst>
+      <p:ext uri="{BB962C8B-B14F-4D97-AF65-F5344CB8AC3E}">
+        <p14:creationId xmlns:p14="http://schemas.microsoft.com/office/powerpoint/2010/main" val="2145715379"/>
+      </p:ext>
+    </p:extLst>
+  </p:cSld>
+  <p:clrMapOvr>
+    <a:masterClrMapping/>
+  </p:clrMapOvr>
+</p:sld>
+</file>
+
+<file path=ppt/slides/slide5.xml><?xml version="1.0" encoding="utf-8"?>
+<p:sld xmlns:a="http://schemas.openxmlformats.org/drawingml/2006/main" xmlns:r="http://schemas.openxmlformats.org/officeDocument/2006/relationships" xmlns:p="http://schemas.openxmlformats.org/presentationml/2006/main">
+  <p:cSld>
+    <p:spTree>
+      <p:nvGrpSpPr>
+        <p:cNvPr id="1" name=""/>
+        <p:cNvGrpSpPr/>
+        <p:nvPr/>
+      </p:nvGrpSpPr>
+      <p:grpSpPr>
+        <a:xfrm>
+          <a:off x="0" y="0"/>
+          <a:ext cx="0" cy="0"/>
+          <a:chOff x="0" y="0"/>
+          <a:chExt cx="0" cy="0"/>
+        </a:xfrm>
+      </p:grpSpPr>
+      <p:sp>
+        <p:nvSpPr>
+          <p:cNvPr id="5" name="TextBox 4">
+            <a:extLst>
+              <a:ext uri="{FF2B5EF4-FFF2-40B4-BE49-F238E27FC236}">
+                <a16:creationId xmlns:a16="http://schemas.microsoft.com/office/drawing/2014/main" id="{46409C35-8811-C77F-54C2-0BC7A96CBEB6}"/>
+              </a:ext>
+            </a:extLst>
+          </p:cNvPr>
+          <p:cNvSpPr txBox="1"/>
+          <p:nvPr/>
+        </p:nvSpPr>
+        <p:spPr>
+          <a:xfrm>
+            <a:off x="563218" y="5430943"/>
+            <a:ext cx="6096000" cy="369332"/>
+          </a:xfrm>
+          <a:prstGeom prst="rect">
+            <a:avLst/>
+          </a:prstGeom>
+          <a:noFill/>
+        </p:spPr>
+        <p:txBody>
+          <a:bodyPr wrap="square">
+            <a:spAutoFit/>
+          </a:bodyPr>
+          <a:lstStyle/>
+          <a:p>
+            <a:r>
+              <a:rPr lang="en-US" dirty="0"/>
+              <a:t>https://carbon.now.sh/</a:t>
+            </a:r>
+          </a:p>
+        </p:txBody>
+      </p:sp>
+      <p:sp>
+        <p:nvSpPr>
+          <p:cNvPr id="6" name="TextBox 5">
+            <a:extLst>
+              <a:ext uri="{FF2B5EF4-FFF2-40B4-BE49-F238E27FC236}">
+                <a16:creationId xmlns:a16="http://schemas.microsoft.com/office/drawing/2014/main" id="{9E291CA3-97E0-03B5-F1F6-61568AF37352}"/>
+              </a:ext>
+            </a:extLst>
+          </p:cNvPr>
+          <p:cNvSpPr txBox="1"/>
+          <p:nvPr/>
+        </p:nvSpPr>
+        <p:spPr>
+          <a:xfrm>
+            <a:off x="563218" y="5990676"/>
+            <a:ext cx="6096000" cy="369332"/>
+          </a:xfrm>
+          <a:prstGeom prst="rect">
+            <a:avLst/>
+          </a:prstGeom>
+          <a:noFill/>
+        </p:spPr>
+        <p:txBody>
+          <a:bodyPr wrap="square">
+            <a:spAutoFit/>
+          </a:bodyPr>
+          <a:lstStyle/>
+          <a:p>
+            <a:r>
+              <a:rPr lang="en-US" dirty="0"/>
+              <a:t>Theme: One Light</a:t>
+            </a:r>
+          </a:p>
+        </p:txBody>
+      </p:sp>
+      <p:pic>
+        <p:nvPicPr>
+          <p:cNvPr id="10" name="Picture 9">
+            <a:extLst>
+              <a:ext uri="{FF2B5EF4-FFF2-40B4-BE49-F238E27FC236}">
+                <a16:creationId xmlns:a16="http://schemas.microsoft.com/office/drawing/2014/main" id="{3A8CB0BC-0057-D455-D8D7-560FEF81B865}"/>
+              </a:ext>
+            </a:extLst>
+          </p:cNvPr>
+          <p:cNvPicPr>
+            <a:picLocks noChangeAspect="1"/>
+          </p:cNvPicPr>
+          <p:nvPr/>
+        </p:nvPicPr>
+        <p:blipFill>
+          <a:blip r:embed="rId3">
+            <a:extLst>
+              <a:ext uri="{28A0092B-C50C-407E-A947-70E740481C1C}">
+                <a14:useLocalDpi xmlns:a14="http://schemas.microsoft.com/office/drawing/2010/main" val="0"/>
+              </a:ext>
+            </a:extLst>
+          </a:blip>
+          <a:stretch>
+            <a:fillRect/>
+          </a:stretch>
+        </p:blipFill>
+        <p:spPr>
+          <a:xfrm>
+            <a:off x="0" y="0"/>
+            <a:ext cx="12192000" cy="4917281"/>
+          </a:xfrm>
+          <a:prstGeom prst="rect">
+            <a:avLst/>
+          </a:prstGeom>
+        </p:spPr>
+      </p:pic>
+    </p:spTree>
+    <p:extLst>
+      <p:ext uri="{BB962C8B-B14F-4D97-AF65-F5344CB8AC3E}">
+        <p14:creationId xmlns:p14="http://schemas.microsoft.com/office/powerpoint/2010/main" val="495322276"/>
+      </p:ext>
+    </p:extLst>
+  </p:cSld>
+  <p:clrMapOvr>
+    <a:masterClrMapping/>
+  </p:clrMapOvr>
+</p:sld>
+</file>
+
+<file path=ppt/slides/slide6.xml><?xml version="1.0" encoding="utf-8"?>
+<p:sld xmlns:a="http://schemas.openxmlformats.org/drawingml/2006/main" xmlns:r="http://schemas.openxmlformats.org/officeDocument/2006/relationships" xmlns:p="http://schemas.openxmlformats.org/presentationml/2006/main">
+  <p:cSld>
+    <p:spTree>
+      <p:nvGrpSpPr>
+        <p:cNvPr id="1" name="">
+          <a:extLst>
+            <a:ext uri="{FF2B5EF4-FFF2-40B4-BE49-F238E27FC236}">
+              <a16:creationId xmlns:a16="http://schemas.microsoft.com/office/drawing/2014/main" id="{B8650F46-8669-8B2D-7690-E25DD2E636E0}"/>
+            </a:ext>
+          </a:extLst>
+        </p:cNvPr>
+        <p:cNvGrpSpPr/>
+        <p:nvPr/>
+      </p:nvGrpSpPr>
+      <p:grpSpPr>
+        <a:xfrm>
+          <a:off x="0" y="0"/>
+          <a:ext cx="0" cy="0"/>
+          <a:chOff x="0" y="0"/>
+          <a:chExt cx="0" cy="0"/>
+        </a:xfrm>
+      </p:grpSpPr>
+      <p:sp>
+        <p:nvSpPr>
+          <p:cNvPr id="31" name="Rectangle 30">
+            <a:extLst>
+              <a:ext uri="{FF2B5EF4-FFF2-40B4-BE49-F238E27FC236}">
+                <a16:creationId xmlns:a16="http://schemas.microsoft.com/office/drawing/2014/main" id="{1641B2C3-3E54-CFD6-A752-0AC425AFFCA6}"/>
+              </a:ext>
+            </a:extLst>
+          </p:cNvPr>
+          <p:cNvSpPr/>
+          <p:nvPr/>
+        </p:nvSpPr>
+        <p:spPr>
+          <a:xfrm>
+            <a:off x="8482515" y="2718435"/>
+            <a:ext cx="247650" cy="247650"/>
+          </a:xfrm>
+          <a:prstGeom prst="rect">
+            <a:avLst/>
+          </a:prstGeom>
+        </p:spPr>
+        <p:style>
+          <a:lnRef idx="2">
+            <a:schemeClr val="accent1">
+              <a:shade val="15000"/>
+            </a:schemeClr>
+          </a:lnRef>
+          <a:fillRef idx="1">
+            <a:schemeClr val="accent1"/>
+          </a:fillRef>
+          <a:effectRef idx="0">
+            <a:schemeClr val="accent1"/>
+          </a:effectRef>
+          <a:fontRef idx="minor">
+            <a:schemeClr val="lt1"/>
+          </a:fontRef>
+        </p:style>
+        <p:txBody>
+          <a:bodyPr rtlCol="0" anchor="ctr"/>
+          <a:lstStyle/>
+          <a:p>
+            <a:pPr algn="ctr"/>
+            <a:endParaRPr lang="en-US"/>
+          </a:p>
+        </p:txBody>
+      </p:sp>
+      <p:sp>
+        <p:nvSpPr>
+          <p:cNvPr id="2" name="Rectangle: Rounded Corners 1">
+            <a:extLst>
+              <a:ext uri="{FF2B5EF4-FFF2-40B4-BE49-F238E27FC236}">
+                <a16:creationId xmlns:a16="http://schemas.microsoft.com/office/drawing/2014/main" id="{E84DF503-3BC6-84E0-6FFB-3B32B203E1CB}"/>
+              </a:ext>
+            </a:extLst>
+          </p:cNvPr>
+          <p:cNvSpPr/>
+          <p:nvPr/>
+        </p:nvSpPr>
+        <p:spPr>
+          <a:xfrm>
+            <a:off x="819950" y="617219"/>
+            <a:ext cx="10552099" cy="1485901"/>
+          </a:xfrm>
+          <a:prstGeom prst="roundRect">
+            <a:avLst>
+              <a:gd name="adj" fmla="val 5234"/>
+            </a:avLst>
+          </a:prstGeom>
+          <a:solidFill>
+            <a:schemeClr val="bg1"/>
+          </a:solidFill>
+          <a:ln>
+            <a:solidFill>
+              <a:schemeClr val="tx1"/>
+            </a:solidFill>
+          </a:ln>
+        </p:spPr>
+        <p:style>
+          <a:lnRef idx="2">
+            <a:schemeClr val="accent1">
+              <a:shade val="15000"/>
+            </a:schemeClr>
+          </a:lnRef>
+          <a:fillRef idx="1">
+            <a:schemeClr val="accent1"/>
+          </a:fillRef>
+          <a:effectRef idx="0">
+            <a:schemeClr val="accent1"/>
+          </a:effectRef>
+          <a:fontRef idx="minor">
+            <a:schemeClr val="lt1"/>
+          </a:fontRef>
+        </p:style>
+        <p:txBody>
+          <a:bodyPr rtlCol="0" anchor="t"/>
+          <a:lstStyle/>
+          <a:p>
+            <a:pPr algn="ctr"/>
+            <a:r>
+              <a:rPr lang="en-US" dirty="0">
+                <a:solidFill>
+                  <a:schemeClr val="tx1"/>
+                </a:solidFill>
+              </a:rPr>
+              <a:t>MCP Host (AI Application)</a:t>
+            </a:r>
+          </a:p>
+        </p:txBody>
+      </p:sp>
+      <p:sp>
+        <p:nvSpPr>
+          <p:cNvPr id="4" name="Rectangle: Rounded Corners 3">
+            <a:extLst>
+              <a:ext uri="{FF2B5EF4-FFF2-40B4-BE49-F238E27FC236}">
+                <a16:creationId xmlns:a16="http://schemas.microsoft.com/office/drawing/2014/main" id="{93675B45-9C5A-DB3C-5478-881C7B1BD00F}"/>
+              </a:ext>
+            </a:extLst>
+          </p:cNvPr>
+          <p:cNvSpPr/>
+          <p:nvPr/>
+        </p:nvSpPr>
+        <p:spPr>
+          <a:xfrm>
+            <a:off x="1553658" y="1188721"/>
+            <a:ext cx="2634168" cy="525780"/>
+          </a:xfrm>
+          <a:prstGeom prst="roundRect">
+            <a:avLst/>
+          </a:prstGeom>
+          <a:solidFill>
+            <a:srgbClr val="E5F1F8"/>
+          </a:solidFill>
+          <a:ln>
+            <a:solidFill>
+              <a:schemeClr val="tx1"/>
+            </a:solidFill>
+          </a:ln>
+        </p:spPr>
+        <p:style>
+          <a:lnRef idx="2">
+            <a:schemeClr val="accent1">
+              <a:shade val="15000"/>
+            </a:schemeClr>
+          </a:lnRef>
+          <a:fillRef idx="1">
+            <a:schemeClr val="accent1"/>
+          </a:fillRef>
+          <a:effectRef idx="0">
+            <a:schemeClr val="accent1"/>
+          </a:effectRef>
+          <a:fontRef idx="minor">
+            <a:schemeClr val="lt1"/>
+          </a:fontRef>
+        </p:style>
+        <p:txBody>
+          <a:bodyPr rtlCol="0" anchor="ctr"/>
+          <a:lstStyle/>
+          <a:p>
+            <a:pPr algn="ctr"/>
+            <a:r>
+              <a:rPr lang="en-US" dirty="0">
+                <a:solidFill>
+                  <a:schemeClr val="tx1"/>
+                </a:solidFill>
+              </a:rPr>
+              <a:t>MCP Client 1</a:t>
+            </a:r>
+          </a:p>
+        </p:txBody>
+      </p:sp>
+      <p:sp>
+        <p:nvSpPr>
+          <p:cNvPr id="9" name="Rectangle: Rounded Corners 8">
+            <a:extLst>
+              <a:ext uri="{FF2B5EF4-FFF2-40B4-BE49-F238E27FC236}">
+                <a16:creationId xmlns:a16="http://schemas.microsoft.com/office/drawing/2014/main" id="{4E726389-504C-D4C8-91C7-AF40D8E5E559}"/>
+              </a:ext>
+            </a:extLst>
+          </p:cNvPr>
+          <p:cNvSpPr/>
+          <p:nvPr/>
+        </p:nvSpPr>
+        <p:spPr>
+          <a:xfrm>
+            <a:off x="4778915" y="1188721"/>
+            <a:ext cx="2634168" cy="525780"/>
+          </a:xfrm>
+          <a:prstGeom prst="roundRect">
+            <a:avLst/>
+          </a:prstGeom>
+          <a:solidFill>
+            <a:srgbClr val="E5F1F8"/>
+          </a:solidFill>
+          <a:ln>
+            <a:solidFill>
+              <a:schemeClr val="tx1"/>
+            </a:solidFill>
+          </a:ln>
+        </p:spPr>
+        <p:style>
+          <a:lnRef idx="2">
+            <a:schemeClr val="accent1">
+              <a:shade val="15000"/>
+            </a:schemeClr>
+          </a:lnRef>
+          <a:fillRef idx="1">
+            <a:schemeClr val="accent1"/>
+          </a:fillRef>
+          <a:effectRef idx="0">
+            <a:schemeClr val="accent1"/>
+          </a:effectRef>
+          <a:fontRef idx="minor">
+            <a:schemeClr val="lt1"/>
+          </a:fontRef>
+        </p:style>
+        <p:txBody>
+          <a:bodyPr rtlCol="0" anchor="ctr"/>
+          <a:lstStyle/>
+          <a:p>
+            <a:pPr algn="ctr"/>
+            <a:r>
+              <a:rPr lang="en-US" dirty="0">
+                <a:solidFill>
+                  <a:schemeClr val="tx1"/>
+                </a:solidFill>
+              </a:rPr>
+              <a:t>MCP Client 2</a:t>
+            </a:r>
+          </a:p>
+        </p:txBody>
+      </p:sp>
+      <p:sp>
+        <p:nvSpPr>
+          <p:cNvPr id="13" name="Rectangle: Rounded Corners 12">
+            <a:extLst>
+              <a:ext uri="{FF2B5EF4-FFF2-40B4-BE49-F238E27FC236}">
+                <a16:creationId xmlns:a16="http://schemas.microsoft.com/office/drawing/2014/main" id="{A6FC3ABB-2BFB-C405-42FE-2ED02F4EA5C4}"/>
+              </a:ext>
+            </a:extLst>
+          </p:cNvPr>
+          <p:cNvSpPr/>
+          <p:nvPr/>
+        </p:nvSpPr>
+        <p:spPr>
+          <a:xfrm>
+            <a:off x="8004174" y="1188721"/>
+            <a:ext cx="2634168" cy="525780"/>
+          </a:xfrm>
+          <a:prstGeom prst="roundRect">
+            <a:avLst/>
+          </a:prstGeom>
+          <a:solidFill>
+            <a:srgbClr val="E5F1F8"/>
+          </a:solidFill>
+          <a:ln>
+            <a:solidFill>
+              <a:schemeClr val="tx1"/>
+            </a:solidFill>
+          </a:ln>
+        </p:spPr>
+        <p:style>
+          <a:lnRef idx="2">
+            <a:schemeClr val="accent1">
+              <a:shade val="15000"/>
+            </a:schemeClr>
+          </a:lnRef>
+          <a:fillRef idx="1">
+            <a:schemeClr val="accent1"/>
+          </a:fillRef>
+          <a:effectRef idx="0">
+            <a:schemeClr val="accent1"/>
+          </a:effectRef>
+          <a:fontRef idx="minor">
+            <a:schemeClr val="lt1"/>
+          </a:fontRef>
+        </p:style>
+        <p:txBody>
+          <a:bodyPr rtlCol="0" anchor="ctr"/>
+          <a:lstStyle/>
+          <a:p>
+            <a:pPr algn="ctr"/>
+            <a:r>
+              <a:rPr lang="en-US" dirty="0">
+                <a:solidFill>
+                  <a:schemeClr val="tx1"/>
+                </a:solidFill>
+              </a:rPr>
+              <a:t>MCP Client 2</a:t>
+            </a:r>
+          </a:p>
+        </p:txBody>
+      </p:sp>
+      <p:sp>
+        <p:nvSpPr>
+          <p:cNvPr id="15" name="Rectangle: Rounded Corners 14">
+            <a:extLst>
+              <a:ext uri="{FF2B5EF4-FFF2-40B4-BE49-F238E27FC236}">
+                <a16:creationId xmlns:a16="http://schemas.microsoft.com/office/drawing/2014/main" id="{6F4543D6-02D0-038C-12A8-DB37F7A273CE}"/>
+              </a:ext>
+            </a:extLst>
+          </p:cNvPr>
+          <p:cNvSpPr/>
+          <p:nvPr/>
+        </p:nvSpPr>
+        <p:spPr>
+          <a:xfrm>
+            <a:off x="1553658" y="2718435"/>
+            <a:ext cx="2634168" cy="796290"/>
+          </a:xfrm>
+          <a:prstGeom prst="roundRect">
+            <a:avLst/>
+          </a:prstGeom>
+          <a:solidFill>
+            <a:srgbClr val="B2D4EB"/>
+          </a:solidFill>
+          <a:ln>
+            <a:solidFill>
+              <a:schemeClr val="tx1"/>
+            </a:solidFill>
+          </a:ln>
+        </p:spPr>
+        <p:style>
+          <a:lnRef idx="2">
+            <a:schemeClr val="accent1">
+              <a:shade val="15000"/>
+            </a:schemeClr>
+          </a:lnRef>
+          <a:fillRef idx="1">
+            <a:schemeClr val="accent1"/>
+          </a:fillRef>
+          <a:effectRef idx="0">
+            <a:schemeClr val="accent1"/>
+          </a:effectRef>
+          <a:fontRef idx="minor">
+            <a:schemeClr val="lt1"/>
+          </a:fontRef>
+        </p:style>
+        <p:txBody>
+          <a:bodyPr rtlCol="0" anchor="ctr"/>
+          <a:lstStyle/>
+          <a:p>
+            <a:pPr algn="ctr"/>
+            <a:r>
+              <a:rPr lang="en-US" dirty="0">
+                <a:solidFill>
+                  <a:schemeClr val="tx1"/>
+                </a:solidFill>
+              </a:rPr>
+              <a:t>MCP Server A</a:t>
+            </a:r>
+          </a:p>
+          <a:p>
+            <a:pPr algn="ctr"/>
+            <a:r>
+              <a:rPr lang="en-US" dirty="0">
+                <a:solidFill>
+                  <a:schemeClr val="tx1"/>
+                </a:solidFill>
+              </a:rPr>
+              <a:t>Local Filesystem</a:t>
+            </a:r>
+          </a:p>
+        </p:txBody>
+      </p:sp>
+      <p:sp>
+        <p:nvSpPr>
+          <p:cNvPr id="16" name="Rectangle: Rounded Corners 15">
+            <a:extLst>
+              <a:ext uri="{FF2B5EF4-FFF2-40B4-BE49-F238E27FC236}">
+                <a16:creationId xmlns:a16="http://schemas.microsoft.com/office/drawing/2014/main" id="{578DD490-0572-9417-BBD7-3FF5F8A9E3D8}"/>
+              </a:ext>
+            </a:extLst>
+          </p:cNvPr>
+          <p:cNvSpPr/>
+          <p:nvPr/>
+        </p:nvSpPr>
+        <p:spPr>
+          <a:xfrm>
+            <a:off x="4778915" y="2718435"/>
+            <a:ext cx="2634168" cy="796290"/>
+          </a:xfrm>
+          <a:prstGeom prst="roundRect">
+            <a:avLst/>
+          </a:prstGeom>
+          <a:solidFill>
+            <a:srgbClr val="B2D4EB"/>
+          </a:solidFill>
+          <a:ln>
+            <a:solidFill>
+              <a:schemeClr val="tx1"/>
+            </a:solidFill>
+          </a:ln>
+        </p:spPr>
+        <p:style>
+          <a:lnRef idx="2">
+            <a:schemeClr val="accent1">
+              <a:shade val="15000"/>
+            </a:schemeClr>
+          </a:lnRef>
+          <a:fillRef idx="1">
+            <a:schemeClr val="accent1"/>
+          </a:fillRef>
+          <a:effectRef idx="0">
+            <a:schemeClr val="accent1"/>
+          </a:effectRef>
+          <a:fontRef idx="minor">
+            <a:schemeClr val="lt1"/>
+          </a:fontRef>
+        </p:style>
+        <p:txBody>
+          <a:bodyPr rtlCol="0" anchor="ctr"/>
+          <a:lstStyle/>
+          <a:p>
+            <a:pPr algn="ctr"/>
+            <a:r>
+              <a:rPr lang="en-US" dirty="0">
+                <a:solidFill>
+                  <a:schemeClr val="tx1"/>
+                </a:solidFill>
+              </a:rPr>
+              <a:t>MCP Server B</a:t>
+            </a:r>
+          </a:p>
+          <a:p>
+            <a:pPr algn="ctr"/>
+            <a:r>
+              <a:rPr lang="en-US" dirty="0">
+                <a:solidFill>
+                  <a:schemeClr val="tx1"/>
+                </a:solidFill>
+              </a:rPr>
+              <a:t>Remote Database</a:t>
+            </a:r>
+          </a:p>
+        </p:txBody>
+      </p:sp>
+      <p:sp>
+        <p:nvSpPr>
+          <p:cNvPr id="17" name="Rectangle: Rounded Corners 16">
+            <a:extLst>
+              <a:ext uri="{FF2B5EF4-FFF2-40B4-BE49-F238E27FC236}">
+                <a16:creationId xmlns:a16="http://schemas.microsoft.com/office/drawing/2014/main" id="{04622E36-7A33-D496-1202-F85F8B8E5A75}"/>
+              </a:ext>
+            </a:extLst>
+          </p:cNvPr>
+          <p:cNvSpPr/>
+          <p:nvPr/>
+        </p:nvSpPr>
+        <p:spPr>
+          <a:xfrm>
+            <a:off x="8004172" y="2718435"/>
+            <a:ext cx="2634168" cy="796290"/>
+          </a:xfrm>
+          <a:prstGeom prst="roundRect">
+            <a:avLst/>
+          </a:prstGeom>
+          <a:solidFill>
+            <a:srgbClr val="B2D4EB"/>
+          </a:solidFill>
+          <a:ln>
+            <a:solidFill>
+              <a:schemeClr val="tx1"/>
+            </a:solidFill>
+          </a:ln>
+        </p:spPr>
+        <p:style>
+          <a:lnRef idx="2">
+            <a:schemeClr val="accent1">
+              <a:shade val="15000"/>
+            </a:schemeClr>
+          </a:lnRef>
+          <a:fillRef idx="1">
+            <a:schemeClr val="accent1"/>
+          </a:fillRef>
+          <a:effectRef idx="0">
+            <a:schemeClr val="accent1"/>
+          </a:effectRef>
+          <a:fontRef idx="minor">
+            <a:schemeClr val="lt1"/>
+          </a:fontRef>
+        </p:style>
+        <p:txBody>
+          <a:bodyPr rtlCol="0" anchor="ctr"/>
+          <a:lstStyle/>
+          <a:p>
+            <a:pPr algn="ctr"/>
+            <a:r>
+              <a:rPr lang="en-US" dirty="0">
+                <a:solidFill>
+                  <a:schemeClr val="tx1"/>
+                </a:solidFill>
+              </a:rPr>
+              <a:t>MCP Server C</a:t>
+            </a:r>
+          </a:p>
+          <a:p>
+            <a:pPr algn="ctr"/>
+            <a:r>
+              <a:rPr lang="en-US" dirty="0">
+                <a:solidFill>
+                  <a:schemeClr val="tx1"/>
+                </a:solidFill>
+              </a:rPr>
+              <a:t>Remote API</a:t>
+            </a:r>
+          </a:p>
+        </p:txBody>
+      </p:sp>
+      <p:cxnSp>
+        <p:nvCxnSpPr>
+          <p:cNvPr id="18" name="Straight Arrow Connector 17">
+            <a:extLst>
+              <a:ext uri="{FF2B5EF4-FFF2-40B4-BE49-F238E27FC236}">
+                <a16:creationId xmlns:a16="http://schemas.microsoft.com/office/drawing/2014/main" id="{BD059445-29E0-0BB8-E8BA-0013ADBA930C}"/>
+              </a:ext>
+            </a:extLst>
+          </p:cNvPr>
+          <p:cNvCxnSpPr>
+            <a:cxnSpLocks/>
+            <a:stCxn id="4" idx="2"/>
+            <a:endCxn id="15" idx="0"/>
+          </p:cNvCxnSpPr>
+          <p:nvPr/>
+        </p:nvCxnSpPr>
+        <p:spPr>
+          <a:xfrm>
+            <a:off x="2870742" y="1714501"/>
+            <a:ext cx="0" cy="1003934"/>
+          </a:xfrm>
+          <a:prstGeom prst="straightConnector1">
+            <a:avLst/>
+          </a:prstGeom>
+          <a:ln>
+            <a:solidFill>
+              <a:schemeClr val="tx1"/>
+            </a:solidFill>
+            <a:prstDash val="sysDash"/>
+            <a:tailEnd type="triangle" w="lg" len="lg"/>
+          </a:ln>
+        </p:spPr>
+        <p:style>
+          <a:lnRef idx="2">
+            <a:schemeClr val="accent1"/>
+          </a:lnRef>
+          <a:fillRef idx="0">
+            <a:schemeClr val="accent1"/>
+          </a:fillRef>
+          <a:effectRef idx="1">
+            <a:schemeClr val="accent1"/>
+          </a:effectRef>
+          <a:fontRef idx="minor">
+            <a:schemeClr val="tx1"/>
+          </a:fontRef>
+        </p:style>
+      </p:cxnSp>
+      <p:cxnSp>
+        <p:nvCxnSpPr>
+          <p:cNvPr id="21" name="Straight Arrow Connector 20">
+            <a:extLst>
+              <a:ext uri="{FF2B5EF4-FFF2-40B4-BE49-F238E27FC236}">
+                <a16:creationId xmlns:a16="http://schemas.microsoft.com/office/drawing/2014/main" id="{B67BB8C0-5CB6-3A94-820B-418CFFCE9D38}"/>
+              </a:ext>
+            </a:extLst>
+          </p:cNvPr>
+          <p:cNvCxnSpPr>
+            <a:cxnSpLocks/>
+            <a:stCxn id="9" idx="2"/>
+            <a:endCxn id="16" idx="0"/>
+          </p:cNvCxnSpPr>
+          <p:nvPr/>
+        </p:nvCxnSpPr>
+        <p:spPr>
+          <a:xfrm>
+            <a:off x="6095999" y="1714501"/>
+            <a:ext cx="0" cy="1003934"/>
+          </a:xfrm>
+          <a:prstGeom prst="straightConnector1">
+            <a:avLst/>
+          </a:prstGeom>
+          <a:ln>
+            <a:solidFill>
+              <a:schemeClr val="tx1"/>
+            </a:solidFill>
+            <a:prstDash val="sysDash"/>
+            <a:tailEnd type="triangle" w="lg" len="lg"/>
+          </a:ln>
+        </p:spPr>
+        <p:style>
+          <a:lnRef idx="2">
+            <a:schemeClr val="accent1"/>
+          </a:lnRef>
+          <a:fillRef idx="0">
+            <a:schemeClr val="accent1"/>
+          </a:fillRef>
+          <a:effectRef idx="1">
+            <a:schemeClr val="accent1"/>
+          </a:effectRef>
+          <a:fontRef idx="minor">
+            <a:schemeClr val="tx1"/>
+          </a:fontRef>
+        </p:style>
+      </p:cxnSp>
+      <p:cxnSp>
+        <p:nvCxnSpPr>
+          <p:cNvPr id="24" name="Straight Arrow Connector 23">
+            <a:extLst>
+              <a:ext uri="{FF2B5EF4-FFF2-40B4-BE49-F238E27FC236}">
+                <a16:creationId xmlns:a16="http://schemas.microsoft.com/office/drawing/2014/main" id="{7FEBFCBE-6607-A910-FF7B-C1762F4684EF}"/>
+              </a:ext>
+            </a:extLst>
+          </p:cNvPr>
+          <p:cNvCxnSpPr>
+            <a:cxnSpLocks/>
+            <a:stCxn id="13" idx="2"/>
+            <a:endCxn id="17" idx="0"/>
+          </p:cNvCxnSpPr>
+          <p:nvPr/>
+        </p:nvCxnSpPr>
+        <p:spPr>
+          <a:xfrm flipH="1">
+            <a:off x="9321256" y="1714501"/>
+            <a:ext cx="2" cy="1003934"/>
+          </a:xfrm>
+          <a:prstGeom prst="straightConnector1">
+            <a:avLst/>
+          </a:prstGeom>
+          <a:ln>
+            <a:solidFill>
+              <a:schemeClr val="tx1"/>
+            </a:solidFill>
+            <a:prstDash val="sysDash"/>
+            <a:tailEnd type="triangle" w="lg" len="lg"/>
+          </a:ln>
+        </p:spPr>
+        <p:style>
+          <a:lnRef idx="2">
+            <a:schemeClr val="accent1"/>
+          </a:lnRef>
+          <a:fillRef idx="0">
+            <a:schemeClr val="accent1"/>
+          </a:fillRef>
+          <a:effectRef idx="1">
+            <a:schemeClr val="accent1"/>
+          </a:effectRef>
+          <a:fontRef idx="minor">
+            <a:schemeClr val="tx1"/>
+          </a:fontRef>
+        </p:style>
+      </p:cxnSp>
+      <p:cxnSp>
+        <p:nvCxnSpPr>
+          <p:cNvPr id="28" name="Connector: Elbow 27">
+            <a:extLst>
+              <a:ext uri="{FF2B5EF4-FFF2-40B4-BE49-F238E27FC236}">
+                <a16:creationId xmlns:a16="http://schemas.microsoft.com/office/drawing/2014/main" id="{CE37A76D-0F39-82E2-974B-B04FAACABE32}"/>
+              </a:ext>
+            </a:extLst>
+          </p:cNvPr>
+          <p:cNvCxnSpPr>
+            <a:cxnSpLocks/>
+            <a:stCxn id="9" idx="2"/>
+            <a:endCxn id="31" idx="0"/>
+          </p:cNvCxnSpPr>
+          <p:nvPr/>
+        </p:nvCxnSpPr>
+        <p:spPr>
+          <a:xfrm rot="16200000" flipH="1">
+            <a:off x="6849202" y="961297"/>
+            <a:ext cx="1003934" cy="2510341"/>
+          </a:xfrm>
+          <a:prstGeom prst="bentConnector3">
+            <a:avLst>
+              <a:gd name="adj1" fmla="val 61385"/>
+            </a:avLst>
+          </a:prstGeom>
+          <a:ln>
+            <a:solidFill>
+              <a:schemeClr val="tx1"/>
+            </a:solidFill>
+            <a:prstDash val="sysDash"/>
+            <a:tailEnd type="triangle" w="lg" len="lg"/>
+          </a:ln>
+        </p:spPr>
+        <p:style>
+          <a:lnRef idx="2">
+            <a:schemeClr val="accent1"/>
+          </a:lnRef>
+          <a:fillRef idx="0">
+            <a:schemeClr val="accent1"/>
+          </a:fillRef>
+          <a:effectRef idx="1">
+            <a:schemeClr val="accent1"/>
+          </a:effectRef>
+          <a:fontRef idx="minor">
+            <a:schemeClr val="tx1"/>
+          </a:fontRef>
+        </p:style>
+      </p:cxnSp>
+    </p:spTree>
+    <p:extLst>
+      <p:ext uri="{BB962C8B-B14F-4D97-AF65-F5344CB8AC3E}">
+        <p14:creationId xmlns:p14="http://schemas.microsoft.com/office/powerpoint/2010/main" val="836248043"/>
+      </p:ext>
+    </p:extLst>
+  </p:cSld>
+  <p:clrMapOvr>
+    <a:masterClrMapping/>
+  </p:clrMapOvr>
+</p:sld>
+</file>
+
+<file path=ppt/slides/slide7.xml><?xml version="1.0" encoding="utf-8"?>
 <p:sld xmlns:a="http://schemas.openxmlformats.org/drawingml/2006/main" xmlns:r="http://schemas.openxmlformats.org/officeDocument/2006/relationships" xmlns:p="http://schemas.openxmlformats.org/presentationml/2006/main">
   <p:cSld>
     <p:spTree>
@@ -5536,7 +8424,7 @@
 </p:sld>
 </file>
 
-<file path=ppt/slides/slide4.xml><?xml version="1.0" encoding="utf-8"?>
+<file path=ppt/slides/slide8.xml><?xml version="1.0" encoding="utf-8"?>
 <p:sld xmlns:a="http://schemas.openxmlformats.org/drawingml/2006/main" xmlns:r="http://schemas.openxmlformats.org/officeDocument/2006/relationships" xmlns:p="http://schemas.openxmlformats.org/presentationml/2006/main">
   <p:cSld>
     <p:spTree>
@@ -5558,7 +8446,7 @@
           <p:cNvPr id="2" name="Rectangle: Rounded Corners 1">
             <a:extLst>
               <a:ext uri="{FF2B5EF4-FFF2-40B4-BE49-F238E27FC236}">
-                <a16:creationId xmlns:a16="http://schemas.microsoft.com/office/drawing/2014/main" id="{2373B790-295F-D9C9-ECAF-274F835713B8}"/>
+                <a16:creationId xmlns:a16="http://schemas.microsoft.com/office/drawing/2014/main" id="{F09FDC59-6067-4502-1360-F42554AD87D3}"/>
               </a:ext>
             </a:extLst>
           </p:cNvPr>
@@ -5567,68 +8455,8 @@
         </p:nvSpPr>
         <p:spPr>
           <a:xfrm>
-            <a:off x="1683600" y="1280957"/>
-            <a:ext cx="8633879" cy="3298663"/>
-          </a:xfrm>
-          <a:prstGeom prst="roundRect">
-            <a:avLst>
-              <a:gd name="adj" fmla="val 5234"/>
-            </a:avLst>
-          </a:prstGeom>
-          <a:solidFill>
-            <a:schemeClr val="bg1"/>
-          </a:solidFill>
-          <a:ln>
-            <a:solidFill>
-              <a:schemeClr val="tx1"/>
-            </a:solidFill>
-          </a:ln>
-        </p:spPr>
-        <p:style>
-          <a:lnRef idx="2">
-            <a:schemeClr val="accent1">
-              <a:shade val="15000"/>
-            </a:schemeClr>
-          </a:lnRef>
-          <a:fillRef idx="1">
-            <a:schemeClr val="accent1"/>
-          </a:fillRef>
-          <a:effectRef idx="0">
-            <a:schemeClr val="accent1"/>
-          </a:effectRef>
-          <a:fontRef idx="minor">
-            <a:schemeClr val="lt1"/>
-          </a:fontRef>
-        </p:style>
-        <p:txBody>
-          <a:bodyPr rtlCol="0" anchor="ctr"/>
-          <a:lstStyle/>
-          <a:p>
-            <a:pPr algn="ctr"/>
-            <a:endParaRPr lang="en-US" dirty="0">
-              <a:solidFill>
-                <a:schemeClr val="tx1"/>
-              </a:solidFill>
-            </a:endParaRPr>
-          </a:p>
-        </p:txBody>
-      </p:sp>
-      <p:sp>
-        <p:nvSpPr>
-          <p:cNvPr id="3" name="Rectangle: Rounded Corners 2">
-            <a:extLst>
-              <a:ext uri="{FF2B5EF4-FFF2-40B4-BE49-F238E27FC236}">
-                <a16:creationId xmlns:a16="http://schemas.microsoft.com/office/drawing/2014/main" id="{AF807674-F982-3E42-18FF-10D7E9818E10}"/>
-              </a:ext>
-            </a:extLst>
-          </p:cNvPr>
-          <p:cNvSpPr/>
-          <p:nvPr/>
-        </p:nvSpPr>
-        <p:spPr>
-          <a:xfrm>
-            <a:off x="3993377" y="4394954"/>
-            <a:ext cx="4014323" cy="369332"/>
+            <a:off x="4046220" y="3398520"/>
+            <a:ext cx="4282440" cy="457200"/>
           </a:xfrm>
           <a:prstGeom prst="roundRect">
             <a:avLst/>
@@ -5669,7 +8497,7 @@
                   <a:schemeClr val="tx1"/>
                 </a:solidFill>
               </a:rPr>
-              <a:t>Security, Compliance, and Governance</a:t>
+              <a:t>Search Public Information on the Web</a:t>
             </a:r>
             <a:endParaRPr lang="en-US" i="1" dirty="0">
               <a:solidFill>
@@ -5681,10 +8509,10 @@
       </p:sp>
       <p:sp>
         <p:nvSpPr>
-          <p:cNvPr id="4" name="Rectangle: Rounded Corners 3">
+          <p:cNvPr id="3" name="Rectangle: Rounded Corners 2">
             <a:extLst>
               <a:ext uri="{FF2B5EF4-FFF2-40B4-BE49-F238E27FC236}">
-                <a16:creationId xmlns:a16="http://schemas.microsoft.com/office/drawing/2014/main" id="{6504FE7B-F946-B4E5-5540-DCBF24C5EE02}"/>
+                <a16:creationId xmlns:a16="http://schemas.microsoft.com/office/drawing/2014/main" id="{9800FF13-E208-2C00-EB7C-BCBA48F554BD}"/>
               </a:ext>
             </a:extLst>
           </p:cNvPr>
@@ -5693,8 +8521,140 @@
         </p:nvSpPr>
         <p:spPr>
           <a:xfrm>
-            <a:off x="2120712" y="1629580"/>
-            <a:ext cx="1097280" cy="1097280"/>
+            <a:off x="4046220" y="2625554"/>
+            <a:ext cx="4282440" cy="457200"/>
+          </a:xfrm>
+          <a:prstGeom prst="roundRect">
+            <a:avLst/>
+          </a:prstGeom>
+          <a:solidFill>
+            <a:srgbClr val="B2D4EB"/>
+          </a:solidFill>
+          <a:ln>
+            <a:solidFill>
+              <a:schemeClr val="tx1"/>
+            </a:solidFill>
+          </a:ln>
+        </p:spPr>
+        <p:style>
+          <a:lnRef idx="2">
+            <a:schemeClr val="accent1">
+              <a:shade val="15000"/>
+            </a:schemeClr>
+          </a:lnRef>
+          <a:fillRef idx="1">
+            <a:schemeClr val="accent1"/>
+          </a:fillRef>
+          <a:effectRef idx="0">
+            <a:schemeClr val="accent1"/>
+          </a:effectRef>
+          <a:fontRef idx="minor">
+            <a:schemeClr val="lt1"/>
+          </a:fontRef>
+        </p:style>
+        <p:txBody>
+          <a:bodyPr rtlCol="0" anchor="ctr"/>
+          <a:lstStyle/>
+          <a:p>
+            <a:pPr algn="ctr"/>
+            <a:r>
+              <a:rPr lang="en-US" dirty="0">
+                <a:solidFill>
+                  <a:schemeClr val="tx1"/>
+                </a:solidFill>
+              </a:rPr>
+              <a:t>Retrieve Stock Quotes from an API</a:t>
+            </a:r>
+            <a:endParaRPr lang="en-US" i="1" dirty="0">
+              <a:solidFill>
+                <a:schemeClr val="tx1"/>
+              </a:solidFill>
+            </a:endParaRPr>
+          </a:p>
+        </p:txBody>
+      </p:sp>
+      <p:sp>
+        <p:nvSpPr>
+          <p:cNvPr id="4" name="Rectangle: Rounded Corners 3">
+            <a:extLst>
+              <a:ext uri="{FF2B5EF4-FFF2-40B4-BE49-F238E27FC236}">
+                <a16:creationId xmlns:a16="http://schemas.microsoft.com/office/drawing/2014/main" id="{CD952C55-0F41-C8E8-4833-F5F86239B3AD}"/>
+              </a:ext>
+            </a:extLst>
+          </p:cNvPr>
+          <p:cNvSpPr/>
+          <p:nvPr/>
+        </p:nvSpPr>
+        <p:spPr>
+          <a:xfrm>
+            <a:off x="4046220" y="1855003"/>
+            <a:ext cx="4282440" cy="457200"/>
+          </a:xfrm>
+          <a:prstGeom prst="roundRect">
+            <a:avLst/>
+          </a:prstGeom>
+          <a:solidFill>
+            <a:srgbClr val="B2D4EB"/>
+          </a:solidFill>
+          <a:ln>
+            <a:solidFill>
+              <a:schemeClr val="tx1"/>
+            </a:solidFill>
+          </a:ln>
+        </p:spPr>
+        <p:style>
+          <a:lnRef idx="2">
+            <a:schemeClr val="accent1">
+              <a:shade val="15000"/>
+            </a:schemeClr>
+          </a:lnRef>
+          <a:fillRef idx="1">
+            <a:schemeClr val="accent1"/>
+          </a:fillRef>
+          <a:effectRef idx="0">
+            <a:schemeClr val="accent1"/>
+          </a:effectRef>
+          <a:fontRef idx="minor">
+            <a:schemeClr val="lt1"/>
+          </a:fontRef>
+        </p:style>
+        <p:txBody>
+          <a:bodyPr rtlCol="0" anchor="ctr"/>
+          <a:lstStyle/>
+          <a:p>
+            <a:pPr algn="ctr"/>
+            <a:r>
+              <a:rPr lang="en-US" dirty="0">
+                <a:solidFill>
+                  <a:schemeClr val="tx1"/>
+                </a:solidFill>
+              </a:rPr>
+              <a:t>Reference Internal Report Files</a:t>
+            </a:r>
+            <a:endParaRPr lang="en-US" i="1" dirty="0">
+              <a:solidFill>
+                <a:schemeClr val="tx1"/>
+              </a:solidFill>
+            </a:endParaRPr>
+          </a:p>
+        </p:txBody>
+      </p:sp>
+      <p:sp>
+        <p:nvSpPr>
+          <p:cNvPr id="5" name="Rectangle: Rounded Corners 4">
+            <a:extLst>
+              <a:ext uri="{FF2B5EF4-FFF2-40B4-BE49-F238E27FC236}">
+                <a16:creationId xmlns:a16="http://schemas.microsoft.com/office/drawing/2014/main" id="{600226F7-C833-1B1C-B967-7291F64244CC}"/>
+              </a:ext>
+            </a:extLst>
+          </p:cNvPr>
+          <p:cNvSpPr/>
+          <p:nvPr/>
+        </p:nvSpPr>
+        <p:spPr>
+          <a:xfrm>
+            <a:off x="1507938" y="2374095"/>
+            <a:ext cx="1913442" cy="960119"/>
           </a:xfrm>
           <a:prstGeom prst="roundRect">
             <a:avLst/>
@@ -5725,7 +8685,7 @@
           </a:fontRef>
         </p:style>
         <p:txBody>
-          <a:bodyPr rtlCol="0" anchor="b"/>
+          <a:bodyPr rtlCol="0" anchor="ctr"/>
           <a:lstStyle/>
           <a:p>
             <a:pPr algn="ctr"/>
@@ -5735,17 +8695,28 @@
                   <a:schemeClr val="tx1"/>
                 </a:solidFill>
               </a:rPr>
-              <a:t>Models</a:t>
-            </a:r>
-          </a:p>
-        </p:txBody>
-      </p:sp>
-      <p:sp>
-        <p:nvSpPr>
-          <p:cNvPr id="5" name="Rectangle: Rounded Corners 4">
+              <a:t>Query</a:t>
+            </a:r>
+          </a:p>
+          <a:p>
+            <a:pPr algn="ctr"/>
+            <a:r>
+              <a:rPr lang="en-US" dirty="0">
+                <a:solidFill>
+                  <a:schemeClr val="tx1"/>
+                </a:solidFill>
+              </a:rPr>
+              <a:t>Planning</a:t>
+            </a:r>
+          </a:p>
+        </p:txBody>
+      </p:sp>
+      <p:sp>
+        <p:nvSpPr>
+          <p:cNvPr id="6" name="Rectangle: Rounded Corners 5">
             <a:extLst>
               <a:ext uri="{FF2B5EF4-FFF2-40B4-BE49-F238E27FC236}">
-                <a16:creationId xmlns:a16="http://schemas.microsoft.com/office/drawing/2014/main" id="{CCD72E2D-BA5E-4BD0-251B-D709E59BA6AA}"/>
+                <a16:creationId xmlns:a16="http://schemas.microsoft.com/office/drawing/2014/main" id="{C93C6EBF-0FE7-EC6E-5B5C-7AA41F6606DD}"/>
               </a:ext>
             </a:extLst>
           </p:cNvPr>
@@ -5754,8 +8725,8 @@
         </p:nvSpPr>
         <p:spPr>
           <a:xfrm>
-            <a:off x="5547360" y="1629580"/>
-            <a:ext cx="1097280" cy="1097280"/>
+            <a:off x="9837420" y="2374095"/>
+            <a:ext cx="1913442" cy="960119"/>
           </a:xfrm>
           <a:prstGeom prst="roundRect">
             <a:avLst/>
@@ -5786,7 +8757,7 @@
           </a:fontRef>
         </p:style>
         <p:txBody>
-          <a:bodyPr rtlCol="0" anchor="b"/>
+          <a:bodyPr rtlCol="0" anchor="ctr"/>
           <a:lstStyle/>
           <a:p>
             <a:pPr algn="ctr"/>
@@ -5796,17 +8767,122 @@
                   <a:schemeClr val="tx1"/>
                 </a:solidFill>
               </a:rPr>
-              <a:t>IQ</a:t>
-            </a:r>
-          </a:p>
-        </p:txBody>
-      </p:sp>
-      <p:sp>
-        <p:nvSpPr>
-          <p:cNvPr id="6" name="Rectangle: Rounded Corners 5">
+              <a:t>Language</a:t>
+            </a:r>
+          </a:p>
+          <a:p>
+            <a:pPr algn="ctr"/>
+            <a:r>
+              <a:rPr lang="en-US" dirty="0">
+                <a:solidFill>
+                  <a:schemeClr val="tx1"/>
+                </a:solidFill>
+              </a:rPr>
+              <a:t>Model</a:t>
+            </a:r>
+          </a:p>
+        </p:txBody>
+      </p:sp>
+      <p:cxnSp>
+        <p:nvCxnSpPr>
+          <p:cNvPr id="7" name="Straight Arrow Connector 6">
             <a:extLst>
               <a:ext uri="{FF2B5EF4-FFF2-40B4-BE49-F238E27FC236}">
-                <a16:creationId xmlns:a16="http://schemas.microsoft.com/office/drawing/2014/main" id="{8A00E6D5-7A21-352C-E165-8534FCB5922A}"/>
+                <a16:creationId xmlns:a16="http://schemas.microsoft.com/office/drawing/2014/main" id="{70FF9049-A038-5CD7-B5B6-A7A955E2687C}"/>
+              </a:ext>
+            </a:extLst>
+          </p:cNvPr>
+          <p:cNvCxnSpPr>
+            <a:cxnSpLocks/>
+            <a:stCxn id="5" idx="3"/>
+            <a:endCxn id="3" idx="1"/>
+          </p:cNvCxnSpPr>
+          <p:nvPr/>
+        </p:nvCxnSpPr>
+        <p:spPr>
+          <a:xfrm flipV="1">
+            <a:off x="3421380" y="2854154"/>
+            <a:ext cx="624840" cy="1"/>
+          </a:xfrm>
+          <a:prstGeom prst="straightConnector1">
+            <a:avLst/>
+          </a:prstGeom>
+          <a:ln>
+            <a:solidFill>
+              <a:schemeClr val="tx1"/>
+            </a:solidFill>
+            <a:prstDash val="solid"/>
+            <a:tailEnd type="triangle" w="lg" len="lg"/>
+          </a:ln>
+        </p:spPr>
+        <p:style>
+          <a:lnRef idx="2">
+            <a:schemeClr val="accent1"/>
+          </a:lnRef>
+          <a:fillRef idx="0">
+            <a:schemeClr val="accent1"/>
+          </a:fillRef>
+          <a:effectRef idx="1">
+            <a:schemeClr val="accent1"/>
+          </a:effectRef>
+          <a:fontRef idx="minor">
+            <a:schemeClr val="tx1"/>
+          </a:fontRef>
+        </p:style>
+      </p:cxnSp>
+      <p:cxnSp>
+        <p:nvCxnSpPr>
+          <p:cNvPr id="10" name="Straight Arrow Connector 9">
+            <a:extLst>
+              <a:ext uri="{FF2B5EF4-FFF2-40B4-BE49-F238E27FC236}">
+                <a16:creationId xmlns:a16="http://schemas.microsoft.com/office/drawing/2014/main" id="{2C10FC99-8029-AE13-0A3B-1F87064360AB}"/>
+              </a:ext>
+            </a:extLst>
+          </p:cNvPr>
+          <p:cNvCxnSpPr>
+            <a:cxnSpLocks/>
+            <a:stCxn id="44" idx="3"/>
+            <a:endCxn id="6" idx="1"/>
+          </p:cNvCxnSpPr>
+          <p:nvPr/>
+        </p:nvCxnSpPr>
+        <p:spPr>
+          <a:xfrm>
+            <a:off x="9189720" y="2854155"/>
+            <a:ext cx="647700" cy="0"/>
+          </a:xfrm>
+          <a:prstGeom prst="straightConnector1">
+            <a:avLst/>
+          </a:prstGeom>
+          <a:ln>
+            <a:solidFill>
+              <a:schemeClr val="tx1"/>
+            </a:solidFill>
+            <a:prstDash val="solid"/>
+            <a:tailEnd type="triangle" w="lg" len="lg"/>
+          </a:ln>
+        </p:spPr>
+        <p:style>
+          <a:lnRef idx="2">
+            <a:schemeClr val="accent1"/>
+          </a:lnRef>
+          <a:fillRef idx="0">
+            <a:schemeClr val="accent1"/>
+          </a:fillRef>
+          <a:effectRef idx="1">
+            <a:schemeClr val="accent1"/>
+          </a:effectRef>
+          <a:fontRef idx="minor">
+            <a:schemeClr val="tx1"/>
+          </a:fontRef>
+        </p:style>
+      </p:cxnSp>
+      <p:sp>
+        <p:nvSpPr>
+          <p:cNvPr id="15" name="Rectangle: Rounded Corners 14">
+            <a:extLst>
+              <a:ext uri="{FF2B5EF4-FFF2-40B4-BE49-F238E27FC236}">
+                <a16:creationId xmlns:a16="http://schemas.microsoft.com/office/drawing/2014/main" id="{C23DA4FB-7AE1-4EE4-8DD5-321F7F7C7F33}"/>
               </a:ext>
             </a:extLst>
           </p:cNvPr>
@@ -5815,8 +8891,8 @@
         </p:nvSpPr>
         <p:spPr>
           <a:xfrm>
-            <a:off x="3834036" y="1629580"/>
-            <a:ext cx="1097280" cy="1097280"/>
+            <a:off x="189267" y="2619607"/>
+            <a:ext cx="915222" cy="469096"/>
           </a:xfrm>
           <a:prstGeom prst="roundRect">
             <a:avLst/>
@@ -5847,7 +8923,7 @@
           </a:fontRef>
         </p:style>
         <p:txBody>
-          <a:bodyPr rtlCol="0" anchor="b"/>
+          <a:bodyPr rtlCol="0" anchor="ctr"/>
           <a:lstStyle/>
           <a:p>
             <a:pPr algn="ctr"/>
@@ -5857,17 +8933,162 @@
                   <a:schemeClr val="tx1"/>
                 </a:solidFill>
               </a:rPr>
-              <a:t>Agents</a:t>
-            </a:r>
-          </a:p>
-        </p:txBody>
-      </p:sp>
-      <p:sp>
-        <p:nvSpPr>
-          <p:cNvPr id="7" name="Rectangle: Rounded Corners 6">
+              <a:t>Prompt</a:t>
+            </a:r>
+          </a:p>
+        </p:txBody>
+      </p:sp>
+      <p:cxnSp>
+        <p:nvCxnSpPr>
+          <p:cNvPr id="16" name="Straight Arrow Connector 15">
             <a:extLst>
               <a:ext uri="{FF2B5EF4-FFF2-40B4-BE49-F238E27FC236}">
-                <a16:creationId xmlns:a16="http://schemas.microsoft.com/office/drawing/2014/main" id="{FEFF2ADF-7ABC-2B4F-15DA-147A653CA05E}"/>
+                <a16:creationId xmlns:a16="http://schemas.microsoft.com/office/drawing/2014/main" id="{942D3144-4FA8-07EA-6898-D7B2C45E010A}"/>
+              </a:ext>
+            </a:extLst>
+          </p:cNvPr>
+          <p:cNvCxnSpPr>
+            <a:cxnSpLocks/>
+            <a:stCxn id="15" idx="3"/>
+            <a:endCxn id="5" idx="1"/>
+          </p:cNvCxnSpPr>
+          <p:nvPr/>
+        </p:nvCxnSpPr>
+        <p:spPr>
+          <a:xfrm>
+            <a:off x="1104489" y="2854155"/>
+            <a:ext cx="403449" cy="0"/>
+          </a:xfrm>
+          <a:prstGeom prst="straightConnector1">
+            <a:avLst/>
+          </a:prstGeom>
+          <a:ln>
+            <a:solidFill>
+              <a:schemeClr val="tx1"/>
+            </a:solidFill>
+            <a:prstDash val="sysDash"/>
+            <a:tailEnd type="triangle" w="lg" len="lg"/>
+          </a:ln>
+        </p:spPr>
+        <p:style>
+          <a:lnRef idx="2">
+            <a:schemeClr val="accent1"/>
+          </a:lnRef>
+          <a:fillRef idx="0">
+            <a:schemeClr val="accent1"/>
+          </a:fillRef>
+          <a:effectRef idx="1">
+            <a:schemeClr val="accent1"/>
+          </a:effectRef>
+          <a:fontRef idx="minor">
+            <a:schemeClr val="tx1"/>
+          </a:fontRef>
+        </p:style>
+      </p:cxnSp>
+      <p:cxnSp>
+        <p:nvCxnSpPr>
+          <p:cNvPr id="19" name="Connector: Elbow 18">
+            <a:extLst>
+              <a:ext uri="{FF2B5EF4-FFF2-40B4-BE49-F238E27FC236}">
+                <a16:creationId xmlns:a16="http://schemas.microsoft.com/office/drawing/2014/main" id="{BF48D9D9-8BAB-3118-5B91-13BAA46C2349}"/>
+              </a:ext>
+            </a:extLst>
+          </p:cNvPr>
+          <p:cNvCxnSpPr>
+            <a:cxnSpLocks/>
+            <a:stCxn id="5" idx="3"/>
+            <a:endCxn id="4" idx="1"/>
+          </p:cNvCxnSpPr>
+          <p:nvPr/>
+        </p:nvCxnSpPr>
+        <p:spPr>
+          <a:xfrm flipV="1">
+            <a:off x="3421380" y="2083603"/>
+            <a:ext cx="624840" cy="770552"/>
+          </a:xfrm>
+          <a:prstGeom prst="bentConnector3">
+            <a:avLst>
+              <a:gd name="adj1" fmla="val 50000"/>
+            </a:avLst>
+          </a:prstGeom>
+          <a:ln>
+            <a:solidFill>
+              <a:schemeClr val="tx1"/>
+            </a:solidFill>
+            <a:prstDash val="solid"/>
+            <a:tailEnd type="triangle" w="lg" len="lg"/>
+          </a:ln>
+        </p:spPr>
+        <p:style>
+          <a:lnRef idx="2">
+            <a:schemeClr val="accent1"/>
+          </a:lnRef>
+          <a:fillRef idx="0">
+            <a:schemeClr val="accent1"/>
+          </a:fillRef>
+          <a:effectRef idx="1">
+            <a:schemeClr val="accent1"/>
+          </a:effectRef>
+          <a:fontRef idx="minor">
+            <a:schemeClr val="tx1"/>
+          </a:fontRef>
+        </p:style>
+      </p:cxnSp>
+      <p:cxnSp>
+        <p:nvCxnSpPr>
+          <p:cNvPr id="22" name="Connector: Elbow 21">
+            <a:extLst>
+              <a:ext uri="{FF2B5EF4-FFF2-40B4-BE49-F238E27FC236}">
+                <a16:creationId xmlns:a16="http://schemas.microsoft.com/office/drawing/2014/main" id="{217AA7E3-1E41-FB8C-7F66-A5758B29A028}"/>
+              </a:ext>
+            </a:extLst>
+          </p:cNvPr>
+          <p:cNvCxnSpPr>
+            <a:cxnSpLocks/>
+            <a:stCxn id="5" idx="3"/>
+            <a:endCxn id="2" idx="1"/>
+          </p:cNvCxnSpPr>
+          <p:nvPr/>
+        </p:nvCxnSpPr>
+        <p:spPr>
+          <a:xfrm>
+            <a:off x="3421380" y="2854155"/>
+            <a:ext cx="624840" cy="772965"/>
+          </a:xfrm>
+          <a:prstGeom prst="bentConnector3">
+            <a:avLst>
+              <a:gd name="adj1" fmla="val 50000"/>
+            </a:avLst>
+          </a:prstGeom>
+          <a:ln>
+            <a:solidFill>
+              <a:schemeClr val="tx1"/>
+            </a:solidFill>
+            <a:prstDash val="solid"/>
+            <a:tailEnd type="triangle" w="lg" len="lg"/>
+          </a:ln>
+        </p:spPr>
+        <p:style>
+          <a:lnRef idx="2">
+            <a:schemeClr val="accent1"/>
+          </a:lnRef>
+          <a:fillRef idx="0">
+            <a:schemeClr val="accent1"/>
+          </a:fillRef>
+          <a:effectRef idx="1">
+            <a:schemeClr val="accent1"/>
+          </a:effectRef>
+          <a:fontRef idx="minor">
+            <a:schemeClr val="tx1"/>
+          </a:fontRef>
+        </p:style>
+      </p:cxnSp>
+      <p:sp>
+        <p:nvSpPr>
+          <p:cNvPr id="25" name="Rectangle: Rounded Corners 24">
+            <a:extLst>
+              <a:ext uri="{FF2B5EF4-FFF2-40B4-BE49-F238E27FC236}">
+                <a16:creationId xmlns:a16="http://schemas.microsoft.com/office/drawing/2014/main" id="{98E95763-BD68-DEF9-F942-CCC8B336544E}"/>
               </a:ext>
             </a:extLst>
           </p:cNvPr>
@@ -5876,8 +9097,8 @@
         </p:nvSpPr>
         <p:spPr>
           <a:xfrm>
-            <a:off x="7260684" y="1629580"/>
-            <a:ext cx="1097280" cy="1097280"/>
+            <a:off x="8732520" y="1852591"/>
+            <a:ext cx="457200" cy="457200"/>
           </a:xfrm>
           <a:prstGeom prst="roundRect">
             <a:avLst/>
@@ -5908,27 +9129,71 @@
           </a:fontRef>
         </p:style>
         <p:txBody>
-          <a:bodyPr rtlCol="0" anchor="b"/>
+          <a:bodyPr rtlCol="0" anchor="ctr"/>
           <a:lstStyle/>
           <a:p>
             <a:pPr algn="ctr"/>
-            <a:r>
-              <a:rPr lang="en-US" dirty="0">
-                <a:solidFill>
-                  <a:schemeClr val="tx1"/>
-                </a:solidFill>
-              </a:rPr>
-              <a:t>Tools</a:t>
-            </a:r>
-          </a:p>
-        </p:txBody>
-      </p:sp>
-      <p:sp>
-        <p:nvSpPr>
-          <p:cNvPr id="8" name="Rectangle: Rounded Corners 7">
+            <a:endParaRPr lang="en-US" dirty="0">
+              <a:solidFill>
+                <a:schemeClr val="tx1"/>
+              </a:solidFill>
+            </a:endParaRPr>
+          </a:p>
+        </p:txBody>
+      </p:sp>
+      <p:cxnSp>
+        <p:nvCxnSpPr>
+          <p:cNvPr id="40" name="Straight Arrow Connector 39">
             <a:extLst>
               <a:ext uri="{FF2B5EF4-FFF2-40B4-BE49-F238E27FC236}">
-                <a16:creationId xmlns:a16="http://schemas.microsoft.com/office/drawing/2014/main" id="{B911A12B-43CF-B03D-9C15-EC0C073F267F}"/>
+                <a16:creationId xmlns:a16="http://schemas.microsoft.com/office/drawing/2014/main" id="{B899F5AF-E80C-3452-008E-8E821AEFA864}"/>
+              </a:ext>
+            </a:extLst>
+          </p:cNvPr>
+          <p:cNvCxnSpPr>
+            <a:cxnSpLocks/>
+            <a:stCxn id="4" idx="3"/>
+            <a:endCxn id="25" idx="1"/>
+          </p:cNvCxnSpPr>
+          <p:nvPr/>
+        </p:nvCxnSpPr>
+        <p:spPr>
+          <a:xfrm flipV="1">
+            <a:off x="8328660" y="2081191"/>
+            <a:ext cx="403860" cy="2412"/>
+          </a:xfrm>
+          <a:prstGeom prst="straightConnector1">
+            <a:avLst/>
+          </a:prstGeom>
+          <a:ln>
+            <a:solidFill>
+              <a:schemeClr val="tx1"/>
+            </a:solidFill>
+            <a:prstDash val="solid"/>
+            <a:tailEnd type="triangle" w="lg" len="lg"/>
+          </a:ln>
+        </p:spPr>
+        <p:style>
+          <a:lnRef idx="2">
+            <a:schemeClr val="accent1"/>
+          </a:lnRef>
+          <a:fillRef idx="0">
+            <a:schemeClr val="accent1"/>
+          </a:fillRef>
+          <a:effectRef idx="1">
+            <a:schemeClr val="accent1"/>
+          </a:effectRef>
+          <a:fontRef idx="minor">
+            <a:schemeClr val="tx1"/>
+          </a:fontRef>
+        </p:style>
+      </p:cxnSp>
+      <p:sp>
+        <p:nvSpPr>
+          <p:cNvPr id="44" name="Rectangle: Rounded Corners 43">
+            <a:extLst>
+              <a:ext uri="{FF2B5EF4-FFF2-40B4-BE49-F238E27FC236}">
+                <a16:creationId xmlns:a16="http://schemas.microsoft.com/office/drawing/2014/main" id="{3F66FD98-C347-7EA9-DC36-7FDBB97B4248}"/>
               </a:ext>
             </a:extLst>
           </p:cNvPr>
@@ -5937,8 +9202,8 @@
         </p:nvSpPr>
         <p:spPr>
           <a:xfrm>
-            <a:off x="8974008" y="1629580"/>
-            <a:ext cx="1097280" cy="1097280"/>
+            <a:off x="8732520" y="2625555"/>
+            <a:ext cx="457200" cy="457200"/>
           </a:xfrm>
           <a:prstGeom prst="roundRect">
             <a:avLst/>
@@ -5969,27 +9234,24 @@
           </a:fontRef>
         </p:style>
         <p:txBody>
-          <a:bodyPr rtlCol="0" anchor="b"/>
+          <a:bodyPr rtlCol="0" anchor="ctr"/>
           <a:lstStyle/>
           <a:p>
             <a:pPr algn="ctr"/>
-            <a:r>
-              <a:rPr lang="en-US" dirty="0">
-                <a:solidFill>
-                  <a:schemeClr val="tx1"/>
-                </a:solidFill>
-              </a:rPr>
-              <a:t>Local</a:t>
-            </a:r>
-          </a:p>
-        </p:txBody>
-      </p:sp>
-      <p:sp>
-        <p:nvSpPr>
-          <p:cNvPr id="9" name="Rectangle: Rounded Corners 8">
+            <a:endParaRPr lang="en-US" dirty="0">
+              <a:solidFill>
+                <a:schemeClr val="tx1"/>
+              </a:solidFill>
+            </a:endParaRPr>
+          </a:p>
+        </p:txBody>
+      </p:sp>
+      <p:sp>
+        <p:nvSpPr>
+          <p:cNvPr id="46" name="Rectangle: Rounded Corners 45">
             <a:extLst>
               <a:ext uri="{FF2B5EF4-FFF2-40B4-BE49-F238E27FC236}">
-                <a16:creationId xmlns:a16="http://schemas.microsoft.com/office/drawing/2014/main" id="{29E82D6B-67A5-FB5E-86C8-E494906EBA72}"/>
+                <a16:creationId xmlns:a16="http://schemas.microsoft.com/office/drawing/2014/main" id="{A791A27B-2AA1-8E05-2231-C99FE09DCBEB}"/>
               </a:ext>
             </a:extLst>
           </p:cNvPr>
@@ -5998,8 +9260,8 @@
         </p:nvSpPr>
         <p:spPr>
           <a:xfrm>
-            <a:off x="2120712" y="3075483"/>
-            <a:ext cx="7950576" cy="521732"/>
+            <a:off x="8732520" y="3398519"/>
+            <a:ext cx="457200" cy="457200"/>
           </a:xfrm>
           <a:prstGeom prst="roundRect">
             <a:avLst/>
@@ -6034,78 +9296,7 @@
           <a:lstStyle/>
           <a:p>
             <a:pPr algn="ctr"/>
-            <a:r>
-              <a:rPr lang="en-US" dirty="0">
-                <a:solidFill>
-                  <a:schemeClr val="tx1"/>
-                </a:solidFill>
-              </a:rPr>
-              <a:t>Control Plane</a:t>
-            </a:r>
-          </a:p>
-        </p:txBody>
-      </p:sp>
-      <p:sp>
-        <p:nvSpPr>
-          <p:cNvPr id="10" name="Rectangle: Rounded Corners 9">
-            <a:extLst>
-              <a:ext uri="{FF2B5EF4-FFF2-40B4-BE49-F238E27FC236}">
-                <a16:creationId xmlns:a16="http://schemas.microsoft.com/office/drawing/2014/main" id="{B8A0002D-68DE-F2E3-7AE8-155E2AE2F385}"/>
-              </a:ext>
-            </a:extLst>
-          </p:cNvPr>
-          <p:cNvSpPr/>
-          <p:nvPr/>
-        </p:nvSpPr>
-        <p:spPr>
-          <a:xfrm>
-            <a:off x="2120712" y="3903751"/>
-            <a:ext cx="1097280" cy="369332"/>
-          </a:xfrm>
-          <a:prstGeom prst="roundRect">
-            <a:avLst>
-              <a:gd name="adj" fmla="val 50000"/>
-            </a:avLst>
-          </a:prstGeom>
-          <a:solidFill>
-            <a:srgbClr val="B2D4EB"/>
-          </a:solidFill>
-          <a:ln>
-            <a:solidFill>
-              <a:schemeClr val="tx1"/>
-            </a:solidFill>
-          </a:ln>
-        </p:spPr>
-        <p:style>
-          <a:lnRef idx="2">
-            <a:schemeClr val="accent1">
-              <a:shade val="15000"/>
-            </a:schemeClr>
-          </a:lnRef>
-          <a:fillRef idx="1">
-            <a:schemeClr val="accent1"/>
-          </a:fillRef>
-          <a:effectRef idx="0">
-            <a:schemeClr val="accent1"/>
-          </a:effectRef>
-          <a:fontRef idx="minor">
-            <a:schemeClr val="lt1"/>
-          </a:fontRef>
-        </p:style>
-        <p:txBody>
-          <a:bodyPr rtlCol="0" anchor="ctr"/>
-          <a:lstStyle/>
-          <a:p>
-            <a:pPr algn="ctr"/>
-            <a:r>
-              <a:rPr lang="en-US" dirty="0">
-                <a:solidFill>
-                  <a:schemeClr val="tx1"/>
-                </a:solidFill>
-              </a:rPr>
-              <a:t>Cloud</a:t>
-            </a:r>
-            <a:endParaRPr lang="en-US" i="1" dirty="0">
+            <a:endParaRPr lang="en-US" dirty="0">
               <a:solidFill>
                 <a:schemeClr val="tx1"/>
               </a:solidFill>
@@ -6113,94 +9304,26 @@
           </a:p>
         </p:txBody>
       </p:sp>
-      <p:sp>
-        <p:nvSpPr>
-          <p:cNvPr id="11" name="Rectangle: Rounded Corners 10">
-            <a:extLst>
-              <a:ext uri="{FF2B5EF4-FFF2-40B4-BE49-F238E27FC236}">
-                <a16:creationId xmlns:a16="http://schemas.microsoft.com/office/drawing/2014/main" id="{275A5F02-D45E-7075-0A8E-DE47614A9350}"/>
-              </a:ext>
-            </a:extLst>
-          </p:cNvPr>
-          <p:cNvSpPr/>
-          <p:nvPr/>
-        </p:nvSpPr>
-        <p:spPr>
-          <a:xfrm>
-            <a:off x="8974008" y="3900228"/>
-            <a:ext cx="1097280" cy="369332"/>
-          </a:xfrm>
-          <a:prstGeom prst="roundRect">
-            <a:avLst>
-              <a:gd name="adj" fmla="val 50000"/>
-            </a:avLst>
-          </a:prstGeom>
-          <a:solidFill>
-            <a:srgbClr val="B2D4EB"/>
-          </a:solidFill>
-          <a:ln>
-            <a:solidFill>
-              <a:schemeClr val="tx1"/>
-            </a:solidFill>
-          </a:ln>
-        </p:spPr>
-        <p:style>
-          <a:lnRef idx="2">
-            <a:schemeClr val="accent1">
-              <a:shade val="15000"/>
-            </a:schemeClr>
-          </a:lnRef>
-          <a:fillRef idx="1">
-            <a:schemeClr val="accent1"/>
-          </a:fillRef>
-          <a:effectRef idx="0">
-            <a:schemeClr val="accent1"/>
-          </a:effectRef>
-          <a:fontRef idx="minor">
-            <a:schemeClr val="lt1"/>
-          </a:fontRef>
-        </p:style>
-        <p:txBody>
-          <a:bodyPr rtlCol="0" anchor="ctr"/>
-          <a:lstStyle/>
-          <a:p>
-            <a:pPr algn="ctr"/>
-            <a:r>
-              <a:rPr lang="en-US" dirty="0">
-                <a:solidFill>
-                  <a:schemeClr val="tx1"/>
-                </a:solidFill>
-              </a:rPr>
-              <a:t>Edge</a:t>
-            </a:r>
-            <a:endParaRPr lang="en-US" i="1" dirty="0">
-              <a:solidFill>
-                <a:schemeClr val="tx1"/>
-              </a:solidFill>
-            </a:endParaRPr>
-          </a:p>
-        </p:txBody>
-      </p:sp>
       <p:cxnSp>
         <p:nvCxnSpPr>
-          <p:cNvPr id="12" name="Straight Arrow Connector 11">
+          <p:cNvPr id="47" name="Straight Arrow Connector 46">
             <a:extLst>
               <a:ext uri="{FF2B5EF4-FFF2-40B4-BE49-F238E27FC236}">
-                <a16:creationId xmlns:a16="http://schemas.microsoft.com/office/drawing/2014/main" id="{059E589C-158C-8464-335B-8E038EB59CAF}"/>
+                <a16:creationId xmlns:a16="http://schemas.microsoft.com/office/drawing/2014/main" id="{42D77B26-2C1F-3022-9B0B-3736BC5CF8AA}"/>
               </a:ext>
             </a:extLst>
           </p:cNvPr>
           <p:cNvCxnSpPr>
             <a:cxnSpLocks/>
-            <a:stCxn id="10" idx="3"/>
-            <a:endCxn id="11" idx="1"/>
+            <a:stCxn id="3" idx="3"/>
+            <a:endCxn id="44" idx="1"/>
           </p:cNvCxnSpPr>
           <p:nvPr/>
         </p:nvCxnSpPr>
         <p:spPr>
-          <a:xfrm flipV="1">
-            <a:off x="3217992" y="4084894"/>
-            <a:ext cx="5756016" cy="3523"/>
+          <a:xfrm>
+            <a:off x="8328660" y="2854154"/>
+            <a:ext cx="403860" cy="1"/>
           </a:xfrm>
           <a:prstGeom prst="straightConnector1">
             <a:avLst/>
@@ -6210,7 +9333,151 @@
               <a:schemeClr val="tx1"/>
             </a:solidFill>
             <a:prstDash val="solid"/>
-            <a:headEnd type="triangle" w="lg" len="lg"/>
+            <a:tailEnd type="triangle" w="lg" len="lg"/>
+          </a:ln>
+        </p:spPr>
+        <p:style>
+          <a:lnRef idx="2">
+            <a:schemeClr val="accent1"/>
+          </a:lnRef>
+          <a:fillRef idx="0">
+            <a:schemeClr val="accent1"/>
+          </a:fillRef>
+          <a:effectRef idx="1">
+            <a:schemeClr val="accent1"/>
+          </a:effectRef>
+          <a:fontRef idx="minor">
+            <a:schemeClr val="tx1"/>
+          </a:fontRef>
+        </p:style>
+      </p:cxnSp>
+      <p:cxnSp>
+        <p:nvCxnSpPr>
+          <p:cNvPr id="55" name="Straight Arrow Connector 54">
+            <a:extLst>
+              <a:ext uri="{FF2B5EF4-FFF2-40B4-BE49-F238E27FC236}">
+                <a16:creationId xmlns:a16="http://schemas.microsoft.com/office/drawing/2014/main" id="{A99ECFB6-8E63-4F62-C5D3-37BC5BB43934}"/>
+              </a:ext>
+            </a:extLst>
+          </p:cNvPr>
+          <p:cNvCxnSpPr>
+            <a:cxnSpLocks/>
+            <a:stCxn id="2" idx="3"/>
+            <a:endCxn id="46" idx="1"/>
+          </p:cNvCxnSpPr>
+          <p:nvPr/>
+        </p:nvCxnSpPr>
+        <p:spPr>
+          <a:xfrm flipV="1">
+            <a:off x="8328660" y="3627119"/>
+            <a:ext cx="403860" cy="1"/>
+          </a:xfrm>
+          <a:prstGeom prst="straightConnector1">
+            <a:avLst/>
+          </a:prstGeom>
+          <a:ln>
+            <a:solidFill>
+              <a:schemeClr val="tx1"/>
+            </a:solidFill>
+            <a:prstDash val="solid"/>
+            <a:tailEnd type="triangle" w="lg" len="lg"/>
+          </a:ln>
+        </p:spPr>
+        <p:style>
+          <a:lnRef idx="2">
+            <a:schemeClr val="accent1"/>
+          </a:lnRef>
+          <a:fillRef idx="0">
+            <a:schemeClr val="accent1"/>
+          </a:fillRef>
+          <a:effectRef idx="1">
+            <a:schemeClr val="accent1"/>
+          </a:effectRef>
+          <a:fontRef idx="minor">
+            <a:schemeClr val="tx1"/>
+          </a:fontRef>
+        </p:style>
+      </p:cxnSp>
+      <p:cxnSp>
+        <p:nvCxnSpPr>
+          <p:cNvPr id="58" name="Connector: Elbow 57">
+            <a:extLst>
+              <a:ext uri="{FF2B5EF4-FFF2-40B4-BE49-F238E27FC236}">
+                <a16:creationId xmlns:a16="http://schemas.microsoft.com/office/drawing/2014/main" id="{DDB500F1-F165-AABE-6725-11E4ED79023E}"/>
+              </a:ext>
+            </a:extLst>
+          </p:cNvPr>
+          <p:cNvCxnSpPr>
+            <a:cxnSpLocks/>
+            <a:stCxn id="25" idx="3"/>
+            <a:endCxn id="6" idx="1"/>
+          </p:cNvCxnSpPr>
+          <p:nvPr/>
+        </p:nvCxnSpPr>
+        <p:spPr>
+          <a:xfrm>
+            <a:off x="9189720" y="2081191"/>
+            <a:ext cx="647700" cy="772964"/>
+          </a:xfrm>
+          <a:prstGeom prst="bentConnector3">
+            <a:avLst>
+              <a:gd name="adj1" fmla="val 50000"/>
+            </a:avLst>
+          </a:prstGeom>
+          <a:ln>
+            <a:solidFill>
+              <a:schemeClr val="tx1"/>
+            </a:solidFill>
+            <a:prstDash val="solid"/>
+            <a:tailEnd type="triangle" w="lg" len="lg"/>
+          </a:ln>
+        </p:spPr>
+        <p:style>
+          <a:lnRef idx="2">
+            <a:schemeClr val="accent1"/>
+          </a:lnRef>
+          <a:fillRef idx="0">
+            <a:schemeClr val="accent1"/>
+          </a:fillRef>
+          <a:effectRef idx="1">
+            <a:schemeClr val="accent1"/>
+          </a:effectRef>
+          <a:fontRef idx="minor">
+            <a:schemeClr val="tx1"/>
+          </a:fontRef>
+        </p:style>
+      </p:cxnSp>
+      <p:cxnSp>
+        <p:nvCxnSpPr>
+          <p:cNvPr id="61" name="Connector: Elbow 60">
+            <a:extLst>
+              <a:ext uri="{FF2B5EF4-FFF2-40B4-BE49-F238E27FC236}">
+                <a16:creationId xmlns:a16="http://schemas.microsoft.com/office/drawing/2014/main" id="{28AC6A5D-0A01-5370-996D-AF8698A1082D}"/>
+              </a:ext>
+            </a:extLst>
+          </p:cNvPr>
+          <p:cNvCxnSpPr>
+            <a:cxnSpLocks/>
+            <a:stCxn id="46" idx="3"/>
+            <a:endCxn id="6" idx="1"/>
+          </p:cNvCxnSpPr>
+          <p:nvPr/>
+        </p:nvCxnSpPr>
+        <p:spPr>
+          <a:xfrm flipV="1">
+            <a:off x="9189720" y="2854155"/>
+            <a:ext cx="647700" cy="772964"/>
+          </a:xfrm>
+          <a:prstGeom prst="bentConnector3">
+            <a:avLst>
+              <a:gd name="adj1" fmla="val 50000"/>
+            </a:avLst>
+          </a:prstGeom>
+          <a:ln>
+            <a:solidFill>
+              <a:schemeClr val="tx1"/>
+            </a:solidFill>
+            <a:prstDash val="solid"/>
             <a:tailEnd type="triangle" w="lg" len="lg"/>
           </a:ln>
         </p:spPr>
@@ -6231,236 +9498,10 @@
       </p:cxnSp>
       <p:pic>
         <p:nvPicPr>
-          <p:cNvPr id="1030" name="Picture 6">
+          <p:cNvPr id="67" name="Graphic 66" descr="Web design with solid fill">
             <a:extLst>
               <a:ext uri="{FF2B5EF4-FFF2-40B4-BE49-F238E27FC236}">
-                <a16:creationId xmlns:a16="http://schemas.microsoft.com/office/drawing/2014/main" id="{8D6EF364-A0CD-1E0B-E3D9-D7610B0BA01B}"/>
-              </a:ext>
-            </a:extLst>
-          </p:cNvPr>
-          <p:cNvPicPr>
-            <a:picLocks noChangeAspect="1" noChangeArrowheads="1"/>
-          </p:cNvPicPr>
-          <p:nvPr/>
-        </p:nvPicPr>
-        <p:blipFill>
-          <a:blip r:embed="rId2">
-            <a:extLst>
-              <a:ext uri="{28A0092B-C50C-407E-A947-70E740481C1C}">
-                <a14:useLocalDpi xmlns:a14="http://schemas.microsoft.com/office/drawing/2010/main" val="0"/>
-              </a:ext>
-            </a:extLst>
-          </a:blip>
-          <a:srcRect/>
-          <a:stretch>
-            <a:fillRect/>
-          </a:stretch>
-        </p:blipFill>
-        <p:spPr bwMode="auto">
-          <a:xfrm>
-            <a:off x="2326452" y="1698160"/>
-            <a:ext cx="685800" cy="685800"/>
-          </a:xfrm>
-          <a:prstGeom prst="rect">
-            <a:avLst/>
-          </a:prstGeom>
-          <a:noFill/>
-          <a:extLst>
-            <a:ext uri="{909E8E84-426E-40DD-AFC4-6F175D3DCCD1}">
-              <a14:hiddenFill xmlns:a14="http://schemas.microsoft.com/office/drawing/2010/main">
-                <a:solidFill>
-                  <a:srgbClr val="FFFFFF"/>
-                </a:solidFill>
-              </a14:hiddenFill>
-            </a:ext>
-          </a:extLst>
-        </p:spPr>
-      </p:pic>
-      <p:pic>
-        <p:nvPicPr>
-          <p:cNvPr id="1034" name="Picture 10">
-            <a:extLst>
-              <a:ext uri="{FF2B5EF4-FFF2-40B4-BE49-F238E27FC236}">
-                <a16:creationId xmlns:a16="http://schemas.microsoft.com/office/drawing/2014/main" id="{584812A5-BC6A-1A0C-EC5F-293C5EE9341F}"/>
-              </a:ext>
-            </a:extLst>
-          </p:cNvPr>
-          <p:cNvPicPr>
-            <a:picLocks noChangeAspect="1" noChangeArrowheads="1"/>
-          </p:cNvPicPr>
-          <p:nvPr/>
-        </p:nvPicPr>
-        <p:blipFill>
-          <a:blip r:embed="rId3">
-            <a:extLst>
-              <a:ext uri="{28A0092B-C50C-407E-A947-70E740481C1C}">
-                <a14:useLocalDpi xmlns:a14="http://schemas.microsoft.com/office/drawing/2010/main" val="0"/>
-              </a:ext>
-            </a:extLst>
-          </a:blip>
-          <a:srcRect/>
-          <a:stretch>
-            <a:fillRect/>
-          </a:stretch>
-        </p:blipFill>
-        <p:spPr bwMode="auto">
-          <a:xfrm>
-            <a:off x="5753100" y="1698160"/>
-            <a:ext cx="685800" cy="685800"/>
-          </a:xfrm>
-          <a:prstGeom prst="rect">
-            <a:avLst/>
-          </a:prstGeom>
-          <a:noFill/>
-          <a:extLst>
-            <a:ext uri="{909E8E84-426E-40DD-AFC4-6F175D3DCCD1}">
-              <a14:hiddenFill xmlns:a14="http://schemas.microsoft.com/office/drawing/2010/main">
-                <a:solidFill>
-                  <a:srgbClr val="FFFFFF"/>
-                </a:solidFill>
-              </a14:hiddenFill>
-            </a:ext>
-          </a:extLst>
-        </p:spPr>
-      </p:pic>
-      <p:sp>
-        <p:nvSpPr>
-          <p:cNvPr id="16" name="TextBox 15">
-            <a:extLst>
-              <a:ext uri="{FF2B5EF4-FFF2-40B4-BE49-F238E27FC236}">
-                <a16:creationId xmlns:a16="http://schemas.microsoft.com/office/drawing/2014/main" id="{75C2BE62-4319-90A2-F77A-43FBCCB45A92}"/>
-              </a:ext>
-            </a:extLst>
-          </p:cNvPr>
-          <p:cNvSpPr txBox="1"/>
-          <p:nvPr/>
-        </p:nvSpPr>
-        <p:spPr>
-          <a:xfrm>
-            <a:off x="169992" y="6374146"/>
-            <a:ext cx="6096000" cy="369332"/>
-          </a:xfrm>
-          <a:prstGeom prst="rect">
-            <a:avLst/>
-          </a:prstGeom>
-          <a:noFill/>
-        </p:spPr>
-        <p:txBody>
-          <a:bodyPr wrap="square">
-            <a:spAutoFit/>
-          </a:bodyPr>
-          <a:lstStyle/>
-          <a:p>
-            <a:r>
-              <a:rPr lang="en-US" dirty="0">
-                <a:hlinkClick r:id="rId4"/>
-              </a:rPr>
-              <a:t>Microsoft Foundry documentation | Microsoft Learn</a:t>
-            </a:r>
-            <a:endParaRPr lang="en-US" dirty="0"/>
-          </a:p>
-        </p:txBody>
-      </p:sp>
-      <p:pic>
-        <p:nvPicPr>
-          <p:cNvPr id="1036" name="Picture 12">
-            <a:extLst>
-              <a:ext uri="{FF2B5EF4-FFF2-40B4-BE49-F238E27FC236}">
-                <a16:creationId xmlns:a16="http://schemas.microsoft.com/office/drawing/2014/main" id="{2C06DA4A-A0CA-3F11-FBF2-7675DC8920F6}"/>
-              </a:ext>
-            </a:extLst>
-          </p:cNvPr>
-          <p:cNvPicPr>
-            <a:picLocks noChangeAspect="1" noChangeArrowheads="1"/>
-          </p:cNvPicPr>
-          <p:nvPr/>
-        </p:nvPicPr>
-        <p:blipFill>
-          <a:blip r:embed="rId5">
-            <a:extLst>
-              <a:ext uri="{28A0092B-C50C-407E-A947-70E740481C1C}">
-                <a14:useLocalDpi xmlns:a14="http://schemas.microsoft.com/office/drawing/2010/main" val="0"/>
-              </a:ext>
-            </a:extLst>
-          </a:blip>
-          <a:srcRect/>
-          <a:stretch>
-            <a:fillRect/>
-          </a:stretch>
-        </p:blipFill>
-        <p:spPr bwMode="auto">
-          <a:xfrm>
-            <a:off x="9179748" y="1698160"/>
-            <a:ext cx="685800" cy="685800"/>
-          </a:xfrm>
-          <a:prstGeom prst="rect">
-            <a:avLst/>
-          </a:prstGeom>
-          <a:noFill/>
-          <a:extLst>
-            <a:ext uri="{909E8E84-426E-40DD-AFC4-6F175D3DCCD1}">
-              <a14:hiddenFill xmlns:a14="http://schemas.microsoft.com/office/drawing/2010/main">
-                <a:solidFill>
-                  <a:srgbClr val="FFFFFF"/>
-                </a:solidFill>
-              </a14:hiddenFill>
-            </a:ext>
-          </a:extLst>
-        </p:spPr>
-      </p:pic>
-      <p:pic>
-        <p:nvPicPr>
-          <p:cNvPr id="1038" name="Picture 14">
-            <a:extLst>
-              <a:ext uri="{FF2B5EF4-FFF2-40B4-BE49-F238E27FC236}">
-                <a16:creationId xmlns:a16="http://schemas.microsoft.com/office/drawing/2014/main" id="{BBE57FCA-085E-B37C-A718-A5115481F51F}"/>
-              </a:ext>
-            </a:extLst>
-          </p:cNvPr>
-          <p:cNvPicPr>
-            <a:picLocks noChangeAspect="1" noChangeArrowheads="1"/>
-          </p:cNvPicPr>
-          <p:nvPr/>
-        </p:nvPicPr>
-        <p:blipFill>
-          <a:blip r:embed="rId6">
-            <a:extLst>
-              <a:ext uri="{28A0092B-C50C-407E-A947-70E740481C1C}">
-                <a14:useLocalDpi xmlns:a14="http://schemas.microsoft.com/office/drawing/2010/main" val="0"/>
-              </a:ext>
-            </a:extLst>
-          </a:blip>
-          <a:srcRect/>
-          <a:stretch>
-            <a:fillRect/>
-          </a:stretch>
-        </p:blipFill>
-        <p:spPr bwMode="auto">
-          <a:xfrm>
-            <a:off x="7466424" y="1698160"/>
-            <a:ext cx="685800" cy="685800"/>
-          </a:xfrm>
-          <a:prstGeom prst="rect">
-            <a:avLst/>
-          </a:prstGeom>
-          <a:noFill/>
-          <a:extLst>
-            <a:ext uri="{909E8E84-426E-40DD-AFC4-6F175D3DCCD1}">
-              <a14:hiddenFill xmlns:a14="http://schemas.microsoft.com/office/drawing/2010/main">
-                <a:solidFill>
-                  <a:srgbClr val="FFFFFF"/>
-                </a:solidFill>
-              </a14:hiddenFill>
-            </a:ext>
-          </a:extLst>
-        </p:spPr>
-      </p:pic>
-      <p:pic>
-        <p:nvPicPr>
-          <p:cNvPr id="21" name="Graphic 20">
-            <a:extLst>
-              <a:ext uri="{FF2B5EF4-FFF2-40B4-BE49-F238E27FC236}">
-                <a16:creationId xmlns:a16="http://schemas.microsoft.com/office/drawing/2014/main" id="{4DCAAB39-A56E-0DEE-C6B4-7E5D07F0EEB0}"/>
+                <a16:creationId xmlns:a16="http://schemas.microsoft.com/office/drawing/2014/main" id="{5D8BB564-5BA8-868D-2AB7-35E0D3AE65F9}"/>
               </a:ext>
             </a:extLst>
           </p:cNvPr>
@@ -6470,10 +9511,10 @@
           <p:nvPr/>
         </p:nvPicPr>
         <p:blipFill>
-          <a:blip r:embed="rId7">
+          <a:blip r:embed="rId2">
             <a:extLst>
               <a:ext uri="{96DAC541-7B7A-43D3-8B79-37D633B846F1}">
-                <asvg:svgBlip xmlns:asvg="http://schemas.microsoft.com/office/drawing/2016/SVG/main" r:embed="rId8"/>
+                <asvg:svgBlip xmlns:asvg="http://schemas.microsoft.com/office/drawing/2016/SVG/main" r:embed="rId3"/>
               </a:ext>
             </a:extLst>
           </a:blip>
@@ -6483,8 +9524,8 @@
         </p:blipFill>
         <p:spPr>
           <a:xfrm>
-            <a:off x="5005387" y="3107749"/>
-            <a:ext cx="457200" cy="457200"/>
+            <a:off x="8755380" y="2648413"/>
+            <a:ext cx="411480" cy="411480"/>
           </a:xfrm>
           <a:prstGeom prst="rect">
             <a:avLst/>
@@ -6493,10 +9534,10 @@
       </p:pic>
       <p:pic>
         <p:nvPicPr>
-          <p:cNvPr id="23" name="Graphic 22">
+          <p:cNvPr id="71" name="Graphic 70" descr="World with solid fill">
             <a:extLst>
               <a:ext uri="{FF2B5EF4-FFF2-40B4-BE49-F238E27FC236}">
-                <a16:creationId xmlns:a16="http://schemas.microsoft.com/office/drawing/2014/main" id="{9F45F68D-2016-AE28-5FB4-29299FA72985}"/>
+                <a16:creationId xmlns:a16="http://schemas.microsoft.com/office/drawing/2014/main" id="{0EF50C39-FA5F-96A6-2DE6-53C76B029FDB}"/>
               </a:ext>
             </a:extLst>
           </p:cNvPr>
@@ -6506,10 +9547,10 @@
           <p:nvPr/>
         </p:nvPicPr>
         <p:blipFill>
-          <a:blip r:embed="rId9">
+          <a:blip r:embed="rId4">
             <a:extLst>
               <a:ext uri="{96DAC541-7B7A-43D3-8B79-37D633B846F1}">
-                <asvg:svgBlip xmlns:asvg="http://schemas.microsoft.com/office/drawing/2016/SVG/main" r:embed="rId10"/>
+                <asvg:svgBlip xmlns:asvg="http://schemas.microsoft.com/office/drawing/2016/SVG/main" r:embed="rId5"/>
               </a:ext>
             </a:extLst>
           </a:blip>
@@ -6519,142 +9560,92 @@
         </p:blipFill>
         <p:spPr>
           <a:xfrm>
-            <a:off x="4039776" y="1698160"/>
-            <a:ext cx="685800" cy="685800"/>
+            <a:off x="8755380" y="3421379"/>
+            <a:ext cx="411480" cy="411480"/>
           </a:xfrm>
           <a:prstGeom prst="rect">
             <a:avLst/>
           </a:prstGeom>
         </p:spPr>
       </p:pic>
-      <p:grpSp>
-        <p:nvGrpSpPr>
-          <p:cNvPr id="27" name="Group 26">
+      <p:pic>
+        <p:nvPicPr>
+          <p:cNvPr id="73" name="Graphic 72" descr="Database with solid fill">
             <a:extLst>
               <a:ext uri="{FF2B5EF4-FFF2-40B4-BE49-F238E27FC236}">
-                <a16:creationId xmlns:a16="http://schemas.microsoft.com/office/drawing/2014/main" id="{220717FD-C295-A74B-1DD9-B84C288BFAF5}"/>
+                <a16:creationId xmlns:a16="http://schemas.microsoft.com/office/drawing/2014/main" id="{20B0889E-3ACA-9DCA-25FE-C1F9B73F7329}"/>
               </a:ext>
             </a:extLst>
           </p:cNvPr>
-          <p:cNvGrpSpPr/>
+          <p:cNvPicPr>
+            <a:picLocks noChangeAspect="1"/>
+          </p:cNvPicPr>
           <p:nvPr/>
-        </p:nvGrpSpPr>
-        <p:grpSpPr>
-          <a:xfrm>
-            <a:off x="4468860" y="550330"/>
-            <a:ext cx="3254280" cy="685800"/>
-            <a:chOff x="4558421" y="553105"/>
-            <a:chExt cx="3254280" cy="685800"/>
-          </a:xfrm>
-        </p:grpSpPr>
-        <p:pic>
-          <p:nvPicPr>
-            <p:cNvPr id="25" name="Picture 24">
-              <a:extLst>
-                <a:ext uri="{FF2B5EF4-FFF2-40B4-BE49-F238E27FC236}">
-                  <a16:creationId xmlns:a16="http://schemas.microsoft.com/office/drawing/2014/main" id="{637A2444-6EF1-C6ED-5009-47471D8E1AFB}"/>
-                </a:ext>
-              </a:extLst>
-            </p:cNvPr>
-            <p:cNvPicPr>
-              <a:picLocks noChangeAspect="1"/>
-            </p:cNvPicPr>
-            <p:nvPr/>
-          </p:nvPicPr>
-          <p:blipFill>
-            <a:blip r:embed="rId11">
-              <a:extLst>
-                <a:ext uri="{28A0092B-C50C-407E-A947-70E740481C1C}">
-                  <a14:useLocalDpi xmlns:a14="http://schemas.microsoft.com/office/drawing/2010/main" val="0"/>
-                </a:ext>
-              </a:extLst>
-            </a:blip>
-            <a:stretch>
-              <a:fillRect/>
-            </a:stretch>
-          </p:blipFill>
-          <p:spPr>
-            <a:xfrm>
-              <a:off x="4558421" y="553105"/>
-              <a:ext cx="750646" cy="685800"/>
-            </a:xfrm>
-            <a:prstGeom prst="rect">
-              <a:avLst/>
-            </a:prstGeom>
-          </p:spPr>
-        </p:pic>
-        <p:sp>
-          <p:nvSpPr>
-            <p:cNvPr id="26" name="TextBox 25">
-              <a:extLst>
-                <a:ext uri="{FF2B5EF4-FFF2-40B4-BE49-F238E27FC236}">
-                  <a16:creationId xmlns:a16="http://schemas.microsoft.com/office/drawing/2014/main" id="{AF52B155-53E9-CC0C-9CB8-93574EE705D4}"/>
-                </a:ext>
-              </a:extLst>
-            </p:cNvPr>
-            <p:cNvSpPr txBox="1"/>
-            <p:nvPr/>
-          </p:nvSpPr>
-          <p:spPr>
-            <a:xfrm>
-              <a:off x="5309067" y="634395"/>
-              <a:ext cx="2503634" cy="523220"/>
-            </a:xfrm>
-            <a:prstGeom prst="rect">
-              <a:avLst/>
-            </a:prstGeom>
-            <a:noFill/>
-          </p:spPr>
-          <p:txBody>
-            <a:bodyPr wrap="none" rtlCol="0">
-              <a:spAutoFit/>
-            </a:bodyPr>
-            <a:lstStyle/>
-            <a:p>
-              <a:r>
-                <a:rPr lang="en-US" sz="2800" dirty="0"/>
-                <a:t>Microsoft Foundry</a:t>
-              </a:r>
-            </a:p>
-          </p:txBody>
-        </p:sp>
-      </p:grpSp>
-    </p:spTree>
-    <p:extLst>
-      <p:ext uri="{BB962C8B-B14F-4D97-AF65-F5344CB8AC3E}">
-        <p14:creationId xmlns:p14="http://schemas.microsoft.com/office/powerpoint/2010/main" val="71902365"/>
-      </p:ext>
-    </p:extLst>
-  </p:cSld>
-  <p:clrMapOvr>
-    <a:masterClrMapping/>
-  </p:clrMapOvr>
-</p:sld>
-</file>
-
-<file path=ppt/slides/slide5.xml><?xml version="1.0" encoding="utf-8"?>
-<p:sld xmlns:a="http://schemas.openxmlformats.org/drawingml/2006/main" xmlns:r="http://schemas.openxmlformats.org/officeDocument/2006/relationships" xmlns:p="http://schemas.openxmlformats.org/presentationml/2006/main">
-  <p:cSld>
-    <p:spTree>
-      <p:nvGrpSpPr>
-        <p:cNvPr id="1" name=""/>
-        <p:cNvGrpSpPr/>
-        <p:nvPr/>
-      </p:nvGrpSpPr>
-      <p:grpSpPr>
-        <a:xfrm>
-          <a:off x="0" y="0"/>
-          <a:ext cx="0" cy="0"/>
-          <a:chOff x="0" y="0"/>
-          <a:chExt cx="0" cy="0"/>
-        </a:xfrm>
-      </p:grpSpPr>
-      <p:sp>
-        <p:nvSpPr>
-          <p:cNvPr id="2" name="Rectangle: Rounded Corners 1">
+        </p:nvPicPr>
+        <p:blipFill>
+          <a:blip r:embed="rId6">
+            <a:extLst>
+              <a:ext uri="{96DAC541-7B7A-43D3-8B79-37D633B846F1}">
+                <asvg:svgBlip xmlns:asvg="http://schemas.microsoft.com/office/drawing/2016/SVG/main" r:embed="rId7"/>
+              </a:ext>
+            </a:extLst>
+          </a:blip>
+          <a:stretch>
+            <a:fillRect/>
+          </a:stretch>
+        </p:blipFill>
+        <p:spPr>
+          <a:xfrm>
+            <a:off x="8755380" y="1875451"/>
+            <a:ext cx="411480" cy="411480"/>
+          </a:xfrm>
+          <a:prstGeom prst="rect">
+            <a:avLst/>
+          </a:prstGeom>
+        </p:spPr>
+      </p:pic>
+      <p:pic>
+        <p:nvPicPr>
+          <p:cNvPr id="75" name="Graphic 74" descr="Gears with solid fill">
             <a:extLst>
               <a:ext uri="{FF2B5EF4-FFF2-40B4-BE49-F238E27FC236}">
-                <a16:creationId xmlns:a16="http://schemas.microsoft.com/office/drawing/2014/main" id="{ED732446-F0F6-0ACF-647A-3BC33E7C3D60}"/>
+                <a16:creationId xmlns:a16="http://schemas.microsoft.com/office/drawing/2014/main" id="{AFA7CC75-0D4E-9273-3BC2-179536E5EC20}"/>
+              </a:ext>
+            </a:extLst>
+          </p:cNvPr>
+          <p:cNvPicPr>
+            <a:picLocks noChangeAspect="1"/>
+          </p:cNvPicPr>
+          <p:nvPr/>
+        </p:nvPicPr>
+        <p:blipFill>
+          <a:blip r:embed="rId8">
+            <a:extLst>
+              <a:ext uri="{96DAC541-7B7A-43D3-8B79-37D633B846F1}">
+                <asvg:svgBlip xmlns:asvg="http://schemas.microsoft.com/office/drawing/2016/SVG/main" r:embed="rId9"/>
+              </a:ext>
+            </a:extLst>
+          </a:blip>
+          <a:stretch>
+            <a:fillRect/>
+          </a:stretch>
+        </p:blipFill>
+        <p:spPr>
+          <a:xfrm>
+            <a:off x="1626048" y="2648413"/>
+            <a:ext cx="411480" cy="411480"/>
+          </a:xfrm>
+          <a:prstGeom prst="rect">
+            <a:avLst/>
+          </a:prstGeom>
+        </p:spPr>
+      </p:pic>
+      <p:sp>
+        <p:nvSpPr>
+          <p:cNvPr id="76" name="Rectangle: Rounded Corners 75">
+            <a:extLst>
+              <a:ext uri="{FF2B5EF4-FFF2-40B4-BE49-F238E27FC236}">
+                <a16:creationId xmlns:a16="http://schemas.microsoft.com/office/drawing/2014/main" id="{3492D89A-8D12-E69E-613E-246E45DCD83F}"/>
               </a:ext>
             </a:extLst>
           </p:cNvPr>
@@ -6663,71 +9654,8 @@
         </p:nvSpPr>
         <p:spPr>
           <a:xfrm>
-            <a:off x="962567" y="281940"/>
-            <a:ext cx="10552099" cy="6187439"/>
-          </a:xfrm>
-          <a:prstGeom prst="roundRect">
-            <a:avLst>
-              <a:gd name="adj" fmla="val 5234"/>
-            </a:avLst>
-          </a:prstGeom>
-          <a:solidFill>
-            <a:schemeClr val="bg1"/>
-          </a:solidFill>
-          <a:ln>
-            <a:solidFill>
-              <a:schemeClr val="tx1"/>
-            </a:solidFill>
-          </a:ln>
-        </p:spPr>
-        <p:style>
-          <a:lnRef idx="2">
-            <a:schemeClr val="accent1">
-              <a:shade val="15000"/>
-            </a:schemeClr>
-          </a:lnRef>
-          <a:fillRef idx="1">
-            <a:schemeClr val="accent1"/>
-          </a:fillRef>
-          <a:effectRef idx="0">
-            <a:schemeClr val="accent1"/>
-          </a:effectRef>
-          <a:fontRef idx="minor">
-            <a:schemeClr val="lt1"/>
-          </a:fontRef>
-        </p:style>
-        <p:txBody>
-          <a:bodyPr rtlCol="0" anchor="t"/>
-          <a:lstStyle/>
-          <a:p>
-            <a:pPr algn="ctr"/>
-            <a:r>
-              <a:rPr lang="en-US" dirty="0">
-                <a:solidFill>
-                  <a:schemeClr val="tx1"/>
-                </a:solidFill>
-              </a:rPr>
-              <a:t>Example Models</a:t>
-            </a:r>
-          </a:p>
-        </p:txBody>
-      </p:sp>
-      <p:sp>
-        <p:nvSpPr>
-          <p:cNvPr id="3" name="Rectangle: Rounded Corners 2">
-            <a:extLst>
-              <a:ext uri="{FF2B5EF4-FFF2-40B4-BE49-F238E27FC236}">
-                <a16:creationId xmlns:a16="http://schemas.microsoft.com/office/drawing/2014/main" id="{5574ED1F-143F-F0C3-860B-D1D1A94B8038}"/>
-              </a:ext>
-            </a:extLst>
-          </p:cNvPr>
-          <p:cNvSpPr/>
-          <p:nvPr/>
-        </p:nvSpPr>
-        <p:spPr>
-          <a:xfrm>
-            <a:off x="4778916" y="1188720"/>
-            <a:ext cx="2634168" cy="2335531"/>
+            <a:off x="10545258" y="3627118"/>
+            <a:ext cx="1205604" cy="469096"/>
           </a:xfrm>
           <a:prstGeom prst="roundRect">
             <a:avLst/>
@@ -6758,7 +9686,7 @@
           </a:fontRef>
         </p:style>
         <p:txBody>
-          <a:bodyPr rtlCol="0" anchor="t"/>
+          <a:bodyPr rtlCol="0" anchor="ctr"/>
           <a:lstStyle/>
           <a:p>
             <a:pPr algn="ctr"/>
@@ -6768,1210 +9696,30 @@
                   <a:schemeClr val="tx1"/>
                 </a:solidFill>
               </a:rPr>
-              <a:t>Anthropic</a:t>
-            </a:r>
-          </a:p>
-        </p:txBody>
-      </p:sp>
-      <p:sp>
-        <p:nvSpPr>
-          <p:cNvPr id="4" name="Rectangle: Rounded Corners 3">
-            <a:extLst>
-              <a:ext uri="{FF2B5EF4-FFF2-40B4-BE49-F238E27FC236}">
-                <a16:creationId xmlns:a16="http://schemas.microsoft.com/office/drawing/2014/main" id="{CB92B3E5-A0FB-4F52-03FE-A3994B4A676E}"/>
-              </a:ext>
-            </a:extLst>
-          </p:cNvPr>
-          <p:cNvSpPr/>
-          <p:nvPr/>
-        </p:nvSpPr>
-        <p:spPr>
-          <a:xfrm>
-            <a:off x="1553658" y="1188720"/>
-            <a:ext cx="2634168" cy="2335531"/>
-          </a:xfrm>
-          <a:prstGeom prst="roundRect">
-            <a:avLst/>
-          </a:prstGeom>
-          <a:solidFill>
-            <a:srgbClr val="E5F1F8"/>
-          </a:solidFill>
-          <a:ln>
-            <a:solidFill>
-              <a:schemeClr val="tx1"/>
-            </a:solidFill>
-          </a:ln>
-        </p:spPr>
-        <p:style>
-          <a:lnRef idx="2">
-            <a:schemeClr val="accent1">
-              <a:shade val="15000"/>
-            </a:schemeClr>
-          </a:lnRef>
-          <a:fillRef idx="1">
-            <a:schemeClr val="accent1"/>
-          </a:fillRef>
-          <a:effectRef idx="0">
-            <a:schemeClr val="accent1"/>
-          </a:effectRef>
-          <a:fontRef idx="minor">
-            <a:schemeClr val="lt1"/>
-          </a:fontRef>
-        </p:style>
-        <p:txBody>
-          <a:bodyPr rtlCol="0" anchor="t"/>
-          <a:lstStyle/>
-          <a:p>
-            <a:pPr algn="ctr"/>
-            <a:r>
-              <a:rPr lang="en-US" dirty="0">
-                <a:solidFill>
-                  <a:schemeClr val="tx1"/>
-                </a:solidFill>
-              </a:rPr>
-              <a:t>Azure OpenAI</a:t>
-            </a:r>
-          </a:p>
-        </p:txBody>
-      </p:sp>
-      <p:sp>
-        <p:nvSpPr>
-          <p:cNvPr id="5" name="Rectangle: Rounded Corners 4">
-            <a:extLst>
-              <a:ext uri="{FF2B5EF4-FFF2-40B4-BE49-F238E27FC236}">
-                <a16:creationId xmlns:a16="http://schemas.microsoft.com/office/drawing/2014/main" id="{ACE8A258-9DE7-F4AF-1449-211286E0D11E}"/>
-              </a:ext>
-            </a:extLst>
-          </p:cNvPr>
-          <p:cNvSpPr/>
-          <p:nvPr/>
-        </p:nvSpPr>
-        <p:spPr>
-          <a:xfrm>
-            <a:off x="8004174" y="1188720"/>
-            <a:ext cx="2634168" cy="2335531"/>
-          </a:xfrm>
-          <a:prstGeom prst="roundRect">
-            <a:avLst/>
-          </a:prstGeom>
-          <a:solidFill>
-            <a:srgbClr val="E5F1F8"/>
-          </a:solidFill>
-          <a:ln>
-            <a:solidFill>
-              <a:schemeClr val="tx1"/>
-            </a:solidFill>
-          </a:ln>
-        </p:spPr>
-        <p:style>
-          <a:lnRef idx="2">
-            <a:schemeClr val="accent1">
-              <a:shade val="15000"/>
-            </a:schemeClr>
-          </a:lnRef>
-          <a:fillRef idx="1">
-            <a:schemeClr val="accent1"/>
-          </a:fillRef>
-          <a:effectRef idx="0">
-            <a:schemeClr val="accent1"/>
-          </a:effectRef>
-          <a:fontRef idx="minor">
-            <a:schemeClr val="lt1"/>
-          </a:fontRef>
-        </p:style>
-        <p:txBody>
-          <a:bodyPr rtlCol="0" anchor="t"/>
-          <a:lstStyle/>
-          <a:p>
-            <a:pPr algn="ctr"/>
-            <a:r>
-              <a:rPr lang="en-US" dirty="0">
-                <a:solidFill>
-                  <a:schemeClr val="tx1"/>
-                </a:solidFill>
-              </a:rPr>
-              <a:t>Microsoft</a:t>
-            </a:r>
-          </a:p>
-        </p:txBody>
-      </p:sp>
-      <p:sp>
-        <p:nvSpPr>
-          <p:cNvPr id="6" name="Rectangle: Rounded Corners 5">
-            <a:extLst>
-              <a:ext uri="{FF2B5EF4-FFF2-40B4-BE49-F238E27FC236}">
-                <a16:creationId xmlns:a16="http://schemas.microsoft.com/office/drawing/2014/main" id="{417ADCD0-E7DE-9B18-898C-7D55B783F694}"/>
-              </a:ext>
-            </a:extLst>
-          </p:cNvPr>
-          <p:cNvSpPr/>
-          <p:nvPr/>
-        </p:nvSpPr>
-        <p:spPr>
-          <a:xfrm>
-            <a:off x="4778916" y="3653789"/>
-            <a:ext cx="2634168" cy="2335531"/>
-          </a:xfrm>
-          <a:prstGeom prst="roundRect">
-            <a:avLst/>
-          </a:prstGeom>
-          <a:solidFill>
-            <a:srgbClr val="E5F1F8"/>
-          </a:solidFill>
-          <a:ln>
-            <a:solidFill>
-              <a:schemeClr val="tx1"/>
-            </a:solidFill>
-          </a:ln>
-        </p:spPr>
-        <p:style>
-          <a:lnRef idx="2">
-            <a:schemeClr val="accent1">
-              <a:shade val="15000"/>
-            </a:schemeClr>
-          </a:lnRef>
-          <a:fillRef idx="1">
-            <a:schemeClr val="accent1"/>
-          </a:fillRef>
-          <a:effectRef idx="0">
-            <a:schemeClr val="accent1"/>
-          </a:effectRef>
-          <a:fontRef idx="minor">
-            <a:schemeClr val="lt1"/>
-          </a:fontRef>
-        </p:style>
-        <p:txBody>
-          <a:bodyPr rtlCol="0" anchor="t"/>
-          <a:lstStyle/>
-          <a:p>
-            <a:pPr algn="ctr"/>
-            <a:r>
-              <a:rPr lang="en-US" dirty="0">
-                <a:solidFill>
-                  <a:schemeClr val="tx1"/>
-                </a:solidFill>
-              </a:rPr>
-              <a:t>Mistral AI</a:t>
-            </a:r>
-          </a:p>
-        </p:txBody>
-      </p:sp>
-      <p:sp>
-        <p:nvSpPr>
-          <p:cNvPr id="7" name="Rectangle: Rounded Corners 6">
-            <a:extLst>
-              <a:ext uri="{FF2B5EF4-FFF2-40B4-BE49-F238E27FC236}">
-                <a16:creationId xmlns:a16="http://schemas.microsoft.com/office/drawing/2014/main" id="{A55125DD-7A11-66B1-DDF5-ECD5D6C1F69B}"/>
-              </a:ext>
-            </a:extLst>
-          </p:cNvPr>
-          <p:cNvSpPr/>
-          <p:nvPr/>
-        </p:nvSpPr>
-        <p:spPr>
-          <a:xfrm>
-            <a:off x="1553658" y="3653789"/>
-            <a:ext cx="2634168" cy="2335531"/>
-          </a:xfrm>
-          <a:prstGeom prst="roundRect">
-            <a:avLst/>
-          </a:prstGeom>
-          <a:solidFill>
-            <a:srgbClr val="E5F1F8"/>
-          </a:solidFill>
-          <a:ln>
-            <a:solidFill>
-              <a:schemeClr val="tx1"/>
-            </a:solidFill>
-          </a:ln>
-        </p:spPr>
-        <p:style>
-          <a:lnRef idx="2">
-            <a:schemeClr val="accent1">
-              <a:shade val="15000"/>
-            </a:schemeClr>
-          </a:lnRef>
-          <a:fillRef idx="1">
-            <a:schemeClr val="accent1"/>
-          </a:fillRef>
-          <a:effectRef idx="0">
-            <a:schemeClr val="accent1"/>
-          </a:effectRef>
-          <a:fontRef idx="minor">
-            <a:schemeClr val="lt1"/>
-          </a:fontRef>
-        </p:style>
-        <p:txBody>
-          <a:bodyPr rtlCol="0" anchor="t"/>
-          <a:lstStyle/>
-          <a:p>
-            <a:pPr algn="ctr"/>
-            <a:r>
-              <a:rPr lang="en-US" dirty="0">
-                <a:solidFill>
-                  <a:schemeClr val="tx1"/>
-                </a:solidFill>
-              </a:rPr>
-              <a:t>Meta</a:t>
-            </a:r>
-          </a:p>
-        </p:txBody>
-      </p:sp>
-      <p:sp>
-        <p:nvSpPr>
-          <p:cNvPr id="8" name="Rectangle: Rounded Corners 7">
-            <a:extLst>
-              <a:ext uri="{FF2B5EF4-FFF2-40B4-BE49-F238E27FC236}">
-                <a16:creationId xmlns:a16="http://schemas.microsoft.com/office/drawing/2014/main" id="{4D8433B6-E222-52DE-3420-6BC81E4D9945}"/>
-              </a:ext>
-            </a:extLst>
-          </p:cNvPr>
-          <p:cNvSpPr/>
-          <p:nvPr/>
-        </p:nvSpPr>
-        <p:spPr>
-          <a:xfrm>
-            <a:off x="8004174" y="3653789"/>
-            <a:ext cx="2634168" cy="2335531"/>
-          </a:xfrm>
-          <a:prstGeom prst="roundRect">
-            <a:avLst/>
-          </a:prstGeom>
-          <a:solidFill>
-            <a:srgbClr val="E5F1F8"/>
-          </a:solidFill>
-          <a:ln>
-            <a:solidFill>
-              <a:schemeClr val="tx1"/>
-            </a:solidFill>
-          </a:ln>
-        </p:spPr>
-        <p:style>
-          <a:lnRef idx="2">
-            <a:schemeClr val="accent1">
-              <a:shade val="15000"/>
-            </a:schemeClr>
-          </a:lnRef>
-          <a:fillRef idx="1">
-            <a:schemeClr val="accent1"/>
-          </a:fillRef>
-          <a:effectRef idx="0">
-            <a:schemeClr val="accent1"/>
-          </a:effectRef>
-          <a:fontRef idx="minor">
-            <a:schemeClr val="lt1"/>
-          </a:fontRef>
-        </p:style>
-        <p:txBody>
-          <a:bodyPr rtlCol="0" anchor="t"/>
-          <a:lstStyle/>
-          <a:p>
-            <a:pPr algn="ctr"/>
-            <a:r>
-              <a:rPr lang="en-US" dirty="0">
-                <a:solidFill>
-                  <a:schemeClr val="tx1"/>
-                </a:solidFill>
-              </a:rPr>
-              <a:t>DeepSeek</a:t>
-            </a:r>
-          </a:p>
-        </p:txBody>
-      </p:sp>
-      <p:sp>
-        <p:nvSpPr>
-          <p:cNvPr id="10" name="Rectangle: Rounded Corners 9">
-            <a:extLst>
-              <a:ext uri="{FF2B5EF4-FFF2-40B4-BE49-F238E27FC236}">
-                <a16:creationId xmlns:a16="http://schemas.microsoft.com/office/drawing/2014/main" id="{02E5EA1C-587E-4A45-E606-F67DF515B407}"/>
-              </a:ext>
-            </a:extLst>
-          </p:cNvPr>
-          <p:cNvSpPr/>
-          <p:nvPr/>
-        </p:nvSpPr>
-        <p:spPr>
-          <a:xfrm>
-            <a:off x="1790700" y="1882140"/>
-            <a:ext cx="2111892" cy="322508"/>
-          </a:xfrm>
-          <a:prstGeom prst="roundRect">
-            <a:avLst>
-              <a:gd name="adj" fmla="val 50000"/>
-            </a:avLst>
-          </a:prstGeom>
-          <a:solidFill>
-            <a:srgbClr val="B2D4EB"/>
-          </a:solidFill>
-          <a:ln>
-            <a:solidFill>
-              <a:schemeClr val="tx1"/>
-            </a:solidFill>
-          </a:ln>
-        </p:spPr>
-        <p:style>
-          <a:lnRef idx="2">
-            <a:schemeClr val="accent1">
-              <a:shade val="15000"/>
-            </a:schemeClr>
-          </a:lnRef>
-          <a:fillRef idx="1">
-            <a:schemeClr val="accent1"/>
-          </a:fillRef>
-          <a:effectRef idx="0">
-            <a:schemeClr val="accent1"/>
-          </a:effectRef>
-          <a:fontRef idx="minor">
-            <a:schemeClr val="lt1"/>
-          </a:fontRef>
-        </p:style>
-        <p:txBody>
-          <a:bodyPr rtlCol="0" anchor="ctr"/>
-          <a:lstStyle/>
-          <a:p>
-            <a:pPr algn="ctr"/>
-            <a:r>
-              <a:rPr lang="en-US" dirty="0" err="1">
-                <a:solidFill>
-                  <a:schemeClr val="tx1"/>
-                </a:solidFill>
-              </a:rPr>
-              <a:t>gpt</a:t>
-            </a:r>
-            <a:endParaRPr lang="en-US" i="1" dirty="0">
-              <a:solidFill>
-                <a:schemeClr val="tx1"/>
-              </a:solidFill>
-            </a:endParaRPr>
-          </a:p>
-        </p:txBody>
-      </p:sp>
-      <p:sp>
-        <p:nvSpPr>
-          <p:cNvPr id="11" name="Rectangle: Rounded Corners 10">
-            <a:extLst>
-              <a:ext uri="{FF2B5EF4-FFF2-40B4-BE49-F238E27FC236}">
-                <a16:creationId xmlns:a16="http://schemas.microsoft.com/office/drawing/2014/main" id="{E11D9861-1EDA-793B-0AA0-18BFA52ACCE4}"/>
-              </a:ext>
-            </a:extLst>
-          </p:cNvPr>
-          <p:cNvSpPr/>
-          <p:nvPr/>
-        </p:nvSpPr>
-        <p:spPr>
-          <a:xfrm>
-            <a:off x="1790700" y="2380687"/>
-            <a:ext cx="2111892" cy="322508"/>
-          </a:xfrm>
-          <a:prstGeom prst="roundRect">
-            <a:avLst>
-              <a:gd name="adj" fmla="val 50000"/>
-            </a:avLst>
-          </a:prstGeom>
-          <a:solidFill>
-            <a:srgbClr val="B2D4EB"/>
-          </a:solidFill>
-          <a:ln>
-            <a:solidFill>
-              <a:schemeClr val="tx1"/>
-            </a:solidFill>
-          </a:ln>
-        </p:spPr>
-        <p:style>
-          <a:lnRef idx="2">
-            <a:schemeClr val="accent1">
-              <a:shade val="15000"/>
-            </a:schemeClr>
-          </a:lnRef>
-          <a:fillRef idx="1">
-            <a:schemeClr val="accent1"/>
-          </a:fillRef>
-          <a:effectRef idx="0">
-            <a:schemeClr val="accent1"/>
-          </a:effectRef>
-          <a:fontRef idx="minor">
-            <a:schemeClr val="lt1"/>
-          </a:fontRef>
-        </p:style>
-        <p:txBody>
-          <a:bodyPr rtlCol="0" anchor="ctr"/>
-          <a:lstStyle/>
-          <a:p>
-            <a:pPr algn="ctr"/>
-            <a:r>
-              <a:rPr lang="en-US" dirty="0">
-                <a:solidFill>
-                  <a:schemeClr val="tx1"/>
-                </a:solidFill>
-              </a:rPr>
-              <a:t>o</a:t>
-            </a:r>
-          </a:p>
-        </p:txBody>
-      </p:sp>
-      <p:sp>
-        <p:nvSpPr>
-          <p:cNvPr id="12" name="Rectangle: Rounded Corners 11">
-            <a:extLst>
-              <a:ext uri="{FF2B5EF4-FFF2-40B4-BE49-F238E27FC236}">
-                <a16:creationId xmlns:a16="http://schemas.microsoft.com/office/drawing/2014/main" id="{46BFDC7A-CED3-C375-66E6-683B9E52EDD1}"/>
-              </a:ext>
-            </a:extLst>
-          </p:cNvPr>
-          <p:cNvSpPr/>
-          <p:nvPr/>
-        </p:nvSpPr>
-        <p:spPr>
-          <a:xfrm>
-            <a:off x="1790700" y="2879234"/>
-            <a:ext cx="2111892" cy="322508"/>
-          </a:xfrm>
-          <a:prstGeom prst="roundRect">
-            <a:avLst>
-              <a:gd name="adj" fmla="val 50000"/>
-            </a:avLst>
-          </a:prstGeom>
-          <a:solidFill>
-            <a:srgbClr val="B2D4EB"/>
-          </a:solidFill>
-          <a:ln>
-            <a:solidFill>
-              <a:schemeClr val="tx1"/>
-            </a:solidFill>
-          </a:ln>
-        </p:spPr>
-        <p:style>
-          <a:lnRef idx="2">
-            <a:schemeClr val="accent1">
-              <a:shade val="15000"/>
-            </a:schemeClr>
-          </a:lnRef>
-          <a:fillRef idx="1">
-            <a:schemeClr val="accent1"/>
-          </a:fillRef>
-          <a:effectRef idx="0">
-            <a:schemeClr val="accent1"/>
-          </a:effectRef>
-          <a:fontRef idx="minor">
-            <a:schemeClr val="lt1"/>
-          </a:fontRef>
-        </p:style>
-        <p:txBody>
-          <a:bodyPr rtlCol="0" anchor="ctr"/>
-          <a:lstStyle/>
-          <a:p>
-            <a:pPr algn="ctr"/>
-            <a:r>
-              <a:rPr lang="en-US" dirty="0">
-                <a:solidFill>
-                  <a:schemeClr val="tx1"/>
-                </a:solidFill>
-              </a:rPr>
-              <a:t>sora</a:t>
-            </a:r>
-          </a:p>
-        </p:txBody>
-      </p:sp>
-    </p:spTree>
-    <p:extLst>
-      <p:ext uri="{BB962C8B-B14F-4D97-AF65-F5344CB8AC3E}">
-        <p14:creationId xmlns:p14="http://schemas.microsoft.com/office/powerpoint/2010/main" val="2145715379"/>
-      </p:ext>
-    </p:extLst>
-  </p:cSld>
-  <p:clrMapOvr>
-    <a:masterClrMapping/>
-  </p:clrMapOvr>
-</p:sld>
-</file>
-
-<file path=ppt/slides/slide6.xml><?xml version="1.0" encoding="utf-8"?>
-<p:sld xmlns:a="http://schemas.openxmlformats.org/drawingml/2006/main" xmlns:r="http://schemas.openxmlformats.org/officeDocument/2006/relationships" xmlns:p="http://schemas.openxmlformats.org/presentationml/2006/main">
-  <p:cSld>
-    <p:spTree>
-      <p:nvGrpSpPr>
-        <p:cNvPr id="1" name=""/>
-        <p:cNvGrpSpPr/>
-        <p:nvPr/>
-      </p:nvGrpSpPr>
-      <p:grpSpPr>
-        <a:xfrm>
-          <a:off x="0" y="0"/>
-          <a:ext cx="0" cy="0"/>
-          <a:chOff x="0" y="0"/>
-          <a:chExt cx="0" cy="0"/>
-        </a:xfrm>
-      </p:grpSpPr>
-      <p:sp>
-        <p:nvSpPr>
-          <p:cNvPr id="5" name="TextBox 4">
-            <a:extLst>
-              <a:ext uri="{FF2B5EF4-FFF2-40B4-BE49-F238E27FC236}">
-                <a16:creationId xmlns:a16="http://schemas.microsoft.com/office/drawing/2014/main" id="{46409C35-8811-C77F-54C2-0BC7A96CBEB6}"/>
-              </a:ext>
-            </a:extLst>
-          </p:cNvPr>
-          <p:cNvSpPr txBox="1"/>
-          <p:nvPr/>
-        </p:nvSpPr>
-        <p:spPr>
-          <a:xfrm>
-            <a:off x="563218" y="5430943"/>
-            <a:ext cx="6096000" cy="369332"/>
-          </a:xfrm>
-          <a:prstGeom prst="rect">
-            <a:avLst/>
-          </a:prstGeom>
-          <a:noFill/>
-        </p:spPr>
-        <p:txBody>
-          <a:bodyPr wrap="square">
-            <a:spAutoFit/>
-          </a:bodyPr>
-          <a:lstStyle/>
-          <a:p>
-            <a:r>
-              <a:rPr lang="en-US" dirty="0"/>
-              <a:t>https://carbon.now.sh/</a:t>
-            </a:r>
-          </a:p>
-        </p:txBody>
-      </p:sp>
-      <p:sp>
-        <p:nvSpPr>
-          <p:cNvPr id="6" name="TextBox 5">
-            <a:extLst>
-              <a:ext uri="{FF2B5EF4-FFF2-40B4-BE49-F238E27FC236}">
-                <a16:creationId xmlns:a16="http://schemas.microsoft.com/office/drawing/2014/main" id="{9E291CA3-97E0-03B5-F1F6-61568AF37352}"/>
-              </a:ext>
-            </a:extLst>
-          </p:cNvPr>
-          <p:cNvSpPr txBox="1"/>
-          <p:nvPr/>
-        </p:nvSpPr>
-        <p:spPr>
-          <a:xfrm>
-            <a:off x="563218" y="5990676"/>
-            <a:ext cx="6096000" cy="369332"/>
-          </a:xfrm>
-          <a:prstGeom prst="rect">
-            <a:avLst/>
-          </a:prstGeom>
-          <a:noFill/>
-        </p:spPr>
-        <p:txBody>
-          <a:bodyPr wrap="square">
-            <a:spAutoFit/>
-          </a:bodyPr>
-          <a:lstStyle/>
-          <a:p>
-            <a:r>
-              <a:rPr lang="en-US" dirty="0"/>
-              <a:t>Theme: One Light</a:t>
-            </a:r>
-          </a:p>
-        </p:txBody>
-      </p:sp>
-      <p:pic>
-        <p:nvPicPr>
-          <p:cNvPr id="10" name="Picture 9">
-            <a:extLst>
-              <a:ext uri="{FF2B5EF4-FFF2-40B4-BE49-F238E27FC236}">
-                <a16:creationId xmlns:a16="http://schemas.microsoft.com/office/drawing/2014/main" id="{3A8CB0BC-0057-D455-D8D7-560FEF81B865}"/>
-              </a:ext>
-            </a:extLst>
-          </p:cNvPr>
-          <p:cNvPicPr>
-            <a:picLocks noChangeAspect="1"/>
-          </p:cNvPicPr>
-          <p:nvPr/>
-        </p:nvPicPr>
-        <p:blipFill>
-          <a:blip r:embed="rId3">
-            <a:extLst>
-              <a:ext uri="{28A0092B-C50C-407E-A947-70E740481C1C}">
-                <a14:useLocalDpi xmlns:a14="http://schemas.microsoft.com/office/drawing/2010/main" val="0"/>
-              </a:ext>
-            </a:extLst>
-          </a:blip>
-          <a:stretch>
-            <a:fillRect/>
-          </a:stretch>
-        </p:blipFill>
-        <p:spPr>
-          <a:xfrm>
-            <a:off x="0" y="0"/>
-            <a:ext cx="12192000" cy="4917281"/>
-          </a:xfrm>
-          <a:prstGeom prst="rect">
-            <a:avLst/>
-          </a:prstGeom>
-        </p:spPr>
-      </p:pic>
-    </p:spTree>
-    <p:extLst>
-      <p:ext uri="{BB962C8B-B14F-4D97-AF65-F5344CB8AC3E}">
-        <p14:creationId xmlns:p14="http://schemas.microsoft.com/office/powerpoint/2010/main" val="495322276"/>
-      </p:ext>
-    </p:extLst>
-  </p:cSld>
-  <p:clrMapOvr>
-    <a:masterClrMapping/>
-  </p:clrMapOvr>
-</p:sld>
-</file>
-
-<file path=ppt/slides/slide7.xml><?xml version="1.0" encoding="utf-8"?>
-<p:sld xmlns:a="http://schemas.openxmlformats.org/drawingml/2006/main" xmlns:r="http://schemas.openxmlformats.org/officeDocument/2006/relationships" xmlns:p="http://schemas.openxmlformats.org/presentationml/2006/main">
-  <p:cSld>
-    <p:spTree>
-      <p:nvGrpSpPr>
-        <p:cNvPr id="1" name="">
-          <a:extLst>
-            <a:ext uri="{FF2B5EF4-FFF2-40B4-BE49-F238E27FC236}">
-              <a16:creationId xmlns:a16="http://schemas.microsoft.com/office/drawing/2014/main" id="{B8650F46-8669-8B2D-7690-E25DD2E636E0}"/>
-            </a:ext>
-          </a:extLst>
-        </p:cNvPr>
-        <p:cNvGrpSpPr/>
-        <p:nvPr/>
-      </p:nvGrpSpPr>
-      <p:grpSpPr>
-        <a:xfrm>
-          <a:off x="0" y="0"/>
-          <a:ext cx="0" cy="0"/>
-          <a:chOff x="0" y="0"/>
-          <a:chExt cx="0" cy="0"/>
-        </a:xfrm>
-      </p:grpSpPr>
-      <p:sp>
-        <p:nvSpPr>
-          <p:cNvPr id="31" name="Rectangle 30">
-            <a:extLst>
-              <a:ext uri="{FF2B5EF4-FFF2-40B4-BE49-F238E27FC236}">
-                <a16:creationId xmlns:a16="http://schemas.microsoft.com/office/drawing/2014/main" id="{1641B2C3-3E54-CFD6-A752-0AC425AFFCA6}"/>
-              </a:ext>
-            </a:extLst>
-          </p:cNvPr>
-          <p:cNvSpPr/>
-          <p:nvPr/>
-        </p:nvSpPr>
-        <p:spPr>
-          <a:xfrm>
-            <a:off x="8482515" y="2718435"/>
-            <a:ext cx="247650" cy="247650"/>
-          </a:xfrm>
-          <a:prstGeom prst="rect">
-            <a:avLst/>
-          </a:prstGeom>
-        </p:spPr>
-        <p:style>
-          <a:lnRef idx="2">
-            <a:schemeClr val="accent1">
-              <a:shade val="15000"/>
-            </a:schemeClr>
-          </a:lnRef>
-          <a:fillRef idx="1">
-            <a:schemeClr val="accent1"/>
-          </a:fillRef>
-          <a:effectRef idx="0">
-            <a:schemeClr val="accent1"/>
-          </a:effectRef>
-          <a:fontRef idx="minor">
-            <a:schemeClr val="lt1"/>
-          </a:fontRef>
-        </p:style>
-        <p:txBody>
-          <a:bodyPr rtlCol="0" anchor="ctr"/>
-          <a:lstStyle/>
-          <a:p>
-            <a:pPr algn="ctr"/>
-            <a:endParaRPr lang="en-US"/>
-          </a:p>
-        </p:txBody>
-      </p:sp>
-      <p:sp>
-        <p:nvSpPr>
-          <p:cNvPr id="2" name="Rectangle: Rounded Corners 1">
-            <a:extLst>
-              <a:ext uri="{FF2B5EF4-FFF2-40B4-BE49-F238E27FC236}">
-                <a16:creationId xmlns:a16="http://schemas.microsoft.com/office/drawing/2014/main" id="{E84DF503-3BC6-84E0-6FFB-3B32B203E1CB}"/>
-              </a:ext>
-            </a:extLst>
-          </p:cNvPr>
-          <p:cNvSpPr/>
-          <p:nvPr/>
-        </p:nvSpPr>
-        <p:spPr>
-          <a:xfrm>
-            <a:off x="819950" y="617219"/>
-            <a:ext cx="10552099" cy="1485901"/>
-          </a:xfrm>
-          <a:prstGeom prst="roundRect">
-            <a:avLst>
-              <a:gd name="adj" fmla="val 5234"/>
-            </a:avLst>
-          </a:prstGeom>
-          <a:solidFill>
-            <a:schemeClr val="bg1"/>
-          </a:solidFill>
-          <a:ln>
-            <a:solidFill>
-              <a:schemeClr val="tx1"/>
-            </a:solidFill>
-          </a:ln>
-        </p:spPr>
-        <p:style>
-          <a:lnRef idx="2">
-            <a:schemeClr val="accent1">
-              <a:shade val="15000"/>
-            </a:schemeClr>
-          </a:lnRef>
-          <a:fillRef idx="1">
-            <a:schemeClr val="accent1"/>
-          </a:fillRef>
-          <a:effectRef idx="0">
-            <a:schemeClr val="accent1"/>
-          </a:effectRef>
-          <a:fontRef idx="minor">
-            <a:schemeClr val="lt1"/>
-          </a:fontRef>
-        </p:style>
-        <p:txBody>
-          <a:bodyPr rtlCol="0" anchor="t"/>
-          <a:lstStyle/>
-          <a:p>
-            <a:pPr algn="ctr"/>
-            <a:r>
-              <a:rPr lang="en-US" dirty="0">
-                <a:solidFill>
-                  <a:schemeClr val="tx1"/>
-                </a:solidFill>
-              </a:rPr>
-              <a:t>MCP Host (AI Application)</a:t>
-            </a:r>
-          </a:p>
-        </p:txBody>
-      </p:sp>
-      <p:sp>
-        <p:nvSpPr>
-          <p:cNvPr id="4" name="Rectangle: Rounded Corners 3">
-            <a:extLst>
-              <a:ext uri="{FF2B5EF4-FFF2-40B4-BE49-F238E27FC236}">
-                <a16:creationId xmlns:a16="http://schemas.microsoft.com/office/drawing/2014/main" id="{93675B45-9C5A-DB3C-5478-881C7B1BD00F}"/>
-              </a:ext>
-            </a:extLst>
-          </p:cNvPr>
-          <p:cNvSpPr/>
-          <p:nvPr/>
-        </p:nvSpPr>
-        <p:spPr>
-          <a:xfrm>
-            <a:off x="1553658" y="1188721"/>
-            <a:ext cx="2634168" cy="525780"/>
-          </a:xfrm>
-          <a:prstGeom prst="roundRect">
-            <a:avLst/>
-          </a:prstGeom>
-          <a:solidFill>
-            <a:srgbClr val="E5F1F8"/>
-          </a:solidFill>
-          <a:ln>
-            <a:solidFill>
-              <a:schemeClr val="tx1"/>
-            </a:solidFill>
-          </a:ln>
-        </p:spPr>
-        <p:style>
-          <a:lnRef idx="2">
-            <a:schemeClr val="accent1">
-              <a:shade val="15000"/>
-            </a:schemeClr>
-          </a:lnRef>
-          <a:fillRef idx="1">
-            <a:schemeClr val="accent1"/>
-          </a:fillRef>
-          <a:effectRef idx="0">
-            <a:schemeClr val="accent1"/>
-          </a:effectRef>
-          <a:fontRef idx="minor">
-            <a:schemeClr val="lt1"/>
-          </a:fontRef>
-        </p:style>
-        <p:txBody>
-          <a:bodyPr rtlCol="0" anchor="ctr"/>
-          <a:lstStyle/>
-          <a:p>
-            <a:pPr algn="ctr"/>
-            <a:r>
-              <a:rPr lang="en-US" dirty="0">
-                <a:solidFill>
-                  <a:schemeClr val="tx1"/>
-                </a:solidFill>
-              </a:rPr>
-              <a:t>MCP Client 1</a:t>
-            </a:r>
-          </a:p>
-        </p:txBody>
-      </p:sp>
-      <p:sp>
-        <p:nvSpPr>
-          <p:cNvPr id="9" name="Rectangle: Rounded Corners 8">
-            <a:extLst>
-              <a:ext uri="{FF2B5EF4-FFF2-40B4-BE49-F238E27FC236}">
-                <a16:creationId xmlns:a16="http://schemas.microsoft.com/office/drawing/2014/main" id="{4E726389-504C-D4C8-91C7-AF40D8E5E559}"/>
-              </a:ext>
-            </a:extLst>
-          </p:cNvPr>
-          <p:cNvSpPr/>
-          <p:nvPr/>
-        </p:nvSpPr>
-        <p:spPr>
-          <a:xfrm>
-            <a:off x="4778915" y="1188721"/>
-            <a:ext cx="2634168" cy="525780"/>
-          </a:xfrm>
-          <a:prstGeom prst="roundRect">
-            <a:avLst/>
-          </a:prstGeom>
-          <a:solidFill>
-            <a:srgbClr val="E5F1F8"/>
-          </a:solidFill>
-          <a:ln>
-            <a:solidFill>
-              <a:schemeClr val="tx1"/>
-            </a:solidFill>
-          </a:ln>
-        </p:spPr>
-        <p:style>
-          <a:lnRef idx="2">
-            <a:schemeClr val="accent1">
-              <a:shade val="15000"/>
-            </a:schemeClr>
-          </a:lnRef>
-          <a:fillRef idx="1">
-            <a:schemeClr val="accent1"/>
-          </a:fillRef>
-          <a:effectRef idx="0">
-            <a:schemeClr val="accent1"/>
-          </a:effectRef>
-          <a:fontRef idx="minor">
-            <a:schemeClr val="lt1"/>
-          </a:fontRef>
-        </p:style>
-        <p:txBody>
-          <a:bodyPr rtlCol="0" anchor="ctr"/>
-          <a:lstStyle/>
-          <a:p>
-            <a:pPr algn="ctr"/>
-            <a:r>
-              <a:rPr lang="en-US" dirty="0">
-                <a:solidFill>
-                  <a:schemeClr val="tx1"/>
-                </a:solidFill>
-              </a:rPr>
-              <a:t>MCP Client 2</a:t>
-            </a:r>
-          </a:p>
-        </p:txBody>
-      </p:sp>
-      <p:sp>
-        <p:nvSpPr>
-          <p:cNvPr id="13" name="Rectangle: Rounded Corners 12">
-            <a:extLst>
-              <a:ext uri="{FF2B5EF4-FFF2-40B4-BE49-F238E27FC236}">
-                <a16:creationId xmlns:a16="http://schemas.microsoft.com/office/drawing/2014/main" id="{A6FC3ABB-2BFB-C405-42FE-2ED02F4EA5C4}"/>
-              </a:ext>
-            </a:extLst>
-          </p:cNvPr>
-          <p:cNvSpPr/>
-          <p:nvPr/>
-        </p:nvSpPr>
-        <p:spPr>
-          <a:xfrm>
-            <a:off x="8004174" y="1188721"/>
-            <a:ext cx="2634168" cy="525780"/>
-          </a:xfrm>
-          <a:prstGeom prst="roundRect">
-            <a:avLst/>
-          </a:prstGeom>
-          <a:solidFill>
-            <a:srgbClr val="E5F1F8"/>
-          </a:solidFill>
-          <a:ln>
-            <a:solidFill>
-              <a:schemeClr val="tx1"/>
-            </a:solidFill>
-          </a:ln>
-        </p:spPr>
-        <p:style>
-          <a:lnRef idx="2">
-            <a:schemeClr val="accent1">
-              <a:shade val="15000"/>
-            </a:schemeClr>
-          </a:lnRef>
-          <a:fillRef idx="1">
-            <a:schemeClr val="accent1"/>
-          </a:fillRef>
-          <a:effectRef idx="0">
-            <a:schemeClr val="accent1"/>
-          </a:effectRef>
-          <a:fontRef idx="minor">
-            <a:schemeClr val="lt1"/>
-          </a:fontRef>
-        </p:style>
-        <p:txBody>
-          <a:bodyPr rtlCol="0" anchor="ctr"/>
-          <a:lstStyle/>
-          <a:p>
-            <a:pPr algn="ctr"/>
-            <a:r>
-              <a:rPr lang="en-US" dirty="0">
-                <a:solidFill>
-                  <a:schemeClr val="tx1"/>
-                </a:solidFill>
-              </a:rPr>
-              <a:t>MCP Client 2</a:t>
-            </a:r>
-          </a:p>
-        </p:txBody>
-      </p:sp>
-      <p:sp>
-        <p:nvSpPr>
-          <p:cNvPr id="15" name="Rectangle: Rounded Corners 14">
-            <a:extLst>
-              <a:ext uri="{FF2B5EF4-FFF2-40B4-BE49-F238E27FC236}">
-                <a16:creationId xmlns:a16="http://schemas.microsoft.com/office/drawing/2014/main" id="{6F4543D6-02D0-038C-12A8-DB37F7A273CE}"/>
-              </a:ext>
-            </a:extLst>
-          </p:cNvPr>
-          <p:cNvSpPr/>
-          <p:nvPr/>
-        </p:nvSpPr>
-        <p:spPr>
-          <a:xfrm>
-            <a:off x="1553658" y="2718435"/>
-            <a:ext cx="2634168" cy="796290"/>
-          </a:xfrm>
-          <a:prstGeom prst="roundRect">
-            <a:avLst/>
-          </a:prstGeom>
-          <a:solidFill>
-            <a:srgbClr val="B2D4EB"/>
-          </a:solidFill>
-          <a:ln>
-            <a:solidFill>
-              <a:schemeClr val="tx1"/>
-            </a:solidFill>
-          </a:ln>
-        </p:spPr>
-        <p:style>
-          <a:lnRef idx="2">
-            <a:schemeClr val="accent1">
-              <a:shade val="15000"/>
-            </a:schemeClr>
-          </a:lnRef>
-          <a:fillRef idx="1">
-            <a:schemeClr val="accent1"/>
-          </a:fillRef>
-          <a:effectRef idx="0">
-            <a:schemeClr val="accent1"/>
-          </a:effectRef>
-          <a:fontRef idx="minor">
-            <a:schemeClr val="lt1"/>
-          </a:fontRef>
-        </p:style>
-        <p:txBody>
-          <a:bodyPr rtlCol="0" anchor="ctr"/>
-          <a:lstStyle/>
-          <a:p>
-            <a:pPr algn="ctr"/>
-            <a:r>
-              <a:rPr lang="en-US" dirty="0">
-                <a:solidFill>
-                  <a:schemeClr val="tx1"/>
-                </a:solidFill>
-              </a:rPr>
-              <a:t>MCP Server A</a:t>
-            </a:r>
-          </a:p>
-          <a:p>
-            <a:pPr algn="ctr"/>
-            <a:r>
-              <a:rPr lang="en-US" dirty="0">
-                <a:solidFill>
-                  <a:schemeClr val="tx1"/>
-                </a:solidFill>
-              </a:rPr>
-              <a:t>Local Filesystem</a:t>
-            </a:r>
-          </a:p>
-        </p:txBody>
-      </p:sp>
-      <p:sp>
-        <p:nvSpPr>
-          <p:cNvPr id="16" name="Rectangle: Rounded Corners 15">
-            <a:extLst>
-              <a:ext uri="{FF2B5EF4-FFF2-40B4-BE49-F238E27FC236}">
-                <a16:creationId xmlns:a16="http://schemas.microsoft.com/office/drawing/2014/main" id="{578DD490-0572-9417-BBD7-3FF5F8A9E3D8}"/>
-              </a:ext>
-            </a:extLst>
-          </p:cNvPr>
-          <p:cNvSpPr/>
-          <p:nvPr/>
-        </p:nvSpPr>
-        <p:spPr>
-          <a:xfrm>
-            <a:off x="4778915" y="2718435"/>
-            <a:ext cx="2634168" cy="796290"/>
-          </a:xfrm>
-          <a:prstGeom prst="roundRect">
-            <a:avLst/>
-          </a:prstGeom>
-          <a:solidFill>
-            <a:srgbClr val="B2D4EB"/>
-          </a:solidFill>
-          <a:ln>
-            <a:solidFill>
-              <a:schemeClr val="tx1"/>
-            </a:solidFill>
-          </a:ln>
-        </p:spPr>
-        <p:style>
-          <a:lnRef idx="2">
-            <a:schemeClr val="accent1">
-              <a:shade val="15000"/>
-            </a:schemeClr>
-          </a:lnRef>
-          <a:fillRef idx="1">
-            <a:schemeClr val="accent1"/>
-          </a:fillRef>
-          <a:effectRef idx="0">
-            <a:schemeClr val="accent1"/>
-          </a:effectRef>
-          <a:fontRef idx="minor">
-            <a:schemeClr val="lt1"/>
-          </a:fontRef>
-        </p:style>
-        <p:txBody>
-          <a:bodyPr rtlCol="0" anchor="ctr"/>
-          <a:lstStyle/>
-          <a:p>
-            <a:pPr algn="ctr"/>
-            <a:r>
-              <a:rPr lang="en-US" dirty="0">
-                <a:solidFill>
-                  <a:schemeClr val="tx1"/>
-                </a:solidFill>
-              </a:rPr>
-              <a:t>MCP Server B</a:t>
-            </a:r>
-          </a:p>
-          <a:p>
-            <a:pPr algn="ctr"/>
-            <a:r>
-              <a:rPr lang="en-US" dirty="0">
-                <a:solidFill>
-                  <a:schemeClr val="tx1"/>
-                </a:solidFill>
-              </a:rPr>
-              <a:t>Remote Database</a:t>
-            </a:r>
-          </a:p>
-        </p:txBody>
-      </p:sp>
-      <p:sp>
-        <p:nvSpPr>
-          <p:cNvPr id="17" name="Rectangle: Rounded Corners 16">
-            <a:extLst>
-              <a:ext uri="{FF2B5EF4-FFF2-40B4-BE49-F238E27FC236}">
-                <a16:creationId xmlns:a16="http://schemas.microsoft.com/office/drawing/2014/main" id="{04622E36-7A33-D496-1202-F85F8B8E5A75}"/>
-              </a:ext>
-            </a:extLst>
-          </p:cNvPr>
-          <p:cNvSpPr/>
-          <p:nvPr/>
-        </p:nvSpPr>
-        <p:spPr>
-          <a:xfrm>
-            <a:off x="8004172" y="2718435"/>
-            <a:ext cx="2634168" cy="796290"/>
-          </a:xfrm>
-          <a:prstGeom prst="roundRect">
-            <a:avLst/>
-          </a:prstGeom>
-          <a:solidFill>
-            <a:srgbClr val="B2D4EB"/>
-          </a:solidFill>
-          <a:ln>
-            <a:solidFill>
-              <a:schemeClr val="tx1"/>
-            </a:solidFill>
-          </a:ln>
-        </p:spPr>
-        <p:style>
-          <a:lnRef idx="2">
-            <a:schemeClr val="accent1">
-              <a:shade val="15000"/>
-            </a:schemeClr>
-          </a:lnRef>
-          <a:fillRef idx="1">
-            <a:schemeClr val="accent1"/>
-          </a:fillRef>
-          <a:effectRef idx="0">
-            <a:schemeClr val="accent1"/>
-          </a:effectRef>
-          <a:fontRef idx="minor">
-            <a:schemeClr val="lt1"/>
-          </a:fontRef>
-        </p:style>
-        <p:txBody>
-          <a:bodyPr rtlCol="0" anchor="ctr"/>
-          <a:lstStyle/>
-          <a:p>
-            <a:pPr algn="ctr"/>
-            <a:r>
-              <a:rPr lang="en-US" dirty="0">
-                <a:solidFill>
-                  <a:schemeClr val="tx1"/>
-                </a:solidFill>
-              </a:rPr>
-              <a:t>MCP Server C</a:t>
-            </a:r>
-          </a:p>
-          <a:p>
-            <a:pPr algn="ctr"/>
-            <a:r>
-              <a:rPr lang="en-US" dirty="0">
-                <a:solidFill>
-                  <a:schemeClr val="tx1"/>
-                </a:solidFill>
-              </a:rPr>
-              <a:t>Remote API</a:t>
+              <a:t>Response</a:t>
             </a:r>
           </a:p>
         </p:txBody>
       </p:sp>
       <p:cxnSp>
         <p:nvCxnSpPr>
-          <p:cNvPr id="18" name="Straight Arrow Connector 17">
+          <p:cNvPr id="77" name="Straight Arrow Connector 76">
             <a:extLst>
               <a:ext uri="{FF2B5EF4-FFF2-40B4-BE49-F238E27FC236}">
-                <a16:creationId xmlns:a16="http://schemas.microsoft.com/office/drawing/2014/main" id="{BD059445-29E0-0BB8-E8BA-0013ADBA930C}"/>
+                <a16:creationId xmlns:a16="http://schemas.microsoft.com/office/drawing/2014/main" id="{1A734903-BE53-2153-B1BE-7817395A6ACC}"/>
               </a:ext>
             </a:extLst>
           </p:cNvPr>
           <p:cNvCxnSpPr>
             <a:cxnSpLocks/>
-            <a:stCxn id="4" idx="2"/>
-            <a:endCxn id="15" idx="0"/>
+            <a:endCxn id="76" idx="0"/>
           </p:cNvCxnSpPr>
           <p:nvPr/>
         </p:nvCxnSpPr>
         <p:spPr>
           <a:xfrm>
-            <a:off x="2870742" y="1714501"/>
-            <a:ext cx="0" cy="1003934"/>
+            <a:off x="11148060" y="3334214"/>
+            <a:ext cx="0" cy="292904"/>
           </a:xfrm>
           <a:prstGeom prst="straightConnector1">
             <a:avLst/>
@@ -8001,122 +9749,27 @@
       </p:cxnSp>
       <p:cxnSp>
         <p:nvCxnSpPr>
-          <p:cNvPr id="21" name="Straight Arrow Connector 20">
+          <p:cNvPr id="14" name="Connector: Elbow 13">
             <a:extLst>
               <a:ext uri="{FF2B5EF4-FFF2-40B4-BE49-F238E27FC236}">
-                <a16:creationId xmlns:a16="http://schemas.microsoft.com/office/drawing/2014/main" id="{B67BB8C0-5CB6-3A94-820B-418CFFCE9D38}"/>
+                <a16:creationId xmlns:a16="http://schemas.microsoft.com/office/drawing/2014/main" id="{4D371B40-23D5-3632-64F0-3A5DAC685C2C}"/>
               </a:ext>
             </a:extLst>
           </p:cNvPr>
           <p:cNvCxnSpPr>
             <a:cxnSpLocks/>
-            <a:stCxn id="9" idx="2"/>
-            <a:endCxn id="16" idx="0"/>
+            <a:endCxn id="5" idx="2"/>
           </p:cNvCxnSpPr>
           <p:nvPr/>
         </p:nvCxnSpPr>
         <p:spPr>
-          <a:xfrm>
-            <a:off x="6095999" y="1714501"/>
-            <a:ext cx="0" cy="1003934"/>
-          </a:xfrm>
-          <a:prstGeom prst="straightConnector1">
-            <a:avLst/>
-          </a:prstGeom>
-          <a:ln>
-            <a:solidFill>
-              <a:schemeClr val="tx1"/>
-            </a:solidFill>
-            <a:prstDash val="sysDash"/>
-            <a:tailEnd type="triangle" w="lg" len="lg"/>
-          </a:ln>
-        </p:spPr>
-        <p:style>
-          <a:lnRef idx="2">
-            <a:schemeClr val="accent1"/>
-          </a:lnRef>
-          <a:fillRef idx="0">
-            <a:schemeClr val="accent1"/>
-          </a:fillRef>
-          <a:effectRef idx="1">
-            <a:schemeClr val="accent1"/>
-          </a:effectRef>
-          <a:fontRef idx="minor">
-            <a:schemeClr val="tx1"/>
-          </a:fontRef>
-        </p:style>
-      </p:cxnSp>
-      <p:cxnSp>
-        <p:nvCxnSpPr>
-          <p:cNvPr id="24" name="Straight Arrow Connector 23">
-            <a:extLst>
-              <a:ext uri="{FF2B5EF4-FFF2-40B4-BE49-F238E27FC236}">
-                <a16:creationId xmlns:a16="http://schemas.microsoft.com/office/drawing/2014/main" id="{7FEBFCBE-6607-A910-FF7B-C1762F4684EF}"/>
-              </a:ext>
-            </a:extLst>
-          </p:cNvPr>
-          <p:cNvCxnSpPr>
-            <a:cxnSpLocks/>
-            <a:stCxn id="13" idx="2"/>
-            <a:endCxn id="17" idx="0"/>
-          </p:cNvCxnSpPr>
-          <p:nvPr/>
-        </p:nvCxnSpPr>
-        <p:spPr>
-          <a:xfrm flipH="1">
-            <a:off x="9321256" y="1714501"/>
-            <a:ext cx="2" cy="1003934"/>
-          </a:xfrm>
-          <a:prstGeom prst="straightConnector1">
-            <a:avLst/>
-          </a:prstGeom>
-          <a:ln>
-            <a:solidFill>
-              <a:schemeClr val="tx1"/>
-            </a:solidFill>
-            <a:prstDash val="sysDash"/>
-            <a:tailEnd type="triangle" w="lg" len="lg"/>
-          </a:ln>
-        </p:spPr>
-        <p:style>
-          <a:lnRef idx="2">
-            <a:schemeClr val="accent1"/>
-          </a:lnRef>
-          <a:fillRef idx="0">
-            <a:schemeClr val="accent1"/>
-          </a:fillRef>
-          <a:effectRef idx="1">
-            <a:schemeClr val="accent1"/>
-          </a:effectRef>
-          <a:fontRef idx="minor">
-            <a:schemeClr val="tx1"/>
-          </a:fontRef>
-        </p:style>
-      </p:cxnSp>
-      <p:cxnSp>
-        <p:nvCxnSpPr>
-          <p:cNvPr id="28" name="Connector: Elbow 27">
-            <a:extLst>
-              <a:ext uri="{FF2B5EF4-FFF2-40B4-BE49-F238E27FC236}">
-                <a16:creationId xmlns:a16="http://schemas.microsoft.com/office/drawing/2014/main" id="{CE37A76D-0F39-82E2-974B-B04FAACABE32}"/>
-              </a:ext>
-            </a:extLst>
-          </p:cNvPr>
-          <p:cNvCxnSpPr>
-            <a:cxnSpLocks/>
-            <a:stCxn id="9" idx="2"/>
-            <a:endCxn id="31" idx="0"/>
-          </p:cNvCxnSpPr>
-          <p:nvPr/>
-        </p:nvCxnSpPr>
-        <p:spPr>
-          <a:xfrm rot="16200000" flipH="1">
-            <a:off x="6849202" y="961297"/>
-            <a:ext cx="1003934" cy="2510341"/>
+          <a:xfrm rot="5400000">
+            <a:off x="6337265" y="-538391"/>
+            <a:ext cx="12700" cy="7745211"/>
           </a:xfrm>
           <a:prstGeom prst="bentConnector3">
             <a:avLst>
-              <a:gd name="adj1" fmla="val 61385"/>
+              <a:gd name="adj1" fmla="val 6060000"/>
             </a:avLst>
           </a:prstGeom>
           <a:ln>
@@ -8145,7 +9798,7 @@
     </p:spTree>
     <p:extLst>
       <p:ext uri="{BB962C8B-B14F-4D97-AF65-F5344CB8AC3E}">
-        <p14:creationId xmlns:p14="http://schemas.microsoft.com/office/powerpoint/2010/main" val="836248043"/>
+        <p14:creationId xmlns:p14="http://schemas.microsoft.com/office/powerpoint/2010/main" val="2560175498"/>
       </p:ext>
     </p:extLst>
   </p:cSld>
@@ -8155,7 +9808,7 @@
 </p:sld>
 </file>
 
-<file path=ppt/slides/slide8.xml><?xml version="1.0" encoding="utf-8"?>
+<file path=ppt/slides/slide9.xml><?xml version="1.0" encoding="utf-8"?>
 <p:sld xmlns:a="http://schemas.openxmlformats.org/drawingml/2006/main" xmlns:r="http://schemas.openxmlformats.org/officeDocument/2006/relationships" xmlns:p="http://schemas.openxmlformats.org/presentationml/2006/main">
   <p:cSld>
     <p:spTree>
@@ -8174,137 +9827,38 @@
       </p:grpSpPr>
       <p:pic>
         <p:nvPicPr>
-          <p:cNvPr id="1026" name="Picture 2">
+          <p:cNvPr id="3" name="Picture 2">
             <a:extLst>
               <a:ext uri="{FF2B5EF4-FFF2-40B4-BE49-F238E27FC236}">
-                <a16:creationId xmlns:a16="http://schemas.microsoft.com/office/drawing/2014/main" id="{5F0DECF4-D97F-50C4-2BC6-FF6779833085}"/>
+                <a16:creationId xmlns:a16="http://schemas.microsoft.com/office/drawing/2014/main" id="{FD8E52CD-5961-A7C1-3607-A00CDD4774AD}"/>
               </a:ext>
             </a:extLst>
           </p:cNvPr>
           <p:cNvPicPr>
-            <a:picLocks noChangeAspect="1" noChangeArrowheads="1"/>
+            <a:picLocks noChangeAspect="1"/>
           </p:cNvPicPr>
           <p:nvPr/>
         </p:nvPicPr>
         <p:blipFill>
-          <a:blip r:embed="rId2">
-            <a:extLst>
-              <a:ext uri="{28A0092B-C50C-407E-A947-70E740481C1C}">
-                <a14:useLocalDpi xmlns:a14="http://schemas.microsoft.com/office/drawing/2010/main" val="0"/>
-              </a:ext>
-            </a:extLst>
-          </a:blip>
-          <a:srcRect/>
+          <a:blip r:embed="rId2"/>
           <a:stretch>
             <a:fillRect/>
           </a:stretch>
         </p:blipFill>
-        <p:spPr bwMode="auto">
-          <a:xfrm>
-            <a:off x="0" y="0"/>
-            <a:ext cx="5349875" cy="6858000"/>
+        <p:spPr>
+          <a:xfrm>
+            <a:off x="0" y="23812"/>
+            <a:ext cx="12192000" cy="6810375"/>
           </a:xfrm>
           <a:prstGeom prst="rect">
             <a:avLst/>
           </a:prstGeom>
-          <a:noFill/>
-          <a:extLst>
-            <a:ext uri="{909E8E84-426E-40DD-AFC4-6F175D3DCCD1}">
-              <a14:hiddenFill xmlns:a14="http://schemas.microsoft.com/office/drawing/2010/main">
-                <a:solidFill>
-                  <a:srgbClr val="FFFFFF"/>
-                </a:solidFill>
-              </a14:hiddenFill>
-            </a:ext>
-          </a:extLst>
         </p:spPr>
       </p:pic>
-      <p:sp>
-        <p:nvSpPr>
-          <p:cNvPr id="5" name="TextBox 4">
-            <a:extLst>
-              <a:ext uri="{FF2B5EF4-FFF2-40B4-BE49-F238E27FC236}">
-                <a16:creationId xmlns:a16="http://schemas.microsoft.com/office/drawing/2014/main" id="{BDD578BC-5D7D-5C4C-8F29-72399D893A54}"/>
-              </a:ext>
-            </a:extLst>
-          </p:cNvPr>
-          <p:cNvSpPr txBox="1"/>
-          <p:nvPr/>
-        </p:nvSpPr>
-        <p:spPr>
-          <a:xfrm>
-            <a:off x="5920557" y="385224"/>
-            <a:ext cx="6097136" cy="646331"/>
-          </a:xfrm>
-          <a:prstGeom prst="rect">
-            <a:avLst/>
-          </a:prstGeom>
-          <a:noFill/>
-        </p:spPr>
-        <p:txBody>
-          <a:bodyPr wrap="square">
-            <a:spAutoFit/>
-          </a:bodyPr>
-          <a:lstStyle/>
-          <a:p>
-            <a:r>
-              <a:rPr lang="en-US" dirty="0"/>
-              <a:t>Style Guide: </a:t>
-            </a:r>
-            <a:r>
-              <a:rPr lang="en-US" dirty="0">
-                <a:hlinkClick r:id="rId3"/>
-              </a:rPr>
-              <a:t>https://oreillymedia.github.io/production-resources/illustrations/</a:t>
-            </a:r>
-            <a:r>
-              <a:rPr lang="en-US" dirty="0"/>
-              <a:t> </a:t>
-            </a:r>
-          </a:p>
-        </p:txBody>
-      </p:sp>
-      <p:sp>
-        <p:nvSpPr>
-          <p:cNvPr id="6" name="TextBox 5">
-            <a:extLst>
-              <a:ext uri="{FF2B5EF4-FFF2-40B4-BE49-F238E27FC236}">
-                <a16:creationId xmlns:a16="http://schemas.microsoft.com/office/drawing/2014/main" id="{73738677-70D9-CDFB-3CCB-A0A1A69FA2EC}"/>
-              </a:ext>
-            </a:extLst>
-          </p:cNvPr>
-          <p:cNvSpPr txBox="1"/>
-          <p:nvPr/>
-        </p:nvSpPr>
-        <p:spPr>
-          <a:xfrm>
-            <a:off x="7173532" y="1822360"/>
-            <a:ext cx="3167342" cy="369332"/>
-          </a:xfrm>
-          <a:prstGeom prst="rect">
-            <a:avLst/>
-          </a:prstGeom>
-          <a:noFill/>
-        </p:spPr>
-        <p:txBody>
-          <a:bodyPr wrap="none" rtlCol="0">
-            <a:spAutoFit/>
-          </a:bodyPr>
-          <a:lstStyle/>
-          <a:p>
-            <a:r>
-              <a:rPr lang="en-US" dirty="0">
-                <a:latin typeface="Guardian Sans Cond Medium" panose="020B0603030202060203" pitchFamily="34" charset="0"/>
-              </a:rPr>
-              <a:t>Fonts: Guardian Sans Cond Medium </a:t>
-            </a:r>
-          </a:p>
-        </p:txBody>
-      </p:sp>
     </p:spTree>
     <p:extLst>
       <p:ext uri="{BB962C8B-B14F-4D97-AF65-F5344CB8AC3E}">
-        <p14:creationId xmlns:p14="http://schemas.microsoft.com/office/powerpoint/2010/main" val="1650268167"/>
+        <p14:creationId xmlns:p14="http://schemas.microsoft.com/office/powerpoint/2010/main" val="3564074342"/>
       </p:ext>
     </p:extLst>
   </p:cSld>

--- a/figures/figures.pptx
+++ b/figures/figures.pptx
@@ -5,7 +5,7 @@
     <p:sldMasterId id="2147483660" r:id="rId1"/>
   </p:sldMasterIdLst>
   <p:notesMasterIdLst>
-    <p:notesMasterId r:id="rId14"/>
+    <p:notesMasterId r:id="rId20"/>
   </p:notesMasterIdLst>
   <p:sldIdLst>
     <p:sldId id="258" r:id="rId2"/>
@@ -14,12 +14,18 @@
     <p:sldId id="260" r:id="rId5"/>
     <p:sldId id="259" r:id="rId6"/>
     <p:sldId id="261" r:id="rId7"/>
-    <p:sldId id="262" r:id="rId8"/>
-    <p:sldId id="264" r:id="rId9"/>
-    <p:sldId id="265" r:id="rId10"/>
-    <p:sldId id="266" r:id="rId11"/>
+    <p:sldId id="268" r:id="rId8"/>
+    <p:sldId id="262" r:id="rId9"/>
+    <p:sldId id="264" r:id="rId10"/>
+    <p:sldId id="265" r:id="rId11"/>
     <p:sldId id="267" r:id="rId12"/>
-    <p:sldId id="257" r:id="rId13"/>
+    <p:sldId id="269" r:id="rId13"/>
+    <p:sldId id="274" r:id="rId14"/>
+    <p:sldId id="270" r:id="rId15"/>
+    <p:sldId id="271" r:id="rId16"/>
+    <p:sldId id="272" r:id="rId17"/>
+    <p:sldId id="273" r:id="rId18"/>
+    <p:sldId id="257" r:id="rId19"/>
   </p:sldIdLst>
   <p:sldSz cx="12192000" cy="6858000"/>
   <p:notesSz cx="6858000" cy="9144000"/>
@@ -141,6 +147,7 @@
         <p14:section name="Agent Deployment" id="{D332562B-3ADB-4CCE-A1B8-55DF9B490E3B}">
           <p14:sldIdLst>
             <p14:sldId id="261"/>
+            <p14:sldId id="268"/>
           </p14:sldIdLst>
         </p14:section>
         <p14:section name="Knowledge Bases" id="{06E034E2-AFC7-4A28-B1B0-B4E2903C9A55}">
@@ -152,8 +159,17 @@
         <p14:section name="Fine-Tuning" id="{0654DAA0-6DAF-4D93-901D-DE1F25DE20A5}">
           <p14:sldIdLst>
             <p14:sldId id="265"/>
-            <p14:sldId id="266"/>
             <p14:sldId id="267"/>
+          </p14:sldIdLst>
+        </p14:section>
+        <p14:section name="Governance" id="{038CE4AA-62CD-47A2-8E40-F6F0DFCCB854}">
+          <p14:sldIdLst>
+            <p14:sldId id="269"/>
+            <p14:sldId id="274"/>
+            <p14:sldId id="270"/>
+            <p14:sldId id="271"/>
+            <p14:sldId id="272"/>
+            <p14:sldId id="273"/>
           </p14:sldIdLst>
         </p14:section>
         <p14:section name="Examples" id="{2CEADF37-2C1D-4DE6-BB08-5D838E707A13}">
@@ -3755,10 +3771,40 @@
           <a:chExt cx="0" cy="0"/>
         </a:xfrm>
       </p:grpSpPr>
+      <p:pic>
+        <p:nvPicPr>
+          <p:cNvPr id="3" name="Picture 2">
+            <a:extLst>
+              <a:ext uri="{FF2B5EF4-FFF2-40B4-BE49-F238E27FC236}">
+                <a16:creationId xmlns:a16="http://schemas.microsoft.com/office/drawing/2014/main" id="{FD8E52CD-5961-A7C1-3607-A00CDD4774AD}"/>
+              </a:ext>
+            </a:extLst>
+          </p:cNvPr>
+          <p:cNvPicPr>
+            <a:picLocks noChangeAspect="1"/>
+          </p:cNvPicPr>
+          <p:nvPr/>
+        </p:nvPicPr>
+        <p:blipFill>
+          <a:blip r:embed="rId2"/>
+          <a:stretch>
+            <a:fillRect/>
+          </a:stretch>
+        </p:blipFill>
+        <p:spPr>
+          <a:xfrm>
+            <a:off x="0" y="23812"/>
+            <a:ext cx="12192000" cy="6810375"/>
+          </a:xfrm>
+          <a:prstGeom prst="rect">
+            <a:avLst/>
+          </a:prstGeom>
+        </p:spPr>
+      </p:pic>
     </p:spTree>
     <p:extLst>
       <p:ext uri="{BB962C8B-B14F-4D97-AF65-F5344CB8AC3E}">
-        <p14:creationId xmlns:p14="http://schemas.microsoft.com/office/powerpoint/2010/main" val="3058180586"/>
+        <p14:creationId xmlns:p14="http://schemas.microsoft.com/office/powerpoint/2010/main" val="3564074342"/>
       </p:ext>
     </p:extLst>
   </p:cSld>
@@ -3829,6 +3875,330 @@
 </file>
 
 <file path=ppt/slides/slide12.xml><?xml version="1.0" encoding="utf-8"?>
+<p:sld xmlns:a="http://schemas.openxmlformats.org/drawingml/2006/main" xmlns:r="http://schemas.openxmlformats.org/officeDocument/2006/relationships" xmlns:p="http://schemas.openxmlformats.org/presentationml/2006/main">
+  <p:cSld>
+    <p:spTree>
+      <p:nvGrpSpPr>
+        <p:cNvPr id="1" name=""/>
+        <p:cNvGrpSpPr/>
+        <p:nvPr/>
+      </p:nvGrpSpPr>
+      <p:grpSpPr>
+        <a:xfrm>
+          <a:off x="0" y="0"/>
+          <a:ext cx="0" cy="0"/>
+          <a:chOff x="0" y="0"/>
+          <a:chExt cx="0" cy="0"/>
+        </a:xfrm>
+      </p:grpSpPr>
+      <p:pic>
+        <p:nvPicPr>
+          <p:cNvPr id="3" name="Picture 2">
+            <a:extLst>
+              <a:ext uri="{FF2B5EF4-FFF2-40B4-BE49-F238E27FC236}">
+                <a16:creationId xmlns:a16="http://schemas.microsoft.com/office/drawing/2014/main" id="{EE4867BA-66DD-B140-5528-856BCA343CD6}"/>
+              </a:ext>
+            </a:extLst>
+          </p:cNvPr>
+          <p:cNvPicPr>
+            <a:picLocks noChangeAspect="1"/>
+          </p:cNvPicPr>
+          <p:nvPr/>
+        </p:nvPicPr>
+        <p:blipFill>
+          <a:blip r:embed="rId2"/>
+          <a:stretch>
+            <a:fillRect/>
+          </a:stretch>
+        </p:blipFill>
+        <p:spPr>
+          <a:xfrm>
+            <a:off x="0" y="99063"/>
+            <a:ext cx="12192000" cy="6659873"/>
+          </a:xfrm>
+          <a:prstGeom prst="rect">
+            <a:avLst/>
+          </a:prstGeom>
+        </p:spPr>
+      </p:pic>
+    </p:spTree>
+    <p:extLst>
+      <p:ext uri="{BB962C8B-B14F-4D97-AF65-F5344CB8AC3E}">
+        <p14:creationId xmlns:p14="http://schemas.microsoft.com/office/powerpoint/2010/main" val="276189202"/>
+      </p:ext>
+    </p:extLst>
+  </p:cSld>
+  <p:clrMapOvr>
+    <a:masterClrMapping/>
+  </p:clrMapOvr>
+</p:sld>
+</file>
+
+<file path=ppt/slides/slide13.xml><?xml version="1.0" encoding="utf-8"?>
+<p:sld xmlns:a="http://schemas.openxmlformats.org/drawingml/2006/main" xmlns:r="http://schemas.openxmlformats.org/officeDocument/2006/relationships" xmlns:p="http://schemas.openxmlformats.org/presentationml/2006/main">
+  <p:cSld>
+    <p:spTree>
+      <p:nvGrpSpPr>
+        <p:cNvPr id="1" name="">
+          <a:extLst>
+            <a:ext uri="{FF2B5EF4-FFF2-40B4-BE49-F238E27FC236}">
+              <a16:creationId xmlns:a16="http://schemas.microsoft.com/office/drawing/2014/main" id="{677E65E1-5DF3-2FE1-BF1F-36B02D0FEC76}"/>
+            </a:ext>
+          </a:extLst>
+        </p:cNvPr>
+        <p:cNvGrpSpPr/>
+        <p:nvPr/>
+      </p:nvGrpSpPr>
+      <p:grpSpPr>
+        <a:xfrm>
+          <a:off x="0" y="0"/>
+          <a:ext cx="0" cy="0"/>
+          <a:chOff x="0" y="0"/>
+          <a:chExt cx="0" cy="0"/>
+        </a:xfrm>
+      </p:grpSpPr>
+      <p:pic>
+        <p:nvPicPr>
+          <p:cNvPr id="3" name="Picture 2">
+            <a:extLst>
+              <a:ext uri="{FF2B5EF4-FFF2-40B4-BE49-F238E27FC236}">
+                <a16:creationId xmlns:a16="http://schemas.microsoft.com/office/drawing/2014/main" id="{8F0F888E-6C37-17E1-670D-996346E71810}"/>
+              </a:ext>
+            </a:extLst>
+          </p:cNvPr>
+          <p:cNvPicPr>
+            <a:picLocks noChangeAspect="1"/>
+          </p:cNvPicPr>
+          <p:nvPr/>
+        </p:nvPicPr>
+        <p:blipFill>
+          <a:blip r:embed="rId2"/>
+          <a:stretch>
+            <a:fillRect/>
+          </a:stretch>
+        </p:blipFill>
+        <p:spPr>
+          <a:xfrm>
+            <a:off x="0" y="1214427"/>
+            <a:ext cx="12192000" cy="4429145"/>
+          </a:xfrm>
+          <a:prstGeom prst="rect">
+            <a:avLst/>
+          </a:prstGeom>
+        </p:spPr>
+      </p:pic>
+    </p:spTree>
+    <p:extLst>
+      <p:ext uri="{BB962C8B-B14F-4D97-AF65-F5344CB8AC3E}">
+        <p14:creationId xmlns:p14="http://schemas.microsoft.com/office/powerpoint/2010/main" val="3483502725"/>
+      </p:ext>
+    </p:extLst>
+  </p:cSld>
+  <p:clrMapOvr>
+    <a:masterClrMapping/>
+  </p:clrMapOvr>
+</p:sld>
+</file>
+
+<file path=ppt/slides/slide14.xml><?xml version="1.0" encoding="utf-8"?>
+<p:sld xmlns:a="http://schemas.openxmlformats.org/drawingml/2006/main" xmlns:r="http://schemas.openxmlformats.org/officeDocument/2006/relationships" xmlns:p="http://schemas.openxmlformats.org/presentationml/2006/main">
+  <p:cSld>
+    <p:spTree>
+      <p:nvGrpSpPr>
+        <p:cNvPr id="1" name=""/>
+        <p:cNvGrpSpPr/>
+        <p:nvPr/>
+      </p:nvGrpSpPr>
+      <p:grpSpPr>
+        <a:xfrm>
+          <a:off x="0" y="0"/>
+          <a:ext cx="0" cy="0"/>
+          <a:chOff x="0" y="0"/>
+          <a:chExt cx="0" cy="0"/>
+        </a:xfrm>
+      </p:grpSpPr>
+      <p:pic>
+        <p:nvPicPr>
+          <p:cNvPr id="3" name="Picture 2">
+            <a:extLst>
+              <a:ext uri="{FF2B5EF4-FFF2-40B4-BE49-F238E27FC236}">
+                <a16:creationId xmlns:a16="http://schemas.microsoft.com/office/drawing/2014/main" id="{5A667DA2-6815-DE2B-768E-FDE43E3CE7EB}"/>
+              </a:ext>
+            </a:extLst>
+          </p:cNvPr>
+          <p:cNvPicPr>
+            <a:picLocks noChangeAspect="1"/>
+          </p:cNvPicPr>
+          <p:nvPr/>
+        </p:nvPicPr>
+        <p:blipFill>
+          <a:blip r:embed="rId2"/>
+          <a:stretch>
+            <a:fillRect/>
+          </a:stretch>
+        </p:blipFill>
+        <p:spPr>
+          <a:xfrm>
+            <a:off x="0" y="0"/>
+            <a:ext cx="7078980" cy="3865170"/>
+          </a:xfrm>
+          <a:prstGeom prst="rect">
+            <a:avLst/>
+          </a:prstGeom>
+        </p:spPr>
+      </p:pic>
+      <p:pic>
+        <p:nvPicPr>
+          <p:cNvPr id="5" name="Picture 4">
+            <a:extLst>
+              <a:ext uri="{FF2B5EF4-FFF2-40B4-BE49-F238E27FC236}">
+                <a16:creationId xmlns:a16="http://schemas.microsoft.com/office/drawing/2014/main" id="{3B15023E-4451-73EF-7EF8-DE3379C381B6}"/>
+              </a:ext>
+            </a:extLst>
+          </p:cNvPr>
+          <p:cNvPicPr>
+            <a:picLocks noChangeAspect="1"/>
+          </p:cNvPicPr>
+          <p:nvPr/>
+        </p:nvPicPr>
+        <p:blipFill>
+          <a:blip r:embed="rId3"/>
+          <a:stretch>
+            <a:fillRect/>
+          </a:stretch>
+        </p:blipFill>
+        <p:spPr>
+          <a:xfrm>
+            <a:off x="2834640" y="3493186"/>
+            <a:ext cx="9357360" cy="3292055"/>
+          </a:xfrm>
+          <a:prstGeom prst="rect">
+            <a:avLst/>
+          </a:prstGeom>
+        </p:spPr>
+      </p:pic>
+    </p:spTree>
+    <p:extLst>
+      <p:ext uri="{BB962C8B-B14F-4D97-AF65-F5344CB8AC3E}">
+        <p14:creationId xmlns:p14="http://schemas.microsoft.com/office/powerpoint/2010/main" val="1990716002"/>
+      </p:ext>
+    </p:extLst>
+  </p:cSld>
+  <p:clrMapOvr>
+    <a:masterClrMapping/>
+  </p:clrMapOvr>
+</p:sld>
+</file>
+
+<file path=ppt/slides/slide15.xml><?xml version="1.0" encoding="utf-8"?>
+<p:sld xmlns:a="http://schemas.openxmlformats.org/drawingml/2006/main" xmlns:r="http://schemas.openxmlformats.org/officeDocument/2006/relationships" xmlns:p="http://schemas.openxmlformats.org/presentationml/2006/main">
+  <p:cSld>
+    <p:spTree>
+      <p:nvGrpSpPr>
+        <p:cNvPr id="1" name="">
+          <a:extLst>
+            <a:ext uri="{FF2B5EF4-FFF2-40B4-BE49-F238E27FC236}">
+              <a16:creationId xmlns:a16="http://schemas.microsoft.com/office/drawing/2014/main" id="{25481119-CA4B-EE59-FA1F-A8A1937BB358}"/>
+            </a:ext>
+          </a:extLst>
+        </p:cNvPr>
+        <p:cNvGrpSpPr/>
+        <p:nvPr/>
+      </p:nvGrpSpPr>
+      <p:grpSpPr>
+        <a:xfrm>
+          <a:off x="0" y="0"/>
+          <a:ext cx="0" cy="0"/>
+          <a:chOff x="0" y="0"/>
+          <a:chExt cx="0" cy="0"/>
+        </a:xfrm>
+      </p:grpSpPr>
+    </p:spTree>
+    <p:extLst>
+      <p:ext uri="{BB962C8B-B14F-4D97-AF65-F5344CB8AC3E}">
+        <p14:creationId xmlns:p14="http://schemas.microsoft.com/office/powerpoint/2010/main" val="2341097629"/>
+      </p:ext>
+    </p:extLst>
+  </p:cSld>
+  <p:clrMapOvr>
+    <a:masterClrMapping/>
+  </p:clrMapOvr>
+</p:sld>
+</file>
+
+<file path=ppt/slides/slide16.xml><?xml version="1.0" encoding="utf-8"?>
+<p:sld xmlns:a="http://schemas.openxmlformats.org/drawingml/2006/main" xmlns:r="http://schemas.openxmlformats.org/officeDocument/2006/relationships" xmlns:p="http://schemas.openxmlformats.org/presentationml/2006/main">
+  <p:cSld>
+    <p:spTree>
+      <p:nvGrpSpPr>
+        <p:cNvPr id="1" name="">
+          <a:extLst>
+            <a:ext uri="{FF2B5EF4-FFF2-40B4-BE49-F238E27FC236}">
+              <a16:creationId xmlns:a16="http://schemas.microsoft.com/office/drawing/2014/main" id="{A3BE5903-046F-B36C-A390-13BCA87A077D}"/>
+            </a:ext>
+          </a:extLst>
+        </p:cNvPr>
+        <p:cNvGrpSpPr/>
+        <p:nvPr/>
+      </p:nvGrpSpPr>
+      <p:grpSpPr>
+        <a:xfrm>
+          <a:off x="0" y="0"/>
+          <a:ext cx="0" cy="0"/>
+          <a:chOff x="0" y="0"/>
+          <a:chExt cx="0" cy="0"/>
+        </a:xfrm>
+      </p:grpSpPr>
+    </p:spTree>
+    <p:extLst>
+      <p:ext uri="{BB962C8B-B14F-4D97-AF65-F5344CB8AC3E}">
+        <p14:creationId xmlns:p14="http://schemas.microsoft.com/office/powerpoint/2010/main" val="2773556687"/>
+      </p:ext>
+    </p:extLst>
+  </p:cSld>
+  <p:clrMapOvr>
+    <a:masterClrMapping/>
+  </p:clrMapOvr>
+</p:sld>
+</file>
+
+<file path=ppt/slides/slide17.xml><?xml version="1.0" encoding="utf-8"?>
+<p:sld xmlns:a="http://schemas.openxmlformats.org/drawingml/2006/main" xmlns:r="http://schemas.openxmlformats.org/officeDocument/2006/relationships" xmlns:p="http://schemas.openxmlformats.org/presentationml/2006/main">
+  <p:cSld>
+    <p:spTree>
+      <p:nvGrpSpPr>
+        <p:cNvPr id="1" name="">
+          <a:extLst>
+            <a:ext uri="{FF2B5EF4-FFF2-40B4-BE49-F238E27FC236}">
+              <a16:creationId xmlns:a16="http://schemas.microsoft.com/office/drawing/2014/main" id="{26816D71-F470-4508-5B65-369C548AF77C}"/>
+            </a:ext>
+          </a:extLst>
+        </p:cNvPr>
+        <p:cNvGrpSpPr/>
+        <p:nvPr/>
+      </p:nvGrpSpPr>
+      <p:grpSpPr>
+        <a:xfrm>
+          <a:off x="0" y="0"/>
+          <a:ext cx="0" cy="0"/>
+          <a:chOff x="0" y="0"/>
+          <a:chExt cx="0" cy="0"/>
+        </a:xfrm>
+      </p:grpSpPr>
+    </p:spTree>
+    <p:extLst>
+      <p:ext uri="{BB962C8B-B14F-4D97-AF65-F5344CB8AC3E}">
+        <p14:creationId xmlns:p14="http://schemas.microsoft.com/office/powerpoint/2010/main" val="1663618783"/>
+      </p:ext>
+    </p:extLst>
+  </p:cSld>
+  <p:clrMapOvr>
+    <a:masterClrMapping/>
+  </p:clrMapOvr>
+</p:sld>
+</file>
+
+<file path=ppt/slides/slide18.xml><?xml version="1.0" encoding="utf-8"?>
 <p:sld xmlns:a="http://schemas.openxmlformats.org/drawingml/2006/main" xmlns:r="http://schemas.openxmlformats.org/officeDocument/2006/relationships" xmlns:p="http://schemas.openxmlformats.org/presentationml/2006/main">
   <p:cSld>
     <p:spTree>
@@ -7237,6 +7607,1464 @@
 </file>
 
 <file path=ppt/slides/slide7.xml><?xml version="1.0" encoding="utf-8"?>
+<p:sld xmlns:a="http://schemas.openxmlformats.org/drawingml/2006/main" xmlns:r="http://schemas.openxmlformats.org/officeDocument/2006/relationships" xmlns:p="http://schemas.openxmlformats.org/presentationml/2006/main">
+  <p:cSld>
+    <p:spTree>
+      <p:nvGrpSpPr>
+        <p:cNvPr id="1" name=""/>
+        <p:cNvGrpSpPr/>
+        <p:nvPr/>
+      </p:nvGrpSpPr>
+      <p:grpSpPr>
+        <a:xfrm>
+          <a:off x="0" y="0"/>
+          <a:ext cx="0" cy="0"/>
+          <a:chOff x="0" y="0"/>
+          <a:chExt cx="0" cy="0"/>
+        </a:xfrm>
+      </p:grpSpPr>
+      <p:pic>
+        <p:nvPicPr>
+          <p:cNvPr id="1026" name="Picture 2" descr="Diagram that shows an agent receiving user inputs on the left, processing them through the model and instructions in the center, and producing outputs on the right. A bidirectional arrow below the agent connects to tools, indicating the agent can call tools during processing to retrieve knowledge or take actions.">
+            <a:extLst>
+              <a:ext uri="{FF2B5EF4-FFF2-40B4-BE49-F238E27FC236}">
+                <a16:creationId xmlns:a16="http://schemas.microsoft.com/office/drawing/2014/main" id="{84BAA02D-198C-8FEB-DDC7-5BF0DBB7B716}"/>
+              </a:ext>
+            </a:extLst>
+          </p:cNvPr>
+          <p:cNvPicPr>
+            <a:picLocks noChangeAspect="1" noChangeArrowheads="1"/>
+          </p:cNvPicPr>
+          <p:nvPr/>
+        </p:nvPicPr>
+        <p:blipFill>
+          <a:blip r:embed="rId2">
+            <a:extLst>
+              <a:ext uri="{28A0092B-C50C-407E-A947-70E740481C1C}">
+                <a14:useLocalDpi xmlns:a14="http://schemas.microsoft.com/office/drawing/2010/main" val="0"/>
+              </a:ext>
+            </a:extLst>
+          </a:blip>
+          <a:srcRect/>
+          <a:stretch>
+            <a:fillRect/>
+          </a:stretch>
+        </p:blipFill>
+        <p:spPr bwMode="auto">
+          <a:xfrm>
+            <a:off x="-3956686" y="3748932"/>
+            <a:ext cx="7589520" cy="3155382"/>
+          </a:xfrm>
+          <a:prstGeom prst="rect">
+            <a:avLst/>
+          </a:prstGeom>
+          <a:noFill/>
+          <a:extLst>
+            <a:ext uri="{909E8E84-426E-40DD-AFC4-6F175D3DCCD1}">
+              <a14:hiddenFill xmlns:a14="http://schemas.microsoft.com/office/drawing/2010/main">
+                <a:solidFill>
+                  <a:srgbClr val="FFFFFF"/>
+                </a:solidFill>
+              </a14:hiddenFill>
+            </a:ext>
+          </a:extLst>
+        </p:spPr>
+      </p:pic>
+      <p:sp>
+        <p:nvSpPr>
+          <p:cNvPr id="2" name="Rectangle: Rounded Corners 1">
+            <a:extLst>
+              <a:ext uri="{FF2B5EF4-FFF2-40B4-BE49-F238E27FC236}">
+                <a16:creationId xmlns:a16="http://schemas.microsoft.com/office/drawing/2014/main" id="{DD0B5B93-017C-38BF-D1E2-3FC17585D737}"/>
+              </a:ext>
+            </a:extLst>
+          </p:cNvPr>
+          <p:cNvSpPr/>
+          <p:nvPr/>
+        </p:nvSpPr>
+        <p:spPr>
+          <a:xfrm>
+            <a:off x="5189220" y="609599"/>
+            <a:ext cx="1813560" cy="1790701"/>
+          </a:xfrm>
+          <a:prstGeom prst="roundRect">
+            <a:avLst>
+              <a:gd name="adj" fmla="val 5234"/>
+            </a:avLst>
+          </a:prstGeom>
+          <a:solidFill>
+            <a:schemeClr val="bg1"/>
+          </a:solidFill>
+          <a:ln>
+            <a:solidFill>
+              <a:schemeClr val="tx1"/>
+            </a:solidFill>
+          </a:ln>
+        </p:spPr>
+        <p:style>
+          <a:lnRef idx="2">
+            <a:schemeClr val="accent1">
+              <a:shade val="15000"/>
+            </a:schemeClr>
+          </a:lnRef>
+          <a:fillRef idx="1">
+            <a:schemeClr val="accent1"/>
+          </a:fillRef>
+          <a:effectRef idx="0">
+            <a:schemeClr val="accent1"/>
+          </a:effectRef>
+          <a:fontRef idx="minor">
+            <a:schemeClr val="lt1"/>
+          </a:fontRef>
+        </p:style>
+        <p:txBody>
+          <a:bodyPr rtlCol="0" anchor="t"/>
+          <a:lstStyle/>
+          <a:p>
+            <a:pPr algn="ctr"/>
+            <a:r>
+              <a:rPr lang="en-US" dirty="0">
+                <a:solidFill>
+                  <a:schemeClr val="tx1"/>
+                </a:solidFill>
+              </a:rPr>
+              <a:t>Agent</a:t>
+            </a:r>
+          </a:p>
+        </p:txBody>
+      </p:sp>
+      <p:sp>
+        <p:nvSpPr>
+          <p:cNvPr id="3" name="Rectangle: Rounded Corners 2">
+            <a:extLst>
+              <a:ext uri="{FF2B5EF4-FFF2-40B4-BE49-F238E27FC236}">
+                <a16:creationId xmlns:a16="http://schemas.microsoft.com/office/drawing/2014/main" id="{5566B249-41E8-70FF-C1BD-2C614E44E77F}"/>
+              </a:ext>
+            </a:extLst>
+          </p:cNvPr>
+          <p:cNvSpPr/>
+          <p:nvPr/>
+        </p:nvSpPr>
+        <p:spPr>
+          <a:xfrm>
+            <a:off x="4272280" y="2855243"/>
+            <a:ext cx="3642358" cy="1485901"/>
+          </a:xfrm>
+          <a:prstGeom prst="roundRect">
+            <a:avLst>
+              <a:gd name="adj" fmla="val 5234"/>
+            </a:avLst>
+          </a:prstGeom>
+          <a:solidFill>
+            <a:schemeClr val="bg1"/>
+          </a:solidFill>
+          <a:ln>
+            <a:solidFill>
+              <a:schemeClr val="tx1"/>
+            </a:solidFill>
+          </a:ln>
+        </p:spPr>
+        <p:style>
+          <a:lnRef idx="2">
+            <a:schemeClr val="accent1">
+              <a:shade val="15000"/>
+            </a:schemeClr>
+          </a:lnRef>
+          <a:fillRef idx="1">
+            <a:schemeClr val="accent1"/>
+          </a:fillRef>
+          <a:effectRef idx="0">
+            <a:schemeClr val="accent1"/>
+          </a:effectRef>
+          <a:fontRef idx="minor">
+            <a:schemeClr val="lt1"/>
+          </a:fontRef>
+        </p:style>
+        <p:txBody>
+          <a:bodyPr rtlCol="0" anchor="t"/>
+          <a:lstStyle/>
+          <a:p>
+            <a:pPr algn="ctr"/>
+            <a:r>
+              <a:rPr lang="en-US" dirty="0">
+                <a:solidFill>
+                  <a:schemeClr val="tx1"/>
+                </a:solidFill>
+              </a:rPr>
+              <a:t>Tool Calls</a:t>
+            </a:r>
+          </a:p>
+        </p:txBody>
+      </p:sp>
+      <p:sp>
+        <p:nvSpPr>
+          <p:cNvPr id="4" name="Rectangle: Rounded Corners 3">
+            <a:extLst>
+              <a:ext uri="{FF2B5EF4-FFF2-40B4-BE49-F238E27FC236}">
+                <a16:creationId xmlns:a16="http://schemas.microsoft.com/office/drawing/2014/main" id="{8166577C-6B48-5754-383D-478B8B3FA9BD}"/>
+              </a:ext>
+            </a:extLst>
+          </p:cNvPr>
+          <p:cNvSpPr/>
+          <p:nvPr/>
+        </p:nvSpPr>
+        <p:spPr>
+          <a:xfrm>
+            <a:off x="7795258" y="626664"/>
+            <a:ext cx="3383280" cy="1773636"/>
+          </a:xfrm>
+          <a:prstGeom prst="roundRect">
+            <a:avLst>
+              <a:gd name="adj" fmla="val 5234"/>
+            </a:avLst>
+          </a:prstGeom>
+          <a:solidFill>
+            <a:schemeClr val="bg1"/>
+          </a:solidFill>
+          <a:ln>
+            <a:solidFill>
+              <a:schemeClr val="tx1"/>
+            </a:solidFill>
+          </a:ln>
+        </p:spPr>
+        <p:style>
+          <a:lnRef idx="2">
+            <a:schemeClr val="accent1">
+              <a:shade val="15000"/>
+            </a:schemeClr>
+          </a:lnRef>
+          <a:fillRef idx="1">
+            <a:schemeClr val="accent1"/>
+          </a:fillRef>
+          <a:effectRef idx="0">
+            <a:schemeClr val="accent1"/>
+          </a:effectRef>
+          <a:fontRef idx="minor">
+            <a:schemeClr val="lt1"/>
+          </a:fontRef>
+        </p:style>
+        <p:txBody>
+          <a:bodyPr rtlCol="0" anchor="t"/>
+          <a:lstStyle/>
+          <a:p>
+            <a:pPr algn="ctr"/>
+            <a:r>
+              <a:rPr lang="en-US" dirty="0">
+                <a:solidFill>
+                  <a:schemeClr val="tx1"/>
+                </a:solidFill>
+              </a:rPr>
+              <a:t>Output</a:t>
+            </a:r>
+          </a:p>
+        </p:txBody>
+      </p:sp>
+      <p:sp>
+        <p:nvSpPr>
+          <p:cNvPr id="5" name="Rectangle: Rounded Corners 4">
+            <a:extLst>
+              <a:ext uri="{FF2B5EF4-FFF2-40B4-BE49-F238E27FC236}">
+                <a16:creationId xmlns:a16="http://schemas.microsoft.com/office/drawing/2014/main" id="{E9BC9BDF-2C43-4EC0-746F-536C87A558E6}"/>
+              </a:ext>
+            </a:extLst>
+          </p:cNvPr>
+          <p:cNvSpPr/>
+          <p:nvPr/>
+        </p:nvSpPr>
+        <p:spPr>
+          <a:xfrm>
+            <a:off x="823808" y="609599"/>
+            <a:ext cx="3383280" cy="1790701"/>
+          </a:xfrm>
+          <a:prstGeom prst="roundRect">
+            <a:avLst>
+              <a:gd name="adj" fmla="val 5234"/>
+            </a:avLst>
+          </a:prstGeom>
+          <a:solidFill>
+            <a:schemeClr val="bg1"/>
+          </a:solidFill>
+          <a:ln>
+            <a:solidFill>
+              <a:schemeClr val="tx1"/>
+            </a:solidFill>
+          </a:ln>
+        </p:spPr>
+        <p:style>
+          <a:lnRef idx="2">
+            <a:schemeClr val="accent1">
+              <a:shade val="15000"/>
+            </a:schemeClr>
+          </a:lnRef>
+          <a:fillRef idx="1">
+            <a:schemeClr val="accent1"/>
+          </a:fillRef>
+          <a:effectRef idx="0">
+            <a:schemeClr val="accent1"/>
+          </a:effectRef>
+          <a:fontRef idx="minor">
+            <a:schemeClr val="lt1"/>
+          </a:fontRef>
+        </p:style>
+        <p:txBody>
+          <a:bodyPr rtlCol="0" anchor="t"/>
+          <a:lstStyle/>
+          <a:p>
+            <a:pPr algn="ctr"/>
+            <a:r>
+              <a:rPr lang="en-US" dirty="0">
+                <a:solidFill>
+                  <a:schemeClr val="tx1"/>
+                </a:solidFill>
+              </a:rPr>
+              <a:t>Input</a:t>
+            </a:r>
+          </a:p>
+        </p:txBody>
+      </p:sp>
+      <p:sp>
+        <p:nvSpPr>
+          <p:cNvPr id="6" name="Rectangle: Rounded Corners 5">
+            <a:extLst>
+              <a:ext uri="{FF2B5EF4-FFF2-40B4-BE49-F238E27FC236}">
+                <a16:creationId xmlns:a16="http://schemas.microsoft.com/office/drawing/2014/main" id="{E1637FF2-78C8-02A4-8845-916F66F7364D}"/>
+              </a:ext>
+            </a:extLst>
+          </p:cNvPr>
+          <p:cNvSpPr/>
+          <p:nvPr/>
+        </p:nvSpPr>
+        <p:spPr>
+          <a:xfrm>
+            <a:off x="5425880" y="1469801"/>
+            <a:ext cx="1340237" cy="329915"/>
+          </a:xfrm>
+          <a:prstGeom prst="roundRect">
+            <a:avLst/>
+          </a:prstGeom>
+          <a:solidFill>
+            <a:srgbClr val="E5F1F8"/>
+          </a:solidFill>
+          <a:ln>
+            <a:solidFill>
+              <a:schemeClr val="tx1"/>
+            </a:solidFill>
+          </a:ln>
+        </p:spPr>
+        <p:style>
+          <a:lnRef idx="2">
+            <a:schemeClr val="accent1">
+              <a:shade val="15000"/>
+            </a:schemeClr>
+          </a:lnRef>
+          <a:fillRef idx="1">
+            <a:schemeClr val="accent1"/>
+          </a:fillRef>
+          <a:effectRef idx="0">
+            <a:schemeClr val="accent1"/>
+          </a:effectRef>
+          <a:fontRef idx="minor">
+            <a:schemeClr val="lt1"/>
+          </a:fontRef>
+        </p:style>
+        <p:txBody>
+          <a:bodyPr rtlCol="0" anchor="ctr"/>
+          <a:lstStyle/>
+          <a:p>
+            <a:pPr algn="ctr"/>
+            <a:r>
+              <a:rPr lang="en-US" dirty="0">
+                <a:solidFill>
+                  <a:schemeClr val="tx1"/>
+                </a:solidFill>
+              </a:rPr>
+              <a:t>Instructions</a:t>
+            </a:r>
+          </a:p>
+        </p:txBody>
+      </p:sp>
+      <p:sp>
+        <p:nvSpPr>
+          <p:cNvPr id="7" name="Rectangle: Rounded Corners 6">
+            <a:extLst>
+              <a:ext uri="{FF2B5EF4-FFF2-40B4-BE49-F238E27FC236}">
+                <a16:creationId xmlns:a16="http://schemas.microsoft.com/office/drawing/2014/main" id="{35E14E21-FA90-20E0-BD54-1EB35C39B056}"/>
+              </a:ext>
+            </a:extLst>
+          </p:cNvPr>
+          <p:cNvSpPr/>
+          <p:nvPr/>
+        </p:nvSpPr>
+        <p:spPr>
+          <a:xfrm>
+            <a:off x="5425881" y="1039700"/>
+            <a:ext cx="1340237" cy="329915"/>
+          </a:xfrm>
+          <a:prstGeom prst="roundRect">
+            <a:avLst/>
+          </a:prstGeom>
+          <a:solidFill>
+            <a:srgbClr val="E5F1F8"/>
+          </a:solidFill>
+          <a:ln>
+            <a:solidFill>
+              <a:schemeClr val="tx1"/>
+            </a:solidFill>
+          </a:ln>
+        </p:spPr>
+        <p:style>
+          <a:lnRef idx="2">
+            <a:schemeClr val="accent1">
+              <a:shade val="15000"/>
+            </a:schemeClr>
+          </a:lnRef>
+          <a:fillRef idx="1">
+            <a:schemeClr val="accent1"/>
+          </a:fillRef>
+          <a:effectRef idx="0">
+            <a:schemeClr val="accent1"/>
+          </a:effectRef>
+          <a:fontRef idx="minor">
+            <a:schemeClr val="lt1"/>
+          </a:fontRef>
+        </p:style>
+        <p:txBody>
+          <a:bodyPr rtlCol="0" anchor="ctr"/>
+          <a:lstStyle/>
+          <a:p>
+            <a:pPr algn="ctr"/>
+            <a:r>
+              <a:rPr lang="en-US" dirty="0">
+                <a:solidFill>
+                  <a:schemeClr val="tx1"/>
+                </a:solidFill>
+              </a:rPr>
+              <a:t>LLM</a:t>
+            </a:r>
+          </a:p>
+        </p:txBody>
+      </p:sp>
+      <p:sp>
+        <p:nvSpPr>
+          <p:cNvPr id="8" name="Rectangle: Rounded Corners 7">
+            <a:extLst>
+              <a:ext uri="{FF2B5EF4-FFF2-40B4-BE49-F238E27FC236}">
+                <a16:creationId xmlns:a16="http://schemas.microsoft.com/office/drawing/2014/main" id="{24C76365-E8A1-1FA2-FBB8-3991FB9D1D13}"/>
+              </a:ext>
+            </a:extLst>
+          </p:cNvPr>
+          <p:cNvSpPr/>
+          <p:nvPr/>
+        </p:nvSpPr>
+        <p:spPr>
+          <a:xfrm>
+            <a:off x="5425879" y="1899902"/>
+            <a:ext cx="1340237" cy="329915"/>
+          </a:xfrm>
+          <a:prstGeom prst="roundRect">
+            <a:avLst/>
+          </a:prstGeom>
+          <a:solidFill>
+            <a:srgbClr val="E5F1F8"/>
+          </a:solidFill>
+          <a:ln>
+            <a:solidFill>
+              <a:schemeClr val="tx1"/>
+            </a:solidFill>
+          </a:ln>
+        </p:spPr>
+        <p:style>
+          <a:lnRef idx="2">
+            <a:schemeClr val="accent1">
+              <a:shade val="15000"/>
+            </a:schemeClr>
+          </a:lnRef>
+          <a:fillRef idx="1">
+            <a:schemeClr val="accent1"/>
+          </a:fillRef>
+          <a:effectRef idx="0">
+            <a:schemeClr val="accent1"/>
+          </a:effectRef>
+          <a:fontRef idx="minor">
+            <a:schemeClr val="lt1"/>
+          </a:fontRef>
+        </p:style>
+        <p:txBody>
+          <a:bodyPr rtlCol="0" anchor="ctr"/>
+          <a:lstStyle/>
+          <a:p>
+            <a:pPr algn="ctr"/>
+            <a:r>
+              <a:rPr lang="en-US" dirty="0">
+                <a:solidFill>
+                  <a:schemeClr val="tx1"/>
+                </a:solidFill>
+              </a:rPr>
+              <a:t>Tools</a:t>
+            </a:r>
+          </a:p>
+        </p:txBody>
+      </p:sp>
+      <p:pic>
+        <p:nvPicPr>
+          <p:cNvPr id="10" name="Graphic 9" descr="Brain with solid fill">
+            <a:extLst>
+              <a:ext uri="{FF2B5EF4-FFF2-40B4-BE49-F238E27FC236}">
+                <a16:creationId xmlns:a16="http://schemas.microsoft.com/office/drawing/2014/main" id="{F81D149A-46A0-A0F2-40BC-1E0C0F7C3477}"/>
+              </a:ext>
+            </a:extLst>
+          </p:cNvPr>
+          <p:cNvPicPr>
+            <a:picLocks noChangeAspect="1"/>
+          </p:cNvPicPr>
+          <p:nvPr/>
+        </p:nvPicPr>
+        <p:blipFill>
+          <a:blip r:embed="rId3">
+            <a:extLst>
+              <a:ext uri="{96DAC541-7B7A-43D3-8B79-37D633B846F1}">
+                <asvg:svgBlip xmlns:asvg="http://schemas.microsoft.com/office/drawing/2016/SVG/main" r:embed="rId4"/>
+              </a:ext>
+            </a:extLst>
+          </a:blip>
+          <a:stretch>
+            <a:fillRect/>
+          </a:stretch>
+        </p:blipFill>
+        <p:spPr>
+          <a:xfrm>
+            <a:off x="6896099" y="3296865"/>
+            <a:ext cx="457200" cy="457200"/>
+          </a:xfrm>
+          <a:prstGeom prst="rect">
+            <a:avLst/>
+          </a:prstGeom>
+        </p:spPr>
+      </p:pic>
+      <p:pic>
+        <p:nvPicPr>
+          <p:cNvPr id="12" name="Graphic 11" descr="Single gear with solid fill">
+            <a:extLst>
+              <a:ext uri="{FF2B5EF4-FFF2-40B4-BE49-F238E27FC236}">
+                <a16:creationId xmlns:a16="http://schemas.microsoft.com/office/drawing/2014/main" id="{030E2C5E-3E11-DAAD-16E3-271D6A0A4F3C}"/>
+              </a:ext>
+            </a:extLst>
+          </p:cNvPr>
+          <p:cNvPicPr>
+            <a:picLocks noChangeAspect="1"/>
+          </p:cNvPicPr>
+          <p:nvPr/>
+        </p:nvPicPr>
+        <p:blipFill>
+          <a:blip r:embed="rId5">
+            <a:extLst>
+              <a:ext uri="{96DAC541-7B7A-43D3-8B79-37D633B846F1}">
+                <asvg:svgBlip xmlns:asvg="http://schemas.microsoft.com/office/drawing/2016/SVG/main" r:embed="rId6"/>
+              </a:ext>
+            </a:extLst>
+          </a:blip>
+          <a:stretch>
+            <a:fillRect/>
+          </a:stretch>
+        </p:blipFill>
+        <p:spPr>
+          <a:xfrm>
+            <a:off x="5864859" y="3293392"/>
+            <a:ext cx="457200" cy="457200"/>
+          </a:xfrm>
+          <a:prstGeom prst="rect">
+            <a:avLst/>
+          </a:prstGeom>
+        </p:spPr>
+      </p:pic>
+      <p:pic>
+        <p:nvPicPr>
+          <p:cNvPr id="14" name="Graphic 13" descr="Magnifying glass with solid fill">
+            <a:extLst>
+              <a:ext uri="{FF2B5EF4-FFF2-40B4-BE49-F238E27FC236}">
+                <a16:creationId xmlns:a16="http://schemas.microsoft.com/office/drawing/2014/main" id="{E1C69C60-7208-0B12-1452-1A5E8DB2B0DB}"/>
+              </a:ext>
+            </a:extLst>
+          </p:cNvPr>
+          <p:cNvPicPr>
+            <a:picLocks noChangeAspect="1"/>
+          </p:cNvPicPr>
+          <p:nvPr/>
+        </p:nvPicPr>
+        <p:blipFill>
+          <a:blip r:embed="rId7">
+            <a:extLst>
+              <a:ext uri="{96DAC541-7B7A-43D3-8B79-37D633B846F1}">
+                <asvg:svgBlip xmlns:asvg="http://schemas.microsoft.com/office/drawing/2016/SVG/main" r:embed="rId8"/>
+              </a:ext>
+            </a:extLst>
+          </a:blip>
+          <a:stretch>
+            <a:fillRect/>
+          </a:stretch>
+        </p:blipFill>
+        <p:spPr>
+          <a:xfrm>
+            <a:off x="4833619" y="3291732"/>
+            <a:ext cx="457200" cy="457200"/>
+          </a:xfrm>
+          <a:prstGeom prst="rect">
+            <a:avLst/>
+          </a:prstGeom>
+        </p:spPr>
+      </p:pic>
+      <p:pic>
+        <p:nvPicPr>
+          <p:cNvPr id="16" name="Graphic 15" descr="Table with solid fill">
+            <a:extLst>
+              <a:ext uri="{FF2B5EF4-FFF2-40B4-BE49-F238E27FC236}">
+                <a16:creationId xmlns:a16="http://schemas.microsoft.com/office/drawing/2014/main" id="{B5676005-E079-2A3B-089C-6566A8AAC606}"/>
+              </a:ext>
+            </a:extLst>
+          </p:cNvPr>
+          <p:cNvPicPr>
+            <a:picLocks noChangeAspect="1"/>
+          </p:cNvPicPr>
+          <p:nvPr/>
+        </p:nvPicPr>
+        <p:blipFill>
+          <a:blip r:embed="rId9">
+            <a:extLst>
+              <a:ext uri="{96DAC541-7B7A-43D3-8B79-37D633B846F1}">
+                <asvg:svgBlip xmlns:asvg="http://schemas.microsoft.com/office/drawing/2016/SVG/main" r:embed="rId10"/>
+              </a:ext>
+            </a:extLst>
+          </a:blip>
+          <a:stretch>
+            <a:fillRect/>
+          </a:stretch>
+        </p:blipFill>
+        <p:spPr>
+          <a:xfrm>
+            <a:off x="9951350" y="1113916"/>
+            <a:ext cx="457200" cy="457200"/>
+          </a:xfrm>
+          <a:prstGeom prst="rect">
+            <a:avLst/>
+          </a:prstGeom>
+        </p:spPr>
+      </p:pic>
+      <p:pic>
+        <p:nvPicPr>
+          <p:cNvPr id="18" name="Graphic 17" descr="Chat bubble with solid fill">
+            <a:extLst>
+              <a:ext uri="{FF2B5EF4-FFF2-40B4-BE49-F238E27FC236}">
+                <a16:creationId xmlns:a16="http://schemas.microsoft.com/office/drawing/2014/main" id="{3C989B8B-DED4-B55D-CC71-F1E215EF7EAB}"/>
+              </a:ext>
+            </a:extLst>
+          </p:cNvPr>
+          <p:cNvPicPr>
+            <a:picLocks noChangeAspect="1"/>
+          </p:cNvPicPr>
+          <p:nvPr/>
+        </p:nvPicPr>
+        <p:blipFill>
+          <a:blip r:embed="rId11">
+            <a:extLst>
+              <a:ext uri="{96DAC541-7B7A-43D3-8B79-37D633B846F1}">
+                <asvg:svgBlip xmlns:asvg="http://schemas.microsoft.com/office/drawing/2016/SVG/main" r:embed="rId12"/>
+              </a:ext>
+            </a:extLst>
+          </a:blip>
+          <a:stretch>
+            <a:fillRect/>
+          </a:stretch>
+        </p:blipFill>
+        <p:spPr>
+          <a:xfrm>
+            <a:off x="3371197" y="1123949"/>
+            <a:ext cx="457200" cy="457200"/>
+          </a:xfrm>
+          <a:prstGeom prst="rect">
+            <a:avLst/>
+          </a:prstGeom>
+        </p:spPr>
+      </p:pic>
+      <p:pic>
+        <p:nvPicPr>
+          <p:cNvPr id="20" name="Graphic 19" descr="Speech with solid fill">
+            <a:extLst>
+              <a:ext uri="{FF2B5EF4-FFF2-40B4-BE49-F238E27FC236}">
+                <a16:creationId xmlns:a16="http://schemas.microsoft.com/office/drawing/2014/main" id="{8F949B6B-BC5B-F17A-DDE0-890881F6E6F5}"/>
+              </a:ext>
+            </a:extLst>
+          </p:cNvPr>
+          <p:cNvPicPr>
+            <a:picLocks noChangeAspect="1"/>
+          </p:cNvPicPr>
+          <p:nvPr/>
+        </p:nvPicPr>
+        <p:blipFill>
+          <a:blip r:embed="rId13">
+            <a:extLst>
+              <a:ext uri="{96DAC541-7B7A-43D3-8B79-37D633B846F1}">
+                <asvg:svgBlip xmlns:asvg="http://schemas.microsoft.com/office/drawing/2016/SVG/main" r:embed="rId14"/>
+              </a:ext>
+            </a:extLst>
+          </a:blip>
+          <a:stretch>
+            <a:fillRect/>
+          </a:stretch>
+        </p:blipFill>
+        <p:spPr>
+          <a:xfrm>
+            <a:off x="1202499" y="1141015"/>
+            <a:ext cx="457200" cy="457200"/>
+          </a:xfrm>
+          <a:prstGeom prst="rect">
+            <a:avLst/>
+          </a:prstGeom>
+        </p:spPr>
+      </p:pic>
+      <p:pic>
+        <p:nvPicPr>
+          <p:cNvPr id="22" name="Graphic 21" descr="Ringer with solid fill">
+            <a:extLst>
+              <a:ext uri="{FF2B5EF4-FFF2-40B4-BE49-F238E27FC236}">
+                <a16:creationId xmlns:a16="http://schemas.microsoft.com/office/drawing/2014/main" id="{31B1C6DC-A0E0-5DD4-461A-CD4ED368BA03}"/>
+              </a:ext>
+            </a:extLst>
+          </p:cNvPr>
+          <p:cNvPicPr>
+            <a:picLocks noChangeAspect="1"/>
+          </p:cNvPicPr>
+          <p:nvPr/>
+        </p:nvPicPr>
+        <p:blipFill>
+          <a:blip r:embed="rId15">
+            <a:extLst>
+              <a:ext uri="{96DAC541-7B7A-43D3-8B79-37D633B846F1}">
+                <asvg:svgBlip xmlns:asvg="http://schemas.microsoft.com/office/drawing/2016/SVG/main" r:embed="rId16"/>
+              </a:ext>
+            </a:extLst>
+          </a:blip>
+          <a:stretch>
+            <a:fillRect/>
+          </a:stretch>
+        </p:blipFill>
+        <p:spPr>
+          <a:xfrm>
+            <a:off x="2286848" y="1123949"/>
+            <a:ext cx="457200" cy="457200"/>
+          </a:xfrm>
+          <a:prstGeom prst="rect">
+            <a:avLst/>
+          </a:prstGeom>
+        </p:spPr>
+      </p:pic>
+      <p:cxnSp>
+        <p:nvCxnSpPr>
+          <p:cNvPr id="23" name="Straight Arrow Connector 22">
+            <a:extLst>
+              <a:ext uri="{FF2B5EF4-FFF2-40B4-BE49-F238E27FC236}">
+                <a16:creationId xmlns:a16="http://schemas.microsoft.com/office/drawing/2014/main" id="{5FBB3EA1-6050-7099-569B-D76BD8F80060}"/>
+              </a:ext>
+            </a:extLst>
+          </p:cNvPr>
+          <p:cNvCxnSpPr>
+            <a:cxnSpLocks/>
+            <a:stCxn id="5" idx="3"/>
+            <a:endCxn id="2" idx="1"/>
+          </p:cNvCxnSpPr>
+          <p:nvPr/>
+        </p:nvCxnSpPr>
+        <p:spPr>
+          <a:xfrm>
+            <a:off x="4207088" y="1504950"/>
+            <a:ext cx="982132" cy="0"/>
+          </a:xfrm>
+          <a:prstGeom prst="straightConnector1">
+            <a:avLst/>
+          </a:prstGeom>
+          <a:ln>
+            <a:solidFill>
+              <a:schemeClr val="tx1"/>
+            </a:solidFill>
+            <a:prstDash val="sysDash"/>
+            <a:tailEnd type="triangle" w="lg" len="lg"/>
+          </a:ln>
+        </p:spPr>
+        <p:style>
+          <a:lnRef idx="2">
+            <a:schemeClr val="accent1"/>
+          </a:lnRef>
+          <a:fillRef idx="0">
+            <a:schemeClr val="accent1"/>
+          </a:fillRef>
+          <a:effectRef idx="1">
+            <a:schemeClr val="accent1"/>
+          </a:effectRef>
+          <a:fontRef idx="minor">
+            <a:schemeClr val="tx1"/>
+          </a:fontRef>
+        </p:style>
+      </p:cxnSp>
+      <p:cxnSp>
+        <p:nvCxnSpPr>
+          <p:cNvPr id="26" name="Straight Arrow Connector 25">
+            <a:extLst>
+              <a:ext uri="{FF2B5EF4-FFF2-40B4-BE49-F238E27FC236}">
+                <a16:creationId xmlns:a16="http://schemas.microsoft.com/office/drawing/2014/main" id="{88013E43-9914-71DD-8256-A57FB83385BD}"/>
+              </a:ext>
+            </a:extLst>
+          </p:cNvPr>
+          <p:cNvCxnSpPr>
+            <a:cxnSpLocks/>
+            <a:stCxn id="2" idx="3"/>
+            <a:endCxn id="4" idx="1"/>
+          </p:cNvCxnSpPr>
+          <p:nvPr/>
+        </p:nvCxnSpPr>
+        <p:spPr>
+          <a:xfrm>
+            <a:off x="7002780" y="1504950"/>
+            <a:ext cx="792478" cy="8532"/>
+          </a:xfrm>
+          <a:prstGeom prst="straightConnector1">
+            <a:avLst/>
+          </a:prstGeom>
+          <a:ln>
+            <a:solidFill>
+              <a:schemeClr val="tx1"/>
+            </a:solidFill>
+            <a:prstDash val="sysDash"/>
+            <a:tailEnd type="triangle" w="lg" len="lg"/>
+          </a:ln>
+        </p:spPr>
+        <p:style>
+          <a:lnRef idx="2">
+            <a:schemeClr val="accent1"/>
+          </a:lnRef>
+          <a:fillRef idx="0">
+            <a:schemeClr val="accent1"/>
+          </a:fillRef>
+          <a:effectRef idx="1">
+            <a:schemeClr val="accent1"/>
+          </a:effectRef>
+          <a:fontRef idx="minor">
+            <a:schemeClr val="tx1"/>
+          </a:fontRef>
+        </p:style>
+      </p:cxnSp>
+      <p:graphicFrame>
+        <p:nvGraphicFramePr>
+          <p:cNvPr id="33" name="Table 32">
+            <a:extLst>
+              <a:ext uri="{FF2B5EF4-FFF2-40B4-BE49-F238E27FC236}">
+                <a16:creationId xmlns:a16="http://schemas.microsoft.com/office/drawing/2014/main" id="{47803182-198F-F147-4FA2-48DE67FF9488}"/>
+              </a:ext>
+            </a:extLst>
+          </p:cNvPr>
+          <p:cNvGraphicFramePr>
+            <a:graphicFrameLocks noGrp="1"/>
+          </p:cNvGraphicFramePr>
+          <p:nvPr>
+            <p:extLst>
+              <p:ext uri="{D42A27DB-BD31-4B8C-83A1-F6EECF244321}">
+                <p14:modId xmlns:p14="http://schemas.microsoft.com/office/powerpoint/2010/main" val="4149560230"/>
+              </p:ext>
+            </p:extLst>
+          </p:nvPr>
+        </p:nvGraphicFramePr>
+        <p:xfrm>
+          <a:off x="916517" y="1571116"/>
+          <a:ext cx="3197862" cy="640080"/>
+        </p:xfrm>
+        <a:graphic>
+          <a:graphicData uri="http://schemas.openxmlformats.org/drawingml/2006/table">
+            <a:tbl>
+              <a:tblPr firstRow="1" bandRow="1">
+                <a:tableStyleId>{5C22544A-7EE6-4342-B048-85BDC9FD1C3A}</a:tableStyleId>
+              </a:tblPr>
+              <a:tblGrid>
+                <a:gridCol w="1065954">
+                  <a:extLst>
+                    <a:ext uri="{9D8B030D-6E8A-4147-A177-3AD203B41FA5}">
+                      <a16:colId xmlns:a16="http://schemas.microsoft.com/office/drawing/2014/main" val="68322426"/>
+                    </a:ext>
+                  </a:extLst>
+                </a:gridCol>
+                <a:gridCol w="1065954">
+                  <a:extLst>
+                    <a:ext uri="{9D8B030D-6E8A-4147-A177-3AD203B41FA5}">
+                      <a16:colId xmlns:a16="http://schemas.microsoft.com/office/drawing/2014/main" val="73392387"/>
+                    </a:ext>
+                  </a:extLst>
+                </a:gridCol>
+                <a:gridCol w="1065954">
+                  <a:extLst>
+                    <a:ext uri="{9D8B030D-6E8A-4147-A177-3AD203B41FA5}">
+                      <a16:colId xmlns:a16="http://schemas.microsoft.com/office/drawing/2014/main" val="3826947402"/>
+                    </a:ext>
+                  </a:extLst>
+                </a:gridCol>
+              </a:tblGrid>
+              <a:tr h="370840">
+                <a:tc>
+                  <a:txBody>
+                    <a:bodyPr/>
+                    <a:lstStyle/>
+                    <a:p>
+                      <a:pPr algn="ctr"/>
+                      <a:r>
+                        <a:rPr lang="en-US" b="0" dirty="0">
+                          <a:solidFill>
+                            <a:sysClr val="windowText" lastClr="000000"/>
+                          </a:solidFill>
+                        </a:rPr>
+                        <a:t>User Messages</a:t>
+                      </a:r>
+                    </a:p>
+                  </a:txBody>
+                  <a:tcPr anchor="ctr">
+                    <a:lnL w="12700" cmpd="sng">
+                      <a:noFill/>
+                    </a:lnL>
+                    <a:lnR w="12700" cmpd="sng">
+                      <a:noFill/>
+                    </a:lnR>
+                    <a:lnT w="12700" cmpd="sng">
+                      <a:noFill/>
+                    </a:lnT>
+                    <a:lnB w="38100" cmpd="sng">
+                      <a:noFill/>
+                    </a:lnB>
+                    <a:lnTlToBr w="12700" cmpd="sng">
+                      <a:noFill/>
+                      <a:prstDash val="solid"/>
+                    </a:lnTlToBr>
+                    <a:lnBlToTr w="12700" cmpd="sng">
+                      <a:noFill/>
+                      <a:prstDash val="solid"/>
+                    </a:lnBlToTr>
+                    <a:noFill/>
+                  </a:tcPr>
+                </a:tc>
+                <a:tc>
+                  <a:txBody>
+                    <a:bodyPr/>
+                    <a:lstStyle/>
+                    <a:p>
+                      <a:pPr algn="ctr"/>
+                      <a:r>
+                        <a:rPr lang="en-US" b="0" dirty="0">
+                          <a:solidFill>
+                            <a:sysClr val="windowText" lastClr="000000"/>
+                          </a:solidFill>
+                        </a:rPr>
+                        <a:t>System Events</a:t>
+                      </a:r>
+                    </a:p>
+                  </a:txBody>
+                  <a:tcPr anchor="ctr">
+                    <a:lnL w="12700" cmpd="sng">
+                      <a:noFill/>
+                    </a:lnL>
+                    <a:lnR w="12700" cmpd="sng">
+                      <a:noFill/>
+                    </a:lnR>
+                    <a:lnT w="12700" cmpd="sng">
+                      <a:noFill/>
+                    </a:lnT>
+                    <a:lnB w="38100" cmpd="sng">
+                      <a:noFill/>
+                    </a:lnB>
+                    <a:lnTlToBr w="12700" cmpd="sng">
+                      <a:noFill/>
+                      <a:prstDash val="solid"/>
+                    </a:lnTlToBr>
+                    <a:lnBlToTr w="12700" cmpd="sng">
+                      <a:noFill/>
+                      <a:prstDash val="solid"/>
+                    </a:lnBlToTr>
+                    <a:noFill/>
+                  </a:tcPr>
+                </a:tc>
+                <a:tc>
+                  <a:txBody>
+                    <a:bodyPr/>
+                    <a:lstStyle/>
+                    <a:p>
+                      <a:pPr algn="ctr"/>
+                      <a:r>
+                        <a:rPr lang="en-US" b="0" dirty="0">
+                          <a:solidFill>
+                            <a:sysClr val="windowText" lastClr="000000"/>
+                          </a:solidFill>
+                        </a:rPr>
+                        <a:t>Agent Messages</a:t>
+                      </a:r>
+                    </a:p>
+                  </a:txBody>
+                  <a:tcPr anchor="ctr">
+                    <a:lnL w="12700" cmpd="sng">
+                      <a:noFill/>
+                    </a:lnL>
+                    <a:lnR w="12700" cmpd="sng">
+                      <a:noFill/>
+                    </a:lnR>
+                    <a:lnT w="12700" cmpd="sng">
+                      <a:noFill/>
+                    </a:lnT>
+                    <a:lnB w="38100" cmpd="sng">
+                      <a:noFill/>
+                    </a:lnB>
+                    <a:lnTlToBr w="12700" cmpd="sng">
+                      <a:noFill/>
+                      <a:prstDash val="solid"/>
+                    </a:lnTlToBr>
+                    <a:lnBlToTr w="12700" cmpd="sng">
+                      <a:noFill/>
+                      <a:prstDash val="solid"/>
+                    </a:lnBlToTr>
+                    <a:noFill/>
+                  </a:tcPr>
+                </a:tc>
+                <a:extLst>
+                  <a:ext uri="{0D108BD9-81ED-4DB2-BD59-A6C34878D82A}">
+                    <a16:rowId xmlns:a16="http://schemas.microsoft.com/office/drawing/2014/main" val="410720830"/>
+                  </a:ext>
+                </a:extLst>
+              </a:tr>
+            </a:tbl>
+          </a:graphicData>
+        </a:graphic>
+      </p:graphicFrame>
+      <p:graphicFrame>
+        <p:nvGraphicFramePr>
+          <p:cNvPr id="35" name="Table 34">
+            <a:extLst>
+              <a:ext uri="{FF2B5EF4-FFF2-40B4-BE49-F238E27FC236}">
+                <a16:creationId xmlns:a16="http://schemas.microsoft.com/office/drawing/2014/main" id="{13CEFDE5-BB13-7FE2-5227-4B42AA1FC243}"/>
+              </a:ext>
+            </a:extLst>
+          </p:cNvPr>
+          <p:cNvGraphicFramePr>
+            <a:graphicFrameLocks noGrp="1"/>
+          </p:cNvGraphicFramePr>
+          <p:nvPr>
+            <p:extLst>
+              <p:ext uri="{D42A27DB-BD31-4B8C-83A1-F6EECF244321}">
+                <p14:modId xmlns:p14="http://schemas.microsoft.com/office/powerpoint/2010/main" val="4110369039"/>
+              </p:ext>
+            </p:extLst>
+          </p:nvPr>
+        </p:nvGraphicFramePr>
+        <p:xfrm>
+          <a:off x="4494528" y="3748932"/>
+          <a:ext cx="3197862" cy="370840"/>
+        </p:xfrm>
+        <a:graphic>
+          <a:graphicData uri="http://schemas.openxmlformats.org/drawingml/2006/table">
+            <a:tbl>
+              <a:tblPr firstRow="1" bandRow="1">
+                <a:tableStyleId>{5C22544A-7EE6-4342-B048-85BDC9FD1C3A}</a:tableStyleId>
+              </a:tblPr>
+              <a:tblGrid>
+                <a:gridCol w="1065954">
+                  <a:extLst>
+                    <a:ext uri="{9D8B030D-6E8A-4147-A177-3AD203B41FA5}">
+                      <a16:colId xmlns:a16="http://schemas.microsoft.com/office/drawing/2014/main" val="68322426"/>
+                    </a:ext>
+                  </a:extLst>
+                </a:gridCol>
+                <a:gridCol w="1065954">
+                  <a:extLst>
+                    <a:ext uri="{9D8B030D-6E8A-4147-A177-3AD203B41FA5}">
+                      <a16:colId xmlns:a16="http://schemas.microsoft.com/office/drawing/2014/main" val="73392387"/>
+                    </a:ext>
+                  </a:extLst>
+                </a:gridCol>
+                <a:gridCol w="1065954">
+                  <a:extLst>
+                    <a:ext uri="{9D8B030D-6E8A-4147-A177-3AD203B41FA5}">
+                      <a16:colId xmlns:a16="http://schemas.microsoft.com/office/drawing/2014/main" val="3826947402"/>
+                    </a:ext>
+                  </a:extLst>
+                </a:gridCol>
+              </a:tblGrid>
+              <a:tr h="370840">
+                <a:tc>
+                  <a:txBody>
+                    <a:bodyPr/>
+                    <a:lstStyle/>
+                    <a:p>
+                      <a:pPr algn="ctr"/>
+                      <a:r>
+                        <a:rPr lang="en-US" b="0" dirty="0">
+                          <a:solidFill>
+                            <a:sysClr val="windowText" lastClr="000000"/>
+                          </a:solidFill>
+                        </a:rPr>
+                        <a:t>Retrieval</a:t>
+                      </a:r>
+                    </a:p>
+                  </a:txBody>
+                  <a:tcPr anchor="ctr">
+                    <a:lnL w="12700" cmpd="sng">
+                      <a:noFill/>
+                    </a:lnL>
+                    <a:lnR w="12700" cmpd="sng">
+                      <a:noFill/>
+                    </a:lnR>
+                    <a:lnT w="12700" cmpd="sng">
+                      <a:noFill/>
+                    </a:lnT>
+                    <a:lnB w="38100" cmpd="sng">
+                      <a:noFill/>
+                    </a:lnB>
+                    <a:lnTlToBr w="12700" cmpd="sng">
+                      <a:noFill/>
+                      <a:prstDash val="solid"/>
+                    </a:lnTlToBr>
+                    <a:lnBlToTr w="12700" cmpd="sng">
+                      <a:noFill/>
+                      <a:prstDash val="solid"/>
+                    </a:lnBlToTr>
+                    <a:noFill/>
+                  </a:tcPr>
+                </a:tc>
+                <a:tc>
+                  <a:txBody>
+                    <a:bodyPr/>
+                    <a:lstStyle/>
+                    <a:p>
+                      <a:pPr algn="ctr"/>
+                      <a:r>
+                        <a:rPr lang="en-US" b="0" dirty="0">
+                          <a:solidFill>
+                            <a:sysClr val="windowText" lastClr="000000"/>
+                          </a:solidFill>
+                        </a:rPr>
+                        <a:t>Actions</a:t>
+                      </a:r>
+                    </a:p>
+                  </a:txBody>
+                  <a:tcPr anchor="ctr">
+                    <a:lnL w="12700" cmpd="sng">
+                      <a:noFill/>
+                    </a:lnL>
+                    <a:lnR w="12700" cmpd="sng">
+                      <a:noFill/>
+                    </a:lnR>
+                    <a:lnT w="12700" cmpd="sng">
+                      <a:noFill/>
+                    </a:lnT>
+                    <a:lnB w="38100" cmpd="sng">
+                      <a:noFill/>
+                    </a:lnB>
+                    <a:lnTlToBr w="12700" cmpd="sng">
+                      <a:noFill/>
+                      <a:prstDash val="solid"/>
+                    </a:lnTlToBr>
+                    <a:lnBlToTr w="12700" cmpd="sng">
+                      <a:noFill/>
+                      <a:prstDash val="solid"/>
+                    </a:lnBlToTr>
+                    <a:noFill/>
+                  </a:tcPr>
+                </a:tc>
+                <a:tc>
+                  <a:txBody>
+                    <a:bodyPr/>
+                    <a:lstStyle/>
+                    <a:p>
+                      <a:pPr algn="ctr"/>
+                      <a:r>
+                        <a:rPr lang="en-US" b="0" dirty="0">
+                          <a:solidFill>
+                            <a:sysClr val="windowText" lastClr="000000"/>
+                          </a:solidFill>
+                        </a:rPr>
+                        <a:t>Memory</a:t>
+                      </a:r>
+                    </a:p>
+                  </a:txBody>
+                  <a:tcPr anchor="ctr">
+                    <a:lnL w="12700" cmpd="sng">
+                      <a:noFill/>
+                    </a:lnL>
+                    <a:lnR w="12700" cmpd="sng">
+                      <a:noFill/>
+                    </a:lnR>
+                    <a:lnT w="12700" cmpd="sng">
+                      <a:noFill/>
+                    </a:lnT>
+                    <a:lnB w="38100" cmpd="sng">
+                      <a:noFill/>
+                    </a:lnB>
+                    <a:lnTlToBr w="12700" cmpd="sng">
+                      <a:noFill/>
+                      <a:prstDash val="solid"/>
+                    </a:lnTlToBr>
+                    <a:lnBlToTr w="12700" cmpd="sng">
+                      <a:noFill/>
+                      <a:prstDash val="solid"/>
+                    </a:lnBlToTr>
+                    <a:noFill/>
+                  </a:tcPr>
+                </a:tc>
+                <a:extLst>
+                  <a:ext uri="{0D108BD9-81ED-4DB2-BD59-A6C34878D82A}">
+                    <a16:rowId xmlns:a16="http://schemas.microsoft.com/office/drawing/2014/main" val="410720830"/>
+                  </a:ext>
+                </a:extLst>
+              </a:tr>
+            </a:tbl>
+          </a:graphicData>
+        </a:graphic>
+      </p:graphicFrame>
+      <p:graphicFrame>
+        <p:nvGraphicFramePr>
+          <p:cNvPr id="36" name="Table 35">
+            <a:extLst>
+              <a:ext uri="{FF2B5EF4-FFF2-40B4-BE49-F238E27FC236}">
+                <a16:creationId xmlns:a16="http://schemas.microsoft.com/office/drawing/2014/main" id="{02E9900A-996C-DAAA-125C-D960B4466D98}"/>
+              </a:ext>
+            </a:extLst>
+          </p:cNvPr>
+          <p:cNvGraphicFramePr>
+            <a:graphicFrameLocks noGrp="1"/>
+          </p:cNvGraphicFramePr>
+          <p:nvPr>
+            <p:extLst>
+              <p:ext uri="{D42A27DB-BD31-4B8C-83A1-F6EECF244321}">
+                <p14:modId xmlns:p14="http://schemas.microsoft.com/office/powerpoint/2010/main" val="2089753363"/>
+              </p:ext>
+            </p:extLst>
+          </p:nvPr>
+        </p:nvGraphicFramePr>
+        <p:xfrm>
+          <a:off x="8093204" y="1571116"/>
+          <a:ext cx="2787388" cy="640080"/>
+        </p:xfrm>
+        <a:graphic>
+          <a:graphicData uri="http://schemas.openxmlformats.org/drawingml/2006/table">
+            <a:tbl>
+              <a:tblPr firstRow="1" bandRow="1">
+                <a:tableStyleId>{5C22544A-7EE6-4342-B048-85BDC9FD1C3A}</a:tableStyleId>
+              </a:tblPr>
+              <a:tblGrid>
+                <a:gridCol w="1393694">
+                  <a:extLst>
+                    <a:ext uri="{9D8B030D-6E8A-4147-A177-3AD203B41FA5}">
+                      <a16:colId xmlns:a16="http://schemas.microsoft.com/office/drawing/2014/main" val="68322426"/>
+                    </a:ext>
+                  </a:extLst>
+                </a:gridCol>
+                <a:gridCol w="1393694">
+                  <a:extLst>
+                    <a:ext uri="{9D8B030D-6E8A-4147-A177-3AD203B41FA5}">
+                      <a16:colId xmlns:a16="http://schemas.microsoft.com/office/drawing/2014/main" val="73392387"/>
+                    </a:ext>
+                  </a:extLst>
+                </a:gridCol>
+              </a:tblGrid>
+              <a:tr h="370840">
+                <a:tc>
+                  <a:txBody>
+                    <a:bodyPr/>
+                    <a:lstStyle/>
+                    <a:p>
+                      <a:pPr algn="ctr"/>
+                      <a:r>
+                        <a:rPr lang="en-US" b="0" dirty="0">
+                          <a:solidFill>
+                            <a:sysClr val="windowText" lastClr="000000"/>
+                          </a:solidFill>
+                        </a:rPr>
+                        <a:t>Agent Messages</a:t>
+                      </a:r>
+                    </a:p>
+                  </a:txBody>
+                  <a:tcPr anchor="ctr">
+                    <a:lnL w="12700" cmpd="sng">
+                      <a:noFill/>
+                    </a:lnL>
+                    <a:lnR w="12700" cmpd="sng">
+                      <a:noFill/>
+                    </a:lnR>
+                    <a:lnT w="12700" cmpd="sng">
+                      <a:noFill/>
+                    </a:lnT>
+                    <a:lnB w="38100" cmpd="sng">
+                      <a:noFill/>
+                    </a:lnB>
+                    <a:lnTlToBr w="12700" cmpd="sng">
+                      <a:noFill/>
+                      <a:prstDash val="solid"/>
+                    </a:lnTlToBr>
+                    <a:lnBlToTr w="12700" cmpd="sng">
+                      <a:noFill/>
+                      <a:prstDash val="solid"/>
+                    </a:lnBlToTr>
+                    <a:noFill/>
+                  </a:tcPr>
+                </a:tc>
+                <a:tc>
+                  <a:txBody>
+                    <a:bodyPr/>
+                    <a:lstStyle/>
+                    <a:p>
+                      <a:pPr algn="ctr"/>
+                      <a:r>
+                        <a:rPr lang="en-US" b="0" dirty="0">
+                          <a:solidFill>
+                            <a:sysClr val="windowText" lastClr="000000"/>
+                          </a:solidFill>
+                        </a:rPr>
+                        <a:t>Structured</a:t>
+                      </a:r>
+                    </a:p>
+                    <a:p>
+                      <a:pPr algn="ctr"/>
+                      <a:r>
+                        <a:rPr lang="en-US" b="0" dirty="0">
+                          <a:solidFill>
+                            <a:sysClr val="windowText" lastClr="000000"/>
+                          </a:solidFill>
+                        </a:rPr>
+                        <a:t>Output</a:t>
+                      </a:r>
+                    </a:p>
+                  </a:txBody>
+                  <a:tcPr anchor="ctr">
+                    <a:lnL w="12700" cmpd="sng">
+                      <a:noFill/>
+                    </a:lnL>
+                    <a:lnR w="12700" cmpd="sng">
+                      <a:noFill/>
+                    </a:lnR>
+                    <a:lnT w="12700" cmpd="sng">
+                      <a:noFill/>
+                    </a:lnT>
+                    <a:lnB w="38100" cmpd="sng">
+                      <a:noFill/>
+                    </a:lnB>
+                    <a:lnTlToBr w="12700" cmpd="sng">
+                      <a:noFill/>
+                      <a:prstDash val="solid"/>
+                    </a:lnTlToBr>
+                    <a:lnBlToTr w="12700" cmpd="sng">
+                      <a:noFill/>
+                      <a:prstDash val="solid"/>
+                    </a:lnBlToTr>
+                    <a:noFill/>
+                  </a:tcPr>
+                </a:tc>
+                <a:extLst>
+                  <a:ext uri="{0D108BD9-81ED-4DB2-BD59-A6C34878D82A}">
+                    <a16:rowId xmlns:a16="http://schemas.microsoft.com/office/drawing/2014/main" val="410720830"/>
+                  </a:ext>
+                </a:extLst>
+              </a:tr>
+            </a:tbl>
+          </a:graphicData>
+        </a:graphic>
+      </p:graphicFrame>
+      <p:pic>
+        <p:nvPicPr>
+          <p:cNvPr id="38" name="Graphic 37" descr="Chat bubble with solid fill">
+            <a:extLst>
+              <a:ext uri="{FF2B5EF4-FFF2-40B4-BE49-F238E27FC236}">
+                <a16:creationId xmlns:a16="http://schemas.microsoft.com/office/drawing/2014/main" id="{76B4E836-5AE0-07B8-D379-E54786753A35}"/>
+              </a:ext>
+            </a:extLst>
+          </p:cNvPr>
+          <p:cNvPicPr>
+            <a:picLocks noChangeAspect="1"/>
+          </p:cNvPicPr>
+          <p:nvPr/>
+        </p:nvPicPr>
+        <p:blipFill>
+          <a:blip r:embed="rId11">
+            <a:extLst>
+              <a:ext uri="{96DAC541-7B7A-43D3-8B79-37D633B846F1}">
+                <asvg:svgBlip xmlns:asvg="http://schemas.microsoft.com/office/drawing/2016/SVG/main" r:embed="rId12"/>
+              </a:ext>
+            </a:extLst>
+          </a:blip>
+          <a:stretch>
+            <a:fillRect/>
+          </a:stretch>
+        </p:blipFill>
+        <p:spPr>
+          <a:xfrm>
+            <a:off x="8565246" y="1141015"/>
+            <a:ext cx="457200" cy="457200"/>
+          </a:xfrm>
+          <a:prstGeom prst="rect">
+            <a:avLst/>
+          </a:prstGeom>
+        </p:spPr>
+      </p:pic>
+      <p:cxnSp>
+        <p:nvCxnSpPr>
+          <p:cNvPr id="39" name="Straight Arrow Connector 38">
+            <a:extLst>
+              <a:ext uri="{FF2B5EF4-FFF2-40B4-BE49-F238E27FC236}">
+                <a16:creationId xmlns:a16="http://schemas.microsoft.com/office/drawing/2014/main" id="{460210D5-1CB7-617C-BD88-70D36F38AC6C}"/>
+              </a:ext>
+            </a:extLst>
+          </p:cNvPr>
+          <p:cNvCxnSpPr>
+            <a:cxnSpLocks/>
+            <a:stCxn id="2" idx="2"/>
+            <a:endCxn id="3" idx="0"/>
+          </p:cNvCxnSpPr>
+          <p:nvPr/>
+        </p:nvCxnSpPr>
+        <p:spPr>
+          <a:xfrm flipH="1">
+            <a:off x="6093459" y="2400300"/>
+            <a:ext cx="2541" cy="454943"/>
+          </a:xfrm>
+          <a:prstGeom prst="straightConnector1">
+            <a:avLst/>
+          </a:prstGeom>
+          <a:ln>
+            <a:solidFill>
+              <a:schemeClr val="tx1"/>
+            </a:solidFill>
+            <a:prstDash val="sysDash"/>
+            <a:headEnd type="triangle" w="lg" len="lg"/>
+            <a:tailEnd type="triangle" w="lg" len="lg"/>
+          </a:ln>
+        </p:spPr>
+        <p:style>
+          <a:lnRef idx="2">
+            <a:schemeClr val="accent1"/>
+          </a:lnRef>
+          <a:fillRef idx="0">
+            <a:schemeClr val="accent1"/>
+          </a:fillRef>
+          <a:effectRef idx="1">
+            <a:schemeClr val="accent1"/>
+          </a:effectRef>
+          <a:fontRef idx="minor">
+            <a:schemeClr val="tx1"/>
+          </a:fontRef>
+        </p:style>
+      </p:cxnSp>
+    </p:spTree>
+    <p:extLst>
+      <p:ext uri="{BB962C8B-B14F-4D97-AF65-F5344CB8AC3E}">
+        <p14:creationId xmlns:p14="http://schemas.microsoft.com/office/powerpoint/2010/main" val="1291696354"/>
+      </p:ext>
+    </p:extLst>
+  </p:cSld>
+  <p:clrMapOvr>
+    <a:masterClrMapping/>
+  </p:clrMapOvr>
+</p:sld>
+</file>
+
+<file path=ppt/slides/slide8.xml><?xml version="1.0" encoding="utf-8"?>
 <p:sld xmlns:a="http://schemas.openxmlformats.org/drawingml/2006/main" xmlns:r="http://schemas.openxmlformats.org/officeDocument/2006/relationships" xmlns:p="http://schemas.openxmlformats.org/presentationml/2006/main">
   <p:cSld>
     <p:spTree>
@@ -8424,1390 +10252,6 @@
 </p:sld>
 </file>
 
-<file path=ppt/slides/slide8.xml><?xml version="1.0" encoding="utf-8"?>
-<p:sld xmlns:a="http://schemas.openxmlformats.org/drawingml/2006/main" xmlns:r="http://schemas.openxmlformats.org/officeDocument/2006/relationships" xmlns:p="http://schemas.openxmlformats.org/presentationml/2006/main">
-  <p:cSld>
-    <p:spTree>
-      <p:nvGrpSpPr>
-        <p:cNvPr id="1" name=""/>
-        <p:cNvGrpSpPr/>
-        <p:nvPr/>
-      </p:nvGrpSpPr>
-      <p:grpSpPr>
-        <a:xfrm>
-          <a:off x="0" y="0"/>
-          <a:ext cx="0" cy="0"/>
-          <a:chOff x="0" y="0"/>
-          <a:chExt cx="0" cy="0"/>
-        </a:xfrm>
-      </p:grpSpPr>
-      <p:sp>
-        <p:nvSpPr>
-          <p:cNvPr id="2" name="Rectangle: Rounded Corners 1">
-            <a:extLst>
-              <a:ext uri="{FF2B5EF4-FFF2-40B4-BE49-F238E27FC236}">
-                <a16:creationId xmlns:a16="http://schemas.microsoft.com/office/drawing/2014/main" id="{F09FDC59-6067-4502-1360-F42554AD87D3}"/>
-              </a:ext>
-            </a:extLst>
-          </p:cNvPr>
-          <p:cNvSpPr/>
-          <p:nvPr/>
-        </p:nvSpPr>
-        <p:spPr>
-          <a:xfrm>
-            <a:off x="4046220" y="3398520"/>
-            <a:ext cx="4282440" cy="457200"/>
-          </a:xfrm>
-          <a:prstGeom prst="roundRect">
-            <a:avLst/>
-          </a:prstGeom>
-          <a:solidFill>
-            <a:srgbClr val="B2D4EB"/>
-          </a:solidFill>
-          <a:ln>
-            <a:solidFill>
-              <a:schemeClr val="tx1"/>
-            </a:solidFill>
-          </a:ln>
-        </p:spPr>
-        <p:style>
-          <a:lnRef idx="2">
-            <a:schemeClr val="accent1">
-              <a:shade val="15000"/>
-            </a:schemeClr>
-          </a:lnRef>
-          <a:fillRef idx="1">
-            <a:schemeClr val="accent1"/>
-          </a:fillRef>
-          <a:effectRef idx="0">
-            <a:schemeClr val="accent1"/>
-          </a:effectRef>
-          <a:fontRef idx="minor">
-            <a:schemeClr val="lt1"/>
-          </a:fontRef>
-        </p:style>
-        <p:txBody>
-          <a:bodyPr rtlCol="0" anchor="ctr"/>
-          <a:lstStyle/>
-          <a:p>
-            <a:pPr algn="ctr"/>
-            <a:r>
-              <a:rPr lang="en-US" dirty="0">
-                <a:solidFill>
-                  <a:schemeClr val="tx1"/>
-                </a:solidFill>
-              </a:rPr>
-              <a:t>Search Public Information on the Web</a:t>
-            </a:r>
-            <a:endParaRPr lang="en-US" i="1" dirty="0">
-              <a:solidFill>
-                <a:schemeClr val="tx1"/>
-              </a:solidFill>
-            </a:endParaRPr>
-          </a:p>
-        </p:txBody>
-      </p:sp>
-      <p:sp>
-        <p:nvSpPr>
-          <p:cNvPr id="3" name="Rectangle: Rounded Corners 2">
-            <a:extLst>
-              <a:ext uri="{FF2B5EF4-FFF2-40B4-BE49-F238E27FC236}">
-                <a16:creationId xmlns:a16="http://schemas.microsoft.com/office/drawing/2014/main" id="{9800FF13-E208-2C00-EB7C-BCBA48F554BD}"/>
-              </a:ext>
-            </a:extLst>
-          </p:cNvPr>
-          <p:cNvSpPr/>
-          <p:nvPr/>
-        </p:nvSpPr>
-        <p:spPr>
-          <a:xfrm>
-            <a:off x="4046220" y="2625554"/>
-            <a:ext cx="4282440" cy="457200"/>
-          </a:xfrm>
-          <a:prstGeom prst="roundRect">
-            <a:avLst/>
-          </a:prstGeom>
-          <a:solidFill>
-            <a:srgbClr val="B2D4EB"/>
-          </a:solidFill>
-          <a:ln>
-            <a:solidFill>
-              <a:schemeClr val="tx1"/>
-            </a:solidFill>
-          </a:ln>
-        </p:spPr>
-        <p:style>
-          <a:lnRef idx="2">
-            <a:schemeClr val="accent1">
-              <a:shade val="15000"/>
-            </a:schemeClr>
-          </a:lnRef>
-          <a:fillRef idx="1">
-            <a:schemeClr val="accent1"/>
-          </a:fillRef>
-          <a:effectRef idx="0">
-            <a:schemeClr val="accent1"/>
-          </a:effectRef>
-          <a:fontRef idx="minor">
-            <a:schemeClr val="lt1"/>
-          </a:fontRef>
-        </p:style>
-        <p:txBody>
-          <a:bodyPr rtlCol="0" anchor="ctr"/>
-          <a:lstStyle/>
-          <a:p>
-            <a:pPr algn="ctr"/>
-            <a:r>
-              <a:rPr lang="en-US" dirty="0">
-                <a:solidFill>
-                  <a:schemeClr val="tx1"/>
-                </a:solidFill>
-              </a:rPr>
-              <a:t>Retrieve Stock Quotes from an API</a:t>
-            </a:r>
-            <a:endParaRPr lang="en-US" i="1" dirty="0">
-              <a:solidFill>
-                <a:schemeClr val="tx1"/>
-              </a:solidFill>
-            </a:endParaRPr>
-          </a:p>
-        </p:txBody>
-      </p:sp>
-      <p:sp>
-        <p:nvSpPr>
-          <p:cNvPr id="4" name="Rectangle: Rounded Corners 3">
-            <a:extLst>
-              <a:ext uri="{FF2B5EF4-FFF2-40B4-BE49-F238E27FC236}">
-                <a16:creationId xmlns:a16="http://schemas.microsoft.com/office/drawing/2014/main" id="{CD952C55-0F41-C8E8-4833-F5F86239B3AD}"/>
-              </a:ext>
-            </a:extLst>
-          </p:cNvPr>
-          <p:cNvSpPr/>
-          <p:nvPr/>
-        </p:nvSpPr>
-        <p:spPr>
-          <a:xfrm>
-            <a:off x="4046220" y="1855003"/>
-            <a:ext cx="4282440" cy="457200"/>
-          </a:xfrm>
-          <a:prstGeom prst="roundRect">
-            <a:avLst/>
-          </a:prstGeom>
-          <a:solidFill>
-            <a:srgbClr val="B2D4EB"/>
-          </a:solidFill>
-          <a:ln>
-            <a:solidFill>
-              <a:schemeClr val="tx1"/>
-            </a:solidFill>
-          </a:ln>
-        </p:spPr>
-        <p:style>
-          <a:lnRef idx="2">
-            <a:schemeClr val="accent1">
-              <a:shade val="15000"/>
-            </a:schemeClr>
-          </a:lnRef>
-          <a:fillRef idx="1">
-            <a:schemeClr val="accent1"/>
-          </a:fillRef>
-          <a:effectRef idx="0">
-            <a:schemeClr val="accent1"/>
-          </a:effectRef>
-          <a:fontRef idx="minor">
-            <a:schemeClr val="lt1"/>
-          </a:fontRef>
-        </p:style>
-        <p:txBody>
-          <a:bodyPr rtlCol="0" anchor="ctr"/>
-          <a:lstStyle/>
-          <a:p>
-            <a:pPr algn="ctr"/>
-            <a:r>
-              <a:rPr lang="en-US" dirty="0">
-                <a:solidFill>
-                  <a:schemeClr val="tx1"/>
-                </a:solidFill>
-              </a:rPr>
-              <a:t>Reference Internal Report Files</a:t>
-            </a:r>
-            <a:endParaRPr lang="en-US" i="1" dirty="0">
-              <a:solidFill>
-                <a:schemeClr val="tx1"/>
-              </a:solidFill>
-            </a:endParaRPr>
-          </a:p>
-        </p:txBody>
-      </p:sp>
-      <p:sp>
-        <p:nvSpPr>
-          <p:cNvPr id="5" name="Rectangle: Rounded Corners 4">
-            <a:extLst>
-              <a:ext uri="{FF2B5EF4-FFF2-40B4-BE49-F238E27FC236}">
-                <a16:creationId xmlns:a16="http://schemas.microsoft.com/office/drawing/2014/main" id="{600226F7-C833-1B1C-B967-7291F64244CC}"/>
-              </a:ext>
-            </a:extLst>
-          </p:cNvPr>
-          <p:cNvSpPr/>
-          <p:nvPr/>
-        </p:nvSpPr>
-        <p:spPr>
-          <a:xfrm>
-            <a:off x="1507938" y="2374095"/>
-            <a:ext cx="1913442" cy="960119"/>
-          </a:xfrm>
-          <a:prstGeom prst="roundRect">
-            <a:avLst/>
-          </a:prstGeom>
-          <a:solidFill>
-            <a:srgbClr val="E5F1F8"/>
-          </a:solidFill>
-          <a:ln>
-            <a:solidFill>
-              <a:schemeClr val="tx1"/>
-            </a:solidFill>
-          </a:ln>
-        </p:spPr>
-        <p:style>
-          <a:lnRef idx="2">
-            <a:schemeClr val="accent1">
-              <a:shade val="15000"/>
-            </a:schemeClr>
-          </a:lnRef>
-          <a:fillRef idx="1">
-            <a:schemeClr val="accent1"/>
-          </a:fillRef>
-          <a:effectRef idx="0">
-            <a:schemeClr val="accent1"/>
-          </a:effectRef>
-          <a:fontRef idx="minor">
-            <a:schemeClr val="lt1"/>
-          </a:fontRef>
-        </p:style>
-        <p:txBody>
-          <a:bodyPr rtlCol="0" anchor="ctr"/>
-          <a:lstStyle/>
-          <a:p>
-            <a:pPr algn="ctr"/>
-            <a:r>
-              <a:rPr lang="en-US" dirty="0">
-                <a:solidFill>
-                  <a:schemeClr val="tx1"/>
-                </a:solidFill>
-              </a:rPr>
-              <a:t>Query</a:t>
-            </a:r>
-          </a:p>
-          <a:p>
-            <a:pPr algn="ctr"/>
-            <a:r>
-              <a:rPr lang="en-US" dirty="0">
-                <a:solidFill>
-                  <a:schemeClr val="tx1"/>
-                </a:solidFill>
-              </a:rPr>
-              <a:t>Planning</a:t>
-            </a:r>
-          </a:p>
-        </p:txBody>
-      </p:sp>
-      <p:sp>
-        <p:nvSpPr>
-          <p:cNvPr id="6" name="Rectangle: Rounded Corners 5">
-            <a:extLst>
-              <a:ext uri="{FF2B5EF4-FFF2-40B4-BE49-F238E27FC236}">
-                <a16:creationId xmlns:a16="http://schemas.microsoft.com/office/drawing/2014/main" id="{C93C6EBF-0FE7-EC6E-5B5C-7AA41F6606DD}"/>
-              </a:ext>
-            </a:extLst>
-          </p:cNvPr>
-          <p:cNvSpPr/>
-          <p:nvPr/>
-        </p:nvSpPr>
-        <p:spPr>
-          <a:xfrm>
-            <a:off x="9837420" y="2374095"/>
-            <a:ext cx="1913442" cy="960119"/>
-          </a:xfrm>
-          <a:prstGeom prst="roundRect">
-            <a:avLst/>
-          </a:prstGeom>
-          <a:solidFill>
-            <a:srgbClr val="E5F1F8"/>
-          </a:solidFill>
-          <a:ln>
-            <a:solidFill>
-              <a:schemeClr val="tx1"/>
-            </a:solidFill>
-          </a:ln>
-        </p:spPr>
-        <p:style>
-          <a:lnRef idx="2">
-            <a:schemeClr val="accent1">
-              <a:shade val="15000"/>
-            </a:schemeClr>
-          </a:lnRef>
-          <a:fillRef idx="1">
-            <a:schemeClr val="accent1"/>
-          </a:fillRef>
-          <a:effectRef idx="0">
-            <a:schemeClr val="accent1"/>
-          </a:effectRef>
-          <a:fontRef idx="minor">
-            <a:schemeClr val="lt1"/>
-          </a:fontRef>
-        </p:style>
-        <p:txBody>
-          <a:bodyPr rtlCol="0" anchor="ctr"/>
-          <a:lstStyle/>
-          <a:p>
-            <a:pPr algn="ctr"/>
-            <a:r>
-              <a:rPr lang="en-US" dirty="0">
-                <a:solidFill>
-                  <a:schemeClr val="tx1"/>
-                </a:solidFill>
-              </a:rPr>
-              <a:t>Language</a:t>
-            </a:r>
-          </a:p>
-          <a:p>
-            <a:pPr algn="ctr"/>
-            <a:r>
-              <a:rPr lang="en-US" dirty="0">
-                <a:solidFill>
-                  <a:schemeClr val="tx1"/>
-                </a:solidFill>
-              </a:rPr>
-              <a:t>Model</a:t>
-            </a:r>
-          </a:p>
-        </p:txBody>
-      </p:sp>
-      <p:cxnSp>
-        <p:nvCxnSpPr>
-          <p:cNvPr id="7" name="Straight Arrow Connector 6">
-            <a:extLst>
-              <a:ext uri="{FF2B5EF4-FFF2-40B4-BE49-F238E27FC236}">
-                <a16:creationId xmlns:a16="http://schemas.microsoft.com/office/drawing/2014/main" id="{70FF9049-A038-5CD7-B5B6-A7A955E2687C}"/>
-              </a:ext>
-            </a:extLst>
-          </p:cNvPr>
-          <p:cNvCxnSpPr>
-            <a:cxnSpLocks/>
-            <a:stCxn id="5" idx="3"/>
-            <a:endCxn id="3" idx="1"/>
-          </p:cNvCxnSpPr>
-          <p:nvPr/>
-        </p:nvCxnSpPr>
-        <p:spPr>
-          <a:xfrm flipV="1">
-            <a:off x="3421380" y="2854154"/>
-            <a:ext cx="624840" cy="1"/>
-          </a:xfrm>
-          <a:prstGeom prst="straightConnector1">
-            <a:avLst/>
-          </a:prstGeom>
-          <a:ln>
-            <a:solidFill>
-              <a:schemeClr val="tx1"/>
-            </a:solidFill>
-            <a:prstDash val="solid"/>
-            <a:tailEnd type="triangle" w="lg" len="lg"/>
-          </a:ln>
-        </p:spPr>
-        <p:style>
-          <a:lnRef idx="2">
-            <a:schemeClr val="accent1"/>
-          </a:lnRef>
-          <a:fillRef idx="0">
-            <a:schemeClr val="accent1"/>
-          </a:fillRef>
-          <a:effectRef idx="1">
-            <a:schemeClr val="accent1"/>
-          </a:effectRef>
-          <a:fontRef idx="minor">
-            <a:schemeClr val="tx1"/>
-          </a:fontRef>
-        </p:style>
-      </p:cxnSp>
-      <p:cxnSp>
-        <p:nvCxnSpPr>
-          <p:cNvPr id="10" name="Straight Arrow Connector 9">
-            <a:extLst>
-              <a:ext uri="{FF2B5EF4-FFF2-40B4-BE49-F238E27FC236}">
-                <a16:creationId xmlns:a16="http://schemas.microsoft.com/office/drawing/2014/main" id="{2C10FC99-8029-AE13-0A3B-1F87064360AB}"/>
-              </a:ext>
-            </a:extLst>
-          </p:cNvPr>
-          <p:cNvCxnSpPr>
-            <a:cxnSpLocks/>
-            <a:stCxn id="44" idx="3"/>
-            <a:endCxn id="6" idx="1"/>
-          </p:cNvCxnSpPr>
-          <p:nvPr/>
-        </p:nvCxnSpPr>
-        <p:spPr>
-          <a:xfrm>
-            <a:off x="9189720" y="2854155"/>
-            <a:ext cx="647700" cy="0"/>
-          </a:xfrm>
-          <a:prstGeom prst="straightConnector1">
-            <a:avLst/>
-          </a:prstGeom>
-          <a:ln>
-            <a:solidFill>
-              <a:schemeClr val="tx1"/>
-            </a:solidFill>
-            <a:prstDash val="solid"/>
-            <a:tailEnd type="triangle" w="lg" len="lg"/>
-          </a:ln>
-        </p:spPr>
-        <p:style>
-          <a:lnRef idx="2">
-            <a:schemeClr val="accent1"/>
-          </a:lnRef>
-          <a:fillRef idx="0">
-            <a:schemeClr val="accent1"/>
-          </a:fillRef>
-          <a:effectRef idx="1">
-            <a:schemeClr val="accent1"/>
-          </a:effectRef>
-          <a:fontRef idx="minor">
-            <a:schemeClr val="tx1"/>
-          </a:fontRef>
-        </p:style>
-      </p:cxnSp>
-      <p:sp>
-        <p:nvSpPr>
-          <p:cNvPr id="15" name="Rectangle: Rounded Corners 14">
-            <a:extLst>
-              <a:ext uri="{FF2B5EF4-FFF2-40B4-BE49-F238E27FC236}">
-                <a16:creationId xmlns:a16="http://schemas.microsoft.com/office/drawing/2014/main" id="{C23DA4FB-7AE1-4EE4-8DD5-321F7F7C7F33}"/>
-              </a:ext>
-            </a:extLst>
-          </p:cNvPr>
-          <p:cNvSpPr/>
-          <p:nvPr/>
-        </p:nvSpPr>
-        <p:spPr>
-          <a:xfrm>
-            <a:off x="189267" y="2619607"/>
-            <a:ext cx="915222" cy="469096"/>
-          </a:xfrm>
-          <a:prstGeom prst="roundRect">
-            <a:avLst/>
-          </a:prstGeom>
-          <a:solidFill>
-            <a:srgbClr val="E5F1F8"/>
-          </a:solidFill>
-          <a:ln>
-            <a:solidFill>
-              <a:schemeClr val="tx1"/>
-            </a:solidFill>
-          </a:ln>
-        </p:spPr>
-        <p:style>
-          <a:lnRef idx="2">
-            <a:schemeClr val="accent1">
-              <a:shade val="15000"/>
-            </a:schemeClr>
-          </a:lnRef>
-          <a:fillRef idx="1">
-            <a:schemeClr val="accent1"/>
-          </a:fillRef>
-          <a:effectRef idx="0">
-            <a:schemeClr val="accent1"/>
-          </a:effectRef>
-          <a:fontRef idx="minor">
-            <a:schemeClr val="lt1"/>
-          </a:fontRef>
-        </p:style>
-        <p:txBody>
-          <a:bodyPr rtlCol="0" anchor="ctr"/>
-          <a:lstStyle/>
-          <a:p>
-            <a:pPr algn="ctr"/>
-            <a:r>
-              <a:rPr lang="en-US" dirty="0">
-                <a:solidFill>
-                  <a:schemeClr val="tx1"/>
-                </a:solidFill>
-              </a:rPr>
-              <a:t>Prompt</a:t>
-            </a:r>
-          </a:p>
-        </p:txBody>
-      </p:sp>
-      <p:cxnSp>
-        <p:nvCxnSpPr>
-          <p:cNvPr id="16" name="Straight Arrow Connector 15">
-            <a:extLst>
-              <a:ext uri="{FF2B5EF4-FFF2-40B4-BE49-F238E27FC236}">
-                <a16:creationId xmlns:a16="http://schemas.microsoft.com/office/drawing/2014/main" id="{942D3144-4FA8-07EA-6898-D7B2C45E010A}"/>
-              </a:ext>
-            </a:extLst>
-          </p:cNvPr>
-          <p:cNvCxnSpPr>
-            <a:cxnSpLocks/>
-            <a:stCxn id="15" idx="3"/>
-            <a:endCxn id="5" idx="1"/>
-          </p:cNvCxnSpPr>
-          <p:nvPr/>
-        </p:nvCxnSpPr>
-        <p:spPr>
-          <a:xfrm>
-            <a:off x="1104489" y="2854155"/>
-            <a:ext cx="403449" cy="0"/>
-          </a:xfrm>
-          <a:prstGeom prst="straightConnector1">
-            <a:avLst/>
-          </a:prstGeom>
-          <a:ln>
-            <a:solidFill>
-              <a:schemeClr val="tx1"/>
-            </a:solidFill>
-            <a:prstDash val="sysDash"/>
-            <a:tailEnd type="triangle" w="lg" len="lg"/>
-          </a:ln>
-        </p:spPr>
-        <p:style>
-          <a:lnRef idx="2">
-            <a:schemeClr val="accent1"/>
-          </a:lnRef>
-          <a:fillRef idx="0">
-            <a:schemeClr val="accent1"/>
-          </a:fillRef>
-          <a:effectRef idx="1">
-            <a:schemeClr val="accent1"/>
-          </a:effectRef>
-          <a:fontRef idx="minor">
-            <a:schemeClr val="tx1"/>
-          </a:fontRef>
-        </p:style>
-      </p:cxnSp>
-      <p:cxnSp>
-        <p:nvCxnSpPr>
-          <p:cNvPr id="19" name="Connector: Elbow 18">
-            <a:extLst>
-              <a:ext uri="{FF2B5EF4-FFF2-40B4-BE49-F238E27FC236}">
-                <a16:creationId xmlns:a16="http://schemas.microsoft.com/office/drawing/2014/main" id="{BF48D9D9-8BAB-3118-5B91-13BAA46C2349}"/>
-              </a:ext>
-            </a:extLst>
-          </p:cNvPr>
-          <p:cNvCxnSpPr>
-            <a:cxnSpLocks/>
-            <a:stCxn id="5" idx="3"/>
-            <a:endCxn id="4" idx="1"/>
-          </p:cNvCxnSpPr>
-          <p:nvPr/>
-        </p:nvCxnSpPr>
-        <p:spPr>
-          <a:xfrm flipV="1">
-            <a:off x="3421380" y="2083603"/>
-            <a:ext cx="624840" cy="770552"/>
-          </a:xfrm>
-          <a:prstGeom prst="bentConnector3">
-            <a:avLst>
-              <a:gd name="adj1" fmla="val 50000"/>
-            </a:avLst>
-          </a:prstGeom>
-          <a:ln>
-            <a:solidFill>
-              <a:schemeClr val="tx1"/>
-            </a:solidFill>
-            <a:prstDash val="solid"/>
-            <a:tailEnd type="triangle" w="lg" len="lg"/>
-          </a:ln>
-        </p:spPr>
-        <p:style>
-          <a:lnRef idx="2">
-            <a:schemeClr val="accent1"/>
-          </a:lnRef>
-          <a:fillRef idx="0">
-            <a:schemeClr val="accent1"/>
-          </a:fillRef>
-          <a:effectRef idx="1">
-            <a:schemeClr val="accent1"/>
-          </a:effectRef>
-          <a:fontRef idx="minor">
-            <a:schemeClr val="tx1"/>
-          </a:fontRef>
-        </p:style>
-      </p:cxnSp>
-      <p:cxnSp>
-        <p:nvCxnSpPr>
-          <p:cNvPr id="22" name="Connector: Elbow 21">
-            <a:extLst>
-              <a:ext uri="{FF2B5EF4-FFF2-40B4-BE49-F238E27FC236}">
-                <a16:creationId xmlns:a16="http://schemas.microsoft.com/office/drawing/2014/main" id="{217AA7E3-1E41-FB8C-7F66-A5758B29A028}"/>
-              </a:ext>
-            </a:extLst>
-          </p:cNvPr>
-          <p:cNvCxnSpPr>
-            <a:cxnSpLocks/>
-            <a:stCxn id="5" idx="3"/>
-            <a:endCxn id="2" idx="1"/>
-          </p:cNvCxnSpPr>
-          <p:nvPr/>
-        </p:nvCxnSpPr>
-        <p:spPr>
-          <a:xfrm>
-            <a:off x="3421380" y="2854155"/>
-            <a:ext cx="624840" cy="772965"/>
-          </a:xfrm>
-          <a:prstGeom prst="bentConnector3">
-            <a:avLst>
-              <a:gd name="adj1" fmla="val 50000"/>
-            </a:avLst>
-          </a:prstGeom>
-          <a:ln>
-            <a:solidFill>
-              <a:schemeClr val="tx1"/>
-            </a:solidFill>
-            <a:prstDash val="solid"/>
-            <a:tailEnd type="triangle" w="lg" len="lg"/>
-          </a:ln>
-        </p:spPr>
-        <p:style>
-          <a:lnRef idx="2">
-            <a:schemeClr val="accent1"/>
-          </a:lnRef>
-          <a:fillRef idx="0">
-            <a:schemeClr val="accent1"/>
-          </a:fillRef>
-          <a:effectRef idx="1">
-            <a:schemeClr val="accent1"/>
-          </a:effectRef>
-          <a:fontRef idx="minor">
-            <a:schemeClr val="tx1"/>
-          </a:fontRef>
-        </p:style>
-      </p:cxnSp>
-      <p:sp>
-        <p:nvSpPr>
-          <p:cNvPr id="25" name="Rectangle: Rounded Corners 24">
-            <a:extLst>
-              <a:ext uri="{FF2B5EF4-FFF2-40B4-BE49-F238E27FC236}">
-                <a16:creationId xmlns:a16="http://schemas.microsoft.com/office/drawing/2014/main" id="{98E95763-BD68-DEF9-F942-CCC8B336544E}"/>
-              </a:ext>
-            </a:extLst>
-          </p:cNvPr>
-          <p:cNvSpPr/>
-          <p:nvPr/>
-        </p:nvSpPr>
-        <p:spPr>
-          <a:xfrm>
-            <a:off x="8732520" y="1852591"/>
-            <a:ext cx="457200" cy="457200"/>
-          </a:xfrm>
-          <a:prstGeom prst="roundRect">
-            <a:avLst/>
-          </a:prstGeom>
-          <a:solidFill>
-            <a:srgbClr val="E5F1F8"/>
-          </a:solidFill>
-          <a:ln>
-            <a:solidFill>
-              <a:schemeClr val="tx1"/>
-            </a:solidFill>
-          </a:ln>
-        </p:spPr>
-        <p:style>
-          <a:lnRef idx="2">
-            <a:schemeClr val="accent1">
-              <a:shade val="15000"/>
-            </a:schemeClr>
-          </a:lnRef>
-          <a:fillRef idx="1">
-            <a:schemeClr val="accent1"/>
-          </a:fillRef>
-          <a:effectRef idx="0">
-            <a:schemeClr val="accent1"/>
-          </a:effectRef>
-          <a:fontRef idx="minor">
-            <a:schemeClr val="lt1"/>
-          </a:fontRef>
-        </p:style>
-        <p:txBody>
-          <a:bodyPr rtlCol="0" anchor="ctr"/>
-          <a:lstStyle/>
-          <a:p>
-            <a:pPr algn="ctr"/>
-            <a:endParaRPr lang="en-US" dirty="0">
-              <a:solidFill>
-                <a:schemeClr val="tx1"/>
-              </a:solidFill>
-            </a:endParaRPr>
-          </a:p>
-        </p:txBody>
-      </p:sp>
-      <p:cxnSp>
-        <p:nvCxnSpPr>
-          <p:cNvPr id="40" name="Straight Arrow Connector 39">
-            <a:extLst>
-              <a:ext uri="{FF2B5EF4-FFF2-40B4-BE49-F238E27FC236}">
-                <a16:creationId xmlns:a16="http://schemas.microsoft.com/office/drawing/2014/main" id="{B899F5AF-E80C-3452-008E-8E821AEFA864}"/>
-              </a:ext>
-            </a:extLst>
-          </p:cNvPr>
-          <p:cNvCxnSpPr>
-            <a:cxnSpLocks/>
-            <a:stCxn id="4" idx="3"/>
-            <a:endCxn id="25" idx="1"/>
-          </p:cNvCxnSpPr>
-          <p:nvPr/>
-        </p:nvCxnSpPr>
-        <p:spPr>
-          <a:xfrm flipV="1">
-            <a:off x="8328660" y="2081191"/>
-            <a:ext cx="403860" cy="2412"/>
-          </a:xfrm>
-          <a:prstGeom prst="straightConnector1">
-            <a:avLst/>
-          </a:prstGeom>
-          <a:ln>
-            <a:solidFill>
-              <a:schemeClr val="tx1"/>
-            </a:solidFill>
-            <a:prstDash val="solid"/>
-            <a:tailEnd type="triangle" w="lg" len="lg"/>
-          </a:ln>
-        </p:spPr>
-        <p:style>
-          <a:lnRef idx="2">
-            <a:schemeClr val="accent1"/>
-          </a:lnRef>
-          <a:fillRef idx="0">
-            <a:schemeClr val="accent1"/>
-          </a:fillRef>
-          <a:effectRef idx="1">
-            <a:schemeClr val="accent1"/>
-          </a:effectRef>
-          <a:fontRef idx="minor">
-            <a:schemeClr val="tx1"/>
-          </a:fontRef>
-        </p:style>
-      </p:cxnSp>
-      <p:sp>
-        <p:nvSpPr>
-          <p:cNvPr id="44" name="Rectangle: Rounded Corners 43">
-            <a:extLst>
-              <a:ext uri="{FF2B5EF4-FFF2-40B4-BE49-F238E27FC236}">
-                <a16:creationId xmlns:a16="http://schemas.microsoft.com/office/drawing/2014/main" id="{3F66FD98-C347-7EA9-DC36-7FDBB97B4248}"/>
-              </a:ext>
-            </a:extLst>
-          </p:cNvPr>
-          <p:cNvSpPr/>
-          <p:nvPr/>
-        </p:nvSpPr>
-        <p:spPr>
-          <a:xfrm>
-            <a:off x="8732520" y="2625555"/>
-            <a:ext cx="457200" cy="457200"/>
-          </a:xfrm>
-          <a:prstGeom prst="roundRect">
-            <a:avLst/>
-          </a:prstGeom>
-          <a:solidFill>
-            <a:srgbClr val="E5F1F8"/>
-          </a:solidFill>
-          <a:ln>
-            <a:solidFill>
-              <a:schemeClr val="tx1"/>
-            </a:solidFill>
-          </a:ln>
-        </p:spPr>
-        <p:style>
-          <a:lnRef idx="2">
-            <a:schemeClr val="accent1">
-              <a:shade val="15000"/>
-            </a:schemeClr>
-          </a:lnRef>
-          <a:fillRef idx="1">
-            <a:schemeClr val="accent1"/>
-          </a:fillRef>
-          <a:effectRef idx="0">
-            <a:schemeClr val="accent1"/>
-          </a:effectRef>
-          <a:fontRef idx="minor">
-            <a:schemeClr val="lt1"/>
-          </a:fontRef>
-        </p:style>
-        <p:txBody>
-          <a:bodyPr rtlCol="0" anchor="ctr"/>
-          <a:lstStyle/>
-          <a:p>
-            <a:pPr algn="ctr"/>
-            <a:endParaRPr lang="en-US" dirty="0">
-              <a:solidFill>
-                <a:schemeClr val="tx1"/>
-              </a:solidFill>
-            </a:endParaRPr>
-          </a:p>
-        </p:txBody>
-      </p:sp>
-      <p:sp>
-        <p:nvSpPr>
-          <p:cNvPr id="46" name="Rectangle: Rounded Corners 45">
-            <a:extLst>
-              <a:ext uri="{FF2B5EF4-FFF2-40B4-BE49-F238E27FC236}">
-                <a16:creationId xmlns:a16="http://schemas.microsoft.com/office/drawing/2014/main" id="{A791A27B-2AA1-8E05-2231-C99FE09DCBEB}"/>
-              </a:ext>
-            </a:extLst>
-          </p:cNvPr>
-          <p:cNvSpPr/>
-          <p:nvPr/>
-        </p:nvSpPr>
-        <p:spPr>
-          <a:xfrm>
-            <a:off x="8732520" y="3398519"/>
-            <a:ext cx="457200" cy="457200"/>
-          </a:xfrm>
-          <a:prstGeom prst="roundRect">
-            <a:avLst/>
-          </a:prstGeom>
-          <a:solidFill>
-            <a:srgbClr val="E5F1F8"/>
-          </a:solidFill>
-          <a:ln>
-            <a:solidFill>
-              <a:schemeClr val="tx1"/>
-            </a:solidFill>
-          </a:ln>
-        </p:spPr>
-        <p:style>
-          <a:lnRef idx="2">
-            <a:schemeClr val="accent1">
-              <a:shade val="15000"/>
-            </a:schemeClr>
-          </a:lnRef>
-          <a:fillRef idx="1">
-            <a:schemeClr val="accent1"/>
-          </a:fillRef>
-          <a:effectRef idx="0">
-            <a:schemeClr val="accent1"/>
-          </a:effectRef>
-          <a:fontRef idx="minor">
-            <a:schemeClr val="lt1"/>
-          </a:fontRef>
-        </p:style>
-        <p:txBody>
-          <a:bodyPr rtlCol="0" anchor="ctr"/>
-          <a:lstStyle/>
-          <a:p>
-            <a:pPr algn="ctr"/>
-            <a:endParaRPr lang="en-US" dirty="0">
-              <a:solidFill>
-                <a:schemeClr val="tx1"/>
-              </a:solidFill>
-            </a:endParaRPr>
-          </a:p>
-        </p:txBody>
-      </p:sp>
-      <p:cxnSp>
-        <p:nvCxnSpPr>
-          <p:cNvPr id="47" name="Straight Arrow Connector 46">
-            <a:extLst>
-              <a:ext uri="{FF2B5EF4-FFF2-40B4-BE49-F238E27FC236}">
-                <a16:creationId xmlns:a16="http://schemas.microsoft.com/office/drawing/2014/main" id="{42D77B26-2C1F-3022-9B0B-3736BC5CF8AA}"/>
-              </a:ext>
-            </a:extLst>
-          </p:cNvPr>
-          <p:cNvCxnSpPr>
-            <a:cxnSpLocks/>
-            <a:stCxn id="3" idx="3"/>
-            <a:endCxn id="44" idx="1"/>
-          </p:cNvCxnSpPr>
-          <p:nvPr/>
-        </p:nvCxnSpPr>
-        <p:spPr>
-          <a:xfrm>
-            <a:off x="8328660" y="2854154"/>
-            <a:ext cx="403860" cy="1"/>
-          </a:xfrm>
-          <a:prstGeom prst="straightConnector1">
-            <a:avLst/>
-          </a:prstGeom>
-          <a:ln>
-            <a:solidFill>
-              <a:schemeClr val="tx1"/>
-            </a:solidFill>
-            <a:prstDash val="solid"/>
-            <a:tailEnd type="triangle" w="lg" len="lg"/>
-          </a:ln>
-        </p:spPr>
-        <p:style>
-          <a:lnRef idx="2">
-            <a:schemeClr val="accent1"/>
-          </a:lnRef>
-          <a:fillRef idx="0">
-            <a:schemeClr val="accent1"/>
-          </a:fillRef>
-          <a:effectRef idx="1">
-            <a:schemeClr val="accent1"/>
-          </a:effectRef>
-          <a:fontRef idx="minor">
-            <a:schemeClr val="tx1"/>
-          </a:fontRef>
-        </p:style>
-      </p:cxnSp>
-      <p:cxnSp>
-        <p:nvCxnSpPr>
-          <p:cNvPr id="55" name="Straight Arrow Connector 54">
-            <a:extLst>
-              <a:ext uri="{FF2B5EF4-FFF2-40B4-BE49-F238E27FC236}">
-                <a16:creationId xmlns:a16="http://schemas.microsoft.com/office/drawing/2014/main" id="{A99ECFB6-8E63-4F62-C5D3-37BC5BB43934}"/>
-              </a:ext>
-            </a:extLst>
-          </p:cNvPr>
-          <p:cNvCxnSpPr>
-            <a:cxnSpLocks/>
-            <a:stCxn id="2" idx="3"/>
-            <a:endCxn id="46" idx="1"/>
-          </p:cNvCxnSpPr>
-          <p:nvPr/>
-        </p:nvCxnSpPr>
-        <p:spPr>
-          <a:xfrm flipV="1">
-            <a:off x="8328660" y="3627119"/>
-            <a:ext cx="403860" cy="1"/>
-          </a:xfrm>
-          <a:prstGeom prst="straightConnector1">
-            <a:avLst/>
-          </a:prstGeom>
-          <a:ln>
-            <a:solidFill>
-              <a:schemeClr val="tx1"/>
-            </a:solidFill>
-            <a:prstDash val="solid"/>
-            <a:tailEnd type="triangle" w="lg" len="lg"/>
-          </a:ln>
-        </p:spPr>
-        <p:style>
-          <a:lnRef idx="2">
-            <a:schemeClr val="accent1"/>
-          </a:lnRef>
-          <a:fillRef idx="0">
-            <a:schemeClr val="accent1"/>
-          </a:fillRef>
-          <a:effectRef idx="1">
-            <a:schemeClr val="accent1"/>
-          </a:effectRef>
-          <a:fontRef idx="minor">
-            <a:schemeClr val="tx1"/>
-          </a:fontRef>
-        </p:style>
-      </p:cxnSp>
-      <p:cxnSp>
-        <p:nvCxnSpPr>
-          <p:cNvPr id="58" name="Connector: Elbow 57">
-            <a:extLst>
-              <a:ext uri="{FF2B5EF4-FFF2-40B4-BE49-F238E27FC236}">
-                <a16:creationId xmlns:a16="http://schemas.microsoft.com/office/drawing/2014/main" id="{DDB500F1-F165-AABE-6725-11E4ED79023E}"/>
-              </a:ext>
-            </a:extLst>
-          </p:cNvPr>
-          <p:cNvCxnSpPr>
-            <a:cxnSpLocks/>
-            <a:stCxn id="25" idx="3"/>
-            <a:endCxn id="6" idx="1"/>
-          </p:cNvCxnSpPr>
-          <p:nvPr/>
-        </p:nvCxnSpPr>
-        <p:spPr>
-          <a:xfrm>
-            <a:off x="9189720" y="2081191"/>
-            <a:ext cx="647700" cy="772964"/>
-          </a:xfrm>
-          <a:prstGeom prst="bentConnector3">
-            <a:avLst>
-              <a:gd name="adj1" fmla="val 50000"/>
-            </a:avLst>
-          </a:prstGeom>
-          <a:ln>
-            <a:solidFill>
-              <a:schemeClr val="tx1"/>
-            </a:solidFill>
-            <a:prstDash val="solid"/>
-            <a:tailEnd type="triangle" w="lg" len="lg"/>
-          </a:ln>
-        </p:spPr>
-        <p:style>
-          <a:lnRef idx="2">
-            <a:schemeClr val="accent1"/>
-          </a:lnRef>
-          <a:fillRef idx="0">
-            <a:schemeClr val="accent1"/>
-          </a:fillRef>
-          <a:effectRef idx="1">
-            <a:schemeClr val="accent1"/>
-          </a:effectRef>
-          <a:fontRef idx="minor">
-            <a:schemeClr val="tx1"/>
-          </a:fontRef>
-        </p:style>
-      </p:cxnSp>
-      <p:cxnSp>
-        <p:nvCxnSpPr>
-          <p:cNvPr id="61" name="Connector: Elbow 60">
-            <a:extLst>
-              <a:ext uri="{FF2B5EF4-FFF2-40B4-BE49-F238E27FC236}">
-                <a16:creationId xmlns:a16="http://schemas.microsoft.com/office/drawing/2014/main" id="{28AC6A5D-0A01-5370-996D-AF8698A1082D}"/>
-              </a:ext>
-            </a:extLst>
-          </p:cNvPr>
-          <p:cNvCxnSpPr>
-            <a:cxnSpLocks/>
-            <a:stCxn id="46" idx="3"/>
-            <a:endCxn id="6" idx="1"/>
-          </p:cNvCxnSpPr>
-          <p:nvPr/>
-        </p:nvCxnSpPr>
-        <p:spPr>
-          <a:xfrm flipV="1">
-            <a:off x="9189720" y="2854155"/>
-            <a:ext cx="647700" cy="772964"/>
-          </a:xfrm>
-          <a:prstGeom prst="bentConnector3">
-            <a:avLst>
-              <a:gd name="adj1" fmla="val 50000"/>
-            </a:avLst>
-          </a:prstGeom>
-          <a:ln>
-            <a:solidFill>
-              <a:schemeClr val="tx1"/>
-            </a:solidFill>
-            <a:prstDash val="solid"/>
-            <a:tailEnd type="triangle" w="lg" len="lg"/>
-          </a:ln>
-        </p:spPr>
-        <p:style>
-          <a:lnRef idx="2">
-            <a:schemeClr val="accent1"/>
-          </a:lnRef>
-          <a:fillRef idx="0">
-            <a:schemeClr val="accent1"/>
-          </a:fillRef>
-          <a:effectRef idx="1">
-            <a:schemeClr val="accent1"/>
-          </a:effectRef>
-          <a:fontRef idx="minor">
-            <a:schemeClr val="tx1"/>
-          </a:fontRef>
-        </p:style>
-      </p:cxnSp>
-      <p:pic>
-        <p:nvPicPr>
-          <p:cNvPr id="67" name="Graphic 66" descr="Web design with solid fill">
-            <a:extLst>
-              <a:ext uri="{FF2B5EF4-FFF2-40B4-BE49-F238E27FC236}">
-                <a16:creationId xmlns:a16="http://schemas.microsoft.com/office/drawing/2014/main" id="{5D8BB564-5BA8-868D-2AB7-35E0D3AE65F9}"/>
-              </a:ext>
-            </a:extLst>
-          </p:cNvPr>
-          <p:cNvPicPr>
-            <a:picLocks noChangeAspect="1"/>
-          </p:cNvPicPr>
-          <p:nvPr/>
-        </p:nvPicPr>
-        <p:blipFill>
-          <a:blip r:embed="rId2">
-            <a:extLst>
-              <a:ext uri="{96DAC541-7B7A-43D3-8B79-37D633B846F1}">
-                <asvg:svgBlip xmlns:asvg="http://schemas.microsoft.com/office/drawing/2016/SVG/main" r:embed="rId3"/>
-              </a:ext>
-            </a:extLst>
-          </a:blip>
-          <a:stretch>
-            <a:fillRect/>
-          </a:stretch>
-        </p:blipFill>
-        <p:spPr>
-          <a:xfrm>
-            <a:off x="8755380" y="2648413"/>
-            <a:ext cx="411480" cy="411480"/>
-          </a:xfrm>
-          <a:prstGeom prst="rect">
-            <a:avLst/>
-          </a:prstGeom>
-        </p:spPr>
-      </p:pic>
-      <p:pic>
-        <p:nvPicPr>
-          <p:cNvPr id="71" name="Graphic 70" descr="World with solid fill">
-            <a:extLst>
-              <a:ext uri="{FF2B5EF4-FFF2-40B4-BE49-F238E27FC236}">
-                <a16:creationId xmlns:a16="http://schemas.microsoft.com/office/drawing/2014/main" id="{0EF50C39-FA5F-96A6-2DE6-53C76B029FDB}"/>
-              </a:ext>
-            </a:extLst>
-          </p:cNvPr>
-          <p:cNvPicPr>
-            <a:picLocks noChangeAspect="1"/>
-          </p:cNvPicPr>
-          <p:nvPr/>
-        </p:nvPicPr>
-        <p:blipFill>
-          <a:blip r:embed="rId4">
-            <a:extLst>
-              <a:ext uri="{96DAC541-7B7A-43D3-8B79-37D633B846F1}">
-                <asvg:svgBlip xmlns:asvg="http://schemas.microsoft.com/office/drawing/2016/SVG/main" r:embed="rId5"/>
-              </a:ext>
-            </a:extLst>
-          </a:blip>
-          <a:stretch>
-            <a:fillRect/>
-          </a:stretch>
-        </p:blipFill>
-        <p:spPr>
-          <a:xfrm>
-            <a:off x="8755380" y="3421379"/>
-            <a:ext cx="411480" cy="411480"/>
-          </a:xfrm>
-          <a:prstGeom prst="rect">
-            <a:avLst/>
-          </a:prstGeom>
-        </p:spPr>
-      </p:pic>
-      <p:pic>
-        <p:nvPicPr>
-          <p:cNvPr id="73" name="Graphic 72" descr="Database with solid fill">
-            <a:extLst>
-              <a:ext uri="{FF2B5EF4-FFF2-40B4-BE49-F238E27FC236}">
-                <a16:creationId xmlns:a16="http://schemas.microsoft.com/office/drawing/2014/main" id="{20B0889E-3ACA-9DCA-25FE-C1F9B73F7329}"/>
-              </a:ext>
-            </a:extLst>
-          </p:cNvPr>
-          <p:cNvPicPr>
-            <a:picLocks noChangeAspect="1"/>
-          </p:cNvPicPr>
-          <p:nvPr/>
-        </p:nvPicPr>
-        <p:blipFill>
-          <a:blip r:embed="rId6">
-            <a:extLst>
-              <a:ext uri="{96DAC541-7B7A-43D3-8B79-37D633B846F1}">
-                <asvg:svgBlip xmlns:asvg="http://schemas.microsoft.com/office/drawing/2016/SVG/main" r:embed="rId7"/>
-              </a:ext>
-            </a:extLst>
-          </a:blip>
-          <a:stretch>
-            <a:fillRect/>
-          </a:stretch>
-        </p:blipFill>
-        <p:spPr>
-          <a:xfrm>
-            <a:off x="8755380" y="1875451"/>
-            <a:ext cx="411480" cy="411480"/>
-          </a:xfrm>
-          <a:prstGeom prst="rect">
-            <a:avLst/>
-          </a:prstGeom>
-        </p:spPr>
-      </p:pic>
-      <p:pic>
-        <p:nvPicPr>
-          <p:cNvPr id="75" name="Graphic 74" descr="Gears with solid fill">
-            <a:extLst>
-              <a:ext uri="{FF2B5EF4-FFF2-40B4-BE49-F238E27FC236}">
-                <a16:creationId xmlns:a16="http://schemas.microsoft.com/office/drawing/2014/main" id="{AFA7CC75-0D4E-9273-3BC2-179536E5EC20}"/>
-              </a:ext>
-            </a:extLst>
-          </p:cNvPr>
-          <p:cNvPicPr>
-            <a:picLocks noChangeAspect="1"/>
-          </p:cNvPicPr>
-          <p:nvPr/>
-        </p:nvPicPr>
-        <p:blipFill>
-          <a:blip r:embed="rId8">
-            <a:extLst>
-              <a:ext uri="{96DAC541-7B7A-43D3-8B79-37D633B846F1}">
-                <asvg:svgBlip xmlns:asvg="http://schemas.microsoft.com/office/drawing/2016/SVG/main" r:embed="rId9"/>
-              </a:ext>
-            </a:extLst>
-          </a:blip>
-          <a:stretch>
-            <a:fillRect/>
-          </a:stretch>
-        </p:blipFill>
-        <p:spPr>
-          <a:xfrm>
-            <a:off x="1626048" y="2648413"/>
-            <a:ext cx="411480" cy="411480"/>
-          </a:xfrm>
-          <a:prstGeom prst="rect">
-            <a:avLst/>
-          </a:prstGeom>
-        </p:spPr>
-      </p:pic>
-      <p:sp>
-        <p:nvSpPr>
-          <p:cNvPr id="76" name="Rectangle: Rounded Corners 75">
-            <a:extLst>
-              <a:ext uri="{FF2B5EF4-FFF2-40B4-BE49-F238E27FC236}">
-                <a16:creationId xmlns:a16="http://schemas.microsoft.com/office/drawing/2014/main" id="{3492D89A-8D12-E69E-613E-246E45DCD83F}"/>
-              </a:ext>
-            </a:extLst>
-          </p:cNvPr>
-          <p:cNvSpPr/>
-          <p:nvPr/>
-        </p:nvSpPr>
-        <p:spPr>
-          <a:xfrm>
-            <a:off x="10545258" y="3627118"/>
-            <a:ext cx="1205604" cy="469096"/>
-          </a:xfrm>
-          <a:prstGeom prst="roundRect">
-            <a:avLst/>
-          </a:prstGeom>
-          <a:solidFill>
-            <a:srgbClr val="E5F1F8"/>
-          </a:solidFill>
-          <a:ln>
-            <a:solidFill>
-              <a:schemeClr val="tx1"/>
-            </a:solidFill>
-          </a:ln>
-        </p:spPr>
-        <p:style>
-          <a:lnRef idx="2">
-            <a:schemeClr val="accent1">
-              <a:shade val="15000"/>
-            </a:schemeClr>
-          </a:lnRef>
-          <a:fillRef idx="1">
-            <a:schemeClr val="accent1"/>
-          </a:fillRef>
-          <a:effectRef idx="0">
-            <a:schemeClr val="accent1"/>
-          </a:effectRef>
-          <a:fontRef idx="minor">
-            <a:schemeClr val="lt1"/>
-          </a:fontRef>
-        </p:style>
-        <p:txBody>
-          <a:bodyPr rtlCol="0" anchor="ctr"/>
-          <a:lstStyle/>
-          <a:p>
-            <a:pPr algn="ctr"/>
-            <a:r>
-              <a:rPr lang="en-US" dirty="0">
-                <a:solidFill>
-                  <a:schemeClr val="tx1"/>
-                </a:solidFill>
-              </a:rPr>
-              <a:t>Response</a:t>
-            </a:r>
-          </a:p>
-        </p:txBody>
-      </p:sp>
-      <p:cxnSp>
-        <p:nvCxnSpPr>
-          <p:cNvPr id="77" name="Straight Arrow Connector 76">
-            <a:extLst>
-              <a:ext uri="{FF2B5EF4-FFF2-40B4-BE49-F238E27FC236}">
-                <a16:creationId xmlns:a16="http://schemas.microsoft.com/office/drawing/2014/main" id="{1A734903-BE53-2153-B1BE-7817395A6ACC}"/>
-              </a:ext>
-            </a:extLst>
-          </p:cNvPr>
-          <p:cNvCxnSpPr>
-            <a:cxnSpLocks/>
-            <a:endCxn id="76" idx="0"/>
-          </p:cNvCxnSpPr>
-          <p:nvPr/>
-        </p:nvCxnSpPr>
-        <p:spPr>
-          <a:xfrm>
-            <a:off x="11148060" y="3334214"/>
-            <a:ext cx="0" cy="292904"/>
-          </a:xfrm>
-          <a:prstGeom prst="straightConnector1">
-            <a:avLst/>
-          </a:prstGeom>
-          <a:ln>
-            <a:solidFill>
-              <a:schemeClr val="tx1"/>
-            </a:solidFill>
-            <a:prstDash val="sysDash"/>
-            <a:tailEnd type="triangle" w="lg" len="lg"/>
-          </a:ln>
-        </p:spPr>
-        <p:style>
-          <a:lnRef idx="2">
-            <a:schemeClr val="accent1"/>
-          </a:lnRef>
-          <a:fillRef idx="0">
-            <a:schemeClr val="accent1"/>
-          </a:fillRef>
-          <a:effectRef idx="1">
-            <a:schemeClr val="accent1"/>
-          </a:effectRef>
-          <a:fontRef idx="minor">
-            <a:schemeClr val="tx1"/>
-          </a:fontRef>
-        </p:style>
-      </p:cxnSp>
-      <p:cxnSp>
-        <p:nvCxnSpPr>
-          <p:cNvPr id="14" name="Connector: Elbow 13">
-            <a:extLst>
-              <a:ext uri="{FF2B5EF4-FFF2-40B4-BE49-F238E27FC236}">
-                <a16:creationId xmlns:a16="http://schemas.microsoft.com/office/drawing/2014/main" id="{4D371B40-23D5-3632-64F0-3A5DAC685C2C}"/>
-              </a:ext>
-            </a:extLst>
-          </p:cNvPr>
-          <p:cNvCxnSpPr>
-            <a:cxnSpLocks/>
-            <a:endCxn id="5" idx="2"/>
-          </p:cNvCxnSpPr>
-          <p:nvPr/>
-        </p:nvCxnSpPr>
-        <p:spPr>
-          <a:xfrm rot="5400000">
-            <a:off x="6337265" y="-538391"/>
-            <a:ext cx="12700" cy="7745211"/>
-          </a:xfrm>
-          <a:prstGeom prst="bentConnector3">
-            <a:avLst>
-              <a:gd name="adj1" fmla="val 6060000"/>
-            </a:avLst>
-          </a:prstGeom>
-          <a:ln>
-            <a:solidFill>
-              <a:schemeClr val="tx1"/>
-            </a:solidFill>
-            <a:prstDash val="sysDash"/>
-            <a:tailEnd type="triangle" w="lg" len="lg"/>
-          </a:ln>
-        </p:spPr>
-        <p:style>
-          <a:lnRef idx="2">
-            <a:schemeClr val="accent1"/>
-          </a:lnRef>
-          <a:fillRef idx="0">
-            <a:schemeClr val="accent1"/>
-          </a:fillRef>
-          <a:effectRef idx="1">
-            <a:schemeClr val="accent1"/>
-          </a:effectRef>
-          <a:fontRef idx="minor">
-            <a:schemeClr val="tx1"/>
-          </a:fontRef>
-        </p:style>
-      </p:cxnSp>
-    </p:spTree>
-    <p:extLst>
-      <p:ext uri="{BB962C8B-B14F-4D97-AF65-F5344CB8AC3E}">
-        <p14:creationId xmlns:p14="http://schemas.microsoft.com/office/powerpoint/2010/main" val="2560175498"/>
-      </p:ext>
-    </p:extLst>
-  </p:cSld>
-  <p:clrMapOvr>
-    <a:masterClrMapping/>
-  </p:clrMapOvr>
-</p:sld>
-</file>
-
 <file path=ppt/slides/slide9.xml><?xml version="1.0" encoding="utf-8"?>
 <p:sld xmlns:a="http://schemas.openxmlformats.org/drawingml/2006/main" xmlns:r="http://schemas.openxmlformats.org/officeDocument/2006/relationships" xmlns:p="http://schemas.openxmlformats.org/presentationml/2006/main">
   <p:cSld>
@@ -9825,12 +10269,1067 @@
           <a:chExt cx="0" cy="0"/>
         </a:xfrm>
       </p:grpSpPr>
+      <p:sp>
+        <p:nvSpPr>
+          <p:cNvPr id="2" name="Rectangle: Rounded Corners 1">
+            <a:extLst>
+              <a:ext uri="{FF2B5EF4-FFF2-40B4-BE49-F238E27FC236}">
+                <a16:creationId xmlns:a16="http://schemas.microsoft.com/office/drawing/2014/main" id="{F09FDC59-6067-4502-1360-F42554AD87D3}"/>
+              </a:ext>
+            </a:extLst>
+          </p:cNvPr>
+          <p:cNvSpPr/>
+          <p:nvPr/>
+        </p:nvSpPr>
+        <p:spPr>
+          <a:xfrm>
+            <a:off x="4046220" y="3398520"/>
+            <a:ext cx="4282440" cy="457200"/>
+          </a:xfrm>
+          <a:prstGeom prst="roundRect">
+            <a:avLst/>
+          </a:prstGeom>
+          <a:solidFill>
+            <a:srgbClr val="B2D4EB"/>
+          </a:solidFill>
+          <a:ln>
+            <a:solidFill>
+              <a:schemeClr val="tx1"/>
+            </a:solidFill>
+          </a:ln>
+        </p:spPr>
+        <p:style>
+          <a:lnRef idx="2">
+            <a:schemeClr val="accent1">
+              <a:shade val="15000"/>
+            </a:schemeClr>
+          </a:lnRef>
+          <a:fillRef idx="1">
+            <a:schemeClr val="accent1"/>
+          </a:fillRef>
+          <a:effectRef idx="0">
+            <a:schemeClr val="accent1"/>
+          </a:effectRef>
+          <a:fontRef idx="minor">
+            <a:schemeClr val="lt1"/>
+          </a:fontRef>
+        </p:style>
+        <p:txBody>
+          <a:bodyPr rtlCol="0" anchor="ctr"/>
+          <a:lstStyle/>
+          <a:p>
+            <a:pPr algn="ctr"/>
+            <a:r>
+              <a:rPr lang="en-US" dirty="0">
+                <a:solidFill>
+                  <a:schemeClr val="tx1"/>
+                </a:solidFill>
+              </a:rPr>
+              <a:t>Search Public Information on the Web</a:t>
+            </a:r>
+            <a:endParaRPr lang="en-US" i="1" dirty="0">
+              <a:solidFill>
+                <a:schemeClr val="tx1"/>
+              </a:solidFill>
+            </a:endParaRPr>
+          </a:p>
+        </p:txBody>
+      </p:sp>
+      <p:sp>
+        <p:nvSpPr>
+          <p:cNvPr id="3" name="Rectangle: Rounded Corners 2">
+            <a:extLst>
+              <a:ext uri="{FF2B5EF4-FFF2-40B4-BE49-F238E27FC236}">
+                <a16:creationId xmlns:a16="http://schemas.microsoft.com/office/drawing/2014/main" id="{9800FF13-E208-2C00-EB7C-BCBA48F554BD}"/>
+              </a:ext>
+            </a:extLst>
+          </p:cNvPr>
+          <p:cNvSpPr/>
+          <p:nvPr/>
+        </p:nvSpPr>
+        <p:spPr>
+          <a:xfrm>
+            <a:off x="4046220" y="2625554"/>
+            <a:ext cx="4282440" cy="457200"/>
+          </a:xfrm>
+          <a:prstGeom prst="roundRect">
+            <a:avLst/>
+          </a:prstGeom>
+          <a:solidFill>
+            <a:srgbClr val="B2D4EB"/>
+          </a:solidFill>
+          <a:ln>
+            <a:solidFill>
+              <a:schemeClr val="tx1"/>
+            </a:solidFill>
+          </a:ln>
+        </p:spPr>
+        <p:style>
+          <a:lnRef idx="2">
+            <a:schemeClr val="accent1">
+              <a:shade val="15000"/>
+            </a:schemeClr>
+          </a:lnRef>
+          <a:fillRef idx="1">
+            <a:schemeClr val="accent1"/>
+          </a:fillRef>
+          <a:effectRef idx="0">
+            <a:schemeClr val="accent1"/>
+          </a:effectRef>
+          <a:fontRef idx="minor">
+            <a:schemeClr val="lt1"/>
+          </a:fontRef>
+        </p:style>
+        <p:txBody>
+          <a:bodyPr rtlCol="0" anchor="ctr"/>
+          <a:lstStyle/>
+          <a:p>
+            <a:pPr algn="ctr"/>
+            <a:r>
+              <a:rPr lang="en-US" dirty="0">
+                <a:solidFill>
+                  <a:schemeClr val="tx1"/>
+                </a:solidFill>
+              </a:rPr>
+              <a:t>Retrieve Stock Quotes from an API</a:t>
+            </a:r>
+            <a:endParaRPr lang="en-US" i="1" dirty="0">
+              <a:solidFill>
+                <a:schemeClr val="tx1"/>
+              </a:solidFill>
+            </a:endParaRPr>
+          </a:p>
+        </p:txBody>
+      </p:sp>
+      <p:sp>
+        <p:nvSpPr>
+          <p:cNvPr id="4" name="Rectangle: Rounded Corners 3">
+            <a:extLst>
+              <a:ext uri="{FF2B5EF4-FFF2-40B4-BE49-F238E27FC236}">
+                <a16:creationId xmlns:a16="http://schemas.microsoft.com/office/drawing/2014/main" id="{CD952C55-0F41-C8E8-4833-F5F86239B3AD}"/>
+              </a:ext>
+            </a:extLst>
+          </p:cNvPr>
+          <p:cNvSpPr/>
+          <p:nvPr/>
+        </p:nvSpPr>
+        <p:spPr>
+          <a:xfrm>
+            <a:off x="4046220" y="1855003"/>
+            <a:ext cx="4282440" cy="457200"/>
+          </a:xfrm>
+          <a:prstGeom prst="roundRect">
+            <a:avLst/>
+          </a:prstGeom>
+          <a:solidFill>
+            <a:srgbClr val="B2D4EB"/>
+          </a:solidFill>
+          <a:ln>
+            <a:solidFill>
+              <a:schemeClr val="tx1"/>
+            </a:solidFill>
+          </a:ln>
+        </p:spPr>
+        <p:style>
+          <a:lnRef idx="2">
+            <a:schemeClr val="accent1">
+              <a:shade val="15000"/>
+            </a:schemeClr>
+          </a:lnRef>
+          <a:fillRef idx="1">
+            <a:schemeClr val="accent1"/>
+          </a:fillRef>
+          <a:effectRef idx="0">
+            <a:schemeClr val="accent1"/>
+          </a:effectRef>
+          <a:fontRef idx="minor">
+            <a:schemeClr val="lt1"/>
+          </a:fontRef>
+        </p:style>
+        <p:txBody>
+          <a:bodyPr rtlCol="0" anchor="ctr"/>
+          <a:lstStyle/>
+          <a:p>
+            <a:pPr algn="ctr"/>
+            <a:r>
+              <a:rPr lang="en-US" dirty="0">
+                <a:solidFill>
+                  <a:schemeClr val="tx1"/>
+                </a:solidFill>
+              </a:rPr>
+              <a:t>Reference Internal Report Files</a:t>
+            </a:r>
+            <a:endParaRPr lang="en-US" i="1" dirty="0">
+              <a:solidFill>
+                <a:schemeClr val="tx1"/>
+              </a:solidFill>
+            </a:endParaRPr>
+          </a:p>
+        </p:txBody>
+      </p:sp>
+      <p:sp>
+        <p:nvSpPr>
+          <p:cNvPr id="5" name="Rectangle: Rounded Corners 4">
+            <a:extLst>
+              <a:ext uri="{FF2B5EF4-FFF2-40B4-BE49-F238E27FC236}">
+                <a16:creationId xmlns:a16="http://schemas.microsoft.com/office/drawing/2014/main" id="{600226F7-C833-1B1C-B967-7291F64244CC}"/>
+              </a:ext>
+            </a:extLst>
+          </p:cNvPr>
+          <p:cNvSpPr/>
+          <p:nvPr/>
+        </p:nvSpPr>
+        <p:spPr>
+          <a:xfrm>
+            <a:off x="1507938" y="2374095"/>
+            <a:ext cx="1913442" cy="960119"/>
+          </a:xfrm>
+          <a:prstGeom prst="roundRect">
+            <a:avLst/>
+          </a:prstGeom>
+          <a:solidFill>
+            <a:srgbClr val="E5F1F8"/>
+          </a:solidFill>
+          <a:ln>
+            <a:solidFill>
+              <a:schemeClr val="tx1"/>
+            </a:solidFill>
+          </a:ln>
+        </p:spPr>
+        <p:style>
+          <a:lnRef idx="2">
+            <a:schemeClr val="accent1">
+              <a:shade val="15000"/>
+            </a:schemeClr>
+          </a:lnRef>
+          <a:fillRef idx="1">
+            <a:schemeClr val="accent1"/>
+          </a:fillRef>
+          <a:effectRef idx="0">
+            <a:schemeClr val="accent1"/>
+          </a:effectRef>
+          <a:fontRef idx="minor">
+            <a:schemeClr val="lt1"/>
+          </a:fontRef>
+        </p:style>
+        <p:txBody>
+          <a:bodyPr rtlCol="0" anchor="ctr"/>
+          <a:lstStyle/>
+          <a:p>
+            <a:pPr algn="ctr"/>
+            <a:r>
+              <a:rPr lang="en-US" dirty="0">
+                <a:solidFill>
+                  <a:schemeClr val="tx1"/>
+                </a:solidFill>
+              </a:rPr>
+              <a:t>Query</a:t>
+            </a:r>
+          </a:p>
+          <a:p>
+            <a:pPr algn="ctr"/>
+            <a:r>
+              <a:rPr lang="en-US" dirty="0">
+                <a:solidFill>
+                  <a:schemeClr val="tx1"/>
+                </a:solidFill>
+              </a:rPr>
+              <a:t>Planning</a:t>
+            </a:r>
+          </a:p>
+        </p:txBody>
+      </p:sp>
+      <p:sp>
+        <p:nvSpPr>
+          <p:cNvPr id="6" name="Rectangle: Rounded Corners 5">
+            <a:extLst>
+              <a:ext uri="{FF2B5EF4-FFF2-40B4-BE49-F238E27FC236}">
+                <a16:creationId xmlns:a16="http://schemas.microsoft.com/office/drawing/2014/main" id="{C93C6EBF-0FE7-EC6E-5B5C-7AA41F6606DD}"/>
+              </a:ext>
+            </a:extLst>
+          </p:cNvPr>
+          <p:cNvSpPr/>
+          <p:nvPr/>
+        </p:nvSpPr>
+        <p:spPr>
+          <a:xfrm>
+            <a:off x="9837420" y="2374095"/>
+            <a:ext cx="1913442" cy="960119"/>
+          </a:xfrm>
+          <a:prstGeom prst="roundRect">
+            <a:avLst/>
+          </a:prstGeom>
+          <a:solidFill>
+            <a:srgbClr val="E5F1F8"/>
+          </a:solidFill>
+          <a:ln>
+            <a:solidFill>
+              <a:schemeClr val="tx1"/>
+            </a:solidFill>
+          </a:ln>
+        </p:spPr>
+        <p:style>
+          <a:lnRef idx="2">
+            <a:schemeClr val="accent1">
+              <a:shade val="15000"/>
+            </a:schemeClr>
+          </a:lnRef>
+          <a:fillRef idx="1">
+            <a:schemeClr val="accent1"/>
+          </a:fillRef>
+          <a:effectRef idx="0">
+            <a:schemeClr val="accent1"/>
+          </a:effectRef>
+          <a:fontRef idx="minor">
+            <a:schemeClr val="lt1"/>
+          </a:fontRef>
+        </p:style>
+        <p:txBody>
+          <a:bodyPr rtlCol="0" anchor="ctr"/>
+          <a:lstStyle/>
+          <a:p>
+            <a:pPr algn="ctr"/>
+            <a:r>
+              <a:rPr lang="en-US" dirty="0">
+                <a:solidFill>
+                  <a:schemeClr val="tx1"/>
+                </a:solidFill>
+              </a:rPr>
+              <a:t>Language</a:t>
+            </a:r>
+          </a:p>
+          <a:p>
+            <a:pPr algn="ctr"/>
+            <a:r>
+              <a:rPr lang="en-US" dirty="0">
+                <a:solidFill>
+                  <a:schemeClr val="tx1"/>
+                </a:solidFill>
+              </a:rPr>
+              <a:t>Model</a:t>
+            </a:r>
+          </a:p>
+        </p:txBody>
+      </p:sp>
+      <p:cxnSp>
+        <p:nvCxnSpPr>
+          <p:cNvPr id="7" name="Straight Arrow Connector 6">
+            <a:extLst>
+              <a:ext uri="{FF2B5EF4-FFF2-40B4-BE49-F238E27FC236}">
+                <a16:creationId xmlns:a16="http://schemas.microsoft.com/office/drawing/2014/main" id="{70FF9049-A038-5CD7-B5B6-A7A955E2687C}"/>
+              </a:ext>
+            </a:extLst>
+          </p:cNvPr>
+          <p:cNvCxnSpPr>
+            <a:cxnSpLocks/>
+            <a:stCxn id="5" idx="3"/>
+            <a:endCxn id="3" idx="1"/>
+          </p:cNvCxnSpPr>
+          <p:nvPr/>
+        </p:nvCxnSpPr>
+        <p:spPr>
+          <a:xfrm flipV="1">
+            <a:off x="3421380" y="2854154"/>
+            <a:ext cx="624840" cy="1"/>
+          </a:xfrm>
+          <a:prstGeom prst="straightConnector1">
+            <a:avLst/>
+          </a:prstGeom>
+          <a:ln>
+            <a:solidFill>
+              <a:schemeClr val="tx1"/>
+            </a:solidFill>
+            <a:prstDash val="solid"/>
+            <a:tailEnd type="triangle" w="lg" len="lg"/>
+          </a:ln>
+        </p:spPr>
+        <p:style>
+          <a:lnRef idx="2">
+            <a:schemeClr val="accent1"/>
+          </a:lnRef>
+          <a:fillRef idx="0">
+            <a:schemeClr val="accent1"/>
+          </a:fillRef>
+          <a:effectRef idx="1">
+            <a:schemeClr val="accent1"/>
+          </a:effectRef>
+          <a:fontRef idx="minor">
+            <a:schemeClr val="tx1"/>
+          </a:fontRef>
+        </p:style>
+      </p:cxnSp>
+      <p:cxnSp>
+        <p:nvCxnSpPr>
+          <p:cNvPr id="10" name="Straight Arrow Connector 9">
+            <a:extLst>
+              <a:ext uri="{FF2B5EF4-FFF2-40B4-BE49-F238E27FC236}">
+                <a16:creationId xmlns:a16="http://schemas.microsoft.com/office/drawing/2014/main" id="{2C10FC99-8029-AE13-0A3B-1F87064360AB}"/>
+              </a:ext>
+            </a:extLst>
+          </p:cNvPr>
+          <p:cNvCxnSpPr>
+            <a:cxnSpLocks/>
+            <a:stCxn id="44" idx="3"/>
+            <a:endCxn id="6" idx="1"/>
+          </p:cNvCxnSpPr>
+          <p:nvPr/>
+        </p:nvCxnSpPr>
+        <p:spPr>
+          <a:xfrm>
+            <a:off x="9189720" y="2854155"/>
+            <a:ext cx="647700" cy="0"/>
+          </a:xfrm>
+          <a:prstGeom prst="straightConnector1">
+            <a:avLst/>
+          </a:prstGeom>
+          <a:ln>
+            <a:solidFill>
+              <a:schemeClr val="tx1"/>
+            </a:solidFill>
+            <a:prstDash val="solid"/>
+            <a:tailEnd type="triangle" w="lg" len="lg"/>
+          </a:ln>
+        </p:spPr>
+        <p:style>
+          <a:lnRef idx="2">
+            <a:schemeClr val="accent1"/>
+          </a:lnRef>
+          <a:fillRef idx="0">
+            <a:schemeClr val="accent1"/>
+          </a:fillRef>
+          <a:effectRef idx="1">
+            <a:schemeClr val="accent1"/>
+          </a:effectRef>
+          <a:fontRef idx="minor">
+            <a:schemeClr val="tx1"/>
+          </a:fontRef>
+        </p:style>
+      </p:cxnSp>
+      <p:sp>
+        <p:nvSpPr>
+          <p:cNvPr id="15" name="Rectangle: Rounded Corners 14">
+            <a:extLst>
+              <a:ext uri="{FF2B5EF4-FFF2-40B4-BE49-F238E27FC236}">
+                <a16:creationId xmlns:a16="http://schemas.microsoft.com/office/drawing/2014/main" id="{C23DA4FB-7AE1-4EE4-8DD5-321F7F7C7F33}"/>
+              </a:ext>
+            </a:extLst>
+          </p:cNvPr>
+          <p:cNvSpPr/>
+          <p:nvPr/>
+        </p:nvSpPr>
+        <p:spPr>
+          <a:xfrm>
+            <a:off x="189267" y="2619607"/>
+            <a:ext cx="915222" cy="469096"/>
+          </a:xfrm>
+          <a:prstGeom prst="roundRect">
+            <a:avLst/>
+          </a:prstGeom>
+          <a:solidFill>
+            <a:srgbClr val="E5F1F8"/>
+          </a:solidFill>
+          <a:ln>
+            <a:solidFill>
+              <a:schemeClr val="tx1"/>
+            </a:solidFill>
+          </a:ln>
+        </p:spPr>
+        <p:style>
+          <a:lnRef idx="2">
+            <a:schemeClr val="accent1">
+              <a:shade val="15000"/>
+            </a:schemeClr>
+          </a:lnRef>
+          <a:fillRef idx="1">
+            <a:schemeClr val="accent1"/>
+          </a:fillRef>
+          <a:effectRef idx="0">
+            <a:schemeClr val="accent1"/>
+          </a:effectRef>
+          <a:fontRef idx="minor">
+            <a:schemeClr val="lt1"/>
+          </a:fontRef>
+        </p:style>
+        <p:txBody>
+          <a:bodyPr rtlCol="0" anchor="ctr"/>
+          <a:lstStyle/>
+          <a:p>
+            <a:pPr algn="ctr"/>
+            <a:r>
+              <a:rPr lang="en-US" dirty="0">
+                <a:solidFill>
+                  <a:schemeClr val="tx1"/>
+                </a:solidFill>
+              </a:rPr>
+              <a:t>Prompt</a:t>
+            </a:r>
+          </a:p>
+        </p:txBody>
+      </p:sp>
+      <p:cxnSp>
+        <p:nvCxnSpPr>
+          <p:cNvPr id="16" name="Straight Arrow Connector 15">
+            <a:extLst>
+              <a:ext uri="{FF2B5EF4-FFF2-40B4-BE49-F238E27FC236}">
+                <a16:creationId xmlns:a16="http://schemas.microsoft.com/office/drawing/2014/main" id="{942D3144-4FA8-07EA-6898-D7B2C45E010A}"/>
+              </a:ext>
+            </a:extLst>
+          </p:cNvPr>
+          <p:cNvCxnSpPr>
+            <a:cxnSpLocks/>
+            <a:stCxn id="15" idx="3"/>
+            <a:endCxn id="5" idx="1"/>
+          </p:cNvCxnSpPr>
+          <p:nvPr/>
+        </p:nvCxnSpPr>
+        <p:spPr>
+          <a:xfrm>
+            <a:off x="1104489" y="2854155"/>
+            <a:ext cx="403449" cy="0"/>
+          </a:xfrm>
+          <a:prstGeom prst="straightConnector1">
+            <a:avLst/>
+          </a:prstGeom>
+          <a:ln>
+            <a:solidFill>
+              <a:schemeClr val="tx1"/>
+            </a:solidFill>
+            <a:prstDash val="sysDash"/>
+            <a:tailEnd type="triangle" w="lg" len="lg"/>
+          </a:ln>
+        </p:spPr>
+        <p:style>
+          <a:lnRef idx="2">
+            <a:schemeClr val="accent1"/>
+          </a:lnRef>
+          <a:fillRef idx="0">
+            <a:schemeClr val="accent1"/>
+          </a:fillRef>
+          <a:effectRef idx="1">
+            <a:schemeClr val="accent1"/>
+          </a:effectRef>
+          <a:fontRef idx="minor">
+            <a:schemeClr val="tx1"/>
+          </a:fontRef>
+        </p:style>
+      </p:cxnSp>
+      <p:cxnSp>
+        <p:nvCxnSpPr>
+          <p:cNvPr id="19" name="Connector: Elbow 18">
+            <a:extLst>
+              <a:ext uri="{FF2B5EF4-FFF2-40B4-BE49-F238E27FC236}">
+                <a16:creationId xmlns:a16="http://schemas.microsoft.com/office/drawing/2014/main" id="{BF48D9D9-8BAB-3118-5B91-13BAA46C2349}"/>
+              </a:ext>
+            </a:extLst>
+          </p:cNvPr>
+          <p:cNvCxnSpPr>
+            <a:cxnSpLocks/>
+            <a:stCxn id="5" idx="3"/>
+            <a:endCxn id="4" idx="1"/>
+          </p:cNvCxnSpPr>
+          <p:nvPr/>
+        </p:nvCxnSpPr>
+        <p:spPr>
+          <a:xfrm flipV="1">
+            <a:off x="3421380" y="2083603"/>
+            <a:ext cx="624840" cy="770552"/>
+          </a:xfrm>
+          <a:prstGeom prst="bentConnector3">
+            <a:avLst>
+              <a:gd name="adj1" fmla="val 50000"/>
+            </a:avLst>
+          </a:prstGeom>
+          <a:ln>
+            <a:solidFill>
+              <a:schemeClr val="tx1"/>
+            </a:solidFill>
+            <a:prstDash val="solid"/>
+            <a:tailEnd type="triangle" w="lg" len="lg"/>
+          </a:ln>
+        </p:spPr>
+        <p:style>
+          <a:lnRef idx="2">
+            <a:schemeClr val="accent1"/>
+          </a:lnRef>
+          <a:fillRef idx="0">
+            <a:schemeClr val="accent1"/>
+          </a:fillRef>
+          <a:effectRef idx="1">
+            <a:schemeClr val="accent1"/>
+          </a:effectRef>
+          <a:fontRef idx="minor">
+            <a:schemeClr val="tx1"/>
+          </a:fontRef>
+        </p:style>
+      </p:cxnSp>
+      <p:cxnSp>
+        <p:nvCxnSpPr>
+          <p:cNvPr id="22" name="Connector: Elbow 21">
+            <a:extLst>
+              <a:ext uri="{FF2B5EF4-FFF2-40B4-BE49-F238E27FC236}">
+                <a16:creationId xmlns:a16="http://schemas.microsoft.com/office/drawing/2014/main" id="{217AA7E3-1E41-FB8C-7F66-A5758B29A028}"/>
+              </a:ext>
+            </a:extLst>
+          </p:cNvPr>
+          <p:cNvCxnSpPr>
+            <a:cxnSpLocks/>
+            <a:stCxn id="5" idx="3"/>
+            <a:endCxn id="2" idx="1"/>
+          </p:cNvCxnSpPr>
+          <p:nvPr/>
+        </p:nvCxnSpPr>
+        <p:spPr>
+          <a:xfrm>
+            <a:off x="3421380" y="2854155"/>
+            <a:ext cx="624840" cy="772965"/>
+          </a:xfrm>
+          <a:prstGeom prst="bentConnector3">
+            <a:avLst>
+              <a:gd name="adj1" fmla="val 50000"/>
+            </a:avLst>
+          </a:prstGeom>
+          <a:ln>
+            <a:solidFill>
+              <a:schemeClr val="tx1"/>
+            </a:solidFill>
+            <a:prstDash val="solid"/>
+            <a:tailEnd type="triangle" w="lg" len="lg"/>
+          </a:ln>
+        </p:spPr>
+        <p:style>
+          <a:lnRef idx="2">
+            <a:schemeClr val="accent1"/>
+          </a:lnRef>
+          <a:fillRef idx="0">
+            <a:schemeClr val="accent1"/>
+          </a:fillRef>
+          <a:effectRef idx="1">
+            <a:schemeClr val="accent1"/>
+          </a:effectRef>
+          <a:fontRef idx="minor">
+            <a:schemeClr val="tx1"/>
+          </a:fontRef>
+        </p:style>
+      </p:cxnSp>
+      <p:sp>
+        <p:nvSpPr>
+          <p:cNvPr id="25" name="Rectangle: Rounded Corners 24">
+            <a:extLst>
+              <a:ext uri="{FF2B5EF4-FFF2-40B4-BE49-F238E27FC236}">
+                <a16:creationId xmlns:a16="http://schemas.microsoft.com/office/drawing/2014/main" id="{98E95763-BD68-DEF9-F942-CCC8B336544E}"/>
+              </a:ext>
+            </a:extLst>
+          </p:cNvPr>
+          <p:cNvSpPr/>
+          <p:nvPr/>
+        </p:nvSpPr>
+        <p:spPr>
+          <a:xfrm>
+            <a:off x="8732520" y="1852591"/>
+            <a:ext cx="457200" cy="457200"/>
+          </a:xfrm>
+          <a:prstGeom prst="roundRect">
+            <a:avLst/>
+          </a:prstGeom>
+          <a:solidFill>
+            <a:srgbClr val="E5F1F8"/>
+          </a:solidFill>
+          <a:ln>
+            <a:solidFill>
+              <a:schemeClr val="tx1"/>
+            </a:solidFill>
+          </a:ln>
+        </p:spPr>
+        <p:style>
+          <a:lnRef idx="2">
+            <a:schemeClr val="accent1">
+              <a:shade val="15000"/>
+            </a:schemeClr>
+          </a:lnRef>
+          <a:fillRef idx="1">
+            <a:schemeClr val="accent1"/>
+          </a:fillRef>
+          <a:effectRef idx="0">
+            <a:schemeClr val="accent1"/>
+          </a:effectRef>
+          <a:fontRef idx="minor">
+            <a:schemeClr val="lt1"/>
+          </a:fontRef>
+        </p:style>
+        <p:txBody>
+          <a:bodyPr rtlCol="0" anchor="ctr"/>
+          <a:lstStyle/>
+          <a:p>
+            <a:pPr algn="ctr"/>
+            <a:endParaRPr lang="en-US" dirty="0">
+              <a:solidFill>
+                <a:schemeClr val="tx1"/>
+              </a:solidFill>
+            </a:endParaRPr>
+          </a:p>
+        </p:txBody>
+      </p:sp>
+      <p:cxnSp>
+        <p:nvCxnSpPr>
+          <p:cNvPr id="40" name="Straight Arrow Connector 39">
+            <a:extLst>
+              <a:ext uri="{FF2B5EF4-FFF2-40B4-BE49-F238E27FC236}">
+                <a16:creationId xmlns:a16="http://schemas.microsoft.com/office/drawing/2014/main" id="{B899F5AF-E80C-3452-008E-8E821AEFA864}"/>
+              </a:ext>
+            </a:extLst>
+          </p:cNvPr>
+          <p:cNvCxnSpPr>
+            <a:cxnSpLocks/>
+            <a:stCxn id="4" idx="3"/>
+            <a:endCxn id="25" idx="1"/>
+          </p:cNvCxnSpPr>
+          <p:nvPr/>
+        </p:nvCxnSpPr>
+        <p:spPr>
+          <a:xfrm flipV="1">
+            <a:off x="8328660" y="2081191"/>
+            <a:ext cx="403860" cy="2412"/>
+          </a:xfrm>
+          <a:prstGeom prst="straightConnector1">
+            <a:avLst/>
+          </a:prstGeom>
+          <a:ln>
+            <a:solidFill>
+              <a:schemeClr val="tx1"/>
+            </a:solidFill>
+            <a:prstDash val="solid"/>
+            <a:tailEnd type="triangle" w="lg" len="lg"/>
+          </a:ln>
+        </p:spPr>
+        <p:style>
+          <a:lnRef idx="2">
+            <a:schemeClr val="accent1"/>
+          </a:lnRef>
+          <a:fillRef idx="0">
+            <a:schemeClr val="accent1"/>
+          </a:fillRef>
+          <a:effectRef idx="1">
+            <a:schemeClr val="accent1"/>
+          </a:effectRef>
+          <a:fontRef idx="minor">
+            <a:schemeClr val="tx1"/>
+          </a:fontRef>
+        </p:style>
+      </p:cxnSp>
+      <p:sp>
+        <p:nvSpPr>
+          <p:cNvPr id="44" name="Rectangle: Rounded Corners 43">
+            <a:extLst>
+              <a:ext uri="{FF2B5EF4-FFF2-40B4-BE49-F238E27FC236}">
+                <a16:creationId xmlns:a16="http://schemas.microsoft.com/office/drawing/2014/main" id="{3F66FD98-C347-7EA9-DC36-7FDBB97B4248}"/>
+              </a:ext>
+            </a:extLst>
+          </p:cNvPr>
+          <p:cNvSpPr/>
+          <p:nvPr/>
+        </p:nvSpPr>
+        <p:spPr>
+          <a:xfrm>
+            <a:off x="8732520" y="2625555"/>
+            <a:ext cx="457200" cy="457200"/>
+          </a:xfrm>
+          <a:prstGeom prst="roundRect">
+            <a:avLst/>
+          </a:prstGeom>
+          <a:solidFill>
+            <a:srgbClr val="E5F1F8"/>
+          </a:solidFill>
+          <a:ln>
+            <a:solidFill>
+              <a:schemeClr val="tx1"/>
+            </a:solidFill>
+          </a:ln>
+        </p:spPr>
+        <p:style>
+          <a:lnRef idx="2">
+            <a:schemeClr val="accent1">
+              <a:shade val="15000"/>
+            </a:schemeClr>
+          </a:lnRef>
+          <a:fillRef idx="1">
+            <a:schemeClr val="accent1"/>
+          </a:fillRef>
+          <a:effectRef idx="0">
+            <a:schemeClr val="accent1"/>
+          </a:effectRef>
+          <a:fontRef idx="minor">
+            <a:schemeClr val="lt1"/>
+          </a:fontRef>
+        </p:style>
+        <p:txBody>
+          <a:bodyPr rtlCol="0" anchor="ctr"/>
+          <a:lstStyle/>
+          <a:p>
+            <a:pPr algn="ctr"/>
+            <a:endParaRPr lang="en-US" dirty="0">
+              <a:solidFill>
+                <a:schemeClr val="tx1"/>
+              </a:solidFill>
+            </a:endParaRPr>
+          </a:p>
+        </p:txBody>
+      </p:sp>
+      <p:sp>
+        <p:nvSpPr>
+          <p:cNvPr id="46" name="Rectangle: Rounded Corners 45">
+            <a:extLst>
+              <a:ext uri="{FF2B5EF4-FFF2-40B4-BE49-F238E27FC236}">
+                <a16:creationId xmlns:a16="http://schemas.microsoft.com/office/drawing/2014/main" id="{A791A27B-2AA1-8E05-2231-C99FE09DCBEB}"/>
+              </a:ext>
+            </a:extLst>
+          </p:cNvPr>
+          <p:cNvSpPr/>
+          <p:nvPr/>
+        </p:nvSpPr>
+        <p:spPr>
+          <a:xfrm>
+            <a:off x="8732520" y="3398519"/>
+            <a:ext cx="457200" cy="457200"/>
+          </a:xfrm>
+          <a:prstGeom prst="roundRect">
+            <a:avLst/>
+          </a:prstGeom>
+          <a:solidFill>
+            <a:srgbClr val="E5F1F8"/>
+          </a:solidFill>
+          <a:ln>
+            <a:solidFill>
+              <a:schemeClr val="tx1"/>
+            </a:solidFill>
+          </a:ln>
+        </p:spPr>
+        <p:style>
+          <a:lnRef idx="2">
+            <a:schemeClr val="accent1">
+              <a:shade val="15000"/>
+            </a:schemeClr>
+          </a:lnRef>
+          <a:fillRef idx="1">
+            <a:schemeClr val="accent1"/>
+          </a:fillRef>
+          <a:effectRef idx="0">
+            <a:schemeClr val="accent1"/>
+          </a:effectRef>
+          <a:fontRef idx="minor">
+            <a:schemeClr val="lt1"/>
+          </a:fontRef>
+        </p:style>
+        <p:txBody>
+          <a:bodyPr rtlCol="0" anchor="ctr"/>
+          <a:lstStyle/>
+          <a:p>
+            <a:pPr algn="ctr"/>
+            <a:endParaRPr lang="en-US" dirty="0">
+              <a:solidFill>
+                <a:schemeClr val="tx1"/>
+              </a:solidFill>
+            </a:endParaRPr>
+          </a:p>
+        </p:txBody>
+      </p:sp>
+      <p:cxnSp>
+        <p:nvCxnSpPr>
+          <p:cNvPr id="47" name="Straight Arrow Connector 46">
+            <a:extLst>
+              <a:ext uri="{FF2B5EF4-FFF2-40B4-BE49-F238E27FC236}">
+                <a16:creationId xmlns:a16="http://schemas.microsoft.com/office/drawing/2014/main" id="{42D77B26-2C1F-3022-9B0B-3736BC5CF8AA}"/>
+              </a:ext>
+            </a:extLst>
+          </p:cNvPr>
+          <p:cNvCxnSpPr>
+            <a:cxnSpLocks/>
+            <a:stCxn id="3" idx="3"/>
+            <a:endCxn id="44" idx="1"/>
+          </p:cNvCxnSpPr>
+          <p:nvPr/>
+        </p:nvCxnSpPr>
+        <p:spPr>
+          <a:xfrm>
+            <a:off x="8328660" y="2854154"/>
+            <a:ext cx="403860" cy="1"/>
+          </a:xfrm>
+          <a:prstGeom prst="straightConnector1">
+            <a:avLst/>
+          </a:prstGeom>
+          <a:ln>
+            <a:solidFill>
+              <a:schemeClr val="tx1"/>
+            </a:solidFill>
+            <a:prstDash val="solid"/>
+            <a:tailEnd type="triangle" w="lg" len="lg"/>
+          </a:ln>
+        </p:spPr>
+        <p:style>
+          <a:lnRef idx="2">
+            <a:schemeClr val="accent1"/>
+          </a:lnRef>
+          <a:fillRef idx="0">
+            <a:schemeClr val="accent1"/>
+          </a:fillRef>
+          <a:effectRef idx="1">
+            <a:schemeClr val="accent1"/>
+          </a:effectRef>
+          <a:fontRef idx="minor">
+            <a:schemeClr val="tx1"/>
+          </a:fontRef>
+        </p:style>
+      </p:cxnSp>
+      <p:cxnSp>
+        <p:nvCxnSpPr>
+          <p:cNvPr id="55" name="Straight Arrow Connector 54">
+            <a:extLst>
+              <a:ext uri="{FF2B5EF4-FFF2-40B4-BE49-F238E27FC236}">
+                <a16:creationId xmlns:a16="http://schemas.microsoft.com/office/drawing/2014/main" id="{A99ECFB6-8E63-4F62-C5D3-37BC5BB43934}"/>
+              </a:ext>
+            </a:extLst>
+          </p:cNvPr>
+          <p:cNvCxnSpPr>
+            <a:cxnSpLocks/>
+            <a:stCxn id="2" idx="3"/>
+            <a:endCxn id="46" idx="1"/>
+          </p:cNvCxnSpPr>
+          <p:nvPr/>
+        </p:nvCxnSpPr>
+        <p:spPr>
+          <a:xfrm flipV="1">
+            <a:off x="8328660" y="3627119"/>
+            <a:ext cx="403860" cy="1"/>
+          </a:xfrm>
+          <a:prstGeom prst="straightConnector1">
+            <a:avLst/>
+          </a:prstGeom>
+          <a:ln>
+            <a:solidFill>
+              <a:schemeClr val="tx1"/>
+            </a:solidFill>
+            <a:prstDash val="solid"/>
+            <a:tailEnd type="triangle" w="lg" len="lg"/>
+          </a:ln>
+        </p:spPr>
+        <p:style>
+          <a:lnRef idx="2">
+            <a:schemeClr val="accent1"/>
+          </a:lnRef>
+          <a:fillRef idx="0">
+            <a:schemeClr val="accent1"/>
+          </a:fillRef>
+          <a:effectRef idx="1">
+            <a:schemeClr val="accent1"/>
+          </a:effectRef>
+          <a:fontRef idx="minor">
+            <a:schemeClr val="tx1"/>
+          </a:fontRef>
+        </p:style>
+      </p:cxnSp>
+      <p:cxnSp>
+        <p:nvCxnSpPr>
+          <p:cNvPr id="58" name="Connector: Elbow 57">
+            <a:extLst>
+              <a:ext uri="{FF2B5EF4-FFF2-40B4-BE49-F238E27FC236}">
+                <a16:creationId xmlns:a16="http://schemas.microsoft.com/office/drawing/2014/main" id="{DDB500F1-F165-AABE-6725-11E4ED79023E}"/>
+              </a:ext>
+            </a:extLst>
+          </p:cNvPr>
+          <p:cNvCxnSpPr>
+            <a:cxnSpLocks/>
+            <a:stCxn id="25" idx="3"/>
+            <a:endCxn id="6" idx="1"/>
+          </p:cNvCxnSpPr>
+          <p:nvPr/>
+        </p:nvCxnSpPr>
+        <p:spPr>
+          <a:xfrm>
+            <a:off x="9189720" y="2081191"/>
+            <a:ext cx="647700" cy="772964"/>
+          </a:xfrm>
+          <a:prstGeom prst="bentConnector3">
+            <a:avLst>
+              <a:gd name="adj1" fmla="val 50000"/>
+            </a:avLst>
+          </a:prstGeom>
+          <a:ln>
+            <a:solidFill>
+              <a:schemeClr val="tx1"/>
+            </a:solidFill>
+            <a:prstDash val="solid"/>
+            <a:tailEnd type="triangle" w="lg" len="lg"/>
+          </a:ln>
+        </p:spPr>
+        <p:style>
+          <a:lnRef idx="2">
+            <a:schemeClr val="accent1"/>
+          </a:lnRef>
+          <a:fillRef idx="0">
+            <a:schemeClr val="accent1"/>
+          </a:fillRef>
+          <a:effectRef idx="1">
+            <a:schemeClr val="accent1"/>
+          </a:effectRef>
+          <a:fontRef idx="minor">
+            <a:schemeClr val="tx1"/>
+          </a:fontRef>
+        </p:style>
+      </p:cxnSp>
+      <p:cxnSp>
+        <p:nvCxnSpPr>
+          <p:cNvPr id="61" name="Connector: Elbow 60">
+            <a:extLst>
+              <a:ext uri="{FF2B5EF4-FFF2-40B4-BE49-F238E27FC236}">
+                <a16:creationId xmlns:a16="http://schemas.microsoft.com/office/drawing/2014/main" id="{28AC6A5D-0A01-5370-996D-AF8698A1082D}"/>
+              </a:ext>
+            </a:extLst>
+          </p:cNvPr>
+          <p:cNvCxnSpPr>
+            <a:cxnSpLocks/>
+            <a:stCxn id="46" idx="3"/>
+            <a:endCxn id="6" idx="1"/>
+          </p:cNvCxnSpPr>
+          <p:nvPr/>
+        </p:nvCxnSpPr>
+        <p:spPr>
+          <a:xfrm flipV="1">
+            <a:off x="9189720" y="2854155"/>
+            <a:ext cx="647700" cy="772964"/>
+          </a:xfrm>
+          <a:prstGeom prst="bentConnector3">
+            <a:avLst>
+              <a:gd name="adj1" fmla="val 50000"/>
+            </a:avLst>
+          </a:prstGeom>
+          <a:ln>
+            <a:solidFill>
+              <a:schemeClr val="tx1"/>
+            </a:solidFill>
+            <a:prstDash val="solid"/>
+            <a:tailEnd type="triangle" w="lg" len="lg"/>
+          </a:ln>
+        </p:spPr>
+        <p:style>
+          <a:lnRef idx="2">
+            <a:schemeClr val="accent1"/>
+          </a:lnRef>
+          <a:fillRef idx="0">
+            <a:schemeClr val="accent1"/>
+          </a:fillRef>
+          <a:effectRef idx="1">
+            <a:schemeClr val="accent1"/>
+          </a:effectRef>
+          <a:fontRef idx="minor">
+            <a:schemeClr val="tx1"/>
+          </a:fontRef>
+        </p:style>
+      </p:cxnSp>
       <p:pic>
         <p:nvPicPr>
-          <p:cNvPr id="3" name="Picture 2">
-            <a:extLst>
-              <a:ext uri="{FF2B5EF4-FFF2-40B4-BE49-F238E27FC236}">
-                <a16:creationId xmlns:a16="http://schemas.microsoft.com/office/drawing/2014/main" id="{FD8E52CD-5961-A7C1-3607-A00CDD4774AD}"/>
+          <p:cNvPr id="67" name="Graphic 66" descr="Web design with solid fill">
+            <a:extLst>
+              <a:ext uri="{FF2B5EF4-FFF2-40B4-BE49-F238E27FC236}">
+                <a16:creationId xmlns:a16="http://schemas.microsoft.com/office/drawing/2014/main" id="{5D8BB564-5BA8-868D-2AB7-35E0D3AE65F9}"/>
               </a:ext>
             </a:extLst>
           </p:cNvPr>
@@ -9840,25 +11339,294 @@
           <p:nvPr/>
         </p:nvPicPr>
         <p:blipFill>
-          <a:blip r:embed="rId2"/>
+          <a:blip r:embed="rId2">
+            <a:extLst>
+              <a:ext uri="{96DAC541-7B7A-43D3-8B79-37D633B846F1}">
+                <asvg:svgBlip xmlns:asvg="http://schemas.microsoft.com/office/drawing/2016/SVG/main" r:embed="rId3"/>
+              </a:ext>
+            </a:extLst>
+          </a:blip>
           <a:stretch>
             <a:fillRect/>
           </a:stretch>
         </p:blipFill>
         <p:spPr>
           <a:xfrm>
-            <a:off x="0" y="23812"/>
-            <a:ext cx="12192000" cy="6810375"/>
+            <a:off x="8755380" y="2648413"/>
+            <a:ext cx="411480" cy="411480"/>
           </a:xfrm>
           <a:prstGeom prst="rect">
             <a:avLst/>
           </a:prstGeom>
         </p:spPr>
       </p:pic>
+      <p:pic>
+        <p:nvPicPr>
+          <p:cNvPr id="71" name="Graphic 70" descr="World with solid fill">
+            <a:extLst>
+              <a:ext uri="{FF2B5EF4-FFF2-40B4-BE49-F238E27FC236}">
+                <a16:creationId xmlns:a16="http://schemas.microsoft.com/office/drawing/2014/main" id="{0EF50C39-FA5F-96A6-2DE6-53C76B029FDB}"/>
+              </a:ext>
+            </a:extLst>
+          </p:cNvPr>
+          <p:cNvPicPr>
+            <a:picLocks noChangeAspect="1"/>
+          </p:cNvPicPr>
+          <p:nvPr/>
+        </p:nvPicPr>
+        <p:blipFill>
+          <a:blip r:embed="rId4">
+            <a:extLst>
+              <a:ext uri="{96DAC541-7B7A-43D3-8B79-37D633B846F1}">
+                <asvg:svgBlip xmlns:asvg="http://schemas.microsoft.com/office/drawing/2016/SVG/main" r:embed="rId5"/>
+              </a:ext>
+            </a:extLst>
+          </a:blip>
+          <a:stretch>
+            <a:fillRect/>
+          </a:stretch>
+        </p:blipFill>
+        <p:spPr>
+          <a:xfrm>
+            <a:off x="8755380" y="3421379"/>
+            <a:ext cx="411480" cy="411480"/>
+          </a:xfrm>
+          <a:prstGeom prst="rect">
+            <a:avLst/>
+          </a:prstGeom>
+        </p:spPr>
+      </p:pic>
+      <p:pic>
+        <p:nvPicPr>
+          <p:cNvPr id="73" name="Graphic 72" descr="Database with solid fill">
+            <a:extLst>
+              <a:ext uri="{FF2B5EF4-FFF2-40B4-BE49-F238E27FC236}">
+                <a16:creationId xmlns:a16="http://schemas.microsoft.com/office/drawing/2014/main" id="{20B0889E-3ACA-9DCA-25FE-C1F9B73F7329}"/>
+              </a:ext>
+            </a:extLst>
+          </p:cNvPr>
+          <p:cNvPicPr>
+            <a:picLocks noChangeAspect="1"/>
+          </p:cNvPicPr>
+          <p:nvPr/>
+        </p:nvPicPr>
+        <p:blipFill>
+          <a:blip r:embed="rId6">
+            <a:extLst>
+              <a:ext uri="{96DAC541-7B7A-43D3-8B79-37D633B846F1}">
+                <asvg:svgBlip xmlns:asvg="http://schemas.microsoft.com/office/drawing/2016/SVG/main" r:embed="rId7"/>
+              </a:ext>
+            </a:extLst>
+          </a:blip>
+          <a:stretch>
+            <a:fillRect/>
+          </a:stretch>
+        </p:blipFill>
+        <p:spPr>
+          <a:xfrm>
+            <a:off x="8755380" y="1875451"/>
+            <a:ext cx="411480" cy="411480"/>
+          </a:xfrm>
+          <a:prstGeom prst="rect">
+            <a:avLst/>
+          </a:prstGeom>
+        </p:spPr>
+      </p:pic>
+      <p:pic>
+        <p:nvPicPr>
+          <p:cNvPr id="75" name="Graphic 74" descr="Gears with solid fill">
+            <a:extLst>
+              <a:ext uri="{FF2B5EF4-FFF2-40B4-BE49-F238E27FC236}">
+                <a16:creationId xmlns:a16="http://schemas.microsoft.com/office/drawing/2014/main" id="{AFA7CC75-0D4E-9273-3BC2-179536E5EC20}"/>
+              </a:ext>
+            </a:extLst>
+          </p:cNvPr>
+          <p:cNvPicPr>
+            <a:picLocks noChangeAspect="1"/>
+          </p:cNvPicPr>
+          <p:nvPr/>
+        </p:nvPicPr>
+        <p:blipFill>
+          <a:blip r:embed="rId8">
+            <a:extLst>
+              <a:ext uri="{96DAC541-7B7A-43D3-8B79-37D633B846F1}">
+                <asvg:svgBlip xmlns:asvg="http://schemas.microsoft.com/office/drawing/2016/SVG/main" r:embed="rId9"/>
+              </a:ext>
+            </a:extLst>
+          </a:blip>
+          <a:stretch>
+            <a:fillRect/>
+          </a:stretch>
+        </p:blipFill>
+        <p:spPr>
+          <a:xfrm>
+            <a:off x="1626048" y="2648413"/>
+            <a:ext cx="411480" cy="411480"/>
+          </a:xfrm>
+          <a:prstGeom prst="rect">
+            <a:avLst/>
+          </a:prstGeom>
+        </p:spPr>
+      </p:pic>
+      <p:sp>
+        <p:nvSpPr>
+          <p:cNvPr id="76" name="Rectangle: Rounded Corners 75">
+            <a:extLst>
+              <a:ext uri="{FF2B5EF4-FFF2-40B4-BE49-F238E27FC236}">
+                <a16:creationId xmlns:a16="http://schemas.microsoft.com/office/drawing/2014/main" id="{3492D89A-8D12-E69E-613E-246E45DCD83F}"/>
+              </a:ext>
+            </a:extLst>
+          </p:cNvPr>
+          <p:cNvSpPr/>
+          <p:nvPr/>
+        </p:nvSpPr>
+        <p:spPr>
+          <a:xfrm>
+            <a:off x="10545258" y="3627118"/>
+            <a:ext cx="1205604" cy="469096"/>
+          </a:xfrm>
+          <a:prstGeom prst="roundRect">
+            <a:avLst/>
+          </a:prstGeom>
+          <a:solidFill>
+            <a:srgbClr val="E5F1F8"/>
+          </a:solidFill>
+          <a:ln>
+            <a:solidFill>
+              <a:schemeClr val="tx1"/>
+            </a:solidFill>
+          </a:ln>
+        </p:spPr>
+        <p:style>
+          <a:lnRef idx="2">
+            <a:schemeClr val="accent1">
+              <a:shade val="15000"/>
+            </a:schemeClr>
+          </a:lnRef>
+          <a:fillRef idx="1">
+            <a:schemeClr val="accent1"/>
+          </a:fillRef>
+          <a:effectRef idx="0">
+            <a:schemeClr val="accent1"/>
+          </a:effectRef>
+          <a:fontRef idx="minor">
+            <a:schemeClr val="lt1"/>
+          </a:fontRef>
+        </p:style>
+        <p:txBody>
+          <a:bodyPr rtlCol="0" anchor="ctr"/>
+          <a:lstStyle/>
+          <a:p>
+            <a:pPr algn="ctr"/>
+            <a:r>
+              <a:rPr lang="en-US" dirty="0">
+                <a:solidFill>
+                  <a:schemeClr val="tx1"/>
+                </a:solidFill>
+              </a:rPr>
+              <a:t>Response</a:t>
+            </a:r>
+          </a:p>
+        </p:txBody>
+      </p:sp>
+      <p:cxnSp>
+        <p:nvCxnSpPr>
+          <p:cNvPr id="77" name="Straight Arrow Connector 76">
+            <a:extLst>
+              <a:ext uri="{FF2B5EF4-FFF2-40B4-BE49-F238E27FC236}">
+                <a16:creationId xmlns:a16="http://schemas.microsoft.com/office/drawing/2014/main" id="{1A734903-BE53-2153-B1BE-7817395A6ACC}"/>
+              </a:ext>
+            </a:extLst>
+          </p:cNvPr>
+          <p:cNvCxnSpPr>
+            <a:cxnSpLocks/>
+            <a:endCxn id="76" idx="0"/>
+          </p:cNvCxnSpPr>
+          <p:nvPr/>
+        </p:nvCxnSpPr>
+        <p:spPr>
+          <a:xfrm>
+            <a:off x="11148060" y="3334214"/>
+            <a:ext cx="0" cy="292904"/>
+          </a:xfrm>
+          <a:prstGeom prst="straightConnector1">
+            <a:avLst/>
+          </a:prstGeom>
+          <a:ln>
+            <a:solidFill>
+              <a:schemeClr val="tx1"/>
+            </a:solidFill>
+            <a:prstDash val="sysDash"/>
+            <a:tailEnd type="triangle" w="lg" len="lg"/>
+          </a:ln>
+        </p:spPr>
+        <p:style>
+          <a:lnRef idx="2">
+            <a:schemeClr val="accent1"/>
+          </a:lnRef>
+          <a:fillRef idx="0">
+            <a:schemeClr val="accent1"/>
+          </a:fillRef>
+          <a:effectRef idx="1">
+            <a:schemeClr val="accent1"/>
+          </a:effectRef>
+          <a:fontRef idx="minor">
+            <a:schemeClr val="tx1"/>
+          </a:fontRef>
+        </p:style>
+      </p:cxnSp>
+      <p:cxnSp>
+        <p:nvCxnSpPr>
+          <p:cNvPr id="14" name="Connector: Elbow 13">
+            <a:extLst>
+              <a:ext uri="{FF2B5EF4-FFF2-40B4-BE49-F238E27FC236}">
+                <a16:creationId xmlns:a16="http://schemas.microsoft.com/office/drawing/2014/main" id="{4D371B40-23D5-3632-64F0-3A5DAC685C2C}"/>
+              </a:ext>
+            </a:extLst>
+          </p:cNvPr>
+          <p:cNvCxnSpPr>
+            <a:cxnSpLocks/>
+            <a:endCxn id="5" idx="2"/>
+          </p:cNvCxnSpPr>
+          <p:nvPr/>
+        </p:nvCxnSpPr>
+        <p:spPr>
+          <a:xfrm rot="5400000">
+            <a:off x="6337265" y="-538391"/>
+            <a:ext cx="12700" cy="7745211"/>
+          </a:xfrm>
+          <a:prstGeom prst="bentConnector3">
+            <a:avLst>
+              <a:gd name="adj1" fmla="val 6060000"/>
+            </a:avLst>
+          </a:prstGeom>
+          <a:ln>
+            <a:solidFill>
+              <a:schemeClr val="tx1"/>
+            </a:solidFill>
+            <a:prstDash val="sysDash"/>
+            <a:tailEnd type="triangle" w="lg" len="lg"/>
+          </a:ln>
+        </p:spPr>
+        <p:style>
+          <a:lnRef idx="2">
+            <a:schemeClr val="accent1"/>
+          </a:lnRef>
+          <a:fillRef idx="0">
+            <a:schemeClr val="accent1"/>
+          </a:fillRef>
+          <a:effectRef idx="1">
+            <a:schemeClr val="accent1"/>
+          </a:effectRef>
+          <a:fontRef idx="minor">
+            <a:schemeClr val="tx1"/>
+          </a:fontRef>
+        </p:style>
+      </p:cxnSp>
     </p:spTree>
     <p:extLst>
       <p:ext uri="{BB962C8B-B14F-4D97-AF65-F5344CB8AC3E}">
-        <p14:creationId xmlns:p14="http://schemas.microsoft.com/office/powerpoint/2010/main" val="3564074342"/>
+        <p14:creationId xmlns:p14="http://schemas.microsoft.com/office/powerpoint/2010/main" val="2560175498"/>
       </p:ext>
     </p:extLst>
   </p:cSld>

--- a/figures/figures.pptx
+++ b/figures/figures.pptx
@@ -5,7 +5,7 @@
     <p:sldMasterId id="2147483660" r:id="rId1"/>
   </p:sldMasterIdLst>
   <p:notesMasterIdLst>
-    <p:notesMasterId r:id="rId20"/>
+    <p:notesMasterId r:id="rId21"/>
   </p:notesMasterIdLst>
   <p:sldIdLst>
     <p:sldId id="258" r:id="rId2"/>
@@ -15,17 +15,18 @@
     <p:sldId id="259" r:id="rId6"/>
     <p:sldId id="261" r:id="rId7"/>
     <p:sldId id="268" r:id="rId8"/>
-    <p:sldId id="262" r:id="rId9"/>
-    <p:sldId id="264" r:id="rId10"/>
-    <p:sldId id="265" r:id="rId11"/>
-    <p:sldId id="267" r:id="rId12"/>
-    <p:sldId id="269" r:id="rId13"/>
-    <p:sldId id="274" r:id="rId14"/>
-    <p:sldId id="270" r:id="rId15"/>
-    <p:sldId id="271" r:id="rId16"/>
-    <p:sldId id="272" r:id="rId17"/>
-    <p:sldId id="273" r:id="rId18"/>
-    <p:sldId id="257" r:id="rId19"/>
+    <p:sldId id="275" r:id="rId9"/>
+    <p:sldId id="262" r:id="rId10"/>
+    <p:sldId id="264" r:id="rId11"/>
+    <p:sldId id="265" r:id="rId12"/>
+    <p:sldId id="267" r:id="rId13"/>
+    <p:sldId id="269" r:id="rId14"/>
+    <p:sldId id="274" r:id="rId15"/>
+    <p:sldId id="270" r:id="rId16"/>
+    <p:sldId id="271" r:id="rId17"/>
+    <p:sldId id="272" r:id="rId18"/>
+    <p:sldId id="273" r:id="rId19"/>
+    <p:sldId id="257" r:id="rId20"/>
   </p:sldIdLst>
   <p:sldSz cx="12192000" cy="6858000"/>
   <p:notesSz cx="6858000" cy="9144000"/>
@@ -148,6 +149,7 @@
           <p14:sldIdLst>
             <p14:sldId id="261"/>
             <p14:sldId id="268"/>
+            <p14:sldId id="275"/>
           </p14:sldIdLst>
         </p14:section>
         <p14:section name="Knowledge Bases" id="{06E034E2-AFC7-4A28-B1B0-B4E2903C9A55}">
@@ -268,7 +270,7 @@
           <a:p>
             <a:fld id="{DAABB0E5-6D8D-4DEE-B75F-67010CF2307C}" type="datetimeFigureOut">
               <a:rPr lang="en-US" smtClean="0"/>
-              <a:t>2/19/2026</a:t>
+              <a:t>2/26/2026</a:t>
             </a:fld>
             <a:endParaRPr lang="en-US"/>
           </a:p>
@@ -953,7 +955,7 @@
           <a:p>
             <a:fld id="{B84C5C40-2055-49AF-9028-5DA79E75E391}" type="datetimeFigureOut">
               <a:rPr lang="en-US" smtClean="0"/>
-              <a:t>2/19/2026</a:t>
+              <a:t>2/26/2026</a:t>
             </a:fld>
             <a:endParaRPr lang="en-US"/>
           </a:p>
@@ -1123,7 +1125,7 @@
           <a:p>
             <a:fld id="{B84C5C40-2055-49AF-9028-5DA79E75E391}" type="datetimeFigureOut">
               <a:rPr lang="en-US" smtClean="0"/>
-              <a:t>2/19/2026</a:t>
+              <a:t>2/26/2026</a:t>
             </a:fld>
             <a:endParaRPr lang="en-US"/>
           </a:p>
@@ -1303,7 +1305,7 @@
           <a:p>
             <a:fld id="{B84C5C40-2055-49AF-9028-5DA79E75E391}" type="datetimeFigureOut">
               <a:rPr lang="en-US" smtClean="0"/>
-              <a:t>2/19/2026</a:t>
+              <a:t>2/26/2026</a:t>
             </a:fld>
             <a:endParaRPr lang="en-US"/>
           </a:p>
@@ -1473,7 +1475,7 @@
           <a:p>
             <a:fld id="{B84C5C40-2055-49AF-9028-5DA79E75E391}" type="datetimeFigureOut">
               <a:rPr lang="en-US" smtClean="0"/>
-              <a:t>2/19/2026</a:t>
+              <a:t>2/26/2026</a:t>
             </a:fld>
             <a:endParaRPr lang="en-US"/>
           </a:p>
@@ -1719,7 +1721,7 @@
           <a:p>
             <a:fld id="{B84C5C40-2055-49AF-9028-5DA79E75E391}" type="datetimeFigureOut">
               <a:rPr lang="en-US" smtClean="0"/>
-              <a:t>2/19/2026</a:t>
+              <a:t>2/26/2026</a:t>
             </a:fld>
             <a:endParaRPr lang="en-US"/>
           </a:p>
@@ -1951,7 +1953,7 @@
           <a:p>
             <a:fld id="{B84C5C40-2055-49AF-9028-5DA79E75E391}" type="datetimeFigureOut">
               <a:rPr lang="en-US" smtClean="0"/>
-              <a:t>2/19/2026</a:t>
+              <a:t>2/26/2026</a:t>
             </a:fld>
             <a:endParaRPr lang="en-US"/>
           </a:p>
@@ -2318,7 +2320,7 @@
           <a:p>
             <a:fld id="{B84C5C40-2055-49AF-9028-5DA79E75E391}" type="datetimeFigureOut">
               <a:rPr lang="en-US" smtClean="0"/>
-              <a:t>2/19/2026</a:t>
+              <a:t>2/26/2026</a:t>
             </a:fld>
             <a:endParaRPr lang="en-US"/>
           </a:p>
@@ -2436,7 +2438,7 @@
           <a:p>
             <a:fld id="{B84C5C40-2055-49AF-9028-5DA79E75E391}" type="datetimeFigureOut">
               <a:rPr lang="en-US" smtClean="0"/>
-              <a:t>2/19/2026</a:t>
+              <a:t>2/26/2026</a:t>
             </a:fld>
             <a:endParaRPr lang="en-US"/>
           </a:p>
@@ -2531,7 +2533,7 @@
           <a:p>
             <a:fld id="{B84C5C40-2055-49AF-9028-5DA79E75E391}" type="datetimeFigureOut">
               <a:rPr lang="en-US" smtClean="0"/>
-              <a:t>2/19/2026</a:t>
+              <a:t>2/26/2026</a:t>
             </a:fld>
             <a:endParaRPr lang="en-US"/>
           </a:p>
@@ -2808,7 +2810,7 @@
           <a:p>
             <a:fld id="{B84C5C40-2055-49AF-9028-5DA79E75E391}" type="datetimeFigureOut">
               <a:rPr lang="en-US" smtClean="0"/>
-              <a:t>2/19/2026</a:t>
+              <a:t>2/26/2026</a:t>
             </a:fld>
             <a:endParaRPr lang="en-US"/>
           </a:p>
@@ -3065,7 +3067,7 @@
           <a:p>
             <a:fld id="{B84C5C40-2055-49AF-9028-5DA79E75E391}" type="datetimeFigureOut">
               <a:rPr lang="en-US" smtClean="0"/>
-              <a:t>2/19/2026</a:t>
+              <a:t>2/26/2026</a:t>
             </a:fld>
             <a:endParaRPr lang="en-US"/>
           </a:p>
@@ -3278,7 +3280,7 @@
           <a:p>
             <a:fld id="{B84C5C40-2055-49AF-9028-5DA79E75E391}" type="datetimeFigureOut">
               <a:rPr lang="en-US" smtClean="0"/>
-              <a:t>2/19/2026</a:t>
+              <a:t>2/26/2026</a:t>
             </a:fld>
             <a:endParaRPr lang="en-US"/>
           </a:p>
@@ -3771,12 +3773,1067 @@
           <a:chExt cx="0" cy="0"/>
         </a:xfrm>
       </p:grpSpPr>
+      <p:sp>
+        <p:nvSpPr>
+          <p:cNvPr id="2" name="Rectangle: Rounded Corners 1">
+            <a:extLst>
+              <a:ext uri="{FF2B5EF4-FFF2-40B4-BE49-F238E27FC236}">
+                <a16:creationId xmlns:a16="http://schemas.microsoft.com/office/drawing/2014/main" id="{F09FDC59-6067-4502-1360-F42554AD87D3}"/>
+              </a:ext>
+            </a:extLst>
+          </p:cNvPr>
+          <p:cNvSpPr/>
+          <p:nvPr/>
+        </p:nvSpPr>
+        <p:spPr>
+          <a:xfrm>
+            <a:off x="4046220" y="3398520"/>
+            <a:ext cx="4282440" cy="457200"/>
+          </a:xfrm>
+          <a:prstGeom prst="roundRect">
+            <a:avLst/>
+          </a:prstGeom>
+          <a:solidFill>
+            <a:srgbClr val="B2D4EB"/>
+          </a:solidFill>
+          <a:ln>
+            <a:solidFill>
+              <a:schemeClr val="tx1"/>
+            </a:solidFill>
+          </a:ln>
+        </p:spPr>
+        <p:style>
+          <a:lnRef idx="2">
+            <a:schemeClr val="accent1">
+              <a:shade val="15000"/>
+            </a:schemeClr>
+          </a:lnRef>
+          <a:fillRef idx="1">
+            <a:schemeClr val="accent1"/>
+          </a:fillRef>
+          <a:effectRef idx="0">
+            <a:schemeClr val="accent1"/>
+          </a:effectRef>
+          <a:fontRef idx="minor">
+            <a:schemeClr val="lt1"/>
+          </a:fontRef>
+        </p:style>
+        <p:txBody>
+          <a:bodyPr rtlCol="0" anchor="ctr"/>
+          <a:lstStyle/>
+          <a:p>
+            <a:pPr algn="ctr"/>
+            <a:r>
+              <a:rPr lang="en-US" dirty="0">
+                <a:solidFill>
+                  <a:schemeClr val="tx1"/>
+                </a:solidFill>
+              </a:rPr>
+              <a:t>Search Public Information on the Web</a:t>
+            </a:r>
+            <a:endParaRPr lang="en-US" i="1" dirty="0">
+              <a:solidFill>
+                <a:schemeClr val="tx1"/>
+              </a:solidFill>
+            </a:endParaRPr>
+          </a:p>
+        </p:txBody>
+      </p:sp>
+      <p:sp>
+        <p:nvSpPr>
+          <p:cNvPr id="3" name="Rectangle: Rounded Corners 2">
+            <a:extLst>
+              <a:ext uri="{FF2B5EF4-FFF2-40B4-BE49-F238E27FC236}">
+                <a16:creationId xmlns:a16="http://schemas.microsoft.com/office/drawing/2014/main" id="{9800FF13-E208-2C00-EB7C-BCBA48F554BD}"/>
+              </a:ext>
+            </a:extLst>
+          </p:cNvPr>
+          <p:cNvSpPr/>
+          <p:nvPr/>
+        </p:nvSpPr>
+        <p:spPr>
+          <a:xfrm>
+            <a:off x="4046220" y="2625554"/>
+            <a:ext cx="4282440" cy="457200"/>
+          </a:xfrm>
+          <a:prstGeom prst="roundRect">
+            <a:avLst/>
+          </a:prstGeom>
+          <a:solidFill>
+            <a:srgbClr val="B2D4EB"/>
+          </a:solidFill>
+          <a:ln>
+            <a:solidFill>
+              <a:schemeClr val="tx1"/>
+            </a:solidFill>
+          </a:ln>
+        </p:spPr>
+        <p:style>
+          <a:lnRef idx="2">
+            <a:schemeClr val="accent1">
+              <a:shade val="15000"/>
+            </a:schemeClr>
+          </a:lnRef>
+          <a:fillRef idx="1">
+            <a:schemeClr val="accent1"/>
+          </a:fillRef>
+          <a:effectRef idx="0">
+            <a:schemeClr val="accent1"/>
+          </a:effectRef>
+          <a:fontRef idx="minor">
+            <a:schemeClr val="lt1"/>
+          </a:fontRef>
+        </p:style>
+        <p:txBody>
+          <a:bodyPr rtlCol="0" anchor="ctr"/>
+          <a:lstStyle/>
+          <a:p>
+            <a:pPr algn="ctr"/>
+            <a:r>
+              <a:rPr lang="en-US" dirty="0">
+                <a:solidFill>
+                  <a:schemeClr val="tx1"/>
+                </a:solidFill>
+              </a:rPr>
+              <a:t>Retrieve Stock Quotes from an API</a:t>
+            </a:r>
+            <a:endParaRPr lang="en-US" i="1" dirty="0">
+              <a:solidFill>
+                <a:schemeClr val="tx1"/>
+              </a:solidFill>
+            </a:endParaRPr>
+          </a:p>
+        </p:txBody>
+      </p:sp>
+      <p:sp>
+        <p:nvSpPr>
+          <p:cNvPr id="4" name="Rectangle: Rounded Corners 3">
+            <a:extLst>
+              <a:ext uri="{FF2B5EF4-FFF2-40B4-BE49-F238E27FC236}">
+                <a16:creationId xmlns:a16="http://schemas.microsoft.com/office/drawing/2014/main" id="{CD952C55-0F41-C8E8-4833-F5F86239B3AD}"/>
+              </a:ext>
+            </a:extLst>
+          </p:cNvPr>
+          <p:cNvSpPr/>
+          <p:nvPr/>
+        </p:nvSpPr>
+        <p:spPr>
+          <a:xfrm>
+            <a:off x="4046220" y="1855003"/>
+            <a:ext cx="4282440" cy="457200"/>
+          </a:xfrm>
+          <a:prstGeom prst="roundRect">
+            <a:avLst/>
+          </a:prstGeom>
+          <a:solidFill>
+            <a:srgbClr val="B2D4EB"/>
+          </a:solidFill>
+          <a:ln>
+            <a:solidFill>
+              <a:schemeClr val="tx1"/>
+            </a:solidFill>
+          </a:ln>
+        </p:spPr>
+        <p:style>
+          <a:lnRef idx="2">
+            <a:schemeClr val="accent1">
+              <a:shade val="15000"/>
+            </a:schemeClr>
+          </a:lnRef>
+          <a:fillRef idx="1">
+            <a:schemeClr val="accent1"/>
+          </a:fillRef>
+          <a:effectRef idx="0">
+            <a:schemeClr val="accent1"/>
+          </a:effectRef>
+          <a:fontRef idx="minor">
+            <a:schemeClr val="lt1"/>
+          </a:fontRef>
+        </p:style>
+        <p:txBody>
+          <a:bodyPr rtlCol="0" anchor="ctr"/>
+          <a:lstStyle/>
+          <a:p>
+            <a:pPr algn="ctr"/>
+            <a:r>
+              <a:rPr lang="en-US" dirty="0">
+                <a:solidFill>
+                  <a:schemeClr val="tx1"/>
+                </a:solidFill>
+              </a:rPr>
+              <a:t>Reference Internal Report Files</a:t>
+            </a:r>
+            <a:endParaRPr lang="en-US" i="1" dirty="0">
+              <a:solidFill>
+                <a:schemeClr val="tx1"/>
+              </a:solidFill>
+            </a:endParaRPr>
+          </a:p>
+        </p:txBody>
+      </p:sp>
+      <p:sp>
+        <p:nvSpPr>
+          <p:cNvPr id="5" name="Rectangle: Rounded Corners 4">
+            <a:extLst>
+              <a:ext uri="{FF2B5EF4-FFF2-40B4-BE49-F238E27FC236}">
+                <a16:creationId xmlns:a16="http://schemas.microsoft.com/office/drawing/2014/main" id="{600226F7-C833-1B1C-B967-7291F64244CC}"/>
+              </a:ext>
+            </a:extLst>
+          </p:cNvPr>
+          <p:cNvSpPr/>
+          <p:nvPr/>
+        </p:nvSpPr>
+        <p:spPr>
+          <a:xfrm>
+            <a:off x="1507938" y="2374095"/>
+            <a:ext cx="1913442" cy="960119"/>
+          </a:xfrm>
+          <a:prstGeom prst="roundRect">
+            <a:avLst/>
+          </a:prstGeom>
+          <a:solidFill>
+            <a:srgbClr val="E5F1F8"/>
+          </a:solidFill>
+          <a:ln>
+            <a:solidFill>
+              <a:schemeClr val="tx1"/>
+            </a:solidFill>
+          </a:ln>
+        </p:spPr>
+        <p:style>
+          <a:lnRef idx="2">
+            <a:schemeClr val="accent1">
+              <a:shade val="15000"/>
+            </a:schemeClr>
+          </a:lnRef>
+          <a:fillRef idx="1">
+            <a:schemeClr val="accent1"/>
+          </a:fillRef>
+          <a:effectRef idx="0">
+            <a:schemeClr val="accent1"/>
+          </a:effectRef>
+          <a:fontRef idx="minor">
+            <a:schemeClr val="lt1"/>
+          </a:fontRef>
+        </p:style>
+        <p:txBody>
+          <a:bodyPr rtlCol="0" anchor="ctr"/>
+          <a:lstStyle/>
+          <a:p>
+            <a:pPr algn="ctr"/>
+            <a:r>
+              <a:rPr lang="en-US" dirty="0">
+                <a:solidFill>
+                  <a:schemeClr val="tx1"/>
+                </a:solidFill>
+              </a:rPr>
+              <a:t>Query</a:t>
+            </a:r>
+          </a:p>
+          <a:p>
+            <a:pPr algn="ctr"/>
+            <a:r>
+              <a:rPr lang="en-US" dirty="0">
+                <a:solidFill>
+                  <a:schemeClr val="tx1"/>
+                </a:solidFill>
+              </a:rPr>
+              <a:t>Planning</a:t>
+            </a:r>
+          </a:p>
+        </p:txBody>
+      </p:sp>
+      <p:sp>
+        <p:nvSpPr>
+          <p:cNvPr id="6" name="Rectangle: Rounded Corners 5">
+            <a:extLst>
+              <a:ext uri="{FF2B5EF4-FFF2-40B4-BE49-F238E27FC236}">
+                <a16:creationId xmlns:a16="http://schemas.microsoft.com/office/drawing/2014/main" id="{C93C6EBF-0FE7-EC6E-5B5C-7AA41F6606DD}"/>
+              </a:ext>
+            </a:extLst>
+          </p:cNvPr>
+          <p:cNvSpPr/>
+          <p:nvPr/>
+        </p:nvSpPr>
+        <p:spPr>
+          <a:xfrm>
+            <a:off x="9837420" y="2374095"/>
+            <a:ext cx="1913442" cy="960119"/>
+          </a:xfrm>
+          <a:prstGeom prst="roundRect">
+            <a:avLst/>
+          </a:prstGeom>
+          <a:solidFill>
+            <a:srgbClr val="E5F1F8"/>
+          </a:solidFill>
+          <a:ln>
+            <a:solidFill>
+              <a:schemeClr val="tx1"/>
+            </a:solidFill>
+          </a:ln>
+        </p:spPr>
+        <p:style>
+          <a:lnRef idx="2">
+            <a:schemeClr val="accent1">
+              <a:shade val="15000"/>
+            </a:schemeClr>
+          </a:lnRef>
+          <a:fillRef idx="1">
+            <a:schemeClr val="accent1"/>
+          </a:fillRef>
+          <a:effectRef idx="0">
+            <a:schemeClr val="accent1"/>
+          </a:effectRef>
+          <a:fontRef idx="minor">
+            <a:schemeClr val="lt1"/>
+          </a:fontRef>
+        </p:style>
+        <p:txBody>
+          <a:bodyPr rtlCol="0" anchor="ctr"/>
+          <a:lstStyle/>
+          <a:p>
+            <a:pPr algn="ctr"/>
+            <a:r>
+              <a:rPr lang="en-US" dirty="0">
+                <a:solidFill>
+                  <a:schemeClr val="tx1"/>
+                </a:solidFill>
+              </a:rPr>
+              <a:t>Language</a:t>
+            </a:r>
+          </a:p>
+          <a:p>
+            <a:pPr algn="ctr"/>
+            <a:r>
+              <a:rPr lang="en-US" dirty="0">
+                <a:solidFill>
+                  <a:schemeClr val="tx1"/>
+                </a:solidFill>
+              </a:rPr>
+              <a:t>Model</a:t>
+            </a:r>
+          </a:p>
+        </p:txBody>
+      </p:sp>
+      <p:cxnSp>
+        <p:nvCxnSpPr>
+          <p:cNvPr id="7" name="Straight Arrow Connector 6">
+            <a:extLst>
+              <a:ext uri="{FF2B5EF4-FFF2-40B4-BE49-F238E27FC236}">
+                <a16:creationId xmlns:a16="http://schemas.microsoft.com/office/drawing/2014/main" id="{70FF9049-A038-5CD7-B5B6-A7A955E2687C}"/>
+              </a:ext>
+            </a:extLst>
+          </p:cNvPr>
+          <p:cNvCxnSpPr>
+            <a:cxnSpLocks/>
+            <a:stCxn id="5" idx="3"/>
+            <a:endCxn id="3" idx="1"/>
+          </p:cNvCxnSpPr>
+          <p:nvPr/>
+        </p:nvCxnSpPr>
+        <p:spPr>
+          <a:xfrm flipV="1">
+            <a:off x="3421380" y="2854154"/>
+            <a:ext cx="624840" cy="1"/>
+          </a:xfrm>
+          <a:prstGeom prst="straightConnector1">
+            <a:avLst/>
+          </a:prstGeom>
+          <a:ln>
+            <a:solidFill>
+              <a:schemeClr val="tx1"/>
+            </a:solidFill>
+            <a:prstDash val="solid"/>
+            <a:tailEnd type="triangle" w="lg" len="lg"/>
+          </a:ln>
+        </p:spPr>
+        <p:style>
+          <a:lnRef idx="2">
+            <a:schemeClr val="accent1"/>
+          </a:lnRef>
+          <a:fillRef idx="0">
+            <a:schemeClr val="accent1"/>
+          </a:fillRef>
+          <a:effectRef idx="1">
+            <a:schemeClr val="accent1"/>
+          </a:effectRef>
+          <a:fontRef idx="minor">
+            <a:schemeClr val="tx1"/>
+          </a:fontRef>
+        </p:style>
+      </p:cxnSp>
+      <p:cxnSp>
+        <p:nvCxnSpPr>
+          <p:cNvPr id="10" name="Straight Arrow Connector 9">
+            <a:extLst>
+              <a:ext uri="{FF2B5EF4-FFF2-40B4-BE49-F238E27FC236}">
+                <a16:creationId xmlns:a16="http://schemas.microsoft.com/office/drawing/2014/main" id="{2C10FC99-8029-AE13-0A3B-1F87064360AB}"/>
+              </a:ext>
+            </a:extLst>
+          </p:cNvPr>
+          <p:cNvCxnSpPr>
+            <a:cxnSpLocks/>
+            <a:stCxn id="44" idx="3"/>
+            <a:endCxn id="6" idx="1"/>
+          </p:cNvCxnSpPr>
+          <p:nvPr/>
+        </p:nvCxnSpPr>
+        <p:spPr>
+          <a:xfrm>
+            <a:off x="9189720" y="2854155"/>
+            <a:ext cx="647700" cy="0"/>
+          </a:xfrm>
+          <a:prstGeom prst="straightConnector1">
+            <a:avLst/>
+          </a:prstGeom>
+          <a:ln>
+            <a:solidFill>
+              <a:schemeClr val="tx1"/>
+            </a:solidFill>
+            <a:prstDash val="solid"/>
+            <a:tailEnd type="triangle" w="lg" len="lg"/>
+          </a:ln>
+        </p:spPr>
+        <p:style>
+          <a:lnRef idx="2">
+            <a:schemeClr val="accent1"/>
+          </a:lnRef>
+          <a:fillRef idx="0">
+            <a:schemeClr val="accent1"/>
+          </a:fillRef>
+          <a:effectRef idx="1">
+            <a:schemeClr val="accent1"/>
+          </a:effectRef>
+          <a:fontRef idx="minor">
+            <a:schemeClr val="tx1"/>
+          </a:fontRef>
+        </p:style>
+      </p:cxnSp>
+      <p:sp>
+        <p:nvSpPr>
+          <p:cNvPr id="15" name="Rectangle: Rounded Corners 14">
+            <a:extLst>
+              <a:ext uri="{FF2B5EF4-FFF2-40B4-BE49-F238E27FC236}">
+                <a16:creationId xmlns:a16="http://schemas.microsoft.com/office/drawing/2014/main" id="{C23DA4FB-7AE1-4EE4-8DD5-321F7F7C7F33}"/>
+              </a:ext>
+            </a:extLst>
+          </p:cNvPr>
+          <p:cNvSpPr/>
+          <p:nvPr/>
+        </p:nvSpPr>
+        <p:spPr>
+          <a:xfrm>
+            <a:off x="189267" y="2619607"/>
+            <a:ext cx="915222" cy="469096"/>
+          </a:xfrm>
+          <a:prstGeom prst="roundRect">
+            <a:avLst/>
+          </a:prstGeom>
+          <a:solidFill>
+            <a:srgbClr val="E5F1F8"/>
+          </a:solidFill>
+          <a:ln>
+            <a:solidFill>
+              <a:schemeClr val="tx1"/>
+            </a:solidFill>
+          </a:ln>
+        </p:spPr>
+        <p:style>
+          <a:lnRef idx="2">
+            <a:schemeClr val="accent1">
+              <a:shade val="15000"/>
+            </a:schemeClr>
+          </a:lnRef>
+          <a:fillRef idx="1">
+            <a:schemeClr val="accent1"/>
+          </a:fillRef>
+          <a:effectRef idx="0">
+            <a:schemeClr val="accent1"/>
+          </a:effectRef>
+          <a:fontRef idx="minor">
+            <a:schemeClr val="lt1"/>
+          </a:fontRef>
+        </p:style>
+        <p:txBody>
+          <a:bodyPr rtlCol="0" anchor="ctr"/>
+          <a:lstStyle/>
+          <a:p>
+            <a:pPr algn="ctr"/>
+            <a:r>
+              <a:rPr lang="en-US" dirty="0">
+                <a:solidFill>
+                  <a:schemeClr val="tx1"/>
+                </a:solidFill>
+              </a:rPr>
+              <a:t>Prompt</a:t>
+            </a:r>
+          </a:p>
+        </p:txBody>
+      </p:sp>
+      <p:cxnSp>
+        <p:nvCxnSpPr>
+          <p:cNvPr id="16" name="Straight Arrow Connector 15">
+            <a:extLst>
+              <a:ext uri="{FF2B5EF4-FFF2-40B4-BE49-F238E27FC236}">
+                <a16:creationId xmlns:a16="http://schemas.microsoft.com/office/drawing/2014/main" id="{942D3144-4FA8-07EA-6898-D7B2C45E010A}"/>
+              </a:ext>
+            </a:extLst>
+          </p:cNvPr>
+          <p:cNvCxnSpPr>
+            <a:cxnSpLocks/>
+            <a:stCxn id="15" idx="3"/>
+            <a:endCxn id="5" idx="1"/>
+          </p:cNvCxnSpPr>
+          <p:nvPr/>
+        </p:nvCxnSpPr>
+        <p:spPr>
+          <a:xfrm>
+            <a:off x="1104489" y="2854155"/>
+            <a:ext cx="403449" cy="0"/>
+          </a:xfrm>
+          <a:prstGeom prst="straightConnector1">
+            <a:avLst/>
+          </a:prstGeom>
+          <a:ln>
+            <a:solidFill>
+              <a:schemeClr val="tx1"/>
+            </a:solidFill>
+            <a:prstDash val="sysDash"/>
+            <a:tailEnd type="triangle" w="lg" len="lg"/>
+          </a:ln>
+        </p:spPr>
+        <p:style>
+          <a:lnRef idx="2">
+            <a:schemeClr val="accent1"/>
+          </a:lnRef>
+          <a:fillRef idx="0">
+            <a:schemeClr val="accent1"/>
+          </a:fillRef>
+          <a:effectRef idx="1">
+            <a:schemeClr val="accent1"/>
+          </a:effectRef>
+          <a:fontRef idx="minor">
+            <a:schemeClr val="tx1"/>
+          </a:fontRef>
+        </p:style>
+      </p:cxnSp>
+      <p:cxnSp>
+        <p:nvCxnSpPr>
+          <p:cNvPr id="19" name="Connector: Elbow 18">
+            <a:extLst>
+              <a:ext uri="{FF2B5EF4-FFF2-40B4-BE49-F238E27FC236}">
+                <a16:creationId xmlns:a16="http://schemas.microsoft.com/office/drawing/2014/main" id="{BF48D9D9-8BAB-3118-5B91-13BAA46C2349}"/>
+              </a:ext>
+            </a:extLst>
+          </p:cNvPr>
+          <p:cNvCxnSpPr>
+            <a:cxnSpLocks/>
+            <a:stCxn id="5" idx="3"/>
+            <a:endCxn id="4" idx="1"/>
+          </p:cNvCxnSpPr>
+          <p:nvPr/>
+        </p:nvCxnSpPr>
+        <p:spPr>
+          <a:xfrm flipV="1">
+            <a:off x="3421380" y="2083603"/>
+            <a:ext cx="624840" cy="770552"/>
+          </a:xfrm>
+          <a:prstGeom prst="bentConnector3">
+            <a:avLst>
+              <a:gd name="adj1" fmla="val 50000"/>
+            </a:avLst>
+          </a:prstGeom>
+          <a:ln>
+            <a:solidFill>
+              <a:schemeClr val="tx1"/>
+            </a:solidFill>
+            <a:prstDash val="solid"/>
+            <a:tailEnd type="triangle" w="lg" len="lg"/>
+          </a:ln>
+        </p:spPr>
+        <p:style>
+          <a:lnRef idx="2">
+            <a:schemeClr val="accent1"/>
+          </a:lnRef>
+          <a:fillRef idx="0">
+            <a:schemeClr val="accent1"/>
+          </a:fillRef>
+          <a:effectRef idx="1">
+            <a:schemeClr val="accent1"/>
+          </a:effectRef>
+          <a:fontRef idx="minor">
+            <a:schemeClr val="tx1"/>
+          </a:fontRef>
+        </p:style>
+      </p:cxnSp>
+      <p:cxnSp>
+        <p:nvCxnSpPr>
+          <p:cNvPr id="22" name="Connector: Elbow 21">
+            <a:extLst>
+              <a:ext uri="{FF2B5EF4-FFF2-40B4-BE49-F238E27FC236}">
+                <a16:creationId xmlns:a16="http://schemas.microsoft.com/office/drawing/2014/main" id="{217AA7E3-1E41-FB8C-7F66-A5758B29A028}"/>
+              </a:ext>
+            </a:extLst>
+          </p:cNvPr>
+          <p:cNvCxnSpPr>
+            <a:cxnSpLocks/>
+            <a:stCxn id="5" idx="3"/>
+            <a:endCxn id="2" idx="1"/>
+          </p:cNvCxnSpPr>
+          <p:nvPr/>
+        </p:nvCxnSpPr>
+        <p:spPr>
+          <a:xfrm>
+            <a:off x="3421380" y="2854155"/>
+            <a:ext cx="624840" cy="772965"/>
+          </a:xfrm>
+          <a:prstGeom prst="bentConnector3">
+            <a:avLst>
+              <a:gd name="adj1" fmla="val 50000"/>
+            </a:avLst>
+          </a:prstGeom>
+          <a:ln>
+            <a:solidFill>
+              <a:schemeClr val="tx1"/>
+            </a:solidFill>
+            <a:prstDash val="solid"/>
+            <a:tailEnd type="triangle" w="lg" len="lg"/>
+          </a:ln>
+        </p:spPr>
+        <p:style>
+          <a:lnRef idx="2">
+            <a:schemeClr val="accent1"/>
+          </a:lnRef>
+          <a:fillRef idx="0">
+            <a:schemeClr val="accent1"/>
+          </a:fillRef>
+          <a:effectRef idx="1">
+            <a:schemeClr val="accent1"/>
+          </a:effectRef>
+          <a:fontRef idx="minor">
+            <a:schemeClr val="tx1"/>
+          </a:fontRef>
+        </p:style>
+      </p:cxnSp>
+      <p:sp>
+        <p:nvSpPr>
+          <p:cNvPr id="25" name="Rectangle: Rounded Corners 24">
+            <a:extLst>
+              <a:ext uri="{FF2B5EF4-FFF2-40B4-BE49-F238E27FC236}">
+                <a16:creationId xmlns:a16="http://schemas.microsoft.com/office/drawing/2014/main" id="{98E95763-BD68-DEF9-F942-CCC8B336544E}"/>
+              </a:ext>
+            </a:extLst>
+          </p:cNvPr>
+          <p:cNvSpPr/>
+          <p:nvPr/>
+        </p:nvSpPr>
+        <p:spPr>
+          <a:xfrm>
+            <a:off x="8732520" y="1852591"/>
+            <a:ext cx="457200" cy="457200"/>
+          </a:xfrm>
+          <a:prstGeom prst="roundRect">
+            <a:avLst/>
+          </a:prstGeom>
+          <a:solidFill>
+            <a:srgbClr val="E5F1F8"/>
+          </a:solidFill>
+          <a:ln>
+            <a:solidFill>
+              <a:schemeClr val="tx1"/>
+            </a:solidFill>
+          </a:ln>
+        </p:spPr>
+        <p:style>
+          <a:lnRef idx="2">
+            <a:schemeClr val="accent1">
+              <a:shade val="15000"/>
+            </a:schemeClr>
+          </a:lnRef>
+          <a:fillRef idx="1">
+            <a:schemeClr val="accent1"/>
+          </a:fillRef>
+          <a:effectRef idx="0">
+            <a:schemeClr val="accent1"/>
+          </a:effectRef>
+          <a:fontRef idx="minor">
+            <a:schemeClr val="lt1"/>
+          </a:fontRef>
+        </p:style>
+        <p:txBody>
+          <a:bodyPr rtlCol="0" anchor="ctr"/>
+          <a:lstStyle/>
+          <a:p>
+            <a:pPr algn="ctr"/>
+            <a:endParaRPr lang="en-US" dirty="0">
+              <a:solidFill>
+                <a:schemeClr val="tx1"/>
+              </a:solidFill>
+            </a:endParaRPr>
+          </a:p>
+        </p:txBody>
+      </p:sp>
+      <p:cxnSp>
+        <p:nvCxnSpPr>
+          <p:cNvPr id="40" name="Straight Arrow Connector 39">
+            <a:extLst>
+              <a:ext uri="{FF2B5EF4-FFF2-40B4-BE49-F238E27FC236}">
+                <a16:creationId xmlns:a16="http://schemas.microsoft.com/office/drawing/2014/main" id="{B899F5AF-E80C-3452-008E-8E821AEFA864}"/>
+              </a:ext>
+            </a:extLst>
+          </p:cNvPr>
+          <p:cNvCxnSpPr>
+            <a:cxnSpLocks/>
+            <a:stCxn id="4" idx="3"/>
+            <a:endCxn id="25" idx="1"/>
+          </p:cNvCxnSpPr>
+          <p:nvPr/>
+        </p:nvCxnSpPr>
+        <p:spPr>
+          <a:xfrm flipV="1">
+            <a:off x="8328660" y="2081191"/>
+            <a:ext cx="403860" cy="2412"/>
+          </a:xfrm>
+          <a:prstGeom prst="straightConnector1">
+            <a:avLst/>
+          </a:prstGeom>
+          <a:ln>
+            <a:solidFill>
+              <a:schemeClr val="tx1"/>
+            </a:solidFill>
+            <a:prstDash val="solid"/>
+            <a:tailEnd type="triangle" w="lg" len="lg"/>
+          </a:ln>
+        </p:spPr>
+        <p:style>
+          <a:lnRef idx="2">
+            <a:schemeClr val="accent1"/>
+          </a:lnRef>
+          <a:fillRef idx="0">
+            <a:schemeClr val="accent1"/>
+          </a:fillRef>
+          <a:effectRef idx="1">
+            <a:schemeClr val="accent1"/>
+          </a:effectRef>
+          <a:fontRef idx="minor">
+            <a:schemeClr val="tx1"/>
+          </a:fontRef>
+        </p:style>
+      </p:cxnSp>
+      <p:sp>
+        <p:nvSpPr>
+          <p:cNvPr id="44" name="Rectangle: Rounded Corners 43">
+            <a:extLst>
+              <a:ext uri="{FF2B5EF4-FFF2-40B4-BE49-F238E27FC236}">
+                <a16:creationId xmlns:a16="http://schemas.microsoft.com/office/drawing/2014/main" id="{3F66FD98-C347-7EA9-DC36-7FDBB97B4248}"/>
+              </a:ext>
+            </a:extLst>
+          </p:cNvPr>
+          <p:cNvSpPr/>
+          <p:nvPr/>
+        </p:nvSpPr>
+        <p:spPr>
+          <a:xfrm>
+            <a:off x="8732520" y="2625555"/>
+            <a:ext cx="457200" cy="457200"/>
+          </a:xfrm>
+          <a:prstGeom prst="roundRect">
+            <a:avLst/>
+          </a:prstGeom>
+          <a:solidFill>
+            <a:srgbClr val="E5F1F8"/>
+          </a:solidFill>
+          <a:ln>
+            <a:solidFill>
+              <a:schemeClr val="tx1"/>
+            </a:solidFill>
+          </a:ln>
+        </p:spPr>
+        <p:style>
+          <a:lnRef idx="2">
+            <a:schemeClr val="accent1">
+              <a:shade val="15000"/>
+            </a:schemeClr>
+          </a:lnRef>
+          <a:fillRef idx="1">
+            <a:schemeClr val="accent1"/>
+          </a:fillRef>
+          <a:effectRef idx="0">
+            <a:schemeClr val="accent1"/>
+          </a:effectRef>
+          <a:fontRef idx="minor">
+            <a:schemeClr val="lt1"/>
+          </a:fontRef>
+        </p:style>
+        <p:txBody>
+          <a:bodyPr rtlCol="0" anchor="ctr"/>
+          <a:lstStyle/>
+          <a:p>
+            <a:pPr algn="ctr"/>
+            <a:endParaRPr lang="en-US" dirty="0">
+              <a:solidFill>
+                <a:schemeClr val="tx1"/>
+              </a:solidFill>
+            </a:endParaRPr>
+          </a:p>
+        </p:txBody>
+      </p:sp>
+      <p:sp>
+        <p:nvSpPr>
+          <p:cNvPr id="46" name="Rectangle: Rounded Corners 45">
+            <a:extLst>
+              <a:ext uri="{FF2B5EF4-FFF2-40B4-BE49-F238E27FC236}">
+                <a16:creationId xmlns:a16="http://schemas.microsoft.com/office/drawing/2014/main" id="{A791A27B-2AA1-8E05-2231-C99FE09DCBEB}"/>
+              </a:ext>
+            </a:extLst>
+          </p:cNvPr>
+          <p:cNvSpPr/>
+          <p:nvPr/>
+        </p:nvSpPr>
+        <p:spPr>
+          <a:xfrm>
+            <a:off x="8732520" y="3398519"/>
+            <a:ext cx="457200" cy="457200"/>
+          </a:xfrm>
+          <a:prstGeom prst="roundRect">
+            <a:avLst/>
+          </a:prstGeom>
+          <a:solidFill>
+            <a:srgbClr val="E5F1F8"/>
+          </a:solidFill>
+          <a:ln>
+            <a:solidFill>
+              <a:schemeClr val="tx1"/>
+            </a:solidFill>
+          </a:ln>
+        </p:spPr>
+        <p:style>
+          <a:lnRef idx="2">
+            <a:schemeClr val="accent1">
+              <a:shade val="15000"/>
+            </a:schemeClr>
+          </a:lnRef>
+          <a:fillRef idx="1">
+            <a:schemeClr val="accent1"/>
+          </a:fillRef>
+          <a:effectRef idx="0">
+            <a:schemeClr val="accent1"/>
+          </a:effectRef>
+          <a:fontRef idx="minor">
+            <a:schemeClr val="lt1"/>
+          </a:fontRef>
+        </p:style>
+        <p:txBody>
+          <a:bodyPr rtlCol="0" anchor="ctr"/>
+          <a:lstStyle/>
+          <a:p>
+            <a:pPr algn="ctr"/>
+            <a:endParaRPr lang="en-US" dirty="0">
+              <a:solidFill>
+                <a:schemeClr val="tx1"/>
+              </a:solidFill>
+            </a:endParaRPr>
+          </a:p>
+        </p:txBody>
+      </p:sp>
+      <p:cxnSp>
+        <p:nvCxnSpPr>
+          <p:cNvPr id="47" name="Straight Arrow Connector 46">
+            <a:extLst>
+              <a:ext uri="{FF2B5EF4-FFF2-40B4-BE49-F238E27FC236}">
+                <a16:creationId xmlns:a16="http://schemas.microsoft.com/office/drawing/2014/main" id="{42D77B26-2C1F-3022-9B0B-3736BC5CF8AA}"/>
+              </a:ext>
+            </a:extLst>
+          </p:cNvPr>
+          <p:cNvCxnSpPr>
+            <a:cxnSpLocks/>
+            <a:stCxn id="3" idx="3"/>
+            <a:endCxn id="44" idx="1"/>
+          </p:cNvCxnSpPr>
+          <p:nvPr/>
+        </p:nvCxnSpPr>
+        <p:spPr>
+          <a:xfrm>
+            <a:off x="8328660" y="2854154"/>
+            <a:ext cx="403860" cy="1"/>
+          </a:xfrm>
+          <a:prstGeom prst="straightConnector1">
+            <a:avLst/>
+          </a:prstGeom>
+          <a:ln>
+            <a:solidFill>
+              <a:schemeClr val="tx1"/>
+            </a:solidFill>
+            <a:prstDash val="solid"/>
+            <a:tailEnd type="triangle" w="lg" len="lg"/>
+          </a:ln>
+        </p:spPr>
+        <p:style>
+          <a:lnRef idx="2">
+            <a:schemeClr val="accent1"/>
+          </a:lnRef>
+          <a:fillRef idx="0">
+            <a:schemeClr val="accent1"/>
+          </a:fillRef>
+          <a:effectRef idx="1">
+            <a:schemeClr val="accent1"/>
+          </a:effectRef>
+          <a:fontRef idx="minor">
+            <a:schemeClr val="tx1"/>
+          </a:fontRef>
+        </p:style>
+      </p:cxnSp>
+      <p:cxnSp>
+        <p:nvCxnSpPr>
+          <p:cNvPr id="55" name="Straight Arrow Connector 54">
+            <a:extLst>
+              <a:ext uri="{FF2B5EF4-FFF2-40B4-BE49-F238E27FC236}">
+                <a16:creationId xmlns:a16="http://schemas.microsoft.com/office/drawing/2014/main" id="{A99ECFB6-8E63-4F62-C5D3-37BC5BB43934}"/>
+              </a:ext>
+            </a:extLst>
+          </p:cNvPr>
+          <p:cNvCxnSpPr>
+            <a:cxnSpLocks/>
+            <a:stCxn id="2" idx="3"/>
+            <a:endCxn id="46" idx="1"/>
+          </p:cNvCxnSpPr>
+          <p:nvPr/>
+        </p:nvCxnSpPr>
+        <p:spPr>
+          <a:xfrm flipV="1">
+            <a:off x="8328660" y="3627119"/>
+            <a:ext cx="403860" cy="1"/>
+          </a:xfrm>
+          <a:prstGeom prst="straightConnector1">
+            <a:avLst/>
+          </a:prstGeom>
+          <a:ln>
+            <a:solidFill>
+              <a:schemeClr val="tx1"/>
+            </a:solidFill>
+            <a:prstDash val="solid"/>
+            <a:tailEnd type="triangle" w="lg" len="lg"/>
+          </a:ln>
+        </p:spPr>
+        <p:style>
+          <a:lnRef idx="2">
+            <a:schemeClr val="accent1"/>
+          </a:lnRef>
+          <a:fillRef idx="0">
+            <a:schemeClr val="accent1"/>
+          </a:fillRef>
+          <a:effectRef idx="1">
+            <a:schemeClr val="accent1"/>
+          </a:effectRef>
+          <a:fontRef idx="minor">
+            <a:schemeClr val="tx1"/>
+          </a:fontRef>
+        </p:style>
+      </p:cxnSp>
+      <p:cxnSp>
+        <p:nvCxnSpPr>
+          <p:cNvPr id="58" name="Connector: Elbow 57">
+            <a:extLst>
+              <a:ext uri="{FF2B5EF4-FFF2-40B4-BE49-F238E27FC236}">
+                <a16:creationId xmlns:a16="http://schemas.microsoft.com/office/drawing/2014/main" id="{DDB500F1-F165-AABE-6725-11E4ED79023E}"/>
+              </a:ext>
+            </a:extLst>
+          </p:cNvPr>
+          <p:cNvCxnSpPr>
+            <a:cxnSpLocks/>
+            <a:stCxn id="25" idx="3"/>
+            <a:endCxn id="6" idx="1"/>
+          </p:cNvCxnSpPr>
+          <p:nvPr/>
+        </p:nvCxnSpPr>
+        <p:spPr>
+          <a:xfrm>
+            <a:off x="9189720" y="2081191"/>
+            <a:ext cx="647700" cy="772964"/>
+          </a:xfrm>
+          <a:prstGeom prst="bentConnector3">
+            <a:avLst>
+              <a:gd name="adj1" fmla="val 50000"/>
+            </a:avLst>
+          </a:prstGeom>
+          <a:ln>
+            <a:solidFill>
+              <a:schemeClr val="tx1"/>
+            </a:solidFill>
+            <a:prstDash val="solid"/>
+            <a:tailEnd type="triangle" w="lg" len="lg"/>
+          </a:ln>
+        </p:spPr>
+        <p:style>
+          <a:lnRef idx="2">
+            <a:schemeClr val="accent1"/>
+          </a:lnRef>
+          <a:fillRef idx="0">
+            <a:schemeClr val="accent1"/>
+          </a:fillRef>
+          <a:effectRef idx="1">
+            <a:schemeClr val="accent1"/>
+          </a:effectRef>
+          <a:fontRef idx="minor">
+            <a:schemeClr val="tx1"/>
+          </a:fontRef>
+        </p:style>
+      </p:cxnSp>
+      <p:cxnSp>
+        <p:nvCxnSpPr>
+          <p:cNvPr id="61" name="Connector: Elbow 60">
+            <a:extLst>
+              <a:ext uri="{FF2B5EF4-FFF2-40B4-BE49-F238E27FC236}">
+                <a16:creationId xmlns:a16="http://schemas.microsoft.com/office/drawing/2014/main" id="{28AC6A5D-0A01-5370-996D-AF8698A1082D}"/>
+              </a:ext>
+            </a:extLst>
+          </p:cNvPr>
+          <p:cNvCxnSpPr>
+            <a:cxnSpLocks/>
+            <a:stCxn id="46" idx="3"/>
+            <a:endCxn id="6" idx="1"/>
+          </p:cNvCxnSpPr>
+          <p:nvPr/>
+        </p:nvCxnSpPr>
+        <p:spPr>
+          <a:xfrm flipV="1">
+            <a:off x="9189720" y="2854155"/>
+            <a:ext cx="647700" cy="772964"/>
+          </a:xfrm>
+          <a:prstGeom prst="bentConnector3">
+            <a:avLst>
+              <a:gd name="adj1" fmla="val 50000"/>
+            </a:avLst>
+          </a:prstGeom>
+          <a:ln>
+            <a:solidFill>
+              <a:schemeClr val="tx1"/>
+            </a:solidFill>
+            <a:prstDash val="solid"/>
+            <a:tailEnd type="triangle" w="lg" len="lg"/>
+          </a:ln>
+        </p:spPr>
+        <p:style>
+          <a:lnRef idx="2">
+            <a:schemeClr val="accent1"/>
+          </a:lnRef>
+          <a:fillRef idx="0">
+            <a:schemeClr val="accent1"/>
+          </a:fillRef>
+          <a:effectRef idx="1">
+            <a:schemeClr val="accent1"/>
+          </a:effectRef>
+          <a:fontRef idx="minor">
+            <a:schemeClr val="tx1"/>
+          </a:fontRef>
+        </p:style>
+      </p:cxnSp>
       <p:pic>
         <p:nvPicPr>
-          <p:cNvPr id="3" name="Picture 2">
-            <a:extLst>
-              <a:ext uri="{FF2B5EF4-FFF2-40B4-BE49-F238E27FC236}">
-                <a16:creationId xmlns:a16="http://schemas.microsoft.com/office/drawing/2014/main" id="{FD8E52CD-5961-A7C1-3607-A00CDD4774AD}"/>
+          <p:cNvPr id="67" name="Graphic 66" descr="Web design with solid fill">
+            <a:extLst>
+              <a:ext uri="{FF2B5EF4-FFF2-40B4-BE49-F238E27FC236}">
+                <a16:creationId xmlns:a16="http://schemas.microsoft.com/office/drawing/2014/main" id="{5D8BB564-5BA8-868D-2AB7-35E0D3AE65F9}"/>
               </a:ext>
             </a:extLst>
           </p:cNvPr>
@@ -3786,25 +4843,294 @@
           <p:nvPr/>
         </p:nvPicPr>
         <p:blipFill>
-          <a:blip r:embed="rId2"/>
+          <a:blip r:embed="rId2">
+            <a:extLst>
+              <a:ext uri="{96DAC541-7B7A-43D3-8B79-37D633B846F1}">
+                <asvg:svgBlip xmlns:asvg="http://schemas.microsoft.com/office/drawing/2016/SVG/main" r:embed="rId3"/>
+              </a:ext>
+            </a:extLst>
+          </a:blip>
           <a:stretch>
             <a:fillRect/>
           </a:stretch>
         </p:blipFill>
         <p:spPr>
           <a:xfrm>
-            <a:off x="0" y="23812"/>
-            <a:ext cx="12192000" cy="6810375"/>
+            <a:off x="8755380" y="2648413"/>
+            <a:ext cx="411480" cy="411480"/>
           </a:xfrm>
           <a:prstGeom prst="rect">
             <a:avLst/>
           </a:prstGeom>
         </p:spPr>
       </p:pic>
+      <p:pic>
+        <p:nvPicPr>
+          <p:cNvPr id="71" name="Graphic 70" descr="World with solid fill">
+            <a:extLst>
+              <a:ext uri="{FF2B5EF4-FFF2-40B4-BE49-F238E27FC236}">
+                <a16:creationId xmlns:a16="http://schemas.microsoft.com/office/drawing/2014/main" id="{0EF50C39-FA5F-96A6-2DE6-53C76B029FDB}"/>
+              </a:ext>
+            </a:extLst>
+          </p:cNvPr>
+          <p:cNvPicPr>
+            <a:picLocks noChangeAspect="1"/>
+          </p:cNvPicPr>
+          <p:nvPr/>
+        </p:nvPicPr>
+        <p:blipFill>
+          <a:blip r:embed="rId4">
+            <a:extLst>
+              <a:ext uri="{96DAC541-7B7A-43D3-8B79-37D633B846F1}">
+                <asvg:svgBlip xmlns:asvg="http://schemas.microsoft.com/office/drawing/2016/SVG/main" r:embed="rId5"/>
+              </a:ext>
+            </a:extLst>
+          </a:blip>
+          <a:stretch>
+            <a:fillRect/>
+          </a:stretch>
+        </p:blipFill>
+        <p:spPr>
+          <a:xfrm>
+            <a:off x="8755380" y="3421379"/>
+            <a:ext cx="411480" cy="411480"/>
+          </a:xfrm>
+          <a:prstGeom prst="rect">
+            <a:avLst/>
+          </a:prstGeom>
+        </p:spPr>
+      </p:pic>
+      <p:pic>
+        <p:nvPicPr>
+          <p:cNvPr id="73" name="Graphic 72" descr="Database with solid fill">
+            <a:extLst>
+              <a:ext uri="{FF2B5EF4-FFF2-40B4-BE49-F238E27FC236}">
+                <a16:creationId xmlns:a16="http://schemas.microsoft.com/office/drawing/2014/main" id="{20B0889E-3ACA-9DCA-25FE-C1F9B73F7329}"/>
+              </a:ext>
+            </a:extLst>
+          </p:cNvPr>
+          <p:cNvPicPr>
+            <a:picLocks noChangeAspect="1"/>
+          </p:cNvPicPr>
+          <p:nvPr/>
+        </p:nvPicPr>
+        <p:blipFill>
+          <a:blip r:embed="rId6">
+            <a:extLst>
+              <a:ext uri="{96DAC541-7B7A-43D3-8B79-37D633B846F1}">
+                <asvg:svgBlip xmlns:asvg="http://schemas.microsoft.com/office/drawing/2016/SVG/main" r:embed="rId7"/>
+              </a:ext>
+            </a:extLst>
+          </a:blip>
+          <a:stretch>
+            <a:fillRect/>
+          </a:stretch>
+        </p:blipFill>
+        <p:spPr>
+          <a:xfrm>
+            <a:off x="8755380" y="1875451"/>
+            <a:ext cx="411480" cy="411480"/>
+          </a:xfrm>
+          <a:prstGeom prst="rect">
+            <a:avLst/>
+          </a:prstGeom>
+        </p:spPr>
+      </p:pic>
+      <p:pic>
+        <p:nvPicPr>
+          <p:cNvPr id="75" name="Graphic 74" descr="Gears with solid fill">
+            <a:extLst>
+              <a:ext uri="{FF2B5EF4-FFF2-40B4-BE49-F238E27FC236}">
+                <a16:creationId xmlns:a16="http://schemas.microsoft.com/office/drawing/2014/main" id="{AFA7CC75-0D4E-9273-3BC2-179536E5EC20}"/>
+              </a:ext>
+            </a:extLst>
+          </p:cNvPr>
+          <p:cNvPicPr>
+            <a:picLocks noChangeAspect="1"/>
+          </p:cNvPicPr>
+          <p:nvPr/>
+        </p:nvPicPr>
+        <p:blipFill>
+          <a:blip r:embed="rId8">
+            <a:extLst>
+              <a:ext uri="{96DAC541-7B7A-43D3-8B79-37D633B846F1}">
+                <asvg:svgBlip xmlns:asvg="http://schemas.microsoft.com/office/drawing/2016/SVG/main" r:embed="rId9"/>
+              </a:ext>
+            </a:extLst>
+          </a:blip>
+          <a:stretch>
+            <a:fillRect/>
+          </a:stretch>
+        </p:blipFill>
+        <p:spPr>
+          <a:xfrm>
+            <a:off x="1626048" y="2648413"/>
+            <a:ext cx="411480" cy="411480"/>
+          </a:xfrm>
+          <a:prstGeom prst="rect">
+            <a:avLst/>
+          </a:prstGeom>
+        </p:spPr>
+      </p:pic>
+      <p:sp>
+        <p:nvSpPr>
+          <p:cNvPr id="76" name="Rectangle: Rounded Corners 75">
+            <a:extLst>
+              <a:ext uri="{FF2B5EF4-FFF2-40B4-BE49-F238E27FC236}">
+                <a16:creationId xmlns:a16="http://schemas.microsoft.com/office/drawing/2014/main" id="{3492D89A-8D12-E69E-613E-246E45DCD83F}"/>
+              </a:ext>
+            </a:extLst>
+          </p:cNvPr>
+          <p:cNvSpPr/>
+          <p:nvPr/>
+        </p:nvSpPr>
+        <p:spPr>
+          <a:xfrm>
+            <a:off x="10545258" y="3627118"/>
+            <a:ext cx="1205604" cy="469096"/>
+          </a:xfrm>
+          <a:prstGeom prst="roundRect">
+            <a:avLst/>
+          </a:prstGeom>
+          <a:solidFill>
+            <a:srgbClr val="E5F1F8"/>
+          </a:solidFill>
+          <a:ln>
+            <a:solidFill>
+              <a:schemeClr val="tx1"/>
+            </a:solidFill>
+          </a:ln>
+        </p:spPr>
+        <p:style>
+          <a:lnRef idx="2">
+            <a:schemeClr val="accent1">
+              <a:shade val="15000"/>
+            </a:schemeClr>
+          </a:lnRef>
+          <a:fillRef idx="1">
+            <a:schemeClr val="accent1"/>
+          </a:fillRef>
+          <a:effectRef idx="0">
+            <a:schemeClr val="accent1"/>
+          </a:effectRef>
+          <a:fontRef idx="minor">
+            <a:schemeClr val="lt1"/>
+          </a:fontRef>
+        </p:style>
+        <p:txBody>
+          <a:bodyPr rtlCol="0" anchor="ctr"/>
+          <a:lstStyle/>
+          <a:p>
+            <a:pPr algn="ctr"/>
+            <a:r>
+              <a:rPr lang="en-US" dirty="0">
+                <a:solidFill>
+                  <a:schemeClr val="tx1"/>
+                </a:solidFill>
+              </a:rPr>
+              <a:t>Response</a:t>
+            </a:r>
+          </a:p>
+        </p:txBody>
+      </p:sp>
+      <p:cxnSp>
+        <p:nvCxnSpPr>
+          <p:cNvPr id="77" name="Straight Arrow Connector 76">
+            <a:extLst>
+              <a:ext uri="{FF2B5EF4-FFF2-40B4-BE49-F238E27FC236}">
+                <a16:creationId xmlns:a16="http://schemas.microsoft.com/office/drawing/2014/main" id="{1A734903-BE53-2153-B1BE-7817395A6ACC}"/>
+              </a:ext>
+            </a:extLst>
+          </p:cNvPr>
+          <p:cNvCxnSpPr>
+            <a:cxnSpLocks/>
+            <a:endCxn id="76" idx="0"/>
+          </p:cNvCxnSpPr>
+          <p:nvPr/>
+        </p:nvCxnSpPr>
+        <p:spPr>
+          <a:xfrm>
+            <a:off x="11148060" y="3334214"/>
+            <a:ext cx="0" cy="292904"/>
+          </a:xfrm>
+          <a:prstGeom prst="straightConnector1">
+            <a:avLst/>
+          </a:prstGeom>
+          <a:ln>
+            <a:solidFill>
+              <a:schemeClr val="tx1"/>
+            </a:solidFill>
+            <a:prstDash val="sysDash"/>
+            <a:tailEnd type="triangle" w="lg" len="lg"/>
+          </a:ln>
+        </p:spPr>
+        <p:style>
+          <a:lnRef idx="2">
+            <a:schemeClr val="accent1"/>
+          </a:lnRef>
+          <a:fillRef idx="0">
+            <a:schemeClr val="accent1"/>
+          </a:fillRef>
+          <a:effectRef idx="1">
+            <a:schemeClr val="accent1"/>
+          </a:effectRef>
+          <a:fontRef idx="minor">
+            <a:schemeClr val="tx1"/>
+          </a:fontRef>
+        </p:style>
+      </p:cxnSp>
+      <p:cxnSp>
+        <p:nvCxnSpPr>
+          <p:cNvPr id="14" name="Connector: Elbow 13">
+            <a:extLst>
+              <a:ext uri="{FF2B5EF4-FFF2-40B4-BE49-F238E27FC236}">
+                <a16:creationId xmlns:a16="http://schemas.microsoft.com/office/drawing/2014/main" id="{4D371B40-23D5-3632-64F0-3A5DAC685C2C}"/>
+              </a:ext>
+            </a:extLst>
+          </p:cNvPr>
+          <p:cNvCxnSpPr>
+            <a:cxnSpLocks/>
+            <a:endCxn id="5" idx="2"/>
+          </p:cNvCxnSpPr>
+          <p:nvPr/>
+        </p:nvCxnSpPr>
+        <p:spPr>
+          <a:xfrm rot="5400000">
+            <a:off x="6337265" y="-538391"/>
+            <a:ext cx="12700" cy="7745211"/>
+          </a:xfrm>
+          <a:prstGeom prst="bentConnector3">
+            <a:avLst>
+              <a:gd name="adj1" fmla="val 6060000"/>
+            </a:avLst>
+          </a:prstGeom>
+          <a:ln>
+            <a:solidFill>
+              <a:schemeClr val="tx1"/>
+            </a:solidFill>
+            <a:prstDash val="sysDash"/>
+            <a:tailEnd type="triangle" w="lg" len="lg"/>
+          </a:ln>
+        </p:spPr>
+        <p:style>
+          <a:lnRef idx="2">
+            <a:schemeClr val="accent1"/>
+          </a:lnRef>
+          <a:fillRef idx="0">
+            <a:schemeClr val="accent1"/>
+          </a:fillRef>
+          <a:effectRef idx="1">
+            <a:schemeClr val="accent1"/>
+          </a:effectRef>
+          <a:fontRef idx="minor">
+            <a:schemeClr val="tx1"/>
+          </a:fontRef>
+        </p:style>
+      </p:cxnSp>
     </p:spTree>
     <p:extLst>
       <p:ext uri="{BB962C8B-B14F-4D97-AF65-F5344CB8AC3E}">
-        <p14:creationId xmlns:p14="http://schemas.microsoft.com/office/powerpoint/2010/main" val="3564074342"/>
+        <p14:creationId xmlns:p14="http://schemas.microsoft.com/office/powerpoint/2010/main" val="2560175498"/>
       </p:ext>
     </p:extLst>
   </p:cSld>
@@ -3836,7 +5162,7 @@
           <p:cNvPr id="3" name="Picture 2">
             <a:extLst>
               <a:ext uri="{FF2B5EF4-FFF2-40B4-BE49-F238E27FC236}">
-                <a16:creationId xmlns:a16="http://schemas.microsoft.com/office/drawing/2014/main" id="{D6A42420-8E3C-777D-C41A-540741D913CD}"/>
+                <a16:creationId xmlns:a16="http://schemas.microsoft.com/office/drawing/2014/main" id="{FD8E52CD-5961-A7C1-3607-A00CDD4774AD}"/>
               </a:ext>
             </a:extLst>
           </p:cNvPr>
@@ -3853,8 +5179,8 @@
         </p:blipFill>
         <p:spPr>
           <a:xfrm>
-            <a:off x="0" y="7451"/>
-            <a:ext cx="12192000" cy="6843098"/>
+            <a:off x="0" y="23812"/>
+            <a:ext cx="12192000" cy="6810375"/>
           </a:xfrm>
           <a:prstGeom prst="rect">
             <a:avLst/>
@@ -3864,7 +5190,7 @@
     </p:spTree>
     <p:extLst>
       <p:ext uri="{BB962C8B-B14F-4D97-AF65-F5344CB8AC3E}">
-        <p14:creationId xmlns:p14="http://schemas.microsoft.com/office/powerpoint/2010/main" val="3996994306"/>
+        <p14:creationId xmlns:p14="http://schemas.microsoft.com/office/powerpoint/2010/main" val="3564074342"/>
       </p:ext>
     </p:extLst>
   </p:cSld>
@@ -3896,6 +5222,66 @@
           <p:cNvPr id="3" name="Picture 2">
             <a:extLst>
               <a:ext uri="{FF2B5EF4-FFF2-40B4-BE49-F238E27FC236}">
+                <a16:creationId xmlns:a16="http://schemas.microsoft.com/office/drawing/2014/main" id="{D6A42420-8E3C-777D-C41A-540741D913CD}"/>
+              </a:ext>
+            </a:extLst>
+          </p:cNvPr>
+          <p:cNvPicPr>
+            <a:picLocks noChangeAspect="1"/>
+          </p:cNvPicPr>
+          <p:nvPr/>
+        </p:nvPicPr>
+        <p:blipFill>
+          <a:blip r:embed="rId2"/>
+          <a:stretch>
+            <a:fillRect/>
+          </a:stretch>
+        </p:blipFill>
+        <p:spPr>
+          <a:xfrm>
+            <a:off x="0" y="7451"/>
+            <a:ext cx="12192000" cy="6843098"/>
+          </a:xfrm>
+          <a:prstGeom prst="rect">
+            <a:avLst/>
+          </a:prstGeom>
+        </p:spPr>
+      </p:pic>
+    </p:spTree>
+    <p:extLst>
+      <p:ext uri="{BB962C8B-B14F-4D97-AF65-F5344CB8AC3E}">
+        <p14:creationId xmlns:p14="http://schemas.microsoft.com/office/powerpoint/2010/main" val="3996994306"/>
+      </p:ext>
+    </p:extLst>
+  </p:cSld>
+  <p:clrMapOvr>
+    <a:masterClrMapping/>
+  </p:clrMapOvr>
+</p:sld>
+</file>
+
+<file path=ppt/slides/slide13.xml><?xml version="1.0" encoding="utf-8"?>
+<p:sld xmlns:a="http://schemas.openxmlformats.org/drawingml/2006/main" xmlns:r="http://schemas.openxmlformats.org/officeDocument/2006/relationships" xmlns:p="http://schemas.openxmlformats.org/presentationml/2006/main">
+  <p:cSld>
+    <p:spTree>
+      <p:nvGrpSpPr>
+        <p:cNvPr id="1" name=""/>
+        <p:cNvGrpSpPr/>
+        <p:nvPr/>
+      </p:nvGrpSpPr>
+      <p:grpSpPr>
+        <a:xfrm>
+          <a:off x="0" y="0"/>
+          <a:ext cx="0" cy="0"/>
+          <a:chOff x="0" y="0"/>
+          <a:chExt cx="0" cy="0"/>
+        </a:xfrm>
+      </p:grpSpPr>
+      <p:pic>
+        <p:nvPicPr>
+          <p:cNvPr id="3" name="Picture 2">
+            <a:extLst>
+              <a:ext uri="{FF2B5EF4-FFF2-40B4-BE49-F238E27FC236}">
                 <a16:creationId xmlns:a16="http://schemas.microsoft.com/office/drawing/2014/main" id="{EE4867BA-66DD-B140-5528-856BCA343CD6}"/>
               </a:ext>
             </a:extLst>
@@ -3934,7 +5320,7 @@
 </p:sld>
 </file>
 
-<file path=ppt/slides/slide13.xml><?xml version="1.0" encoding="utf-8"?>
+<file path=ppt/slides/slide14.xml><?xml version="1.0" encoding="utf-8"?>
 <p:sld xmlns:a="http://schemas.openxmlformats.org/drawingml/2006/main" xmlns:r="http://schemas.openxmlformats.org/officeDocument/2006/relationships" xmlns:p="http://schemas.openxmlformats.org/presentationml/2006/main">
   <p:cSld>
     <p:spTree>
@@ -4000,7 +5386,7 @@
 </p:sld>
 </file>
 
-<file path=ppt/slides/slide14.xml><?xml version="1.0" encoding="utf-8"?>
+<file path=ppt/slides/slide15.xml><?xml version="1.0" encoding="utf-8"?>
 <p:sld xmlns:a="http://schemas.openxmlformats.org/drawingml/2006/main" xmlns:r="http://schemas.openxmlformats.org/officeDocument/2006/relationships" xmlns:p="http://schemas.openxmlformats.org/presentationml/2006/main">
   <p:cSld>
     <p:spTree>
@@ -4090,7 +5476,7 @@
 </p:sld>
 </file>
 
-<file path=ppt/slides/slide15.xml><?xml version="1.0" encoding="utf-8"?>
+<file path=ppt/slides/slide16.xml><?xml version="1.0" encoding="utf-8"?>
 <p:sld xmlns:a="http://schemas.openxmlformats.org/drawingml/2006/main" xmlns:r="http://schemas.openxmlformats.org/officeDocument/2006/relationships" xmlns:p="http://schemas.openxmlformats.org/presentationml/2006/main">
   <p:cSld>
     <p:spTree>
@@ -4126,7 +5512,7 @@
 </p:sld>
 </file>
 
-<file path=ppt/slides/slide16.xml><?xml version="1.0" encoding="utf-8"?>
+<file path=ppt/slides/slide17.xml><?xml version="1.0" encoding="utf-8"?>
 <p:sld xmlns:a="http://schemas.openxmlformats.org/drawingml/2006/main" xmlns:r="http://schemas.openxmlformats.org/officeDocument/2006/relationships" xmlns:p="http://schemas.openxmlformats.org/presentationml/2006/main">
   <p:cSld>
     <p:spTree>
@@ -4162,7 +5548,7 @@
 </p:sld>
 </file>
 
-<file path=ppt/slides/slide17.xml><?xml version="1.0" encoding="utf-8"?>
+<file path=ppt/slides/slide18.xml><?xml version="1.0" encoding="utf-8"?>
 <p:sld xmlns:a="http://schemas.openxmlformats.org/drawingml/2006/main" xmlns:r="http://schemas.openxmlformats.org/officeDocument/2006/relationships" xmlns:p="http://schemas.openxmlformats.org/presentationml/2006/main">
   <p:cSld>
     <p:spTree>
@@ -4198,7 +5584,7 @@
 </p:sld>
 </file>
 
-<file path=ppt/slides/slide18.xml><?xml version="1.0" encoding="utf-8"?>
+<file path=ppt/slides/slide19.xml><?xml version="1.0" encoding="utf-8"?>
 <p:sld xmlns:a="http://schemas.openxmlformats.org/drawingml/2006/main" xmlns:r="http://schemas.openxmlformats.org/officeDocument/2006/relationships" xmlns:p="http://schemas.openxmlformats.org/presentationml/2006/main">
   <p:cSld>
     <p:spTree>
@@ -9065,6 +10451,1255 @@
 </file>
 
 <file path=ppt/slides/slide8.xml><?xml version="1.0" encoding="utf-8"?>
+<p:sld xmlns:a="http://schemas.openxmlformats.org/drawingml/2006/main" xmlns:r="http://schemas.openxmlformats.org/officeDocument/2006/relationships" xmlns:p="http://schemas.openxmlformats.org/presentationml/2006/main">
+  <p:cSld>
+    <p:spTree>
+      <p:nvGrpSpPr>
+        <p:cNvPr id="1" name=""/>
+        <p:cNvGrpSpPr/>
+        <p:nvPr/>
+      </p:nvGrpSpPr>
+      <p:grpSpPr>
+        <a:xfrm>
+          <a:off x="0" y="0"/>
+          <a:ext cx="0" cy="0"/>
+          <a:chOff x="0" y="0"/>
+          <a:chExt cx="0" cy="0"/>
+        </a:xfrm>
+      </p:grpSpPr>
+      <p:sp>
+        <p:nvSpPr>
+          <p:cNvPr id="2" name="Rectangle: Rounded Corners 1">
+            <a:extLst>
+              <a:ext uri="{FF2B5EF4-FFF2-40B4-BE49-F238E27FC236}">
+                <a16:creationId xmlns:a16="http://schemas.microsoft.com/office/drawing/2014/main" id="{FCEAC593-D8CD-61FE-1EC9-C96369134D92}"/>
+              </a:ext>
+            </a:extLst>
+          </p:cNvPr>
+          <p:cNvSpPr/>
+          <p:nvPr/>
+        </p:nvSpPr>
+        <p:spPr>
+          <a:xfrm>
+            <a:off x="182881" y="1961989"/>
+            <a:ext cx="3841894" cy="1790701"/>
+          </a:xfrm>
+          <a:prstGeom prst="roundRect">
+            <a:avLst>
+              <a:gd name="adj" fmla="val 5234"/>
+            </a:avLst>
+          </a:prstGeom>
+          <a:solidFill>
+            <a:schemeClr val="bg1"/>
+          </a:solidFill>
+          <a:ln>
+            <a:solidFill>
+              <a:schemeClr val="tx1"/>
+            </a:solidFill>
+          </a:ln>
+        </p:spPr>
+        <p:style>
+          <a:lnRef idx="2">
+            <a:schemeClr val="accent1">
+              <a:shade val="15000"/>
+            </a:schemeClr>
+          </a:lnRef>
+          <a:fillRef idx="1">
+            <a:schemeClr val="accent1"/>
+          </a:fillRef>
+          <a:effectRef idx="0">
+            <a:schemeClr val="accent1"/>
+          </a:effectRef>
+          <a:fontRef idx="minor">
+            <a:schemeClr val="lt1"/>
+          </a:fontRef>
+        </p:style>
+        <p:txBody>
+          <a:bodyPr rtlCol="0" anchor="t"/>
+          <a:lstStyle/>
+          <a:p>
+            <a:pPr algn="ctr"/>
+            <a:r>
+              <a:rPr lang="en-US" dirty="0">
+                <a:solidFill>
+                  <a:schemeClr val="tx1"/>
+                </a:solidFill>
+              </a:rPr>
+              <a:t>Microsoft Foundry</a:t>
+            </a:r>
+          </a:p>
+        </p:txBody>
+      </p:sp>
+      <p:grpSp>
+        <p:nvGrpSpPr>
+          <p:cNvPr id="20" name="Group 19">
+            <a:extLst>
+              <a:ext uri="{FF2B5EF4-FFF2-40B4-BE49-F238E27FC236}">
+                <a16:creationId xmlns:a16="http://schemas.microsoft.com/office/drawing/2014/main" id="{3C8D5DE6-7408-3D08-510F-FAA473A61DAF}"/>
+              </a:ext>
+            </a:extLst>
+          </p:cNvPr>
+          <p:cNvGrpSpPr/>
+          <p:nvPr/>
+        </p:nvGrpSpPr>
+        <p:grpSpPr>
+          <a:xfrm>
+            <a:off x="492634" y="2520363"/>
+            <a:ext cx="3213551" cy="870652"/>
+            <a:chOff x="1094614" y="2520363"/>
+            <a:chExt cx="3213551" cy="870652"/>
+          </a:xfrm>
+        </p:grpSpPr>
+        <p:sp>
+          <p:nvSpPr>
+            <p:cNvPr id="3" name="Rectangle: Rounded Corners 2">
+              <a:extLst>
+                <a:ext uri="{FF2B5EF4-FFF2-40B4-BE49-F238E27FC236}">
+                  <a16:creationId xmlns:a16="http://schemas.microsoft.com/office/drawing/2014/main" id="{A912725C-460A-B2C6-B45E-AFDA16950EF5}"/>
+                </a:ext>
+              </a:extLst>
+            </p:cNvPr>
+            <p:cNvSpPr/>
+            <p:nvPr/>
+          </p:nvSpPr>
+          <p:spPr>
+            <a:xfrm>
+              <a:off x="1094614" y="2520363"/>
+              <a:ext cx="1340237" cy="870652"/>
+            </a:xfrm>
+            <a:prstGeom prst="roundRect">
+              <a:avLst/>
+            </a:prstGeom>
+            <a:solidFill>
+              <a:srgbClr val="E5F1F8"/>
+            </a:solidFill>
+            <a:ln>
+              <a:solidFill>
+                <a:schemeClr val="tx1"/>
+              </a:solidFill>
+            </a:ln>
+          </p:spPr>
+          <p:style>
+            <a:lnRef idx="2">
+              <a:schemeClr val="accent1">
+                <a:shade val="15000"/>
+              </a:schemeClr>
+            </a:lnRef>
+            <a:fillRef idx="1">
+              <a:schemeClr val="accent1"/>
+            </a:fillRef>
+            <a:effectRef idx="0">
+              <a:schemeClr val="accent1"/>
+            </a:effectRef>
+            <a:fontRef idx="minor">
+              <a:schemeClr val="lt1"/>
+            </a:fontRef>
+          </p:style>
+          <p:txBody>
+            <a:bodyPr rtlCol="0" anchor="ctr"/>
+            <a:lstStyle/>
+            <a:p>
+              <a:pPr algn="ctr"/>
+              <a:r>
+                <a:rPr lang="en-US" dirty="0">
+                  <a:solidFill>
+                    <a:schemeClr val="tx1"/>
+                  </a:solidFill>
+                </a:rPr>
+                <a:t>Agent</a:t>
+              </a:r>
+            </a:p>
+          </p:txBody>
+        </p:sp>
+        <p:sp>
+          <p:nvSpPr>
+            <p:cNvPr id="4" name="Rectangle: Rounded Corners 3">
+              <a:extLst>
+                <a:ext uri="{FF2B5EF4-FFF2-40B4-BE49-F238E27FC236}">
+                  <a16:creationId xmlns:a16="http://schemas.microsoft.com/office/drawing/2014/main" id="{E5663406-1A83-EB63-FD18-62122032389D}"/>
+                </a:ext>
+              </a:extLst>
+            </p:cNvPr>
+            <p:cNvSpPr/>
+            <p:nvPr/>
+          </p:nvSpPr>
+          <p:spPr>
+            <a:xfrm>
+              <a:off x="2967928" y="2520363"/>
+              <a:ext cx="1340237" cy="870652"/>
+            </a:xfrm>
+            <a:prstGeom prst="roundRect">
+              <a:avLst/>
+            </a:prstGeom>
+            <a:solidFill>
+              <a:srgbClr val="E5F1F8"/>
+            </a:solidFill>
+            <a:ln>
+              <a:solidFill>
+                <a:schemeClr val="tx1"/>
+              </a:solidFill>
+            </a:ln>
+          </p:spPr>
+          <p:style>
+            <a:lnRef idx="2">
+              <a:schemeClr val="accent1">
+                <a:shade val="15000"/>
+              </a:schemeClr>
+            </a:lnRef>
+            <a:fillRef idx="1">
+              <a:schemeClr val="accent1"/>
+            </a:fillRef>
+            <a:effectRef idx="0">
+              <a:schemeClr val="accent1"/>
+            </a:effectRef>
+            <a:fontRef idx="minor">
+              <a:schemeClr val="lt1"/>
+            </a:fontRef>
+          </p:style>
+          <p:txBody>
+            <a:bodyPr rtlCol="0" anchor="ctr"/>
+            <a:lstStyle/>
+            <a:p>
+              <a:pPr algn="ctr"/>
+              <a:r>
+                <a:rPr lang="en-US" dirty="0">
+                  <a:solidFill>
+                    <a:schemeClr val="tx1"/>
+                  </a:solidFill>
+                </a:rPr>
+                <a:t>MCP Client</a:t>
+              </a:r>
+            </a:p>
+          </p:txBody>
+        </p:sp>
+      </p:grpSp>
+      <p:sp>
+        <p:nvSpPr>
+          <p:cNvPr id="5" name="Rectangle: Rounded Corners 4">
+            <a:extLst>
+              <a:ext uri="{FF2B5EF4-FFF2-40B4-BE49-F238E27FC236}">
+                <a16:creationId xmlns:a16="http://schemas.microsoft.com/office/drawing/2014/main" id="{7A06BC94-073A-00F0-7B7A-53ABD805A1C4}"/>
+              </a:ext>
+            </a:extLst>
+          </p:cNvPr>
+          <p:cNvSpPr/>
+          <p:nvPr/>
+        </p:nvSpPr>
+        <p:spPr>
+          <a:xfrm>
+            <a:off x="5159832" y="804800"/>
+            <a:ext cx="2406383" cy="4059193"/>
+          </a:xfrm>
+          <a:prstGeom prst="roundRect">
+            <a:avLst>
+              <a:gd name="adj" fmla="val 5234"/>
+            </a:avLst>
+          </a:prstGeom>
+          <a:solidFill>
+            <a:schemeClr val="bg1"/>
+          </a:solidFill>
+          <a:ln>
+            <a:solidFill>
+              <a:schemeClr val="tx1"/>
+            </a:solidFill>
+          </a:ln>
+        </p:spPr>
+        <p:style>
+          <a:lnRef idx="2">
+            <a:schemeClr val="accent1">
+              <a:shade val="15000"/>
+            </a:schemeClr>
+          </a:lnRef>
+          <a:fillRef idx="1">
+            <a:schemeClr val="accent1"/>
+          </a:fillRef>
+          <a:effectRef idx="0">
+            <a:schemeClr val="accent1"/>
+          </a:effectRef>
+          <a:fontRef idx="minor">
+            <a:schemeClr val="lt1"/>
+          </a:fontRef>
+        </p:style>
+        <p:txBody>
+          <a:bodyPr rtlCol="0" anchor="t"/>
+          <a:lstStyle/>
+          <a:p>
+            <a:pPr algn="ctr"/>
+            <a:r>
+              <a:rPr lang="en-US" dirty="0">
+                <a:solidFill>
+                  <a:schemeClr val="tx1"/>
+                </a:solidFill>
+              </a:rPr>
+              <a:t>MCP Servers</a:t>
+            </a:r>
+          </a:p>
+        </p:txBody>
+      </p:sp>
+      <p:sp>
+        <p:nvSpPr>
+          <p:cNvPr id="6" name="Rectangle: Rounded Corners 5">
+            <a:extLst>
+              <a:ext uri="{FF2B5EF4-FFF2-40B4-BE49-F238E27FC236}">
+                <a16:creationId xmlns:a16="http://schemas.microsoft.com/office/drawing/2014/main" id="{B66DD466-80C6-ABEA-A847-87533B9DAE34}"/>
+              </a:ext>
+            </a:extLst>
+          </p:cNvPr>
+          <p:cNvSpPr/>
+          <p:nvPr/>
+        </p:nvSpPr>
+        <p:spPr>
+          <a:xfrm>
+            <a:off x="5692902" y="2520363"/>
+            <a:ext cx="1340237" cy="870652"/>
+          </a:xfrm>
+          <a:prstGeom prst="roundRect">
+            <a:avLst/>
+          </a:prstGeom>
+          <a:solidFill>
+            <a:srgbClr val="E5F1F8"/>
+          </a:solidFill>
+          <a:ln>
+            <a:solidFill>
+              <a:schemeClr val="tx1"/>
+            </a:solidFill>
+          </a:ln>
+        </p:spPr>
+        <p:style>
+          <a:lnRef idx="2">
+            <a:schemeClr val="accent1">
+              <a:shade val="15000"/>
+            </a:schemeClr>
+          </a:lnRef>
+          <a:fillRef idx="1">
+            <a:schemeClr val="accent1"/>
+          </a:fillRef>
+          <a:effectRef idx="0">
+            <a:schemeClr val="accent1"/>
+          </a:effectRef>
+          <a:fontRef idx="minor">
+            <a:schemeClr val="lt1"/>
+          </a:fontRef>
+        </p:style>
+        <p:txBody>
+          <a:bodyPr rtlCol="0" anchor="ctr"/>
+          <a:lstStyle/>
+          <a:p>
+            <a:pPr algn="ctr"/>
+            <a:r>
+              <a:rPr lang="en-US" dirty="0">
+                <a:solidFill>
+                  <a:schemeClr val="tx1"/>
+                </a:solidFill>
+              </a:rPr>
+              <a:t>File Storage MCP Server</a:t>
+            </a:r>
+          </a:p>
+        </p:txBody>
+      </p:sp>
+      <p:sp>
+        <p:nvSpPr>
+          <p:cNvPr id="7" name="Rectangle: Rounded Corners 6">
+            <a:extLst>
+              <a:ext uri="{FF2B5EF4-FFF2-40B4-BE49-F238E27FC236}">
+                <a16:creationId xmlns:a16="http://schemas.microsoft.com/office/drawing/2014/main" id="{93581B78-846C-5C2B-AD8B-2A27DE6133B0}"/>
+              </a:ext>
+            </a:extLst>
+          </p:cNvPr>
+          <p:cNvSpPr/>
+          <p:nvPr/>
+        </p:nvSpPr>
+        <p:spPr>
+          <a:xfrm>
+            <a:off x="5692901" y="1412582"/>
+            <a:ext cx="1340237" cy="870652"/>
+          </a:xfrm>
+          <a:prstGeom prst="roundRect">
+            <a:avLst/>
+          </a:prstGeom>
+          <a:solidFill>
+            <a:srgbClr val="E5F1F8"/>
+          </a:solidFill>
+          <a:ln>
+            <a:solidFill>
+              <a:schemeClr val="tx1"/>
+            </a:solidFill>
+          </a:ln>
+        </p:spPr>
+        <p:style>
+          <a:lnRef idx="2">
+            <a:schemeClr val="accent1">
+              <a:shade val="15000"/>
+            </a:schemeClr>
+          </a:lnRef>
+          <a:fillRef idx="1">
+            <a:schemeClr val="accent1"/>
+          </a:fillRef>
+          <a:effectRef idx="0">
+            <a:schemeClr val="accent1"/>
+          </a:effectRef>
+          <a:fontRef idx="minor">
+            <a:schemeClr val="lt1"/>
+          </a:fontRef>
+        </p:style>
+        <p:txBody>
+          <a:bodyPr rtlCol="0" anchor="ctr"/>
+          <a:lstStyle/>
+          <a:p>
+            <a:pPr algn="ctr"/>
+            <a:r>
+              <a:rPr lang="en-US" dirty="0">
+                <a:solidFill>
+                  <a:schemeClr val="tx1"/>
+                </a:solidFill>
+              </a:rPr>
+              <a:t>Third-Party MCP Server</a:t>
+            </a:r>
+          </a:p>
+        </p:txBody>
+      </p:sp>
+      <p:sp>
+        <p:nvSpPr>
+          <p:cNvPr id="8" name="Rectangle: Rounded Corners 7">
+            <a:extLst>
+              <a:ext uri="{FF2B5EF4-FFF2-40B4-BE49-F238E27FC236}">
+                <a16:creationId xmlns:a16="http://schemas.microsoft.com/office/drawing/2014/main" id="{4CA2D4C7-E2C9-BE70-32B0-9E817B3AD4C5}"/>
+              </a:ext>
+            </a:extLst>
+          </p:cNvPr>
+          <p:cNvSpPr/>
+          <p:nvPr/>
+        </p:nvSpPr>
+        <p:spPr>
+          <a:xfrm>
+            <a:off x="5692900" y="3628144"/>
+            <a:ext cx="1340237" cy="870652"/>
+          </a:xfrm>
+          <a:prstGeom prst="roundRect">
+            <a:avLst/>
+          </a:prstGeom>
+          <a:solidFill>
+            <a:srgbClr val="E5F1F8"/>
+          </a:solidFill>
+          <a:ln>
+            <a:solidFill>
+              <a:schemeClr val="tx1"/>
+            </a:solidFill>
+          </a:ln>
+        </p:spPr>
+        <p:style>
+          <a:lnRef idx="2">
+            <a:schemeClr val="accent1">
+              <a:shade val="15000"/>
+            </a:schemeClr>
+          </a:lnRef>
+          <a:fillRef idx="1">
+            <a:schemeClr val="accent1"/>
+          </a:fillRef>
+          <a:effectRef idx="0">
+            <a:schemeClr val="accent1"/>
+          </a:effectRef>
+          <a:fontRef idx="minor">
+            <a:schemeClr val="lt1"/>
+          </a:fontRef>
+        </p:style>
+        <p:txBody>
+          <a:bodyPr rtlCol="0" anchor="ctr"/>
+          <a:lstStyle/>
+          <a:p>
+            <a:pPr algn="ctr"/>
+            <a:r>
+              <a:rPr lang="en-US" dirty="0">
+                <a:solidFill>
+                  <a:schemeClr val="tx1"/>
+                </a:solidFill>
+              </a:rPr>
+              <a:t>Database</a:t>
+            </a:r>
+          </a:p>
+          <a:p>
+            <a:pPr algn="ctr"/>
+            <a:r>
+              <a:rPr lang="en-US" dirty="0">
+                <a:solidFill>
+                  <a:schemeClr val="tx1"/>
+                </a:solidFill>
+              </a:rPr>
+              <a:t>MCP Server</a:t>
+            </a:r>
+          </a:p>
+        </p:txBody>
+      </p:sp>
+      <p:sp>
+        <p:nvSpPr>
+          <p:cNvPr id="10" name="Rectangle: Rounded Corners 9">
+            <a:extLst>
+              <a:ext uri="{FF2B5EF4-FFF2-40B4-BE49-F238E27FC236}">
+                <a16:creationId xmlns:a16="http://schemas.microsoft.com/office/drawing/2014/main" id="{E9A04995-C98F-AF75-E6DC-AFDAD76B392B}"/>
+              </a:ext>
+            </a:extLst>
+          </p:cNvPr>
+          <p:cNvSpPr/>
+          <p:nvPr/>
+        </p:nvSpPr>
+        <p:spPr>
+          <a:xfrm>
+            <a:off x="9067023" y="804800"/>
+            <a:ext cx="2406383" cy="4059193"/>
+          </a:xfrm>
+          <a:prstGeom prst="roundRect">
+            <a:avLst>
+              <a:gd name="adj" fmla="val 5234"/>
+            </a:avLst>
+          </a:prstGeom>
+          <a:solidFill>
+            <a:schemeClr val="bg1"/>
+          </a:solidFill>
+          <a:ln>
+            <a:solidFill>
+              <a:schemeClr val="tx1"/>
+            </a:solidFill>
+          </a:ln>
+        </p:spPr>
+        <p:style>
+          <a:lnRef idx="2">
+            <a:schemeClr val="accent1">
+              <a:shade val="15000"/>
+            </a:schemeClr>
+          </a:lnRef>
+          <a:fillRef idx="1">
+            <a:schemeClr val="accent1"/>
+          </a:fillRef>
+          <a:effectRef idx="0">
+            <a:schemeClr val="accent1"/>
+          </a:effectRef>
+          <a:fontRef idx="minor">
+            <a:schemeClr val="lt1"/>
+          </a:fontRef>
+        </p:style>
+        <p:txBody>
+          <a:bodyPr rtlCol="0" anchor="t"/>
+          <a:lstStyle/>
+          <a:p>
+            <a:pPr algn="ctr"/>
+            <a:r>
+              <a:rPr lang="en-US" dirty="0">
+                <a:solidFill>
+                  <a:schemeClr val="tx1"/>
+                </a:solidFill>
+              </a:rPr>
+              <a:t>External Services</a:t>
+            </a:r>
+          </a:p>
+        </p:txBody>
+      </p:sp>
+      <p:sp>
+        <p:nvSpPr>
+          <p:cNvPr id="11" name="Rectangle: Rounded Corners 10">
+            <a:extLst>
+              <a:ext uri="{FF2B5EF4-FFF2-40B4-BE49-F238E27FC236}">
+                <a16:creationId xmlns:a16="http://schemas.microsoft.com/office/drawing/2014/main" id="{B5A15264-2CA2-94CF-802C-8F148D56ECAF}"/>
+              </a:ext>
+            </a:extLst>
+          </p:cNvPr>
+          <p:cNvSpPr/>
+          <p:nvPr/>
+        </p:nvSpPr>
+        <p:spPr>
+          <a:xfrm>
+            <a:off x="9600093" y="2520363"/>
+            <a:ext cx="1340237" cy="870652"/>
+          </a:xfrm>
+          <a:prstGeom prst="roundRect">
+            <a:avLst/>
+          </a:prstGeom>
+          <a:solidFill>
+            <a:srgbClr val="E5F1F8"/>
+          </a:solidFill>
+          <a:ln>
+            <a:solidFill>
+              <a:schemeClr val="tx1"/>
+            </a:solidFill>
+          </a:ln>
+        </p:spPr>
+        <p:style>
+          <a:lnRef idx="2">
+            <a:schemeClr val="accent1">
+              <a:shade val="15000"/>
+            </a:schemeClr>
+          </a:lnRef>
+          <a:fillRef idx="1">
+            <a:schemeClr val="accent1"/>
+          </a:fillRef>
+          <a:effectRef idx="0">
+            <a:schemeClr val="accent1"/>
+          </a:effectRef>
+          <a:fontRef idx="minor">
+            <a:schemeClr val="lt1"/>
+          </a:fontRef>
+        </p:style>
+        <p:txBody>
+          <a:bodyPr rtlCol="0" anchor="ctr"/>
+          <a:lstStyle/>
+          <a:p>
+            <a:pPr algn="ctr"/>
+            <a:r>
+              <a:rPr lang="en-US" dirty="0">
+                <a:solidFill>
+                  <a:schemeClr val="tx1"/>
+                </a:solidFill>
+              </a:rPr>
+              <a:t>Blob Storage</a:t>
+            </a:r>
+          </a:p>
+        </p:txBody>
+      </p:sp>
+      <p:sp>
+        <p:nvSpPr>
+          <p:cNvPr id="12" name="Rectangle: Rounded Corners 11">
+            <a:extLst>
+              <a:ext uri="{FF2B5EF4-FFF2-40B4-BE49-F238E27FC236}">
+                <a16:creationId xmlns:a16="http://schemas.microsoft.com/office/drawing/2014/main" id="{F9FB5A06-89C1-2865-4EBC-BFD77D31C7E0}"/>
+              </a:ext>
+            </a:extLst>
+          </p:cNvPr>
+          <p:cNvSpPr/>
+          <p:nvPr/>
+        </p:nvSpPr>
+        <p:spPr>
+          <a:xfrm>
+            <a:off x="9600092" y="1412582"/>
+            <a:ext cx="1340237" cy="870652"/>
+          </a:xfrm>
+          <a:prstGeom prst="roundRect">
+            <a:avLst/>
+          </a:prstGeom>
+          <a:solidFill>
+            <a:srgbClr val="E5F1F8"/>
+          </a:solidFill>
+          <a:ln>
+            <a:solidFill>
+              <a:schemeClr val="tx1"/>
+            </a:solidFill>
+          </a:ln>
+        </p:spPr>
+        <p:style>
+          <a:lnRef idx="2">
+            <a:schemeClr val="accent1">
+              <a:shade val="15000"/>
+            </a:schemeClr>
+          </a:lnRef>
+          <a:fillRef idx="1">
+            <a:schemeClr val="accent1"/>
+          </a:fillRef>
+          <a:effectRef idx="0">
+            <a:schemeClr val="accent1"/>
+          </a:effectRef>
+          <a:fontRef idx="minor">
+            <a:schemeClr val="lt1"/>
+          </a:fontRef>
+        </p:style>
+        <p:txBody>
+          <a:bodyPr rtlCol="0" anchor="ctr"/>
+          <a:lstStyle/>
+          <a:p>
+            <a:pPr algn="ctr"/>
+            <a:r>
+              <a:rPr lang="en-US" dirty="0">
+                <a:solidFill>
+                  <a:schemeClr val="tx1"/>
+                </a:solidFill>
+              </a:rPr>
+              <a:t>SaaS App</a:t>
+            </a:r>
+          </a:p>
+        </p:txBody>
+      </p:sp>
+      <p:sp>
+        <p:nvSpPr>
+          <p:cNvPr id="13" name="Rectangle: Rounded Corners 12">
+            <a:extLst>
+              <a:ext uri="{FF2B5EF4-FFF2-40B4-BE49-F238E27FC236}">
+                <a16:creationId xmlns:a16="http://schemas.microsoft.com/office/drawing/2014/main" id="{22A69AFF-6121-37F3-566A-DE1AA9EF9D38}"/>
+              </a:ext>
+            </a:extLst>
+          </p:cNvPr>
+          <p:cNvSpPr/>
+          <p:nvPr/>
+        </p:nvSpPr>
+        <p:spPr>
+          <a:xfrm>
+            <a:off x="9600091" y="3628144"/>
+            <a:ext cx="1340237" cy="870652"/>
+          </a:xfrm>
+          <a:prstGeom prst="roundRect">
+            <a:avLst/>
+          </a:prstGeom>
+          <a:solidFill>
+            <a:srgbClr val="E5F1F8"/>
+          </a:solidFill>
+          <a:ln>
+            <a:solidFill>
+              <a:schemeClr val="tx1"/>
+            </a:solidFill>
+          </a:ln>
+        </p:spPr>
+        <p:style>
+          <a:lnRef idx="2">
+            <a:schemeClr val="accent1">
+              <a:shade val="15000"/>
+            </a:schemeClr>
+          </a:lnRef>
+          <a:fillRef idx="1">
+            <a:schemeClr val="accent1"/>
+          </a:fillRef>
+          <a:effectRef idx="0">
+            <a:schemeClr val="accent1"/>
+          </a:effectRef>
+          <a:fontRef idx="minor">
+            <a:schemeClr val="lt1"/>
+          </a:fontRef>
+        </p:style>
+        <p:txBody>
+          <a:bodyPr rtlCol="0" anchor="ctr"/>
+          <a:lstStyle/>
+          <a:p>
+            <a:pPr algn="ctr"/>
+            <a:r>
+              <a:rPr lang="en-US" dirty="0">
+                <a:solidFill>
+                  <a:schemeClr val="tx1"/>
+                </a:solidFill>
+              </a:rPr>
+              <a:t>Database</a:t>
+            </a:r>
+          </a:p>
+        </p:txBody>
+      </p:sp>
+      <p:cxnSp>
+        <p:nvCxnSpPr>
+          <p:cNvPr id="15" name="Straight Arrow Connector 14">
+            <a:extLst>
+              <a:ext uri="{FF2B5EF4-FFF2-40B4-BE49-F238E27FC236}">
+                <a16:creationId xmlns:a16="http://schemas.microsoft.com/office/drawing/2014/main" id="{6A8B2231-37D8-6CF7-3B6C-0CA623A3A208}"/>
+              </a:ext>
+            </a:extLst>
+          </p:cNvPr>
+          <p:cNvCxnSpPr>
+            <a:cxnSpLocks/>
+            <a:stCxn id="3" idx="3"/>
+            <a:endCxn id="4" idx="1"/>
+          </p:cNvCxnSpPr>
+          <p:nvPr/>
+        </p:nvCxnSpPr>
+        <p:spPr>
+          <a:xfrm>
+            <a:off x="1832871" y="2955689"/>
+            <a:ext cx="533077" cy="0"/>
+          </a:xfrm>
+          <a:prstGeom prst="straightConnector1">
+            <a:avLst/>
+          </a:prstGeom>
+          <a:ln>
+            <a:solidFill>
+              <a:schemeClr val="tx1"/>
+            </a:solidFill>
+            <a:prstDash val="solid"/>
+            <a:headEnd type="triangle" w="lg" len="lg"/>
+            <a:tailEnd type="triangle" w="lg" len="lg"/>
+          </a:ln>
+        </p:spPr>
+        <p:style>
+          <a:lnRef idx="2">
+            <a:schemeClr val="accent1"/>
+          </a:lnRef>
+          <a:fillRef idx="0">
+            <a:schemeClr val="accent1"/>
+          </a:fillRef>
+          <a:effectRef idx="1">
+            <a:schemeClr val="accent1"/>
+          </a:effectRef>
+          <a:fontRef idx="minor">
+            <a:schemeClr val="tx1"/>
+          </a:fontRef>
+        </p:style>
+      </p:cxnSp>
+      <p:cxnSp>
+        <p:nvCxnSpPr>
+          <p:cNvPr id="22" name="Straight Arrow Connector 21">
+            <a:extLst>
+              <a:ext uri="{FF2B5EF4-FFF2-40B4-BE49-F238E27FC236}">
+                <a16:creationId xmlns:a16="http://schemas.microsoft.com/office/drawing/2014/main" id="{B6AF12AA-901C-45D0-7A07-FC55AAB45F61}"/>
+              </a:ext>
+            </a:extLst>
+          </p:cNvPr>
+          <p:cNvCxnSpPr>
+            <a:cxnSpLocks/>
+            <a:stCxn id="7" idx="3"/>
+            <a:endCxn id="12" idx="1"/>
+          </p:cNvCxnSpPr>
+          <p:nvPr/>
+        </p:nvCxnSpPr>
+        <p:spPr>
+          <a:xfrm>
+            <a:off x="7033138" y="1847908"/>
+            <a:ext cx="2566954" cy="0"/>
+          </a:xfrm>
+          <a:prstGeom prst="straightConnector1">
+            <a:avLst/>
+          </a:prstGeom>
+          <a:ln>
+            <a:solidFill>
+              <a:schemeClr val="tx1"/>
+            </a:solidFill>
+            <a:prstDash val="sysDash"/>
+            <a:tailEnd type="triangle" w="lg" len="lg"/>
+          </a:ln>
+        </p:spPr>
+        <p:style>
+          <a:lnRef idx="2">
+            <a:schemeClr val="accent1"/>
+          </a:lnRef>
+          <a:fillRef idx="0">
+            <a:schemeClr val="accent1"/>
+          </a:fillRef>
+          <a:effectRef idx="1">
+            <a:schemeClr val="accent1"/>
+          </a:effectRef>
+          <a:fontRef idx="minor">
+            <a:schemeClr val="tx1"/>
+          </a:fontRef>
+        </p:style>
+      </p:cxnSp>
+      <p:cxnSp>
+        <p:nvCxnSpPr>
+          <p:cNvPr id="25" name="Straight Arrow Connector 24">
+            <a:extLst>
+              <a:ext uri="{FF2B5EF4-FFF2-40B4-BE49-F238E27FC236}">
+                <a16:creationId xmlns:a16="http://schemas.microsoft.com/office/drawing/2014/main" id="{B39D667D-0422-43D5-28F2-605AE5941F22}"/>
+              </a:ext>
+            </a:extLst>
+          </p:cNvPr>
+          <p:cNvCxnSpPr>
+            <a:cxnSpLocks/>
+            <a:stCxn id="6" idx="3"/>
+            <a:endCxn id="11" idx="1"/>
+          </p:cNvCxnSpPr>
+          <p:nvPr/>
+        </p:nvCxnSpPr>
+        <p:spPr>
+          <a:xfrm>
+            <a:off x="7033139" y="2955689"/>
+            <a:ext cx="2566954" cy="0"/>
+          </a:xfrm>
+          <a:prstGeom prst="straightConnector1">
+            <a:avLst/>
+          </a:prstGeom>
+          <a:ln>
+            <a:solidFill>
+              <a:schemeClr val="tx1"/>
+            </a:solidFill>
+            <a:prstDash val="sysDash"/>
+            <a:tailEnd type="triangle" w="lg" len="lg"/>
+          </a:ln>
+        </p:spPr>
+        <p:style>
+          <a:lnRef idx="2">
+            <a:schemeClr val="accent1"/>
+          </a:lnRef>
+          <a:fillRef idx="0">
+            <a:schemeClr val="accent1"/>
+          </a:fillRef>
+          <a:effectRef idx="1">
+            <a:schemeClr val="accent1"/>
+          </a:effectRef>
+          <a:fontRef idx="minor">
+            <a:schemeClr val="tx1"/>
+          </a:fontRef>
+        </p:style>
+      </p:cxnSp>
+      <p:cxnSp>
+        <p:nvCxnSpPr>
+          <p:cNvPr id="28" name="Straight Arrow Connector 27">
+            <a:extLst>
+              <a:ext uri="{FF2B5EF4-FFF2-40B4-BE49-F238E27FC236}">
+                <a16:creationId xmlns:a16="http://schemas.microsoft.com/office/drawing/2014/main" id="{8A2CC6C4-B8F4-865E-18AE-A24BC6F4AF3A}"/>
+              </a:ext>
+            </a:extLst>
+          </p:cNvPr>
+          <p:cNvCxnSpPr>
+            <a:cxnSpLocks/>
+            <a:stCxn id="8" idx="3"/>
+            <a:endCxn id="13" idx="1"/>
+          </p:cNvCxnSpPr>
+          <p:nvPr/>
+        </p:nvCxnSpPr>
+        <p:spPr>
+          <a:xfrm>
+            <a:off x="7033137" y="4063470"/>
+            <a:ext cx="2566954" cy="0"/>
+          </a:xfrm>
+          <a:prstGeom prst="straightConnector1">
+            <a:avLst/>
+          </a:prstGeom>
+          <a:ln>
+            <a:solidFill>
+              <a:schemeClr val="tx1"/>
+            </a:solidFill>
+            <a:prstDash val="sysDash"/>
+            <a:tailEnd type="triangle" w="lg" len="lg"/>
+          </a:ln>
+        </p:spPr>
+        <p:style>
+          <a:lnRef idx="2">
+            <a:schemeClr val="accent1"/>
+          </a:lnRef>
+          <a:fillRef idx="0">
+            <a:schemeClr val="accent1"/>
+          </a:fillRef>
+          <a:effectRef idx="1">
+            <a:schemeClr val="accent1"/>
+          </a:effectRef>
+          <a:fontRef idx="minor">
+            <a:schemeClr val="tx1"/>
+          </a:fontRef>
+        </p:style>
+      </p:cxnSp>
+      <p:cxnSp>
+        <p:nvCxnSpPr>
+          <p:cNvPr id="31" name="Connector: Elbow 30">
+            <a:extLst>
+              <a:ext uri="{FF2B5EF4-FFF2-40B4-BE49-F238E27FC236}">
+                <a16:creationId xmlns:a16="http://schemas.microsoft.com/office/drawing/2014/main" id="{B97CD07A-2870-7437-2F7C-3F75E24EB5CF}"/>
+              </a:ext>
+            </a:extLst>
+          </p:cNvPr>
+          <p:cNvCxnSpPr>
+            <a:cxnSpLocks/>
+            <a:stCxn id="4" idx="3"/>
+            <a:endCxn id="7" idx="1"/>
+          </p:cNvCxnSpPr>
+          <p:nvPr/>
+        </p:nvCxnSpPr>
+        <p:spPr>
+          <a:xfrm flipV="1">
+            <a:off x="3706185" y="1847908"/>
+            <a:ext cx="1986716" cy="1107781"/>
+          </a:xfrm>
+          <a:prstGeom prst="bentConnector3">
+            <a:avLst>
+              <a:gd name="adj1" fmla="val 50000"/>
+            </a:avLst>
+          </a:prstGeom>
+          <a:ln>
+            <a:solidFill>
+              <a:schemeClr val="tx1"/>
+            </a:solidFill>
+            <a:prstDash val="solid"/>
+            <a:headEnd type="triangle" w="lg" len="lg"/>
+            <a:tailEnd type="triangle" w="lg" len="lg"/>
+          </a:ln>
+        </p:spPr>
+        <p:style>
+          <a:lnRef idx="2">
+            <a:schemeClr val="accent1"/>
+          </a:lnRef>
+          <a:fillRef idx="0">
+            <a:schemeClr val="accent1"/>
+          </a:fillRef>
+          <a:effectRef idx="1">
+            <a:schemeClr val="accent1"/>
+          </a:effectRef>
+          <a:fontRef idx="minor">
+            <a:schemeClr val="tx1"/>
+          </a:fontRef>
+        </p:style>
+      </p:cxnSp>
+      <p:cxnSp>
+        <p:nvCxnSpPr>
+          <p:cNvPr id="34" name="Connector: Elbow 33">
+            <a:extLst>
+              <a:ext uri="{FF2B5EF4-FFF2-40B4-BE49-F238E27FC236}">
+                <a16:creationId xmlns:a16="http://schemas.microsoft.com/office/drawing/2014/main" id="{18C5FA9F-3761-6651-D33F-2C24793118A2}"/>
+              </a:ext>
+            </a:extLst>
+          </p:cNvPr>
+          <p:cNvCxnSpPr>
+            <a:cxnSpLocks/>
+            <a:stCxn id="4" idx="3"/>
+            <a:endCxn id="8" idx="1"/>
+          </p:cNvCxnSpPr>
+          <p:nvPr/>
+        </p:nvCxnSpPr>
+        <p:spPr>
+          <a:xfrm>
+            <a:off x="3706185" y="2955689"/>
+            <a:ext cx="1986715" cy="1107781"/>
+          </a:xfrm>
+          <a:prstGeom prst="bentConnector3">
+            <a:avLst>
+              <a:gd name="adj1" fmla="val 50000"/>
+            </a:avLst>
+          </a:prstGeom>
+          <a:ln>
+            <a:solidFill>
+              <a:schemeClr val="tx1"/>
+            </a:solidFill>
+            <a:prstDash val="solid"/>
+            <a:headEnd type="triangle" w="lg" len="lg"/>
+            <a:tailEnd type="triangle" w="lg" len="lg"/>
+          </a:ln>
+        </p:spPr>
+        <p:style>
+          <a:lnRef idx="2">
+            <a:schemeClr val="accent1"/>
+          </a:lnRef>
+          <a:fillRef idx="0">
+            <a:schemeClr val="accent1"/>
+          </a:fillRef>
+          <a:effectRef idx="1">
+            <a:schemeClr val="accent1"/>
+          </a:effectRef>
+          <a:fontRef idx="minor">
+            <a:schemeClr val="tx1"/>
+          </a:fontRef>
+        </p:style>
+      </p:cxnSp>
+      <p:cxnSp>
+        <p:nvCxnSpPr>
+          <p:cNvPr id="37" name="Straight Arrow Connector 36">
+            <a:extLst>
+              <a:ext uri="{FF2B5EF4-FFF2-40B4-BE49-F238E27FC236}">
+                <a16:creationId xmlns:a16="http://schemas.microsoft.com/office/drawing/2014/main" id="{43E6F43D-CF04-FED6-7F22-B3883E121EF8}"/>
+              </a:ext>
+            </a:extLst>
+          </p:cNvPr>
+          <p:cNvCxnSpPr>
+            <a:cxnSpLocks/>
+            <a:stCxn id="4" idx="3"/>
+            <a:endCxn id="6" idx="1"/>
+          </p:cNvCxnSpPr>
+          <p:nvPr/>
+        </p:nvCxnSpPr>
+        <p:spPr>
+          <a:xfrm>
+            <a:off x="3706185" y="2955689"/>
+            <a:ext cx="1986717" cy="0"/>
+          </a:xfrm>
+          <a:prstGeom prst="straightConnector1">
+            <a:avLst/>
+          </a:prstGeom>
+          <a:ln>
+            <a:solidFill>
+              <a:schemeClr val="tx1"/>
+            </a:solidFill>
+            <a:prstDash val="solid"/>
+            <a:headEnd type="triangle" w="lg" len="lg"/>
+            <a:tailEnd type="triangle" w="lg" len="lg"/>
+          </a:ln>
+        </p:spPr>
+        <p:style>
+          <a:lnRef idx="2">
+            <a:schemeClr val="accent1"/>
+          </a:lnRef>
+          <a:fillRef idx="0">
+            <a:schemeClr val="accent1"/>
+          </a:fillRef>
+          <a:effectRef idx="1">
+            <a:schemeClr val="accent1"/>
+          </a:effectRef>
+          <a:fontRef idx="minor">
+            <a:schemeClr val="tx1"/>
+          </a:fontRef>
+        </p:style>
+      </p:cxnSp>
+      <p:sp>
+        <p:nvSpPr>
+          <p:cNvPr id="40" name="TextBox 39">
+            <a:extLst>
+              <a:ext uri="{FF2B5EF4-FFF2-40B4-BE49-F238E27FC236}">
+                <a16:creationId xmlns:a16="http://schemas.microsoft.com/office/drawing/2014/main" id="{50545247-9B5D-B18C-25FF-A2F607D94783}"/>
+              </a:ext>
+            </a:extLst>
+          </p:cNvPr>
+          <p:cNvSpPr txBox="1"/>
+          <p:nvPr/>
+        </p:nvSpPr>
+        <p:spPr>
+          <a:xfrm>
+            <a:off x="7920517" y="1478522"/>
+            <a:ext cx="792204" cy="369332"/>
+          </a:xfrm>
+          <a:prstGeom prst="rect">
+            <a:avLst/>
+          </a:prstGeom>
+          <a:noFill/>
+        </p:spPr>
+        <p:txBody>
+          <a:bodyPr wrap="none" rtlCol="0">
+            <a:spAutoFit/>
+          </a:bodyPr>
+          <a:lstStyle/>
+          <a:p>
+            <a:pPr algn="ctr"/>
+            <a:r>
+              <a:rPr lang="en-US" dirty="0"/>
+              <a:t>API Call</a:t>
+            </a:r>
+          </a:p>
+        </p:txBody>
+      </p:sp>
+      <p:sp>
+        <p:nvSpPr>
+          <p:cNvPr id="41" name="TextBox 40">
+            <a:extLst>
+              <a:ext uri="{FF2B5EF4-FFF2-40B4-BE49-F238E27FC236}">
+                <a16:creationId xmlns:a16="http://schemas.microsoft.com/office/drawing/2014/main" id="{0F2CCF29-E962-3B49-3A2F-5B7C8B1E62E0}"/>
+              </a:ext>
+            </a:extLst>
+          </p:cNvPr>
+          <p:cNvSpPr txBox="1"/>
+          <p:nvPr/>
+        </p:nvSpPr>
+        <p:spPr>
+          <a:xfrm>
+            <a:off x="7739820" y="2586250"/>
+            <a:ext cx="1153586" cy="369332"/>
+          </a:xfrm>
+          <a:prstGeom prst="rect">
+            <a:avLst/>
+          </a:prstGeom>
+          <a:noFill/>
+        </p:spPr>
+        <p:txBody>
+          <a:bodyPr wrap="none" rtlCol="0">
+            <a:spAutoFit/>
+          </a:bodyPr>
+          <a:lstStyle/>
+          <a:p>
+            <a:pPr algn="ctr"/>
+            <a:r>
+              <a:rPr lang="en-US" dirty="0"/>
+              <a:t>Python SDK</a:t>
+            </a:r>
+          </a:p>
+        </p:txBody>
+      </p:sp>
+      <p:sp>
+        <p:nvSpPr>
+          <p:cNvPr id="42" name="TextBox 41">
+            <a:extLst>
+              <a:ext uri="{FF2B5EF4-FFF2-40B4-BE49-F238E27FC236}">
+                <a16:creationId xmlns:a16="http://schemas.microsoft.com/office/drawing/2014/main" id="{683BC4EA-D032-66AD-9B5E-0313282962E7}"/>
+              </a:ext>
+            </a:extLst>
+          </p:cNvPr>
+          <p:cNvSpPr txBox="1"/>
+          <p:nvPr/>
+        </p:nvSpPr>
+        <p:spPr>
+          <a:xfrm>
+            <a:off x="7794098" y="3694030"/>
+            <a:ext cx="1045030" cy="369332"/>
+          </a:xfrm>
+          <a:prstGeom prst="rect">
+            <a:avLst/>
+          </a:prstGeom>
+          <a:noFill/>
+        </p:spPr>
+        <p:txBody>
+          <a:bodyPr wrap="none" rtlCol="0">
+            <a:spAutoFit/>
+          </a:bodyPr>
+          <a:lstStyle/>
+          <a:p>
+            <a:r>
+              <a:rPr lang="en-US" dirty="0"/>
+              <a:t>SQL Query</a:t>
+            </a:r>
+          </a:p>
+        </p:txBody>
+      </p:sp>
+      <p:sp>
+        <p:nvSpPr>
+          <p:cNvPr id="45" name="Rectangle: Rounded Corners 44">
+            <a:extLst>
+              <a:ext uri="{FF2B5EF4-FFF2-40B4-BE49-F238E27FC236}">
+                <a16:creationId xmlns:a16="http://schemas.microsoft.com/office/drawing/2014/main" id="{F84FB3F3-23CB-15B6-FD3C-E0EC33E4649A}"/>
+              </a:ext>
+            </a:extLst>
+          </p:cNvPr>
+          <p:cNvSpPr/>
+          <p:nvPr/>
+        </p:nvSpPr>
+        <p:spPr>
+          <a:xfrm rot="16200000">
+            <a:off x="4167506" y="2771023"/>
+            <a:ext cx="1054775" cy="369332"/>
+          </a:xfrm>
+          <a:prstGeom prst="roundRect">
+            <a:avLst/>
+          </a:prstGeom>
+          <a:solidFill>
+            <a:srgbClr val="B2D4EB"/>
+          </a:solidFill>
+          <a:ln>
+            <a:solidFill>
+              <a:schemeClr val="tx1"/>
+            </a:solidFill>
+          </a:ln>
+        </p:spPr>
+        <p:style>
+          <a:lnRef idx="2">
+            <a:schemeClr val="accent1">
+              <a:shade val="15000"/>
+            </a:schemeClr>
+          </a:lnRef>
+          <a:fillRef idx="1">
+            <a:schemeClr val="accent1"/>
+          </a:fillRef>
+          <a:effectRef idx="0">
+            <a:schemeClr val="accent1"/>
+          </a:effectRef>
+          <a:fontRef idx="minor">
+            <a:schemeClr val="lt1"/>
+          </a:fontRef>
+        </p:style>
+        <p:txBody>
+          <a:bodyPr rtlCol="0" anchor="ctr"/>
+          <a:lstStyle/>
+          <a:p>
+            <a:pPr algn="ctr"/>
+            <a:r>
+              <a:rPr lang="en-US" dirty="0">
+                <a:solidFill>
+                  <a:schemeClr val="tx1"/>
+                </a:solidFill>
+              </a:rPr>
+              <a:t>JSON-RPC</a:t>
+            </a:r>
+            <a:endParaRPr lang="en-US" i="1" dirty="0">
+              <a:solidFill>
+                <a:schemeClr val="tx1"/>
+              </a:solidFill>
+            </a:endParaRPr>
+          </a:p>
+        </p:txBody>
+      </p:sp>
+    </p:spTree>
+    <p:extLst>
+      <p:ext uri="{BB962C8B-B14F-4D97-AF65-F5344CB8AC3E}">
+        <p14:creationId xmlns:p14="http://schemas.microsoft.com/office/powerpoint/2010/main" val="566489712"/>
+      </p:ext>
+    </p:extLst>
+  </p:cSld>
+  <p:clrMapOvr>
+    <a:masterClrMapping/>
+  </p:clrMapOvr>
+</p:sld>
+</file>
+
+<file path=ppt/slides/slide9.xml><?xml version="1.0" encoding="utf-8"?>
 <p:sld xmlns:a="http://schemas.openxmlformats.org/drawingml/2006/main" xmlns:r="http://schemas.openxmlformats.org/officeDocument/2006/relationships" xmlns:p="http://schemas.openxmlformats.org/presentationml/2006/main">
   <p:cSld>
     <p:spTree>
@@ -10243,1390 +12878,6 @@
     <p:extLst>
       <p:ext uri="{BB962C8B-B14F-4D97-AF65-F5344CB8AC3E}">
         <p14:creationId xmlns:p14="http://schemas.microsoft.com/office/powerpoint/2010/main" val="3488000674"/>
-      </p:ext>
-    </p:extLst>
-  </p:cSld>
-  <p:clrMapOvr>
-    <a:masterClrMapping/>
-  </p:clrMapOvr>
-</p:sld>
-</file>
-
-<file path=ppt/slides/slide9.xml><?xml version="1.0" encoding="utf-8"?>
-<p:sld xmlns:a="http://schemas.openxmlformats.org/drawingml/2006/main" xmlns:r="http://schemas.openxmlformats.org/officeDocument/2006/relationships" xmlns:p="http://schemas.openxmlformats.org/presentationml/2006/main">
-  <p:cSld>
-    <p:spTree>
-      <p:nvGrpSpPr>
-        <p:cNvPr id="1" name=""/>
-        <p:cNvGrpSpPr/>
-        <p:nvPr/>
-      </p:nvGrpSpPr>
-      <p:grpSpPr>
-        <a:xfrm>
-          <a:off x="0" y="0"/>
-          <a:ext cx="0" cy="0"/>
-          <a:chOff x="0" y="0"/>
-          <a:chExt cx="0" cy="0"/>
-        </a:xfrm>
-      </p:grpSpPr>
-      <p:sp>
-        <p:nvSpPr>
-          <p:cNvPr id="2" name="Rectangle: Rounded Corners 1">
-            <a:extLst>
-              <a:ext uri="{FF2B5EF4-FFF2-40B4-BE49-F238E27FC236}">
-                <a16:creationId xmlns:a16="http://schemas.microsoft.com/office/drawing/2014/main" id="{F09FDC59-6067-4502-1360-F42554AD87D3}"/>
-              </a:ext>
-            </a:extLst>
-          </p:cNvPr>
-          <p:cNvSpPr/>
-          <p:nvPr/>
-        </p:nvSpPr>
-        <p:spPr>
-          <a:xfrm>
-            <a:off x="4046220" y="3398520"/>
-            <a:ext cx="4282440" cy="457200"/>
-          </a:xfrm>
-          <a:prstGeom prst="roundRect">
-            <a:avLst/>
-          </a:prstGeom>
-          <a:solidFill>
-            <a:srgbClr val="B2D4EB"/>
-          </a:solidFill>
-          <a:ln>
-            <a:solidFill>
-              <a:schemeClr val="tx1"/>
-            </a:solidFill>
-          </a:ln>
-        </p:spPr>
-        <p:style>
-          <a:lnRef idx="2">
-            <a:schemeClr val="accent1">
-              <a:shade val="15000"/>
-            </a:schemeClr>
-          </a:lnRef>
-          <a:fillRef idx="1">
-            <a:schemeClr val="accent1"/>
-          </a:fillRef>
-          <a:effectRef idx="0">
-            <a:schemeClr val="accent1"/>
-          </a:effectRef>
-          <a:fontRef idx="minor">
-            <a:schemeClr val="lt1"/>
-          </a:fontRef>
-        </p:style>
-        <p:txBody>
-          <a:bodyPr rtlCol="0" anchor="ctr"/>
-          <a:lstStyle/>
-          <a:p>
-            <a:pPr algn="ctr"/>
-            <a:r>
-              <a:rPr lang="en-US" dirty="0">
-                <a:solidFill>
-                  <a:schemeClr val="tx1"/>
-                </a:solidFill>
-              </a:rPr>
-              <a:t>Search Public Information on the Web</a:t>
-            </a:r>
-            <a:endParaRPr lang="en-US" i="1" dirty="0">
-              <a:solidFill>
-                <a:schemeClr val="tx1"/>
-              </a:solidFill>
-            </a:endParaRPr>
-          </a:p>
-        </p:txBody>
-      </p:sp>
-      <p:sp>
-        <p:nvSpPr>
-          <p:cNvPr id="3" name="Rectangle: Rounded Corners 2">
-            <a:extLst>
-              <a:ext uri="{FF2B5EF4-FFF2-40B4-BE49-F238E27FC236}">
-                <a16:creationId xmlns:a16="http://schemas.microsoft.com/office/drawing/2014/main" id="{9800FF13-E208-2C00-EB7C-BCBA48F554BD}"/>
-              </a:ext>
-            </a:extLst>
-          </p:cNvPr>
-          <p:cNvSpPr/>
-          <p:nvPr/>
-        </p:nvSpPr>
-        <p:spPr>
-          <a:xfrm>
-            <a:off x="4046220" y="2625554"/>
-            <a:ext cx="4282440" cy="457200"/>
-          </a:xfrm>
-          <a:prstGeom prst="roundRect">
-            <a:avLst/>
-          </a:prstGeom>
-          <a:solidFill>
-            <a:srgbClr val="B2D4EB"/>
-          </a:solidFill>
-          <a:ln>
-            <a:solidFill>
-              <a:schemeClr val="tx1"/>
-            </a:solidFill>
-          </a:ln>
-        </p:spPr>
-        <p:style>
-          <a:lnRef idx="2">
-            <a:schemeClr val="accent1">
-              <a:shade val="15000"/>
-            </a:schemeClr>
-          </a:lnRef>
-          <a:fillRef idx="1">
-            <a:schemeClr val="accent1"/>
-          </a:fillRef>
-          <a:effectRef idx="0">
-            <a:schemeClr val="accent1"/>
-          </a:effectRef>
-          <a:fontRef idx="minor">
-            <a:schemeClr val="lt1"/>
-          </a:fontRef>
-        </p:style>
-        <p:txBody>
-          <a:bodyPr rtlCol="0" anchor="ctr"/>
-          <a:lstStyle/>
-          <a:p>
-            <a:pPr algn="ctr"/>
-            <a:r>
-              <a:rPr lang="en-US" dirty="0">
-                <a:solidFill>
-                  <a:schemeClr val="tx1"/>
-                </a:solidFill>
-              </a:rPr>
-              <a:t>Retrieve Stock Quotes from an API</a:t>
-            </a:r>
-            <a:endParaRPr lang="en-US" i="1" dirty="0">
-              <a:solidFill>
-                <a:schemeClr val="tx1"/>
-              </a:solidFill>
-            </a:endParaRPr>
-          </a:p>
-        </p:txBody>
-      </p:sp>
-      <p:sp>
-        <p:nvSpPr>
-          <p:cNvPr id="4" name="Rectangle: Rounded Corners 3">
-            <a:extLst>
-              <a:ext uri="{FF2B5EF4-FFF2-40B4-BE49-F238E27FC236}">
-                <a16:creationId xmlns:a16="http://schemas.microsoft.com/office/drawing/2014/main" id="{CD952C55-0F41-C8E8-4833-F5F86239B3AD}"/>
-              </a:ext>
-            </a:extLst>
-          </p:cNvPr>
-          <p:cNvSpPr/>
-          <p:nvPr/>
-        </p:nvSpPr>
-        <p:spPr>
-          <a:xfrm>
-            <a:off x="4046220" y="1855003"/>
-            <a:ext cx="4282440" cy="457200"/>
-          </a:xfrm>
-          <a:prstGeom prst="roundRect">
-            <a:avLst/>
-          </a:prstGeom>
-          <a:solidFill>
-            <a:srgbClr val="B2D4EB"/>
-          </a:solidFill>
-          <a:ln>
-            <a:solidFill>
-              <a:schemeClr val="tx1"/>
-            </a:solidFill>
-          </a:ln>
-        </p:spPr>
-        <p:style>
-          <a:lnRef idx="2">
-            <a:schemeClr val="accent1">
-              <a:shade val="15000"/>
-            </a:schemeClr>
-          </a:lnRef>
-          <a:fillRef idx="1">
-            <a:schemeClr val="accent1"/>
-          </a:fillRef>
-          <a:effectRef idx="0">
-            <a:schemeClr val="accent1"/>
-          </a:effectRef>
-          <a:fontRef idx="minor">
-            <a:schemeClr val="lt1"/>
-          </a:fontRef>
-        </p:style>
-        <p:txBody>
-          <a:bodyPr rtlCol="0" anchor="ctr"/>
-          <a:lstStyle/>
-          <a:p>
-            <a:pPr algn="ctr"/>
-            <a:r>
-              <a:rPr lang="en-US" dirty="0">
-                <a:solidFill>
-                  <a:schemeClr val="tx1"/>
-                </a:solidFill>
-              </a:rPr>
-              <a:t>Reference Internal Report Files</a:t>
-            </a:r>
-            <a:endParaRPr lang="en-US" i="1" dirty="0">
-              <a:solidFill>
-                <a:schemeClr val="tx1"/>
-              </a:solidFill>
-            </a:endParaRPr>
-          </a:p>
-        </p:txBody>
-      </p:sp>
-      <p:sp>
-        <p:nvSpPr>
-          <p:cNvPr id="5" name="Rectangle: Rounded Corners 4">
-            <a:extLst>
-              <a:ext uri="{FF2B5EF4-FFF2-40B4-BE49-F238E27FC236}">
-                <a16:creationId xmlns:a16="http://schemas.microsoft.com/office/drawing/2014/main" id="{600226F7-C833-1B1C-B967-7291F64244CC}"/>
-              </a:ext>
-            </a:extLst>
-          </p:cNvPr>
-          <p:cNvSpPr/>
-          <p:nvPr/>
-        </p:nvSpPr>
-        <p:spPr>
-          <a:xfrm>
-            <a:off x="1507938" y="2374095"/>
-            <a:ext cx="1913442" cy="960119"/>
-          </a:xfrm>
-          <a:prstGeom prst="roundRect">
-            <a:avLst/>
-          </a:prstGeom>
-          <a:solidFill>
-            <a:srgbClr val="E5F1F8"/>
-          </a:solidFill>
-          <a:ln>
-            <a:solidFill>
-              <a:schemeClr val="tx1"/>
-            </a:solidFill>
-          </a:ln>
-        </p:spPr>
-        <p:style>
-          <a:lnRef idx="2">
-            <a:schemeClr val="accent1">
-              <a:shade val="15000"/>
-            </a:schemeClr>
-          </a:lnRef>
-          <a:fillRef idx="1">
-            <a:schemeClr val="accent1"/>
-          </a:fillRef>
-          <a:effectRef idx="0">
-            <a:schemeClr val="accent1"/>
-          </a:effectRef>
-          <a:fontRef idx="minor">
-            <a:schemeClr val="lt1"/>
-          </a:fontRef>
-        </p:style>
-        <p:txBody>
-          <a:bodyPr rtlCol="0" anchor="ctr"/>
-          <a:lstStyle/>
-          <a:p>
-            <a:pPr algn="ctr"/>
-            <a:r>
-              <a:rPr lang="en-US" dirty="0">
-                <a:solidFill>
-                  <a:schemeClr val="tx1"/>
-                </a:solidFill>
-              </a:rPr>
-              <a:t>Query</a:t>
-            </a:r>
-          </a:p>
-          <a:p>
-            <a:pPr algn="ctr"/>
-            <a:r>
-              <a:rPr lang="en-US" dirty="0">
-                <a:solidFill>
-                  <a:schemeClr val="tx1"/>
-                </a:solidFill>
-              </a:rPr>
-              <a:t>Planning</a:t>
-            </a:r>
-          </a:p>
-        </p:txBody>
-      </p:sp>
-      <p:sp>
-        <p:nvSpPr>
-          <p:cNvPr id="6" name="Rectangle: Rounded Corners 5">
-            <a:extLst>
-              <a:ext uri="{FF2B5EF4-FFF2-40B4-BE49-F238E27FC236}">
-                <a16:creationId xmlns:a16="http://schemas.microsoft.com/office/drawing/2014/main" id="{C93C6EBF-0FE7-EC6E-5B5C-7AA41F6606DD}"/>
-              </a:ext>
-            </a:extLst>
-          </p:cNvPr>
-          <p:cNvSpPr/>
-          <p:nvPr/>
-        </p:nvSpPr>
-        <p:spPr>
-          <a:xfrm>
-            <a:off x="9837420" y="2374095"/>
-            <a:ext cx="1913442" cy="960119"/>
-          </a:xfrm>
-          <a:prstGeom prst="roundRect">
-            <a:avLst/>
-          </a:prstGeom>
-          <a:solidFill>
-            <a:srgbClr val="E5F1F8"/>
-          </a:solidFill>
-          <a:ln>
-            <a:solidFill>
-              <a:schemeClr val="tx1"/>
-            </a:solidFill>
-          </a:ln>
-        </p:spPr>
-        <p:style>
-          <a:lnRef idx="2">
-            <a:schemeClr val="accent1">
-              <a:shade val="15000"/>
-            </a:schemeClr>
-          </a:lnRef>
-          <a:fillRef idx="1">
-            <a:schemeClr val="accent1"/>
-          </a:fillRef>
-          <a:effectRef idx="0">
-            <a:schemeClr val="accent1"/>
-          </a:effectRef>
-          <a:fontRef idx="minor">
-            <a:schemeClr val="lt1"/>
-          </a:fontRef>
-        </p:style>
-        <p:txBody>
-          <a:bodyPr rtlCol="0" anchor="ctr"/>
-          <a:lstStyle/>
-          <a:p>
-            <a:pPr algn="ctr"/>
-            <a:r>
-              <a:rPr lang="en-US" dirty="0">
-                <a:solidFill>
-                  <a:schemeClr val="tx1"/>
-                </a:solidFill>
-              </a:rPr>
-              <a:t>Language</a:t>
-            </a:r>
-          </a:p>
-          <a:p>
-            <a:pPr algn="ctr"/>
-            <a:r>
-              <a:rPr lang="en-US" dirty="0">
-                <a:solidFill>
-                  <a:schemeClr val="tx1"/>
-                </a:solidFill>
-              </a:rPr>
-              <a:t>Model</a:t>
-            </a:r>
-          </a:p>
-        </p:txBody>
-      </p:sp>
-      <p:cxnSp>
-        <p:nvCxnSpPr>
-          <p:cNvPr id="7" name="Straight Arrow Connector 6">
-            <a:extLst>
-              <a:ext uri="{FF2B5EF4-FFF2-40B4-BE49-F238E27FC236}">
-                <a16:creationId xmlns:a16="http://schemas.microsoft.com/office/drawing/2014/main" id="{70FF9049-A038-5CD7-B5B6-A7A955E2687C}"/>
-              </a:ext>
-            </a:extLst>
-          </p:cNvPr>
-          <p:cNvCxnSpPr>
-            <a:cxnSpLocks/>
-            <a:stCxn id="5" idx="3"/>
-            <a:endCxn id="3" idx="1"/>
-          </p:cNvCxnSpPr>
-          <p:nvPr/>
-        </p:nvCxnSpPr>
-        <p:spPr>
-          <a:xfrm flipV="1">
-            <a:off x="3421380" y="2854154"/>
-            <a:ext cx="624840" cy="1"/>
-          </a:xfrm>
-          <a:prstGeom prst="straightConnector1">
-            <a:avLst/>
-          </a:prstGeom>
-          <a:ln>
-            <a:solidFill>
-              <a:schemeClr val="tx1"/>
-            </a:solidFill>
-            <a:prstDash val="solid"/>
-            <a:tailEnd type="triangle" w="lg" len="lg"/>
-          </a:ln>
-        </p:spPr>
-        <p:style>
-          <a:lnRef idx="2">
-            <a:schemeClr val="accent1"/>
-          </a:lnRef>
-          <a:fillRef idx="0">
-            <a:schemeClr val="accent1"/>
-          </a:fillRef>
-          <a:effectRef idx="1">
-            <a:schemeClr val="accent1"/>
-          </a:effectRef>
-          <a:fontRef idx="minor">
-            <a:schemeClr val="tx1"/>
-          </a:fontRef>
-        </p:style>
-      </p:cxnSp>
-      <p:cxnSp>
-        <p:nvCxnSpPr>
-          <p:cNvPr id="10" name="Straight Arrow Connector 9">
-            <a:extLst>
-              <a:ext uri="{FF2B5EF4-FFF2-40B4-BE49-F238E27FC236}">
-                <a16:creationId xmlns:a16="http://schemas.microsoft.com/office/drawing/2014/main" id="{2C10FC99-8029-AE13-0A3B-1F87064360AB}"/>
-              </a:ext>
-            </a:extLst>
-          </p:cNvPr>
-          <p:cNvCxnSpPr>
-            <a:cxnSpLocks/>
-            <a:stCxn id="44" idx="3"/>
-            <a:endCxn id="6" idx="1"/>
-          </p:cNvCxnSpPr>
-          <p:nvPr/>
-        </p:nvCxnSpPr>
-        <p:spPr>
-          <a:xfrm>
-            <a:off x="9189720" y="2854155"/>
-            <a:ext cx="647700" cy="0"/>
-          </a:xfrm>
-          <a:prstGeom prst="straightConnector1">
-            <a:avLst/>
-          </a:prstGeom>
-          <a:ln>
-            <a:solidFill>
-              <a:schemeClr val="tx1"/>
-            </a:solidFill>
-            <a:prstDash val="solid"/>
-            <a:tailEnd type="triangle" w="lg" len="lg"/>
-          </a:ln>
-        </p:spPr>
-        <p:style>
-          <a:lnRef idx="2">
-            <a:schemeClr val="accent1"/>
-          </a:lnRef>
-          <a:fillRef idx="0">
-            <a:schemeClr val="accent1"/>
-          </a:fillRef>
-          <a:effectRef idx="1">
-            <a:schemeClr val="accent1"/>
-          </a:effectRef>
-          <a:fontRef idx="minor">
-            <a:schemeClr val="tx1"/>
-          </a:fontRef>
-        </p:style>
-      </p:cxnSp>
-      <p:sp>
-        <p:nvSpPr>
-          <p:cNvPr id="15" name="Rectangle: Rounded Corners 14">
-            <a:extLst>
-              <a:ext uri="{FF2B5EF4-FFF2-40B4-BE49-F238E27FC236}">
-                <a16:creationId xmlns:a16="http://schemas.microsoft.com/office/drawing/2014/main" id="{C23DA4FB-7AE1-4EE4-8DD5-321F7F7C7F33}"/>
-              </a:ext>
-            </a:extLst>
-          </p:cNvPr>
-          <p:cNvSpPr/>
-          <p:nvPr/>
-        </p:nvSpPr>
-        <p:spPr>
-          <a:xfrm>
-            <a:off x="189267" y="2619607"/>
-            <a:ext cx="915222" cy="469096"/>
-          </a:xfrm>
-          <a:prstGeom prst="roundRect">
-            <a:avLst/>
-          </a:prstGeom>
-          <a:solidFill>
-            <a:srgbClr val="E5F1F8"/>
-          </a:solidFill>
-          <a:ln>
-            <a:solidFill>
-              <a:schemeClr val="tx1"/>
-            </a:solidFill>
-          </a:ln>
-        </p:spPr>
-        <p:style>
-          <a:lnRef idx="2">
-            <a:schemeClr val="accent1">
-              <a:shade val="15000"/>
-            </a:schemeClr>
-          </a:lnRef>
-          <a:fillRef idx="1">
-            <a:schemeClr val="accent1"/>
-          </a:fillRef>
-          <a:effectRef idx="0">
-            <a:schemeClr val="accent1"/>
-          </a:effectRef>
-          <a:fontRef idx="minor">
-            <a:schemeClr val="lt1"/>
-          </a:fontRef>
-        </p:style>
-        <p:txBody>
-          <a:bodyPr rtlCol="0" anchor="ctr"/>
-          <a:lstStyle/>
-          <a:p>
-            <a:pPr algn="ctr"/>
-            <a:r>
-              <a:rPr lang="en-US" dirty="0">
-                <a:solidFill>
-                  <a:schemeClr val="tx1"/>
-                </a:solidFill>
-              </a:rPr>
-              <a:t>Prompt</a:t>
-            </a:r>
-          </a:p>
-        </p:txBody>
-      </p:sp>
-      <p:cxnSp>
-        <p:nvCxnSpPr>
-          <p:cNvPr id="16" name="Straight Arrow Connector 15">
-            <a:extLst>
-              <a:ext uri="{FF2B5EF4-FFF2-40B4-BE49-F238E27FC236}">
-                <a16:creationId xmlns:a16="http://schemas.microsoft.com/office/drawing/2014/main" id="{942D3144-4FA8-07EA-6898-D7B2C45E010A}"/>
-              </a:ext>
-            </a:extLst>
-          </p:cNvPr>
-          <p:cNvCxnSpPr>
-            <a:cxnSpLocks/>
-            <a:stCxn id="15" idx="3"/>
-            <a:endCxn id="5" idx="1"/>
-          </p:cNvCxnSpPr>
-          <p:nvPr/>
-        </p:nvCxnSpPr>
-        <p:spPr>
-          <a:xfrm>
-            <a:off x="1104489" y="2854155"/>
-            <a:ext cx="403449" cy="0"/>
-          </a:xfrm>
-          <a:prstGeom prst="straightConnector1">
-            <a:avLst/>
-          </a:prstGeom>
-          <a:ln>
-            <a:solidFill>
-              <a:schemeClr val="tx1"/>
-            </a:solidFill>
-            <a:prstDash val="sysDash"/>
-            <a:tailEnd type="triangle" w="lg" len="lg"/>
-          </a:ln>
-        </p:spPr>
-        <p:style>
-          <a:lnRef idx="2">
-            <a:schemeClr val="accent1"/>
-          </a:lnRef>
-          <a:fillRef idx="0">
-            <a:schemeClr val="accent1"/>
-          </a:fillRef>
-          <a:effectRef idx="1">
-            <a:schemeClr val="accent1"/>
-          </a:effectRef>
-          <a:fontRef idx="minor">
-            <a:schemeClr val="tx1"/>
-          </a:fontRef>
-        </p:style>
-      </p:cxnSp>
-      <p:cxnSp>
-        <p:nvCxnSpPr>
-          <p:cNvPr id="19" name="Connector: Elbow 18">
-            <a:extLst>
-              <a:ext uri="{FF2B5EF4-FFF2-40B4-BE49-F238E27FC236}">
-                <a16:creationId xmlns:a16="http://schemas.microsoft.com/office/drawing/2014/main" id="{BF48D9D9-8BAB-3118-5B91-13BAA46C2349}"/>
-              </a:ext>
-            </a:extLst>
-          </p:cNvPr>
-          <p:cNvCxnSpPr>
-            <a:cxnSpLocks/>
-            <a:stCxn id="5" idx="3"/>
-            <a:endCxn id="4" idx="1"/>
-          </p:cNvCxnSpPr>
-          <p:nvPr/>
-        </p:nvCxnSpPr>
-        <p:spPr>
-          <a:xfrm flipV="1">
-            <a:off x="3421380" y="2083603"/>
-            <a:ext cx="624840" cy="770552"/>
-          </a:xfrm>
-          <a:prstGeom prst="bentConnector3">
-            <a:avLst>
-              <a:gd name="adj1" fmla="val 50000"/>
-            </a:avLst>
-          </a:prstGeom>
-          <a:ln>
-            <a:solidFill>
-              <a:schemeClr val="tx1"/>
-            </a:solidFill>
-            <a:prstDash val="solid"/>
-            <a:tailEnd type="triangle" w="lg" len="lg"/>
-          </a:ln>
-        </p:spPr>
-        <p:style>
-          <a:lnRef idx="2">
-            <a:schemeClr val="accent1"/>
-          </a:lnRef>
-          <a:fillRef idx="0">
-            <a:schemeClr val="accent1"/>
-          </a:fillRef>
-          <a:effectRef idx="1">
-            <a:schemeClr val="accent1"/>
-          </a:effectRef>
-          <a:fontRef idx="minor">
-            <a:schemeClr val="tx1"/>
-          </a:fontRef>
-        </p:style>
-      </p:cxnSp>
-      <p:cxnSp>
-        <p:nvCxnSpPr>
-          <p:cNvPr id="22" name="Connector: Elbow 21">
-            <a:extLst>
-              <a:ext uri="{FF2B5EF4-FFF2-40B4-BE49-F238E27FC236}">
-                <a16:creationId xmlns:a16="http://schemas.microsoft.com/office/drawing/2014/main" id="{217AA7E3-1E41-FB8C-7F66-A5758B29A028}"/>
-              </a:ext>
-            </a:extLst>
-          </p:cNvPr>
-          <p:cNvCxnSpPr>
-            <a:cxnSpLocks/>
-            <a:stCxn id="5" idx="3"/>
-            <a:endCxn id="2" idx="1"/>
-          </p:cNvCxnSpPr>
-          <p:nvPr/>
-        </p:nvCxnSpPr>
-        <p:spPr>
-          <a:xfrm>
-            <a:off x="3421380" y="2854155"/>
-            <a:ext cx="624840" cy="772965"/>
-          </a:xfrm>
-          <a:prstGeom prst="bentConnector3">
-            <a:avLst>
-              <a:gd name="adj1" fmla="val 50000"/>
-            </a:avLst>
-          </a:prstGeom>
-          <a:ln>
-            <a:solidFill>
-              <a:schemeClr val="tx1"/>
-            </a:solidFill>
-            <a:prstDash val="solid"/>
-            <a:tailEnd type="triangle" w="lg" len="lg"/>
-          </a:ln>
-        </p:spPr>
-        <p:style>
-          <a:lnRef idx="2">
-            <a:schemeClr val="accent1"/>
-          </a:lnRef>
-          <a:fillRef idx="0">
-            <a:schemeClr val="accent1"/>
-          </a:fillRef>
-          <a:effectRef idx="1">
-            <a:schemeClr val="accent1"/>
-          </a:effectRef>
-          <a:fontRef idx="minor">
-            <a:schemeClr val="tx1"/>
-          </a:fontRef>
-        </p:style>
-      </p:cxnSp>
-      <p:sp>
-        <p:nvSpPr>
-          <p:cNvPr id="25" name="Rectangle: Rounded Corners 24">
-            <a:extLst>
-              <a:ext uri="{FF2B5EF4-FFF2-40B4-BE49-F238E27FC236}">
-                <a16:creationId xmlns:a16="http://schemas.microsoft.com/office/drawing/2014/main" id="{98E95763-BD68-DEF9-F942-CCC8B336544E}"/>
-              </a:ext>
-            </a:extLst>
-          </p:cNvPr>
-          <p:cNvSpPr/>
-          <p:nvPr/>
-        </p:nvSpPr>
-        <p:spPr>
-          <a:xfrm>
-            <a:off x="8732520" y="1852591"/>
-            <a:ext cx="457200" cy="457200"/>
-          </a:xfrm>
-          <a:prstGeom prst="roundRect">
-            <a:avLst/>
-          </a:prstGeom>
-          <a:solidFill>
-            <a:srgbClr val="E5F1F8"/>
-          </a:solidFill>
-          <a:ln>
-            <a:solidFill>
-              <a:schemeClr val="tx1"/>
-            </a:solidFill>
-          </a:ln>
-        </p:spPr>
-        <p:style>
-          <a:lnRef idx="2">
-            <a:schemeClr val="accent1">
-              <a:shade val="15000"/>
-            </a:schemeClr>
-          </a:lnRef>
-          <a:fillRef idx="1">
-            <a:schemeClr val="accent1"/>
-          </a:fillRef>
-          <a:effectRef idx="0">
-            <a:schemeClr val="accent1"/>
-          </a:effectRef>
-          <a:fontRef idx="minor">
-            <a:schemeClr val="lt1"/>
-          </a:fontRef>
-        </p:style>
-        <p:txBody>
-          <a:bodyPr rtlCol="0" anchor="ctr"/>
-          <a:lstStyle/>
-          <a:p>
-            <a:pPr algn="ctr"/>
-            <a:endParaRPr lang="en-US" dirty="0">
-              <a:solidFill>
-                <a:schemeClr val="tx1"/>
-              </a:solidFill>
-            </a:endParaRPr>
-          </a:p>
-        </p:txBody>
-      </p:sp>
-      <p:cxnSp>
-        <p:nvCxnSpPr>
-          <p:cNvPr id="40" name="Straight Arrow Connector 39">
-            <a:extLst>
-              <a:ext uri="{FF2B5EF4-FFF2-40B4-BE49-F238E27FC236}">
-                <a16:creationId xmlns:a16="http://schemas.microsoft.com/office/drawing/2014/main" id="{B899F5AF-E80C-3452-008E-8E821AEFA864}"/>
-              </a:ext>
-            </a:extLst>
-          </p:cNvPr>
-          <p:cNvCxnSpPr>
-            <a:cxnSpLocks/>
-            <a:stCxn id="4" idx="3"/>
-            <a:endCxn id="25" idx="1"/>
-          </p:cNvCxnSpPr>
-          <p:nvPr/>
-        </p:nvCxnSpPr>
-        <p:spPr>
-          <a:xfrm flipV="1">
-            <a:off x="8328660" y="2081191"/>
-            <a:ext cx="403860" cy="2412"/>
-          </a:xfrm>
-          <a:prstGeom prst="straightConnector1">
-            <a:avLst/>
-          </a:prstGeom>
-          <a:ln>
-            <a:solidFill>
-              <a:schemeClr val="tx1"/>
-            </a:solidFill>
-            <a:prstDash val="solid"/>
-            <a:tailEnd type="triangle" w="lg" len="lg"/>
-          </a:ln>
-        </p:spPr>
-        <p:style>
-          <a:lnRef idx="2">
-            <a:schemeClr val="accent1"/>
-          </a:lnRef>
-          <a:fillRef idx="0">
-            <a:schemeClr val="accent1"/>
-          </a:fillRef>
-          <a:effectRef idx="1">
-            <a:schemeClr val="accent1"/>
-          </a:effectRef>
-          <a:fontRef idx="minor">
-            <a:schemeClr val="tx1"/>
-          </a:fontRef>
-        </p:style>
-      </p:cxnSp>
-      <p:sp>
-        <p:nvSpPr>
-          <p:cNvPr id="44" name="Rectangle: Rounded Corners 43">
-            <a:extLst>
-              <a:ext uri="{FF2B5EF4-FFF2-40B4-BE49-F238E27FC236}">
-                <a16:creationId xmlns:a16="http://schemas.microsoft.com/office/drawing/2014/main" id="{3F66FD98-C347-7EA9-DC36-7FDBB97B4248}"/>
-              </a:ext>
-            </a:extLst>
-          </p:cNvPr>
-          <p:cNvSpPr/>
-          <p:nvPr/>
-        </p:nvSpPr>
-        <p:spPr>
-          <a:xfrm>
-            <a:off x="8732520" y="2625555"/>
-            <a:ext cx="457200" cy="457200"/>
-          </a:xfrm>
-          <a:prstGeom prst="roundRect">
-            <a:avLst/>
-          </a:prstGeom>
-          <a:solidFill>
-            <a:srgbClr val="E5F1F8"/>
-          </a:solidFill>
-          <a:ln>
-            <a:solidFill>
-              <a:schemeClr val="tx1"/>
-            </a:solidFill>
-          </a:ln>
-        </p:spPr>
-        <p:style>
-          <a:lnRef idx="2">
-            <a:schemeClr val="accent1">
-              <a:shade val="15000"/>
-            </a:schemeClr>
-          </a:lnRef>
-          <a:fillRef idx="1">
-            <a:schemeClr val="accent1"/>
-          </a:fillRef>
-          <a:effectRef idx="0">
-            <a:schemeClr val="accent1"/>
-          </a:effectRef>
-          <a:fontRef idx="minor">
-            <a:schemeClr val="lt1"/>
-          </a:fontRef>
-        </p:style>
-        <p:txBody>
-          <a:bodyPr rtlCol="0" anchor="ctr"/>
-          <a:lstStyle/>
-          <a:p>
-            <a:pPr algn="ctr"/>
-            <a:endParaRPr lang="en-US" dirty="0">
-              <a:solidFill>
-                <a:schemeClr val="tx1"/>
-              </a:solidFill>
-            </a:endParaRPr>
-          </a:p>
-        </p:txBody>
-      </p:sp>
-      <p:sp>
-        <p:nvSpPr>
-          <p:cNvPr id="46" name="Rectangle: Rounded Corners 45">
-            <a:extLst>
-              <a:ext uri="{FF2B5EF4-FFF2-40B4-BE49-F238E27FC236}">
-                <a16:creationId xmlns:a16="http://schemas.microsoft.com/office/drawing/2014/main" id="{A791A27B-2AA1-8E05-2231-C99FE09DCBEB}"/>
-              </a:ext>
-            </a:extLst>
-          </p:cNvPr>
-          <p:cNvSpPr/>
-          <p:nvPr/>
-        </p:nvSpPr>
-        <p:spPr>
-          <a:xfrm>
-            <a:off x="8732520" y="3398519"/>
-            <a:ext cx="457200" cy="457200"/>
-          </a:xfrm>
-          <a:prstGeom prst="roundRect">
-            <a:avLst/>
-          </a:prstGeom>
-          <a:solidFill>
-            <a:srgbClr val="E5F1F8"/>
-          </a:solidFill>
-          <a:ln>
-            <a:solidFill>
-              <a:schemeClr val="tx1"/>
-            </a:solidFill>
-          </a:ln>
-        </p:spPr>
-        <p:style>
-          <a:lnRef idx="2">
-            <a:schemeClr val="accent1">
-              <a:shade val="15000"/>
-            </a:schemeClr>
-          </a:lnRef>
-          <a:fillRef idx="1">
-            <a:schemeClr val="accent1"/>
-          </a:fillRef>
-          <a:effectRef idx="0">
-            <a:schemeClr val="accent1"/>
-          </a:effectRef>
-          <a:fontRef idx="minor">
-            <a:schemeClr val="lt1"/>
-          </a:fontRef>
-        </p:style>
-        <p:txBody>
-          <a:bodyPr rtlCol="0" anchor="ctr"/>
-          <a:lstStyle/>
-          <a:p>
-            <a:pPr algn="ctr"/>
-            <a:endParaRPr lang="en-US" dirty="0">
-              <a:solidFill>
-                <a:schemeClr val="tx1"/>
-              </a:solidFill>
-            </a:endParaRPr>
-          </a:p>
-        </p:txBody>
-      </p:sp>
-      <p:cxnSp>
-        <p:nvCxnSpPr>
-          <p:cNvPr id="47" name="Straight Arrow Connector 46">
-            <a:extLst>
-              <a:ext uri="{FF2B5EF4-FFF2-40B4-BE49-F238E27FC236}">
-                <a16:creationId xmlns:a16="http://schemas.microsoft.com/office/drawing/2014/main" id="{42D77B26-2C1F-3022-9B0B-3736BC5CF8AA}"/>
-              </a:ext>
-            </a:extLst>
-          </p:cNvPr>
-          <p:cNvCxnSpPr>
-            <a:cxnSpLocks/>
-            <a:stCxn id="3" idx="3"/>
-            <a:endCxn id="44" idx="1"/>
-          </p:cNvCxnSpPr>
-          <p:nvPr/>
-        </p:nvCxnSpPr>
-        <p:spPr>
-          <a:xfrm>
-            <a:off x="8328660" y="2854154"/>
-            <a:ext cx="403860" cy="1"/>
-          </a:xfrm>
-          <a:prstGeom prst="straightConnector1">
-            <a:avLst/>
-          </a:prstGeom>
-          <a:ln>
-            <a:solidFill>
-              <a:schemeClr val="tx1"/>
-            </a:solidFill>
-            <a:prstDash val="solid"/>
-            <a:tailEnd type="triangle" w="lg" len="lg"/>
-          </a:ln>
-        </p:spPr>
-        <p:style>
-          <a:lnRef idx="2">
-            <a:schemeClr val="accent1"/>
-          </a:lnRef>
-          <a:fillRef idx="0">
-            <a:schemeClr val="accent1"/>
-          </a:fillRef>
-          <a:effectRef idx="1">
-            <a:schemeClr val="accent1"/>
-          </a:effectRef>
-          <a:fontRef idx="minor">
-            <a:schemeClr val="tx1"/>
-          </a:fontRef>
-        </p:style>
-      </p:cxnSp>
-      <p:cxnSp>
-        <p:nvCxnSpPr>
-          <p:cNvPr id="55" name="Straight Arrow Connector 54">
-            <a:extLst>
-              <a:ext uri="{FF2B5EF4-FFF2-40B4-BE49-F238E27FC236}">
-                <a16:creationId xmlns:a16="http://schemas.microsoft.com/office/drawing/2014/main" id="{A99ECFB6-8E63-4F62-C5D3-37BC5BB43934}"/>
-              </a:ext>
-            </a:extLst>
-          </p:cNvPr>
-          <p:cNvCxnSpPr>
-            <a:cxnSpLocks/>
-            <a:stCxn id="2" idx="3"/>
-            <a:endCxn id="46" idx="1"/>
-          </p:cNvCxnSpPr>
-          <p:nvPr/>
-        </p:nvCxnSpPr>
-        <p:spPr>
-          <a:xfrm flipV="1">
-            <a:off x="8328660" y="3627119"/>
-            <a:ext cx="403860" cy="1"/>
-          </a:xfrm>
-          <a:prstGeom prst="straightConnector1">
-            <a:avLst/>
-          </a:prstGeom>
-          <a:ln>
-            <a:solidFill>
-              <a:schemeClr val="tx1"/>
-            </a:solidFill>
-            <a:prstDash val="solid"/>
-            <a:tailEnd type="triangle" w="lg" len="lg"/>
-          </a:ln>
-        </p:spPr>
-        <p:style>
-          <a:lnRef idx="2">
-            <a:schemeClr val="accent1"/>
-          </a:lnRef>
-          <a:fillRef idx="0">
-            <a:schemeClr val="accent1"/>
-          </a:fillRef>
-          <a:effectRef idx="1">
-            <a:schemeClr val="accent1"/>
-          </a:effectRef>
-          <a:fontRef idx="minor">
-            <a:schemeClr val="tx1"/>
-          </a:fontRef>
-        </p:style>
-      </p:cxnSp>
-      <p:cxnSp>
-        <p:nvCxnSpPr>
-          <p:cNvPr id="58" name="Connector: Elbow 57">
-            <a:extLst>
-              <a:ext uri="{FF2B5EF4-FFF2-40B4-BE49-F238E27FC236}">
-                <a16:creationId xmlns:a16="http://schemas.microsoft.com/office/drawing/2014/main" id="{DDB500F1-F165-AABE-6725-11E4ED79023E}"/>
-              </a:ext>
-            </a:extLst>
-          </p:cNvPr>
-          <p:cNvCxnSpPr>
-            <a:cxnSpLocks/>
-            <a:stCxn id="25" idx="3"/>
-            <a:endCxn id="6" idx="1"/>
-          </p:cNvCxnSpPr>
-          <p:nvPr/>
-        </p:nvCxnSpPr>
-        <p:spPr>
-          <a:xfrm>
-            <a:off x="9189720" y="2081191"/>
-            <a:ext cx="647700" cy="772964"/>
-          </a:xfrm>
-          <a:prstGeom prst="bentConnector3">
-            <a:avLst>
-              <a:gd name="adj1" fmla="val 50000"/>
-            </a:avLst>
-          </a:prstGeom>
-          <a:ln>
-            <a:solidFill>
-              <a:schemeClr val="tx1"/>
-            </a:solidFill>
-            <a:prstDash val="solid"/>
-            <a:tailEnd type="triangle" w="lg" len="lg"/>
-          </a:ln>
-        </p:spPr>
-        <p:style>
-          <a:lnRef idx="2">
-            <a:schemeClr val="accent1"/>
-          </a:lnRef>
-          <a:fillRef idx="0">
-            <a:schemeClr val="accent1"/>
-          </a:fillRef>
-          <a:effectRef idx="1">
-            <a:schemeClr val="accent1"/>
-          </a:effectRef>
-          <a:fontRef idx="minor">
-            <a:schemeClr val="tx1"/>
-          </a:fontRef>
-        </p:style>
-      </p:cxnSp>
-      <p:cxnSp>
-        <p:nvCxnSpPr>
-          <p:cNvPr id="61" name="Connector: Elbow 60">
-            <a:extLst>
-              <a:ext uri="{FF2B5EF4-FFF2-40B4-BE49-F238E27FC236}">
-                <a16:creationId xmlns:a16="http://schemas.microsoft.com/office/drawing/2014/main" id="{28AC6A5D-0A01-5370-996D-AF8698A1082D}"/>
-              </a:ext>
-            </a:extLst>
-          </p:cNvPr>
-          <p:cNvCxnSpPr>
-            <a:cxnSpLocks/>
-            <a:stCxn id="46" idx="3"/>
-            <a:endCxn id="6" idx="1"/>
-          </p:cNvCxnSpPr>
-          <p:nvPr/>
-        </p:nvCxnSpPr>
-        <p:spPr>
-          <a:xfrm flipV="1">
-            <a:off x="9189720" y="2854155"/>
-            <a:ext cx="647700" cy="772964"/>
-          </a:xfrm>
-          <a:prstGeom prst="bentConnector3">
-            <a:avLst>
-              <a:gd name="adj1" fmla="val 50000"/>
-            </a:avLst>
-          </a:prstGeom>
-          <a:ln>
-            <a:solidFill>
-              <a:schemeClr val="tx1"/>
-            </a:solidFill>
-            <a:prstDash val="solid"/>
-            <a:tailEnd type="triangle" w="lg" len="lg"/>
-          </a:ln>
-        </p:spPr>
-        <p:style>
-          <a:lnRef idx="2">
-            <a:schemeClr val="accent1"/>
-          </a:lnRef>
-          <a:fillRef idx="0">
-            <a:schemeClr val="accent1"/>
-          </a:fillRef>
-          <a:effectRef idx="1">
-            <a:schemeClr val="accent1"/>
-          </a:effectRef>
-          <a:fontRef idx="minor">
-            <a:schemeClr val="tx1"/>
-          </a:fontRef>
-        </p:style>
-      </p:cxnSp>
-      <p:pic>
-        <p:nvPicPr>
-          <p:cNvPr id="67" name="Graphic 66" descr="Web design with solid fill">
-            <a:extLst>
-              <a:ext uri="{FF2B5EF4-FFF2-40B4-BE49-F238E27FC236}">
-                <a16:creationId xmlns:a16="http://schemas.microsoft.com/office/drawing/2014/main" id="{5D8BB564-5BA8-868D-2AB7-35E0D3AE65F9}"/>
-              </a:ext>
-            </a:extLst>
-          </p:cNvPr>
-          <p:cNvPicPr>
-            <a:picLocks noChangeAspect="1"/>
-          </p:cNvPicPr>
-          <p:nvPr/>
-        </p:nvPicPr>
-        <p:blipFill>
-          <a:blip r:embed="rId2">
-            <a:extLst>
-              <a:ext uri="{96DAC541-7B7A-43D3-8B79-37D633B846F1}">
-                <asvg:svgBlip xmlns:asvg="http://schemas.microsoft.com/office/drawing/2016/SVG/main" r:embed="rId3"/>
-              </a:ext>
-            </a:extLst>
-          </a:blip>
-          <a:stretch>
-            <a:fillRect/>
-          </a:stretch>
-        </p:blipFill>
-        <p:spPr>
-          <a:xfrm>
-            <a:off x="8755380" y="2648413"/>
-            <a:ext cx="411480" cy="411480"/>
-          </a:xfrm>
-          <a:prstGeom prst="rect">
-            <a:avLst/>
-          </a:prstGeom>
-        </p:spPr>
-      </p:pic>
-      <p:pic>
-        <p:nvPicPr>
-          <p:cNvPr id="71" name="Graphic 70" descr="World with solid fill">
-            <a:extLst>
-              <a:ext uri="{FF2B5EF4-FFF2-40B4-BE49-F238E27FC236}">
-                <a16:creationId xmlns:a16="http://schemas.microsoft.com/office/drawing/2014/main" id="{0EF50C39-FA5F-96A6-2DE6-53C76B029FDB}"/>
-              </a:ext>
-            </a:extLst>
-          </p:cNvPr>
-          <p:cNvPicPr>
-            <a:picLocks noChangeAspect="1"/>
-          </p:cNvPicPr>
-          <p:nvPr/>
-        </p:nvPicPr>
-        <p:blipFill>
-          <a:blip r:embed="rId4">
-            <a:extLst>
-              <a:ext uri="{96DAC541-7B7A-43D3-8B79-37D633B846F1}">
-                <asvg:svgBlip xmlns:asvg="http://schemas.microsoft.com/office/drawing/2016/SVG/main" r:embed="rId5"/>
-              </a:ext>
-            </a:extLst>
-          </a:blip>
-          <a:stretch>
-            <a:fillRect/>
-          </a:stretch>
-        </p:blipFill>
-        <p:spPr>
-          <a:xfrm>
-            <a:off x="8755380" y="3421379"/>
-            <a:ext cx="411480" cy="411480"/>
-          </a:xfrm>
-          <a:prstGeom prst="rect">
-            <a:avLst/>
-          </a:prstGeom>
-        </p:spPr>
-      </p:pic>
-      <p:pic>
-        <p:nvPicPr>
-          <p:cNvPr id="73" name="Graphic 72" descr="Database with solid fill">
-            <a:extLst>
-              <a:ext uri="{FF2B5EF4-FFF2-40B4-BE49-F238E27FC236}">
-                <a16:creationId xmlns:a16="http://schemas.microsoft.com/office/drawing/2014/main" id="{20B0889E-3ACA-9DCA-25FE-C1F9B73F7329}"/>
-              </a:ext>
-            </a:extLst>
-          </p:cNvPr>
-          <p:cNvPicPr>
-            <a:picLocks noChangeAspect="1"/>
-          </p:cNvPicPr>
-          <p:nvPr/>
-        </p:nvPicPr>
-        <p:blipFill>
-          <a:blip r:embed="rId6">
-            <a:extLst>
-              <a:ext uri="{96DAC541-7B7A-43D3-8B79-37D633B846F1}">
-                <asvg:svgBlip xmlns:asvg="http://schemas.microsoft.com/office/drawing/2016/SVG/main" r:embed="rId7"/>
-              </a:ext>
-            </a:extLst>
-          </a:blip>
-          <a:stretch>
-            <a:fillRect/>
-          </a:stretch>
-        </p:blipFill>
-        <p:spPr>
-          <a:xfrm>
-            <a:off x="8755380" y="1875451"/>
-            <a:ext cx="411480" cy="411480"/>
-          </a:xfrm>
-          <a:prstGeom prst="rect">
-            <a:avLst/>
-          </a:prstGeom>
-        </p:spPr>
-      </p:pic>
-      <p:pic>
-        <p:nvPicPr>
-          <p:cNvPr id="75" name="Graphic 74" descr="Gears with solid fill">
-            <a:extLst>
-              <a:ext uri="{FF2B5EF4-FFF2-40B4-BE49-F238E27FC236}">
-                <a16:creationId xmlns:a16="http://schemas.microsoft.com/office/drawing/2014/main" id="{AFA7CC75-0D4E-9273-3BC2-179536E5EC20}"/>
-              </a:ext>
-            </a:extLst>
-          </p:cNvPr>
-          <p:cNvPicPr>
-            <a:picLocks noChangeAspect="1"/>
-          </p:cNvPicPr>
-          <p:nvPr/>
-        </p:nvPicPr>
-        <p:blipFill>
-          <a:blip r:embed="rId8">
-            <a:extLst>
-              <a:ext uri="{96DAC541-7B7A-43D3-8B79-37D633B846F1}">
-                <asvg:svgBlip xmlns:asvg="http://schemas.microsoft.com/office/drawing/2016/SVG/main" r:embed="rId9"/>
-              </a:ext>
-            </a:extLst>
-          </a:blip>
-          <a:stretch>
-            <a:fillRect/>
-          </a:stretch>
-        </p:blipFill>
-        <p:spPr>
-          <a:xfrm>
-            <a:off x="1626048" y="2648413"/>
-            <a:ext cx="411480" cy="411480"/>
-          </a:xfrm>
-          <a:prstGeom prst="rect">
-            <a:avLst/>
-          </a:prstGeom>
-        </p:spPr>
-      </p:pic>
-      <p:sp>
-        <p:nvSpPr>
-          <p:cNvPr id="76" name="Rectangle: Rounded Corners 75">
-            <a:extLst>
-              <a:ext uri="{FF2B5EF4-FFF2-40B4-BE49-F238E27FC236}">
-                <a16:creationId xmlns:a16="http://schemas.microsoft.com/office/drawing/2014/main" id="{3492D89A-8D12-E69E-613E-246E45DCD83F}"/>
-              </a:ext>
-            </a:extLst>
-          </p:cNvPr>
-          <p:cNvSpPr/>
-          <p:nvPr/>
-        </p:nvSpPr>
-        <p:spPr>
-          <a:xfrm>
-            <a:off x="10545258" y="3627118"/>
-            <a:ext cx="1205604" cy="469096"/>
-          </a:xfrm>
-          <a:prstGeom prst="roundRect">
-            <a:avLst/>
-          </a:prstGeom>
-          <a:solidFill>
-            <a:srgbClr val="E5F1F8"/>
-          </a:solidFill>
-          <a:ln>
-            <a:solidFill>
-              <a:schemeClr val="tx1"/>
-            </a:solidFill>
-          </a:ln>
-        </p:spPr>
-        <p:style>
-          <a:lnRef idx="2">
-            <a:schemeClr val="accent1">
-              <a:shade val="15000"/>
-            </a:schemeClr>
-          </a:lnRef>
-          <a:fillRef idx="1">
-            <a:schemeClr val="accent1"/>
-          </a:fillRef>
-          <a:effectRef idx="0">
-            <a:schemeClr val="accent1"/>
-          </a:effectRef>
-          <a:fontRef idx="minor">
-            <a:schemeClr val="lt1"/>
-          </a:fontRef>
-        </p:style>
-        <p:txBody>
-          <a:bodyPr rtlCol="0" anchor="ctr"/>
-          <a:lstStyle/>
-          <a:p>
-            <a:pPr algn="ctr"/>
-            <a:r>
-              <a:rPr lang="en-US" dirty="0">
-                <a:solidFill>
-                  <a:schemeClr val="tx1"/>
-                </a:solidFill>
-              </a:rPr>
-              <a:t>Response</a:t>
-            </a:r>
-          </a:p>
-        </p:txBody>
-      </p:sp>
-      <p:cxnSp>
-        <p:nvCxnSpPr>
-          <p:cNvPr id="77" name="Straight Arrow Connector 76">
-            <a:extLst>
-              <a:ext uri="{FF2B5EF4-FFF2-40B4-BE49-F238E27FC236}">
-                <a16:creationId xmlns:a16="http://schemas.microsoft.com/office/drawing/2014/main" id="{1A734903-BE53-2153-B1BE-7817395A6ACC}"/>
-              </a:ext>
-            </a:extLst>
-          </p:cNvPr>
-          <p:cNvCxnSpPr>
-            <a:cxnSpLocks/>
-            <a:endCxn id="76" idx="0"/>
-          </p:cNvCxnSpPr>
-          <p:nvPr/>
-        </p:nvCxnSpPr>
-        <p:spPr>
-          <a:xfrm>
-            <a:off x="11148060" y="3334214"/>
-            <a:ext cx="0" cy="292904"/>
-          </a:xfrm>
-          <a:prstGeom prst="straightConnector1">
-            <a:avLst/>
-          </a:prstGeom>
-          <a:ln>
-            <a:solidFill>
-              <a:schemeClr val="tx1"/>
-            </a:solidFill>
-            <a:prstDash val="sysDash"/>
-            <a:tailEnd type="triangle" w="lg" len="lg"/>
-          </a:ln>
-        </p:spPr>
-        <p:style>
-          <a:lnRef idx="2">
-            <a:schemeClr val="accent1"/>
-          </a:lnRef>
-          <a:fillRef idx="0">
-            <a:schemeClr val="accent1"/>
-          </a:fillRef>
-          <a:effectRef idx="1">
-            <a:schemeClr val="accent1"/>
-          </a:effectRef>
-          <a:fontRef idx="minor">
-            <a:schemeClr val="tx1"/>
-          </a:fontRef>
-        </p:style>
-      </p:cxnSp>
-      <p:cxnSp>
-        <p:nvCxnSpPr>
-          <p:cNvPr id="14" name="Connector: Elbow 13">
-            <a:extLst>
-              <a:ext uri="{FF2B5EF4-FFF2-40B4-BE49-F238E27FC236}">
-                <a16:creationId xmlns:a16="http://schemas.microsoft.com/office/drawing/2014/main" id="{4D371B40-23D5-3632-64F0-3A5DAC685C2C}"/>
-              </a:ext>
-            </a:extLst>
-          </p:cNvPr>
-          <p:cNvCxnSpPr>
-            <a:cxnSpLocks/>
-            <a:endCxn id="5" idx="2"/>
-          </p:cNvCxnSpPr>
-          <p:nvPr/>
-        </p:nvCxnSpPr>
-        <p:spPr>
-          <a:xfrm rot="5400000">
-            <a:off x="6337265" y="-538391"/>
-            <a:ext cx="12700" cy="7745211"/>
-          </a:xfrm>
-          <a:prstGeom prst="bentConnector3">
-            <a:avLst>
-              <a:gd name="adj1" fmla="val 6060000"/>
-            </a:avLst>
-          </a:prstGeom>
-          <a:ln>
-            <a:solidFill>
-              <a:schemeClr val="tx1"/>
-            </a:solidFill>
-            <a:prstDash val="sysDash"/>
-            <a:tailEnd type="triangle" w="lg" len="lg"/>
-          </a:ln>
-        </p:spPr>
-        <p:style>
-          <a:lnRef idx="2">
-            <a:schemeClr val="accent1"/>
-          </a:lnRef>
-          <a:fillRef idx="0">
-            <a:schemeClr val="accent1"/>
-          </a:fillRef>
-          <a:effectRef idx="1">
-            <a:schemeClr val="accent1"/>
-          </a:effectRef>
-          <a:fontRef idx="minor">
-            <a:schemeClr val="tx1"/>
-          </a:fontRef>
-        </p:style>
-      </p:cxnSp>
-    </p:spTree>
-    <p:extLst>
-      <p:ext uri="{BB962C8B-B14F-4D97-AF65-F5344CB8AC3E}">
-        <p14:creationId xmlns:p14="http://schemas.microsoft.com/office/powerpoint/2010/main" val="2560175498"/>
       </p:ext>
     </p:extLst>
   </p:cSld>

--- a/figures/figures.pptx
+++ b/figures/figures.pptx
@@ -5,7 +5,7 @@
     <p:sldMasterId id="2147483660" r:id="rId1"/>
   </p:sldMasterIdLst>
   <p:notesMasterIdLst>
-    <p:notesMasterId r:id="rId21"/>
+    <p:notesMasterId r:id="rId23"/>
   </p:notesMasterIdLst>
   <p:sldIdLst>
     <p:sldId id="258" r:id="rId2"/>
@@ -17,16 +17,18 @@
     <p:sldId id="268" r:id="rId8"/>
     <p:sldId id="275" r:id="rId9"/>
     <p:sldId id="262" r:id="rId10"/>
-    <p:sldId id="264" r:id="rId11"/>
-    <p:sldId id="265" r:id="rId12"/>
-    <p:sldId id="267" r:id="rId13"/>
-    <p:sldId id="269" r:id="rId14"/>
-    <p:sldId id="274" r:id="rId15"/>
-    <p:sldId id="270" r:id="rId16"/>
-    <p:sldId id="271" r:id="rId17"/>
-    <p:sldId id="272" r:id="rId18"/>
-    <p:sldId id="273" r:id="rId19"/>
-    <p:sldId id="257" r:id="rId20"/>
+    <p:sldId id="278" r:id="rId11"/>
+    <p:sldId id="277" r:id="rId12"/>
+    <p:sldId id="264" r:id="rId13"/>
+    <p:sldId id="265" r:id="rId14"/>
+    <p:sldId id="267" r:id="rId15"/>
+    <p:sldId id="269" r:id="rId16"/>
+    <p:sldId id="274" r:id="rId17"/>
+    <p:sldId id="270" r:id="rId18"/>
+    <p:sldId id="271" r:id="rId19"/>
+    <p:sldId id="272" r:id="rId20"/>
+    <p:sldId id="273" r:id="rId21"/>
+    <p:sldId id="257" r:id="rId22"/>
   </p:sldIdLst>
   <p:sldSz cx="12192000" cy="6858000"/>
   <p:notesSz cx="6858000" cy="9144000"/>
@@ -155,6 +157,8 @@
         <p14:section name="Knowledge Bases" id="{06E034E2-AFC7-4A28-B1B0-B4E2903C9A55}">
           <p14:sldIdLst>
             <p14:sldId id="262"/>
+            <p14:sldId id="278"/>
+            <p14:sldId id="277"/>
             <p14:sldId id="264"/>
           </p14:sldIdLst>
         </p14:section>
@@ -270,7 +274,7 @@
           <a:p>
             <a:fld id="{DAABB0E5-6D8D-4DEE-B75F-67010CF2307C}" type="datetimeFigureOut">
               <a:rPr lang="en-US" smtClean="0"/>
-              <a:t>2/26/2026</a:t>
+              <a:t>3/2/2026</a:t>
             </a:fld>
             <a:endParaRPr lang="en-US"/>
           </a:p>
@@ -955,7 +959,7 @@
           <a:p>
             <a:fld id="{B84C5C40-2055-49AF-9028-5DA79E75E391}" type="datetimeFigureOut">
               <a:rPr lang="en-US" smtClean="0"/>
-              <a:t>2/26/2026</a:t>
+              <a:t>3/2/2026</a:t>
             </a:fld>
             <a:endParaRPr lang="en-US"/>
           </a:p>
@@ -1125,7 +1129,7 @@
           <a:p>
             <a:fld id="{B84C5C40-2055-49AF-9028-5DA79E75E391}" type="datetimeFigureOut">
               <a:rPr lang="en-US" smtClean="0"/>
-              <a:t>2/26/2026</a:t>
+              <a:t>3/2/2026</a:t>
             </a:fld>
             <a:endParaRPr lang="en-US"/>
           </a:p>
@@ -1305,7 +1309,7 @@
           <a:p>
             <a:fld id="{B84C5C40-2055-49AF-9028-5DA79E75E391}" type="datetimeFigureOut">
               <a:rPr lang="en-US" smtClean="0"/>
-              <a:t>2/26/2026</a:t>
+              <a:t>3/2/2026</a:t>
             </a:fld>
             <a:endParaRPr lang="en-US"/>
           </a:p>
@@ -1475,7 +1479,7 @@
           <a:p>
             <a:fld id="{B84C5C40-2055-49AF-9028-5DA79E75E391}" type="datetimeFigureOut">
               <a:rPr lang="en-US" smtClean="0"/>
-              <a:t>2/26/2026</a:t>
+              <a:t>3/2/2026</a:t>
             </a:fld>
             <a:endParaRPr lang="en-US"/>
           </a:p>
@@ -1721,7 +1725,7 @@
           <a:p>
             <a:fld id="{B84C5C40-2055-49AF-9028-5DA79E75E391}" type="datetimeFigureOut">
               <a:rPr lang="en-US" smtClean="0"/>
-              <a:t>2/26/2026</a:t>
+              <a:t>3/2/2026</a:t>
             </a:fld>
             <a:endParaRPr lang="en-US"/>
           </a:p>
@@ -1953,7 +1957,7 @@
           <a:p>
             <a:fld id="{B84C5C40-2055-49AF-9028-5DA79E75E391}" type="datetimeFigureOut">
               <a:rPr lang="en-US" smtClean="0"/>
-              <a:t>2/26/2026</a:t>
+              <a:t>3/2/2026</a:t>
             </a:fld>
             <a:endParaRPr lang="en-US"/>
           </a:p>
@@ -2320,7 +2324,7 @@
           <a:p>
             <a:fld id="{B84C5C40-2055-49AF-9028-5DA79E75E391}" type="datetimeFigureOut">
               <a:rPr lang="en-US" smtClean="0"/>
-              <a:t>2/26/2026</a:t>
+              <a:t>3/2/2026</a:t>
             </a:fld>
             <a:endParaRPr lang="en-US"/>
           </a:p>
@@ -2438,7 +2442,7 @@
           <a:p>
             <a:fld id="{B84C5C40-2055-49AF-9028-5DA79E75E391}" type="datetimeFigureOut">
               <a:rPr lang="en-US" smtClean="0"/>
-              <a:t>2/26/2026</a:t>
+              <a:t>3/2/2026</a:t>
             </a:fld>
             <a:endParaRPr lang="en-US"/>
           </a:p>
@@ -2533,7 +2537,7 @@
           <a:p>
             <a:fld id="{B84C5C40-2055-49AF-9028-5DA79E75E391}" type="datetimeFigureOut">
               <a:rPr lang="en-US" smtClean="0"/>
-              <a:t>2/26/2026</a:t>
+              <a:t>3/2/2026</a:t>
             </a:fld>
             <a:endParaRPr lang="en-US"/>
           </a:p>
@@ -2810,7 +2814,7 @@
           <a:p>
             <a:fld id="{B84C5C40-2055-49AF-9028-5DA79E75E391}" type="datetimeFigureOut">
               <a:rPr lang="en-US" smtClean="0"/>
-              <a:t>2/26/2026</a:t>
+              <a:t>3/2/2026</a:t>
             </a:fld>
             <a:endParaRPr lang="en-US"/>
           </a:p>
@@ -3067,7 +3071,7 @@
           <a:p>
             <a:fld id="{B84C5C40-2055-49AF-9028-5DA79E75E391}" type="datetimeFigureOut">
               <a:rPr lang="en-US" smtClean="0"/>
-              <a:t>2/26/2026</a:t>
+              <a:t>3/2/2026</a:t>
             </a:fld>
             <a:endParaRPr lang="en-US"/>
           </a:p>
@@ -3280,7 +3284,7 @@
           <a:p>
             <a:fld id="{B84C5C40-2055-49AF-9028-5DA79E75E391}" type="datetimeFigureOut">
               <a:rPr lang="en-US" smtClean="0"/>
-              <a:t>2/26/2026</a:t>
+              <a:t>3/2/2026</a:t>
             </a:fld>
             <a:endParaRPr lang="en-US"/>
           </a:p>
@@ -3773,1364 +3777,57 @@
           <a:chExt cx="0" cy="0"/>
         </a:xfrm>
       </p:grpSpPr>
-      <p:sp>
-        <p:nvSpPr>
-          <p:cNvPr id="2" name="Rectangle: Rounded Corners 1">
-            <a:extLst>
-              <a:ext uri="{FF2B5EF4-FFF2-40B4-BE49-F238E27FC236}">
-                <a16:creationId xmlns:a16="http://schemas.microsoft.com/office/drawing/2014/main" id="{F09FDC59-6067-4502-1360-F42554AD87D3}"/>
-              </a:ext>
-            </a:extLst>
-          </p:cNvPr>
-          <p:cNvSpPr/>
-          <p:nvPr/>
-        </p:nvSpPr>
-        <p:spPr>
-          <a:xfrm>
-            <a:off x="4046220" y="3398520"/>
-            <a:ext cx="4282440" cy="457200"/>
-          </a:xfrm>
-          <a:prstGeom prst="roundRect">
-            <a:avLst/>
-          </a:prstGeom>
-          <a:solidFill>
-            <a:srgbClr val="B2D4EB"/>
-          </a:solidFill>
-          <a:ln>
-            <a:solidFill>
-              <a:schemeClr val="tx1"/>
-            </a:solidFill>
-          </a:ln>
-        </p:spPr>
-        <p:style>
-          <a:lnRef idx="2">
-            <a:schemeClr val="accent1">
-              <a:shade val="15000"/>
-            </a:schemeClr>
-          </a:lnRef>
-          <a:fillRef idx="1">
-            <a:schemeClr val="accent1"/>
-          </a:fillRef>
-          <a:effectRef idx="0">
-            <a:schemeClr val="accent1"/>
-          </a:effectRef>
-          <a:fontRef idx="minor">
-            <a:schemeClr val="lt1"/>
-          </a:fontRef>
-        </p:style>
-        <p:txBody>
-          <a:bodyPr rtlCol="0" anchor="ctr"/>
-          <a:lstStyle/>
-          <a:p>
-            <a:pPr algn="ctr"/>
-            <a:r>
-              <a:rPr lang="en-US" dirty="0">
-                <a:solidFill>
-                  <a:schemeClr val="tx1"/>
-                </a:solidFill>
-              </a:rPr>
-              <a:t>Search Public Information on the Web</a:t>
-            </a:r>
-            <a:endParaRPr lang="en-US" i="1" dirty="0">
-              <a:solidFill>
-                <a:schemeClr val="tx1"/>
-              </a:solidFill>
-            </a:endParaRPr>
-          </a:p>
-        </p:txBody>
-      </p:sp>
-      <p:sp>
-        <p:nvSpPr>
-          <p:cNvPr id="3" name="Rectangle: Rounded Corners 2">
-            <a:extLst>
-              <a:ext uri="{FF2B5EF4-FFF2-40B4-BE49-F238E27FC236}">
-                <a16:creationId xmlns:a16="http://schemas.microsoft.com/office/drawing/2014/main" id="{9800FF13-E208-2C00-EB7C-BCBA48F554BD}"/>
-              </a:ext>
-            </a:extLst>
-          </p:cNvPr>
-          <p:cNvSpPr/>
-          <p:nvPr/>
-        </p:nvSpPr>
-        <p:spPr>
-          <a:xfrm>
-            <a:off x="4046220" y="2625554"/>
-            <a:ext cx="4282440" cy="457200"/>
-          </a:xfrm>
-          <a:prstGeom prst="roundRect">
-            <a:avLst/>
-          </a:prstGeom>
-          <a:solidFill>
-            <a:srgbClr val="B2D4EB"/>
-          </a:solidFill>
-          <a:ln>
-            <a:solidFill>
-              <a:schemeClr val="tx1"/>
-            </a:solidFill>
-          </a:ln>
-        </p:spPr>
-        <p:style>
-          <a:lnRef idx="2">
-            <a:schemeClr val="accent1">
-              <a:shade val="15000"/>
-            </a:schemeClr>
-          </a:lnRef>
-          <a:fillRef idx="1">
-            <a:schemeClr val="accent1"/>
-          </a:fillRef>
-          <a:effectRef idx="0">
-            <a:schemeClr val="accent1"/>
-          </a:effectRef>
-          <a:fontRef idx="minor">
-            <a:schemeClr val="lt1"/>
-          </a:fontRef>
-        </p:style>
-        <p:txBody>
-          <a:bodyPr rtlCol="0" anchor="ctr"/>
-          <a:lstStyle/>
-          <a:p>
-            <a:pPr algn="ctr"/>
-            <a:r>
-              <a:rPr lang="en-US" dirty="0">
-                <a:solidFill>
-                  <a:schemeClr val="tx1"/>
-                </a:solidFill>
-              </a:rPr>
-              <a:t>Retrieve Stock Quotes from an API</a:t>
-            </a:r>
-            <a:endParaRPr lang="en-US" i="1" dirty="0">
-              <a:solidFill>
-                <a:schemeClr val="tx1"/>
-              </a:solidFill>
-            </a:endParaRPr>
-          </a:p>
-        </p:txBody>
-      </p:sp>
-      <p:sp>
-        <p:nvSpPr>
-          <p:cNvPr id="4" name="Rectangle: Rounded Corners 3">
-            <a:extLst>
-              <a:ext uri="{FF2B5EF4-FFF2-40B4-BE49-F238E27FC236}">
-                <a16:creationId xmlns:a16="http://schemas.microsoft.com/office/drawing/2014/main" id="{CD952C55-0F41-C8E8-4833-F5F86239B3AD}"/>
-              </a:ext>
-            </a:extLst>
-          </p:cNvPr>
-          <p:cNvSpPr/>
-          <p:nvPr/>
-        </p:nvSpPr>
-        <p:spPr>
-          <a:xfrm>
-            <a:off x="4046220" y="1855003"/>
-            <a:ext cx="4282440" cy="457200"/>
-          </a:xfrm>
-          <a:prstGeom prst="roundRect">
-            <a:avLst/>
-          </a:prstGeom>
-          <a:solidFill>
-            <a:srgbClr val="B2D4EB"/>
-          </a:solidFill>
-          <a:ln>
-            <a:solidFill>
-              <a:schemeClr val="tx1"/>
-            </a:solidFill>
-          </a:ln>
-        </p:spPr>
-        <p:style>
-          <a:lnRef idx="2">
-            <a:schemeClr val="accent1">
-              <a:shade val="15000"/>
-            </a:schemeClr>
-          </a:lnRef>
-          <a:fillRef idx="1">
-            <a:schemeClr val="accent1"/>
-          </a:fillRef>
-          <a:effectRef idx="0">
-            <a:schemeClr val="accent1"/>
-          </a:effectRef>
-          <a:fontRef idx="minor">
-            <a:schemeClr val="lt1"/>
-          </a:fontRef>
-        </p:style>
-        <p:txBody>
-          <a:bodyPr rtlCol="0" anchor="ctr"/>
-          <a:lstStyle/>
-          <a:p>
-            <a:pPr algn="ctr"/>
-            <a:r>
-              <a:rPr lang="en-US" dirty="0">
-                <a:solidFill>
-                  <a:schemeClr val="tx1"/>
-                </a:solidFill>
-              </a:rPr>
-              <a:t>Reference Internal Report Files</a:t>
-            </a:r>
-            <a:endParaRPr lang="en-US" i="1" dirty="0">
-              <a:solidFill>
-                <a:schemeClr val="tx1"/>
-              </a:solidFill>
-            </a:endParaRPr>
-          </a:p>
-        </p:txBody>
-      </p:sp>
-      <p:sp>
-        <p:nvSpPr>
-          <p:cNvPr id="5" name="Rectangle: Rounded Corners 4">
-            <a:extLst>
-              <a:ext uri="{FF2B5EF4-FFF2-40B4-BE49-F238E27FC236}">
-                <a16:creationId xmlns:a16="http://schemas.microsoft.com/office/drawing/2014/main" id="{600226F7-C833-1B1C-B967-7291F64244CC}"/>
-              </a:ext>
-            </a:extLst>
-          </p:cNvPr>
-          <p:cNvSpPr/>
-          <p:nvPr/>
-        </p:nvSpPr>
-        <p:spPr>
-          <a:xfrm>
-            <a:off x="1507938" y="2374095"/>
-            <a:ext cx="1913442" cy="960119"/>
-          </a:xfrm>
-          <a:prstGeom prst="roundRect">
-            <a:avLst/>
-          </a:prstGeom>
-          <a:solidFill>
-            <a:srgbClr val="E5F1F8"/>
-          </a:solidFill>
-          <a:ln>
-            <a:solidFill>
-              <a:schemeClr val="tx1"/>
-            </a:solidFill>
-          </a:ln>
-        </p:spPr>
-        <p:style>
-          <a:lnRef idx="2">
-            <a:schemeClr val="accent1">
-              <a:shade val="15000"/>
-            </a:schemeClr>
-          </a:lnRef>
-          <a:fillRef idx="1">
-            <a:schemeClr val="accent1"/>
-          </a:fillRef>
-          <a:effectRef idx="0">
-            <a:schemeClr val="accent1"/>
-          </a:effectRef>
-          <a:fontRef idx="minor">
-            <a:schemeClr val="lt1"/>
-          </a:fontRef>
-        </p:style>
-        <p:txBody>
-          <a:bodyPr rtlCol="0" anchor="ctr"/>
-          <a:lstStyle/>
-          <a:p>
-            <a:pPr algn="ctr"/>
-            <a:r>
-              <a:rPr lang="en-US" dirty="0">
-                <a:solidFill>
-                  <a:schemeClr val="tx1"/>
-                </a:solidFill>
-              </a:rPr>
-              <a:t>Query</a:t>
-            </a:r>
-          </a:p>
-          <a:p>
-            <a:pPr algn="ctr"/>
-            <a:r>
-              <a:rPr lang="en-US" dirty="0">
-                <a:solidFill>
-                  <a:schemeClr val="tx1"/>
-                </a:solidFill>
-              </a:rPr>
-              <a:t>Planning</a:t>
-            </a:r>
-          </a:p>
-        </p:txBody>
-      </p:sp>
-      <p:sp>
-        <p:nvSpPr>
-          <p:cNvPr id="6" name="Rectangle: Rounded Corners 5">
-            <a:extLst>
-              <a:ext uri="{FF2B5EF4-FFF2-40B4-BE49-F238E27FC236}">
-                <a16:creationId xmlns:a16="http://schemas.microsoft.com/office/drawing/2014/main" id="{C93C6EBF-0FE7-EC6E-5B5C-7AA41F6606DD}"/>
-              </a:ext>
-            </a:extLst>
-          </p:cNvPr>
-          <p:cNvSpPr/>
-          <p:nvPr/>
-        </p:nvSpPr>
-        <p:spPr>
-          <a:xfrm>
-            <a:off x="9837420" y="2374095"/>
-            <a:ext cx="1913442" cy="960119"/>
-          </a:xfrm>
-          <a:prstGeom prst="roundRect">
-            <a:avLst/>
-          </a:prstGeom>
-          <a:solidFill>
-            <a:srgbClr val="E5F1F8"/>
-          </a:solidFill>
-          <a:ln>
-            <a:solidFill>
-              <a:schemeClr val="tx1"/>
-            </a:solidFill>
-          </a:ln>
-        </p:spPr>
-        <p:style>
-          <a:lnRef idx="2">
-            <a:schemeClr val="accent1">
-              <a:shade val="15000"/>
-            </a:schemeClr>
-          </a:lnRef>
-          <a:fillRef idx="1">
-            <a:schemeClr val="accent1"/>
-          </a:fillRef>
-          <a:effectRef idx="0">
-            <a:schemeClr val="accent1"/>
-          </a:effectRef>
-          <a:fontRef idx="minor">
-            <a:schemeClr val="lt1"/>
-          </a:fontRef>
-        </p:style>
-        <p:txBody>
-          <a:bodyPr rtlCol="0" anchor="ctr"/>
-          <a:lstStyle/>
-          <a:p>
-            <a:pPr algn="ctr"/>
-            <a:r>
-              <a:rPr lang="en-US" dirty="0">
-                <a:solidFill>
-                  <a:schemeClr val="tx1"/>
-                </a:solidFill>
-              </a:rPr>
-              <a:t>Language</a:t>
-            </a:r>
-          </a:p>
-          <a:p>
-            <a:pPr algn="ctr"/>
-            <a:r>
-              <a:rPr lang="en-US" dirty="0">
-                <a:solidFill>
-                  <a:schemeClr val="tx1"/>
-                </a:solidFill>
-              </a:rPr>
-              <a:t>Model</a:t>
-            </a:r>
-          </a:p>
-        </p:txBody>
-      </p:sp>
-      <p:cxnSp>
-        <p:nvCxnSpPr>
-          <p:cNvPr id="7" name="Straight Arrow Connector 6">
-            <a:extLst>
-              <a:ext uri="{FF2B5EF4-FFF2-40B4-BE49-F238E27FC236}">
-                <a16:creationId xmlns:a16="http://schemas.microsoft.com/office/drawing/2014/main" id="{70FF9049-A038-5CD7-B5B6-A7A955E2687C}"/>
-              </a:ext>
-            </a:extLst>
-          </p:cNvPr>
-          <p:cNvCxnSpPr>
-            <a:cxnSpLocks/>
-            <a:stCxn id="5" idx="3"/>
-            <a:endCxn id="3" idx="1"/>
-          </p:cNvCxnSpPr>
-          <p:nvPr/>
-        </p:nvCxnSpPr>
-        <p:spPr>
-          <a:xfrm flipV="1">
-            <a:off x="3421380" y="2854154"/>
-            <a:ext cx="624840" cy="1"/>
-          </a:xfrm>
-          <a:prstGeom prst="straightConnector1">
-            <a:avLst/>
-          </a:prstGeom>
-          <a:ln>
-            <a:solidFill>
-              <a:schemeClr val="tx1"/>
-            </a:solidFill>
-            <a:prstDash val="solid"/>
-            <a:tailEnd type="triangle" w="lg" len="lg"/>
-          </a:ln>
-        </p:spPr>
-        <p:style>
-          <a:lnRef idx="2">
-            <a:schemeClr val="accent1"/>
-          </a:lnRef>
-          <a:fillRef idx="0">
-            <a:schemeClr val="accent1"/>
-          </a:fillRef>
-          <a:effectRef idx="1">
-            <a:schemeClr val="accent1"/>
-          </a:effectRef>
-          <a:fontRef idx="minor">
-            <a:schemeClr val="tx1"/>
-          </a:fontRef>
-        </p:style>
-      </p:cxnSp>
-      <p:cxnSp>
-        <p:nvCxnSpPr>
-          <p:cNvPr id="10" name="Straight Arrow Connector 9">
-            <a:extLst>
-              <a:ext uri="{FF2B5EF4-FFF2-40B4-BE49-F238E27FC236}">
-                <a16:creationId xmlns:a16="http://schemas.microsoft.com/office/drawing/2014/main" id="{2C10FC99-8029-AE13-0A3B-1F87064360AB}"/>
-              </a:ext>
-            </a:extLst>
-          </p:cNvPr>
-          <p:cNvCxnSpPr>
-            <a:cxnSpLocks/>
-            <a:stCxn id="44" idx="3"/>
-            <a:endCxn id="6" idx="1"/>
-          </p:cNvCxnSpPr>
-          <p:nvPr/>
-        </p:nvCxnSpPr>
-        <p:spPr>
-          <a:xfrm>
-            <a:off x="9189720" y="2854155"/>
-            <a:ext cx="647700" cy="0"/>
-          </a:xfrm>
-          <a:prstGeom prst="straightConnector1">
-            <a:avLst/>
-          </a:prstGeom>
-          <a:ln>
-            <a:solidFill>
-              <a:schemeClr val="tx1"/>
-            </a:solidFill>
-            <a:prstDash val="solid"/>
-            <a:tailEnd type="triangle" w="lg" len="lg"/>
-          </a:ln>
-        </p:spPr>
-        <p:style>
-          <a:lnRef idx="2">
-            <a:schemeClr val="accent1"/>
-          </a:lnRef>
-          <a:fillRef idx="0">
-            <a:schemeClr val="accent1"/>
-          </a:fillRef>
-          <a:effectRef idx="1">
-            <a:schemeClr val="accent1"/>
-          </a:effectRef>
-          <a:fontRef idx="minor">
-            <a:schemeClr val="tx1"/>
-          </a:fontRef>
-        </p:style>
-      </p:cxnSp>
-      <p:sp>
-        <p:nvSpPr>
-          <p:cNvPr id="15" name="Rectangle: Rounded Corners 14">
-            <a:extLst>
-              <a:ext uri="{FF2B5EF4-FFF2-40B4-BE49-F238E27FC236}">
-                <a16:creationId xmlns:a16="http://schemas.microsoft.com/office/drawing/2014/main" id="{C23DA4FB-7AE1-4EE4-8DD5-321F7F7C7F33}"/>
-              </a:ext>
-            </a:extLst>
-          </p:cNvPr>
-          <p:cNvSpPr/>
-          <p:nvPr/>
-        </p:nvSpPr>
-        <p:spPr>
-          <a:xfrm>
-            <a:off x="189267" y="2619607"/>
-            <a:ext cx="915222" cy="469096"/>
-          </a:xfrm>
-          <a:prstGeom prst="roundRect">
-            <a:avLst/>
-          </a:prstGeom>
-          <a:solidFill>
-            <a:srgbClr val="E5F1F8"/>
-          </a:solidFill>
-          <a:ln>
-            <a:solidFill>
-              <a:schemeClr val="tx1"/>
-            </a:solidFill>
-          </a:ln>
-        </p:spPr>
-        <p:style>
-          <a:lnRef idx="2">
-            <a:schemeClr val="accent1">
-              <a:shade val="15000"/>
-            </a:schemeClr>
-          </a:lnRef>
-          <a:fillRef idx="1">
-            <a:schemeClr val="accent1"/>
-          </a:fillRef>
-          <a:effectRef idx="0">
-            <a:schemeClr val="accent1"/>
-          </a:effectRef>
-          <a:fontRef idx="minor">
-            <a:schemeClr val="lt1"/>
-          </a:fontRef>
-        </p:style>
-        <p:txBody>
-          <a:bodyPr rtlCol="0" anchor="ctr"/>
-          <a:lstStyle/>
-          <a:p>
-            <a:pPr algn="ctr"/>
-            <a:r>
-              <a:rPr lang="en-US" dirty="0">
-                <a:solidFill>
-                  <a:schemeClr val="tx1"/>
-                </a:solidFill>
-              </a:rPr>
-              <a:t>Prompt</a:t>
-            </a:r>
-          </a:p>
-        </p:txBody>
-      </p:sp>
-      <p:cxnSp>
-        <p:nvCxnSpPr>
-          <p:cNvPr id="16" name="Straight Arrow Connector 15">
-            <a:extLst>
-              <a:ext uri="{FF2B5EF4-FFF2-40B4-BE49-F238E27FC236}">
-                <a16:creationId xmlns:a16="http://schemas.microsoft.com/office/drawing/2014/main" id="{942D3144-4FA8-07EA-6898-D7B2C45E010A}"/>
-              </a:ext>
-            </a:extLst>
-          </p:cNvPr>
-          <p:cNvCxnSpPr>
-            <a:cxnSpLocks/>
-            <a:stCxn id="15" idx="3"/>
-            <a:endCxn id="5" idx="1"/>
-          </p:cNvCxnSpPr>
-          <p:nvPr/>
-        </p:nvCxnSpPr>
-        <p:spPr>
-          <a:xfrm>
-            <a:off x="1104489" y="2854155"/>
-            <a:ext cx="403449" cy="0"/>
-          </a:xfrm>
-          <a:prstGeom prst="straightConnector1">
-            <a:avLst/>
-          </a:prstGeom>
-          <a:ln>
-            <a:solidFill>
-              <a:schemeClr val="tx1"/>
-            </a:solidFill>
-            <a:prstDash val="sysDash"/>
-            <a:tailEnd type="triangle" w="lg" len="lg"/>
-          </a:ln>
-        </p:spPr>
-        <p:style>
-          <a:lnRef idx="2">
-            <a:schemeClr val="accent1"/>
-          </a:lnRef>
-          <a:fillRef idx="0">
-            <a:schemeClr val="accent1"/>
-          </a:fillRef>
-          <a:effectRef idx="1">
-            <a:schemeClr val="accent1"/>
-          </a:effectRef>
-          <a:fontRef idx="minor">
-            <a:schemeClr val="tx1"/>
-          </a:fontRef>
-        </p:style>
-      </p:cxnSp>
-      <p:cxnSp>
-        <p:nvCxnSpPr>
-          <p:cNvPr id="19" name="Connector: Elbow 18">
-            <a:extLst>
-              <a:ext uri="{FF2B5EF4-FFF2-40B4-BE49-F238E27FC236}">
-                <a16:creationId xmlns:a16="http://schemas.microsoft.com/office/drawing/2014/main" id="{BF48D9D9-8BAB-3118-5B91-13BAA46C2349}"/>
-              </a:ext>
-            </a:extLst>
-          </p:cNvPr>
-          <p:cNvCxnSpPr>
-            <a:cxnSpLocks/>
-            <a:stCxn id="5" idx="3"/>
-            <a:endCxn id="4" idx="1"/>
-          </p:cNvCxnSpPr>
-          <p:nvPr/>
-        </p:nvCxnSpPr>
-        <p:spPr>
-          <a:xfrm flipV="1">
-            <a:off x="3421380" y="2083603"/>
-            <a:ext cx="624840" cy="770552"/>
-          </a:xfrm>
-          <a:prstGeom prst="bentConnector3">
-            <a:avLst>
-              <a:gd name="adj1" fmla="val 50000"/>
-            </a:avLst>
-          </a:prstGeom>
-          <a:ln>
-            <a:solidFill>
-              <a:schemeClr val="tx1"/>
-            </a:solidFill>
-            <a:prstDash val="solid"/>
-            <a:tailEnd type="triangle" w="lg" len="lg"/>
-          </a:ln>
-        </p:spPr>
-        <p:style>
-          <a:lnRef idx="2">
-            <a:schemeClr val="accent1"/>
-          </a:lnRef>
-          <a:fillRef idx="0">
-            <a:schemeClr val="accent1"/>
-          </a:fillRef>
-          <a:effectRef idx="1">
-            <a:schemeClr val="accent1"/>
-          </a:effectRef>
-          <a:fontRef idx="minor">
-            <a:schemeClr val="tx1"/>
-          </a:fontRef>
-        </p:style>
-      </p:cxnSp>
-      <p:cxnSp>
-        <p:nvCxnSpPr>
-          <p:cNvPr id="22" name="Connector: Elbow 21">
-            <a:extLst>
-              <a:ext uri="{FF2B5EF4-FFF2-40B4-BE49-F238E27FC236}">
-                <a16:creationId xmlns:a16="http://schemas.microsoft.com/office/drawing/2014/main" id="{217AA7E3-1E41-FB8C-7F66-A5758B29A028}"/>
-              </a:ext>
-            </a:extLst>
-          </p:cNvPr>
-          <p:cNvCxnSpPr>
-            <a:cxnSpLocks/>
-            <a:stCxn id="5" idx="3"/>
-            <a:endCxn id="2" idx="1"/>
-          </p:cNvCxnSpPr>
-          <p:nvPr/>
-        </p:nvCxnSpPr>
-        <p:spPr>
-          <a:xfrm>
-            <a:off x="3421380" y="2854155"/>
-            <a:ext cx="624840" cy="772965"/>
-          </a:xfrm>
-          <a:prstGeom prst="bentConnector3">
-            <a:avLst>
-              <a:gd name="adj1" fmla="val 50000"/>
-            </a:avLst>
-          </a:prstGeom>
-          <a:ln>
-            <a:solidFill>
-              <a:schemeClr val="tx1"/>
-            </a:solidFill>
-            <a:prstDash val="solid"/>
-            <a:tailEnd type="triangle" w="lg" len="lg"/>
-          </a:ln>
-        </p:spPr>
-        <p:style>
-          <a:lnRef idx="2">
-            <a:schemeClr val="accent1"/>
-          </a:lnRef>
-          <a:fillRef idx="0">
-            <a:schemeClr val="accent1"/>
-          </a:fillRef>
-          <a:effectRef idx="1">
-            <a:schemeClr val="accent1"/>
-          </a:effectRef>
-          <a:fontRef idx="minor">
-            <a:schemeClr val="tx1"/>
-          </a:fontRef>
-        </p:style>
-      </p:cxnSp>
-      <p:sp>
-        <p:nvSpPr>
-          <p:cNvPr id="25" name="Rectangle: Rounded Corners 24">
-            <a:extLst>
-              <a:ext uri="{FF2B5EF4-FFF2-40B4-BE49-F238E27FC236}">
-                <a16:creationId xmlns:a16="http://schemas.microsoft.com/office/drawing/2014/main" id="{98E95763-BD68-DEF9-F942-CCC8B336544E}"/>
-              </a:ext>
-            </a:extLst>
-          </p:cNvPr>
-          <p:cNvSpPr/>
-          <p:nvPr/>
-        </p:nvSpPr>
-        <p:spPr>
-          <a:xfrm>
-            <a:off x="8732520" y="1852591"/>
-            <a:ext cx="457200" cy="457200"/>
-          </a:xfrm>
-          <a:prstGeom prst="roundRect">
-            <a:avLst/>
-          </a:prstGeom>
-          <a:solidFill>
-            <a:srgbClr val="E5F1F8"/>
-          </a:solidFill>
-          <a:ln>
-            <a:solidFill>
-              <a:schemeClr val="tx1"/>
-            </a:solidFill>
-          </a:ln>
-        </p:spPr>
-        <p:style>
-          <a:lnRef idx="2">
-            <a:schemeClr val="accent1">
-              <a:shade val="15000"/>
-            </a:schemeClr>
-          </a:lnRef>
-          <a:fillRef idx="1">
-            <a:schemeClr val="accent1"/>
-          </a:fillRef>
-          <a:effectRef idx="0">
-            <a:schemeClr val="accent1"/>
-          </a:effectRef>
-          <a:fontRef idx="minor">
-            <a:schemeClr val="lt1"/>
-          </a:fontRef>
-        </p:style>
-        <p:txBody>
-          <a:bodyPr rtlCol="0" anchor="ctr"/>
-          <a:lstStyle/>
-          <a:p>
-            <a:pPr algn="ctr"/>
-            <a:endParaRPr lang="en-US" dirty="0">
-              <a:solidFill>
-                <a:schemeClr val="tx1"/>
-              </a:solidFill>
-            </a:endParaRPr>
-          </a:p>
-        </p:txBody>
-      </p:sp>
-      <p:cxnSp>
-        <p:nvCxnSpPr>
-          <p:cNvPr id="40" name="Straight Arrow Connector 39">
-            <a:extLst>
-              <a:ext uri="{FF2B5EF4-FFF2-40B4-BE49-F238E27FC236}">
-                <a16:creationId xmlns:a16="http://schemas.microsoft.com/office/drawing/2014/main" id="{B899F5AF-E80C-3452-008E-8E821AEFA864}"/>
-              </a:ext>
-            </a:extLst>
-          </p:cNvPr>
-          <p:cNvCxnSpPr>
-            <a:cxnSpLocks/>
-            <a:stCxn id="4" idx="3"/>
-            <a:endCxn id="25" idx="1"/>
-          </p:cNvCxnSpPr>
-          <p:nvPr/>
-        </p:nvCxnSpPr>
-        <p:spPr>
-          <a:xfrm flipV="1">
-            <a:off x="8328660" y="2081191"/>
-            <a:ext cx="403860" cy="2412"/>
-          </a:xfrm>
-          <a:prstGeom prst="straightConnector1">
-            <a:avLst/>
-          </a:prstGeom>
-          <a:ln>
-            <a:solidFill>
-              <a:schemeClr val="tx1"/>
-            </a:solidFill>
-            <a:prstDash val="solid"/>
-            <a:tailEnd type="triangle" w="lg" len="lg"/>
-          </a:ln>
-        </p:spPr>
-        <p:style>
-          <a:lnRef idx="2">
-            <a:schemeClr val="accent1"/>
-          </a:lnRef>
-          <a:fillRef idx="0">
-            <a:schemeClr val="accent1"/>
-          </a:fillRef>
-          <a:effectRef idx="1">
-            <a:schemeClr val="accent1"/>
-          </a:effectRef>
-          <a:fontRef idx="minor">
-            <a:schemeClr val="tx1"/>
-          </a:fontRef>
-        </p:style>
-      </p:cxnSp>
-      <p:sp>
-        <p:nvSpPr>
-          <p:cNvPr id="44" name="Rectangle: Rounded Corners 43">
-            <a:extLst>
-              <a:ext uri="{FF2B5EF4-FFF2-40B4-BE49-F238E27FC236}">
-                <a16:creationId xmlns:a16="http://schemas.microsoft.com/office/drawing/2014/main" id="{3F66FD98-C347-7EA9-DC36-7FDBB97B4248}"/>
-              </a:ext>
-            </a:extLst>
-          </p:cNvPr>
-          <p:cNvSpPr/>
-          <p:nvPr/>
-        </p:nvSpPr>
-        <p:spPr>
-          <a:xfrm>
-            <a:off x="8732520" y="2625555"/>
-            <a:ext cx="457200" cy="457200"/>
-          </a:xfrm>
-          <a:prstGeom prst="roundRect">
-            <a:avLst/>
-          </a:prstGeom>
-          <a:solidFill>
-            <a:srgbClr val="E5F1F8"/>
-          </a:solidFill>
-          <a:ln>
-            <a:solidFill>
-              <a:schemeClr val="tx1"/>
-            </a:solidFill>
-          </a:ln>
-        </p:spPr>
-        <p:style>
-          <a:lnRef idx="2">
-            <a:schemeClr val="accent1">
-              <a:shade val="15000"/>
-            </a:schemeClr>
-          </a:lnRef>
-          <a:fillRef idx="1">
-            <a:schemeClr val="accent1"/>
-          </a:fillRef>
-          <a:effectRef idx="0">
-            <a:schemeClr val="accent1"/>
-          </a:effectRef>
-          <a:fontRef idx="minor">
-            <a:schemeClr val="lt1"/>
-          </a:fontRef>
-        </p:style>
-        <p:txBody>
-          <a:bodyPr rtlCol="0" anchor="ctr"/>
-          <a:lstStyle/>
-          <a:p>
-            <a:pPr algn="ctr"/>
-            <a:endParaRPr lang="en-US" dirty="0">
-              <a:solidFill>
-                <a:schemeClr val="tx1"/>
-              </a:solidFill>
-            </a:endParaRPr>
-          </a:p>
-        </p:txBody>
-      </p:sp>
-      <p:sp>
-        <p:nvSpPr>
-          <p:cNvPr id="46" name="Rectangle: Rounded Corners 45">
-            <a:extLst>
-              <a:ext uri="{FF2B5EF4-FFF2-40B4-BE49-F238E27FC236}">
-                <a16:creationId xmlns:a16="http://schemas.microsoft.com/office/drawing/2014/main" id="{A791A27B-2AA1-8E05-2231-C99FE09DCBEB}"/>
-              </a:ext>
-            </a:extLst>
-          </p:cNvPr>
-          <p:cNvSpPr/>
-          <p:nvPr/>
-        </p:nvSpPr>
-        <p:spPr>
-          <a:xfrm>
-            <a:off x="8732520" y="3398519"/>
-            <a:ext cx="457200" cy="457200"/>
-          </a:xfrm>
-          <a:prstGeom prst="roundRect">
-            <a:avLst/>
-          </a:prstGeom>
-          <a:solidFill>
-            <a:srgbClr val="E5F1F8"/>
-          </a:solidFill>
-          <a:ln>
-            <a:solidFill>
-              <a:schemeClr val="tx1"/>
-            </a:solidFill>
-          </a:ln>
-        </p:spPr>
-        <p:style>
-          <a:lnRef idx="2">
-            <a:schemeClr val="accent1">
-              <a:shade val="15000"/>
-            </a:schemeClr>
-          </a:lnRef>
-          <a:fillRef idx="1">
-            <a:schemeClr val="accent1"/>
-          </a:fillRef>
-          <a:effectRef idx="0">
-            <a:schemeClr val="accent1"/>
-          </a:effectRef>
-          <a:fontRef idx="minor">
-            <a:schemeClr val="lt1"/>
-          </a:fontRef>
-        </p:style>
-        <p:txBody>
-          <a:bodyPr rtlCol="0" anchor="ctr"/>
-          <a:lstStyle/>
-          <a:p>
-            <a:pPr algn="ctr"/>
-            <a:endParaRPr lang="en-US" dirty="0">
-              <a:solidFill>
-                <a:schemeClr val="tx1"/>
-              </a:solidFill>
-            </a:endParaRPr>
-          </a:p>
-        </p:txBody>
-      </p:sp>
-      <p:cxnSp>
-        <p:nvCxnSpPr>
-          <p:cNvPr id="47" name="Straight Arrow Connector 46">
-            <a:extLst>
-              <a:ext uri="{FF2B5EF4-FFF2-40B4-BE49-F238E27FC236}">
-                <a16:creationId xmlns:a16="http://schemas.microsoft.com/office/drawing/2014/main" id="{42D77B26-2C1F-3022-9B0B-3736BC5CF8AA}"/>
-              </a:ext>
-            </a:extLst>
-          </p:cNvPr>
-          <p:cNvCxnSpPr>
-            <a:cxnSpLocks/>
-            <a:stCxn id="3" idx="3"/>
-            <a:endCxn id="44" idx="1"/>
-          </p:cNvCxnSpPr>
-          <p:nvPr/>
-        </p:nvCxnSpPr>
-        <p:spPr>
-          <a:xfrm>
-            <a:off x="8328660" y="2854154"/>
-            <a:ext cx="403860" cy="1"/>
-          </a:xfrm>
-          <a:prstGeom prst="straightConnector1">
-            <a:avLst/>
-          </a:prstGeom>
-          <a:ln>
-            <a:solidFill>
-              <a:schemeClr val="tx1"/>
-            </a:solidFill>
-            <a:prstDash val="solid"/>
-            <a:tailEnd type="triangle" w="lg" len="lg"/>
-          </a:ln>
-        </p:spPr>
-        <p:style>
-          <a:lnRef idx="2">
-            <a:schemeClr val="accent1"/>
-          </a:lnRef>
-          <a:fillRef idx="0">
-            <a:schemeClr val="accent1"/>
-          </a:fillRef>
-          <a:effectRef idx="1">
-            <a:schemeClr val="accent1"/>
-          </a:effectRef>
-          <a:fontRef idx="minor">
-            <a:schemeClr val="tx1"/>
-          </a:fontRef>
-        </p:style>
-      </p:cxnSp>
-      <p:cxnSp>
-        <p:nvCxnSpPr>
-          <p:cNvPr id="55" name="Straight Arrow Connector 54">
-            <a:extLst>
-              <a:ext uri="{FF2B5EF4-FFF2-40B4-BE49-F238E27FC236}">
-                <a16:creationId xmlns:a16="http://schemas.microsoft.com/office/drawing/2014/main" id="{A99ECFB6-8E63-4F62-C5D3-37BC5BB43934}"/>
-              </a:ext>
-            </a:extLst>
-          </p:cNvPr>
-          <p:cNvCxnSpPr>
-            <a:cxnSpLocks/>
-            <a:stCxn id="2" idx="3"/>
-            <a:endCxn id="46" idx="1"/>
-          </p:cNvCxnSpPr>
-          <p:nvPr/>
-        </p:nvCxnSpPr>
-        <p:spPr>
-          <a:xfrm flipV="1">
-            <a:off x="8328660" y="3627119"/>
-            <a:ext cx="403860" cy="1"/>
-          </a:xfrm>
-          <a:prstGeom prst="straightConnector1">
-            <a:avLst/>
-          </a:prstGeom>
-          <a:ln>
-            <a:solidFill>
-              <a:schemeClr val="tx1"/>
-            </a:solidFill>
-            <a:prstDash val="solid"/>
-            <a:tailEnd type="triangle" w="lg" len="lg"/>
-          </a:ln>
-        </p:spPr>
-        <p:style>
-          <a:lnRef idx="2">
-            <a:schemeClr val="accent1"/>
-          </a:lnRef>
-          <a:fillRef idx="0">
-            <a:schemeClr val="accent1"/>
-          </a:fillRef>
-          <a:effectRef idx="1">
-            <a:schemeClr val="accent1"/>
-          </a:effectRef>
-          <a:fontRef idx="minor">
-            <a:schemeClr val="tx1"/>
-          </a:fontRef>
-        </p:style>
-      </p:cxnSp>
-      <p:cxnSp>
-        <p:nvCxnSpPr>
-          <p:cNvPr id="58" name="Connector: Elbow 57">
-            <a:extLst>
-              <a:ext uri="{FF2B5EF4-FFF2-40B4-BE49-F238E27FC236}">
-                <a16:creationId xmlns:a16="http://schemas.microsoft.com/office/drawing/2014/main" id="{DDB500F1-F165-AABE-6725-11E4ED79023E}"/>
-              </a:ext>
-            </a:extLst>
-          </p:cNvPr>
-          <p:cNvCxnSpPr>
-            <a:cxnSpLocks/>
-            <a:stCxn id="25" idx="3"/>
-            <a:endCxn id="6" idx="1"/>
-          </p:cNvCxnSpPr>
-          <p:nvPr/>
-        </p:nvCxnSpPr>
-        <p:spPr>
-          <a:xfrm>
-            <a:off x="9189720" y="2081191"/>
-            <a:ext cx="647700" cy="772964"/>
-          </a:xfrm>
-          <a:prstGeom prst="bentConnector3">
-            <a:avLst>
-              <a:gd name="adj1" fmla="val 50000"/>
-            </a:avLst>
-          </a:prstGeom>
-          <a:ln>
-            <a:solidFill>
-              <a:schemeClr val="tx1"/>
-            </a:solidFill>
-            <a:prstDash val="solid"/>
-            <a:tailEnd type="triangle" w="lg" len="lg"/>
-          </a:ln>
-        </p:spPr>
-        <p:style>
-          <a:lnRef idx="2">
-            <a:schemeClr val="accent1"/>
-          </a:lnRef>
-          <a:fillRef idx="0">
-            <a:schemeClr val="accent1"/>
-          </a:fillRef>
-          <a:effectRef idx="1">
-            <a:schemeClr val="accent1"/>
-          </a:effectRef>
-          <a:fontRef idx="minor">
-            <a:schemeClr val="tx1"/>
-          </a:fontRef>
-        </p:style>
-      </p:cxnSp>
-      <p:cxnSp>
-        <p:nvCxnSpPr>
-          <p:cNvPr id="61" name="Connector: Elbow 60">
-            <a:extLst>
-              <a:ext uri="{FF2B5EF4-FFF2-40B4-BE49-F238E27FC236}">
-                <a16:creationId xmlns:a16="http://schemas.microsoft.com/office/drawing/2014/main" id="{28AC6A5D-0A01-5370-996D-AF8698A1082D}"/>
-              </a:ext>
-            </a:extLst>
-          </p:cNvPr>
-          <p:cNvCxnSpPr>
-            <a:cxnSpLocks/>
-            <a:stCxn id="46" idx="3"/>
-            <a:endCxn id="6" idx="1"/>
-          </p:cNvCxnSpPr>
-          <p:nvPr/>
-        </p:nvCxnSpPr>
-        <p:spPr>
-          <a:xfrm flipV="1">
-            <a:off x="9189720" y="2854155"/>
-            <a:ext cx="647700" cy="772964"/>
-          </a:xfrm>
-          <a:prstGeom prst="bentConnector3">
-            <a:avLst>
-              <a:gd name="adj1" fmla="val 50000"/>
-            </a:avLst>
-          </a:prstGeom>
-          <a:ln>
-            <a:solidFill>
-              <a:schemeClr val="tx1"/>
-            </a:solidFill>
-            <a:prstDash val="solid"/>
-            <a:tailEnd type="triangle" w="lg" len="lg"/>
-          </a:ln>
-        </p:spPr>
-        <p:style>
-          <a:lnRef idx="2">
-            <a:schemeClr val="accent1"/>
-          </a:lnRef>
-          <a:fillRef idx="0">
-            <a:schemeClr val="accent1"/>
-          </a:fillRef>
-          <a:effectRef idx="1">
-            <a:schemeClr val="accent1"/>
-          </a:effectRef>
-          <a:fontRef idx="minor">
-            <a:schemeClr val="tx1"/>
-          </a:fontRef>
-        </p:style>
-      </p:cxnSp>
       <p:pic>
         <p:nvPicPr>
-          <p:cNvPr id="67" name="Graphic 66" descr="Web design with solid fill">
-            <a:extLst>
-              <a:ext uri="{FF2B5EF4-FFF2-40B4-BE49-F238E27FC236}">
-                <a16:creationId xmlns:a16="http://schemas.microsoft.com/office/drawing/2014/main" id="{5D8BB564-5BA8-868D-2AB7-35E0D3AE65F9}"/>
+          <p:cNvPr id="1026" name="Picture 2" descr="Diagram of the Azure AI Search architecture for agentic retrieval.">
+            <a:extLst>
+              <a:ext uri="{FF2B5EF4-FFF2-40B4-BE49-F238E27FC236}">
+                <a16:creationId xmlns:a16="http://schemas.microsoft.com/office/drawing/2014/main" id="{EC60E7D7-9592-24FA-5E18-751F6025EFCB}"/>
               </a:ext>
             </a:extLst>
           </p:cNvPr>
           <p:cNvPicPr>
-            <a:picLocks noChangeAspect="1"/>
+            <a:picLocks noChangeAspect="1" noChangeArrowheads="1"/>
           </p:cNvPicPr>
           <p:nvPr/>
         </p:nvPicPr>
         <p:blipFill>
           <a:blip r:embed="rId2">
             <a:extLst>
-              <a:ext uri="{96DAC541-7B7A-43D3-8B79-37D633B846F1}">
-                <asvg:svgBlip xmlns:asvg="http://schemas.microsoft.com/office/drawing/2016/SVG/main" r:embed="rId3"/>
+              <a:ext uri="{28A0092B-C50C-407E-A947-70E740481C1C}">
+                <a14:useLocalDpi xmlns:a14="http://schemas.microsoft.com/office/drawing/2010/main" val="0"/>
               </a:ext>
             </a:extLst>
           </a:blip>
+          <a:srcRect/>
           <a:stretch>
             <a:fillRect/>
           </a:stretch>
         </p:blipFill>
-        <p:spPr>
-          <a:xfrm>
-            <a:off x="8755380" y="2648413"/>
-            <a:ext cx="411480" cy="411480"/>
+        <p:spPr bwMode="auto">
+          <a:xfrm>
+            <a:off x="0" y="2984500"/>
+            <a:ext cx="12192000" cy="3873500"/>
           </a:xfrm>
           <a:prstGeom prst="rect">
             <a:avLst/>
           </a:prstGeom>
+          <a:noFill/>
+          <a:extLst>
+            <a:ext uri="{909E8E84-426E-40DD-AFC4-6F175D3DCCD1}">
+              <a14:hiddenFill xmlns:a14="http://schemas.microsoft.com/office/drawing/2010/main">
+                <a:solidFill>
+                  <a:srgbClr val="FFFFFF"/>
+                </a:solidFill>
+              </a14:hiddenFill>
+            </a:ext>
+          </a:extLst>
         </p:spPr>
       </p:pic>
-      <p:pic>
-        <p:nvPicPr>
-          <p:cNvPr id="71" name="Graphic 70" descr="World with solid fill">
-            <a:extLst>
-              <a:ext uri="{FF2B5EF4-FFF2-40B4-BE49-F238E27FC236}">
-                <a16:creationId xmlns:a16="http://schemas.microsoft.com/office/drawing/2014/main" id="{0EF50C39-FA5F-96A6-2DE6-53C76B029FDB}"/>
-              </a:ext>
-            </a:extLst>
-          </p:cNvPr>
-          <p:cNvPicPr>
-            <a:picLocks noChangeAspect="1"/>
-          </p:cNvPicPr>
-          <p:nvPr/>
-        </p:nvPicPr>
-        <p:blipFill>
-          <a:blip r:embed="rId4">
-            <a:extLst>
-              <a:ext uri="{96DAC541-7B7A-43D3-8B79-37D633B846F1}">
-                <asvg:svgBlip xmlns:asvg="http://schemas.microsoft.com/office/drawing/2016/SVG/main" r:embed="rId5"/>
-              </a:ext>
-            </a:extLst>
-          </a:blip>
-          <a:stretch>
-            <a:fillRect/>
-          </a:stretch>
-        </p:blipFill>
-        <p:spPr>
-          <a:xfrm>
-            <a:off x="8755380" y="3421379"/>
-            <a:ext cx="411480" cy="411480"/>
-          </a:xfrm>
-          <a:prstGeom prst="rect">
-            <a:avLst/>
-          </a:prstGeom>
-        </p:spPr>
-      </p:pic>
-      <p:pic>
-        <p:nvPicPr>
-          <p:cNvPr id="73" name="Graphic 72" descr="Database with solid fill">
-            <a:extLst>
-              <a:ext uri="{FF2B5EF4-FFF2-40B4-BE49-F238E27FC236}">
-                <a16:creationId xmlns:a16="http://schemas.microsoft.com/office/drawing/2014/main" id="{20B0889E-3ACA-9DCA-25FE-C1F9B73F7329}"/>
-              </a:ext>
-            </a:extLst>
-          </p:cNvPr>
-          <p:cNvPicPr>
-            <a:picLocks noChangeAspect="1"/>
-          </p:cNvPicPr>
-          <p:nvPr/>
-        </p:nvPicPr>
-        <p:blipFill>
-          <a:blip r:embed="rId6">
-            <a:extLst>
-              <a:ext uri="{96DAC541-7B7A-43D3-8B79-37D633B846F1}">
-                <asvg:svgBlip xmlns:asvg="http://schemas.microsoft.com/office/drawing/2016/SVG/main" r:embed="rId7"/>
-              </a:ext>
-            </a:extLst>
-          </a:blip>
-          <a:stretch>
-            <a:fillRect/>
-          </a:stretch>
-        </p:blipFill>
-        <p:spPr>
-          <a:xfrm>
-            <a:off x="8755380" y="1875451"/>
-            <a:ext cx="411480" cy="411480"/>
-          </a:xfrm>
-          <a:prstGeom prst="rect">
-            <a:avLst/>
-          </a:prstGeom>
-        </p:spPr>
-      </p:pic>
-      <p:pic>
-        <p:nvPicPr>
-          <p:cNvPr id="75" name="Graphic 74" descr="Gears with solid fill">
-            <a:extLst>
-              <a:ext uri="{FF2B5EF4-FFF2-40B4-BE49-F238E27FC236}">
-                <a16:creationId xmlns:a16="http://schemas.microsoft.com/office/drawing/2014/main" id="{AFA7CC75-0D4E-9273-3BC2-179536E5EC20}"/>
-              </a:ext>
-            </a:extLst>
-          </p:cNvPr>
-          <p:cNvPicPr>
-            <a:picLocks noChangeAspect="1"/>
-          </p:cNvPicPr>
-          <p:nvPr/>
-        </p:nvPicPr>
-        <p:blipFill>
-          <a:blip r:embed="rId8">
-            <a:extLst>
-              <a:ext uri="{96DAC541-7B7A-43D3-8B79-37D633B846F1}">
-                <asvg:svgBlip xmlns:asvg="http://schemas.microsoft.com/office/drawing/2016/SVG/main" r:embed="rId9"/>
-              </a:ext>
-            </a:extLst>
-          </a:blip>
-          <a:stretch>
-            <a:fillRect/>
-          </a:stretch>
-        </p:blipFill>
-        <p:spPr>
-          <a:xfrm>
-            <a:off x="1626048" y="2648413"/>
-            <a:ext cx="411480" cy="411480"/>
-          </a:xfrm>
-          <a:prstGeom prst="rect">
-            <a:avLst/>
-          </a:prstGeom>
-        </p:spPr>
-      </p:pic>
-      <p:sp>
-        <p:nvSpPr>
-          <p:cNvPr id="76" name="Rectangle: Rounded Corners 75">
-            <a:extLst>
-              <a:ext uri="{FF2B5EF4-FFF2-40B4-BE49-F238E27FC236}">
-                <a16:creationId xmlns:a16="http://schemas.microsoft.com/office/drawing/2014/main" id="{3492D89A-8D12-E69E-613E-246E45DCD83F}"/>
-              </a:ext>
-            </a:extLst>
-          </p:cNvPr>
-          <p:cNvSpPr/>
-          <p:nvPr/>
-        </p:nvSpPr>
-        <p:spPr>
-          <a:xfrm>
-            <a:off x="10545258" y="3627118"/>
-            <a:ext cx="1205604" cy="469096"/>
-          </a:xfrm>
-          <a:prstGeom prst="roundRect">
-            <a:avLst/>
-          </a:prstGeom>
-          <a:solidFill>
-            <a:srgbClr val="E5F1F8"/>
-          </a:solidFill>
-          <a:ln>
-            <a:solidFill>
-              <a:schemeClr val="tx1"/>
-            </a:solidFill>
-          </a:ln>
-        </p:spPr>
-        <p:style>
-          <a:lnRef idx="2">
-            <a:schemeClr val="accent1">
-              <a:shade val="15000"/>
-            </a:schemeClr>
-          </a:lnRef>
-          <a:fillRef idx="1">
-            <a:schemeClr val="accent1"/>
-          </a:fillRef>
-          <a:effectRef idx="0">
-            <a:schemeClr val="accent1"/>
-          </a:effectRef>
-          <a:fontRef idx="minor">
-            <a:schemeClr val="lt1"/>
-          </a:fontRef>
-        </p:style>
-        <p:txBody>
-          <a:bodyPr rtlCol="0" anchor="ctr"/>
-          <a:lstStyle/>
-          <a:p>
-            <a:pPr algn="ctr"/>
-            <a:r>
-              <a:rPr lang="en-US" dirty="0">
-                <a:solidFill>
-                  <a:schemeClr val="tx1"/>
-                </a:solidFill>
-              </a:rPr>
-              <a:t>Response</a:t>
-            </a:r>
-          </a:p>
-        </p:txBody>
-      </p:sp>
-      <p:cxnSp>
-        <p:nvCxnSpPr>
-          <p:cNvPr id="77" name="Straight Arrow Connector 76">
-            <a:extLst>
-              <a:ext uri="{FF2B5EF4-FFF2-40B4-BE49-F238E27FC236}">
-                <a16:creationId xmlns:a16="http://schemas.microsoft.com/office/drawing/2014/main" id="{1A734903-BE53-2153-B1BE-7817395A6ACC}"/>
-              </a:ext>
-            </a:extLst>
-          </p:cNvPr>
-          <p:cNvCxnSpPr>
-            <a:cxnSpLocks/>
-            <a:endCxn id="76" idx="0"/>
-          </p:cNvCxnSpPr>
-          <p:nvPr/>
-        </p:nvCxnSpPr>
-        <p:spPr>
-          <a:xfrm>
-            <a:off x="11148060" y="3334214"/>
-            <a:ext cx="0" cy="292904"/>
-          </a:xfrm>
-          <a:prstGeom prst="straightConnector1">
-            <a:avLst/>
-          </a:prstGeom>
-          <a:ln>
-            <a:solidFill>
-              <a:schemeClr val="tx1"/>
-            </a:solidFill>
-            <a:prstDash val="sysDash"/>
-            <a:tailEnd type="triangle" w="lg" len="lg"/>
-          </a:ln>
-        </p:spPr>
-        <p:style>
-          <a:lnRef idx="2">
-            <a:schemeClr val="accent1"/>
-          </a:lnRef>
-          <a:fillRef idx="0">
-            <a:schemeClr val="accent1"/>
-          </a:fillRef>
-          <a:effectRef idx="1">
-            <a:schemeClr val="accent1"/>
-          </a:effectRef>
-          <a:fontRef idx="minor">
-            <a:schemeClr val="tx1"/>
-          </a:fontRef>
-        </p:style>
-      </p:cxnSp>
-      <p:cxnSp>
-        <p:nvCxnSpPr>
-          <p:cNvPr id="14" name="Connector: Elbow 13">
-            <a:extLst>
-              <a:ext uri="{FF2B5EF4-FFF2-40B4-BE49-F238E27FC236}">
-                <a16:creationId xmlns:a16="http://schemas.microsoft.com/office/drawing/2014/main" id="{4D371B40-23D5-3632-64F0-3A5DAC685C2C}"/>
-              </a:ext>
-            </a:extLst>
-          </p:cNvPr>
-          <p:cNvCxnSpPr>
-            <a:cxnSpLocks/>
-            <a:endCxn id="5" idx="2"/>
-          </p:cNvCxnSpPr>
-          <p:nvPr/>
-        </p:nvCxnSpPr>
-        <p:spPr>
-          <a:xfrm rot="5400000">
-            <a:off x="6337265" y="-538391"/>
-            <a:ext cx="12700" cy="7745211"/>
-          </a:xfrm>
-          <a:prstGeom prst="bentConnector3">
-            <a:avLst>
-              <a:gd name="adj1" fmla="val 6060000"/>
-            </a:avLst>
-          </a:prstGeom>
-          <a:ln>
-            <a:solidFill>
-              <a:schemeClr val="tx1"/>
-            </a:solidFill>
-            <a:prstDash val="sysDash"/>
-            <a:tailEnd type="triangle" w="lg" len="lg"/>
-          </a:ln>
-        </p:spPr>
-        <p:style>
-          <a:lnRef idx="2">
-            <a:schemeClr val="accent1"/>
-          </a:lnRef>
-          <a:fillRef idx="0">
-            <a:schemeClr val="accent1"/>
-          </a:fillRef>
-          <a:effectRef idx="1">
-            <a:schemeClr val="accent1"/>
-          </a:effectRef>
-          <a:fontRef idx="minor">
-            <a:schemeClr val="tx1"/>
-          </a:fontRef>
-        </p:style>
-      </p:cxnSp>
     </p:spTree>
     <p:extLst>
       <p:ext uri="{BB962C8B-B14F-4D97-AF65-F5344CB8AC3E}">
-        <p14:creationId xmlns:p14="http://schemas.microsoft.com/office/powerpoint/2010/main" val="2560175498"/>
+        <p14:creationId xmlns:p14="http://schemas.microsoft.com/office/powerpoint/2010/main" val="4218926270"/>
       </p:ext>
     </p:extLst>
   </p:cSld>
@@ -5145,7 +3842,13 @@
   <p:cSld>
     <p:spTree>
       <p:nvGrpSpPr>
-        <p:cNvPr id="1" name=""/>
+        <p:cNvPr id="1" name="">
+          <a:extLst>
+            <a:ext uri="{FF2B5EF4-FFF2-40B4-BE49-F238E27FC236}">
+              <a16:creationId xmlns:a16="http://schemas.microsoft.com/office/drawing/2014/main" id="{FEBEBDB7-571A-26BD-0DDC-EC428319EC29}"/>
+            </a:ext>
+          </a:extLst>
+        </p:cNvPr>
         <p:cNvGrpSpPr/>
         <p:nvPr/>
       </p:nvGrpSpPr>
@@ -5157,12 +3860,498 @@
           <a:chExt cx="0" cy="0"/>
         </a:xfrm>
       </p:grpSpPr>
+      <p:sp>
+        <p:nvSpPr>
+          <p:cNvPr id="2" name="Rectangle: Rounded Corners 1">
+            <a:extLst>
+              <a:ext uri="{FF2B5EF4-FFF2-40B4-BE49-F238E27FC236}">
+                <a16:creationId xmlns:a16="http://schemas.microsoft.com/office/drawing/2014/main" id="{77A4DF76-E5D0-B5A1-771E-FF6FC164C892}"/>
+              </a:ext>
+            </a:extLst>
+          </p:cNvPr>
+          <p:cNvSpPr/>
+          <p:nvPr/>
+        </p:nvSpPr>
+        <p:spPr>
+          <a:xfrm>
+            <a:off x="4572000" y="2484120"/>
+            <a:ext cx="4282440" cy="457200"/>
+          </a:xfrm>
+          <a:prstGeom prst="roundRect">
+            <a:avLst/>
+          </a:prstGeom>
+          <a:solidFill>
+            <a:srgbClr val="B2D4EB"/>
+          </a:solidFill>
+          <a:ln>
+            <a:solidFill>
+              <a:schemeClr val="tx1"/>
+            </a:solidFill>
+          </a:ln>
+        </p:spPr>
+        <p:style>
+          <a:lnRef idx="2">
+            <a:schemeClr val="accent1">
+              <a:shade val="15000"/>
+            </a:schemeClr>
+          </a:lnRef>
+          <a:fillRef idx="1">
+            <a:schemeClr val="accent1"/>
+          </a:fillRef>
+          <a:effectRef idx="0">
+            <a:schemeClr val="accent1"/>
+          </a:effectRef>
+          <a:fontRef idx="minor">
+            <a:schemeClr val="lt1"/>
+          </a:fontRef>
+        </p:style>
+        <p:txBody>
+          <a:bodyPr rtlCol="0" anchor="ctr"/>
+          <a:lstStyle/>
+          <a:p>
+            <a:pPr algn="ctr"/>
+            <a:r>
+              <a:rPr lang="en-US" dirty="0">
+                <a:solidFill>
+                  <a:schemeClr val="tx1"/>
+                </a:solidFill>
+              </a:rPr>
+              <a:t>OCR text and detect other items in images</a:t>
+            </a:r>
+            <a:endParaRPr lang="en-US" i="1" dirty="0">
+              <a:solidFill>
+                <a:schemeClr val="tx1"/>
+              </a:solidFill>
+            </a:endParaRPr>
+          </a:p>
+        </p:txBody>
+      </p:sp>
+      <p:sp>
+        <p:nvSpPr>
+          <p:cNvPr id="3" name="Rectangle: Rounded Corners 2">
+            <a:extLst>
+              <a:ext uri="{FF2B5EF4-FFF2-40B4-BE49-F238E27FC236}">
+                <a16:creationId xmlns:a16="http://schemas.microsoft.com/office/drawing/2014/main" id="{9FC2E6E4-3FA0-B1C2-44CA-4FDE763339EA}"/>
+              </a:ext>
+            </a:extLst>
+          </p:cNvPr>
+          <p:cNvSpPr/>
+          <p:nvPr/>
+        </p:nvSpPr>
+        <p:spPr>
+          <a:xfrm>
+            <a:off x="4572000" y="1711154"/>
+            <a:ext cx="4282440" cy="457200"/>
+          </a:xfrm>
+          <a:prstGeom prst="roundRect">
+            <a:avLst/>
+          </a:prstGeom>
+          <a:solidFill>
+            <a:srgbClr val="B2D4EB"/>
+          </a:solidFill>
+          <a:ln>
+            <a:solidFill>
+              <a:schemeClr val="tx1"/>
+            </a:solidFill>
+          </a:ln>
+        </p:spPr>
+        <p:style>
+          <a:lnRef idx="2">
+            <a:schemeClr val="accent1">
+              <a:shade val="15000"/>
+            </a:schemeClr>
+          </a:lnRef>
+          <a:fillRef idx="1">
+            <a:schemeClr val="accent1"/>
+          </a:fillRef>
+          <a:effectRef idx="0">
+            <a:schemeClr val="accent1"/>
+          </a:effectRef>
+          <a:fontRef idx="minor">
+            <a:schemeClr val="lt1"/>
+          </a:fontRef>
+        </p:style>
+        <p:txBody>
+          <a:bodyPr rtlCol="0" anchor="ctr"/>
+          <a:lstStyle/>
+          <a:p>
+            <a:pPr algn="ctr"/>
+            <a:r>
+              <a:rPr lang="en-US" dirty="0">
+                <a:solidFill>
+                  <a:schemeClr val="tx1"/>
+                </a:solidFill>
+              </a:rPr>
+              <a:t>Detect languages and/or translate</a:t>
+            </a:r>
+            <a:endParaRPr lang="en-US" i="1" dirty="0">
+              <a:solidFill>
+                <a:schemeClr val="tx1"/>
+              </a:solidFill>
+            </a:endParaRPr>
+          </a:p>
+        </p:txBody>
+      </p:sp>
+      <p:sp>
+        <p:nvSpPr>
+          <p:cNvPr id="5" name="Rectangle: Rounded Corners 4">
+            <a:extLst>
+              <a:ext uri="{FF2B5EF4-FFF2-40B4-BE49-F238E27FC236}">
+                <a16:creationId xmlns:a16="http://schemas.microsoft.com/office/drawing/2014/main" id="{593FC118-1D56-1A6A-3E6F-2E4C93EC5BB5}"/>
+              </a:ext>
+            </a:extLst>
+          </p:cNvPr>
+          <p:cNvSpPr/>
+          <p:nvPr/>
+        </p:nvSpPr>
+        <p:spPr>
+          <a:xfrm>
+            <a:off x="1923639" y="2607713"/>
+            <a:ext cx="1913442" cy="960119"/>
+          </a:xfrm>
+          <a:prstGeom prst="roundRect">
+            <a:avLst/>
+          </a:prstGeom>
+          <a:solidFill>
+            <a:srgbClr val="E5F1F8"/>
+          </a:solidFill>
+          <a:ln>
+            <a:solidFill>
+              <a:schemeClr val="tx1"/>
+            </a:solidFill>
+          </a:ln>
+        </p:spPr>
+        <p:style>
+          <a:lnRef idx="2">
+            <a:schemeClr val="accent1">
+              <a:shade val="15000"/>
+            </a:schemeClr>
+          </a:lnRef>
+          <a:fillRef idx="1">
+            <a:schemeClr val="accent1"/>
+          </a:fillRef>
+          <a:effectRef idx="0">
+            <a:schemeClr val="accent1"/>
+          </a:effectRef>
+          <a:fontRef idx="minor">
+            <a:schemeClr val="lt1"/>
+          </a:fontRef>
+        </p:style>
+        <p:txBody>
+          <a:bodyPr rtlCol="0" anchor="ctr"/>
+          <a:lstStyle/>
+          <a:p>
+            <a:pPr algn="ctr"/>
+            <a:r>
+              <a:rPr lang="en-US" dirty="0">
+                <a:solidFill>
+                  <a:schemeClr val="tx1"/>
+                </a:solidFill>
+              </a:rPr>
+              <a:t>Chunk large documents into smaller portions</a:t>
+            </a:r>
+            <a:endParaRPr lang="en-US" i="1" dirty="0">
+              <a:solidFill>
+                <a:schemeClr val="tx1"/>
+              </a:solidFill>
+            </a:endParaRPr>
+          </a:p>
+        </p:txBody>
+      </p:sp>
+      <p:sp>
+        <p:nvSpPr>
+          <p:cNvPr id="6" name="Rectangle: Rounded Corners 5">
+            <a:extLst>
+              <a:ext uri="{FF2B5EF4-FFF2-40B4-BE49-F238E27FC236}">
+                <a16:creationId xmlns:a16="http://schemas.microsoft.com/office/drawing/2014/main" id="{B6F1F862-E17E-1BF2-68BB-E557944EFB90}"/>
+              </a:ext>
+            </a:extLst>
+          </p:cNvPr>
+          <p:cNvSpPr/>
+          <p:nvPr/>
+        </p:nvSpPr>
+        <p:spPr>
+          <a:xfrm>
+            <a:off x="9589359" y="2607713"/>
+            <a:ext cx="1913442" cy="960119"/>
+          </a:xfrm>
+          <a:prstGeom prst="roundRect">
+            <a:avLst/>
+          </a:prstGeom>
+          <a:solidFill>
+            <a:srgbClr val="E5F1F8"/>
+          </a:solidFill>
+          <a:ln>
+            <a:solidFill>
+              <a:schemeClr val="tx1"/>
+            </a:solidFill>
+          </a:ln>
+        </p:spPr>
+        <p:style>
+          <a:lnRef idx="2">
+            <a:schemeClr val="accent1">
+              <a:shade val="15000"/>
+            </a:schemeClr>
+          </a:lnRef>
+          <a:fillRef idx="1">
+            <a:schemeClr val="accent1"/>
+          </a:fillRef>
+          <a:effectRef idx="0">
+            <a:schemeClr val="accent1"/>
+          </a:effectRef>
+          <a:fontRef idx="minor">
+            <a:schemeClr val="lt1"/>
+          </a:fontRef>
+        </p:style>
+        <p:txBody>
+          <a:bodyPr rtlCol="0" anchor="ctr"/>
+          <a:lstStyle/>
+          <a:p>
+            <a:pPr algn="ctr"/>
+            <a:r>
+              <a:rPr lang="en-US" dirty="0">
+                <a:solidFill>
+                  <a:schemeClr val="tx1"/>
+                </a:solidFill>
+              </a:rPr>
+              <a:t>Search Index</a:t>
+            </a:r>
+          </a:p>
+        </p:txBody>
+      </p:sp>
+      <p:cxnSp>
+        <p:nvCxnSpPr>
+          <p:cNvPr id="16" name="Straight Arrow Connector 15">
+            <a:extLst>
+              <a:ext uri="{FF2B5EF4-FFF2-40B4-BE49-F238E27FC236}">
+                <a16:creationId xmlns:a16="http://schemas.microsoft.com/office/drawing/2014/main" id="{F53DDE5B-F2C9-368A-EB4B-004B47F0142D}"/>
+              </a:ext>
+            </a:extLst>
+          </p:cNvPr>
+          <p:cNvCxnSpPr>
+            <a:cxnSpLocks/>
+            <a:endCxn id="5" idx="1"/>
+          </p:cNvCxnSpPr>
+          <p:nvPr/>
+        </p:nvCxnSpPr>
+        <p:spPr>
+          <a:xfrm>
+            <a:off x="1535906" y="3087773"/>
+            <a:ext cx="387733" cy="0"/>
+          </a:xfrm>
+          <a:prstGeom prst="straightConnector1">
+            <a:avLst/>
+          </a:prstGeom>
+          <a:ln>
+            <a:solidFill>
+              <a:schemeClr val="tx1"/>
+            </a:solidFill>
+            <a:prstDash val="sysDash"/>
+            <a:tailEnd type="triangle" w="lg" len="lg"/>
+          </a:ln>
+        </p:spPr>
+        <p:style>
+          <a:lnRef idx="2">
+            <a:schemeClr val="accent1"/>
+          </a:lnRef>
+          <a:fillRef idx="0">
+            <a:schemeClr val="accent1"/>
+          </a:fillRef>
+          <a:effectRef idx="1">
+            <a:schemeClr val="accent1"/>
+          </a:effectRef>
+          <a:fontRef idx="minor">
+            <a:schemeClr val="tx1"/>
+          </a:fontRef>
+        </p:style>
+      </p:cxnSp>
+      <p:cxnSp>
+        <p:nvCxnSpPr>
+          <p:cNvPr id="22" name="Connector: Elbow 21">
+            <a:extLst>
+              <a:ext uri="{FF2B5EF4-FFF2-40B4-BE49-F238E27FC236}">
+                <a16:creationId xmlns:a16="http://schemas.microsoft.com/office/drawing/2014/main" id="{E340D823-D62F-C29E-58F1-B5E39213D990}"/>
+              </a:ext>
+            </a:extLst>
+          </p:cNvPr>
+          <p:cNvCxnSpPr>
+            <a:cxnSpLocks/>
+            <a:stCxn id="5" idx="3"/>
+            <a:endCxn id="2" idx="1"/>
+          </p:cNvCxnSpPr>
+          <p:nvPr/>
+        </p:nvCxnSpPr>
+        <p:spPr>
+          <a:xfrm flipV="1">
+            <a:off x="3837081" y="2712720"/>
+            <a:ext cx="734919" cy="375053"/>
+          </a:xfrm>
+          <a:prstGeom prst="bentConnector3">
+            <a:avLst>
+              <a:gd name="adj1" fmla="val 50000"/>
+            </a:avLst>
+          </a:prstGeom>
+          <a:ln>
+            <a:solidFill>
+              <a:schemeClr val="tx1"/>
+            </a:solidFill>
+            <a:prstDash val="solid"/>
+            <a:tailEnd type="triangle" w="lg" len="lg"/>
+          </a:ln>
+        </p:spPr>
+        <p:style>
+          <a:lnRef idx="2">
+            <a:schemeClr val="accent1"/>
+          </a:lnRef>
+          <a:fillRef idx="0">
+            <a:schemeClr val="accent1"/>
+          </a:fillRef>
+          <a:effectRef idx="1">
+            <a:schemeClr val="accent1"/>
+          </a:effectRef>
+          <a:fontRef idx="minor">
+            <a:schemeClr val="tx1"/>
+          </a:fontRef>
+        </p:style>
+      </p:cxnSp>
+      <p:sp>
+        <p:nvSpPr>
+          <p:cNvPr id="8" name="Rectangle: Rounded Corners 7">
+            <a:extLst>
+              <a:ext uri="{FF2B5EF4-FFF2-40B4-BE49-F238E27FC236}">
+                <a16:creationId xmlns:a16="http://schemas.microsoft.com/office/drawing/2014/main" id="{232CAEE3-52CA-0618-98BB-135A06D4B4AE}"/>
+              </a:ext>
+            </a:extLst>
+          </p:cNvPr>
+          <p:cNvSpPr/>
+          <p:nvPr/>
+        </p:nvSpPr>
+        <p:spPr>
+          <a:xfrm>
+            <a:off x="4572000" y="3257085"/>
+            <a:ext cx="4282440" cy="457200"/>
+          </a:xfrm>
+          <a:prstGeom prst="roundRect">
+            <a:avLst/>
+          </a:prstGeom>
+          <a:solidFill>
+            <a:srgbClr val="B2D4EB"/>
+          </a:solidFill>
+          <a:ln>
+            <a:solidFill>
+              <a:schemeClr val="tx1"/>
+            </a:solidFill>
+          </a:ln>
+        </p:spPr>
+        <p:style>
+          <a:lnRef idx="2">
+            <a:schemeClr val="accent1">
+              <a:shade val="15000"/>
+            </a:schemeClr>
+          </a:lnRef>
+          <a:fillRef idx="1">
+            <a:schemeClr val="accent1"/>
+          </a:fillRef>
+          <a:effectRef idx="0">
+            <a:schemeClr val="accent1"/>
+          </a:effectRef>
+          <a:fontRef idx="minor">
+            <a:schemeClr val="lt1"/>
+          </a:fontRef>
+        </p:style>
+        <p:txBody>
+          <a:bodyPr rtlCol="0" anchor="ctr"/>
+          <a:lstStyle/>
+          <a:p>
+            <a:pPr algn="ctr"/>
+            <a:r>
+              <a:rPr lang="en-US" dirty="0">
+                <a:solidFill>
+                  <a:schemeClr val="tx1"/>
+                </a:solidFill>
+              </a:rPr>
+              <a:t>Extract key phrases and terms</a:t>
+            </a:r>
+            <a:endParaRPr lang="en-US" i="1" dirty="0">
+              <a:solidFill>
+                <a:schemeClr val="tx1"/>
+              </a:solidFill>
+            </a:endParaRPr>
+          </a:p>
+        </p:txBody>
+      </p:sp>
+      <p:sp>
+        <p:nvSpPr>
+          <p:cNvPr id="9" name="Rectangle: Rounded Corners 8">
+            <a:extLst>
+              <a:ext uri="{FF2B5EF4-FFF2-40B4-BE49-F238E27FC236}">
+                <a16:creationId xmlns:a16="http://schemas.microsoft.com/office/drawing/2014/main" id="{55DE1353-6451-F2F2-4FDD-C8D856D8703A}"/>
+              </a:ext>
+            </a:extLst>
+          </p:cNvPr>
+          <p:cNvSpPr/>
+          <p:nvPr/>
+        </p:nvSpPr>
+        <p:spPr>
+          <a:xfrm>
+            <a:off x="4572000" y="4030050"/>
+            <a:ext cx="4282440" cy="457200"/>
+          </a:xfrm>
+          <a:prstGeom prst="roundRect">
+            <a:avLst/>
+          </a:prstGeom>
+          <a:solidFill>
+            <a:srgbClr val="B2D4EB"/>
+          </a:solidFill>
+          <a:ln>
+            <a:solidFill>
+              <a:schemeClr val="tx1"/>
+            </a:solidFill>
+          </a:ln>
+        </p:spPr>
+        <p:style>
+          <a:lnRef idx="2">
+            <a:schemeClr val="accent1">
+              <a:shade val="15000"/>
+            </a:schemeClr>
+          </a:lnRef>
+          <a:fillRef idx="1">
+            <a:schemeClr val="accent1"/>
+          </a:fillRef>
+          <a:effectRef idx="0">
+            <a:schemeClr val="accent1"/>
+          </a:effectRef>
+          <a:fontRef idx="minor">
+            <a:schemeClr val="lt1"/>
+          </a:fontRef>
+        </p:style>
+        <p:txBody>
+          <a:bodyPr rtlCol="0" anchor="ctr"/>
+          <a:lstStyle/>
+          <a:p>
+            <a:pPr algn="ctr"/>
+            <a:r>
+              <a:rPr lang="en-US" dirty="0">
+                <a:solidFill>
+                  <a:schemeClr val="tx1"/>
+                </a:solidFill>
+              </a:rPr>
+              <a:t>Extract entities (people, skills, URLs, etc.) </a:t>
+            </a:r>
+            <a:endParaRPr lang="en-US" i="1" dirty="0">
+              <a:solidFill>
+                <a:schemeClr val="tx1"/>
+              </a:solidFill>
+            </a:endParaRPr>
+          </a:p>
+        </p:txBody>
+      </p:sp>
       <p:pic>
         <p:nvPicPr>
-          <p:cNvPr id="3" name="Picture 2">
-            <a:extLst>
-              <a:ext uri="{FF2B5EF4-FFF2-40B4-BE49-F238E27FC236}">
-                <a16:creationId xmlns:a16="http://schemas.microsoft.com/office/drawing/2014/main" id="{FD8E52CD-5961-A7C1-3607-A00CDD4774AD}"/>
+          <p:cNvPr id="23" name="Graphic 22" descr="Document with solid fill">
+            <a:extLst>
+              <a:ext uri="{FF2B5EF4-FFF2-40B4-BE49-F238E27FC236}">
+                <a16:creationId xmlns:a16="http://schemas.microsoft.com/office/drawing/2014/main" id="{4B4356EB-DB04-1639-EBB5-9B125D08A9C9}"/>
               </a:ext>
             </a:extLst>
           </p:cNvPr>
@@ -5172,25 +4361,410 @@
           <p:nvPr/>
         </p:nvPicPr>
         <p:blipFill>
-          <a:blip r:embed="rId2"/>
+          <a:blip r:embed="rId2">
+            <a:extLst>
+              <a:ext uri="{96DAC541-7B7A-43D3-8B79-37D633B846F1}">
+                <asvg:svgBlip xmlns:asvg="http://schemas.microsoft.com/office/drawing/2016/SVG/main" r:embed="rId3"/>
+              </a:ext>
+            </a:extLst>
+          </a:blip>
           <a:stretch>
             <a:fillRect/>
           </a:stretch>
         </p:blipFill>
         <p:spPr>
           <a:xfrm>
-            <a:off x="0" y="23812"/>
-            <a:ext cx="12192000" cy="6810375"/>
+            <a:off x="814929" y="2607713"/>
+            <a:ext cx="685800" cy="685800"/>
           </a:xfrm>
           <a:prstGeom prst="rect">
             <a:avLst/>
           </a:prstGeom>
         </p:spPr>
       </p:pic>
+      <p:sp>
+        <p:nvSpPr>
+          <p:cNvPr id="24" name="TextBox 23">
+            <a:extLst>
+              <a:ext uri="{FF2B5EF4-FFF2-40B4-BE49-F238E27FC236}">
+                <a16:creationId xmlns:a16="http://schemas.microsoft.com/office/drawing/2014/main" id="{F43B01B8-40E1-CA65-2D85-E7874B50AB9E}"/>
+              </a:ext>
+            </a:extLst>
+          </p:cNvPr>
+          <p:cNvSpPr txBox="1"/>
+          <p:nvPr/>
+        </p:nvSpPr>
+        <p:spPr>
+          <a:xfrm>
+            <a:off x="591364" y="3257085"/>
+            <a:ext cx="1120820" cy="369332"/>
+          </a:xfrm>
+          <a:prstGeom prst="rect">
+            <a:avLst/>
+          </a:prstGeom>
+          <a:noFill/>
+        </p:spPr>
+        <p:txBody>
+          <a:bodyPr wrap="none" rtlCol="0">
+            <a:spAutoFit/>
+          </a:bodyPr>
+          <a:lstStyle/>
+          <a:p>
+            <a:pPr algn="ctr"/>
+            <a:r>
+              <a:rPr lang="en-US" dirty="0"/>
+              <a:t>Documents</a:t>
+            </a:r>
+          </a:p>
+        </p:txBody>
+      </p:sp>
+      <p:cxnSp>
+        <p:nvCxnSpPr>
+          <p:cNvPr id="26" name="Connector: Elbow 25">
+            <a:extLst>
+              <a:ext uri="{FF2B5EF4-FFF2-40B4-BE49-F238E27FC236}">
+                <a16:creationId xmlns:a16="http://schemas.microsoft.com/office/drawing/2014/main" id="{E6694889-3916-A298-2BD5-0D22502998BD}"/>
+              </a:ext>
+            </a:extLst>
+          </p:cNvPr>
+          <p:cNvCxnSpPr>
+            <a:cxnSpLocks/>
+            <a:stCxn id="5" idx="3"/>
+            <a:endCxn id="3" idx="1"/>
+          </p:cNvCxnSpPr>
+          <p:nvPr/>
+        </p:nvCxnSpPr>
+        <p:spPr>
+          <a:xfrm flipV="1">
+            <a:off x="3837081" y="1939754"/>
+            <a:ext cx="734919" cy="1148019"/>
+          </a:xfrm>
+          <a:prstGeom prst="bentConnector3">
+            <a:avLst>
+              <a:gd name="adj1" fmla="val 50000"/>
+            </a:avLst>
+          </a:prstGeom>
+          <a:ln>
+            <a:solidFill>
+              <a:schemeClr val="tx1"/>
+            </a:solidFill>
+            <a:prstDash val="solid"/>
+            <a:tailEnd type="triangle" w="lg" len="lg"/>
+          </a:ln>
+        </p:spPr>
+        <p:style>
+          <a:lnRef idx="2">
+            <a:schemeClr val="accent1"/>
+          </a:lnRef>
+          <a:fillRef idx="0">
+            <a:schemeClr val="accent1"/>
+          </a:fillRef>
+          <a:effectRef idx="1">
+            <a:schemeClr val="accent1"/>
+          </a:effectRef>
+          <a:fontRef idx="minor">
+            <a:schemeClr val="tx1"/>
+          </a:fontRef>
+        </p:style>
+      </p:cxnSp>
+      <p:cxnSp>
+        <p:nvCxnSpPr>
+          <p:cNvPr id="29" name="Connector: Elbow 28">
+            <a:extLst>
+              <a:ext uri="{FF2B5EF4-FFF2-40B4-BE49-F238E27FC236}">
+                <a16:creationId xmlns:a16="http://schemas.microsoft.com/office/drawing/2014/main" id="{006A07C8-FFE6-FC10-054C-D7EC53902858}"/>
+              </a:ext>
+            </a:extLst>
+          </p:cNvPr>
+          <p:cNvCxnSpPr>
+            <a:cxnSpLocks/>
+            <a:stCxn id="5" idx="3"/>
+            <a:endCxn id="8" idx="1"/>
+          </p:cNvCxnSpPr>
+          <p:nvPr/>
+        </p:nvCxnSpPr>
+        <p:spPr>
+          <a:xfrm>
+            <a:off x="3837081" y="3087773"/>
+            <a:ext cx="734919" cy="397912"/>
+          </a:xfrm>
+          <a:prstGeom prst="bentConnector3">
+            <a:avLst>
+              <a:gd name="adj1" fmla="val 50000"/>
+            </a:avLst>
+          </a:prstGeom>
+          <a:ln>
+            <a:solidFill>
+              <a:schemeClr val="tx1"/>
+            </a:solidFill>
+            <a:prstDash val="solid"/>
+            <a:tailEnd type="triangle" w="lg" len="lg"/>
+          </a:ln>
+        </p:spPr>
+        <p:style>
+          <a:lnRef idx="2">
+            <a:schemeClr val="accent1"/>
+          </a:lnRef>
+          <a:fillRef idx="0">
+            <a:schemeClr val="accent1"/>
+          </a:fillRef>
+          <a:effectRef idx="1">
+            <a:schemeClr val="accent1"/>
+          </a:effectRef>
+          <a:fontRef idx="minor">
+            <a:schemeClr val="tx1"/>
+          </a:fontRef>
+        </p:style>
+      </p:cxnSp>
+      <p:cxnSp>
+        <p:nvCxnSpPr>
+          <p:cNvPr id="32" name="Connector: Elbow 31">
+            <a:extLst>
+              <a:ext uri="{FF2B5EF4-FFF2-40B4-BE49-F238E27FC236}">
+                <a16:creationId xmlns:a16="http://schemas.microsoft.com/office/drawing/2014/main" id="{B3E68473-1A12-B82E-8D58-1A05019A69F6}"/>
+              </a:ext>
+            </a:extLst>
+          </p:cNvPr>
+          <p:cNvCxnSpPr>
+            <a:cxnSpLocks/>
+            <a:stCxn id="5" idx="3"/>
+            <a:endCxn id="9" idx="1"/>
+          </p:cNvCxnSpPr>
+          <p:nvPr/>
+        </p:nvCxnSpPr>
+        <p:spPr>
+          <a:xfrm>
+            <a:off x="3837081" y="3087773"/>
+            <a:ext cx="734919" cy="1170877"/>
+          </a:xfrm>
+          <a:prstGeom prst="bentConnector3">
+            <a:avLst>
+              <a:gd name="adj1" fmla="val 50000"/>
+            </a:avLst>
+          </a:prstGeom>
+          <a:ln>
+            <a:solidFill>
+              <a:schemeClr val="tx1"/>
+            </a:solidFill>
+            <a:prstDash val="solid"/>
+            <a:tailEnd type="triangle" w="lg" len="lg"/>
+          </a:ln>
+        </p:spPr>
+        <p:style>
+          <a:lnRef idx="2">
+            <a:schemeClr val="accent1"/>
+          </a:lnRef>
+          <a:fillRef idx="0">
+            <a:schemeClr val="accent1"/>
+          </a:fillRef>
+          <a:effectRef idx="1">
+            <a:schemeClr val="accent1"/>
+          </a:effectRef>
+          <a:fontRef idx="minor">
+            <a:schemeClr val="tx1"/>
+          </a:fontRef>
+        </p:style>
+      </p:cxnSp>
+      <p:cxnSp>
+        <p:nvCxnSpPr>
+          <p:cNvPr id="35" name="Connector: Elbow 34">
+            <a:extLst>
+              <a:ext uri="{FF2B5EF4-FFF2-40B4-BE49-F238E27FC236}">
+                <a16:creationId xmlns:a16="http://schemas.microsoft.com/office/drawing/2014/main" id="{322D29AA-6031-8645-B88C-4F31D12DC377}"/>
+              </a:ext>
+            </a:extLst>
+          </p:cNvPr>
+          <p:cNvCxnSpPr>
+            <a:cxnSpLocks/>
+            <a:stCxn id="3" idx="3"/>
+            <a:endCxn id="6" idx="1"/>
+          </p:cNvCxnSpPr>
+          <p:nvPr/>
+        </p:nvCxnSpPr>
+        <p:spPr>
+          <a:xfrm>
+            <a:off x="8854440" y="1939754"/>
+            <a:ext cx="734919" cy="1148019"/>
+          </a:xfrm>
+          <a:prstGeom prst="bentConnector3">
+            <a:avLst>
+              <a:gd name="adj1" fmla="val 50000"/>
+            </a:avLst>
+          </a:prstGeom>
+          <a:ln>
+            <a:solidFill>
+              <a:schemeClr val="tx1"/>
+            </a:solidFill>
+            <a:prstDash val="solid"/>
+            <a:tailEnd type="triangle" w="lg" len="lg"/>
+          </a:ln>
+        </p:spPr>
+        <p:style>
+          <a:lnRef idx="2">
+            <a:schemeClr val="accent1"/>
+          </a:lnRef>
+          <a:fillRef idx="0">
+            <a:schemeClr val="accent1"/>
+          </a:fillRef>
+          <a:effectRef idx="1">
+            <a:schemeClr val="accent1"/>
+          </a:effectRef>
+          <a:fontRef idx="minor">
+            <a:schemeClr val="tx1"/>
+          </a:fontRef>
+        </p:style>
+      </p:cxnSp>
+      <p:cxnSp>
+        <p:nvCxnSpPr>
+          <p:cNvPr id="38" name="Connector: Elbow 37">
+            <a:extLst>
+              <a:ext uri="{FF2B5EF4-FFF2-40B4-BE49-F238E27FC236}">
+                <a16:creationId xmlns:a16="http://schemas.microsoft.com/office/drawing/2014/main" id="{9A7EA838-C83A-2914-FF9B-922AEE2873B8}"/>
+              </a:ext>
+            </a:extLst>
+          </p:cNvPr>
+          <p:cNvCxnSpPr>
+            <a:cxnSpLocks/>
+            <a:stCxn id="2" idx="3"/>
+            <a:endCxn id="6" idx="1"/>
+          </p:cNvCxnSpPr>
+          <p:nvPr/>
+        </p:nvCxnSpPr>
+        <p:spPr>
+          <a:xfrm>
+            <a:off x="8854440" y="2712720"/>
+            <a:ext cx="734919" cy="375053"/>
+          </a:xfrm>
+          <a:prstGeom prst="bentConnector3">
+            <a:avLst>
+              <a:gd name="adj1" fmla="val 50000"/>
+            </a:avLst>
+          </a:prstGeom>
+          <a:ln>
+            <a:solidFill>
+              <a:schemeClr val="tx1"/>
+            </a:solidFill>
+            <a:prstDash val="solid"/>
+            <a:tailEnd type="triangle" w="lg" len="lg"/>
+          </a:ln>
+        </p:spPr>
+        <p:style>
+          <a:lnRef idx="2">
+            <a:schemeClr val="accent1"/>
+          </a:lnRef>
+          <a:fillRef idx="0">
+            <a:schemeClr val="accent1"/>
+          </a:fillRef>
+          <a:effectRef idx="1">
+            <a:schemeClr val="accent1"/>
+          </a:effectRef>
+          <a:fontRef idx="minor">
+            <a:schemeClr val="tx1"/>
+          </a:fontRef>
+        </p:style>
+      </p:cxnSp>
+      <p:cxnSp>
+        <p:nvCxnSpPr>
+          <p:cNvPr id="43" name="Connector: Elbow 42">
+            <a:extLst>
+              <a:ext uri="{FF2B5EF4-FFF2-40B4-BE49-F238E27FC236}">
+                <a16:creationId xmlns:a16="http://schemas.microsoft.com/office/drawing/2014/main" id="{80FE345D-D495-3DCB-A7FE-B831EF929BA3}"/>
+              </a:ext>
+            </a:extLst>
+          </p:cNvPr>
+          <p:cNvCxnSpPr>
+            <a:cxnSpLocks/>
+            <a:stCxn id="8" idx="3"/>
+            <a:endCxn id="6" idx="1"/>
+          </p:cNvCxnSpPr>
+          <p:nvPr/>
+        </p:nvCxnSpPr>
+        <p:spPr>
+          <a:xfrm flipV="1">
+            <a:off x="8854440" y="3087773"/>
+            <a:ext cx="734919" cy="397912"/>
+          </a:xfrm>
+          <a:prstGeom prst="bentConnector3">
+            <a:avLst>
+              <a:gd name="adj1" fmla="val 50000"/>
+            </a:avLst>
+          </a:prstGeom>
+          <a:ln>
+            <a:solidFill>
+              <a:schemeClr val="tx1"/>
+            </a:solidFill>
+            <a:prstDash val="solid"/>
+            <a:tailEnd type="triangle" w="lg" len="lg"/>
+          </a:ln>
+        </p:spPr>
+        <p:style>
+          <a:lnRef idx="2">
+            <a:schemeClr val="accent1"/>
+          </a:lnRef>
+          <a:fillRef idx="0">
+            <a:schemeClr val="accent1"/>
+          </a:fillRef>
+          <a:effectRef idx="1">
+            <a:schemeClr val="accent1"/>
+          </a:effectRef>
+          <a:fontRef idx="minor">
+            <a:schemeClr val="tx1"/>
+          </a:fontRef>
+        </p:style>
+      </p:cxnSp>
+      <p:cxnSp>
+        <p:nvCxnSpPr>
+          <p:cNvPr id="50" name="Connector: Elbow 49">
+            <a:extLst>
+              <a:ext uri="{FF2B5EF4-FFF2-40B4-BE49-F238E27FC236}">
+                <a16:creationId xmlns:a16="http://schemas.microsoft.com/office/drawing/2014/main" id="{ABBAAB0E-15B1-635D-938D-03283CFC2E97}"/>
+              </a:ext>
+            </a:extLst>
+          </p:cNvPr>
+          <p:cNvCxnSpPr>
+            <a:cxnSpLocks/>
+            <a:stCxn id="9" idx="3"/>
+            <a:endCxn id="6" idx="1"/>
+          </p:cNvCxnSpPr>
+          <p:nvPr/>
+        </p:nvCxnSpPr>
+        <p:spPr>
+          <a:xfrm flipV="1">
+            <a:off x="8854440" y="3087773"/>
+            <a:ext cx="734919" cy="1170877"/>
+          </a:xfrm>
+          <a:prstGeom prst="bentConnector3">
+            <a:avLst>
+              <a:gd name="adj1" fmla="val 50000"/>
+            </a:avLst>
+          </a:prstGeom>
+          <a:ln>
+            <a:solidFill>
+              <a:schemeClr val="tx1"/>
+            </a:solidFill>
+            <a:prstDash val="solid"/>
+            <a:tailEnd type="triangle" w="lg" len="lg"/>
+          </a:ln>
+        </p:spPr>
+        <p:style>
+          <a:lnRef idx="2">
+            <a:schemeClr val="accent1"/>
+          </a:lnRef>
+          <a:fillRef idx="0">
+            <a:schemeClr val="accent1"/>
+          </a:fillRef>
+          <a:effectRef idx="1">
+            <a:schemeClr val="accent1"/>
+          </a:effectRef>
+          <a:fontRef idx="minor">
+            <a:schemeClr val="tx1"/>
+          </a:fontRef>
+        </p:style>
+      </p:cxnSp>
     </p:spTree>
     <p:extLst>
       <p:ext uri="{BB962C8B-B14F-4D97-AF65-F5344CB8AC3E}">
-        <p14:creationId xmlns:p14="http://schemas.microsoft.com/office/powerpoint/2010/main" val="3564074342"/>
+        <p14:creationId xmlns:p14="http://schemas.microsoft.com/office/powerpoint/2010/main" val="3923047050"/>
       </p:ext>
     </p:extLst>
   </p:cSld>
@@ -5217,12 +4791,1067 @@
           <a:chExt cx="0" cy="0"/>
         </a:xfrm>
       </p:grpSpPr>
+      <p:sp>
+        <p:nvSpPr>
+          <p:cNvPr id="2" name="Rectangle: Rounded Corners 1">
+            <a:extLst>
+              <a:ext uri="{FF2B5EF4-FFF2-40B4-BE49-F238E27FC236}">
+                <a16:creationId xmlns:a16="http://schemas.microsoft.com/office/drawing/2014/main" id="{F09FDC59-6067-4502-1360-F42554AD87D3}"/>
+              </a:ext>
+            </a:extLst>
+          </p:cNvPr>
+          <p:cNvSpPr/>
+          <p:nvPr/>
+        </p:nvSpPr>
+        <p:spPr>
+          <a:xfrm>
+            <a:off x="4046220" y="3398520"/>
+            <a:ext cx="4282440" cy="457200"/>
+          </a:xfrm>
+          <a:prstGeom prst="roundRect">
+            <a:avLst/>
+          </a:prstGeom>
+          <a:solidFill>
+            <a:srgbClr val="B2D4EB"/>
+          </a:solidFill>
+          <a:ln>
+            <a:solidFill>
+              <a:schemeClr val="tx1"/>
+            </a:solidFill>
+          </a:ln>
+        </p:spPr>
+        <p:style>
+          <a:lnRef idx="2">
+            <a:schemeClr val="accent1">
+              <a:shade val="15000"/>
+            </a:schemeClr>
+          </a:lnRef>
+          <a:fillRef idx="1">
+            <a:schemeClr val="accent1"/>
+          </a:fillRef>
+          <a:effectRef idx="0">
+            <a:schemeClr val="accent1"/>
+          </a:effectRef>
+          <a:fontRef idx="minor">
+            <a:schemeClr val="lt1"/>
+          </a:fontRef>
+        </p:style>
+        <p:txBody>
+          <a:bodyPr rtlCol="0" anchor="ctr"/>
+          <a:lstStyle/>
+          <a:p>
+            <a:pPr algn="ctr"/>
+            <a:r>
+              <a:rPr lang="en-US" dirty="0">
+                <a:solidFill>
+                  <a:schemeClr val="tx1"/>
+                </a:solidFill>
+              </a:rPr>
+              <a:t>Search Public Information on the Web</a:t>
+            </a:r>
+            <a:endParaRPr lang="en-US" i="1" dirty="0">
+              <a:solidFill>
+                <a:schemeClr val="tx1"/>
+              </a:solidFill>
+            </a:endParaRPr>
+          </a:p>
+        </p:txBody>
+      </p:sp>
+      <p:sp>
+        <p:nvSpPr>
+          <p:cNvPr id="3" name="Rectangle: Rounded Corners 2">
+            <a:extLst>
+              <a:ext uri="{FF2B5EF4-FFF2-40B4-BE49-F238E27FC236}">
+                <a16:creationId xmlns:a16="http://schemas.microsoft.com/office/drawing/2014/main" id="{9800FF13-E208-2C00-EB7C-BCBA48F554BD}"/>
+              </a:ext>
+            </a:extLst>
+          </p:cNvPr>
+          <p:cNvSpPr/>
+          <p:nvPr/>
+        </p:nvSpPr>
+        <p:spPr>
+          <a:xfrm>
+            <a:off x="4046220" y="2625554"/>
+            <a:ext cx="4282440" cy="457200"/>
+          </a:xfrm>
+          <a:prstGeom prst="roundRect">
+            <a:avLst/>
+          </a:prstGeom>
+          <a:solidFill>
+            <a:srgbClr val="B2D4EB"/>
+          </a:solidFill>
+          <a:ln>
+            <a:solidFill>
+              <a:schemeClr val="tx1"/>
+            </a:solidFill>
+          </a:ln>
+        </p:spPr>
+        <p:style>
+          <a:lnRef idx="2">
+            <a:schemeClr val="accent1">
+              <a:shade val="15000"/>
+            </a:schemeClr>
+          </a:lnRef>
+          <a:fillRef idx="1">
+            <a:schemeClr val="accent1"/>
+          </a:fillRef>
+          <a:effectRef idx="0">
+            <a:schemeClr val="accent1"/>
+          </a:effectRef>
+          <a:fontRef idx="minor">
+            <a:schemeClr val="lt1"/>
+          </a:fontRef>
+        </p:style>
+        <p:txBody>
+          <a:bodyPr rtlCol="0" anchor="ctr"/>
+          <a:lstStyle/>
+          <a:p>
+            <a:pPr algn="ctr"/>
+            <a:r>
+              <a:rPr lang="en-US" dirty="0">
+                <a:solidFill>
+                  <a:schemeClr val="tx1"/>
+                </a:solidFill>
+              </a:rPr>
+              <a:t>Retrieve Stock Quotes from an API</a:t>
+            </a:r>
+            <a:endParaRPr lang="en-US" i="1" dirty="0">
+              <a:solidFill>
+                <a:schemeClr val="tx1"/>
+              </a:solidFill>
+            </a:endParaRPr>
+          </a:p>
+        </p:txBody>
+      </p:sp>
+      <p:sp>
+        <p:nvSpPr>
+          <p:cNvPr id="4" name="Rectangle: Rounded Corners 3">
+            <a:extLst>
+              <a:ext uri="{FF2B5EF4-FFF2-40B4-BE49-F238E27FC236}">
+                <a16:creationId xmlns:a16="http://schemas.microsoft.com/office/drawing/2014/main" id="{CD952C55-0F41-C8E8-4833-F5F86239B3AD}"/>
+              </a:ext>
+            </a:extLst>
+          </p:cNvPr>
+          <p:cNvSpPr/>
+          <p:nvPr/>
+        </p:nvSpPr>
+        <p:spPr>
+          <a:xfrm>
+            <a:off x="4046220" y="1855003"/>
+            <a:ext cx="4282440" cy="457200"/>
+          </a:xfrm>
+          <a:prstGeom prst="roundRect">
+            <a:avLst/>
+          </a:prstGeom>
+          <a:solidFill>
+            <a:srgbClr val="B2D4EB"/>
+          </a:solidFill>
+          <a:ln>
+            <a:solidFill>
+              <a:schemeClr val="tx1"/>
+            </a:solidFill>
+          </a:ln>
+        </p:spPr>
+        <p:style>
+          <a:lnRef idx="2">
+            <a:schemeClr val="accent1">
+              <a:shade val="15000"/>
+            </a:schemeClr>
+          </a:lnRef>
+          <a:fillRef idx="1">
+            <a:schemeClr val="accent1"/>
+          </a:fillRef>
+          <a:effectRef idx="0">
+            <a:schemeClr val="accent1"/>
+          </a:effectRef>
+          <a:fontRef idx="minor">
+            <a:schemeClr val="lt1"/>
+          </a:fontRef>
+        </p:style>
+        <p:txBody>
+          <a:bodyPr rtlCol="0" anchor="ctr"/>
+          <a:lstStyle/>
+          <a:p>
+            <a:pPr algn="ctr"/>
+            <a:r>
+              <a:rPr lang="en-US" dirty="0">
+                <a:solidFill>
+                  <a:schemeClr val="tx1"/>
+                </a:solidFill>
+              </a:rPr>
+              <a:t>Reference Internal Report Files</a:t>
+            </a:r>
+            <a:endParaRPr lang="en-US" i="1" dirty="0">
+              <a:solidFill>
+                <a:schemeClr val="tx1"/>
+              </a:solidFill>
+            </a:endParaRPr>
+          </a:p>
+        </p:txBody>
+      </p:sp>
+      <p:sp>
+        <p:nvSpPr>
+          <p:cNvPr id="5" name="Rectangle: Rounded Corners 4">
+            <a:extLst>
+              <a:ext uri="{FF2B5EF4-FFF2-40B4-BE49-F238E27FC236}">
+                <a16:creationId xmlns:a16="http://schemas.microsoft.com/office/drawing/2014/main" id="{600226F7-C833-1B1C-B967-7291F64244CC}"/>
+              </a:ext>
+            </a:extLst>
+          </p:cNvPr>
+          <p:cNvSpPr/>
+          <p:nvPr/>
+        </p:nvSpPr>
+        <p:spPr>
+          <a:xfrm>
+            <a:off x="1507938" y="2374095"/>
+            <a:ext cx="1913442" cy="960119"/>
+          </a:xfrm>
+          <a:prstGeom prst="roundRect">
+            <a:avLst/>
+          </a:prstGeom>
+          <a:solidFill>
+            <a:srgbClr val="E5F1F8"/>
+          </a:solidFill>
+          <a:ln>
+            <a:solidFill>
+              <a:schemeClr val="tx1"/>
+            </a:solidFill>
+          </a:ln>
+        </p:spPr>
+        <p:style>
+          <a:lnRef idx="2">
+            <a:schemeClr val="accent1">
+              <a:shade val="15000"/>
+            </a:schemeClr>
+          </a:lnRef>
+          <a:fillRef idx="1">
+            <a:schemeClr val="accent1"/>
+          </a:fillRef>
+          <a:effectRef idx="0">
+            <a:schemeClr val="accent1"/>
+          </a:effectRef>
+          <a:fontRef idx="minor">
+            <a:schemeClr val="lt1"/>
+          </a:fontRef>
+        </p:style>
+        <p:txBody>
+          <a:bodyPr rtlCol="0" anchor="ctr"/>
+          <a:lstStyle/>
+          <a:p>
+            <a:pPr algn="ctr"/>
+            <a:r>
+              <a:rPr lang="en-US" dirty="0">
+                <a:solidFill>
+                  <a:schemeClr val="tx1"/>
+                </a:solidFill>
+              </a:rPr>
+              <a:t>Query</a:t>
+            </a:r>
+          </a:p>
+          <a:p>
+            <a:pPr algn="ctr"/>
+            <a:r>
+              <a:rPr lang="en-US" dirty="0">
+                <a:solidFill>
+                  <a:schemeClr val="tx1"/>
+                </a:solidFill>
+              </a:rPr>
+              <a:t>Planning</a:t>
+            </a:r>
+          </a:p>
+        </p:txBody>
+      </p:sp>
+      <p:sp>
+        <p:nvSpPr>
+          <p:cNvPr id="6" name="Rectangle: Rounded Corners 5">
+            <a:extLst>
+              <a:ext uri="{FF2B5EF4-FFF2-40B4-BE49-F238E27FC236}">
+                <a16:creationId xmlns:a16="http://schemas.microsoft.com/office/drawing/2014/main" id="{C93C6EBF-0FE7-EC6E-5B5C-7AA41F6606DD}"/>
+              </a:ext>
+            </a:extLst>
+          </p:cNvPr>
+          <p:cNvSpPr/>
+          <p:nvPr/>
+        </p:nvSpPr>
+        <p:spPr>
+          <a:xfrm>
+            <a:off x="9837420" y="2374095"/>
+            <a:ext cx="1913442" cy="960119"/>
+          </a:xfrm>
+          <a:prstGeom prst="roundRect">
+            <a:avLst/>
+          </a:prstGeom>
+          <a:solidFill>
+            <a:srgbClr val="E5F1F8"/>
+          </a:solidFill>
+          <a:ln>
+            <a:solidFill>
+              <a:schemeClr val="tx1"/>
+            </a:solidFill>
+          </a:ln>
+        </p:spPr>
+        <p:style>
+          <a:lnRef idx="2">
+            <a:schemeClr val="accent1">
+              <a:shade val="15000"/>
+            </a:schemeClr>
+          </a:lnRef>
+          <a:fillRef idx="1">
+            <a:schemeClr val="accent1"/>
+          </a:fillRef>
+          <a:effectRef idx="0">
+            <a:schemeClr val="accent1"/>
+          </a:effectRef>
+          <a:fontRef idx="minor">
+            <a:schemeClr val="lt1"/>
+          </a:fontRef>
+        </p:style>
+        <p:txBody>
+          <a:bodyPr rtlCol="0" anchor="ctr"/>
+          <a:lstStyle/>
+          <a:p>
+            <a:pPr algn="ctr"/>
+            <a:r>
+              <a:rPr lang="en-US" dirty="0">
+                <a:solidFill>
+                  <a:schemeClr val="tx1"/>
+                </a:solidFill>
+              </a:rPr>
+              <a:t>Language</a:t>
+            </a:r>
+          </a:p>
+          <a:p>
+            <a:pPr algn="ctr"/>
+            <a:r>
+              <a:rPr lang="en-US" dirty="0">
+                <a:solidFill>
+                  <a:schemeClr val="tx1"/>
+                </a:solidFill>
+              </a:rPr>
+              <a:t>Model</a:t>
+            </a:r>
+          </a:p>
+        </p:txBody>
+      </p:sp>
+      <p:cxnSp>
+        <p:nvCxnSpPr>
+          <p:cNvPr id="7" name="Straight Arrow Connector 6">
+            <a:extLst>
+              <a:ext uri="{FF2B5EF4-FFF2-40B4-BE49-F238E27FC236}">
+                <a16:creationId xmlns:a16="http://schemas.microsoft.com/office/drawing/2014/main" id="{70FF9049-A038-5CD7-B5B6-A7A955E2687C}"/>
+              </a:ext>
+            </a:extLst>
+          </p:cNvPr>
+          <p:cNvCxnSpPr>
+            <a:cxnSpLocks/>
+            <a:stCxn id="5" idx="3"/>
+            <a:endCxn id="3" idx="1"/>
+          </p:cNvCxnSpPr>
+          <p:nvPr/>
+        </p:nvCxnSpPr>
+        <p:spPr>
+          <a:xfrm flipV="1">
+            <a:off x="3421380" y="2854154"/>
+            <a:ext cx="624840" cy="1"/>
+          </a:xfrm>
+          <a:prstGeom prst="straightConnector1">
+            <a:avLst/>
+          </a:prstGeom>
+          <a:ln>
+            <a:solidFill>
+              <a:schemeClr val="tx1"/>
+            </a:solidFill>
+            <a:prstDash val="solid"/>
+            <a:tailEnd type="triangle" w="lg" len="lg"/>
+          </a:ln>
+        </p:spPr>
+        <p:style>
+          <a:lnRef idx="2">
+            <a:schemeClr val="accent1"/>
+          </a:lnRef>
+          <a:fillRef idx="0">
+            <a:schemeClr val="accent1"/>
+          </a:fillRef>
+          <a:effectRef idx="1">
+            <a:schemeClr val="accent1"/>
+          </a:effectRef>
+          <a:fontRef idx="minor">
+            <a:schemeClr val="tx1"/>
+          </a:fontRef>
+        </p:style>
+      </p:cxnSp>
+      <p:cxnSp>
+        <p:nvCxnSpPr>
+          <p:cNvPr id="10" name="Straight Arrow Connector 9">
+            <a:extLst>
+              <a:ext uri="{FF2B5EF4-FFF2-40B4-BE49-F238E27FC236}">
+                <a16:creationId xmlns:a16="http://schemas.microsoft.com/office/drawing/2014/main" id="{2C10FC99-8029-AE13-0A3B-1F87064360AB}"/>
+              </a:ext>
+            </a:extLst>
+          </p:cNvPr>
+          <p:cNvCxnSpPr>
+            <a:cxnSpLocks/>
+            <a:stCxn id="44" idx="3"/>
+            <a:endCxn id="6" idx="1"/>
+          </p:cNvCxnSpPr>
+          <p:nvPr/>
+        </p:nvCxnSpPr>
+        <p:spPr>
+          <a:xfrm>
+            <a:off x="9189720" y="2854155"/>
+            <a:ext cx="647700" cy="0"/>
+          </a:xfrm>
+          <a:prstGeom prst="straightConnector1">
+            <a:avLst/>
+          </a:prstGeom>
+          <a:ln>
+            <a:solidFill>
+              <a:schemeClr val="tx1"/>
+            </a:solidFill>
+            <a:prstDash val="solid"/>
+            <a:tailEnd type="triangle" w="lg" len="lg"/>
+          </a:ln>
+        </p:spPr>
+        <p:style>
+          <a:lnRef idx="2">
+            <a:schemeClr val="accent1"/>
+          </a:lnRef>
+          <a:fillRef idx="0">
+            <a:schemeClr val="accent1"/>
+          </a:fillRef>
+          <a:effectRef idx="1">
+            <a:schemeClr val="accent1"/>
+          </a:effectRef>
+          <a:fontRef idx="minor">
+            <a:schemeClr val="tx1"/>
+          </a:fontRef>
+        </p:style>
+      </p:cxnSp>
+      <p:sp>
+        <p:nvSpPr>
+          <p:cNvPr id="15" name="Rectangle: Rounded Corners 14">
+            <a:extLst>
+              <a:ext uri="{FF2B5EF4-FFF2-40B4-BE49-F238E27FC236}">
+                <a16:creationId xmlns:a16="http://schemas.microsoft.com/office/drawing/2014/main" id="{C23DA4FB-7AE1-4EE4-8DD5-321F7F7C7F33}"/>
+              </a:ext>
+            </a:extLst>
+          </p:cNvPr>
+          <p:cNvSpPr/>
+          <p:nvPr/>
+        </p:nvSpPr>
+        <p:spPr>
+          <a:xfrm>
+            <a:off x="189267" y="2619607"/>
+            <a:ext cx="915222" cy="469096"/>
+          </a:xfrm>
+          <a:prstGeom prst="roundRect">
+            <a:avLst/>
+          </a:prstGeom>
+          <a:solidFill>
+            <a:srgbClr val="E5F1F8"/>
+          </a:solidFill>
+          <a:ln>
+            <a:solidFill>
+              <a:schemeClr val="tx1"/>
+            </a:solidFill>
+          </a:ln>
+        </p:spPr>
+        <p:style>
+          <a:lnRef idx="2">
+            <a:schemeClr val="accent1">
+              <a:shade val="15000"/>
+            </a:schemeClr>
+          </a:lnRef>
+          <a:fillRef idx="1">
+            <a:schemeClr val="accent1"/>
+          </a:fillRef>
+          <a:effectRef idx="0">
+            <a:schemeClr val="accent1"/>
+          </a:effectRef>
+          <a:fontRef idx="minor">
+            <a:schemeClr val="lt1"/>
+          </a:fontRef>
+        </p:style>
+        <p:txBody>
+          <a:bodyPr rtlCol="0" anchor="ctr"/>
+          <a:lstStyle/>
+          <a:p>
+            <a:pPr algn="ctr"/>
+            <a:r>
+              <a:rPr lang="en-US" dirty="0">
+                <a:solidFill>
+                  <a:schemeClr val="tx1"/>
+                </a:solidFill>
+              </a:rPr>
+              <a:t>Prompt</a:t>
+            </a:r>
+          </a:p>
+        </p:txBody>
+      </p:sp>
+      <p:cxnSp>
+        <p:nvCxnSpPr>
+          <p:cNvPr id="16" name="Straight Arrow Connector 15">
+            <a:extLst>
+              <a:ext uri="{FF2B5EF4-FFF2-40B4-BE49-F238E27FC236}">
+                <a16:creationId xmlns:a16="http://schemas.microsoft.com/office/drawing/2014/main" id="{942D3144-4FA8-07EA-6898-D7B2C45E010A}"/>
+              </a:ext>
+            </a:extLst>
+          </p:cNvPr>
+          <p:cNvCxnSpPr>
+            <a:cxnSpLocks/>
+            <a:stCxn id="15" idx="3"/>
+            <a:endCxn id="5" idx="1"/>
+          </p:cNvCxnSpPr>
+          <p:nvPr/>
+        </p:nvCxnSpPr>
+        <p:spPr>
+          <a:xfrm>
+            <a:off x="1104489" y="2854155"/>
+            <a:ext cx="403449" cy="0"/>
+          </a:xfrm>
+          <a:prstGeom prst="straightConnector1">
+            <a:avLst/>
+          </a:prstGeom>
+          <a:ln>
+            <a:solidFill>
+              <a:schemeClr val="tx1"/>
+            </a:solidFill>
+            <a:prstDash val="sysDash"/>
+            <a:tailEnd type="triangle" w="lg" len="lg"/>
+          </a:ln>
+        </p:spPr>
+        <p:style>
+          <a:lnRef idx="2">
+            <a:schemeClr val="accent1"/>
+          </a:lnRef>
+          <a:fillRef idx="0">
+            <a:schemeClr val="accent1"/>
+          </a:fillRef>
+          <a:effectRef idx="1">
+            <a:schemeClr val="accent1"/>
+          </a:effectRef>
+          <a:fontRef idx="minor">
+            <a:schemeClr val="tx1"/>
+          </a:fontRef>
+        </p:style>
+      </p:cxnSp>
+      <p:cxnSp>
+        <p:nvCxnSpPr>
+          <p:cNvPr id="19" name="Connector: Elbow 18">
+            <a:extLst>
+              <a:ext uri="{FF2B5EF4-FFF2-40B4-BE49-F238E27FC236}">
+                <a16:creationId xmlns:a16="http://schemas.microsoft.com/office/drawing/2014/main" id="{BF48D9D9-8BAB-3118-5B91-13BAA46C2349}"/>
+              </a:ext>
+            </a:extLst>
+          </p:cNvPr>
+          <p:cNvCxnSpPr>
+            <a:cxnSpLocks/>
+            <a:stCxn id="5" idx="3"/>
+            <a:endCxn id="4" idx="1"/>
+          </p:cNvCxnSpPr>
+          <p:nvPr/>
+        </p:nvCxnSpPr>
+        <p:spPr>
+          <a:xfrm flipV="1">
+            <a:off x="3421380" y="2083603"/>
+            <a:ext cx="624840" cy="770552"/>
+          </a:xfrm>
+          <a:prstGeom prst="bentConnector3">
+            <a:avLst>
+              <a:gd name="adj1" fmla="val 50000"/>
+            </a:avLst>
+          </a:prstGeom>
+          <a:ln>
+            <a:solidFill>
+              <a:schemeClr val="tx1"/>
+            </a:solidFill>
+            <a:prstDash val="solid"/>
+            <a:tailEnd type="triangle" w="lg" len="lg"/>
+          </a:ln>
+        </p:spPr>
+        <p:style>
+          <a:lnRef idx="2">
+            <a:schemeClr val="accent1"/>
+          </a:lnRef>
+          <a:fillRef idx="0">
+            <a:schemeClr val="accent1"/>
+          </a:fillRef>
+          <a:effectRef idx="1">
+            <a:schemeClr val="accent1"/>
+          </a:effectRef>
+          <a:fontRef idx="minor">
+            <a:schemeClr val="tx1"/>
+          </a:fontRef>
+        </p:style>
+      </p:cxnSp>
+      <p:cxnSp>
+        <p:nvCxnSpPr>
+          <p:cNvPr id="22" name="Connector: Elbow 21">
+            <a:extLst>
+              <a:ext uri="{FF2B5EF4-FFF2-40B4-BE49-F238E27FC236}">
+                <a16:creationId xmlns:a16="http://schemas.microsoft.com/office/drawing/2014/main" id="{217AA7E3-1E41-FB8C-7F66-A5758B29A028}"/>
+              </a:ext>
+            </a:extLst>
+          </p:cNvPr>
+          <p:cNvCxnSpPr>
+            <a:cxnSpLocks/>
+            <a:stCxn id="5" idx="3"/>
+            <a:endCxn id="2" idx="1"/>
+          </p:cNvCxnSpPr>
+          <p:nvPr/>
+        </p:nvCxnSpPr>
+        <p:spPr>
+          <a:xfrm>
+            <a:off x="3421380" y="2854155"/>
+            <a:ext cx="624840" cy="772965"/>
+          </a:xfrm>
+          <a:prstGeom prst="bentConnector3">
+            <a:avLst>
+              <a:gd name="adj1" fmla="val 50000"/>
+            </a:avLst>
+          </a:prstGeom>
+          <a:ln>
+            <a:solidFill>
+              <a:schemeClr val="tx1"/>
+            </a:solidFill>
+            <a:prstDash val="solid"/>
+            <a:tailEnd type="triangle" w="lg" len="lg"/>
+          </a:ln>
+        </p:spPr>
+        <p:style>
+          <a:lnRef idx="2">
+            <a:schemeClr val="accent1"/>
+          </a:lnRef>
+          <a:fillRef idx="0">
+            <a:schemeClr val="accent1"/>
+          </a:fillRef>
+          <a:effectRef idx="1">
+            <a:schemeClr val="accent1"/>
+          </a:effectRef>
+          <a:fontRef idx="minor">
+            <a:schemeClr val="tx1"/>
+          </a:fontRef>
+        </p:style>
+      </p:cxnSp>
+      <p:sp>
+        <p:nvSpPr>
+          <p:cNvPr id="25" name="Rectangle: Rounded Corners 24">
+            <a:extLst>
+              <a:ext uri="{FF2B5EF4-FFF2-40B4-BE49-F238E27FC236}">
+                <a16:creationId xmlns:a16="http://schemas.microsoft.com/office/drawing/2014/main" id="{98E95763-BD68-DEF9-F942-CCC8B336544E}"/>
+              </a:ext>
+            </a:extLst>
+          </p:cNvPr>
+          <p:cNvSpPr/>
+          <p:nvPr/>
+        </p:nvSpPr>
+        <p:spPr>
+          <a:xfrm>
+            <a:off x="8732520" y="1852591"/>
+            <a:ext cx="457200" cy="457200"/>
+          </a:xfrm>
+          <a:prstGeom prst="roundRect">
+            <a:avLst/>
+          </a:prstGeom>
+          <a:solidFill>
+            <a:srgbClr val="E5F1F8"/>
+          </a:solidFill>
+          <a:ln>
+            <a:solidFill>
+              <a:schemeClr val="tx1"/>
+            </a:solidFill>
+          </a:ln>
+        </p:spPr>
+        <p:style>
+          <a:lnRef idx="2">
+            <a:schemeClr val="accent1">
+              <a:shade val="15000"/>
+            </a:schemeClr>
+          </a:lnRef>
+          <a:fillRef idx="1">
+            <a:schemeClr val="accent1"/>
+          </a:fillRef>
+          <a:effectRef idx="0">
+            <a:schemeClr val="accent1"/>
+          </a:effectRef>
+          <a:fontRef idx="minor">
+            <a:schemeClr val="lt1"/>
+          </a:fontRef>
+        </p:style>
+        <p:txBody>
+          <a:bodyPr rtlCol="0" anchor="ctr"/>
+          <a:lstStyle/>
+          <a:p>
+            <a:pPr algn="ctr"/>
+            <a:endParaRPr lang="en-US" dirty="0">
+              <a:solidFill>
+                <a:schemeClr val="tx1"/>
+              </a:solidFill>
+            </a:endParaRPr>
+          </a:p>
+        </p:txBody>
+      </p:sp>
+      <p:cxnSp>
+        <p:nvCxnSpPr>
+          <p:cNvPr id="40" name="Straight Arrow Connector 39">
+            <a:extLst>
+              <a:ext uri="{FF2B5EF4-FFF2-40B4-BE49-F238E27FC236}">
+                <a16:creationId xmlns:a16="http://schemas.microsoft.com/office/drawing/2014/main" id="{B899F5AF-E80C-3452-008E-8E821AEFA864}"/>
+              </a:ext>
+            </a:extLst>
+          </p:cNvPr>
+          <p:cNvCxnSpPr>
+            <a:cxnSpLocks/>
+            <a:stCxn id="4" idx="3"/>
+            <a:endCxn id="25" idx="1"/>
+          </p:cNvCxnSpPr>
+          <p:nvPr/>
+        </p:nvCxnSpPr>
+        <p:spPr>
+          <a:xfrm flipV="1">
+            <a:off x="8328660" y="2081191"/>
+            <a:ext cx="403860" cy="2412"/>
+          </a:xfrm>
+          <a:prstGeom prst="straightConnector1">
+            <a:avLst/>
+          </a:prstGeom>
+          <a:ln>
+            <a:solidFill>
+              <a:schemeClr val="tx1"/>
+            </a:solidFill>
+            <a:prstDash val="solid"/>
+            <a:tailEnd type="triangle" w="lg" len="lg"/>
+          </a:ln>
+        </p:spPr>
+        <p:style>
+          <a:lnRef idx="2">
+            <a:schemeClr val="accent1"/>
+          </a:lnRef>
+          <a:fillRef idx="0">
+            <a:schemeClr val="accent1"/>
+          </a:fillRef>
+          <a:effectRef idx="1">
+            <a:schemeClr val="accent1"/>
+          </a:effectRef>
+          <a:fontRef idx="minor">
+            <a:schemeClr val="tx1"/>
+          </a:fontRef>
+        </p:style>
+      </p:cxnSp>
+      <p:sp>
+        <p:nvSpPr>
+          <p:cNvPr id="44" name="Rectangle: Rounded Corners 43">
+            <a:extLst>
+              <a:ext uri="{FF2B5EF4-FFF2-40B4-BE49-F238E27FC236}">
+                <a16:creationId xmlns:a16="http://schemas.microsoft.com/office/drawing/2014/main" id="{3F66FD98-C347-7EA9-DC36-7FDBB97B4248}"/>
+              </a:ext>
+            </a:extLst>
+          </p:cNvPr>
+          <p:cNvSpPr/>
+          <p:nvPr/>
+        </p:nvSpPr>
+        <p:spPr>
+          <a:xfrm>
+            <a:off x="8732520" y="2625555"/>
+            <a:ext cx="457200" cy="457200"/>
+          </a:xfrm>
+          <a:prstGeom prst="roundRect">
+            <a:avLst/>
+          </a:prstGeom>
+          <a:solidFill>
+            <a:srgbClr val="E5F1F8"/>
+          </a:solidFill>
+          <a:ln>
+            <a:solidFill>
+              <a:schemeClr val="tx1"/>
+            </a:solidFill>
+          </a:ln>
+        </p:spPr>
+        <p:style>
+          <a:lnRef idx="2">
+            <a:schemeClr val="accent1">
+              <a:shade val="15000"/>
+            </a:schemeClr>
+          </a:lnRef>
+          <a:fillRef idx="1">
+            <a:schemeClr val="accent1"/>
+          </a:fillRef>
+          <a:effectRef idx="0">
+            <a:schemeClr val="accent1"/>
+          </a:effectRef>
+          <a:fontRef idx="minor">
+            <a:schemeClr val="lt1"/>
+          </a:fontRef>
+        </p:style>
+        <p:txBody>
+          <a:bodyPr rtlCol="0" anchor="ctr"/>
+          <a:lstStyle/>
+          <a:p>
+            <a:pPr algn="ctr"/>
+            <a:endParaRPr lang="en-US" dirty="0">
+              <a:solidFill>
+                <a:schemeClr val="tx1"/>
+              </a:solidFill>
+            </a:endParaRPr>
+          </a:p>
+        </p:txBody>
+      </p:sp>
+      <p:sp>
+        <p:nvSpPr>
+          <p:cNvPr id="46" name="Rectangle: Rounded Corners 45">
+            <a:extLst>
+              <a:ext uri="{FF2B5EF4-FFF2-40B4-BE49-F238E27FC236}">
+                <a16:creationId xmlns:a16="http://schemas.microsoft.com/office/drawing/2014/main" id="{A791A27B-2AA1-8E05-2231-C99FE09DCBEB}"/>
+              </a:ext>
+            </a:extLst>
+          </p:cNvPr>
+          <p:cNvSpPr/>
+          <p:nvPr/>
+        </p:nvSpPr>
+        <p:spPr>
+          <a:xfrm>
+            <a:off x="8732520" y="3398519"/>
+            <a:ext cx="457200" cy="457200"/>
+          </a:xfrm>
+          <a:prstGeom prst="roundRect">
+            <a:avLst/>
+          </a:prstGeom>
+          <a:solidFill>
+            <a:srgbClr val="E5F1F8"/>
+          </a:solidFill>
+          <a:ln>
+            <a:solidFill>
+              <a:schemeClr val="tx1"/>
+            </a:solidFill>
+          </a:ln>
+        </p:spPr>
+        <p:style>
+          <a:lnRef idx="2">
+            <a:schemeClr val="accent1">
+              <a:shade val="15000"/>
+            </a:schemeClr>
+          </a:lnRef>
+          <a:fillRef idx="1">
+            <a:schemeClr val="accent1"/>
+          </a:fillRef>
+          <a:effectRef idx="0">
+            <a:schemeClr val="accent1"/>
+          </a:effectRef>
+          <a:fontRef idx="minor">
+            <a:schemeClr val="lt1"/>
+          </a:fontRef>
+        </p:style>
+        <p:txBody>
+          <a:bodyPr rtlCol="0" anchor="ctr"/>
+          <a:lstStyle/>
+          <a:p>
+            <a:pPr algn="ctr"/>
+            <a:endParaRPr lang="en-US" dirty="0">
+              <a:solidFill>
+                <a:schemeClr val="tx1"/>
+              </a:solidFill>
+            </a:endParaRPr>
+          </a:p>
+        </p:txBody>
+      </p:sp>
+      <p:cxnSp>
+        <p:nvCxnSpPr>
+          <p:cNvPr id="47" name="Straight Arrow Connector 46">
+            <a:extLst>
+              <a:ext uri="{FF2B5EF4-FFF2-40B4-BE49-F238E27FC236}">
+                <a16:creationId xmlns:a16="http://schemas.microsoft.com/office/drawing/2014/main" id="{42D77B26-2C1F-3022-9B0B-3736BC5CF8AA}"/>
+              </a:ext>
+            </a:extLst>
+          </p:cNvPr>
+          <p:cNvCxnSpPr>
+            <a:cxnSpLocks/>
+            <a:stCxn id="3" idx="3"/>
+            <a:endCxn id="44" idx="1"/>
+          </p:cNvCxnSpPr>
+          <p:nvPr/>
+        </p:nvCxnSpPr>
+        <p:spPr>
+          <a:xfrm>
+            <a:off x="8328660" y="2854154"/>
+            <a:ext cx="403860" cy="1"/>
+          </a:xfrm>
+          <a:prstGeom prst="straightConnector1">
+            <a:avLst/>
+          </a:prstGeom>
+          <a:ln>
+            <a:solidFill>
+              <a:schemeClr val="tx1"/>
+            </a:solidFill>
+            <a:prstDash val="solid"/>
+            <a:tailEnd type="triangle" w="lg" len="lg"/>
+          </a:ln>
+        </p:spPr>
+        <p:style>
+          <a:lnRef idx="2">
+            <a:schemeClr val="accent1"/>
+          </a:lnRef>
+          <a:fillRef idx="0">
+            <a:schemeClr val="accent1"/>
+          </a:fillRef>
+          <a:effectRef idx="1">
+            <a:schemeClr val="accent1"/>
+          </a:effectRef>
+          <a:fontRef idx="minor">
+            <a:schemeClr val="tx1"/>
+          </a:fontRef>
+        </p:style>
+      </p:cxnSp>
+      <p:cxnSp>
+        <p:nvCxnSpPr>
+          <p:cNvPr id="55" name="Straight Arrow Connector 54">
+            <a:extLst>
+              <a:ext uri="{FF2B5EF4-FFF2-40B4-BE49-F238E27FC236}">
+                <a16:creationId xmlns:a16="http://schemas.microsoft.com/office/drawing/2014/main" id="{A99ECFB6-8E63-4F62-C5D3-37BC5BB43934}"/>
+              </a:ext>
+            </a:extLst>
+          </p:cNvPr>
+          <p:cNvCxnSpPr>
+            <a:cxnSpLocks/>
+            <a:stCxn id="2" idx="3"/>
+            <a:endCxn id="46" idx="1"/>
+          </p:cNvCxnSpPr>
+          <p:nvPr/>
+        </p:nvCxnSpPr>
+        <p:spPr>
+          <a:xfrm flipV="1">
+            <a:off x="8328660" y="3627119"/>
+            <a:ext cx="403860" cy="1"/>
+          </a:xfrm>
+          <a:prstGeom prst="straightConnector1">
+            <a:avLst/>
+          </a:prstGeom>
+          <a:ln>
+            <a:solidFill>
+              <a:schemeClr val="tx1"/>
+            </a:solidFill>
+            <a:prstDash val="solid"/>
+            <a:tailEnd type="triangle" w="lg" len="lg"/>
+          </a:ln>
+        </p:spPr>
+        <p:style>
+          <a:lnRef idx="2">
+            <a:schemeClr val="accent1"/>
+          </a:lnRef>
+          <a:fillRef idx="0">
+            <a:schemeClr val="accent1"/>
+          </a:fillRef>
+          <a:effectRef idx="1">
+            <a:schemeClr val="accent1"/>
+          </a:effectRef>
+          <a:fontRef idx="minor">
+            <a:schemeClr val="tx1"/>
+          </a:fontRef>
+        </p:style>
+      </p:cxnSp>
+      <p:cxnSp>
+        <p:nvCxnSpPr>
+          <p:cNvPr id="58" name="Connector: Elbow 57">
+            <a:extLst>
+              <a:ext uri="{FF2B5EF4-FFF2-40B4-BE49-F238E27FC236}">
+                <a16:creationId xmlns:a16="http://schemas.microsoft.com/office/drawing/2014/main" id="{DDB500F1-F165-AABE-6725-11E4ED79023E}"/>
+              </a:ext>
+            </a:extLst>
+          </p:cNvPr>
+          <p:cNvCxnSpPr>
+            <a:cxnSpLocks/>
+            <a:stCxn id="25" idx="3"/>
+            <a:endCxn id="6" idx="1"/>
+          </p:cNvCxnSpPr>
+          <p:nvPr/>
+        </p:nvCxnSpPr>
+        <p:spPr>
+          <a:xfrm>
+            <a:off x="9189720" y="2081191"/>
+            <a:ext cx="647700" cy="772964"/>
+          </a:xfrm>
+          <a:prstGeom prst="bentConnector3">
+            <a:avLst>
+              <a:gd name="adj1" fmla="val 50000"/>
+            </a:avLst>
+          </a:prstGeom>
+          <a:ln>
+            <a:solidFill>
+              <a:schemeClr val="tx1"/>
+            </a:solidFill>
+            <a:prstDash val="solid"/>
+            <a:tailEnd type="triangle" w="lg" len="lg"/>
+          </a:ln>
+        </p:spPr>
+        <p:style>
+          <a:lnRef idx="2">
+            <a:schemeClr val="accent1"/>
+          </a:lnRef>
+          <a:fillRef idx="0">
+            <a:schemeClr val="accent1"/>
+          </a:fillRef>
+          <a:effectRef idx="1">
+            <a:schemeClr val="accent1"/>
+          </a:effectRef>
+          <a:fontRef idx="minor">
+            <a:schemeClr val="tx1"/>
+          </a:fontRef>
+        </p:style>
+      </p:cxnSp>
+      <p:cxnSp>
+        <p:nvCxnSpPr>
+          <p:cNvPr id="61" name="Connector: Elbow 60">
+            <a:extLst>
+              <a:ext uri="{FF2B5EF4-FFF2-40B4-BE49-F238E27FC236}">
+                <a16:creationId xmlns:a16="http://schemas.microsoft.com/office/drawing/2014/main" id="{28AC6A5D-0A01-5370-996D-AF8698A1082D}"/>
+              </a:ext>
+            </a:extLst>
+          </p:cNvPr>
+          <p:cNvCxnSpPr>
+            <a:cxnSpLocks/>
+            <a:stCxn id="46" idx="3"/>
+            <a:endCxn id="6" idx="1"/>
+          </p:cNvCxnSpPr>
+          <p:nvPr/>
+        </p:nvCxnSpPr>
+        <p:spPr>
+          <a:xfrm flipV="1">
+            <a:off x="9189720" y="2854155"/>
+            <a:ext cx="647700" cy="772964"/>
+          </a:xfrm>
+          <a:prstGeom prst="bentConnector3">
+            <a:avLst>
+              <a:gd name="adj1" fmla="val 50000"/>
+            </a:avLst>
+          </a:prstGeom>
+          <a:ln>
+            <a:solidFill>
+              <a:schemeClr val="tx1"/>
+            </a:solidFill>
+            <a:prstDash val="solid"/>
+            <a:tailEnd type="triangle" w="lg" len="lg"/>
+          </a:ln>
+        </p:spPr>
+        <p:style>
+          <a:lnRef idx="2">
+            <a:schemeClr val="accent1"/>
+          </a:lnRef>
+          <a:fillRef idx="0">
+            <a:schemeClr val="accent1"/>
+          </a:fillRef>
+          <a:effectRef idx="1">
+            <a:schemeClr val="accent1"/>
+          </a:effectRef>
+          <a:fontRef idx="minor">
+            <a:schemeClr val="tx1"/>
+          </a:fontRef>
+        </p:style>
+      </p:cxnSp>
       <p:pic>
         <p:nvPicPr>
-          <p:cNvPr id="3" name="Picture 2">
-            <a:extLst>
-              <a:ext uri="{FF2B5EF4-FFF2-40B4-BE49-F238E27FC236}">
-                <a16:creationId xmlns:a16="http://schemas.microsoft.com/office/drawing/2014/main" id="{D6A42420-8E3C-777D-C41A-540741D913CD}"/>
+          <p:cNvPr id="67" name="Graphic 66" descr="Web design with solid fill">
+            <a:extLst>
+              <a:ext uri="{FF2B5EF4-FFF2-40B4-BE49-F238E27FC236}">
+                <a16:creationId xmlns:a16="http://schemas.microsoft.com/office/drawing/2014/main" id="{5D8BB564-5BA8-868D-2AB7-35E0D3AE65F9}"/>
               </a:ext>
             </a:extLst>
           </p:cNvPr>
@@ -5232,25 +5861,294 @@
           <p:nvPr/>
         </p:nvPicPr>
         <p:blipFill>
-          <a:blip r:embed="rId2"/>
+          <a:blip r:embed="rId2">
+            <a:extLst>
+              <a:ext uri="{96DAC541-7B7A-43D3-8B79-37D633B846F1}">
+                <asvg:svgBlip xmlns:asvg="http://schemas.microsoft.com/office/drawing/2016/SVG/main" r:embed="rId3"/>
+              </a:ext>
+            </a:extLst>
+          </a:blip>
           <a:stretch>
             <a:fillRect/>
           </a:stretch>
         </p:blipFill>
         <p:spPr>
           <a:xfrm>
-            <a:off x="0" y="7451"/>
-            <a:ext cx="12192000" cy="6843098"/>
+            <a:off x="8755380" y="2648413"/>
+            <a:ext cx="411480" cy="411480"/>
           </a:xfrm>
           <a:prstGeom prst="rect">
             <a:avLst/>
           </a:prstGeom>
         </p:spPr>
       </p:pic>
+      <p:pic>
+        <p:nvPicPr>
+          <p:cNvPr id="71" name="Graphic 70" descr="World with solid fill">
+            <a:extLst>
+              <a:ext uri="{FF2B5EF4-FFF2-40B4-BE49-F238E27FC236}">
+                <a16:creationId xmlns:a16="http://schemas.microsoft.com/office/drawing/2014/main" id="{0EF50C39-FA5F-96A6-2DE6-53C76B029FDB}"/>
+              </a:ext>
+            </a:extLst>
+          </p:cNvPr>
+          <p:cNvPicPr>
+            <a:picLocks noChangeAspect="1"/>
+          </p:cNvPicPr>
+          <p:nvPr/>
+        </p:nvPicPr>
+        <p:blipFill>
+          <a:blip r:embed="rId4">
+            <a:extLst>
+              <a:ext uri="{96DAC541-7B7A-43D3-8B79-37D633B846F1}">
+                <asvg:svgBlip xmlns:asvg="http://schemas.microsoft.com/office/drawing/2016/SVG/main" r:embed="rId5"/>
+              </a:ext>
+            </a:extLst>
+          </a:blip>
+          <a:stretch>
+            <a:fillRect/>
+          </a:stretch>
+        </p:blipFill>
+        <p:spPr>
+          <a:xfrm>
+            <a:off x="8755380" y="3421379"/>
+            <a:ext cx="411480" cy="411480"/>
+          </a:xfrm>
+          <a:prstGeom prst="rect">
+            <a:avLst/>
+          </a:prstGeom>
+        </p:spPr>
+      </p:pic>
+      <p:pic>
+        <p:nvPicPr>
+          <p:cNvPr id="73" name="Graphic 72" descr="Database with solid fill">
+            <a:extLst>
+              <a:ext uri="{FF2B5EF4-FFF2-40B4-BE49-F238E27FC236}">
+                <a16:creationId xmlns:a16="http://schemas.microsoft.com/office/drawing/2014/main" id="{20B0889E-3ACA-9DCA-25FE-C1F9B73F7329}"/>
+              </a:ext>
+            </a:extLst>
+          </p:cNvPr>
+          <p:cNvPicPr>
+            <a:picLocks noChangeAspect="1"/>
+          </p:cNvPicPr>
+          <p:nvPr/>
+        </p:nvPicPr>
+        <p:blipFill>
+          <a:blip r:embed="rId6">
+            <a:extLst>
+              <a:ext uri="{96DAC541-7B7A-43D3-8B79-37D633B846F1}">
+                <asvg:svgBlip xmlns:asvg="http://schemas.microsoft.com/office/drawing/2016/SVG/main" r:embed="rId7"/>
+              </a:ext>
+            </a:extLst>
+          </a:blip>
+          <a:stretch>
+            <a:fillRect/>
+          </a:stretch>
+        </p:blipFill>
+        <p:spPr>
+          <a:xfrm>
+            <a:off x="8755380" y="1875451"/>
+            <a:ext cx="411480" cy="411480"/>
+          </a:xfrm>
+          <a:prstGeom prst="rect">
+            <a:avLst/>
+          </a:prstGeom>
+        </p:spPr>
+      </p:pic>
+      <p:pic>
+        <p:nvPicPr>
+          <p:cNvPr id="75" name="Graphic 74" descr="Gears with solid fill">
+            <a:extLst>
+              <a:ext uri="{FF2B5EF4-FFF2-40B4-BE49-F238E27FC236}">
+                <a16:creationId xmlns:a16="http://schemas.microsoft.com/office/drawing/2014/main" id="{AFA7CC75-0D4E-9273-3BC2-179536E5EC20}"/>
+              </a:ext>
+            </a:extLst>
+          </p:cNvPr>
+          <p:cNvPicPr>
+            <a:picLocks noChangeAspect="1"/>
+          </p:cNvPicPr>
+          <p:nvPr/>
+        </p:nvPicPr>
+        <p:blipFill>
+          <a:blip r:embed="rId8">
+            <a:extLst>
+              <a:ext uri="{96DAC541-7B7A-43D3-8B79-37D633B846F1}">
+                <asvg:svgBlip xmlns:asvg="http://schemas.microsoft.com/office/drawing/2016/SVG/main" r:embed="rId9"/>
+              </a:ext>
+            </a:extLst>
+          </a:blip>
+          <a:stretch>
+            <a:fillRect/>
+          </a:stretch>
+        </p:blipFill>
+        <p:spPr>
+          <a:xfrm>
+            <a:off x="1626048" y="2648413"/>
+            <a:ext cx="411480" cy="411480"/>
+          </a:xfrm>
+          <a:prstGeom prst="rect">
+            <a:avLst/>
+          </a:prstGeom>
+        </p:spPr>
+      </p:pic>
+      <p:sp>
+        <p:nvSpPr>
+          <p:cNvPr id="76" name="Rectangle: Rounded Corners 75">
+            <a:extLst>
+              <a:ext uri="{FF2B5EF4-FFF2-40B4-BE49-F238E27FC236}">
+                <a16:creationId xmlns:a16="http://schemas.microsoft.com/office/drawing/2014/main" id="{3492D89A-8D12-E69E-613E-246E45DCD83F}"/>
+              </a:ext>
+            </a:extLst>
+          </p:cNvPr>
+          <p:cNvSpPr/>
+          <p:nvPr/>
+        </p:nvSpPr>
+        <p:spPr>
+          <a:xfrm>
+            <a:off x="10545258" y="3627118"/>
+            <a:ext cx="1205604" cy="469096"/>
+          </a:xfrm>
+          <a:prstGeom prst="roundRect">
+            <a:avLst/>
+          </a:prstGeom>
+          <a:solidFill>
+            <a:srgbClr val="E5F1F8"/>
+          </a:solidFill>
+          <a:ln>
+            <a:solidFill>
+              <a:schemeClr val="tx1"/>
+            </a:solidFill>
+          </a:ln>
+        </p:spPr>
+        <p:style>
+          <a:lnRef idx="2">
+            <a:schemeClr val="accent1">
+              <a:shade val="15000"/>
+            </a:schemeClr>
+          </a:lnRef>
+          <a:fillRef idx="1">
+            <a:schemeClr val="accent1"/>
+          </a:fillRef>
+          <a:effectRef idx="0">
+            <a:schemeClr val="accent1"/>
+          </a:effectRef>
+          <a:fontRef idx="minor">
+            <a:schemeClr val="lt1"/>
+          </a:fontRef>
+        </p:style>
+        <p:txBody>
+          <a:bodyPr rtlCol="0" anchor="ctr"/>
+          <a:lstStyle/>
+          <a:p>
+            <a:pPr algn="ctr"/>
+            <a:r>
+              <a:rPr lang="en-US" dirty="0">
+                <a:solidFill>
+                  <a:schemeClr val="tx1"/>
+                </a:solidFill>
+              </a:rPr>
+              <a:t>Response</a:t>
+            </a:r>
+          </a:p>
+        </p:txBody>
+      </p:sp>
+      <p:cxnSp>
+        <p:nvCxnSpPr>
+          <p:cNvPr id="77" name="Straight Arrow Connector 76">
+            <a:extLst>
+              <a:ext uri="{FF2B5EF4-FFF2-40B4-BE49-F238E27FC236}">
+                <a16:creationId xmlns:a16="http://schemas.microsoft.com/office/drawing/2014/main" id="{1A734903-BE53-2153-B1BE-7817395A6ACC}"/>
+              </a:ext>
+            </a:extLst>
+          </p:cNvPr>
+          <p:cNvCxnSpPr>
+            <a:cxnSpLocks/>
+            <a:endCxn id="76" idx="0"/>
+          </p:cNvCxnSpPr>
+          <p:nvPr/>
+        </p:nvCxnSpPr>
+        <p:spPr>
+          <a:xfrm>
+            <a:off x="11148060" y="3334214"/>
+            <a:ext cx="0" cy="292904"/>
+          </a:xfrm>
+          <a:prstGeom prst="straightConnector1">
+            <a:avLst/>
+          </a:prstGeom>
+          <a:ln>
+            <a:solidFill>
+              <a:schemeClr val="tx1"/>
+            </a:solidFill>
+            <a:prstDash val="sysDash"/>
+            <a:tailEnd type="triangle" w="lg" len="lg"/>
+          </a:ln>
+        </p:spPr>
+        <p:style>
+          <a:lnRef idx="2">
+            <a:schemeClr val="accent1"/>
+          </a:lnRef>
+          <a:fillRef idx="0">
+            <a:schemeClr val="accent1"/>
+          </a:fillRef>
+          <a:effectRef idx="1">
+            <a:schemeClr val="accent1"/>
+          </a:effectRef>
+          <a:fontRef idx="minor">
+            <a:schemeClr val="tx1"/>
+          </a:fontRef>
+        </p:style>
+      </p:cxnSp>
+      <p:cxnSp>
+        <p:nvCxnSpPr>
+          <p:cNvPr id="14" name="Connector: Elbow 13">
+            <a:extLst>
+              <a:ext uri="{FF2B5EF4-FFF2-40B4-BE49-F238E27FC236}">
+                <a16:creationId xmlns:a16="http://schemas.microsoft.com/office/drawing/2014/main" id="{4D371B40-23D5-3632-64F0-3A5DAC685C2C}"/>
+              </a:ext>
+            </a:extLst>
+          </p:cNvPr>
+          <p:cNvCxnSpPr>
+            <a:cxnSpLocks/>
+            <a:endCxn id="5" idx="2"/>
+          </p:cNvCxnSpPr>
+          <p:nvPr/>
+        </p:nvCxnSpPr>
+        <p:spPr>
+          <a:xfrm rot="5400000">
+            <a:off x="6337265" y="-538391"/>
+            <a:ext cx="12700" cy="7745211"/>
+          </a:xfrm>
+          <a:prstGeom prst="bentConnector3">
+            <a:avLst>
+              <a:gd name="adj1" fmla="val 6060000"/>
+            </a:avLst>
+          </a:prstGeom>
+          <a:ln>
+            <a:solidFill>
+              <a:schemeClr val="tx1"/>
+            </a:solidFill>
+            <a:prstDash val="sysDash"/>
+            <a:tailEnd type="triangle" w="lg" len="lg"/>
+          </a:ln>
+        </p:spPr>
+        <p:style>
+          <a:lnRef idx="2">
+            <a:schemeClr val="accent1"/>
+          </a:lnRef>
+          <a:fillRef idx="0">
+            <a:schemeClr val="accent1"/>
+          </a:fillRef>
+          <a:effectRef idx="1">
+            <a:schemeClr val="accent1"/>
+          </a:effectRef>
+          <a:fontRef idx="minor">
+            <a:schemeClr val="tx1"/>
+          </a:fontRef>
+        </p:style>
+      </p:cxnSp>
     </p:spTree>
     <p:extLst>
       <p:ext uri="{BB962C8B-B14F-4D97-AF65-F5344CB8AC3E}">
-        <p14:creationId xmlns:p14="http://schemas.microsoft.com/office/powerpoint/2010/main" val="3996994306"/>
+        <p14:creationId xmlns:p14="http://schemas.microsoft.com/office/powerpoint/2010/main" val="2560175498"/>
       </p:ext>
     </p:extLst>
   </p:cSld>
@@ -5282,7 +6180,7 @@
           <p:cNvPr id="3" name="Picture 2">
             <a:extLst>
               <a:ext uri="{FF2B5EF4-FFF2-40B4-BE49-F238E27FC236}">
-                <a16:creationId xmlns:a16="http://schemas.microsoft.com/office/drawing/2014/main" id="{EE4867BA-66DD-B140-5528-856BCA343CD6}"/>
+                <a16:creationId xmlns:a16="http://schemas.microsoft.com/office/drawing/2014/main" id="{FD8E52CD-5961-A7C1-3607-A00CDD4774AD}"/>
               </a:ext>
             </a:extLst>
           </p:cNvPr>
@@ -5299,8 +6197,8 @@
         </p:blipFill>
         <p:spPr>
           <a:xfrm>
-            <a:off x="0" y="99063"/>
-            <a:ext cx="12192000" cy="6659873"/>
+            <a:off x="0" y="23812"/>
+            <a:ext cx="12192000" cy="6810375"/>
           </a:xfrm>
           <a:prstGeom prst="rect">
             <a:avLst/>
@@ -5310,7 +6208,7 @@
     </p:spTree>
     <p:extLst>
       <p:ext uri="{BB962C8B-B14F-4D97-AF65-F5344CB8AC3E}">
-        <p14:creationId xmlns:p14="http://schemas.microsoft.com/office/powerpoint/2010/main" val="276189202"/>
+        <p14:creationId xmlns:p14="http://schemas.microsoft.com/office/powerpoint/2010/main" val="3564074342"/>
       </p:ext>
     </p:extLst>
   </p:cSld>
@@ -5325,13 +6223,7 @@
   <p:cSld>
     <p:spTree>
       <p:nvGrpSpPr>
-        <p:cNvPr id="1" name="">
-          <a:extLst>
-            <a:ext uri="{FF2B5EF4-FFF2-40B4-BE49-F238E27FC236}">
-              <a16:creationId xmlns:a16="http://schemas.microsoft.com/office/drawing/2014/main" id="{677E65E1-5DF3-2FE1-BF1F-36B02D0FEC76}"/>
-            </a:ext>
-          </a:extLst>
-        </p:cNvPr>
+        <p:cNvPr id="1" name=""/>
         <p:cNvGrpSpPr/>
         <p:nvPr/>
       </p:nvGrpSpPr>
@@ -5348,7 +6240,7 @@
           <p:cNvPr id="3" name="Picture 2">
             <a:extLst>
               <a:ext uri="{FF2B5EF4-FFF2-40B4-BE49-F238E27FC236}">
-                <a16:creationId xmlns:a16="http://schemas.microsoft.com/office/drawing/2014/main" id="{8F0F888E-6C37-17E1-670D-996346E71810}"/>
+                <a16:creationId xmlns:a16="http://schemas.microsoft.com/office/drawing/2014/main" id="{D6A42420-8E3C-777D-C41A-540741D913CD}"/>
               </a:ext>
             </a:extLst>
           </p:cNvPr>
@@ -5365,8 +6257,8 @@
         </p:blipFill>
         <p:spPr>
           <a:xfrm>
-            <a:off x="0" y="1214427"/>
-            <a:ext cx="12192000" cy="4429145"/>
+            <a:off x="0" y="7451"/>
+            <a:ext cx="12192000" cy="6843098"/>
           </a:xfrm>
           <a:prstGeom prst="rect">
             <a:avLst/>
@@ -5376,7 +6268,7 @@
     </p:spTree>
     <p:extLst>
       <p:ext uri="{BB962C8B-B14F-4D97-AF65-F5344CB8AC3E}">
-        <p14:creationId xmlns:p14="http://schemas.microsoft.com/office/powerpoint/2010/main" val="3483502725"/>
+        <p14:creationId xmlns:p14="http://schemas.microsoft.com/office/powerpoint/2010/main" val="3996994306"/>
       </p:ext>
     </p:extLst>
   </p:cSld>
@@ -5408,6 +6300,132 @@
           <p:cNvPr id="3" name="Picture 2">
             <a:extLst>
               <a:ext uri="{FF2B5EF4-FFF2-40B4-BE49-F238E27FC236}">
+                <a16:creationId xmlns:a16="http://schemas.microsoft.com/office/drawing/2014/main" id="{EE4867BA-66DD-B140-5528-856BCA343CD6}"/>
+              </a:ext>
+            </a:extLst>
+          </p:cNvPr>
+          <p:cNvPicPr>
+            <a:picLocks noChangeAspect="1"/>
+          </p:cNvPicPr>
+          <p:nvPr/>
+        </p:nvPicPr>
+        <p:blipFill>
+          <a:blip r:embed="rId2"/>
+          <a:stretch>
+            <a:fillRect/>
+          </a:stretch>
+        </p:blipFill>
+        <p:spPr>
+          <a:xfrm>
+            <a:off x="0" y="99063"/>
+            <a:ext cx="12192000" cy="6659873"/>
+          </a:xfrm>
+          <a:prstGeom prst="rect">
+            <a:avLst/>
+          </a:prstGeom>
+        </p:spPr>
+      </p:pic>
+    </p:spTree>
+    <p:extLst>
+      <p:ext uri="{BB962C8B-B14F-4D97-AF65-F5344CB8AC3E}">
+        <p14:creationId xmlns:p14="http://schemas.microsoft.com/office/powerpoint/2010/main" val="276189202"/>
+      </p:ext>
+    </p:extLst>
+  </p:cSld>
+  <p:clrMapOvr>
+    <a:masterClrMapping/>
+  </p:clrMapOvr>
+</p:sld>
+</file>
+
+<file path=ppt/slides/slide16.xml><?xml version="1.0" encoding="utf-8"?>
+<p:sld xmlns:a="http://schemas.openxmlformats.org/drawingml/2006/main" xmlns:r="http://schemas.openxmlformats.org/officeDocument/2006/relationships" xmlns:p="http://schemas.openxmlformats.org/presentationml/2006/main">
+  <p:cSld>
+    <p:spTree>
+      <p:nvGrpSpPr>
+        <p:cNvPr id="1" name="">
+          <a:extLst>
+            <a:ext uri="{FF2B5EF4-FFF2-40B4-BE49-F238E27FC236}">
+              <a16:creationId xmlns:a16="http://schemas.microsoft.com/office/drawing/2014/main" id="{677E65E1-5DF3-2FE1-BF1F-36B02D0FEC76}"/>
+            </a:ext>
+          </a:extLst>
+        </p:cNvPr>
+        <p:cNvGrpSpPr/>
+        <p:nvPr/>
+      </p:nvGrpSpPr>
+      <p:grpSpPr>
+        <a:xfrm>
+          <a:off x="0" y="0"/>
+          <a:ext cx="0" cy="0"/>
+          <a:chOff x="0" y="0"/>
+          <a:chExt cx="0" cy="0"/>
+        </a:xfrm>
+      </p:grpSpPr>
+      <p:pic>
+        <p:nvPicPr>
+          <p:cNvPr id="3" name="Picture 2">
+            <a:extLst>
+              <a:ext uri="{FF2B5EF4-FFF2-40B4-BE49-F238E27FC236}">
+                <a16:creationId xmlns:a16="http://schemas.microsoft.com/office/drawing/2014/main" id="{8F0F888E-6C37-17E1-670D-996346E71810}"/>
+              </a:ext>
+            </a:extLst>
+          </p:cNvPr>
+          <p:cNvPicPr>
+            <a:picLocks noChangeAspect="1"/>
+          </p:cNvPicPr>
+          <p:nvPr/>
+        </p:nvPicPr>
+        <p:blipFill>
+          <a:blip r:embed="rId2"/>
+          <a:stretch>
+            <a:fillRect/>
+          </a:stretch>
+        </p:blipFill>
+        <p:spPr>
+          <a:xfrm>
+            <a:off x="0" y="1214427"/>
+            <a:ext cx="12192000" cy="4429145"/>
+          </a:xfrm>
+          <a:prstGeom prst="rect">
+            <a:avLst/>
+          </a:prstGeom>
+        </p:spPr>
+      </p:pic>
+    </p:spTree>
+    <p:extLst>
+      <p:ext uri="{BB962C8B-B14F-4D97-AF65-F5344CB8AC3E}">
+        <p14:creationId xmlns:p14="http://schemas.microsoft.com/office/powerpoint/2010/main" val="3483502725"/>
+      </p:ext>
+    </p:extLst>
+  </p:cSld>
+  <p:clrMapOvr>
+    <a:masterClrMapping/>
+  </p:clrMapOvr>
+</p:sld>
+</file>
+
+<file path=ppt/slides/slide17.xml><?xml version="1.0" encoding="utf-8"?>
+<p:sld xmlns:a="http://schemas.openxmlformats.org/drawingml/2006/main" xmlns:r="http://schemas.openxmlformats.org/officeDocument/2006/relationships" xmlns:p="http://schemas.openxmlformats.org/presentationml/2006/main">
+  <p:cSld>
+    <p:spTree>
+      <p:nvGrpSpPr>
+        <p:cNvPr id="1" name=""/>
+        <p:cNvGrpSpPr/>
+        <p:nvPr/>
+      </p:nvGrpSpPr>
+      <p:grpSpPr>
+        <a:xfrm>
+          <a:off x="0" y="0"/>
+          <a:ext cx="0" cy="0"/>
+          <a:chOff x="0" y="0"/>
+          <a:chExt cx="0" cy="0"/>
+        </a:xfrm>
+      </p:grpSpPr>
+      <p:pic>
+        <p:nvPicPr>
+          <p:cNvPr id="3" name="Picture 2">
+            <a:extLst>
+              <a:ext uri="{FF2B5EF4-FFF2-40B4-BE49-F238E27FC236}">
                 <a16:creationId xmlns:a16="http://schemas.microsoft.com/office/drawing/2014/main" id="{5A667DA2-6815-DE2B-768E-FDE43E3CE7EB}"/>
               </a:ext>
             </a:extLst>
@@ -5476,7 +6494,7 @@
 </p:sld>
 </file>
 
-<file path=ppt/slides/slide16.xml><?xml version="1.0" encoding="utf-8"?>
+<file path=ppt/slides/slide18.xml><?xml version="1.0" encoding="utf-8"?>
 <p:sld xmlns:a="http://schemas.openxmlformats.org/drawingml/2006/main" xmlns:r="http://schemas.openxmlformats.org/officeDocument/2006/relationships" xmlns:p="http://schemas.openxmlformats.org/presentationml/2006/main">
   <p:cSld>
     <p:spTree>
@@ -5512,7 +6530,7 @@
 </p:sld>
 </file>
 
-<file path=ppt/slides/slide17.xml><?xml version="1.0" encoding="utf-8"?>
+<file path=ppt/slides/slide19.xml><?xml version="1.0" encoding="utf-8"?>
 <p:sld xmlns:a="http://schemas.openxmlformats.org/drawingml/2006/main" xmlns:r="http://schemas.openxmlformats.org/officeDocument/2006/relationships" xmlns:p="http://schemas.openxmlformats.org/presentationml/2006/main">
   <p:cSld>
     <p:spTree>
@@ -5548,7 +6566,637 @@
 </p:sld>
 </file>
 
-<file path=ppt/slides/slide18.xml><?xml version="1.0" encoding="utf-8"?>
+<file path=ppt/slides/slide2.xml><?xml version="1.0" encoding="utf-8"?>
+<p:sld xmlns:a="http://schemas.openxmlformats.org/drawingml/2006/main" xmlns:r="http://schemas.openxmlformats.org/officeDocument/2006/relationships" xmlns:p="http://schemas.openxmlformats.org/presentationml/2006/main">
+  <p:cSld>
+    <p:spTree>
+      <p:nvGrpSpPr>
+        <p:cNvPr id="1" name=""/>
+        <p:cNvGrpSpPr/>
+        <p:nvPr/>
+      </p:nvGrpSpPr>
+      <p:grpSpPr>
+        <a:xfrm>
+          <a:off x="0" y="0"/>
+          <a:ext cx="0" cy="0"/>
+          <a:chOff x="0" y="0"/>
+          <a:chExt cx="0" cy="0"/>
+        </a:xfrm>
+      </p:grpSpPr>
+      <p:pic>
+        <p:nvPicPr>
+          <p:cNvPr id="2050" name="Picture 2" descr="Diagram showing Foundry resource containing multiple projects, each with deployments and connections.">
+            <a:extLst>
+              <a:ext uri="{FF2B5EF4-FFF2-40B4-BE49-F238E27FC236}">
+                <a16:creationId xmlns:a16="http://schemas.microsoft.com/office/drawing/2014/main" id="{12EEA84E-8776-00EF-5D97-05E8737B61E3}"/>
+              </a:ext>
+            </a:extLst>
+          </p:cNvPr>
+          <p:cNvPicPr>
+            <a:picLocks noChangeAspect="1" noChangeArrowheads="1"/>
+          </p:cNvPicPr>
+          <p:nvPr/>
+        </p:nvPicPr>
+        <p:blipFill>
+          <a:blip r:embed="rId3">
+            <a:clrChange>
+              <a:clrFrom>
+                <a:srgbClr val="FFFFFF"/>
+              </a:clrFrom>
+              <a:clrTo>
+                <a:srgbClr val="FFFFFF">
+                  <a:alpha val="0"/>
+                </a:srgbClr>
+              </a:clrTo>
+            </a:clrChange>
+            <a:extLst>
+              <a:ext uri="{28A0092B-C50C-407E-A947-70E740481C1C}">
+                <a14:useLocalDpi xmlns:a14="http://schemas.microsoft.com/office/drawing/2010/main" val="0"/>
+              </a:ext>
+            </a:extLst>
+          </a:blip>
+          <a:srcRect/>
+          <a:stretch>
+            <a:fillRect/>
+          </a:stretch>
+        </p:blipFill>
+        <p:spPr bwMode="auto">
+          <a:xfrm>
+            <a:off x="6607866" y="3166424"/>
+            <a:ext cx="5524500" cy="3667125"/>
+          </a:xfrm>
+          <a:prstGeom prst="rect">
+            <a:avLst/>
+          </a:prstGeom>
+          <a:noFill/>
+          <a:extLst>
+            <a:ext uri="{909E8E84-426E-40DD-AFC4-6F175D3DCCD1}">
+              <a14:hiddenFill xmlns:a14="http://schemas.microsoft.com/office/drawing/2010/main">
+                <a:solidFill>
+                  <a:srgbClr val="FFFFFF"/>
+                </a:solidFill>
+              </a14:hiddenFill>
+            </a:ext>
+          </a:extLst>
+        </p:spPr>
+      </p:pic>
+      <p:sp>
+        <p:nvSpPr>
+          <p:cNvPr id="4" name="Rectangle: Rounded Corners 3">
+            <a:extLst>
+              <a:ext uri="{FF2B5EF4-FFF2-40B4-BE49-F238E27FC236}">
+                <a16:creationId xmlns:a16="http://schemas.microsoft.com/office/drawing/2014/main" id="{F839DD77-409D-94ED-8A62-6F53CBB88ADD}"/>
+              </a:ext>
+            </a:extLst>
+          </p:cNvPr>
+          <p:cNvSpPr/>
+          <p:nvPr/>
+        </p:nvSpPr>
+        <p:spPr>
+          <a:xfrm>
+            <a:off x="962568" y="732317"/>
+            <a:ext cx="4456090" cy="2434107"/>
+          </a:xfrm>
+          <a:prstGeom prst="roundRect">
+            <a:avLst>
+              <a:gd name="adj" fmla="val 5234"/>
+            </a:avLst>
+          </a:prstGeom>
+          <a:solidFill>
+            <a:schemeClr val="bg1"/>
+          </a:solidFill>
+          <a:ln>
+            <a:solidFill>
+              <a:schemeClr val="tx1"/>
+            </a:solidFill>
+          </a:ln>
+        </p:spPr>
+        <p:style>
+          <a:lnRef idx="2">
+            <a:schemeClr val="accent1">
+              <a:shade val="15000"/>
+            </a:schemeClr>
+          </a:lnRef>
+          <a:fillRef idx="1">
+            <a:schemeClr val="accent1"/>
+          </a:fillRef>
+          <a:effectRef idx="0">
+            <a:schemeClr val="accent1"/>
+          </a:effectRef>
+          <a:fontRef idx="minor">
+            <a:schemeClr val="lt1"/>
+          </a:fontRef>
+        </p:style>
+        <p:txBody>
+          <a:bodyPr rtlCol="0" anchor="t"/>
+          <a:lstStyle/>
+          <a:p>
+            <a:pPr algn="ctr"/>
+            <a:r>
+              <a:rPr lang="en-US" dirty="0">
+                <a:solidFill>
+                  <a:schemeClr val="tx1"/>
+                </a:solidFill>
+              </a:rPr>
+              <a:t>Foundry Resource</a:t>
+            </a:r>
+          </a:p>
+        </p:txBody>
+      </p:sp>
+      <p:sp>
+        <p:nvSpPr>
+          <p:cNvPr id="5" name="Rectangle: Rounded Corners 4">
+            <a:extLst>
+              <a:ext uri="{FF2B5EF4-FFF2-40B4-BE49-F238E27FC236}">
+                <a16:creationId xmlns:a16="http://schemas.microsoft.com/office/drawing/2014/main" id="{CFAF0893-8AEC-1DBB-B036-2949BA0795A0}"/>
+              </a:ext>
+            </a:extLst>
+          </p:cNvPr>
+          <p:cNvSpPr/>
+          <p:nvPr/>
+        </p:nvSpPr>
+        <p:spPr>
+          <a:xfrm>
+            <a:off x="2410311" y="1494888"/>
+            <a:ext cx="1080042" cy="694520"/>
+          </a:xfrm>
+          <a:prstGeom prst="roundRect">
+            <a:avLst/>
+          </a:prstGeom>
+          <a:solidFill>
+            <a:srgbClr val="E5F1F8"/>
+          </a:solidFill>
+          <a:ln>
+            <a:solidFill>
+              <a:schemeClr val="tx1"/>
+            </a:solidFill>
+          </a:ln>
+        </p:spPr>
+        <p:style>
+          <a:lnRef idx="2">
+            <a:schemeClr val="accent1">
+              <a:shade val="15000"/>
+            </a:schemeClr>
+          </a:lnRef>
+          <a:fillRef idx="1">
+            <a:schemeClr val="accent1"/>
+          </a:fillRef>
+          <a:effectRef idx="0">
+            <a:schemeClr val="accent1"/>
+          </a:effectRef>
+          <a:fontRef idx="minor">
+            <a:schemeClr val="lt1"/>
+          </a:fontRef>
+        </p:style>
+        <p:txBody>
+          <a:bodyPr rtlCol="0" anchor="ctr"/>
+          <a:lstStyle/>
+          <a:p>
+            <a:pPr algn="ctr"/>
+            <a:r>
+              <a:rPr lang="en-US" dirty="0">
+                <a:solidFill>
+                  <a:schemeClr val="tx1"/>
+                </a:solidFill>
+              </a:rPr>
+              <a:t>Project</a:t>
+            </a:r>
+          </a:p>
+          <a:p>
+            <a:pPr algn="ctr"/>
+            <a:r>
+              <a:rPr lang="en-US" dirty="0">
+                <a:solidFill>
+                  <a:schemeClr val="tx1"/>
+                </a:solidFill>
+              </a:rPr>
+              <a:t>2</a:t>
+            </a:r>
+          </a:p>
+        </p:txBody>
+      </p:sp>
+      <p:sp>
+        <p:nvSpPr>
+          <p:cNvPr id="6" name="Rectangle: Rounded Corners 5">
+            <a:extLst>
+              <a:ext uri="{FF2B5EF4-FFF2-40B4-BE49-F238E27FC236}">
+                <a16:creationId xmlns:a16="http://schemas.microsoft.com/office/drawing/2014/main" id="{A7E630FB-2D59-D6DB-B847-29F7E0317AFA}"/>
+              </a:ext>
+            </a:extLst>
+          </p:cNvPr>
+          <p:cNvSpPr/>
+          <p:nvPr/>
+        </p:nvSpPr>
+        <p:spPr>
+          <a:xfrm>
+            <a:off x="1183452" y="1494888"/>
+            <a:ext cx="1080042" cy="694520"/>
+          </a:xfrm>
+          <a:prstGeom prst="roundRect">
+            <a:avLst/>
+          </a:prstGeom>
+          <a:solidFill>
+            <a:srgbClr val="E5F1F8"/>
+          </a:solidFill>
+          <a:ln>
+            <a:solidFill>
+              <a:schemeClr val="tx1"/>
+            </a:solidFill>
+          </a:ln>
+        </p:spPr>
+        <p:style>
+          <a:lnRef idx="2">
+            <a:schemeClr val="accent1">
+              <a:shade val="15000"/>
+            </a:schemeClr>
+          </a:lnRef>
+          <a:fillRef idx="1">
+            <a:schemeClr val="accent1"/>
+          </a:fillRef>
+          <a:effectRef idx="0">
+            <a:schemeClr val="accent1"/>
+          </a:effectRef>
+          <a:fontRef idx="minor">
+            <a:schemeClr val="lt1"/>
+          </a:fontRef>
+        </p:style>
+        <p:txBody>
+          <a:bodyPr rtlCol="0" anchor="ctr"/>
+          <a:lstStyle/>
+          <a:p>
+            <a:pPr algn="ctr"/>
+            <a:r>
+              <a:rPr lang="en-US" dirty="0">
+                <a:solidFill>
+                  <a:schemeClr val="tx1"/>
+                </a:solidFill>
+              </a:rPr>
+              <a:t>Project</a:t>
+            </a:r>
+          </a:p>
+          <a:p>
+            <a:pPr algn="ctr"/>
+            <a:r>
+              <a:rPr lang="en-US" dirty="0">
+                <a:solidFill>
+                  <a:schemeClr val="tx1"/>
+                </a:solidFill>
+              </a:rPr>
+              <a:t>1</a:t>
+            </a:r>
+          </a:p>
+        </p:txBody>
+      </p:sp>
+      <p:sp>
+        <p:nvSpPr>
+          <p:cNvPr id="8" name="Rectangle: Rounded Corners 7">
+            <a:extLst>
+              <a:ext uri="{FF2B5EF4-FFF2-40B4-BE49-F238E27FC236}">
+                <a16:creationId xmlns:a16="http://schemas.microsoft.com/office/drawing/2014/main" id="{5E9103F9-368F-E4D0-C17C-BF0F1C74D31A}"/>
+              </a:ext>
+            </a:extLst>
+          </p:cNvPr>
+          <p:cNvSpPr/>
+          <p:nvPr/>
+        </p:nvSpPr>
+        <p:spPr>
+          <a:xfrm>
+            <a:off x="4117733" y="1494888"/>
+            <a:ext cx="1080042" cy="694520"/>
+          </a:xfrm>
+          <a:prstGeom prst="roundRect">
+            <a:avLst/>
+          </a:prstGeom>
+          <a:solidFill>
+            <a:srgbClr val="B2D4EB"/>
+          </a:solidFill>
+          <a:ln>
+            <a:solidFill>
+              <a:schemeClr val="tx1"/>
+            </a:solidFill>
+          </a:ln>
+        </p:spPr>
+        <p:style>
+          <a:lnRef idx="2">
+            <a:schemeClr val="accent1">
+              <a:shade val="15000"/>
+            </a:schemeClr>
+          </a:lnRef>
+          <a:fillRef idx="1">
+            <a:schemeClr val="accent1"/>
+          </a:fillRef>
+          <a:effectRef idx="0">
+            <a:schemeClr val="accent1"/>
+          </a:effectRef>
+          <a:fontRef idx="minor">
+            <a:schemeClr val="lt1"/>
+          </a:fontRef>
+        </p:style>
+        <p:txBody>
+          <a:bodyPr rtlCol="0" anchor="ctr"/>
+          <a:lstStyle/>
+          <a:p>
+            <a:pPr algn="ctr"/>
+            <a:r>
+              <a:rPr lang="en-US" dirty="0">
+                <a:solidFill>
+                  <a:schemeClr val="tx1"/>
+                </a:solidFill>
+              </a:rPr>
+              <a:t>Project</a:t>
+            </a:r>
+          </a:p>
+          <a:p>
+            <a:pPr algn="ctr"/>
+            <a:r>
+              <a:rPr lang="en-US" i="1" dirty="0">
+                <a:solidFill>
+                  <a:schemeClr val="tx1"/>
+                </a:solidFill>
+              </a:rPr>
+              <a:t>n</a:t>
+            </a:r>
+          </a:p>
+        </p:txBody>
+      </p:sp>
+      <p:sp>
+        <p:nvSpPr>
+          <p:cNvPr id="9" name="TextBox 8">
+            <a:extLst>
+              <a:ext uri="{FF2B5EF4-FFF2-40B4-BE49-F238E27FC236}">
+                <a16:creationId xmlns:a16="http://schemas.microsoft.com/office/drawing/2014/main" id="{C992B776-2029-F35D-E69F-FB22F1454014}"/>
+              </a:ext>
+            </a:extLst>
+          </p:cNvPr>
+          <p:cNvSpPr txBox="1"/>
+          <p:nvPr/>
+        </p:nvSpPr>
+        <p:spPr>
+          <a:xfrm>
+            <a:off x="3637170" y="1657482"/>
+            <a:ext cx="333746" cy="369332"/>
+          </a:xfrm>
+          <a:prstGeom prst="rect">
+            <a:avLst/>
+          </a:prstGeom>
+          <a:noFill/>
+        </p:spPr>
+        <p:txBody>
+          <a:bodyPr wrap="none" rtlCol="0" anchor="ctr">
+            <a:spAutoFit/>
+          </a:bodyPr>
+          <a:lstStyle/>
+          <a:p>
+            <a:r>
+              <a:rPr lang="en-US" dirty="0"/>
+              <a:t>…</a:t>
+            </a:r>
+          </a:p>
+        </p:txBody>
+      </p:sp>
+      <p:sp>
+        <p:nvSpPr>
+          <p:cNvPr id="10" name="Rectangle: Rounded Corners 9">
+            <a:extLst>
+              <a:ext uri="{FF2B5EF4-FFF2-40B4-BE49-F238E27FC236}">
+                <a16:creationId xmlns:a16="http://schemas.microsoft.com/office/drawing/2014/main" id="{B3CF4078-AF58-188A-DF99-E08A01A42DFE}"/>
+              </a:ext>
+            </a:extLst>
+          </p:cNvPr>
+          <p:cNvSpPr/>
+          <p:nvPr/>
+        </p:nvSpPr>
+        <p:spPr>
+          <a:xfrm>
+            <a:off x="1183452" y="2534516"/>
+            <a:ext cx="4014323" cy="369332"/>
+          </a:xfrm>
+          <a:prstGeom prst="roundRect">
+            <a:avLst/>
+          </a:prstGeom>
+          <a:solidFill>
+            <a:srgbClr val="B2D4EB"/>
+          </a:solidFill>
+          <a:ln>
+            <a:solidFill>
+              <a:schemeClr val="tx1"/>
+            </a:solidFill>
+          </a:ln>
+        </p:spPr>
+        <p:style>
+          <a:lnRef idx="2">
+            <a:schemeClr val="accent1">
+              <a:shade val="15000"/>
+            </a:schemeClr>
+          </a:lnRef>
+          <a:fillRef idx="1">
+            <a:schemeClr val="accent1"/>
+          </a:fillRef>
+          <a:effectRef idx="0">
+            <a:schemeClr val="accent1"/>
+          </a:effectRef>
+          <a:fontRef idx="minor">
+            <a:schemeClr val="lt1"/>
+          </a:fontRef>
+        </p:style>
+        <p:txBody>
+          <a:bodyPr rtlCol="0" anchor="ctr"/>
+          <a:lstStyle/>
+          <a:p>
+            <a:pPr algn="ctr"/>
+            <a:r>
+              <a:rPr lang="en-US" dirty="0">
+                <a:solidFill>
+                  <a:schemeClr val="tx1"/>
+                </a:solidFill>
+              </a:rPr>
+              <a:t>Security + Governance</a:t>
+            </a:r>
+            <a:endParaRPr lang="en-US" i="1" dirty="0">
+              <a:solidFill>
+                <a:schemeClr val="tx1"/>
+              </a:solidFill>
+            </a:endParaRPr>
+          </a:p>
+        </p:txBody>
+      </p:sp>
+      <p:cxnSp>
+        <p:nvCxnSpPr>
+          <p:cNvPr id="13" name="Straight Arrow Connector 12">
+            <a:extLst>
+              <a:ext uri="{FF2B5EF4-FFF2-40B4-BE49-F238E27FC236}">
+                <a16:creationId xmlns:a16="http://schemas.microsoft.com/office/drawing/2014/main" id="{B3C89E23-8123-0234-D0F1-F39C80D61B78}"/>
+              </a:ext>
+            </a:extLst>
+          </p:cNvPr>
+          <p:cNvCxnSpPr>
+            <a:stCxn id="8" idx="3"/>
+          </p:cNvCxnSpPr>
+          <p:nvPr/>
+        </p:nvCxnSpPr>
+        <p:spPr>
+          <a:xfrm>
+            <a:off x="5197775" y="1842148"/>
+            <a:ext cx="591279" cy="0"/>
+          </a:xfrm>
+          <a:prstGeom prst="straightConnector1">
+            <a:avLst/>
+          </a:prstGeom>
+          <a:ln>
+            <a:solidFill>
+              <a:schemeClr val="tx1"/>
+            </a:solidFill>
+            <a:prstDash val="sysDash"/>
+            <a:tailEnd type="triangle" w="lg" len="lg"/>
+          </a:ln>
+        </p:spPr>
+        <p:style>
+          <a:lnRef idx="2">
+            <a:schemeClr val="accent1"/>
+          </a:lnRef>
+          <a:fillRef idx="0">
+            <a:schemeClr val="accent1"/>
+          </a:fillRef>
+          <a:effectRef idx="1">
+            <a:schemeClr val="accent1"/>
+          </a:effectRef>
+          <a:fontRef idx="minor">
+            <a:schemeClr val="tx1"/>
+          </a:fontRef>
+        </p:style>
+      </p:cxnSp>
+      <p:sp>
+        <p:nvSpPr>
+          <p:cNvPr id="14" name="TextBox 13">
+            <a:extLst>
+              <a:ext uri="{FF2B5EF4-FFF2-40B4-BE49-F238E27FC236}">
+                <a16:creationId xmlns:a16="http://schemas.microsoft.com/office/drawing/2014/main" id="{DA373EA2-E891-EE8A-A28C-9322032A5F17}"/>
+              </a:ext>
+            </a:extLst>
+          </p:cNvPr>
+          <p:cNvSpPr txBox="1"/>
+          <p:nvPr/>
+        </p:nvSpPr>
+        <p:spPr>
+          <a:xfrm>
+            <a:off x="5825155" y="1518982"/>
+            <a:ext cx="2013506" cy="646331"/>
+          </a:xfrm>
+          <a:prstGeom prst="rect">
+            <a:avLst/>
+          </a:prstGeom>
+          <a:noFill/>
+        </p:spPr>
+        <p:txBody>
+          <a:bodyPr wrap="square" rtlCol="0" anchor="ctr">
+            <a:spAutoFit/>
+          </a:bodyPr>
+          <a:lstStyle/>
+          <a:p>
+            <a:r>
+              <a:rPr lang="en-US" dirty="0"/>
+              <a:t>Configure Identities, RBAC, Monitoring, etc.</a:t>
+            </a:r>
+          </a:p>
+        </p:txBody>
+      </p:sp>
+      <p:sp>
+        <p:nvSpPr>
+          <p:cNvPr id="15" name="TextBox 14">
+            <a:extLst>
+              <a:ext uri="{FF2B5EF4-FFF2-40B4-BE49-F238E27FC236}">
+                <a16:creationId xmlns:a16="http://schemas.microsoft.com/office/drawing/2014/main" id="{0121F8B3-1DDB-194B-0435-0F2F79CBA773}"/>
+              </a:ext>
+            </a:extLst>
+          </p:cNvPr>
+          <p:cNvSpPr txBox="1"/>
+          <p:nvPr/>
+        </p:nvSpPr>
+        <p:spPr>
+          <a:xfrm>
+            <a:off x="2183860" y="3429000"/>
+            <a:ext cx="2013506" cy="646331"/>
+          </a:xfrm>
+          <a:prstGeom prst="rect">
+            <a:avLst/>
+          </a:prstGeom>
+          <a:noFill/>
+        </p:spPr>
+        <p:txBody>
+          <a:bodyPr wrap="square" rtlCol="0" anchor="ctr">
+            <a:spAutoFit/>
+          </a:bodyPr>
+          <a:lstStyle/>
+          <a:p>
+            <a:pPr algn="ctr"/>
+            <a:r>
+              <a:rPr lang="en-US" dirty="0"/>
+              <a:t>Connect to Tools and Knowledge bases</a:t>
+            </a:r>
+          </a:p>
+        </p:txBody>
+      </p:sp>
+      <p:cxnSp>
+        <p:nvCxnSpPr>
+          <p:cNvPr id="16" name="Straight Arrow Connector 15">
+            <a:extLst>
+              <a:ext uri="{FF2B5EF4-FFF2-40B4-BE49-F238E27FC236}">
+                <a16:creationId xmlns:a16="http://schemas.microsoft.com/office/drawing/2014/main" id="{753FAC2D-AAEE-099D-6EBF-C4AE11D1CF5E}"/>
+              </a:ext>
+            </a:extLst>
+          </p:cNvPr>
+          <p:cNvCxnSpPr>
+            <a:cxnSpLocks/>
+            <a:stCxn id="10" idx="2"/>
+            <a:endCxn id="15" idx="0"/>
+          </p:cNvCxnSpPr>
+          <p:nvPr/>
+        </p:nvCxnSpPr>
+        <p:spPr>
+          <a:xfrm flipH="1">
+            <a:off x="3190613" y="2903848"/>
+            <a:ext cx="1" cy="525152"/>
+          </a:xfrm>
+          <a:prstGeom prst="straightConnector1">
+            <a:avLst/>
+          </a:prstGeom>
+          <a:ln>
+            <a:solidFill>
+              <a:schemeClr val="tx1"/>
+            </a:solidFill>
+            <a:prstDash val="sysDash"/>
+            <a:tailEnd type="triangle" w="lg" len="lg"/>
+          </a:ln>
+        </p:spPr>
+        <p:style>
+          <a:lnRef idx="2">
+            <a:schemeClr val="accent1"/>
+          </a:lnRef>
+          <a:fillRef idx="0">
+            <a:schemeClr val="accent1"/>
+          </a:fillRef>
+          <a:effectRef idx="1">
+            <a:schemeClr val="accent1"/>
+          </a:effectRef>
+          <a:fontRef idx="minor">
+            <a:schemeClr val="tx1"/>
+          </a:fontRef>
+        </p:style>
+      </p:cxnSp>
+    </p:spTree>
+    <p:extLst>
+      <p:ext uri="{BB962C8B-B14F-4D97-AF65-F5344CB8AC3E}">
+        <p14:creationId xmlns:p14="http://schemas.microsoft.com/office/powerpoint/2010/main" val="1065807327"/>
+      </p:ext>
+    </p:extLst>
+  </p:cSld>
+  <p:clrMapOvr>
+    <a:masterClrMapping/>
+  </p:clrMapOvr>
+</p:sld>
+</file>
+
+<file path=ppt/slides/slide20.xml><?xml version="1.0" encoding="utf-8"?>
 <p:sld xmlns:a="http://schemas.openxmlformats.org/drawingml/2006/main" xmlns:r="http://schemas.openxmlformats.org/officeDocument/2006/relationships" xmlns:p="http://schemas.openxmlformats.org/presentationml/2006/main">
   <p:cSld>
     <p:spTree>
@@ -5584,7 +7232,7 @@
 </p:sld>
 </file>
 
-<file path=ppt/slides/slide19.xml><?xml version="1.0" encoding="utf-8"?>
+<file path=ppt/slides/slide21.xml><?xml version="1.0" encoding="utf-8"?>
 <p:sld xmlns:a="http://schemas.openxmlformats.org/drawingml/2006/main" xmlns:r="http://schemas.openxmlformats.org/officeDocument/2006/relationships" xmlns:p="http://schemas.openxmlformats.org/presentationml/2006/main">
   <p:cSld>
     <p:spTree>
@@ -5734,636 +7382,6 @@
     <p:extLst>
       <p:ext uri="{BB962C8B-B14F-4D97-AF65-F5344CB8AC3E}">
         <p14:creationId xmlns:p14="http://schemas.microsoft.com/office/powerpoint/2010/main" val="1650268167"/>
-      </p:ext>
-    </p:extLst>
-  </p:cSld>
-  <p:clrMapOvr>
-    <a:masterClrMapping/>
-  </p:clrMapOvr>
-</p:sld>
-</file>
-
-<file path=ppt/slides/slide2.xml><?xml version="1.0" encoding="utf-8"?>
-<p:sld xmlns:a="http://schemas.openxmlformats.org/drawingml/2006/main" xmlns:r="http://schemas.openxmlformats.org/officeDocument/2006/relationships" xmlns:p="http://schemas.openxmlformats.org/presentationml/2006/main">
-  <p:cSld>
-    <p:spTree>
-      <p:nvGrpSpPr>
-        <p:cNvPr id="1" name=""/>
-        <p:cNvGrpSpPr/>
-        <p:nvPr/>
-      </p:nvGrpSpPr>
-      <p:grpSpPr>
-        <a:xfrm>
-          <a:off x="0" y="0"/>
-          <a:ext cx="0" cy="0"/>
-          <a:chOff x="0" y="0"/>
-          <a:chExt cx="0" cy="0"/>
-        </a:xfrm>
-      </p:grpSpPr>
-      <p:pic>
-        <p:nvPicPr>
-          <p:cNvPr id="2050" name="Picture 2" descr="Diagram showing Foundry resource containing multiple projects, each with deployments and connections.">
-            <a:extLst>
-              <a:ext uri="{FF2B5EF4-FFF2-40B4-BE49-F238E27FC236}">
-                <a16:creationId xmlns:a16="http://schemas.microsoft.com/office/drawing/2014/main" id="{12EEA84E-8776-00EF-5D97-05E8737B61E3}"/>
-              </a:ext>
-            </a:extLst>
-          </p:cNvPr>
-          <p:cNvPicPr>
-            <a:picLocks noChangeAspect="1" noChangeArrowheads="1"/>
-          </p:cNvPicPr>
-          <p:nvPr/>
-        </p:nvPicPr>
-        <p:blipFill>
-          <a:blip r:embed="rId3">
-            <a:clrChange>
-              <a:clrFrom>
-                <a:srgbClr val="FFFFFF"/>
-              </a:clrFrom>
-              <a:clrTo>
-                <a:srgbClr val="FFFFFF">
-                  <a:alpha val="0"/>
-                </a:srgbClr>
-              </a:clrTo>
-            </a:clrChange>
-            <a:extLst>
-              <a:ext uri="{28A0092B-C50C-407E-A947-70E740481C1C}">
-                <a14:useLocalDpi xmlns:a14="http://schemas.microsoft.com/office/drawing/2010/main" val="0"/>
-              </a:ext>
-            </a:extLst>
-          </a:blip>
-          <a:srcRect/>
-          <a:stretch>
-            <a:fillRect/>
-          </a:stretch>
-        </p:blipFill>
-        <p:spPr bwMode="auto">
-          <a:xfrm>
-            <a:off x="6607866" y="3166424"/>
-            <a:ext cx="5524500" cy="3667125"/>
-          </a:xfrm>
-          <a:prstGeom prst="rect">
-            <a:avLst/>
-          </a:prstGeom>
-          <a:noFill/>
-          <a:extLst>
-            <a:ext uri="{909E8E84-426E-40DD-AFC4-6F175D3DCCD1}">
-              <a14:hiddenFill xmlns:a14="http://schemas.microsoft.com/office/drawing/2010/main">
-                <a:solidFill>
-                  <a:srgbClr val="FFFFFF"/>
-                </a:solidFill>
-              </a14:hiddenFill>
-            </a:ext>
-          </a:extLst>
-        </p:spPr>
-      </p:pic>
-      <p:sp>
-        <p:nvSpPr>
-          <p:cNvPr id="4" name="Rectangle: Rounded Corners 3">
-            <a:extLst>
-              <a:ext uri="{FF2B5EF4-FFF2-40B4-BE49-F238E27FC236}">
-                <a16:creationId xmlns:a16="http://schemas.microsoft.com/office/drawing/2014/main" id="{F839DD77-409D-94ED-8A62-6F53CBB88ADD}"/>
-              </a:ext>
-            </a:extLst>
-          </p:cNvPr>
-          <p:cNvSpPr/>
-          <p:nvPr/>
-        </p:nvSpPr>
-        <p:spPr>
-          <a:xfrm>
-            <a:off x="962568" y="732317"/>
-            <a:ext cx="4456090" cy="2434107"/>
-          </a:xfrm>
-          <a:prstGeom prst="roundRect">
-            <a:avLst>
-              <a:gd name="adj" fmla="val 5234"/>
-            </a:avLst>
-          </a:prstGeom>
-          <a:solidFill>
-            <a:schemeClr val="bg1"/>
-          </a:solidFill>
-          <a:ln>
-            <a:solidFill>
-              <a:schemeClr val="tx1"/>
-            </a:solidFill>
-          </a:ln>
-        </p:spPr>
-        <p:style>
-          <a:lnRef idx="2">
-            <a:schemeClr val="accent1">
-              <a:shade val="15000"/>
-            </a:schemeClr>
-          </a:lnRef>
-          <a:fillRef idx="1">
-            <a:schemeClr val="accent1"/>
-          </a:fillRef>
-          <a:effectRef idx="0">
-            <a:schemeClr val="accent1"/>
-          </a:effectRef>
-          <a:fontRef idx="minor">
-            <a:schemeClr val="lt1"/>
-          </a:fontRef>
-        </p:style>
-        <p:txBody>
-          <a:bodyPr rtlCol="0" anchor="t"/>
-          <a:lstStyle/>
-          <a:p>
-            <a:pPr algn="ctr"/>
-            <a:r>
-              <a:rPr lang="en-US" dirty="0">
-                <a:solidFill>
-                  <a:schemeClr val="tx1"/>
-                </a:solidFill>
-              </a:rPr>
-              <a:t>Foundry Resource</a:t>
-            </a:r>
-          </a:p>
-        </p:txBody>
-      </p:sp>
-      <p:sp>
-        <p:nvSpPr>
-          <p:cNvPr id="5" name="Rectangle: Rounded Corners 4">
-            <a:extLst>
-              <a:ext uri="{FF2B5EF4-FFF2-40B4-BE49-F238E27FC236}">
-                <a16:creationId xmlns:a16="http://schemas.microsoft.com/office/drawing/2014/main" id="{CFAF0893-8AEC-1DBB-B036-2949BA0795A0}"/>
-              </a:ext>
-            </a:extLst>
-          </p:cNvPr>
-          <p:cNvSpPr/>
-          <p:nvPr/>
-        </p:nvSpPr>
-        <p:spPr>
-          <a:xfrm>
-            <a:off x="2410311" y="1494888"/>
-            <a:ext cx="1080042" cy="694520"/>
-          </a:xfrm>
-          <a:prstGeom prst="roundRect">
-            <a:avLst/>
-          </a:prstGeom>
-          <a:solidFill>
-            <a:srgbClr val="E5F1F8"/>
-          </a:solidFill>
-          <a:ln>
-            <a:solidFill>
-              <a:schemeClr val="tx1"/>
-            </a:solidFill>
-          </a:ln>
-        </p:spPr>
-        <p:style>
-          <a:lnRef idx="2">
-            <a:schemeClr val="accent1">
-              <a:shade val="15000"/>
-            </a:schemeClr>
-          </a:lnRef>
-          <a:fillRef idx="1">
-            <a:schemeClr val="accent1"/>
-          </a:fillRef>
-          <a:effectRef idx="0">
-            <a:schemeClr val="accent1"/>
-          </a:effectRef>
-          <a:fontRef idx="minor">
-            <a:schemeClr val="lt1"/>
-          </a:fontRef>
-        </p:style>
-        <p:txBody>
-          <a:bodyPr rtlCol="0" anchor="ctr"/>
-          <a:lstStyle/>
-          <a:p>
-            <a:pPr algn="ctr"/>
-            <a:r>
-              <a:rPr lang="en-US" dirty="0">
-                <a:solidFill>
-                  <a:schemeClr val="tx1"/>
-                </a:solidFill>
-              </a:rPr>
-              <a:t>Project</a:t>
-            </a:r>
-          </a:p>
-          <a:p>
-            <a:pPr algn="ctr"/>
-            <a:r>
-              <a:rPr lang="en-US" dirty="0">
-                <a:solidFill>
-                  <a:schemeClr val="tx1"/>
-                </a:solidFill>
-              </a:rPr>
-              <a:t>2</a:t>
-            </a:r>
-          </a:p>
-        </p:txBody>
-      </p:sp>
-      <p:sp>
-        <p:nvSpPr>
-          <p:cNvPr id="6" name="Rectangle: Rounded Corners 5">
-            <a:extLst>
-              <a:ext uri="{FF2B5EF4-FFF2-40B4-BE49-F238E27FC236}">
-                <a16:creationId xmlns:a16="http://schemas.microsoft.com/office/drawing/2014/main" id="{A7E630FB-2D59-D6DB-B847-29F7E0317AFA}"/>
-              </a:ext>
-            </a:extLst>
-          </p:cNvPr>
-          <p:cNvSpPr/>
-          <p:nvPr/>
-        </p:nvSpPr>
-        <p:spPr>
-          <a:xfrm>
-            <a:off x="1183452" y="1494888"/>
-            <a:ext cx="1080042" cy="694520"/>
-          </a:xfrm>
-          <a:prstGeom prst="roundRect">
-            <a:avLst/>
-          </a:prstGeom>
-          <a:solidFill>
-            <a:srgbClr val="E5F1F8"/>
-          </a:solidFill>
-          <a:ln>
-            <a:solidFill>
-              <a:schemeClr val="tx1"/>
-            </a:solidFill>
-          </a:ln>
-        </p:spPr>
-        <p:style>
-          <a:lnRef idx="2">
-            <a:schemeClr val="accent1">
-              <a:shade val="15000"/>
-            </a:schemeClr>
-          </a:lnRef>
-          <a:fillRef idx="1">
-            <a:schemeClr val="accent1"/>
-          </a:fillRef>
-          <a:effectRef idx="0">
-            <a:schemeClr val="accent1"/>
-          </a:effectRef>
-          <a:fontRef idx="minor">
-            <a:schemeClr val="lt1"/>
-          </a:fontRef>
-        </p:style>
-        <p:txBody>
-          <a:bodyPr rtlCol="0" anchor="ctr"/>
-          <a:lstStyle/>
-          <a:p>
-            <a:pPr algn="ctr"/>
-            <a:r>
-              <a:rPr lang="en-US" dirty="0">
-                <a:solidFill>
-                  <a:schemeClr val="tx1"/>
-                </a:solidFill>
-              </a:rPr>
-              <a:t>Project</a:t>
-            </a:r>
-          </a:p>
-          <a:p>
-            <a:pPr algn="ctr"/>
-            <a:r>
-              <a:rPr lang="en-US" dirty="0">
-                <a:solidFill>
-                  <a:schemeClr val="tx1"/>
-                </a:solidFill>
-              </a:rPr>
-              <a:t>1</a:t>
-            </a:r>
-          </a:p>
-        </p:txBody>
-      </p:sp>
-      <p:sp>
-        <p:nvSpPr>
-          <p:cNvPr id="8" name="Rectangle: Rounded Corners 7">
-            <a:extLst>
-              <a:ext uri="{FF2B5EF4-FFF2-40B4-BE49-F238E27FC236}">
-                <a16:creationId xmlns:a16="http://schemas.microsoft.com/office/drawing/2014/main" id="{5E9103F9-368F-E4D0-C17C-BF0F1C74D31A}"/>
-              </a:ext>
-            </a:extLst>
-          </p:cNvPr>
-          <p:cNvSpPr/>
-          <p:nvPr/>
-        </p:nvSpPr>
-        <p:spPr>
-          <a:xfrm>
-            <a:off x="4117733" y="1494888"/>
-            <a:ext cx="1080042" cy="694520"/>
-          </a:xfrm>
-          <a:prstGeom prst="roundRect">
-            <a:avLst/>
-          </a:prstGeom>
-          <a:solidFill>
-            <a:srgbClr val="B2D4EB"/>
-          </a:solidFill>
-          <a:ln>
-            <a:solidFill>
-              <a:schemeClr val="tx1"/>
-            </a:solidFill>
-          </a:ln>
-        </p:spPr>
-        <p:style>
-          <a:lnRef idx="2">
-            <a:schemeClr val="accent1">
-              <a:shade val="15000"/>
-            </a:schemeClr>
-          </a:lnRef>
-          <a:fillRef idx="1">
-            <a:schemeClr val="accent1"/>
-          </a:fillRef>
-          <a:effectRef idx="0">
-            <a:schemeClr val="accent1"/>
-          </a:effectRef>
-          <a:fontRef idx="minor">
-            <a:schemeClr val="lt1"/>
-          </a:fontRef>
-        </p:style>
-        <p:txBody>
-          <a:bodyPr rtlCol="0" anchor="ctr"/>
-          <a:lstStyle/>
-          <a:p>
-            <a:pPr algn="ctr"/>
-            <a:r>
-              <a:rPr lang="en-US" dirty="0">
-                <a:solidFill>
-                  <a:schemeClr val="tx1"/>
-                </a:solidFill>
-              </a:rPr>
-              <a:t>Project</a:t>
-            </a:r>
-          </a:p>
-          <a:p>
-            <a:pPr algn="ctr"/>
-            <a:r>
-              <a:rPr lang="en-US" i="1" dirty="0">
-                <a:solidFill>
-                  <a:schemeClr val="tx1"/>
-                </a:solidFill>
-              </a:rPr>
-              <a:t>n</a:t>
-            </a:r>
-          </a:p>
-        </p:txBody>
-      </p:sp>
-      <p:sp>
-        <p:nvSpPr>
-          <p:cNvPr id="9" name="TextBox 8">
-            <a:extLst>
-              <a:ext uri="{FF2B5EF4-FFF2-40B4-BE49-F238E27FC236}">
-                <a16:creationId xmlns:a16="http://schemas.microsoft.com/office/drawing/2014/main" id="{C992B776-2029-F35D-E69F-FB22F1454014}"/>
-              </a:ext>
-            </a:extLst>
-          </p:cNvPr>
-          <p:cNvSpPr txBox="1"/>
-          <p:nvPr/>
-        </p:nvSpPr>
-        <p:spPr>
-          <a:xfrm>
-            <a:off x="3637170" y="1657482"/>
-            <a:ext cx="333746" cy="369332"/>
-          </a:xfrm>
-          <a:prstGeom prst="rect">
-            <a:avLst/>
-          </a:prstGeom>
-          <a:noFill/>
-        </p:spPr>
-        <p:txBody>
-          <a:bodyPr wrap="none" rtlCol="0" anchor="ctr">
-            <a:spAutoFit/>
-          </a:bodyPr>
-          <a:lstStyle/>
-          <a:p>
-            <a:r>
-              <a:rPr lang="en-US" dirty="0"/>
-              <a:t>…</a:t>
-            </a:r>
-          </a:p>
-        </p:txBody>
-      </p:sp>
-      <p:sp>
-        <p:nvSpPr>
-          <p:cNvPr id="10" name="Rectangle: Rounded Corners 9">
-            <a:extLst>
-              <a:ext uri="{FF2B5EF4-FFF2-40B4-BE49-F238E27FC236}">
-                <a16:creationId xmlns:a16="http://schemas.microsoft.com/office/drawing/2014/main" id="{B3CF4078-AF58-188A-DF99-E08A01A42DFE}"/>
-              </a:ext>
-            </a:extLst>
-          </p:cNvPr>
-          <p:cNvSpPr/>
-          <p:nvPr/>
-        </p:nvSpPr>
-        <p:spPr>
-          <a:xfrm>
-            <a:off x="1183452" y="2534516"/>
-            <a:ext cx="4014323" cy="369332"/>
-          </a:xfrm>
-          <a:prstGeom prst="roundRect">
-            <a:avLst/>
-          </a:prstGeom>
-          <a:solidFill>
-            <a:srgbClr val="B2D4EB"/>
-          </a:solidFill>
-          <a:ln>
-            <a:solidFill>
-              <a:schemeClr val="tx1"/>
-            </a:solidFill>
-          </a:ln>
-        </p:spPr>
-        <p:style>
-          <a:lnRef idx="2">
-            <a:schemeClr val="accent1">
-              <a:shade val="15000"/>
-            </a:schemeClr>
-          </a:lnRef>
-          <a:fillRef idx="1">
-            <a:schemeClr val="accent1"/>
-          </a:fillRef>
-          <a:effectRef idx="0">
-            <a:schemeClr val="accent1"/>
-          </a:effectRef>
-          <a:fontRef idx="minor">
-            <a:schemeClr val="lt1"/>
-          </a:fontRef>
-        </p:style>
-        <p:txBody>
-          <a:bodyPr rtlCol="0" anchor="ctr"/>
-          <a:lstStyle/>
-          <a:p>
-            <a:pPr algn="ctr"/>
-            <a:r>
-              <a:rPr lang="en-US" dirty="0">
-                <a:solidFill>
-                  <a:schemeClr val="tx1"/>
-                </a:solidFill>
-              </a:rPr>
-              <a:t>Security + Governance</a:t>
-            </a:r>
-            <a:endParaRPr lang="en-US" i="1" dirty="0">
-              <a:solidFill>
-                <a:schemeClr val="tx1"/>
-              </a:solidFill>
-            </a:endParaRPr>
-          </a:p>
-        </p:txBody>
-      </p:sp>
-      <p:cxnSp>
-        <p:nvCxnSpPr>
-          <p:cNvPr id="13" name="Straight Arrow Connector 12">
-            <a:extLst>
-              <a:ext uri="{FF2B5EF4-FFF2-40B4-BE49-F238E27FC236}">
-                <a16:creationId xmlns:a16="http://schemas.microsoft.com/office/drawing/2014/main" id="{B3C89E23-8123-0234-D0F1-F39C80D61B78}"/>
-              </a:ext>
-            </a:extLst>
-          </p:cNvPr>
-          <p:cNvCxnSpPr>
-            <a:stCxn id="8" idx="3"/>
-          </p:cNvCxnSpPr>
-          <p:nvPr/>
-        </p:nvCxnSpPr>
-        <p:spPr>
-          <a:xfrm>
-            <a:off x="5197775" y="1842148"/>
-            <a:ext cx="591279" cy="0"/>
-          </a:xfrm>
-          <a:prstGeom prst="straightConnector1">
-            <a:avLst/>
-          </a:prstGeom>
-          <a:ln>
-            <a:solidFill>
-              <a:schemeClr val="tx1"/>
-            </a:solidFill>
-            <a:prstDash val="sysDash"/>
-            <a:tailEnd type="triangle" w="lg" len="lg"/>
-          </a:ln>
-        </p:spPr>
-        <p:style>
-          <a:lnRef idx="2">
-            <a:schemeClr val="accent1"/>
-          </a:lnRef>
-          <a:fillRef idx="0">
-            <a:schemeClr val="accent1"/>
-          </a:fillRef>
-          <a:effectRef idx="1">
-            <a:schemeClr val="accent1"/>
-          </a:effectRef>
-          <a:fontRef idx="minor">
-            <a:schemeClr val="tx1"/>
-          </a:fontRef>
-        </p:style>
-      </p:cxnSp>
-      <p:sp>
-        <p:nvSpPr>
-          <p:cNvPr id="14" name="TextBox 13">
-            <a:extLst>
-              <a:ext uri="{FF2B5EF4-FFF2-40B4-BE49-F238E27FC236}">
-                <a16:creationId xmlns:a16="http://schemas.microsoft.com/office/drawing/2014/main" id="{DA373EA2-E891-EE8A-A28C-9322032A5F17}"/>
-              </a:ext>
-            </a:extLst>
-          </p:cNvPr>
-          <p:cNvSpPr txBox="1"/>
-          <p:nvPr/>
-        </p:nvSpPr>
-        <p:spPr>
-          <a:xfrm>
-            <a:off x="5825155" y="1518982"/>
-            <a:ext cx="2013506" cy="646331"/>
-          </a:xfrm>
-          <a:prstGeom prst="rect">
-            <a:avLst/>
-          </a:prstGeom>
-          <a:noFill/>
-        </p:spPr>
-        <p:txBody>
-          <a:bodyPr wrap="square" rtlCol="0" anchor="ctr">
-            <a:spAutoFit/>
-          </a:bodyPr>
-          <a:lstStyle/>
-          <a:p>
-            <a:r>
-              <a:rPr lang="en-US" dirty="0"/>
-              <a:t>Configure Identities, RBAC, Monitoring, etc.</a:t>
-            </a:r>
-          </a:p>
-        </p:txBody>
-      </p:sp>
-      <p:sp>
-        <p:nvSpPr>
-          <p:cNvPr id="15" name="TextBox 14">
-            <a:extLst>
-              <a:ext uri="{FF2B5EF4-FFF2-40B4-BE49-F238E27FC236}">
-                <a16:creationId xmlns:a16="http://schemas.microsoft.com/office/drawing/2014/main" id="{0121F8B3-1DDB-194B-0435-0F2F79CBA773}"/>
-              </a:ext>
-            </a:extLst>
-          </p:cNvPr>
-          <p:cNvSpPr txBox="1"/>
-          <p:nvPr/>
-        </p:nvSpPr>
-        <p:spPr>
-          <a:xfrm>
-            <a:off x="2183860" y="3429000"/>
-            <a:ext cx="2013506" cy="646331"/>
-          </a:xfrm>
-          <a:prstGeom prst="rect">
-            <a:avLst/>
-          </a:prstGeom>
-          <a:noFill/>
-        </p:spPr>
-        <p:txBody>
-          <a:bodyPr wrap="square" rtlCol="0" anchor="ctr">
-            <a:spAutoFit/>
-          </a:bodyPr>
-          <a:lstStyle/>
-          <a:p>
-            <a:pPr algn="ctr"/>
-            <a:r>
-              <a:rPr lang="en-US" dirty="0"/>
-              <a:t>Connect to Tools and Knowledge bases</a:t>
-            </a:r>
-          </a:p>
-        </p:txBody>
-      </p:sp>
-      <p:cxnSp>
-        <p:nvCxnSpPr>
-          <p:cNvPr id="16" name="Straight Arrow Connector 15">
-            <a:extLst>
-              <a:ext uri="{FF2B5EF4-FFF2-40B4-BE49-F238E27FC236}">
-                <a16:creationId xmlns:a16="http://schemas.microsoft.com/office/drawing/2014/main" id="{753FAC2D-AAEE-099D-6EBF-C4AE11D1CF5E}"/>
-              </a:ext>
-            </a:extLst>
-          </p:cNvPr>
-          <p:cNvCxnSpPr>
-            <a:cxnSpLocks/>
-            <a:stCxn id="10" idx="2"/>
-            <a:endCxn id="15" idx="0"/>
-          </p:cNvCxnSpPr>
-          <p:nvPr/>
-        </p:nvCxnSpPr>
-        <p:spPr>
-          <a:xfrm flipH="1">
-            <a:off x="3190613" y="2903848"/>
-            <a:ext cx="1" cy="525152"/>
-          </a:xfrm>
-          <a:prstGeom prst="straightConnector1">
-            <a:avLst/>
-          </a:prstGeom>
-          <a:ln>
-            <a:solidFill>
-              <a:schemeClr val="tx1"/>
-            </a:solidFill>
-            <a:prstDash val="sysDash"/>
-            <a:tailEnd type="triangle" w="lg" len="lg"/>
-          </a:ln>
-        </p:spPr>
-        <p:style>
-          <a:lnRef idx="2">
-            <a:schemeClr val="accent1"/>
-          </a:lnRef>
-          <a:fillRef idx="0">
-            <a:schemeClr val="accent1"/>
-          </a:fillRef>
-          <a:effectRef idx="1">
-            <a:schemeClr val="accent1"/>
-          </a:effectRef>
-          <a:fontRef idx="minor">
-            <a:schemeClr val="tx1"/>
-          </a:fontRef>
-        </p:style>
-      </p:cxnSp>
-    </p:spTree>
-    <p:extLst>
-      <p:ext uri="{BB962C8B-B14F-4D97-AF65-F5344CB8AC3E}">
-        <p14:creationId xmlns:p14="http://schemas.microsoft.com/office/powerpoint/2010/main" val="1065807327"/>
       </p:ext>
     </p:extLst>
   </p:cSld>

--- a/figures/figures.pptx
+++ b/figures/figures.pptx
@@ -5,7 +5,7 @@
     <p:sldMasterId id="2147483660" r:id="rId1"/>
   </p:sldMasterIdLst>
   <p:notesMasterIdLst>
-    <p:notesMasterId r:id="rId23"/>
+    <p:notesMasterId r:id="rId24"/>
   </p:notesMasterIdLst>
   <p:sldIdLst>
     <p:sldId id="258" r:id="rId2"/>
@@ -17,18 +17,19 @@
     <p:sldId id="268" r:id="rId8"/>
     <p:sldId id="275" r:id="rId9"/>
     <p:sldId id="262" r:id="rId10"/>
-    <p:sldId id="278" r:id="rId11"/>
-    <p:sldId id="277" r:id="rId12"/>
-    <p:sldId id="264" r:id="rId13"/>
-    <p:sldId id="265" r:id="rId14"/>
-    <p:sldId id="267" r:id="rId15"/>
-    <p:sldId id="269" r:id="rId16"/>
-    <p:sldId id="274" r:id="rId17"/>
-    <p:sldId id="270" r:id="rId18"/>
-    <p:sldId id="271" r:id="rId19"/>
-    <p:sldId id="272" r:id="rId20"/>
-    <p:sldId id="273" r:id="rId21"/>
-    <p:sldId id="257" r:id="rId22"/>
+    <p:sldId id="279" r:id="rId11"/>
+    <p:sldId id="278" r:id="rId12"/>
+    <p:sldId id="277" r:id="rId13"/>
+    <p:sldId id="264" r:id="rId14"/>
+    <p:sldId id="265" r:id="rId15"/>
+    <p:sldId id="267" r:id="rId16"/>
+    <p:sldId id="269" r:id="rId17"/>
+    <p:sldId id="274" r:id="rId18"/>
+    <p:sldId id="270" r:id="rId19"/>
+    <p:sldId id="271" r:id="rId20"/>
+    <p:sldId id="272" r:id="rId21"/>
+    <p:sldId id="273" r:id="rId22"/>
+    <p:sldId id="257" r:id="rId23"/>
   </p:sldIdLst>
   <p:sldSz cx="12192000" cy="6858000"/>
   <p:notesSz cx="6858000" cy="9144000"/>
@@ -157,6 +158,7 @@
         <p14:section name="Knowledge Bases" id="{06E034E2-AFC7-4A28-B1B0-B4E2903C9A55}">
           <p14:sldIdLst>
             <p14:sldId id="262"/>
+            <p14:sldId id="279"/>
             <p14:sldId id="278"/>
             <p14:sldId id="277"/>
             <p14:sldId id="264"/>
@@ -274,7 +276,7 @@
           <a:p>
             <a:fld id="{DAABB0E5-6D8D-4DEE-B75F-67010CF2307C}" type="datetimeFigureOut">
               <a:rPr lang="en-US" smtClean="0"/>
-              <a:t>3/2/2026</a:t>
+              <a:t>3/26/2026</a:t>
             </a:fld>
             <a:endParaRPr lang="en-US"/>
           </a:p>
@@ -959,7 +961,7 @@
           <a:p>
             <a:fld id="{B84C5C40-2055-49AF-9028-5DA79E75E391}" type="datetimeFigureOut">
               <a:rPr lang="en-US" smtClean="0"/>
-              <a:t>3/2/2026</a:t>
+              <a:t>3/26/2026</a:t>
             </a:fld>
             <a:endParaRPr lang="en-US"/>
           </a:p>
@@ -1129,7 +1131,7 @@
           <a:p>
             <a:fld id="{B84C5C40-2055-49AF-9028-5DA79E75E391}" type="datetimeFigureOut">
               <a:rPr lang="en-US" smtClean="0"/>
-              <a:t>3/2/2026</a:t>
+              <a:t>3/26/2026</a:t>
             </a:fld>
             <a:endParaRPr lang="en-US"/>
           </a:p>
@@ -1309,7 +1311,7 @@
           <a:p>
             <a:fld id="{B84C5C40-2055-49AF-9028-5DA79E75E391}" type="datetimeFigureOut">
               <a:rPr lang="en-US" smtClean="0"/>
-              <a:t>3/2/2026</a:t>
+              <a:t>3/26/2026</a:t>
             </a:fld>
             <a:endParaRPr lang="en-US"/>
           </a:p>
@@ -1479,7 +1481,7 @@
           <a:p>
             <a:fld id="{B84C5C40-2055-49AF-9028-5DA79E75E391}" type="datetimeFigureOut">
               <a:rPr lang="en-US" smtClean="0"/>
-              <a:t>3/2/2026</a:t>
+              <a:t>3/26/2026</a:t>
             </a:fld>
             <a:endParaRPr lang="en-US"/>
           </a:p>
@@ -1725,7 +1727,7 @@
           <a:p>
             <a:fld id="{B84C5C40-2055-49AF-9028-5DA79E75E391}" type="datetimeFigureOut">
               <a:rPr lang="en-US" smtClean="0"/>
-              <a:t>3/2/2026</a:t>
+              <a:t>3/26/2026</a:t>
             </a:fld>
             <a:endParaRPr lang="en-US"/>
           </a:p>
@@ -1957,7 +1959,7 @@
           <a:p>
             <a:fld id="{B84C5C40-2055-49AF-9028-5DA79E75E391}" type="datetimeFigureOut">
               <a:rPr lang="en-US" smtClean="0"/>
-              <a:t>3/2/2026</a:t>
+              <a:t>3/26/2026</a:t>
             </a:fld>
             <a:endParaRPr lang="en-US"/>
           </a:p>
@@ -2324,7 +2326,7 @@
           <a:p>
             <a:fld id="{B84C5C40-2055-49AF-9028-5DA79E75E391}" type="datetimeFigureOut">
               <a:rPr lang="en-US" smtClean="0"/>
-              <a:t>3/2/2026</a:t>
+              <a:t>3/26/2026</a:t>
             </a:fld>
             <a:endParaRPr lang="en-US"/>
           </a:p>
@@ -2442,7 +2444,7 @@
           <a:p>
             <a:fld id="{B84C5C40-2055-49AF-9028-5DA79E75E391}" type="datetimeFigureOut">
               <a:rPr lang="en-US" smtClean="0"/>
-              <a:t>3/2/2026</a:t>
+              <a:t>3/26/2026</a:t>
             </a:fld>
             <a:endParaRPr lang="en-US"/>
           </a:p>
@@ -2537,7 +2539,7 @@
           <a:p>
             <a:fld id="{B84C5C40-2055-49AF-9028-5DA79E75E391}" type="datetimeFigureOut">
               <a:rPr lang="en-US" smtClean="0"/>
-              <a:t>3/2/2026</a:t>
+              <a:t>3/26/2026</a:t>
             </a:fld>
             <a:endParaRPr lang="en-US"/>
           </a:p>
@@ -2814,7 +2816,7 @@
           <a:p>
             <a:fld id="{B84C5C40-2055-49AF-9028-5DA79E75E391}" type="datetimeFigureOut">
               <a:rPr lang="en-US" smtClean="0"/>
-              <a:t>3/2/2026</a:t>
+              <a:t>3/26/2026</a:t>
             </a:fld>
             <a:endParaRPr lang="en-US"/>
           </a:p>
@@ -3071,7 +3073,7 @@
           <a:p>
             <a:fld id="{B84C5C40-2055-49AF-9028-5DA79E75E391}" type="datetimeFigureOut">
               <a:rPr lang="en-US" smtClean="0"/>
-              <a:t>3/2/2026</a:t>
+              <a:t>3/26/2026</a:t>
             </a:fld>
             <a:endParaRPr lang="en-US"/>
           </a:p>
@@ -3284,7 +3286,7 @@
           <a:p>
             <a:fld id="{B84C5C40-2055-49AF-9028-5DA79E75E391}" type="datetimeFigureOut">
               <a:rPr lang="en-US" smtClean="0"/>
-              <a:t>3/2/2026</a:t>
+              <a:t>3/26/2026</a:t>
             </a:fld>
             <a:endParaRPr lang="en-US"/>
           </a:p>
@@ -3777,6 +3779,942 @@
           <a:chExt cx="0" cy="0"/>
         </a:xfrm>
       </p:grpSpPr>
+      <p:sp>
+        <p:nvSpPr>
+          <p:cNvPr id="2" name="Rectangle: Rounded Corners 1">
+            <a:extLst>
+              <a:ext uri="{FF2B5EF4-FFF2-40B4-BE49-F238E27FC236}">
+                <a16:creationId xmlns:a16="http://schemas.microsoft.com/office/drawing/2014/main" id="{83119B92-3DAB-FFFE-A154-7D9735CB5A30}"/>
+              </a:ext>
+            </a:extLst>
+          </p:cNvPr>
+          <p:cNvSpPr/>
+          <p:nvPr/>
+        </p:nvSpPr>
+        <p:spPr>
+          <a:xfrm>
+            <a:off x="616801" y="1509556"/>
+            <a:ext cx="2073059" cy="3473923"/>
+          </a:xfrm>
+          <a:prstGeom prst="roundRect">
+            <a:avLst>
+              <a:gd name="adj" fmla="val 5234"/>
+            </a:avLst>
+          </a:prstGeom>
+          <a:solidFill>
+            <a:schemeClr val="bg1"/>
+          </a:solidFill>
+          <a:ln>
+            <a:solidFill>
+              <a:schemeClr val="tx1"/>
+            </a:solidFill>
+          </a:ln>
+        </p:spPr>
+        <p:style>
+          <a:lnRef idx="2">
+            <a:schemeClr val="accent1">
+              <a:shade val="15000"/>
+            </a:schemeClr>
+          </a:lnRef>
+          <a:fillRef idx="1">
+            <a:schemeClr val="accent1"/>
+          </a:fillRef>
+          <a:effectRef idx="0">
+            <a:schemeClr val="accent1"/>
+          </a:effectRef>
+          <a:fontRef idx="minor">
+            <a:schemeClr val="lt1"/>
+          </a:fontRef>
+        </p:style>
+        <p:txBody>
+          <a:bodyPr rtlCol="0" anchor="ctr"/>
+          <a:lstStyle/>
+          <a:p>
+            <a:pPr algn="ctr"/>
+            <a:endParaRPr lang="en-US" dirty="0">
+              <a:solidFill>
+                <a:schemeClr val="tx1"/>
+              </a:solidFill>
+            </a:endParaRPr>
+          </a:p>
+        </p:txBody>
+      </p:sp>
+      <p:sp>
+        <p:nvSpPr>
+          <p:cNvPr id="3" name="Rectangle: Rounded Corners 2">
+            <a:extLst>
+              <a:ext uri="{FF2B5EF4-FFF2-40B4-BE49-F238E27FC236}">
+                <a16:creationId xmlns:a16="http://schemas.microsoft.com/office/drawing/2014/main" id="{DC2FB030-72C0-C615-61E3-8874EDB5B692}"/>
+              </a:ext>
+            </a:extLst>
+          </p:cNvPr>
+          <p:cNvSpPr/>
+          <p:nvPr/>
+        </p:nvSpPr>
+        <p:spPr>
+          <a:xfrm>
+            <a:off x="867128" y="1324891"/>
+            <a:ext cx="1572403" cy="369332"/>
+          </a:xfrm>
+          <a:prstGeom prst="roundRect">
+            <a:avLst/>
+          </a:prstGeom>
+          <a:solidFill>
+            <a:srgbClr val="B2D4EB"/>
+          </a:solidFill>
+          <a:ln>
+            <a:solidFill>
+              <a:schemeClr val="tx1"/>
+            </a:solidFill>
+          </a:ln>
+        </p:spPr>
+        <p:style>
+          <a:lnRef idx="2">
+            <a:schemeClr val="accent1">
+              <a:shade val="15000"/>
+            </a:schemeClr>
+          </a:lnRef>
+          <a:fillRef idx="1">
+            <a:schemeClr val="accent1"/>
+          </a:fillRef>
+          <a:effectRef idx="0">
+            <a:schemeClr val="accent1"/>
+          </a:effectRef>
+          <a:fontRef idx="minor">
+            <a:schemeClr val="lt1"/>
+          </a:fontRef>
+        </p:style>
+        <p:txBody>
+          <a:bodyPr rtlCol="0" anchor="ctr"/>
+          <a:lstStyle/>
+          <a:p>
+            <a:pPr algn="ctr"/>
+            <a:r>
+              <a:rPr lang="en-US" dirty="0">
+                <a:solidFill>
+                  <a:schemeClr val="tx1"/>
+                </a:solidFill>
+              </a:rPr>
+              <a:t>Data Sources</a:t>
+            </a:r>
+            <a:endParaRPr lang="en-US" i="1" dirty="0">
+              <a:solidFill>
+                <a:schemeClr val="tx1"/>
+              </a:solidFill>
+            </a:endParaRPr>
+          </a:p>
+        </p:txBody>
+      </p:sp>
+      <p:sp>
+        <p:nvSpPr>
+          <p:cNvPr id="4" name="Rectangle: Rounded Corners 3">
+            <a:extLst>
+              <a:ext uri="{FF2B5EF4-FFF2-40B4-BE49-F238E27FC236}">
+                <a16:creationId xmlns:a16="http://schemas.microsoft.com/office/drawing/2014/main" id="{C6E96547-9778-A42C-9F45-E33160AA5534}"/>
+              </a:ext>
+            </a:extLst>
+          </p:cNvPr>
+          <p:cNvSpPr/>
+          <p:nvPr/>
+        </p:nvSpPr>
+        <p:spPr>
+          <a:xfrm>
+            <a:off x="3597491" y="2813019"/>
+            <a:ext cx="1344168" cy="866894"/>
+          </a:xfrm>
+          <a:prstGeom prst="roundRect">
+            <a:avLst/>
+          </a:prstGeom>
+          <a:solidFill>
+            <a:srgbClr val="E5F1F8"/>
+          </a:solidFill>
+          <a:ln>
+            <a:solidFill>
+              <a:schemeClr val="tx1"/>
+            </a:solidFill>
+          </a:ln>
+        </p:spPr>
+        <p:style>
+          <a:lnRef idx="2">
+            <a:schemeClr val="accent1">
+              <a:shade val="15000"/>
+            </a:schemeClr>
+          </a:lnRef>
+          <a:fillRef idx="1">
+            <a:schemeClr val="accent1"/>
+          </a:fillRef>
+          <a:effectRef idx="0">
+            <a:schemeClr val="accent1"/>
+          </a:effectRef>
+          <a:fontRef idx="minor">
+            <a:schemeClr val="lt1"/>
+          </a:fontRef>
+        </p:style>
+        <p:txBody>
+          <a:bodyPr rtlCol="0" anchor="ctr"/>
+          <a:lstStyle/>
+          <a:p>
+            <a:pPr algn="ctr"/>
+            <a:r>
+              <a:rPr lang="en-US" dirty="0">
+                <a:solidFill>
+                  <a:schemeClr val="tx1"/>
+                </a:solidFill>
+              </a:rPr>
+              <a:t>Index</a:t>
+            </a:r>
+          </a:p>
+        </p:txBody>
+      </p:sp>
+      <p:sp>
+        <p:nvSpPr>
+          <p:cNvPr id="5" name="Rectangle: Rounded Corners 4">
+            <a:extLst>
+              <a:ext uri="{FF2B5EF4-FFF2-40B4-BE49-F238E27FC236}">
+                <a16:creationId xmlns:a16="http://schemas.microsoft.com/office/drawing/2014/main" id="{83BB60D5-76CA-A9ED-C3AE-FC7B38F1C3F2}"/>
+              </a:ext>
+            </a:extLst>
+          </p:cNvPr>
+          <p:cNvSpPr/>
+          <p:nvPr/>
+        </p:nvSpPr>
+        <p:spPr>
+          <a:xfrm>
+            <a:off x="7206977" y="2813018"/>
+            <a:ext cx="1340237" cy="866894"/>
+          </a:xfrm>
+          <a:prstGeom prst="roundRect">
+            <a:avLst/>
+          </a:prstGeom>
+          <a:solidFill>
+            <a:srgbClr val="E5F1F8"/>
+          </a:solidFill>
+          <a:ln>
+            <a:solidFill>
+              <a:schemeClr val="tx1"/>
+            </a:solidFill>
+          </a:ln>
+        </p:spPr>
+        <p:style>
+          <a:lnRef idx="2">
+            <a:schemeClr val="accent1">
+              <a:shade val="15000"/>
+            </a:schemeClr>
+          </a:lnRef>
+          <a:fillRef idx="1">
+            <a:schemeClr val="accent1"/>
+          </a:fillRef>
+          <a:effectRef idx="0">
+            <a:schemeClr val="accent1"/>
+          </a:effectRef>
+          <a:fontRef idx="minor">
+            <a:schemeClr val="lt1"/>
+          </a:fontRef>
+        </p:style>
+        <p:txBody>
+          <a:bodyPr rtlCol="0" anchor="ctr"/>
+          <a:lstStyle/>
+          <a:p>
+            <a:pPr algn="ctr"/>
+            <a:r>
+              <a:rPr lang="en-US" dirty="0">
+                <a:solidFill>
+                  <a:schemeClr val="tx1"/>
+                </a:solidFill>
+              </a:rPr>
+              <a:t>LLM</a:t>
+            </a:r>
+          </a:p>
+        </p:txBody>
+      </p:sp>
+      <p:pic>
+        <p:nvPicPr>
+          <p:cNvPr id="7" name="Graphic 6" descr="Database with solid fill">
+            <a:extLst>
+              <a:ext uri="{FF2B5EF4-FFF2-40B4-BE49-F238E27FC236}">
+                <a16:creationId xmlns:a16="http://schemas.microsoft.com/office/drawing/2014/main" id="{BFE9337E-0E41-BD25-9BC2-22B0B07C52FF}"/>
+              </a:ext>
+            </a:extLst>
+          </p:cNvPr>
+          <p:cNvPicPr>
+            <a:picLocks noChangeAspect="1"/>
+          </p:cNvPicPr>
+          <p:nvPr/>
+        </p:nvPicPr>
+        <p:blipFill>
+          <a:blip r:embed="rId2">
+            <a:extLst>
+              <a:ext uri="{96DAC541-7B7A-43D3-8B79-37D633B846F1}">
+                <asvg:svgBlip xmlns:asvg="http://schemas.microsoft.com/office/drawing/2016/SVG/main" r:embed="rId3"/>
+              </a:ext>
+            </a:extLst>
+          </a:blip>
+          <a:stretch>
+            <a:fillRect/>
+          </a:stretch>
+        </p:blipFill>
+        <p:spPr>
+          <a:xfrm>
+            <a:off x="1310429" y="1788181"/>
+            <a:ext cx="685800" cy="685800"/>
+          </a:xfrm>
+          <a:prstGeom prst="rect">
+            <a:avLst/>
+          </a:prstGeom>
+        </p:spPr>
+      </p:pic>
+      <p:pic>
+        <p:nvPicPr>
+          <p:cNvPr id="8" name="Graphic 7" descr="Document with solid fill">
+            <a:extLst>
+              <a:ext uri="{FF2B5EF4-FFF2-40B4-BE49-F238E27FC236}">
+                <a16:creationId xmlns:a16="http://schemas.microsoft.com/office/drawing/2014/main" id="{FBD7988B-3983-E05A-7FCC-29DBBA171853}"/>
+              </a:ext>
+            </a:extLst>
+          </p:cNvPr>
+          <p:cNvPicPr>
+            <a:picLocks noChangeAspect="1"/>
+          </p:cNvPicPr>
+          <p:nvPr/>
+        </p:nvPicPr>
+        <p:blipFill>
+          <a:blip r:embed="rId4">
+            <a:extLst>
+              <a:ext uri="{96DAC541-7B7A-43D3-8B79-37D633B846F1}">
+                <asvg:svgBlip xmlns:asvg="http://schemas.microsoft.com/office/drawing/2016/SVG/main" r:embed="rId5"/>
+              </a:ext>
+            </a:extLst>
+          </a:blip>
+          <a:srcRect/>
+          <a:stretch/>
+        </p:blipFill>
+        <p:spPr>
+          <a:xfrm>
+            <a:off x="1310429" y="2843153"/>
+            <a:ext cx="685800" cy="685800"/>
+          </a:xfrm>
+          <a:prstGeom prst="rect">
+            <a:avLst/>
+          </a:prstGeom>
+        </p:spPr>
+      </p:pic>
+      <p:pic>
+        <p:nvPicPr>
+          <p:cNvPr id="9" name="Graphic 8" descr="Gears with solid fill">
+            <a:extLst>
+              <a:ext uri="{FF2B5EF4-FFF2-40B4-BE49-F238E27FC236}">
+                <a16:creationId xmlns:a16="http://schemas.microsoft.com/office/drawing/2014/main" id="{31D68DF8-6A08-2505-A3B1-6F7C550CEAA9}"/>
+              </a:ext>
+            </a:extLst>
+          </p:cNvPr>
+          <p:cNvPicPr>
+            <a:picLocks noChangeAspect="1"/>
+          </p:cNvPicPr>
+          <p:nvPr/>
+        </p:nvPicPr>
+        <p:blipFill>
+          <a:blip r:embed="rId6">
+            <a:extLst>
+              <a:ext uri="{96DAC541-7B7A-43D3-8B79-37D633B846F1}">
+                <asvg:svgBlip xmlns:asvg="http://schemas.microsoft.com/office/drawing/2016/SVG/main" r:embed="rId7"/>
+              </a:ext>
+            </a:extLst>
+          </a:blip>
+          <a:srcRect/>
+          <a:stretch/>
+        </p:blipFill>
+        <p:spPr>
+          <a:xfrm>
+            <a:off x="1310429" y="3898125"/>
+            <a:ext cx="685800" cy="685800"/>
+          </a:xfrm>
+          <a:prstGeom prst="rect">
+            <a:avLst/>
+          </a:prstGeom>
+        </p:spPr>
+      </p:pic>
+      <p:sp>
+        <p:nvSpPr>
+          <p:cNvPr id="10" name="TextBox 9">
+            <a:extLst>
+              <a:ext uri="{FF2B5EF4-FFF2-40B4-BE49-F238E27FC236}">
+                <a16:creationId xmlns:a16="http://schemas.microsoft.com/office/drawing/2014/main" id="{EDEB1C91-1889-95C5-CCD9-173007AC1E20}"/>
+              </a:ext>
+            </a:extLst>
+          </p:cNvPr>
+          <p:cNvSpPr txBox="1"/>
+          <p:nvPr/>
+        </p:nvSpPr>
+        <p:spPr>
+          <a:xfrm>
+            <a:off x="1264891" y="2375950"/>
+            <a:ext cx="776879" cy="307777"/>
+          </a:xfrm>
+          <a:prstGeom prst="rect">
+            <a:avLst/>
+          </a:prstGeom>
+          <a:noFill/>
+        </p:spPr>
+        <p:txBody>
+          <a:bodyPr wrap="none" rtlCol="0">
+            <a:spAutoFit/>
+          </a:bodyPr>
+          <a:lstStyle/>
+          <a:p>
+            <a:pPr algn="ctr"/>
+            <a:r>
+              <a:rPr lang="en-US" sz="1400" dirty="0"/>
+              <a:t>Database</a:t>
+            </a:r>
+          </a:p>
+        </p:txBody>
+      </p:sp>
+      <p:sp>
+        <p:nvSpPr>
+          <p:cNvPr id="11" name="TextBox 10">
+            <a:extLst>
+              <a:ext uri="{FF2B5EF4-FFF2-40B4-BE49-F238E27FC236}">
+                <a16:creationId xmlns:a16="http://schemas.microsoft.com/office/drawing/2014/main" id="{3C7F89B1-B1CE-968F-CA44-CB29AE26D8C6}"/>
+              </a:ext>
+            </a:extLst>
+          </p:cNvPr>
+          <p:cNvSpPr txBox="1"/>
+          <p:nvPr/>
+        </p:nvSpPr>
+        <p:spPr>
+          <a:xfrm>
+            <a:off x="1197116" y="3495327"/>
+            <a:ext cx="912430" cy="307777"/>
+          </a:xfrm>
+          <a:prstGeom prst="rect">
+            <a:avLst/>
+          </a:prstGeom>
+          <a:noFill/>
+        </p:spPr>
+        <p:txBody>
+          <a:bodyPr wrap="none" rtlCol="0">
+            <a:spAutoFit/>
+          </a:bodyPr>
+          <a:lstStyle/>
+          <a:p>
+            <a:pPr algn="ctr"/>
+            <a:r>
+              <a:rPr lang="en-US" sz="1400" dirty="0"/>
+              <a:t>Documents</a:t>
+            </a:r>
+          </a:p>
+        </p:txBody>
+      </p:sp>
+      <p:sp>
+        <p:nvSpPr>
+          <p:cNvPr id="12" name="TextBox 11">
+            <a:extLst>
+              <a:ext uri="{FF2B5EF4-FFF2-40B4-BE49-F238E27FC236}">
+                <a16:creationId xmlns:a16="http://schemas.microsoft.com/office/drawing/2014/main" id="{966FF3F2-DD9D-64DF-31BB-C4194E7B86B3}"/>
+              </a:ext>
+            </a:extLst>
+          </p:cNvPr>
+          <p:cNvSpPr txBox="1"/>
+          <p:nvPr/>
+        </p:nvSpPr>
+        <p:spPr>
+          <a:xfrm>
+            <a:off x="1422336" y="4483046"/>
+            <a:ext cx="461986" cy="307777"/>
+          </a:xfrm>
+          <a:prstGeom prst="rect">
+            <a:avLst/>
+          </a:prstGeom>
+          <a:noFill/>
+        </p:spPr>
+        <p:txBody>
+          <a:bodyPr wrap="none" rtlCol="0">
+            <a:spAutoFit/>
+          </a:bodyPr>
+          <a:lstStyle/>
+          <a:p>
+            <a:pPr algn="ctr"/>
+            <a:r>
+              <a:rPr lang="en-US" sz="1400" dirty="0"/>
+              <a:t>APIs</a:t>
+            </a:r>
+          </a:p>
+        </p:txBody>
+      </p:sp>
+      <p:pic>
+        <p:nvPicPr>
+          <p:cNvPr id="13" name="Graphic 12" descr="User with solid fill">
+            <a:extLst>
+              <a:ext uri="{FF2B5EF4-FFF2-40B4-BE49-F238E27FC236}">
+                <a16:creationId xmlns:a16="http://schemas.microsoft.com/office/drawing/2014/main" id="{96BAB4E6-5045-1E1E-93EC-9E2D602DA515}"/>
+              </a:ext>
+            </a:extLst>
+          </p:cNvPr>
+          <p:cNvPicPr>
+            <a:picLocks noChangeAspect="1"/>
+          </p:cNvPicPr>
+          <p:nvPr/>
+        </p:nvPicPr>
+        <p:blipFill>
+          <a:blip r:embed="rId8">
+            <a:extLst>
+              <a:ext uri="{96DAC541-7B7A-43D3-8B79-37D633B846F1}">
+                <asvg:svgBlip xmlns:asvg="http://schemas.microsoft.com/office/drawing/2016/SVG/main" r:embed="rId9"/>
+              </a:ext>
+            </a:extLst>
+          </a:blip>
+          <a:srcRect/>
+          <a:stretch/>
+        </p:blipFill>
+        <p:spPr>
+          <a:xfrm>
+            <a:off x="5731418" y="1327464"/>
+            <a:ext cx="685800" cy="685800"/>
+          </a:xfrm>
+          <a:prstGeom prst="rect">
+            <a:avLst/>
+          </a:prstGeom>
+        </p:spPr>
+      </p:pic>
+      <p:sp>
+        <p:nvSpPr>
+          <p:cNvPr id="14" name="TextBox 13">
+            <a:extLst>
+              <a:ext uri="{FF2B5EF4-FFF2-40B4-BE49-F238E27FC236}">
+                <a16:creationId xmlns:a16="http://schemas.microsoft.com/office/drawing/2014/main" id="{D133FD24-0E51-C18F-DC0D-05012862BC6A}"/>
+              </a:ext>
+            </a:extLst>
+          </p:cNvPr>
+          <p:cNvSpPr txBox="1"/>
+          <p:nvPr/>
+        </p:nvSpPr>
+        <p:spPr>
+          <a:xfrm>
+            <a:off x="5837714" y="1859375"/>
+            <a:ext cx="473207" cy="307777"/>
+          </a:xfrm>
+          <a:prstGeom prst="rect">
+            <a:avLst/>
+          </a:prstGeom>
+          <a:noFill/>
+        </p:spPr>
+        <p:txBody>
+          <a:bodyPr wrap="none" rtlCol="0">
+            <a:spAutoFit/>
+          </a:bodyPr>
+          <a:lstStyle/>
+          <a:p>
+            <a:pPr algn="ctr"/>
+            <a:r>
+              <a:rPr lang="en-US" sz="1400" dirty="0"/>
+              <a:t>User</a:t>
+            </a:r>
+          </a:p>
+        </p:txBody>
+      </p:sp>
+      <p:cxnSp>
+        <p:nvCxnSpPr>
+          <p:cNvPr id="15" name="Connector: Elbow 14">
+            <a:extLst>
+              <a:ext uri="{FF2B5EF4-FFF2-40B4-BE49-F238E27FC236}">
+                <a16:creationId xmlns:a16="http://schemas.microsoft.com/office/drawing/2014/main" id="{F223CD2A-519C-5E26-2A15-B5F069B92302}"/>
+              </a:ext>
+            </a:extLst>
+          </p:cNvPr>
+          <p:cNvCxnSpPr>
+            <a:cxnSpLocks/>
+            <a:stCxn id="4" idx="0"/>
+            <a:endCxn id="13" idx="1"/>
+          </p:cNvCxnSpPr>
+          <p:nvPr/>
+        </p:nvCxnSpPr>
+        <p:spPr>
+          <a:xfrm rot="5400000" flipH="1" flipV="1">
+            <a:off x="4429169" y="1510771"/>
+            <a:ext cx="1142655" cy="1461843"/>
+          </a:xfrm>
+          <a:prstGeom prst="bentConnector2">
+            <a:avLst/>
+          </a:prstGeom>
+          <a:ln>
+            <a:solidFill>
+              <a:schemeClr val="tx1"/>
+            </a:solidFill>
+            <a:prstDash val="solid"/>
+            <a:headEnd type="triangle" w="lg" len="lg"/>
+            <a:tailEnd type="none" w="lg" len="lg"/>
+          </a:ln>
+        </p:spPr>
+        <p:style>
+          <a:lnRef idx="2">
+            <a:schemeClr val="accent1"/>
+          </a:lnRef>
+          <a:fillRef idx="0">
+            <a:schemeClr val="accent1"/>
+          </a:fillRef>
+          <a:effectRef idx="1">
+            <a:schemeClr val="accent1"/>
+          </a:effectRef>
+          <a:fontRef idx="minor">
+            <a:schemeClr val="tx1"/>
+          </a:fontRef>
+        </p:style>
+      </p:cxnSp>
+      <p:sp>
+        <p:nvSpPr>
+          <p:cNvPr id="20" name="TextBox 19">
+            <a:extLst>
+              <a:ext uri="{FF2B5EF4-FFF2-40B4-BE49-F238E27FC236}">
+                <a16:creationId xmlns:a16="http://schemas.microsoft.com/office/drawing/2014/main" id="{8D559034-7A85-3B34-A564-61446578AD9B}"/>
+              </a:ext>
+            </a:extLst>
+          </p:cNvPr>
+          <p:cNvSpPr txBox="1"/>
+          <p:nvPr/>
+        </p:nvSpPr>
+        <p:spPr>
+          <a:xfrm>
+            <a:off x="4269575" y="1663194"/>
+            <a:ext cx="571888" cy="307777"/>
+          </a:xfrm>
+          <a:prstGeom prst="rect">
+            <a:avLst/>
+          </a:prstGeom>
+          <a:noFill/>
+        </p:spPr>
+        <p:txBody>
+          <a:bodyPr wrap="none" rtlCol="0">
+            <a:spAutoFit/>
+          </a:bodyPr>
+          <a:lstStyle/>
+          <a:p>
+            <a:pPr algn="ctr"/>
+            <a:r>
+              <a:rPr lang="en-US" sz="1400" dirty="0"/>
+              <a:t>Query</a:t>
+            </a:r>
+          </a:p>
+        </p:txBody>
+      </p:sp>
+      <p:cxnSp>
+        <p:nvCxnSpPr>
+          <p:cNvPr id="21" name="Connector: Elbow 20">
+            <a:extLst>
+              <a:ext uri="{FF2B5EF4-FFF2-40B4-BE49-F238E27FC236}">
+                <a16:creationId xmlns:a16="http://schemas.microsoft.com/office/drawing/2014/main" id="{1089B3EE-2F65-1D88-F136-218C0BC84AB6}"/>
+              </a:ext>
+            </a:extLst>
+          </p:cNvPr>
+          <p:cNvCxnSpPr>
+            <a:cxnSpLocks/>
+            <a:stCxn id="5" idx="0"/>
+            <a:endCxn id="13" idx="3"/>
+          </p:cNvCxnSpPr>
+          <p:nvPr/>
+        </p:nvCxnSpPr>
+        <p:spPr>
+          <a:xfrm rot="16200000" flipV="1">
+            <a:off x="6575830" y="1511752"/>
+            <a:ext cx="1142654" cy="1459878"/>
+          </a:xfrm>
+          <a:prstGeom prst="bentConnector2">
+            <a:avLst/>
+          </a:prstGeom>
+          <a:ln>
+            <a:solidFill>
+              <a:schemeClr val="tx1"/>
+            </a:solidFill>
+            <a:prstDash val="solid"/>
+            <a:headEnd type="none" w="lg" len="lg"/>
+            <a:tailEnd type="triangle" w="lg" len="lg"/>
+          </a:ln>
+        </p:spPr>
+        <p:style>
+          <a:lnRef idx="2">
+            <a:schemeClr val="accent1"/>
+          </a:lnRef>
+          <a:fillRef idx="0">
+            <a:schemeClr val="accent1"/>
+          </a:fillRef>
+          <a:effectRef idx="1">
+            <a:schemeClr val="accent1"/>
+          </a:effectRef>
+          <a:fontRef idx="minor">
+            <a:schemeClr val="tx1"/>
+          </a:fontRef>
+        </p:style>
+      </p:cxnSp>
+      <p:sp>
+        <p:nvSpPr>
+          <p:cNvPr id="25" name="TextBox 24">
+            <a:extLst>
+              <a:ext uri="{FF2B5EF4-FFF2-40B4-BE49-F238E27FC236}">
+                <a16:creationId xmlns:a16="http://schemas.microsoft.com/office/drawing/2014/main" id="{D86FB239-BA6E-104C-E546-CF3C3B574FF3}"/>
+              </a:ext>
+            </a:extLst>
+          </p:cNvPr>
+          <p:cNvSpPr txBox="1"/>
+          <p:nvPr/>
+        </p:nvSpPr>
+        <p:spPr>
+          <a:xfrm>
+            <a:off x="7077773" y="1663193"/>
+            <a:ext cx="799322" cy="307777"/>
+          </a:xfrm>
+          <a:prstGeom prst="rect">
+            <a:avLst/>
+          </a:prstGeom>
+          <a:noFill/>
+        </p:spPr>
+        <p:txBody>
+          <a:bodyPr wrap="none" rtlCol="0">
+            <a:spAutoFit/>
+          </a:bodyPr>
+          <a:lstStyle/>
+          <a:p>
+            <a:pPr algn="ctr"/>
+            <a:r>
+              <a:rPr lang="en-US" sz="1400" dirty="0"/>
+              <a:t>Response</a:t>
+            </a:r>
+          </a:p>
+        </p:txBody>
+      </p:sp>
+      <p:cxnSp>
+        <p:nvCxnSpPr>
+          <p:cNvPr id="26" name="Straight Arrow Connector 25">
+            <a:extLst>
+              <a:ext uri="{FF2B5EF4-FFF2-40B4-BE49-F238E27FC236}">
+                <a16:creationId xmlns:a16="http://schemas.microsoft.com/office/drawing/2014/main" id="{51064699-9071-77EB-9C94-E9DDF0AD5AE8}"/>
+              </a:ext>
+            </a:extLst>
+          </p:cNvPr>
+          <p:cNvCxnSpPr>
+            <a:cxnSpLocks/>
+            <a:stCxn id="2" idx="3"/>
+            <a:endCxn id="4" idx="1"/>
+          </p:cNvCxnSpPr>
+          <p:nvPr/>
+        </p:nvCxnSpPr>
+        <p:spPr>
+          <a:xfrm flipV="1">
+            <a:off x="2689860" y="3246466"/>
+            <a:ext cx="907631" cy="52"/>
+          </a:xfrm>
+          <a:prstGeom prst="straightConnector1">
+            <a:avLst/>
+          </a:prstGeom>
+          <a:ln>
+            <a:solidFill>
+              <a:schemeClr val="tx1"/>
+            </a:solidFill>
+            <a:prstDash val="solid"/>
+            <a:headEnd type="triangle" w="lg" len="lg"/>
+            <a:tailEnd type="triangle" w="lg" len="lg"/>
+          </a:ln>
+        </p:spPr>
+        <p:style>
+          <a:lnRef idx="2">
+            <a:schemeClr val="accent1"/>
+          </a:lnRef>
+          <a:fillRef idx="0">
+            <a:schemeClr val="accent1"/>
+          </a:fillRef>
+          <a:effectRef idx="1">
+            <a:schemeClr val="accent1"/>
+          </a:effectRef>
+          <a:fontRef idx="minor">
+            <a:schemeClr val="tx1"/>
+          </a:fontRef>
+        </p:style>
+      </p:cxnSp>
+      <p:cxnSp>
+        <p:nvCxnSpPr>
+          <p:cNvPr id="33" name="Straight Arrow Connector 32">
+            <a:extLst>
+              <a:ext uri="{FF2B5EF4-FFF2-40B4-BE49-F238E27FC236}">
+                <a16:creationId xmlns:a16="http://schemas.microsoft.com/office/drawing/2014/main" id="{A3E6D11C-DC37-66ED-444E-45229E77AB10}"/>
+              </a:ext>
+            </a:extLst>
+          </p:cNvPr>
+          <p:cNvCxnSpPr>
+            <a:cxnSpLocks/>
+            <a:stCxn id="4" idx="3"/>
+            <a:endCxn id="5" idx="1"/>
+          </p:cNvCxnSpPr>
+          <p:nvPr/>
+        </p:nvCxnSpPr>
+        <p:spPr>
+          <a:xfrm flipV="1">
+            <a:off x="4941659" y="3246465"/>
+            <a:ext cx="2265318" cy="1"/>
+          </a:xfrm>
+          <a:prstGeom prst="straightConnector1">
+            <a:avLst/>
+          </a:prstGeom>
+          <a:ln>
+            <a:solidFill>
+              <a:schemeClr val="tx1"/>
+            </a:solidFill>
+            <a:prstDash val="solid"/>
+            <a:headEnd type="none" w="lg" len="lg"/>
+            <a:tailEnd type="triangle" w="lg" len="lg"/>
+          </a:ln>
+        </p:spPr>
+        <p:style>
+          <a:lnRef idx="2">
+            <a:schemeClr val="accent1"/>
+          </a:lnRef>
+          <a:fillRef idx="0">
+            <a:schemeClr val="accent1"/>
+          </a:fillRef>
+          <a:effectRef idx="1">
+            <a:schemeClr val="accent1"/>
+          </a:effectRef>
+          <a:fontRef idx="minor">
+            <a:schemeClr val="tx1"/>
+          </a:fontRef>
+        </p:style>
+      </p:cxnSp>
+      <p:sp>
+        <p:nvSpPr>
+          <p:cNvPr id="45" name="Rectangle: Rounded Corners 44">
+            <a:extLst>
+              <a:ext uri="{FF2B5EF4-FFF2-40B4-BE49-F238E27FC236}">
+                <a16:creationId xmlns:a16="http://schemas.microsoft.com/office/drawing/2014/main" id="{44B2CCA4-3CCA-DA67-6D56-F48A5071DB3E}"/>
+              </a:ext>
+            </a:extLst>
+          </p:cNvPr>
+          <p:cNvSpPr/>
+          <p:nvPr/>
+        </p:nvSpPr>
+        <p:spPr>
+          <a:xfrm>
+            <a:off x="5546929" y="3059668"/>
+            <a:ext cx="1054775" cy="369332"/>
+          </a:xfrm>
+          <a:prstGeom prst="roundRect">
+            <a:avLst/>
+          </a:prstGeom>
+          <a:solidFill>
+            <a:srgbClr val="B2D4EB"/>
+          </a:solidFill>
+          <a:ln>
+            <a:solidFill>
+              <a:schemeClr val="tx1"/>
+            </a:solidFill>
+          </a:ln>
+        </p:spPr>
+        <p:style>
+          <a:lnRef idx="2">
+            <a:schemeClr val="accent1">
+              <a:shade val="15000"/>
+            </a:schemeClr>
+          </a:lnRef>
+          <a:fillRef idx="1">
+            <a:schemeClr val="accent1"/>
+          </a:fillRef>
+          <a:effectRef idx="0">
+            <a:schemeClr val="accent1"/>
+          </a:effectRef>
+          <a:fontRef idx="minor">
+            <a:schemeClr val="lt1"/>
+          </a:fontRef>
+        </p:style>
+        <p:txBody>
+          <a:bodyPr rtlCol="0" anchor="ctr"/>
+          <a:lstStyle/>
+          <a:p>
+            <a:pPr algn="ctr"/>
+            <a:r>
+              <a:rPr lang="en-US" dirty="0">
+                <a:solidFill>
+                  <a:schemeClr val="tx1"/>
+                </a:solidFill>
+              </a:rPr>
+              <a:t>Context</a:t>
+            </a:r>
+            <a:endParaRPr lang="en-US" i="1" dirty="0">
+              <a:solidFill>
+                <a:schemeClr val="tx1"/>
+              </a:solidFill>
+            </a:endParaRPr>
+          </a:p>
+        </p:txBody>
+      </p:sp>
+      <p:sp>
+        <p:nvSpPr>
+          <p:cNvPr id="46" name="TextBox 45">
+            <a:extLst>
+              <a:ext uri="{FF2B5EF4-FFF2-40B4-BE49-F238E27FC236}">
+                <a16:creationId xmlns:a16="http://schemas.microsoft.com/office/drawing/2014/main" id="{4D798ED8-D9BF-411C-F47B-7E32E9A58041}"/>
+              </a:ext>
+            </a:extLst>
+          </p:cNvPr>
+          <p:cNvSpPr txBox="1"/>
+          <p:nvPr/>
+        </p:nvSpPr>
+        <p:spPr>
+          <a:xfrm>
+            <a:off x="5379542" y="3429000"/>
+            <a:ext cx="1389547" cy="523220"/>
+          </a:xfrm>
+          <a:prstGeom prst="rect">
+            <a:avLst/>
+          </a:prstGeom>
+          <a:noFill/>
+        </p:spPr>
+        <p:txBody>
+          <a:bodyPr wrap="none" rtlCol="0">
+            <a:spAutoFit/>
+          </a:bodyPr>
+          <a:lstStyle/>
+          <a:p>
+            <a:pPr algn="ctr"/>
+            <a:r>
+              <a:rPr lang="en-US" sz="1400" dirty="0"/>
+              <a:t>Prompt, Query,</a:t>
+            </a:r>
+          </a:p>
+          <a:p>
+            <a:pPr algn="ctr"/>
+            <a:r>
+              <a:rPr lang="en-US" sz="1400" dirty="0"/>
+              <a:t>and Retrieved Data</a:t>
+            </a:r>
+          </a:p>
+        </p:txBody>
+      </p:sp>
+    </p:spTree>
+    <p:extLst>
+      <p:ext uri="{BB962C8B-B14F-4D97-AF65-F5344CB8AC3E}">
+        <p14:creationId xmlns:p14="http://schemas.microsoft.com/office/powerpoint/2010/main" val="506868723"/>
+      </p:ext>
+    </p:extLst>
+  </p:cSld>
+  <p:clrMapOvr>
+    <a:masterClrMapping/>
+  </p:clrMapOvr>
+</p:sld>
+</file>
+
+<file path=ppt/slides/slide11.xml><?xml version="1.0" encoding="utf-8"?>
+<p:sld xmlns:a="http://schemas.openxmlformats.org/drawingml/2006/main" xmlns:r="http://schemas.openxmlformats.org/officeDocument/2006/relationships" xmlns:p="http://schemas.openxmlformats.org/presentationml/2006/main">
+  <p:cSld>
+    <p:spTree>
+      <p:nvGrpSpPr>
+        <p:cNvPr id="1" name=""/>
+        <p:cNvGrpSpPr/>
+        <p:nvPr/>
+      </p:nvGrpSpPr>
+      <p:grpSpPr>
+        <a:xfrm>
+          <a:off x="0" y="0"/>
+          <a:ext cx="0" cy="0"/>
+          <a:chOff x="0" y="0"/>
+          <a:chExt cx="0" cy="0"/>
+        </a:xfrm>
+      </p:grpSpPr>
       <p:pic>
         <p:nvPicPr>
           <p:cNvPr id="1026" name="Picture 2" descr="Diagram of the Azure AI Search architecture for agentic retrieval.">
@@ -3806,7 +4744,7 @@
         </p:blipFill>
         <p:spPr bwMode="auto">
           <a:xfrm>
-            <a:off x="0" y="2984500"/>
+            <a:off x="-32280" y="4799453"/>
             <a:ext cx="12192000" cy="3873500"/>
           </a:xfrm>
           <a:prstGeom prst="rect">
@@ -3824,6 +4762,1411 @@
           </a:extLst>
         </p:spPr>
       </p:pic>
+      <p:sp>
+        <p:nvSpPr>
+          <p:cNvPr id="2" name="Rectangle: Rounded Corners 1">
+            <a:extLst>
+              <a:ext uri="{FF2B5EF4-FFF2-40B4-BE49-F238E27FC236}">
+                <a16:creationId xmlns:a16="http://schemas.microsoft.com/office/drawing/2014/main" id="{C06A36BA-3259-02BA-E8FD-4008E85602F8}"/>
+              </a:ext>
+            </a:extLst>
+          </p:cNvPr>
+          <p:cNvSpPr/>
+          <p:nvPr/>
+        </p:nvSpPr>
+        <p:spPr>
+          <a:xfrm>
+            <a:off x="590131" y="1082037"/>
+            <a:ext cx="2313089" cy="1612116"/>
+          </a:xfrm>
+          <a:prstGeom prst="roundRect">
+            <a:avLst>
+              <a:gd name="adj" fmla="val 5234"/>
+            </a:avLst>
+          </a:prstGeom>
+          <a:solidFill>
+            <a:schemeClr val="bg1"/>
+          </a:solidFill>
+          <a:ln>
+            <a:solidFill>
+              <a:schemeClr val="tx1"/>
+            </a:solidFill>
+          </a:ln>
+        </p:spPr>
+        <p:style>
+          <a:lnRef idx="2">
+            <a:schemeClr val="accent1">
+              <a:shade val="15000"/>
+            </a:schemeClr>
+          </a:lnRef>
+          <a:fillRef idx="1">
+            <a:schemeClr val="accent1"/>
+          </a:fillRef>
+          <a:effectRef idx="0">
+            <a:schemeClr val="accent1"/>
+          </a:effectRef>
+          <a:fontRef idx="minor">
+            <a:schemeClr val="lt1"/>
+          </a:fontRef>
+        </p:style>
+        <p:txBody>
+          <a:bodyPr rtlCol="0" anchor="ctr"/>
+          <a:lstStyle/>
+          <a:p>
+            <a:pPr algn="ctr"/>
+            <a:endParaRPr lang="en-US" dirty="0">
+              <a:solidFill>
+                <a:schemeClr val="tx1"/>
+              </a:solidFill>
+            </a:endParaRPr>
+          </a:p>
+        </p:txBody>
+      </p:sp>
+      <p:sp>
+        <p:nvSpPr>
+          <p:cNvPr id="3" name="Rectangle: Rounded Corners 2">
+            <a:extLst>
+              <a:ext uri="{FF2B5EF4-FFF2-40B4-BE49-F238E27FC236}">
+                <a16:creationId xmlns:a16="http://schemas.microsoft.com/office/drawing/2014/main" id="{523CBE4A-053C-8640-596E-FCA438EF5A8E}"/>
+              </a:ext>
+            </a:extLst>
+          </p:cNvPr>
+          <p:cNvSpPr/>
+          <p:nvPr/>
+        </p:nvSpPr>
+        <p:spPr>
+          <a:xfrm>
+            <a:off x="779353" y="794908"/>
+            <a:ext cx="1982047" cy="574258"/>
+          </a:xfrm>
+          <a:prstGeom prst="roundRect">
+            <a:avLst/>
+          </a:prstGeom>
+          <a:solidFill>
+            <a:srgbClr val="B2D4EB"/>
+          </a:solidFill>
+          <a:ln>
+            <a:solidFill>
+              <a:schemeClr val="tx1"/>
+            </a:solidFill>
+          </a:ln>
+        </p:spPr>
+        <p:style>
+          <a:lnRef idx="2">
+            <a:schemeClr val="accent1">
+              <a:shade val="15000"/>
+            </a:schemeClr>
+          </a:lnRef>
+          <a:fillRef idx="1">
+            <a:schemeClr val="accent1"/>
+          </a:fillRef>
+          <a:effectRef idx="0">
+            <a:schemeClr val="accent1"/>
+          </a:effectRef>
+          <a:fontRef idx="minor">
+            <a:schemeClr val="lt1"/>
+          </a:fontRef>
+        </p:style>
+        <p:txBody>
+          <a:bodyPr rtlCol="0" anchor="ctr"/>
+          <a:lstStyle/>
+          <a:p>
+            <a:pPr algn="ctr"/>
+            <a:r>
+              <a:rPr lang="en-US" dirty="0">
+                <a:solidFill>
+                  <a:schemeClr val="tx1"/>
+                </a:solidFill>
+              </a:rPr>
+              <a:t>Knowledge Sources </a:t>
+            </a:r>
+            <a:r>
+              <a:rPr lang="en-US" sz="1400" dirty="0">
+                <a:solidFill>
+                  <a:schemeClr val="tx1"/>
+                </a:solidFill>
+              </a:rPr>
+              <a:t>(Indexed)</a:t>
+            </a:r>
+            <a:endParaRPr lang="en-US" i="1" dirty="0">
+              <a:solidFill>
+                <a:schemeClr val="tx1"/>
+              </a:solidFill>
+            </a:endParaRPr>
+          </a:p>
+        </p:txBody>
+      </p:sp>
+      <p:graphicFrame>
+        <p:nvGraphicFramePr>
+          <p:cNvPr id="4" name="Table 3">
+            <a:extLst>
+              <a:ext uri="{FF2B5EF4-FFF2-40B4-BE49-F238E27FC236}">
+                <a16:creationId xmlns:a16="http://schemas.microsoft.com/office/drawing/2014/main" id="{9853A8DD-AF2A-60E0-5030-29590308A9E4}"/>
+              </a:ext>
+            </a:extLst>
+          </p:cNvPr>
+          <p:cNvGraphicFramePr>
+            <a:graphicFrameLocks noGrp="1"/>
+          </p:cNvGraphicFramePr>
+          <p:nvPr>
+            <p:extLst>
+              <p:ext uri="{D42A27DB-BD31-4B8C-83A1-F6EECF244321}">
+                <p14:modId xmlns:p14="http://schemas.microsoft.com/office/powerpoint/2010/main" val="4267279013"/>
+              </p:ext>
+            </p:extLst>
+          </p:nvPr>
+        </p:nvGraphicFramePr>
+        <p:xfrm>
+          <a:off x="779353" y="1451369"/>
+          <a:ext cx="1982047" cy="1112520"/>
+        </p:xfrm>
+        <a:graphic>
+          <a:graphicData uri="http://schemas.openxmlformats.org/drawingml/2006/table">
+            <a:tbl>
+              <a:tblPr firstRow="1" bandRow="1">
+                <a:tableStyleId>{5C22544A-7EE6-4342-B048-85BDC9FD1C3A}</a:tableStyleId>
+              </a:tblPr>
+              <a:tblGrid>
+                <a:gridCol w="1982047">
+                  <a:extLst>
+                    <a:ext uri="{9D8B030D-6E8A-4147-A177-3AD203B41FA5}">
+                      <a16:colId xmlns:a16="http://schemas.microsoft.com/office/drawing/2014/main" val="3167127258"/>
+                    </a:ext>
+                  </a:extLst>
+                </a:gridCol>
+              </a:tblGrid>
+              <a:tr h="370840">
+                <a:tc>
+                  <a:txBody>
+                    <a:bodyPr/>
+                    <a:lstStyle/>
+                    <a:p>
+                      <a:pPr algn="ctr"/>
+                      <a:r>
+                        <a:rPr lang="en-US" b="0" dirty="0">
+                          <a:solidFill>
+                            <a:sysClr val="windowText" lastClr="000000"/>
+                          </a:solidFill>
+                        </a:rPr>
+                        <a:t>Search Index</a:t>
+                      </a:r>
+                    </a:p>
+                  </a:txBody>
+                  <a:tcPr anchor="ctr">
+                    <a:lnL w="12700" cmpd="sng">
+                      <a:noFill/>
+                    </a:lnL>
+                    <a:lnR w="12700" cmpd="sng">
+                      <a:noFill/>
+                    </a:lnR>
+                    <a:lnT w="12700" cmpd="sng">
+                      <a:noFill/>
+                    </a:lnT>
+                    <a:lnB w="38100" cmpd="sng">
+                      <a:noFill/>
+                    </a:lnB>
+                    <a:lnTlToBr w="12700" cmpd="sng">
+                      <a:noFill/>
+                      <a:prstDash val="solid"/>
+                    </a:lnTlToBr>
+                    <a:lnBlToTr w="12700" cmpd="sng">
+                      <a:noFill/>
+                      <a:prstDash val="solid"/>
+                    </a:lnBlToTr>
+                    <a:noFill/>
+                  </a:tcPr>
+                </a:tc>
+                <a:extLst>
+                  <a:ext uri="{0D108BD9-81ED-4DB2-BD59-A6C34878D82A}">
+                    <a16:rowId xmlns:a16="http://schemas.microsoft.com/office/drawing/2014/main" val="2068122310"/>
+                  </a:ext>
+                </a:extLst>
+              </a:tr>
+              <a:tr h="370840">
+                <a:tc>
+                  <a:txBody>
+                    <a:bodyPr/>
+                    <a:lstStyle/>
+                    <a:p>
+                      <a:pPr algn="ctr"/>
+                      <a:r>
+                        <a:rPr lang="en-US" b="0" dirty="0">
+                          <a:solidFill>
+                            <a:sysClr val="windowText" lastClr="000000"/>
+                          </a:solidFill>
+                        </a:rPr>
+                        <a:t>Azure Blob Storage</a:t>
+                      </a:r>
+                    </a:p>
+                  </a:txBody>
+                  <a:tcPr anchor="ctr">
+                    <a:lnL w="12700" cmpd="sng">
+                      <a:noFill/>
+                    </a:lnL>
+                    <a:lnR w="12700" cmpd="sng">
+                      <a:noFill/>
+                    </a:lnR>
+                    <a:lnT w="12700" cmpd="sng">
+                      <a:noFill/>
+                    </a:lnT>
+                    <a:lnB w="38100" cmpd="sng">
+                      <a:noFill/>
+                    </a:lnB>
+                    <a:lnTlToBr w="12700" cmpd="sng">
+                      <a:noFill/>
+                      <a:prstDash val="solid"/>
+                    </a:lnTlToBr>
+                    <a:lnBlToTr w="12700" cmpd="sng">
+                      <a:noFill/>
+                      <a:prstDash val="solid"/>
+                    </a:lnBlToTr>
+                    <a:noFill/>
+                  </a:tcPr>
+                </a:tc>
+                <a:extLst>
+                  <a:ext uri="{0D108BD9-81ED-4DB2-BD59-A6C34878D82A}">
+                    <a16:rowId xmlns:a16="http://schemas.microsoft.com/office/drawing/2014/main" val="2140426109"/>
+                  </a:ext>
+                </a:extLst>
+              </a:tr>
+              <a:tr h="370840">
+                <a:tc>
+                  <a:txBody>
+                    <a:bodyPr/>
+                    <a:lstStyle/>
+                    <a:p>
+                      <a:pPr algn="ctr"/>
+                      <a:r>
+                        <a:rPr lang="en-US" b="0" dirty="0">
+                          <a:solidFill>
+                            <a:sysClr val="windowText" lastClr="000000"/>
+                          </a:solidFill>
+                        </a:rPr>
+                        <a:t>Fabric </a:t>
+                      </a:r>
+                      <a:r>
+                        <a:rPr lang="en-US" b="0" dirty="0" err="1">
+                          <a:solidFill>
+                            <a:sysClr val="windowText" lastClr="000000"/>
+                          </a:solidFill>
+                        </a:rPr>
+                        <a:t>Onelake</a:t>
+                      </a:r>
+                      <a:endParaRPr lang="en-US" b="0" dirty="0">
+                        <a:solidFill>
+                          <a:sysClr val="windowText" lastClr="000000"/>
+                        </a:solidFill>
+                      </a:endParaRPr>
+                    </a:p>
+                  </a:txBody>
+                  <a:tcPr anchor="ctr">
+                    <a:lnL w="12700" cmpd="sng">
+                      <a:noFill/>
+                    </a:lnL>
+                    <a:lnR w="12700" cmpd="sng">
+                      <a:noFill/>
+                    </a:lnR>
+                    <a:lnT w="12700" cmpd="sng">
+                      <a:noFill/>
+                    </a:lnT>
+                    <a:lnB w="38100" cmpd="sng">
+                      <a:noFill/>
+                    </a:lnB>
+                    <a:lnTlToBr w="12700" cmpd="sng">
+                      <a:noFill/>
+                      <a:prstDash val="solid"/>
+                    </a:lnTlToBr>
+                    <a:lnBlToTr w="12700" cmpd="sng">
+                      <a:noFill/>
+                      <a:prstDash val="solid"/>
+                    </a:lnBlToTr>
+                    <a:noFill/>
+                  </a:tcPr>
+                </a:tc>
+                <a:extLst>
+                  <a:ext uri="{0D108BD9-81ED-4DB2-BD59-A6C34878D82A}">
+                    <a16:rowId xmlns:a16="http://schemas.microsoft.com/office/drawing/2014/main" val="4266800507"/>
+                  </a:ext>
+                </a:extLst>
+              </a:tr>
+            </a:tbl>
+          </a:graphicData>
+        </a:graphic>
+      </p:graphicFrame>
+      <p:sp>
+        <p:nvSpPr>
+          <p:cNvPr id="8" name="Rectangle: Rounded Corners 7">
+            <a:extLst>
+              <a:ext uri="{FF2B5EF4-FFF2-40B4-BE49-F238E27FC236}">
+                <a16:creationId xmlns:a16="http://schemas.microsoft.com/office/drawing/2014/main" id="{42A0140A-4B8D-2702-E7CF-52EA0DCEBB3C}"/>
+              </a:ext>
+            </a:extLst>
+          </p:cNvPr>
+          <p:cNvSpPr/>
+          <p:nvPr/>
+        </p:nvSpPr>
+        <p:spPr>
+          <a:xfrm>
+            <a:off x="4161703" y="2194679"/>
+            <a:ext cx="5721437" cy="1404069"/>
+          </a:xfrm>
+          <a:prstGeom prst="roundRect">
+            <a:avLst>
+              <a:gd name="adj" fmla="val 5234"/>
+            </a:avLst>
+          </a:prstGeom>
+          <a:solidFill>
+            <a:schemeClr val="bg1"/>
+          </a:solidFill>
+          <a:ln>
+            <a:solidFill>
+              <a:schemeClr val="tx1"/>
+            </a:solidFill>
+          </a:ln>
+        </p:spPr>
+        <p:style>
+          <a:lnRef idx="2">
+            <a:schemeClr val="accent1">
+              <a:shade val="15000"/>
+            </a:schemeClr>
+          </a:lnRef>
+          <a:fillRef idx="1">
+            <a:schemeClr val="accent1"/>
+          </a:fillRef>
+          <a:effectRef idx="0">
+            <a:schemeClr val="accent1"/>
+          </a:effectRef>
+          <a:fontRef idx="minor">
+            <a:schemeClr val="lt1"/>
+          </a:fontRef>
+        </p:style>
+        <p:txBody>
+          <a:bodyPr rtlCol="0" anchor="ctr"/>
+          <a:lstStyle/>
+          <a:p>
+            <a:pPr algn="ctr"/>
+            <a:endParaRPr lang="en-US" dirty="0">
+              <a:solidFill>
+                <a:schemeClr val="tx1"/>
+              </a:solidFill>
+            </a:endParaRPr>
+          </a:p>
+        </p:txBody>
+      </p:sp>
+      <p:pic>
+        <p:nvPicPr>
+          <p:cNvPr id="11" name="Graphic 10">
+            <a:extLst>
+              <a:ext uri="{FF2B5EF4-FFF2-40B4-BE49-F238E27FC236}">
+                <a16:creationId xmlns:a16="http://schemas.microsoft.com/office/drawing/2014/main" id="{1DD30818-84F6-CF80-B405-BA6F52AF3F36}"/>
+              </a:ext>
+            </a:extLst>
+          </p:cNvPr>
+          <p:cNvPicPr>
+            <a:picLocks noChangeAspect="1"/>
+          </p:cNvPicPr>
+          <p:nvPr/>
+        </p:nvPicPr>
+        <p:blipFill>
+          <a:blip r:embed="rId3">
+            <a:extLst>
+              <a:ext uri="{96DAC541-7B7A-43D3-8B79-37D633B846F1}">
+                <asvg:svgBlip xmlns:asvg="http://schemas.microsoft.com/office/drawing/2016/SVG/main" r:embed="rId4"/>
+              </a:ext>
+            </a:extLst>
+          </a:blip>
+          <a:stretch>
+            <a:fillRect/>
+          </a:stretch>
+        </p:blipFill>
+        <p:spPr>
+          <a:xfrm>
+            <a:off x="4327225" y="1741424"/>
+            <a:ext cx="457200" cy="457200"/>
+          </a:xfrm>
+          <a:prstGeom prst="rect">
+            <a:avLst/>
+          </a:prstGeom>
+        </p:spPr>
+      </p:pic>
+      <p:grpSp>
+        <p:nvGrpSpPr>
+          <p:cNvPr id="29" name="Group 28">
+            <a:extLst>
+              <a:ext uri="{FF2B5EF4-FFF2-40B4-BE49-F238E27FC236}">
+                <a16:creationId xmlns:a16="http://schemas.microsoft.com/office/drawing/2014/main" id="{DB96D1BE-0DD0-0713-D1C3-3DE3A8D2ED71}"/>
+              </a:ext>
+            </a:extLst>
+          </p:cNvPr>
+          <p:cNvGrpSpPr/>
+          <p:nvPr/>
+        </p:nvGrpSpPr>
+        <p:grpSpPr>
+          <a:xfrm>
+            <a:off x="4432936" y="2466285"/>
+            <a:ext cx="5178970" cy="866894"/>
+            <a:chOff x="4523785" y="5200779"/>
+            <a:chExt cx="5178970" cy="866894"/>
+          </a:xfrm>
+        </p:grpSpPr>
+        <p:sp>
+          <p:nvSpPr>
+            <p:cNvPr id="12" name="Rectangle: Rounded Corners 11">
+              <a:extLst>
+                <a:ext uri="{FF2B5EF4-FFF2-40B4-BE49-F238E27FC236}">
+                  <a16:creationId xmlns:a16="http://schemas.microsoft.com/office/drawing/2014/main" id="{0E6BB17F-0E4D-C386-1982-985D0F0F0A19}"/>
+                </a:ext>
+              </a:extLst>
+            </p:cNvPr>
+            <p:cNvSpPr/>
+            <p:nvPr/>
+          </p:nvSpPr>
+          <p:spPr>
+            <a:xfrm>
+              <a:off x="4523785" y="5200779"/>
+              <a:ext cx="1344168" cy="866894"/>
+            </a:xfrm>
+            <a:prstGeom prst="roundRect">
+              <a:avLst/>
+            </a:prstGeom>
+            <a:solidFill>
+              <a:srgbClr val="E5F1F8"/>
+            </a:solidFill>
+            <a:ln>
+              <a:solidFill>
+                <a:schemeClr val="tx1"/>
+              </a:solidFill>
+            </a:ln>
+          </p:spPr>
+          <p:style>
+            <a:lnRef idx="2">
+              <a:schemeClr val="accent1">
+                <a:shade val="15000"/>
+              </a:schemeClr>
+            </a:lnRef>
+            <a:fillRef idx="1">
+              <a:schemeClr val="accent1"/>
+            </a:fillRef>
+            <a:effectRef idx="0">
+              <a:schemeClr val="accent1"/>
+            </a:effectRef>
+            <a:fontRef idx="minor">
+              <a:schemeClr val="lt1"/>
+            </a:fontRef>
+          </p:style>
+          <p:txBody>
+            <a:bodyPr rtlCol="0" anchor="ctr"/>
+            <a:lstStyle/>
+            <a:p>
+              <a:pPr algn="ctr"/>
+              <a:r>
+                <a:rPr lang="en-US" dirty="0">
+                  <a:solidFill>
+                    <a:schemeClr val="tx1"/>
+                  </a:solidFill>
+                </a:rPr>
+                <a:t>Indexing Engine</a:t>
+              </a:r>
+            </a:p>
+          </p:txBody>
+        </p:sp>
+        <p:cxnSp>
+          <p:nvCxnSpPr>
+            <p:cNvPr id="13" name="Straight Arrow Connector 12">
+              <a:extLst>
+                <a:ext uri="{FF2B5EF4-FFF2-40B4-BE49-F238E27FC236}">
+                  <a16:creationId xmlns:a16="http://schemas.microsoft.com/office/drawing/2014/main" id="{B2502404-E195-BC9E-46D1-67DD0B4867C6}"/>
+                </a:ext>
+              </a:extLst>
+            </p:cNvPr>
+            <p:cNvCxnSpPr>
+              <a:cxnSpLocks/>
+              <a:stCxn id="12" idx="3"/>
+              <a:endCxn id="14" idx="1"/>
+            </p:cNvCxnSpPr>
+            <p:nvPr/>
+          </p:nvCxnSpPr>
+          <p:spPr>
+            <a:xfrm>
+              <a:off x="5867953" y="5634226"/>
+              <a:ext cx="573233" cy="0"/>
+            </a:xfrm>
+            <a:prstGeom prst="straightConnector1">
+              <a:avLst/>
+            </a:prstGeom>
+            <a:ln>
+              <a:solidFill>
+                <a:schemeClr val="tx1"/>
+              </a:solidFill>
+              <a:prstDash val="solid"/>
+              <a:headEnd type="none" w="lg" len="lg"/>
+              <a:tailEnd type="triangle" w="lg" len="lg"/>
+            </a:ln>
+          </p:spPr>
+          <p:style>
+            <a:lnRef idx="2">
+              <a:schemeClr val="accent1"/>
+            </a:lnRef>
+            <a:fillRef idx="0">
+              <a:schemeClr val="accent1"/>
+            </a:fillRef>
+            <a:effectRef idx="1">
+              <a:schemeClr val="accent1"/>
+            </a:effectRef>
+            <a:fontRef idx="minor">
+              <a:schemeClr val="tx1"/>
+            </a:fontRef>
+          </p:style>
+        </p:cxnSp>
+        <p:sp>
+          <p:nvSpPr>
+            <p:cNvPr id="14" name="Rectangle: Rounded Corners 13">
+              <a:extLst>
+                <a:ext uri="{FF2B5EF4-FFF2-40B4-BE49-F238E27FC236}">
+                  <a16:creationId xmlns:a16="http://schemas.microsoft.com/office/drawing/2014/main" id="{1EAE2DE6-CBC0-1892-D217-2EB1383D6350}"/>
+                </a:ext>
+              </a:extLst>
+            </p:cNvPr>
+            <p:cNvSpPr/>
+            <p:nvPr/>
+          </p:nvSpPr>
+          <p:spPr>
+            <a:xfrm>
+              <a:off x="6441186" y="5200779"/>
+              <a:ext cx="1344168" cy="866894"/>
+            </a:xfrm>
+            <a:prstGeom prst="roundRect">
+              <a:avLst/>
+            </a:prstGeom>
+            <a:solidFill>
+              <a:srgbClr val="E5F1F8"/>
+            </a:solidFill>
+            <a:ln>
+              <a:solidFill>
+                <a:schemeClr val="tx1"/>
+              </a:solidFill>
+            </a:ln>
+          </p:spPr>
+          <p:style>
+            <a:lnRef idx="2">
+              <a:schemeClr val="accent1">
+                <a:shade val="15000"/>
+              </a:schemeClr>
+            </a:lnRef>
+            <a:fillRef idx="1">
+              <a:schemeClr val="accent1"/>
+            </a:fillRef>
+            <a:effectRef idx="0">
+              <a:schemeClr val="accent1"/>
+            </a:effectRef>
+            <a:fontRef idx="minor">
+              <a:schemeClr val="lt1"/>
+            </a:fontRef>
+          </p:style>
+          <p:txBody>
+            <a:bodyPr rtlCol="0" anchor="ctr"/>
+            <a:lstStyle/>
+            <a:p>
+              <a:pPr algn="ctr"/>
+              <a:r>
+                <a:rPr lang="en-US" dirty="0">
+                  <a:solidFill>
+                    <a:schemeClr val="tx1"/>
+                  </a:solidFill>
+                </a:rPr>
+                <a:t>Knowledge Base</a:t>
+              </a:r>
+            </a:p>
+          </p:txBody>
+        </p:sp>
+        <p:sp>
+          <p:nvSpPr>
+            <p:cNvPr id="16" name="Rectangle: Rounded Corners 15">
+              <a:extLst>
+                <a:ext uri="{FF2B5EF4-FFF2-40B4-BE49-F238E27FC236}">
+                  <a16:creationId xmlns:a16="http://schemas.microsoft.com/office/drawing/2014/main" id="{D385EE08-4195-FEB1-92CE-E2F08AEC0904}"/>
+                </a:ext>
+              </a:extLst>
+            </p:cNvPr>
+            <p:cNvSpPr/>
+            <p:nvPr/>
+          </p:nvSpPr>
+          <p:spPr>
+            <a:xfrm>
+              <a:off x="8358587" y="5200779"/>
+              <a:ext cx="1344168" cy="866894"/>
+            </a:xfrm>
+            <a:prstGeom prst="roundRect">
+              <a:avLst/>
+            </a:prstGeom>
+            <a:solidFill>
+              <a:srgbClr val="E5F1F8"/>
+            </a:solidFill>
+            <a:ln>
+              <a:solidFill>
+                <a:schemeClr val="tx1"/>
+              </a:solidFill>
+            </a:ln>
+          </p:spPr>
+          <p:style>
+            <a:lnRef idx="2">
+              <a:schemeClr val="accent1">
+                <a:shade val="15000"/>
+              </a:schemeClr>
+            </a:lnRef>
+            <a:fillRef idx="1">
+              <a:schemeClr val="accent1"/>
+            </a:fillRef>
+            <a:effectRef idx="0">
+              <a:schemeClr val="accent1"/>
+            </a:effectRef>
+            <a:fontRef idx="minor">
+              <a:schemeClr val="lt1"/>
+            </a:fontRef>
+          </p:style>
+          <p:txBody>
+            <a:bodyPr rtlCol="0" anchor="ctr"/>
+            <a:lstStyle/>
+            <a:p>
+              <a:pPr algn="ctr"/>
+              <a:r>
+                <a:rPr lang="en-US" dirty="0">
+                  <a:solidFill>
+                    <a:schemeClr val="tx1"/>
+                  </a:solidFill>
+                </a:rPr>
+                <a:t>Query</a:t>
+              </a:r>
+            </a:p>
+            <a:p>
+              <a:pPr algn="ctr"/>
+              <a:r>
+                <a:rPr lang="en-US" dirty="0">
+                  <a:solidFill>
+                    <a:schemeClr val="tx1"/>
+                  </a:solidFill>
+                </a:rPr>
+                <a:t>Engine</a:t>
+              </a:r>
+            </a:p>
+          </p:txBody>
+        </p:sp>
+        <p:cxnSp>
+          <p:nvCxnSpPr>
+            <p:cNvPr id="17" name="Straight Arrow Connector 16">
+              <a:extLst>
+                <a:ext uri="{FF2B5EF4-FFF2-40B4-BE49-F238E27FC236}">
+                  <a16:creationId xmlns:a16="http://schemas.microsoft.com/office/drawing/2014/main" id="{AEDB932B-5B10-ABF7-6812-6F86DD883464}"/>
+                </a:ext>
+              </a:extLst>
+            </p:cNvPr>
+            <p:cNvCxnSpPr>
+              <a:cxnSpLocks/>
+              <a:stCxn id="16" idx="1"/>
+              <a:endCxn id="14" idx="3"/>
+            </p:cNvCxnSpPr>
+            <p:nvPr/>
+          </p:nvCxnSpPr>
+          <p:spPr>
+            <a:xfrm flipH="1">
+              <a:off x="7785354" y="5634226"/>
+              <a:ext cx="573233" cy="0"/>
+            </a:xfrm>
+            <a:prstGeom prst="straightConnector1">
+              <a:avLst/>
+            </a:prstGeom>
+            <a:ln>
+              <a:solidFill>
+                <a:schemeClr val="tx1"/>
+              </a:solidFill>
+              <a:prstDash val="solid"/>
+              <a:headEnd type="none" w="lg" len="lg"/>
+              <a:tailEnd type="triangle" w="lg" len="lg"/>
+            </a:ln>
+          </p:spPr>
+          <p:style>
+            <a:lnRef idx="2">
+              <a:schemeClr val="accent1"/>
+            </a:lnRef>
+            <a:fillRef idx="0">
+              <a:schemeClr val="accent1"/>
+            </a:fillRef>
+            <a:effectRef idx="1">
+              <a:schemeClr val="accent1"/>
+            </a:effectRef>
+            <a:fontRef idx="minor">
+              <a:schemeClr val="tx1"/>
+            </a:fontRef>
+          </p:style>
+        </p:cxnSp>
+      </p:grpSp>
+      <p:sp>
+        <p:nvSpPr>
+          <p:cNvPr id="24" name="Rectangle: Rounded Corners 23">
+            <a:extLst>
+              <a:ext uri="{FF2B5EF4-FFF2-40B4-BE49-F238E27FC236}">
+                <a16:creationId xmlns:a16="http://schemas.microsoft.com/office/drawing/2014/main" id="{10B8367E-DED3-2D25-B1AF-FDC2C8A01481}"/>
+              </a:ext>
+            </a:extLst>
+          </p:cNvPr>
+          <p:cNvSpPr/>
+          <p:nvPr/>
+        </p:nvSpPr>
+        <p:spPr>
+          <a:xfrm>
+            <a:off x="593095" y="3377768"/>
+            <a:ext cx="2313089" cy="1278052"/>
+          </a:xfrm>
+          <a:prstGeom prst="roundRect">
+            <a:avLst>
+              <a:gd name="adj" fmla="val 5234"/>
+            </a:avLst>
+          </a:prstGeom>
+          <a:solidFill>
+            <a:schemeClr val="bg1"/>
+          </a:solidFill>
+          <a:ln>
+            <a:solidFill>
+              <a:schemeClr val="tx1"/>
+            </a:solidFill>
+          </a:ln>
+        </p:spPr>
+        <p:style>
+          <a:lnRef idx="2">
+            <a:schemeClr val="accent1">
+              <a:shade val="15000"/>
+            </a:schemeClr>
+          </a:lnRef>
+          <a:fillRef idx="1">
+            <a:schemeClr val="accent1"/>
+          </a:fillRef>
+          <a:effectRef idx="0">
+            <a:schemeClr val="accent1"/>
+          </a:effectRef>
+          <a:fontRef idx="minor">
+            <a:schemeClr val="lt1"/>
+          </a:fontRef>
+        </p:style>
+        <p:txBody>
+          <a:bodyPr rtlCol="0" anchor="ctr"/>
+          <a:lstStyle/>
+          <a:p>
+            <a:pPr algn="ctr"/>
+            <a:endParaRPr lang="en-US" dirty="0">
+              <a:solidFill>
+                <a:schemeClr val="tx1"/>
+              </a:solidFill>
+            </a:endParaRPr>
+          </a:p>
+        </p:txBody>
+      </p:sp>
+      <p:sp>
+        <p:nvSpPr>
+          <p:cNvPr id="25" name="Rectangle: Rounded Corners 24">
+            <a:extLst>
+              <a:ext uri="{FF2B5EF4-FFF2-40B4-BE49-F238E27FC236}">
+                <a16:creationId xmlns:a16="http://schemas.microsoft.com/office/drawing/2014/main" id="{2A6787BC-3A0F-9584-7965-0482CD3B3AAC}"/>
+              </a:ext>
+            </a:extLst>
+          </p:cNvPr>
+          <p:cNvSpPr/>
+          <p:nvPr/>
+        </p:nvSpPr>
+        <p:spPr>
+          <a:xfrm>
+            <a:off x="755651" y="3090640"/>
+            <a:ext cx="1982047" cy="574258"/>
+          </a:xfrm>
+          <a:prstGeom prst="roundRect">
+            <a:avLst/>
+          </a:prstGeom>
+          <a:solidFill>
+            <a:srgbClr val="B2D4EB"/>
+          </a:solidFill>
+          <a:ln>
+            <a:solidFill>
+              <a:schemeClr val="tx1"/>
+            </a:solidFill>
+          </a:ln>
+        </p:spPr>
+        <p:style>
+          <a:lnRef idx="2">
+            <a:schemeClr val="accent1">
+              <a:shade val="15000"/>
+            </a:schemeClr>
+          </a:lnRef>
+          <a:fillRef idx="1">
+            <a:schemeClr val="accent1"/>
+          </a:fillRef>
+          <a:effectRef idx="0">
+            <a:schemeClr val="accent1"/>
+          </a:effectRef>
+          <a:fontRef idx="minor">
+            <a:schemeClr val="lt1"/>
+          </a:fontRef>
+        </p:style>
+        <p:txBody>
+          <a:bodyPr rtlCol="0" anchor="ctr"/>
+          <a:lstStyle/>
+          <a:p>
+            <a:pPr algn="ctr"/>
+            <a:r>
+              <a:rPr lang="en-US" dirty="0">
+                <a:solidFill>
+                  <a:schemeClr val="tx1"/>
+                </a:solidFill>
+              </a:rPr>
+              <a:t>Knowledge Sources </a:t>
+            </a:r>
+            <a:r>
+              <a:rPr lang="en-US" sz="1400" dirty="0">
+                <a:solidFill>
+                  <a:schemeClr val="tx1"/>
+                </a:solidFill>
+              </a:rPr>
+              <a:t>(Remote)</a:t>
+            </a:r>
+            <a:endParaRPr lang="en-US" i="1" dirty="0">
+              <a:solidFill>
+                <a:schemeClr val="tx1"/>
+              </a:solidFill>
+            </a:endParaRPr>
+          </a:p>
+        </p:txBody>
+      </p:sp>
+      <p:graphicFrame>
+        <p:nvGraphicFramePr>
+          <p:cNvPr id="26" name="Table 25">
+            <a:extLst>
+              <a:ext uri="{FF2B5EF4-FFF2-40B4-BE49-F238E27FC236}">
+                <a16:creationId xmlns:a16="http://schemas.microsoft.com/office/drawing/2014/main" id="{EC018D9B-FFCB-F4AC-3749-0EE10F7CD9B5}"/>
+              </a:ext>
+            </a:extLst>
+          </p:cNvPr>
+          <p:cNvGraphicFramePr>
+            <a:graphicFrameLocks noGrp="1"/>
+          </p:cNvGraphicFramePr>
+          <p:nvPr>
+            <p:extLst>
+              <p:ext uri="{D42A27DB-BD31-4B8C-83A1-F6EECF244321}">
+                <p14:modId xmlns:p14="http://schemas.microsoft.com/office/powerpoint/2010/main" val="2690640093"/>
+              </p:ext>
+            </p:extLst>
+          </p:nvPr>
+        </p:nvGraphicFramePr>
+        <p:xfrm>
+          <a:off x="736597" y="3747101"/>
+          <a:ext cx="1982047" cy="741680"/>
+        </p:xfrm>
+        <a:graphic>
+          <a:graphicData uri="http://schemas.openxmlformats.org/drawingml/2006/table">
+            <a:tbl>
+              <a:tblPr firstRow="1" bandRow="1">
+                <a:tableStyleId>{5C22544A-7EE6-4342-B048-85BDC9FD1C3A}</a:tableStyleId>
+              </a:tblPr>
+              <a:tblGrid>
+                <a:gridCol w="1982047">
+                  <a:extLst>
+                    <a:ext uri="{9D8B030D-6E8A-4147-A177-3AD203B41FA5}">
+                      <a16:colId xmlns:a16="http://schemas.microsoft.com/office/drawing/2014/main" val="3167127258"/>
+                    </a:ext>
+                  </a:extLst>
+                </a:gridCol>
+              </a:tblGrid>
+              <a:tr h="370840">
+                <a:tc>
+                  <a:txBody>
+                    <a:bodyPr/>
+                    <a:lstStyle/>
+                    <a:p>
+                      <a:pPr algn="ctr"/>
+                      <a:r>
+                        <a:rPr lang="en-US" b="0" dirty="0">
+                          <a:solidFill>
+                            <a:sysClr val="windowText" lastClr="000000"/>
+                          </a:solidFill>
+                        </a:rPr>
+                        <a:t>SharePoint on M365</a:t>
+                      </a:r>
+                    </a:p>
+                  </a:txBody>
+                  <a:tcPr anchor="ctr">
+                    <a:lnL w="12700" cmpd="sng">
+                      <a:noFill/>
+                    </a:lnL>
+                    <a:lnR w="12700" cmpd="sng">
+                      <a:noFill/>
+                    </a:lnR>
+                    <a:lnT w="12700" cmpd="sng">
+                      <a:noFill/>
+                    </a:lnT>
+                    <a:lnB w="38100" cmpd="sng">
+                      <a:noFill/>
+                    </a:lnB>
+                    <a:lnTlToBr w="12700" cmpd="sng">
+                      <a:noFill/>
+                      <a:prstDash val="solid"/>
+                    </a:lnTlToBr>
+                    <a:lnBlToTr w="12700" cmpd="sng">
+                      <a:noFill/>
+                      <a:prstDash val="solid"/>
+                    </a:lnBlToTr>
+                    <a:noFill/>
+                  </a:tcPr>
+                </a:tc>
+                <a:extLst>
+                  <a:ext uri="{0D108BD9-81ED-4DB2-BD59-A6C34878D82A}">
+                    <a16:rowId xmlns:a16="http://schemas.microsoft.com/office/drawing/2014/main" val="2068122310"/>
+                  </a:ext>
+                </a:extLst>
+              </a:tr>
+              <a:tr h="370840">
+                <a:tc>
+                  <a:txBody>
+                    <a:bodyPr/>
+                    <a:lstStyle/>
+                    <a:p>
+                      <a:pPr algn="ctr"/>
+                      <a:r>
+                        <a:rPr lang="en-US" b="0" dirty="0">
+                          <a:solidFill>
+                            <a:sysClr val="windowText" lastClr="000000"/>
+                          </a:solidFill>
+                        </a:rPr>
+                        <a:t>Web with Bing</a:t>
+                      </a:r>
+                    </a:p>
+                  </a:txBody>
+                  <a:tcPr anchor="ctr">
+                    <a:lnL w="12700" cmpd="sng">
+                      <a:noFill/>
+                    </a:lnL>
+                    <a:lnR w="12700" cmpd="sng">
+                      <a:noFill/>
+                    </a:lnR>
+                    <a:lnT w="12700" cmpd="sng">
+                      <a:noFill/>
+                    </a:lnT>
+                    <a:lnB w="38100" cmpd="sng">
+                      <a:noFill/>
+                    </a:lnB>
+                    <a:lnTlToBr w="12700" cmpd="sng">
+                      <a:noFill/>
+                      <a:prstDash val="solid"/>
+                    </a:lnTlToBr>
+                    <a:lnBlToTr w="12700" cmpd="sng">
+                      <a:noFill/>
+                      <a:prstDash val="solid"/>
+                    </a:lnBlToTr>
+                    <a:noFill/>
+                  </a:tcPr>
+                </a:tc>
+                <a:extLst>
+                  <a:ext uri="{0D108BD9-81ED-4DB2-BD59-A6C34878D82A}">
+                    <a16:rowId xmlns:a16="http://schemas.microsoft.com/office/drawing/2014/main" val="4266800507"/>
+                  </a:ext>
+                </a:extLst>
+              </a:tr>
+            </a:tbl>
+          </a:graphicData>
+        </a:graphic>
+      </p:graphicFrame>
+      <p:sp>
+        <p:nvSpPr>
+          <p:cNvPr id="27" name="TextBox 26">
+            <a:extLst>
+              <a:ext uri="{FF2B5EF4-FFF2-40B4-BE49-F238E27FC236}">
+                <a16:creationId xmlns:a16="http://schemas.microsoft.com/office/drawing/2014/main" id="{8C26FC72-A6B7-0592-62C4-B9205B5E130B}"/>
+              </a:ext>
+            </a:extLst>
+          </p:cNvPr>
+          <p:cNvSpPr txBox="1"/>
+          <p:nvPr/>
+        </p:nvSpPr>
+        <p:spPr>
+          <a:xfrm>
+            <a:off x="4784425" y="1783386"/>
+            <a:ext cx="1452192" cy="369332"/>
+          </a:xfrm>
+          <a:prstGeom prst="rect">
+            <a:avLst/>
+          </a:prstGeom>
+          <a:noFill/>
+        </p:spPr>
+        <p:txBody>
+          <a:bodyPr wrap="none" rtlCol="0">
+            <a:spAutoFit/>
+          </a:bodyPr>
+          <a:lstStyle/>
+          <a:p>
+            <a:r>
+              <a:rPr lang="en-US" dirty="0"/>
+              <a:t>Azure AI Search</a:t>
+            </a:r>
+          </a:p>
+        </p:txBody>
+      </p:sp>
+      <p:cxnSp>
+        <p:nvCxnSpPr>
+          <p:cNvPr id="30" name="Connector: Elbow 29">
+            <a:extLst>
+              <a:ext uri="{FF2B5EF4-FFF2-40B4-BE49-F238E27FC236}">
+                <a16:creationId xmlns:a16="http://schemas.microsoft.com/office/drawing/2014/main" id="{9096CCB3-27F0-B65F-269E-BBF8BAC30A6D}"/>
+              </a:ext>
+            </a:extLst>
+          </p:cNvPr>
+          <p:cNvCxnSpPr>
+            <a:cxnSpLocks/>
+            <a:stCxn id="24" idx="3"/>
+            <a:endCxn id="14" idx="2"/>
+          </p:cNvCxnSpPr>
+          <p:nvPr/>
+        </p:nvCxnSpPr>
+        <p:spPr>
+          <a:xfrm flipV="1">
+            <a:off x="2906184" y="3333179"/>
+            <a:ext cx="4116237" cy="683615"/>
+          </a:xfrm>
+          <a:prstGeom prst="bentConnector2">
+            <a:avLst/>
+          </a:prstGeom>
+          <a:ln>
+            <a:solidFill>
+              <a:schemeClr val="tx1"/>
+            </a:solidFill>
+            <a:prstDash val="sysDash"/>
+            <a:headEnd type="triangle" w="lg" len="lg"/>
+            <a:tailEnd type="triangle" w="lg" len="lg"/>
+          </a:ln>
+        </p:spPr>
+        <p:style>
+          <a:lnRef idx="2">
+            <a:schemeClr val="accent1"/>
+          </a:lnRef>
+          <a:fillRef idx="0">
+            <a:schemeClr val="accent1"/>
+          </a:fillRef>
+          <a:effectRef idx="1">
+            <a:schemeClr val="accent1"/>
+          </a:effectRef>
+          <a:fontRef idx="minor">
+            <a:schemeClr val="tx1"/>
+          </a:fontRef>
+        </p:style>
+      </p:cxnSp>
+      <p:cxnSp>
+        <p:nvCxnSpPr>
+          <p:cNvPr id="33" name="Connector: Elbow 32">
+            <a:extLst>
+              <a:ext uri="{FF2B5EF4-FFF2-40B4-BE49-F238E27FC236}">
+                <a16:creationId xmlns:a16="http://schemas.microsoft.com/office/drawing/2014/main" id="{A0C61436-186C-FADD-09E4-9F73A8FCA2DB}"/>
+              </a:ext>
+            </a:extLst>
+          </p:cNvPr>
+          <p:cNvCxnSpPr>
+            <a:cxnSpLocks/>
+            <a:stCxn id="8" idx="1"/>
+            <a:endCxn id="2" idx="3"/>
+          </p:cNvCxnSpPr>
+          <p:nvPr/>
+        </p:nvCxnSpPr>
+        <p:spPr>
+          <a:xfrm rot="10800000">
+            <a:off x="2903221" y="1888096"/>
+            <a:ext cx="1258483" cy="1008619"/>
+          </a:xfrm>
+          <a:prstGeom prst="bentConnector3">
+            <a:avLst>
+              <a:gd name="adj1" fmla="val 50000"/>
+            </a:avLst>
+          </a:prstGeom>
+          <a:ln>
+            <a:solidFill>
+              <a:schemeClr val="tx1"/>
+            </a:solidFill>
+            <a:prstDash val="sysDash"/>
+            <a:headEnd type="triangle" w="lg" len="lg"/>
+            <a:tailEnd type="triangle" w="lg" len="lg"/>
+          </a:ln>
+        </p:spPr>
+        <p:style>
+          <a:lnRef idx="2">
+            <a:schemeClr val="accent1"/>
+          </a:lnRef>
+          <a:fillRef idx="0">
+            <a:schemeClr val="accent1"/>
+          </a:fillRef>
+          <a:effectRef idx="1">
+            <a:schemeClr val="accent1"/>
+          </a:effectRef>
+          <a:fontRef idx="minor">
+            <a:schemeClr val="tx1"/>
+          </a:fontRef>
+        </p:style>
+      </p:cxnSp>
+      <p:sp>
+        <p:nvSpPr>
+          <p:cNvPr id="36" name="Rectangle: Rounded Corners 35">
+            <a:extLst>
+              <a:ext uri="{FF2B5EF4-FFF2-40B4-BE49-F238E27FC236}">
+                <a16:creationId xmlns:a16="http://schemas.microsoft.com/office/drawing/2014/main" id="{D841EC0D-EBD6-5CE8-6DC5-5D0B6B0C0365}"/>
+              </a:ext>
+            </a:extLst>
+          </p:cNvPr>
+          <p:cNvSpPr/>
+          <p:nvPr/>
+        </p:nvSpPr>
+        <p:spPr>
+          <a:xfrm>
+            <a:off x="3011548" y="2119895"/>
+            <a:ext cx="1041827" cy="574258"/>
+          </a:xfrm>
+          <a:prstGeom prst="roundRect">
+            <a:avLst/>
+          </a:prstGeom>
+          <a:solidFill>
+            <a:srgbClr val="B2D4EB"/>
+          </a:solidFill>
+          <a:ln>
+            <a:solidFill>
+              <a:schemeClr val="tx1"/>
+            </a:solidFill>
+          </a:ln>
+        </p:spPr>
+        <p:style>
+          <a:lnRef idx="2">
+            <a:schemeClr val="accent1">
+              <a:shade val="15000"/>
+            </a:schemeClr>
+          </a:lnRef>
+          <a:fillRef idx="1">
+            <a:schemeClr val="accent1"/>
+          </a:fillRef>
+          <a:effectRef idx="0">
+            <a:schemeClr val="accent1"/>
+          </a:effectRef>
+          <a:fontRef idx="minor">
+            <a:schemeClr val="lt1"/>
+          </a:fontRef>
+        </p:style>
+        <p:txBody>
+          <a:bodyPr rtlCol="0" anchor="ctr"/>
+          <a:lstStyle/>
+          <a:p>
+            <a:pPr algn="ctr"/>
+            <a:r>
+              <a:rPr lang="en-US" sz="1400" i="1" dirty="0">
+                <a:solidFill>
+                  <a:schemeClr val="tx1"/>
+                </a:solidFill>
+              </a:rPr>
+              <a:t>Indexing + Enrichment</a:t>
+            </a:r>
+          </a:p>
+        </p:txBody>
+      </p:sp>
+      <p:sp>
+        <p:nvSpPr>
+          <p:cNvPr id="37" name="Rectangle: Rounded Corners 36">
+            <a:extLst>
+              <a:ext uri="{FF2B5EF4-FFF2-40B4-BE49-F238E27FC236}">
+                <a16:creationId xmlns:a16="http://schemas.microsoft.com/office/drawing/2014/main" id="{E9F95B81-DAC1-C3AD-DBDE-9B0467E804DF}"/>
+              </a:ext>
+            </a:extLst>
+          </p:cNvPr>
+          <p:cNvSpPr/>
+          <p:nvPr/>
+        </p:nvSpPr>
+        <p:spPr>
+          <a:xfrm>
+            <a:off x="4644982" y="3729665"/>
+            <a:ext cx="1222418" cy="574258"/>
+          </a:xfrm>
+          <a:prstGeom prst="roundRect">
+            <a:avLst/>
+          </a:prstGeom>
+          <a:solidFill>
+            <a:srgbClr val="B2D4EB"/>
+          </a:solidFill>
+          <a:ln>
+            <a:solidFill>
+              <a:schemeClr val="tx1"/>
+            </a:solidFill>
+          </a:ln>
+        </p:spPr>
+        <p:style>
+          <a:lnRef idx="2">
+            <a:schemeClr val="accent1">
+              <a:shade val="15000"/>
+            </a:schemeClr>
+          </a:lnRef>
+          <a:fillRef idx="1">
+            <a:schemeClr val="accent1"/>
+          </a:fillRef>
+          <a:effectRef idx="0">
+            <a:schemeClr val="accent1"/>
+          </a:effectRef>
+          <a:fontRef idx="minor">
+            <a:schemeClr val="lt1"/>
+          </a:fontRef>
+        </p:style>
+        <p:txBody>
+          <a:bodyPr rtlCol="0" anchor="ctr"/>
+          <a:lstStyle/>
+          <a:p>
+            <a:pPr algn="ctr"/>
+            <a:r>
+              <a:rPr lang="en-US" sz="1400" i="1" dirty="0">
+                <a:solidFill>
+                  <a:schemeClr val="tx1"/>
+                </a:solidFill>
+              </a:rPr>
+              <a:t>Direct Source Retrieval</a:t>
+            </a:r>
+          </a:p>
+        </p:txBody>
+      </p:sp>
+      <p:grpSp>
+        <p:nvGrpSpPr>
+          <p:cNvPr id="43" name="Group 42">
+            <a:extLst>
+              <a:ext uri="{FF2B5EF4-FFF2-40B4-BE49-F238E27FC236}">
+                <a16:creationId xmlns:a16="http://schemas.microsoft.com/office/drawing/2014/main" id="{48DB8E28-0138-EE36-0136-3CAE044CDB91}"/>
+              </a:ext>
+            </a:extLst>
+          </p:cNvPr>
+          <p:cNvGrpSpPr/>
+          <p:nvPr/>
+        </p:nvGrpSpPr>
+        <p:grpSpPr>
+          <a:xfrm>
+            <a:off x="10466680" y="2668113"/>
+            <a:ext cx="671979" cy="765562"/>
+            <a:chOff x="10110076" y="2694410"/>
+            <a:chExt cx="671979" cy="765562"/>
+          </a:xfrm>
+        </p:grpSpPr>
+        <p:pic>
+          <p:nvPicPr>
+            <p:cNvPr id="41" name="Graphic 40">
+              <a:extLst>
+                <a:ext uri="{FF2B5EF4-FFF2-40B4-BE49-F238E27FC236}">
+                  <a16:creationId xmlns:a16="http://schemas.microsoft.com/office/drawing/2014/main" id="{BBE4E029-6BF4-5A7D-4747-1B580A80CDA7}"/>
+                </a:ext>
+              </a:extLst>
+            </p:cNvPr>
+            <p:cNvPicPr>
+              <a:picLocks noChangeAspect="1"/>
+            </p:cNvPicPr>
+            <p:nvPr/>
+          </p:nvPicPr>
+          <p:blipFill>
+            <a:blip r:embed="rId5">
+              <a:extLst>
+                <a:ext uri="{96DAC541-7B7A-43D3-8B79-37D633B846F1}">
+                  <asvg:svgBlip xmlns:asvg="http://schemas.microsoft.com/office/drawing/2016/SVG/main" r:embed="rId6"/>
+                </a:ext>
+              </a:extLst>
+            </a:blip>
+            <a:stretch>
+              <a:fillRect/>
+            </a:stretch>
+          </p:blipFill>
+          <p:spPr>
+            <a:xfrm>
+              <a:off x="10217465" y="2694410"/>
+              <a:ext cx="457200" cy="457200"/>
+            </a:xfrm>
+            <a:prstGeom prst="rect">
+              <a:avLst/>
+            </a:prstGeom>
+          </p:spPr>
+        </p:pic>
+        <p:sp>
+          <p:nvSpPr>
+            <p:cNvPr id="42" name="TextBox 41">
+              <a:extLst>
+                <a:ext uri="{FF2B5EF4-FFF2-40B4-BE49-F238E27FC236}">
+                  <a16:creationId xmlns:a16="http://schemas.microsoft.com/office/drawing/2014/main" id="{025FE0D2-202A-0F8B-C116-0C0853E85210}"/>
+                </a:ext>
+              </a:extLst>
+            </p:cNvPr>
+            <p:cNvSpPr txBox="1"/>
+            <p:nvPr/>
+          </p:nvSpPr>
+          <p:spPr>
+            <a:xfrm>
+              <a:off x="10110076" y="3090640"/>
+              <a:ext cx="671979" cy="369332"/>
+            </a:xfrm>
+            <a:prstGeom prst="rect">
+              <a:avLst/>
+            </a:prstGeom>
+            <a:noFill/>
+          </p:spPr>
+          <p:txBody>
+            <a:bodyPr wrap="none" rtlCol="0">
+              <a:spAutoFit/>
+            </a:bodyPr>
+            <a:lstStyle/>
+            <a:p>
+              <a:pPr algn="ctr"/>
+              <a:r>
+                <a:rPr lang="en-US" dirty="0"/>
+                <a:t>Agent</a:t>
+              </a:r>
+            </a:p>
+          </p:txBody>
+        </p:sp>
+      </p:grpSp>
+      <p:cxnSp>
+        <p:nvCxnSpPr>
+          <p:cNvPr id="44" name="Straight Arrow Connector 43">
+            <a:extLst>
+              <a:ext uri="{FF2B5EF4-FFF2-40B4-BE49-F238E27FC236}">
+                <a16:creationId xmlns:a16="http://schemas.microsoft.com/office/drawing/2014/main" id="{5EC7870B-945A-ABCC-C1D6-C5ACE8058529}"/>
+              </a:ext>
+            </a:extLst>
+          </p:cNvPr>
+          <p:cNvCxnSpPr>
+            <a:cxnSpLocks/>
+            <a:stCxn id="41" idx="1"/>
+            <a:endCxn id="8" idx="3"/>
+          </p:cNvCxnSpPr>
+          <p:nvPr/>
+        </p:nvCxnSpPr>
+        <p:spPr>
+          <a:xfrm flipH="1">
+            <a:off x="9883140" y="2896713"/>
+            <a:ext cx="690929" cy="1"/>
+          </a:xfrm>
+          <a:prstGeom prst="straightConnector1">
+            <a:avLst/>
+          </a:prstGeom>
+          <a:ln>
+            <a:solidFill>
+              <a:schemeClr val="tx1"/>
+            </a:solidFill>
+            <a:prstDash val="solid"/>
+            <a:headEnd type="triangle" w="lg" len="lg"/>
+            <a:tailEnd type="triangle" w="lg" len="lg"/>
+          </a:ln>
+        </p:spPr>
+        <p:style>
+          <a:lnRef idx="2">
+            <a:schemeClr val="accent1"/>
+          </a:lnRef>
+          <a:fillRef idx="0">
+            <a:schemeClr val="accent1"/>
+          </a:fillRef>
+          <a:effectRef idx="1">
+            <a:schemeClr val="accent1"/>
+          </a:effectRef>
+          <a:fontRef idx="minor">
+            <a:schemeClr val="tx1"/>
+          </a:fontRef>
+        </p:style>
+      </p:cxnSp>
     </p:spTree>
     <p:extLst>
       <p:ext uri="{BB962C8B-B14F-4D97-AF65-F5344CB8AC3E}">
@@ -3837,7 +6180,7 @@
 </p:sld>
 </file>
 
-<file path=ppt/slides/slide11.xml><?xml version="1.0" encoding="utf-8"?>
+<file path=ppt/slides/slide12.xml><?xml version="1.0" encoding="utf-8"?>
 <p:sld xmlns:a="http://schemas.openxmlformats.org/drawingml/2006/main" xmlns:r="http://schemas.openxmlformats.org/officeDocument/2006/relationships" xmlns:p="http://schemas.openxmlformats.org/presentationml/2006/main">
   <p:cSld>
     <p:spTree>
@@ -4765,1390 +7108,6 @@
     <p:extLst>
       <p:ext uri="{BB962C8B-B14F-4D97-AF65-F5344CB8AC3E}">
         <p14:creationId xmlns:p14="http://schemas.microsoft.com/office/powerpoint/2010/main" val="3923047050"/>
-      </p:ext>
-    </p:extLst>
-  </p:cSld>
-  <p:clrMapOvr>
-    <a:masterClrMapping/>
-  </p:clrMapOvr>
-</p:sld>
-</file>
-
-<file path=ppt/slides/slide12.xml><?xml version="1.0" encoding="utf-8"?>
-<p:sld xmlns:a="http://schemas.openxmlformats.org/drawingml/2006/main" xmlns:r="http://schemas.openxmlformats.org/officeDocument/2006/relationships" xmlns:p="http://schemas.openxmlformats.org/presentationml/2006/main">
-  <p:cSld>
-    <p:spTree>
-      <p:nvGrpSpPr>
-        <p:cNvPr id="1" name=""/>
-        <p:cNvGrpSpPr/>
-        <p:nvPr/>
-      </p:nvGrpSpPr>
-      <p:grpSpPr>
-        <a:xfrm>
-          <a:off x="0" y="0"/>
-          <a:ext cx="0" cy="0"/>
-          <a:chOff x="0" y="0"/>
-          <a:chExt cx="0" cy="0"/>
-        </a:xfrm>
-      </p:grpSpPr>
-      <p:sp>
-        <p:nvSpPr>
-          <p:cNvPr id="2" name="Rectangle: Rounded Corners 1">
-            <a:extLst>
-              <a:ext uri="{FF2B5EF4-FFF2-40B4-BE49-F238E27FC236}">
-                <a16:creationId xmlns:a16="http://schemas.microsoft.com/office/drawing/2014/main" id="{F09FDC59-6067-4502-1360-F42554AD87D3}"/>
-              </a:ext>
-            </a:extLst>
-          </p:cNvPr>
-          <p:cNvSpPr/>
-          <p:nvPr/>
-        </p:nvSpPr>
-        <p:spPr>
-          <a:xfrm>
-            <a:off x="4046220" y="3398520"/>
-            <a:ext cx="4282440" cy="457200"/>
-          </a:xfrm>
-          <a:prstGeom prst="roundRect">
-            <a:avLst/>
-          </a:prstGeom>
-          <a:solidFill>
-            <a:srgbClr val="B2D4EB"/>
-          </a:solidFill>
-          <a:ln>
-            <a:solidFill>
-              <a:schemeClr val="tx1"/>
-            </a:solidFill>
-          </a:ln>
-        </p:spPr>
-        <p:style>
-          <a:lnRef idx="2">
-            <a:schemeClr val="accent1">
-              <a:shade val="15000"/>
-            </a:schemeClr>
-          </a:lnRef>
-          <a:fillRef idx="1">
-            <a:schemeClr val="accent1"/>
-          </a:fillRef>
-          <a:effectRef idx="0">
-            <a:schemeClr val="accent1"/>
-          </a:effectRef>
-          <a:fontRef idx="minor">
-            <a:schemeClr val="lt1"/>
-          </a:fontRef>
-        </p:style>
-        <p:txBody>
-          <a:bodyPr rtlCol="0" anchor="ctr"/>
-          <a:lstStyle/>
-          <a:p>
-            <a:pPr algn="ctr"/>
-            <a:r>
-              <a:rPr lang="en-US" dirty="0">
-                <a:solidFill>
-                  <a:schemeClr val="tx1"/>
-                </a:solidFill>
-              </a:rPr>
-              <a:t>Search Public Information on the Web</a:t>
-            </a:r>
-            <a:endParaRPr lang="en-US" i="1" dirty="0">
-              <a:solidFill>
-                <a:schemeClr val="tx1"/>
-              </a:solidFill>
-            </a:endParaRPr>
-          </a:p>
-        </p:txBody>
-      </p:sp>
-      <p:sp>
-        <p:nvSpPr>
-          <p:cNvPr id="3" name="Rectangle: Rounded Corners 2">
-            <a:extLst>
-              <a:ext uri="{FF2B5EF4-FFF2-40B4-BE49-F238E27FC236}">
-                <a16:creationId xmlns:a16="http://schemas.microsoft.com/office/drawing/2014/main" id="{9800FF13-E208-2C00-EB7C-BCBA48F554BD}"/>
-              </a:ext>
-            </a:extLst>
-          </p:cNvPr>
-          <p:cNvSpPr/>
-          <p:nvPr/>
-        </p:nvSpPr>
-        <p:spPr>
-          <a:xfrm>
-            <a:off x="4046220" y="2625554"/>
-            <a:ext cx="4282440" cy="457200"/>
-          </a:xfrm>
-          <a:prstGeom prst="roundRect">
-            <a:avLst/>
-          </a:prstGeom>
-          <a:solidFill>
-            <a:srgbClr val="B2D4EB"/>
-          </a:solidFill>
-          <a:ln>
-            <a:solidFill>
-              <a:schemeClr val="tx1"/>
-            </a:solidFill>
-          </a:ln>
-        </p:spPr>
-        <p:style>
-          <a:lnRef idx="2">
-            <a:schemeClr val="accent1">
-              <a:shade val="15000"/>
-            </a:schemeClr>
-          </a:lnRef>
-          <a:fillRef idx="1">
-            <a:schemeClr val="accent1"/>
-          </a:fillRef>
-          <a:effectRef idx="0">
-            <a:schemeClr val="accent1"/>
-          </a:effectRef>
-          <a:fontRef idx="minor">
-            <a:schemeClr val="lt1"/>
-          </a:fontRef>
-        </p:style>
-        <p:txBody>
-          <a:bodyPr rtlCol="0" anchor="ctr"/>
-          <a:lstStyle/>
-          <a:p>
-            <a:pPr algn="ctr"/>
-            <a:r>
-              <a:rPr lang="en-US" dirty="0">
-                <a:solidFill>
-                  <a:schemeClr val="tx1"/>
-                </a:solidFill>
-              </a:rPr>
-              <a:t>Retrieve Stock Quotes from an API</a:t>
-            </a:r>
-            <a:endParaRPr lang="en-US" i="1" dirty="0">
-              <a:solidFill>
-                <a:schemeClr val="tx1"/>
-              </a:solidFill>
-            </a:endParaRPr>
-          </a:p>
-        </p:txBody>
-      </p:sp>
-      <p:sp>
-        <p:nvSpPr>
-          <p:cNvPr id="4" name="Rectangle: Rounded Corners 3">
-            <a:extLst>
-              <a:ext uri="{FF2B5EF4-FFF2-40B4-BE49-F238E27FC236}">
-                <a16:creationId xmlns:a16="http://schemas.microsoft.com/office/drawing/2014/main" id="{CD952C55-0F41-C8E8-4833-F5F86239B3AD}"/>
-              </a:ext>
-            </a:extLst>
-          </p:cNvPr>
-          <p:cNvSpPr/>
-          <p:nvPr/>
-        </p:nvSpPr>
-        <p:spPr>
-          <a:xfrm>
-            <a:off x="4046220" y="1855003"/>
-            <a:ext cx="4282440" cy="457200"/>
-          </a:xfrm>
-          <a:prstGeom prst="roundRect">
-            <a:avLst/>
-          </a:prstGeom>
-          <a:solidFill>
-            <a:srgbClr val="B2D4EB"/>
-          </a:solidFill>
-          <a:ln>
-            <a:solidFill>
-              <a:schemeClr val="tx1"/>
-            </a:solidFill>
-          </a:ln>
-        </p:spPr>
-        <p:style>
-          <a:lnRef idx="2">
-            <a:schemeClr val="accent1">
-              <a:shade val="15000"/>
-            </a:schemeClr>
-          </a:lnRef>
-          <a:fillRef idx="1">
-            <a:schemeClr val="accent1"/>
-          </a:fillRef>
-          <a:effectRef idx="0">
-            <a:schemeClr val="accent1"/>
-          </a:effectRef>
-          <a:fontRef idx="minor">
-            <a:schemeClr val="lt1"/>
-          </a:fontRef>
-        </p:style>
-        <p:txBody>
-          <a:bodyPr rtlCol="0" anchor="ctr"/>
-          <a:lstStyle/>
-          <a:p>
-            <a:pPr algn="ctr"/>
-            <a:r>
-              <a:rPr lang="en-US" dirty="0">
-                <a:solidFill>
-                  <a:schemeClr val="tx1"/>
-                </a:solidFill>
-              </a:rPr>
-              <a:t>Reference Internal Report Files</a:t>
-            </a:r>
-            <a:endParaRPr lang="en-US" i="1" dirty="0">
-              <a:solidFill>
-                <a:schemeClr val="tx1"/>
-              </a:solidFill>
-            </a:endParaRPr>
-          </a:p>
-        </p:txBody>
-      </p:sp>
-      <p:sp>
-        <p:nvSpPr>
-          <p:cNvPr id="5" name="Rectangle: Rounded Corners 4">
-            <a:extLst>
-              <a:ext uri="{FF2B5EF4-FFF2-40B4-BE49-F238E27FC236}">
-                <a16:creationId xmlns:a16="http://schemas.microsoft.com/office/drawing/2014/main" id="{600226F7-C833-1B1C-B967-7291F64244CC}"/>
-              </a:ext>
-            </a:extLst>
-          </p:cNvPr>
-          <p:cNvSpPr/>
-          <p:nvPr/>
-        </p:nvSpPr>
-        <p:spPr>
-          <a:xfrm>
-            <a:off x="1507938" y="2374095"/>
-            <a:ext cx="1913442" cy="960119"/>
-          </a:xfrm>
-          <a:prstGeom prst="roundRect">
-            <a:avLst/>
-          </a:prstGeom>
-          <a:solidFill>
-            <a:srgbClr val="E5F1F8"/>
-          </a:solidFill>
-          <a:ln>
-            <a:solidFill>
-              <a:schemeClr val="tx1"/>
-            </a:solidFill>
-          </a:ln>
-        </p:spPr>
-        <p:style>
-          <a:lnRef idx="2">
-            <a:schemeClr val="accent1">
-              <a:shade val="15000"/>
-            </a:schemeClr>
-          </a:lnRef>
-          <a:fillRef idx="1">
-            <a:schemeClr val="accent1"/>
-          </a:fillRef>
-          <a:effectRef idx="0">
-            <a:schemeClr val="accent1"/>
-          </a:effectRef>
-          <a:fontRef idx="minor">
-            <a:schemeClr val="lt1"/>
-          </a:fontRef>
-        </p:style>
-        <p:txBody>
-          <a:bodyPr rtlCol="0" anchor="ctr"/>
-          <a:lstStyle/>
-          <a:p>
-            <a:pPr algn="ctr"/>
-            <a:r>
-              <a:rPr lang="en-US" dirty="0">
-                <a:solidFill>
-                  <a:schemeClr val="tx1"/>
-                </a:solidFill>
-              </a:rPr>
-              <a:t>Query</a:t>
-            </a:r>
-          </a:p>
-          <a:p>
-            <a:pPr algn="ctr"/>
-            <a:r>
-              <a:rPr lang="en-US" dirty="0">
-                <a:solidFill>
-                  <a:schemeClr val="tx1"/>
-                </a:solidFill>
-              </a:rPr>
-              <a:t>Planning</a:t>
-            </a:r>
-          </a:p>
-        </p:txBody>
-      </p:sp>
-      <p:sp>
-        <p:nvSpPr>
-          <p:cNvPr id="6" name="Rectangle: Rounded Corners 5">
-            <a:extLst>
-              <a:ext uri="{FF2B5EF4-FFF2-40B4-BE49-F238E27FC236}">
-                <a16:creationId xmlns:a16="http://schemas.microsoft.com/office/drawing/2014/main" id="{C93C6EBF-0FE7-EC6E-5B5C-7AA41F6606DD}"/>
-              </a:ext>
-            </a:extLst>
-          </p:cNvPr>
-          <p:cNvSpPr/>
-          <p:nvPr/>
-        </p:nvSpPr>
-        <p:spPr>
-          <a:xfrm>
-            <a:off x="9837420" y="2374095"/>
-            <a:ext cx="1913442" cy="960119"/>
-          </a:xfrm>
-          <a:prstGeom prst="roundRect">
-            <a:avLst/>
-          </a:prstGeom>
-          <a:solidFill>
-            <a:srgbClr val="E5F1F8"/>
-          </a:solidFill>
-          <a:ln>
-            <a:solidFill>
-              <a:schemeClr val="tx1"/>
-            </a:solidFill>
-          </a:ln>
-        </p:spPr>
-        <p:style>
-          <a:lnRef idx="2">
-            <a:schemeClr val="accent1">
-              <a:shade val="15000"/>
-            </a:schemeClr>
-          </a:lnRef>
-          <a:fillRef idx="1">
-            <a:schemeClr val="accent1"/>
-          </a:fillRef>
-          <a:effectRef idx="0">
-            <a:schemeClr val="accent1"/>
-          </a:effectRef>
-          <a:fontRef idx="minor">
-            <a:schemeClr val="lt1"/>
-          </a:fontRef>
-        </p:style>
-        <p:txBody>
-          <a:bodyPr rtlCol="0" anchor="ctr"/>
-          <a:lstStyle/>
-          <a:p>
-            <a:pPr algn="ctr"/>
-            <a:r>
-              <a:rPr lang="en-US" dirty="0">
-                <a:solidFill>
-                  <a:schemeClr val="tx1"/>
-                </a:solidFill>
-              </a:rPr>
-              <a:t>Language</a:t>
-            </a:r>
-          </a:p>
-          <a:p>
-            <a:pPr algn="ctr"/>
-            <a:r>
-              <a:rPr lang="en-US" dirty="0">
-                <a:solidFill>
-                  <a:schemeClr val="tx1"/>
-                </a:solidFill>
-              </a:rPr>
-              <a:t>Model</a:t>
-            </a:r>
-          </a:p>
-        </p:txBody>
-      </p:sp>
-      <p:cxnSp>
-        <p:nvCxnSpPr>
-          <p:cNvPr id="7" name="Straight Arrow Connector 6">
-            <a:extLst>
-              <a:ext uri="{FF2B5EF4-FFF2-40B4-BE49-F238E27FC236}">
-                <a16:creationId xmlns:a16="http://schemas.microsoft.com/office/drawing/2014/main" id="{70FF9049-A038-5CD7-B5B6-A7A955E2687C}"/>
-              </a:ext>
-            </a:extLst>
-          </p:cNvPr>
-          <p:cNvCxnSpPr>
-            <a:cxnSpLocks/>
-            <a:stCxn id="5" idx="3"/>
-            <a:endCxn id="3" idx="1"/>
-          </p:cNvCxnSpPr>
-          <p:nvPr/>
-        </p:nvCxnSpPr>
-        <p:spPr>
-          <a:xfrm flipV="1">
-            <a:off x="3421380" y="2854154"/>
-            <a:ext cx="624840" cy="1"/>
-          </a:xfrm>
-          <a:prstGeom prst="straightConnector1">
-            <a:avLst/>
-          </a:prstGeom>
-          <a:ln>
-            <a:solidFill>
-              <a:schemeClr val="tx1"/>
-            </a:solidFill>
-            <a:prstDash val="solid"/>
-            <a:tailEnd type="triangle" w="lg" len="lg"/>
-          </a:ln>
-        </p:spPr>
-        <p:style>
-          <a:lnRef idx="2">
-            <a:schemeClr val="accent1"/>
-          </a:lnRef>
-          <a:fillRef idx="0">
-            <a:schemeClr val="accent1"/>
-          </a:fillRef>
-          <a:effectRef idx="1">
-            <a:schemeClr val="accent1"/>
-          </a:effectRef>
-          <a:fontRef idx="minor">
-            <a:schemeClr val="tx1"/>
-          </a:fontRef>
-        </p:style>
-      </p:cxnSp>
-      <p:cxnSp>
-        <p:nvCxnSpPr>
-          <p:cNvPr id="10" name="Straight Arrow Connector 9">
-            <a:extLst>
-              <a:ext uri="{FF2B5EF4-FFF2-40B4-BE49-F238E27FC236}">
-                <a16:creationId xmlns:a16="http://schemas.microsoft.com/office/drawing/2014/main" id="{2C10FC99-8029-AE13-0A3B-1F87064360AB}"/>
-              </a:ext>
-            </a:extLst>
-          </p:cNvPr>
-          <p:cNvCxnSpPr>
-            <a:cxnSpLocks/>
-            <a:stCxn id="44" idx="3"/>
-            <a:endCxn id="6" idx="1"/>
-          </p:cNvCxnSpPr>
-          <p:nvPr/>
-        </p:nvCxnSpPr>
-        <p:spPr>
-          <a:xfrm>
-            <a:off x="9189720" y="2854155"/>
-            <a:ext cx="647700" cy="0"/>
-          </a:xfrm>
-          <a:prstGeom prst="straightConnector1">
-            <a:avLst/>
-          </a:prstGeom>
-          <a:ln>
-            <a:solidFill>
-              <a:schemeClr val="tx1"/>
-            </a:solidFill>
-            <a:prstDash val="solid"/>
-            <a:tailEnd type="triangle" w="lg" len="lg"/>
-          </a:ln>
-        </p:spPr>
-        <p:style>
-          <a:lnRef idx="2">
-            <a:schemeClr val="accent1"/>
-          </a:lnRef>
-          <a:fillRef idx="0">
-            <a:schemeClr val="accent1"/>
-          </a:fillRef>
-          <a:effectRef idx="1">
-            <a:schemeClr val="accent1"/>
-          </a:effectRef>
-          <a:fontRef idx="minor">
-            <a:schemeClr val="tx1"/>
-          </a:fontRef>
-        </p:style>
-      </p:cxnSp>
-      <p:sp>
-        <p:nvSpPr>
-          <p:cNvPr id="15" name="Rectangle: Rounded Corners 14">
-            <a:extLst>
-              <a:ext uri="{FF2B5EF4-FFF2-40B4-BE49-F238E27FC236}">
-                <a16:creationId xmlns:a16="http://schemas.microsoft.com/office/drawing/2014/main" id="{C23DA4FB-7AE1-4EE4-8DD5-321F7F7C7F33}"/>
-              </a:ext>
-            </a:extLst>
-          </p:cNvPr>
-          <p:cNvSpPr/>
-          <p:nvPr/>
-        </p:nvSpPr>
-        <p:spPr>
-          <a:xfrm>
-            <a:off x="189267" y="2619607"/>
-            <a:ext cx="915222" cy="469096"/>
-          </a:xfrm>
-          <a:prstGeom prst="roundRect">
-            <a:avLst/>
-          </a:prstGeom>
-          <a:solidFill>
-            <a:srgbClr val="E5F1F8"/>
-          </a:solidFill>
-          <a:ln>
-            <a:solidFill>
-              <a:schemeClr val="tx1"/>
-            </a:solidFill>
-          </a:ln>
-        </p:spPr>
-        <p:style>
-          <a:lnRef idx="2">
-            <a:schemeClr val="accent1">
-              <a:shade val="15000"/>
-            </a:schemeClr>
-          </a:lnRef>
-          <a:fillRef idx="1">
-            <a:schemeClr val="accent1"/>
-          </a:fillRef>
-          <a:effectRef idx="0">
-            <a:schemeClr val="accent1"/>
-          </a:effectRef>
-          <a:fontRef idx="minor">
-            <a:schemeClr val="lt1"/>
-          </a:fontRef>
-        </p:style>
-        <p:txBody>
-          <a:bodyPr rtlCol="0" anchor="ctr"/>
-          <a:lstStyle/>
-          <a:p>
-            <a:pPr algn="ctr"/>
-            <a:r>
-              <a:rPr lang="en-US" dirty="0">
-                <a:solidFill>
-                  <a:schemeClr val="tx1"/>
-                </a:solidFill>
-              </a:rPr>
-              <a:t>Prompt</a:t>
-            </a:r>
-          </a:p>
-        </p:txBody>
-      </p:sp>
-      <p:cxnSp>
-        <p:nvCxnSpPr>
-          <p:cNvPr id="16" name="Straight Arrow Connector 15">
-            <a:extLst>
-              <a:ext uri="{FF2B5EF4-FFF2-40B4-BE49-F238E27FC236}">
-                <a16:creationId xmlns:a16="http://schemas.microsoft.com/office/drawing/2014/main" id="{942D3144-4FA8-07EA-6898-D7B2C45E010A}"/>
-              </a:ext>
-            </a:extLst>
-          </p:cNvPr>
-          <p:cNvCxnSpPr>
-            <a:cxnSpLocks/>
-            <a:stCxn id="15" idx="3"/>
-            <a:endCxn id="5" idx="1"/>
-          </p:cNvCxnSpPr>
-          <p:nvPr/>
-        </p:nvCxnSpPr>
-        <p:spPr>
-          <a:xfrm>
-            <a:off x="1104489" y="2854155"/>
-            <a:ext cx="403449" cy="0"/>
-          </a:xfrm>
-          <a:prstGeom prst="straightConnector1">
-            <a:avLst/>
-          </a:prstGeom>
-          <a:ln>
-            <a:solidFill>
-              <a:schemeClr val="tx1"/>
-            </a:solidFill>
-            <a:prstDash val="sysDash"/>
-            <a:tailEnd type="triangle" w="lg" len="lg"/>
-          </a:ln>
-        </p:spPr>
-        <p:style>
-          <a:lnRef idx="2">
-            <a:schemeClr val="accent1"/>
-          </a:lnRef>
-          <a:fillRef idx="0">
-            <a:schemeClr val="accent1"/>
-          </a:fillRef>
-          <a:effectRef idx="1">
-            <a:schemeClr val="accent1"/>
-          </a:effectRef>
-          <a:fontRef idx="minor">
-            <a:schemeClr val="tx1"/>
-          </a:fontRef>
-        </p:style>
-      </p:cxnSp>
-      <p:cxnSp>
-        <p:nvCxnSpPr>
-          <p:cNvPr id="19" name="Connector: Elbow 18">
-            <a:extLst>
-              <a:ext uri="{FF2B5EF4-FFF2-40B4-BE49-F238E27FC236}">
-                <a16:creationId xmlns:a16="http://schemas.microsoft.com/office/drawing/2014/main" id="{BF48D9D9-8BAB-3118-5B91-13BAA46C2349}"/>
-              </a:ext>
-            </a:extLst>
-          </p:cNvPr>
-          <p:cNvCxnSpPr>
-            <a:cxnSpLocks/>
-            <a:stCxn id="5" idx="3"/>
-            <a:endCxn id="4" idx="1"/>
-          </p:cNvCxnSpPr>
-          <p:nvPr/>
-        </p:nvCxnSpPr>
-        <p:spPr>
-          <a:xfrm flipV="1">
-            <a:off x="3421380" y="2083603"/>
-            <a:ext cx="624840" cy="770552"/>
-          </a:xfrm>
-          <a:prstGeom prst="bentConnector3">
-            <a:avLst>
-              <a:gd name="adj1" fmla="val 50000"/>
-            </a:avLst>
-          </a:prstGeom>
-          <a:ln>
-            <a:solidFill>
-              <a:schemeClr val="tx1"/>
-            </a:solidFill>
-            <a:prstDash val="solid"/>
-            <a:tailEnd type="triangle" w="lg" len="lg"/>
-          </a:ln>
-        </p:spPr>
-        <p:style>
-          <a:lnRef idx="2">
-            <a:schemeClr val="accent1"/>
-          </a:lnRef>
-          <a:fillRef idx="0">
-            <a:schemeClr val="accent1"/>
-          </a:fillRef>
-          <a:effectRef idx="1">
-            <a:schemeClr val="accent1"/>
-          </a:effectRef>
-          <a:fontRef idx="minor">
-            <a:schemeClr val="tx1"/>
-          </a:fontRef>
-        </p:style>
-      </p:cxnSp>
-      <p:cxnSp>
-        <p:nvCxnSpPr>
-          <p:cNvPr id="22" name="Connector: Elbow 21">
-            <a:extLst>
-              <a:ext uri="{FF2B5EF4-FFF2-40B4-BE49-F238E27FC236}">
-                <a16:creationId xmlns:a16="http://schemas.microsoft.com/office/drawing/2014/main" id="{217AA7E3-1E41-FB8C-7F66-A5758B29A028}"/>
-              </a:ext>
-            </a:extLst>
-          </p:cNvPr>
-          <p:cNvCxnSpPr>
-            <a:cxnSpLocks/>
-            <a:stCxn id="5" idx="3"/>
-            <a:endCxn id="2" idx="1"/>
-          </p:cNvCxnSpPr>
-          <p:nvPr/>
-        </p:nvCxnSpPr>
-        <p:spPr>
-          <a:xfrm>
-            <a:off x="3421380" y="2854155"/>
-            <a:ext cx="624840" cy="772965"/>
-          </a:xfrm>
-          <a:prstGeom prst="bentConnector3">
-            <a:avLst>
-              <a:gd name="adj1" fmla="val 50000"/>
-            </a:avLst>
-          </a:prstGeom>
-          <a:ln>
-            <a:solidFill>
-              <a:schemeClr val="tx1"/>
-            </a:solidFill>
-            <a:prstDash val="solid"/>
-            <a:tailEnd type="triangle" w="lg" len="lg"/>
-          </a:ln>
-        </p:spPr>
-        <p:style>
-          <a:lnRef idx="2">
-            <a:schemeClr val="accent1"/>
-          </a:lnRef>
-          <a:fillRef idx="0">
-            <a:schemeClr val="accent1"/>
-          </a:fillRef>
-          <a:effectRef idx="1">
-            <a:schemeClr val="accent1"/>
-          </a:effectRef>
-          <a:fontRef idx="minor">
-            <a:schemeClr val="tx1"/>
-          </a:fontRef>
-        </p:style>
-      </p:cxnSp>
-      <p:sp>
-        <p:nvSpPr>
-          <p:cNvPr id="25" name="Rectangle: Rounded Corners 24">
-            <a:extLst>
-              <a:ext uri="{FF2B5EF4-FFF2-40B4-BE49-F238E27FC236}">
-                <a16:creationId xmlns:a16="http://schemas.microsoft.com/office/drawing/2014/main" id="{98E95763-BD68-DEF9-F942-CCC8B336544E}"/>
-              </a:ext>
-            </a:extLst>
-          </p:cNvPr>
-          <p:cNvSpPr/>
-          <p:nvPr/>
-        </p:nvSpPr>
-        <p:spPr>
-          <a:xfrm>
-            <a:off x="8732520" y="1852591"/>
-            <a:ext cx="457200" cy="457200"/>
-          </a:xfrm>
-          <a:prstGeom prst="roundRect">
-            <a:avLst/>
-          </a:prstGeom>
-          <a:solidFill>
-            <a:srgbClr val="E5F1F8"/>
-          </a:solidFill>
-          <a:ln>
-            <a:solidFill>
-              <a:schemeClr val="tx1"/>
-            </a:solidFill>
-          </a:ln>
-        </p:spPr>
-        <p:style>
-          <a:lnRef idx="2">
-            <a:schemeClr val="accent1">
-              <a:shade val="15000"/>
-            </a:schemeClr>
-          </a:lnRef>
-          <a:fillRef idx="1">
-            <a:schemeClr val="accent1"/>
-          </a:fillRef>
-          <a:effectRef idx="0">
-            <a:schemeClr val="accent1"/>
-          </a:effectRef>
-          <a:fontRef idx="minor">
-            <a:schemeClr val="lt1"/>
-          </a:fontRef>
-        </p:style>
-        <p:txBody>
-          <a:bodyPr rtlCol="0" anchor="ctr"/>
-          <a:lstStyle/>
-          <a:p>
-            <a:pPr algn="ctr"/>
-            <a:endParaRPr lang="en-US" dirty="0">
-              <a:solidFill>
-                <a:schemeClr val="tx1"/>
-              </a:solidFill>
-            </a:endParaRPr>
-          </a:p>
-        </p:txBody>
-      </p:sp>
-      <p:cxnSp>
-        <p:nvCxnSpPr>
-          <p:cNvPr id="40" name="Straight Arrow Connector 39">
-            <a:extLst>
-              <a:ext uri="{FF2B5EF4-FFF2-40B4-BE49-F238E27FC236}">
-                <a16:creationId xmlns:a16="http://schemas.microsoft.com/office/drawing/2014/main" id="{B899F5AF-E80C-3452-008E-8E821AEFA864}"/>
-              </a:ext>
-            </a:extLst>
-          </p:cNvPr>
-          <p:cNvCxnSpPr>
-            <a:cxnSpLocks/>
-            <a:stCxn id="4" idx="3"/>
-            <a:endCxn id="25" idx="1"/>
-          </p:cNvCxnSpPr>
-          <p:nvPr/>
-        </p:nvCxnSpPr>
-        <p:spPr>
-          <a:xfrm flipV="1">
-            <a:off x="8328660" y="2081191"/>
-            <a:ext cx="403860" cy="2412"/>
-          </a:xfrm>
-          <a:prstGeom prst="straightConnector1">
-            <a:avLst/>
-          </a:prstGeom>
-          <a:ln>
-            <a:solidFill>
-              <a:schemeClr val="tx1"/>
-            </a:solidFill>
-            <a:prstDash val="solid"/>
-            <a:tailEnd type="triangle" w="lg" len="lg"/>
-          </a:ln>
-        </p:spPr>
-        <p:style>
-          <a:lnRef idx="2">
-            <a:schemeClr val="accent1"/>
-          </a:lnRef>
-          <a:fillRef idx="0">
-            <a:schemeClr val="accent1"/>
-          </a:fillRef>
-          <a:effectRef idx="1">
-            <a:schemeClr val="accent1"/>
-          </a:effectRef>
-          <a:fontRef idx="minor">
-            <a:schemeClr val="tx1"/>
-          </a:fontRef>
-        </p:style>
-      </p:cxnSp>
-      <p:sp>
-        <p:nvSpPr>
-          <p:cNvPr id="44" name="Rectangle: Rounded Corners 43">
-            <a:extLst>
-              <a:ext uri="{FF2B5EF4-FFF2-40B4-BE49-F238E27FC236}">
-                <a16:creationId xmlns:a16="http://schemas.microsoft.com/office/drawing/2014/main" id="{3F66FD98-C347-7EA9-DC36-7FDBB97B4248}"/>
-              </a:ext>
-            </a:extLst>
-          </p:cNvPr>
-          <p:cNvSpPr/>
-          <p:nvPr/>
-        </p:nvSpPr>
-        <p:spPr>
-          <a:xfrm>
-            <a:off x="8732520" y="2625555"/>
-            <a:ext cx="457200" cy="457200"/>
-          </a:xfrm>
-          <a:prstGeom prst="roundRect">
-            <a:avLst/>
-          </a:prstGeom>
-          <a:solidFill>
-            <a:srgbClr val="E5F1F8"/>
-          </a:solidFill>
-          <a:ln>
-            <a:solidFill>
-              <a:schemeClr val="tx1"/>
-            </a:solidFill>
-          </a:ln>
-        </p:spPr>
-        <p:style>
-          <a:lnRef idx="2">
-            <a:schemeClr val="accent1">
-              <a:shade val="15000"/>
-            </a:schemeClr>
-          </a:lnRef>
-          <a:fillRef idx="1">
-            <a:schemeClr val="accent1"/>
-          </a:fillRef>
-          <a:effectRef idx="0">
-            <a:schemeClr val="accent1"/>
-          </a:effectRef>
-          <a:fontRef idx="minor">
-            <a:schemeClr val="lt1"/>
-          </a:fontRef>
-        </p:style>
-        <p:txBody>
-          <a:bodyPr rtlCol="0" anchor="ctr"/>
-          <a:lstStyle/>
-          <a:p>
-            <a:pPr algn="ctr"/>
-            <a:endParaRPr lang="en-US" dirty="0">
-              <a:solidFill>
-                <a:schemeClr val="tx1"/>
-              </a:solidFill>
-            </a:endParaRPr>
-          </a:p>
-        </p:txBody>
-      </p:sp>
-      <p:sp>
-        <p:nvSpPr>
-          <p:cNvPr id="46" name="Rectangle: Rounded Corners 45">
-            <a:extLst>
-              <a:ext uri="{FF2B5EF4-FFF2-40B4-BE49-F238E27FC236}">
-                <a16:creationId xmlns:a16="http://schemas.microsoft.com/office/drawing/2014/main" id="{A791A27B-2AA1-8E05-2231-C99FE09DCBEB}"/>
-              </a:ext>
-            </a:extLst>
-          </p:cNvPr>
-          <p:cNvSpPr/>
-          <p:nvPr/>
-        </p:nvSpPr>
-        <p:spPr>
-          <a:xfrm>
-            <a:off x="8732520" y="3398519"/>
-            <a:ext cx="457200" cy="457200"/>
-          </a:xfrm>
-          <a:prstGeom prst="roundRect">
-            <a:avLst/>
-          </a:prstGeom>
-          <a:solidFill>
-            <a:srgbClr val="E5F1F8"/>
-          </a:solidFill>
-          <a:ln>
-            <a:solidFill>
-              <a:schemeClr val="tx1"/>
-            </a:solidFill>
-          </a:ln>
-        </p:spPr>
-        <p:style>
-          <a:lnRef idx="2">
-            <a:schemeClr val="accent1">
-              <a:shade val="15000"/>
-            </a:schemeClr>
-          </a:lnRef>
-          <a:fillRef idx="1">
-            <a:schemeClr val="accent1"/>
-          </a:fillRef>
-          <a:effectRef idx="0">
-            <a:schemeClr val="accent1"/>
-          </a:effectRef>
-          <a:fontRef idx="minor">
-            <a:schemeClr val="lt1"/>
-          </a:fontRef>
-        </p:style>
-        <p:txBody>
-          <a:bodyPr rtlCol="0" anchor="ctr"/>
-          <a:lstStyle/>
-          <a:p>
-            <a:pPr algn="ctr"/>
-            <a:endParaRPr lang="en-US" dirty="0">
-              <a:solidFill>
-                <a:schemeClr val="tx1"/>
-              </a:solidFill>
-            </a:endParaRPr>
-          </a:p>
-        </p:txBody>
-      </p:sp>
-      <p:cxnSp>
-        <p:nvCxnSpPr>
-          <p:cNvPr id="47" name="Straight Arrow Connector 46">
-            <a:extLst>
-              <a:ext uri="{FF2B5EF4-FFF2-40B4-BE49-F238E27FC236}">
-                <a16:creationId xmlns:a16="http://schemas.microsoft.com/office/drawing/2014/main" id="{42D77B26-2C1F-3022-9B0B-3736BC5CF8AA}"/>
-              </a:ext>
-            </a:extLst>
-          </p:cNvPr>
-          <p:cNvCxnSpPr>
-            <a:cxnSpLocks/>
-            <a:stCxn id="3" idx="3"/>
-            <a:endCxn id="44" idx="1"/>
-          </p:cNvCxnSpPr>
-          <p:nvPr/>
-        </p:nvCxnSpPr>
-        <p:spPr>
-          <a:xfrm>
-            <a:off x="8328660" y="2854154"/>
-            <a:ext cx="403860" cy="1"/>
-          </a:xfrm>
-          <a:prstGeom prst="straightConnector1">
-            <a:avLst/>
-          </a:prstGeom>
-          <a:ln>
-            <a:solidFill>
-              <a:schemeClr val="tx1"/>
-            </a:solidFill>
-            <a:prstDash val="solid"/>
-            <a:tailEnd type="triangle" w="lg" len="lg"/>
-          </a:ln>
-        </p:spPr>
-        <p:style>
-          <a:lnRef idx="2">
-            <a:schemeClr val="accent1"/>
-          </a:lnRef>
-          <a:fillRef idx="0">
-            <a:schemeClr val="accent1"/>
-          </a:fillRef>
-          <a:effectRef idx="1">
-            <a:schemeClr val="accent1"/>
-          </a:effectRef>
-          <a:fontRef idx="minor">
-            <a:schemeClr val="tx1"/>
-          </a:fontRef>
-        </p:style>
-      </p:cxnSp>
-      <p:cxnSp>
-        <p:nvCxnSpPr>
-          <p:cNvPr id="55" name="Straight Arrow Connector 54">
-            <a:extLst>
-              <a:ext uri="{FF2B5EF4-FFF2-40B4-BE49-F238E27FC236}">
-                <a16:creationId xmlns:a16="http://schemas.microsoft.com/office/drawing/2014/main" id="{A99ECFB6-8E63-4F62-C5D3-37BC5BB43934}"/>
-              </a:ext>
-            </a:extLst>
-          </p:cNvPr>
-          <p:cNvCxnSpPr>
-            <a:cxnSpLocks/>
-            <a:stCxn id="2" idx="3"/>
-            <a:endCxn id="46" idx="1"/>
-          </p:cNvCxnSpPr>
-          <p:nvPr/>
-        </p:nvCxnSpPr>
-        <p:spPr>
-          <a:xfrm flipV="1">
-            <a:off x="8328660" y="3627119"/>
-            <a:ext cx="403860" cy="1"/>
-          </a:xfrm>
-          <a:prstGeom prst="straightConnector1">
-            <a:avLst/>
-          </a:prstGeom>
-          <a:ln>
-            <a:solidFill>
-              <a:schemeClr val="tx1"/>
-            </a:solidFill>
-            <a:prstDash val="solid"/>
-            <a:tailEnd type="triangle" w="lg" len="lg"/>
-          </a:ln>
-        </p:spPr>
-        <p:style>
-          <a:lnRef idx="2">
-            <a:schemeClr val="accent1"/>
-          </a:lnRef>
-          <a:fillRef idx="0">
-            <a:schemeClr val="accent1"/>
-          </a:fillRef>
-          <a:effectRef idx="1">
-            <a:schemeClr val="accent1"/>
-          </a:effectRef>
-          <a:fontRef idx="minor">
-            <a:schemeClr val="tx1"/>
-          </a:fontRef>
-        </p:style>
-      </p:cxnSp>
-      <p:cxnSp>
-        <p:nvCxnSpPr>
-          <p:cNvPr id="58" name="Connector: Elbow 57">
-            <a:extLst>
-              <a:ext uri="{FF2B5EF4-FFF2-40B4-BE49-F238E27FC236}">
-                <a16:creationId xmlns:a16="http://schemas.microsoft.com/office/drawing/2014/main" id="{DDB500F1-F165-AABE-6725-11E4ED79023E}"/>
-              </a:ext>
-            </a:extLst>
-          </p:cNvPr>
-          <p:cNvCxnSpPr>
-            <a:cxnSpLocks/>
-            <a:stCxn id="25" idx="3"/>
-            <a:endCxn id="6" idx="1"/>
-          </p:cNvCxnSpPr>
-          <p:nvPr/>
-        </p:nvCxnSpPr>
-        <p:spPr>
-          <a:xfrm>
-            <a:off x="9189720" y="2081191"/>
-            <a:ext cx="647700" cy="772964"/>
-          </a:xfrm>
-          <a:prstGeom prst="bentConnector3">
-            <a:avLst>
-              <a:gd name="adj1" fmla="val 50000"/>
-            </a:avLst>
-          </a:prstGeom>
-          <a:ln>
-            <a:solidFill>
-              <a:schemeClr val="tx1"/>
-            </a:solidFill>
-            <a:prstDash val="solid"/>
-            <a:tailEnd type="triangle" w="lg" len="lg"/>
-          </a:ln>
-        </p:spPr>
-        <p:style>
-          <a:lnRef idx="2">
-            <a:schemeClr val="accent1"/>
-          </a:lnRef>
-          <a:fillRef idx="0">
-            <a:schemeClr val="accent1"/>
-          </a:fillRef>
-          <a:effectRef idx="1">
-            <a:schemeClr val="accent1"/>
-          </a:effectRef>
-          <a:fontRef idx="minor">
-            <a:schemeClr val="tx1"/>
-          </a:fontRef>
-        </p:style>
-      </p:cxnSp>
-      <p:cxnSp>
-        <p:nvCxnSpPr>
-          <p:cNvPr id="61" name="Connector: Elbow 60">
-            <a:extLst>
-              <a:ext uri="{FF2B5EF4-FFF2-40B4-BE49-F238E27FC236}">
-                <a16:creationId xmlns:a16="http://schemas.microsoft.com/office/drawing/2014/main" id="{28AC6A5D-0A01-5370-996D-AF8698A1082D}"/>
-              </a:ext>
-            </a:extLst>
-          </p:cNvPr>
-          <p:cNvCxnSpPr>
-            <a:cxnSpLocks/>
-            <a:stCxn id="46" idx="3"/>
-            <a:endCxn id="6" idx="1"/>
-          </p:cNvCxnSpPr>
-          <p:nvPr/>
-        </p:nvCxnSpPr>
-        <p:spPr>
-          <a:xfrm flipV="1">
-            <a:off x="9189720" y="2854155"/>
-            <a:ext cx="647700" cy="772964"/>
-          </a:xfrm>
-          <a:prstGeom prst="bentConnector3">
-            <a:avLst>
-              <a:gd name="adj1" fmla="val 50000"/>
-            </a:avLst>
-          </a:prstGeom>
-          <a:ln>
-            <a:solidFill>
-              <a:schemeClr val="tx1"/>
-            </a:solidFill>
-            <a:prstDash val="solid"/>
-            <a:tailEnd type="triangle" w="lg" len="lg"/>
-          </a:ln>
-        </p:spPr>
-        <p:style>
-          <a:lnRef idx="2">
-            <a:schemeClr val="accent1"/>
-          </a:lnRef>
-          <a:fillRef idx="0">
-            <a:schemeClr val="accent1"/>
-          </a:fillRef>
-          <a:effectRef idx="1">
-            <a:schemeClr val="accent1"/>
-          </a:effectRef>
-          <a:fontRef idx="minor">
-            <a:schemeClr val="tx1"/>
-          </a:fontRef>
-        </p:style>
-      </p:cxnSp>
-      <p:pic>
-        <p:nvPicPr>
-          <p:cNvPr id="67" name="Graphic 66" descr="Web design with solid fill">
-            <a:extLst>
-              <a:ext uri="{FF2B5EF4-FFF2-40B4-BE49-F238E27FC236}">
-                <a16:creationId xmlns:a16="http://schemas.microsoft.com/office/drawing/2014/main" id="{5D8BB564-5BA8-868D-2AB7-35E0D3AE65F9}"/>
-              </a:ext>
-            </a:extLst>
-          </p:cNvPr>
-          <p:cNvPicPr>
-            <a:picLocks noChangeAspect="1"/>
-          </p:cNvPicPr>
-          <p:nvPr/>
-        </p:nvPicPr>
-        <p:blipFill>
-          <a:blip r:embed="rId2">
-            <a:extLst>
-              <a:ext uri="{96DAC541-7B7A-43D3-8B79-37D633B846F1}">
-                <asvg:svgBlip xmlns:asvg="http://schemas.microsoft.com/office/drawing/2016/SVG/main" r:embed="rId3"/>
-              </a:ext>
-            </a:extLst>
-          </a:blip>
-          <a:stretch>
-            <a:fillRect/>
-          </a:stretch>
-        </p:blipFill>
-        <p:spPr>
-          <a:xfrm>
-            <a:off x="8755380" y="2648413"/>
-            <a:ext cx="411480" cy="411480"/>
-          </a:xfrm>
-          <a:prstGeom prst="rect">
-            <a:avLst/>
-          </a:prstGeom>
-        </p:spPr>
-      </p:pic>
-      <p:pic>
-        <p:nvPicPr>
-          <p:cNvPr id="71" name="Graphic 70" descr="World with solid fill">
-            <a:extLst>
-              <a:ext uri="{FF2B5EF4-FFF2-40B4-BE49-F238E27FC236}">
-                <a16:creationId xmlns:a16="http://schemas.microsoft.com/office/drawing/2014/main" id="{0EF50C39-FA5F-96A6-2DE6-53C76B029FDB}"/>
-              </a:ext>
-            </a:extLst>
-          </p:cNvPr>
-          <p:cNvPicPr>
-            <a:picLocks noChangeAspect="1"/>
-          </p:cNvPicPr>
-          <p:nvPr/>
-        </p:nvPicPr>
-        <p:blipFill>
-          <a:blip r:embed="rId4">
-            <a:extLst>
-              <a:ext uri="{96DAC541-7B7A-43D3-8B79-37D633B846F1}">
-                <asvg:svgBlip xmlns:asvg="http://schemas.microsoft.com/office/drawing/2016/SVG/main" r:embed="rId5"/>
-              </a:ext>
-            </a:extLst>
-          </a:blip>
-          <a:stretch>
-            <a:fillRect/>
-          </a:stretch>
-        </p:blipFill>
-        <p:spPr>
-          <a:xfrm>
-            <a:off x="8755380" y="3421379"/>
-            <a:ext cx="411480" cy="411480"/>
-          </a:xfrm>
-          <a:prstGeom prst="rect">
-            <a:avLst/>
-          </a:prstGeom>
-        </p:spPr>
-      </p:pic>
-      <p:pic>
-        <p:nvPicPr>
-          <p:cNvPr id="73" name="Graphic 72" descr="Database with solid fill">
-            <a:extLst>
-              <a:ext uri="{FF2B5EF4-FFF2-40B4-BE49-F238E27FC236}">
-                <a16:creationId xmlns:a16="http://schemas.microsoft.com/office/drawing/2014/main" id="{20B0889E-3ACA-9DCA-25FE-C1F9B73F7329}"/>
-              </a:ext>
-            </a:extLst>
-          </p:cNvPr>
-          <p:cNvPicPr>
-            <a:picLocks noChangeAspect="1"/>
-          </p:cNvPicPr>
-          <p:nvPr/>
-        </p:nvPicPr>
-        <p:blipFill>
-          <a:blip r:embed="rId6">
-            <a:extLst>
-              <a:ext uri="{96DAC541-7B7A-43D3-8B79-37D633B846F1}">
-                <asvg:svgBlip xmlns:asvg="http://schemas.microsoft.com/office/drawing/2016/SVG/main" r:embed="rId7"/>
-              </a:ext>
-            </a:extLst>
-          </a:blip>
-          <a:stretch>
-            <a:fillRect/>
-          </a:stretch>
-        </p:blipFill>
-        <p:spPr>
-          <a:xfrm>
-            <a:off x="8755380" y="1875451"/>
-            <a:ext cx="411480" cy="411480"/>
-          </a:xfrm>
-          <a:prstGeom prst="rect">
-            <a:avLst/>
-          </a:prstGeom>
-        </p:spPr>
-      </p:pic>
-      <p:pic>
-        <p:nvPicPr>
-          <p:cNvPr id="75" name="Graphic 74" descr="Gears with solid fill">
-            <a:extLst>
-              <a:ext uri="{FF2B5EF4-FFF2-40B4-BE49-F238E27FC236}">
-                <a16:creationId xmlns:a16="http://schemas.microsoft.com/office/drawing/2014/main" id="{AFA7CC75-0D4E-9273-3BC2-179536E5EC20}"/>
-              </a:ext>
-            </a:extLst>
-          </p:cNvPr>
-          <p:cNvPicPr>
-            <a:picLocks noChangeAspect="1"/>
-          </p:cNvPicPr>
-          <p:nvPr/>
-        </p:nvPicPr>
-        <p:blipFill>
-          <a:blip r:embed="rId8">
-            <a:extLst>
-              <a:ext uri="{96DAC541-7B7A-43D3-8B79-37D633B846F1}">
-                <asvg:svgBlip xmlns:asvg="http://schemas.microsoft.com/office/drawing/2016/SVG/main" r:embed="rId9"/>
-              </a:ext>
-            </a:extLst>
-          </a:blip>
-          <a:stretch>
-            <a:fillRect/>
-          </a:stretch>
-        </p:blipFill>
-        <p:spPr>
-          <a:xfrm>
-            <a:off x="1626048" y="2648413"/>
-            <a:ext cx="411480" cy="411480"/>
-          </a:xfrm>
-          <a:prstGeom prst="rect">
-            <a:avLst/>
-          </a:prstGeom>
-        </p:spPr>
-      </p:pic>
-      <p:sp>
-        <p:nvSpPr>
-          <p:cNvPr id="76" name="Rectangle: Rounded Corners 75">
-            <a:extLst>
-              <a:ext uri="{FF2B5EF4-FFF2-40B4-BE49-F238E27FC236}">
-                <a16:creationId xmlns:a16="http://schemas.microsoft.com/office/drawing/2014/main" id="{3492D89A-8D12-E69E-613E-246E45DCD83F}"/>
-              </a:ext>
-            </a:extLst>
-          </p:cNvPr>
-          <p:cNvSpPr/>
-          <p:nvPr/>
-        </p:nvSpPr>
-        <p:spPr>
-          <a:xfrm>
-            <a:off x="10545258" y="3627118"/>
-            <a:ext cx="1205604" cy="469096"/>
-          </a:xfrm>
-          <a:prstGeom prst="roundRect">
-            <a:avLst/>
-          </a:prstGeom>
-          <a:solidFill>
-            <a:srgbClr val="E5F1F8"/>
-          </a:solidFill>
-          <a:ln>
-            <a:solidFill>
-              <a:schemeClr val="tx1"/>
-            </a:solidFill>
-          </a:ln>
-        </p:spPr>
-        <p:style>
-          <a:lnRef idx="2">
-            <a:schemeClr val="accent1">
-              <a:shade val="15000"/>
-            </a:schemeClr>
-          </a:lnRef>
-          <a:fillRef idx="1">
-            <a:schemeClr val="accent1"/>
-          </a:fillRef>
-          <a:effectRef idx="0">
-            <a:schemeClr val="accent1"/>
-          </a:effectRef>
-          <a:fontRef idx="minor">
-            <a:schemeClr val="lt1"/>
-          </a:fontRef>
-        </p:style>
-        <p:txBody>
-          <a:bodyPr rtlCol="0" anchor="ctr"/>
-          <a:lstStyle/>
-          <a:p>
-            <a:pPr algn="ctr"/>
-            <a:r>
-              <a:rPr lang="en-US" dirty="0">
-                <a:solidFill>
-                  <a:schemeClr val="tx1"/>
-                </a:solidFill>
-              </a:rPr>
-              <a:t>Response</a:t>
-            </a:r>
-          </a:p>
-        </p:txBody>
-      </p:sp>
-      <p:cxnSp>
-        <p:nvCxnSpPr>
-          <p:cNvPr id="77" name="Straight Arrow Connector 76">
-            <a:extLst>
-              <a:ext uri="{FF2B5EF4-FFF2-40B4-BE49-F238E27FC236}">
-                <a16:creationId xmlns:a16="http://schemas.microsoft.com/office/drawing/2014/main" id="{1A734903-BE53-2153-B1BE-7817395A6ACC}"/>
-              </a:ext>
-            </a:extLst>
-          </p:cNvPr>
-          <p:cNvCxnSpPr>
-            <a:cxnSpLocks/>
-            <a:endCxn id="76" idx="0"/>
-          </p:cNvCxnSpPr>
-          <p:nvPr/>
-        </p:nvCxnSpPr>
-        <p:spPr>
-          <a:xfrm>
-            <a:off x="11148060" y="3334214"/>
-            <a:ext cx="0" cy="292904"/>
-          </a:xfrm>
-          <a:prstGeom prst="straightConnector1">
-            <a:avLst/>
-          </a:prstGeom>
-          <a:ln>
-            <a:solidFill>
-              <a:schemeClr val="tx1"/>
-            </a:solidFill>
-            <a:prstDash val="sysDash"/>
-            <a:tailEnd type="triangle" w="lg" len="lg"/>
-          </a:ln>
-        </p:spPr>
-        <p:style>
-          <a:lnRef idx="2">
-            <a:schemeClr val="accent1"/>
-          </a:lnRef>
-          <a:fillRef idx="0">
-            <a:schemeClr val="accent1"/>
-          </a:fillRef>
-          <a:effectRef idx="1">
-            <a:schemeClr val="accent1"/>
-          </a:effectRef>
-          <a:fontRef idx="minor">
-            <a:schemeClr val="tx1"/>
-          </a:fontRef>
-        </p:style>
-      </p:cxnSp>
-      <p:cxnSp>
-        <p:nvCxnSpPr>
-          <p:cNvPr id="14" name="Connector: Elbow 13">
-            <a:extLst>
-              <a:ext uri="{FF2B5EF4-FFF2-40B4-BE49-F238E27FC236}">
-                <a16:creationId xmlns:a16="http://schemas.microsoft.com/office/drawing/2014/main" id="{4D371B40-23D5-3632-64F0-3A5DAC685C2C}"/>
-              </a:ext>
-            </a:extLst>
-          </p:cNvPr>
-          <p:cNvCxnSpPr>
-            <a:cxnSpLocks/>
-            <a:endCxn id="5" idx="2"/>
-          </p:cNvCxnSpPr>
-          <p:nvPr/>
-        </p:nvCxnSpPr>
-        <p:spPr>
-          <a:xfrm rot="5400000">
-            <a:off x="6337265" y="-538391"/>
-            <a:ext cx="12700" cy="7745211"/>
-          </a:xfrm>
-          <a:prstGeom prst="bentConnector3">
-            <a:avLst>
-              <a:gd name="adj1" fmla="val 6060000"/>
-            </a:avLst>
-          </a:prstGeom>
-          <a:ln>
-            <a:solidFill>
-              <a:schemeClr val="tx1"/>
-            </a:solidFill>
-            <a:prstDash val="sysDash"/>
-            <a:tailEnd type="triangle" w="lg" len="lg"/>
-          </a:ln>
-        </p:spPr>
-        <p:style>
-          <a:lnRef idx="2">
-            <a:schemeClr val="accent1"/>
-          </a:lnRef>
-          <a:fillRef idx="0">
-            <a:schemeClr val="accent1"/>
-          </a:fillRef>
-          <a:effectRef idx="1">
-            <a:schemeClr val="accent1"/>
-          </a:effectRef>
-          <a:fontRef idx="minor">
-            <a:schemeClr val="tx1"/>
-          </a:fontRef>
-        </p:style>
-      </p:cxnSp>
-    </p:spTree>
-    <p:extLst>
-      <p:ext uri="{BB962C8B-B14F-4D97-AF65-F5344CB8AC3E}">
-        <p14:creationId xmlns:p14="http://schemas.microsoft.com/office/powerpoint/2010/main" val="2560175498"/>
       </p:ext>
     </p:extLst>
   </p:cSld>
@@ -6175,12 +7134,1067 @@
           <a:chExt cx="0" cy="0"/>
         </a:xfrm>
       </p:grpSpPr>
+      <p:sp>
+        <p:nvSpPr>
+          <p:cNvPr id="2" name="Rectangle: Rounded Corners 1">
+            <a:extLst>
+              <a:ext uri="{FF2B5EF4-FFF2-40B4-BE49-F238E27FC236}">
+                <a16:creationId xmlns:a16="http://schemas.microsoft.com/office/drawing/2014/main" id="{F09FDC59-6067-4502-1360-F42554AD87D3}"/>
+              </a:ext>
+            </a:extLst>
+          </p:cNvPr>
+          <p:cNvSpPr/>
+          <p:nvPr/>
+        </p:nvSpPr>
+        <p:spPr>
+          <a:xfrm>
+            <a:off x="4046220" y="3398520"/>
+            <a:ext cx="4282440" cy="457200"/>
+          </a:xfrm>
+          <a:prstGeom prst="roundRect">
+            <a:avLst/>
+          </a:prstGeom>
+          <a:solidFill>
+            <a:srgbClr val="B2D4EB"/>
+          </a:solidFill>
+          <a:ln>
+            <a:solidFill>
+              <a:schemeClr val="tx1"/>
+            </a:solidFill>
+          </a:ln>
+        </p:spPr>
+        <p:style>
+          <a:lnRef idx="2">
+            <a:schemeClr val="accent1">
+              <a:shade val="15000"/>
+            </a:schemeClr>
+          </a:lnRef>
+          <a:fillRef idx="1">
+            <a:schemeClr val="accent1"/>
+          </a:fillRef>
+          <a:effectRef idx="0">
+            <a:schemeClr val="accent1"/>
+          </a:effectRef>
+          <a:fontRef idx="minor">
+            <a:schemeClr val="lt1"/>
+          </a:fontRef>
+        </p:style>
+        <p:txBody>
+          <a:bodyPr rtlCol="0" anchor="ctr"/>
+          <a:lstStyle/>
+          <a:p>
+            <a:pPr algn="ctr"/>
+            <a:r>
+              <a:rPr lang="en-US" dirty="0">
+                <a:solidFill>
+                  <a:schemeClr val="tx1"/>
+                </a:solidFill>
+              </a:rPr>
+              <a:t>Search Public Information on the Web</a:t>
+            </a:r>
+            <a:endParaRPr lang="en-US" i="1" dirty="0">
+              <a:solidFill>
+                <a:schemeClr val="tx1"/>
+              </a:solidFill>
+            </a:endParaRPr>
+          </a:p>
+        </p:txBody>
+      </p:sp>
+      <p:sp>
+        <p:nvSpPr>
+          <p:cNvPr id="3" name="Rectangle: Rounded Corners 2">
+            <a:extLst>
+              <a:ext uri="{FF2B5EF4-FFF2-40B4-BE49-F238E27FC236}">
+                <a16:creationId xmlns:a16="http://schemas.microsoft.com/office/drawing/2014/main" id="{9800FF13-E208-2C00-EB7C-BCBA48F554BD}"/>
+              </a:ext>
+            </a:extLst>
+          </p:cNvPr>
+          <p:cNvSpPr/>
+          <p:nvPr/>
+        </p:nvSpPr>
+        <p:spPr>
+          <a:xfrm>
+            <a:off x="4046220" y="2625554"/>
+            <a:ext cx="4282440" cy="457200"/>
+          </a:xfrm>
+          <a:prstGeom prst="roundRect">
+            <a:avLst/>
+          </a:prstGeom>
+          <a:solidFill>
+            <a:srgbClr val="B2D4EB"/>
+          </a:solidFill>
+          <a:ln>
+            <a:solidFill>
+              <a:schemeClr val="tx1"/>
+            </a:solidFill>
+          </a:ln>
+        </p:spPr>
+        <p:style>
+          <a:lnRef idx="2">
+            <a:schemeClr val="accent1">
+              <a:shade val="15000"/>
+            </a:schemeClr>
+          </a:lnRef>
+          <a:fillRef idx="1">
+            <a:schemeClr val="accent1"/>
+          </a:fillRef>
+          <a:effectRef idx="0">
+            <a:schemeClr val="accent1"/>
+          </a:effectRef>
+          <a:fontRef idx="minor">
+            <a:schemeClr val="lt1"/>
+          </a:fontRef>
+        </p:style>
+        <p:txBody>
+          <a:bodyPr rtlCol="0" anchor="ctr"/>
+          <a:lstStyle/>
+          <a:p>
+            <a:pPr algn="ctr"/>
+            <a:r>
+              <a:rPr lang="en-US" dirty="0">
+                <a:solidFill>
+                  <a:schemeClr val="tx1"/>
+                </a:solidFill>
+              </a:rPr>
+              <a:t>Retrieve Stock Quotes from an API</a:t>
+            </a:r>
+            <a:endParaRPr lang="en-US" i="1" dirty="0">
+              <a:solidFill>
+                <a:schemeClr val="tx1"/>
+              </a:solidFill>
+            </a:endParaRPr>
+          </a:p>
+        </p:txBody>
+      </p:sp>
+      <p:sp>
+        <p:nvSpPr>
+          <p:cNvPr id="4" name="Rectangle: Rounded Corners 3">
+            <a:extLst>
+              <a:ext uri="{FF2B5EF4-FFF2-40B4-BE49-F238E27FC236}">
+                <a16:creationId xmlns:a16="http://schemas.microsoft.com/office/drawing/2014/main" id="{CD952C55-0F41-C8E8-4833-F5F86239B3AD}"/>
+              </a:ext>
+            </a:extLst>
+          </p:cNvPr>
+          <p:cNvSpPr/>
+          <p:nvPr/>
+        </p:nvSpPr>
+        <p:spPr>
+          <a:xfrm>
+            <a:off x="4046220" y="1855003"/>
+            <a:ext cx="4282440" cy="457200"/>
+          </a:xfrm>
+          <a:prstGeom prst="roundRect">
+            <a:avLst/>
+          </a:prstGeom>
+          <a:solidFill>
+            <a:srgbClr val="B2D4EB"/>
+          </a:solidFill>
+          <a:ln>
+            <a:solidFill>
+              <a:schemeClr val="tx1"/>
+            </a:solidFill>
+          </a:ln>
+        </p:spPr>
+        <p:style>
+          <a:lnRef idx="2">
+            <a:schemeClr val="accent1">
+              <a:shade val="15000"/>
+            </a:schemeClr>
+          </a:lnRef>
+          <a:fillRef idx="1">
+            <a:schemeClr val="accent1"/>
+          </a:fillRef>
+          <a:effectRef idx="0">
+            <a:schemeClr val="accent1"/>
+          </a:effectRef>
+          <a:fontRef idx="minor">
+            <a:schemeClr val="lt1"/>
+          </a:fontRef>
+        </p:style>
+        <p:txBody>
+          <a:bodyPr rtlCol="0" anchor="ctr"/>
+          <a:lstStyle/>
+          <a:p>
+            <a:pPr algn="ctr"/>
+            <a:r>
+              <a:rPr lang="en-US" dirty="0">
+                <a:solidFill>
+                  <a:schemeClr val="tx1"/>
+                </a:solidFill>
+              </a:rPr>
+              <a:t>Reference Internal Report Files</a:t>
+            </a:r>
+            <a:endParaRPr lang="en-US" i="1" dirty="0">
+              <a:solidFill>
+                <a:schemeClr val="tx1"/>
+              </a:solidFill>
+            </a:endParaRPr>
+          </a:p>
+        </p:txBody>
+      </p:sp>
+      <p:sp>
+        <p:nvSpPr>
+          <p:cNvPr id="5" name="Rectangle: Rounded Corners 4">
+            <a:extLst>
+              <a:ext uri="{FF2B5EF4-FFF2-40B4-BE49-F238E27FC236}">
+                <a16:creationId xmlns:a16="http://schemas.microsoft.com/office/drawing/2014/main" id="{600226F7-C833-1B1C-B967-7291F64244CC}"/>
+              </a:ext>
+            </a:extLst>
+          </p:cNvPr>
+          <p:cNvSpPr/>
+          <p:nvPr/>
+        </p:nvSpPr>
+        <p:spPr>
+          <a:xfrm>
+            <a:off x="1507938" y="2374095"/>
+            <a:ext cx="1913442" cy="960119"/>
+          </a:xfrm>
+          <a:prstGeom prst="roundRect">
+            <a:avLst/>
+          </a:prstGeom>
+          <a:solidFill>
+            <a:srgbClr val="E5F1F8"/>
+          </a:solidFill>
+          <a:ln>
+            <a:solidFill>
+              <a:schemeClr val="tx1"/>
+            </a:solidFill>
+          </a:ln>
+        </p:spPr>
+        <p:style>
+          <a:lnRef idx="2">
+            <a:schemeClr val="accent1">
+              <a:shade val="15000"/>
+            </a:schemeClr>
+          </a:lnRef>
+          <a:fillRef idx="1">
+            <a:schemeClr val="accent1"/>
+          </a:fillRef>
+          <a:effectRef idx="0">
+            <a:schemeClr val="accent1"/>
+          </a:effectRef>
+          <a:fontRef idx="minor">
+            <a:schemeClr val="lt1"/>
+          </a:fontRef>
+        </p:style>
+        <p:txBody>
+          <a:bodyPr rtlCol="0" anchor="ctr"/>
+          <a:lstStyle/>
+          <a:p>
+            <a:pPr algn="ctr"/>
+            <a:r>
+              <a:rPr lang="en-US" dirty="0">
+                <a:solidFill>
+                  <a:schemeClr val="tx1"/>
+                </a:solidFill>
+              </a:rPr>
+              <a:t>Query</a:t>
+            </a:r>
+          </a:p>
+          <a:p>
+            <a:pPr algn="ctr"/>
+            <a:r>
+              <a:rPr lang="en-US" dirty="0">
+                <a:solidFill>
+                  <a:schemeClr val="tx1"/>
+                </a:solidFill>
+              </a:rPr>
+              <a:t>Planning</a:t>
+            </a:r>
+          </a:p>
+        </p:txBody>
+      </p:sp>
+      <p:sp>
+        <p:nvSpPr>
+          <p:cNvPr id="6" name="Rectangle: Rounded Corners 5">
+            <a:extLst>
+              <a:ext uri="{FF2B5EF4-FFF2-40B4-BE49-F238E27FC236}">
+                <a16:creationId xmlns:a16="http://schemas.microsoft.com/office/drawing/2014/main" id="{C93C6EBF-0FE7-EC6E-5B5C-7AA41F6606DD}"/>
+              </a:ext>
+            </a:extLst>
+          </p:cNvPr>
+          <p:cNvSpPr/>
+          <p:nvPr/>
+        </p:nvSpPr>
+        <p:spPr>
+          <a:xfrm>
+            <a:off x="9837420" y="2374095"/>
+            <a:ext cx="1913442" cy="960119"/>
+          </a:xfrm>
+          <a:prstGeom prst="roundRect">
+            <a:avLst/>
+          </a:prstGeom>
+          <a:solidFill>
+            <a:srgbClr val="E5F1F8"/>
+          </a:solidFill>
+          <a:ln>
+            <a:solidFill>
+              <a:schemeClr val="tx1"/>
+            </a:solidFill>
+          </a:ln>
+        </p:spPr>
+        <p:style>
+          <a:lnRef idx="2">
+            <a:schemeClr val="accent1">
+              <a:shade val="15000"/>
+            </a:schemeClr>
+          </a:lnRef>
+          <a:fillRef idx="1">
+            <a:schemeClr val="accent1"/>
+          </a:fillRef>
+          <a:effectRef idx="0">
+            <a:schemeClr val="accent1"/>
+          </a:effectRef>
+          <a:fontRef idx="minor">
+            <a:schemeClr val="lt1"/>
+          </a:fontRef>
+        </p:style>
+        <p:txBody>
+          <a:bodyPr rtlCol="0" anchor="ctr"/>
+          <a:lstStyle/>
+          <a:p>
+            <a:pPr algn="ctr"/>
+            <a:r>
+              <a:rPr lang="en-US" dirty="0">
+                <a:solidFill>
+                  <a:schemeClr val="tx1"/>
+                </a:solidFill>
+              </a:rPr>
+              <a:t>Language</a:t>
+            </a:r>
+          </a:p>
+          <a:p>
+            <a:pPr algn="ctr"/>
+            <a:r>
+              <a:rPr lang="en-US" dirty="0">
+                <a:solidFill>
+                  <a:schemeClr val="tx1"/>
+                </a:solidFill>
+              </a:rPr>
+              <a:t>Model</a:t>
+            </a:r>
+          </a:p>
+        </p:txBody>
+      </p:sp>
+      <p:cxnSp>
+        <p:nvCxnSpPr>
+          <p:cNvPr id="7" name="Straight Arrow Connector 6">
+            <a:extLst>
+              <a:ext uri="{FF2B5EF4-FFF2-40B4-BE49-F238E27FC236}">
+                <a16:creationId xmlns:a16="http://schemas.microsoft.com/office/drawing/2014/main" id="{70FF9049-A038-5CD7-B5B6-A7A955E2687C}"/>
+              </a:ext>
+            </a:extLst>
+          </p:cNvPr>
+          <p:cNvCxnSpPr>
+            <a:cxnSpLocks/>
+            <a:stCxn id="5" idx="3"/>
+            <a:endCxn id="3" idx="1"/>
+          </p:cNvCxnSpPr>
+          <p:nvPr/>
+        </p:nvCxnSpPr>
+        <p:spPr>
+          <a:xfrm flipV="1">
+            <a:off x="3421380" y="2854154"/>
+            <a:ext cx="624840" cy="1"/>
+          </a:xfrm>
+          <a:prstGeom prst="straightConnector1">
+            <a:avLst/>
+          </a:prstGeom>
+          <a:ln>
+            <a:solidFill>
+              <a:schemeClr val="tx1"/>
+            </a:solidFill>
+            <a:prstDash val="solid"/>
+            <a:tailEnd type="triangle" w="lg" len="lg"/>
+          </a:ln>
+        </p:spPr>
+        <p:style>
+          <a:lnRef idx="2">
+            <a:schemeClr val="accent1"/>
+          </a:lnRef>
+          <a:fillRef idx="0">
+            <a:schemeClr val="accent1"/>
+          </a:fillRef>
+          <a:effectRef idx="1">
+            <a:schemeClr val="accent1"/>
+          </a:effectRef>
+          <a:fontRef idx="minor">
+            <a:schemeClr val="tx1"/>
+          </a:fontRef>
+        </p:style>
+      </p:cxnSp>
+      <p:cxnSp>
+        <p:nvCxnSpPr>
+          <p:cNvPr id="10" name="Straight Arrow Connector 9">
+            <a:extLst>
+              <a:ext uri="{FF2B5EF4-FFF2-40B4-BE49-F238E27FC236}">
+                <a16:creationId xmlns:a16="http://schemas.microsoft.com/office/drawing/2014/main" id="{2C10FC99-8029-AE13-0A3B-1F87064360AB}"/>
+              </a:ext>
+            </a:extLst>
+          </p:cNvPr>
+          <p:cNvCxnSpPr>
+            <a:cxnSpLocks/>
+            <a:stCxn id="44" idx="3"/>
+            <a:endCxn id="6" idx="1"/>
+          </p:cNvCxnSpPr>
+          <p:nvPr/>
+        </p:nvCxnSpPr>
+        <p:spPr>
+          <a:xfrm>
+            <a:off x="9189720" y="2854155"/>
+            <a:ext cx="647700" cy="0"/>
+          </a:xfrm>
+          <a:prstGeom prst="straightConnector1">
+            <a:avLst/>
+          </a:prstGeom>
+          <a:ln>
+            <a:solidFill>
+              <a:schemeClr val="tx1"/>
+            </a:solidFill>
+            <a:prstDash val="solid"/>
+            <a:tailEnd type="triangle" w="lg" len="lg"/>
+          </a:ln>
+        </p:spPr>
+        <p:style>
+          <a:lnRef idx="2">
+            <a:schemeClr val="accent1"/>
+          </a:lnRef>
+          <a:fillRef idx="0">
+            <a:schemeClr val="accent1"/>
+          </a:fillRef>
+          <a:effectRef idx="1">
+            <a:schemeClr val="accent1"/>
+          </a:effectRef>
+          <a:fontRef idx="minor">
+            <a:schemeClr val="tx1"/>
+          </a:fontRef>
+        </p:style>
+      </p:cxnSp>
+      <p:sp>
+        <p:nvSpPr>
+          <p:cNvPr id="15" name="Rectangle: Rounded Corners 14">
+            <a:extLst>
+              <a:ext uri="{FF2B5EF4-FFF2-40B4-BE49-F238E27FC236}">
+                <a16:creationId xmlns:a16="http://schemas.microsoft.com/office/drawing/2014/main" id="{C23DA4FB-7AE1-4EE4-8DD5-321F7F7C7F33}"/>
+              </a:ext>
+            </a:extLst>
+          </p:cNvPr>
+          <p:cNvSpPr/>
+          <p:nvPr/>
+        </p:nvSpPr>
+        <p:spPr>
+          <a:xfrm>
+            <a:off x="189267" y="2619607"/>
+            <a:ext cx="915222" cy="469096"/>
+          </a:xfrm>
+          <a:prstGeom prst="roundRect">
+            <a:avLst/>
+          </a:prstGeom>
+          <a:solidFill>
+            <a:srgbClr val="E5F1F8"/>
+          </a:solidFill>
+          <a:ln>
+            <a:solidFill>
+              <a:schemeClr val="tx1"/>
+            </a:solidFill>
+          </a:ln>
+        </p:spPr>
+        <p:style>
+          <a:lnRef idx="2">
+            <a:schemeClr val="accent1">
+              <a:shade val="15000"/>
+            </a:schemeClr>
+          </a:lnRef>
+          <a:fillRef idx="1">
+            <a:schemeClr val="accent1"/>
+          </a:fillRef>
+          <a:effectRef idx="0">
+            <a:schemeClr val="accent1"/>
+          </a:effectRef>
+          <a:fontRef idx="minor">
+            <a:schemeClr val="lt1"/>
+          </a:fontRef>
+        </p:style>
+        <p:txBody>
+          <a:bodyPr rtlCol="0" anchor="ctr"/>
+          <a:lstStyle/>
+          <a:p>
+            <a:pPr algn="ctr"/>
+            <a:r>
+              <a:rPr lang="en-US" dirty="0">
+                <a:solidFill>
+                  <a:schemeClr val="tx1"/>
+                </a:solidFill>
+              </a:rPr>
+              <a:t>Prompt</a:t>
+            </a:r>
+          </a:p>
+        </p:txBody>
+      </p:sp>
+      <p:cxnSp>
+        <p:nvCxnSpPr>
+          <p:cNvPr id="16" name="Straight Arrow Connector 15">
+            <a:extLst>
+              <a:ext uri="{FF2B5EF4-FFF2-40B4-BE49-F238E27FC236}">
+                <a16:creationId xmlns:a16="http://schemas.microsoft.com/office/drawing/2014/main" id="{942D3144-4FA8-07EA-6898-D7B2C45E010A}"/>
+              </a:ext>
+            </a:extLst>
+          </p:cNvPr>
+          <p:cNvCxnSpPr>
+            <a:cxnSpLocks/>
+            <a:stCxn id="15" idx="3"/>
+            <a:endCxn id="5" idx="1"/>
+          </p:cNvCxnSpPr>
+          <p:nvPr/>
+        </p:nvCxnSpPr>
+        <p:spPr>
+          <a:xfrm>
+            <a:off x="1104489" y="2854155"/>
+            <a:ext cx="403449" cy="0"/>
+          </a:xfrm>
+          <a:prstGeom prst="straightConnector1">
+            <a:avLst/>
+          </a:prstGeom>
+          <a:ln>
+            <a:solidFill>
+              <a:schemeClr val="tx1"/>
+            </a:solidFill>
+            <a:prstDash val="sysDash"/>
+            <a:tailEnd type="triangle" w="lg" len="lg"/>
+          </a:ln>
+        </p:spPr>
+        <p:style>
+          <a:lnRef idx="2">
+            <a:schemeClr val="accent1"/>
+          </a:lnRef>
+          <a:fillRef idx="0">
+            <a:schemeClr val="accent1"/>
+          </a:fillRef>
+          <a:effectRef idx="1">
+            <a:schemeClr val="accent1"/>
+          </a:effectRef>
+          <a:fontRef idx="minor">
+            <a:schemeClr val="tx1"/>
+          </a:fontRef>
+        </p:style>
+      </p:cxnSp>
+      <p:cxnSp>
+        <p:nvCxnSpPr>
+          <p:cNvPr id="19" name="Connector: Elbow 18">
+            <a:extLst>
+              <a:ext uri="{FF2B5EF4-FFF2-40B4-BE49-F238E27FC236}">
+                <a16:creationId xmlns:a16="http://schemas.microsoft.com/office/drawing/2014/main" id="{BF48D9D9-8BAB-3118-5B91-13BAA46C2349}"/>
+              </a:ext>
+            </a:extLst>
+          </p:cNvPr>
+          <p:cNvCxnSpPr>
+            <a:cxnSpLocks/>
+            <a:stCxn id="5" idx="3"/>
+            <a:endCxn id="4" idx="1"/>
+          </p:cNvCxnSpPr>
+          <p:nvPr/>
+        </p:nvCxnSpPr>
+        <p:spPr>
+          <a:xfrm flipV="1">
+            <a:off x="3421380" y="2083603"/>
+            <a:ext cx="624840" cy="770552"/>
+          </a:xfrm>
+          <a:prstGeom prst="bentConnector3">
+            <a:avLst>
+              <a:gd name="adj1" fmla="val 50000"/>
+            </a:avLst>
+          </a:prstGeom>
+          <a:ln>
+            <a:solidFill>
+              <a:schemeClr val="tx1"/>
+            </a:solidFill>
+            <a:prstDash val="solid"/>
+            <a:tailEnd type="triangle" w="lg" len="lg"/>
+          </a:ln>
+        </p:spPr>
+        <p:style>
+          <a:lnRef idx="2">
+            <a:schemeClr val="accent1"/>
+          </a:lnRef>
+          <a:fillRef idx="0">
+            <a:schemeClr val="accent1"/>
+          </a:fillRef>
+          <a:effectRef idx="1">
+            <a:schemeClr val="accent1"/>
+          </a:effectRef>
+          <a:fontRef idx="minor">
+            <a:schemeClr val="tx1"/>
+          </a:fontRef>
+        </p:style>
+      </p:cxnSp>
+      <p:cxnSp>
+        <p:nvCxnSpPr>
+          <p:cNvPr id="22" name="Connector: Elbow 21">
+            <a:extLst>
+              <a:ext uri="{FF2B5EF4-FFF2-40B4-BE49-F238E27FC236}">
+                <a16:creationId xmlns:a16="http://schemas.microsoft.com/office/drawing/2014/main" id="{217AA7E3-1E41-FB8C-7F66-A5758B29A028}"/>
+              </a:ext>
+            </a:extLst>
+          </p:cNvPr>
+          <p:cNvCxnSpPr>
+            <a:cxnSpLocks/>
+            <a:stCxn id="5" idx="3"/>
+            <a:endCxn id="2" idx="1"/>
+          </p:cNvCxnSpPr>
+          <p:nvPr/>
+        </p:nvCxnSpPr>
+        <p:spPr>
+          <a:xfrm>
+            <a:off x="3421380" y="2854155"/>
+            <a:ext cx="624840" cy="772965"/>
+          </a:xfrm>
+          <a:prstGeom prst="bentConnector3">
+            <a:avLst>
+              <a:gd name="adj1" fmla="val 50000"/>
+            </a:avLst>
+          </a:prstGeom>
+          <a:ln>
+            <a:solidFill>
+              <a:schemeClr val="tx1"/>
+            </a:solidFill>
+            <a:prstDash val="solid"/>
+            <a:tailEnd type="triangle" w="lg" len="lg"/>
+          </a:ln>
+        </p:spPr>
+        <p:style>
+          <a:lnRef idx="2">
+            <a:schemeClr val="accent1"/>
+          </a:lnRef>
+          <a:fillRef idx="0">
+            <a:schemeClr val="accent1"/>
+          </a:fillRef>
+          <a:effectRef idx="1">
+            <a:schemeClr val="accent1"/>
+          </a:effectRef>
+          <a:fontRef idx="minor">
+            <a:schemeClr val="tx1"/>
+          </a:fontRef>
+        </p:style>
+      </p:cxnSp>
+      <p:sp>
+        <p:nvSpPr>
+          <p:cNvPr id="25" name="Rectangle: Rounded Corners 24">
+            <a:extLst>
+              <a:ext uri="{FF2B5EF4-FFF2-40B4-BE49-F238E27FC236}">
+                <a16:creationId xmlns:a16="http://schemas.microsoft.com/office/drawing/2014/main" id="{98E95763-BD68-DEF9-F942-CCC8B336544E}"/>
+              </a:ext>
+            </a:extLst>
+          </p:cNvPr>
+          <p:cNvSpPr/>
+          <p:nvPr/>
+        </p:nvSpPr>
+        <p:spPr>
+          <a:xfrm>
+            <a:off x="8732520" y="1852591"/>
+            <a:ext cx="457200" cy="457200"/>
+          </a:xfrm>
+          <a:prstGeom prst="roundRect">
+            <a:avLst/>
+          </a:prstGeom>
+          <a:solidFill>
+            <a:srgbClr val="E5F1F8"/>
+          </a:solidFill>
+          <a:ln>
+            <a:solidFill>
+              <a:schemeClr val="tx1"/>
+            </a:solidFill>
+          </a:ln>
+        </p:spPr>
+        <p:style>
+          <a:lnRef idx="2">
+            <a:schemeClr val="accent1">
+              <a:shade val="15000"/>
+            </a:schemeClr>
+          </a:lnRef>
+          <a:fillRef idx="1">
+            <a:schemeClr val="accent1"/>
+          </a:fillRef>
+          <a:effectRef idx="0">
+            <a:schemeClr val="accent1"/>
+          </a:effectRef>
+          <a:fontRef idx="minor">
+            <a:schemeClr val="lt1"/>
+          </a:fontRef>
+        </p:style>
+        <p:txBody>
+          <a:bodyPr rtlCol="0" anchor="ctr"/>
+          <a:lstStyle/>
+          <a:p>
+            <a:pPr algn="ctr"/>
+            <a:endParaRPr lang="en-US" dirty="0">
+              <a:solidFill>
+                <a:schemeClr val="tx1"/>
+              </a:solidFill>
+            </a:endParaRPr>
+          </a:p>
+        </p:txBody>
+      </p:sp>
+      <p:cxnSp>
+        <p:nvCxnSpPr>
+          <p:cNvPr id="40" name="Straight Arrow Connector 39">
+            <a:extLst>
+              <a:ext uri="{FF2B5EF4-FFF2-40B4-BE49-F238E27FC236}">
+                <a16:creationId xmlns:a16="http://schemas.microsoft.com/office/drawing/2014/main" id="{B899F5AF-E80C-3452-008E-8E821AEFA864}"/>
+              </a:ext>
+            </a:extLst>
+          </p:cNvPr>
+          <p:cNvCxnSpPr>
+            <a:cxnSpLocks/>
+            <a:stCxn id="4" idx="3"/>
+            <a:endCxn id="25" idx="1"/>
+          </p:cNvCxnSpPr>
+          <p:nvPr/>
+        </p:nvCxnSpPr>
+        <p:spPr>
+          <a:xfrm flipV="1">
+            <a:off x="8328660" y="2081191"/>
+            <a:ext cx="403860" cy="2412"/>
+          </a:xfrm>
+          <a:prstGeom prst="straightConnector1">
+            <a:avLst/>
+          </a:prstGeom>
+          <a:ln>
+            <a:solidFill>
+              <a:schemeClr val="tx1"/>
+            </a:solidFill>
+            <a:prstDash val="solid"/>
+            <a:tailEnd type="triangle" w="lg" len="lg"/>
+          </a:ln>
+        </p:spPr>
+        <p:style>
+          <a:lnRef idx="2">
+            <a:schemeClr val="accent1"/>
+          </a:lnRef>
+          <a:fillRef idx="0">
+            <a:schemeClr val="accent1"/>
+          </a:fillRef>
+          <a:effectRef idx="1">
+            <a:schemeClr val="accent1"/>
+          </a:effectRef>
+          <a:fontRef idx="minor">
+            <a:schemeClr val="tx1"/>
+          </a:fontRef>
+        </p:style>
+      </p:cxnSp>
+      <p:sp>
+        <p:nvSpPr>
+          <p:cNvPr id="44" name="Rectangle: Rounded Corners 43">
+            <a:extLst>
+              <a:ext uri="{FF2B5EF4-FFF2-40B4-BE49-F238E27FC236}">
+                <a16:creationId xmlns:a16="http://schemas.microsoft.com/office/drawing/2014/main" id="{3F66FD98-C347-7EA9-DC36-7FDBB97B4248}"/>
+              </a:ext>
+            </a:extLst>
+          </p:cNvPr>
+          <p:cNvSpPr/>
+          <p:nvPr/>
+        </p:nvSpPr>
+        <p:spPr>
+          <a:xfrm>
+            <a:off x="8732520" y="2625555"/>
+            <a:ext cx="457200" cy="457200"/>
+          </a:xfrm>
+          <a:prstGeom prst="roundRect">
+            <a:avLst/>
+          </a:prstGeom>
+          <a:solidFill>
+            <a:srgbClr val="E5F1F8"/>
+          </a:solidFill>
+          <a:ln>
+            <a:solidFill>
+              <a:schemeClr val="tx1"/>
+            </a:solidFill>
+          </a:ln>
+        </p:spPr>
+        <p:style>
+          <a:lnRef idx="2">
+            <a:schemeClr val="accent1">
+              <a:shade val="15000"/>
+            </a:schemeClr>
+          </a:lnRef>
+          <a:fillRef idx="1">
+            <a:schemeClr val="accent1"/>
+          </a:fillRef>
+          <a:effectRef idx="0">
+            <a:schemeClr val="accent1"/>
+          </a:effectRef>
+          <a:fontRef idx="minor">
+            <a:schemeClr val="lt1"/>
+          </a:fontRef>
+        </p:style>
+        <p:txBody>
+          <a:bodyPr rtlCol="0" anchor="ctr"/>
+          <a:lstStyle/>
+          <a:p>
+            <a:pPr algn="ctr"/>
+            <a:endParaRPr lang="en-US" dirty="0">
+              <a:solidFill>
+                <a:schemeClr val="tx1"/>
+              </a:solidFill>
+            </a:endParaRPr>
+          </a:p>
+        </p:txBody>
+      </p:sp>
+      <p:sp>
+        <p:nvSpPr>
+          <p:cNvPr id="46" name="Rectangle: Rounded Corners 45">
+            <a:extLst>
+              <a:ext uri="{FF2B5EF4-FFF2-40B4-BE49-F238E27FC236}">
+                <a16:creationId xmlns:a16="http://schemas.microsoft.com/office/drawing/2014/main" id="{A791A27B-2AA1-8E05-2231-C99FE09DCBEB}"/>
+              </a:ext>
+            </a:extLst>
+          </p:cNvPr>
+          <p:cNvSpPr/>
+          <p:nvPr/>
+        </p:nvSpPr>
+        <p:spPr>
+          <a:xfrm>
+            <a:off x="8732520" y="3398519"/>
+            <a:ext cx="457200" cy="457200"/>
+          </a:xfrm>
+          <a:prstGeom prst="roundRect">
+            <a:avLst/>
+          </a:prstGeom>
+          <a:solidFill>
+            <a:srgbClr val="E5F1F8"/>
+          </a:solidFill>
+          <a:ln>
+            <a:solidFill>
+              <a:schemeClr val="tx1"/>
+            </a:solidFill>
+          </a:ln>
+        </p:spPr>
+        <p:style>
+          <a:lnRef idx="2">
+            <a:schemeClr val="accent1">
+              <a:shade val="15000"/>
+            </a:schemeClr>
+          </a:lnRef>
+          <a:fillRef idx="1">
+            <a:schemeClr val="accent1"/>
+          </a:fillRef>
+          <a:effectRef idx="0">
+            <a:schemeClr val="accent1"/>
+          </a:effectRef>
+          <a:fontRef idx="minor">
+            <a:schemeClr val="lt1"/>
+          </a:fontRef>
+        </p:style>
+        <p:txBody>
+          <a:bodyPr rtlCol="0" anchor="ctr"/>
+          <a:lstStyle/>
+          <a:p>
+            <a:pPr algn="ctr"/>
+            <a:endParaRPr lang="en-US" dirty="0">
+              <a:solidFill>
+                <a:schemeClr val="tx1"/>
+              </a:solidFill>
+            </a:endParaRPr>
+          </a:p>
+        </p:txBody>
+      </p:sp>
+      <p:cxnSp>
+        <p:nvCxnSpPr>
+          <p:cNvPr id="47" name="Straight Arrow Connector 46">
+            <a:extLst>
+              <a:ext uri="{FF2B5EF4-FFF2-40B4-BE49-F238E27FC236}">
+                <a16:creationId xmlns:a16="http://schemas.microsoft.com/office/drawing/2014/main" id="{42D77B26-2C1F-3022-9B0B-3736BC5CF8AA}"/>
+              </a:ext>
+            </a:extLst>
+          </p:cNvPr>
+          <p:cNvCxnSpPr>
+            <a:cxnSpLocks/>
+            <a:stCxn id="3" idx="3"/>
+            <a:endCxn id="44" idx="1"/>
+          </p:cNvCxnSpPr>
+          <p:nvPr/>
+        </p:nvCxnSpPr>
+        <p:spPr>
+          <a:xfrm>
+            <a:off x="8328660" y="2854154"/>
+            <a:ext cx="403860" cy="1"/>
+          </a:xfrm>
+          <a:prstGeom prst="straightConnector1">
+            <a:avLst/>
+          </a:prstGeom>
+          <a:ln>
+            <a:solidFill>
+              <a:schemeClr val="tx1"/>
+            </a:solidFill>
+            <a:prstDash val="solid"/>
+            <a:tailEnd type="triangle" w="lg" len="lg"/>
+          </a:ln>
+        </p:spPr>
+        <p:style>
+          <a:lnRef idx="2">
+            <a:schemeClr val="accent1"/>
+          </a:lnRef>
+          <a:fillRef idx="0">
+            <a:schemeClr val="accent1"/>
+          </a:fillRef>
+          <a:effectRef idx="1">
+            <a:schemeClr val="accent1"/>
+          </a:effectRef>
+          <a:fontRef idx="minor">
+            <a:schemeClr val="tx1"/>
+          </a:fontRef>
+        </p:style>
+      </p:cxnSp>
+      <p:cxnSp>
+        <p:nvCxnSpPr>
+          <p:cNvPr id="55" name="Straight Arrow Connector 54">
+            <a:extLst>
+              <a:ext uri="{FF2B5EF4-FFF2-40B4-BE49-F238E27FC236}">
+                <a16:creationId xmlns:a16="http://schemas.microsoft.com/office/drawing/2014/main" id="{A99ECFB6-8E63-4F62-C5D3-37BC5BB43934}"/>
+              </a:ext>
+            </a:extLst>
+          </p:cNvPr>
+          <p:cNvCxnSpPr>
+            <a:cxnSpLocks/>
+            <a:stCxn id="2" idx="3"/>
+            <a:endCxn id="46" idx="1"/>
+          </p:cNvCxnSpPr>
+          <p:nvPr/>
+        </p:nvCxnSpPr>
+        <p:spPr>
+          <a:xfrm flipV="1">
+            <a:off x="8328660" y="3627119"/>
+            <a:ext cx="403860" cy="1"/>
+          </a:xfrm>
+          <a:prstGeom prst="straightConnector1">
+            <a:avLst/>
+          </a:prstGeom>
+          <a:ln>
+            <a:solidFill>
+              <a:schemeClr val="tx1"/>
+            </a:solidFill>
+            <a:prstDash val="solid"/>
+            <a:tailEnd type="triangle" w="lg" len="lg"/>
+          </a:ln>
+        </p:spPr>
+        <p:style>
+          <a:lnRef idx="2">
+            <a:schemeClr val="accent1"/>
+          </a:lnRef>
+          <a:fillRef idx="0">
+            <a:schemeClr val="accent1"/>
+          </a:fillRef>
+          <a:effectRef idx="1">
+            <a:schemeClr val="accent1"/>
+          </a:effectRef>
+          <a:fontRef idx="minor">
+            <a:schemeClr val="tx1"/>
+          </a:fontRef>
+        </p:style>
+      </p:cxnSp>
+      <p:cxnSp>
+        <p:nvCxnSpPr>
+          <p:cNvPr id="58" name="Connector: Elbow 57">
+            <a:extLst>
+              <a:ext uri="{FF2B5EF4-FFF2-40B4-BE49-F238E27FC236}">
+                <a16:creationId xmlns:a16="http://schemas.microsoft.com/office/drawing/2014/main" id="{DDB500F1-F165-AABE-6725-11E4ED79023E}"/>
+              </a:ext>
+            </a:extLst>
+          </p:cNvPr>
+          <p:cNvCxnSpPr>
+            <a:cxnSpLocks/>
+            <a:stCxn id="25" idx="3"/>
+            <a:endCxn id="6" idx="1"/>
+          </p:cNvCxnSpPr>
+          <p:nvPr/>
+        </p:nvCxnSpPr>
+        <p:spPr>
+          <a:xfrm>
+            <a:off x="9189720" y="2081191"/>
+            <a:ext cx="647700" cy="772964"/>
+          </a:xfrm>
+          <a:prstGeom prst="bentConnector3">
+            <a:avLst>
+              <a:gd name="adj1" fmla="val 50000"/>
+            </a:avLst>
+          </a:prstGeom>
+          <a:ln>
+            <a:solidFill>
+              <a:schemeClr val="tx1"/>
+            </a:solidFill>
+            <a:prstDash val="solid"/>
+            <a:tailEnd type="triangle" w="lg" len="lg"/>
+          </a:ln>
+        </p:spPr>
+        <p:style>
+          <a:lnRef idx="2">
+            <a:schemeClr val="accent1"/>
+          </a:lnRef>
+          <a:fillRef idx="0">
+            <a:schemeClr val="accent1"/>
+          </a:fillRef>
+          <a:effectRef idx="1">
+            <a:schemeClr val="accent1"/>
+          </a:effectRef>
+          <a:fontRef idx="minor">
+            <a:schemeClr val="tx1"/>
+          </a:fontRef>
+        </p:style>
+      </p:cxnSp>
+      <p:cxnSp>
+        <p:nvCxnSpPr>
+          <p:cNvPr id="61" name="Connector: Elbow 60">
+            <a:extLst>
+              <a:ext uri="{FF2B5EF4-FFF2-40B4-BE49-F238E27FC236}">
+                <a16:creationId xmlns:a16="http://schemas.microsoft.com/office/drawing/2014/main" id="{28AC6A5D-0A01-5370-996D-AF8698A1082D}"/>
+              </a:ext>
+            </a:extLst>
+          </p:cNvPr>
+          <p:cNvCxnSpPr>
+            <a:cxnSpLocks/>
+            <a:stCxn id="46" idx="3"/>
+            <a:endCxn id="6" idx="1"/>
+          </p:cNvCxnSpPr>
+          <p:nvPr/>
+        </p:nvCxnSpPr>
+        <p:spPr>
+          <a:xfrm flipV="1">
+            <a:off x="9189720" y="2854155"/>
+            <a:ext cx="647700" cy="772964"/>
+          </a:xfrm>
+          <a:prstGeom prst="bentConnector3">
+            <a:avLst>
+              <a:gd name="adj1" fmla="val 50000"/>
+            </a:avLst>
+          </a:prstGeom>
+          <a:ln>
+            <a:solidFill>
+              <a:schemeClr val="tx1"/>
+            </a:solidFill>
+            <a:prstDash val="solid"/>
+            <a:tailEnd type="triangle" w="lg" len="lg"/>
+          </a:ln>
+        </p:spPr>
+        <p:style>
+          <a:lnRef idx="2">
+            <a:schemeClr val="accent1"/>
+          </a:lnRef>
+          <a:fillRef idx="0">
+            <a:schemeClr val="accent1"/>
+          </a:fillRef>
+          <a:effectRef idx="1">
+            <a:schemeClr val="accent1"/>
+          </a:effectRef>
+          <a:fontRef idx="minor">
+            <a:schemeClr val="tx1"/>
+          </a:fontRef>
+        </p:style>
+      </p:cxnSp>
       <p:pic>
         <p:nvPicPr>
-          <p:cNvPr id="3" name="Picture 2">
-            <a:extLst>
-              <a:ext uri="{FF2B5EF4-FFF2-40B4-BE49-F238E27FC236}">
-                <a16:creationId xmlns:a16="http://schemas.microsoft.com/office/drawing/2014/main" id="{FD8E52CD-5961-A7C1-3607-A00CDD4774AD}"/>
+          <p:cNvPr id="67" name="Graphic 66" descr="Web design with solid fill">
+            <a:extLst>
+              <a:ext uri="{FF2B5EF4-FFF2-40B4-BE49-F238E27FC236}">
+                <a16:creationId xmlns:a16="http://schemas.microsoft.com/office/drawing/2014/main" id="{5D8BB564-5BA8-868D-2AB7-35E0D3AE65F9}"/>
               </a:ext>
             </a:extLst>
           </p:cNvPr>
@@ -6190,25 +8204,294 @@
           <p:nvPr/>
         </p:nvPicPr>
         <p:blipFill>
-          <a:blip r:embed="rId2"/>
+          <a:blip r:embed="rId2">
+            <a:extLst>
+              <a:ext uri="{96DAC541-7B7A-43D3-8B79-37D633B846F1}">
+                <asvg:svgBlip xmlns:asvg="http://schemas.microsoft.com/office/drawing/2016/SVG/main" r:embed="rId3"/>
+              </a:ext>
+            </a:extLst>
+          </a:blip>
           <a:stretch>
             <a:fillRect/>
           </a:stretch>
         </p:blipFill>
         <p:spPr>
           <a:xfrm>
-            <a:off x="0" y="23812"/>
-            <a:ext cx="12192000" cy="6810375"/>
+            <a:off x="8755380" y="2648413"/>
+            <a:ext cx="411480" cy="411480"/>
           </a:xfrm>
           <a:prstGeom prst="rect">
             <a:avLst/>
           </a:prstGeom>
         </p:spPr>
       </p:pic>
+      <p:pic>
+        <p:nvPicPr>
+          <p:cNvPr id="71" name="Graphic 70" descr="World with solid fill">
+            <a:extLst>
+              <a:ext uri="{FF2B5EF4-FFF2-40B4-BE49-F238E27FC236}">
+                <a16:creationId xmlns:a16="http://schemas.microsoft.com/office/drawing/2014/main" id="{0EF50C39-FA5F-96A6-2DE6-53C76B029FDB}"/>
+              </a:ext>
+            </a:extLst>
+          </p:cNvPr>
+          <p:cNvPicPr>
+            <a:picLocks noChangeAspect="1"/>
+          </p:cNvPicPr>
+          <p:nvPr/>
+        </p:nvPicPr>
+        <p:blipFill>
+          <a:blip r:embed="rId4">
+            <a:extLst>
+              <a:ext uri="{96DAC541-7B7A-43D3-8B79-37D633B846F1}">
+                <asvg:svgBlip xmlns:asvg="http://schemas.microsoft.com/office/drawing/2016/SVG/main" r:embed="rId5"/>
+              </a:ext>
+            </a:extLst>
+          </a:blip>
+          <a:stretch>
+            <a:fillRect/>
+          </a:stretch>
+        </p:blipFill>
+        <p:spPr>
+          <a:xfrm>
+            <a:off x="8755380" y="3421379"/>
+            <a:ext cx="411480" cy="411480"/>
+          </a:xfrm>
+          <a:prstGeom prst="rect">
+            <a:avLst/>
+          </a:prstGeom>
+        </p:spPr>
+      </p:pic>
+      <p:pic>
+        <p:nvPicPr>
+          <p:cNvPr id="73" name="Graphic 72" descr="Database with solid fill">
+            <a:extLst>
+              <a:ext uri="{FF2B5EF4-FFF2-40B4-BE49-F238E27FC236}">
+                <a16:creationId xmlns:a16="http://schemas.microsoft.com/office/drawing/2014/main" id="{20B0889E-3ACA-9DCA-25FE-C1F9B73F7329}"/>
+              </a:ext>
+            </a:extLst>
+          </p:cNvPr>
+          <p:cNvPicPr>
+            <a:picLocks noChangeAspect="1"/>
+          </p:cNvPicPr>
+          <p:nvPr/>
+        </p:nvPicPr>
+        <p:blipFill>
+          <a:blip r:embed="rId6">
+            <a:extLst>
+              <a:ext uri="{96DAC541-7B7A-43D3-8B79-37D633B846F1}">
+                <asvg:svgBlip xmlns:asvg="http://schemas.microsoft.com/office/drawing/2016/SVG/main" r:embed="rId7"/>
+              </a:ext>
+            </a:extLst>
+          </a:blip>
+          <a:stretch>
+            <a:fillRect/>
+          </a:stretch>
+        </p:blipFill>
+        <p:spPr>
+          <a:xfrm>
+            <a:off x="8755380" y="1875451"/>
+            <a:ext cx="411480" cy="411480"/>
+          </a:xfrm>
+          <a:prstGeom prst="rect">
+            <a:avLst/>
+          </a:prstGeom>
+        </p:spPr>
+      </p:pic>
+      <p:pic>
+        <p:nvPicPr>
+          <p:cNvPr id="75" name="Graphic 74" descr="Gears with solid fill">
+            <a:extLst>
+              <a:ext uri="{FF2B5EF4-FFF2-40B4-BE49-F238E27FC236}">
+                <a16:creationId xmlns:a16="http://schemas.microsoft.com/office/drawing/2014/main" id="{AFA7CC75-0D4E-9273-3BC2-179536E5EC20}"/>
+              </a:ext>
+            </a:extLst>
+          </p:cNvPr>
+          <p:cNvPicPr>
+            <a:picLocks noChangeAspect="1"/>
+          </p:cNvPicPr>
+          <p:nvPr/>
+        </p:nvPicPr>
+        <p:blipFill>
+          <a:blip r:embed="rId8">
+            <a:extLst>
+              <a:ext uri="{96DAC541-7B7A-43D3-8B79-37D633B846F1}">
+                <asvg:svgBlip xmlns:asvg="http://schemas.microsoft.com/office/drawing/2016/SVG/main" r:embed="rId9"/>
+              </a:ext>
+            </a:extLst>
+          </a:blip>
+          <a:stretch>
+            <a:fillRect/>
+          </a:stretch>
+        </p:blipFill>
+        <p:spPr>
+          <a:xfrm>
+            <a:off x="1626048" y="2648413"/>
+            <a:ext cx="411480" cy="411480"/>
+          </a:xfrm>
+          <a:prstGeom prst="rect">
+            <a:avLst/>
+          </a:prstGeom>
+        </p:spPr>
+      </p:pic>
+      <p:sp>
+        <p:nvSpPr>
+          <p:cNvPr id="76" name="Rectangle: Rounded Corners 75">
+            <a:extLst>
+              <a:ext uri="{FF2B5EF4-FFF2-40B4-BE49-F238E27FC236}">
+                <a16:creationId xmlns:a16="http://schemas.microsoft.com/office/drawing/2014/main" id="{3492D89A-8D12-E69E-613E-246E45DCD83F}"/>
+              </a:ext>
+            </a:extLst>
+          </p:cNvPr>
+          <p:cNvSpPr/>
+          <p:nvPr/>
+        </p:nvSpPr>
+        <p:spPr>
+          <a:xfrm>
+            <a:off x="10545258" y="3627118"/>
+            <a:ext cx="1205604" cy="469096"/>
+          </a:xfrm>
+          <a:prstGeom prst="roundRect">
+            <a:avLst/>
+          </a:prstGeom>
+          <a:solidFill>
+            <a:srgbClr val="E5F1F8"/>
+          </a:solidFill>
+          <a:ln>
+            <a:solidFill>
+              <a:schemeClr val="tx1"/>
+            </a:solidFill>
+          </a:ln>
+        </p:spPr>
+        <p:style>
+          <a:lnRef idx="2">
+            <a:schemeClr val="accent1">
+              <a:shade val="15000"/>
+            </a:schemeClr>
+          </a:lnRef>
+          <a:fillRef idx="1">
+            <a:schemeClr val="accent1"/>
+          </a:fillRef>
+          <a:effectRef idx="0">
+            <a:schemeClr val="accent1"/>
+          </a:effectRef>
+          <a:fontRef idx="minor">
+            <a:schemeClr val="lt1"/>
+          </a:fontRef>
+        </p:style>
+        <p:txBody>
+          <a:bodyPr rtlCol="0" anchor="ctr"/>
+          <a:lstStyle/>
+          <a:p>
+            <a:pPr algn="ctr"/>
+            <a:r>
+              <a:rPr lang="en-US" dirty="0">
+                <a:solidFill>
+                  <a:schemeClr val="tx1"/>
+                </a:solidFill>
+              </a:rPr>
+              <a:t>Response</a:t>
+            </a:r>
+          </a:p>
+        </p:txBody>
+      </p:sp>
+      <p:cxnSp>
+        <p:nvCxnSpPr>
+          <p:cNvPr id="77" name="Straight Arrow Connector 76">
+            <a:extLst>
+              <a:ext uri="{FF2B5EF4-FFF2-40B4-BE49-F238E27FC236}">
+                <a16:creationId xmlns:a16="http://schemas.microsoft.com/office/drawing/2014/main" id="{1A734903-BE53-2153-B1BE-7817395A6ACC}"/>
+              </a:ext>
+            </a:extLst>
+          </p:cNvPr>
+          <p:cNvCxnSpPr>
+            <a:cxnSpLocks/>
+            <a:endCxn id="76" idx="0"/>
+          </p:cNvCxnSpPr>
+          <p:nvPr/>
+        </p:nvCxnSpPr>
+        <p:spPr>
+          <a:xfrm>
+            <a:off x="11148060" y="3334214"/>
+            <a:ext cx="0" cy="292904"/>
+          </a:xfrm>
+          <a:prstGeom prst="straightConnector1">
+            <a:avLst/>
+          </a:prstGeom>
+          <a:ln>
+            <a:solidFill>
+              <a:schemeClr val="tx1"/>
+            </a:solidFill>
+            <a:prstDash val="sysDash"/>
+            <a:tailEnd type="triangle" w="lg" len="lg"/>
+          </a:ln>
+        </p:spPr>
+        <p:style>
+          <a:lnRef idx="2">
+            <a:schemeClr val="accent1"/>
+          </a:lnRef>
+          <a:fillRef idx="0">
+            <a:schemeClr val="accent1"/>
+          </a:fillRef>
+          <a:effectRef idx="1">
+            <a:schemeClr val="accent1"/>
+          </a:effectRef>
+          <a:fontRef idx="minor">
+            <a:schemeClr val="tx1"/>
+          </a:fontRef>
+        </p:style>
+      </p:cxnSp>
+      <p:cxnSp>
+        <p:nvCxnSpPr>
+          <p:cNvPr id="14" name="Connector: Elbow 13">
+            <a:extLst>
+              <a:ext uri="{FF2B5EF4-FFF2-40B4-BE49-F238E27FC236}">
+                <a16:creationId xmlns:a16="http://schemas.microsoft.com/office/drawing/2014/main" id="{4D371B40-23D5-3632-64F0-3A5DAC685C2C}"/>
+              </a:ext>
+            </a:extLst>
+          </p:cNvPr>
+          <p:cNvCxnSpPr>
+            <a:cxnSpLocks/>
+            <a:endCxn id="5" idx="2"/>
+          </p:cNvCxnSpPr>
+          <p:nvPr/>
+        </p:nvCxnSpPr>
+        <p:spPr>
+          <a:xfrm rot="5400000">
+            <a:off x="6337265" y="-538391"/>
+            <a:ext cx="12700" cy="7745211"/>
+          </a:xfrm>
+          <a:prstGeom prst="bentConnector3">
+            <a:avLst>
+              <a:gd name="adj1" fmla="val 6060000"/>
+            </a:avLst>
+          </a:prstGeom>
+          <a:ln>
+            <a:solidFill>
+              <a:schemeClr val="tx1"/>
+            </a:solidFill>
+            <a:prstDash val="sysDash"/>
+            <a:tailEnd type="triangle" w="lg" len="lg"/>
+          </a:ln>
+        </p:spPr>
+        <p:style>
+          <a:lnRef idx="2">
+            <a:schemeClr val="accent1"/>
+          </a:lnRef>
+          <a:fillRef idx="0">
+            <a:schemeClr val="accent1"/>
+          </a:fillRef>
+          <a:effectRef idx="1">
+            <a:schemeClr val="accent1"/>
+          </a:effectRef>
+          <a:fontRef idx="minor">
+            <a:schemeClr val="tx1"/>
+          </a:fontRef>
+        </p:style>
+      </p:cxnSp>
     </p:spTree>
     <p:extLst>
       <p:ext uri="{BB962C8B-B14F-4D97-AF65-F5344CB8AC3E}">
-        <p14:creationId xmlns:p14="http://schemas.microsoft.com/office/powerpoint/2010/main" val="3564074342"/>
+        <p14:creationId xmlns:p14="http://schemas.microsoft.com/office/powerpoint/2010/main" val="2560175498"/>
       </p:ext>
     </p:extLst>
   </p:cSld>
@@ -6240,7 +8523,7 @@
           <p:cNvPr id="3" name="Picture 2">
             <a:extLst>
               <a:ext uri="{FF2B5EF4-FFF2-40B4-BE49-F238E27FC236}">
-                <a16:creationId xmlns:a16="http://schemas.microsoft.com/office/drawing/2014/main" id="{D6A42420-8E3C-777D-C41A-540741D913CD}"/>
+                <a16:creationId xmlns:a16="http://schemas.microsoft.com/office/drawing/2014/main" id="{FD8E52CD-5961-A7C1-3607-A00CDD4774AD}"/>
               </a:ext>
             </a:extLst>
           </p:cNvPr>
@@ -6257,8 +8540,8 @@
         </p:blipFill>
         <p:spPr>
           <a:xfrm>
-            <a:off x="0" y="7451"/>
-            <a:ext cx="12192000" cy="6843098"/>
+            <a:off x="0" y="23812"/>
+            <a:ext cx="12192000" cy="6810375"/>
           </a:xfrm>
           <a:prstGeom prst="rect">
             <a:avLst/>
@@ -6268,7 +8551,7 @@
     </p:spTree>
     <p:extLst>
       <p:ext uri="{BB962C8B-B14F-4D97-AF65-F5344CB8AC3E}">
-        <p14:creationId xmlns:p14="http://schemas.microsoft.com/office/powerpoint/2010/main" val="3996994306"/>
+        <p14:creationId xmlns:p14="http://schemas.microsoft.com/office/powerpoint/2010/main" val="3564074342"/>
       </p:ext>
     </p:extLst>
   </p:cSld>
@@ -6300,6 +8583,66 @@
           <p:cNvPr id="3" name="Picture 2">
             <a:extLst>
               <a:ext uri="{FF2B5EF4-FFF2-40B4-BE49-F238E27FC236}">
+                <a16:creationId xmlns:a16="http://schemas.microsoft.com/office/drawing/2014/main" id="{D6A42420-8E3C-777D-C41A-540741D913CD}"/>
+              </a:ext>
+            </a:extLst>
+          </p:cNvPr>
+          <p:cNvPicPr>
+            <a:picLocks noChangeAspect="1"/>
+          </p:cNvPicPr>
+          <p:nvPr/>
+        </p:nvPicPr>
+        <p:blipFill>
+          <a:blip r:embed="rId2"/>
+          <a:stretch>
+            <a:fillRect/>
+          </a:stretch>
+        </p:blipFill>
+        <p:spPr>
+          <a:xfrm>
+            <a:off x="0" y="7451"/>
+            <a:ext cx="12192000" cy="6843098"/>
+          </a:xfrm>
+          <a:prstGeom prst="rect">
+            <a:avLst/>
+          </a:prstGeom>
+        </p:spPr>
+      </p:pic>
+    </p:spTree>
+    <p:extLst>
+      <p:ext uri="{BB962C8B-B14F-4D97-AF65-F5344CB8AC3E}">
+        <p14:creationId xmlns:p14="http://schemas.microsoft.com/office/powerpoint/2010/main" val="3996994306"/>
+      </p:ext>
+    </p:extLst>
+  </p:cSld>
+  <p:clrMapOvr>
+    <a:masterClrMapping/>
+  </p:clrMapOvr>
+</p:sld>
+</file>
+
+<file path=ppt/slides/slide16.xml><?xml version="1.0" encoding="utf-8"?>
+<p:sld xmlns:a="http://schemas.openxmlformats.org/drawingml/2006/main" xmlns:r="http://schemas.openxmlformats.org/officeDocument/2006/relationships" xmlns:p="http://schemas.openxmlformats.org/presentationml/2006/main">
+  <p:cSld>
+    <p:spTree>
+      <p:nvGrpSpPr>
+        <p:cNvPr id="1" name=""/>
+        <p:cNvGrpSpPr/>
+        <p:nvPr/>
+      </p:nvGrpSpPr>
+      <p:grpSpPr>
+        <a:xfrm>
+          <a:off x="0" y="0"/>
+          <a:ext cx="0" cy="0"/>
+          <a:chOff x="0" y="0"/>
+          <a:chExt cx="0" cy="0"/>
+        </a:xfrm>
+      </p:grpSpPr>
+      <p:pic>
+        <p:nvPicPr>
+          <p:cNvPr id="3" name="Picture 2">
+            <a:extLst>
+              <a:ext uri="{FF2B5EF4-FFF2-40B4-BE49-F238E27FC236}">
                 <a16:creationId xmlns:a16="http://schemas.microsoft.com/office/drawing/2014/main" id="{EE4867BA-66DD-B140-5528-856BCA343CD6}"/>
               </a:ext>
             </a:extLst>
@@ -6338,7 +8681,7 @@
 </p:sld>
 </file>
 
-<file path=ppt/slides/slide16.xml><?xml version="1.0" encoding="utf-8"?>
+<file path=ppt/slides/slide17.xml><?xml version="1.0" encoding="utf-8"?>
 <p:sld xmlns:a="http://schemas.openxmlformats.org/drawingml/2006/main" xmlns:r="http://schemas.openxmlformats.org/officeDocument/2006/relationships" xmlns:p="http://schemas.openxmlformats.org/presentationml/2006/main">
   <p:cSld>
     <p:spTree>
@@ -6404,7 +8747,7 @@
 </p:sld>
 </file>
 
-<file path=ppt/slides/slide17.xml><?xml version="1.0" encoding="utf-8"?>
+<file path=ppt/slides/slide18.xml><?xml version="1.0" encoding="utf-8"?>
 <p:sld xmlns:a="http://schemas.openxmlformats.org/drawingml/2006/main" xmlns:r="http://schemas.openxmlformats.org/officeDocument/2006/relationships" xmlns:p="http://schemas.openxmlformats.org/presentationml/2006/main">
   <p:cSld>
     <p:spTree>
@@ -6494,7 +8837,7 @@
 </p:sld>
 </file>
 
-<file path=ppt/slides/slide18.xml><?xml version="1.0" encoding="utf-8"?>
+<file path=ppt/slides/slide19.xml><?xml version="1.0" encoding="utf-8"?>
 <p:sld xmlns:a="http://schemas.openxmlformats.org/drawingml/2006/main" xmlns:r="http://schemas.openxmlformats.org/officeDocument/2006/relationships" xmlns:p="http://schemas.openxmlformats.org/presentationml/2006/main">
   <p:cSld>
     <p:spTree>
@@ -6530,7 +8873,637 @@
 </p:sld>
 </file>
 
-<file path=ppt/slides/slide19.xml><?xml version="1.0" encoding="utf-8"?>
+<file path=ppt/slides/slide2.xml><?xml version="1.0" encoding="utf-8"?>
+<p:sld xmlns:a="http://schemas.openxmlformats.org/drawingml/2006/main" xmlns:r="http://schemas.openxmlformats.org/officeDocument/2006/relationships" xmlns:p="http://schemas.openxmlformats.org/presentationml/2006/main">
+  <p:cSld>
+    <p:spTree>
+      <p:nvGrpSpPr>
+        <p:cNvPr id="1" name=""/>
+        <p:cNvGrpSpPr/>
+        <p:nvPr/>
+      </p:nvGrpSpPr>
+      <p:grpSpPr>
+        <a:xfrm>
+          <a:off x="0" y="0"/>
+          <a:ext cx="0" cy="0"/>
+          <a:chOff x="0" y="0"/>
+          <a:chExt cx="0" cy="0"/>
+        </a:xfrm>
+      </p:grpSpPr>
+      <p:pic>
+        <p:nvPicPr>
+          <p:cNvPr id="2050" name="Picture 2" descr="Diagram showing Foundry resource containing multiple projects, each with deployments and connections.">
+            <a:extLst>
+              <a:ext uri="{FF2B5EF4-FFF2-40B4-BE49-F238E27FC236}">
+                <a16:creationId xmlns:a16="http://schemas.microsoft.com/office/drawing/2014/main" id="{12EEA84E-8776-00EF-5D97-05E8737B61E3}"/>
+              </a:ext>
+            </a:extLst>
+          </p:cNvPr>
+          <p:cNvPicPr>
+            <a:picLocks noChangeAspect="1" noChangeArrowheads="1"/>
+          </p:cNvPicPr>
+          <p:nvPr/>
+        </p:nvPicPr>
+        <p:blipFill>
+          <a:blip r:embed="rId3">
+            <a:clrChange>
+              <a:clrFrom>
+                <a:srgbClr val="FFFFFF"/>
+              </a:clrFrom>
+              <a:clrTo>
+                <a:srgbClr val="FFFFFF">
+                  <a:alpha val="0"/>
+                </a:srgbClr>
+              </a:clrTo>
+            </a:clrChange>
+            <a:extLst>
+              <a:ext uri="{28A0092B-C50C-407E-A947-70E740481C1C}">
+                <a14:useLocalDpi xmlns:a14="http://schemas.microsoft.com/office/drawing/2010/main" val="0"/>
+              </a:ext>
+            </a:extLst>
+          </a:blip>
+          <a:srcRect/>
+          <a:stretch>
+            <a:fillRect/>
+          </a:stretch>
+        </p:blipFill>
+        <p:spPr bwMode="auto">
+          <a:xfrm>
+            <a:off x="6607866" y="3166424"/>
+            <a:ext cx="5524500" cy="3667125"/>
+          </a:xfrm>
+          <a:prstGeom prst="rect">
+            <a:avLst/>
+          </a:prstGeom>
+          <a:noFill/>
+          <a:extLst>
+            <a:ext uri="{909E8E84-426E-40DD-AFC4-6F175D3DCCD1}">
+              <a14:hiddenFill xmlns:a14="http://schemas.microsoft.com/office/drawing/2010/main">
+                <a:solidFill>
+                  <a:srgbClr val="FFFFFF"/>
+                </a:solidFill>
+              </a14:hiddenFill>
+            </a:ext>
+          </a:extLst>
+        </p:spPr>
+      </p:pic>
+      <p:sp>
+        <p:nvSpPr>
+          <p:cNvPr id="4" name="Rectangle: Rounded Corners 3">
+            <a:extLst>
+              <a:ext uri="{FF2B5EF4-FFF2-40B4-BE49-F238E27FC236}">
+                <a16:creationId xmlns:a16="http://schemas.microsoft.com/office/drawing/2014/main" id="{F839DD77-409D-94ED-8A62-6F53CBB88ADD}"/>
+              </a:ext>
+            </a:extLst>
+          </p:cNvPr>
+          <p:cNvSpPr/>
+          <p:nvPr/>
+        </p:nvSpPr>
+        <p:spPr>
+          <a:xfrm>
+            <a:off x="962568" y="732317"/>
+            <a:ext cx="4456090" cy="2434107"/>
+          </a:xfrm>
+          <a:prstGeom prst="roundRect">
+            <a:avLst>
+              <a:gd name="adj" fmla="val 5234"/>
+            </a:avLst>
+          </a:prstGeom>
+          <a:solidFill>
+            <a:schemeClr val="bg1"/>
+          </a:solidFill>
+          <a:ln>
+            <a:solidFill>
+              <a:schemeClr val="tx1"/>
+            </a:solidFill>
+          </a:ln>
+        </p:spPr>
+        <p:style>
+          <a:lnRef idx="2">
+            <a:schemeClr val="accent1">
+              <a:shade val="15000"/>
+            </a:schemeClr>
+          </a:lnRef>
+          <a:fillRef idx="1">
+            <a:schemeClr val="accent1"/>
+          </a:fillRef>
+          <a:effectRef idx="0">
+            <a:schemeClr val="accent1"/>
+          </a:effectRef>
+          <a:fontRef idx="minor">
+            <a:schemeClr val="lt1"/>
+          </a:fontRef>
+        </p:style>
+        <p:txBody>
+          <a:bodyPr rtlCol="0" anchor="t"/>
+          <a:lstStyle/>
+          <a:p>
+            <a:pPr algn="ctr"/>
+            <a:r>
+              <a:rPr lang="en-US" dirty="0">
+                <a:solidFill>
+                  <a:schemeClr val="tx1"/>
+                </a:solidFill>
+              </a:rPr>
+              <a:t>Foundry Resource</a:t>
+            </a:r>
+          </a:p>
+        </p:txBody>
+      </p:sp>
+      <p:sp>
+        <p:nvSpPr>
+          <p:cNvPr id="5" name="Rectangle: Rounded Corners 4">
+            <a:extLst>
+              <a:ext uri="{FF2B5EF4-FFF2-40B4-BE49-F238E27FC236}">
+                <a16:creationId xmlns:a16="http://schemas.microsoft.com/office/drawing/2014/main" id="{CFAF0893-8AEC-1DBB-B036-2949BA0795A0}"/>
+              </a:ext>
+            </a:extLst>
+          </p:cNvPr>
+          <p:cNvSpPr/>
+          <p:nvPr/>
+        </p:nvSpPr>
+        <p:spPr>
+          <a:xfrm>
+            <a:off x="2410311" y="1494888"/>
+            <a:ext cx="1080042" cy="694520"/>
+          </a:xfrm>
+          <a:prstGeom prst="roundRect">
+            <a:avLst/>
+          </a:prstGeom>
+          <a:solidFill>
+            <a:srgbClr val="E5F1F8"/>
+          </a:solidFill>
+          <a:ln>
+            <a:solidFill>
+              <a:schemeClr val="tx1"/>
+            </a:solidFill>
+          </a:ln>
+        </p:spPr>
+        <p:style>
+          <a:lnRef idx="2">
+            <a:schemeClr val="accent1">
+              <a:shade val="15000"/>
+            </a:schemeClr>
+          </a:lnRef>
+          <a:fillRef idx="1">
+            <a:schemeClr val="accent1"/>
+          </a:fillRef>
+          <a:effectRef idx="0">
+            <a:schemeClr val="accent1"/>
+          </a:effectRef>
+          <a:fontRef idx="minor">
+            <a:schemeClr val="lt1"/>
+          </a:fontRef>
+        </p:style>
+        <p:txBody>
+          <a:bodyPr rtlCol="0" anchor="ctr"/>
+          <a:lstStyle/>
+          <a:p>
+            <a:pPr algn="ctr"/>
+            <a:r>
+              <a:rPr lang="en-US" dirty="0">
+                <a:solidFill>
+                  <a:schemeClr val="tx1"/>
+                </a:solidFill>
+              </a:rPr>
+              <a:t>Project</a:t>
+            </a:r>
+          </a:p>
+          <a:p>
+            <a:pPr algn="ctr"/>
+            <a:r>
+              <a:rPr lang="en-US" dirty="0">
+                <a:solidFill>
+                  <a:schemeClr val="tx1"/>
+                </a:solidFill>
+              </a:rPr>
+              <a:t>2</a:t>
+            </a:r>
+          </a:p>
+        </p:txBody>
+      </p:sp>
+      <p:sp>
+        <p:nvSpPr>
+          <p:cNvPr id="6" name="Rectangle: Rounded Corners 5">
+            <a:extLst>
+              <a:ext uri="{FF2B5EF4-FFF2-40B4-BE49-F238E27FC236}">
+                <a16:creationId xmlns:a16="http://schemas.microsoft.com/office/drawing/2014/main" id="{A7E630FB-2D59-D6DB-B847-29F7E0317AFA}"/>
+              </a:ext>
+            </a:extLst>
+          </p:cNvPr>
+          <p:cNvSpPr/>
+          <p:nvPr/>
+        </p:nvSpPr>
+        <p:spPr>
+          <a:xfrm>
+            <a:off x="1183452" y="1494888"/>
+            <a:ext cx="1080042" cy="694520"/>
+          </a:xfrm>
+          <a:prstGeom prst="roundRect">
+            <a:avLst/>
+          </a:prstGeom>
+          <a:solidFill>
+            <a:srgbClr val="E5F1F8"/>
+          </a:solidFill>
+          <a:ln>
+            <a:solidFill>
+              <a:schemeClr val="tx1"/>
+            </a:solidFill>
+          </a:ln>
+        </p:spPr>
+        <p:style>
+          <a:lnRef idx="2">
+            <a:schemeClr val="accent1">
+              <a:shade val="15000"/>
+            </a:schemeClr>
+          </a:lnRef>
+          <a:fillRef idx="1">
+            <a:schemeClr val="accent1"/>
+          </a:fillRef>
+          <a:effectRef idx="0">
+            <a:schemeClr val="accent1"/>
+          </a:effectRef>
+          <a:fontRef idx="minor">
+            <a:schemeClr val="lt1"/>
+          </a:fontRef>
+        </p:style>
+        <p:txBody>
+          <a:bodyPr rtlCol="0" anchor="ctr"/>
+          <a:lstStyle/>
+          <a:p>
+            <a:pPr algn="ctr"/>
+            <a:r>
+              <a:rPr lang="en-US" dirty="0">
+                <a:solidFill>
+                  <a:schemeClr val="tx1"/>
+                </a:solidFill>
+              </a:rPr>
+              <a:t>Project</a:t>
+            </a:r>
+          </a:p>
+          <a:p>
+            <a:pPr algn="ctr"/>
+            <a:r>
+              <a:rPr lang="en-US" dirty="0">
+                <a:solidFill>
+                  <a:schemeClr val="tx1"/>
+                </a:solidFill>
+              </a:rPr>
+              <a:t>1</a:t>
+            </a:r>
+          </a:p>
+        </p:txBody>
+      </p:sp>
+      <p:sp>
+        <p:nvSpPr>
+          <p:cNvPr id="8" name="Rectangle: Rounded Corners 7">
+            <a:extLst>
+              <a:ext uri="{FF2B5EF4-FFF2-40B4-BE49-F238E27FC236}">
+                <a16:creationId xmlns:a16="http://schemas.microsoft.com/office/drawing/2014/main" id="{5E9103F9-368F-E4D0-C17C-BF0F1C74D31A}"/>
+              </a:ext>
+            </a:extLst>
+          </p:cNvPr>
+          <p:cNvSpPr/>
+          <p:nvPr/>
+        </p:nvSpPr>
+        <p:spPr>
+          <a:xfrm>
+            <a:off x="4117733" y="1494888"/>
+            <a:ext cx="1080042" cy="694520"/>
+          </a:xfrm>
+          <a:prstGeom prst="roundRect">
+            <a:avLst/>
+          </a:prstGeom>
+          <a:solidFill>
+            <a:srgbClr val="B2D4EB"/>
+          </a:solidFill>
+          <a:ln>
+            <a:solidFill>
+              <a:schemeClr val="tx1"/>
+            </a:solidFill>
+          </a:ln>
+        </p:spPr>
+        <p:style>
+          <a:lnRef idx="2">
+            <a:schemeClr val="accent1">
+              <a:shade val="15000"/>
+            </a:schemeClr>
+          </a:lnRef>
+          <a:fillRef idx="1">
+            <a:schemeClr val="accent1"/>
+          </a:fillRef>
+          <a:effectRef idx="0">
+            <a:schemeClr val="accent1"/>
+          </a:effectRef>
+          <a:fontRef idx="minor">
+            <a:schemeClr val="lt1"/>
+          </a:fontRef>
+        </p:style>
+        <p:txBody>
+          <a:bodyPr rtlCol="0" anchor="ctr"/>
+          <a:lstStyle/>
+          <a:p>
+            <a:pPr algn="ctr"/>
+            <a:r>
+              <a:rPr lang="en-US" dirty="0">
+                <a:solidFill>
+                  <a:schemeClr val="tx1"/>
+                </a:solidFill>
+              </a:rPr>
+              <a:t>Project</a:t>
+            </a:r>
+          </a:p>
+          <a:p>
+            <a:pPr algn="ctr"/>
+            <a:r>
+              <a:rPr lang="en-US" i="1" dirty="0">
+                <a:solidFill>
+                  <a:schemeClr val="tx1"/>
+                </a:solidFill>
+              </a:rPr>
+              <a:t>n</a:t>
+            </a:r>
+          </a:p>
+        </p:txBody>
+      </p:sp>
+      <p:sp>
+        <p:nvSpPr>
+          <p:cNvPr id="9" name="TextBox 8">
+            <a:extLst>
+              <a:ext uri="{FF2B5EF4-FFF2-40B4-BE49-F238E27FC236}">
+                <a16:creationId xmlns:a16="http://schemas.microsoft.com/office/drawing/2014/main" id="{C992B776-2029-F35D-E69F-FB22F1454014}"/>
+              </a:ext>
+            </a:extLst>
+          </p:cNvPr>
+          <p:cNvSpPr txBox="1"/>
+          <p:nvPr/>
+        </p:nvSpPr>
+        <p:spPr>
+          <a:xfrm>
+            <a:off x="3637170" y="1657482"/>
+            <a:ext cx="333746" cy="369332"/>
+          </a:xfrm>
+          <a:prstGeom prst="rect">
+            <a:avLst/>
+          </a:prstGeom>
+          <a:noFill/>
+        </p:spPr>
+        <p:txBody>
+          <a:bodyPr wrap="none" rtlCol="0" anchor="ctr">
+            <a:spAutoFit/>
+          </a:bodyPr>
+          <a:lstStyle/>
+          <a:p>
+            <a:r>
+              <a:rPr lang="en-US" dirty="0"/>
+              <a:t>…</a:t>
+            </a:r>
+          </a:p>
+        </p:txBody>
+      </p:sp>
+      <p:sp>
+        <p:nvSpPr>
+          <p:cNvPr id="10" name="Rectangle: Rounded Corners 9">
+            <a:extLst>
+              <a:ext uri="{FF2B5EF4-FFF2-40B4-BE49-F238E27FC236}">
+                <a16:creationId xmlns:a16="http://schemas.microsoft.com/office/drawing/2014/main" id="{B3CF4078-AF58-188A-DF99-E08A01A42DFE}"/>
+              </a:ext>
+            </a:extLst>
+          </p:cNvPr>
+          <p:cNvSpPr/>
+          <p:nvPr/>
+        </p:nvSpPr>
+        <p:spPr>
+          <a:xfrm>
+            <a:off x="1183452" y="2534516"/>
+            <a:ext cx="4014323" cy="369332"/>
+          </a:xfrm>
+          <a:prstGeom prst="roundRect">
+            <a:avLst/>
+          </a:prstGeom>
+          <a:solidFill>
+            <a:srgbClr val="B2D4EB"/>
+          </a:solidFill>
+          <a:ln>
+            <a:solidFill>
+              <a:schemeClr val="tx1"/>
+            </a:solidFill>
+          </a:ln>
+        </p:spPr>
+        <p:style>
+          <a:lnRef idx="2">
+            <a:schemeClr val="accent1">
+              <a:shade val="15000"/>
+            </a:schemeClr>
+          </a:lnRef>
+          <a:fillRef idx="1">
+            <a:schemeClr val="accent1"/>
+          </a:fillRef>
+          <a:effectRef idx="0">
+            <a:schemeClr val="accent1"/>
+          </a:effectRef>
+          <a:fontRef idx="minor">
+            <a:schemeClr val="lt1"/>
+          </a:fontRef>
+        </p:style>
+        <p:txBody>
+          <a:bodyPr rtlCol="0" anchor="ctr"/>
+          <a:lstStyle/>
+          <a:p>
+            <a:pPr algn="ctr"/>
+            <a:r>
+              <a:rPr lang="en-US" dirty="0">
+                <a:solidFill>
+                  <a:schemeClr val="tx1"/>
+                </a:solidFill>
+              </a:rPr>
+              <a:t>Security + Governance</a:t>
+            </a:r>
+            <a:endParaRPr lang="en-US" i="1" dirty="0">
+              <a:solidFill>
+                <a:schemeClr val="tx1"/>
+              </a:solidFill>
+            </a:endParaRPr>
+          </a:p>
+        </p:txBody>
+      </p:sp>
+      <p:cxnSp>
+        <p:nvCxnSpPr>
+          <p:cNvPr id="13" name="Straight Arrow Connector 12">
+            <a:extLst>
+              <a:ext uri="{FF2B5EF4-FFF2-40B4-BE49-F238E27FC236}">
+                <a16:creationId xmlns:a16="http://schemas.microsoft.com/office/drawing/2014/main" id="{B3C89E23-8123-0234-D0F1-F39C80D61B78}"/>
+              </a:ext>
+            </a:extLst>
+          </p:cNvPr>
+          <p:cNvCxnSpPr>
+            <a:stCxn id="8" idx="3"/>
+          </p:cNvCxnSpPr>
+          <p:nvPr/>
+        </p:nvCxnSpPr>
+        <p:spPr>
+          <a:xfrm>
+            <a:off x="5197775" y="1842148"/>
+            <a:ext cx="591279" cy="0"/>
+          </a:xfrm>
+          <a:prstGeom prst="straightConnector1">
+            <a:avLst/>
+          </a:prstGeom>
+          <a:ln>
+            <a:solidFill>
+              <a:schemeClr val="tx1"/>
+            </a:solidFill>
+            <a:prstDash val="sysDash"/>
+            <a:tailEnd type="triangle" w="lg" len="lg"/>
+          </a:ln>
+        </p:spPr>
+        <p:style>
+          <a:lnRef idx="2">
+            <a:schemeClr val="accent1"/>
+          </a:lnRef>
+          <a:fillRef idx="0">
+            <a:schemeClr val="accent1"/>
+          </a:fillRef>
+          <a:effectRef idx="1">
+            <a:schemeClr val="accent1"/>
+          </a:effectRef>
+          <a:fontRef idx="minor">
+            <a:schemeClr val="tx1"/>
+          </a:fontRef>
+        </p:style>
+      </p:cxnSp>
+      <p:sp>
+        <p:nvSpPr>
+          <p:cNvPr id="14" name="TextBox 13">
+            <a:extLst>
+              <a:ext uri="{FF2B5EF4-FFF2-40B4-BE49-F238E27FC236}">
+                <a16:creationId xmlns:a16="http://schemas.microsoft.com/office/drawing/2014/main" id="{DA373EA2-E891-EE8A-A28C-9322032A5F17}"/>
+              </a:ext>
+            </a:extLst>
+          </p:cNvPr>
+          <p:cNvSpPr txBox="1"/>
+          <p:nvPr/>
+        </p:nvSpPr>
+        <p:spPr>
+          <a:xfrm>
+            <a:off x="5825155" y="1518982"/>
+            <a:ext cx="2013506" cy="646331"/>
+          </a:xfrm>
+          <a:prstGeom prst="rect">
+            <a:avLst/>
+          </a:prstGeom>
+          <a:noFill/>
+        </p:spPr>
+        <p:txBody>
+          <a:bodyPr wrap="square" rtlCol="0" anchor="ctr">
+            <a:spAutoFit/>
+          </a:bodyPr>
+          <a:lstStyle/>
+          <a:p>
+            <a:r>
+              <a:rPr lang="en-US" dirty="0"/>
+              <a:t>Configure Identities, RBAC, Monitoring, etc.</a:t>
+            </a:r>
+          </a:p>
+        </p:txBody>
+      </p:sp>
+      <p:sp>
+        <p:nvSpPr>
+          <p:cNvPr id="15" name="TextBox 14">
+            <a:extLst>
+              <a:ext uri="{FF2B5EF4-FFF2-40B4-BE49-F238E27FC236}">
+                <a16:creationId xmlns:a16="http://schemas.microsoft.com/office/drawing/2014/main" id="{0121F8B3-1DDB-194B-0435-0F2F79CBA773}"/>
+              </a:ext>
+            </a:extLst>
+          </p:cNvPr>
+          <p:cNvSpPr txBox="1"/>
+          <p:nvPr/>
+        </p:nvSpPr>
+        <p:spPr>
+          <a:xfrm>
+            <a:off x="2183860" y="3429000"/>
+            <a:ext cx="2013506" cy="646331"/>
+          </a:xfrm>
+          <a:prstGeom prst="rect">
+            <a:avLst/>
+          </a:prstGeom>
+          <a:noFill/>
+        </p:spPr>
+        <p:txBody>
+          <a:bodyPr wrap="square" rtlCol="0" anchor="ctr">
+            <a:spAutoFit/>
+          </a:bodyPr>
+          <a:lstStyle/>
+          <a:p>
+            <a:pPr algn="ctr"/>
+            <a:r>
+              <a:rPr lang="en-US" dirty="0"/>
+              <a:t>Connect to Tools and Knowledge bases</a:t>
+            </a:r>
+          </a:p>
+        </p:txBody>
+      </p:sp>
+      <p:cxnSp>
+        <p:nvCxnSpPr>
+          <p:cNvPr id="16" name="Straight Arrow Connector 15">
+            <a:extLst>
+              <a:ext uri="{FF2B5EF4-FFF2-40B4-BE49-F238E27FC236}">
+                <a16:creationId xmlns:a16="http://schemas.microsoft.com/office/drawing/2014/main" id="{753FAC2D-AAEE-099D-6EBF-C4AE11D1CF5E}"/>
+              </a:ext>
+            </a:extLst>
+          </p:cNvPr>
+          <p:cNvCxnSpPr>
+            <a:cxnSpLocks/>
+            <a:stCxn id="10" idx="2"/>
+            <a:endCxn id="15" idx="0"/>
+          </p:cNvCxnSpPr>
+          <p:nvPr/>
+        </p:nvCxnSpPr>
+        <p:spPr>
+          <a:xfrm flipH="1">
+            <a:off x="3190613" y="2903848"/>
+            <a:ext cx="1" cy="525152"/>
+          </a:xfrm>
+          <a:prstGeom prst="straightConnector1">
+            <a:avLst/>
+          </a:prstGeom>
+          <a:ln>
+            <a:solidFill>
+              <a:schemeClr val="tx1"/>
+            </a:solidFill>
+            <a:prstDash val="sysDash"/>
+            <a:tailEnd type="triangle" w="lg" len="lg"/>
+          </a:ln>
+        </p:spPr>
+        <p:style>
+          <a:lnRef idx="2">
+            <a:schemeClr val="accent1"/>
+          </a:lnRef>
+          <a:fillRef idx="0">
+            <a:schemeClr val="accent1"/>
+          </a:fillRef>
+          <a:effectRef idx="1">
+            <a:schemeClr val="accent1"/>
+          </a:effectRef>
+          <a:fontRef idx="minor">
+            <a:schemeClr val="tx1"/>
+          </a:fontRef>
+        </p:style>
+      </p:cxnSp>
+    </p:spTree>
+    <p:extLst>
+      <p:ext uri="{BB962C8B-B14F-4D97-AF65-F5344CB8AC3E}">
+        <p14:creationId xmlns:p14="http://schemas.microsoft.com/office/powerpoint/2010/main" val="1065807327"/>
+      </p:ext>
+    </p:extLst>
+  </p:cSld>
+  <p:clrMapOvr>
+    <a:masterClrMapping/>
+  </p:clrMapOvr>
+</p:sld>
+</file>
+
+<file path=ppt/slides/slide20.xml><?xml version="1.0" encoding="utf-8"?>
 <p:sld xmlns:a="http://schemas.openxmlformats.org/drawingml/2006/main" xmlns:r="http://schemas.openxmlformats.org/officeDocument/2006/relationships" xmlns:p="http://schemas.openxmlformats.org/presentationml/2006/main">
   <p:cSld>
     <p:spTree>
@@ -6566,637 +9539,7 @@
 </p:sld>
 </file>
 
-<file path=ppt/slides/slide2.xml><?xml version="1.0" encoding="utf-8"?>
-<p:sld xmlns:a="http://schemas.openxmlformats.org/drawingml/2006/main" xmlns:r="http://schemas.openxmlformats.org/officeDocument/2006/relationships" xmlns:p="http://schemas.openxmlformats.org/presentationml/2006/main">
-  <p:cSld>
-    <p:spTree>
-      <p:nvGrpSpPr>
-        <p:cNvPr id="1" name=""/>
-        <p:cNvGrpSpPr/>
-        <p:nvPr/>
-      </p:nvGrpSpPr>
-      <p:grpSpPr>
-        <a:xfrm>
-          <a:off x="0" y="0"/>
-          <a:ext cx="0" cy="0"/>
-          <a:chOff x="0" y="0"/>
-          <a:chExt cx="0" cy="0"/>
-        </a:xfrm>
-      </p:grpSpPr>
-      <p:pic>
-        <p:nvPicPr>
-          <p:cNvPr id="2050" name="Picture 2" descr="Diagram showing Foundry resource containing multiple projects, each with deployments and connections.">
-            <a:extLst>
-              <a:ext uri="{FF2B5EF4-FFF2-40B4-BE49-F238E27FC236}">
-                <a16:creationId xmlns:a16="http://schemas.microsoft.com/office/drawing/2014/main" id="{12EEA84E-8776-00EF-5D97-05E8737B61E3}"/>
-              </a:ext>
-            </a:extLst>
-          </p:cNvPr>
-          <p:cNvPicPr>
-            <a:picLocks noChangeAspect="1" noChangeArrowheads="1"/>
-          </p:cNvPicPr>
-          <p:nvPr/>
-        </p:nvPicPr>
-        <p:blipFill>
-          <a:blip r:embed="rId3">
-            <a:clrChange>
-              <a:clrFrom>
-                <a:srgbClr val="FFFFFF"/>
-              </a:clrFrom>
-              <a:clrTo>
-                <a:srgbClr val="FFFFFF">
-                  <a:alpha val="0"/>
-                </a:srgbClr>
-              </a:clrTo>
-            </a:clrChange>
-            <a:extLst>
-              <a:ext uri="{28A0092B-C50C-407E-A947-70E740481C1C}">
-                <a14:useLocalDpi xmlns:a14="http://schemas.microsoft.com/office/drawing/2010/main" val="0"/>
-              </a:ext>
-            </a:extLst>
-          </a:blip>
-          <a:srcRect/>
-          <a:stretch>
-            <a:fillRect/>
-          </a:stretch>
-        </p:blipFill>
-        <p:spPr bwMode="auto">
-          <a:xfrm>
-            <a:off x="6607866" y="3166424"/>
-            <a:ext cx="5524500" cy="3667125"/>
-          </a:xfrm>
-          <a:prstGeom prst="rect">
-            <a:avLst/>
-          </a:prstGeom>
-          <a:noFill/>
-          <a:extLst>
-            <a:ext uri="{909E8E84-426E-40DD-AFC4-6F175D3DCCD1}">
-              <a14:hiddenFill xmlns:a14="http://schemas.microsoft.com/office/drawing/2010/main">
-                <a:solidFill>
-                  <a:srgbClr val="FFFFFF"/>
-                </a:solidFill>
-              </a14:hiddenFill>
-            </a:ext>
-          </a:extLst>
-        </p:spPr>
-      </p:pic>
-      <p:sp>
-        <p:nvSpPr>
-          <p:cNvPr id="4" name="Rectangle: Rounded Corners 3">
-            <a:extLst>
-              <a:ext uri="{FF2B5EF4-FFF2-40B4-BE49-F238E27FC236}">
-                <a16:creationId xmlns:a16="http://schemas.microsoft.com/office/drawing/2014/main" id="{F839DD77-409D-94ED-8A62-6F53CBB88ADD}"/>
-              </a:ext>
-            </a:extLst>
-          </p:cNvPr>
-          <p:cNvSpPr/>
-          <p:nvPr/>
-        </p:nvSpPr>
-        <p:spPr>
-          <a:xfrm>
-            <a:off x="962568" y="732317"/>
-            <a:ext cx="4456090" cy="2434107"/>
-          </a:xfrm>
-          <a:prstGeom prst="roundRect">
-            <a:avLst>
-              <a:gd name="adj" fmla="val 5234"/>
-            </a:avLst>
-          </a:prstGeom>
-          <a:solidFill>
-            <a:schemeClr val="bg1"/>
-          </a:solidFill>
-          <a:ln>
-            <a:solidFill>
-              <a:schemeClr val="tx1"/>
-            </a:solidFill>
-          </a:ln>
-        </p:spPr>
-        <p:style>
-          <a:lnRef idx="2">
-            <a:schemeClr val="accent1">
-              <a:shade val="15000"/>
-            </a:schemeClr>
-          </a:lnRef>
-          <a:fillRef idx="1">
-            <a:schemeClr val="accent1"/>
-          </a:fillRef>
-          <a:effectRef idx="0">
-            <a:schemeClr val="accent1"/>
-          </a:effectRef>
-          <a:fontRef idx="minor">
-            <a:schemeClr val="lt1"/>
-          </a:fontRef>
-        </p:style>
-        <p:txBody>
-          <a:bodyPr rtlCol="0" anchor="t"/>
-          <a:lstStyle/>
-          <a:p>
-            <a:pPr algn="ctr"/>
-            <a:r>
-              <a:rPr lang="en-US" dirty="0">
-                <a:solidFill>
-                  <a:schemeClr val="tx1"/>
-                </a:solidFill>
-              </a:rPr>
-              <a:t>Foundry Resource</a:t>
-            </a:r>
-          </a:p>
-        </p:txBody>
-      </p:sp>
-      <p:sp>
-        <p:nvSpPr>
-          <p:cNvPr id="5" name="Rectangle: Rounded Corners 4">
-            <a:extLst>
-              <a:ext uri="{FF2B5EF4-FFF2-40B4-BE49-F238E27FC236}">
-                <a16:creationId xmlns:a16="http://schemas.microsoft.com/office/drawing/2014/main" id="{CFAF0893-8AEC-1DBB-B036-2949BA0795A0}"/>
-              </a:ext>
-            </a:extLst>
-          </p:cNvPr>
-          <p:cNvSpPr/>
-          <p:nvPr/>
-        </p:nvSpPr>
-        <p:spPr>
-          <a:xfrm>
-            <a:off x="2410311" y="1494888"/>
-            <a:ext cx="1080042" cy="694520"/>
-          </a:xfrm>
-          <a:prstGeom prst="roundRect">
-            <a:avLst/>
-          </a:prstGeom>
-          <a:solidFill>
-            <a:srgbClr val="E5F1F8"/>
-          </a:solidFill>
-          <a:ln>
-            <a:solidFill>
-              <a:schemeClr val="tx1"/>
-            </a:solidFill>
-          </a:ln>
-        </p:spPr>
-        <p:style>
-          <a:lnRef idx="2">
-            <a:schemeClr val="accent1">
-              <a:shade val="15000"/>
-            </a:schemeClr>
-          </a:lnRef>
-          <a:fillRef idx="1">
-            <a:schemeClr val="accent1"/>
-          </a:fillRef>
-          <a:effectRef idx="0">
-            <a:schemeClr val="accent1"/>
-          </a:effectRef>
-          <a:fontRef idx="minor">
-            <a:schemeClr val="lt1"/>
-          </a:fontRef>
-        </p:style>
-        <p:txBody>
-          <a:bodyPr rtlCol="0" anchor="ctr"/>
-          <a:lstStyle/>
-          <a:p>
-            <a:pPr algn="ctr"/>
-            <a:r>
-              <a:rPr lang="en-US" dirty="0">
-                <a:solidFill>
-                  <a:schemeClr val="tx1"/>
-                </a:solidFill>
-              </a:rPr>
-              <a:t>Project</a:t>
-            </a:r>
-          </a:p>
-          <a:p>
-            <a:pPr algn="ctr"/>
-            <a:r>
-              <a:rPr lang="en-US" dirty="0">
-                <a:solidFill>
-                  <a:schemeClr val="tx1"/>
-                </a:solidFill>
-              </a:rPr>
-              <a:t>2</a:t>
-            </a:r>
-          </a:p>
-        </p:txBody>
-      </p:sp>
-      <p:sp>
-        <p:nvSpPr>
-          <p:cNvPr id="6" name="Rectangle: Rounded Corners 5">
-            <a:extLst>
-              <a:ext uri="{FF2B5EF4-FFF2-40B4-BE49-F238E27FC236}">
-                <a16:creationId xmlns:a16="http://schemas.microsoft.com/office/drawing/2014/main" id="{A7E630FB-2D59-D6DB-B847-29F7E0317AFA}"/>
-              </a:ext>
-            </a:extLst>
-          </p:cNvPr>
-          <p:cNvSpPr/>
-          <p:nvPr/>
-        </p:nvSpPr>
-        <p:spPr>
-          <a:xfrm>
-            <a:off x="1183452" y="1494888"/>
-            <a:ext cx="1080042" cy="694520"/>
-          </a:xfrm>
-          <a:prstGeom prst="roundRect">
-            <a:avLst/>
-          </a:prstGeom>
-          <a:solidFill>
-            <a:srgbClr val="E5F1F8"/>
-          </a:solidFill>
-          <a:ln>
-            <a:solidFill>
-              <a:schemeClr val="tx1"/>
-            </a:solidFill>
-          </a:ln>
-        </p:spPr>
-        <p:style>
-          <a:lnRef idx="2">
-            <a:schemeClr val="accent1">
-              <a:shade val="15000"/>
-            </a:schemeClr>
-          </a:lnRef>
-          <a:fillRef idx="1">
-            <a:schemeClr val="accent1"/>
-          </a:fillRef>
-          <a:effectRef idx="0">
-            <a:schemeClr val="accent1"/>
-          </a:effectRef>
-          <a:fontRef idx="minor">
-            <a:schemeClr val="lt1"/>
-          </a:fontRef>
-        </p:style>
-        <p:txBody>
-          <a:bodyPr rtlCol="0" anchor="ctr"/>
-          <a:lstStyle/>
-          <a:p>
-            <a:pPr algn="ctr"/>
-            <a:r>
-              <a:rPr lang="en-US" dirty="0">
-                <a:solidFill>
-                  <a:schemeClr val="tx1"/>
-                </a:solidFill>
-              </a:rPr>
-              <a:t>Project</a:t>
-            </a:r>
-          </a:p>
-          <a:p>
-            <a:pPr algn="ctr"/>
-            <a:r>
-              <a:rPr lang="en-US" dirty="0">
-                <a:solidFill>
-                  <a:schemeClr val="tx1"/>
-                </a:solidFill>
-              </a:rPr>
-              <a:t>1</a:t>
-            </a:r>
-          </a:p>
-        </p:txBody>
-      </p:sp>
-      <p:sp>
-        <p:nvSpPr>
-          <p:cNvPr id="8" name="Rectangle: Rounded Corners 7">
-            <a:extLst>
-              <a:ext uri="{FF2B5EF4-FFF2-40B4-BE49-F238E27FC236}">
-                <a16:creationId xmlns:a16="http://schemas.microsoft.com/office/drawing/2014/main" id="{5E9103F9-368F-E4D0-C17C-BF0F1C74D31A}"/>
-              </a:ext>
-            </a:extLst>
-          </p:cNvPr>
-          <p:cNvSpPr/>
-          <p:nvPr/>
-        </p:nvSpPr>
-        <p:spPr>
-          <a:xfrm>
-            <a:off x="4117733" y="1494888"/>
-            <a:ext cx="1080042" cy="694520"/>
-          </a:xfrm>
-          <a:prstGeom prst="roundRect">
-            <a:avLst/>
-          </a:prstGeom>
-          <a:solidFill>
-            <a:srgbClr val="B2D4EB"/>
-          </a:solidFill>
-          <a:ln>
-            <a:solidFill>
-              <a:schemeClr val="tx1"/>
-            </a:solidFill>
-          </a:ln>
-        </p:spPr>
-        <p:style>
-          <a:lnRef idx="2">
-            <a:schemeClr val="accent1">
-              <a:shade val="15000"/>
-            </a:schemeClr>
-          </a:lnRef>
-          <a:fillRef idx="1">
-            <a:schemeClr val="accent1"/>
-          </a:fillRef>
-          <a:effectRef idx="0">
-            <a:schemeClr val="accent1"/>
-          </a:effectRef>
-          <a:fontRef idx="minor">
-            <a:schemeClr val="lt1"/>
-          </a:fontRef>
-        </p:style>
-        <p:txBody>
-          <a:bodyPr rtlCol="0" anchor="ctr"/>
-          <a:lstStyle/>
-          <a:p>
-            <a:pPr algn="ctr"/>
-            <a:r>
-              <a:rPr lang="en-US" dirty="0">
-                <a:solidFill>
-                  <a:schemeClr val="tx1"/>
-                </a:solidFill>
-              </a:rPr>
-              <a:t>Project</a:t>
-            </a:r>
-          </a:p>
-          <a:p>
-            <a:pPr algn="ctr"/>
-            <a:r>
-              <a:rPr lang="en-US" i="1" dirty="0">
-                <a:solidFill>
-                  <a:schemeClr val="tx1"/>
-                </a:solidFill>
-              </a:rPr>
-              <a:t>n</a:t>
-            </a:r>
-          </a:p>
-        </p:txBody>
-      </p:sp>
-      <p:sp>
-        <p:nvSpPr>
-          <p:cNvPr id="9" name="TextBox 8">
-            <a:extLst>
-              <a:ext uri="{FF2B5EF4-FFF2-40B4-BE49-F238E27FC236}">
-                <a16:creationId xmlns:a16="http://schemas.microsoft.com/office/drawing/2014/main" id="{C992B776-2029-F35D-E69F-FB22F1454014}"/>
-              </a:ext>
-            </a:extLst>
-          </p:cNvPr>
-          <p:cNvSpPr txBox="1"/>
-          <p:nvPr/>
-        </p:nvSpPr>
-        <p:spPr>
-          <a:xfrm>
-            <a:off x="3637170" y="1657482"/>
-            <a:ext cx="333746" cy="369332"/>
-          </a:xfrm>
-          <a:prstGeom prst="rect">
-            <a:avLst/>
-          </a:prstGeom>
-          <a:noFill/>
-        </p:spPr>
-        <p:txBody>
-          <a:bodyPr wrap="none" rtlCol="0" anchor="ctr">
-            <a:spAutoFit/>
-          </a:bodyPr>
-          <a:lstStyle/>
-          <a:p>
-            <a:r>
-              <a:rPr lang="en-US" dirty="0"/>
-              <a:t>…</a:t>
-            </a:r>
-          </a:p>
-        </p:txBody>
-      </p:sp>
-      <p:sp>
-        <p:nvSpPr>
-          <p:cNvPr id="10" name="Rectangle: Rounded Corners 9">
-            <a:extLst>
-              <a:ext uri="{FF2B5EF4-FFF2-40B4-BE49-F238E27FC236}">
-                <a16:creationId xmlns:a16="http://schemas.microsoft.com/office/drawing/2014/main" id="{B3CF4078-AF58-188A-DF99-E08A01A42DFE}"/>
-              </a:ext>
-            </a:extLst>
-          </p:cNvPr>
-          <p:cNvSpPr/>
-          <p:nvPr/>
-        </p:nvSpPr>
-        <p:spPr>
-          <a:xfrm>
-            <a:off x="1183452" y="2534516"/>
-            <a:ext cx="4014323" cy="369332"/>
-          </a:xfrm>
-          <a:prstGeom prst="roundRect">
-            <a:avLst/>
-          </a:prstGeom>
-          <a:solidFill>
-            <a:srgbClr val="B2D4EB"/>
-          </a:solidFill>
-          <a:ln>
-            <a:solidFill>
-              <a:schemeClr val="tx1"/>
-            </a:solidFill>
-          </a:ln>
-        </p:spPr>
-        <p:style>
-          <a:lnRef idx="2">
-            <a:schemeClr val="accent1">
-              <a:shade val="15000"/>
-            </a:schemeClr>
-          </a:lnRef>
-          <a:fillRef idx="1">
-            <a:schemeClr val="accent1"/>
-          </a:fillRef>
-          <a:effectRef idx="0">
-            <a:schemeClr val="accent1"/>
-          </a:effectRef>
-          <a:fontRef idx="minor">
-            <a:schemeClr val="lt1"/>
-          </a:fontRef>
-        </p:style>
-        <p:txBody>
-          <a:bodyPr rtlCol="0" anchor="ctr"/>
-          <a:lstStyle/>
-          <a:p>
-            <a:pPr algn="ctr"/>
-            <a:r>
-              <a:rPr lang="en-US" dirty="0">
-                <a:solidFill>
-                  <a:schemeClr val="tx1"/>
-                </a:solidFill>
-              </a:rPr>
-              <a:t>Security + Governance</a:t>
-            </a:r>
-            <a:endParaRPr lang="en-US" i="1" dirty="0">
-              <a:solidFill>
-                <a:schemeClr val="tx1"/>
-              </a:solidFill>
-            </a:endParaRPr>
-          </a:p>
-        </p:txBody>
-      </p:sp>
-      <p:cxnSp>
-        <p:nvCxnSpPr>
-          <p:cNvPr id="13" name="Straight Arrow Connector 12">
-            <a:extLst>
-              <a:ext uri="{FF2B5EF4-FFF2-40B4-BE49-F238E27FC236}">
-                <a16:creationId xmlns:a16="http://schemas.microsoft.com/office/drawing/2014/main" id="{B3C89E23-8123-0234-D0F1-F39C80D61B78}"/>
-              </a:ext>
-            </a:extLst>
-          </p:cNvPr>
-          <p:cNvCxnSpPr>
-            <a:stCxn id="8" idx="3"/>
-          </p:cNvCxnSpPr>
-          <p:nvPr/>
-        </p:nvCxnSpPr>
-        <p:spPr>
-          <a:xfrm>
-            <a:off x="5197775" y="1842148"/>
-            <a:ext cx="591279" cy="0"/>
-          </a:xfrm>
-          <a:prstGeom prst="straightConnector1">
-            <a:avLst/>
-          </a:prstGeom>
-          <a:ln>
-            <a:solidFill>
-              <a:schemeClr val="tx1"/>
-            </a:solidFill>
-            <a:prstDash val="sysDash"/>
-            <a:tailEnd type="triangle" w="lg" len="lg"/>
-          </a:ln>
-        </p:spPr>
-        <p:style>
-          <a:lnRef idx="2">
-            <a:schemeClr val="accent1"/>
-          </a:lnRef>
-          <a:fillRef idx="0">
-            <a:schemeClr val="accent1"/>
-          </a:fillRef>
-          <a:effectRef idx="1">
-            <a:schemeClr val="accent1"/>
-          </a:effectRef>
-          <a:fontRef idx="minor">
-            <a:schemeClr val="tx1"/>
-          </a:fontRef>
-        </p:style>
-      </p:cxnSp>
-      <p:sp>
-        <p:nvSpPr>
-          <p:cNvPr id="14" name="TextBox 13">
-            <a:extLst>
-              <a:ext uri="{FF2B5EF4-FFF2-40B4-BE49-F238E27FC236}">
-                <a16:creationId xmlns:a16="http://schemas.microsoft.com/office/drawing/2014/main" id="{DA373EA2-E891-EE8A-A28C-9322032A5F17}"/>
-              </a:ext>
-            </a:extLst>
-          </p:cNvPr>
-          <p:cNvSpPr txBox="1"/>
-          <p:nvPr/>
-        </p:nvSpPr>
-        <p:spPr>
-          <a:xfrm>
-            <a:off x="5825155" y="1518982"/>
-            <a:ext cx="2013506" cy="646331"/>
-          </a:xfrm>
-          <a:prstGeom prst="rect">
-            <a:avLst/>
-          </a:prstGeom>
-          <a:noFill/>
-        </p:spPr>
-        <p:txBody>
-          <a:bodyPr wrap="square" rtlCol="0" anchor="ctr">
-            <a:spAutoFit/>
-          </a:bodyPr>
-          <a:lstStyle/>
-          <a:p>
-            <a:r>
-              <a:rPr lang="en-US" dirty="0"/>
-              <a:t>Configure Identities, RBAC, Monitoring, etc.</a:t>
-            </a:r>
-          </a:p>
-        </p:txBody>
-      </p:sp>
-      <p:sp>
-        <p:nvSpPr>
-          <p:cNvPr id="15" name="TextBox 14">
-            <a:extLst>
-              <a:ext uri="{FF2B5EF4-FFF2-40B4-BE49-F238E27FC236}">
-                <a16:creationId xmlns:a16="http://schemas.microsoft.com/office/drawing/2014/main" id="{0121F8B3-1DDB-194B-0435-0F2F79CBA773}"/>
-              </a:ext>
-            </a:extLst>
-          </p:cNvPr>
-          <p:cNvSpPr txBox="1"/>
-          <p:nvPr/>
-        </p:nvSpPr>
-        <p:spPr>
-          <a:xfrm>
-            <a:off x="2183860" y="3429000"/>
-            <a:ext cx="2013506" cy="646331"/>
-          </a:xfrm>
-          <a:prstGeom prst="rect">
-            <a:avLst/>
-          </a:prstGeom>
-          <a:noFill/>
-        </p:spPr>
-        <p:txBody>
-          <a:bodyPr wrap="square" rtlCol="0" anchor="ctr">
-            <a:spAutoFit/>
-          </a:bodyPr>
-          <a:lstStyle/>
-          <a:p>
-            <a:pPr algn="ctr"/>
-            <a:r>
-              <a:rPr lang="en-US" dirty="0"/>
-              <a:t>Connect to Tools and Knowledge bases</a:t>
-            </a:r>
-          </a:p>
-        </p:txBody>
-      </p:sp>
-      <p:cxnSp>
-        <p:nvCxnSpPr>
-          <p:cNvPr id="16" name="Straight Arrow Connector 15">
-            <a:extLst>
-              <a:ext uri="{FF2B5EF4-FFF2-40B4-BE49-F238E27FC236}">
-                <a16:creationId xmlns:a16="http://schemas.microsoft.com/office/drawing/2014/main" id="{753FAC2D-AAEE-099D-6EBF-C4AE11D1CF5E}"/>
-              </a:ext>
-            </a:extLst>
-          </p:cNvPr>
-          <p:cNvCxnSpPr>
-            <a:cxnSpLocks/>
-            <a:stCxn id="10" idx="2"/>
-            <a:endCxn id="15" idx="0"/>
-          </p:cNvCxnSpPr>
-          <p:nvPr/>
-        </p:nvCxnSpPr>
-        <p:spPr>
-          <a:xfrm flipH="1">
-            <a:off x="3190613" y="2903848"/>
-            <a:ext cx="1" cy="525152"/>
-          </a:xfrm>
-          <a:prstGeom prst="straightConnector1">
-            <a:avLst/>
-          </a:prstGeom>
-          <a:ln>
-            <a:solidFill>
-              <a:schemeClr val="tx1"/>
-            </a:solidFill>
-            <a:prstDash val="sysDash"/>
-            <a:tailEnd type="triangle" w="lg" len="lg"/>
-          </a:ln>
-        </p:spPr>
-        <p:style>
-          <a:lnRef idx="2">
-            <a:schemeClr val="accent1"/>
-          </a:lnRef>
-          <a:fillRef idx="0">
-            <a:schemeClr val="accent1"/>
-          </a:fillRef>
-          <a:effectRef idx="1">
-            <a:schemeClr val="accent1"/>
-          </a:effectRef>
-          <a:fontRef idx="minor">
-            <a:schemeClr val="tx1"/>
-          </a:fontRef>
-        </p:style>
-      </p:cxnSp>
-    </p:spTree>
-    <p:extLst>
-      <p:ext uri="{BB962C8B-B14F-4D97-AF65-F5344CB8AC3E}">
-        <p14:creationId xmlns:p14="http://schemas.microsoft.com/office/powerpoint/2010/main" val="1065807327"/>
-      </p:ext>
-    </p:extLst>
-  </p:cSld>
-  <p:clrMapOvr>
-    <a:masterClrMapping/>
-  </p:clrMapOvr>
-</p:sld>
-</file>
-
-<file path=ppt/slides/slide20.xml><?xml version="1.0" encoding="utf-8"?>
+<file path=ppt/slides/slide21.xml><?xml version="1.0" encoding="utf-8"?>
 <p:sld xmlns:a="http://schemas.openxmlformats.org/drawingml/2006/main" xmlns:r="http://schemas.openxmlformats.org/officeDocument/2006/relationships" xmlns:p="http://schemas.openxmlformats.org/presentationml/2006/main">
   <p:cSld>
     <p:spTree>
@@ -7232,7 +9575,7 @@
 </p:sld>
 </file>
 
-<file path=ppt/slides/slide21.xml><?xml version="1.0" encoding="utf-8"?>
+<file path=ppt/slides/slide22.xml><?xml version="1.0" encoding="utf-8"?>
 <p:sld xmlns:a="http://schemas.openxmlformats.org/drawingml/2006/main" xmlns:r="http://schemas.openxmlformats.org/officeDocument/2006/relationships" xmlns:p="http://schemas.openxmlformats.org/presentationml/2006/main">
   <p:cSld>
     <p:spTree>

--- a/figures/figures.pptx
+++ b/figures/figures.pptx
@@ -175,6 +175,10 @@
             <p14:sldId id="269"/>
             <p14:sldId id="274"/>
             <p14:sldId id="270"/>
+          </p14:sldIdLst>
+        </p14:section>
+        <p14:section name="Edge Deployment" id="{751363D7-BD1F-4E68-8906-25A659F6AF95}">
+          <p14:sldIdLst>
             <p14:sldId id="271"/>
             <p14:sldId id="272"/>
             <p14:sldId id="273"/>
@@ -276,7 +280,7 @@
           <a:p>
             <a:fld id="{DAABB0E5-6D8D-4DEE-B75F-67010CF2307C}" type="datetimeFigureOut">
               <a:rPr lang="en-US" smtClean="0"/>
-              <a:t>3/26/2026</a:t>
+              <a:t>4/5/2026</a:t>
             </a:fld>
             <a:endParaRPr lang="en-US"/>
           </a:p>
@@ -961,7 +965,7 @@
           <a:p>
             <a:fld id="{B84C5C40-2055-49AF-9028-5DA79E75E391}" type="datetimeFigureOut">
               <a:rPr lang="en-US" smtClean="0"/>
-              <a:t>3/26/2026</a:t>
+              <a:t>4/5/2026</a:t>
             </a:fld>
             <a:endParaRPr lang="en-US"/>
           </a:p>
@@ -1131,7 +1135,7 @@
           <a:p>
             <a:fld id="{B84C5C40-2055-49AF-9028-5DA79E75E391}" type="datetimeFigureOut">
               <a:rPr lang="en-US" smtClean="0"/>
-              <a:t>3/26/2026</a:t>
+              <a:t>4/5/2026</a:t>
             </a:fld>
             <a:endParaRPr lang="en-US"/>
           </a:p>
@@ -1311,7 +1315,7 @@
           <a:p>
             <a:fld id="{B84C5C40-2055-49AF-9028-5DA79E75E391}" type="datetimeFigureOut">
               <a:rPr lang="en-US" smtClean="0"/>
-              <a:t>3/26/2026</a:t>
+              <a:t>4/5/2026</a:t>
             </a:fld>
             <a:endParaRPr lang="en-US"/>
           </a:p>
@@ -1481,7 +1485,7 @@
           <a:p>
             <a:fld id="{B84C5C40-2055-49AF-9028-5DA79E75E391}" type="datetimeFigureOut">
               <a:rPr lang="en-US" smtClean="0"/>
-              <a:t>3/26/2026</a:t>
+              <a:t>4/5/2026</a:t>
             </a:fld>
             <a:endParaRPr lang="en-US"/>
           </a:p>
@@ -1727,7 +1731,7 @@
           <a:p>
             <a:fld id="{B84C5C40-2055-49AF-9028-5DA79E75E391}" type="datetimeFigureOut">
               <a:rPr lang="en-US" smtClean="0"/>
-              <a:t>3/26/2026</a:t>
+              <a:t>4/5/2026</a:t>
             </a:fld>
             <a:endParaRPr lang="en-US"/>
           </a:p>
@@ -1959,7 +1963,7 @@
           <a:p>
             <a:fld id="{B84C5C40-2055-49AF-9028-5DA79E75E391}" type="datetimeFigureOut">
               <a:rPr lang="en-US" smtClean="0"/>
-              <a:t>3/26/2026</a:t>
+              <a:t>4/5/2026</a:t>
             </a:fld>
             <a:endParaRPr lang="en-US"/>
           </a:p>
@@ -2326,7 +2330,7 @@
           <a:p>
             <a:fld id="{B84C5C40-2055-49AF-9028-5DA79E75E391}" type="datetimeFigureOut">
               <a:rPr lang="en-US" smtClean="0"/>
-              <a:t>3/26/2026</a:t>
+              <a:t>4/5/2026</a:t>
             </a:fld>
             <a:endParaRPr lang="en-US"/>
           </a:p>
@@ -2444,7 +2448,7 @@
           <a:p>
             <a:fld id="{B84C5C40-2055-49AF-9028-5DA79E75E391}" type="datetimeFigureOut">
               <a:rPr lang="en-US" smtClean="0"/>
-              <a:t>3/26/2026</a:t>
+              <a:t>4/5/2026</a:t>
             </a:fld>
             <a:endParaRPr lang="en-US"/>
           </a:p>
@@ -2539,7 +2543,7 @@
           <a:p>
             <a:fld id="{B84C5C40-2055-49AF-9028-5DA79E75E391}" type="datetimeFigureOut">
               <a:rPr lang="en-US" smtClean="0"/>
-              <a:t>3/26/2026</a:t>
+              <a:t>4/5/2026</a:t>
             </a:fld>
             <a:endParaRPr lang="en-US"/>
           </a:p>
@@ -2816,7 +2820,7 @@
           <a:p>
             <a:fld id="{B84C5C40-2055-49AF-9028-5DA79E75E391}" type="datetimeFigureOut">
               <a:rPr lang="en-US" smtClean="0"/>
-              <a:t>3/26/2026</a:t>
+              <a:t>4/5/2026</a:t>
             </a:fld>
             <a:endParaRPr lang="en-US"/>
           </a:p>
@@ -3073,7 +3077,7 @@
           <a:p>
             <a:fld id="{B84C5C40-2055-49AF-9028-5DA79E75E391}" type="datetimeFigureOut">
               <a:rPr lang="en-US" smtClean="0"/>
-              <a:t>3/26/2026</a:t>
+              <a:t>4/5/2026</a:t>
             </a:fld>
             <a:endParaRPr lang="en-US"/>
           </a:p>
@@ -3286,7 +3290,7 @@
           <a:p>
             <a:fld id="{B84C5C40-2055-49AF-9028-5DA79E75E391}" type="datetimeFigureOut">
               <a:rPr lang="en-US" smtClean="0"/>
-              <a:t>3/26/2026</a:t>
+              <a:t>4/5/2026</a:t>
             </a:fld>
             <a:endParaRPr lang="en-US"/>
           </a:p>
@@ -8860,6 +8864,963 @@
           <a:chExt cx="0" cy="0"/>
         </a:xfrm>
       </p:grpSpPr>
+      <p:sp>
+        <p:nvSpPr>
+          <p:cNvPr id="2" name="Rectangle: Rounded Corners 1">
+            <a:extLst>
+              <a:ext uri="{FF2B5EF4-FFF2-40B4-BE49-F238E27FC236}">
+                <a16:creationId xmlns:a16="http://schemas.microsoft.com/office/drawing/2014/main" id="{B5CB0691-4F4F-B36F-1292-BDF4D6F64E6F}"/>
+              </a:ext>
+            </a:extLst>
+          </p:cNvPr>
+          <p:cNvSpPr/>
+          <p:nvPr/>
+        </p:nvSpPr>
+        <p:spPr>
+          <a:xfrm>
+            <a:off x="2933281" y="1839992"/>
+            <a:ext cx="6325438" cy="974563"/>
+          </a:xfrm>
+          <a:prstGeom prst="roundRect">
+            <a:avLst>
+              <a:gd name="adj" fmla="val 5234"/>
+            </a:avLst>
+          </a:prstGeom>
+          <a:solidFill>
+            <a:schemeClr val="bg1"/>
+          </a:solidFill>
+          <a:ln>
+            <a:solidFill>
+              <a:schemeClr val="tx1"/>
+            </a:solidFill>
+          </a:ln>
+        </p:spPr>
+        <p:style>
+          <a:lnRef idx="2">
+            <a:schemeClr val="accent1">
+              <a:shade val="15000"/>
+            </a:schemeClr>
+          </a:lnRef>
+          <a:fillRef idx="1">
+            <a:schemeClr val="accent1"/>
+          </a:fillRef>
+          <a:effectRef idx="0">
+            <a:schemeClr val="accent1"/>
+          </a:effectRef>
+          <a:fontRef idx="minor">
+            <a:schemeClr val="lt1"/>
+          </a:fontRef>
+        </p:style>
+        <p:txBody>
+          <a:bodyPr rtlCol="0" anchor="ctr"/>
+          <a:lstStyle/>
+          <a:p>
+            <a:pPr algn="ctr"/>
+            <a:endParaRPr lang="en-US" dirty="0">
+              <a:solidFill>
+                <a:schemeClr val="tx1"/>
+              </a:solidFill>
+            </a:endParaRPr>
+          </a:p>
+        </p:txBody>
+      </p:sp>
+      <p:sp>
+        <p:nvSpPr>
+          <p:cNvPr id="3" name="Rectangle: Rounded Corners 2">
+            <a:extLst>
+              <a:ext uri="{FF2B5EF4-FFF2-40B4-BE49-F238E27FC236}">
+                <a16:creationId xmlns:a16="http://schemas.microsoft.com/office/drawing/2014/main" id="{3CC2B664-F030-F1F9-F28B-DCC5EEC01A16}"/>
+              </a:ext>
+            </a:extLst>
+          </p:cNvPr>
+          <p:cNvSpPr/>
+          <p:nvPr/>
+        </p:nvSpPr>
+        <p:spPr>
+          <a:xfrm>
+            <a:off x="4805537" y="1655326"/>
+            <a:ext cx="2580925" cy="369332"/>
+          </a:xfrm>
+          <a:prstGeom prst="roundRect">
+            <a:avLst/>
+          </a:prstGeom>
+          <a:solidFill>
+            <a:srgbClr val="B2D4EB"/>
+          </a:solidFill>
+          <a:ln>
+            <a:solidFill>
+              <a:schemeClr val="tx1"/>
+            </a:solidFill>
+          </a:ln>
+        </p:spPr>
+        <p:style>
+          <a:lnRef idx="2">
+            <a:schemeClr val="accent1">
+              <a:shade val="15000"/>
+            </a:schemeClr>
+          </a:lnRef>
+          <a:fillRef idx="1">
+            <a:schemeClr val="accent1"/>
+          </a:fillRef>
+          <a:effectRef idx="0">
+            <a:schemeClr val="accent1"/>
+          </a:effectRef>
+          <a:fontRef idx="minor">
+            <a:schemeClr val="lt1"/>
+          </a:fontRef>
+        </p:style>
+        <p:txBody>
+          <a:bodyPr rtlCol="0" anchor="ctr"/>
+          <a:lstStyle/>
+          <a:p>
+            <a:pPr algn="ctr"/>
+            <a:r>
+              <a:rPr lang="en-US" dirty="0">
+                <a:solidFill>
+                  <a:schemeClr val="tx1"/>
+                </a:solidFill>
+              </a:rPr>
+              <a:t>On-Device Inference</a:t>
+            </a:r>
+            <a:endParaRPr lang="en-US" i="1" dirty="0">
+              <a:solidFill>
+                <a:schemeClr val="tx1"/>
+              </a:solidFill>
+            </a:endParaRPr>
+          </a:p>
+        </p:txBody>
+      </p:sp>
+      <p:graphicFrame>
+        <p:nvGraphicFramePr>
+          <p:cNvPr id="4" name="Table 3">
+            <a:extLst>
+              <a:ext uri="{FF2B5EF4-FFF2-40B4-BE49-F238E27FC236}">
+                <a16:creationId xmlns:a16="http://schemas.microsoft.com/office/drawing/2014/main" id="{DF53C473-9B29-E37D-A715-ED5C1E1CE73A}"/>
+              </a:ext>
+            </a:extLst>
+          </p:cNvPr>
+          <p:cNvGraphicFramePr>
+            <a:graphicFrameLocks noGrp="1"/>
+          </p:cNvGraphicFramePr>
+          <p:nvPr>
+            <p:extLst>
+              <p:ext uri="{D42A27DB-BD31-4B8C-83A1-F6EECF244321}">
+                <p14:modId xmlns:p14="http://schemas.microsoft.com/office/powerpoint/2010/main" val="2686571618"/>
+              </p:ext>
+            </p:extLst>
+          </p:nvPr>
+        </p:nvGraphicFramePr>
+        <p:xfrm>
+          <a:off x="3122928" y="2208569"/>
+          <a:ext cx="5946141" cy="370840"/>
+        </p:xfrm>
+        <a:graphic>
+          <a:graphicData uri="http://schemas.openxmlformats.org/drawingml/2006/table">
+            <a:tbl>
+              <a:tblPr firstRow="1" bandRow="1">
+                <a:tableStyleId>{5C22544A-7EE6-4342-B048-85BDC9FD1C3A}</a:tableStyleId>
+              </a:tblPr>
+              <a:tblGrid>
+                <a:gridCol w="1982047">
+                  <a:extLst>
+                    <a:ext uri="{9D8B030D-6E8A-4147-A177-3AD203B41FA5}">
+                      <a16:colId xmlns:a16="http://schemas.microsoft.com/office/drawing/2014/main" val="3167127258"/>
+                    </a:ext>
+                  </a:extLst>
+                </a:gridCol>
+                <a:gridCol w="1982047">
+                  <a:extLst>
+                    <a:ext uri="{9D8B030D-6E8A-4147-A177-3AD203B41FA5}">
+                      <a16:colId xmlns:a16="http://schemas.microsoft.com/office/drawing/2014/main" val="1913894467"/>
+                    </a:ext>
+                  </a:extLst>
+                </a:gridCol>
+                <a:gridCol w="1982047">
+                  <a:extLst>
+                    <a:ext uri="{9D8B030D-6E8A-4147-A177-3AD203B41FA5}">
+                      <a16:colId xmlns:a16="http://schemas.microsoft.com/office/drawing/2014/main" val="304178738"/>
+                    </a:ext>
+                  </a:extLst>
+                </a:gridCol>
+              </a:tblGrid>
+              <a:tr h="370840">
+                <a:tc>
+                  <a:txBody>
+                    <a:bodyPr/>
+                    <a:lstStyle/>
+                    <a:p>
+                      <a:pPr algn="ctr"/>
+                      <a:r>
+                        <a:rPr lang="en-US" b="0" dirty="0">
+                          <a:solidFill>
+                            <a:sysClr val="windowText" lastClr="000000"/>
+                          </a:solidFill>
+                        </a:rPr>
+                        <a:t>No per-token costs</a:t>
+                      </a:r>
+                    </a:p>
+                  </a:txBody>
+                  <a:tcPr anchor="ctr">
+                    <a:lnL w="12700" cmpd="sng">
+                      <a:noFill/>
+                    </a:lnL>
+                    <a:lnR w="12700" cmpd="sng">
+                      <a:noFill/>
+                    </a:lnR>
+                    <a:lnT w="12700" cmpd="sng">
+                      <a:noFill/>
+                    </a:lnT>
+                    <a:lnB w="38100" cmpd="sng">
+                      <a:noFill/>
+                    </a:lnB>
+                    <a:lnTlToBr w="12700" cmpd="sng">
+                      <a:noFill/>
+                      <a:prstDash val="solid"/>
+                    </a:lnTlToBr>
+                    <a:lnBlToTr w="12700" cmpd="sng">
+                      <a:noFill/>
+                      <a:prstDash val="solid"/>
+                    </a:lnBlToTr>
+                    <a:noFill/>
+                  </a:tcPr>
+                </a:tc>
+                <a:tc>
+                  <a:txBody>
+                    <a:bodyPr/>
+                    <a:lstStyle/>
+                    <a:p>
+                      <a:pPr algn="ctr"/>
+                      <a:r>
+                        <a:rPr lang="en-US" b="0" dirty="0">
+                          <a:solidFill>
+                            <a:sysClr val="windowText" lastClr="000000"/>
+                          </a:solidFill>
+                        </a:rPr>
+                        <a:t>Low latency</a:t>
+                      </a:r>
+                    </a:p>
+                  </a:txBody>
+                  <a:tcPr anchor="ctr">
+                    <a:lnL w="12700" cmpd="sng">
+                      <a:noFill/>
+                    </a:lnL>
+                    <a:lnR w="12700" cmpd="sng">
+                      <a:noFill/>
+                    </a:lnR>
+                    <a:lnT w="12700" cmpd="sng">
+                      <a:noFill/>
+                    </a:lnT>
+                    <a:lnB w="38100" cmpd="sng">
+                      <a:noFill/>
+                    </a:lnB>
+                    <a:lnTlToBr w="12700" cmpd="sng">
+                      <a:noFill/>
+                      <a:prstDash val="solid"/>
+                    </a:lnTlToBr>
+                    <a:lnBlToTr w="12700" cmpd="sng">
+                      <a:noFill/>
+                      <a:prstDash val="solid"/>
+                    </a:lnBlToTr>
+                    <a:noFill/>
+                  </a:tcPr>
+                </a:tc>
+                <a:tc>
+                  <a:txBody>
+                    <a:bodyPr/>
+                    <a:lstStyle/>
+                    <a:p>
+                      <a:pPr algn="ctr"/>
+                      <a:r>
+                        <a:rPr lang="en-US" b="0" dirty="0">
+                          <a:solidFill>
+                            <a:sysClr val="windowText" lastClr="000000"/>
+                          </a:solidFill>
+                        </a:rPr>
+                        <a:t>Works Offline</a:t>
+                      </a:r>
+                    </a:p>
+                  </a:txBody>
+                  <a:tcPr anchor="ctr">
+                    <a:lnL w="12700" cmpd="sng">
+                      <a:noFill/>
+                    </a:lnL>
+                    <a:lnR w="12700" cmpd="sng">
+                      <a:noFill/>
+                    </a:lnR>
+                    <a:lnT w="12700" cmpd="sng">
+                      <a:noFill/>
+                    </a:lnT>
+                    <a:lnB w="38100" cmpd="sng">
+                      <a:noFill/>
+                    </a:lnB>
+                    <a:lnTlToBr w="12700" cmpd="sng">
+                      <a:noFill/>
+                      <a:prstDash val="solid"/>
+                    </a:lnTlToBr>
+                    <a:lnBlToTr w="12700" cmpd="sng">
+                      <a:noFill/>
+                      <a:prstDash val="solid"/>
+                    </a:lnBlToTr>
+                    <a:noFill/>
+                  </a:tcPr>
+                </a:tc>
+                <a:extLst>
+                  <a:ext uri="{0D108BD9-81ED-4DB2-BD59-A6C34878D82A}">
+                    <a16:rowId xmlns:a16="http://schemas.microsoft.com/office/drawing/2014/main" val="2068122310"/>
+                  </a:ext>
+                </a:extLst>
+              </a:tr>
+            </a:tbl>
+          </a:graphicData>
+        </a:graphic>
+      </p:graphicFrame>
+      <p:sp>
+        <p:nvSpPr>
+          <p:cNvPr id="5" name="Rectangle: Rounded Corners 4">
+            <a:extLst>
+              <a:ext uri="{FF2B5EF4-FFF2-40B4-BE49-F238E27FC236}">
+                <a16:creationId xmlns:a16="http://schemas.microsoft.com/office/drawing/2014/main" id="{E2F5A509-0B8F-7811-0487-C9575E6398F1}"/>
+              </a:ext>
+            </a:extLst>
+          </p:cNvPr>
+          <p:cNvSpPr/>
+          <p:nvPr/>
+        </p:nvSpPr>
+        <p:spPr>
+          <a:xfrm>
+            <a:off x="2933281" y="3183887"/>
+            <a:ext cx="6325438" cy="974563"/>
+          </a:xfrm>
+          <a:prstGeom prst="roundRect">
+            <a:avLst>
+              <a:gd name="adj" fmla="val 5234"/>
+            </a:avLst>
+          </a:prstGeom>
+          <a:solidFill>
+            <a:schemeClr val="bg1"/>
+          </a:solidFill>
+          <a:ln>
+            <a:solidFill>
+              <a:schemeClr val="tx1"/>
+            </a:solidFill>
+          </a:ln>
+        </p:spPr>
+        <p:style>
+          <a:lnRef idx="2">
+            <a:schemeClr val="accent1">
+              <a:shade val="15000"/>
+            </a:schemeClr>
+          </a:lnRef>
+          <a:fillRef idx="1">
+            <a:schemeClr val="accent1"/>
+          </a:fillRef>
+          <a:effectRef idx="0">
+            <a:schemeClr val="accent1"/>
+          </a:effectRef>
+          <a:fontRef idx="minor">
+            <a:schemeClr val="lt1"/>
+          </a:fontRef>
+        </p:style>
+        <p:txBody>
+          <a:bodyPr rtlCol="0" anchor="ctr"/>
+          <a:lstStyle/>
+          <a:p>
+            <a:pPr algn="ctr"/>
+            <a:endParaRPr lang="en-US" dirty="0">
+              <a:solidFill>
+                <a:schemeClr val="tx1"/>
+              </a:solidFill>
+            </a:endParaRPr>
+          </a:p>
+        </p:txBody>
+      </p:sp>
+      <p:sp>
+        <p:nvSpPr>
+          <p:cNvPr id="6" name="Rectangle: Rounded Corners 5">
+            <a:extLst>
+              <a:ext uri="{FF2B5EF4-FFF2-40B4-BE49-F238E27FC236}">
+                <a16:creationId xmlns:a16="http://schemas.microsoft.com/office/drawing/2014/main" id="{D4965C37-35DD-9952-1CFD-D128D2081A33}"/>
+              </a:ext>
+            </a:extLst>
+          </p:cNvPr>
+          <p:cNvSpPr/>
+          <p:nvPr/>
+        </p:nvSpPr>
+        <p:spPr>
+          <a:xfrm>
+            <a:off x="4805537" y="2999221"/>
+            <a:ext cx="2580925" cy="369332"/>
+          </a:xfrm>
+          <a:prstGeom prst="roundRect">
+            <a:avLst/>
+          </a:prstGeom>
+          <a:solidFill>
+            <a:srgbClr val="B2D4EB"/>
+          </a:solidFill>
+          <a:ln>
+            <a:solidFill>
+              <a:schemeClr val="tx1"/>
+            </a:solidFill>
+          </a:ln>
+        </p:spPr>
+        <p:style>
+          <a:lnRef idx="2">
+            <a:schemeClr val="accent1">
+              <a:shade val="15000"/>
+            </a:schemeClr>
+          </a:lnRef>
+          <a:fillRef idx="1">
+            <a:schemeClr val="accent1"/>
+          </a:fillRef>
+          <a:effectRef idx="0">
+            <a:schemeClr val="accent1"/>
+          </a:effectRef>
+          <a:fontRef idx="minor">
+            <a:schemeClr val="lt1"/>
+          </a:fontRef>
+        </p:style>
+        <p:txBody>
+          <a:bodyPr rtlCol="0" anchor="ctr"/>
+          <a:lstStyle/>
+          <a:p>
+            <a:pPr algn="ctr"/>
+            <a:r>
+              <a:rPr lang="en-US" dirty="0">
+                <a:solidFill>
+                  <a:schemeClr val="tx1"/>
+                </a:solidFill>
+              </a:rPr>
+              <a:t>Model Customization</a:t>
+            </a:r>
+            <a:endParaRPr lang="en-US" i="1" dirty="0">
+              <a:solidFill>
+                <a:schemeClr val="tx1"/>
+              </a:solidFill>
+            </a:endParaRPr>
+          </a:p>
+        </p:txBody>
+      </p:sp>
+      <p:graphicFrame>
+        <p:nvGraphicFramePr>
+          <p:cNvPr id="7" name="Table 6">
+            <a:extLst>
+              <a:ext uri="{FF2B5EF4-FFF2-40B4-BE49-F238E27FC236}">
+                <a16:creationId xmlns:a16="http://schemas.microsoft.com/office/drawing/2014/main" id="{43E63C08-E18D-B389-2582-B89833A5B651}"/>
+              </a:ext>
+            </a:extLst>
+          </p:cNvPr>
+          <p:cNvGraphicFramePr>
+            <a:graphicFrameLocks noGrp="1"/>
+          </p:cNvGraphicFramePr>
+          <p:nvPr>
+            <p:extLst>
+              <p:ext uri="{D42A27DB-BD31-4B8C-83A1-F6EECF244321}">
+                <p14:modId xmlns:p14="http://schemas.microsoft.com/office/powerpoint/2010/main" val="3340926545"/>
+              </p:ext>
+            </p:extLst>
+          </p:nvPr>
+        </p:nvGraphicFramePr>
+        <p:xfrm>
+          <a:off x="3122928" y="3443461"/>
+          <a:ext cx="5946141" cy="640080"/>
+        </p:xfrm>
+        <a:graphic>
+          <a:graphicData uri="http://schemas.openxmlformats.org/drawingml/2006/table">
+            <a:tbl>
+              <a:tblPr firstRow="1" bandRow="1">
+                <a:tableStyleId>{5C22544A-7EE6-4342-B048-85BDC9FD1C3A}</a:tableStyleId>
+              </a:tblPr>
+              <a:tblGrid>
+                <a:gridCol w="1982047">
+                  <a:extLst>
+                    <a:ext uri="{9D8B030D-6E8A-4147-A177-3AD203B41FA5}">
+                      <a16:colId xmlns:a16="http://schemas.microsoft.com/office/drawing/2014/main" val="3167127258"/>
+                    </a:ext>
+                  </a:extLst>
+                </a:gridCol>
+                <a:gridCol w="1982047">
+                  <a:extLst>
+                    <a:ext uri="{9D8B030D-6E8A-4147-A177-3AD203B41FA5}">
+                      <a16:colId xmlns:a16="http://schemas.microsoft.com/office/drawing/2014/main" val="1913894467"/>
+                    </a:ext>
+                  </a:extLst>
+                </a:gridCol>
+                <a:gridCol w="1982047">
+                  <a:extLst>
+                    <a:ext uri="{9D8B030D-6E8A-4147-A177-3AD203B41FA5}">
+                      <a16:colId xmlns:a16="http://schemas.microsoft.com/office/drawing/2014/main" val="304178738"/>
+                    </a:ext>
+                  </a:extLst>
+                </a:gridCol>
+              </a:tblGrid>
+              <a:tr h="370840">
+                <a:tc>
+                  <a:txBody>
+                    <a:bodyPr/>
+                    <a:lstStyle/>
+                    <a:p>
+                      <a:pPr algn="ctr"/>
+                      <a:r>
+                        <a:rPr lang="en-US" b="0" dirty="0">
+                          <a:solidFill>
+                            <a:sysClr val="windowText" lastClr="000000"/>
+                          </a:solidFill>
+                        </a:rPr>
+                        <a:t>Download from Foundry models</a:t>
+                      </a:r>
+                    </a:p>
+                  </a:txBody>
+                  <a:tcPr anchor="ctr">
+                    <a:lnL w="12700" cmpd="sng">
+                      <a:noFill/>
+                    </a:lnL>
+                    <a:lnR w="12700" cmpd="sng">
+                      <a:noFill/>
+                    </a:lnR>
+                    <a:lnT w="12700" cmpd="sng">
+                      <a:noFill/>
+                    </a:lnT>
+                    <a:lnB w="38100" cmpd="sng">
+                      <a:noFill/>
+                    </a:lnB>
+                    <a:lnTlToBr w="12700" cmpd="sng">
+                      <a:noFill/>
+                      <a:prstDash val="solid"/>
+                    </a:lnTlToBr>
+                    <a:lnBlToTr w="12700" cmpd="sng">
+                      <a:noFill/>
+                      <a:prstDash val="solid"/>
+                    </a:lnBlToTr>
+                    <a:noFill/>
+                  </a:tcPr>
+                </a:tc>
+                <a:tc>
+                  <a:txBody>
+                    <a:bodyPr/>
+                    <a:lstStyle/>
+                    <a:p>
+                      <a:pPr algn="ctr"/>
+                      <a:r>
+                        <a:rPr lang="en-US" b="0" dirty="0">
+                          <a:solidFill>
+                            <a:sysClr val="windowText" lastClr="000000"/>
+                          </a:solidFill>
+                        </a:rPr>
+                        <a:t>Pull other models from Hugging Face</a:t>
+                      </a:r>
+                    </a:p>
+                  </a:txBody>
+                  <a:tcPr anchor="ctr">
+                    <a:lnL w="12700" cmpd="sng">
+                      <a:noFill/>
+                    </a:lnL>
+                    <a:lnR w="12700" cmpd="sng">
+                      <a:noFill/>
+                    </a:lnR>
+                    <a:lnT w="12700" cmpd="sng">
+                      <a:noFill/>
+                    </a:lnT>
+                    <a:lnB w="38100" cmpd="sng">
+                      <a:noFill/>
+                    </a:lnB>
+                    <a:lnTlToBr w="12700" cmpd="sng">
+                      <a:noFill/>
+                      <a:prstDash val="solid"/>
+                    </a:lnTlToBr>
+                    <a:lnBlToTr w="12700" cmpd="sng">
+                      <a:noFill/>
+                      <a:prstDash val="solid"/>
+                    </a:lnBlToTr>
+                    <a:noFill/>
+                  </a:tcPr>
+                </a:tc>
+                <a:tc>
+                  <a:txBody>
+                    <a:bodyPr/>
+                    <a:lstStyle/>
+                    <a:p>
+                      <a:pPr algn="ctr"/>
+                      <a:r>
+                        <a:rPr lang="en-US" b="0" dirty="0">
+                          <a:solidFill>
+                            <a:sysClr val="windowText" lastClr="000000"/>
+                          </a:solidFill>
+                        </a:rPr>
+                        <a:t>Optimize for your machine</a:t>
+                      </a:r>
+                    </a:p>
+                  </a:txBody>
+                  <a:tcPr anchor="ctr">
+                    <a:lnL w="12700" cmpd="sng">
+                      <a:noFill/>
+                    </a:lnL>
+                    <a:lnR w="12700" cmpd="sng">
+                      <a:noFill/>
+                    </a:lnR>
+                    <a:lnT w="12700" cmpd="sng">
+                      <a:noFill/>
+                    </a:lnT>
+                    <a:lnB w="38100" cmpd="sng">
+                      <a:noFill/>
+                    </a:lnB>
+                    <a:lnTlToBr w="12700" cmpd="sng">
+                      <a:noFill/>
+                      <a:prstDash val="solid"/>
+                    </a:lnTlToBr>
+                    <a:lnBlToTr w="12700" cmpd="sng">
+                      <a:noFill/>
+                      <a:prstDash val="solid"/>
+                    </a:lnBlToTr>
+                    <a:noFill/>
+                  </a:tcPr>
+                </a:tc>
+                <a:extLst>
+                  <a:ext uri="{0D108BD9-81ED-4DB2-BD59-A6C34878D82A}">
+                    <a16:rowId xmlns:a16="http://schemas.microsoft.com/office/drawing/2014/main" val="2068122310"/>
+                  </a:ext>
+                </a:extLst>
+              </a:tr>
+            </a:tbl>
+          </a:graphicData>
+        </a:graphic>
+      </p:graphicFrame>
+      <p:sp>
+        <p:nvSpPr>
+          <p:cNvPr id="8" name="Rectangle: Rounded Corners 7">
+            <a:extLst>
+              <a:ext uri="{FF2B5EF4-FFF2-40B4-BE49-F238E27FC236}">
+                <a16:creationId xmlns:a16="http://schemas.microsoft.com/office/drawing/2014/main" id="{807007C4-3061-A8D2-7F2E-AC6DBB9E5633}"/>
+              </a:ext>
+            </a:extLst>
+          </p:cNvPr>
+          <p:cNvSpPr/>
+          <p:nvPr/>
+        </p:nvSpPr>
+        <p:spPr>
+          <a:xfrm>
+            <a:off x="2933282" y="4527781"/>
+            <a:ext cx="6325438" cy="974563"/>
+          </a:xfrm>
+          <a:prstGeom prst="roundRect">
+            <a:avLst>
+              <a:gd name="adj" fmla="val 5234"/>
+            </a:avLst>
+          </a:prstGeom>
+          <a:solidFill>
+            <a:schemeClr val="bg1"/>
+          </a:solidFill>
+          <a:ln>
+            <a:solidFill>
+              <a:schemeClr val="tx1"/>
+            </a:solidFill>
+          </a:ln>
+        </p:spPr>
+        <p:style>
+          <a:lnRef idx="2">
+            <a:schemeClr val="accent1">
+              <a:shade val="15000"/>
+            </a:schemeClr>
+          </a:lnRef>
+          <a:fillRef idx="1">
+            <a:schemeClr val="accent1"/>
+          </a:fillRef>
+          <a:effectRef idx="0">
+            <a:schemeClr val="accent1"/>
+          </a:effectRef>
+          <a:fontRef idx="minor">
+            <a:schemeClr val="lt1"/>
+          </a:fontRef>
+        </p:style>
+        <p:txBody>
+          <a:bodyPr rtlCol="0" anchor="ctr"/>
+          <a:lstStyle/>
+          <a:p>
+            <a:pPr algn="ctr"/>
+            <a:endParaRPr lang="en-US" dirty="0">
+              <a:solidFill>
+                <a:schemeClr val="tx1"/>
+              </a:solidFill>
+            </a:endParaRPr>
+          </a:p>
+        </p:txBody>
+      </p:sp>
+      <p:sp>
+        <p:nvSpPr>
+          <p:cNvPr id="9" name="Rectangle: Rounded Corners 8">
+            <a:extLst>
+              <a:ext uri="{FF2B5EF4-FFF2-40B4-BE49-F238E27FC236}">
+                <a16:creationId xmlns:a16="http://schemas.microsoft.com/office/drawing/2014/main" id="{40E10519-9789-FE60-F956-7F35469179EF}"/>
+              </a:ext>
+            </a:extLst>
+          </p:cNvPr>
+          <p:cNvSpPr/>
+          <p:nvPr/>
+        </p:nvSpPr>
+        <p:spPr>
+          <a:xfrm>
+            <a:off x="4805538" y="4343115"/>
+            <a:ext cx="2580925" cy="369332"/>
+          </a:xfrm>
+          <a:prstGeom prst="roundRect">
+            <a:avLst/>
+          </a:prstGeom>
+          <a:solidFill>
+            <a:srgbClr val="B2D4EB"/>
+          </a:solidFill>
+          <a:ln>
+            <a:solidFill>
+              <a:schemeClr val="tx1"/>
+            </a:solidFill>
+          </a:ln>
+        </p:spPr>
+        <p:style>
+          <a:lnRef idx="2">
+            <a:schemeClr val="accent1">
+              <a:shade val="15000"/>
+            </a:schemeClr>
+          </a:lnRef>
+          <a:fillRef idx="1">
+            <a:schemeClr val="accent1"/>
+          </a:fillRef>
+          <a:effectRef idx="0">
+            <a:schemeClr val="accent1"/>
+          </a:effectRef>
+          <a:fontRef idx="minor">
+            <a:schemeClr val="lt1"/>
+          </a:fontRef>
+        </p:style>
+        <p:txBody>
+          <a:bodyPr rtlCol="0" anchor="ctr"/>
+          <a:lstStyle/>
+          <a:p>
+            <a:pPr algn="ctr"/>
+            <a:r>
+              <a:rPr lang="en-US" dirty="0">
+                <a:solidFill>
+                  <a:schemeClr val="tx1"/>
+                </a:solidFill>
+              </a:rPr>
+              <a:t>App Integration</a:t>
+            </a:r>
+            <a:endParaRPr lang="en-US" i="1" dirty="0">
+              <a:solidFill>
+                <a:schemeClr val="tx1"/>
+              </a:solidFill>
+            </a:endParaRPr>
+          </a:p>
+        </p:txBody>
+      </p:sp>
+      <p:graphicFrame>
+        <p:nvGraphicFramePr>
+          <p:cNvPr id="10" name="Table 9">
+            <a:extLst>
+              <a:ext uri="{FF2B5EF4-FFF2-40B4-BE49-F238E27FC236}">
+                <a16:creationId xmlns:a16="http://schemas.microsoft.com/office/drawing/2014/main" id="{5B679DA3-8983-1774-D4AD-BD0BA5945F8A}"/>
+              </a:ext>
+            </a:extLst>
+          </p:cNvPr>
+          <p:cNvGraphicFramePr>
+            <a:graphicFrameLocks noGrp="1"/>
+          </p:cNvGraphicFramePr>
+          <p:nvPr>
+            <p:extLst>
+              <p:ext uri="{D42A27DB-BD31-4B8C-83A1-F6EECF244321}">
+                <p14:modId xmlns:p14="http://schemas.microsoft.com/office/powerpoint/2010/main" val="1308394595"/>
+              </p:ext>
+            </p:extLst>
+          </p:nvPr>
+        </p:nvGraphicFramePr>
+        <p:xfrm>
+          <a:off x="3122929" y="4787355"/>
+          <a:ext cx="5946141" cy="640080"/>
+        </p:xfrm>
+        <a:graphic>
+          <a:graphicData uri="http://schemas.openxmlformats.org/drawingml/2006/table">
+            <a:tbl>
+              <a:tblPr firstRow="1" bandRow="1">
+                <a:tableStyleId>{5C22544A-7EE6-4342-B048-85BDC9FD1C3A}</a:tableStyleId>
+              </a:tblPr>
+              <a:tblGrid>
+                <a:gridCol w="1982047">
+                  <a:extLst>
+                    <a:ext uri="{9D8B030D-6E8A-4147-A177-3AD203B41FA5}">
+                      <a16:colId xmlns:a16="http://schemas.microsoft.com/office/drawing/2014/main" val="3167127258"/>
+                    </a:ext>
+                  </a:extLst>
+                </a:gridCol>
+                <a:gridCol w="1982047">
+                  <a:extLst>
+                    <a:ext uri="{9D8B030D-6E8A-4147-A177-3AD203B41FA5}">
+                      <a16:colId xmlns:a16="http://schemas.microsoft.com/office/drawing/2014/main" val="1913894467"/>
+                    </a:ext>
+                  </a:extLst>
+                </a:gridCol>
+                <a:gridCol w="1982047">
+                  <a:extLst>
+                    <a:ext uri="{9D8B030D-6E8A-4147-A177-3AD203B41FA5}">
+                      <a16:colId xmlns:a16="http://schemas.microsoft.com/office/drawing/2014/main" val="304178738"/>
+                    </a:ext>
+                  </a:extLst>
+                </a:gridCol>
+              </a:tblGrid>
+              <a:tr h="370840">
+                <a:tc>
+                  <a:txBody>
+                    <a:bodyPr/>
+                    <a:lstStyle/>
+                    <a:p>
+                      <a:pPr algn="ctr"/>
+                      <a:r>
+                        <a:rPr lang="en-US" b="0" dirty="0">
+                          <a:solidFill>
+                            <a:sysClr val="windowText" lastClr="000000"/>
+                          </a:solidFill>
+                        </a:rPr>
+                        <a:t>SDKs for </a:t>
+                      </a:r>
+                      <a:r>
+                        <a:rPr lang="en-US" b="0" dirty="0" err="1">
+                          <a:solidFill>
+                            <a:sysClr val="windowText" lastClr="000000"/>
+                          </a:solidFill>
+                        </a:rPr>
+                        <a:t>Javascript</a:t>
+                      </a:r>
+                      <a:r>
+                        <a:rPr lang="en-US" b="0" dirty="0">
+                          <a:solidFill>
+                            <a:sysClr val="windowText" lastClr="000000"/>
+                          </a:solidFill>
+                        </a:rPr>
+                        <a:t>, Python, &amp; C#</a:t>
+                      </a:r>
+                    </a:p>
+                  </a:txBody>
+                  <a:tcPr anchor="ctr">
+                    <a:lnL w="12700" cmpd="sng">
+                      <a:noFill/>
+                    </a:lnL>
+                    <a:lnR w="12700" cmpd="sng">
+                      <a:noFill/>
+                    </a:lnR>
+                    <a:lnT w="12700" cmpd="sng">
+                      <a:noFill/>
+                    </a:lnT>
+                    <a:lnB w="38100" cmpd="sng">
+                      <a:noFill/>
+                    </a:lnB>
+                    <a:lnTlToBr w="12700" cmpd="sng">
+                      <a:noFill/>
+                      <a:prstDash val="solid"/>
+                    </a:lnTlToBr>
+                    <a:lnBlToTr w="12700" cmpd="sng">
+                      <a:noFill/>
+                      <a:prstDash val="solid"/>
+                    </a:lnBlToTr>
+                    <a:noFill/>
+                  </a:tcPr>
+                </a:tc>
+                <a:tc>
+                  <a:txBody>
+                    <a:bodyPr/>
+                    <a:lstStyle/>
+                    <a:p>
+                      <a:pPr algn="ctr"/>
+                      <a:r>
+                        <a:rPr lang="en-US" b="0" dirty="0">
+                          <a:solidFill>
+                            <a:sysClr val="windowText" lastClr="000000"/>
+                          </a:solidFill>
+                        </a:rPr>
+                        <a:t>OpenAI-compatible API format</a:t>
+                      </a:r>
+                    </a:p>
+                  </a:txBody>
+                  <a:tcPr anchor="ctr">
+                    <a:lnL w="12700" cmpd="sng">
+                      <a:noFill/>
+                    </a:lnL>
+                    <a:lnR w="12700" cmpd="sng">
+                      <a:noFill/>
+                    </a:lnR>
+                    <a:lnT w="12700" cmpd="sng">
+                      <a:noFill/>
+                    </a:lnT>
+                    <a:lnB w="38100" cmpd="sng">
+                      <a:noFill/>
+                    </a:lnB>
+                    <a:lnTlToBr w="12700" cmpd="sng">
+                      <a:noFill/>
+                      <a:prstDash val="solid"/>
+                    </a:lnTlToBr>
+                    <a:lnBlToTr w="12700" cmpd="sng">
+                      <a:noFill/>
+                      <a:prstDash val="solid"/>
+                    </a:lnBlToTr>
+                    <a:noFill/>
+                  </a:tcPr>
+                </a:tc>
+                <a:tc>
+                  <a:txBody>
+                    <a:bodyPr/>
+                    <a:lstStyle/>
+                    <a:p>
+                      <a:pPr algn="ctr"/>
+                      <a:r>
+                        <a:rPr lang="en-US" b="0" dirty="0">
+                          <a:solidFill>
+                            <a:sysClr val="windowText" lastClr="000000"/>
+                          </a:solidFill>
+                        </a:rPr>
+                        <a:t>Interactive chat</a:t>
+                      </a:r>
+                    </a:p>
+                    <a:p>
+                      <a:pPr algn="ctr"/>
+                      <a:r>
+                        <a:rPr lang="en-US" b="0" dirty="0">
+                          <a:solidFill>
+                            <a:sysClr val="windowText" lastClr="000000"/>
+                          </a:solidFill>
+                        </a:rPr>
+                        <a:t>via the CLI</a:t>
+                      </a:r>
+                    </a:p>
+                  </a:txBody>
+                  <a:tcPr anchor="ctr">
+                    <a:lnL w="12700" cmpd="sng">
+                      <a:noFill/>
+                    </a:lnL>
+                    <a:lnR w="12700" cmpd="sng">
+                      <a:noFill/>
+                    </a:lnR>
+                    <a:lnT w="12700" cmpd="sng">
+                      <a:noFill/>
+                    </a:lnT>
+                    <a:lnB w="38100" cmpd="sng">
+                      <a:noFill/>
+                    </a:lnB>
+                    <a:lnTlToBr w="12700" cmpd="sng">
+                      <a:noFill/>
+                      <a:prstDash val="solid"/>
+                    </a:lnTlToBr>
+                    <a:lnBlToTr w="12700" cmpd="sng">
+                      <a:noFill/>
+                      <a:prstDash val="solid"/>
+                    </a:lnBlToTr>
+                    <a:noFill/>
+                  </a:tcPr>
+                </a:tc>
+                <a:extLst>
+                  <a:ext uri="{0D108BD9-81ED-4DB2-BD59-A6C34878D82A}">
+                    <a16:rowId xmlns:a16="http://schemas.microsoft.com/office/drawing/2014/main" val="2068122310"/>
+                  </a:ext>
+                </a:extLst>
+              </a:tr>
+            </a:tbl>
+          </a:graphicData>
+        </a:graphic>
+      </p:graphicFrame>
     </p:spTree>
     <p:extLst>
       <p:ext uri="{BB962C8B-B14F-4D97-AF65-F5344CB8AC3E}">
@@ -9526,6 +10487,1226 @@
           <a:chExt cx="0" cy="0"/>
         </a:xfrm>
       </p:grpSpPr>
+      <p:sp>
+        <p:nvSpPr>
+          <p:cNvPr id="2" name="Rectangle: Rounded Corners 1">
+            <a:extLst>
+              <a:ext uri="{FF2B5EF4-FFF2-40B4-BE49-F238E27FC236}">
+                <a16:creationId xmlns:a16="http://schemas.microsoft.com/office/drawing/2014/main" id="{9DABD033-95C1-DE14-1371-DDB65914500E}"/>
+              </a:ext>
+            </a:extLst>
+          </p:cNvPr>
+          <p:cNvSpPr/>
+          <p:nvPr/>
+        </p:nvSpPr>
+        <p:spPr>
+          <a:xfrm>
+            <a:off x="2584694" y="2174798"/>
+            <a:ext cx="4982297" cy="2468643"/>
+          </a:xfrm>
+          <a:prstGeom prst="roundRect">
+            <a:avLst>
+              <a:gd name="adj" fmla="val 5234"/>
+            </a:avLst>
+          </a:prstGeom>
+          <a:solidFill>
+            <a:schemeClr val="bg1"/>
+          </a:solidFill>
+          <a:ln>
+            <a:solidFill>
+              <a:schemeClr val="tx1"/>
+            </a:solidFill>
+          </a:ln>
+        </p:spPr>
+        <p:style>
+          <a:lnRef idx="2">
+            <a:schemeClr val="accent1">
+              <a:shade val="15000"/>
+            </a:schemeClr>
+          </a:lnRef>
+          <a:fillRef idx="1">
+            <a:schemeClr val="accent1"/>
+          </a:fillRef>
+          <a:effectRef idx="0">
+            <a:schemeClr val="accent1"/>
+          </a:effectRef>
+          <a:fontRef idx="minor">
+            <a:schemeClr val="lt1"/>
+          </a:fontRef>
+        </p:style>
+        <p:txBody>
+          <a:bodyPr rtlCol="0" anchor="ctr"/>
+          <a:lstStyle/>
+          <a:p>
+            <a:pPr algn="ctr"/>
+            <a:endParaRPr lang="en-US" dirty="0">
+              <a:solidFill>
+                <a:schemeClr val="tx1"/>
+              </a:solidFill>
+            </a:endParaRPr>
+          </a:p>
+        </p:txBody>
+      </p:sp>
+      <p:cxnSp>
+        <p:nvCxnSpPr>
+          <p:cNvPr id="8" name="Straight Arrow Connector 7">
+            <a:extLst>
+              <a:ext uri="{FF2B5EF4-FFF2-40B4-BE49-F238E27FC236}">
+                <a16:creationId xmlns:a16="http://schemas.microsoft.com/office/drawing/2014/main" id="{81F47915-E3BB-FBA3-7676-86FE48083972}"/>
+              </a:ext>
+            </a:extLst>
+          </p:cNvPr>
+          <p:cNvCxnSpPr>
+            <a:cxnSpLocks/>
+            <a:stCxn id="20" idx="1"/>
+            <a:endCxn id="12" idx="3"/>
+          </p:cNvCxnSpPr>
+          <p:nvPr/>
+        </p:nvCxnSpPr>
+        <p:spPr>
+          <a:xfrm flipH="1">
+            <a:off x="7281103" y="2888337"/>
+            <a:ext cx="795151" cy="0"/>
+          </a:xfrm>
+          <a:prstGeom prst="straightConnector1">
+            <a:avLst/>
+          </a:prstGeom>
+          <a:ln>
+            <a:solidFill>
+              <a:schemeClr val="tx1"/>
+            </a:solidFill>
+            <a:prstDash val="solid"/>
+            <a:headEnd type="none" w="lg" len="lg"/>
+            <a:tailEnd type="triangle" w="lg" len="lg"/>
+          </a:ln>
+        </p:spPr>
+        <p:style>
+          <a:lnRef idx="2">
+            <a:schemeClr val="accent1"/>
+          </a:lnRef>
+          <a:fillRef idx="0">
+            <a:schemeClr val="accent1"/>
+          </a:fillRef>
+          <a:effectRef idx="1">
+            <a:schemeClr val="accent1"/>
+          </a:effectRef>
+          <a:fontRef idx="minor">
+            <a:schemeClr val="tx1"/>
+          </a:fontRef>
+        </p:style>
+      </p:cxnSp>
+      <p:grpSp>
+        <p:nvGrpSpPr>
+          <p:cNvPr id="26" name="Group 25">
+            <a:extLst>
+              <a:ext uri="{FF2B5EF4-FFF2-40B4-BE49-F238E27FC236}">
+                <a16:creationId xmlns:a16="http://schemas.microsoft.com/office/drawing/2014/main" id="{D9DEEFD6-4A89-56D2-D306-6B0F392F03A2}"/>
+              </a:ext>
+            </a:extLst>
+          </p:cNvPr>
+          <p:cNvGrpSpPr/>
+          <p:nvPr/>
+        </p:nvGrpSpPr>
+        <p:grpSpPr>
+          <a:xfrm>
+            <a:off x="2870578" y="2444894"/>
+            <a:ext cx="4410525" cy="1928450"/>
+            <a:chOff x="4432935" y="2463266"/>
+            <a:chExt cx="4410525" cy="1928450"/>
+          </a:xfrm>
+        </p:grpSpPr>
+        <p:sp>
+          <p:nvSpPr>
+            <p:cNvPr id="4" name="Rectangle: Rounded Corners 3">
+              <a:extLst>
+                <a:ext uri="{FF2B5EF4-FFF2-40B4-BE49-F238E27FC236}">
+                  <a16:creationId xmlns:a16="http://schemas.microsoft.com/office/drawing/2014/main" id="{7D235446-172F-6EEA-DCA9-68B84AE458F0}"/>
+                </a:ext>
+              </a:extLst>
+            </p:cNvPr>
+            <p:cNvSpPr/>
+            <p:nvPr/>
+          </p:nvSpPr>
+          <p:spPr>
+            <a:xfrm>
+              <a:off x="4432936" y="2466285"/>
+              <a:ext cx="1344168" cy="866894"/>
+            </a:xfrm>
+            <a:prstGeom prst="roundRect">
+              <a:avLst/>
+            </a:prstGeom>
+            <a:solidFill>
+              <a:srgbClr val="E5F1F8"/>
+            </a:solidFill>
+            <a:ln>
+              <a:solidFill>
+                <a:schemeClr val="tx1"/>
+              </a:solidFill>
+            </a:ln>
+          </p:spPr>
+          <p:style>
+            <a:lnRef idx="2">
+              <a:schemeClr val="accent1">
+                <a:shade val="15000"/>
+              </a:schemeClr>
+            </a:lnRef>
+            <a:fillRef idx="1">
+              <a:schemeClr val="accent1"/>
+            </a:fillRef>
+            <a:effectRef idx="0">
+              <a:schemeClr val="accent1"/>
+            </a:effectRef>
+            <a:fontRef idx="minor">
+              <a:schemeClr val="lt1"/>
+            </a:fontRef>
+          </p:style>
+          <p:txBody>
+            <a:bodyPr rtlCol="0" anchor="ctr"/>
+            <a:lstStyle/>
+            <a:p>
+              <a:pPr algn="ctr"/>
+              <a:r>
+                <a:rPr lang="en-US" dirty="0">
+                  <a:solidFill>
+                    <a:schemeClr val="tx1"/>
+                  </a:solidFill>
+                </a:rPr>
+                <a:t>Local Service</a:t>
+              </a:r>
+            </a:p>
+            <a:p>
+              <a:pPr algn="ctr"/>
+              <a:r>
+                <a:rPr lang="en-US" dirty="0">
+                  <a:solidFill>
+                    <a:schemeClr val="tx1"/>
+                  </a:solidFill>
+                </a:rPr>
+                <a:t>(Core C API)</a:t>
+              </a:r>
+            </a:p>
+          </p:txBody>
+        </p:sp>
+        <p:sp>
+          <p:nvSpPr>
+            <p:cNvPr id="6" name="Rectangle: Rounded Corners 5">
+              <a:extLst>
+                <a:ext uri="{FF2B5EF4-FFF2-40B4-BE49-F238E27FC236}">
+                  <a16:creationId xmlns:a16="http://schemas.microsoft.com/office/drawing/2014/main" id="{EC6BE8AC-19F7-DD20-EE5B-659AF29F464A}"/>
+                </a:ext>
+              </a:extLst>
+            </p:cNvPr>
+            <p:cNvSpPr/>
+            <p:nvPr/>
+          </p:nvSpPr>
+          <p:spPr>
+            <a:xfrm>
+              <a:off x="5966114" y="2463266"/>
+              <a:ext cx="1344168" cy="866894"/>
+            </a:xfrm>
+            <a:prstGeom prst="roundRect">
+              <a:avLst/>
+            </a:prstGeom>
+            <a:solidFill>
+              <a:srgbClr val="E5F1F8"/>
+            </a:solidFill>
+            <a:ln>
+              <a:solidFill>
+                <a:schemeClr val="tx1"/>
+              </a:solidFill>
+            </a:ln>
+          </p:spPr>
+          <p:style>
+            <a:lnRef idx="2">
+              <a:schemeClr val="accent1">
+                <a:shade val="15000"/>
+              </a:schemeClr>
+            </a:lnRef>
+            <a:fillRef idx="1">
+              <a:schemeClr val="accent1"/>
+            </a:fillRef>
+            <a:effectRef idx="0">
+              <a:schemeClr val="accent1"/>
+            </a:effectRef>
+            <a:fontRef idx="minor">
+              <a:schemeClr val="lt1"/>
+            </a:fontRef>
+          </p:style>
+          <p:txBody>
+            <a:bodyPr rtlCol="0" anchor="ctr"/>
+            <a:lstStyle/>
+            <a:p>
+              <a:pPr algn="ctr"/>
+              <a:r>
+                <a:rPr lang="en-US" dirty="0">
+                  <a:solidFill>
+                    <a:schemeClr val="tx1"/>
+                  </a:solidFill>
+                </a:rPr>
+                <a:t>ONNX Runtime</a:t>
+              </a:r>
+            </a:p>
+          </p:txBody>
+        </p:sp>
+        <p:sp>
+          <p:nvSpPr>
+            <p:cNvPr id="7" name="Rectangle: Rounded Corners 6">
+              <a:extLst>
+                <a:ext uri="{FF2B5EF4-FFF2-40B4-BE49-F238E27FC236}">
+                  <a16:creationId xmlns:a16="http://schemas.microsoft.com/office/drawing/2014/main" id="{8197549C-A069-ABFE-9697-3B84E0F4C460}"/>
+                </a:ext>
+              </a:extLst>
+            </p:cNvPr>
+            <p:cNvSpPr/>
+            <p:nvPr/>
+          </p:nvSpPr>
+          <p:spPr>
+            <a:xfrm>
+              <a:off x="4432935" y="3524822"/>
+              <a:ext cx="4410525" cy="866894"/>
+            </a:xfrm>
+            <a:prstGeom prst="roundRect">
+              <a:avLst/>
+            </a:prstGeom>
+            <a:solidFill>
+              <a:srgbClr val="E5F1F8"/>
+            </a:solidFill>
+            <a:ln>
+              <a:solidFill>
+                <a:schemeClr val="tx1"/>
+              </a:solidFill>
+            </a:ln>
+          </p:spPr>
+          <p:style>
+            <a:lnRef idx="2">
+              <a:schemeClr val="accent1">
+                <a:shade val="15000"/>
+              </a:schemeClr>
+            </a:lnRef>
+            <a:fillRef idx="1">
+              <a:schemeClr val="accent1"/>
+            </a:fillRef>
+            <a:effectRef idx="0">
+              <a:schemeClr val="accent1"/>
+            </a:effectRef>
+            <a:fontRef idx="minor">
+              <a:schemeClr val="lt1"/>
+            </a:fontRef>
+          </p:style>
+          <p:txBody>
+            <a:bodyPr rtlCol="0" anchor="t"/>
+            <a:lstStyle/>
+            <a:p>
+              <a:pPr algn="ctr"/>
+              <a:r>
+                <a:rPr lang="en-US" dirty="0">
+                  <a:solidFill>
+                    <a:schemeClr val="tx1"/>
+                  </a:solidFill>
+                </a:rPr>
+                <a:t>Model Cache</a:t>
+              </a:r>
+            </a:p>
+          </p:txBody>
+        </p:sp>
+        <p:sp>
+          <p:nvSpPr>
+            <p:cNvPr id="12" name="Rectangle: Rounded Corners 11">
+              <a:extLst>
+                <a:ext uri="{FF2B5EF4-FFF2-40B4-BE49-F238E27FC236}">
+                  <a16:creationId xmlns:a16="http://schemas.microsoft.com/office/drawing/2014/main" id="{3EAD17B7-C4B2-FCB0-6649-6E63B0A81515}"/>
+                </a:ext>
+              </a:extLst>
+            </p:cNvPr>
+            <p:cNvSpPr/>
+            <p:nvPr/>
+          </p:nvSpPr>
+          <p:spPr>
+            <a:xfrm>
+              <a:off x="7499292" y="2473262"/>
+              <a:ext cx="1344168" cy="866894"/>
+            </a:xfrm>
+            <a:prstGeom prst="roundRect">
+              <a:avLst/>
+            </a:prstGeom>
+            <a:solidFill>
+              <a:srgbClr val="E5F1F8"/>
+            </a:solidFill>
+            <a:ln>
+              <a:solidFill>
+                <a:schemeClr val="tx1"/>
+              </a:solidFill>
+            </a:ln>
+          </p:spPr>
+          <p:style>
+            <a:lnRef idx="2">
+              <a:schemeClr val="accent1">
+                <a:shade val="15000"/>
+              </a:schemeClr>
+            </a:lnRef>
+            <a:fillRef idx="1">
+              <a:schemeClr val="accent1"/>
+            </a:fillRef>
+            <a:effectRef idx="0">
+              <a:schemeClr val="accent1"/>
+            </a:effectRef>
+            <a:fontRef idx="minor">
+              <a:schemeClr val="lt1"/>
+            </a:fontRef>
+          </p:style>
+          <p:txBody>
+            <a:bodyPr rtlCol="0" anchor="ctr"/>
+            <a:lstStyle/>
+            <a:p>
+              <a:pPr algn="ctr"/>
+              <a:r>
+                <a:rPr lang="en-US" dirty="0">
+                  <a:solidFill>
+                    <a:schemeClr val="tx1"/>
+                  </a:solidFill>
+                </a:rPr>
+                <a:t>Model Management</a:t>
+              </a:r>
+            </a:p>
+          </p:txBody>
+        </p:sp>
+        <p:sp>
+          <p:nvSpPr>
+            <p:cNvPr id="13" name="Rectangle: Rounded Corners 12">
+              <a:extLst>
+                <a:ext uri="{FF2B5EF4-FFF2-40B4-BE49-F238E27FC236}">
+                  <a16:creationId xmlns:a16="http://schemas.microsoft.com/office/drawing/2014/main" id="{2120D170-1949-EC3F-DB51-93C17FCF7505}"/>
+                </a:ext>
+              </a:extLst>
+            </p:cNvPr>
+            <p:cNvSpPr/>
+            <p:nvPr/>
+          </p:nvSpPr>
+          <p:spPr>
+            <a:xfrm>
+              <a:off x="6102328" y="3955654"/>
+              <a:ext cx="1071738" cy="322014"/>
+            </a:xfrm>
+            <a:prstGeom prst="roundRect">
+              <a:avLst/>
+            </a:prstGeom>
+            <a:solidFill>
+              <a:srgbClr val="B2D4EB"/>
+            </a:solidFill>
+            <a:ln>
+              <a:solidFill>
+                <a:schemeClr val="tx1"/>
+              </a:solidFill>
+            </a:ln>
+          </p:spPr>
+          <p:style>
+            <a:lnRef idx="2">
+              <a:schemeClr val="accent1">
+                <a:shade val="15000"/>
+              </a:schemeClr>
+            </a:lnRef>
+            <a:fillRef idx="1">
+              <a:schemeClr val="accent1"/>
+            </a:fillRef>
+            <a:effectRef idx="0">
+              <a:schemeClr val="accent1"/>
+            </a:effectRef>
+            <a:fontRef idx="minor">
+              <a:schemeClr val="lt1"/>
+            </a:fontRef>
+          </p:style>
+          <p:txBody>
+            <a:bodyPr rtlCol="0" anchor="ctr"/>
+            <a:lstStyle/>
+            <a:p>
+              <a:pPr algn="ctr"/>
+              <a:r>
+                <a:rPr lang="en-US" sz="1400" i="1" dirty="0">
+                  <a:solidFill>
+                    <a:schemeClr val="tx1"/>
+                  </a:solidFill>
+                </a:rPr>
+                <a:t>Model 2</a:t>
+              </a:r>
+            </a:p>
+          </p:txBody>
+        </p:sp>
+        <p:sp>
+          <p:nvSpPr>
+            <p:cNvPr id="14" name="Rectangle: Rounded Corners 13">
+              <a:extLst>
+                <a:ext uri="{FF2B5EF4-FFF2-40B4-BE49-F238E27FC236}">
+                  <a16:creationId xmlns:a16="http://schemas.microsoft.com/office/drawing/2014/main" id="{30451BAB-C34E-4650-515B-63F461663ED0}"/>
+                </a:ext>
+              </a:extLst>
+            </p:cNvPr>
+            <p:cNvSpPr/>
+            <p:nvPr/>
+          </p:nvSpPr>
+          <p:spPr>
+            <a:xfrm>
+              <a:off x="7635507" y="3955654"/>
+              <a:ext cx="1071738" cy="322014"/>
+            </a:xfrm>
+            <a:prstGeom prst="roundRect">
+              <a:avLst/>
+            </a:prstGeom>
+            <a:solidFill>
+              <a:srgbClr val="B2D4EB"/>
+            </a:solidFill>
+            <a:ln>
+              <a:solidFill>
+                <a:schemeClr val="tx1"/>
+              </a:solidFill>
+            </a:ln>
+          </p:spPr>
+          <p:style>
+            <a:lnRef idx="2">
+              <a:schemeClr val="accent1">
+                <a:shade val="15000"/>
+              </a:schemeClr>
+            </a:lnRef>
+            <a:fillRef idx="1">
+              <a:schemeClr val="accent1"/>
+            </a:fillRef>
+            <a:effectRef idx="0">
+              <a:schemeClr val="accent1"/>
+            </a:effectRef>
+            <a:fontRef idx="minor">
+              <a:schemeClr val="lt1"/>
+            </a:fontRef>
+          </p:style>
+          <p:txBody>
+            <a:bodyPr rtlCol="0" anchor="ctr"/>
+            <a:lstStyle/>
+            <a:p>
+              <a:pPr algn="ctr"/>
+              <a:r>
+                <a:rPr lang="en-US" sz="1400" i="1" dirty="0">
+                  <a:solidFill>
+                    <a:schemeClr val="tx1"/>
+                  </a:solidFill>
+                </a:rPr>
+                <a:t>Model 3</a:t>
+              </a:r>
+            </a:p>
+          </p:txBody>
+        </p:sp>
+        <p:sp>
+          <p:nvSpPr>
+            <p:cNvPr id="15" name="Rectangle: Rounded Corners 14">
+              <a:extLst>
+                <a:ext uri="{FF2B5EF4-FFF2-40B4-BE49-F238E27FC236}">
+                  <a16:creationId xmlns:a16="http://schemas.microsoft.com/office/drawing/2014/main" id="{55626C3B-43F8-65F9-6D86-F7B15D95C526}"/>
+                </a:ext>
+              </a:extLst>
+            </p:cNvPr>
+            <p:cNvSpPr/>
+            <p:nvPr/>
+          </p:nvSpPr>
+          <p:spPr>
+            <a:xfrm>
+              <a:off x="4569151" y="3945117"/>
+              <a:ext cx="1071738" cy="322014"/>
+            </a:xfrm>
+            <a:prstGeom prst="roundRect">
+              <a:avLst/>
+            </a:prstGeom>
+            <a:solidFill>
+              <a:srgbClr val="B2D4EB"/>
+            </a:solidFill>
+            <a:ln>
+              <a:solidFill>
+                <a:schemeClr val="tx1"/>
+              </a:solidFill>
+            </a:ln>
+          </p:spPr>
+          <p:style>
+            <a:lnRef idx="2">
+              <a:schemeClr val="accent1">
+                <a:shade val="15000"/>
+              </a:schemeClr>
+            </a:lnRef>
+            <a:fillRef idx="1">
+              <a:schemeClr val="accent1"/>
+            </a:fillRef>
+            <a:effectRef idx="0">
+              <a:schemeClr val="accent1"/>
+            </a:effectRef>
+            <a:fontRef idx="minor">
+              <a:schemeClr val="lt1"/>
+            </a:fontRef>
+          </p:style>
+          <p:txBody>
+            <a:bodyPr rtlCol="0" anchor="ctr"/>
+            <a:lstStyle/>
+            <a:p>
+              <a:pPr algn="ctr"/>
+              <a:r>
+                <a:rPr lang="en-US" sz="1400" i="1" dirty="0">
+                  <a:solidFill>
+                    <a:schemeClr val="tx1"/>
+                  </a:solidFill>
+                </a:rPr>
+                <a:t>Model 1</a:t>
+              </a:r>
+            </a:p>
+          </p:txBody>
+        </p:sp>
+      </p:grpSp>
+      <p:sp>
+        <p:nvSpPr>
+          <p:cNvPr id="16" name="Rectangle: Rounded Corners 15">
+            <a:extLst>
+              <a:ext uri="{FF2B5EF4-FFF2-40B4-BE49-F238E27FC236}">
+                <a16:creationId xmlns:a16="http://schemas.microsoft.com/office/drawing/2014/main" id="{03CFB2EF-0BF7-6736-3257-3868777206B9}"/>
+              </a:ext>
+            </a:extLst>
+          </p:cNvPr>
+          <p:cNvSpPr/>
+          <p:nvPr/>
+        </p:nvSpPr>
+        <p:spPr>
+          <a:xfrm>
+            <a:off x="3785379" y="4465752"/>
+            <a:ext cx="2580925" cy="369332"/>
+          </a:xfrm>
+          <a:prstGeom prst="roundRect">
+            <a:avLst/>
+          </a:prstGeom>
+          <a:solidFill>
+            <a:srgbClr val="B2D4EB"/>
+          </a:solidFill>
+          <a:ln>
+            <a:solidFill>
+              <a:schemeClr val="tx1"/>
+            </a:solidFill>
+          </a:ln>
+        </p:spPr>
+        <p:style>
+          <a:lnRef idx="2">
+            <a:schemeClr val="accent1">
+              <a:shade val="15000"/>
+            </a:schemeClr>
+          </a:lnRef>
+          <a:fillRef idx="1">
+            <a:schemeClr val="accent1"/>
+          </a:fillRef>
+          <a:effectRef idx="0">
+            <a:schemeClr val="accent1"/>
+          </a:effectRef>
+          <a:fontRef idx="minor">
+            <a:schemeClr val="lt1"/>
+          </a:fontRef>
+        </p:style>
+        <p:txBody>
+          <a:bodyPr rtlCol="0" anchor="ctr"/>
+          <a:lstStyle/>
+          <a:p>
+            <a:pPr algn="ctr"/>
+            <a:r>
+              <a:rPr lang="en-US" dirty="0">
+                <a:solidFill>
+                  <a:schemeClr val="tx1"/>
+                </a:solidFill>
+              </a:rPr>
+              <a:t>Foundry Local</a:t>
+            </a:r>
+            <a:endParaRPr lang="en-US" i="1" dirty="0">
+              <a:solidFill>
+                <a:schemeClr val="tx1"/>
+              </a:solidFill>
+            </a:endParaRPr>
+          </a:p>
+        </p:txBody>
+      </p:sp>
+      <p:pic>
+        <p:nvPicPr>
+          <p:cNvPr id="18" name="Picture 17">
+            <a:extLst>
+              <a:ext uri="{FF2B5EF4-FFF2-40B4-BE49-F238E27FC236}">
+                <a16:creationId xmlns:a16="http://schemas.microsoft.com/office/drawing/2014/main" id="{740EC0C0-D10C-CDBC-F226-4707993BAD76}"/>
+              </a:ext>
+            </a:extLst>
+          </p:cNvPr>
+          <p:cNvPicPr>
+            <a:picLocks noChangeAspect="1"/>
+          </p:cNvPicPr>
+          <p:nvPr/>
+        </p:nvPicPr>
+        <p:blipFill>
+          <a:blip r:embed="rId2">
+            <a:extLst>
+              <a:ext uri="{28A0092B-C50C-407E-A947-70E740481C1C}">
+                <a14:useLocalDpi xmlns:a14="http://schemas.microsoft.com/office/drawing/2010/main" val="0"/>
+              </a:ext>
+            </a:extLst>
+          </a:blip>
+          <a:stretch>
+            <a:fillRect/>
+          </a:stretch>
+        </p:blipFill>
+        <p:spPr>
+          <a:xfrm>
+            <a:off x="3858140" y="4444678"/>
+            <a:ext cx="411480" cy="411480"/>
+          </a:xfrm>
+          <a:prstGeom prst="rect">
+            <a:avLst/>
+          </a:prstGeom>
+        </p:spPr>
+      </p:pic>
+      <p:pic>
+        <p:nvPicPr>
+          <p:cNvPr id="20" name="Picture 19">
+            <a:extLst>
+              <a:ext uri="{FF2B5EF4-FFF2-40B4-BE49-F238E27FC236}">
+                <a16:creationId xmlns:a16="http://schemas.microsoft.com/office/drawing/2014/main" id="{08B03222-4598-AD0F-7004-E5BF69B439B1}"/>
+              </a:ext>
+            </a:extLst>
+          </p:cNvPr>
+          <p:cNvPicPr>
+            <a:picLocks noChangeAspect="1"/>
+          </p:cNvPicPr>
+          <p:nvPr/>
+        </p:nvPicPr>
+        <p:blipFill>
+          <a:blip r:embed="rId3">
+            <a:extLst>
+              <a:ext uri="{28A0092B-C50C-407E-A947-70E740481C1C}">
+                <a14:useLocalDpi xmlns:a14="http://schemas.microsoft.com/office/drawing/2010/main" val="0"/>
+              </a:ext>
+            </a:extLst>
+          </a:blip>
+          <a:stretch>
+            <a:fillRect/>
+          </a:stretch>
+        </p:blipFill>
+        <p:spPr>
+          <a:xfrm>
+            <a:off x="8076254" y="2545437"/>
+            <a:ext cx="750647" cy="685800"/>
+          </a:xfrm>
+          <a:prstGeom prst="rect">
+            <a:avLst/>
+          </a:prstGeom>
+        </p:spPr>
+      </p:pic>
+      <p:sp>
+        <p:nvSpPr>
+          <p:cNvPr id="21" name="TextBox 20">
+            <a:extLst>
+              <a:ext uri="{FF2B5EF4-FFF2-40B4-BE49-F238E27FC236}">
+                <a16:creationId xmlns:a16="http://schemas.microsoft.com/office/drawing/2014/main" id="{61ACAD34-655D-6D96-E9CE-9A30055341BD}"/>
+              </a:ext>
+            </a:extLst>
+          </p:cNvPr>
+          <p:cNvSpPr txBox="1"/>
+          <p:nvPr/>
+        </p:nvSpPr>
+        <p:spPr>
+          <a:xfrm>
+            <a:off x="7613977" y="3183284"/>
+            <a:ext cx="1675202" cy="646331"/>
+          </a:xfrm>
+          <a:prstGeom prst="rect">
+            <a:avLst/>
+          </a:prstGeom>
+          <a:noFill/>
+        </p:spPr>
+        <p:txBody>
+          <a:bodyPr wrap="none" rtlCol="0">
+            <a:spAutoFit/>
+          </a:bodyPr>
+          <a:lstStyle/>
+          <a:p>
+            <a:pPr algn="ctr"/>
+            <a:r>
+              <a:rPr lang="en-US" dirty="0"/>
+              <a:t>Microsoft Foundry</a:t>
+            </a:r>
+          </a:p>
+          <a:p>
+            <a:pPr algn="ctr"/>
+            <a:r>
+              <a:rPr lang="en-US" dirty="0"/>
+              <a:t>Model Catalog</a:t>
+            </a:r>
+          </a:p>
+        </p:txBody>
+      </p:sp>
+      <p:sp>
+        <p:nvSpPr>
+          <p:cNvPr id="29" name="Rectangle: Rounded Corners 28">
+            <a:extLst>
+              <a:ext uri="{FF2B5EF4-FFF2-40B4-BE49-F238E27FC236}">
+                <a16:creationId xmlns:a16="http://schemas.microsoft.com/office/drawing/2014/main" id="{8D49B3AD-DB92-B552-129E-23875F3C5E8A}"/>
+              </a:ext>
+            </a:extLst>
+          </p:cNvPr>
+          <p:cNvSpPr/>
+          <p:nvPr/>
+        </p:nvSpPr>
+        <p:spPr>
+          <a:xfrm>
+            <a:off x="2584694" y="800167"/>
+            <a:ext cx="4982297" cy="941185"/>
+          </a:xfrm>
+          <a:prstGeom prst="roundRect">
+            <a:avLst>
+              <a:gd name="adj" fmla="val 5234"/>
+            </a:avLst>
+          </a:prstGeom>
+          <a:solidFill>
+            <a:schemeClr val="bg1"/>
+          </a:solidFill>
+          <a:ln>
+            <a:solidFill>
+              <a:schemeClr val="tx1"/>
+            </a:solidFill>
+          </a:ln>
+        </p:spPr>
+        <p:style>
+          <a:lnRef idx="2">
+            <a:schemeClr val="accent1">
+              <a:shade val="15000"/>
+            </a:schemeClr>
+          </a:lnRef>
+          <a:fillRef idx="1">
+            <a:schemeClr val="accent1"/>
+          </a:fillRef>
+          <a:effectRef idx="0">
+            <a:schemeClr val="accent1"/>
+          </a:effectRef>
+          <a:fontRef idx="minor">
+            <a:schemeClr val="lt1"/>
+          </a:fontRef>
+        </p:style>
+        <p:txBody>
+          <a:bodyPr rtlCol="0" anchor="ctr"/>
+          <a:lstStyle/>
+          <a:p>
+            <a:pPr algn="ctr"/>
+            <a:endParaRPr lang="en-US" dirty="0">
+              <a:solidFill>
+                <a:schemeClr val="tx1"/>
+              </a:solidFill>
+            </a:endParaRPr>
+          </a:p>
+        </p:txBody>
+      </p:sp>
+      <p:sp>
+        <p:nvSpPr>
+          <p:cNvPr id="30" name="Rectangle: Rounded Corners 29">
+            <a:extLst>
+              <a:ext uri="{FF2B5EF4-FFF2-40B4-BE49-F238E27FC236}">
+                <a16:creationId xmlns:a16="http://schemas.microsoft.com/office/drawing/2014/main" id="{FE1E4223-18B0-0270-B46F-77DE56377983}"/>
+              </a:ext>
+            </a:extLst>
+          </p:cNvPr>
+          <p:cNvSpPr/>
+          <p:nvPr/>
+        </p:nvSpPr>
+        <p:spPr>
+          <a:xfrm>
+            <a:off x="3785377" y="615501"/>
+            <a:ext cx="2580925" cy="369332"/>
+          </a:xfrm>
+          <a:prstGeom prst="roundRect">
+            <a:avLst/>
+          </a:prstGeom>
+          <a:solidFill>
+            <a:srgbClr val="B2D4EB"/>
+          </a:solidFill>
+          <a:ln>
+            <a:solidFill>
+              <a:schemeClr val="tx1"/>
+            </a:solidFill>
+          </a:ln>
+        </p:spPr>
+        <p:style>
+          <a:lnRef idx="2">
+            <a:schemeClr val="accent1">
+              <a:shade val="15000"/>
+            </a:schemeClr>
+          </a:lnRef>
+          <a:fillRef idx="1">
+            <a:schemeClr val="accent1"/>
+          </a:fillRef>
+          <a:effectRef idx="0">
+            <a:schemeClr val="accent1"/>
+          </a:effectRef>
+          <a:fontRef idx="minor">
+            <a:schemeClr val="lt1"/>
+          </a:fontRef>
+        </p:style>
+        <p:txBody>
+          <a:bodyPr rtlCol="0" anchor="ctr"/>
+          <a:lstStyle/>
+          <a:p>
+            <a:pPr algn="ctr"/>
+            <a:r>
+              <a:rPr lang="en-US" dirty="0">
+                <a:solidFill>
+                  <a:schemeClr val="tx1"/>
+                </a:solidFill>
+              </a:rPr>
+              <a:t>Developer Experience</a:t>
+            </a:r>
+            <a:endParaRPr lang="en-US" i="1" dirty="0">
+              <a:solidFill>
+                <a:schemeClr val="tx1"/>
+              </a:solidFill>
+            </a:endParaRPr>
+          </a:p>
+        </p:txBody>
+      </p:sp>
+      <p:sp>
+        <p:nvSpPr>
+          <p:cNvPr id="32" name="Rectangle: Rounded Corners 31">
+            <a:extLst>
+              <a:ext uri="{FF2B5EF4-FFF2-40B4-BE49-F238E27FC236}">
+                <a16:creationId xmlns:a16="http://schemas.microsoft.com/office/drawing/2014/main" id="{D047E8E3-E96F-F9CC-2C1A-9F31EC67F570}"/>
+              </a:ext>
+            </a:extLst>
+          </p:cNvPr>
+          <p:cNvSpPr/>
+          <p:nvPr/>
+        </p:nvSpPr>
+        <p:spPr>
+          <a:xfrm>
+            <a:off x="4403757" y="1064612"/>
+            <a:ext cx="1344168" cy="553989"/>
+          </a:xfrm>
+          <a:prstGeom prst="roundRect">
+            <a:avLst/>
+          </a:prstGeom>
+          <a:solidFill>
+            <a:srgbClr val="E5F1F8"/>
+          </a:solidFill>
+          <a:ln>
+            <a:solidFill>
+              <a:schemeClr val="tx1"/>
+            </a:solidFill>
+          </a:ln>
+        </p:spPr>
+        <p:style>
+          <a:lnRef idx="2">
+            <a:schemeClr val="accent1">
+              <a:shade val="15000"/>
+            </a:schemeClr>
+          </a:lnRef>
+          <a:fillRef idx="1">
+            <a:schemeClr val="accent1"/>
+          </a:fillRef>
+          <a:effectRef idx="0">
+            <a:schemeClr val="accent1"/>
+          </a:effectRef>
+          <a:fontRef idx="minor">
+            <a:schemeClr val="lt1"/>
+          </a:fontRef>
+        </p:style>
+        <p:txBody>
+          <a:bodyPr rtlCol="0" anchor="ctr"/>
+          <a:lstStyle/>
+          <a:p>
+            <a:pPr algn="ctr"/>
+            <a:r>
+              <a:rPr lang="en-US" dirty="0">
+                <a:solidFill>
+                  <a:schemeClr val="tx1"/>
+                </a:solidFill>
+              </a:rPr>
+              <a:t>SDKs</a:t>
+            </a:r>
+          </a:p>
+        </p:txBody>
+      </p:sp>
+      <p:sp>
+        <p:nvSpPr>
+          <p:cNvPr id="33" name="Rectangle: Rounded Corners 32">
+            <a:extLst>
+              <a:ext uri="{FF2B5EF4-FFF2-40B4-BE49-F238E27FC236}">
+                <a16:creationId xmlns:a16="http://schemas.microsoft.com/office/drawing/2014/main" id="{1549E190-6268-5A77-8C6B-DAEBDEFAD43C}"/>
+              </a:ext>
+            </a:extLst>
+          </p:cNvPr>
+          <p:cNvSpPr/>
+          <p:nvPr/>
+        </p:nvSpPr>
+        <p:spPr>
+          <a:xfrm>
+            <a:off x="5985374" y="1064611"/>
+            <a:ext cx="1344168" cy="553989"/>
+          </a:xfrm>
+          <a:prstGeom prst="roundRect">
+            <a:avLst/>
+          </a:prstGeom>
+          <a:solidFill>
+            <a:srgbClr val="E5F1F8"/>
+          </a:solidFill>
+          <a:ln>
+            <a:solidFill>
+              <a:schemeClr val="tx1"/>
+            </a:solidFill>
+          </a:ln>
+        </p:spPr>
+        <p:style>
+          <a:lnRef idx="2">
+            <a:schemeClr val="accent1">
+              <a:shade val="15000"/>
+            </a:schemeClr>
+          </a:lnRef>
+          <a:fillRef idx="1">
+            <a:schemeClr val="accent1"/>
+          </a:fillRef>
+          <a:effectRef idx="0">
+            <a:schemeClr val="accent1"/>
+          </a:effectRef>
+          <a:fontRef idx="minor">
+            <a:schemeClr val="lt1"/>
+          </a:fontRef>
+        </p:style>
+        <p:txBody>
+          <a:bodyPr rtlCol="0" anchor="ctr"/>
+          <a:lstStyle/>
+          <a:p>
+            <a:pPr algn="ctr"/>
+            <a:r>
+              <a:rPr lang="en-US" dirty="0">
+                <a:solidFill>
+                  <a:schemeClr val="tx1"/>
+                </a:solidFill>
+              </a:rPr>
+              <a:t>CLI</a:t>
+            </a:r>
+          </a:p>
+        </p:txBody>
+      </p:sp>
+      <p:sp>
+        <p:nvSpPr>
+          <p:cNvPr id="34" name="Rectangle: Rounded Corners 33">
+            <a:extLst>
+              <a:ext uri="{FF2B5EF4-FFF2-40B4-BE49-F238E27FC236}">
+                <a16:creationId xmlns:a16="http://schemas.microsoft.com/office/drawing/2014/main" id="{20DFE1C6-902A-9B22-61A5-FE9656C8C7D0}"/>
+              </a:ext>
+            </a:extLst>
+          </p:cNvPr>
+          <p:cNvSpPr/>
+          <p:nvPr/>
+        </p:nvSpPr>
+        <p:spPr>
+          <a:xfrm>
+            <a:off x="2822140" y="1062776"/>
+            <a:ext cx="1344168" cy="553989"/>
+          </a:xfrm>
+          <a:prstGeom prst="roundRect">
+            <a:avLst/>
+          </a:prstGeom>
+          <a:solidFill>
+            <a:srgbClr val="E5F1F8"/>
+          </a:solidFill>
+          <a:ln>
+            <a:solidFill>
+              <a:schemeClr val="tx1"/>
+            </a:solidFill>
+          </a:ln>
+        </p:spPr>
+        <p:style>
+          <a:lnRef idx="2">
+            <a:schemeClr val="accent1">
+              <a:shade val="15000"/>
+            </a:schemeClr>
+          </a:lnRef>
+          <a:fillRef idx="1">
+            <a:schemeClr val="accent1"/>
+          </a:fillRef>
+          <a:effectRef idx="0">
+            <a:schemeClr val="accent1"/>
+          </a:effectRef>
+          <a:fontRef idx="minor">
+            <a:schemeClr val="lt1"/>
+          </a:fontRef>
+        </p:style>
+        <p:txBody>
+          <a:bodyPr rtlCol="0" anchor="ctr"/>
+          <a:lstStyle/>
+          <a:p>
+            <a:pPr algn="ctr"/>
+            <a:r>
+              <a:rPr lang="en-US" dirty="0">
+                <a:solidFill>
+                  <a:schemeClr val="tx1"/>
+                </a:solidFill>
+              </a:rPr>
+              <a:t>REST Web Server</a:t>
+            </a:r>
+          </a:p>
+        </p:txBody>
+      </p:sp>
+      <p:cxnSp>
+        <p:nvCxnSpPr>
+          <p:cNvPr id="35" name="Straight Arrow Connector 34">
+            <a:extLst>
+              <a:ext uri="{FF2B5EF4-FFF2-40B4-BE49-F238E27FC236}">
+                <a16:creationId xmlns:a16="http://schemas.microsoft.com/office/drawing/2014/main" id="{C78B64DB-9DDF-AAC1-D30D-EC498B479ED1}"/>
+              </a:ext>
+            </a:extLst>
+          </p:cNvPr>
+          <p:cNvCxnSpPr>
+            <a:cxnSpLocks/>
+          </p:cNvCxnSpPr>
+          <p:nvPr/>
+        </p:nvCxnSpPr>
+        <p:spPr>
+          <a:xfrm flipV="1">
+            <a:off x="4282872" y="1741352"/>
+            <a:ext cx="0" cy="433446"/>
+          </a:xfrm>
+          <a:prstGeom prst="straightConnector1">
+            <a:avLst/>
+          </a:prstGeom>
+          <a:ln>
+            <a:solidFill>
+              <a:schemeClr val="tx1"/>
+            </a:solidFill>
+            <a:prstDash val="solid"/>
+            <a:headEnd type="triangle" w="lg" len="lg"/>
+            <a:tailEnd type="triangle" w="lg" len="lg"/>
+          </a:ln>
+        </p:spPr>
+        <p:style>
+          <a:lnRef idx="2">
+            <a:schemeClr val="accent1"/>
+          </a:lnRef>
+          <a:fillRef idx="0">
+            <a:schemeClr val="accent1"/>
+          </a:fillRef>
+          <a:effectRef idx="1">
+            <a:schemeClr val="accent1"/>
+          </a:effectRef>
+          <a:fontRef idx="minor">
+            <a:schemeClr val="tx1"/>
+          </a:fontRef>
+        </p:style>
+      </p:cxnSp>
+      <p:cxnSp>
+        <p:nvCxnSpPr>
+          <p:cNvPr id="39" name="Straight Arrow Connector 38">
+            <a:extLst>
+              <a:ext uri="{FF2B5EF4-FFF2-40B4-BE49-F238E27FC236}">
+                <a16:creationId xmlns:a16="http://schemas.microsoft.com/office/drawing/2014/main" id="{6DC56010-06B3-9647-A302-F7EA6C749369}"/>
+              </a:ext>
+            </a:extLst>
+          </p:cNvPr>
+          <p:cNvCxnSpPr>
+            <a:cxnSpLocks/>
+          </p:cNvCxnSpPr>
+          <p:nvPr/>
+        </p:nvCxnSpPr>
+        <p:spPr>
+          <a:xfrm flipV="1">
+            <a:off x="5853254" y="1741352"/>
+            <a:ext cx="0" cy="433446"/>
+          </a:xfrm>
+          <a:prstGeom prst="straightConnector1">
+            <a:avLst/>
+          </a:prstGeom>
+          <a:ln>
+            <a:solidFill>
+              <a:schemeClr val="tx1"/>
+            </a:solidFill>
+            <a:prstDash val="solid"/>
+            <a:headEnd type="triangle" w="lg" len="lg"/>
+            <a:tailEnd type="triangle" w="lg" len="lg"/>
+          </a:ln>
+        </p:spPr>
+        <p:style>
+          <a:lnRef idx="2">
+            <a:schemeClr val="accent1"/>
+          </a:lnRef>
+          <a:fillRef idx="0">
+            <a:schemeClr val="accent1"/>
+          </a:fillRef>
+          <a:effectRef idx="1">
+            <a:schemeClr val="accent1"/>
+          </a:effectRef>
+          <a:fontRef idx="minor">
+            <a:schemeClr val="tx1"/>
+          </a:fontRef>
+        </p:style>
+      </p:cxnSp>
+      <p:sp>
+        <p:nvSpPr>
+          <p:cNvPr id="40" name="TextBox 39">
+            <a:extLst>
+              <a:ext uri="{FF2B5EF4-FFF2-40B4-BE49-F238E27FC236}">
+                <a16:creationId xmlns:a16="http://schemas.microsoft.com/office/drawing/2014/main" id="{6B841E0E-9A0C-0AF0-73DC-3D01CB1B600C}"/>
+              </a:ext>
+            </a:extLst>
+          </p:cNvPr>
+          <p:cNvSpPr txBox="1"/>
+          <p:nvPr/>
+        </p:nvSpPr>
+        <p:spPr>
+          <a:xfrm>
+            <a:off x="5985374" y="1795687"/>
+            <a:ext cx="1015920" cy="307777"/>
+          </a:xfrm>
+          <a:prstGeom prst="rect">
+            <a:avLst/>
+          </a:prstGeom>
+          <a:noFill/>
+        </p:spPr>
+        <p:txBody>
+          <a:bodyPr wrap="none" rtlCol="0">
+            <a:spAutoFit/>
+          </a:bodyPr>
+          <a:lstStyle/>
+          <a:p>
+            <a:r>
+              <a:rPr lang="en-US" sz="1400" i="1" dirty="0"/>
+              <a:t>Named Pipes</a:t>
+            </a:r>
+          </a:p>
+        </p:txBody>
+      </p:sp>
+      <p:sp>
+        <p:nvSpPr>
+          <p:cNvPr id="41" name="TextBox 40">
+            <a:extLst>
+              <a:ext uri="{FF2B5EF4-FFF2-40B4-BE49-F238E27FC236}">
+                <a16:creationId xmlns:a16="http://schemas.microsoft.com/office/drawing/2014/main" id="{5B935555-E192-F7FA-B5DB-71FBC3D6CE7B}"/>
+              </a:ext>
+            </a:extLst>
+          </p:cNvPr>
+          <p:cNvSpPr txBox="1"/>
+          <p:nvPr/>
+        </p:nvSpPr>
+        <p:spPr>
+          <a:xfrm>
+            <a:off x="3328515" y="1801431"/>
+            <a:ext cx="837793" cy="307777"/>
+          </a:xfrm>
+          <a:prstGeom prst="rect">
+            <a:avLst/>
+          </a:prstGeom>
+          <a:noFill/>
+        </p:spPr>
+        <p:txBody>
+          <a:bodyPr wrap="none" rtlCol="0">
+            <a:spAutoFit/>
+          </a:bodyPr>
+          <a:lstStyle/>
+          <a:p>
+            <a:pPr algn="ctr"/>
+            <a:r>
+              <a:rPr lang="en-US" sz="1400" i="1" dirty="0"/>
+              <a:t>HTTP Calls</a:t>
+            </a:r>
+          </a:p>
+        </p:txBody>
+      </p:sp>
     </p:spTree>
     <p:extLst>
       <p:ext uri="{BB962C8B-B14F-4D97-AF65-F5344CB8AC3E}">
@@ -9562,6 +11743,2264 @@
           <a:chExt cx="0" cy="0"/>
         </a:xfrm>
       </p:grpSpPr>
+      <p:grpSp>
+        <p:nvGrpSpPr>
+          <p:cNvPr id="3" name="Group 2">
+            <a:extLst>
+              <a:ext uri="{FF2B5EF4-FFF2-40B4-BE49-F238E27FC236}">
+                <a16:creationId xmlns:a16="http://schemas.microsoft.com/office/drawing/2014/main" id="{1CA1E36B-6F8B-78EC-D1DA-00A7BA890F0C}"/>
+              </a:ext>
+            </a:extLst>
+          </p:cNvPr>
+          <p:cNvGrpSpPr/>
+          <p:nvPr/>
+        </p:nvGrpSpPr>
+        <p:grpSpPr>
+          <a:xfrm>
+            <a:off x="573747" y="1716157"/>
+            <a:ext cx="10253279" cy="3589047"/>
+            <a:chOff x="112514" y="1046426"/>
+            <a:chExt cx="8240279" cy="3542588"/>
+          </a:xfrm>
+        </p:grpSpPr>
+        <p:sp>
+          <p:nvSpPr>
+            <p:cNvPr id="4" name="Rectangle 3">
+              <a:extLst>
+                <a:ext uri="{FF2B5EF4-FFF2-40B4-BE49-F238E27FC236}">
+                  <a16:creationId xmlns:a16="http://schemas.microsoft.com/office/drawing/2014/main" id="{2E48D362-580F-42C1-3153-EC52D854BB7E}"/>
+                </a:ext>
+              </a:extLst>
+            </p:cNvPr>
+            <p:cNvSpPr/>
+            <p:nvPr/>
+          </p:nvSpPr>
+          <p:spPr>
+            <a:xfrm>
+              <a:off x="542776" y="1046427"/>
+              <a:ext cx="1525630" cy="273831"/>
+            </a:xfrm>
+            <a:prstGeom prst="rect">
+              <a:avLst/>
+            </a:prstGeom>
+            <a:solidFill>
+              <a:srgbClr val="B2D4EB"/>
+            </a:solidFill>
+          </p:spPr>
+          <p:style>
+            <a:lnRef idx="2">
+              <a:schemeClr val="dk1">
+                <a:shade val="15000"/>
+              </a:schemeClr>
+            </a:lnRef>
+            <a:fillRef idx="1">
+              <a:schemeClr val="dk1"/>
+            </a:fillRef>
+            <a:effectRef idx="0">
+              <a:schemeClr val="dk1"/>
+            </a:effectRef>
+            <a:fontRef idx="minor">
+              <a:schemeClr val="lt1"/>
+            </a:fontRef>
+          </p:style>
+          <p:txBody>
+            <a:bodyPr rtlCol="0" anchor="ctr"/>
+            <a:lstStyle/>
+            <a:p>
+              <a:pPr algn="ctr"/>
+              <a:r>
+                <a:rPr lang="en-US" dirty="0">
+                  <a:solidFill>
+                    <a:schemeClr val="tx1"/>
+                  </a:solidFill>
+                </a:rPr>
+                <a:t>Model Weight</a:t>
+              </a:r>
+            </a:p>
+          </p:txBody>
+        </p:sp>
+        <mc:AlternateContent xmlns:mc="http://schemas.openxmlformats.org/markup-compatibility/2006">
+          <mc:Choice xmlns:a14="http://schemas.microsoft.com/office/drawing/2010/main" Requires="a14">
+            <p:sp>
+              <p:nvSpPr>
+                <p:cNvPr id="5" name="Rectangle 4">
+                  <a:extLst>
+                    <a:ext uri="{FF2B5EF4-FFF2-40B4-BE49-F238E27FC236}">
+                      <a16:creationId xmlns:a16="http://schemas.microsoft.com/office/drawing/2014/main" id="{6BE5B6E0-B039-FB4B-FEBD-88B3EACEBF59}"/>
+                    </a:ext>
+                  </a:extLst>
+                </p:cNvPr>
+                <p:cNvSpPr/>
+                <p:nvPr/>
+              </p:nvSpPr>
+              <p:spPr>
+                <a:xfrm>
+                  <a:off x="542776" y="1320258"/>
+                  <a:ext cx="1525630" cy="289315"/>
+                </a:xfrm>
+                <a:prstGeom prst="rect">
+                  <a:avLst/>
+                </a:prstGeom>
+                <a:solidFill>
+                  <a:schemeClr val="bg1"/>
+                </a:solidFill>
+              </p:spPr>
+              <p:style>
+                <a:lnRef idx="2">
+                  <a:schemeClr val="accent5">
+                    <a:shade val="15000"/>
+                  </a:schemeClr>
+                </a:lnRef>
+                <a:fillRef idx="1">
+                  <a:schemeClr val="accent5"/>
+                </a:fillRef>
+                <a:effectRef idx="0">
+                  <a:schemeClr val="accent5"/>
+                </a:effectRef>
+                <a:fontRef idx="minor">
+                  <a:schemeClr val="lt1"/>
+                </a:fontRef>
+              </p:style>
+              <p:txBody>
+                <a:bodyPr rtlCol="0" anchor="ctr"/>
+                <a:lstStyle/>
+                <a:p>
+                  <a:pPr algn="ctr"/>
+                  <a14:m>
+                    <m:oMathPara xmlns:m="http://schemas.openxmlformats.org/officeDocument/2006/math">
+                      <m:oMathParaPr>
+                        <m:jc m:val="centerGroup"/>
+                      </m:oMathParaPr>
+                      <m:oMath xmlns:m="http://schemas.openxmlformats.org/officeDocument/2006/math">
+                        <m:r>
+                          <a:rPr lang="en-US" b="0" i="1" smtClean="0">
+                            <a:solidFill>
+                              <a:sysClr val="windowText" lastClr="000000"/>
+                            </a:solidFill>
+                            <a:latin typeface="Cambria Math" panose="02040503050406030204" pitchFamily="18" charset="0"/>
+                          </a:rPr>
+                          <m:t>𝑤</m:t>
+                        </m:r>
+                        <m:r>
+                          <a:rPr lang="en-US" b="0" i="1" smtClean="0">
+                            <a:solidFill>
+                              <a:sysClr val="windowText" lastClr="000000"/>
+                            </a:solidFill>
+                            <a:latin typeface="Cambria Math" panose="02040503050406030204" pitchFamily="18" charset="0"/>
+                          </a:rPr>
+                          <m:t>=0.37</m:t>
+                        </m:r>
+                      </m:oMath>
+                    </m:oMathPara>
+                  </a14:m>
+                  <a:endParaRPr lang="en-US" dirty="0">
+                    <a:solidFill>
+                      <a:sysClr val="windowText" lastClr="000000"/>
+                    </a:solidFill>
+                  </a:endParaRPr>
+                </a:p>
+              </p:txBody>
+            </p:sp>
+          </mc:Choice>
+          <mc:Fallback>
+            <p:sp>
+              <p:nvSpPr>
+                <p:cNvPr id="5" name="Rectangle 4">
+                  <a:extLst>
+                    <a:ext uri="{FF2B5EF4-FFF2-40B4-BE49-F238E27FC236}">
+                      <a16:creationId xmlns:a16="http://schemas.microsoft.com/office/drawing/2014/main" id="{6BE5B6E0-B039-FB4B-FEBD-88B3EACEBF59}"/>
+                    </a:ext>
+                  </a:extLst>
+                </p:cNvPr>
+                <p:cNvSpPr>
+                  <a:spLocks noRot="1" noChangeAspect="1" noMove="1" noResize="1" noEditPoints="1" noAdjustHandles="1" noChangeArrowheads="1" noChangeShapeType="1" noTextEdit="1"/>
+                </p:cNvSpPr>
+                <p:nvPr/>
+              </p:nvSpPr>
+              <p:spPr>
+                <a:xfrm>
+                  <a:off x="542776" y="1320258"/>
+                  <a:ext cx="1525630" cy="289315"/>
+                </a:xfrm>
+                <a:prstGeom prst="rect">
+                  <a:avLst/>
+                </a:prstGeom>
+                <a:blipFill>
+                  <a:blip r:embed="rId2"/>
+                  <a:stretch>
+                    <a:fillRect b="-3922"/>
+                  </a:stretch>
+                </a:blipFill>
+              </p:spPr>
+              <p:txBody>
+                <a:bodyPr/>
+                <a:lstStyle/>
+                <a:p>
+                  <a:r>
+                    <a:rPr lang="en-US">
+                      <a:noFill/>
+                    </a:rPr>
+                    <a:t> </a:t>
+                  </a:r>
+                </a:p>
+              </p:txBody>
+            </p:sp>
+          </mc:Fallback>
+        </mc:AlternateContent>
+        <p:sp>
+          <p:nvSpPr>
+            <p:cNvPr id="6" name="TextBox 5">
+              <a:extLst>
+                <a:ext uri="{FF2B5EF4-FFF2-40B4-BE49-F238E27FC236}">
+                  <a16:creationId xmlns:a16="http://schemas.microsoft.com/office/drawing/2014/main" id="{51D7E328-0589-1816-BDBA-AD0FE42F5688}"/>
+                </a:ext>
+              </a:extLst>
+            </p:cNvPr>
+            <p:cNvSpPr txBox="1"/>
+            <p:nvPr/>
+          </p:nvSpPr>
+          <p:spPr>
+            <a:xfrm>
+              <a:off x="549126" y="1639593"/>
+              <a:ext cx="1525630" cy="430887"/>
+            </a:xfrm>
+            <a:prstGeom prst="rect">
+              <a:avLst/>
+            </a:prstGeom>
+            <a:noFill/>
+          </p:spPr>
+          <p:txBody>
+            <a:bodyPr wrap="square" rtlCol="0">
+              <a:spAutoFit/>
+            </a:bodyPr>
+            <a:lstStyle/>
+            <a:p>
+              <a:pPr algn="ctr"/>
+              <a:r>
+                <a:rPr lang="en-US" sz="1100" dirty="0"/>
+                <a:t>Stored as a 32-bit number (FP32)*</a:t>
+              </a:r>
+            </a:p>
+          </p:txBody>
+        </p:sp>
+        <p:sp>
+          <p:nvSpPr>
+            <p:cNvPr id="7" name="Rectangle 6">
+              <a:extLst>
+                <a:ext uri="{FF2B5EF4-FFF2-40B4-BE49-F238E27FC236}">
+                  <a16:creationId xmlns:a16="http://schemas.microsoft.com/office/drawing/2014/main" id="{D0E40183-A35F-5E76-740F-108817A55AEF}"/>
+                </a:ext>
+              </a:extLst>
+            </p:cNvPr>
+            <p:cNvSpPr/>
+            <p:nvPr/>
+          </p:nvSpPr>
+          <p:spPr>
+            <a:xfrm>
+              <a:off x="278148" y="2328864"/>
+              <a:ext cx="2067587" cy="273831"/>
+            </a:xfrm>
+            <a:prstGeom prst="rect">
+              <a:avLst/>
+            </a:prstGeom>
+            <a:solidFill>
+              <a:srgbClr val="B2D4EB"/>
+            </a:solidFill>
+          </p:spPr>
+          <p:style>
+            <a:lnRef idx="2">
+              <a:schemeClr val="dk1">
+                <a:shade val="15000"/>
+              </a:schemeClr>
+            </a:lnRef>
+            <a:fillRef idx="1">
+              <a:schemeClr val="dk1"/>
+            </a:fillRef>
+            <a:effectRef idx="0">
+              <a:schemeClr val="dk1"/>
+            </a:effectRef>
+            <a:fontRef idx="minor">
+              <a:schemeClr val="lt1"/>
+            </a:fontRef>
+          </p:style>
+          <p:txBody>
+            <a:bodyPr rtlCol="0" anchor="ctr"/>
+            <a:lstStyle/>
+            <a:p>
+              <a:pPr algn="ctr"/>
+              <a:r>
+                <a:rPr lang="en-US" dirty="0">
+                  <a:solidFill>
+                    <a:schemeClr val="tx1"/>
+                  </a:solidFill>
+                </a:rPr>
+                <a:t>4-bit Quantization</a:t>
+              </a:r>
+            </a:p>
+          </p:txBody>
+        </p:sp>
+        <mc:AlternateContent xmlns:mc="http://schemas.openxmlformats.org/markup-compatibility/2006">
+          <mc:Choice xmlns:a14="http://schemas.microsoft.com/office/drawing/2010/main" Requires="a14">
+            <p:sp>
+              <p:nvSpPr>
+                <p:cNvPr id="8" name="Rectangle 7">
+                  <a:extLst>
+                    <a:ext uri="{FF2B5EF4-FFF2-40B4-BE49-F238E27FC236}">
+                      <a16:creationId xmlns:a16="http://schemas.microsoft.com/office/drawing/2014/main" id="{27C0CFB8-487E-1AB4-9407-F3EA9F0EF059}"/>
+                    </a:ext>
+                  </a:extLst>
+                </p:cNvPr>
+                <p:cNvSpPr/>
+                <p:nvPr/>
+              </p:nvSpPr>
+              <p:spPr>
+                <a:xfrm>
+                  <a:off x="278149" y="2602695"/>
+                  <a:ext cx="2067586" cy="577001"/>
+                </a:xfrm>
+                <a:prstGeom prst="rect">
+                  <a:avLst/>
+                </a:prstGeom>
+                <a:solidFill>
+                  <a:schemeClr val="bg1"/>
+                </a:solidFill>
+              </p:spPr>
+              <p:style>
+                <a:lnRef idx="2">
+                  <a:schemeClr val="accent5">
+                    <a:shade val="15000"/>
+                  </a:schemeClr>
+                </a:lnRef>
+                <a:fillRef idx="1">
+                  <a:schemeClr val="accent5"/>
+                </a:fillRef>
+                <a:effectRef idx="0">
+                  <a:schemeClr val="accent5"/>
+                </a:effectRef>
+                <a:fontRef idx="minor">
+                  <a:schemeClr val="lt1"/>
+                </a:fontRef>
+              </p:style>
+              <p:txBody>
+                <a:bodyPr rtlCol="0" anchor="ctr"/>
+                <a:lstStyle/>
+                <a:p>
+                  <a:pPr algn="ctr"/>
+                  <a14:m>
+                    <m:oMathPara xmlns:m="http://schemas.openxmlformats.org/officeDocument/2006/math">
+                      <m:oMathParaPr>
+                        <m:jc m:val="centerGroup"/>
+                      </m:oMathParaPr>
+                      <m:oMath xmlns:m="http://schemas.openxmlformats.org/officeDocument/2006/math">
+                        <m:r>
+                          <a:rPr lang="en-US" b="0" i="1" smtClean="0">
+                            <a:solidFill>
+                              <a:sysClr val="windowText" lastClr="000000"/>
+                            </a:solidFill>
+                            <a:latin typeface="Cambria Math" panose="02040503050406030204" pitchFamily="18" charset="0"/>
+                          </a:rPr>
+                          <m:t>𝑄</m:t>
+                        </m:r>
+                        <m:d>
+                          <m:dPr>
+                            <m:ctrlPr>
+                              <a:rPr lang="en-US" b="0" i="1" smtClean="0">
+                                <a:solidFill>
+                                  <a:sysClr val="windowText" lastClr="000000"/>
+                                </a:solidFill>
+                                <a:latin typeface="Cambria Math" panose="02040503050406030204" pitchFamily="18" charset="0"/>
+                              </a:rPr>
+                            </m:ctrlPr>
+                          </m:dPr>
+                          <m:e>
+                            <m:r>
+                              <a:rPr lang="en-US" b="0" i="1" smtClean="0">
+                                <a:solidFill>
+                                  <a:sysClr val="windowText" lastClr="000000"/>
+                                </a:solidFill>
+                                <a:latin typeface="Cambria Math" panose="02040503050406030204" pitchFamily="18" charset="0"/>
+                              </a:rPr>
+                              <m:t>𝑤</m:t>
+                            </m:r>
+                          </m:e>
+                        </m:d>
+                        <m:r>
+                          <a:rPr lang="en-US" b="0" i="1" smtClean="0">
+                            <a:solidFill>
+                              <a:sysClr val="windowText" lastClr="000000"/>
+                            </a:solidFill>
+                            <a:latin typeface="Cambria Math" panose="02040503050406030204" pitchFamily="18" charset="0"/>
+                          </a:rPr>
+                          <m:t>=</m:t>
+                        </m:r>
+                        <m:r>
+                          <m:rPr>
+                            <m:nor/>
+                          </m:rPr>
+                          <a:rPr lang="en-US" b="0" i="0" smtClean="0">
+                            <a:solidFill>
+                              <a:sysClr val="windowText" lastClr="000000"/>
+                            </a:solidFill>
+                            <a:latin typeface="Cambria Math" panose="02040503050406030204" pitchFamily="18" charset="0"/>
+                          </a:rPr>
+                          <m:t>round</m:t>
+                        </m:r>
+                        <m:d>
+                          <m:dPr>
+                            <m:ctrlPr>
+                              <a:rPr lang="en-US" b="0" i="1" smtClean="0">
+                                <a:solidFill>
+                                  <a:sysClr val="windowText" lastClr="000000"/>
+                                </a:solidFill>
+                                <a:latin typeface="Cambria Math" panose="02040503050406030204" pitchFamily="18" charset="0"/>
+                              </a:rPr>
+                            </m:ctrlPr>
+                          </m:dPr>
+                          <m:e>
+                            <m:f>
+                              <m:fPr>
+                                <m:ctrlPr>
+                                  <a:rPr lang="en-US" b="0" i="1" smtClean="0">
+                                    <a:solidFill>
+                                      <a:sysClr val="windowText" lastClr="000000"/>
+                                    </a:solidFill>
+                                    <a:latin typeface="Cambria Math" panose="02040503050406030204" pitchFamily="18" charset="0"/>
+                                  </a:rPr>
+                                </m:ctrlPr>
+                              </m:fPr>
+                              <m:num>
+                                <m:r>
+                                  <a:rPr lang="en-US" b="0" i="1" smtClean="0">
+                                    <a:solidFill>
+                                      <a:sysClr val="windowText" lastClr="000000"/>
+                                    </a:solidFill>
+                                    <a:latin typeface="Cambria Math" panose="02040503050406030204" pitchFamily="18" charset="0"/>
+                                  </a:rPr>
+                                  <m:t>𝑤</m:t>
+                                </m:r>
+                              </m:num>
+                              <m:den>
+                                <m:r>
+                                  <a:rPr lang="en-US" b="0" i="1" smtClean="0">
+                                    <a:solidFill>
+                                      <a:sysClr val="windowText" lastClr="000000"/>
+                                    </a:solidFill>
+                                    <a:latin typeface="Cambria Math" panose="02040503050406030204" pitchFamily="18" charset="0"/>
+                                  </a:rPr>
+                                  <m:t>𝑆</m:t>
+                                </m:r>
+                              </m:den>
+                            </m:f>
+                          </m:e>
+                        </m:d>
+                      </m:oMath>
+                    </m:oMathPara>
+                  </a14:m>
+                  <a:endParaRPr lang="en-US" dirty="0">
+                    <a:solidFill>
+                      <a:sysClr val="windowText" lastClr="000000"/>
+                    </a:solidFill>
+                  </a:endParaRPr>
+                </a:p>
+              </p:txBody>
+            </p:sp>
+          </mc:Choice>
+          <mc:Fallback>
+            <p:sp>
+              <p:nvSpPr>
+                <p:cNvPr id="8" name="Rectangle 7">
+                  <a:extLst>
+                    <a:ext uri="{FF2B5EF4-FFF2-40B4-BE49-F238E27FC236}">
+                      <a16:creationId xmlns:a16="http://schemas.microsoft.com/office/drawing/2014/main" id="{27C0CFB8-487E-1AB4-9407-F3EA9F0EF059}"/>
+                    </a:ext>
+                  </a:extLst>
+                </p:cNvPr>
+                <p:cNvSpPr>
+                  <a:spLocks noRot="1" noChangeAspect="1" noMove="1" noResize="1" noEditPoints="1" noAdjustHandles="1" noChangeArrowheads="1" noChangeShapeType="1" noTextEdit="1"/>
+                </p:cNvSpPr>
+                <p:nvPr/>
+              </p:nvSpPr>
+              <p:spPr>
+                <a:xfrm>
+                  <a:off x="278149" y="2602695"/>
+                  <a:ext cx="2067586" cy="577001"/>
+                </a:xfrm>
+                <a:prstGeom prst="rect">
+                  <a:avLst/>
+                </a:prstGeom>
+                <a:blipFill>
+                  <a:blip r:embed="rId3"/>
+                  <a:stretch>
+                    <a:fillRect/>
+                  </a:stretch>
+                </a:blipFill>
+              </p:spPr>
+              <p:txBody>
+                <a:bodyPr/>
+                <a:lstStyle/>
+                <a:p>
+                  <a:r>
+                    <a:rPr lang="en-US">
+                      <a:noFill/>
+                    </a:rPr>
+                    <a:t> </a:t>
+                  </a:r>
+                </a:p>
+              </p:txBody>
+            </p:sp>
+          </mc:Fallback>
+        </mc:AlternateContent>
+        <mc:AlternateContent xmlns:mc="http://schemas.openxmlformats.org/markup-compatibility/2006">
+          <mc:Choice xmlns:a14="http://schemas.microsoft.com/office/drawing/2010/main" Requires="a14">
+            <p:sp>
+              <p:nvSpPr>
+                <p:cNvPr id="9" name="TextBox 8">
+                  <a:extLst>
+                    <a:ext uri="{FF2B5EF4-FFF2-40B4-BE49-F238E27FC236}">
+                      <a16:creationId xmlns:a16="http://schemas.microsoft.com/office/drawing/2014/main" id="{CEA2197A-6B30-EDA9-B710-11ED19E1A2EA}"/>
+                    </a:ext>
+                  </a:extLst>
+                </p:cNvPr>
+                <p:cNvSpPr txBox="1"/>
+                <p:nvPr/>
+              </p:nvSpPr>
+              <p:spPr>
+                <a:xfrm>
+                  <a:off x="112514" y="3180683"/>
+                  <a:ext cx="2398855" cy="1260739"/>
+                </a:xfrm>
+                <a:prstGeom prst="rect">
+                  <a:avLst/>
+                </a:prstGeom>
+                <a:noFill/>
+              </p:spPr>
+              <p:txBody>
+                <a:bodyPr wrap="square" rtlCol="0">
+                  <a:spAutoFit/>
+                </a:bodyPr>
+                <a:lstStyle/>
+                <a:p>
+                  <a:pPr algn="ctr"/>
+                  <a:r>
+                    <a:rPr lang="en-US" sz="1100" dirty="0"/>
+                    <a:t>A 4-bit quantized value can represent 2</a:t>
+                  </a:r>
+                  <a:r>
+                    <a:rPr lang="en-US" sz="1100" baseline="30000" dirty="0"/>
+                    <a:t>4</a:t>
+                  </a:r>
+                  <a:r>
+                    <a:rPr lang="en-US" sz="1100" dirty="0"/>
+                    <a:t>=16 discrete levels.</a:t>
+                  </a:r>
+                </a:p>
+                <a:p>
+                  <a:r>
+                    <a:rPr lang="en-US" sz="1100" dirty="0"/>
+                    <a:t>Where:</a:t>
+                  </a:r>
+                </a:p>
+                <a:p>
+                  <a:pPr marL="171450" indent="-171450">
+                    <a:buFont typeface="Arial" panose="020B0604020202020204" pitchFamily="34" charset="0"/>
+                    <a:buChar char="•"/>
+                  </a:pPr>
+                  <a14:m>
+                    <m:oMath xmlns:m="http://schemas.openxmlformats.org/officeDocument/2006/math">
+                      <m:r>
+                        <a:rPr lang="en-US" sz="1100" i="1" dirty="0" smtClean="0">
+                          <a:latin typeface="Cambria Math" panose="02040503050406030204" pitchFamily="18" charset="0"/>
+                        </a:rPr>
+                        <m:t>𝑆</m:t>
+                      </m:r>
+                    </m:oMath>
+                  </a14:m>
+                  <a:r>
+                    <a:rPr lang="en-US" sz="1100" dirty="0"/>
+                    <a:t> is the scale factor (how much one quantization level represents)</a:t>
+                  </a:r>
+                </a:p>
+                <a:p>
+                  <a:pPr marL="171450" indent="-171450">
+                    <a:buFont typeface="Arial" panose="020B0604020202020204" pitchFamily="34" charset="0"/>
+                    <a:buChar char="•"/>
+                  </a:pPr>
+                  <a14:m>
+                    <m:oMath xmlns:m="http://schemas.openxmlformats.org/officeDocument/2006/math">
+                      <m:r>
+                        <a:rPr lang="en-US" sz="1100" i="1" dirty="0" smtClean="0">
+                          <a:latin typeface="Cambria Math" panose="02040503050406030204" pitchFamily="18" charset="0"/>
+                        </a:rPr>
+                        <m:t>𝑄</m:t>
+                      </m:r>
+                      <m:r>
+                        <a:rPr lang="en-US" sz="1100" i="1" dirty="0" smtClean="0">
+                          <a:latin typeface="Cambria Math" panose="02040503050406030204" pitchFamily="18" charset="0"/>
+                        </a:rPr>
+                        <m:t>(</m:t>
+                      </m:r>
+                      <m:r>
+                        <a:rPr lang="en-US" sz="1100" i="1" dirty="0" smtClean="0">
+                          <a:latin typeface="Cambria Math" panose="02040503050406030204" pitchFamily="18" charset="0"/>
+                        </a:rPr>
+                        <m:t>𝑤</m:t>
+                      </m:r>
+                      <m:r>
+                        <a:rPr lang="en-US" sz="1100" i="1" dirty="0" smtClean="0">
+                          <a:latin typeface="Cambria Math" panose="02040503050406030204" pitchFamily="18" charset="0"/>
+                        </a:rPr>
+                        <m:t>) </m:t>
+                      </m:r>
+                    </m:oMath>
+                  </a14:m>
+                  <a:r>
+                    <a:rPr lang="en-US" sz="1100" dirty="0"/>
+                    <a:t>is an integer between [-8,+7] (16 levels total).</a:t>
+                  </a:r>
+                </a:p>
+                <a:p>
+                  <a:pPr marL="171450" indent="-171450">
+                    <a:buFont typeface="Arial" panose="020B0604020202020204" pitchFamily="34" charset="0"/>
+                    <a:buChar char="•"/>
+                  </a:pPr>
+                  <a14:m>
+                    <m:oMath xmlns:m="http://schemas.openxmlformats.org/officeDocument/2006/math">
+                      <m:r>
+                        <a:rPr lang="en-US" sz="1100" i="1" dirty="0" smtClean="0">
+                          <a:latin typeface="Cambria Math" panose="02040503050406030204" pitchFamily="18" charset="0"/>
+                        </a:rPr>
+                        <m:t>𝑄</m:t>
+                      </m:r>
+                      <m:r>
+                        <a:rPr lang="en-US" sz="1100" i="1" dirty="0" smtClean="0">
+                          <a:latin typeface="Cambria Math" panose="02040503050406030204" pitchFamily="18" charset="0"/>
+                        </a:rPr>
+                        <m:t>(</m:t>
+                      </m:r>
+                      <m:r>
+                        <a:rPr lang="en-US" sz="1100" i="1" dirty="0" smtClean="0">
+                          <a:latin typeface="Cambria Math" panose="02040503050406030204" pitchFamily="18" charset="0"/>
+                        </a:rPr>
+                        <m:t>𝑤</m:t>
+                      </m:r>
+                      <m:r>
+                        <a:rPr lang="en-US" sz="1100" i="1" dirty="0" smtClean="0">
+                          <a:latin typeface="Cambria Math" panose="02040503050406030204" pitchFamily="18" charset="0"/>
+                        </a:rPr>
+                        <m:t>)∈{−8,−7,−6,…,6,7}</m:t>
+                      </m:r>
+                    </m:oMath>
+                  </a14:m>
+                  <a:endParaRPr lang="en-US" sz="1100" dirty="0"/>
+                </a:p>
+              </p:txBody>
+            </p:sp>
+          </mc:Choice>
+          <mc:Fallback>
+            <p:sp>
+              <p:nvSpPr>
+                <p:cNvPr id="9" name="TextBox 8">
+                  <a:extLst>
+                    <a:ext uri="{FF2B5EF4-FFF2-40B4-BE49-F238E27FC236}">
+                      <a16:creationId xmlns:a16="http://schemas.microsoft.com/office/drawing/2014/main" id="{CEA2197A-6B30-EDA9-B710-11ED19E1A2EA}"/>
+                    </a:ext>
+                  </a:extLst>
+                </p:cNvPr>
+                <p:cNvSpPr txBox="1">
+                  <a:spLocks noRot="1" noChangeAspect="1" noMove="1" noResize="1" noEditPoints="1" noAdjustHandles="1" noChangeArrowheads="1" noChangeShapeType="1" noTextEdit="1"/>
+                </p:cNvSpPr>
+                <p:nvPr/>
+              </p:nvSpPr>
+              <p:spPr>
+                <a:xfrm>
+                  <a:off x="112514" y="3180683"/>
+                  <a:ext cx="2398855" cy="1260739"/>
+                </a:xfrm>
+                <a:prstGeom prst="rect">
+                  <a:avLst/>
+                </a:prstGeom>
+                <a:blipFill>
+                  <a:blip r:embed="rId4"/>
+                  <a:stretch>
+                    <a:fillRect b="-1429"/>
+                  </a:stretch>
+                </a:blipFill>
+              </p:spPr>
+              <p:txBody>
+                <a:bodyPr/>
+                <a:lstStyle/>
+                <a:p>
+                  <a:r>
+                    <a:rPr lang="en-US">
+                      <a:noFill/>
+                    </a:rPr>
+                    <a:t> </a:t>
+                  </a:r>
+                </a:p>
+              </p:txBody>
+            </p:sp>
+          </mc:Fallback>
+        </mc:AlternateContent>
+        <p:sp>
+          <p:nvSpPr>
+            <p:cNvPr id="10" name="Rectangle 9">
+              <a:extLst>
+                <a:ext uri="{FF2B5EF4-FFF2-40B4-BE49-F238E27FC236}">
+                  <a16:creationId xmlns:a16="http://schemas.microsoft.com/office/drawing/2014/main" id="{F8000436-35AE-15BA-7C56-0E053A1C98DD}"/>
+                </a:ext>
+              </a:extLst>
+            </p:cNvPr>
+            <p:cNvSpPr/>
+            <p:nvPr/>
+          </p:nvSpPr>
+          <p:spPr>
+            <a:xfrm>
+              <a:off x="2886939" y="1046426"/>
+              <a:ext cx="2757871" cy="273831"/>
+            </a:xfrm>
+            <a:prstGeom prst="rect">
+              <a:avLst/>
+            </a:prstGeom>
+            <a:solidFill>
+              <a:srgbClr val="B2D4EB"/>
+            </a:solidFill>
+          </p:spPr>
+          <p:style>
+            <a:lnRef idx="2">
+              <a:schemeClr val="dk1">
+                <a:shade val="15000"/>
+              </a:schemeClr>
+            </a:lnRef>
+            <a:fillRef idx="1">
+              <a:schemeClr val="dk1"/>
+            </a:fillRef>
+            <a:effectRef idx="0">
+              <a:schemeClr val="dk1"/>
+            </a:effectRef>
+            <a:fontRef idx="minor">
+              <a:schemeClr val="lt1"/>
+            </a:fontRef>
+          </p:style>
+          <p:txBody>
+            <a:bodyPr rtlCol="0" anchor="ctr"/>
+            <a:lstStyle/>
+            <a:p>
+              <a:pPr algn="ctr"/>
+              <a:r>
+                <a:rPr lang="en-US" dirty="0">
+                  <a:solidFill>
+                    <a:schemeClr val="tx1"/>
+                  </a:solidFill>
+                </a:rPr>
+                <a:t>Map the Scale</a:t>
+              </a:r>
+            </a:p>
+          </p:txBody>
+        </p:sp>
+        <mc:AlternateContent xmlns:mc="http://schemas.openxmlformats.org/markup-compatibility/2006">
+          <mc:Choice xmlns:a14="http://schemas.microsoft.com/office/drawing/2010/main" Requires="a14">
+            <p:sp>
+              <p:nvSpPr>
+                <p:cNvPr id="11" name="Rectangle 10">
+                  <a:extLst>
+                    <a:ext uri="{FF2B5EF4-FFF2-40B4-BE49-F238E27FC236}">
+                      <a16:creationId xmlns:a16="http://schemas.microsoft.com/office/drawing/2014/main" id="{46CEBABB-5713-12A3-0F3D-6E24FAB414B1}"/>
+                    </a:ext>
+                  </a:extLst>
+                </p:cNvPr>
+                <p:cNvSpPr/>
+                <p:nvPr/>
+              </p:nvSpPr>
+              <p:spPr>
+                <a:xfrm>
+                  <a:off x="2886939" y="1315484"/>
+                  <a:ext cx="2757871" cy="577001"/>
+                </a:xfrm>
+                <a:prstGeom prst="rect">
+                  <a:avLst/>
+                </a:prstGeom>
+                <a:solidFill>
+                  <a:schemeClr val="bg1"/>
+                </a:solidFill>
+              </p:spPr>
+              <p:style>
+                <a:lnRef idx="2">
+                  <a:schemeClr val="accent5">
+                    <a:shade val="15000"/>
+                  </a:schemeClr>
+                </a:lnRef>
+                <a:fillRef idx="1">
+                  <a:schemeClr val="accent5"/>
+                </a:fillRef>
+                <a:effectRef idx="0">
+                  <a:schemeClr val="accent5"/>
+                </a:effectRef>
+                <a:fontRef idx="minor">
+                  <a:schemeClr val="lt1"/>
+                </a:fontRef>
+              </p:style>
+              <p:txBody>
+                <a:bodyPr rtlCol="0" anchor="ctr"/>
+                <a:lstStyle/>
+                <a:p>
+                  <a:pPr algn="ctr"/>
+                  <a14:m>
+                    <m:oMathPara xmlns:m="http://schemas.openxmlformats.org/officeDocument/2006/math">
+                      <m:oMathParaPr>
+                        <m:jc m:val="centerGroup"/>
+                      </m:oMathParaPr>
+                      <m:oMath xmlns:m="http://schemas.openxmlformats.org/officeDocument/2006/math">
+                        <m:r>
+                          <m:rPr>
+                            <m:sty m:val="p"/>
+                          </m:rPr>
+                          <a:rPr lang="en-US" b="0" i="0" smtClean="0">
+                            <a:solidFill>
+                              <a:sysClr val="windowText" lastClr="000000"/>
+                            </a:solidFill>
+                            <a:latin typeface="Cambria Math" panose="02040503050406030204" pitchFamily="18" charset="0"/>
+                          </a:rPr>
+                          <m:t>S</m:t>
+                        </m:r>
+                        <m:r>
+                          <a:rPr lang="en-US" b="0" i="0" smtClean="0">
+                            <a:solidFill>
+                              <a:sysClr val="windowText" lastClr="000000"/>
+                            </a:solidFill>
+                            <a:latin typeface="Cambria Math" panose="02040503050406030204" pitchFamily="18" charset="0"/>
+                          </a:rPr>
+                          <m:t>=</m:t>
+                        </m:r>
+                        <m:f>
+                          <m:fPr>
+                            <m:ctrlPr>
+                              <a:rPr lang="en-US" b="0" i="1" smtClean="0">
+                                <a:solidFill>
+                                  <a:sysClr val="windowText" lastClr="000000"/>
+                                </a:solidFill>
+                                <a:latin typeface="Cambria Math" panose="02040503050406030204" pitchFamily="18" charset="0"/>
+                              </a:rPr>
+                            </m:ctrlPr>
+                          </m:fPr>
+                          <m:num>
+                            <m:r>
+                              <m:rPr>
+                                <m:sty m:val="p"/>
+                              </m:rPr>
+                              <a:rPr lang="en-US" b="0" i="0" smtClean="0">
+                                <a:solidFill>
+                                  <a:sysClr val="windowText" lastClr="000000"/>
+                                </a:solidFill>
+                                <a:latin typeface="Cambria Math" panose="02040503050406030204" pitchFamily="18" charset="0"/>
+                              </a:rPr>
+                              <m:t>max</m:t>
+                            </m:r>
+                            <m:r>
+                              <a:rPr lang="en-US" b="0" i="1" smtClean="0">
+                                <a:solidFill>
+                                  <a:sysClr val="windowText" lastClr="000000"/>
+                                </a:solidFill>
+                                <a:latin typeface="Cambria Math" panose="02040503050406030204" pitchFamily="18" charset="0"/>
+                              </a:rPr>
+                              <m:t>⁡(</m:t>
+                            </m:r>
+                            <m:d>
+                              <m:dPr>
+                                <m:begChr m:val="|"/>
+                                <m:endChr m:val="|"/>
+                                <m:ctrlPr>
+                                  <a:rPr lang="en-US" b="0" i="1" smtClean="0">
+                                    <a:solidFill>
+                                      <a:sysClr val="windowText" lastClr="000000"/>
+                                    </a:solidFill>
+                                    <a:latin typeface="Cambria Math" panose="02040503050406030204" pitchFamily="18" charset="0"/>
+                                  </a:rPr>
+                                </m:ctrlPr>
+                              </m:dPr>
+                              <m:e>
+                                <m:r>
+                                  <a:rPr lang="en-US" b="0" i="1" smtClean="0">
+                                    <a:solidFill>
+                                      <a:sysClr val="windowText" lastClr="000000"/>
+                                    </a:solidFill>
+                                    <a:latin typeface="Cambria Math" panose="02040503050406030204" pitchFamily="18" charset="0"/>
+                                  </a:rPr>
+                                  <m:t>𝑤</m:t>
+                                </m:r>
+                              </m:e>
+                            </m:d>
+                            <m:r>
+                              <a:rPr lang="en-US" b="0" i="1" smtClean="0">
+                                <a:solidFill>
+                                  <a:sysClr val="windowText" lastClr="000000"/>
+                                </a:solidFill>
+                                <a:latin typeface="Cambria Math" panose="02040503050406030204" pitchFamily="18" charset="0"/>
+                              </a:rPr>
+                              <m:t>)</m:t>
+                            </m:r>
+                          </m:num>
+                          <m:den>
+                            <m:r>
+                              <a:rPr lang="en-US" b="0" i="1" smtClean="0">
+                                <a:solidFill>
+                                  <a:sysClr val="windowText" lastClr="000000"/>
+                                </a:solidFill>
+                                <a:latin typeface="Cambria Math" panose="02040503050406030204" pitchFamily="18" charset="0"/>
+                              </a:rPr>
+                              <m:t>7</m:t>
+                            </m:r>
+                          </m:den>
+                        </m:f>
+                        <m:r>
+                          <a:rPr lang="en-US" b="0" i="1" smtClean="0">
+                            <a:solidFill>
+                              <a:sysClr val="windowText" lastClr="000000"/>
+                            </a:solidFill>
+                            <a:latin typeface="Cambria Math" panose="02040503050406030204" pitchFamily="18" charset="0"/>
+                          </a:rPr>
+                          <m:t>=</m:t>
+                        </m:r>
+                        <m:f>
+                          <m:fPr>
+                            <m:ctrlPr>
+                              <a:rPr lang="en-US" b="0" i="1" smtClean="0">
+                                <a:solidFill>
+                                  <a:sysClr val="windowText" lastClr="000000"/>
+                                </a:solidFill>
+                                <a:latin typeface="Cambria Math" panose="02040503050406030204" pitchFamily="18" charset="0"/>
+                              </a:rPr>
+                            </m:ctrlPr>
+                          </m:fPr>
+                          <m:num>
+                            <m:r>
+                              <a:rPr lang="en-US" b="0" i="1" smtClean="0">
+                                <a:solidFill>
+                                  <a:sysClr val="windowText" lastClr="000000"/>
+                                </a:solidFill>
+                                <a:latin typeface="Cambria Math" panose="02040503050406030204" pitchFamily="18" charset="0"/>
+                              </a:rPr>
+                              <m:t>1.0</m:t>
+                            </m:r>
+                          </m:num>
+                          <m:den>
+                            <m:r>
+                              <a:rPr lang="en-US" b="0" i="1" smtClean="0">
+                                <a:solidFill>
+                                  <a:sysClr val="windowText" lastClr="000000"/>
+                                </a:solidFill>
+                                <a:latin typeface="Cambria Math" panose="02040503050406030204" pitchFamily="18" charset="0"/>
+                              </a:rPr>
+                              <m:t>7</m:t>
+                            </m:r>
+                          </m:den>
+                        </m:f>
+                        <m:r>
+                          <a:rPr lang="en-US" b="0" i="1" smtClean="0">
+                            <a:solidFill>
+                              <a:sysClr val="windowText" lastClr="000000"/>
+                            </a:solidFill>
+                            <a:latin typeface="Cambria Math" panose="02040503050406030204" pitchFamily="18" charset="0"/>
+                            <a:ea typeface="Cambria Math" panose="02040503050406030204" pitchFamily="18" charset="0"/>
+                          </a:rPr>
+                          <m:t>≈0.1429</m:t>
+                        </m:r>
+                      </m:oMath>
+                    </m:oMathPara>
+                  </a14:m>
+                  <a:endParaRPr lang="en-US" dirty="0">
+                    <a:solidFill>
+                      <a:sysClr val="windowText" lastClr="000000"/>
+                    </a:solidFill>
+                  </a:endParaRPr>
+                </a:p>
+              </p:txBody>
+            </p:sp>
+          </mc:Choice>
+          <mc:Fallback>
+            <p:sp>
+              <p:nvSpPr>
+                <p:cNvPr id="11" name="Rectangle 10">
+                  <a:extLst>
+                    <a:ext uri="{FF2B5EF4-FFF2-40B4-BE49-F238E27FC236}">
+                      <a16:creationId xmlns:a16="http://schemas.microsoft.com/office/drawing/2014/main" id="{46CEBABB-5713-12A3-0F3D-6E24FAB414B1}"/>
+                    </a:ext>
+                  </a:extLst>
+                </p:cNvPr>
+                <p:cNvSpPr>
+                  <a:spLocks noRot="1" noChangeAspect="1" noMove="1" noResize="1" noEditPoints="1" noAdjustHandles="1" noChangeArrowheads="1" noChangeShapeType="1" noTextEdit="1"/>
+                </p:cNvSpPr>
+                <p:nvPr/>
+              </p:nvSpPr>
+              <p:spPr>
+                <a:xfrm>
+                  <a:off x="2886939" y="1315484"/>
+                  <a:ext cx="2757871" cy="577001"/>
+                </a:xfrm>
+                <a:prstGeom prst="rect">
+                  <a:avLst/>
+                </a:prstGeom>
+                <a:blipFill>
+                  <a:blip r:embed="rId5"/>
+                  <a:stretch>
+                    <a:fillRect/>
+                  </a:stretch>
+                </a:blipFill>
+              </p:spPr>
+              <p:txBody>
+                <a:bodyPr/>
+                <a:lstStyle/>
+                <a:p>
+                  <a:r>
+                    <a:rPr lang="en-US">
+                      <a:noFill/>
+                    </a:rPr>
+                    <a:t> </a:t>
+                  </a:r>
+                </a:p>
+              </p:txBody>
+            </p:sp>
+          </mc:Fallback>
+        </mc:AlternateContent>
+        <p:sp>
+          <p:nvSpPr>
+            <p:cNvPr id="12" name="TextBox 11">
+              <a:extLst>
+                <a:ext uri="{FF2B5EF4-FFF2-40B4-BE49-F238E27FC236}">
+                  <a16:creationId xmlns:a16="http://schemas.microsoft.com/office/drawing/2014/main" id="{B747FC42-5EAE-C0DF-2B08-6B125B6DB5B2}"/>
+                </a:ext>
+              </a:extLst>
+            </p:cNvPr>
+            <p:cNvSpPr txBox="1"/>
+            <p:nvPr/>
+          </p:nvSpPr>
+          <p:spPr>
+            <a:xfrm>
+              <a:off x="2886938" y="1930258"/>
+              <a:ext cx="2757871" cy="600164"/>
+            </a:xfrm>
+            <a:prstGeom prst="rect">
+              <a:avLst/>
+            </a:prstGeom>
+            <a:noFill/>
+          </p:spPr>
+          <p:txBody>
+            <a:bodyPr wrap="square">
+              <a:spAutoFit/>
+            </a:bodyPr>
+            <a:lstStyle/>
+            <a:p>
+              <a:pPr algn="ctr"/>
+              <a:r>
+                <a:rPr lang="en-US" sz="1100" dirty="0"/>
+                <a:t>Let’s say the weights in this tensor range from [-1.0,+1.0]. Denominator is the max weight in the [-8,+7] quant range (so, 7).</a:t>
+              </a:r>
+            </a:p>
+          </p:txBody>
+        </p:sp>
+        <p:sp>
+          <p:nvSpPr>
+            <p:cNvPr id="13" name="Rectangle 12">
+              <a:extLst>
+                <a:ext uri="{FF2B5EF4-FFF2-40B4-BE49-F238E27FC236}">
+                  <a16:creationId xmlns:a16="http://schemas.microsoft.com/office/drawing/2014/main" id="{05AF1B14-4056-FBF2-F6CB-B18A101C05C6}"/>
+                </a:ext>
+              </a:extLst>
+            </p:cNvPr>
+            <p:cNvSpPr/>
+            <p:nvPr/>
+          </p:nvSpPr>
+          <p:spPr>
+            <a:xfrm>
+              <a:off x="2886937" y="2967524"/>
+              <a:ext cx="2757871" cy="273831"/>
+            </a:xfrm>
+            <a:prstGeom prst="rect">
+              <a:avLst/>
+            </a:prstGeom>
+            <a:solidFill>
+              <a:srgbClr val="B2D4EB"/>
+            </a:solidFill>
+          </p:spPr>
+          <p:style>
+            <a:lnRef idx="2">
+              <a:schemeClr val="dk1">
+                <a:shade val="15000"/>
+              </a:schemeClr>
+            </a:lnRef>
+            <a:fillRef idx="1">
+              <a:schemeClr val="dk1"/>
+            </a:fillRef>
+            <a:effectRef idx="0">
+              <a:schemeClr val="dk1"/>
+            </a:effectRef>
+            <a:fontRef idx="minor">
+              <a:schemeClr val="lt1"/>
+            </a:fontRef>
+          </p:style>
+          <p:txBody>
+            <a:bodyPr rtlCol="0" anchor="ctr"/>
+            <a:lstStyle/>
+            <a:p>
+              <a:pPr algn="ctr"/>
+              <a:r>
+                <a:rPr lang="en-US" dirty="0">
+                  <a:solidFill>
+                    <a:schemeClr val="tx1"/>
+                  </a:solidFill>
+                </a:rPr>
+                <a:t>Quantize the Value</a:t>
+              </a:r>
+            </a:p>
+          </p:txBody>
+        </p:sp>
+        <mc:AlternateContent xmlns:mc="http://schemas.openxmlformats.org/markup-compatibility/2006">
+          <mc:Choice xmlns:a14="http://schemas.microsoft.com/office/drawing/2010/main" Requires="a14">
+            <p:sp>
+              <p:nvSpPr>
+                <p:cNvPr id="14" name="Rectangle 13">
+                  <a:extLst>
+                    <a:ext uri="{FF2B5EF4-FFF2-40B4-BE49-F238E27FC236}">
+                      <a16:creationId xmlns:a16="http://schemas.microsoft.com/office/drawing/2014/main" id="{1A52E72A-5693-49F9-8BB0-4E7AC881649A}"/>
+                    </a:ext>
+                  </a:extLst>
+                </p:cNvPr>
+                <p:cNvSpPr/>
+                <p:nvPr/>
+              </p:nvSpPr>
+              <p:spPr>
+                <a:xfrm>
+                  <a:off x="2886939" y="3247400"/>
+                  <a:ext cx="2757871" cy="869576"/>
+                </a:xfrm>
+                <a:prstGeom prst="rect">
+                  <a:avLst/>
+                </a:prstGeom>
+                <a:solidFill>
+                  <a:schemeClr val="bg1"/>
+                </a:solidFill>
+              </p:spPr>
+              <p:style>
+                <a:lnRef idx="2">
+                  <a:schemeClr val="accent5">
+                    <a:shade val="15000"/>
+                  </a:schemeClr>
+                </a:lnRef>
+                <a:fillRef idx="1">
+                  <a:schemeClr val="accent5"/>
+                </a:fillRef>
+                <a:effectRef idx="0">
+                  <a:schemeClr val="accent5"/>
+                </a:effectRef>
+                <a:fontRef idx="minor">
+                  <a:schemeClr val="lt1"/>
+                </a:fontRef>
+              </p:style>
+              <p:txBody>
+                <a:bodyPr rtlCol="0" anchor="ctr"/>
+                <a:lstStyle/>
+                <a:p>
+                  <a:pPr algn="ctr"/>
+                  <a14:m>
+                    <m:oMathPara xmlns:m="http://schemas.openxmlformats.org/officeDocument/2006/math">
+                      <m:oMathParaPr>
+                        <m:jc m:val="centerGroup"/>
+                      </m:oMathParaPr>
+                      <m:oMath xmlns:m="http://schemas.openxmlformats.org/officeDocument/2006/math">
+                        <m:r>
+                          <a:rPr lang="en-US" i="1" smtClean="0">
+                            <a:solidFill>
+                              <a:sysClr val="windowText" lastClr="000000"/>
+                            </a:solidFill>
+                            <a:latin typeface="Cambria Math" panose="02040503050406030204" pitchFamily="18" charset="0"/>
+                          </a:rPr>
+                          <m:t>𝑄</m:t>
+                        </m:r>
+                        <m:d>
+                          <m:dPr>
+                            <m:ctrlPr>
+                              <a:rPr lang="en-US" i="1">
+                                <a:solidFill>
+                                  <a:sysClr val="windowText" lastClr="000000"/>
+                                </a:solidFill>
+                                <a:latin typeface="Cambria Math" panose="02040503050406030204" pitchFamily="18" charset="0"/>
+                              </a:rPr>
+                            </m:ctrlPr>
+                          </m:dPr>
+                          <m:e>
+                            <m:r>
+                              <a:rPr lang="en-US" b="0" i="1" smtClean="0">
+                                <a:solidFill>
+                                  <a:sysClr val="windowText" lastClr="000000"/>
+                                </a:solidFill>
+                                <a:latin typeface="Cambria Math" panose="02040503050406030204" pitchFamily="18" charset="0"/>
+                              </a:rPr>
+                              <m:t>0.37</m:t>
+                            </m:r>
+                          </m:e>
+                        </m:d>
+                        <m:r>
+                          <a:rPr lang="en-US" i="1">
+                            <a:solidFill>
+                              <a:sysClr val="windowText" lastClr="000000"/>
+                            </a:solidFill>
+                            <a:latin typeface="Cambria Math" panose="02040503050406030204" pitchFamily="18" charset="0"/>
+                          </a:rPr>
+                          <m:t>=</m:t>
+                        </m:r>
+                        <m:r>
+                          <m:rPr>
+                            <m:nor/>
+                          </m:rPr>
+                          <a:rPr lang="en-US">
+                            <a:solidFill>
+                              <a:sysClr val="windowText" lastClr="000000"/>
+                            </a:solidFill>
+                            <a:latin typeface="Cambria Math" panose="02040503050406030204" pitchFamily="18" charset="0"/>
+                          </a:rPr>
+                          <m:t>round</m:t>
+                        </m:r>
+                        <m:d>
+                          <m:dPr>
+                            <m:ctrlPr>
+                              <a:rPr lang="en-US" i="1">
+                                <a:solidFill>
+                                  <a:sysClr val="windowText" lastClr="000000"/>
+                                </a:solidFill>
+                                <a:latin typeface="Cambria Math" panose="02040503050406030204" pitchFamily="18" charset="0"/>
+                              </a:rPr>
+                            </m:ctrlPr>
+                          </m:dPr>
+                          <m:e>
+                            <m:f>
+                              <m:fPr>
+                                <m:ctrlPr>
+                                  <a:rPr lang="en-US" i="1">
+                                    <a:solidFill>
+                                      <a:sysClr val="windowText" lastClr="000000"/>
+                                    </a:solidFill>
+                                    <a:latin typeface="Cambria Math" panose="02040503050406030204" pitchFamily="18" charset="0"/>
+                                  </a:rPr>
+                                </m:ctrlPr>
+                              </m:fPr>
+                              <m:num>
+                                <m:r>
+                                  <a:rPr lang="en-US" b="0" i="1" smtClean="0">
+                                    <a:solidFill>
+                                      <a:sysClr val="windowText" lastClr="000000"/>
+                                    </a:solidFill>
+                                    <a:latin typeface="Cambria Math" panose="02040503050406030204" pitchFamily="18" charset="0"/>
+                                  </a:rPr>
+                                  <m:t>0.37</m:t>
+                                </m:r>
+                              </m:num>
+                              <m:den>
+                                <m:r>
+                                  <a:rPr lang="en-US" b="0" i="1" smtClean="0">
+                                    <a:solidFill>
+                                      <a:sysClr val="windowText" lastClr="000000"/>
+                                    </a:solidFill>
+                                    <a:latin typeface="Cambria Math" panose="02040503050406030204" pitchFamily="18" charset="0"/>
+                                  </a:rPr>
+                                  <m:t>0.1429</m:t>
+                                </m:r>
+                              </m:den>
+                            </m:f>
+                          </m:e>
+                        </m:d>
+                      </m:oMath>
+                    </m:oMathPara>
+                  </a14:m>
+                  <a:endParaRPr lang="en-US" i="1" dirty="0">
+                    <a:solidFill>
+                      <a:sysClr val="windowText" lastClr="000000"/>
+                    </a:solidFill>
+                    <a:latin typeface="Cambria Math" panose="02040503050406030204" pitchFamily="18" charset="0"/>
+                  </a:endParaRPr>
+                </a:p>
+                <a:p>
+                  <a:pPr algn="ctr"/>
+                  <a14:m>
+                    <m:oMathPara xmlns:m="http://schemas.openxmlformats.org/officeDocument/2006/math">
+                      <m:oMathParaPr>
+                        <m:jc m:val="centerGroup"/>
+                      </m:oMathParaPr>
+                      <m:oMath xmlns:m="http://schemas.openxmlformats.org/officeDocument/2006/math">
+                        <m:r>
+                          <a:rPr lang="en-US" b="0" i="1" smtClean="0">
+                            <a:solidFill>
+                              <a:sysClr val="windowText" lastClr="000000"/>
+                            </a:solidFill>
+                            <a:latin typeface="Cambria Math" panose="02040503050406030204" pitchFamily="18" charset="0"/>
+                          </a:rPr>
+                          <m:t>=</m:t>
+                        </m:r>
+                        <m:r>
+                          <m:rPr>
+                            <m:nor/>
+                          </m:rPr>
+                          <a:rPr lang="en-US">
+                            <a:solidFill>
+                              <a:sysClr val="windowText" lastClr="000000"/>
+                            </a:solidFill>
+                            <a:latin typeface="Cambria Math" panose="02040503050406030204" pitchFamily="18" charset="0"/>
+                          </a:rPr>
+                          <m:t>round</m:t>
+                        </m:r>
+                        <m:d>
+                          <m:dPr>
+                            <m:ctrlPr>
+                              <a:rPr lang="en-US" i="1" smtClean="0">
+                                <a:solidFill>
+                                  <a:sysClr val="windowText" lastClr="000000"/>
+                                </a:solidFill>
+                                <a:latin typeface="Cambria Math" panose="02040503050406030204" pitchFamily="18" charset="0"/>
+                              </a:rPr>
+                            </m:ctrlPr>
+                          </m:dPr>
+                          <m:e>
+                            <m:r>
+                              <a:rPr lang="en-US" b="0" i="1" smtClean="0">
+                                <a:solidFill>
+                                  <a:sysClr val="windowText" lastClr="000000"/>
+                                </a:solidFill>
+                                <a:latin typeface="Cambria Math" panose="02040503050406030204" pitchFamily="18" charset="0"/>
+                              </a:rPr>
+                              <m:t>2.59</m:t>
+                            </m:r>
+                          </m:e>
+                        </m:d>
+                        <m:r>
+                          <a:rPr lang="en-US" b="0" i="1" smtClean="0">
+                            <a:solidFill>
+                              <a:sysClr val="windowText" lastClr="000000"/>
+                            </a:solidFill>
+                            <a:latin typeface="Cambria Math" panose="02040503050406030204" pitchFamily="18" charset="0"/>
+                          </a:rPr>
+                          <m:t>=3</m:t>
+                        </m:r>
+                      </m:oMath>
+                    </m:oMathPara>
+                  </a14:m>
+                  <a:endParaRPr lang="en-US" dirty="0">
+                    <a:solidFill>
+                      <a:sysClr val="windowText" lastClr="000000"/>
+                    </a:solidFill>
+                  </a:endParaRPr>
+                </a:p>
+              </p:txBody>
+            </p:sp>
+          </mc:Choice>
+          <mc:Fallback>
+            <p:sp>
+              <p:nvSpPr>
+                <p:cNvPr id="14" name="Rectangle 13">
+                  <a:extLst>
+                    <a:ext uri="{FF2B5EF4-FFF2-40B4-BE49-F238E27FC236}">
+                      <a16:creationId xmlns:a16="http://schemas.microsoft.com/office/drawing/2014/main" id="{1A52E72A-5693-49F9-8BB0-4E7AC881649A}"/>
+                    </a:ext>
+                  </a:extLst>
+                </p:cNvPr>
+                <p:cNvSpPr>
+                  <a:spLocks noRot="1" noChangeAspect="1" noMove="1" noResize="1" noEditPoints="1" noAdjustHandles="1" noChangeArrowheads="1" noChangeShapeType="1" noTextEdit="1"/>
+                </p:cNvSpPr>
+                <p:nvPr/>
+              </p:nvSpPr>
+              <p:spPr>
+                <a:xfrm>
+                  <a:off x="2886939" y="3247400"/>
+                  <a:ext cx="2757871" cy="869576"/>
+                </a:xfrm>
+                <a:prstGeom prst="rect">
+                  <a:avLst/>
+                </a:prstGeom>
+                <a:blipFill>
+                  <a:blip r:embed="rId6"/>
+                  <a:stretch>
+                    <a:fillRect b="-3378"/>
+                  </a:stretch>
+                </a:blipFill>
+              </p:spPr>
+              <p:txBody>
+                <a:bodyPr/>
+                <a:lstStyle/>
+                <a:p>
+                  <a:r>
+                    <a:rPr lang="en-US">
+                      <a:noFill/>
+                    </a:rPr>
+                    <a:t> </a:t>
+                  </a:r>
+                </a:p>
+              </p:txBody>
+            </p:sp>
+          </mc:Fallback>
+        </mc:AlternateContent>
+        <p:sp>
+          <p:nvSpPr>
+            <p:cNvPr id="15" name="TextBox 14">
+              <a:extLst>
+                <a:ext uri="{FF2B5EF4-FFF2-40B4-BE49-F238E27FC236}">
+                  <a16:creationId xmlns:a16="http://schemas.microsoft.com/office/drawing/2014/main" id="{46F26E49-C806-D5AE-946D-FC847BA33CA6}"/>
+                </a:ext>
+              </a:extLst>
+            </p:cNvPr>
+            <p:cNvSpPr txBox="1"/>
+            <p:nvPr/>
+          </p:nvSpPr>
+          <p:spPr>
+            <a:xfrm>
+              <a:off x="2886939" y="4158127"/>
+              <a:ext cx="2757871" cy="430887"/>
+            </a:xfrm>
+            <a:prstGeom prst="rect">
+              <a:avLst/>
+            </a:prstGeom>
+            <a:noFill/>
+          </p:spPr>
+          <p:txBody>
+            <a:bodyPr wrap="square">
+              <a:spAutoFit/>
+            </a:bodyPr>
+            <a:lstStyle/>
+            <a:p>
+              <a:pPr algn="ctr"/>
+              <a:r>
+                <a:rPr lang="en-US" sz="1100" dirty="0"/>
+                <a:t>Integer representation (4-bit) is: 3</a:t>
+              </a:r>
+            </a:p>
+            <a:p>
+              <a:pPr algn="ctr"/>
+              <a:r>
+                <a:rPr lang="en-US" sz="1100" dirty="0"/>
+                <a:t>(binary: 0011)</a:t>
+              </a:r>
+            </a:p>
+          </p:txBody>
+        </p:sp>
+        <p:cxnSp>
+          <p:nvCxnSpPr>
+            <p:cNvPr id="16" name="Connector: Elbow 15">
+              <a:extLst>
+                <a:ext uri="{FF2B5EF4-FFF2-40B4-BE49-F238E27FC236}">
+                  <a16:creationId xmlns:a16="http://schemas.microsoft.com/office/drawing/2014/main" id="{A08310A7-EEE8-F6F6-64C4-407BEAE69530}"/>
+                </a:ext>
+              </a:extLst>
+            </p:cNvPr>
+            <p:cNvCxnSpPr>
+              <a:cxnSpLocks/>
+              <a:stCxn id="13" idx="3"/>
+              <a:endCxn id="18" idx="1"/>
+            </p:cNvCxnSpPr>
+            <p:nvPr/>
+          </p:nvCxnSpPr>
+          <p:spPr>
+            <a:xfrm flipV="1">
+              <a:off x="5644808" y="1183343"/>
+              <a:ext cx="818539" cy="1921097"/>
+            </a:xfrm>
+            <a:prstGeom prst="bentConnector3">
+              <a:avLst>
+                <a:gd name="adj1" fmla="val 50000"/>
+              </a:avLst>
+            </a:prstGeom>
+            <a:ln w="38100">
+              <a:solidFill>
+                <a:schemeClr val="tx1"/>
+              </a:solidFill>
+              <a:tailEnd type="triangle"/>
+            </a:ln>
+          </p:spPr>
+          <p:style>
+            <a:lnRef idx="1">
+              <a:schemeClr val="accent1"/>
+            </a:lnRef>
+            <a:fillRef idx="0">
+              <a:schemeClr val="accent1"/>
+            </a:fillRef>
+            <a:effectRef idx="0">
+              <a:schemeClr val="accent1"/>
+            </a:effectRef>
+            <a:fontRef idx="minor">
+              <a:schemeClr val="tx1"/>
+            </a:fontRef>
+          </p:style>
+        </p:cxnSp>
+        <p:cxnSp>
+          <p:nvCxnSpPr>
+            <p:cNvPr id="17" name="Connector: Elbow 16">
+              <a:extLst>
+                <a:ext uri="{FF2B5EF4-FFF2-40B4-BE49-F238E27FC236}">
+                  <a16:creationId xmlns:a16="http://schemas.microsoft.com/office/drawing/2014/main" id="{20F04CE8-49AC-5CFE-206A-9C293D4CF620}"/>
+                </a:ext>
+              </a:extLst>
+            </p:cNvPr>
+            <p:cNvCxnSpPr>
+              <a:cxnSpLocks/>
+              <a:stCxn id="7" idx="3"/>
+              <a:endCxn id="10" idx="1"/>
+            </p:cNvCxnSpPr>
+            <p:nvPr/>
+          </p:nvCxnSpPr>
+          <p:spPr>
+            <a:xfrm flipV="1">
+              <a:off x="2345735" y="1183342"/>
+              <a:ext cx="541204" cy="1282438"/>
+            </a:xfrm>
+            <a:prstGeom prst="bentConnector3">
+              <a:avLst>
+                <a:gd name="adj1" fmla="val 50000"/>
+              </a:avLst>
+            </a:prstGeom>
+            <a:ln w="38100">
+              <a:solidFill>
+                <a:schemeClr val="tx1"/>
+              </a:solidFill>
+              <a:tailEnd type="triangle"/>
+            </a:ln>
+          </p:spPr>
+          <p:style>
+            <a:lnRef idx="1">
+              <a:schemeClr val="accent1"/>
+            </a:lnRef>
+            <a:fillRef idx="0">
+              <a:schemeClr val="accent1"/>
+            </a:fillRef>
+            <a:effectRef idx="0">
+              <a:schemeClr val="accent1"/>
+            </a:effectRef>
+            <a:fontRef idx="minor">
+              <a:schemeClr val="tx1"/>
+            </a:fontRef>
+          </p:style>
+        </p:cxnSp>
+        <p:sp>
+          <p:nvSpPr>
+            <p:cNvPr id="18" name="Rectangle 17">
+              <a:extLst>
+                <a:ext uri="{FF2B5EF4-FFF2-40B4-BE49-F238E27FC236}">
+                  <a16:creationId xmlns:a16="http://schemas.microsoft.com/office/drawing/2014/main" id="{597FF09C-A29A-A499-A2B3-672C34E3A06E}"/>
+                </a:ext>
+              </a:extLst>
+            </p:cNvPr>
+            <p:cNvSpPr/>
+            <p:nvPr/>
+          </p:nvSpPr>
+          <p:spPr>
+            <a:xfrm>
+              <a:off x="6463347" y="1046427"/>
+              <a:ext cx="1711303" cy="273831"/>
+            </a:xfrm>
+            <a:prstGeom prst="rect">
+              <a:avLst/>
+            </a:prstGeom>
+            <a:solidFill>
+              <a:srgbClr val="B2D4EB"/>
+            </a:solidFill>
+          </p:spPr>
+          <p:style>
+            <a:lnRef idx="2">
+              <a:schemeClr val="dk1">
+                <a:shade val="15000"/>
+              </a:schemeClr>
+            </a:lnRef>
+            <a:fillRef idx="1">
+              <a:schemeClr val="dk1"/>
+            </a:fillRef>
+            <a:effectRef idx="0">
+              <a:schemeClr val="dk1"/>
+            </a:effectRef>
+            <a:fontRef idx="minor">
+              <a:schemeClr val="lt1"/>
+            </a:fontRef>
+          </p:style>
+          <p:txBody>
+            <a:bodyPr rtlCol="0" anchor="ctr"/>
+            <a:lstStyle/>
+            <a:p>
+              <a:pPr algn="ctr"/>
+              <a:r>
+                <a:rPr lang="en-US" dirty="0">
+                  <a:solidFill>
+                    <a:schemeClr val="tx1"/>
+                  </a:solidFill>
+                </a:rPr>
+                <a:t>De-Quantize</a:t>
+              </a:r>
+            </a:p>
+          </p:txBody>
+        </p:sp>
+        <mc:AlternateContent xmlns:mc="http://schemas.openxmlformats.org/markup-compatibility/2006">
+          <mc:Choice xmlns:a14="http://schemas.microsoft.com/office/drawing/2010/main" Requires="a14">
+            <p:sp>
+              <p:nvSpPr>
+                <p:cNvPr id="19" name="Rectangle 18">
+                  <a:extLst>
+                    <a:ext uri="{FF2B5EF4-FFF2-40B4-BE49-F238E27FC236}">
+                      <a16:creationId xmlns:a16="http://schemas.microsoft.com/office/drawing/2014/main" id="{18328F5A-70D5-58BA-1577-8D30F865B26C}"/>
+                    </a:ext>
+                  </a:extLst>
+                </p:cNvPr>
+                <p:cNvSpPr/>
+                <p:nvPr/>
+              </p:nvSpPr>
+              <p:spPr>
+                <a:xfrm>
+                  <a:off x="6463345" y="1315484"/>
+                  <a:ext cx="1711304" cy="855718"/>
+                </a:xfrm>
+                <a:prstGeom prst="rect">
+                  <a:avLst/>
+                </a:prstGeom>
+                <a:solidFill>
+                  <a:schemeClr val="bg1"/>
+                </a:solidFill>
+              </p:spPr>
+              <p:style>
+                <a:lnRef idx="2">
+                  <a:schemeClr val="accent5">
+                    <a:shade val="15000"/>
+                  </a:schemeClr>
+                </a:lnRef>
+                <a:fillRef idx="1">
+                  <a:schemeClr val="accent5"/>
+                </a:fillRef>
+                <a:effectRef idx="0">
+                  <a:schemeClr val="accent5"/>
+                </a:effectRef>
+                <a:fontRef idx="minor">
+                  <a:schemeClr val="lt1"/>
+                </a:fontRef>
+              </p:style>
+              <p:txBody>
+                <a:bodyPr rtlCol="0" anchor="ctr"/>
+                <a:lstStyle/>
+                <a:p>
+                  <a:pPr algn="ctr"/>
+                  <a14:m>
+                    <m:oMathPara xmlns:m="http://schemas.openxmlformats.org/officeDocument/2006/math">
+                      <m:oMathParaPr>
+                        <m:jc m:val="centerGroup"/>
+                      </m:oMathParaPr>
+                      <m:oMath xmlns:m="http://schemas.openxmlformats.org/officeDocument/2006/math">
+                        <m:acc>
+                          <m:accPr>
+                            <m:chr m:val="̂"/>
+                            <m:ctrlPr>
+                              <a:rPr lang="pl-PL" b="0" i="1" smtClean="0">
+                                <a:solidFill>
+                                  <a:sysClr val="windowText" lastClr="000000"/>
+                                </a:solidFill>
+                                <a:latin typeface="Cambria Math" panose="02040503050406030204" pitchFamily="18" charset="0"/>
+                              </a:rPr>
+                            </m:ctrlPr>
+                          </m:accPr>
+                          <m:e>
+                            <m:r>
+                              <a:rPr lang="en-US" b="0" i="1" smtClean="0">
+                                <a:solidFill>
+                                  <a:sysClr val="windowText" lastClr="000000"/>
+                                </a:solidFill>
+                                <a:latin typeface="Cambria Math" panose="02040503050406030204" pitchFamily="18" charset="0"/>
+                              </a:rPr>
+                              <m:t>𝑤</m:t>
+                            </m:r>
+                          </m:e>
+                        </m:acc>
+                        <m:r>
+                          <a:rPr lang="pl-PL" i="1">
+                            <a:solidFill>
+                              <a:sysClr val="windowText" lastClr="000000"/>
+                            </a:solidFill>
+                            <a:latin typeface="Cambria Math" panose="02040503050406030204" pitchFamily="18" charset="0"/>
+                          </a:rPr>
+                          <m:t>=</m:t>
+                        </m:r>
+                        <m:r>
+                          <a:rPr lang="pl-PL" i="1">
+                            <a:solidFill>
+                              <a:sysClr val="windowText" lastClr="000000"/>
+                            </a:solidFill>
+                            <a:latin typeface="Cambria Math" panose="02040503050406030204" pitchFamily="18" charset="0"/>
+                          </a:rPr>
+                          <m:t>𝑆</m:t>
+                        </m:r>
+                        <m:r>
+                          <a:rPr lang="pl-PL" i="1">
+                            <a:solidFill>
+                              <a:sysClr val="windowText" lastClr="000000"/>
+                            </a:solidFill>
+                            <a:latin typeface="Cambria Math" panose="02040503050406030204" pitchFamily="18" charset="0"/>
+                          </a:rPr>
+                          <m:t>×</m:t>
+                        </m:r>
+                        <m:r>
+                          <a:rPr lang="pl-PL" i="1">
+                            <a:solidFill>
+                              <a:sysClr val="windowText" lastClr="000000"/>
+                            </a:solidFill>
+                            <a:latin typeface="Cambria Math" panose="02040503050406030204" pitchFamily="18" charset="0"/>
+                          </a:rPr>
+                          <m:t>𝑄</m:t>
+                        </m:r>
+                        <m:r>
+                          <a:rPr lang="pl-PL" i="1">
+                            <a:solidFill>
+                              <a:sysClr val="windowText" lastClr="000000"/>
+                            </a:solidFill>
+                            <a:latin typeface="Cambria Math" panose="02040503050406030204" pitchFamily="18" charset="0"/>
+                          </a:rPr>
+                          <m:t>(</m:t>
+                        </m:r>
+                        <m:r>
+                          <a:rPr lang="pl-PL" i="1">
+                            <a:solidFill>
+                              <a:sysClr val="windowText" lastClr="000000"/>
+                            </a:solidFill>
+                            <a:latin typeface="Cambria Math" panose="02040503050406030204" pitchFamily="18" charset="0"/>
+                          </a:rPr>
+                          <m:t>𝑤</m:t>
+                        </m:r>
+                        <m:r>
+                          <a:rPr lang="pl-PL" i="1">
+                            <a:solidFill>
+                              <a:sysClr val="windowText" lastClr="000000"/>
+                            </a:solidFill>
+                            <a:latin typeface="Cambria Math" panose="02040503050406030204" pitchFamily="18" charset="0"/>
+                          </a:rPr>
+                          <m:t>)=0.1429×3=0.4287</m:t>
+                        </m:r>
+                      </m:oMath>
+                    </m:oMathPara>
+                  </a14:m>
+                  <a:endParaRPr lang="en-US" dirty="0">
+                    <a:solidFill>
+                      <a:sysClr val="windowText" lastClr="000000"/>
+                    </a:solidFill>
+                  </a:endParaRPr>
+                </a:p>
+              </p:txBody>
+            </p:sp>
+          </mc:Choice>
+          <mc:Fallback>
+            <p:sp>
+              <p:nvSpPr>
+                <p:cNvPr id="19" name="Rectangle 18">
+                  <a:extLst>
+                    <a:ext uri="{FF2B5EF4-FFF2-40B4-BE49-F238E27FC236}">
+                      <a16:creationId xmlns:a16="http://schemas.microsoft.com/office/drawing/2014/main" id="{18328F5A-70D5-58BA-1577-8D30F865B26C}"/>
+                    </a:ext>
+                  </a:extLst>
+                </p:cNvPr>
+                <p:cNvSpPr>
+                  <a:spLocks noRot="1" noChangeAspect="1" noMove="1" noResize="1" noEditPoints="1" noAdjustHandles="1" noChangeArrowheads="1" noChangeShapeType="1" noTextEdit="1"/>
+                </p:cNvSpPr>
+                <p:nvPr/>
+              </p:nvSpPr>
+              <p:spPr>
+                <a:xfrm>
+                  <a:off x="6463345" y="1315484"/>
+                  <a:ext cx="1711304" cy="855718"/>
+                </a:xfrm>
+                <a:prstGeom prst="rect">
+                  <a:avLst/>
+                </a:prstGeom>
+                <a:blipFill>
+                  <a:blip r:embed="rId7"/>
+                  <a:stretch>
+                    <a:fillRect t="-3448"/>
+                  </a:stretch>
+                </a:blipFill>
+              </p:spPr>
+              <p:txBody>
+                <a:bodyPr/>
+                <a:lstStyle/>
+                <a:p>
+                  <a:r>
+                    <a:rPr lang="en-US">
+                      <a:noFill/>
+                    </a:rPr>
+                    <a:t> </a:t>
+                  </a:r>
+                </a:p>
+              </p:txBody>
+            </p:sp>
+          </mc:Fallback>
+        </mc:AlternateContent>
+        <p:sp>
+          <p:nvSpPr>
+            <p:cNvPr id="20" name="TextBox 19">
+              <a:extLst>
+                <a:ext uri="{FF2B5EF4-FFF2-40B4-BE49-F238E27FC236}">
+                  <a16:creationId xmlns:a16="http://schemas.microsoft.com/office/drawing/2014/main" id="{539C600D-70A1-925D-4FF1-E2B23D5A1F91}"/>
+                </a:ext>
+              </a:extLst>
+            </p:cNvPr>
+            <p:cNvSpPr txBox="1"/>
+            <p:nvPr/>
+          </p:nvSpPr>
+          <p:spPr>
+            <a:xfrm>
+              <a:off x="6463345" y="2227691"/>
+              <a:ext cx="1711304" cy="430887"/>
+            </a:xfrm>
+            <a:prstGeom prst="rect">
+              <a:avLst/>
+            </a:prstGeom>
+            <a:noFill/>
+          </p:spPr>
+          <p:txBody>
+            <a:bodyPr wrap="square" rtlCol="0">
+              <a:spAutoFit/>
+            </a:bodyPr>
+            <a:lstStyle/>
+            <a:p>
+              <a:pPr algn="ctr"/>
+              <a:r>
+                <a:rPr lang="en-US" sz="1100" dirty="0"/>
+                <a:t>Reconstruct the original model weight</a:t>
+              </a:r>
+            </a:p>
+          </p:txBody>
+        </p:sp>
+        <p:sp>
+          <p:nvSpPr>
+            <p:cNvPr id="21" name="Rectangle 20">
+              <a:extLst>
+                <a:ext uri="{FF2B5EF4-FFF2-40B4-BE49-F238E27FC236}">
+                  <a16:creationId xmlns:a16="http://schemas.microsoft.com/office/drawing/2014/main" id="{60E68490-F7D3-8A4D-DB15-5F77430143DC}"/>
+                </a:ext>
+              </a:extLst>
+            </p:cNvPr>
+            <p:cNvSpPr/>
+            <p:nvPr/>
+          </p:nvSpPr>
+          <p:spPr>
+            <a:xfrm>
+              <a:off x="6285205" y="2967525"/>
+              <a:ext cx="2067587" cy="273831"/>
+            </a:xfrm>
+            <a:prstGeom prst="rect">
+              <a:avLst/>
+            </a:prstGeom>
+            <a:solidFill>
+              <a:srgbClr val="B2D4EB"/>
+            </a:solidFill>
+          </p:spPr>
+          <p:style>
+            <a:lnRef idx="2">
+              <a:schemeClr val="dk1">
+                <a:shade val="15000"/>
+              </a:schemeClr>
+            </a:lnRef>
+            <a:fillRef idx="1">
+              <a:schemeClr val="dk1"/>
+            </a:fillRef>
+            <a:effectRef idx="0">
+              <a:schemeClr val="dk1"/>
+            </a:effectRef>
+            <a:fontRef idx="minor">
+              <a:schemeClr val="lt1"/>
+            </a:fontRef>
+          </p:style>
+          <p:txBody>
+            <a:bodyPr rtlCol="0" anchor="ctr"/>
+            <a:lstStyle/>
+            <a:p>
+              <a:pPr algn="ctr"/>
+              <a:r>
+                <a:rPr lang="en-US" dirty="0">
+                  <a:solidFill>
+                    <a:schemeClr val="tx1"/>
+                  </a:solidFill>
+                </a:rPr>
+                <a:t>Error</a:t>
+              </a:r>
+            </a:p>
+          </p:txBody>
+        </p:sp>
+        <mc:AlternateContent xmlns:mc="http://schemas.openxmlformats.org/markup-compatibility/2006">
+          <mc:Choice xmlns:a14="http://schemas.microsoft.com/office/drawing/2010/main" Requires="a14">
+            <p:sp>
+              <p:nvSpPr>
+                <p:cNvPr id="22" name="Rectangle 21">
+                  <a:extLst>
+                    <a:ext uri="{FF2B5EF4-FFF2-40B4-BE49-F238E27FC236}">
+                      <a16:creationId xmlns:a16="http://schemas.microsoft.com/office/drawing/2014/main" id="{85A267A4-5AA5-3125-5651-EB5175AD87BD}"/>
+                    </a:ext>
+                  </a:extLst>
+                </p:cNvPr>
+                <p:cNvSpPr/>
+                <p:nvPr/>
+              </p:nvSpPr>
+              <p:spPr>
+                <a:xfrm>
+                  <a:off x="6285206" y="3241356"/>
+                  <a:ext cx="2067586" cy="875620"/>
+                </a:xfrm>
+                <a:prstGeom prst="rect">
+                  <a:avLst/>
+                </a:prstGeom>
+                <a:solidFill>
+                  <a:schemeClr val="bg1"/>
+                </a:solidFill>
+              </p:spPr>
+              <p:style>
+                <a:lnRef idx="2">
+                  <a:schemeClr val="accent5">
+                    <a:shade val="15000"/>
+                  </a:schemeClr>
+                </a:lnRef>
+                <a:fillRef idx="1">
+                  <a:schemeClr val="accent5"/>
+                </a:fillRef>
+                <a:effectRef idx="0">
+                  <a:schemeClr val="accent5"/>
+                </a:effectRef>
+                <a:fontRef idx="minor">
+                  <a:schemeClr val="lt1"/>
+                </a:fontRef>
+              </p:style>
+              <p:txBody>
+                <a:bodyPr rtlCol="0" anchor="ctr"/>
+                <a:lstStyle/>
+                <a:p>
+                  <a:pPr algn="ctr"/>
+                  <a14:m>
+                    <m:oMathPara xmlns:m="http://schemas.openxmlformats.org/officeDocument/2006/math">
+                      <m:oMathParaPr>
+                        <m:jc m:val="centerGroup"/>
+                      </m:oMathParaPr>
+                      <m:oMath xmlns:m="http://schemas.openxmlformats.org/officeDocument/2006/math">
+                        <m:r>
+                          <m:rPr>
+                            <m:nor/>
+                          </m:rPr>
+                          <a:rPr lang="en-US" b="0" i="0" smtClean="0">
+                            <a:solidFill>
+                              <a:sysClr val="windowText" lastClr="000000"/>
+                            </a:solidFill>
+                            <a:latin typeface="Cambria Math" panose="02040503050406030204" pitchFamily="18" charset="0"/>
+                          </a:rPr>
+                          <m:t>error</m:t>
+                        </m:r>
+                        <m:r>
+                          <a:rPr lang="en-US" b="0" i="1" smtClean="0">
+                            <a:solidFill>
+                              <a:sysClr val="windowText" lastClr="000000"/>
+                            </a:solidFill>
+                            <a:latin typeface="Cambria Math" panose="02040503050406030204" pitchFamily="18" charset="0"/>
+                          </a:rPr>
+                          <m:t>=</m:t>
+                        </m:r>
+                        <m:r>
+                          <a:rPr lang="pl-PL" i="1" smtClean="0">
+                            <a:solidFill>
+                              <a:sysClr val="windowText" lastClr="000000"/>
+                            </a:solidFill>
+                            <a:latin typeface="Cambria Math" panose="02040503050406030204" pitchFamily="18" charset="0"/>
+                          </a:rPr>
+                          <m:t>𝑤</m:t>
+                        </m:r>
+                        <m:r>
+                          <a:rPr lang="pl-PL" i="1" smtClean="0">
+                            <a:solidFill>
+                              <a:sysClr val="windowText" lastClr="000000"/>
+                            </a:solidFill>
+                            <a:latin typeface="Cambria Math" panose="02040503050406030204" pitchFamily="18" charset="0"/>
+                          </a:rPr>
+                          <m:t>−</m:t>
+                        </m:r>
+                        <m:acc>
+                          <m:accPr>
+                            <m:chr m:val="̂"/>
+                            <m:ctrlPr>
+                              <a:rPr lang="pl-PL" i="1" smtClean="0">
+                                <a:solidFill>
+                                  <a:sysClr val="windowText" lastClr="000000"/>
+                                </a:solidFill>
+                                <a:latin typeface="Cambria Math" panose="02040503050406030204" pitchFamily="18" charset="0"/>
+                              </a:rPr>
+                            </m:ctrlPr>
+                          </m:accPr>
+                          <m:e>
+                            <m:r>
+                              <a:rPr lang="en-US" b="0" i="1" smtClean="0">
+                                <a:solidFill>
+                                  <a:sysClr val="windowText" lastClr="000000"/>
+                                </a:solidFill>
+                                <a:latin typeface="Cambria Math" panose="02040503050406030204" pitchFamily="18" charset="0"/>
+                              </a:rPr>
+                              <m:t>𝑤</m:t>
+                            </m:r>
+                          </m:e>
+                        </m:acc>
+                      </m:oMath>
+                    </m:oMathPara>
+                  </a14:m>
+                  <a:endParaRPr lang="en-US" i="1" dirty="0">
+                    <a:solidFill>
+                      <a:sysClr val="windowText" lastClr="000000"/>
+                    </a:solidFill>
+                    <a:latin typeface="Cambria Math" panose="02040503050406030204" pitchFamily="18" charset="0"/>
+                  </a:endParaRPr>
+                </a:p>
+                <a:p>
+                  <a:pPr algn="ctr"/>
+                  <a14:m>
+                    <m:oMathPara xmlns:m="http://schemas.openxmlformats.org/officeDocument/2006/math">
+                      <m:oMathParaPr>
+                        <m:jc m:val="centerGroup"/>
+                      </m:oMathParaPr>
+                      <m:oMath xmlns:m="http://schemas.openxmlformats.org/officeDocument/2006/math">
+                        <m:r>
+                          <a:rPr lang="pl-PL" i="1">
+                            <a:solidFill>
+                              <a:sysClr val="windowText" lastClr="000000"/>
+                            </a:solidFill>
+                            <a:latin typeface="Cambria Math" panose="02040503050406030204" pitchFamily="18" charset="0"/>
+                          </a:rPr>
+                          <m:t>=0.37−0.4287=−0.0587</m:t>
+                        </m:r>
+                      </m:oMath>
+                    </m:oMathPara>
+                  </a14:m>
+                  <a:endParaRPr lang="en-US" dirty="0">
+                    <a:solidFill>
+                      <a:sysClr val="windowText" lastClr="000000"/>
+                    </a:solidFill>
+                  </a:endParaRPr>
+                </a:p>
+              </p:txBody>
+            </p:sp>
+          </mc:Choice>
+          <mc:Fallback>
+            <p:sp>
+              <p:nvSpPr>
+                <p:cNvPr id="22" name="Rectangle 21">
+                  <a:extLst>
+                    <a:ext uri="{FF2B5EF4-FFF2-40B4-BE49-F238E27FC236}">
+                      <a16:creationId xmlns:a16="http://schemas.microsoft.com/office/drawing/2014/main" id="{85A267A4-5AA5-3125-5651-EB5175AD87BD}"/>
+                    </a:ext>
+                  </a:extLst>
+                </p:cNvPr>
+                <p:cNvSpPr>
+                  <a:spLocks noRot="1" noChangeAspect="1" noMove="1" noResize="1" noEditPoints="1" noAdjustHandles="1" noChangeArrowheads="1" noChangeShapeType="1" noTextEdit="1"/>
+                </p:cNvSpPr>
+                <p:nvPr/>
+              </p:nvSpPr>
+              <p:spPr>
+                <a:xfrm>
+                  <a:off x="6285206" y="3241356"/>
+                  <a:ext cx="2067586" cy="875620"/>
+                </a:xfrm>
+                <a:prstGeom prst="rect">
+                  <a:avLst/>
+                </a:prstGeom>
+                <a:blipFill>
+                  <a:blip r:embed="rId8"/>
+                  <a:stretch>
+                    <a:fillRect t="-2013"/>
+                  </a:stretch>
+                </a:blipFill>
+              </p:spPr>
+              <p:txBody>
+                <a:bodyPr/>
+                <a:lstStyle/>
+                <a:p>
+                  <a:r>
+                    <a:rPr lang="en-US">
+                      <a:noFill/>
+                    </a:rPr>
+                    <a:t> </a:t>
+                  </a:r>
+                </a:p>
+              </p:txBody>
+            </p:sp>
+          </mc:Fallback>
+        </mc:AlternateContent>
+        <p:sp>
+          <p:nvSpPr>
+            <p:cNvPr id="23" name="TextBox 22">
+              <a:extLst>
+                <a:ext uri="{FF2B5EF4-FFF2-40B4-BE49-F238E27FC236}">
+                  <a16:creationId xmlns:a16="http://schemas.microsoft.com/office/drawing/2014/main" id="{C6E99888-98F6-40AA-8A60-0DCC4BFB49C2}"/>
+                </a:ext>
+              </a:extLst>
+            </p:cNvPr>
+            <p:cNvSpPr txBox="1"/>
+            <p:nvPr/>
+          </p:nvSpPr>
+          <p:spPr>
+            <a:xfrm>
+              <a:off x="6285206" y="4090401"/>
+              <a:ext cx="2067587" cy="430887"/>
+            </a:xfrm>
+            <a:prstGeom prst="rect">
+              <a:avLst/>
+            </a:prstGeom>
+            <a:noFill/>
+          </p:spPr>
+          <p:txBody>
+            <a:bodyPr wrap="square" rtlCol="0">
+              <a:spAutoFit/>
+            </a:bodyPr>
+            <a:lstStyle/>
+            <a:p>
+              <a:pPr algn="ctr"/>
+              <a:r>
+                <a:rPr lang="en-US" sz="1100" dirty="0"/>
+                <a:t>The reconstructed model weight is</a:t>
+              </a:r>
+            </a:p>
+            <a:p>
+              <a:pPr algn="ctr"/>
+              <a:r>
+                <a:rPr lang="en-US" sz="1100" dirty="0"/>
+                <a:t>off by -0.0587</a:t>
+              </a:r>
+            </a:p>
+          </p:txBody>
+        </p:sp>
+        <p:cxnSp>
+          <p:nvCxnSpPr>
+            <p:cNvPr id="24" name="Straight Arrow Connector 23">
+              <a:extLst>
+                <a:ext uri="{FF2B5EF4-FFF2-40B4-BE49-F238E27FC236}">
+                  <a16:creationId xmlns:a16="http://schemas.microsoft.com/office/drawing/2014/main" id="{CD7909FA-F299-55CF-6779-574736906812}"/>
+                </a:ext>
+              </a:extLst>
+            </p:cNvPr>
+            <p:cNvCxnSpPr>
+              <a:cxnSpLocks/>
+              <a:stCxn id="6" idx="2"/>
+              <a:endCxn id="7" idx="0"/>
+            </p:cNvCxnSpPr>
+            <p:nvPr/>
+          </p:nvCxnSpPr>
+          <p:spPr>
+            <a:xfrm>
+              <a:off x="1311942" y="1928908"/>
+              <a:ext cx="0" cy="399956"/>
+            </a:xfrm>
+            <a:prstGeom prst="straightConnector1">
+              <a:avLst/>
+            </a:prstGeom>
+            <a:ln w="38100">
+              <a:solidFill>
+                <a:schemeClr val="tx1"/>
+              </a:solidFill>
+              <a:tailEnd type="triangle"/>
+            </a:ln>
+          </p:spPr>
+          <p:style>
+            <a:lnRef idx="1">
+              <a:schemeClr val="accent1"/>
+            </a:lnRef>
+            <a:fillRef idx="0">
+              <a:schemeClr val="accent1"/>
+            </a:fillRef>
+            <a:effectRef idx="0">
+              <a:schemeClr val="accent1"/>
+            </a:effectRef>
+            <a:fontRef idx="minor">
+              <a:schemeClr val="tx1"/>
+            </a:fontRef>
+          </p:style>
+        </p:cxnSp>
+        <p:cxnSp>
+          <p:nvCxnSpPr>
+            <p:cNvPr id="25" name="Straight Arrow Connector 24">
+              <a:extLst>
+                <a:ext uri="{FF2B5EF4-FFF2-40B4-BE49-F238E27FC236}">
+                  <a16:creationId xmlns:a16="http://schemas.microsoft.com/office/drawing/2014/main" id="{CF8213CC-FC4F-80C2-D898-9041F2C3C40F}"/>
+                </a:ext>
+              </a:extLst>
+            </p:cNvPr>
+            <p:cNvCxnSpPr>
+              <a:cxnSpLocks/>
+              <a:stCxn id="12" idx="2"/>
+              <a:endCxn id="13" idx="0"/>
+            </p:cNvCxnSpPr>
+            <p:nvPr/>
+          </p:nvCxnSpPr>
+          <p:spPr>
+            <a:xfrm flipH="1">
+              <a:off x="4265873" y="2361146"/>
+              <a:ext cx="1" cy="606378"/>
+            </a:xfrm>
+            <a:prstGeom prst="straightConnector1">
+              <a:avLst/>
+            </a:prstGeom>
+            <a:ln w="38100">
+              <a:solidFill>
+                <a:schemeClr val="tx1"/>
+              </a:solidFill>
+              <a:tailEnd type="triangle"/>
+            </a:ln>
+          </p:spPr>
+          <p:style>
+            <a:lnRef idx="1">
+              <a:schemeClr val="accent1"/>
+            </a:lnRef>
+            <a:fillRef idx="0">
+              <a:schemeClr val="accent1"/>
+            </a:fillRef>
+            <a:effectRef idx="0">
+              <a:schemeClr val="accent1"/>
+            </a:effectRef>
+            <a:fontRef idx="minor">
+              <a:schemeClr val="tx1"/>
+            </a:fontRef>
+          </p:style>
+        </p:cxnSp>
+        <p:cxnSp>
+          <p:nvCxnSpPr>
+            <p:cNvPr id="26" name="Straight Arrow Connector 25">
+              <a:extLst>
+                <a:ext uri="{FF2B5EF4-FFF2-40B4-BE49-F238E27FC236}">
+                  <a16:creationId xmlns:a16="http://schemas.microsoft.com/office/drawing/2014/main" id="{7F869889-41FC-A3CD-DF46-A7147E3D45EB}"/>
+                </a:ext>
+              </a:extLst>
+            </p:cNvPr>
+            <p:cNvCxnSpPr>
+              <a:cxnSpLocks/>
+              <a:stCxn id="20" idx="2"/>
+              <a:endCxn id="21" idx="0"/>
+            </p:cNvCxnSpPr>
+            <p:nvPr/>
+          </p:nvCxnSpPr>
+          <p:spPr>
+            <a:xfrm>
+              <a:off x="7318998" y="2501521"/>
+              <a:ext cx="1" cy="466004"/>
+            </a:xfrm>
+            <a:prstGeom prst="straightConnector1">
+              <a:avLst/>
+            </a:prstGeom>
+            <a:ln w="38100">
+              <a:solidFill>
+                <a:schemeClr val="tx1"/>
+              </a:solidFill>
+              <a:tailEnd type="triangle"/>
+            </a:ln>
+          </p:spPr>
+          <p:style>
+            <a:lnRef idx="1">
+              <a:schemeClr val="accent1"/>
+            </a:lnRef>
+            <a:fillRef idx="0">
+              <a:schemeClr val="accent1"/>
+            </a:fillRef>
+            <a:effectRef idx="0">
+              <a:schemeClr val="accent1"/>
+            </a:effectRef>
+            <a:fontRef idx="minor">
+              <a:schemeClr val="tx1"/>
+            </a:fontRef>
+          </p:style>
+        </p:cxnSp>
+      </p:grpSp>
     </p:spTree>
     <p:extLst>
       <p:ext uri="{BB962C8B-B14F-4D97-AF65-F5344CB8AC3E}">

--- a/figures/figures.pptx
+++ b/figures/figures.pptx
@@ -5,7 +5,7 @@
     <p:sldMasterId id="2147483660" r:id="rId1"/>
   </p:sldMasterIdLst>
   <p:notesMasterIdLst>
-    <p:notesMasterId r:id="rId24"/>
+    <p:notesMasterId r:id="rId25"/>
   </p:notesMasterIdLst>
   <p:sldIdLst>
     <p:sldId id="258" r:id="rId2"/>
@@ -23,13 +23,14 @@
     <p:sldId id="264" r:id="rId14"/>
     <p:sldId id="265" r:id="rId15"/>
     <p:sldId id="267" r:id="rId16"/>
-    <p:sldId id="269" r:id="rId17"/>
-    <p:sldId id="274" r:id="rId18"/>
-    <p:sldId id="270" r:id="rId19"/>
-    <p:sldId id="271" r:id="rId20"/>
-    <p:sldId id="272" r:id="rId21"/>
-    <p:sldId id="273" r:id="rId22"/>
-    <p:sldId id="257" r:id="rId23"/>
+    <p:sldId id="280" r:id="rId17"/>
+    <p:sldId id="271" r:id="rId18"/>
+    <p:sldId id="272" r:id="rId19"/>
+    <p:sldId id="273" r:id="rId20"/>
+    <p:sldId id="269" r:id="rId21"/>
+    <p:sldId id="274" r:id="rId22"/>
+    <p:sldId id="270" r:id="rId23"/>
+    <p:sldId id="257" r:id="rId24"/>
   </p:sldIdLst>
   <p:sldSz cx="12192000" cy="6858000"/>
   <p:notesSz cx="6858000" cy="9144000"/>
@@ -170,11 +171,9 @@
             <p14:sldId id="267"/>
           </p14:sldIdLst>
         </p14:section>
-        <p14:section name="Governance" id="{038CE4AA-62CD-47A2-8E40-F6F0DFCCB854}">
+        <p14:section name="Workflows" id="{F124E500-37B7-4919-B26F-2DBCF3957E81}">
           <p14:sldIdLst>
-            <p14:sldId id="269"/>
-            <p14:sldId id="274"/>
-            <p14:sldId id="270"/>
+            <p14:sldId id="280"/>
           </p14:sldIdLst>
         </p14:section>
         <p14:section name="Edge Deployment" id="{751363D7-BD1F-4E68-8906-25A659F6AF95}">
@@ -182,6 +181,13 @@
             <p14:sldId id="271"/>
             <p14:sldId id="272"/>
             <p14:sldId id="273"/>
+          </p14:sldIdLst>
+        </p14:section>
+        <p14:section name="Governance" id="{038CE4AA-62CD-47A2-8E40-F6F0DFCCB854}">
+          <p14:sldIdLst>
+            <p14:sldId id="269"/>
+            <p14:sldId id="274"/>
+            <p14:sldId id="270"/>
           </p14:sldIdLst>
         </p14:section>
         <p14:section name="Examples" id="{2CEADF37-2C1D-4DE6-BB08-5D838E707A13}">
@@ -280,7 +286,7 @@
           <a:p>
             <a:fld id="{DAABB0E5-6D8D-4DEE-B75F-67010CF2307C}" type="datetimeFigureOut">
               <a:rPr lang="en-US" smtClean="0"/>
-              <a:t>4/5/2026</a:t>
+              <a:t>4/11/2026</a:t>
             </a:fld>
             <a:endParaRPr lang="en-US"/>
           </a:p>
@@ -965,7 +971,7 @@
           <a:p>
             <a:fld id="{B84C5C40-2055-49AF-9028-5DA79E75E391}" type="datetimeFigureOut">
               <a:rPr lang="en-US" smtClean="0"/>
-              <a:t>4/5/2026</a:t>
+              <a:t>4/11/2026</a:t>
             </a:fld>
             <a:endParaRPr lang="en-US"/>
           </a:p>
@@ -1135,7 +1141,7 @@
           <a:p>
             <a:fld id="{B84C5C40-2055-49AF-9028-5DA79E75E391}" type="datetimeFigureOut">
               <a:rPr lang="en-US" smtClean="0"/>
-              <a:t>4/5/2026</a:t>
+              <a:t>4/11/2026</a:t>
             </a:fld>
             <a:endParaRPr lang="en-US"/>
           </a:p>
@@ -1315,7 +1321,7 @@
           <a:p>
             <a:fld id="{B84C5C40-2055-49AF-9028-5DA79E75E391}" type="datetimeFigureOut">
               <a:rPr lang="en-US" smtClean="0"/>
-              <a:t>4/5/2026</a:t>
+              <a:t>4/11/2026</a:t>
             </a:fld>
             <a:endParaRPr lang="en-US"/>
           </a:p>
@@ -1485,7 +1491,7 @@
           <a:p>
             <a:fld id="{B84C5C40-2055-49AF-9028-5DA79E75E391}" type="datetimeFigureOut">
               <a:rPr lang="en-US" smtClean="0"/>
-              <a:t>4/5/2026</a:t>
+              <a:t>4/11/2026</a:t>
             </a:fld>
             <a:endParaRPr lang="en-US"/>
           </a:p>
@@ -1731,7 +1737,7 @@
           <a:p>
             <a:fld id="{B84C5C40-2055-49AF-9028-5DA79E75E391}" type="datetimeFigureOut">
               <a:rPr lang="en-US" smtClean="0"/>
-              <a:t>4/5/2026</a:t>
+              <a:t>4/11/2026</a:t>
             </a:fld>
             <a:endParaRPr lang="en-US"/>
           </a:p>
@@ -1963,7 +1969,7 @@
           <a:p>
             <a:fld id="{B84C5C40-2055-49AF-9028-5DA79E75E391}" type="datetimeFigureOut">
               <a:rPr lang="en-US" smtClean="0"/>
-              <a:t>4/5/2026</a:t>
+              <a:t>4/11/2026</a:t>
             </a:fld>
             <a:endParaRPr lang="en-US"/>
           </a:p>
@@ -2330,7 +2336,7 @@
           <a:p>
             <a:fld id="{B84C5C40-2055-49AF-9028-5DA79E75E391}" type="datetimeFigureOut">
               <a:rPr lang="en-US" smtClean="0"/>
-              <a:t>4/5/2026</a:t>
+              <a:t>4/11/2026</a:t>
             </a:fld>
             <a:endParaRPr lang="en-US"/>
           </a:p>
@@ -2448,7 +2454,7 @@
           <a:p>
             <a:fld id="{B84C5C40-2055-49AF-9028-5DA79E75E391}" type="datetimeFigureOut">
               <a:rPr lang="en-US" smtClean="0"/>
-              <a:t>4/5/2026</a:t>
+              <a:t>4/11/2026</a:t>
             </a:fld>
             <a:endParaRPr lang="en-US"/>
           </a:p>
@@ -2543,7 +2549,7 @@
           <a:p>
             <a:fld id="{B84C5C40-2055-49AF-9028-5DA79E75E391}" type="datetimeFigureOut">
               <a:rPr lang="en-US" smtClean="0"/>
-              <a:t>4/5/2026</a:t>
+              <a:t>4/11/2026</a:t>
             </a:fld>
             <a:endParaRPr lang="en-US"/>
           </a:p>
@@ -2820,7 +2826,7 @@
           <a:p>
             <a:fld id="{B84C5C40-2055-49AF-9028-5DA79E75E391}" type="datetimeFigureOut">
               <a:rPr lang="en-US" smtClean="0"/>
-              <a:t>4/5/2026</a:t>
+              <a:t>4/11/2026</a:t>
             </a:fld>
             <a:endParaRPr lang="en-US"/>
           </a:p>
@@ -3077,7 +3083,7 @@
           <a:p>
             <a:fld id="{B84C5C40-2055-49AF-9028-5DA79E75E391}" type="datetimeFigureOut">
               <a:rPr lang="en-US" smtClean="0"/>
-              <a:t>4/5/2026</a:t>
+              <a:t>4/11/2026</a:t>
             </a:fld>
             <a:endParaRPr lang="en-US"/>
           </a:p>
@@ -3290,7 +3296,7 @@
           <a:p>
             <a:fld id="{B84C5C40-2055-49AF-9028-5DA79E75E391}" type="datetimeFigureOut">
               <a:rPr lang="en-US" smtClean="0"/>
-              <a:t>4/5/2026</a:t>
+              <a:t>4/11/2026</a:t>
             </a:fld>
             <a:endParaRPr lang="en-US"/>
           </a:p>
@@ -8642,12 +8648,832 @@
           <a:chExt cx="0" cy="0"/>
         </a:xfrm>
       </p:grpSpPr>
+      <p:sp>
+        <p:nvSpPr>
+          <p:cNvPr id="2" name="Rectangle: Rounded Corners 1">
+            <a:extLst>
+              <a:ext uri="{FF2B5EF4-FFF2-40B4-BE49-F238E27FC236}">
+                <a16:creationId xmlns:a16="http://schemas.microsoft.com/office/drawing/2014/main" id="{08AFB654-7A06-C3A4-7E7E-0CD359D6C0E5}"/>
+              </a:ext>
+            </a:extLst>
+          </p:cNvPr>
+          <p:cNvSpPr/>
+          <p:nvPr/>
+        </p:nvSpPr>
+        <p:spPr>
+          <a:xfrm>
+            <a:off x="1293967" y="880545"/>
+            <a:ext cx="2580925" cy="369332"/>
+          </a:xfrm>
+          <a:prstGeom prst="roundRect">
+            <a:avLst/>
+          </a:prstGeom>
+          <a:solidFill>
+            <a:srgbClr val="B2D4EB"/>
+          </a:solidFill>
+          <a:ln>
+            <a:solidFill>
+              <a:schemeClr val="tx1"/>
+            </a:solidFill>
+          </a:ln>
+        </p:spPr>
+        <p:style>
+          <a:lnRef idx="2">
+            <a:schemeClr val="accent1">
+              <a:shade val="15000"/>
+            </a:schemeClr>
+          </a:lnRef>
+          <a:fillRef idx="1">
+            <a:schemeClr val="accent1"/>
+          </a:fillRef>
+          <a:effectRef idx="0">
+            <a:schemeClr val="accent1"/>
+          </a:effectRef>
+          <a:fontRef idx="minor">
+            <a:schemeClr val="lt1"/>
+          </a:fontRef>
+        </p:style>
+        <p:txBody>
+          <a:bodyPr rtlCol="0" anchor="ctr"/>
+          <a:lstStyle/>
+          <a:p>
+            <a:pPr algn="ctr"/>
+            <a:r>
+              <a:rPr lang="en-US" dirty="0">
+                <a:solidFill>
+                  <a:schemeClr val="tx1"/>
+                </a:solidFill>
+              </a:rPr>
+              <a:t>User Input</a:t>
+            </a:r>
+            <a:endParaRPr lang="en-US" i="1" dirty="0">
+              <a:solidFill>
+                <a:schemeClr val="tx1"/>
+              </a:solidFill>
+            </a:endParaRPr>
+          </a:p>
+        </p:txBody>
+      </p:sp>
+      <p:sp>
+        <p:nvSpPr>
+          <p:cNvPr id="3" name="Rectangle: Rounded Corners 2">
+            <a:extLst>
+              <a:ext uri="{FF2B5EF4-FFF2-40B4-BE49-F238E27FC236}">
+                <a16:creationId xmlns:a16="http://schemas.microsoft.com/office/drawing/2014/main" id="{E86E8FED-E7D9-C8F7-A2EF-4BE21234B54B}"/>
+              </a:ext>
+            </a:extLst>
+          </p:cNvPr>
+          <p:cNvSpPr/>
+          <p:nvPr/>
+        </p:nvSpPr>
+        <p:spPr>
+          <a:xfrm>
+            <a:off x="1293967" y="5160997"/>
+            <a:ext cx="2580925" cy="369332"/>
+          </a:xfrm>
+          <a:prstGeom prst="roundRect">
+            <a:avLst/>
+          </a:prstGeom>
+          <a:solidFill>
+            <a:srgbClr val="B2D4EB"/>
+          </a:solidFill>
+          <a:ln>
+            <a:solidFill>
+              <a:schemeClr val="tx1"/>
+            </a:solidFill>
+          </a:ln>
+        </p:spPr>
+        <p:style>
+          <a:lnRef idx="2">
+            <a:schemeClr val="accent1">
+              <a:shade val="15000"/>
+            </a:schemeClr>
+          </a:lnRef>
+          <a:fillRef idx="1">
+            <a:schemeClr val="accent1"/>
+          </a:fillRef>
+          <a:effectRef idx="0">
+            <a:schemeClr val="accent1"/>
+          </a:effectRef>
+          <a:fontRef idx="minor">
+            <a:schemeClr val="lt1"/>
+          </a:fontRef>
+        </p:style>
+        <p:txBody>
+          <a:bodyPr rtlCol="0" anchor="ctr"/>
+          <a:lstStyle/>
+          <a:p>
+            <a:pPr algn="ctr"/>
+            <a:r>
+              <a:rPr lang="en-US" dirty="0">
+                <a:solidFill>
+                  <a:schemeClr val="tx1"/>
+                </a:solidFill>
+              </a:rPr>
+              <a:t>Output</a:t>
+            </a:r>
+            <a:endParaRPr lang="en-US" i="1" dirty="0">
+              <a:solidFill>
+                <a:schemeClr val="tx1"/>
+              </a:solidFill>
+            </a:endParaRPr>
+          </a:p>
+        </p:txBody>
+      </p:sp>
+      <p:sp>
+        <p:nvSpPr>
+          <p:cNvPr id="4" name="Rectangle: Rounded Corners 3">
+            <a:extLst>
+              <a:ext uri="{FF2B5EF4-FFF2-40B4-BE49-F238E27FC236}">
+                <a16:creationId xmlns:a16="http://schemas.microsoft.com/office/drawing/2014/main" id="{77C06C5B-8FC5-D569-2AE0-03636CF0CCD1}"/>
+              </a:ext>
+            </a:extLst>
+          </p:cNvPr>
+          <p:cNvSpPr/>
+          <p:nvPr/>
+        </p:nvSpPr>
+        <p:spPr>
+          <a:xfrm>
+            <a:off x="4805537" y="5160997"/>
+            <a:ext cx="2580925" cy="369332"/>
+          </a:xfrm>
+          <a:prstGeom prst="roundRect">
+            <a:avLst/>
+          </a:prstGeom>
+          <a:solidFill>
+            <a:srgbClr val="B2D4EB"/>
+          </a:solidFill>
+          <a:ln>
+            <a:solidFill>
+              <a:schemeClr val="tx1"/>
+            </a:solidFill>
+          </a:ln>
+        </p:spPr>
+        <p:style>
+          <a:lnRef idx="2">
+            <a:schemeClr val="accent1">
+              <a:shade val="15000"/>
+            </a:schemeClr>
+          </a:lnRef>
+          <a:fillRef idx="1">
+            <a:schemeClr val="accent1"/>
+          </a:fillRef>
+          <a:effectRef idx="0">
+            <a:schemeClr val="accent1"/>
+          </a:effectRef>
+          <a:fontRef idx="minor">
+            <a:schemeClr val="lt1"/>
+          </a:fontRef>
+        </p:style>
+        <p:txBody>
+          <a:bodyPr rtlCol="0" anchor="ctr"/>
+          <a:lstStyle/>
+          <a:p>
+            <a:pPr algn="ctr"/>
+            <a:r>
+              <a:rPr lang="en-US" dirty="0">
+                <a:solidFill>
+                  <a:schemeClr val="tx1"/>
+                </a:solidFill>
+              </a:rPr>
+              <a:t>Output</a:t>
+            </a:r>
+            <a:endParaRPr lang="en-US" i="1" dirty="0">
+              <a:solidFill>
+                <a:schemeClr val="tx1"/>
+              </a:solidFill>
+            </a:endParaRPr>
+          </a:p>
+        </p:txBody>
+      </p:sp>
+      <p:sp>
+        <p:nvSpPr>
+          <p:cNvPr id="5" name="Rectangle: Rounded Corners 4">
+            <a:extLst>
+              <a:ext uri="{FF2B5EF4-FFF2-40B4-BE49-F238E27FC236}">
+                <a16:creationId xmlns:a16="http://schemas.microsoft.com/office/drawing/2014/main" id="{44341166-D50F-198F-0E6D-17DCEC0EA317}"/>
+              </a:ext>
+            </a:extLst>
+          </p:cNvPr>
+          <p:cNvSpPr/>
+          <p:nvPr/>
+        </p:nvSpPr>
+        <p:spPr>
+          <a:xfrm>
+            <a:off x="4805536" y="880545"/>
+            <a:ext cx="2580925" cy="369332"/>
+          </a:xfrm>
+          <a:prstGeom prst="roundRect">
+            <a:avLst/>
+          </a:prstGeom>
+          <a:solidFill>
+            <a:srgbClr val="B2D4EB"/>
+          </a:solidFill>
+          <a:ln>
+            <a:solidFill>
+              <a:schemeClr val="tx1"/>
+            </a:solidFill>
+          </a:ln>
+        </p:spPr>
+        <p:style>
+          <a:lnRef idx="2">
+            <a:schemeClr val="accent1">
+              <a:shade val="15000"/>
+            </a:schemeClr>
+          </a:lnRef>
+          <a:fillRef idx="1">
+            <a:schemeClr val="accent1"/>
+          </a:fillRef>
+          <a:effectRef idx="0">
+            <a:schemeClr val="accent1"/>
+          </a:effectRef>
+          <a:fontRef idx="minor">
+            <a:schemeClr val="lt1"/>
+          </a:fontRef>
+        </p:style>
+        <p:txBody>
+          <a:bodyPr rtlCol="0" anchor="ctr"/>
+          <a:lstStyle/>
+          <a:p>
+            <a:pPr algn="ctr"/>
+            <a:r>
+              <a:rPr lang="en-US" dirty="0">
+                <a:solidFill>
+                  <a:schemeClr val="tx1"/>
+                </a:solidFill>
+              </a:rPr>
+              <a:t>User Input</a:t>
+            </a:r>
+            <a:endParaRPr lang="en-US" i="1" dirty="0">
+              <a:solidFill>
+                <a:schemeClr val="tx1"/>
+              </a:solidFill>
+            </a:endParaRPr>
+          </a:p>
+        </p:txBody>
+      </p:sp>
+      <p:sp>
+        <p:nvSpPr>
+          <p:cNvPr id="6" name="Rectangle: Rounded Corners 5">
+            <a:extLst>
+              <a:ext uri="{FF2B5EF4-FFF2-40B4-BE49-F238E27FC236}">
+                <a16:creationId xmlns:a16="http://schemas.microsoft.com/office/drawing/2014/main" id="{782E7744-3205-3D14-6BE9-883217B14999}"/>
+              </a:ext>
+            </a:extLst>
+          </p:cNvPr>
+          <p:cNvSpPr/>
+          <p:nvPr/>
+        </p:nvSpPr>
+        <p:spPr>
+          <a:xfrm>
+            <a:off x="8317108" y="878092"/>
+            <a:ext cx="2580925" cy="369332"/>
+          </a:xfrm>
+          <a:prstGeom prst="roundRect">
+            <a:avLst/>
+          </a:prstGeom>
+          <a:solidFill>
+            <a:srgbClr val="B2D4EB"/>
+          </a:solidFill>
+          <a:ln>
+            <a:solidFill>
+              <a:schemeClr val="tx1"/>
+            </a:solidFill>
+          </a:ln>
+        </p:spPr>
+        <p:style>
+          <a:lnRef idx="2">
+            <a:schemeClr val="accent1">
+              <a:shade val="15000"/>
+            </a:schemeClr>
+          </a:lnRef>
+          <a:fillRef idx="1">
+            <a:schemeClr val="accent1"/>
+          </a:fillRef>
+          <a:effectRef idx="0">
+            <a:schemeClr val="accent1"/>
+          </a:effectRef>
+          <a:fontRef idx="minor">
+            <a:schemeClr val="lt1"/>
+          </a:fontRef>
+        </p:style>
+        <p:txBody>
+          <a:bodyPr rtlCol="0" anchor="ctr"/>
+          <a:lstStyle/>
+          <a:p>
+            <a:pPr algn="ctr"/>
+            <a:r>
+              <a:rPr lang="en-US" dirty="0">
+                <a:solidFill>
+                  <a:schemeClr val="tx1"/>
+                </a:solidFill>
+              </a:rPr>
+              <a:t>User Input</a:t>
+            </a:r>
+            <a:endParaRPr lang="en-US" i="1" dirty="0">
+              <a:solidFill>
+                <a:schemeClr val="tx1"/>
+              </a:solidFill>
+            </a:endParaRPr>
+          </a:p>
+        </p:txBody>
+      </p:sp>
+      <p:sp>
+        <p:nvSpPr>
+          <p:cNvPr id="7" name="Rectangle: Rounded Corners 6">
+            <a:extLst>
+              <a:ext uri="{FF2B5EF4-FFF2-40B4-BE49-F238E27FC236}">
+                <a16:creationId xmlns:a16="http://schemas.microsoft.com/office/drawing/2014/main" id="{27A39C3D-9111-F29C-AB9D-1E650F4C0C60}"/>
+              </a:ext>
+            </a:extLst>
+          </p:cNvPr>
+          <p:cNvSpPr/>
+          <p:nvPr/>
+        </p:nvSpPr>
+        <p:spPr>
+          <a:xfrm>
+            <a:off x="8317108" y="5160997"/>
+            <a:ext cx="2580925" cy="369332"/>
+          </a:xfrm>
+          <a:prstGeom prst="roundRect">
+            <a:avLst/>
+          </a:prstGeom>
+          <a:solidFill>
+            <a:srgbClr val="B2D4EB"/>
+          </a:solidFill>
+          <a:ln>
+            <a:solidFill>
+              <a:schemeClr val="tx1"/>
+            </a:solidFill>
+          </a:ln>
+        </p:spPr>
+        <p:style>
+          <a:lnRef idx="2">
+            <a:schemeClr val="accent1">
+              <a:shade val="15000"/>
+            </a:schemeClr>
+          </a:lnRef>
+          <a:fillRef idx="1">
+            <a:schemeClr val="accent1"/>
+          </a:fillRef>
+          <a:effectRef idx="0">
+            <a:schemeClr val="accent1"/>
+          </a:effectRef>
+          <a:fontRef idx="minor">
+            <a:schemeClr val="lt1"/>
+          </a:fontRef>
+        </p:style>
+        <p:txBody>
+          <a:bodyPr rtlCol="0" anchor="ctr"/>
+          <a:lstStyle/>
+          <a:p>
+            <a:pPr algn="ctr"/>
+            <a:r>
+              <a:rPr lang="en-US" dirty="0">
+                <a:solidFill>
+                  <a:schemeClr val="tx1"/>
+                </a:solidFill>
+              </a:rPr>
+              <a:t>Output</a:t>
+            </a:r>
+            <a:endParaRPr lang="en-US" i="1" dirty="0">
+              <a:solidFill>
+                <a:schemeClr val="tx1"/>
+              </a:solidFill>
+            </a:endParaRPr>
+          </a:p>
+        </p:txBody>
+      </p:sp>
+      <p:sp>
+        <p:nvSpPr>
+          <p:cNvPr id="8" name="TextBox 7">
+            <a:extLst>
+              <a:ext uri="{FF2B5EF4-FFF2-40B4-BE49-F238E27FC236}">
+                <a16:creationId xmlns:a16="http://schemas.microsoft.com/office/drawing/2014/main" id="{5D035EDB-7D42-FD80-A64D-1B444CF1F6E4}"/>
+              </a:ext>
+            </a:extLst>
+          </p:cNvPr>
+          <p:cNvSpPr txBox="1"/>
+          <p:nvPr/>
+        </p:nvSpPr>
+        <p:spPr>
+          <a:xfrm>
+            <a:off x="2059509" y="397565"/>
+            <a:ext cx="1049839" cy="369332"/>
+          </a:xfrm>
+          <a:prstGeom prst="rect">
+            <a:avLst/>
+          </a:prstGeom>
+          <a:noFill/>
+        </p:spPr>
+        <p:txBody>
+          <a:bodyPr wrap="none" rtlCol="0">
+            <a:spAutoFit/>
+          </a:bodyPr>
+          <a:lstStyle/>
+          <a:p>
+            <a:pPr algn="ctr"/>
+            <a:r>
+              <a:rPr lang="en-US" dirty="0"/>
+              <a:t>Sequential</a:t>
+            </a:r>
+          </a:p>
+        </p:txBody>
+      </p:sp>
+      <p:sp>
+        <p:nvSpPr>
+          <p:cNvPr id="9" name="TextBox 8">
+            <a:extLst>
+              <a:ext uri="{FF2B5EF4-FFF2-40B4-BE49-F238E27FC236}">
+                <a16:creationId xmlns:a16="http://schemas.microsoft.com/office/drawing/2014/main" id="{0DCBC3F8-8300-3DAD-0BC5-425AB5841CE3}"/>
+              </a:ext>
+            </a:extLst>
+          </p:cNvPr>
+          <p:cNvSpPr txBox="1"/>
+          <p:nvPr/>
+        </p:nvSpPr>
+        <p:spPr>
+          <a:xfrm>
+            <a:off x="9054373" y="397565"/>
+            <a:ext cx="1106393" cy="369332"/>
+          </a:xfrm>
+          <a:prstGeom prst="rect">
+            <a:avLst/>
+          </a:prstGeom>
+          <a:noFill/>
+        </p:spPr>
+        <p:txBody>
+          <a:bodyPr wrap="none" rtlCol="0">
+            <a:spAutoFit/>
+          </a:bodyPr>
+          <a:lstStyle/>
+          <a:p>
+            <a:pPr algn="ctr"/>
+            <a:r>
+              <a:rPr lang="en-US" dirty="0"/>
+              <a:t>Group Chat</a:t>
+            </a:r>
+          </a:p>
+        </p:txBody>
+      </p:sp>
+      <p:sp>
+        <p:nvSpPr>
+          <p:cNvPr id="10" name="TextBox 9">
+            <a:extLst>
+              <a:ext uri="{FF2B5EF4-FFF2-40B4-BE49-F238E27FC236}">
+                <a16:creationId xmlns:a16="http://schemas.microsoft.com/office/drawing/2014/main" id="{8D0CDE82-B9BA-575A-4838-57123640C602}"/>
+              </a:ext>
+            </a:extLst>
+          </p:cNvPr>
+          <p:cNvSpPr txBox="1"/>
+          <p:nvPr/>
+        </p:nvSpPr>
+        <p:spPr>
+          <a:xfrm>
+            <a:off x="5386865" y="397565"/>
+            <a:ext cx="1418273" cy="369332"/>
+          </a:xfrm>
+          <a:prstGeom prst="rect">
+            <a:avLst/>
+          </a:prstGeom>
+          <a:noFill/>
+        </p:spPr>
+        <p:txBody>
+          <a:bodyPr wrap="none" rtlCol="0">
+            <a:spAutoFit/>
+          </a:bodyPr>
+          <a:lstStyle/>
+          <a:p>
+            <a:pPr algn="ctr"/>
+            <a:r>
+              <a:rPr lang="en-US" dirty="0"/>
+              <a:t>Human in Loop</a:t>
+            </a:r>
+          </a:p>
+        </p:txBody>
+      </p:sp>
+      <p:sp>
+        <p:nvSpPr>
+          <p:cNvPr id="11" name="Rectangle: Rounded Corners 10">
+            <a:extLst>
+              <a:ext uri="{FF2B5EF4-FFF2-40B4-BE49-F238E27FC236}">
+                <a16:creationId xmlns:a16="http://schemas.microsoft.com/office/drawing/2014/main" id="{03C72ADD-5624-A5AF-C90C-8D288A445042}"/>
+              </a:ext>
+            </a:extLst>
+          </p:cNvPr>
+          <p:cNvSpPr/>
+          <p:nvPr/>
+        </p:nvSpPr>
+        <p:spPr>
+          <a:xfrm>
+            <a:off x="1907431" y="1577486"/>
+            <a:ext cx="1344168" cy="866894"/>
+          </a:xfrm>
+          <a:prstGeom prst="roundRect">
+            <a:avLst/>
+          </a:prstGeom>
+          <a:solidFill>
+            <a:srgbClr val="E5F1F8"/>
+          </a:solidFill>
+          <a:ln>
+            <a:solidFill>
+              <a:schemeClr val="tx1"/>
+            </a:solidFill>
+          </a:ln>
+        </p:spPr>
+        <p:style>
+          <a:lnRef idx="2">
+            <a:schemeClr val="accent1">
+              <a:shade val="15000"/>
+            </a:schemeClr>
+          </a:lnRef>
+          <a:fillRef idx="1">
+            <a:schemeClr val="accent1"/>
+          </a:fillRef>
+          <a:effectRef idx="0">
+            <a:schemeClr val="accent1"/>
+          </a:effectRef>
+          <a:fontRef idx="minor">
+            <a:schemeClr val="lt1"/>
+          </a:fontRef>
+        </p:style>
+        <p:txBody>
+          <a:bodyPr rtlCol="0" anchor="ctr"/>
+          <a:lstStyle/>
+          <a:p>
+            <a:pPr algn="ctr"/>
+            <a:r>
+              <a:rPr lang="en-US" dirty="0">
+                <a:solidFill>
+                  <a:schemeClr val="tx1"/>
+                </a:solidFill>
+              </a:rPr>
+              <a:t>Agent 1</a:t>
+            </a:r>
+          </a:p>
+        </p:txBody>
+      </p:sp>
+      <p:sp>
+        <p:nvSpPr>
+          <p:cNvPr id="12" name="Rectangle: Rounded Corners 11">
+            <a:extLst>
+              <a:ext uri="{FF2B5EF4-FFF2-40B4-BE49-F238E27FC236}">
+                <a16:creationId xmlns:a16="http://schemas.microsoft.com/office/drawing/2014/main" id="{00E24462-6792-9F65-B196-3AAC33E7B93E}"/>
+              </a:ext>
+            </a:extLst>
+          </p:cNvPr>
+          <p:cNvSpPr/>
+          <p:nvPr/>
+        </p:nvSpPr>
+        <p:spPr>
+          <a:xfrm>
+            <a:off x="1907431" y="3966493"/>
+            <a:ext cx="1344168" cy="866894"/>
+          </a:xfrm>
+          <a:prstGeom prst="roundRect">
+            <a:avLst/>
+          </a:prstGeom>
+          <a:solidFill>
+            <a:srgbClr val="E5F1F8"/>
+          </a:solidFill>
+          <a:ln>
+            <a:solidFill>
+              <a:schemeClr val="tx1"/>
+            </a:solidFill>
+          </a:ln>
+        </p:spPr>
+        <p:style>
+          <a:lnRef idx="2">
+            <a:schemeClr val="accent1">
+              <a:shade val="15000"/>
+            </a:schemeClr>
+          </a:lnRef>
+          <a:fillRef idx="1">
+            <a:schemeClr val="accent1"/>
+          </a:fillRef>
+          <a:effectRef idx="0">
+            <a:schemeClr val="accent1"/>
+          </a:effectRef>
+          <a:fontRef idx="minor">
+            <a:schemeClr val="lt1"/>
+          </a:fontRef>
+        </p:style>
+        <p:txBody>
+          <a:bodyPr rtlCol="0" anchor="ctr"/>
+          <a:lstStyle/>
+          <a:p>
+            <a:pPr algn="ctr"/>
+            <a:r>
+              <a:rPr lang="en-US" dirty="0">
+                <a:solidFill>
+                  <a:schemeClr val="tx1"/>
+                </a:solidFill>
+              </a:rPr>
+              <a:t>Agent 3</a:t>
+            </a:r>
+          </a:p>
+        </p:txBody>
+      </p:sp>
+      <p:sp>
+        <p:nvSpPr>
+          <p:cNvPr id="13" name="Rectangle: Rounded Corners 12">
+            <a:extLst>
+              <a:ext uri="{FF2B5EF4-FFF2-40B4-BE49-F238E27FC236}">
+                <a16:creationId xmlns:a16="http://schemas.microsoft.com/office/drawing/2014/main" id="{127113AE-C3C2-85C7-0E3A-0BAF3433488F}"/>
+              </a:ext>
+            </a:extLst>
+          </p:cNvPr>
+          <p:cNvSpPr/>
+          <p:nvPr/>
+        </p:nvSpPr>
+        <p:spPr>
+          <a:xfrm>
+            <a:off x="1907431" y="2771990"/>
+            <a:ext cx="1344168" cy="866894"/>
+          </a:xfrm>
+          <a:prstGeom prst="roundRect">
+            <a:avLst/>
+          </a:prstGeom>
+          <a:solidFill>
+            <a:srgbClr val="E5F1F8"/>
+          </a:solidFill>
+          <a:ln>
+            <a:solidFill>
+              <a:schemeClr val="tx1"/>
+            </a:solidFill>
+          </a:ln>
+        </p:spPr>
+        <p:style>
+          <a:lnRef idx="2">
+            <a:schemeClr val="accent1">
+              <a:shade val="15000"/>
+            </a:schemeClr>
+          </a:lnRef>
+          <a:fillRef idx="1">
+            <a:schemeClr val="accent1"/>
+          </a:fillRef>
+          <a:effectRef idx="0">
+            <a:schemeClr val="accent1"/>
+          </a:effectRef>
+          <a:fontRef idx="minor">
+            <a:schemeClr val="lt1"/>
+          </a:fontRef>
+        </p:style>
+        <p:txBody>
+          <a:bodyPr rtlCol="0" anchor="ctr"/>
+          <a:lstStyle/>
+          <a:p>
+            <a:pPr algn="ctr"/>
+            <a:r>
+              <a:rPr lang="en-US" dirty="0">
+                <a:solidFill>
+                  <a:schemeClr val="tx1"/>
+                </a:solidFill>
+              </a:rPr>
+              <a:t>Agent 2</a:t>
+            </a:r>
+          </a:p>
+        </p:txBody>
+      </p:sp>
+      <p:sp>
+        <p:nvSpPr>
+          <p:cNvPr id="14" name="Rectangle: Rounded Corners 13">
+            <a:extLst>
+              <a:ext uri="{FF2B5EF4-FFF2-40B4-BE49-F238E27FC236}">
+                <a16:creationId xmlns:a16="http://schemas.microsoft.com/office/drawing/2014/main" id="{50CB94AA-C467-6DED-59A5-34F72F9BE893}"/>
+              </a:ext>
+            </a:extLst>
+          </p:cNvPr>
+          <p:cNvSpPr/>
+          <p:nvPr/>
+        </p:nvSpPr>
+        <p:spPr>
+          <a:xfrm>
+            <a:off x="8935485" y="1577486"/>
+            <a:ext cx="1344168" cy="866894"/>
+          </a:xfrm>
+          <a:prstGeom prst="roundRect">
+            <a:avLst/>
+          </a:prstGeom>
+          <a:solidFill>
+            <a:srgbClr val="E5F1F8"/>
+          </a:solidFill>
+          <a:ln>
+            <a:solidFill>
+              <a:schemeClr val="tx1"/>
+            </a:solidFill>
+          </a:ln>
+        </p:spPr>
+        <p:style>
+          <a:lnRef idx="2">
+            <a:schemeClr val="accent1">
+              <a:shade val="15000"/>
+            </a:schemeClr>
+          </a:lnRef>
+          <a:fillRef idx="1">
+            <a:schemeClr val="accent1"/>
+          </a:fillRef>
+          <a:effectRef idx="0">
+            <a:schemeClr val="accent1"/>
+          </a:effectRef>
+          <a:fontRef idx="minor">
+            <a:schemeClr val="lt1"/>
+          </a:fontRef>
+        </p:style>
+        <p:txBody>
+          <a:bodyPr rtlCol="0" anchor="ctr"/>
+          <a:lstStyle/>
+          <a:p>
+            <a:pPr algn="ctr"/>
+            <a:r>
+              <a:rPr lang="en-US" dirty="0">
+                <a:solidFill>
+                  <a:schemeClr val="tx1"/>
+                </a:solidFill>
+              </a:rPr>
+              <a:t>Orchestrator</a:t>
+            </a:r>
+          </a:p>
+          <a:p>
+            <a:pPr algn="ctr"/>
+            <a:r>
+              <a:rPr lang="en-US" sz="1200" dirty="0">
+                <a:solidFill>
+                  <a:schemeClr val="tx1"/>
+                </a:solidFill>
+              </a:rPr>
+              <a:t>(Route by Context)</a:t>
+            </a:r>
+          </a:p>
+        </p:txBody>
+      </p:sp>
+      <p:sp>
+        <p:nvSpPr>
+          <p:cNvPr id="16" name="Rectangle: Rounded Corners 15">
+            <a:extLst>
+              <a:ext uri="{FF2B5EF4-FFF2-40B4-BE49-F238E27FC236}">
+                <a16:creationId xmlns:a16="http://schemas.microsoft.com/office/drawing/2014/main" id="{A6050253-1AB3-63EB-84EB-ACEE2400BBF8}"/>
+              </a:ext>
+            </a:extLst>
+          </p:cNvPr>
+          <p:cNvSpPr/>
+          <p:nvPr/>
+        </p:nvSpPr>
+        <p:spPr>
+          <a:xfrm>
+            <a:off x="5421458" y="1577486"/>
+            <a:ext cx="1344168" cy="866894"/>
+          </a:xfrm>
+          <a:prstGeom prst="roundRect">
+            <a:avLst/>
+          </a:prstGeom>
+          <a:solidFill>
+            <a:srgbClr val="E5F1F8"/>
+          </a:solidFill>
+          <a:ln>
+            <a:solidFill>
+              <a:schemeClr val="tx1"/>
+            </a:solidFill>
+          </a:ln>
+        </p:spPr>
+        <p:style>
+          <a:lnRef idx="2">
+            <a:schemeClr val="accent1">
+              <a:shade val="15000"/>
+            </a:schemeClr>
+          </a:lnRef>
+          <a:fillRef idx="1">
+            <a:schemeClr val="accent1"/>
+          </a:fillRef>
+          <a:effectRef idx="0">
+            <a:schemeClr val="accent1"/>
+          </a:effectRef>
+          <a:fontRef idx="minor">
+            <a:schemeClr val="lt1"/>
+          </a:fontRef>
+        </p:style>
+        <p:txBody>
+          <a:bodyPr rtlCol="0" anchor="ctr"/>
+          <a:lstStyle/>
+          <a:p>
+            <a:pPr algn="ctr"/>
+            <a:r>
+              <a:rPr lang="en-US" dirty="0">
+                <a:solidFill>
+                  <a:schemeClr val="tx1"/>
+                </a:solidFill>
+              </a:rPr>
+              <a:t>Agent 1</a:t>
+            </a:r>
+          </a:p>
+        </p:txBody>
+      </p:sp>
       <p:pic>
         <p:nvPicPr>
-          <p:cNvPr id="3" name="Picture 2">
-            <a:extLst>
-              <a:ext uri="{FF2B5EF4-FFF2-40B4-BE49-F238E27FC236}">
-                <a16:creationId xmlns:a16="http://schemas.microsoft.com/office/drawing/2014/main" id="{EE4867BA-66DD-B140-5528-856BCA343CD6}"/>
+          <p:cNvPr id="18" name="Graphic 17" descr="User with solid fill">
+            <a:extLst>
+              <a:ext uri="{FF2B5EF4-FFF2-40B4-BE49-F238E27FC236}">
+                <a16:creationId xmlns:a16="http://schemas.microsoft.com/office/drawing/2014/main" id="{1B9F9BDD-1142-BCE0-EDD8-ADD84DF93974}"/>
               </a:ext>
             </a:extLst>
           </p:cNvPr>
@@ -8657,25 +9483,1179 @@
           <p:nvPr/>
         </p:nvPicPr>
         <p:blipFill>
-          <a:blip r:embed="rId2"/>
+          <a:blip r:embed="rId2">
+            <a:extLst>
+              <a:ext uri="{96DAC541-7B7A-43D3-8B79-37D633B846F1}">
+                <asvg:svgBlip xmlns:asvg="http://schemas.microsoft.com/office/drawing/2016/SVG/main" r:embed="rId3"/>
+              </a:ext>
+            </a:extLst>
+          </a:blip>
           <a:stretch>
             <a:fillRect/>
           </a:stretch>
         </p:blipFill>
         <p:spPr>
           <a:xfrm>
-            <a:off x="0" y="99063"/>
-            <a:ext cx="12192000" cy="6659873"/>
+            <a:off x="6422726" y="3841197"/>
+            <a:ext cx="685800" cy="685800"/>
           </a:xfrm>
           <a:prstGeom prst="rect">
             <a:avLst/>
           </a:prstGeom>
         </p:spPr>
       </p:pic>
+      <p:cxnSp>
+        <p:nvCxnSpPr>
+          <p:cNvPr id="19" name="Straight Arrow Connector 18">
+            <a:extLst>
+              <a:ext uri="{FF2B5EF4-FFF2-40B4-BE49-F238E27FC236}">
+                <a16:creationId xmlns:a16="http://schemas.microsoft.com/office/drawing/2014/main" id="{3BEF4AA4-B888-18BB-6FB5-C6F9288B2265}"/>
+              </a:ext>
+            </a:extLst>
+          </p:cNvPr>
+          <p:cNvCxnSpPr>
+            <a:cxnSpLocks/>
+            <a:stCxn id="5" idx="2"/>
+            <a:endCxn id="16" idx="0"/>
+          </p:cNvCxnSpPr>
+          <p:nvPr/>
+        </p:nvCxnSpPr>
+        <p:spPr>
+          <a:xfrm flipH="1">
+            <a:off x="6093542" y="1249877"/>
+            <a:ext cx="2457" cy="327609"/>
+          </a:xfrm>
+          <a:prstGeom prst="straightConnector1">
+            <a:avLst/>
+          </a:prstGeom>
+          <a:ln>
+            <a:solidFill>
+              <a:schemeClr val="tx1"/>
+            </a:solidFill>
+            <a:prstDash val="solid"/>
+            <a:headEnd type="none" w="lg" len="lg"/>
+            <a:tailEnd type="triangle" w="lg" len="lg"/>
+          </a:ln>
+        </p:spPr>
+        <p:style>
+          <a:lnRef idx="2">
+            <a:schemeClr val="accent1"/>
+          </a:lnRef>
+          <a:fillRef idx="0">
+            <a:schemeClr val="accent1"/>
+          </a:fillRef>
+          <a:effectRef idx="1">
+            <a:schemeClr val="accent1"/>
+          </a:effectRef>
+          <a:fontRef idx="minor">
+            <a:schemeClr val="tx1"/>
+          </a:fontRef>
+        </p:style>
+      </p:cxnSp>
+      <p:cxnSp>
+        <p:nvCxnSpPr>
+          <p:cNvPr id="22" name="Straight Arrow Connector 21">
+            <a:extLst>
+              <a:ext uri="{FF2B5EF4-FFF2-40B4-BE49-F238E27FC236}">
+                <a16:creationId xmlns:a16="http://schemas.microsoft.com/office/drawing/2014/main" id="{F476B6AE-D465-4915-3E1B-D83CE01572FB}"/>
+              </a:ext>
+            </a:extLst>
+          </p:cNvPr>
+          <p:cNvCxnSpPr>
+            <a:cxnSpLocks/>
+            <a:stCxn id="16" idx="2"/>
+            <a:endCxn id="15" idx="0"/>
+          </p:cNvCxnSpPr>
+          <p:nvPr/>
+        </p:nvCxnSpPr>
+        <p:spPr>
+          <a:xfrm>
+            <a:off x="6093542" y="2444380"/>
+            <a:ext cx="0" cy="327610"/>
+          </a:xfrm>
+          <a:prstGeom prst="straightConnector1">
+            <a:avLst/>
+          </a:prstGeom>
+          <a:ln>
+            <a:solidFill>
+              <a:schemeClr val="tx1"/>
+            </a:solidFill>
+            <a:prstDash val="solid"/>
+            <a:headEnd type="none" w="lg" len="lg"/>
+            <a:tailEnd type="triangle" w="lg" len="lg"/>
+          </a:ln>
+        </p:spPr>
+        <p:style>
+          <a:lnRef idx="2">
+            <a:schemeClr val="accent1"/>
+          </a:lnRef>
+          <a:fillRef idx="0">
+            <a:schemeClr val="accent1"/>
+          </a:fillRef>
+          <a:effectRef idx="1">
+            <a:schemeClr val="accent1"/>
+          </a:effectRef>
+          <a:fontRef idx="minor">
+            <a:schemeClr val="tx1"/>
+          </a:fontRef>
+        </p:style>
+      </p:cxnSp>
+      <p:cxnSp>
+        <p:nvCxnSpPr>
+          <p:cNvPr id="25" name="Straight Arrow Connector 24">
+            <a:extLst>
+              <a:ext uri="{FF2B5EF4-FFF2-40B4-BE49-F238E27FC236}">
+                <a16:creationId xmlns:a16="http://schemas.microsoft.com/office/drawing/2014/main" id="{6211E7CA-0A5C-9A5B-E02F-FE87A8E49E61}"/>
+              </a:ext>
+            </a:extLst>
+          </p:cNvPr>
+          <p:cNvCxnSpPr>
+            <a:cxnSpLocks/>
+            <a:stCxn id="2" idx="2"/>
+            <a:endCxn id="11" idx="0"/>
+          </p:cNvCxnSpPr>
+          <p:nvPr/>
+        </p:nvCxnSpPr>
+        <p:spPr>
+          <a:xfrm flipH="1">
+            <a:off x="2579515" y="1249877"/>
+            <a:ext cx="4915" cy="327609"/>
+          </a:xfrm>
+          <a:prstGeom prst="straightConnector1">
+            <a:avLst/>
+          </a:prstGeom>
+          <a:ln>
+            <a:solidFill>
+              <a:schemeClr val="tx1"/>
+            </a:solidFill>
+            <a:prstDash val="solid"/>
+            <a:headEnd type="none" w="lg" len="lg"/>
+            <a:tailEnd type="triangle" w="lg" len="lg"/>
+          </a:ln>
+        </p:spPr>
+        <p:style>
+          <a:lnRef idx="2">
+            <a:schemeClr val="accent1"/>
+          </a:lnRef>
+          <a:fillRef idx="0">
+            <a:schemeClr val="accent1"/>
+          </a:fillRef>
+          <a:effectRef idx="1">
+            <a:schemeClr val="accent1"/>
+          </a:effectRef>
+          <a:fontRef idx="minor">
+            <a:schemeClr val="tx1"/>
+          </a:fontRef>
+        </p:style>
+      </p:cxnSp>
+      <p:sp>
+        <p:nvSpPr>
+          <p:cNvPr id="28" name="TextBox 27">
+            <a:extLst>
+              <a:ext uri="{FF2B5EF4-FFF2-40B4-BE49-F238E27FC236}">
+                <a16:creationId xmlns:a16="http://schemas.microsoft.com/office/drawing/2014/main" id="{65BE0972-B87A-4DA1-1F47-7D690864B492}"/>
+              </a:ext>
+            </a:extLst>
+          </p:cNvPr>
+          <p:cNvSpPr txBox="1"/>
+          <p:nvPr/>
+        </p:nvSpPr>
+        <p:spPr>
+          <a:xfrm>
+            <a:off x="6344228" y="4416172"/>
+            <a:ext cx="842795" cy="461665"/>
+          </a:xfrm>
+          <a:prstGeom prst="rect">
+            <a:avLst/>
+          </a:prstGeom>
+          <a:noFill/>
+        </p:spPr>
+        <p:txBody>
+          <a:bodyPr wrap="none" rtlCol="0">
+            <a:spAutoFit/>
+          </a:bodyPr>
+          <a:lstStyle/>
+          <a:p>
+            <a:pPr algn="ctr"/>
+            <a:r>
+              <a:rPr lang="en-US" sz="1200" dirty="0"/>
+              <a:t>Approves or</a:t>
+            </a:r>
+          </a:p>
+          <a:p>
+            <a:pPr algn="ctr"/>
+            <a:r>
+              <a:rPr lang="en-US" sz="1200" dirty="0"/>
+              <a:t>Clarifies</a:t>
+            </a:r>
+          </a:p>
+        </p:txBody>
+      </p:sp>
+      <p:cxnSp>
+        <p:nvCxnSpPr>
+          <p:cNvPr id="30" name="Connector: Elbow 29">
+            <a:extLst>
+              <a:ext uri="{FF2B5EF4-FFF2-40B4-BE49-F238E27FC236}">
+                <a16:creationId xmlns:a16="http://schemas.microsoft.com/office/drawing/2014/main" id="{F9C84E05-C87E-751E-D39B-0EB80D386D6F}"/>
+              </a:ext>
+            </a:extLst>
+          </p:cNvPr>
+          <p:cNvCxnSpPr>
+            <a:cxnSpLocks/>
+            <a:endCxn id="18" idx="0"/>
+          </p:cNvCxnSpPr>
+          <p:nvPr/>
+        </p:nvCxnSpPr>
+        <p:spPr>
+          <a:xfrm rot="16200000" flipH="1">
+            <a:off x="6422641" y="3498212"/>
+            <a:ext cx="412200" cy="273770"/>
+          </a:xfrm>
+          <a:prstGeom prst="bentConnector3">
+            <a:avLst>
+              <a:gd name="adj1" fmla="val 50000"/>
+            </a:avLst>
+          </a:prstGeom>
+          <a:ln>
+            <a:solidFill>
+              <a:schemeClr val="tx1"/>
+            </a:solidFill>
+            <a:prstDash val="solid"/>
+            <a:headEnd type="none" w="lg" len="lg"/>
+            <a:tailEnd type="triangle" w="lg" len="lg"/>
+          </a:ln>
+        </p:spPr>
+        <p:style>
+          <a:lnRef idx="2">
+            <a:schemeClr val="accent1"/>
+          </a:lnRef>
+          <a:fillRef idx="0">
+            <a:schemeClr val="accent1"/>
+          </a:fillRef>
+          <a:effectRef idx="1">
+            <a:schemeClr val="accent1"/>
+          </a:effectRef>
+          <a:fontRef idx="minor">
+            <a:schemeClr val="tx1"/>
+          </a:fontRef>
+        </p:style>
+      </p:cxnSp>
+      <p:cxnSp>
+        <p:nvCxnSpPr>
+          <p:cNvPr id="39" name="Straight Arrow Connector 38">
+            <a:extLst>
+              <a:ext uri="{FF2B5EF4-FFF2-40B4-BE49-F238E27FC236}">
+                <a16:creationId xmlns:a16="http://schemas.microsoft.com/office/drawing/2014/main" id="{EFC9E4D5-9A27-41B0-A6B7-325376A8EEA9}"/>
+              </a:ext>
+            </a:extLst>
+          </p:cNvPr>
+          <p:cNvCxnSpPr>
+            <a:cxnSpLocks/>
+            <a:stCxn id="11" idx="2"/>
+            <a:endCxn id="13" idx="0"/>
+          </p:cNvCxnSpPr>
+          <p:nvPr/>
+        </p:nvCxnSpPr>
+        <p:spPr>
+          <a:xfrm>
+            <a:off x="2579515" y="2444380"/>
+            <a:ext cx="0" cy="327610"/>
+          </a:xfrm>
+          <a:prstGeom prst="straightConnector1">
+            <a:avLst/>
+          </a:prstGeom>
+          <a:ln>
+            <a:solidFill>
+              <a:schemeClr val="tx1"/>
+            </a:solidFill>
+            <a:prstDash val="solid"/>
+            <a:headEnd type="none" w="lg" len="lg"/>
+            <a:tailEnd type="triangle" w="lg" len="lg"/>
+          </a:ln>
+        </p:spPr>
+        <p:style>
+          <a:lnRef idx="2">
+            <a:schemeClr val="accent1"/>
+          </a:lnRef>
+          <a:fillRef idx="0">
+            <a:schemeClr val="accent1"/>
+          </a:fillRef>
+          <a:effectRef idx="1">
+            <a:schemeClr val="accent1"/>
+          </a:effectRef>
+          <a:fontRef idx="minor">
+            <a:schemeClr val="tx1"/>
+          </a:fontRef>
+        </p:style>
+      </p:cxnSp>
+      <p:cxnSp>
+        <p:nvCxnSpPr>
+          <p:cNvPr id="42" name="Straight Arrow Connector 41">
+            <a:extLst>
+              <a:ext uri="{FF2B5EF4-FFF2-40B4-BE49-F238E27FC236}">
+                <a16:creationId xmlns:a16="http://schemas.microsoft.com/office/drawing/2014/main" id="{B5EE7C03-9562-EF4D-00EA-CB265A4C9AB9}"/>
+              </a:ext>
+            </a:extLst>
+          </p:cNvPr>
+          <p:cNvCxnSpPr>
+            <a:cxnSpLocks/>
+            <a:stCxn id="13" idx="2"/>
+            <a:endCxn id="12" idx="0"/>
+          </p:cNvCxnSpPr>
+          <p:nvPr/>
+        </p:nvCxnSpPr>
+        <p:spPr>
+          <a:xfrm>
+            <a:off x="2579515" y="3638884"/>
+            <a:ext cx="0" cy="327609"/>
+          </a:xfrm>
+          <a:prstGeom prst="straightConnector1">
+            <a:avLst/>
+          </a:prstGeom>
+          <a:ln>
+            <a:solidFill>
+              <a:schemeClr val="tx1"/>
+            </a:solidFill>
+            <a:prstDash val="solid"/>
+            <a:headEnd type="none" w="lg" len="lg"/>
+            <a:tailEnd type="triangle" w="lg" len="lg"/>
+          </a:ln>
+        </p:spPr>
+        <p:style>
+          <a:lnRef idx="2">
+            <a:schemeClr val="accent1"/>
+          </a:lnRef>
+          <a:fillRef idx="0">
+            <a:schemeClr val="accent1"/>
+          </a:fillRef>
+          <a:effectRef idx="1">
+            <a:schemeClr val="accent1"/>
+          </a:effectRef>
+          <a:fontRef idx="minor">
+            <a:schemeClr val="tx1"/>
+          </a:fontRef>
+        </p:style>
+      </p:cxnSp>
+      <p:cxnSp>
+        <p:nvCxnSpPr>
+          <p:cNvPr id="45" name="Straight Arrow Connector 44">
+            <a:extLst>
+              <a:ext uri="{FF2B5EF4-FFF2-40B4-BE49-F238E27FC236}">
+                <a16:creationId xmlns:a16="http://schemas.microsoft.com/office/drawing/2014/main" id="{4025382F-8D45-D2AE-35A9-8B1AFA651182}"/>
+              </a:ext>
+            </a:extLst>
+          </p:cNvPr>
+          <p:cNvCxnSpPr>
+            <a:cxnSpLocks/>
+            <a:stCxn id="12" idx="2"/>
+            <a:endCxn id="3" idx="0"/>
+          </p:cNvCxnSpPr>
+          <p:nvPr/>
+        </p:nvCxnSpPr>
+        <p:spPr>
+          <a:xfrm>
+            <a:off x="2579515" y="4833387"/>
+            <a:ext cx="4915" cy="327610"/>
+          </a:xfrm>
+          <a:prstGeom prst="straightConnector1">
+            <a:avLst/>
+          </a:prstGeom>
+          <a:ln>
+            <a:solidFill>
+              <a:schemeClr val="tx1"/>
+            </a:solidFill>
+            <a:prstDash val="solid"/>
+            <a:headEnd type="none" w="lg" len="lg"/>
+            <a:tailEnd type="triangle" w="lg" len="lg"/>
+          </a:ln>
+        </p:spPr>
+        <p:style>
+          <a:lnRef idx="2">
+            <a:schemeClr val="accent1"/>
+          </a:lnRef>
+          <a:fillRef idx="0">
+            <a:schemeClr val="accent1"/>
+          </a:fillRef>
+          <a:effectRef idx="1">
+            <a:schemeClr val="accent1"/>
+          </a:effectRef>
+          <a:fontRef idx="minor">
+            <a:schemeClr val="tx1"/>
+          </a:fontRef>
+        </p:style>
+      </p:cxnSp>
+      <p:sp>
+        <p:nvSpPr>
+          <p:cNvPr id="48" name="TextBox 47">
+            <a:extLst>
+              <a:ext uri="{FF2B5EF4-FFF2-40B4-BE49-F238E27FC236}">
+                <a16:creationId xmlns:a16="http://schemas.microsoft.com/office/drawing/2014/main" id="{FD068019-47A3-33D3-84C8-9F7C60B24399}"/>
+              </a:ext>
+            </a:extLst>
+          </p:cNvPr>
+          <p:cNvSpPr txBox="1"/>
+          <p:nvPr/>
+        </p:nvSpPr>
+        <p:spPr>
+          <a:xfrm>
+            <a:off x="6479406" y="3355943"/>
+            <a:ext cx="366639" cy="276999"/>
+          </a:xfrm>
+          <a:prstGeom prst="rect">
+            <a:avLst/>
+          </a:prstGeom>
+          <a:noFill/>
+        </p:spPr>
+        <p:txBody>
+          <a:bodyPr wrap="none" rtlCol="0">
+            <a:spAutoFit/>
+          </a:bodyPr>
+          <a:lstStyle/>
+          <a:p>
+            <a:pPr algn="ctr"/>
+            <a:r>
+              <a:rPr lang="en-US" sz="1200" dirty="0"/>
+              <a:t>yes</a:t>
+            </a:r>
+          </a:p>
+        </p:txBody>
+      </p:sp>
+      <p:sp>
+        <p:nvSpPr>
+          <p:cNvPr id="49" name="TextBox 48">
+            <a:extLst>
+              <a:ext uri="{FF2B5EF4-FFF2-40B4-BE49-F238E27FC236}">
+                <a16:creationId xmlns:a16="http://schemas.microsoft.com/office/drawing/2014/main" id="{CD2AEDFC-0FEB-1CDF-3F9F-2B7FB5A2FC99}"/>
+              </a:ext>
+            </a:extLst>
+          </p:cNvPr>
+          <p:cNvSpPr txBox="1"/>
+          <p:nvPr/>
+        </p:nvSpPr>
+        <p:spPr>
+          <a:xfrm>
+            <a:off x="5386865" y="3355943"/>
+            <a:ext cx="325731" cy="276999"/>
+          </a:xfrm>
+          <a:prstGeom prst="rect">
+            <a:avLst/>
+          </a:prstGeom>
+          <a:noFill/>
+        </p:spPr>
+        <p:txBody>
+          <a:bodyPr wrap="none" rtlCol="0">
+            <a:spAutoFit/>
+          </a:bodyPr>
+          <a:lstStyle/>
+          <a:p>
+            <a:pPr algn="ctr"/>
+            <a:r>
+              <a:rPr lang="en-US" sz="1200" dirty="0"/>
+              <a:t>no</a:t>
+            </a:r>
+          </a:p>
+        </p:txBody>
+      </p:sp>
+      <p:cxnSp>
+        <p:nvCxnSpPr>
+          <p:cNvPr id="53" name="Straight Arrow Connector 52">
+            <a:extLst>
+              <a:ext uri="{FF2B5EF4-FFF2-40B4-BE49-F238E27FC236}">
+                <a16:creationId xmlns:a16="http://schemas.microsoft.com/office/drawing/2014/main" id="{7294098A-677B-10E2-34C5-5C1BE2219448}"/>
+              </a:ext>
+            </a:extLst>
+          </p:cNvPr>
+          <p:cNvCxnSpPr>
+            <a:cxnSpLocks/>
+          </p:cNvCxnSpPr>
+          <p:nvPr/>
+        </p:nvCxnSpPr>
+        <p:spPr>
+          <a:xfrm>
+            <a:off x="5700145" y="3428997"/>
+            <a:ext cx="0" cy="1726058"/>
+          </a:xfrm>
+          <a:prstGeom prst="straightConnector1">
+            <a:avLst/>
+          </a:prstGeom>
+          <a:ln>
+            <a:solidFill>
+              <a:schemeClr val="tx1"/>
+            </a:solidFill>
+            <a:prstDash val="solid"/>
+            <a:headEnd type="none" w="lg" len="lg"/>
+            <a:tailEnd type="triangle" w="lg" len="lg"/>
+          </a:ln>
+        </p:spPr>
+        <p:style>
+          <a:lnRef idx="2">
+            <a:schemeClr val="accent1"/>
+          </a:lnRef>
+          <a:fillRef idx="0">
+            <a:schemeClr val="accent1"/>
+          </a:fillRef>
+          <a:effectRef idx="1">
+            <a:schemeClr val="accent1"/>
+          </a:effectRef>
+          <a:fontRef idx="minor">
+            <a:schemeClr val="tx1"/>
+          </a:fontRef>
+        </p:style>
+      </p:cxnSp>
+      <p:cxnSp>
+        <p:nvCxnSpPr>
+          <p:cNvPr id="55" name="Straight Arrow Connector 54">
+            <a:extLst>
+              <a:ext uri="{FF2B5EF4-FFF2-40B4-BE49-F238E27FC236}">
+                <a16:creationId xmlns:a16="http://schemas.microsoft.com/office/drawing/2014/main" id="{E89C40B7-FA41-0814-7C87-B0B00357906E}"/>
+              </a:ext>
+            </a:extLst>
+          </p:cNvPr>
+          <p:cNvCxnSpPr>
+            <a:cxnSpLocks/>
+            <a:stCxn id="28" idx="2"/>
+          </p:cNvCxnSpPr>
+          <p:nvPr/>
+        </p:nvCxnSpPr>
+        <p:spPr>
+          <a:xfrm flipH="1">
+            <a:off x="6765625" y="4877837"/>
+            <a:ext cx="1" cy="277218"/>
+          </a:xfrm>
+          <a:prstGeom prst="straightConnector1">
+            <a:avLst/>
+          </a:prstGeom>
+          <a:ln>
+            <a:solidFill>
+              <a:schemeClr val="tx1"/>
+            </a:solidFill>
+            <a:prstDash val="solid"/>
+            <a:headEnd type="none" w="lg" len="lg"/>
+            <a:tailEnd type="triangle" w="lg" len="lg"/>
+          </a:ln>
+        </p:spPr>
+        <p:style>
+          <a:lnRef idx="2">
+            <a:schemeClr val="accent1"/>
+          </a:lnRef>
+          <a:fillRef idx="0">
+            <a:schemeClr val="accent1"/>
+          </a:fillRef>
+          <a:effectRef idx="1">
+            <a:schemeClr val="accent1"/>
+          </a:effectRef>
+          <a:fontRef idx="minor">
+            <a:schemeClr val="tx1"/>
+          </a:fontRef>
+        </p:style>
+      </p:cxnSp>
+      <p:sp>
+        <p:nvSpPr>
+          <p:cNvPr id="15" name="Flowchart: Decision 14">
+            <a:extLst>
+              <a:ext uri="{FF2B5EF4-FFF2-40B4-BE49-F238E27FC236}">
+                <a16:creationId xmlns:a16="http://schemas.microsoft.com/office/drawing/2014/main" id="{9F808D75-E976-70B5-1E8C-92954997F27F}"/>
+              </a:ext>
+            </a:extLst>
+          </p:cNvPr>
+          <p:cNvSpPr/>
+          <p:nvPr/>
+        </p:nvSpPr>
+        <p:spPr>
+          <a:xfrm>
+            <a:off x="5231894" y="2771990"/>
+            <a:ext cx="1723296" cy="866894"/>
+          </a:xfrm>
+          <a:prstGeom prst="flowChartDecision">
+            <a:avLst/>
+          </a:prstGeom>
+          <a:solidFill>
+            <a:srgbClr val="E5F1F8"/>
+          </a:solidFill>
+          <a:ln>
+            <a:solidFill>
+              <a:schemeClr val="tx1"/>
+            </a:solidFill>
+          </a:ln>
+        </p:spPr>
+        <p:style>
+          <a:lnRef idx="2">
+            <a:schemeClr val="accent1">
+              <a:shade val="15000"/>
+            </a:schemeClr>
+          </a:lnRef>
+          <a:fillRef idx="1">
+            <a:schemeClr val="accent1"/>
+          </a:fillRef>
+          <a:effectRef idx="0">
+            <a:schemeClr val="accent1"/>
+          </a:effectRef>
+          <a:fontRef idx="minor">
+            <a:schemeClr val="lt1"/>
+          </a:fontRef>
+        </p:style>
+        <p:txBody>
+          <a:bodyPr rtlCol="0" anchor="ctr"/>
+          <a:lstStyle/>
+          <a:p>
+            <a:pPr algn="ctr"/>
+            <a:r>
+              <a:rPr lang="en-US" dirty="0">
+                <a:solidFill>
+                  <a:schemeClr val="tx1"/>
+                </a:solidFill>
+              </a:rPr>
+              <a:t>Review?</a:t>
+            </a:r>
+          </a:p>
+        </p:txBody>
+      </p:sp>
+      <p:sp>
+        <p:nvSpPr>
+          <p:cNvPr id="60" name="Rectangle: Rounded Corners 59">
+            <a:extLst>
+              <a:ext uri="{FF2B5EF4-FFF2-40B4-BE49-F238E27FC236}">
+                <a16:creationId xmlns:a16="http://schemas.microsoft.com/office/drawing/2014/main" id="{C0F91184-A0B5-338B-04D3-73E6BC57562B}"/>
+              </a:ext>
+            </a:extLst>
+          </p:cNvPr>
+          <p:cNvSpPr/>
+          <p:nvPr/>
+        </p:nvSpPr>
+        <p:spPr>
+          <a:xfrm>
+            <a:off x="8317107" y="2947785"/>
+            <a:ext cx="792503" cy="685157"/>
+          </a:xfrm>
+          <a:prstGeom prst="roundRect">
+            <a:avLst/>
+          </a:prstGeom>
+          <a:solidFill>
+            <a:srgbClr val="E5F1F8"/>
+          </a:solidFill>
+          <a:ln>
+            <a:solidFill>
+              <a:schemeClr val="tx1"/>
+            </a:solidFill>
+          </a:ln>
+        </p:spPr>
+        <p:style>
+          <a:lnRef idx="2">
+            <a:schemeClr val="accent1">
+              <a:shade val="15000"/>
+            </a:schemeClr>
+          </a:lnRef>
+          <a:fillRef idx="1">
+            <a:schemeClr val="accent1"/>
+          </a:fillRef>
+          <a:effectRef idx="0">
+            <a:schemeClr val="accent1"/>
+          </a:effectRef>
+          <a:fontRef idx="minor">
+            <a:schemeClr val="lt1"/>
+          </a:fontRef>
+        </p:style>
+        <p:txBody>
+          <a:bodyPr rtlCol="0" anchor="ctr"/>
+          <a:lstStyle/>
+          <a:p>
+            <a:pPr algn="ctr"/>
+            <a:r>
+              <a:rPr lang="en-US" dirty="0">
+                <a:solidFill>
+                  <a:schemeClr val="tx1"/>
+                </a:solidFill>
+              </a:rPr>
+              <a:t>Expert A</a:t>
+            </a:r>
+            <a:endParaRPr lang="en-US" sz="1200" dirty="0">
+              <a:solidFill>
+                <a:schemeClr val="tx1"/>
+              </a:solidFill>
+            </a:endParaRPr>
+          </a:p>
+        </p:txBody>
+      </p:sp>
+      <p:sp>
+        <p:nvSpPr>
+          <p:cNvPr id="61" name="Rectangle: Rounded Corners 60">
+            <a:extLst>
+              <a:ext uri="{FF2B5EF4-FFF2-40B4-BE49-F238E27FC236}">
+                <a16:creationId xmlns:a16="http://schemas.microsoft.com/office/drawing/2014/main" id="{AB01557F-ABD2-BE16-968B-EB3184C63AF1}"/>
+              </a:ext>
+            </a:extLst>
+          </p:cNvPr>
+          <p:cNvSpPr/>
+          <p:nvPr/>
+        </p:nvSpPr>
+        <p:spPr>
+          <a:xfrm>
+            <a:off x="9211317" y="2947785"/>
+            <a:ext cx="792503" cy="685157"/>
+          </a:xfrm>
+          <a:prstGeom prst="roundRect">
+            <a:avLst/>
+          </a:prstGeom>
+          <a:solidFill>
+            <a:srgbClr val="E5F1F8"/>
+          </a:solidFill>
+          <a:ln>
+            <a:solidFill>
+              <a:schemeClr val="tx1"/>
+            </a:solidFill>
+          </a:ln>
+        </p:spPr>
+        <p:style>
+          <a:lnRef idx="2">
+            <a:schemeClr val="accent1">
+              <a:shade val="15000"/>
+            </a:schemeClr>
+          </a:lnRef>
+          <a:fillRef idx="1">
+            <a:schemeClr val="accent1"/>
+          </a:fillRef>
+          <a:effectRef idx="0">
+            <a:schemeClr val="accent1"/>
+          </a:effectRef>
+          <a:fontRef idx="minor">
+            <a:schemeClr val="lt1"/>
+          </a:fontRef>
+        </p:style>
+        <p:txBody>
+          <a:bodyPr rtlCol="0" anchor="ctr"/>
+          <a:lstStyle/>
+          <a:p>
+            <a:pPr algn="ctr"/>
+            <a:r>
+              <a:rPr lang="en-US" dirty="0">
+                <a:solidFill>
+                  <a:schemeClr val="tx1"/>
+                </a:solidFill>
+              </a:rPr>
+              <a:t>Expert B</a:t>
+            </a:r>
+            <a:endParaRPr lang="en-US" sz="1200" dirty="0">
+              <a:solidFill>
+                <a:schemeClr val="tx1"/>
+              </a:solidFill>
+            </a:endParaRPr>
+          </a:p>
+        </p:txBody>
+      </p:sp>
+      <p:sp>
+        <p:nvSpPr>
+          <p:cNvPr id="62" name="Rectangle: Rounded Corners 61">
+            <a:extLst>
+              <a:ext uri="{FF2B5EF4-FFF2-40B4-BE49-F238E27FC236}">
+                <a16:creationId xmlns:a16="http://schemas.microsoft.com/office/drawing/2014/main" id="{88F63535-DF4C-4B17-E76D-AF2692CD0174}"/>
+              </a:ext>
+            </a:extLst>
+          </p:cNvPr>
+          <p:cNvSpPr/>
+          <p:nvPr/>
+        </p:nvSpPr>
+        <p:spPr>
+          <a:xfrm>
+            <a:off x="10105530" y="2947785"/>
+            <a:ext cx="792503" cy="685157"/>
+          </a:xfrm>
+          <a:prstGeom prst="roundRect">
+            <a:avLst/>
+          </a:prstGeom>
+          <a:solidFill>
+            <a:srgbClr val="E5F1F8"/>
+          </a:solidFill>
+          <a:ln>
+            <a:solidFill>
+              <a:schemeClr val="tx1"/>
+            </a:solidFill>
+          </a:ln>
+        </p:spPr>
+        <p:style>
+          <a:lnRef idx="2">
+            <a:schemeClr val="accent1">
+              <a:shade val="15000"/>
+            </a:schemeClr>
+          </a:lnRef>
+          <a:fillRef idx="1">
+            <a:schemeClr val="accent1"/>
+          </a:fillRef>
+          <a:effectRef idx="0">
+            <a:schemeClr val="accent1"/>
+          </a:effectRef>
+          <a:fontRef idx="minor">
+            <a:schemeClr val="lt1"/>
+          </a:fontRef>
+        </p:style>
+        <p:txBody>
+          <a:bodyPr rtlCol="0" anchor="ctr"/>
+          <a:lstStyle/>
+          <a:p>
+            <a:pPr algn="ctr"/>
+            <a:r>
+              <a:rPr lang="en-US" dirty="0">
+                <a:solidFill>
+                  <a:schemeClr val="tx1"/>
+                </a:solidFill>
+              </a:rPr>
+              <a:t>Expert C</a:t>
+            </a:r>
+            <a:endParaRPr lang="en-US" sz="1200" dirty="0">
+              <a:solidFill>
+                <a:schemeClr val="tx1"/>
+              </a:solidFill>
+            </a:endParaRPr>
+          </a:p>
+        </p:txBody>
+      </p:sp>
+      <p:cxnSp>
+        <p:nvCxnSpPr>
+          <p:cNvPr id="63" name="Straight Arrow Connector 62">
+            <a:extLst>
+              <a:ext uri="{FF2B5EF4-FFF2-40B4-BE49-F238E27FC236}">
+                <a16:creationId xmlns:a16="http://schemas.microsoft.com/office/drawing/2014/main" id="{C1F33F15-6730-7F83-7184-1EFFB0E840B2}"/>
+              </a:ext>
+            </a:extLst>
+          </p:cNvPr>
+          <p:cNvCxnSpPr>
+            <a:cxnSpLocks/>
+            <a:stCxn id="14" idx="2"/>
+            <a:endCxn id="61" idx="0"/>
+          </p:cNvCxnSpPr>
+          <p:nvPr/>
+        </p:nvCxnSpPr>
+        <p:spPr>
+          <a:xfrm>
+            <a:off x="9607569" y="2444380"/>
+            <a:ext cx="0" cy="503405"/>
+          </a:xfrm>
+          <a:prstGeom prst="straightConnector1">
+            <a:avLst/>
+          </a:prstGeom>
+          <a:ln>
+            <a:solidFill>
+              <a:schemeClr val="tx1"/>
+            </a:solidFill>
+            <a:prstDash val="solid"/>
+            <a:headEnd type="none" w="lg" len="lg"/>
+            <a:tailEnd type="triangle" w="lg" len="lg"/>
+          </a:ln>
+        </p:spPr>
+        <p:style>
+          <a:lnRef idx="2">
+            <a:schemeClr val="accent1"/>
+          </a:lnRef>
+          <a:fillRef idx="0">
+            <a:schemeClr val="accent1"/>
+          </a:fillRef>
+          <a:effectRef idx="1">
+            <a:schemeClr val="accent1"/>
+          </a:effectRef>
+          <a:fontRef idx="minor">
+            <a:schemeClr val="tx1"/>
+          </a:fontRef>
+        </p:style>
+      </p:cxnSp>
+      <p:cxnSp>
+        <p:nvCxnSpPr>
+          <p:cNvPr id="66" name="Straight Arrow Connector 65">
+            <a:extLst>
+              <a:ext uri="{FF2B5EF4-FFF2-40B4-BE49-F238E27FC236}">
+                <a16:creationId xmlns:a16="http://schemas.microsoft.com/office/drawing/2014/main" id="{A4BA7FA0-175B-997D-9DFD-C48975209D2D}"/>
+              </a:ext>
+            </a:extLst>
+          </p:cNvPr>
+          <p:cNvCxnSpPr>
+            <a:cxnSpLocks/>
+            <a:stCxn id="6" idx="2"/>
+            <a:endCxn id="14" idx="0"/>
+          </p:cNvCxnSpPr>
+          <p:nvPr/>
+        </p:nvCxnSpPr>
+        <p:spPr>
+          <a:xfrm flipH="1">
+            <a:off x="9607569" y="1247424"/>
+            <a:ext cx="2" cy="330062"/>
+          </a:xfrm>
+          <a:prstGeom prst="straightConnector1">
+            <a:avLst/>
+          </a:prstGeom>
+          <a:ln>
+            <a:solidFill>
+              <a:schemeClr val="tx1"/>
+            </a:solidFill>
+            <a:prstDash val="solid"/>
+            <a:headEnd type="none" w="lg" len="lg"/>
+            <a:tailEnd type="triangle" w="lg" len="lg"/>
+          </a:ln>
+        </p:spPr>
+        <p:style>
+          <a:lnRef idx="2">
+            <a:schemeClr val="accent1"/>
+          </a:lnRef>
+          <a:fillRef idx="0">
+            <a:schemeClr val="accent1"/>
+          </a:fillRef>
+          <a:effectRef idx="1">
+            <a:schemeClr val="accent1"/>
+          </a:effectRef>
+          <a:fontRef idx="minor">
+            <a:schemeClr val="tx1"/>
+          </a:fontRef>
+        </p:style>
+      </p:cxnSp>
+      <p:cxnSp>
+        <p:nvCxnSpPr>
+          <p:cNvPr id="69" name="Connector: Elbow 68">
+            <a:extLst>
+              <a:ext uri="{FF2B5EF4-FFF2-40B4-BE49-F238E27FC236}">
+                <a16:creationId xmlns:a16="http://schemas.microsoft.com/office/drawing/2014/main" id="{C712FCF4-FA2C-A1B7-F6E3-C494DB41694C}"/>
+              </a:ext>
+            </a:extLst>
+          </p:cNvPr>
+          <p:cNvCxnSpPr>
+            <a:cxnSpLocks/>
+            <a:stCxn id="14" idx="2"/>
+            <a:endCxn id="60" idx="0"/>
+          </p:cNvCxnSpPr>
+          <p:nvPr/>
+        </p:nvCxnSpPr>
+        <p:spPr>
+          <a:xfrm rot="5400000">
+            <a:off x="8908762" y="2248977"/>
+            <a:ext cx="503405" cy="894210"/>
+          </a:xfrm>
+          <a:prstGeom prst="bentConnector3">
+            <a:avLst>
+              <a:gd name="adj1" fmla="val 50000"/>
+            </a:avLst>
+          </a:prstGeom>
+          <a:ln>
+            <a:solidFill>
+              <a:schemeClr val="tx1"/>
+            </a:solidFill>
+            <a:prstDash val="solid"/>
+            <a:headEnd type="none" w="lg" len="lg"/>
+            <a:tailEnd type="triangle" w="lg" len="lg"/>
+          </a:ln>
+        </p:spPr>
+        <p:style>
+          <a:lnRef idx="2">
+            <a:schemeClr val="accent1"/>
+          </a:lnRef>
+          <a:fillRef idx="0">
+            <a:schemeClr val="accent1"/>
+          </a:fillRef>
+          <a:effectRef idx="1">
+            <a:schemeClr val="accent1"/>
+          </a:effectRef>
+          <a:fontRef idx="minor">
+            <a:schemeClr val="tx1"/>
+          </a:fontRef>
+        </p:style>
+      </p:cxnSp>
+      <p:cxnSp>
+        <p:nvCxnSpPr>
+          <p:cNvPr id="72" name="Connector: Elbow 71">
+            <a:extLst>
+              <a:ext uri="{FF2B5EF4-FFF2-40B4-BE49-F238E27FC236}">
+                <a16:creationId xmlns:a16="http://schemas.microsoft.com/office/drawing/2014/main" id="{B6BE40E8-80D9-F923-B31B-4EB673E02EF8}"/>
+              </a:ext>
+            </a:extLst>
+          </p:cNvPr>
+          <p:cNvCxnSpPr>
+            <a:cxnSpLocks/>
+            <a:stCxn id="14" idx="2"/>
+            <a:endCxn id="62" idx="0"/>
+          </p:cNvCxnSpPr>
+          <p:nvPr/>
+        </p:nvCxnSpPr>
+        <p:spPr>
+          <a:xfrm rot="16200000" flipH="1">
+            <a:off x="9802973" y="2248975"/>
+            <a:ext cx="503405" cy="894213"/>
+          </a:xfrm>
+          <a:prstGeom prst="bentConnector3">
+            <a:avLst>
+              <a:gd name="adj1" fmla="val 50000"/>
+            </a:avLst>
+          </a:prstGeom>
+          <a:ln>
+            <a:solidFill>
+              <a:schemeClr val="tx1"/>
+            </a:solidFill>
+            <a:prstDash val="solid"/>
+            <a:headEnd type="none" w="lg" len="lg"/>
+            <a:tailEnd type="triangle" w="lg" len="lg"/>
+          </a:ln>
+        </p:spPr>
+        <p:style>
+          <a:lnRef idx="2">
+            <a:schemeClr val="accent1"/>
+          </a:lnRef>
+          <a:fillRef idx="0">
+            <a:schemeClr val="accent1"/>
+          </a:fillRef>
+          <a:effectRef idx="1">
+            <a:schemeClr val="accent1"/>
+          </a:effectRef>
+          <a:fontRef idx="minor">
+            <a:schemeClr val="tx1"/>
+          </a:fontRef>
+        </p:style>
+      </p:cxnSp>
+      <p:cxnSp>
+        <p:nvCxnSpPr>
+          <p:cNvPr id="75" name="Connector: Elbow 74">
+            <a:extLst>
+              <a:ext uri="{FF2B5EF4-FFF2-40B4-BE49-F238E27FC236}">
+                <a16:creationId xmlns:a16="http://schemas.microsoft.com/office/drawing/2014/main" id="{3F73E562-451E-ACE6-539E-D86109028F4E}"/>
+              </a:ext>
+            </a:extLst>
+          </p:cNvPr>
+          <p:cNvCxnSpPr>
+            <a:cxnSpLocks/>
+            <a:stCxn id="60" idx="2"/>
+            <a:endCxn id="7" idx="0"/>
+          </p:cNvCxnSpPr>
+          <p:nvPr/>
+        </p:nvCxnSpPr>
+        <p:spPr>
+          <a:xfrm rot="16200000" flipH="1">
+            <a:off x="8396438" y="3949863"/>
+            <a:ext cx="1528055" cy="894212"/>
+          </a:xfrm>
+          <a:prstGeom prst="bentConnector3">
+            <a:avLst>
+              <a:gd name="adj1" fmla="val 50000"/>
+            </a:avLst>
+          </a:prstGeom>
+          <a:ln>
+            <a:solidFill>
+              <a:schemeClr val="tx1"/>
+            </a:solidFill>
+            <a:prstDash val="solid"/>
+            <a:headEnd type="none" w="lg" len="lg"/>
+            <a:tailEnd type="triangle" w="lg" len="lg"/>
+          </a:ln>
+        </p:spPr>
+        <p:style>
+          <a:lnRef idx="2">
+            <a:schemeClr val="accent1"/>
+          </a:lnRef>
+          <a:fillRef idx="0">
+            <a:schemeClr val="accent1"/>
+          </a:fillRef>
+          <a:effectRef idx="1">
+            <a:schemeClr val="accent1"/>
+          </a:effectRef>
+          <a:fontRef idx="minor">
+            <a:schemeClr val="tx1"/>
+          </a:fontRef>
+        </p:style>
+      </p:cxnSp>
+      <p:cxnSp>
+        <p:nvCxnSpPr>
+          <p:cNvPr id="78" name="Connector: Elbow 77">
+            <a:extLst>
+              <a:ext uri="{FF2B5EF4-FFF2-40B4-BE49-F238E27FC236}">
+                <a16:creationId xmlns:a16="http://schemas.microsoft.com/office/drawing/2014/main" id="{DE881DF3-FDE1-E2F0-A9A6-2EF92D0A6A22}"/>
+              </a:ext>
+            </a:extLst>
+          </p:cNvPr>
+          <p:cNvCxnSpPr>
+            <a:cxnSpLocks/>
+            <a:stCxn id="62" idx="2"/>
+            <a:endCxn id="7" idx="0"/>
+          </p:cNvCxnSpPr>
+          <p:nvPr/>
+        </p:nvCxnSpPr>
+        <p:spPr>
+          <a:xfrm rot="5400000">
+            <a:off x="9290650" y="3949864"/>
+            <a:ext cx="1528055" cy="894211"/>
+          </a:xfrm>
+          <a:prstGeom prst="bentConnector3">
+            <a:avLst>
+              <a:gd name="adj1" fmla="val 50000"/>
+            </a:avLst>
+          </a:prstGeom>
+          <a:ln>
+            <a:solidFill>
+              <a:schemeClr val="tx1"/>
+            </a:solidFill>
+            <a:prstDash val="solid"/>
+            <a:headEnd type="none" w="lg" len="lg"/>
+            <a:tailEnd type="triangle" w="lg" len="lg"/>
+          </a:ln>
+        </p:spPr>
+        <p:style>
+          <a:lnRef idx="2">
+            <a:schemeClr val="accent1"/>
+          </a:lnRef>
+          <a:fillRef idx="0">
+            <a:schemeClr val="accent1"/>
+          </a:fillRef>
+          <a:effectRef idx="1">
+            <a:schemeClr val="accent1"/>
+          </a:effectRef>
+          <a:fontRef idx="minor">
+            <a:schemeClr val="tx1"/>
+          </a:fontRef>
+        </p:style>
+      </p:cxnSp>
+      <p:cxnSp>
+        <p:nvCxnSpPr>
+          <p:cNvPr id="81" name="Straight Arrow Connector 80">
+            <a:extLst>
+              <a:ext uri="{FF2B5EF4-FFF2-40B4-BE49-F238E27FC236}">
+                <a16:creationId xmlns:a16="http://schemas.microsoft.com/office/drawing/2014/main" id="{457C5348-A8B7-BB09-4C4A-BB5E1799E7CD}"/>
+              </a:ext>
+            </a:extLst>
+          </p:cNvPr>
+          <p:cNvCxnSpPr>
+            <a:cxnSpLocks/>
+            <a:stCxn id="61" idx="2"/>
+            <a:endCxn id="7" idx="0"/>
+          </p:cNvCxnSpPr>
+          <p:nvPr/>
+        </p:nvCxnSpPr>
+        <p:spPr>
+          <a:xfrm>
+            <a:off x="9607569" y="3632942"/>
+            <a:ext cx="2" cy="1528055"/>
+          </a:xfrm>
+          <a:prstGeom prst="straightConnector1">
+            <a:avLst/>
+          </a:prstGeom>
+          <a:ln>
+            <a:solidFill>
+              <a:schemeClr val="tx1"/>
+            </a:solidFill>
+            <a:prstDash val="solid"/>
+            <a:headEnd type="none" w="lg" len="lg"/>
+            <a:tailEnd type="triangle" w="lg" len="lg"/>
+          </a:ln>
+        </p:spPr>
+        <p:style>
+          <a:lnRef idx="2">
+            <a:schemeClr val="accent1"/>
+          </a:lnRef>
+          <a:fillRef idx="0">
+            <a:schemeClr val="accent1"/>
+          </a:fillRef>
+          <a:effectRef idx="1">
+            <a:schemeClr val="accent1"/>
+          </a:effectRef>
+          <a:fontRef idx="minor">
+            <a:schemeClr val="tx1"/>
+          </a:fontRef>
+        </p:style>
+      </p:cxnSp>
     </p:spTree>
     <p:extLst>
       <p:ext uri="{BB962C8B-B14F-4D97-AF65-F5344CB8AC3E}">
-        <p14:creationId xmlns:p14="http://schemas.microsoft.com/office/powerpoint/2010/main" val="276189202"/>
+        <p14:creationId xmlns:p14="http://schemas.microsoft.com/office/powerpoint/2010/main" val="996512096"/>
       </p:ext>
     </p:extLst>
   </p:cSld>
@@ -8686,162 +10666,6 @@
 </file>
 
 <file path=ppt/slides/slide17.xml><?xml version="1.0" encoding="utf-8"?>
-<p:sld xmlns:a="http://schemas.openxmlformats.org/drawingml/2006/main" xmlns:r="http://schemas.openxmlformats.org/officeDocument/2006/relationships" xmlns:p="http://schemas.openxmlformats.org/presentationml/2006/main">
-  <p:cSld>
-    <p:spTree>
-      <p:nvGrpSpPr>
-        <p:cNvPr id="1" name="">
-          <a:extLst>
-            <a:ext uri="{FF2B5EF4-FFF2-40B4-BE49-F238E27FC236}">
-              <a16:creationId xmlns:a16="http://schemas.microsoft.com/office/drawing/2014/main" id="{677E65E1-5DF3-2FE1-BF1F-36B02D0FEC76}"/>
-            </a:ext>
-          </a:extLst>
-        </p:cNvPr>
-        <p:cNvGrpSpPr/>
-        <p:nvPr/>
-      </p:nvGrpSpPr>
-      <p:grpSpPr>
-        <a:xfrm>
-          <a:off x="0" y="0"/>
-          <a:ext cx="0" cy="0"/>
-          <a:chOff x="0" y="0"/>
-          <a:chExt cx="0" cy="0"/>
-        </a:xfrm>
-      </p:grpSpPr>
-      <p:pic>
-        <p:nvPicPr>
-          <p:cNvPr id="3" name="Picture 2">
-            <a:extLst>
-              <a:ext uri="{FF2B5EF4-FFF2-40B4-BE49-F238E27FC236}">
-                <a16:creationId xmlns:a16="http://schemas.microsoft.com/office/drawing/2014/main" id="{8F0F888E-6C37-17E1-670D-996346E71810}"/>
-              </a:ext>
-            </a:extLst>
-          </p:cNvPr>
-          <p:cNvPicPr>
-            <a:picLocks noChangeAspect="1"/>
-          </p:cNvPicPr>
-          <p:nvPr/>
-        </p:nvPicPr>
-        <p:blipFill>
-          <a:blip r:embed="rId2"/>
-          <a:stretch>
-            <a:fillRect/>
-          </a:stretch>
-        </p:blipFill>
-        <p:spPr>
-          <a:xfrm>
-            <a:off x="0" y="1214427"/>
-            <a:ext cx="12192000" cy="4429145"/>
-          </a:xfrm>
-          <a:prstGeom prst="rect">
-            <a:avLst/>
-          </a:prstGeom>
-        </p:spPr>
-      </p:pic>
-    </p:spTree>
-    <p:extLst>
-      <p:ext uri="{BB962C8B-B14F-4D97-AF65-F5344CB8AC3E}">
-        <p14:creationId xmlns:p14="http://schemas.microsoft.com/office/powerpoint/2010/main" val="3483502725"/>
-      </p:ext>
-    </p:extLst>
-  </p:cSld>
-  <p:clrMapOvr>
-    <a:masterClrMapping/>
-  </p:clrMapOvr>
-</p:sld>
-</file>
-
-<file path=ppt/slides/slide18.xml><?xml version="1.0" encoding="utf-8"?>
-<p:sld xmlns:a="http://schemas.openxmlformats.org/drawingml/2006/main" xmlns:r="http://schemas.openxmlformats.org/officeDocument/2006/relationships" xmlns:p="http://schemas.openxmlformats.org/presentationml/2006/main">
-  <p:cSld>
-    <p:spTree>
-      <p:nvGrpSpPr>
-        <p:cNvPr id="1" name=""/>
-        <p:cNvGrpSpPr/>
-        <p:nvPr/>
-      </p:nvGrpSpPr>
-      <p:grpSpPr>
-        <a:xfrm>
-          <a:off x="0" y="0"/>
-          <a:ext cx="0" cy="0"/>
-          <a:chOff x="0" y="0"/>
-          <a:chExt cx="0" cy="0"/>
-        </a:xfrm>
-      </p:grpSpPr>
-      <p:pic>
-        <p:nvPicPr>
-          <p:cNvPr id="3" name="Picture 2">
-            <a:extLst>
-              <a:ext uri="{FF2B5EF4-FFF2-40B4-BE49-F238E27FC236}">
-                <a16:creationId xmlns:a16="http://schemas.microsoft.com/office/drawing/2014/main" id="{5A667DA2-6815-DE2B-768E-FDE43E3CE7EB}"/>
-              </a:ext>
-            </a:extLst>
-          </p:cNvPr>
-          <p:cNvPicPr>
-            <a:picLocks noChangeAspect="1"/>
-          </p:cNvPicPr>
-          <p:nvPr/>
-        </p:nvPicPr>
-        <p:blipFill>
-          <a:blip r:embed="rId2"/>
-          <a:stretch>
-            <a:fillRect/>
-          </a:stretch>
-        </p:blipFill>
-        <p:spPr>
-          <a:xfrm>
-            <a:off x="0" y="0"/>
-            <a:ext cx="7078980" cy="3865170"/>
-          </a:xfrm>
-          <a:prstGeom prst="rect">
-            <a:avLst/>
-          </a:prstGeom>
-        </p:spPr>
-      </p:pic>
-      <p:pic>
-        <p:nvPicPr>
-          <p:cNvPr id="5" name="Picture 4">
-            <a:extLst>
-              <a:ext uri="{FF2B5EF4-FFF2-40B4-BE49-F238E27FC236}">
-                <a16:creationId xmlns:a16="http://schemas.microsoft.com/office/drawing/2014/main" id="{3B15023E-4451-73EF-7EF8-DE3379C381B6}"/>
-              </a:ext>
-            </a:extLst>
-          </p:cNvPr>
-          <p:cNvPicPr>
-            <a:picLocks noChangeAspect="1"/>
-          </p:cNvPicPr>
-          <p:nvPr/>
-        </p:nvPicPr>
-        <p:blipFill>
-          <a:blip r:embed="rId3"/>
-          <a:stretch>
-            <a:fillRect/>
-          </a:stretch>
-        </p:blipFill>
-        <p:spPr>
-          <a:xfrm>
-            <a:off x="2834640" y="3493186"/>
-            <a:ext cx="9357360" cy="3292055"/>
-          </a:xfrm>
-          <a:prstGeom prst="rect">
-            <a:avLst/>
-          </a:prstGeom>
-        </p:spPr>
-      </p:pic>
-    </p:spTree>
-    <p:extLst>
-      <p:ext uri="{BB962C8B-B14F-4D97-AF65-F5344CB8AC3E}">
-        <p14:creationId xmlns:p14="http://schemas.microsoft.com/office/powerpoint/2010/main" val="1990716002"/>
-      </p:ext>
-    </p:extLst>
-  </p:cSld>
-  <p:clrMapOvr>
-    <a:masterClrMapping/>
-  </p:clrMapOvr>
-</p:sld>
-</file>
-
-<file path=ppt/slides/slide19.xml><?xml version="1.0" encoding="utf-8"?>
 <p:sld xmlns:a="http://schemas.openxmlformats.org/drawingml/2006/main" xmlns:r="http://schemas.openxmlformats.org/officeDocument/2006/relationships" xmlns:p="http://schemas.openxmlformats.org/presentationml/2006/main">
   <p:cSld>
     <p:spTree>
@@ -9834,637 +11658,7 @@
 </p:sld>
 </file>
 
-<file path=ppt/slides/slide2.xml><?xml version="1.0" encoding="utf-8"?>
-<p:sld xmlns:a="http://schemas.openxmlformats.org/drawingml/2006/main" xmlns:r="http://schemas.openxmlformats.org/officeDocument/2006/relationships" xmlns:p="http://schemas.openxmlformats.org/presentationml/2006/main">
-  <p:cSld>
-    <p:spTree>
-      <p:nvGrpSpPr>
-        <p:cNvPr id="1" name=""/>
-        <p:cNvGrpSpPr/>
-        <p:nvPr/>
-      </p:nvGrpSpPr>
-      <p:grpSpPr>
-        <a:xfrm>
-          <a:off x="0" y="0"/>
-          <a:ext cx="0" cy="0"/>
-          <a:chOff x="0" y="0"/>
-          <a:chExt cx="0" cy="0"/>
-        </a:xfrm>
-      </p:grpSpPr>
-      <p:pic>
-        <p:nvPicPr>
-          <p:cNvPr id="2050" name="Picture 2" descr="Diagram showing Foundry resource containing multiple projects, each with deployments and connections.">
-            <a:extLst>
-              <a:ext uri="{FF2B5EF4-FFF2-40B4-BE49-F238E27FC236}">
-                <a16:creationId xmlns:a16="http://schemas.microsoft.com/office/drawing/2014/main" id="{12EEA84E-8776-00EF-5D97-05E8737B61E3}"/>
-              </a:ext>
-            </a:extLst>
-          </p:cNvPr>
-          <p:cNvPicPr>
-            <a:picLocks noChangeAspect="1" noChangeArrowheads="1"/>
-          </p:cNvPicPr>
-          <p:nvPr/>
-        </p:nvPicPr>
-        <p:blipFill>
-          <a:blip r:embed="rId3">
-            <a:clrChange>
-              <a:clrFrom>
-                <a:srgbClr val="FFFFFF"/>
-              </a:clrFrom>
-              <a:clrTo>
-                <a:srgbClr val="FFFFFF">
-                  <a:alpha val="0"/>
-                </a:srgbClr>
-              </a:clrTo>
-            </a:clrChange>
-            <a:extLst>
-              <a:ext uri="{28A0092B-C50C-407E-A947-70E740481C1C}">
-                <a14:useLocalDpi xmlns:a14="http://schemas.microsoft.com/office/drawing/2010/main" val="0"/>
-              </a:ext>
-            </a:extLst>
-          </a:blip>
-          <a:srcRect/>
-          <a:stretch>
-            <a:fillRect/>
-          </a:stretch>
-        </p:blipFill>
-        <p:spPr bwMode="auto">
-          <a:xfrm>
-            <a:off x="6607866" y="3166424"/>
-            <a:ext cx="5524500" cy="3667125"/>
-          </a:xfrm>
-          <a:prstGeom prst="rect">
-            <a:avLst/>
-          </a:prstGeom>
-          <a:noFill/>
-          <a:extLst>
-            <a:ext uri="{909E8E84-426E-40DD-AFC4-6F175D3DCCD1}">
-              <a14:hiddenFill xmlns:a14="http://schemas.microsoft.com/office/drawing/2010/main">
-                <a:solidFill>
-                  <a:srgbClr val="FFFFFF"/>
-                </a:solidFill>
-              </a14:hiddenFill>
-            </a:ext>
-          </a:extLst>
-        </p:spPr>
-      </p:pic>
-      <p:sp>
-        <p:nvSpPr>
-          <p:cNvPr id="4" name="Rectangle: Rounded Corners 3">
-            <a:extLst>
-              <a:ext uri="{FF2B5EF4-FFF2-40B4-BE49-F238E27FC236}">
-                <a16:creationId xmlns:a16="http://schemas.microsoft.com/office/drawing/2014/main" id="{F839DD77-409D-94ED-8A62-6F53CBB88ADD}"/>
-              </a:ext>
-            </a:extLst>
-          </p:cNvPr>
-          <p:cNvSpPr/>
-          <p:nvPr/>
-        </p:nvSpPr>
-        <p:spPr>
-          <a:xfrm>
-            <a:off x="962568" y="732317"/>
-            <a:ext cx="4456090" cy="2434107"/>
-          </a:xfrm>
-          <a:prstGeom prst="roundRect">
-            <a:avLst>
-              <a:gd name="adj" fmla="val 5234"/>
-            </a:avLst>
-          </a:prstGeom>
-          <a:solidFill>
-            <a:schemeClr val="bg1"/>
-          </a:solidFill>
-          <a:ln>
-            <a:solidFill>
-              <a:schemeClr val="tx1"/>
-            </a:solidFill>
-          </a:ln>
-        </p:spPr>
-        <p:style>
-          <a:lnRef idx="2">
-            <a:schemeClr val="accent1">
-              <a:shade val="15000"/>
-            </a:schemeClr>
-          </a:lnRef>
-          <a:fillRef idx="1">
-            <a:schemeClr val="accent1"/>
-          </a:fillRef>
-          <a:effectRef idx="0">
-            <a:schemeClr val="accent1"/>
-          </a:effectRef>
-          <a:fontRef idx="minor">
-            <a:schemeClr val="lt1"/>
-          </a:fontRef>
-        </p:style>
-        <p:txBody>
-          <a:bodyPr rtlCol="0" anchor="t"/>
-          <a:lstStyle/>
-          <a:p>
-            <a:pPr algn="ctr"/>
-            <a:r>
-              <a:rPr lang="en-US" dirty="0">
-                <a:solidFill>
-                  <a:schemeClr val="tx1"/>
-                </a:solidFill>
-              </a:rPr>
-              <a:t>Foundry Resource</a:t>
-            </a:r>
-          </a:p>
-        </p:txBody>
-      </p:sp>
-      <p:sp>
-        <p:nvSpPr>
-          <p:cNvPr id="5" name="Rectangle: Rounded Corners 4">
-            <a:extLst>
-              <a:ext uri="{FF2B5EF4-FFF2-40B4-BE49-F238E27FC236}">
-                <a16:creationId xmlns:a16="http://schemas.microsoft.com/office/drawing/2014/main" id="{CFAF0893-8AEC-1DBB-B036-2949BA0795A0}"/>
-              </a:ext>
-            </a:extLst>
-          </p:cNvPr>
-          <p:cNvSpPr/>
-          <p:nvPr/>
-        </p:nvSpPr>
-        <p:spPr>
-          <a:xfrm>
-            <a:off x="2410311" y="1494888"/>
-            <a:ext cx="1080042" cy="694520"/>
-          </a:xfrm>
-          <a:prstGeom prst="roundRect">
-            <a:avLst/>
-          </a:prstGeom>
-          <a:solidFill>
-            <a:srgbClr val="E5F1F8"/>
-          </a:solidFill>
-          <a:ln>
-            <a:solidFill>
-              <a:schemeClr val="tx1"/>
-            </a:solidFill>
-          </a:ln>
-        </p:spPr>
-        <p:style>
-          <a:lnRef idx="2">
-            <a:schemeClr val="accent1">
-              <a:shade val="15000"/>
-            </a:schemeClr>
-          </a:lnRef>
-          <a:fillRef idx="1">
-            <a:schemeClr val="accent1"/>
-          </a:fillRef>
-          <a:effectRef idx="0">
-            <a:schemeClr val="accent1"/>
-          </a:effectRef>
-          <a:fontRef idx="minor">
-            <a:schemeClr val="lt1"/>
-          </a:fontRef>
-        </p:style>
-        <p:txBody>
-          <a:bodyPr rtlCol="0" anchor="ctr"/>
-          <a:lstStyle/>
-          <a:p>
-            <a:pPr algn="ctr"/>
-            <a:r>
-              <a:rPr lang="en-US" dirty="0">
-                <a:solidFill>
-                  <a:schemeClr val="tx1"/>
-                </a:solidFill>
-              </a:rPr>
-              <a:t>Project</a:t>
-            </a:r>
-          </a:p>
-          <a:p>
-            <a:pPr algn="ctr"/>
-            <a:r>
-              <a:rPr lang="en-US" dirty="0">
-                <a:solidFill>
-                  <a:schemeClr val="tx1"/>
-                </a:solidFill>
-              </a:rPr>
-              <a:t>2</a:t>
-            </a:r>
-          </a:p>
-        </p:txBody>
-      </p:sp>
-      <p:sp>
-        <p:nvSpPr>
-          <p:cNvPr id="6" name="Rectangle: Rounded Corners 5">
-            <a:extLst>
-              <a:ext uri="{FF2B5EF4-FFF2-40B4-BE49-F238E27FC236}">
-                <a16:creationId xmlns:a16="http://schemas.microsoft.com/office/drawing/2014/main" id="{A7E630FB-2D59-D6DB-B847-29F7E0317AFA}"/>
-              </a:ext>
-            </a:extLst>
-          </p:cNvPr>
-          <p:cNvSpPr/>
-          <p:nvPr/>
-        </p:nvSpPr>
-        <p:spPr>
-          <a:xfrm>
-            <a:off x="1183452" y="1494888"/>
-            <a:ext cx="1080042" cy="694520"/>
-          </a:xfrm>
-          <a:prstGeom prst="roundRect">
-            <a:avLst/>
-          </a:prstGeom>
-          <a:solidFill>
-            <a:srgbClr val="E5F1F8"/>
-          </a:solidFill>
-          <a:ln>
-            <a:solidFill>
-              <a:schemeClr val="tx1"/>
-            </a:solidFill>
-          </a:ln>
-        </p:spPr>
-        <p:style>
-          <a:lnRef idx="2">
-            <a:schemeClr val="accent1">
-              <a:shade val="15000"/>
-            </a:schemeClr>
-          </a:lnRef>
-          <a:fillRef idx="1">
-            <a:schemeClr val="accent1"/>
-          </a:fillRef>
-          <a:effectRef idx="0">
-            <a:schemeClr val="accent1"/>
-          </a:effectRef>
-          <a:fontRef idx="minor">
-            <a:schemeClr val="lt1"/>
-          </a:fontRef>
-        </p:style>
-        <p:txBody>
-          <a:bodyPr rtlCol="0" anchor="ctr"/>
-          <a:lstStyle/>
-          <a:p>
-            <a:pPr algn="ctr"/>
-            <a:r>
-              <a:rPr lang="en-US" dirty="0">
-                <a:solidFill>
-                  <a:schemeClr val="tx1"/>
-                </a:solidFill>
-              </a:rPr>
-              <a:t>Project</a:t>
-            </a:r>
-          </a:p>
-          <a:p>
-            <a:pPr algn="ctr"/>
-            <a:r>
-              <a:rPr lang="en-US" dirty="0">
-                <a:solidFill>
-                  <a:schemeClr val="tx1"/>
-                </a:solidFill>
-              </a:rPr>
-              <a:t>1</a:t>
-            </a:r>
-          </a:p>
-        </p:txBody>
-      </p:sp>
-      <p:sp>
-        <p:nvSpPr>
-          <p:cNvPr id="8" name="Rectangle: Rounded Corners 7">
-            <a:extLst>
-              <a:ext uri="{FF2B5EF4-FFF2-40B4-BE49-F238E27FC236}">
-                <a16:creationId xmlns:a16="http://schemas.microsoft.com/office/drawing/2014/main" id="{5E9103F9-368F-E4D0-C17C-BF0F1C74D31A}"/>
-              </a:ext>
-            </a:extLst>
-          </p:cNvPr>
-          <p:cNvSpPr/>
-          <p:nvPr/>
-        </p:nvSpPr>
-        <p:spPr>
-          <a:xfrm>
-            <a:off x="4117733" y="1494888"/>
-            <a:ext cx="1080042" cy="694520"/>
-          </a:xfrm>
-          <a:prstGeom prst="roundRect">
-            <a:avLst/>
-          </a:prstGeom>
-          <a:solidFill>
-            <a:srgbClr val="B2D4EB"/>
-          </a:solidFill>
-          <a:ln>
-            <a:solidFill>
-              <a:schemeClr val="tx1"/>
-            </a:solidFill>
-          </a:ln>
-        </p:spPr>
-        <p:style>
-          <a:lnRef idx="2">
-            <a:schemeClr val="accent1">
-              <a:shade val="15000"/>
-            </a:schemeClr>
-          </a:lnRef>
-          <a:fillRef idx="1">
-            <a:schemeClr val="accent1"/>
-          </a:fillRef>
-          <a:effectRef idx="0">
-            <a:schemeClr val="accent1"/>
-          </a:effectRef>
-          <a:fontRef idx="minor">
-            <a:schemeClr val="lt1"/>
-          </a:fontRef>
-        </p:style>
-        <p:txBody>
-          <a:bodyPr rtlCol="0" anchor="ctr"/>
-          <a:lstStyle/>
-          <a:p>
-            <a:pPr algn="ctr"/>
-            <a:r>
-              <a:rPr lang="en-US" dirty="0">
-                <a:solidFill>
-                  <a:schemeClr val="tx1"/>
-                </a:solidFill>
-              </a:rPr>
-              <a:t>Project</a:t>
-            </a:r>
-          </a:p>
-          <a:p>
-            <a:pPr algn="ctr"/>
-            <a:r>
-              <a:rPr lang="en-US" i="1" dirty="0">
-                <a:solidFill>
-                  <a:schemeClr val="tx1"/>
-                </a:solidFill>
-              </a:rPr>
-              <a:t>n</a:t>
-            </a:r>
-          </a:p>
-        </p:txBody>
-      </p:sp>
-      <p:sp>
-        <p:nvSpPr>
-          <p:cNvPr id="9" name="TextBox 8">
-            <a:extLst>
-              <a:ext uri="{FF2B5EF4-FFF2-40B4-BE49-F238E27FC236}">
-                <a16:creationId xmlns:a16="http://schemas.microsoft.com/office/drawing/2014/main" id="{C992B776-2029-F35D-E69F-FB22F1454014}"/>
-              </a:ext>
-            </a:extLst>
-          </p:cNvPr>
-          <p:cNvSpPr txBox="1"/>
-          <p:nvPr/>
-        </p:nvSpPr>
-        <p:spPr>
-          <a:xfrm>
-            <a:off x="3637170" y="1657482"/>
-            <a:ext cx="333746" cy="369332"/>
-          </a:xfrm>
-          <a:prstGeom prst="rect">
-            <a:avLst/>
-          </a:prstGeom>
-          <a:noFill/>
-        </p:spPr>
-        <p:txBody>
-          <a:bodyPr wrap="none" rtlCol="0" anchor="ctr">
-            <a:spAutoFit/>
-          </a:bodyPr>
-          <a:lstStyle/>
-          <a:p>
-            <a:r>
-              <a:rPr lang="en-US" dirty="0"/>
-              <a:t>…</a:t>
-            </a:r>
-          </a:p>
-        </p:txBody>
-      </p:sp>
-      <p:sp>
-        <p:nvSpPr>
-          <p:cNvPr id="10" name="Rectangle: Rounded Corners 9">
-            <a:extLst>
-              <a:ext uri="{FF2B5EF4-FFF2-40B4-BE49-F238E27FC236}">
-                <a16:creationId xmlns:a16="http://schemas.microsoft.com/office/drawing/2014/main" id="{B3CF4078-AF58-188A-DF99-E08A01A42DFE}"/>
-              </a:ext>
-            </a:extLst>
-          </p:cNvPr>
-          <p:cNvSpPr/>
-          <p:nvPr/>
-        </p:nvSpPr>
-        <p:spPr>
-          <a:xfrm>
-            <a:off x="1183452" y="2534516"/>
-            <a:ext cx="4014323" cy="369332"/>
-          </a:xfrm>
-          <a:prstGeom prst="roundRect">
-            <a:avLst/>
-          </a:prstGeom>
-          <a:solidFill>
-            <a:srgbClr val="B2D4EB"/>
-          </a:solidFill>
-          <a:ln>
-            <a:solidFill>
-              <a:schemeClr val="tx1"/>
-            </a:solidFill>
-          </a:ln>
-        </p:spPr>
-        <p:style>
-          <a:lnRef idx="2">
-            <a:schemeClr val="accent1">
-              <a:shade val="15000"/>
-            </a:schemeClr>
-          </a:lnRef>
-          <a:fillRef idx="1">
-            <a:schemeClr val="accent1"/>
-          </a:fillRef>
-          <a:effectRef idx="0">
-            <a:schemeClr val="accent1"/>
-          </a:effectRef>
-          <a:fontRef idx="minor">
-            <a:schemeClr val="lt1"/>
-          </a:fontRef>
-        </p:style>
-        <p:txBody>
-          <a:bodyPr rtlCol="0" anchor="ctr"/>
-          <a:lstStyle/>
-          <a:p>
-            <a:pPr algn="ctr"/>
-            <a:r>
-              <a:rPr lang="en-US" dirty="0">
-                <a:solidFill>
-                  <a:schemeClr val="tx1"/>
-                </a:solidFill>
-              </a:rPr>
-              <a:t>Security + Governance</a:t>
-            </a:r>
-            <a:endParaRPr lang="en-US" i="1" dirty="0">
-              <a:solidFill>
-                <a:schemeClr val="tx1"/>
-              </a:solidFill>
-            </a:endParaRPr>
-          </a:p>
-        </p:txBody>
-      </p:sp>
-      <p:cxnSp>
-        <p:nvCxnSpPr>
-          <p:cNvPr id="13" name="Straight Arrow Connector 12">
-            <a:extLst>
-              <a:ext uri="{FF2B5EF4-FFF2-40B4-BE49-F238E27FC236}">
-                <a16:creationId xmlns:a16="http://schemas.microsoft.com/office/drawing/2014/main" id="{B3C89E23-8123-0234-D0F1-F39C80D61B78}"/>
-              </a:ext>
-            </a:extLst>
-          </p:cNvPr>
-          <p:cNvCxnSpPr>
-            <a:stCxn id="8" idx="3"/>
-          </p:cNvCxnSpPr>
-          <p:nvPr/>
-        </p:nvCxnSpPr>
-        <p:spPr>
-          <a:xfrm>
-            <a:off x="5197775" y="1842148"/>
-            <a:ext cx="591279" cy="0"/>
-          </a:xfrm>
-          <a:prstGeom prst="straightConnector1">
-            <a:avLst/>
-          </a:prstGeom>
-          <a:ln>
-            <a:solidFill>
-              <a:schemeClr val="tx1"/>
-            </a:solidFill>
-            <a:prstDash val="sysDash"/>
-            <a:tailEnd type="triangle" w="lg" len="lg"/>
-          </a:ln>
-        </p:spPr>
-        <p:style>
-          <a:lnRef idx="2">
-            <a:schemeClr val="accent1"/>
-          </a:lnRef>
-          <a:fillRef idx="0">
-            <a:schemeClr val="accent1"/>
-          </a:fillRef>
-          <a:effectRef idx="1">
-            <a:schemeClr val="accent1"/>
-          </a:effectRef>
-          <a:fontRef idx="minor">
-            <a:schemeClr val="tx1"/>
-          </a:fontRef>
-        </p:style>
-      </p:cxnSp>
-      <p:sp>
-        <p:nvSpPr>
-          <p:cNvPr id="14" name="TextBox 13">
-            <a:extLst>
-              <a:ext uri="{FF2B5EF4-FFF2-40B4-BE49-F238E27FC236}">
-                <a16:creationId xmlns:a16="http://schemas.microsoft.com/office/drawing/2014/main" id="{DA373EA2-E891-EE8A-A28C-9322032A5F17}"/>
-              </a:ext>
-            </a:extLst>
-          </p:cNvPr>
-          <p:cNvSpPr txBox="1"/>
-          <p:nvPr/>
-        </p:nvSpPr>
-        <p:spPr>
-          <a:xfrm>
-            <a:off x="5825155" y="1518982"/>
-            <a:ext cx="2013506" cy="646331"/>
-          </a:xfrm>
-          <a:prstGeom prst="rect">
-            <a:avLst/>
-          </a:prstGeom>
-          <a:noFill/>
-        </p:spPr>
-        <p:txBody>
-          <a:bodyPr wrap="square" rtlCol="0" anchor="ctr">
-            <a:spAutoFit/>
-          </a:bodyPr>
-          <a:lstStyle/>
-          <a:p>
-            <a:r>
-              <a:rPr lang="en-US" dirty="0"/>
-              <a:t>Configure Identities, RBAC, Monitoring, etc.</a:t>
-            </a:r>
-          </a:p>
-        </p:txBody>
-      </p:sp>
-      <p:sp>
-        <p:nvSpPr>
-          <p:cNvPr id="15" name="TextBox 14">
-            <a:extLst>
-              <a:ext uri="{FF2B5EF4-FFF2-40B4-BE49-F238E27FC236}">
-                <a16:creationId xmlns:a16="http://schemas.microsoft.com/office/drawing/2014/main" id="{0121F8B3-1DDB-194B-0435-0F2F79CBA773}"/>
-              </a:ext>
-            </a:extLst>
-          </p:cNvPr>
-          <p:cNvSpPr txBox="1"/>
-          <p:nvPr/>
-        </p:nvSpPr>
-        <p:spPr>
-          <a:xfrm>
-            <a:off x="2183860" y="3429000"/>
-            <a:ext cx="2013506" cy="646331"/>
-          </a:xfrm>
-          <a:prstGeom prst="rect">
-            <a:avLst/>
-          </a:prstGeom>
-          <a:noFill/>
-        </p:spPr>
-        <p:txBody>
-          <a:bodyPr wrap="square" rtlCol="0" anchor="ctr">
-            <a:spAutoFit/>
-          </a:bodyPr>
-          <a:lstStyle/>
-          <a:p>
-            <a:pPr algn="ctr"/>
-            <a:r>
-              <a:rPr lang="en-US" dirty="0"/>
-              <a:t>Connect to Tools and Knowledge bases</a:t>
-            </a:r>
-          </a:p>
-        </p:txBody>
-      </p:sp>
-      <p:cxnSp>
-        <p:nvCxnSpPr>
-          <p:cNvPr id="16" name="Straight Arrow Connector 15">
-            <a:extLst>
-              <a:ext uri="{FF2B5EF4-FFF2-40B4-BE49-F238E27FC236}">
-                <a16:creationId xmlns:a16="http://schemas.microsoft.com/office/drawing/2014/main" id="{753FAC2D-AAEE-099D-6EBF-C4AE11D1CF5E}"/>
-              </a:ext>
-            </a:extLst>
-          </p:cNvPr>
-          <p:cNvCxnSpPr>
-            <a:cxnSpLocks/>
-            <a:stCxn id="10" idx="2"/>
-            <a:endCxn id="15" idx="0"/>
-          </p:cNvCxnSpPr>
-          <p:nvPr/>
-        </p:nvCxnSpPr>
-        <p:spPr>
-          <a:xfrm flipH="1">
-            <a:off x="3190613" y="2903848"/>
-            <a:ext cx="1" cy="525152"/>
-          </a:xfrm>
-          <a:prstGeom prst="straightConnector1">
-            <a:avLst/>
-          </a:prstGeom>
-          <a:ln>
-            <a:solidFill>
-              <a:schemeClr val="tx1"/>
-            </a:solidFill>
-            <a:prstDash val="sysDash"/>
-            <a:tailEnd type="triangle" w="lg" len="lg"/>
-          </a:ln>
-        </p:spPr>
-        <p:style>
-          <a:lnRef idx="2">
-            <a:schemeClr val="accent1"/>
-          </a:lnRef>
-          <a:fillRef idx="0">
-            <a:schemeClr val="accent1"/>
-          </a:fillRef>
-          <a:effectRef idx="1">
-            <a:schemeClr val="accent1"/>
-          </a:effectRef>
-          <a:fontRef idx="minor">
-            <a:schemeClr val="tx1"/>
-          </a:fontRef>
-        </p:style>
-      </p:cxnSp>
-    </p:spTree>
-    <p:extLst>
-      <p:ext uri="{BB962C8B-B14F-4D97-AF65-F5344CB8AC3E}">
-        <p14:creationId xmlns:p14="http://schemas.microsoft.com/office/powerpoint/2010/main" val="1065807327"/>
-      </p:ext>
-    </p:extLst>
-  </p:cSld>
-  <p:clrMapOvr>
-    <a:masterClrMapping/>
-  </p:clrMapOvr>
-</p:sld>
-</file>
-
-<file path=ppt/slides/slide20.xml><?xml version="1.0" encoding="utf-8"?>
+<file path=ppt/slides/slide18.xml><?xml version="1.0" encoding="utf-8"?>
 <p:sld xmlns:a="http://schemas.openxmlformats.org/drawingml/2006/main" xmlns:r="http://schemas.openxmlformats.org/officeDocument/2006/relationships" xmlns:p="http://schemas.openxmlformats.org/presentationml/2006/main">
   <p:cSld>
     <p:spTree>
@@ -11720,7 +12914,7 @@
 </p:sld>
 </file>
 
-<file path=ppt/slides/slide21.xml><?xml version="1.0" encoding="utf-8"?>
+<file path=ppt/slides/slide19.xml><?xml version="1.0" encoding="utf-8"?>
 <p:sld xmlns:a="http://schemas.openxmlformats.org/drawingml/2006/main" xmlns:r="http://schemas.openxmlformats.org/officeDocument/2006/relationships" xmlns:p="http://schemas.openxmlformats.org/presentationml/2006/main">
   <p:cSld>
     <p:spTree>
@@ -11819,8 +13013,8 @@
             </a:p>
           </p:txBody>
         </p:sp>
-        <mc:AlternateContent xmlns:mc="http://schemas.openxmlformats.org/markup-compatibility/2006">
-          <mc:Choice xmlns:a14="http://schemas.microsoft.com/office/drawing/2010/main" Requires="a14">
+        <mc:AlternateContent xmlns:mc="http://schemas.openxmlformats.org/markup-compatibility/2006" xmlns:a14="http://schemas.microsoft.com/office/drawing/2010/main">
+          <mc:Choice Requires="a14">
             <p:sp>
               <p:nvSpPr>
                 <p:cNvPr id="5" name="Rectangle 4">
@@ -11902,7 +13096,7 @@
               </p:txBody>
             </p:sp>
           </mc:Choice>
-          <mc:Fallback>
+          <mc:Fallback xmlns="">
             <p:sp>
               <p:nvSpPr>
                 <p:cNvPr id="5" name="Rectangle 4">
@@ -12039,8 +13233,8 @@
             </a:p>
           </p:txBody>
         </p:sp>
-        <mc:AlternateContent xmlns:mc="http://schemas.openxmlformats.org/markup-compatibility/2006">
-          <mc:Choice xmlns:a14="http://schemas.microsoft.com/office/drawing/2010/main" Requires="a14">
+        <mc:AlternateContent xmlns:mc="http://schemas.openxmlformats.org/markup-compatibility/2006" xmlns:a14="http://schemas.microsoft.com/office/drawing/2010/main">
+          <mc:Choice Requires="a14">
             <p:sp>
               <p:nvSpPr>
                 <p:cNvPr id="8" name="Rectangle 7">
@@ -12205,7 +13399,7 @@
               </p:txBody>
             </p:sp>
           </mc:Choice>
-          <mc:Fallback>
+          <mc:Fallback xmlns="">
             <p:sp>
               <p:nvSpPr>
                 <p:cNvPr id="8" name="Rectangle 7">
@@ -12250,8 +13444,8 @@
             </p:sp>
           </mc:Fallback>
         </mc:AlternateContent>
-        <mc:AlternateContent xmlns:mc="http://schemas.openxmlformats.org/markup-compatibility/2006">
-          <mc:Choice xmlns:a14="http://schemas.microsoft.com/office/drawing/2010/main" Requires="a14">
+        <mc:AlternateContent xmlns:mc="http://schemas.openxmlformats.org/markup-compatibility/2006" xmlns:a14="http://schemas.microsoft.com/office/drawing/2010/main">
+          <mc:Choice Requires="a14">
             <p:sp>
               <p:nvSpPr>
                 <p:cNvPr id="9" name="TextBox 8">
@@ -12396,7 +13590,7 @@
               </p:txBody>
             </p:sp>
           </mc:Choice>
-          <mc:Fallback>
+          <mc:Fallback xmlns="">
             <p:sp>
               <p:nvSpPr>
                 <p:cNvPr id="9" name="TextBox 8">
@@ -12497,8 +13691,8 @@
             </a:p>
           </p:txBody>
         </p:sp>
-        <mc:AlternateContent xmlns:mc="http://schemas.openxmlformats.org/markup-compatibility/2006">
-          <mc:Choice xmlns:a14="http://schemas.microsoft.com/office/drawing/2010/main" Requires="a14">
+        <mc:AlternateContent xmlns:mc="http://schemas.openxmlformats.org/markup-compatibility/2006" xmlns:a14="http://schemas.microsoft.com/office/drawing/2010/main">
+          <mc:Choice Requires="a14">
             <p:sp>
               <p:nvSpPr>
                 <p:cNvPr id="11" name="Rectangle 10">
@@ -12716,7 +13910,7 @@
               </p:txBody>
             </p:sp>
           </mc:Choice>
-          <mc:Fallback>
+          <mc:Fallback xmlns="">
             <p:sp>
               <p:nvSpPr>
                 <p:cNvPr id="11" name="Rectangle 10">
@@ -12853,8 +14047,8 @@
             </a:p>
           </p:txBody>
         </p:sp>
-        <mc:AlternateContent xmlns:mc="http://schemas.openxmlformats.org/markup-compatibility/2006">
-          <mc:Choice xmlns:a14="http://schemas.microsoft.com/office/drawing/2010/main" Requires="a14">
+        <mc:AlternateContent xmlns:mc="http://schemas.openxmlformats.org/markup-compatibility/2006" xmlns:a14="http://schemas.microsoft.com/office/drawing/2010/main">
+          <mc:Choice Requires="a14">
             <p:sp>
               <p:nvSpPr>
                 <p:cNvPr id="14" name="Rectangle 13">
@@ -13090,7 +14284,7 @@
               </p:txBody>
             </p:sp>
           </mc:Choice>
-          <mc:Fallback>
+          <mc:Fallback xmlns="">
             <p:sp>
               <p:nvSpPr>
                 <p:cNvPr id="14" name="Rectangle 13">
@@ -13330,8 +14524,8 @@
             </a:p>
           </p:txBody>
         </p:sp>
-        <mc:AlternateContent xmlns:mc="http://schemas.openxmlformats.org/markup-compatibility/2006">
-          <mc:Choice xmlns:a14="http://schemas.microsoft.com/office/drawing/2010/main" Requires="a14">
+        <mc:AlternateContent xmlns:mc="http://schemas.openxmlformats.org/markup-compatibility/2006" xmlns:a14="http://schemas.microsoft.com/office/drawing/2010/main">
+          <mc:Choice Requires="a14">
             <p:sp>
               <p:nvSpPr>
                 <p:cNvPr id="19" name="Rectangle 18">
@@ -13482,7 +14676,7 @@
               </p:txBody>
             </p:sp>
           </mc:Choice>
-          <mc:Fallback>
+          <mc:Fallback xmlns="">
             <p:sp>
               <p:nvSpPr>
                 <p:cNvPr id="19" name="Rectangle 18">
@@ -13619,8 +14813,8 @@
             </a:p>
           </p:txBody>
         </p:sp>
-        <mc:AlternateContent xmlns:mc="http://schemas.openxmlformats.org/markup-compatibility/2006">
-          <mc:Choice xmlns:a14="http://schemas.microsoft.com/office/drawing/2010/main" Requires="a14">
+        <mc:AlternateContent xmlns:mc="http://schemas.openxmlformats.org/markup-compatibility/2006" xmlns:a14="http://schemas.microsoft.com/office/drawing/2010/main">
+          <mc:Choice Requires="a14">
             <p:sp>
               <p:nvSpPr>
                 <p:cNvPr id="22" name="Rectangle 21">
@@ -13774,7 +14968,7 @@
               </p:txBody>
             </p:sp>
           </mc:Choice>
-          <mc:Fallback>
+          <mc:Fallback xmlns="">
             <p:sp>
               <p:nvSpPr>
                 <p:cNvPr id="22" name="Rectangle 21">
@@ -14014,7 +15208,853 @@
 </p:sld>
 </file>
 
+<file path=ppt/slides/slide2.xml><?xml version="1.0" encoding="utf-8"?>
+<p:sld xmlns:a="http://schemas.openxmlformats.org/drawingml/2006/main" xmlns:r="http://schemas.openxmlformats.org/officeDocument/2006/relationships" xmlns:p="http://schemas.openxmlformats.org/presentationml/2006/main">
+  <p:cSld>
+    <p:spTree>
+      <p:nvGrpSpPr>
+        <p:cNvPr id="1" name=""/>
+        <p:cNvGrpSpPr/>
+        <p:nvPr/>
+      </p:nvGrpSpPr>
+      <p:grpSpPr>
+        <a:xfrm>
+          <a:off x="0" y="0"/>
+          <a:ext cx="0" cy="0"/>
+          <a:chOff x="0" y="0"/>
+          <a:chExt cx="0" cy="0"/>
+        </a:xfrm>
+      </p:grpSpPr>
+      <p:pic>
+        <p:nvPicPr>
+          <p:cNvPr id="2050" name="Picture 2" descr="Diagram showing Foundry resource containing multiple projects, each with deployments and connections.">
+            <a:extLst>
+              <a:ext uri="{FF2B5EF4-FFF2-40B4-BE49-F238E27FC236}">
+                <a16:creationId xmlns:a16="http://schemas.microsoft.com/office/drawing/2014/main" id="{12EEA84E-8776-00EF-5D97-05E8737B61E3}"/>
+              </a:ext>
+            </a:extLst>
+          </p:cNvPr>
+          <p:cNvPicPr>
+            <a:picLocks noChangeAspect="1" noChangeArrowheads="1"/>
+          </p:cNvPicPr>
+          <p:nvPr/>
+        </p:nvPicPr>
+        <p:blipFill>
+          <a:blip r:embed="rId3">
+            <a:clrChange>
+              <a:clrFrom>
+                <a:srgbClr val="FFFFFF"/>
+              </a:clrFrom>
+              <a:clrTo>
+                <a:srgbClr val="FFFFFF">
+                  <a:alpha val="0"/>
+                </a:srgbClr>
+              </a:clrTo>
+            </a:clrChange>
+            <a:extLst>
+              <a:ext uri="{28A0092B-C50C-407E-A947-70E740481C1C}">
+                <a14:useLocalDpi xmlns:a14="http://schemas.microsoft.com/office/drawing/2010/main" val="0"/>
+              </a:ext>
+            </a:extLst>
+          </a:blip>
+          <a:srcRect/>
+          <a:stretch>
+            <a:fillRect/>
+          </a:stretch>
+        </p:blipFill>
+        <p:spPr bwMode="auto">
+          <a:xfrm>
+            <a:off x="6607866" y="3166424"/>
+            <a:ext cx="5524500" cy="3667125"/>
+          </a:xfrm>
+          <a:prstGeom prst="rect">
+            <a:avLst/>
+          </a:prstGeom>
+          <a:noFill/>
+          <a:extLst>
+            <a:ext uri="{909E8E84-426E-40DD-AFC4-6F175D3DCCD1}">
+              <a14:hiddenFill xmlns:a14="http://schemas.microsoft.com/office/drawing/2010/main">
+                <a:solidFill>
+                  <a:srgbClr val="FFFFFF"/>
+                </a:solidFill>
+              </a14:hiddenFill>
+            </a:ext>
+          </a:extLst>
+        </p:spPr>
+      </p:pic>
+      <p:sp>
+        <p:nvSpPr>
+          <p:cNvPr id="4" name="Rectangle: Rounded Corners 3">
+            <a:extLst>
+              <a:ext uri="{FF2B5EF4-FFF2-40B4-BE49-F238E27FC236}">
+                <a16:creationId xmlns:a16="http://schemas.microsoft.com/office/drawing/2014/main" id="{F839DD77-409D-94ED-8A62-6F53CBB88ADD}"/>
+              </a:ext>
+            </a:extLst>
+          </p:cNvPr>
+          <p:cNvSpPr/>
+          <p:nvPr/>
+        </p:nvSpPr>
+        <p:spPr>
+          <a:xfrm>
+            <a:off x="962568" y="732317"/>
+            <a:ext cx="4456090" cy="2434107"/>
+          </a:xfrm>
+          <a:prstGeom prst="roundRect">
+            <a:avLst>
+              <a:gd name="adj" fmla="val 5234"/>
+            </a:avLst>
+          </a:prstGeom>
+          <a:solidFill>
+            <a:schemeClr val="bg1"/>
+          </a:solidFill>
+          <a:ln>
+            <a:solidFill>
+              <a:schemeClr val="tx1"/>
+            </a:solidFill>
+          </a:ln>
+        </p:spPr>
+        <p:style>
+          <a:lnRef idx="2">
+            <a:schemeClr val="accent1">
+              <a:shade val="15000"/>
+            </a:schemeClr>
+          </a:lnRef>
+          <a:fillRef idx="1">
+            <a:schemeClr val="accent1"/>
+          </a:fillRef>
+          <a:effectRef idx="0">
+            <a:schemeClr val="accent1"/>
+          </a:effectRef>
+          <a:fontRef idx="minor">
+            <a:schemeClr val="lt1"/>
+          </a:fontRef>
+        </p:style>
+        <p:txBody>
+          <a:bodyPr rtlCol="0" anchor="t"/>
+          <a:lstStyle/>
+          <a:p>
+            <a:pPr algn="ctr"/>
+            <a:r>
+              <a:rPr lang="en-US" dirty="0">
+                <a:solidFill>
+                  <a:schemeClr val="tx1"/>
+                </a:solidFill>
+              </a:rPr>
+              <a:t>Foundry Resource</a:t>
+            </a:r>
+          </a:p>
+        </p:txBody>
+      </p:sp>
+      <p:sp>
+        <p:nvSpPr>
+          <p:cNvPr id="5" name="Rectangle: Rounded Corners 4">
+            <a:extLst>
+              <a:ext uri="{FF2B5EF4-FFF2-40B4-BE49-F238E27FC236}">
+                <a16:creationId xmlns:a16="http://schemas.microsoft.com/office/drawing/2014/main" id="{CFAF0893-8AEC-1DBB-B036-2949BA0795A0}"/>
+              </a:ext>
+            </a:extLst>
+          </p:cNvPr>
+          <p:cNvSpPr/>
+          <p:nvPr/>
+        </p:nvSpPr>
+        <p:spPr>
+          <a:xfrm>
+            <a:off x="2410311" y="1494888"/>
+            <a:ext cx="1080042" cy="694520"/>
+          </a:xfrm>
+          <a:prstGeom prst="roundRect">
+            <a:avLst/>
+          </a:prstGeom>
+          <a:solidFill>
+            <a:srgbClr val="E5F1F8"/>
+          </a:solidFill>
+          <a:ln>
+            <a:solidFill>
+              <a:schemeClr val="tx1"/>
+            </a:solidFill>
+          </a:ln>
+        </p:spPr>
+        <p:style>
+          <a:lnRef idx="2">
+            <a:schemeClr val="accent1">
+              <a:shade val="15000"/>
+            </a:schemeClr>
+          </a:lnRef>
+          <a:fillRef idx="1">
+            <a:schemeClr val="accent1"/>
+          </a:fillRef>
+          <a:effectRef idx="0">
+            <a:schemeClr val="accent1"/>
+          </a:effectRef>
+          <a:fontRef idx="minor">
+            <a:schemeClr val="lt1"/>
+          </a:fontRef>
+        </p:style>
+        <p:txBody>
+          <a:bodyPr rtlCol="0" anchor="ctr"/>
+          <a:lstStyle/>
+          <a:p>
+            <a:pPr algn="ctr"/>
+            <a:r>
+              <a:rPr lang="en-US" dirty="0">
+                <a:solidFill>
+                  <a:schemeClr val="tx1"/>
+                </a:solidFill>
+              </a:rPr>
+              <a:t>Project</a:t>
+            </a:r>
+          </a:p>
+          <a:p>
+            <a:pPr algn="ctr"/>
+            <a:r>
+              <a:rPr lang="en-US" dirty="0">
+                <a:solidFill>
+                  <a:schemeClr val="tx1"/>
+                </a:solidFill>
+              </a:rPr>
+              <a:t>2</a:t>
+            </a:r>
+          </a:p>
+        </p:txBody>
+      </p:sp>
+      <p:sp>
+        <p:nvSpPr>
+          <p:cNvPr id="6" name="Rectangle: Rounded Corners 5">
+            <a:extLst>
+              <a:ext uri="{FF2B5EF4-FFF2-40B4-BE49-F238E27FC236}">
+                <a16:creationId xmlns:a16="http://schemas.microsoft.com/office/drawing/2014/main" id="{A7E630FB-2D59-D6DB-B847-29F7E0317AFA}"/>
+              </a:ext>
+            </a:extLst>
+          </p:cNvPr>
+          <p:cNvSpPr/>
+          <p:nvPr/>
+        </p:nvSpPr>
+        <p:spPr>
+          <a:xfrm>
+            <a:off x="1183452" y="1494888"/>
+            <a:ext cx="1080042" cy="694520"/>
+          </a:xfrm>
+          <a:prstGeom prst="roundRect">
+            <a:avLst/>
+          </a:prstGeom>
+          <a:solidFill>
+            <a:srgbClr val="E5F1F8"/>
+          </a:solidFill>
+          <a:ln>
+            <a:solidFill>
+              <a:schemeClr val="tx1"/>
+            </a:solidFill>
+          </a:ln>
+        </p:spPr>
+        <p:style>
+          <a:lnRef idx="2">
+            <a:schemeClr val="accent1">
+              <a:shade val="15000"/>
+            </a:schemeClr>
+          </a:lnRef>
+          <a:fillRef idx="1">
+            <a:schemeClr val="accent1"/>
+          </a:fillRef>
+          <a:effectRef idx="0">
+            <a:schemeClr val="accent1"/>
+          </a:effectRef>
+          <a:fontRef idx="minor">
+            <a:schemeClr val="lt1"/>
+          </a:fontRef>
+        </p:style>
+        <p:txBody>
+          <a:bodyPr rtlCol="0" anchor="ctr"/>
+          <a:lstStyle/>
+          <a:p>
+            <a:pPr algn="ctr"/>
+            <a:r>
+              <a:rPr lang="en-US" dirty="0">
+                <a:solidFill>
+                  <a:schemeClr val="tx1"/>
+                </a:solidFill>
+              </a:rPr>
+              <a:t>Project</a:t>
+            </a:r>
+          </a:p>
+          <a:p>
+            <a:pPr algn="ctr"/>
+            <a:r>
+              <a:rPr lang="en-US" dirty="0">
+                <a:solidFill>
+                  <a:schemeClr val="tx1"/>
+                </a:solidFill>
+              </a:rPr>
+              <a:t>1</a:t>
+            </a:r>
+          </a:p>
+        </p:txBody>
+      </p:sp>
+      <p:sp>
+        <p:nvSpPr>
+          <p:cNvPr id="8" name="Rectangle: Rounded Corners 7">
+            <a:extLst>
+              <a:ext uri="{FF2B5EF4-FFF2-40B4-BE49-F238E27FC236}">
+                <a16:creationId xmlns:a16="http://schemas.microsoft.com/office/drawing/2014/main" id="{5E9103F9-368F-E4D0-C17C-BF0F1C74D31A}"/>
+              </a:ext>
+            </a:extLst>
+          </p:cNvPr>
+          <p:cNvSpPr/>
+          <p:nvPr/>
+        </p:nvSpPr>
+        <p:spPr>
+          <a:xfrm>
+            <a:off x="4117733" y="1494888"/>
+            <a:ext cx="1080042" cy="694520"/>
+          </a:xfrm>
+          <a:prstGeom prst="roundRect">
+            <a:avLst/>
+          </a:prstGeom>
+          <a:solidFill>
+            <a:srgbClr val="B2D4EB"/>
+          </a:solidFill>
+          <a:ln>
+            <a:solidFill>
+              <a:schemeClr val="tx1"/>
+            </a:solidFill>
+          </a:ln>
+        </p:spPr>
+        <p:style>
+          <a:lnRef idx="2">
+            <a:schemeClr val="accent1">
+              <a:shade val="15000"/>
+            </a:schemeClr>
+          </a:lnRef>
+          <a:fillRef idx="1">
+            <a:schemeClr val="accent1"/>
+          </a:fillRef>
+          <a:effectRef idx="0">
+            <a:schemeClr val="accent1"/>
+          </a:effectRef>
+          <a:fontRef idx="minor">
+            <a:schemeClr val="lt1"/>
+          </a:fontRef>
+        </p:style>
+        <p:txBody>
+          <a:bodyPr rtlCol="0" anchor="ctr"/>
+          <a:lstStyle/>
+          <a:p>
+            <a:pPr algn="ctr"/>
+            <a:r>
+              <a:rPr lang="en-US" dirty="0">
+                <a:solidFill>
+                  <a:schemeClr val="tx1"/>
+                </a:solidFill>
+              </a:rPr>
+              <a:t>Project</a:t>
+            </a:r>
+          </a:p>
+          <a:p>
+            <a:pPr algn="ctr"/>
+            <a:r>
+              <a:rPr lang="en-US" i="1" dirty="0">
+                <a:solidFill>
+                  <a:schemeClr val="tx1"/>
+                </a:solidFill>
+              </a:rPr>
+              <a:t>n</a:t>
+            </a:r>
+          </a:p>
+        </p:txBody>
+      </p:sp>
+      <p:sp>
+        <p:nvSpPr>
+          <p:cNvPr id="9" name="TextBox 8">
+            <a:extLst>
+              <a:ext uri="{FF2B5EF4-FFF2-40B4-BE49-F238E27FC236}">
+                <a16:creationId xmlns:a16="http://schemas.microsoft.com/office/drawing/2014/main" id="{C992B776-2029-F35D-E69F-FB22F1454014}"/>
+              </a:ext>
+            </a:extLst>
+          </p:cNvPr>
+          <p:cNvSpPr txBox="1"/>
+          <p:nvPr/>
+        </p:nvSpPr>
+        <p:spPr>
+          <a:xfrm>
+            <a:off x="3637170" y="1657482"/>
+            <a:ext cx="333746" cy="369332"/>
+          </a:xfrm>
+          <a:prstGeom prst="rect">
+            <a:avLst/>
+          </a:prstGeom>
+          <a:noFill/>
+        </p:spPr>
+        <p:txBody>
+          <a:bodyPr wrap="none" rtlCol="0" anchor="ctr">
+            <a:spAutoFit/>
+          </a:bodyPr>
+          <a:lstStyle/>
+          <a:p>
+            <a:r>
+              <a:rPr lang="en-US" dirty="0"/>
+              <a:t>…</a:t>
+            </a:r>
+          </a:p>
+        </p:txBody>
+      </p:sp>
+      <p:sp>
+        <p:nvSpPr>
+          <p:cNvPr id="10" name="Rectangle: Rounded Corners 9">
+            <a:extLst>
+              <a:ext uri="{FF2B5EF4-FFF2-40B4-BE49-F238E27FC236}">
+                <a16:creationId xmlns:a16="http://schemas.microsoft.com/office/drawing/2014/main" id="{B3CF4078-AF58-188A-DF99-E08A01A42DFE}"/>
+              </a:ext>
+            </a:extLst>
+          </p:cNvPr>
+          <p:cNvSpPr/>
+          <p:nvPr/>
+        </p:nvSpPr>
+        <p:spPr>
+          <a:xfrm>
+            <a:off x="1183452" y="2534516"/>
+            <a:ext cx="4014323" cy="369332"/>
+          </a:xfrm>
+          <a:prstGeom prst="roundRect">
+            <a:avLst/>
+          </a:prstGeom>
+          <a:solidFill>
+            <a:srgbClr val="B2D4EB"/>
+          </a:solidFill>
+          <a:ln>
+            <a:solidFill>
+              <a:schemeClr val="tx1"/>
+            </a:solidFill>
+          </a:ln>
+        </p:spPr>
+        <p:style>
+          <a:lnRef idx="2">
+            <a:schemeClr val="accent1">
+              <a:shade val="15000"/>
+            </a:schemeClr>
+          </a:lnRef>
+          <a:fillRef idx="1">
+            <a:schemeClr val="accent1"/>
+          </a:fillRef>
+          <a:effectRef idx="0">
+            <a:schemeClr val="accent1"/>
+          </a:effectRef>
+          <a:fontRef idx="minor">
+            <a:schemeClr val="lt1"/>
+          </a:fontRef>
+        </p:style>
+        <p:txBody>
+          <a:bodyPr rtlCol="0" anchor="ctr"/>
+          <a:lstStyle/>
+          <a:p>
+            <a:pPr algn="ctr"/>
+            <a:r>
+              <a:rPr lang="en-US" dirty="0">
+                <a:solidFill>
+                  <a:schemeClr val="tx1"/>
+                </a:solidFill>
+              </a:rPr>
+              <a:t>Security + Governance</a:t>
+            </a:r>
+            <a:endParaRPr lang="en-US" i="1" dirty="0">
+              <a:solidFill>
+                <a:schemeClr val="tx1"/>
+              </a:solidFill>
+            </a:endParaRPr>
+          </a:p>
+        </p:txBody>
+      </p:sp>
+      <p:cxnSp>
+        <p:nvCxnSpPr>
+          <p:cNvPr id="13" name="Straight Arrow Connector 12">
+            <a:extLst>
+              <a:ext uri="{FF2B5EF4-FFF2-40B4-BE49-F238E27FC236}">
+                <a16:creationId xmlns:a16="http://schemas.microsoft.com/office/drawing/2014/main" id="{B3C89E23-8123-0234-D0F1-F39C80D61B78}"/>
+              </a:ext>
+            </a:extLst>
+          </p:cNvPr>
+          <p:cNvCxnSpPr>
+            <a:stCxn id="8" idx="3"/>
+          </p:cNvCxnSpPr>
+          <p:nvPr/>
+        </p:nvCxnSpPr>
+        <p:spPr>
+          <a:xfrm>
+            <a:off x="5197775" y="1842148"/>
+            <a:ext cx="591279" cy="0"/>
+          </a:xfrm>
+          <a:prstGeom prst="straightConnector1">
+            <a:avLst/>
+          </a:prstGeom>
+          <a:ln>
+            <a:solidFill>
+              <a:schemeClr val="tx1"/>
+            </a:solidFill>
+            <a:prstDash val="sysDash"/>
+            <a:tailEnd type="triangle" w="lg" len="lg"/>
+          </a:ln>
+        </p:spPr>
+        <p:style>
+          <a:lnRef idx="2">
+            <a:schemeClr val="accent1"/>
+          </a:lnRef>
+          <a:fillRef idx="0">
+            <a:schemeClr val="accent1"/>
+          </a:fillRef>
+          <a:effectRef idx="1">
+            <a:schemeClr val="accent1"/>
+          </a:effectRef>
+          <a:fontRef idx="minor">
+            <a:schemeClr val="tx1"/>
+          </a:fontRef>
+        </p:style>
+      </p:cxnSp>
+      <p:sp>
+        <p:nvSpPr>
+          <p:cNvPr id="14" name="TextBox 13">
+            <a:extLst>
+              <a:ext uri="{FF2B5EF4-FFF2-40B4-BE49-F238E27FC236}">
+                <a16:creationId xmlns:a16="http://schemas.microsoft.com/office/drawing/2014/main" id="{DA373EA2-E891-EE8A-A28C-9322032A5F17}"/>
+              </a:ext>
+            </a:extLst>
+          </p:cNvPr>
+          <p:cNvSpPr txBox="1"/>
+          <p:nvPr/>
+        </p:nvSpPr>
+        <p:spPr>
+          <a:xfrm>
+            <a:off x="5825155" y="1518982"/>
+            <a:ext cx="2013506" cy="646331"/>
+          </a:xfrm>
+          <a:prstGeom prst="rect">
+            <a:avLst/>
+          </a:prstGeom>
+          <a:noFill/>
+        </p:spPr>
+        <p:txBody>
+          <a:bodyPr wrap="square" rtlCol="0" anchor="ctr">
+            <a:spAutoFit/>
+          </a:bodyPr>
+          <a:lstStyle/>
+          <a:p>
+            <a:r>
+              <a:rPr lang="en-US" dirty="0"/>
+              <a:t>Configure Identities, RBAC, Monitoring, etc.</a:t>
+            </a:r>
+          </a:p>
+        </p:txBody>
+      </p:sp>
+      <p:sp>
+        <p:nvSpPr>
+          <p:cNvPr id="15" name="TextBox 14">
+            <a:extLst>
+              <a:ext uri="{FF2B5EF4-FFF2-40B4-BE49-F238E27FC236}">
+                <a16:creationId xmlns:a16="http://schemas.microsoft.com/office/drawing/2014/main" id="{0121F8B3-1DDB-194B-0435-0F2F79CBA773}"/>
+              </a:ext>
+            </a:extLst>
+          </p:cNvPr>
+          <p:cNvSpPr txBox="1"/>
+          <p:nvPr/>
+        </p:nvSpPr>
+        <p:spPr>
+          <a:xfrm>
+            <a:off x="2183860" y="3429000"/>
+            <a:ext cx="2013506" cy="646331"/>
+          </a:xfrm>
+          <a:prstGeom prst="rect">
+            <a:avLst/>
+          </a:prstGeom>
+          <a:noFill/>
+        </p:spPr>
+        <p:txBody>
+          <a:bodyPr wrap="square" rtlCol="0" anchor="ctr">
+            <a:spAutoFit/>
+          </a:bodyPr>
+          <a:lstStyle/>
+          <a:p>
+            <a:pPr algn="ctr"/>
+            <a:r>
+              <a:rPr lang="en-US" dirty="0"/>
+              <a:t>Connect to Tools and Knowledge bases</a:t>
+            </a:r>
+          </a:p>
+        </p:txBody>
+      </p:sp>
+      <p:cxnSp>
+        <p:nvCxnSpPr>
+          <p:cNvPr id="16" name="Straight Arrow Connector 15">
+            <a:extLst>
+              <a:ext uri="{FF2B5EF4-FFF2-40B4-BE49-F238E27FC236}">
+                <a16:creationId xmlns:a16="http://schemas.microsoft.com/office/drawing/2014/main" id="{753FAC2D-AAEE-099D-6EBF-C4AE11D1CF5E}"/>
+              </a:ext>
+            </a:extLst>
+          </p:cNvPr>
+          <p:cNvCxnSpPr>
+            <a:cxnSpLocks/>
+            <a:stCxn id="10" idx="2"/>
+            <a:endCxn id="15" idx="0"/>
+          </p:cNvCxnSpPr>
+          <p:nvPr/>
+        </p:nvCxnSpPr>
+        <p:spPr>
+          <a:xfrm flipH="1">
+            <a:off x="3190613" y="2903848"/>
+            <a:ext cx="1" cy="525152"/>
+          </a:xfrm>
+          <a:prstGeom prst="straightConnector1">
+            <a:avLst/>
+          </a:prstGeom>
+          <a:ln>
+            <a:solidFill>
+              <a:schemeClr val="tx1"/>
+            </a:solidFill>
+            <a:prstDash val="sysDash"/>
+            <a:tailEnd type="triangle" w="lg" len="lg"/>
+          </a:ln>
+        </p:spPr>
+        <p:style>
+          <a:lnRef idx="2">
+            <a:schemeClr val="accent1"/>
+          </a:lnRef>
+          <a:fillRef idx="0">
+            <a:schemeClr val="accent1"/>
+          </a:fillRef>
+          <a:effectRef idx="1">
+            <a:schemeClr val="accent1"/>
+          </a:effectRef>
+          <a:fontRef idx="minor">
+            <a:schemeClr val="tx1"/>
+          </a:fontRef>
+        </p:style>
+      </p:cxnSp>
+    </p:spTree>
+    <p:extLst>
+      <p:ext uri="{BB962C8B-B14F-4D97-AF65-F5344CB8AC3E}">
+        <p14:creationId xmlns:p14="http://schemas.microsoft.com/office/powerpoint/2010/main" val="1065807327"/>
+      </p:ext>
+    </p:extLst>
+  </p:cSld>
+  <p:clrMapOvr>
+    <a:masterClrMapping/>
+  </p:clrMapOvr>
+</p:sld>
+</file>
+
+<file path=ppt/slides/slide20.xml><?xml version="1.0" encoding="utf-8"?>
+<p:sld xmlns:a="http://schemas.openxmlformats.org/drawingml/2006/main" xmlns:r="http://schemas.openxmlformats.org/officeDocument/2006/relationships" xmlns:p="http://schemas.openxmlformats.org/presentationml/2006/main">
+  <p:cSld>
+    <p:spTree>
+      <p:nvGrpSpPr>
+        <p:cNvPr id="1" name=""/>
+        <p:cNvGrpSpPr/>
+        <p:nvPr/>
+      </p:nvGrpSpPr>
+      <p:grpSpPr>
+        <a:xfrm>
+          <a:off x="0" y="0"/>
+          <a:ext cx="0" cy="0"/>
+          <a:chOff x="0" y="0"/>
+          <a:chExt cx="0" cy="0"/>
+        </a:xfrm>
+      </p:grpSpPr>
+      <p:pic>
+        <p:nvPicPr>
+          <p:cNvPr id="3" name="Picture 2">
+            <a:extLst>
+              <a:ext uri="{FF2B5EF4-FFF2-40B4-BE49-F238E27FC236}">
+                <a16:creationId xmlns:a16="http://schemas.microsoft.com/office/drawing/2014/main" id="{EE4867BA-66DD-B140-5528-856BCA343CD6}"/>
+              </a:ext>
+            </a:extLst>
+          </p:cNvPr>
+          <p:cNvPicPr>
+            <a:picLocks noChangeAspect="1"/>
+          </p:cNvPicPr>
+          <p:nvPr/>
+        </p:nvPicPr>
+        <p:blipFill>
+          <a:blip r:embed="rId2"/>
+          <a:stretch>
+            <a:fillRect/>
+          </a:stretch>
+        </p:blipFill>
+        <p:spPr>
+          <a:xfrm>
+            <a:off x="0" y="99063"/>
+            <a:ext cx="12192000" cy="6659873"/>
+          </a:xfrm>
+          <a:prstGeom prst="rect">
+            <a:avLst/>
+          </a:prstGeom>
+        </p:spPr>
+      </p:pic>
+    </p:spTree>
+    <p:extLst>
+      <p:ext uri="{BB962C8B-B14F-4D97-AF65-F5344CB8AC3E}">
+        <p14:creationId xmlns:p14="http://schemas.microsoft.com/office/powerpoint/2010/main" val="276189202"/>
+      </p:ext>
+    </p:extLst>
+  </p:cSld>
+  <p:clrMapOvr>
+    <a:masterClrMapping/>
+  </p:clrMapOvr>
+</p:sld>
+</file>
+
+<file path=ppt/slides/slide21.xml><?xml version="1.0" encoding="utf-8"?>
+<p:sld xmlns:a="http://schemas.openxmlformats.org/drawingml/2006/main" xmlns:r="http://schemas.openxmlformats.org/officeDocument/2006/relationships" xmlns:p="http://schemas.openxmlformats.org/presentationml/2006/main">
+  <p:cSld>
+    <p:spTree>
+      <p:nvGrpSpPr>
+        <p:cNvPr id="1" name="">
+          <a:extLst>
+            <a:ext uri="{FF2B5EF4-FFF2-40B4-BE49-F238E27FC236}">
+              <a16:creationId xmlns:a16="http://schemas.microsoft.com/office/drawing/2014/main" id="{677E65E1-5DF3-2FE1-BF1F-36B02D0FEC76}"/>
+            </a:ext>
+          </a:extLst>
+        </p:cNvPr>
+        <p:cNvGrpSpPr/>
+        <p:nvPr/>
+      </p:nvGrpSpPr>
+      <p:grpSpPr>
+        <a:xfrm>
+          <a:off x="0" y="0"/>
+          <a:ext cx="0" cy="0"/>
+          <a:chOff x="0" y="0"/>
+          <a:chExt cx="0" cy="0"/>
+        </a:xfrm>
+      </p:grpSpPr>
+      <p:pic>
+        <p:nvPicPr>
+          <p:cNvPr id="3" name="Picture 2">
+            <a:extLst>
+              <a:ext uri="{FF2B5EF4-FFF2-40B4-BE49-F238E27FC236}">
+                <a16:creationId xmlns:a16="http://schemas.microsoft.com/office/drawing/2014/main" id="{8F0F888E-6C37-17E1-670D-996346E71810}"/>
+              </a:ext>
+            </a:extLst>
+          </p:cNvPr>
+          <p:cNvPicPr>
+            <a:picLocks noChangeAspect="1"/>
+          </p:cNvPicPr>
+          <p:nvPr/>
+        </p:nvPicPr>
+        <p:blipFill>
+          <a:blip r:embed="rId2"/>
+          <a:stretch>
+            <a:fillRect/>
+          </a:stretch>
+        </p:blipFill>
+        <p:spPr>
+          <a:xfrm>
+            <a:off x="0" y="1214427"/>
+            <a:ext cx="12192000" cy="4429145"/>
+          </a:xfrm>
+          <a:prstGeom prst="rect">
+            <a:avLst/>
+          </a:prstGeom>
+        </p:spPr>
+      </p:pic>
+    </p:spTree>
+    <p:extLst>
+      <p:ext uri="{BB962C8B-B14F-4D97-AF65-F5344CB8AC3E}">
+        <p14:creationId xmlns:p14="http://schemas.microsoft.com/office/powerpoint/2010/main" val="3483502725"/>
+      </p:ext>
+    </p:extLst>
+  </p:cSld>
+  <p:clrMapOvr>
+    <a:masterClrMapping/>
+  </p:clrMapOvr>
+</p:sld>
+</file>
+
 <file path=ppt/slides/slide22.xml><?xml version="1.0" encoding="utf-8"?>
+<p:sld xmlns:a="http://schemas.openxmlformats.org/drawingml/2006/main" xmlns:r="http://schemas.openxmlformats.org/officeDocument/2006/relationships" xmlns:p="http://schemas.openxmlformats.org/presentationml/2006/main">
+  <p:cSld>
+    <p:spTree>
+      <p:nvGrpSpPr>
+        <p:cNvPr id="1" name=""/>
+        <p:cNvGrpSpPr/>
+        <p:nvPr/>
+      </p:nvGrpSpPr>
+      <p:grpSpPr>
+        <a:xfrm>
+          <a:off x="0" y="0"/>
+          <a:ext cx="0" cy="0"/>
+          <a:chOff x="0" y="0"/>
+          <a:chExt cx="0" cy="0"/>
+        </a:xfrm>
+      </p:grpSpPr>
+      <p:pic>
+        <p:nvPicPr>
+          <p:cNvPr id="3" name="Picture 2">
+            <a:extLst>
+              <a:ext uri="{FF2B5EF4-FFF2-40B4-BE49-F238E27FC236}">
+                <a16:creationId xmlns:a16="http://schemas.microsoft.com/office/drawing/2014/main" id="{5A667DA2-6815-DE2B-768E-FDE43E3CE7EB}"/>
+              </a:ext>
+            </a:extLst>
+          </p:cNvPr>
+          <p:cNvPicPr>
+            <a:picLocks noChangeAspect="1"/>
+          </p:cNvPicPr>
+          <p:nvPr/>
+        </p:nvPicPr>
+        <p:blipFill>
+          <a:blip r:embed="rId2"/>
+          <a:stretch>
+            <a:fillRect/>
+          </a:stretch>
+        </p:blipFill>
+        <p:spPr>
+          <a:xfrm>
+            <a:off x="0" y="0"/>
+            <a:ext cx="7078980" cy="3865170"/>
+          </a:xfrm>
+          <a:prstGeom prst="rect">
+            <a:avLst/>
+          </a:prstGeom>
+        </p:spPr>
+      </p:pic>
+      <p:pic>
+        <p:nvPicPr>
+          <p:cNvPr id="5" name="Picture 4">
+            <a:extLst>
+              <a:ext uri="{FF2B5EF4-FFF2-40B4-BE49-F238E27FC236}">
+                <a16:creationId xmlns:a16="http://schemas.microsoft.com/office/drawing/2014/main" id="{3B15023E-4451-73EF-7EF8-DE3379C381B6}"/>
+              </a:ext>
+            </a:extLst>
+          </p:cNvPr>
+          <p:cNvPicPr>
+            <a:picLocks noChangeAspect="1"/>
+          </p:cNvPicPr>
+          <p:nvPr/>
+        </p:nvPicPr>
+        <p:blipFill>
+          <a:blip r:embed="rId3"/>
+          <a:stretch>
+            <a:fillRect/>
+          </a:stretch>
+        </p:blipFill>
+        <p:spPr>
+          <a:xfrm>
+            <a:off x="2834640" y="3493186"/>
+            <a:ext cx="9357360" cy="3292055"/>
+          </a:xfrm>
+          <a:prstGeom prst="rect">
+            <a:avLst/>
+          </a:prstGeom>
+        </p:spPr>
+      </p:pic>
+    </p:spTree>
+    <p:extLst>
+      <p:ext uri="{BB962C8B-B14F-4D97-AF65-F5344CB8AC3E}">
+        <p14:creationId xmlns:p14="http://schemas.microsoft.com/office/powerpoint/2010/main" val="1990716002"/>
+      </p:ext>
+    </p:extLst>
+  </p:cSld>
+  <p:clrMapOvr>
+    <a:masterClrMapping/>
+  </p:clrMapOvr>
+</p:sld>
+</file>
+
+<file path=ppt/slides/slide23.xml><?xml version="1.0" encoding="utf-8"?>
 <p:sld xmlns:a="http://schemas.openxmlformats.org/drawingml/2006/main" xmlns:r="http://schemas.openxmlformats.org/officeDocument/2006/relationships" xmlns:p="http://schemas.openxmlformats.org/presentationml/2006/main">
   <p:cSld>
     <p:spTree>

--- a/figures/figures.pptx
+++ b/figures/figures.pptx
@@ -5,7 +5,7 @@
     <p:sldMasterId id="2147483660" r:id="rId1"/>
   </p:sldMasterIdLst>
   <p:notesMasterIdLst>
-    <p:notesMasterId r:id="rId25"/>
+    <p:notesMasterId r:id="rId26"/>
   </p:notesMasterIdLst>
   <p:sldIdLst>
     <p:sldId id="258" r:id="rId2"/>
@@ -27,10 +27,11 @@
     <p:sldId id="271" r:id="rId18"/>
     <p:sldId id="272" r:id="rId19"/>
     <p:sldId id="273" r:id="rId20"/>
-    <p:sldId id="269" r:id="rId21"/>
-    <p:sldId id="274" r:id="rId22"/>
-    <p:sldId id="270" r:id="rId23"/>
-    <p:sldId id="257" r:id="rId24"/>
+    <p:sldId id="281" r:id="rId21"/>
+    <p:sldId id="269" r:id="rId22"/>
+    <p:sldId id="274" r:id="rId23"/>
+    <p:sldId id="270" r:id="rId24"/>
+    <p:sldId id="257" r:id="rId25"/>
   </p:sldIdLst>
   <p:sldSz cx="12192000" cy="6858000"/>
   <p:notesSz cx="6858000" cy="9144000"/>
@@ -185,6 +186,7 @@
         </p14:section>
         <p14:section name="Governance" id="{038CE4AA-62CD-47A2-8E40-F6F0DFCCB854}">
           <p14:sldIdLst>
+            <p14:sldId id="281"/>
             <p14:sldId id="269"/>
             <p14:sldId id="274"/>
             <p14:sldId id="270"/>
@@ -286,7 +288,7 @@
           <a:p>
             <a:fld id="{DAABB0E5-6D8D-4DEE-B75F-67010CF2307C}" type="datetimeFigureOut">
               <a:rPr lang="en-US" smtClean="0"/>
-              <a:t>4/11/2026</a:t>
+              <a:t>4/23/2026</a:t>
             </a:fld>
             <a:endParaRPr lang="en-US"/>
           </a:p>
@@ -971,7 +973,7 @@
           <a:p>
             <a:fld id="{B84C5C40-2055-49AF-9028-5DA79E75E391}" type="datetimeFigureOut">
               <a:rPr lang="en-US" smtClean="0"/>
-              <a:t>4/11/2026</a:t>
+              <a:t>4/23/2026</a:t>
             </a:fld>
             <a:endParaRPr lang="en-US"/>
           </a:p>
@@ -1141,7 +1143,7 @@
           <a:p>
             <a:fld id="{B84C5C40-2055-49AF-9028-5DA79E75E391}" type="datetimeFigureOut">
               <a:rPr lang="en-US" smtClean="0"/>
-              <a:t>4/11/2026</a:t>
+              <a:t>4/23/2026</a:t>
             </a:fld>
             <a:endParaRPr lang="en-US"/>
           </a:p>
@@ -1321,7 +1323,7 @@
           <a:p>
             <a:fld id="{B84C5C40-2055-49AF-9028-5DA79E75E391}" type="datetimeFigureOut">
               <a:rPr lang="en-US" smtClean="0"/>
-              <a:t>4/11/2026</a:t>
+              <a:t>4/23/2026</a:t>
             </a:fld>
             <a:endParaRPr lang="en-US"/>
           </a:p>
@@ -1491,7 +1493,7 @@
           <a:p>
             <a:fld id="{B84C5C40-2055-49AF-9028-5DA79E75E391}" type="datetimeFigureOut">
               <a:rPr lang="en-US" smtClean="0"/>
-              <a:t>4/11/2026</a:t>
+              <a:t>4/23/2026</a:t>
             </a:fld>
             <a:endParaRPr lang="en-US"/>
           </a:p>
@@ -1737,7 +1739,7 @@
           <a:p>
             <a:fld id="{B84C5C40-2055-49AF-9028-5DA79E75E391}" type="datetimeFigureOut">
               <a:rPr lang="en-US" smtClean="0"/>
-              <a:t>4/11/2026</a:t>
+              <a:t>4/23/2026</a:t>
             </a:fld>
             <a:endParaRPr lang="en-US"/>
           </a:p>
@@ -1969,7 +1971,7 @@
           <a:p>
             <a:fld id="{B84C5C40-2055-49AF-9028-5DA79E75E391}" type="datetimeFigureOut">
               <a:rPr lang="en-US" smtClean="0"/>
-              <a:t>4/11/2026</a:t>
+              <a:t>4/23/2026</a:t>
             </a:fld>
             <a:endParaRPr lang="en-US"/>
           </a:p>
@@ -2336,7 +2338,7 @@
           <a:p>
             <a:fld id="{B84C5C40-2055-49AF-9028-5DA79E75E391}" type="datetimeFigureOut">
               <a:rPr lang="en-US" smtClean="0"/>
-              <a:t>4/11/2026</a:t>
+              <a:t>4/23/2026</a:t>
             </a:fld>
             <a:endParaRPr lang="en-US"/>
           </a:p>
@@ -2454,7 +2456,7 @@
           <a:p>
             <a:fld id="{B84C5C40-2055-49AF-9028-5DA79E75E391}" type="datetimeFigureOut">
               <a:rPr lang="en-US" smtClean="0"/>
-              <a:t>4/11/2026</a:t>
+              <a:t>4/23/2026</a:t>
             </a:fld>
             <a:endParaRPr lang="en-US"/>
           </a:p>
@@ -2549,7 +2551,7 @@
           <a:p>
             <a:fld id="{B84C5C40-2055-49AF-9028-5DA79E75E391}" type="datetimeFigureOut">
               <a:rPr lang="en-US" smtClean="0"/>
-              <a:t>4/11/2026</a:t>
+              <a:t>4/23/2026</a:t>
             </a:fld>
             <a:endParaRPr lang="en-US"/>
           </a:p>
@@ -2826,7 +2828,7 @@
           <a:p>
             <a:fld id="{B84C5C40-2055-49AF-9028-5DA79E75E391}" type="datetimeFigureOut">
               <a:rPr lang="en-US" smtClean="0"/>
-              <a:t>4/11/2026</a:t>
+              <a:t>4/23/2026</a:t>
             </a:fld>
             <a:endParaRPr lang="en-US"/>
           </a:p>
@@ -3083,7 +3085,7 @@
           <a:p>
             <a:fld id="{B84C5C40-2055-49AF-9028-5DA79E75E391}" type="datetimeFigureOut">
               <a:rPr lang="en-US" smtClean="0"/>
-              <a:t>4/11/2026</a:t>
+              <a:t>4/23/2026</a:t>
             </a:fld>
             <a:endParaRPr lang="en-US"/>
           </a:p>
@@ -3296,7 +3298,7 @@
           <a:p>
             <a:fld id="{B84C5C40-2055-49AF-9028-5DA79E75E391}" type="datetimeFigureOut">
               <a:rPr lang="en-US" smtClean="0"/>
-              <a:t>4/11/2026</a:t>
+              <a:t>4/23/2026</a:t>
             </a:fld>
             <a:endParaRPr lang="en-US"/>
           </a:p>
@@ -4052,10 +4054,10 @@
           <p:nvPr/>
         </p:nvPicPr>
         <p:blipFill>
-          <a:blip r:embed="rId2">
+          <a:blip>
             <a:extLst>
               <a:ext uri="{96DAC541-7B7A-43D3-8B79-37D633B846F1}">
-                <asvg:svgBlip xmlns:asvg="http://schemas.microsoft.com/office/drawing/2016/SVG/main" r:embed="rId3"/>
+                <asvg:svgBlip xmlns:asvg="http://schemas.microsoft.com/office/drawing/2016/SVG/main" r:embed="rId2"/>
               </a:ext>
             </a:extLst>
           </a:blip>
@@ -4088,10 +4090,10 @@
           <p:nvPr/>
         </p:nvPicPr>
         <p:blipFill>
-          <a:blip r:embed="rId4">
+          <a:blip>
             <a:extLst>
               <a:ext uri="{96DAC541-7B7A-43D3-8B79-37D633B846F1}">
-                <asvg:svgBlip xmlns:asvg="http://schemas.microsoft.com/office/drawing/2016/SVG/main" r:embed="rId5"/>
+                <asvg:svgBlip xmlns:asvg="http://schemas.microsoft.com/office/drawing/2016/SVG/main" r:embed="rId3"/>
               </a:ext>
             </a:extLst>
           </a:blip>
@@ -4123,10 +4125,10 @@
           <p:nvPr/>
         </p:nvPicPr>
         <p:blipFill>
-          <a:blip r:embed="rId6">
+          <a:blip>
             <a:extLst>
               <a:ext uri="{96DAC541-7B7A-43D3-8B79-37D633B846F1}">
-                <asvg:svgBlip xmlns:asvg="http://schemas.microsoft.com/office/drawing/2016/SVG/main" r:embed="rId7"/>
+                <asvg:svgBlip xmlns:asvg="http://schemas.microsoft.com/office/drawing/2016/SVG/main" r:embed="rId4"/>
               </a:ext>
             </a:extLst>
           </a:blip>
@@ -4266,10 +4268,10 @@
           <p:nvPr/>
         </p:nvPicPr>
         <p:blipFill>
-          <a:blip r:embed="rId8">
+          <a:blip>
             <a:extLst>
               <a:ext uri="{96DAC541-7B7A-43D3-8B79-37D633B846F1}">
-                <asvg:svgBlip xmlns:asvg="http://schemas.microsoft.com/office/drawing/2016/SVG/main" r:embed="rId9"/>
+                <asvg:svgBlip xmlns:asvg="http://schemas.microsoft.com/office/drawing/2016/SVG/main" r:embed="rId5"/>
               </a:ext>
             </a:extLst>
           </a:blip>
@@ -5178,10 +5180,10 @@
           <p:nvPr/>
         </p:nvPicPr>
         <p:blipFill>
-          <a:blip r:embed="rId3">
+          <a:blip>
             <a:extLst>
               <a:ext uri="{96DAC541-7B7A-43D3-8B79-37D633B846F1}">
-                <asvg:svgBlip xmlns:asvg="http://schemas.microsoft.com/office/drawing/2016/SVG/main" r:embed="rId4"/>
+                <asvg:svgBlip xmlns:asvg="http://schemas.microsoft.com/office/drawing/2016/SVG/main" r:embed="rId3"/>
               </a:ext>
             </a:extLst>
           </a:blip>
@@ -6071,10 +6073,10 @@
             <p:nvPr/>
           </p:nvPicPr>
           <p:blipFill>
-            <a:blip r:embed="rId5">
+            <a:blip>
               <a:extLst>
                 <a:ext uri="{96DAC541-7B7A-43D3-8B79-37D633B846F1}">
-                  <asvg:svgBlip xmlns:asvg="http://schemas.microsoft.com/office/drawing/2016/SVG/main" r:embed="rId6"/>
+                  <asvg:svgBlip xmlns:asvg="http://schemas.microsoft.com/office/drawing/2016/SVG/main" r:embed="rId4"/>
                 </a:ext>
               </a:extLst>
             </a:blip>
@@ -6714,10 +6716,10 @@
           <p:nvPr/>
         </p:nvPicPr>
         <p:blipFill>
-          <a:blip r:embed="rId2">
+          <a:blip>
             <a:extLst>
               <a:ext uri="{96DAC541-7B7A-43D3-8B79-37D633B846F1}">
-                <asvg:svgBlip xmlns:asvg="http://schemas.microsoft.com/office/drawing/2016/SVG/main" r:embed="rId3"/>
+                <asvg:svgBlip xmlns:asvg="http://schemas.microsoft.com/office/drawing/2016/SVG/main" r:embed="rId2"/>
               </a:ext>
             </a:extLst>
           </a:blip>
@@ -8214,10 +8216,10 @@
           <p:nvPr/>
         </p:nvPicPr>
         <p:blipFill>
-          <a:blip r:embed="rId2">
+          <a:blip>
             <a:extLst>
               <a:ext uri="{96DAC541-7B7A-43D3-8B79-37D633B846F1}">
-                <asvg:svgBlip xmlns:asvg="http://schemas.microsoft.com/office/drawing/2016/SVG/main" r:embed="rId3"/>
+                <asvg:svgBlip xmlns:asvg="http://schemas.microsoft.com/office/drawing/2016/SVG/main" r:embed="rId2"/>
               </a:ext>
             </a:extLst>
           </a:blip>
@@ -8250,10 +8252,10 @@
           <p:nvPr/>
         </p:nvPicPr>
         <p:blipFill>
-          <a:blip r:embed="rId4">
+          <a:blip>
             <a:extLst>
               <a:ext uri="{96DAC541-7B7A-43D3-8B79-37D633B846F1}">
-                <asvg:svgBlip xmlns:asvg="http://schemas.microsoft.com/office/drawing/2016/SVG/main" r:embed="rId5"/>
+                <asvg:svgBlip xmlns:asvg="http://schemas.microsoft.com/office/drawing/2016/SVG/main" r:embed="rId3"/>
               </a:ext>
             </a:extLst>
           </a:blip>
@@ -8286,10 +8288,10 @@
           <p:nvPr/>
         </p:nvPicPr>
         <p:blipFill>
-          <a:blip r:embed="rId6">
+          <a:blip>
             <a:extLst>
               <a:ext uri="{96DAC541-7B7A-43D3-8B79-37D633B846F1}">
-                <asvg:svgBlip xmlns:asvg="http://schemas.microsoft.com/office/drawing/2016/SVG/main" r:embed="rId7"/>
+                <asvg:svgBlip xmlns:asvg="http://schemas.microsoft.com/office/drawing/2016/SVG/main" r:embed="rId4"/>
               </a:ext>
             </a:extLst>
           </a:blip>
@@ -8322,10 +8324,10 @@
           <p:nvPr/>
         </p:nvPicPr>
         <p:blipFill>
-          <a:blip r:embed="rId8">
+          <a:blip>
             <a:extLst>
               <a:ext uri="{96DAC541-7B7A-43D3-8B79-37D633B846F1}">
-                <asvg:svgBlip xmlns:asvg="http://schemas.microsoft.com/office/drawing/2016/SVG/main" r:embed="rId9"/>
+                <asvg:svgBlip xmlns:asvg="http://schemas.microsoft.com/office/drawing/2016/SVG/main" r:embed="rId5"/>
               </a:ext>
             </a:extLst>
           </a:blip>
@@ -9483,10 +9485,10 @@
           <p:nvPr/>
         </p:nvPicPr>
         <p:blipFill>
-          <a:blip r:embed="rId2">
+          <a:blip>
             <a:extLst>
               <a:ext uri="{96DAC541-7B7A-43D3-8B79-37D633B846F1}">
-                <asvg:svgBlip xmlns:asvg="http://schemas.microsoft.com/office/drawing/2016/SVG/main" r:embed="rId3"/>
+                <asvg:svgBlip xmlns:asvg="http://schemas.microsoft.com/office/drawing/2016/SVG/main" r:embed="rId2"/>
               </a:ext>
             </a:extLst>
           </a:blip>
@@ -15855,6 +15857,976 @@
           <a:chExt cx="0" cy="0"/>
         </a:xfrm>
       </p:grpSpPr>
+      <p:grpSp>
+        <p:nvGrpSpPr>
+          <p:cNvPr id="57" name="Group 56">
+            <a:extLst>
+              <a:ext uri="{FF2B5EF4-FFF2-40B4-BE49-F238E27FC236}">
+                <a16:creationId xmlns:a16="http://schemas.microsoft.com/office/drawing/2014/main" id="{94D3DA75-530C-7F8C-9F2D-5A7A12B26CC8}"/>
+              </a:ext>
+            </a:extLst>
+          </p:cNvPr>
+          <p:cNvGrpSpPr/>
+          <p:nvPr/>
+        </p:nvGrpSpPr>
+        <p:grpSpPr>
+          <a:xfrm>
+            <a:off x="2742318" y="1761898"/>
+            <a:ext cx="6707363" cy="3334204"/>
+            <a:chOff x="2626805" y="1138961"/>
+            <a:chExt cx="6707363" cy="3334204"/>
+          </a:xfrm>
+        </p:grpSpPr>
+        <p:sp>
+          <p:nvSpPr>
+            <p:cNvPr id="2" name="Rectangle: Rounded Corners 1">
+              <a:extLst>
+                <a:ext uri="{FF2B5EF4-FFF2-40B4-BE49-F238E27FC236}">
+                  <a16:creationId xmlns:a16="http://schemas.microsoft.com/office/drawing/2014/main" id="{42E1BAB5-E274-763D-6C88-4CAF97E3D6C2}"/>
+                </a:ext>
+              </a:extLst>
+            </p:cNvPr>
+            <p:cNvSpPr/>
+            <p:nvPr/>
+          </p:nvSpPr>
+          <p:spPr>
+            <a:xfrm>
+              <a:off x="2626805" y="2444034"/>
+              <a:ext cx="1438743" cy="724060"/>
+            </a:xfrm>
+            <a:prstGeom prst="roundRect">
+              <a:avLst/>
+            </a:prstGeom>
+            <a:solidFill>
+              <a:srgbClr val="E5F1F8"/>
+            </a:solidFill>
+            <a:ln>
+              <a:solidFill>
+                <a:schemeClr val="tx1"/>
+              </a:solidFill>
+            </a:ln>
+          </p:spPr>
+          <p:style>
+            <a:lnRef idx="2">
+              <a:schemeClr val="accent1">
+                <a:shade val="15000"/>
+              </a:schemeClr>
+            </a:lnRef>
+            <a:fillRef idx="1">
+              <a:schemeClr val="accent1"/>
+            </a:fillRef>
+            <a:effectRef idx="0">
+              <a:schemeClr val="accent1"/>
+            </a:effectRef>
+            <a:fontRef idx="minor">
+              <a:schemeClr val="lt1"/>
+            </a:fontRef>
+          </p:style>
+          <p:txBody>
+            <a:bodyPr rtlCol="0" anchor="ctr"/>
+            <a:lstStyle/>
+            <a:p>
+              <a:pPr algn="ctr"/>
+              <a:r>
+                <a:rPr lang="en-US" dirty="0">
+                  <a:solidFill>
+                    <a:schemeClr val="tx1"/>
+                  </a:solidFill>
+                </a:rPr>
+                <a:t>User Input</a:t>
+              </a:r>
+            </a:p>
+          </p:txBody>
+        </p:sp>
+        <p:sp>
+          <p:nvSpPr>
+            <p:cNvPr id="3" name="Rectangle: Rounded Corners 2">
+              <a:extLst>
+                <a:ext uri="{FF2B5EF4-FFF2-40B4-BE49-F238E27FC236}">
+                  <a16:creationId xmlns:a16="http://schemas.microsoft.com/office/drawing/2014/main" id="{32354587-DCA6-E904-8F29-6F6BFBBEFBD3}"/>
+                </a:ext>
+              </a:extLst>
+            </p:cNvPr>
+            <p:cNvSpPr/>
+            <p:nvPr/>
+          </p:nvSpPr>
+          <p:spPr>
+            <a:xfrm>
+              <a:off x="5261115" y="2444034"/>
+              <a:ext cx="1438743" cy="724060"/>
+            </a:xfrm>
+            <a:prstGeom prst="roundRect">
+              <a:avLst/>
+            </a:prstGeom>
+            <a:solidFill>
+              <a:srgbClr val="E5F1F8"/>
+            </a:solidFill>
+            <a:ln>
+              <a:solidFill>
+                <a:schemeClr val="tx1"/>
+              </a:solidFill>
+            </a:ln>
+          </p:spPr>
+          <p:style>
+            <a:lnRef idx="2">
+              <a:schemeClr val="accent1">
+                <a:shade val="15000"/>
+              </a:schemeClr>
+            </a:lnRef>
+            <a:fillRef idx="1">
+              <a:schemeClr val="accent1"/>
+            </a:fillRef>
+            <a:effectRef idx="0">
+              <a:schemeClr val="accent1"/>
+            </a:effectRef>
+            <a:fontRef idx="minor">
+              <a:schemeClr val="lt1"/>
+            </a:fontRef>
+          </p:style>
+          <p:txBody>
+            <a:bodyPr rtlCol="0" anchor="ctr"/>
+            <a:lstStyle/>
+            <a:p>
+              <a:pPr algn="ctr"/>
+              <a:r>
+                <a:rPr lang="en-US" dirty="0">
+                  <a:solidFill>
+                    <a:schemeClr val="tx1"/>
+                  </a:solidFill>
+                </a:rPr>
+                <a:t>Tool Call &amp; Response</a:t>
+              </a:r>
+            </a:p>
+          </p:txBody>
+        </p:sp>
+        <p:sp>
+          <p:nvSpPr>
+            <p:cNvPr id="5" name="Rectangle: Rounded Corners 4">
+              <a:extLst>
+                <a:ext uri="{FF2B5EF4-FFF2-40B4-BE49-F238E27FC236}">
+                  <a16:creationId xmlns:a16="http://schemas.microsoft.com/office/drawing/2014/main" id="{C88989B2-FAE5-E38B-FFE5-3D8A1AFD67E2}"/>
+                </a:ext>
+              </a:extLst>
+            </p:cNvPr>
+            <p:cNvSpPr/>
+            <p:nvPr/>
+          </p:nvSpPr>
+          <p:spPr>
+            <a:xfrm>
+              <a:off x="7895425" y="2444034"/>
+              <a:ext cx="1438743" cy="724060"/>
+            </a:xfrm>
+            <a:prstGeom prst="roundRect">
+              <a:avLst/>
+            </a:prstGeom>
+            <a:solidFill>
+              <a:srgbClr val="E5F1F8"/>
+            </a:solidFill>
+            <a:ln>
+              <a:solidFill>
+                <a:schemeClr val="tx1"/>
+              </a:solidFill>
+            </a:ln>
+          </p:spPr>
+          <p:style>
+            <a:lnRef idx="2">
+              <a:schemeClr val="accent1">
+                <a:shade val="15000"/>
+              </a:schemeClr>
+            </a:lnRef>
+            <a:fillRef idx="1">
+              <a:schemeClr val="accent1"/>
+            </a:fillRef>
+            <a:effectRef idx="0">
+              <a:schemeClr val="accent1"/>
+            </a:effectRef>
+            <a:fontRef idx="minor">
+              <a:schemeClr val="lt1"/>
+            </a:fontRef>
+          </p:style>
+          <p:txBody>
+            <a:bodyPr rtlCol="0" anchor="ctr"/>
+            <a:lstStyle/>
+            <a:p>
+              <a:pPr algn="ctr"/>
+              <a:r>
+                <a:rPr lang="en-US" dirty="0">
+                  <a:solidFill>
+                    <a:schemeClr val="tx1"/>
+                  </a:solidFill>
+                </a:rPr>
+                <a:t>Agent Output</a:t>
+              </a:r>
+            </a:p>
+          </p:txBody>
+        </p:sp>
+        <p:cxnSp>
+          <p:nvCxnSpPr>
+            <p:cNvPr id="6" name="Straight Arrow Connector 5">
+              <a:extLst>
+                <a:ext uri="{FF2B5EF4-FFF2-40B4-BE49-F238E27FC236}">
+                  <a16:creationId xmlns:a16="http://schemas.microsoft.com/office/drawing/2014/main" id="{AF1DA7FB-B4E6-70FC-E344-8A1F141B58BC}"/>
+                </a:ext>
+              </a:extLst>
+            </p:cNvPr>
+            <p:cNvCxnSpPr>
+              <a:cxnSpLocks/>
+              <a:stCxn id="2" idx="3"/>
+              <a:endCxn id="3" idx="1"/>
+            </p:cNvCxnSpPr>
+            <p:nvPr/>
+          </p:nvCxnSpPr>
+          <p:spPr>
+            <a:xfrm>
+              <a:off x="4065548" y="2806064"/>
+              <a:ext cx="1195567" cy="0"/>
+            </a:xfrm>
+            <a:prstGeom prst="straightConnector1">
+              <a:avLst/>
+            </a:prstGeom>
+            <a:ln>
+              <a:solidFill>
+                <a:schemeClr val="tx1"/>
+              </a:solidFill>
+              <a:prstDash val="solid"/>
+              <a:headEnd type="none" w="lg" len="lg"/>
+              <a:tailEnd type="triangle" w="lg" len="lg"/>
+            </a:ln>
+          </p:spPr>
+          <p:style>
+            <a:lnRef idx="2">
+              <a:schemeClr val="accent1"/>
+            </a:lnRef>
+            <a:fillRef idx="0">
+              <a:schemeClr val="accent1"/>
+            </a:fillRef>
+            <a:effectRef idx="1">
+              <a:schemeClr val="accent1"/>
+            </a:effectRef>
+            <a:fontRef idx="minor">
+              <a:schemeClr val="tx1"/>
+            </a:fontRef>
+          </p:style>
+        </p:cxnSp>
+        <p:sp>
+          <p:nvSpPr>
+            <p:cNvPr id="16" name="Rectangle: Rounded Corners 15">
+              <a:extLst>
+                <a:ext uri="{FF2B5EF4-FFF2-40B4-BE49-F238E27FC236}">
+                  <a16:creationId xmlns:a16="http://schemas.microsoft.com/office/drawing/2014/main" id="{76E5D172-00CA-4800-2437-6E2B4EBDF04D}"/>
+                </a:ext>
+              </a:extLst>
+            </p:cNvPr>
+            <p:cNvSpPr/>
+            <p:nvPr/>
+          </p:nvSpPr>
+          <p:spPr>
+            <a:xfrm>
+              <a:off x="3460475" y="1138963"/>
+              <a:ext cx="1914939" cy="928378"/>
+            </a:xfrm>
+            <a:prstGeom prst="roundRect">
+              <a:avLst/>
+            </a:prstGeom>
+            <a:solidFill>
+              <a:srgbClr val="B2D4EB"/>
+            </a:solidFill>
+            <a:ln>
+              <a:solidFill>
+                <a:schemeClr val="tx1"/>
+              </a:solidFill>
+            </a:ln>
+          </p:spPr>
+          <p:style>
+            <a:lnRef idx="2">
+              <a:schemeClr val="accent1">
+                <a:shade val="15000"/>
+              </a:schemeClr>
+            </a:lnRef>
+            <a:fillRef idx="1">
+              <a:schemeClr val="accent1"/>
+            </a:fillRef>
+            <a:effectRef idx="0">
+              <a:schemeClr val="accent1"/>
+            </a:effectRef>
+            <a:fontRef idx="minor">
+              <a:schemeClr val="lt1"/>
+            </a:fontRef>
+          </p:style>
+          <p:txBody>
+            <a:bodyPr rtlCol="0" anchor="ctr"/>
+            <a:lstStyle/>
+            <a:p>
+              <a:pPr algn="ctr"/>
+              <a:r>
+                <a:rPr lang="en-US" dirty="0">
+                  <a:solidFill>
+                    <a:schemeClr val="tx1"/>
+                  </a:solidFill>
+                </a:rPr>
+                <a:t>Check for harmful requests</a:t>
+              </a:r>
+              <a:endParaRPr lang="en-US" i="1" dirty="0">
+                <a:solidFill>
+                  <a:schemeClr val="tx1"/>
+                </a:solidFill>
+              </a:endParaRPr>
+            </a:p>
+          </p:txBody>
+        </p:sp>
+        <p:cxnSp>
+          <p:nvCxnSpPr>
+            <p:cNvPr id="18" name="Straight Connector 17">
+              <a:extLst>
+                <a:ext uri="{FF2B5EF4-FFF2-40B4-BE49-F238E27FC236}">
+                  <a16:creationId xmlns:a16="http://schemas.microsoft.com/office/drawing/2014/main" id="{B5E30DE5-D8B0-6032-35C8-AA4A209F9440}"/>
+                </a:ext>
+              </a:extLst>
+            </p:cNvPr>
+            <p:cNvCxnSpPr>
+              <a:cxnSpLocks/>
+              <a:stCxn id="16" idx="2"/>
+              <a:endCxn id="25" idx="0"/>
+            </p:cNvCxnSpPr>
+            <p:nvPr/>
+          </p:nvCxnSpPr>
+          <p:spPr>
+            <a:xfrm>
+              <a:off x="4417945" y="2067341"/>
+              <a:ext cx="1215" cy="670142"/>
+            </a:xfrm>
+            <a:prstGeom prst="line">
+              <a:avLst/>
+            </a:prstGeom>
+            <a:ln>
+              <a:solidFill>
+                <a:schemeClr val="tx1"/>
+              </a:solidFill>
+              <a:prstDash val="sysDash"/>
+              <a:headEnd type="none" w="med" len="med"/>
+              <a:tailEnd type="none" w="med" len="med"/>
+            </a:ln>
+          </p:spPr>
+          <p:style>
+            <a:lnRef idx="2">
+              <a:schemeClr val="accent1"/>
+            </a:lnRef>
+            <a:fillRef idx="0">
+              <a:schemeClr val="accent1"/>
+            </a:fillRef>
+            <a:effectRef idx="1">
+              <a:schemeClr val="accent1"/>
+            </a:effectRef>
+            <a:fontRef idx="minor">
+              <a:schemeClr val="tx1"/>
+            </a:fontRef>
+          </p:style>
+        </p:cxnSp>
+        <p:sp>
+          <p:nvSpPr>
+            <p:cNvPr id="20" name="Rectangle: Rounded Corners 19">
+              <a:extLst>
+                <a:ext uri="{FF2B5EF4-FFF2-40B4-BE49-F238E27FC236}">
+                  <a16:creationId xmlns:a16="http://schemas.microsoft.com/office/drawing/2014/main" id="{9C640152-4738-174F-FD99-7D55FC76F495}"/>
+                </a:ext>
+              </a:extLst>
+            </p:cNvPr>
+            <p:cNvSpPr/>
+            <p:nvPr/>
+          </p:nvSpPr>
+          <p:spPr>
+            <a:xfrm>
+              <a:off x="3836948" y="3544787"/>
+              <a:ext cx="1914939" cy="928378"/>
+            </a:xfrm>
+            <a:prstGeom prst="roundRect">
+              <a:avLst/>
+            </a:prstGeom>
+            <a:solidFill>
+              <a:srgbClr val="B2D4EB"/>
+            </a:solidFill>
+            <a:ln>
+              <a:solidFill>
+                <a:schemeClr val="tx1"/>
+              </a:solidFill>
+            </a:ln>
+          </p:spPr>
+          <p:style>
+            <a:lnRef idx="2">
+              <a:schemeClr val="accent1">
+                <a:shade val="15000"/>
+              </a:schemeClr>
+            </a:lnRef>
+            <a:fillRef idx="1">
+              <a:schemeClr val="accent1"/>
+            </a:fillRef>
+            <a:effectRef idx="0">
+              <a:schemeClr val="accent1"/>
+            </a:effectRef>
+            <a:fontRef idx="minor">
+              <a:schemeClr val="lt1"/>
+            </a:fontRef>
+          </p:style>
+          <p:txBody>
+            <a:bodyPr rtlCol="0" anchor="ctr"/>
+            <a:lstStyle/>
+            <a:p>
+              <a:pPr algn="ctr"/>
+              <a:r>
+                <a:rPr lang="en-US" dirty="0">
+                  <a:solidFill>
+                    <a:schemeClr val="tx1"/>
+                  </a:solidFill>
+                </a:rPr>
+                <a:t>Limit off-task or malicious tool requests</a:t>
+              </a:r>
+              <a:endParaRPr lang="en-US" i="1" dirty="0">
+                <a:solidFill>
+                  <a:schemeClr val="tx1"/>
+                </a:solidFill>
+              </a:endParaRPr>
+            </a:p>
+          </p:txBody>
+        </p:sp>
+        <p:sp>
+          <p:nvSpPr>
+            <p:cNvPr id="21" name="Rectangle: Rounded Corners 20">
+              <a:extLst>
+                <a:ext uri="{FF2B5EF4-FFF2-40B4-BE49-F238E27FC236}">
+                  <a16:creationId xmlns:a16="http://schemas.microsoft.com/office/drawing/2014/main" id="{CE8A49B1-D71B-5EA0-3F20-96427E390C88}"/>
+                </a:ext>
+              </a:extLst>
+            </p:cNvPr>
+            <p:cNvSpPr/>
+            <p:nvPr/>
+          </p:nvSpPr>
+          <p:spPr>
+            <a:xfrm>
+              <a:off x="6096000" y="3544787"/>
+              <a:ext cx="1914939" cy="928378"/>
+            </a:xfrm>
+            <a:prstGeom prst="roundRect">
+              <a:avLst/>
+            </a:prstGeom>
+            <a:solidFill>
+              <a:srgbClr val="B2D4EB"/>
+            </a:solidFill>
+            <a:ln>
+              <a:solidFill>
+                <a:schemeClr val="tx1"/>
+              </a:solidFill>
+            </a:ln>
+          </p:spPr>
+          <p:style>
+            <a:lnRef idx="2">
+              <a:schemeClr val="accent1">
+                <a:shade val="15000"/>
+              </a:schemeClr>
+            </a:lnRef>
+            <a:fillRef idx="1">
+              <a:schemeClr val="accent1"/>
+            </a:fillRef>
+            <a:effectRef idx="0">
+              <a:schemeClr val="accent1"/>
+            </a:effectRef>
+            <a:fontRef idx="minor">
+              <a:schemeClr val="lt1"/>
+            </a:fontRef>
+          </p:style>
+          <p:txBody>
+            <a:bodyPr rtlCol="0" anchor="ctr"/>
+            <a:lstStyle/>
+            <a:p>
+              <a:pPr algn="ctr"/>
+              <a:r>
+                <a:rPr lang="en-US" dirty="0">
+                  <a:solidFill>
+                    <a:schemeClr val="tx1"/>
+                  </a:solidFill>
+                </a:rPr>
+                <a:t>Remove sensitive info from reasoning</a:t>
+              </a:r>
+              <a:endParaRPr lang="en-US" i="1" dirty="0">
+                <a:solidFill>
+                  <a:schemeClr val="tx1"/>
+                </a:solidFill>
+              </a:endParaRPr>
+            </a:p>
+          </p:txBody>
+        </p:sp>
+        <p:sp>
+          <p:nvSpPr>
+            <p:cNvPr id="25" name="Oval 24">
+              <a:extLst>
+                <a:ext uri="{FF2B5EF4-FFF2-40B4-BE49-F238E27FC236}">
+                  <a16:creationId xmlns:a16="http://schemas.microsoft.com/office/drawing/2014/main" id="{E4AFC691-A3D6-2FFA-81BA-8C7DE54F75B0}"/>
+                </a:ext>
+              </a:extLst>
+            </p:cNvPr>
+            <p:cNvSpPr/>
+            <p:nvPr/>
+          </p:nvSpPr>
+          <p:spPr>
+            <a:xfrm>
+              <a:off x="4350580" y="2737483"/>
+              <a:ext cx="137160" cy="137160"/>
+            </a:xfrm>
+            <a:prstGeom prst="ellipse">
+              <a:avLst/>
+            </a:prstGeom>
+          </p:spPr>
+          <p:style>
+            <a:lnRef idx="2">
+              <a:schemeClr val="dk1">
+                <a:shade val="15000"/>
+              </a:schemeClr>
+            </a:lnRef>
+            <a:fillRef idx="1">
+              <a:schemeClr val="dk1"/>
+            </a:fillRef>
+            <a:effectRef idx="0">
+              <a:schemeClr val="dk1"/>
+            </a:effectRef>
+            <a:fontRef idx="minor">
+              <a:schemeClr val="lt1"/>
+            </a:fontRef>
+          </p:style>
+          <p:txBody>
+            <a:bodyPr rtlCol="0" anchor="ctr"/>
+            <a:lstStyle/>
+            <a:p>
+              <a:pPr algn="ctr"/>
+              <a:endParaRPr lang="en-US"/>
+            </a:p>
+          </p:txBody>
+        </p:sp>
+        <p:sp>
+          <p:nvSpPr>
+            <p:cNvPr id="28" name="Oval 27">
+              <a:extLst>
+                <a:ext uri="{FF2B5EF4-FFF2-40B4-BE49-F238E27FC236}">
+                  <a16:creationId xmlns:a16="http://schemas.microsoft.com/office/drawing/2014/main" id="{50B510AA-FF5C-95FD-3DCF-B2FFD06A3D55}"/>
+                </a:ext>
+              </a:extLst>
+            </p:cNvPr>
+            <p:cNvSpPr/>
+            <p:nvPr/>
+          </p:nvSpPr>
+          <p:spPr>
+            <a:xfrm>
+              <a:off x="4725838" y="2737483"/>
+              <a:ext cx="137160" cy="137160"/>
+            </a:xfrm>
+            <a:prstGeom prst="ellipse">
+              <a:avLst/>
+            </a:prstGeom>
+          </p:spPr>
+          <p:style>
+            <a:lnRef idx="2">
+              <a:schemeClr val="dk1">
+                <a:shade val="15000"/>
+              </a:schemeClr>
+            </a:lnRef>
+            <a:fillRef idx="1">
+              <a:schemeClr val="dk1"/>
+            </a:fillRef>
+            <a:effectRef idx="0">
+              <a:schemeClr val="dk1"/>
+            </a:effectRef>
+            <a:fontRef idx="minor">
+              <a:schemeClr val="lt1"/>
+            </a:fontRef>
+          </p:style>
+          <p:txBody>
+            <a:bodyPr rtlCol="0" anchor="ctr"/>
+            <a:lstStyle/>
+            <a:p>
+              <a:pPr algn="ctr"/>
+              <a:endParaRPr lang="en-US"/>
+            </a:p>
+          </p:txBody>
+        </p:sp>
+        <p:cxnSp>
+          <p:nvCxnSpPr>
+            <p:cNvPr id="29" name="Straight Connector 28">
+              <a:extLst>
+                <a:ext uri="{FF2B5EF4-FFF2-40B4-BE49-F238E27FC236}">
+                  <a16:creationId xmlns:a16="http://schemas.microsoft.com/office/drawing/2014/main" id="{A3BF217B-83BA-289D-E5E5-4473C0B1D346}"/>
+                </a:ext>
+              </a:extLst>
+            </p:cNvPr>
+            <p:cNvCxnSpPr>
+              <a:cxnSpLocks/>
+              <a:stCxn id="28" idx="4"/>
+              <a:endCxn id="20" idx="0"/>
+            </p:cNvCxnSpPr>
+            <p:nvPr/>
+          </p:nvCxnSpPr>
+          <p:spPr>
+            <a:xfrm>
+              <a:off x="4794418" y="2874643"/>
+              <a:ext cx="0" cy="670144"/>
+            </a:xfrm>
+            <a:prstGeom prst="line">
+              <a:avLst/>
+            </a:prstGeom>
+            <a:ln>
+              <a:solidFill>
+                <a:schemeClr val="tx1"/>
+              </a:solidFill>
+              <a:prstDash val="sysDash"/>
+              <a:headEnd type="none" w="med" len="med"/>
+              <a:tailEnd type="none" w="med" len="med"/>
+            </a:ln>
+          </p:spPr>
+          <p:style>
+            <a:lnRef idx="2">
+              <a:schemeClr val="accent1"/>
+            </a:lnRef>
+            <a:fillRef idx="0">
+              <a:schemeClr val="accent1"/>
+            </a:fillRef>
+            <a:effectRef idx="1">
+              <a:schemeClr val="accent1"/>
+            </a:effectRef>
+            <a:fontRef idx="minor">
+              <a:schemeClr val="tx1"/>
+            </a:fontRef>
+          </p:style>
+        </p:cxnSp>
+        <p:cxnSp>
+          <p:nvCxnSpPr>
+            <p:cNvPr id="40" name="Straight Connector 39">
+              <a:extLst>
+                <a:ext uri="{FF2B5EF4-FFF2-40B4-BE49-F238E27FC236}">
+                  <a16:creationId xmlns:a16="http://schemas.microsoft.com/office/drawing/2014/main" id="{D0973632-01B6-A0BB-7642-2574628EF338}"/>
+                </a:ext>
+              </a:extLst>
+            </p:cNvPr>
+            <p:cNvCxnSpPr>
+              <a:cxnSpLocks/>
+              <a:stCxn id="21" idx="0"/>
+              <a:endCxn id="48" idx="4"/>
+            </p:cNvCxnSpPr>
+            <p:nvPr/>
+          </p:nvCxnSpPr>
+          <p:spPr>
+            <a:xfrm flipV="1">
+              <a:off x="7053470" y="2874643"/>
+              <a:ext cx="0" cy="670144"/>
+            </a:xfrm>
+            <a:prstGeom prst="line">
+              <a:avLst/>
+            </a:prstGeom>
+            <a:ln>
+              <a:solidFill>
+                <a:schemeClr val="tx1"/>
+              </a:solidFill>
+              <a:prstDash val="sysDash"/>
+              <a:headEnd type="none" w="med" len="med"/>
+              <a:tailEnd type="none" w="med" len="med"/>
+            </a:ln>
+          </p:spPr>
+          <p:style>
+            <a:lnRef idx="2">
+              <a:schemeClr val="accent1"/>
+            </a:lnRef>
+            <a:fillRef idx="0">
+              <a:schemeClr val="accent1"/>
+            </a:fillRef>
+            <a:effectRef idx="1">
+              <a:schemeClr val="accent1"/>
+            </a:effectRef>
+            <a:fontRef idx="minor">
+              <a:schemeClr val="tx1"/>
+            </a:fontRef>
+          </p:style>
+        </p:cxnSp>
+        <p:sp>
+          <p:nvSpPr>
+            <p:cNvPr id="46" name="Rectangle: Rounded Corners 45">
+              <a:extLst>
+                <a:ext uri="{FF2B5EF4-FFF2-40B4-BE49-F238E27FC236}">
+                  <a16:creationId xmlns:a16="http://schemas.microsoft.com/office/drawing/2014/main" id="{79F8E829-F3C4-30FE-28E1-43304C61F284}"/>
+                </a:ext>
+              </a:extLst>
+            </p:cNvPr>
+            <p:cNvSpPr/>
+            <p:nvPr/>
+          </p:nvSpPr>
+          <p:spPr>
+            <a:xfrm>
+              <a:off x="6471258" y="1138961"/>
+              <a:ext cx="1914939" cy="928378"/>
+            </a:xfrm>
+            <a:prstGeom prst="roundRect">
+              <a:avLst/>
+            </a:prstGeom>
+            <a:solidFill>
+              <a:srgbClr val="B2D4EB"/>
+            </a:solidFill>
+            <a:ln>
+              <a:solidFill>
+                <a:schemeClr val="tx1"/>
+              </a:solidFill>
+            </a:ln>
+          </p:spPr>
+          <p:style>
+            <a:lnRef idx="2">
+              <a:schemeClr val="accent1">
+                <a:shade val="15000"/>
+              </a:schemeClr>
+            </a:lnRef>
+            <a:fillRef idx="1">
+              <a:schemeClr val="accent1"/>
+            </a:fillRef>
+            <a:effectRef idx="0">
+              <a:schemeClr val="accent1"/>
+            </a:effectRef>
+            <a:fontRef idx="minor">
+              <a:schemeClr val="lt1"/>
+            </a:fontRef>
+          </p:style>
+          <p:txBody>
+            <a:bodyPr rtlCol="0" anchor="ctr"/>
+            <a:lstStyle/>
+            <a:p>
+              <a:pPr algn="ctr"/>
+              <a:r>
+                <a:rPr lang="en-US" dirty="0">
+                  <a:solidFill>
+                    <a:schemeClr val="tx1"/>
+                  </a:solidFill>
+                </a:rPr>
+                <a:t>Last checks &amp; annotations before response</a:t>
+              </a:r>
+              <a:endParaRPr lang="en-US" i="1" dirty="0">
+                <a:solidFill>
+                  <a:schemeClr val="tx1"/>
+                </a:solidFill>
+              </a:endParaRPr>
+            </a:p>
+          </p:txBody>
+        </p:sp>
+        <p:cxnSp>
+          <p:nvCxnSpPr>
+            <p:cNvPr id="47" name="Straight Arrow Connector 46">
+              <a:extLst>
+                <a:ext uri="{FF2B5EF4-FFF2-40B4-BE49-F238E27FC236}">
+                  <a16:creationId xmlns:a16="http://schemas.microsoft.com/office/drawing/2014/main" id="{FB411845-759C-7B36-5B9F-4D89DD0FB430}"/>
+                </a:ext>
+              </a:extLst>
+            </p:cNvPr>
+            <p:cNvCxnSpPr>
+              <a:cxnSpLocks/>
+              <a:stCxn id="3" idx="3"/>
+              <a:endCxn id="5" idx="1"/>
+            </p:cNvCxnSpPr>
+            <p:nvPr/>
+          </p:nvCxnSpPr>
+          <p:spPr>
+            <a:xfrm>
+              <a:off x="6699858" y="2806064"/>
+              <a:ext cx="1195567" cy="0"/>
+            </a:xfrm>
+            <a:prstGeom prst="straightConnector1">
+              <a:avLst/>
+            </a:prstGeom>
+            <a:ln>
+              <a:solidFill>
+                <a:schemeClr val="tx1"/>
+              </a:solidFill>
+              <a:prstDash val="solid"/>
+              <a:headEnd type="none" w="lg" len="lg"/>
+              <a:tailEnd type="triangle" w="lg" len="lg"/>
+            </a:ln>
+          </p:spPr>
+          <p:style>
+            <a:lnRef idx="2">
+              <a:schemeClr val="accent1"/>
+            </a:lnRef>
+            <a:fillRef idx="0">
+              <a:schemeClr val="accent1"/>
+            </a:fillRef>
+            <a:effectRef idx="1">
+              <a:schemeClr val="accent1"/>
+            </a:effectRef>
+            <a:fontRef idx="minor">
+              <a:schemeClr val="tx1"/>
+            </a:fontRef>
+          </p:style>
+        </p:cxnSp>
+        <p:sp>
+          <p:nvSpPr>
+            <p:cNvPr id="48" name="Oval 47">
+              <a:extLst>
+                <a:ext uri="{FF2B5EF4-FFF2-40B4-BE49-F238E27FC236}">
+                  <a16:creationId xmlns:a16="http://schemas.microsoft.com/office/drawing/2014/main" id="{15A50184-1911-57A0-BC51-2E2FCC6E2FB1}"/>
+                </a:ext>
+              </a:extLst>
+            </p:cNvPr>
+            <p:cNvSpPr/>
+            <p:nvPr/>
+          </p:nvSpPr>
+          <p:spPr>
+            <a:xfrm>
+              <a:off x="6984890" y="2737483"/>
+              <a:ext cx="137160" cy="137160"/>
+            </a:xfrm>
+            <a:prstGeom prst="ellipse">
+              <a:avLst/>
+            </a:prstGeom>
+          </p:spPr>
+          <p:style>
+            <a:lnRef idx="2">
+              <a:schemeClr val="dk1">
+                <a:shade val="15000"/>
+              </a:schemeClr>
+            </a:lnRef>
+            <a:fillRef idx="1">
+              <a:schemeClr val="dk1"/>
+            </a:fillRef>
+            <a:effectRef idx="0">
+              <a:schemeClr val="dk1"/>
+            </a:effectRef>
+            <a:fontRef idx="minor">
+              <a:schemeClr val="lt1"/>
+            </a:fontRef>
+          </p:style>
+          <p:txBody>
+            <a:bodyPr rtlCol="0" anchor="ctr"/>
+            <a:lstStyle/>
+            <a:p>
+              <a:pPr algn="ctr"/>
+              <a:endParaRPr lang="en-US"/>
+            </a:p>
+          </p:txBody>
+        </p:sp>
+        <p:sp>
+          <p:nvSpPr>
+            <p:cNvPr id="49" name="Oval 48">
+              <a:extLst>
+                <a:ext uri="{FF2B5EF4-FFF2-40B4-BE49-F238E27FC236}">
+                  <a16:creationId xmlns:a16="http://schemas.microsoft.com/office/drawing/2014/main" id="{4DBFB7B5-4EF5-73EA-6169-E38F3155B0DA}"/>
+                </a:ext>
+              </a:extLst>
+            </p:cNvPr>
+            <p:cNvSpPr/>
+            <p:nvPr/>
+          </p:nvSpPr>
+          <p:spPr>
+            <a:xfrm>
+              <a:off x="7360148" y="2737483"/>
+              <a:ext cx="137160" cy="137160"/>
+            </a:xfrm>
+            <a:prstGeom prst="ellipse">
+              <a:avLst/>
+            </a:prstGeom>
+          </p:spPr>
+          <p:style>
+            <a:lnRef idx="2">
+              <a:schemeClr val="dk1">
+                <a:shade val="15000"/>
+              </a:schemeClr>
+            </a:lnRef>
+            <a:fillRef idx="1">
+              <a:schemeClr val="dk1"/>
+            </a:fillRef>
+            <a:effectRef idx="0">
+              <a:schemeClr val="dk1"/>
+            </a:effectRef>
+            <a:fontRef idx="minor">
+              <a:schemeClr val="lt1"/>
+            </a:fontRef>
+          </p:style>
+          <p:txBody>
+            <a:bodyPr rtlCol="0" anchor="ctr"/>
+            <a:lstStyle/>
+            <a:p>
+              <a:pPr algn="ctr"/>
+              <a:endParaRPr lang="en-US"/>
+            </a:p>
+          </p:txBody>
+        </p:sp>
+        <p:cxnSp>
+          <p:nvCxnSpPr>
+            <p:cNvPr id="54" name="Straight Connector 53">
+              <a:extLst>
+                <a:ext uri="{FF2B5EF4-FFF2-40B4-BE49-F238E27FC236}">
+                  <a16:creationId xmlns:a16="http://schemas.microsoft.com/office/drawing/2014/main" id="{915D2FED-027D-2E87-5FF7-B06AF88F9EE2}"/>
+                </a:ext>
+              </a:extLst>
+            </p:cNvPr>
+            <p:cNvCxnSpPr>
+              <a:cxnSpLocks/>
+              <a:stCxn id="49" idx="0"/>
+              <a:endCxn id="46" idx="2"/>
+            </p:cNvCxnSpPr>
+            <p:nvPr/>
+          </p:nvCxnSpPr>
+          <p:spPr>
+            <a:xfrm flipV="1">
+              <a:off x="7428728" y="2067339"/>
+              <a:ext cx="0" cy="670144"/>
+            </a:xfrm>
+            <a:prstGeom prst="line">
+              <a:avLst/>
+            </a:prstGeom>
+            <a:ln>
+              <a:solidFill>
+                <a:schemeClr val="tx1"/>
+              </a:solidFill>
+              <a:prstDash val="sysDash"/>
+              <a:headEnd type="none" w="med" len="med"/>
+              <a:tailEnd type="none" w="med" len="med"/>
+            </a:ln>
+          </p:spPr>
+          <p:style>
+            <a:lnRef idx="2">
+              <a:schemeClr val="accent1"/>
+            </a:lnRef>
+            <a:fillRef idx="0">
+              <a:schemeClr val="accent1"/>
+            </a:fillRef>
+            <a:effectRef idx="1">
+              <a:schemeClr val="accent1"/>
+            </a:effectRef>
+            <a:fontRef idx="minor">
+              <a:schemeClr val="tx1"/>
+            </a:fontRef>
+          </p:style>
+        </p:cxnSp>
+      </p:grpSp>
+    </p:spTree>
+    <p:extLst>
+      <p:ext uri="{BB962C8B-B14F-4D97-AF65-F5344CB8AC3E}">
+        <p14:creationId xmlns:p14="http://schemas.microsoft.com/office/powerpoint/2010/main" val="793143649"/>
+      </p:ext>
+    </p:extLst>
+  </p:cSld>
+  <p:clrMapOvr>
+    <a:masterClrMapping/>
+  </p:clrMapOvr>
+</p:sld>
+</file>
+
+<file path=ppt/slides/slide21.xml><?xml version="1.0" encoding="utf-8"?>
+<p:sld xmlns:a="http://schemas.openxmlformats.org/drawingml/2006/main" xmlns:r="http://schemas.openxmlformats.org/officeDocument/2006/relationships" xmlns:p="http://schemas.openxmlformats.org/presentationml/2006/main">
+  <p:cSld>
+    <p:spTree>
+      <p:nvGrpSpPr>
+        <p:cNvPr id="1" name=""/>
+        <p:cNvGrpSpPr/>
+        <p:nvPr/>
+      </p:nvGrpSpPr>
+      <p:grpSpPr>
+        <a:xfrm>
+          <a:off x="0" y="0"/>
+          <a:ext cx="0" cy="0"/>
+          <a:chOff x="0" y="0"/>
+          <a:chExt cx="0" cy="0"/>
+        </a:xfrm>
+      </p:grpSpPr>
       <p:pic>
         <p:nvPicPr>
           <p:cNvPr id="3" name="Picture 2">
@@ -15898,7 +16870,7 @@
 </p:sld>
 </file>
 
-<file path=ppt/slides/slide21.xml><?xml version="1.0" encoding="utf-8"?>
+<file path=ppt/slides/slide22.xml><?xml version="1.0" encoding="utf-8"?>
 <p:sld xmlns:a="http://schemas.openxmlformats.org/drawingml/2006/main" xmlns:r="http://schemas.openxmlformats.org/officeDocument/2006/relationships" xmlns:p="http://schemas.openxmlformats.org/presentationml/2006/main">
   <p:cSld>
     <p:spTree>
@@ -15964,7 +16936,7 @@
 </p:sld>
 </file>
 
-<file path=ppt/slides/slide22.xml><?xml version="1.0" encoding="utf-8"?>
+<file path=ppt/slides/slide23.xml><?xml version="1.0" encoding="utf-8"?>
 <p:sld xmlns:a="http://schemas.openxmlformats.org/drawingml/2006/main" xmlns:r="http://schemas.openxmlformats.org/officeDocument/2006/relationships" xmlns:p="http://schemas.openxmlformats.org/presentationml/2006/main">
   <p:cSld>
     <p:spTree>
@@ -16054,7 +17026,7 @@
 </p:sld>
 </file>
 
-<file path=ppt/slides/slide23.xml><?xml version="1.0" encoding="utf-8"?>
+<file path=ppt/slides/slide24.xml><?xml version="1.0" encoding="utf-8"?>
 <p:sld xmlns:a="http://schemas.openxmlformats.org/drawingml/2006/main" xmlns:r="http://schemas.openxmlformats.org/officeDocument/2006/relationships" xmlns:p="http://schemas.openxmlformats.org/presentationml/2006/main">
   <p:cSld>
     <p:spTree>
@@ -17147,10 +18119,10 @@
           <p:nvPr/>
         </p:nvPicPr>
         <p:blipFill>
-          <a:blip r:embed="rId7">
+          <a:blip>
             <a:extLst>
               <a:ext uri="{96DAC541-7B7A-43D3-8B79-37D633B846F1}">
-                <asvg:svgBlip xmlns:asvg="http://schemas.microsoft.com/office/drawing/2016/SVG/main" r:embed="rId8"/>
+                <asvg:svgBlip xmlns:asvg="http://schemas.microsoft.com/office/drawing/2016/SVG/main" r:embed="rId7"/>
               </a:ext>
             </a:extLst>
           </a:blip>
@@ -17183,10 +18155,10 @@
           <p:nvPr/>
         </p:nvPicPr>
         <p:blipFill>
-          <a:blip r:embed="rId9">
+          <a:blip>
             <a:extLst>
               <a:ext uri="{96DAC541-7B7A-43D3-8B79-37D633B846F1}">
-                <asvg:svgBlip xmlns:asvg="http://schemas.microsoft.com/office/drawing/2016/SVG/main" r:embed="rId10"/>
+                <asvg:svgBlip xmlns:asvg="http://schemas.microsoft.com/office/drawing/2016/SVG/main" r:embed="rId8"/>
               </a:ext>
             </a:extLst>
           </a:blip>
@@ -17239,7 +18211,7 @@
             <p:nvPr/>
           </p:nvPicPr>
           <p:blipFill>
-            <a:blip r:embed="rId11">
+            <a:blip r:embed="rId9">
               <a:extLst>
                 <a:ext uri="{28A0092B-C50C-407E-A947-70E740481C1C}">
                   <a14:useLocalDpi xmlns:a14="http://schemas.microsoft.com/office/drawing/2010/main" val="0"/>
@@ -19346,10 +20318,10 @@
           <p:nvPr/>
         </p:nvPicPr>
         <p:blipFill>
-          <a:blip r:embed="rId3">
+          <a:blip>
             <a:extLst>
               <a:ext uri="{96DAC541-7B7A-43D3-8B79-37D633B846F1}">
-                <asvg:svgBlip xmlns:asvg="http://schemas.microsoft.com/office/drawing/2016/SVG/main" r:embed="rId4"/>
+                <asvg:svgBlip xmlns:asvg="http://schemas.microsoft.com/office/drawing/2016/SVG/main" r:embed="rId3"/>
               </a:ext>
             </a:extLst>
           </a:blip>
@@ -19382,10 +20354,10 @@
           <p:nvPr/>
         </p:nvPicPr>
         <p:blipFill>
-          <a:blip r:embed="rId5">
+          <a:blip>
             <a:extLst>
               <a:ext uri="{96DAC541-7B7A-43D3-8B79-37D633B846F1}">
-                <asvg:svgBlip xmlns:asvg="http://schemas.microsoft.com/office/drawing/2016/SVG/main" r:embed="rId6"/>
+                <asvg:svgBlip xmlns:asvg="http://schemas.microsoft.com/office/drawing/2016/SVG/main" r:embed="rId4"/>
               </a:ext>
             </a:extLst>
           </a:blip>
@@ -19418,10 +20390,10 @@
           <p:nvPr/>
         </p:nvPicPr>
         <p:blipFill>
-          <a:blip r:embed="rId7">
+          <a:blip>
             <a:extLst>
               <a:ext uri="{96DAC541-7B7A-43D3-8B79-37D633B846F1}">
-                <asvg:svgBlip xmlns:asvg="http://schemas.microsoft.com/office/drawing/2016/SVG/main" r:embed="rId8"/>
+                <asvg:svgBlip xmlns:asvg="http://schemas.microsoft.com/office/drawing/2016/SVG/main" r:embed="rId5"/>
               </a:ext>
             </a:extLst>
           </a:blip>
@@ -19454,10 +20426,10 @@
           <p:nvPr/>
         </p:nvPicPr>
         <p:blipFill>
-          <a:blip r:embed="rId9">
+          <a:blip>
             <a:extLst>
               <a:ext uri="{96DAC541-7B7A-43D3-8B79-37D633B846F1}">
-                <asvg:svgBlip xmlns:asvg="http://schemas.microsoft.com/office/drawing/2016/SVG/main" r:embed="rId10"/>
+                <asvg:svgBlip xmlns:asvg="http://schemas.microsoft.com/office/drawing/2016/SVG/main" r:embed="rId6"/>
               </a:ext>
             </a:extLst>
           </a:blip>
@@ -19490,10 +20462,10 @@
           <p:nvPr/>
         </p:nvPicPr>
         <p:blipFill>
-          <a:blip r:embed="rId11">
+          <a:blip>
             <a:extLst>
               <a:ext uri="{96DAC541-7B7A-43D3-8B79-37D633B846F1}">
-                <asvg:svgBlip xmlns:asvg="http://schemas.microsoft.com/office/drawing/2016/SVG/main" r:embed="rId12"/>
+                <asvg:svgBlip xmlns:asvg="http://schemas.microsoft.com/office/drawing/2016/SVG/main" r:embed="rId7"/>
               </a:ext>
             </a:extLst>
           </a:blip>
@@ -19526,10 +20498,10 @@
           <p:nvPr/>
         </p:nvPicPr>
         <p:blipFill>
-          <a:blip r:embed="rId13">
+          <a:blip>
             <a:extLst>
               <a:ext uri="{96DAC541-7B7A-43D3-8B79-37D633B846F1}">
-                <asvg:svgBlip xmlns:asvg="http://schemas.microsoft.com/office/drawing/2016/SVG/main" r:embed="rId14"/>
+                <asvg:svgBlip xmlns:asvg="http://schemas.microsoft.com/office/drawing/2016/SVG/main" r:embed="rId8"/>
               </a:ext>
             </a:extLst>
           </a:blip>
@@ -19562,10 +20534,10 @@
           <p:nvPr/>
         </p:nvPicPr>
         <p:blipFill>
-          <a:blip r:embed="rId15">
+          <a:blip>
             <a:extLst>
               <a:ext uri="{96DAC541-7B7A-43D3-8B79-37D633B846F1}">
-                <asvg:svgBlip xmlns:asvg="http://schemas.microsoft.com/office/drawing/2016/SVG/main" r:embed="rId16"/>
+                <asvg:svgBlip xmlns:asvg="http://schemas.microsoft.com/office/drawing/2016/SVG/main" r:embed="rId9"/>
               </a:ext>
             </a:extLst>
           </a:blip>
@@ -20208,10 +21180,10 @@
           <p:nvPr/>
         </p:nvPicPr>
         <p:blipFill>
-          <a:blip r:embed="rId11">
+          <a:blip>
             <a:extLst>
               <a:ext uri="{96DAC541-7B7A-43D3-8B79-37D633B846F1}">
-                <asvg:svgBlip xmlns:asvg="http://schemas.microsoft.com/office/drawing/2016/SVG/main" r:embed="rId12"/>
+                <asvg:svgBlip xmlns:asvg="http://schemas.microsoft.com/office/drawing/2016/SVG/main" r:embed="rId7"/>
               </a:ext>
             </a:extLst>
           </a:blip>

--- a/figures/figures.pptx
+++ b/figures/figures.pptx
@@ -5,7 +5,7 @@
     <p:sldMasterId id="2147483660" r:id="rId1"/>
   </p:sldMasterIdLst>
   <p:notesMasterIdLst>
-    <p:notesMasterId r:id="rId26"/>
+    <p:notesMasterId r:id="rId29"/>
   </p:notesMasterIdLst>
   <p:sldIdLst>
     <p:sldId id="258" r:id="rId2"/>
@@ -31,7 +31,10 @@
     <p:sldId id="269" r:id="rId22"/>
     <p:sldId id="274" r:id="rId23"/>
     <p:sldId id="270" r:id="rId24"/>
-    <p:sldId id="257" r:id="rId25"/>
+    <p:sldId id="284" r:id="rId25"/>
+    <p:sldId id="282" r:id="rId26"/>
+    <p:sldId id="283" r:id="rId27"/>
+    <p:sldId id="257" r:id="rId28"/>
   </p:sldIdLst>
   <p:sldSz cx="12192000" cy="6858000"/>
   <p:notesSz cx="6858000" cy="9144000"/>
@@ -190,6 +193,13 @@
             <p14:sldId id="269"/>
             <p14:sldId id="274"/>
             <p14:sldId id="270"/>
+          </p14:sldIdLst>
+        </p14:section>
+        <p14:section name="Conclusion" id="{02F95322-1659-4331-9A74-3CC42BA10F6A}">
+          <p14:sldIdLst>
+            <p14:sldId id="284"/>
+            <p14:sldId id="282"/>
+            <p14:sldId id="283"/>
           </p14:sldIdLst>
         </p14:section>
         <p14:section name="Examples" id="{2CEADF37-2C1D-4DE6-BB08-5D838E707A13}">
@@ -17043,6 +17053,3904 @@
           <a:chExt cx="0" cy="0"/>
         </a:xfrm>
       </p:grpSpPr>
+      <p:sp>
+        <p:nvSpPr>
+          <p:cNvPr id="44" name="Rectangle: Rounded Corners 43">
+            <a:extLst>
+              <a:ext uri="{FF2B5EF4-FFF2-40B4-BE49-F238E27FC236}">
+                <a16:creationId xmlns:a16="http://schemas.microsoft.com/office/drawing/2014/main" id="{D2CE8B92-0FBB-60F0-A0EE-D6AFE5D15B09}"/>
+              </a:ext>
+            </a:extLst>
+          </p:cNvPr>
+          <p:cNvSpPr/>
+          <p:nvPr/>
+        </p:nvSpPr>
+        <p:spPr>
+          <a:xfrm>
+            <a:off x="358855" y="3658434"/>
+            <a:ext cx="8891162" cy="2923341"/>
+          </a:xfrm>
+          <a:prstGeom prst="roundRect">
+            <a:avLst>
+              <a:gd name="adj" fmla="val 5234"/>
+            </a:avLst>
+          </a:prstGeom>
+          <a:solidFill>
+            <a:schemeClr val="bg1"/>
+          </a:solidFill>
+          <a:ln>
+            <a:solidFill>
+              <a:schemeClr val="tx1"/>
+            </a:solidFill>
+          </a:ln>
+        </p:spPr>
+        <p:style>
+          <a:lnRef idx="2">
+            <a:schemeClr val="accent1">
+              <a:shade val="15000"/>
+            </a:schemeClr>
+          </a:lnRef>
+          <a:fillRef idx="1">
+            <a:schemeClr val="accent1"/>
+          </a:fillRef>
+          <a:effectRef idx="0">
+            <a:schemeClr val="accent1"/>
+          </a:effectRef>
+          <a:fontRef idx="minor">
+            <a:schemeClr val="lt1"/>
+          </a:fontRef>
+        </p:style>
+        <p:txBody>
+          <a:bodyPr rtlCol="0" anchor="ctr"/>
+          <a:lstStyle/>
+          <a:p>
+            <a:pPr algn="ctr"/>
+            <a:endParaRPr lang="en-US" dirty="0">
+              <a:solidFill>
+                <a:schemeClr val="tx1"/>
+              </a:solidFill>
+            </a:endParaRPr>
+          </a:p>
+        </p:txBody>
+      </p:sp>
+      <p:sp>
+        <p:nvSpPr>
+          <p:cNvPr id="43" name="Rectangle: Rounded Corners 42">
+            <a:extLst>
+              <a:ext uri="{FF2B5EF4-FFF2-40B4-BE49-F238E27FC236}">
+                <a16:creationId xmlns:a16="http://schemas.microsoft.com/office/drawing/2014/main" id="{E8230BA4-DB8E-C294-E0A5-63D3EE9E71FE}"/>
+              </a:ext>
+            </a:extLst>
+          </p:cNvPr>
+          <p:cNvSpPr/>
+          <p:nvPr/>
+        </p:nvSpPr>
+        <p:spPr>
+          <a:xfrm>
+            <a:off x="358855" y="153614"/>
+            <a:ext cx="8891162" cy="3433513"/>
+          </a:xfrm>
+          <a:prstGeom prst="roundRect">
+            <a:avLst>
+              <a:gd name="adj" fmla="val 5234"/>
+            </a:avLst>
+          </a:prstGeom>
+          <a:solidFill>
+            <a:schemeClr val="bg1"/>
+          </a:solidFill>
+          <a:ln>
+            <a:solidFill>
+              <a:schemeClr val="tx1"/>
+            </a:solidFill>
+          </a:ln>
+        </p:spPr>
+        <p:style>
+          <a:lnRef idx="2">
+            <a:schemeClr val="accent1">
+              <a:shade val="15000"/>
+            </a:schemeClr>
+          </a:lnRef>
+          <a:fillRef idx="1">
+            <a:schemeClr val="accent1"/>
+          </a:fillRef>
+          <a:effectRef idx="0">
+            <a:schemeClr val="accent1"/>
+          </a:effectRef>
+          <a:fontRef idx="minor">
+            <a:schemeClr val="lt1"/>
+          </a:fontRef>
+        </p:style>
+        <p:txBody>
+          <a:bodyPr rtlCol="0" anchor="ctr"/>
+          <a:lstStyle/>
+          <a:p>
+            <a:pPr algn="ctr"/>
+            <a:endParaRPr lang="en-US" dirty="0">
+              <a:solidFill>
+                <a:schemeClr val="tx1"/>
+              </a:solidFill>
+            </a:endParaRPr>
+          </a:p>
+        </p:txBody>
+      </p:sp>
+      <p:pic>
+        <p:nvPicPr>
+          <p:cNvPr id="5" name="Graphic 4">
+            <a:extLst>
+              <a:ext uri="{FF2B5EF4-FFF2-40B4-BE49-F238E27FC236}">
+                <a16:creationId xmlns:a16="http://schemas.microsoft.com/office/drawing/2014/main" id="{71F33519-CE18-B69F-489D-3645A1E07D4E}"/>
+              </a:ext>
+            </a:extLst>
+          </p:cNvPr>
+          <p:cNvPicPr>
+            <a:picLocks noChangeAspect="1"/>
+          </p:cNvPicPr>
+          <p:nvPr/>
+        </p:nvPicPr>
+        <p:blipFill>
+          <a:blip>
+            <a:extLst>
+              <a:ext uri="{96DAC541-7B7A-43D3-8B79-37D633B846F1}">
+                <asvg:svgBlip xmlns:asvg="http://schemas.microsoft.com/office/drawing/2016/SVG/main" r:embed="rId2"/>
+              </a:ext>
+            </a:extLst>
+          </a:blip>
+          <a:stretch>
+            <a:fillRect/>
+          </a:stretch>
+        </p:blipFill>
+        <p:spPr>
+          <a:xfrm>
+            <a:off x="6328300" y="1598778"/>
+            <a:ext cx="685800" cy="685800"/>
+          </a:xfrm>
+          <a:prstGeom prst="rect">
+            <a:avLst/>
+          </a:prstGeom>
+        </p:spPr>
+      </p:pic>
+      <p:pic>
+        <p:nvPicPr>
+          <p:cNvPr id="7" name="Graphic 6">
+            <a:extLst>
+              <a:ext uri="{FF2B5EF4-FFF2-40B4-BE49-F238E27FC236}">
+                <a16:creationId xmlns:a16="http://schemas.microsoft.com/office/drawing/2014/main" id="{ED25F84F-12D9-933D-383D-DF47935E14D8}"/>
+              </a:ext>
+            </a:extLst>
+          </p:cNvPr>
+          <p:cNvPicPr>
+            <a:picLocks noChangeAspect="1"/>
+          </p:cNvPicPr>
+          <p:nvPr/>
+        </p:nvPicPr>
+        <p:blipFill>
+          <a:blip>
+            <a:extLst>
+              <a:ext uri="{96DAC541-7B7A-43D3-8B79-37D633B846F1}">
+                <asvg:svgBlip xmlns:asvg="http://schemas.microsoft.com/office/drawing/2016/SVG/main" r:embed="rId3"/>
+              </a:ext>
+            </a:extLst>
+          </a:blip>
+          <a:stretch>
+            <a:fillRect/>
+          </a:stretch>
+        </p:blipFill>
+        <p:spPr>
+          <a:xfrm>
+            <a:off x="4144061" y="1598778"/>
+            <a:ext cx="685800" cy="685800"/>
+          </a:xfrm>
+          <a:prstGeom prst="rect">
+            <a:avLst/>
+          </a:prstGeom>
+        </p:spPr>
+      </p:pic>
+      <p:pic>
+        <p:nvPicPr>
+          <p:cNvPr id="8" name="Graphic 7" descr="User with solid fill">
+            <a:extLst>
+              <a:ext uri="{FF2B5EF4-FFF2-40B4-BE49-F238E27FC236}">
+                <a16:creationId xmlns:a16="http://schemas.microsoft.com/office/drawing/2014/main" id="{45C5B597-FDA1-220F-DA15-C4996706619A}"/>
+              </a:ext>
+            </a:extLst>
+          </p:cNvPr>
+          <p:cNvPicPr>
+            <a:picLocks noChangeAspect="1"/>
+          </p:cNvPicPr>
+          <p:nvPr/>
+        </p:nvPicPr>
+        <p:blipFill>
+          <a:blip>
+            <a:extLst>
+              <a:ext uri="{96DAC541-7B7A-43D3-8B79-37D633B846F1}">
+                <asvg:svgBlip xmlns:asvg="http://schemas.microsoft.com/office/drawing/2016/SVG/main" r:embed="rId4"/>
+              </a:ext>
+            </a:extLst>
+          </a:blip>
+          <a:stretch>
+            <a:fillRect/>
+          </a:stretch>
+        </p:blipFill>
+        <p:spPr>
+          <a:xfrm>
+            <a:off x="1966732" y="1598778"/>
+            <a:ext cx="685800" cy="685800"/>
+          </a:xfrm>
+          <a:prstGeom prst="rect">
+            <a:avLst/>
+          </a:prstGeom>
+        </p:spPr>
+      </p:pic>
+      <p:sp>
+        <p:nvSpPr>
+          <p:cNvPr id="9" name="TextBox 8">
+            <a:extLst>
+              <a:ext uri="{FF2B5EF4-FFF2-40B4-BE49-F238E27FC236}">
+                <a16:creationId xmlns:a16="http://schemas.microsoft.com/office/drawing/2014/main" id="{4085A3F3-6DF2-4004-4A04-AFA22E2C0073}"/>
+              </a:ext>
+            </a:extLst>
+          </p:cNvPr>
+          <p:cNvSpPr txBox="1"/>
+          <p:nvPr/>
+        </p:nvSpPr>
+        <p:spPr>
+          <a:xfrm>
+            <a:off x="2032152" y="2183544"/>
+            <a:ext cx="554960" cy="369332"/>
+          </a:xfrm>
+          <a:prstGeom prst="rect">
+            <a:avLst/>
+          </a:prstGeom>
+          <a:noFill/>
+        </p:spPr>
+        <p:txBody>
+          <a:bodyPr wrap="none" rtlCol="0">
+            <a:spAutoFit/>
+          </a:bodyPr>
+          <a:lstStyle/>
+          <a:p>
+            <a:pPr algn="ctr"/>
+            <a:r>
+              <a:rPr lang="en-US" dirty="0"/>
+              <a:t>User</a:t>
+            </a:r>
+          </a:p>
+        </p:txBody>
+      </p:sp>
+      <p:sp>
+        <p:nvSpPr>
+          <p:cNvPr id="12" name="Rectangle: Rounded Corners 11">
+            <a:extLst>
+              <a:ext uri="{FF2B5EF4-FFF2-40B4-BE49-F238E27FC236}">
+                <a16:creationId xmlns:a16="http://schemas.microsoft.com/office/drawing/2014/main" id="{C68BB52E-7BF9-9935-FCC4-98115B42BF97}"/>
+              </a:ext>
+            </a:extLst>
+          </p:cNvPr>
+          <p:cNvSpPr/>
+          <p:nvPr/>
+        </p:nvSpPr>
+        <p:spPr>
+          <a:xfrm>
+            <a:off x="533713" y="1685704"/>
+            <a:ext cx="1078685" cy="369332"/>
+          </a:xfrm>
+          <a:prstGeom prst="roundRect">
+            <a:avLst/>
+          </a:prstGeom>
+          <a:solidFill>
+            <a:srgbClr val="B2D4EB"/>
+          </a:solidFill>
+          <a:ln>
+            <a:solidFill>
+              <a:schemeClr val="tx1"/>
+            </a:solidFill>
+          </a:ln>
+        </p:spPr>
+        <p:style>
+          <a:lnRef idx="2">
+            <a:schemeClr val="accent1">
+              <a:shade val="15000"/>
+            </a:schemeClr>
+          </a:lnRef>
+          <a:fillRef idx="1">
+            <a:schemeClr val="accent1"/>
+          </a:fillRef>
+          <a:effectRef idx="0">
+            <a:schemeClr val="accent1"/>
+          </a:effectRef>
+          <a:fontRef idx="minor">
+            <a:schemeClr val="lt1"/>
+          </a:fontRef>
+        </p:style>
+        <p:txBody>
+          <a:bodyPr rtlCol="0" anchor="ctr"/>
+          <a:lstStyle/>
+          <a:p>
+            <a:pPr algn="ctr"/>
+            <a:r>
+              <a:rPr lang="en-US" dirty="0">
+                <a:solidFill>
+                  <a:schemeClr val="tx1"/>
+                </a:solidFill>
+              </a:rPr>
+              <a:t>Now…</a:t>
+            </a:r>
+            <a:endParaRPr lang="en-US" i="1" dirty="0">
+              <a:solidFill>
+                <a:schemeClr val="tx1"/>
+              </a:solidFill>
+            </a:endParaRPr>
+          </a:p>
+        </p:txBody>
+      </p:sp>
+      <p:sp>
+        <p:nvSpPr>
+          <p:cNvPr id="14" name="TextBox 13">
+            <a:extLst>
+              <a:ext uri="{FF2B5EF4-FFF2-40B4-BE49-F238E27FC236}">
+                <a16:creationId xmlns:a16="http://schemas.microsoft.com/office/drawing/2014/main" id="{131DAF99-B97C-87DD-26D0-B8648A52F7C4}"/>
+              </a:ext>
+            </a:extLst>
+          </p:cNvPr>
+          <p:cNvSpPr txBox="1"/>
+          <p:nvPr/>
+        </p:nvSpPr>
+        <p:spPr>
+          <a:xfrm>
+            <a:off x="4150971" y="2183544"/>
+            <a:ext cx="671980" cy="369332"/>
+          </a:xfrm>
+          <a:prstGeom prst="rect">
+            <a:avLst/>
+          </a:prstGeom>
+          <a:noFill/>
+        </p:spPr>
+        <p:txBody>
+          <a:bodyPr wrap="none" rtlCol="0">
+            <a:spAutoFit/>
+          </a:bodyPr>
+          <a:lstStyle/>
+          <a:p>
+            <a:pPr algn="ctr"/>
+            <a:r>
+              <a:rPr lang="en-US" dirty="0"/>
+              <a:t>Agent</a:t>
+            </a:r>
+          </a:p>
+        </p:txBody>
+      </p:sp>
+      <p:sp>
+        <p:nvSpPr>
+          <p:cNvPr id="15" name="TextBox 14">
+            <a:extLst>
+              <a:ext uri="{FF2B5EF4-FFF2-40B4-BE49-F238E27FC236}">
+                <a16:creationId xmlns:a16="http://schemas.microsoft.com/office/drawing/2014/main" id="{1163E150-DB3F-44DE-67E4-D87E6220AC23}"/>
+              </a:ext>
+            </a:extLst>
+          </p:cNvPr>
+          <p:cNvSpPr txBox="1"/>
+          <p:nvPr/>
+        </p:nvSpPr>
+        <p:spPr>
+          <a:xfrm>
+            <a:off x="6002012" y="2183544"/>
+            <a:ext cx="1338380" cy="369332"/>
+          </a:xfrm>
+          <a:prstGeom prst="rect">
+            <a:avLst/>
+          </a:prstGeom>
+          <a:noFill/>
+        </p:spPr>
+        <p:txBody>
+          <a:bodyPr wrap="none" rtlCol="0">
+            <a:spAutoFit/>
+          </a:bodyPr>
+          <a:lstStyle/>
+          <a:p>
+            <a:pPr algn="ctr"/>
+            <a:r>
+              <a:rPr lang="en-US" dirty="0"/>
+              <a:t>Memory Store</a:t>
+            </a:r>
+          </a:p>
+        </p:txBody>
+      </p:sp>
+      <p:sp>
+        <p:nvSpPr>
+          <p:cNvPr id="16" name="Speech Bubble: Rectangle with Corners Rounded 15">
+            <a:extLst>
+              <a:ext uri="{FF2B5EF4-FFF2-40B4-BE49-F238E27FC236}">
+                <a16:creationId xmlns:a16="http://schemas.microsoft.com/office/drawing/2014/main" id="{62598B43-CEC1-5766-C927-CEC15C1A0AAE}"/>
+              </a:ext>
+            </a:extLst>
+          </p:cNvPr>
+          <p:cNvSpPr/>
+          <p:nvPr/>
+        </p:nvSpPr>
+        <p:spPr>
+          <a:xfrm>
+            <a:off x="1770288" y="366015"/>
+            <a:ext cx="2885222" cy="1012578"/>
+          </a:xfrm>
+          <a:prstGeom prst="wedgeRoundRectCallout">
+            <a:avLst>
+              <a:gd name="adj1" fmla="val -29100"/>
+              <a:gd name="adj2" fmla="val 75797"/>
+              <a:gd name="adj3" fmla="val 16667"/>
+            </a:avLst>
+          </a:prstGeom>
+          <a:solidFill>
+            <a:srgbClr val="E5F1F8"/>
+          </a:solidFill>
+        </p:spPr>
+        <p:style>
+          <a:lnRef idx="2">
+            <a:schemeClr val="dk1">
+              <a:shade val="15000"/>
+            </a:schemeClr>
+          </a:lnRef>
+          <a:fillRef idx="1">
+            <a:schemeClr val="dk1"/>
+          </a:fillRef>
+          <a:effectRef idx="0">
+            <a:schemeClr val="dk1"/>
+          </a:effectRef>
+          <a:fontRef idx="minor">
+            <a:schemeClr val="lt1"/>
+          </a:fontRef>
+        </p:style>
+        <p:txBody>
+          <a:bodyPr rtlCol="0" anchor="ctr"/>
+          <a:lstStyle/>
+          <a:p>
+            <a:pPr algn="ctr"/>
+            <a:r>
+              <a:rPr lang="en-US" dirty="0">
+                <a:solidFill>
+                  <a:schemeClr val="tx1"/>
+                </a:solidFill>
+              </a:rPr>
+              <a:t>Write some code to train a machine learning model.</a:t>
+            </a:r>
+          </a:p>
+          <a:p>
+            <a:pPr algn="ctr"/>
+            <a:r>
+              <a:rPr lang="en-US" dirty="0">
+                <a:solidFill>
+                  <a:schemeClr val="tx1"/>
+                </a:solidFill>
+              </a:rPr>
+              <a:t>I only know Python. </a:t>
+            </a:r>
+          </a:p>
+        </p:txBody>
+      </p:sp>
+      <p:cxnSp>
+        <p:nvCxnSpPr>
+          <p:cNvPr id="19" name="Straight Arrow Connector 18">
+            <a:extLst>
+              <a:ext uri="{FF2B5EF4-FFF2-40B4-BE49-F238E27FC236}">
+                <a16:creationId xmlns:a16="http://schemas.microsoft.com/office/drawing/2014/main" id="{511CB169-6E50-27F5-F297-9515C4A19049}"/>
+              </a:ext>
+            </a:extLst>
+          </p:cNvPr>
+          <p:cNvCxnSpPr>
+            <a:cxnSpLocks/>
+            <a:stCxn id="8" idx="3"/>
+            <a:endCxn id="7" idx="1"/>
+          </p:cNvCxnSpPr>
+          <p:nvPr/>
+        </p:nvCxnSpPr>
+        <p:spPr>
+          <a:xfrm>
+            <a:off x="2652532" y="1941678"/>
+            <a:ext cx="1491529" cy="0"/>
+          </a:xfrm>
+          <a:prstGeom prst="straightConnector1">
+            <a:avLst/>
+          </a:prstGeom>
+          <a:ln>
+            <a:solidFill>
+              <a:schemeClr val="tx1"/>
+            </a:solidFill>
+            <a:prstDash val="solid"/>
+            <a:headEnd type="none" w="lg" len="lg"/>
+            <a:tailEnd type="triangle" w="lg" len="lg"/>
+          </a:ln>
+        </p:spPr>
+        <p:style>
+          <a:lnRef idx="2">
+            <a:schemeClr val="accent1"/>
+          </a:lnRef>
+          <a:fillRef idx="0">
+            <a:schemeClr val="accent1"/>
+          </a:fillRef>
+          <a:effectRef idx="1">
+            <a:schemeClr val="accent1"/>
+          </a:effectRef>
+          <a:fontRef idx="minor">
+            <a:schemeClr val="tx1"/>
+          </a:fontRef>
+        </p:style>
+      </p:cxnSp>
+      <p:cxnSp>
+        <p:nvCxnSpPr>
+          <p:cNvPr id="23" name="Straight Arrow Connector 22">
+            <a:extLst>
+              <a:ext uri="{FF2B5EF4-FFF2-40B4-BE49-F238E27FC236}">
+                <a16:creationId xmlns:a16="http://schemas.microsoft.com/office/drawing/2014/main" id="{19BD5D59-D6BD-C3BA-C313-5F1EA656DB47}"/>
+              </a:ext>
+            </a:extLst>
+          </p:cNvPr>
+          <p:cNvCxnSpPr>
+            <a:cxnSpLocks/>
+            <a:stCxn id="7" idx="3"/>
+            <a:endCxn id="5" idx="1"/>
+          </p:cNvCxnSpPr>
+          <p:nvPr/>
+        </p:nvCxnSpPr>
+        <p:spPr>
+          <a:xfrm>
+            <a:off x="4829861" y="1941678"/>
+            <a:ext cx="1498439" cy="0"/>
+          </a:xfrm>
+          <a:prstGeom prst="straightConnector1">
+            <a:avLst/>
+          </a:prstGeom>
+          <a:ln>
+            <a:solidFill>
+              <a:schemeClr val="tx1"/>
+            </a:solidFill>
+            <a:prstDash val="solid"/>
+            <a:headEnd type="none" w="lg" len="lg"/>
+            <a:tailEnd type="triangle" w="lg" len="lg"/>
+          </a:ln>
+        </p:spPr>
+        <p:style>
+          <a:lnRef idx="2">
+            <a:schemeClr val="accent1"/>
+          </a:lnRef>
+          <a:fillRef idx="0">
+            <a:schemeClr val="accent1"/>
+          </a:fillRef>
+          <a:effectRef idx="1">
+            <a:schemeClr val="accent1"/>
+          </a:effectRef>
+          <a:fontRef idx="minor">
+            <a:schemeClr val="tx1"/>
+          </a:fontRef>
+        </p:style>
+      </p:cxnSp>
+      <p:sp>
+        <p:nvSpPr>
+          <p:cNvPr id="26" name="Speech Bubble: Rectangle with Corners Rounded 25">
+            <a:extLst>
+              <a:ext uri="{FF2B5EF4-FFF2-40B4-BE49-F238E27FC236}">
+                <a16:creationId xmlns:a16="http://schemas.microsoft.com/office/drawing/2014/main" id="{251CF955-9DB1-0FA1-7E20-6549D911EBF7}"/>
+              </a:ext>
+            </a:extLst>
+          </p:cNvPr>
+          <p:cNvSpPr/>
+          <p:nvPr/>
+        </p:nvSpPr>
+        <p:spPr>
+          <a:xfrm>
+            <a:off x="3785978" y="2794741"/>
+            <a:ext cx="2885222" cy="612648"/>
+          </a:xfrm>
+          <a:prstGeom prst="wedgeRoundRectCallout">
+            <a:avLst>
+              <a:gd name="adj1" fmla="val -25196"/>
+              <a:gd name="adj2" fmla="val -88916"/>
+              <a:gd name="adj3" fmla="val 16667"/>
+            </a:avLst>
+          </a:prstGeom>
+          <a:solidFill>
+            <a:srgbClr val="E5F1F8"/>
+          </a:solidFill>
+        </p:spPr>
+        <p:style>
+          <a:lnRef idx="2">
+            <a:schemeClr val="dk1">
+              <a:shade val="15000"/>
+            </a:schemeClr>
+          </a:lnRef>
+          <a:fillRef idx="1">
+            <a:schemeClr val="dk1"/>
+          </a:fillRef>
+          <a:effectRef idx="0">
+            <a:schemeClr val="dk1"/>
+          </a:effectRef>
+          <a:fontRef idx="minor">
+            <a:schemeClr val="lt1"/>
+          </a:fontRef>
+        </p:style>
+        <p:txBody>
+          <a:bodyPr rtlCol="0" anchor="ctr"/>
+          <a:lstStyle/>
+          <a:p>
+            <a:pPr algn="ctr"/>
+            <a:r>
+              <a:rPr lang="en-US" dirty="0">
+                <a:solidFill>
+                  <a:schemeClr val="tx1"/>
+                </a:solidFill>
+              </a:rPr>
+              <a:t>from </a:t>
+            </a:r>
+            <a:r>
+              <a:rPr lang="en-US" dirty="0" err="1">
+                <a:solidFill>
+                  <a:schemeClr val="tx1"/>
+                </a:solidFill>
+              </a:rPr>
+              <a:t>sklearn</a:t>
+            </a:r>
+            <a:r>
+              <a:rPr lang="en-US" dirty="0">
+                <a:solidFill>
+                  <a:schemeClr val="tx1"/>
+                </a:solidFill>
+              </a:rPr>
+              <a:t> import …</a:t>
+            </a:r>
+          </a:p>
+        </p:txBody>
+      </p:sp>
+      <p:sp>
+        <p:nvSpPr>
+          <p:cNvPr id="27" name="Speech Bubble: Rectangle with Corners Rounded 26">
+            <a:extLst>
+              <a:ext uri="{FF2B5EF4-FFF2-40B4-BE49-F238E27FC236}">
+                <a16:creationId xmlns:a16="http://schemas.microsoft.com/office/drawing/2014/main" id="{171105D8-27A4-BFED-D2CD-C8DA37000511}"/>
+              </a:ext>
+            </a:extLst>
+          </p:cNvPr>
+          <p:cNvSpPr/>
+          <p:nvPr/>
+        </p:nvSpPr>
+        <p:spPr>
+          <a:xfrm>
+            <a:off x="6096000" y="765945"/>
+            <a:ext cx="2885222" cy="612648"/>
+          </a:xfrm>
+          <a:prstGeom prst="wedgeRoundRectCallout">
+            <a:avLst>
+              <a:gd name="adj1" fmla="val -29330"/>
+              <a:gd name="adj2" fmla="val 89539"/>
+              <a:gd name="adj3" fmla="val 16667"/>
+            </a:avLst>
+          </a:prstGeom>
+          <a:solidFill>
+            <a:srgbClr val="E5F1F8"/>
+          </a:solidFill>
+        </p:spPr>
+        <p:style>
+          <a:lnRef idx="2">
+            <a:schemeClr val="dk1">
+              <a:shade val="15000"/>
+            </a:schemeClr>
+          </a:lnRef>
+          <a:fillRef idx="1">
+            <a:schemeClr val="dk1"/>
+          </a:fillRef>
+          <a:effectRef idx="0">
+            <a:schemeClr val="dk1"/>
+          </a:effectRef>
+          <a:fontRef idx="minor">
+            <a:schemeClr val="lt1"/>
+          </a:fontRef>
+        </p:style>
+        <p:txBody>
+          <a:bodyPr rtlCol="0" anchor="ctr"/>
+          <a:lstStyle/>
+          <a:p>
+            <a:pPr algn="ctr"/>
+            <a:r>
+              <a:rPr lang="en-US" dirty="0">
+                <a:solidFill>
+                  <a:schemeClr val="tx1"/>
+                </a:solidFill>
+              </a:rPr>
+              <a:t>Only knows Python</a:t>
+            </a:r>
+          </a:p>
+        </p:txBody>
+      </p:sp>
+      <p:pic>
+        <p:nvPicPr>
+          <p:cNvPr id="28" name="Graphic 27">
+            <a:extLst>
+              <a:ext uri="{FF2B5EF4-FFF2-40B4-BE49-F238E27FC236}">
+                <a16:creationId xmlns:a16="http://schemas.microsoft.com/office/drawing/2014/main" id="{3753D523-5D17-25C2-3E2E-562DC19F42FD}"/>
+              </a:ext>
+            </a:extLst>
+          </p:cNvPr>
+          <p:cNvPicPr>
+            <a:picLocks noChangeAspect="1"/>
+          </p:cNvPicPr>
+          <p:nvPr/>
+        </p:nvPicPr>
+        <p:blipFill>
+          <a:blip>
+            <a:extLst>
+              <a:ext uri="{96DAC541-7B7A-43D3-8B79-37D633B846F1}">
+                <asvg:svgBlip xmlns:asvg="http://schemas.microsoft.com/office/drawing/2016/SVG/main" r:embed="rId2"/>
+              </a:ext>
+            </a:extLst>
+          </a:blip>
+          <a:stretch>
+            <a:fillRect/>
+          </a:stretch>
+        </p:blipFill>
+        <p:spPr>
+          <a:xfrm>
+            <a:off x="6328300" y="4640152"/>
+            <a:ext cx="685800" cy="685800"/>
+          </a:xfrm>
+          <a:prstGeom prst="rect">
+            <a:avLst/>
+          </a:prstGeom>
+        </p:spPr>
+      </p:pic>
+      <p:pic>
+        <p:nvPicPr>
+          <p:cNvPr id="29" name="Graphic 28">
+            <a:extLst>
+              <a:ext uri="{FF2B5EF4-FFF2-40B4-BE49-F238E27FC236}">
+                <a16:creationId xmlns:a16="http://schemas.microsoft.com/office/drawing/2014/main" id="{4FAF1C6E-95B5-32B1-E2B3-661500DADBEE}"/>
+              </a:ext>
+            </a:extLst>
+          </p:cNvPr>
+          <p:cNvPicPr>
+            <a:picLocks noChangeAspect="1"/>
+          </p:cNvPicPr>
+          <p:nvPr/>
+        </p:nvPicPr>
+        <p:blipFill>
+          <a:blip>
+            <a:extLst>
+              <a:ext uri="{96DAC541-7B7A-43D3-8B79-37D633B846F1}">
+                <asvg:svgBlip xmlns:asvg="http://schemas.microsoft.com/office/drawing/2016/SVG/main" r:embed="rId3"/>
+              </a:ext>
+            </a:extLst>
+          </a:blip>
+          <a:stretch>
+            <a:fillRect/>
+          </a:stretch>
+        </p:blipFill>
+        <p:spPr>
+          <a:xfrm>
+            <a:off x="4144061" y="4640152"/>
+            <a:ext cx="685800" cy="685800"/>
+          </a:xfrm>
+          <a:prstGeom prst="rect">
+            <a:avLst/>
+          </a:prstGeom>
+        </p:spPr>
+      </p:pic>
+      <p:pic>
+        <p:nvPicPr>
+          <p:cNvPr id="30" name="Graphic 29" descr="User with solid fill">
+            <a:extLst>
+              <a:ext uri="{FF2B5EF4-FFF2-40B4-BE49-F238E27FC236}">
+                <a16:creationId xmlns:a16="http://schemas.microsoft.com/office/drawing/2014/main" id="{3CFE110E-8813-1FA4-CDD3-2ADB30FCF439}"/>
+              </a:ext>
+            </a:extLst>
+          </p:cNvPr>
+          <p:cNvPicPr>
+            <a:picLocks noChangeAspect="1"/>
+          </p:cNvPicPr>
+          <p:nvPr/>
+        </p:nvPicPr>
+        <p:blipFill>
+          <a:blip>
+            <a:extLst>
+              <a:ext uri="{96DAC541-7B7A-43D3-8B79-37D633B846F1}">
+                <asvg:svgBlip xmlns:asvg="http://schemas.microsoft.com/office/drawing/2016/SVG/main" r:embed="rId4"/>
+              </a:ext>
+            </a:extLst>
+          </a:blip>
+          <a:stretch>
+            <a:fillRect/>
+          </a:stretch>
+        </p:blipFill>
+        <p:spPr>
+          <a:xfrm>
+            <a:off x="1966732" y="4640152"/>
+            <a:ext cx="685800" cy="685800"/>
+          </a:xfrm>
+          <a:prstGeom prst="rect">
+            <a:avLst/>
+          </a:prstGeom>
+        </p:spPr>
+      </p:pic>
+      <p:sp>
+        <p:nvSpPr>
+          <p:cNvPr id="31" name="TextBox 30">
+            <a:extLst>
+              <a:ext uri="{FF2B5EF4-FFF2-40B4-BE49-F238E27FC236}">
+                <a16:creationId xmlns:a16="http://schemas.microsoft.com/office/drawing/2014/main" id="{95FBFC99-2660-1276-0EE8-A4D1E458FAB8}"/>
+              </a:ext>
+            </a:extLst>
+          </p:cNvPr>
+          <p:cNvSpPr txBox="1"/>
+          <p:nvPr/>
+        </p:nvSpPr>
+        <p:spPr>
+          <a:xfrm>
+            <a:off x="2032152" y="5224918"/>
+            <a:ext cx="554960" cy="369332"/>
+          </a:xfrm>
+          <a:prstGeom prst="rect">
+            <a:avLst/>
+          </a:prstGeom>
+          <a:noFill/>
+        </p:spPr>
+        <p:txBody>
+          <a:bodyPr wrap="none" rtlCol="0">
+            <a:spAutoFit/>
+          </a:bodyPr>
+          <a:lstStyle/>
+          <a:p>
+            <a:pPr algn="ctr"/>
+            <a:r>
+              <a:rPr lang="en-US" dirty="0"/>
+              <a:t>User</a:t>
+            </a:r>
+          </a:p>
+        </p:txBody>
+      </p:sp>
+      <p:sp>
+        <p:nvSpPr>
+          <p:cNvPr id="32" name="Rectangle: Rounded Corners 31">
+            <a:extLst>
+              <a:ext uri="{FF2B5EF4-FFF2-40B4-BE49-F238E27FC236}">
+                <a16:creationId xmlns:a16="http://schemas.microsoft.com/office/drawing/2014/main" id="{3FBB97D8-567B-2FB3-A77F-4142991A4776}"/>
+              </a:ext>
+            </a:extLst>
+          </p:cNvPr>
+          <p:cNvSpPr/>
+          <p:nvPr/>
+        </p:nvSpPr>
+        <p:spPr>
+          <a:xfrm>
+            <a:off x="533713" y="5119217"/>
+            <a:ext cx="1078685" cy="369332"/>
+          </a:xfrm>
+          <a:prstGeom prst="roundRect">
+            <a:avLst/>
+          </a:prstGeom>
+          <a:solidFill>
+            <a:srgbClr val="B2D4EB"/>
+          </a:solidFill>
+          <a:ln>
+            <a:solidFill>
+              <a:schemeClr val="tx1"/>
+            </a:solidFill>
+          </a:ln>
+        </p:spPr>
+        <p:style>
+          <a:lnRef idx="2">
+            <a:schemeClr val="accent1">
+              <a:shade val="15000"/>
+            </a:schemeClr>
+          </a:lnRef>
+          <a:fillRef idx="1">
+            <a:schemeClr val="accent1"/>
+          </a:fillRef>
+          <a:effectRef idx="0">
+            <a:schemeClr val="accent1"/>
+          </a:effectRef>
+          <a:fontRef idx="minor">
+            <a:schemeClr val="lt1"/>
+          </a:fontRef>
+        </p:style>
+        <p:txBody>
+          <a:bodyPr rtlCol="0" anchor="ctr"/>
+          <a:lstStyle/>
+          <a:p>
+            <a:pPr algn="ctr"/>
+            <a:r>
+              <a:rPr lang="en-US" dirty="0">
+                <a:solidFill>
+                  <a:schemeClr val="tx1"/>
+                </a:solidFill>
+              </a:rPr>
+              <a:t>Later…</a:t>
+            </a:r>
+            <a:endParaRPr lang="en-US" i="1" dirty="0">
+              <a:solidFill>
+                <a:schemeClr val="tx1"/>
+              </a:solidFill>
+            </a:endParaRPr>
+          </a:p>
+        </p:txBody>
+      </p:sp>
+      <p:sp>
+        <p:nvSpPr>
+          <p:cNvPr id="33" name="TextBox 32">
+            <a:extLst>
+              <a:ext uri="{FF2B5EF4-FFF2-40B4-BE49-F238E27FC236}">
+                <a16:creationId xmlns:a16="http://schemas.microsoft.com/office/drawing/2014/main" id="{C2CFF3AF-6386-1815-7F4B-10773FA4310B}"/>
+              </a:ext>
+            </a:extLst>
+          </p:cNvPr>
+          <p:cNvSpPr txBox="1"/>
+          <p:nvPr/>
+        </p:nvSpPr>
+        <p:spPr>
+          <a:xfrm>
+            <a:off x="4150971" y="5224918"/>
+            <a:ext cx="671980" cy="369332"/>
+          </a:xfrm>
+          <a:prstGeom prst="rect">
+            <a:avLst/>
+          </a:prstGeom>
+          <a:noFill/>
+        </p:spPr>
+        <p:txBody>
+          <a:bodyPr wrap="none" rtlCol="0">
+            <a:spAutoFit/>
+          </a:bodyPr>
+          <a:lstStyle/>
+          <a:p>
+            <a:pPr algn="ctr"/>
+            <a:r>
+              <a:rPr lang="en-US" dirty="0"/>
+              <a:t>Agent</a:t>
+            </a:r>
+          </a:p>
+        </p:txBody>
+      </p:sp>
+      <p:sp>
+        <p:nvSpPr>
+          <p:cNvPr id="34" name="TextBox 33">
+            <a:extLst>
+              <a:ext uri="{FF2B5EF4-FFF2-40B4-BE49-F238E27FC236}">
+                <a16:creationId xmlns:a16="http://schemas.microsoft.com/office/drawing/2014/main" id="{A612CBF8-29C7-89CD-7A59-406C49225BBD}"/>
+              </a:ext>
+            </a:extLst>
+          </p:cNvPr>
+          <p:cNvSpPr txBox="1"/>
+          <p:nvPr/>
+        </p:nvSpPr>
+        <p:spPr>
+          <a:xfrm>
+            <a:off x="6002012" y="5224918"/>
+            <a:ext cx="1338380" cy="369332"/>
+          </a:xfrm>
+          <a:prstGeom prst="rect">
+            <a:avLst/>
+          </a:prstGeom>
+          <a:noFill/>
+        </p:spPr>
+        <p:txBody>
+          <a:bodyPr wrap="none" rtlCol="0">
+            <a:spAutoFit/>
+          </a:bodyPr>
+          <a:lstStyle/>
+          <a:p>
+            <a:pPr algn="ctr"/>
+            <a:r>
+              <a:rPr lang="en-US" dirty="0"/>
+              <a:t>Memory Store</a:t>
+            </a:r>
+          </a:p>
+        </p:txBody>
+      </p:sp>
+      <p:sp>
+        <p:nvSpPr>
+          <p:cNvPr id="35" name="Speech Bubble: Rectangle with Corners Rounded 34">
+            <a:extLst>
+              <a:ext uri="{FF2B5EF4-FFF2-40B4-BE49-F238E27FC236}">
+                <a16:creationId xmlns:a16="http://schemas.microsoft.com/office/drawing/2014/main" id="{135EC79D-0288-3ED4-7298-811262B903D5}"/>
+              </a:ext>
+            </a:extLst>
+          </p:cNvPr>
+          <p:cNvSpPr/>
+          <p:nvPr/>
+        </p:nvSpPr>
+        <p:spPr>
+          <a:xfrm>
+            <a:off x="1770288" y="3807319"/>
+            <a:ext cx="2885222" cy="612648"/>
+          </a:xfrm>
+          <a:prstGeom prst="wedgeRoundRectCallout">
+            <a:avLst>
+              <a:gd name="adj1" fmla="val -29330"/>
+              <a:gd name="adj2" fmla="val 89539"/>
+              <a:gd name="adj3" fmla="val 16667"/>
+            </a:avLst>
+          </a:prstGeom>
+          <a:solidFill>
+            <a:srgbClr val="E5F1F8"/>
+          </a:solidFill>
+        </p:spPr>
+        <p:style>
+          <a:lnRef idx="2">
+            <a:schemeClr val="dk1">
+              <a:shade val="15000"/>
+            </a:schemeClr>
+          </a:lnRef>
+          <a:fillRef idx="1">
+            <a:schemeClr val="dk1"/>
+          </a:fillRef>
+          <a:effectRef idx="0">
+            <a:schemeClr val="dk1"/>
+          </a:effectRef>
+          <a:fontRef idx="minor">
+            <a:schemeClr val="lt1"/>
+          </a:fontRef>
+        </p:style>
+        <p:txBody>
+          <a:bodyPr rtlCol="0" anchor="ctr"/>
+          <a:lstStyle/>
+          <a:p>
+            <a:pPr algn="ctr"/>
+            <a:r>
+              <a:rPr lang="en-US" dirty="0">
+                <a:solidFill>
+                  <a:schemeClr val="tx1"/>
+                </a:solidFill>
+              </a:rPr>
+              <a:t>Help me generate a plot</a:t>
+            </a:r>
+          </a:p>
+          <a:p>
+            <a:pPr algn="ctr"/>
+            <a:r>
+              <a:rPr lang="en-US" dirty="0">
+                <a:solidFill>
+                  <a:schemeClr val="tx1"/>
+                </a:solidFill>
+              </a:rPr>
+              <a:t>for this dataset.</a:t>
+            </a:r>
+          </a:p>
+        </p:txBody>
+      </p:sp>
+      <p:cxnSp>
+        <p:nvCxnSpPr>
+          <p:cNvPr id="36" name="Straight Arrow Connector 35">
+            <a:extLst>
+              <a:ext uri="{FF2B5EF4-FFF2-40B4-BE49-F238E27FC236}">
+                <a16:creationId xmlns:a16="http://schemas.microsoft.com/office/drawing/2014/main" id="{79F506EE-BB26-240B-042A-A2A65C8D06D4}"/>
+              </a:ext>
+            </a:extLst>
+          </p:cNvPr>
+          <p:cNvCxnSpPr>
+            <a:cxnSpLocks/>
+            <a:stCxn id="30" idx="3"/>
+            <a:endCxn id="29" idx="1"/>
+          </p:cNvCxnSpPr>
+          <p:nvPr/>
+        </p:nvCxnSpPr>
+        <p:spPr>
+          <a:xfrm>
+            <a:off x="2652532" y="4983052"/>
+            <a:ext cx="1491529" cy="0"/>
+          </a:xfrm>
+          <a:prstGeom prst="straightConnector1">
+            <a:avLst/>
+          </a:prstGeom>
+          <a:ln>
+            <a:solidFill>
+              <a:schemeClr val="tx1"/>
+            </a:solidFill>
+            <a:prstDash val="solid"/>
+            <a:headEnd type="none" w="lg" len="lg"/>
+            <a:tailEnd type="triangle" w="lg" len="lg"/>
+          </a:ln>
+        </p:spPr>
+        <p:style>
+          <a:lnRef idx="2">
+            <a:schemeClr val="accent1"/>
+          </a:lnRef>
+          <a:fillRef idx="0">
+            <a:schemeClr val="accent1"/>
+          </a:fillRef>
+          <a:effectRef idx="1">
+            <a:schemeClr val="accent1"/>
+          </a:effectRef>
+          <a:fontRef idx="minor">
+            <a:schemeClr val="tx1"/>
+          </a:fontRef>
+        </p:style>
+      </p:cxnSp>
+      <p:cxnSp>
+        <p:nvCxnSpPr>
+          <p:cNvPr id="37" name="Straight Arrow Connector 36">
+            <a:extLst>
+              <a:ext uri="{FF2B5EF4-FFF2-40B4-BE49-F238E27FC236}">
+                <a16:creationId xmlns:a16="http://schemas.microsoft.com/office/drawing/2014/main" id="{574A5733-2C01-3E27-7090-45BD5FB15200}"/>
+              </a:ext>
+            </a:extLst>
+          </p:cNvPr>
+          <p:cNvCxnSpPr>
+            <a:cxnSpLocks/>
+            <a:stCxn id="28" idx="1"/>
+            <a:endCxn id="29" idx="3"/>
+          </p:cNvCxnSpPr>
+          <p:nvPr/>
+        </p:nvCxnSpPr>
+        <p:spPr>
+          <a:xfrm flipH="1">
+            <a:off x="4829861" y="4983052"/>
+            <a:ext cx="1498439" cy="0"/>
+          </a:xfrm>
+          <a:prstGeom prst="straightConnector1">
+            <a:avLst/>
+          </a:prstGeom>
+          <a:ln>
+            <a:solidFill>
+              <a:schemeClr val="tx1"/>
+            </a:solidFill>
+            <a:prstDash val="solid"/>
+            <a:headEnd type="none" w="lg" len="lg"/>
+            <a:tailEnd type="triangle" w="lg" len="lg"/>
+          </a:ln>
+        </p:spPr>
+        <p:style>
+          <a:lnRef idx="2">
+            <a:schemeClr val="accent1"/>
+          </a:lnRef>
+          <a:fillRef idx="0">
+            <a:schemeClr val="accent1"/>
+          </a:fillRef>
+          <a:effectRef idx="1">
+            <a:schemeClr val="accent1"/>
+          </a:effectRef>
+          <a:fontRef idx="minor">
+            <a:schemeClr val="tx1"/>
+          </a:fontRef>
+        </p:style>
+      </p:cxnSp>
+      <p:sp>
+        <p:nvSpPr>
+          <p:cNvPr id="38" name="Speech Bubble: Rectangle with Corners Rounded 37">
+            <a:extLst>
+              <a:ext uri="{FF2B5EF4-FFF2-40B4-BE49-F238E27FC236}">
+                <a16:creationId xmlns:a16="http://schemas.microsoft.com/office/drawing/2014/main" id="{5D85D6AC-48CF-AC5D-C137-4856B7B2D135}"/>
+              </a:ext>
+            </a:extLst>
+          </p:cNvPr>
+          <p:cNvSpPr/>
+          <p:nvPr/>
+        </p:nvSpPr>
+        <p:spPr>
+          <a:xfrm>
+            <a:off x="3785978" y="5836115"/>
+            <a:ext cx="2885222" cy="612648"/>
+          </a:xfrm>
+          <a:prstGeom prst="wedgeRoundRectCallout">
+            <a:avLst>
+              <a:gd name="adj1" fmla="val -25196"/>
+              <a:gd name="adj2" fmla="val -88916"/>
+              <a:gd name="adj3" fmla="val 16667"/>
+            </a:avLst>
+          </a:prstGeom>
+          <a:solidFill>
+            <a:srgbClr val="E5F1F8"/>
+          </a:solidFill>
+        </p:spPr>
+        <p:style>
+          <a:lnRef idx="2">
+            <a:schemeClr val="dk1">
+              <a:shade val="15000"/>
+            </a:schemeClr>
+          </a:lnRef>
+          <a:fillRef idx="1">
+            <a:schemeClr val="dk1"/>
+          </a:fillRef>
+          <a:effectRef idx="0">
+            <a:schemeClr val="dk1"/>
+          </a:effectRef>
+          <a:fontRef idx="minor">
+            <a:schemeClr val="lt1"/>
+          </a:fontRef>
+        </p:style>
+        <p:txBody>
+          <a:bodyPr rtlCol="0" anchor="ctr"/>
+          <a:lstStyle/>
+          <a:p>
+            <a:r>
+              <a:rPr lang="en-US" dirty="0">
+                <a:solidFill>
+                  <a:schemeClr val="tx1"/>
+                </a:solidFill>
+              </a:rPr>
+              <a:t>import </a:t>
+            </a:r>
+            <a:r>
+              <a:rPr lang="en-US" dirty="0" err="1">
+                <a:solidFill>
+                  <a:schemeClr val="tx1"/>
+                </a:solidFill>
+              </a:rPr>
+              <a:t>matplotlib.pyplot</a:t>
+            </a:r>
+            <a:r>
+              <a:rPr lang="en-US" dirty="0">
+                <a:solidFill>
+                  <a:schemeClr val="tx1"/>
+                </a:solidFill>
+              </a:rPr>
+              <a:t> as </a:t>
+            </a:r>
+            <a:r>
+              <a:rPr lang="en-US" dirty="0" err="1">
+                <a:solidFill>
+                  <a:schemeClr val="tx1"/>
+                </a:solidFill>
+              </a:rPr>
+              <a:t>plt</a:t>
+            </a:r>
+            <a:endParaRPr lang="en-US" dirty="0">
+              <a:solidFill>
+                <a:schemeClr val="tx1"/>
+              </a:solidFill>
+            </a:endParaRPr>
+          </a:p>
+        </p:txBody>
+      </p:sp>
+      <p:sp>
+        <p:nvSpPr>
+          <p:cNvPr id="39" name="Speech Bubble: Rectangle with Corners Rounded 38">
+            <a:extLst>
+              <a:ext uri="{FF2B5EF4-FFF2-40B4-BE49-F238E27FC236}">
+                <a16:creationId xmlns:a16="http://schemas.microsoft.com/office/drawing/2014/main" id="{949128A9-77EC-8D4B-219D-7A28229C8AC4}"/>
+              </a:ext>
+            </a:extLst>
+          </p:cNvPr>
+          <p:cNvSpPr/>
+          <p:nvPr/>
+        </p:nvSpPr>
+        <p:spPr>
+          <a:xfrm>
+            <a:off x="6096000" y="3807319"/>
+            <a:ext cx="2885222" cy="612648"/>
+          </a:xfrm>
+          <a:prstGeom prst="wedgeRoundRectCallout">
+            <a:avLst>
+              <a:gd name="adj1" fmla="val -29330"/>
+              <a:gd name="adj2" fmla="val 89539"/>
+              <a:gd name="adj3" fmla="val 16667"/>
+            </a:avLst>
+          </a:prstGeom>
+          <a:solidFill>
+            <a:srgbClr val="E5F1F8"/>
+          </a:solidFill>
+        </p:spPr>
+        <p:style>
+          <a:lnRef idx="2">
+            <a:schemeClr val="dk1">
+              <a:shade val="15000"/>
+            </a:schemeClr>
+          </a:lnRef>
+          <a:fillRef idx="1">
+            <a:schemeClr val="dk1"/>
+          </a:fillRef>
+          <a:effectRef idx="0">
+            <a:schemeClr val="dk1"/>
+          </a:effectRef>
+          <a:fontRef idx="minor">
+            <a:schemeClr val="lt1"/>
+          </a:fontRef>
+        </p:style>
+        <p:txBody>
+          <a:bodyPr rtlCol="0" anchor="ctr"/>
+          <a:lstStyle/>
+          <a:p>
+            <a:pPr algn="ctr"/>
+            <a:r>
+              <a:rPr lang="en-US" dirty="0">
+                <a:solidFill>
+                  <a:schemeClr val="tx1"/>
+                </a:solidFill>
+              </a:rPr>
+              <a:t>Only knows Python</a:t>
+            </a:r>
+          </a:p>
+        </p:txBody>
+      </p:sp>
+    </p:spTree>
+    <p:extLst>
+      <p:ext uri="{BB962C8B-B14F-4D97-AF65-F5344CB8AC3E}">
+        <p14:creationId xmlns:p14="http://schemas.microsoft.com/office/powerpoint/2010/main" val="2395708849"/>
+      </p:ext>
+    </p:extLst>
+  </p:cSld>
+  <p:clrMapOvr>
+    <a:masterClrMapping/>
+  </p:clrMapOvr>
+</p:sld>
+</file>
+
+<file path=ppt/slides/slide25.xml><?xml version="1.0" encoding="utf-8"?>
+<p:sld xmlns:a="http://schemas.openxmlformats.org/drawingml/2006/main" xmlns:r="http://schemas.openxmlformats.org/officeDocument/2006/relationships" xmlns:p="http://schemas.openxmlformats.org/presentationml/2006/main">
+  <p:cSld>
+    <p:spTree>
+      <p:nvGrpSpPr>
+        <p:cNvPr id="1" name=""/>
+        <p:cNvGrpSpPr/>
+        <p:nvPr/>
+      </p:nvGrpSpPr>
+      <p:grpSpPr>
+        <a:xfrm>
+          <a:off x="0" y="0"/>
+          <a:ext cx="0" cy="0"/>
+          <a:chOff x="0" y="0"/>
+          <a:chExt cx="0" cy="0"/>
+        </a:xfrm>
+      </p:grpSpPr>
+      <p:sp>
+        <p:nvSpPr>
+          <p:cNvPr id="29" name="Rectangle 28">
+            <a:extLst>
+              <a:ext uri="{FF2B5EF4-FFF2-40B4-BE49-F238E27FC236}">
+                <a16:creationId xmlns:a16="http://schemas.microsoft.com/office/drawing/2014/main" id="{D09C6FBE-9D75-48BF-C42A-6E39ED978517}"/>
+              </a:ext>
+            </a:extLst>
+          </p:cNvPr>
+          <p:cNvSpPr/>
+          <p:nvPr/>
+        </p:nvSpPr>
+        <p:spPr>
+          <a:xfrm>
+            <a:off x="8773764" y="3207730"/>
+            <a:ext cx="237446" cy="184664"/>
+          </a:xfrm>
+          <a:prstGeom prst="rect">
+            <a:avLst/>
+          </a:prstGeom>
+        </p:spPr>
+        <p:style>
+          <a:lnRef idx="2">
+            <a:schemeClr val="accent1">
+              <a:shade val="15000"/>
+            </a:schemeClr>
+          </a:lnRef>
+          <a:fillRef idx="1">
+            <a:schemeClr val="accent1"/>
+          </a:fillRef>
+          <a:effectRef idx="0">
+            <a:schemeClr val="accent1"/>
+          </a:effectRef>
+          <a:fontRef idx="minor">
+            <a:schemeClr val="lt1"/>
+          </a:fontRef>
+        </p:style>
+        <p:txBody>
+          <a:bodyPr rtlCol="0" anchor="ctr"/>
+          <a:lstStyle/>
+          <a:p>
+            <a:pPr algn="ctr"/>
+            <a:endParaRPr lang="en-US"/>
+          </a:p>
+        </p:txBody>
+      </p:sp>
+      <p:sp>
+        <p:nvSpPr>
+          <p:cNvPr id="2" name="Rectangle: Rounded Corners 1">
+            <a:extLst>
+              <a:ext uri="{FF2B5EF4-FFF2-40B4-BE49-F238E27FC236}">
+                <a16:creationId xmlns:a16="http://schemas.microsoft.com/office/drawing/2014/main" id="{D7D559C0-7BA5-7BA3-7991-88FE92F6985E}"/>
+              </a:ext>
+            </a:extLst>
+          </p:cNvPr>
+          <p:cNvSpPr/>
+          <p:nvPr/>
+        </p:nvSpPr>
+        <p:spPr>
+          <a:xfrm>
+            <a:off x="4028921" y="2284412"/>
+            <a:ext cx="4982297" cy="1817138"/>
+          </a:xfrm>
+          <a:prstGeom prst="roundRect">
+            <a:avLst>
+              <a:gd name="adj" fmla="val 5234"/>
+            </a:avLst>
+          </a:prstGeom>
+          <a:solidFill>
+            <a:schemeClr val="bg1"/>
+          </a:solidFill>
+          <a:ln>
+            <a:solidFill>
+              <a:schemeClr val="tx1"/>
+            </a:solidFill>
+          </a:ln>
+        </p:spPr>
+        <p:style>
+          <a:lnRef idx="2">
+            <a:schemeClr val="accent1">
+              <a:shade val="15000"/>
+            </a:schemeClr>
+          </a:lnRef>
+          <a:fillRef idx="1">
+            <a:schemeClr val="accent1"/>
+          </a:fillRef>
+          <a:effectRef idx="0">
+            <a:schemeClr val="accent1"/>
+          </a:effectRef>
+          <a:fontRef idx="minor">
+            <a:schemeClr val="lt1"/>
+          </a:fontRef>
+        </p:style>
+        <p:txBody>
+          <a:bodyPr rtlCol="0" anchor="ctr"/>
+          <a:lstStyle/>
+          <a:p>
+            <a:pPr algn="ctr"/>
+            <a:endParaRPr lang="en-US" dirty="0">
+              <a:solidFill>
+                <a:schemeClr val="tx1"/>
+              </a:solidFill>
+            </a:endParaRPr>
+          </a:p>
+        </p:txBody>
+      </p:sp>
+      <p:sp>
+        <p:nvSpPr>
+          <p:cNvPr id="3" name="Rectangle: Rounded Corners 2">
+            <a:extLst>
+              <a:ext uri="{FF2B5EF4-FFF2-40B4-BE49-F238E27FC236}">
+                <a16:creationId xmlns:a16="http://schemas.microsoft.com/office/drawing/2014/main" id="{369A92FF-932E-7204-6E1B-ADC372951728}"/>
+              </a:ext>
+            </a:extLst>
+          </p:cNvPr>
+          <p:cNvSpPr/>
+          <p:nvPr/>
+        </p:nvSpPr>
+        <p:spPr>
+          <a:xfrm>
+            <a:off x="5229604" y="2099745"/>
+            <a:ext cx="2580925" cy="369332"/>
+          </a:xfrm>
+          <a:prstGeom prst="roundRect">
+            <a:avLst/>
+          </a:prstGeom>
+          <a:solidFill>
+            <a:srgbClr val="B2D4EB"/>
+          </a:solidFill>
+          <a:ln>
+            <a:solidFill>
+              <a:schemeClr val="tx1"/>
+            </a:solidFill>
+          </a:ln>
+        </p:spPr>
+        <p:style>
+          <a:lnRef idx="2">
+            <a:schemeClr val="accent1">
+              <a:shade val="15000"/>
+            </a:schemeClr>
+          </a:lnRef>
+          <a:fillRef idx="1">
+            <a:schemeClr val="accent1"/>
+          </a:fillRef>
+          <a:effectRef idx="0">
+            <a:schemeClr val="accent1"/>
+          </a:effectRef>
+          <a:fontRef idx="minor">
+            <a:schemeClr val="lt1"/>
+          </a:fontRef>
+        </p:style>
+        <p:txBody>
+          <a:bodyPr rtlCol="0" anchor="ctr"/>
+          <a:lstStyle/>
+          <a:p>
+            <a:pPr algn="ctr"/>
+            <a:r>
+              <a:rPr lang="en-US" dirty="0">
+                <a:solidFill>
+                  <a:schemeClr val="tx1"/>
+                </a:solidFill>
+              </a:rPr>
+              <a:t>Governance Layers</a:t>
+            </a:r>
+            <a:endParaRPr lang="en-US" i="1" dirty="0">
+              <a:solidFill>
+                <a:schemeClr val="tx1"/>
+              </a:solidFill>
+            </a:endParaRPr>
+          </a:p>
+        </p:txBody>
+      </p:sp>
+      <p:sp>
+        <p:nvSpPr>
+          <p:cNvPr id="4" name="Rectangle: Rounded Corners 3">
+            <a:extLst>
+              <a:ext uri="{FF2B5EF4-FFF2-40B4-BE49-F238E27FC236}">
+                <a16:creationId xmlns:a16="http://schemas.microsoft.com/office/drawing/2014/main" id="{BBB68683-7AE1-4C22-DB0B-68CB410C7950}"/>
+              </a:ext>
+            </a:extLst>
+          </p:cNvPr>
+          <p:cNvSpPr/>
+          <p:nvPr/>
+        </p:nvSpPr>
+        <p:spPr>
+          <a:xfrm>
+            <a:off x="5847981" y="2653741"/>
+            <a:ext cx="1344168" cy="553989"/>
+          </a:xfrm>
+          <a:prstGeom prst="roundRect">
+            <a:avLst/>
+          </a:prstGeom>
+          <a:solidFill>
+            <a:srgbClr val="E5F1F8"/>
+          </a:solidFill>
+          <a:ln>
+            <a:solidFill>
+              <a:schemeClr val="tx1"/>
+            </a:solidFill>
+          </a:ln>
+        </p:spPr>
+        <p:style>
+          <a:lnRef idx="2">
+            <a:schemeClr val="accent1">
+              <a:shade val="15000"/>
+            </a:schemeClr>
+          </a:lnRef>
+          <a:fillRef idx="1">
+            <a:schemeClr val="accent1"/>
+          </a:fillRef>
+          <a:effectRef idx="0">
+            <a:schemeClr val="accent1"/>
+          </a:effectRef>
+          <a:fontRef idx="minor">
+            <a:schemeClr val="lt1"/>
+          </a:fontRef>
+        </p:style>
+        <p:txBody>
+          <a:bodyPr rtlCol="0" anchor="ctr"/>
+          <a:lstStyle/>
+          <a:p>
+            <a:pPr algn="ctr"/>
+            <a:r>
+              <a:rPr lang="en-US" dirty="0">
+                <a:solidFill>
+                  <a:schemeClr val="tx1"/>
+                </a:solidFill>
+              </a:rPr>
+              <a:t>Identity &amp; Trust</a:t>
+            </a:r>
+          </a:p>
+        </p:txBody>
+      </p:sp>
+      <p:sp>
+        <p:nvSpPr>
+          <p:cNvPr id="5" name="Rectangle: Rounded Corners 4">
+            <a:extLst>
+              <a:ext uri="{FF2B5EF4-FFF2-40B4-BE49-F238E27FC236}">
+                <a16:creationId xmlns:a16="http://schemas.microsoft.com/office/drawing/2014/main" id="{48AEFC57-5299-7BF2-954C-A15A60632198}"/>
+              </a:ext>
+            </a:extLst>
+          </p:cNvPr>
+          <p:cNvSpPr/>
+          <p:nvPr/>
+        </p:nvSpPr>
+        <p:spPr>
+          <a:xfrm>
+            <a:off x="7429595" y="2653741"/>
+            <a:ext cx="1344168" cy="553989"/>
+          </a:xfrm>
+          <a:prstGeom prst="roundRect">
+            <a:avLst/>
+          </a:prstGeom>
+          <a:solidFill>
+            <a:srgbClr val="E5F1F8"/>
+          </a:solidFill>
+          <a:ln>
+            <a:solidFill>
+              <a:schemeClr val="tx1"/>
+            </a:solidFill>
+          </a:ln>
+        </p:spPr>
+        <p:style>
+          <a:lnRef idx="2">
+            <a:schemeClr val="accent1">
+              <a:shade val="15000"/>
+            </a:schemeClr>
+          </a:lnRef>
+          <a:fillRef idx="1">
+            <a:schemeClr val="accent1"/>
+          </a:fillRef>
+          <a:effectRef idx="0">
+            <a:schemeClr val="accent1"/>
+          </a:effectRef>
+          <a:fontRef idx="minor">
+            <a:schemeClr val="lt1"/>
+          </a:fontRef>
+        </p:style>
+        <p:txBody>
+          <a:bodyPr rtlCol="0" anchor="ctr"/>
+          <a:lstStyle/>
+          <a:p>
+            <a:pPr algn="ctr"/>
+            <a:r>
+              <a:rPr lang="en-US" dirty="0">
+                <a:solidFill>
+                  <a:schemeClr val="tx1"/>
+                </a:solidFill>
+              </a:rPr>
+              <a:t>Prompt Injection</a:t>
+            </a:r>
+          </a:p>
+        </p:txBody>
+      </p:sp>
+      <p:sp>
+        <p:nvSpPr>
+          <p:cNvPr id="6" name="Rectangle: Rounded Corners 5">
+            <a:extLst>
+              <a:ext uri="{FF2B5EF4-FFF2-40B4-BE49-F238E27FC236}">
+                <a16:creationId xmlns:a16="http://schemas.microsoft.com/office/drawing/2014/main" id="{1FB277EF-2BCD-7572-3C0B-F3829ECED8EE}"/>
+              </a:ext>
+            </a:extLst>
+          </p:cNvPr>
+          <p:cNvSpPr/>
+          <p:nvPr/>
+        </p:nvSpPr>
+        <p:spPr>
+          <a:xfrm>
+            <a:off x="4266367" y="2653741"/>
+            <a:ext cx="1344168" cy="553989"/>
+          </a:xfrm>
+          <a:prstGeom prst="roundRect">
+            <a:avLst/>
+          </a:prstGeom>
+          <a:solidFill>
+            <a:srgbClr val="E5F1F8"/>
+          </a:solidFill>
+          <a:ln>
+            <a:solidFill>
+              <a:schemeClr val="tx1"/>
+            </a:solidFill>
+          </a:ln>
+        </p:spPr>
+        <p:style>
+          <a:lnRef idx="2">
+            <a:schemeClr val="accent1">
+              <a:shade val="15000"/>
+            </a:schemeClr>
+          </a:lnRef>
+          <a:fillRef idx="1">
+            <a:schemeClr val="accent1"/>
+          </a:fillRef>
+          <a:effectRef idx="0">
+            <a:schemeClr val="accent1"/>
+          </a:effectRef>
+          <a:fontRef idx="minor">
+            <a:schemeClr val="lt1"/>
+          </a:fontRef>
+        </p:style>
+        <p:txBody>
+          <a:bodyPr rtlCol="0" anchor="ctr"/>
+          <a:lstStyle/>
+          <a:p>
+            <a:pPr algn="ctr"/>
+            <a:r>
+              <a:rPr lang="en-US" dirty="0">
+                <a:solidFill>
+                  <a:schemeClr val="tx1"/>
+                </a:solidFill>
+              </a:rPr>
+              <a:t>Policy Engine</a:t>
+            </a:r>
+          </a:p>
+        </p:txBody>
+      </p:sp>
+      <p:sp>
+        <p:nvSpPr>
+          <p:cNvPr id="7" name="Rectangle: Rounded Corners 6">
+            <a:extLst>
+              <a:ext uri="{FF2B5EF4-FFF2-40B4-BE49-F238E27FC236}">
+                <a16:creationId xmlns:a16="http://schemas.microsoft.com/office/drawing/2014/main" id="{D45AB78B-DEA8-01BB-75CC-60343D2DE3B9}"/>
+              </a:ext>
+            </a:extLst>
+          </p:cNvPr>
+          <p:cNvSpPr/>
+          <p:nvPr/>
+        </p:nvSpPr>
+        <p:spPr>
+          <a:xfrm>
+            <a:off x="811982" y="2284411"/>
+            <a:ext cx="2854044" cy="1817138"/>
+          </a:xfrm>
+          <a:prstGeom prst="roundRect">
+            <a:avLst>
+              <a:gd name="adj" fmla="val 5234"/>
+            </a:avLst>
+          </a:prstGeom>
+          <a:solidFill>
+            <a:schemeClr val="bg1"/>
+          </a:solidFill>
+          <a:ln>
+            <a:solidFill>
+              <a:schemeClr val="tx1"/>
+            </a:solidFill>
+          </a:ln>
+        </p:spPr>
+        <p:style>
+          <a:lnRef idx="2">
+            <a:schemeClr val="accent1">
+              <a:shade val="15000"/>
+            </a:schemeClr>
+          </a:lnRef>
+          <a:fillRef idx="1">
+            <a:schemeClr val="accent1"/>
+          </a:fillRef>
+          <a:effectRef idx="0">
+            <a:schemeClr val="accent1"/>
+          </a:effectRef>
+          <a:fontRef idx="minor">
+            <a:schemeClr val="lt1"/>
+          </a:fontRef>
+        </p:style>
+        <p:txBody>
+          <a:bodyPr rtlCol="0" anchor="ctr"/>
+          <a:lstStyle/>
+          <a:p>
+            <a:pPr algn="ctr"/>
+            <a:endParaRPr lang="en-US" dirty="0">
+              <a:solidFill>
+                <a:schemeClr val="tx1"/>
+              </a:solidFill>
+            </a:endParaRPr>
+          </a:p>
+        </p:txBody>
+      </p:sp>
+      <p:sp>
+        <p:nvSpPr>
+          <p:cNvPr id="8" name="Rectangle: Rounded Corners 7">
+            <a:extLst>
+              <a:ext uri="{FF2B5EF4-FFF2-40B4-BE49-F238E27FC236}">
+                <a16:creationId xmlns:a16="http://schemas.microsoft.com/office/drawing/2014/main" id="{CE8DED82-D37E-2CA9-B8B6-14C77E79F870}"/>
+              </a:ext>
+            </a:extLst>
+          </p:cNvPr>
+          <p:cNvSpPr/>
+          <p:nvPr/>
+        </p:nvSpPr>
+        <p:spPr>
+          <a:xfrm>
+            <a:off x="1210903" y="2099745"/>
+            <a:ext cx="2056202" cy="369332"/>
+          </a:xfrm>
+          <a:prstGeom prst="roundRect">
+            <a:avLst/>
+          </a:prstGeom>
+          <a:solidFill>
+            <a:srgbClr val="B2D4EB"/>
+          </a:solidFill>
+          <a:ln>
+            <a:solidFill>
+              <a:schemeClr val="tx1"/>
+            </a:solidFill>
+          </a:ln>
+        </p:spPr>
+        <p:style>
+          <a:lnRef idx="2">
+            <a:schemeClr val="accent1">
+              <a:shade val="15000"/>
+            </a:schemeClr>
+          </a:lnRef>
+          <a:fillRef idx="1">
+            <a:schemeClr val="accent1"/>
+          </a:fillRef>
+          <a:effectRef idx="0">
+            <a:schemeClr val="accent1"/>
+          </a:effectRef>
+          <a:fontRef idx="minor">
+            <a:schemeClr val="lt1"/>
+          </a:fontRef>
+        </p:style>
+        <p:txBody>
+          <a:bodyPr rtlCol="0" anchor="ctr"/>
+          <a:lstStyle/>
+          <a:p>
+            <a:pPr algn="ctr"/>
+            <a:r>
+              <a:rPr lang="en-US" dirty="0">
+                <a:solidFill>
+                  <a:schemeClr val="tx1"/>
+                </a:solidFill>
+              </a:rPr>
+              <a:t>Agent Framework</a:t>
+            </a:r>
+            <a:endParaRPr lang="en-US" i="1" dirty="0">
+              <a:solidFill>
+                <a:schemeClr val="tx1"/>
+              </a:solidFill>
+            </a:endParaRPr>
+          </a:p>
+        </p:txBody>
+      </p:sp>
+      <p:sp>
+        <p:nvSpPr>
+          <p:cNvPr id="9" name="Rectangle: Rounded Corners 8">
+            <a:extLst>
+              <a:ext uri="{FF2B5EF4-FFF2-40B4-BE49-F238E27FC236}">
+                <a16:creationId xmlns:a16="http://schemas.microsoft.com/office/drawing/2014/main" id="{B21B9E34-2525-7477-715C-A94A9F092864}"/>
+              </a:ext>
+            </a:extLst>
+          </p:cNvPr>
+          <p:cNvSpPr/>
+          <p:nvPr/>
+        </p:nvSpPr>
+        <p:spPr>
+          <a:xfrm>
+            <a:off x="5068128" y="3399767"/>
+            <a:ext cx="1344168" cy="553989"/>
+          </a:xfrm>
+          <a:prstGeom prst="roundRect">
+            <a:avLst/>
+          </a:prstGeom>
+          <a:solidFill>
+            <a:srgbClr val="E5F1F8"/>
+          </a:solidFill>
+          <a:ln>
+            <a:solidFill>
+              <a:schemeClr val="tx1"/>
+            </a:solidFill>
+          </a:ln>
+        </p:spPr>
+        <p:style>
+          <a:lnRef idx="2">
+            <a:schemeClr val="accent1">
+              <a:shade val="15000"/>
+            </a:schemeClr>
+          </a:lnRef>
+          <a:fillRef idx="1">
+            <a:schemeClr val="accent1"/>
+          </a:fillRef>
+          <a:effectRef idx="0">
+            <a:schemeClr val="accent1"/>
+          </a:effectRef>
+          <a:fontRef idx="minor">
+            <a:schemeClr val="lt1"/>
+          </a:fontRef>
+        </p:style>
+        <p:txBody>
+          <a:bodyPr rtlCol="0" anchor="ctr"/>
+          <a:lstStyle/>
+          <a:p>
+            <a:pPr algn="ctr"/>
+            <a:r>
+              <a:rPr lang="en-US" dirty="0">
+                <a:solidFill>
+                  <a:schemeClr val="tx1"/>
+                </a:solidFill>
+              </a:rPr>
+              <a:t>Execution Sandbox</a:t>
+            </a:r>
+          </a:p>
+        </p:txBody>
+      </p:sp>
+      <p:sp>
+        <p:nvSpPr>
+          <p:cNvPr id="10" name="Rectangle: Rounded Corners 9">
+            <a:extLst>
+              <a:ext uri="{FF2B5EF4-FFF2-40B4-BE49-F238E27FC236}">
+                <a16:creationId xmlns:a16="http://schemas.microsoft.com/office/drawing/2014/main" id="{FD185910-FAAE-B9BC-5504-BD859B072DB3}"/>
+              </a:ext>
+            </a:extLst>
+          </p:cNvPr>
+          <p:cNvSpPr/>
+          <p:nvPr/>
+        </p:nvSpPr>
+        <p:spPr>
+          <a:xfrm>
+            <a:off x="6627846" y="3399767"/>
+            <a:ext cx="1344168" cy="553989"/>
+          </a:xfrm>
+          <a:prstGeom prst="roundRect">
+            <a:avLst/>
+          </a:prstGeom>
+          <a:solidFill>
+            <a:srgbClr val="E5F1F8"/>
+          </a:solidFill>
+          <a:ln>
+            <a:solidFill>
+              <a:schemeClr val="tx1"/>
+            </a:solidFill>
+          </a:ln>
+        </p:spPr>
+        <p:style>
+          <a:lnRef idx="2">
+            <a:schemeClr val="accent1">
+              <a:shade val="15000"/>
+            </a:schemeClr>
+          </a:lnRef>
+          <a:fillRef idx="1">
+            <a:schemeClr val="accent1"/>
+          </a:fillRef>
+          <a:effectRef idx="0">
+            <a:schemeClr val="accent1"/>
+          </a:effectRef>
+          <a:fontRef idx="minor">
+            <a:schemeClr val="lt1"/>
+          </a:fontRef>
+        </p:style>
+        <p:txBody>
+          <a:bodyPr rtlCol="0" anchor="ctr"/>
+          <a:lstStyle/>
+          <a:p>
+            <a:pPr algn="ctr"/>
+            <a:r>
+              <a:rPr lang="en-US" dirty="0">
+                <a:solidFill>
+                  <a:schemeClr val="tx1"/>
+                </a:solidFill>
+              </a:rPr>
+              <a:t>Audit Log</a:t>
+            </a:r>
+          </a:p>
+        </p:txBody>
+      </p:sp>
+      <p:sp>
+        <p:nvSpPr>
+          <p:cNvPr id="12" name="Rectangle: Rounded Corners 11">
+            <a:extLst>
+              <a:ext uri="{FF2B5EF4-FFF2-40B4-BE49-F238E27FC236}">
+                <a16:creationId xmlns:a16="http://schemas.microsoft.com/office/drawing/2014/main" id="{642A45A0-4DC2-9B66-4AC8-0E24961EFEB3}"/>
+              </a:ext>
+            </a:extLst>
+          </p:cNvPr>
+          <p:cNvSpPr/>
+          <p:nvPr/>
+        </p:nvSpPr>
+        <p:spPr>
+          <a:xfrm>
+            <a:off x="1024326" y="2653741"/>
+            <a:ext cx="1103842" cy="553989"/>
+          </a:xfrm>
+          <a:prstGeom prst="roundRect">
+            <a:avLst/>
+          </a:prstGeom>
+          <a:solidFill>
+            <a:srgbClr val="E5F1F8"/>
+          </a:solidFill>
+          <a:ln>
+            <a:solidFill>
+              <a:schemeClr val="tx1"/>
+            </a:solidFill>
+          </a:ln>
+        </p:spPr>
+        <p:style>
+          <a:lnRef idx="2">
+            <a:schemeClr val="accent1">
+              <a:shade val="15000"/>
+            </a:schemeClr>
+          </a:lnRef>
+          <a:fillRef idx="1">
+            <a:schemeClr val="accent1"/>
+          </a:fillRef>
+          <a:effectRef idx="0">
+            <a:schemeClr val="accent1"/>
+          </a:effectRef>
+          <a:fontRef idx="minor">
+            <a:schemeClr val="lt1"/>
+          </a:fontRef>
+        </p:style>
+        <p:txBody>
+          <a:bodyPr rtlCol="0" anchor="ctr"/>
+          <a:lstStyle/>
+          <a:p>
+            <a:pPr algn="ctr"/>
+            <a:r>
+              <a:rPr lang="en-US" dirty="0">
+                <a:solidFill>
+                  <a:schemeClr val="tx1"/>
+                </a:solidFill>
+              </a:rPr>
+              <a:t>OpenAI</a:t>
+            </a:r>
+          </a:p>
+        </p:txBody>
+      </p:sp>
+      <p:sp>
+        <p:nvSpPr>
+          <p:cNvPr id="13" name="Rectangle: Rounded Corners 12">
+            <a:extLst>
+              <a:ext uri="{FF2B5EF4-FFF2-40B4-BE49-F238E27FC236}">
+                <a16:creationId xmlns:a16="http://schemas.microsoft.com/office/drawing/2014/main" id="{7EEFFF0A-9698-34DD-AD36-A33BA15E0A7B}"/>
+              </a:ext>
+            </a:extLst>
+          </p:cNvPr>
+          <p:cNvSpPr/>
+          <p:nvPr/>
+        </p:nvSpPr>
+        <p:spPr>
+          <a:xfrm>
+            <a:off x="2340512" y="2653742"/>
+            <a:ext cx="1103842" cy="553989"/>
+          </a:xfrm>
+          <a:prstGeom prst="roundRect">
+            <a:avLst/>
+          </a:prstGeom>
+          <a:solidFill>
+            <a:srgbClr val="E5F1F8"/>
+          </a:solidFill>
+          <a:ln>
+            <a:solidFill>
+              <a:schemeClr val="tx1"/>
+            </a:solidFill>
+          </a:ln>
+        </p:spPr>
+        <p:style>
+          <a:lnRef idx="2">
+            <a:schemeClr val="accent1">
+              <a:shade val="15000"/>
+            </a:schemeClr>
+          </a:lnRef>
+          <a:fillRef idx="1">
+            <a:schemeClr val="accent1"/>
+          </a:fillRef>
+          <a:effectRef idx="0">
+            <a:schemeClr val="accent1"/>
+          </a:effectRef>
+          <a:fontRef idx="minor">
+            <a:schemeClr val="lt1"/>
+          </a:fontRef>
+        </p:style>
+        <p:txBody>
+          <a:bodyPr rtlCol="0" anchor="ctr"/>
+          <a:lstStyle/>
+          <a:p>
+            <a:pPr algn="ctr"/>
+            <a:r>
+              <a:rPr lang="en-US" dirty="0" err="1">
+                <a:solidFill>
+                  <a:schemeClr val="tx1"/>
+                </a:solidFill>
+              </a:rPr>
+              <a:t>LangChain</a:t>
+            </a:r>
+            <a:endParaRPr lang="en-US" dirty="0">
+              <a:solidFill>
+                <a:schemeClr val="tx1"/>
+              </a:solidFill>
+            </a:endParaRPr>
+          </a:p>
+        </p:txBody>
+      </p:sp>
+      <p:sp>
+        <p:nvSpPr>
+          <p:cNvPr id="14" name="Rectangle: Rounded Corners 13">
+            <a:extLst>
+              <a:ext uri="{FF2B5EF4-FFF2-40B4-BE49-F238E27FC236}">
+                <a16:creationId xmlns:a16="http://schemas.microsoft.com/office/drawing/2014/main" id="{81111102-2E81-9A03-3E50-0FB0D2507B7A}"/>
+              </a:ext>
+            </a:extLst>
+          </p:cNvPr>
+          <p:cNvSpPr/>
+          <p:nvPr/>
+        </p:nvSpPr>
+        <p:spPr>
+          <a:xfrm>
+            <a:off x="1024326" y="3392394"/>
+            <a:ext cx="1103842" cy="553989"/>
+          </a:xfrm>
+          <a:prstGeom prst="roundRect">
+            <a:avLst/>
+          </a:prstGeom>
+          <a:solidFill>
+            <a:srgbClr val="E5F1F8"/>
+          </a:solidFill>
+          <a:ln>
+            <a:solidFill>
+              <a:schemeClr val="tx1"/>
+            </a:solidFill>
+          </a:ln>
+        </p:spPr>
+        <p:style>
+          <a:lnRef idx="2">
+            <a:schemeClr val="accent1">
+              <a:shade val="15000"/>
+            </a:schemeClr>
+          </a:lnRef>
+          <a:fillRef idx="1">
+            <a:schemeClr val="accent1"/>
+          </a:fillRef>
+          <a:effectRef idx="0">
+            <a:schemeClr val="accent1"/>
+          </a:effectRef>
+          <a:fontRef idx="minor">
+            <a:schemeClr val="lt1"/>
+          </a:fontRef>
+        </p:style>
+        <p:txBody>
+          <a:bodyPr rtlCol="0" anchor="ctr"/>
+          <a:lstStyle/>
+          <a:p>
+            <a:pPr algn="ctr"/>
+            <a:r>
+              <a:rPr lang="en-US" dirty="0" err="1">
+                <a:solidFill>
+                  <a:schemeClr val="tx1"/>
+                </a:solidFill>
+              </a:rPr>
+              <a:t>CrewAI</a:t>
+            </a:r>
+            <a:endParaRPr lang="en-US" dirty="0">
+              <a:solidFill>
+                <a:schemeClr val="tx1"/>
+              </a:solidFill>
+            </a:endParaRPr>
+          </a:p>
+        </p:txBody>
+      </p:sp>
+      <p:sp>
+        <p:nvSpPr>
+          <p:cNvPr id="15" name="Rectangle: Rounded Corners 14">
+            <a:extLst>
+              <a:ext uri="{FF2B5EF4-FFF2-40B4-BE49-F238E27FC236}">
+                <a16:creationId xmlns:a16="http://schemas.microsoft.com/office/drawing/2014/main" id="{AB7AD7D0-AC7D-3A60-DE81-097E439CC0BD}"/>
+              </a:ext>
+            </a:extLst>
+          </p:cNvPr>
+          <p:cNvSpPr/>
+          <p:nvPr/>
+        </p:nvSpPr>
+        <p:spPr>
+          <a:xfrm>
+            <a:off x="2340512" y="3399767"/>
+            <a:ext cx="1103842" cy="553989"/>
+          </a:xfrm>
+          <a:prstGeom prst="roundRect">
+            <a:avLst/>
+          </a:prstGeom>
+          <a:solidFill>
+            <a:srgbClr val="E5F1F8"/>
+          </a:solidFill>
+          <a:ln>
+            <a:solidFill>
+              <a:schemeClr val="tx1"/>
+            </a:solidFill>
+          </a:ln>
+        </p:spPr>
+        <p:style>
+          <a:lnRef idx="2">
+            <a:schemeClr val="accent1">
+              <a:shade val="15000"/>
+            </a:schemeClr>
+          </a:lnRef>
+          <a:fillRef idx="1">
+            <a:schemeClr val="accent1"/>
+          </a:fillRef>
+          <a:effectRef idx="0">
+            <a:schemeClr val="accent1"/>
+          </a:effectRef>
+          <a:fontRef idx="minor">
+            <a:schemeClr val="lt1"/>
+          </a:fontRef>
+        </p:style>
+        <p:txBody>
+          <a:bodyPr rtlCol="0" anchor="ctr"/>
+          <a:lstStyle/>
+          <a:p>
+            <a:pPr algn="ctr"/>
+            <a:r>
+              <a:rPr lang="en-US" dirty="0" err="1">
+                <a:solidFill>
+                  <a:schemeClr val="tx1"/>
+                </a:solidFill>
+              </a:rPr>
+              <a:t>AutoGen</a:t>
+            </a:r>
+            <a:endParaRPr lang="en-US" dirty="0">
+              <a:solidFill>
+                <a:schemeClr val="tx1"/>
+              </a:solidFill>
+            </a:endParaRPr>
+          </a:p>
+        </p:txBody>
+      </p:sp>
+      <p:cxnSp>
+        <p:nvCxnSpPr>
+          <p:cNvPr id="16" name="Straight Arrow Connector 15">
+            <a:extLst>
+              <a:ext uri="{FF2B5EF4-FFF2-40B4-BE49-F238E27FC236}">
+                <a16:creationId xmlns:a16="http://schemas.microsoft.com/office/drawing/2014/main" id="{9A768D8C-D005-708F-D0B3-75FFA74EC39C}"/>
+              </a:ext>
+            </a:extLst>
+          </p:cNvPr>
+          <p:cNvCxnSpPr>
+            <a:cxnSpLocks/>
+            <a:stCxn id="7" idx="3"/>
+            <a:endCxn id="2" idx="1"/>
+          </p:cNvCxnSpPr>
+          <p:nvPr/>
+        </p:nvCxnSpPr>
+        <p:spPr>
+          <a:xfrm>
+            <a:off x="3666026" y="3192980"/>
+            <a:ext cx="362895" cy="1"/>
+          </a:xfrm>
+          <a:prstGeom prst="straightConnector1">
+            <a:avLst/>
+          </a:prstGeom>
+          <a:ln>
+            <a:solidFill>
+              <a:schemeClr val="tx1"/>
+            </a:solidFill>
+            <a:prstDash val="solid"/>
+            <a:headEnd type="none" w="lg" len="lg"/>
+            <a:tailEnd type="triangle" w="lg" len="lg"/>
+          </a:ln>
+        </p:spPr>
+        <p:style>
+          <a:lnRef idx="2">
+            <a:schemeClr val="accent1"/>
+          </a:lnRef>
+          <a:fillRef idx="0">
+            <a:schemeClr val="accent1"/>
+          </a:fillRef>
+          <a:effectRef idx="1">
+            <a:schemeClr val="accent1"/>
+          </a:effectRef>
+          <a:fontRef idx="minor">
+            <a:schemeClr val="tx1"/>
+          </a:fontRef>
+        </p:style>
+      </p:cxnSp>
+      <p:cxnSp>
+        <p:nvCxnSpPr>
+          <p:cNvPr id="22" name="Connector: Elbow 21">
+            <a:extLst>
+              <a:ext uri="{FF2B5EF4-FFF2-40B4-BE49-F238E27FC236}">
+                <a16:creationId xmlns:a16="http://schemas.microsoft.com/office/drawing/2014/main" id="{9BB7F5A3-619C-4929-B9EE-4A61A71FD193}"/>
+              </a:ext>
+            </a:extLst>
+          </p:cNvPr>
+          <p:cNvCxnSpPr>
+            <a:cxnSpLocks/>
+            <a:stCxn id="29" idx="3"/>
+            <a:endCxn id="20" idx="2"/>
+          </p:cNvCxnSpPr>
+          <p:nvPr/>
+        </p:nvCxnSpPr>
+        <p:spPr>
+          <a:xfrm flipV="1">
+            <a:off x="9011210" y="2749759"/>
+            <a:ext cx="567259" cy="550303"/>
+          </a:xfrm>
+          <a:prstGeom prst="bentConnector3">
+            <a:avLst>
+              <a:gd name="adj1" fmla="val 50000"/>
+            </a:avLst>
+          </a:prstGeom>
+          <a:ln>
+            <a:solidFill>
+              <a:schemeClr val="tx1"/>
+            </a:solidFill>
+            <a:prstDash val="solid"/>
+            <a:headEnd type="none" w="lg" len="lg"/>
+            <a:tailEnd type="triangle" w="lg" len="lg"/>
+          </a:ln>
+        </p:spPr>
+        <p:style>
+          <a:lnRef idx="2">
+            <a:schemeClr val="accent1"/>
+          </a:lnRef>
+          <a:fillRef idx="0">
+            <a:schemeClr val="accent1"/>
+          </a:fillRef>
+          <a:effectRef idx="1">
+            <a:schemeClr val="accent1"/>
+          </a:effectRef>
+          <a:fontRef idx="minor">
+            <a:schemeClr val="tx1"/>
+          </a:fontRef>
+        </p:style>
+      </p:cxnSp>
+      <p:cxnSp>
+        <p:nvCxnSpPr>
+          <p:cNvPr id="25" name="Connector: Elbow 24">
+            <a:extLst>
+              <a:ext uri="{FF2B5EF4-FFF2-40B4-BE49-F238E27FC236}">
+                <a16:creationId xmlns:a16="http://schemas.microsoft.com/office/drawing/2014/main" id="{8FF3F189-78F8-E2E6-3BB4-7D68189CF0D7}"/>
+              </a:ext>
+            </a:extLst>
+          </p:cNvPr>
+          <p:cNvCxnSpPr>
+            <a:cxnSpLocks/>
+            <a:stCxn id="29" idx="3"/>
+            <a:endCxn id="34" idx="2"/>
+          </p:cNvCxnSpPr>
+          <p:nvPr/>
+        </p:nvCxnSpPr>
+        <p:spPr>
+          <a:xfrm>
+            <a:off x="9011210" y="3300062"/>
+            <a:ext cx="567259" cy="524493"/>
+          </a:xfrm>
+          <a:prstGeom prst="bentConnector3">
+            <a:avLst>
+              <a:gd name="adj1" fmla="val 50000"/>
+            </a:avLst>
+          </a:prstGeom>
+          <a:ln>
+            <a:solidFill>
+              <a:schemeClr val="tx1"/>
+            </a:solidFill>
+            <a:prstDash val="solid"/>
+            <a:headEnd type="none" w="lg" len="lg"/>
+            <a:tailEnd type="triangle" w="lg" len="lg"/>
+          </a:ln>
+        </p:spPr>
+        <p:style>
+          <a:lnRef idx="2">
+            <a:schemeClr val="accent1"/>
+          </a:lnRef>
+          <a:fillRef idx="0">
+            <a:schemeClr val="accent1"/>
+          </a:fillRef>
+          <a:effectRef idx="1">
+            <a:schemeClr val="accent1"/>
+          </a:effectRef>
+          <a:fontRef idx="minor">
+            <a:schemeClr val="tx1"/>
+          </a:fontRef>
+        </p:style>
+      </p:cxnSp>
+      <p:grpSp>
+        <p:nvGrpSpPr>
+          <p:cNvPr id="39" name="Group 38">
+            <a:extLst>
+              <a:ext uri="{FF2B5EF4-FFF2-40B4-BE49-F238E27FC236}">
+                <a16:creationId xmlns:a16="http://schemas.microsoft.com/office/drawing/2014/main" id="{91FFC1EC-BE44-BACF-7FF6-36B59D23C045}"/>
+              </a:ext>
+            </a:extLst>
+          </p:cNvPr>
+          <p:cNvGrpSpPr/>
+          <p:nvPr/>
+        </p:nvGrpSpPr>
+        <p:grpSpPr>
+          <a:xfrm>
+            <a:off x="9578469" y="2280728"/>
+            <a:ext cx="1344168" cy="746025"/>
+            <a:chOff x="9154399" y="2746626"/>
+            <a:chExt cx="1344168" cy="746025"/>
+          </a:xfrm>
+        </p:grpSpPr>
+        <p:sp>
+          <p:nvSpPr>
+            <p:cNvPr id="20" name="Rectangle: Top Corners Rounded 19">
+              <a:extLst>
+                <a:ext uri="{FF2B5EF4-FFF2-40B4-BE49-F238E27FC236}">
+                  <a16:creationId xmlns:a16="http://schemas.microsoft.com/office/drawing/2014/main" id="{216307B9-4BD8-168F-42F0-5B3FE0C4D8BF}"/>
+                </a:ext>
+              </a:extLst>
+            </p:cNvPr>
+            <p:cNvSpPr/>
+            <p:nvPr/>
+          </p:nvSpPr>
+          <p:spPr>
+            <a:xfrm>
+              <a:off x="9154399" y="2938662"/>
+              <a:ext cx="1344168" cy="553989"/>
+            </a:xfrm>
+            <a:prstGeom prst="round2SameRect">
+              <a:avLst>
+                <a:gd name="adj1" fmla="val 0"/>
+                <a:gd name="adj2" fmla="val 11961"/>
+              </a:avLst>
+            </a:prstGeom>
+            <a:solidFill>
+              <a:srgbClr val="E5F1F8"/>
+            </a:solidFill>
+            <a:ln>
+              <a:solidFill>
+                <a:schemeClr val="tx1"/>
+              </a:solidFill>
+            </a:ln>
+          </p:spPr>
+          <p:style>
+            <a:lnRef idx="2">
+              <a:schemeClr val="accent1">
+                <a:shade val="15000"/>
+              </a:schemeClr>
+            </a:lnRef>
+            <a:fillRef idx="1">
+              <a:schemeClr val="accent1"/>
+            </a:fillRef>
+            <a:effectRef idx="0">
+              <a:schemeClr val="accent1"/>
+            </a:effectRef>
+            <a:fontRef idx="minor">
+              <a:schemeClr val="lt1"/>
+            </a:fontRef>
+          </p:style>
+          <p:txBody>
+            <a:bodyPr rtlCol="0" anchor="ctr"/>
+            <a:lstStyle/>
+            <a:p>
+              <a:pPr algn="ctr"/>
+              <a:r>
+                <a:rPr lang="en-US" dirty="0">
+                  <a:solidFill>
+                    <a:schemeClr val="tx1"/>
+                  </a:solidFill>
+                </a:rPr>
+                <a:t>Execute Tool</a:t>
+              </a:r>
+            </a:p>
+          </p:txBody>
+        </p:sp>
+        <p:sp>
+          <p:nvSpPr>
+            <p:cNvPr id="32" name="Rectangle: Rounded Corners 31">
+              <a:extLst>
+                <a:ext uri="{FF2B5EF4-FFF2-40B4-BE49-F238E27FC236}">
+                  <a16:creationId xmlns:a16="http://schemas.microsoft.com/office/drawing/2014/main" id="{B6A576D1-C568-D323-02BC-80D25B9907E2}"/>
+                </a:ext>
+              </a:extLst>
+            </p:cNvPr>
+            <p:cNvSpPr/>
+            <p:nvPr/>
+          </p:nvSpPr>
+          <p:spPr>
+            <a:xfrm>
+              <a:off x="9154399" y="2746626"/>
+              <a:ext cx="1344168" cy="230826"/>
+            </a:xfrm>
+            <a:prstGeom prst="roundRect">
+              <a:avLst/>
+            </a:prstGeom>
+            <a:solidFill>
+              <a:srgbClr val="B2D4EB"/>
+            </a:solidFill>
+            <a:ln>
+              <a:solidFill>
+                <a:schemeClr val="tx1"/>
+              </a:solidFill>
+            </a:ln>
+          </p:spPr>
+          <p:style>
+            <a:lnRef idx="2">
+              <a:schemeClr val="accent1">
+                <a:shade val="15000"/>
+              </a:schemeClr>
+            </a:lnRef>
+            <a:fillRef idx="1">
+              <a:schemeClr val="accent1"/>
+            </a:fillRef>
+            <a:effectRef idx="0">
+              <a:schemeClr val="accent1"/>
+            </a:effectRef>
+            <a:fontRef idx="minor">
+              <a:schemeClr val="lt1"/>
+            </a:fontRef>
+          </p:style>
+          <p:txBody>
+            <a:bodyPr rtlCol="0" anchor="ctr"/>
+            <a:lstStyle/>
+            <a:p>
+              <a:pPr algn="ctr"/>
+              <a:r>
+                <a:rPr lang="en-US" dirty="0">
+                  <a:solidFill>
+                    <a:schemeClr val="tx1"/>
+                  </a:solidFill>
+                </a:rPr>
+                <a:t>✓Allow</a:t>
+              </a:r>
+              <a:endParaRPr lang="en-US" i="1" dirty="0">
+                <a:solidFill>
+                  <a:schemeClr val="tx1"/>
+                </a:solidFill>
+              </a:endParaRPr>
+            </a:p>
+          </p:txBody>
+        </p:sp>
+      </p:grpSp>
+      <p:grpSp>
+        <p:nvGrpSpPr>
+          <p:cNvPr id="38" name="Group 37">
+            <a:extLst>
+              <a:ext uri="{FF2B5EF4-FFF2-40B4-BE49-F238E27FC236}">
+                <a16:creationId xmlns:a16="http://schemas.microsoft.com/office/drawing/2014/main" id="{E5783BEB-2611-7D95-DFA0-145D65E89C30}"/>
+              </a:ext>
+            </a:extLst>
+          </p:cNvPr>
+          <p:cNvGrpSpPr/>
+          <p:nvPr/>
+        </p:nvGrpSpPr>
+        <p:grpSpPr>
+          <a:xfrm>
+            <a:off x="9578469" y="3355524"/>
+            <a:ext cx="1344168" cy="746025"/>
+            <a:chOff x="9333303" y="1474489"/>
+            <a:chExt cx="1344168" cy="746025"/>
+          </a:xfrm>
+        </p:grpSpPr>
+        <p:sp>
+          <p:nvSpPr>
+            <p:cNvPr id="34" name="Rectangle: Top Corners Rounded 33">
+              <a:extLst>
+                <a:ext uri="{FF2B5EF4-FFF2-40B4-BE49-F238E27FC236}">
+                  <a16:creationId xmlns:a16="http://schemas.microsoft.com/office/drawing/2014/main" id="{CC177FAA-2FF8-49CA-1C5D-DC1D03EF165E}"/>
+                </a:ext>
+              </a:extLst>
+            </p:cNvPr>
+            <p:cNvSpPr/>
+            <p:nvPr/>
+          </p:nvSpPr>
+          <p:spPr>
+            <a:xfrm>
+              <a:off x="9333303" y="1666525"/>
+              <a:ext cx="1344168" cy="553989"/>
+            </a:xfrm>
+            <a:prstGeom prst="round2SameRect">
+              <a:avLst>
+                <a:gd name="adj1" fmla="val 0"/>
+                <a:gd name="adj2" fmla="val 11961"/>
+              </a:avLst>
+            </a:prstGeom>
+            <a:solidFill>
+              <a:srgbClr val="E5F1F8"/>
+            </a:solidFill>
+            <a:ln>
+              <a:solidFill>
+                <a:schemeClr val="tx1"/>
+              </a:solidFill>
+            </a:ln>
+          </p:spPr>
+          <p:style>
+            <a:lnRef idx="2">
+              <a:schemeClr val="accent1">
+                <a:shade val="15000"/>
+              </a:schemeClr>
+            </a:lnRef>
+            <a:fillRef idx="1">
+              <a:schemeClr val="accent1"/>
+            </a:fillRef>
+            <a:effectRef idx="0">
+              <a:schemeClr val="accent1"/>
+            </a:effectRef>
+            <a:fontRef idx="minor">
+              <a:schemeClr val="lt1"/>
+            </a:fontRef>
+          </p:style>
+          <p:txBody>
+            <a:bodyPr rtlCol="0" anchor="ctr"/>
+            <a:lstStyle/>
+            <a:p>
+              <a:pPr algn="ctr"/>
+              <a:r>
+                <a:rPr lang="en-US" dirty="0">
+                  <a:solidFill>
+                    <a:schemeClr val="tx1"/>
+                  </a:solidFill>
+                </a:rPr>
+                <a:t>Block &amp; Log</a:t>
+              </a:r>
+            </a:p>
+          </p:txBody>
+        </p:sp>
+        <p:sp>
+          <p:nvSpPr>
+            <p:cNvPr id="35" name="Rectangle: Rounded Corners 34">
+              <a:extLst>
+                <a:ext uri="{FF2B5EF4-FFF2-40B4-BE49-F238E27FC236}">
+                  <a16:creationId xmlns:a16="http://schemas.microsoft.com/office/drawing/2014/main" id="{F0E8F2DE-1F77-929B-EE42-882361C60C5D}"/>
+                </a:ext>
+              </a:extLst>
+            </p:cNvPr>
+            <p:cNvSpPr/>
+            <p:nvPr/>
+          </p:nvSpPr>
+          <p:spPr>
+            <a:xfrm>
+              <a:off x="9333303" y="1474489"/>
+              <a:ext cx="1344168" cy="230826"/>
+            </a:xfrm>
+            <a:prstGeom prst="roundRect">
+              <a:avLst/>
+            </a:prstGeom>
+            <a:solidFill>
+              <a:srgbClr val="B2D4EB"/>
+            </a:solidFill>
+            <a:ln>
+              <a:solidFill>
+                <a:schemeClr val="tx1"/>
+              </a:solidFill>
+            </a:ln>
+          </p:spPr>
+          <p:style>
+            <a:lnRef idx="2">
+              <a:schemeClr val="accent1">
+                <a:shade val="15000"/>
+              </a:schemeClr>
+            </a:lnRef>
+            <a:fillRef idx="1">
+              <a:schemeClr val="accent1"/>
+            </a:fillRef>
+            <a:effectRef idx="0">
+              <a:schemeClr val="accent1"/>
+            </a:effectRef>
+            <a:fontRef idx="minor">
+              <a:schemeClr val="lt1"/>
+            </a:fontRef>
+          </p:style>
+          <p:txBody>
+            <a:bodyPr rtlCol="0" anchor="ctr"/>
+            <a:lstStyle/>
+            <a:p>
+              <a:pPr algn="ctr"/>
+              <a:r>
+                <a:rPr lang="en-US" dirty="0">
+                  <a:solidFill>
+                    <a:schemeClr val="tx1"/>
+                  </a:solidFill>
+                </a:rPr>
+                <a:t>✗Deny </a:t>
+              </a:r>
+              <a:endParaRPr lang="en-US" i="1" dirty="0">
+                <a:solidFill>
+                  <a:schemeClr val="tx1"/>
+                </a:solidFill>
+              </a:endParaRPr>
+            </a:p>
+          </p:txBody>
+        </p:sp>
+      </p:grpSp>
+    </p:spTree>
+    <p:extLst>
+      <p:ext uri="{BB962C8B-B14F-4D97-AF65-F5344CB8AC3E}">
+        <p14:creationId xmlns:p14="http://schemas.microsoft.com/office/powerpoint/2010/main" val="4196770489"/>
+      </p:ext>
+    </p:extLst>
+  </p:cSld>
+  <p:clrMapOvr>
+    <a:masterClrMapping/>
+  </p:clrMapOvr>
+</p:sld>
+</file>
+
+<file path=ppt/slides/slide26.xml><?xml version="1.0" encoding="utf-8"?>
+<p:sld xmlns:a="http://schemas.openxmlformats.org/drawingml/2006/main" xmlns:r="http://schemas.openxmlformats.org/officeDocument/2006/relationships" xmlns:p="http://schemas.openxmlformats.org/presentationml/2006/main">
+  <p:cSld>
+    <p:spTree>
+      <p:nvGrpSpPr>
+        <p:cNvPr id="1" name=""/>
+        <p:cNvGrpSpPr/>
+        <p:nvPr/>
+      </p:nvGrpSpPr>
+      <p:grpSpPr>
+        <a:xfrm>
+          <a:off x="0" y="0"/>
+          <a:ext cx="0" cy="0"/>
+          <a:chOff x="0" y="0"/>
+          <a:chExt cx="0" cy="0"/>
+        </a:xfrm>
+      </p:grpSpPr>
+      <p:sp>
+        <p:nvSpPr>
+          <p:cNvPr id="8" name="Oval 7">
+            <a:extLst>
+              <a:ext uri="{FF2B5EF4-FFF2-40B4-BE49-F238E27FC236}">
+                <a16:creationId xmlns:a16="http://schemas.microsoft.com/office/drawing/2014/main" id="{CF80C86E-58D4-B174-1E73-0A50246E20A4}"/>
+              </a:ext>
+            </a:extLst>
+          </p:cNvPr>
+          <p:cNvSpPr/>
+          <p:nvPr/>
+        </p:nvSpPr>
+        <p:spPr>
+          <a:xfrm>
+            <a:off x="815009" y="1480931"/>
+            <a:ext cx="3657600" cy="3657600"/>
+          </a:xfrm>
+          <a:prstGeom prst="ellipse">
+            <a:avLst/>
+          </a:prstGeom>
+          <a:solidFill>
+            <a:schemeClr val="bg1"/>
+          </a:solidFill>
+        </p:spPr>
+        <p:style>
+          <a:lnRef idx="2">
+            <a:schemeClr val="dk1">
+              <a:shade val="15000"/>
+            </a:schemeClr>
+          </a:lnRef>
+          <a:fillRef idx="1">
+            <a:schemeClr val="dk1"/>
+          </a:fillRef>
+          <a:effectRef idx="0">
+            <a:schemeClr val="dk1"/>
+          </a:effectRef>
+          <a:fontRef idx="minor">
+            <a:schemeClr val="lt1"/>
+          </a:fontRef>
+        </p:style>
+        <p:txBody>
+          <a:bodyPr lIns="0" tIns="0" rIns="0" bIns="0" rtlCol="0" anchor="ctr"/>
+          <a:lstStyle/>
+          <a:p>
+            <a:pPr algn="ctr"/>
+            <a:endParaRPr lang="en-US"/>
+          </a:p>
+        </p:txBody>
+      </p:sp>
+      <p:sp>
+        <p:nvSpPr>
+          <p:cNvPr id="7" name="Oval 6">
+            <a:extLst>
+              <a:ext uri="{FF2B5EF4-FFF2-40B4-BE49-F238E27FC236}">
+                <a16:creationId xmlns:a16="http://schemas.microsoft.com/office/drawing/2014/main" id="{7CC98AF7-F22C-249A-306C-516F719A4DD5}"/>
+              </a:ext>
+            </a:extLst>
+          </p:cNvPr>
+          <p:cNvSpPr/>
+          <p:nvPr/>
+        </p:nvSpPr>
+        <p:spPr>
+          <a:xfrm>
+            <a:off x="1272209" y="1938131"/>
+            <a:ext cx="2743200" cy="2743200"/>
+          </a:xfrm>
+          <a:prstGeom prst="ellipse">
+            <a:avLst/>
+          </a:prstGeom>
+          <a:solidFill>
+            <a:schemeClr val="tx2">
+              <a:lumMod val="10000"/>
+              <a:lumOff val="90000"/>
+            </a:schemeClr>
+          </a:solidFill>
+        </p:spPr>
+        <p:style>
+          <a:lnRef idx="2">
+            <a:schemeClr val="accent1">
+              <a:shade val="15000"/>
+            </a:schemeClr>
+          </a:lnRef>
+          <a:fillRef idx="1">
+            <a:schemeClr val="accent1"/>
+          </a:fillRef>
+          <a:effectRef idx="0">
+            <a:schemeClr val="accent1"/>
+          </a:effectRef>
+          <a:fontRef idx="minor">
+            <a:schemeClr val="lt1"/>
+          </a:fontRef>
+        </p:style>
+        <p:txBody>
+          <a:bodyPr lIns="0" tIns="0" rIns="0" bIns="0" rtlCol="0" anchor="ctr"/>
+          <a:lstStyle/>
+          <a:p>
+            <a:pPr algn="ctr"/>
+            <a:endParaRPr lang="en-US"/>
+          </a:p>
+        </p:txBody>
+      </p:sp>
+      <p:sp>
+        <p:nvSpPr>
+          <p:cNvPr id="6" name="Oval 5">
+            <a:extLst>
+              <a:ext uri="{FF2B5EF4-FFF2-40B4-BE49-F238E27FC236}">
+                <a16:creationId xmlns:a16="http://schemas.microsoft.com/office/drawing/2014/main" id="{7CC548FE-C725-F21F-EECE-27D62F1F833A}"/>
+              </a:ext>
+            </a:extLst>
+          </p:cNvPr>
+          <p:cNvSpPr/>
+          <p:nvPr/>
+        </p:nvSpPr>
+        <p:spPr>
+          <a:xfrm>
+            <a:off x="1729409" y="2395331"/>
+            <a:ext cx="1828800" cy="1828800"/>
+          </a:xfrm>
+          <a:prstGeom prst="ellipse">
+            <a:avLst/>
+          </a:prstGeom>
+          <a:solidFill>
+            <a:srgbClr val="B0D3EA"/>
+          </a:solidFill>
+        </p:spPr>
+        <p:style>
+          <a:lnRef idx="2">
+            <a:schemeClr val="accent1">
+              <a:shade val="15000"/>
+            </a:schemeClr>
+          </a:lnRef>
+          <a:fillRef idx="1">
+            <a:schemeClr val="accent1"/>
+          </a:fillRef>
+          <a:effectRef idx="0">
+            <a:schemeClr val="accent1"/>
+          </a:effectRef>
+          <a:fontRef idx="minor">
+            <a:schemeClr val="lt1"/>
+          </a:fontRef>
+        </p:style>
+        <p:txBody>
+          <a:bodyPr lIns="0" tIns="0" rIns="0" bIns="0" rtlCol="0" anchor="ctr"/>
+          <a:lstStyle/>
+          <a:p>
+            <a:pPr algn="ctr"/>
+            <a:endParaRPr lang="en-US" dirty="0"/>
+          </a:p>
+        </p:txBody>
+      </p:sp>
+      <p:sp>
+        <p:nvSpPr>
+          <p:cNvPr id="5" name="Oval 4">
+            <a:extLst>
+              <a:ext uri="{FF2B5EF4-FFF2-40B4-BE49-F238E27FC236}">
+                <a16:creationId xmlns:a16="http://schemas.microsoft.com/office/drawing/2014/main" id="{50415412-7E1B-2ECC-0786-4A6132CDD673}"/>
+              </a:ext>
+            </a:extLst>
+          </p:cNvPr>
+          <p:cNvSpPr/>
+          <p:nvPr/>
+        </p:nvSpPr>
+        <p:spPr>
+          <a:xfrm>
+            <a:off x="2186609" y="2852531"/>
+            <a:ext cx="914400" cy="914400"/>
+          </a:xfrm>
+          <a:prstGeom prst="ellipse">
+            <a:avLst/>
+          </a:prstGeom>
+          <a:solidFill>
+            <a:schemeClr val="tx2">
+              <a:lumMod val="50000"/>
+              <a:lumOff val="50000"/>
+            </a:schemeClr>
+          </a:solidFill>
+        </p:spPr>
+        <p:style>
+          <a:lnRef idx="2">
+            <a:schemeClr val="accent1">
+              <a:shade val="15000"/>
+            </a:schemeClr>
+          </a:lnRef>
+          <a:fillRef idx="1">
+            <a:schemeClr val="accent1"/>
+          </a:fillRef>
+          <a:effectRef idx="0">
+            <a:schemeClr val="accent1"/>
+          </a:effectRef>
+          <a:fontRef idx="minor">
+            <a:schemeClr val="lt1"/>
+          </a:fontRef>
+        </p:style>
+        <p:txBody>
+          <a:bodyPr lIns="0" tIns="0" rIns="0" bIns="0" rtlCol="0" anchor="ctr"/>
+          <a:lstStyle/>
+          <a:p>
+            <a:pPr algn="ctr"/>
+            <a:endParaRPr lang="en-US" dirty="0"/>
+          </a:p>
+        </p:txBody>
+      </p:sp>
+      <p:sp>
+        <p:nvSpPr>
+          <p:cNvPr id="9" name="Oval 8">
+            <a:extLst>
+              <a:ext uri="{FF2B5EF4-FFF2-40B4-BE49-F238E27FC236}">
+                <a16:creationId xmlns:a16="http://schemas.microsoft.com/office/drawing/2014/main" id="{DB189114-68FB-4B8E-BF07-F84D9A019160}"/>
+              </a:ext>
+            </a:extLst>
+          </p:cNvPr>
+          <p:cNvSpPr/>
+          <p:nvPr/>
+        </p:nvSpPr>
+        <p:spPr>
+          <a:xfrm>
+            <a:off x="2506649" y="3172571"/>
+            <a:ext cx="274320" cy="274320"/>
+          </a:xfrm>
+          <a:prstGeom prst="ellipse">
+            <a:avLst/>
+          </a:prstGeom>
+        </p:spPr>
+        <p:style>
+          <a:lnRef idx="2">
+            <a:schemeClr val="dk1">
+              <a:shade val="15000"/>
+            </a:schemeClr>
+          </a:lnRef>
+          <a:fillRef idx="1">
+            <a:schemeClr val="dk1"/>
+          </a:fillRef>
+          <a:effectRef idx="0">
+            <a:schemeClr val="dk1"/>
+          </a:effectRef>
+          <a:fontRef idx="minor">
+            <a:schemeClr val="lt1"/>
+          </a:fontRef>
+        </p:style>
+        <p:txBody>
+          <a:bodyPr lIns="0" tIns="0" rIns="0" bIns="0" rtlCol="0" anchor="ctr"/>
+          <a:lstStyle/>
+          <a:p>
+            <a:pPr algn="ctr"/>
+            <a:r>
+              <a:rPr lang="en-US" dirty="0"/>
+              <a:t>1</a:t>
+            </a:r>
+          </a:p>
+        </p:txBody>
+      </p:sp>
+      <p:sp>
+        <p:nvSpPr>
+          <p:cNvPr id="10" name="Oval 9">
+            <a:extLst>
+              <a:ext uri="{FF2B5EF4-FFF2-40B4-BE49-F238E27FC236}">
+                <a16:creationId xmlns:a16="http://schemas.microsoft.com/office/drawing/2014/main" id="{27051D7B-1B88-BB29-E835-7E9AD2C81E13}"/>
+              </a:ext>
+            </a:extLst>
+          </p:cNvPr>
+          <p:cNvSpPr/>
+          <p:nvPr/>
+        </p:nvSpPr>
+        <p:spPr>
+          <a:xfrm>
+            <a:off x="2506649" y="3858371"/>
+            <a:ext cx="274320" cy="274320"/>
+          </a:xfrm>
+          <a:prstGeom prst="ellipse">
+            <a:avLst/>
+          </a:prstGeom>
+        </p:spPr>
+        <p:style>
+          <a:lnRef idx="2">
+            <a:schemeClr val="dk1">
+              <a:shade val="15000"/>
+            </a:schemeClr>
+          </a:lnRef>
+          <a:fillRef idx="1">
+            <a:schemeClr val="dk1"/>
+          </a:fillRef>
+          <a:effectRef idx="0">
+            <a:schemeClr val="dk1"/>
+          </a:effectRef>
+          <a:fontRef idx="minor">
+            <a:schemeClr val="lt1"/>
+          </a:fontRef>
+        </p:style>
+        <p:txBody>
+          <a:bodyPr lIns="0" tIns="0" rIns="0" bIns="0" rtlCol="0" anchor="ctr"/>
+          <a:lstStyle/>
+          <a:p>
+            <a:pPr algn="ctr"/>
+            <a:r>
+              <a:rPr lang="en-US" dirty="0"/>
+              <a:t>2</a:t>
+            </a:r>
+          </a:p>
+        </p:txBody>
+      </p:sp>
+      <p:sp>
+        <p:nvSpPr>
+          <p:cNvPr id="11" name="Oval 10">
+            <a:extLst>
+              <a:ext uri="{FF2B5EF4-FFF2-40B4-BE49-F238E27FC236}">
+                <a16:creationId xmlns:a16="http://schemas.microsoft.com/office/drawing/2014/main" id="{7017C1FB-B9B0-A544-018A-40F5602ADB75}"/>
+              </a:ext>
+            </a:extLst>
+          </p:cNvPr>
+          <p:cNvSpPr/>
+          <p:nvPr/>
+        </p:nvSpPr>
+        <p:spPr>
+          <a:xfrm>
+            <a:off x="2506649" y="4306243"/>
+            <a:ext cx="274320" cy="274320"/>
+          </a:xfrm>
+          <a:prstGeom prst="ellipse">
+            <a:avLst/>
+          </a:prstGeom>
+        </p:spPr>
+        <p:style>
+          <a:lnRef idx="2">
+            <a:schemeClr val="dk1">
+              <a:shade val="15000"/>
+            </a:schemeClr>
+          </a:lnRef>
+          <a:fillRef idx="1">
+            <a:schemeClr val="dk1"/>
+          </a:fillRef>
+          <a:effectRef idx="0">
+            <a:schemeClr val="dk1"/>
+          </a:effectRef>
+          <a:fontRef idx="minor">
+            <a:schemeClr val="lt1"/>
+          </a:fontRef>
+        </p:style>
+        <p:txBody>
+          <a:bodyPr lIns="0" tIns="0" rIns="0" bIns="0" rtlCol="0" anchor="ctr"/>
+          <a:lstStyle/>
+          <a:p>
+            <a:pPr algn="ctr"/>
+            <a:r>
+              <a:rPr lang="en-US" dirty="0"/>
+              <a:t>3</a:t>
+            </a:r>
+          </a:p>
+        </p:txBody>
+      </p:sp>
+      <p:sp>
+        <p:nvSpPr>
+          <p:cNvPr id="12" name="Oval 11">
+            <a:extLst>
+              <a:ext uri="{FF2B5EF4-FFF2-40B4-BE49-F238E27FC236}">
+                <a16:creationId xmlns:a16="http://schemas.microsoft.com/office/drawing/2014/main" id="{73BB3504-9CE8-67D2-DD11-EDFB3DF1A9D2}"/>
+              </a:ext>
+            </a:extLst>
+          </p:cNvPr>
+          <p:cNvSpPr/>
+          <p:nvPr/>
+        </p:nvSpPr>
+        <p:spPr>
+          <a:xfrm>
+            <a:off x="2506649" y="4763443"/>
+            <a:ext cx="274320" cy="274320"/>
+          </a:xfrm>
+          <a:prstGeom prst="ellipse">
+            <a:avLst/>
+          </a:prstGeom>
+        </p:spPr>
+        <p:style>
+          <a:lnRef idx="2">
+            <a:schemeClr val="dk1">
+              <a:shade val="15000"/>
+            </a:schemeClr>
+          </a:lnRef>
+          <a:fillRef idx="1">
+            <a:schemeClr val="dk1"/>
+          </a:fillRef>
+          <a:effectRef idx="0">
+            <a:schemeClr val="dk1"/>
+          </a:effectRef>
+          <a:fontRef idx="minor">
+            <a:schemeClr val="lt1"/>
+          </a:fontRef>
+        </p:style>
+        <p:txBody>
+          <a:bodyPr lIns="0" tIns="0" rIns="0" bIns="0" rtlCol="0" anchor="ctr"/>
+          <a:lstStyle/>
+          <a:p>
+            <a:pPr algn="ctr"/>
+            <a:r>
+              <a:rPr lang="en-US" dirty="0"/>
+              <a:t>4</a:t>
+            </a:r>
+          </a:p>
+        </p:txBody>
+      </p:sp>
+      <p:grpSp>
+        <p:nvGrpSpPr>
+          <p:cNvPr id="13" name="Group 12">
+            <a:extLst>
+              <a:ext uri="{FF2B5EF4-FFF2-40B4-BE49-F238E27FC236}">
+                <a16:creationId xmlns:a16="http://schemas.microsoft.com/office/drawing/2014/main" id="{EFAE7B39-0D6E-2F49-E761-6510D66859F7}"/>
+              </a:ext>
+            </a:extLst>
+          </p:cNvPr>
+          <p:cNvGrpSpPr/>
+          <p:nvPr/>
+        </p:nvGrpSpPr>
+        <p:grpSpPr>
+          <a:xfrm>
+            <a:off x="4792648" y="2325322"/>
+            <a:ext cx="1818401" cy="746025"/>
+            <a:chOff x="9154399" y="2746626"/>
+            <a:chExt cx="1344168" cy="746025"/>
+          </a:xfrm>
+        </p:grpSpPr>
+        <p:sp>
+          <p:nvSpPr>
+            <p:cNvPr id="14" name="Rectangle: Top Corners Rounded 13">
+              <a:extLst>
+                <a:ext uri="{FF2B5EF4-FFF2-40B4-BE49-F238E27FC236}">
+                  <a16:creationId xmlns:a16="http://schemas.microsoft.com/office/drawing/2014/main" id="{147BB980-3222-2816-AA45-8F53BFAB799C}"/>
+                </a:ext>
+              </a:extLst>
+            </p:cNvPr>
+            <p:cNvSpPr/>
+            <p:nvPr/>
+          </p:nvSpPr>
+          <p:spPr>
+            <a:xfrm>
+              <a:off x="9154399" y="2938662"/>
+              <a:ext cx="1344168" cy="553989"/>
+            </a:xfrm>
+            <a:prstGeom prst="round2SameRect">
+              <a:avLst>
+                <a:gd name="adj1" fmla="val 0"/>
+                <a:gd name="adj2" fmla="val 11961"/>
+              </a:avLst>
+            </a:prstGeom>
+            <a:solidFill>
+              <a:srgbClr val="E5F1F8"/>
+            </a:solidFill>
+            <a:ln>
+              <a:solidFill>
+                <a:schemeClr val="tx1"/>
+              </a:solidFill>
+            </a:ln>
+          </p:spPr>
+          <p:style>
+            <a:lnRef idx="2">
+              <a:schemeClr val="accent1">
+                <a:shade val="15000"/>
+              </a:schemeClr>
+            </a:lnRef>
+            <a:fillRef idx="1">
+              <a:schemeClr val="accent1"/>
+            </a:fillRef>
+            <a:effectRef idx="0">
+              <a:schemeClr val="accent1"/>
+            </a:effectRef>
+            <a:fontRef idx="minor">
+              <a:schemeClr val="lt1"/>
+            </a:fontRef>
+          </p:style>
+          <p:txBody>
+            <a:bodyPr rtlCol="0" anchor="ctr"/>
+            <a:lstStyle/>
+            <a:p>
+              <a:pPr algn="ctr"/>
+              <a:r>
+                <a:rPr lang="en-US" dirty="0">
+                  <a:solidFill>
+                    <a:schemeClr val="tx1"/>
+                  </a:solidFill>
+                </a:rPr>
+                <a:t>Vetted, can write</a:t>
+              </a:r>
+            </a:p>
+          </p:txBody>
+        </p:sp>
+        <p:sp>
+          <p:nvSpPr>
+            <p:cNvPr id="15" name="Rectangle: Rounded Corners 14">
+              <a:extLst>
+                <a:ext uri="{FF2B5EF4-FFF2-40B4-BE49-F238E27FC236}">
+                  <a16:creationId xmlns:a16="http://schemas.microsoft.com/office/drawing/2014/main" id="{2C9488A8-8BEB-7C4B-06D7-BBA89E69E3A4}"/>
+                </a:ext>
+              </a:extLst>
+            </p:cNvPr>
+            <p:cNvSpPr/>
+            <p:nvPr/>
+          </p:nvSpPr>
+          <p:spPr>
+            <a:xfrm>
+              <a:off x="9154399" y="2746626"/>
+              <a:ext cx="1344168" cy="230826"/>
+            </a:xfrm>
+            <a:prstGeom prst="roundRect">
+              <a:avLst/>
+            </a:prstGeom>
+            <a:solidFill>
+              <a:srgbClr val="B2D4EB"/>
+            </a:solidFill>
+            <a:ln>
+              <a:solidFill>
+                <a:schemeClr val="tx1"/>
+              </a:solidFill>
+            </a:ln>
+          </p:spPr>
+          <p:style>
+            <a:lnRef idx="2">
+              <a:schemeClr val="accent1">
+                <a:shade val="15000"/>
+              </a:schemeClr>
+            </a:lnRef>
+            <a:fillRef idx="1">
+              <a:schemeClr val="accent1"/>
+            </a:fillRef>
+            <a:effectRef idx="0">
+              <a:schemeClr val="accent1"/>
+            </a:effectRef>
+            <a:fontRef idx="minor">
+              <a:schemeClr val="lt1"/>
+            </a:fontRef>
+          </p:style>
+          <p:txBody>
+            <a:bodyPr rtlCol="0" anchor="ctr"/>
+            <a:lstStyle/>
+            <a:p>
+              <a:pPr algn="ctr"/>
+              <a:r>
+                <a:rPr lang="en-US" dirty="0">
+                  <a:solidFill>
+                    <a:schemeClr val="tx1"/>
+                  </a:solidFill>
+                </a:rPr>
+                <a:t>Supervisor</a:t>
+              </a:r>
+              <a:endParaRPr lang="en-US" i="1" dirty="0">
+                <a:solidFill>
+                  <a:schemeClr val="tx1"/>
+                </a:solidFill>
+              </a:endParaRPr>
+            </a:p>
+          </p:txBody>
+        </p:sp>
+      </p:grpSp>
+      <p:grpSp>
+        <p:nvGrpSpPr>
+          <p:cNvPr id="19" name="Group 18">
+            <a:extLst>
+              <a:ext uri="{FF2B5EF4-FFF2-40B4-BE49-F238E27FC236}">
+                <a16:creationId xmlns:a16="http://schemas.microsoft.com/office/drawing/2014/main" id="{061399A9-7756-5106-74E4-8039284BD6F9}"/>
+              </a:ext>
+            </a:extLst>
+          </p:cNvPr>
+          <p:cNvGrpSpPr/>
+          <p:nvPr/>
+        </p:nvGrpSpPr>
+        <p:grpSpPr>
+          <a:xfrm>
+            <a:off x="4792649" y="1480931"/>
+            <a:ext cx="1818401" cy="746025"/>
+            <a:chOff x="9154399" y="2746626"/>
+            <a:chExt cx="1344168" cy="746025"/>
+          </a:xfrm>
+        </p:grpSpPr>
+        <p:sp>
+          <p:nvSpPr>
+            <p:cNvPr id="20" name="Rectangle: Top Corners Rounded 19">
+              <a:extLst>
+                <a:ext uri="{FF2B5EF4-FFF2-40B4-BE49-F238E27FC236}">
+                  <a16:creationId xmlns:a16="http://schemas.microsoft.com/office/drawing/2014/main" id="{B9C15A88-3F88-44B9-1AC2-BB1472D41859}"/>
+                </a:ext>
+              </a:extLst>
+            </p:cNvPr>
+            <p:cNvSpPr/>
+            <p:nvPr/>
+          </p:nvSpPr>
+          <p:spPr>
+            <a:xfrm>
+              <a:off x="9154399" y="2938662"/>
+              <a:ext cx="1344168" cy="553989"/>
+            </a:xfrm>
+            <a:prstGeom prst="round2SameRect">
+              <a:avLst>
+                <a:gd name="adj1" fmla="val 0"/>
+                <a:gd name="adj2" fmla="val 11961"/>
+              </a:avLst>
+            </a:prstGeom>
+            <a:solidFill>
+              <a:srgbClr val="E5F1F8"/>
+            </a:solidFill>
+            <a:ln>
+              <a:solidFill>
+                <a:schemeClr val="tx1"/>
+              </a:solidFill>
+            </a:ln>
+          </p:spPr>
+          <p:style>
+            <a:lnRef idx="2">
+              <a:schemeClr val="accent1">
+                <a:shade val="15000"/>
+              </a:schemeClr>
+            </a:lnRef>
+            <a:fillRef idx="1">
+              <a:schemeClr val="accent1"/>
+            </a:fillRef>
+            <a:effectRef idx="0">
+              <a:schemeClr val="accent1"/>
+            </a:effectRef>
+            <a:fontRef idx="minor">
+              <a:schemeClr val="lt1"/>
+            </a:fontRef>
+          </p:style>
+          <p:txBody>
+            <a:bodyPr rtlCol="0" anchor="ctr"/>
+            <a:lstStyle/>
+            <a:p>
+              <a:pPr algn="ctr"/>
+              <a:r>
+                <a:rPr lang="en-US" dirty="0">
+                  <a:solidFill>
+                    <a:schemeClr val="tx1"/>
+                  </a:solidFill>
+                </a:rPr>
+                <a:t>Policy engine only</a:t>
+              </a:r>
+            </a:p>
+          </p:txBody>
+        </p:sp>
+        <p:sp>
+          <p:nvSpPr>
+            <p:cNvPr id="21" name="Rectangle: Rounded Corners 20">
+              <a:extLst>
+                <a:ext uri="{FF2B5EF4-FFF2-40B4-BE49-F238E27FC236}">
+                  <a16:creationId xmlns:a16="http://schemas.microsoft.com/office/drawing/2014/main" id="{C8B1ED5E-7029-8479-1352-ACFBF15B5279}"/>
+                </a:ext>
+              </a:extLst>
+            </p:cNvPr>
+            <p:cNvSpPr/>
+            <p:nvPr/>
+          </p:nvSpPr>
+          <p:spPr>
+            <a:xfrm>
+              <a:off x="9154399" y="2746626"/>
+              <a:ext cx="1344168" cy="230826"/>
+            </a:xfrm>
+            <a:prstGeom prst="roundRect">
+              <a:avLst/>
+            </a:prstGeom>
+            <a:solidFill>
+              <a:srgbClr val="B2D4EB"/>
+            </a:solidFill>
+            <a:ln>
+              <a:solidFill>
+                <a:schemeClr val="tx1"/>
+              </a:solidFill>
+            </a:ln>
+          </p:spPr>
+          <p:style>
+            <a:lnRef idx="2">
+              <a:schemeClr val="accent1">
+                <a:shade val="15000"/>
+              </a:schemeClr>
+            </a:lnRef>
+            <a:fillRef idx="1">
+              <a:schemeClr val="accent1"/>
+            </a:fillRef>
+            <a:effectRef idx="0">
+              <a:schemeClr val="accent1"/>
+            </a:effectRef>
+            <a:fontRef idx="minor">
+              <a:schemeClr val="lt1"/>
+            </a:fontRef>
+          </p:style>
+          <p:txBody>
+            <a:bodyPr rtlCol="0" anchor="ctr"/>
+            <a:lstStyle/>
+            <a:p>
+              <a:pPr algn="ctr"/>
+              <a:r>
+                <a:rPr lang="en-US" dirty="0">
+                  <a:solidFill>
+                    <a:schemeClr val="tx1"/>
+                  </a:solidFill>
+                </a:rPr>
+                <a:t>Kernel</a:t>
+              </a:r>
+              <a:endParaRPr lang="en-US" i="1" dirty="0">
+                <a:solidFill>
+                  <a:schemeClr val="tx1"/>
+                </a:solidFill>
+              </a:endParaRPr>
+            </a:p>
+          </p:txBody>
+        </p:sp>
+      </p:grpSp>
+      <p:grpSp>
+        <p:nvGrpSpPr>
+          <p:cNvPr id="22" name="Group 21">
+            <a:extLst>
+              <a:ext uri="{FF2B5EF4-FFF2-40B4-BE49-F238E27FC236}">
+                <a16:creationId xmlns:a16="http://schemas.microsoft.com/office/drawing/2014/main" id="{2E13D34C-09BE-AB71-4F6E-A98DED831C08}"/>
+              </a:ext>
+            </a:extLst>
+          </p:cNvPr>
+          <p:cNvGrpSpPr/>
+          <p:nvPr/>
+        </p:nvGrpSpPr>
+        <p:grpSpPr>
+          <a:xfrm>
+            <a:off x="4792648" y="3169714"/>
+            <a:ext cx="1818401" cy="746025"/>
+            <a:chOff x="9154399" y="2746626"/>
+            <a:chExt cx="1344168" cy="746025"/>
+          </a:xfrm>
+        </p:grpSpPr>
+        <p:sp>
+          <p:nvSpPr>
+            <p:cNvPr id="23" name="Rectangle: Top Corners Rounded 22">
+              <a:extLst>
+                <a:ext uri="{FF2B5EF4-FFF2-40B4-BE49-F238E27FC236}">
+                  <a16:creationId xmlns:a16="http://schemas.microsoft.com/office/drawing/2014/main" id="{52FD50CD-760C-883D-C943-5372574A74FF}"/>
+                </a:ext>
+              </a:extLst>
+            </p:cNvPr>
+            <p:cNvSpPr/>
+            <p:nvPr/>
+          </p:nvSpPr>
+          <p:spPr>
+            <a:xfrm>
+              <a:off x="9154399" y="2938662"/>
+              <a:ext cx="1344168" cy="553989"/>
+            </a:xfrm>
+            <a:prstGeom prst="round2SameRect">
+              <a:avLst>
+                <a:gd name="adj1" fmla="val 0"/>
+                <a:gd name="adj2" fmla="val 11961"/>
+              </a:avLst>
+            </a:prstGeom>
+            <a:solidFill>
+              <a:srgbClr val="E5F1F8"/>
+            </a:solidFill>
+            <a:ln>
+              <a:solidFill>
+                <a:schemeClr val="tx1"/>
+              </a:solidFill>
+            </a:ln>
+          </p:spPr>
+          <p:style>
+            <a:lnRef idx="2">
+              <a:schemeClr val="accent1">
+                <a:shade val="15000"/>
+              </a:schemeClr>
+            </a:lnRef>
+            <a:fillRef idx="1">
+              <a:schemeClr val="accent1"/>
+            </a:fillRef>
+            <a:effectRef idx="0">
+              <a:schemeClr val="accent1"/>
+            </a:effectRef>
+            <a:fontRef idx="minor">
+              <a:schemeClr val="lt1"/>
+            </a:fontRef>
+          </p:style>
+          <p:txBody>
+            <a:bodyPr rtlCol="0" anchor="ctr"/>
+            <a:lstStyle/>
+            <a:p>
+              <a:pPr algn="ctr"/>
+              <a:r>
+                <a:rPr lang="en-US" dirty="0">
+                  <a:solidFill>
+                    <a:schemeClr val="tx1"/>
+                  </a:solidFill>
+                </a:rPr>
+                <a:t>Standard agent</a:t>
+              </a:r>
+            </a:p>
+          </p:txBody>
+        </p:sp>
+        <p:sp>
+          <p:nvSpPr>
+            <p:cNvPr id="24" name="Rectangle: Rounded Corners 23">
+              <a:extLst>
+                <a:ext uri="{FF2B5EF4-FFF2-40B4-BE49-F238E27FC236}">
+                  <a16:creationId xmlns:a16="http://schemas.microsoft.com/office/drawing/2014/main" id="{BFF9C8C6-191E-39B7-1611-4972B37E34D0}"/>
+                </a:ext>
+              </a:extLst>
+            </p:cNvPr>
+            <p:cNvSpPr/>
+            <p:nvPr/>
+          </p:nvSpPr>
+          <p:spPr>
+            <a:xfrm>
+              <a:off x="9154399" y="2746626"/>
+              <a:ext cx="1344168" cy="230826"/>
+            </a:xfrm>
+            <a:prstGeom prst="roundRect">
+              <a:avLst/>
+            </a:prstGeom>
+            <a:solidFill>
+              <a:srgbClr val="B2D4EB"/>
+            </a:solidFill>
+            <a:ln>
+              <a:solidFill>
+                <a:schemeClr val="tx1"/>
+              </a:solidFill>
+            </a:ln>
+          </p:spPr>
+          <p:style>
+            <a:lnRef idx="2">
+              <a:schemeClr val="accent1">
+                <a:shade val="15000"/>
+              </a:schemeClr>
+            </a:lnRef>
+            <a:fillRef idx="1">
+              <a:schemeClr val="accent1"/>
+            </a:fillRef>
+            <a:effectRef idx="0">
+              <a:schemeClr val="accent1"/>
+            </a:effectRef>
+            <a:fontRef idx="minor">
+              <a:schemeClr val="lt1"/>
+            </a:fontRef>
+          </p:style>
+          <p:txBody>
+            <a:bodyPr rtlCol="0" anchor="ctr"/>
+            <a:lstStyle/>
+            <a:p>
+              <a:pPr algn="ctr"/>
+              <a:r>
+                <a:rPr lang="en-US" dirty="0">
+                  <a:solidFill>
+                    <a:schemeClr val="tx1"/>
+                  </a:solidFill>
+                </a:rPr>
+                <a:t>User</a:t>
+              </a:r>
+              <a:endParaRPr lang="en-US" i="1" dirty="0">
+                <a:solidFill>
+                  <a:schemeClr val="tx1"/>
+                </a:solidFill>
+              </a:endParaRPr>
+            </a:p>
+          </p:txBody>
+        </p:sp>
+      </p:grpSp>
+      <p:grpSp>
+        <p:nvGrpSpPr>
+          <p:cNvPr id="25" name="Group 24">
+            <a:extLst>
+              <a:ext uri="{FF2B5EF4-FFF2-40B4-BE49-F238E27FC236}">
+                <a16:creationId xmlns:a16="http://schemas.microsoft.com/office/drawing/2014/main" id="{99062568-FA8E-F589-1C12-98954AC4D417}"/>
+              </a:ext>
+            </a:extLst>
+          </p:cNvPr>
+          <p:cNvGrpSpPr/>
+          <p:nvPr/>
+        </p:nvGrpSpPr>
+        <p:grpSpPr>
+          <a:xfrm>
+            <a:off x="4792647" y="4014105"/>
+            <a:ext cx="1818401" cy="746025"/>
+            <a:chOff x="9154399" y="2746626"/>
+            <a:chExt cx="1344168" cy="746025"/>
+          </a:xfrm>
+        </p:grpSpPr>
+        <p:sp>
+          <p:nvSpPr>
+            <p:cNvPr id="26" name="Rectangle: Top Corners Rounded 25">
+              <a:extLst>
+                <a:ext uri="{FF2B5EF4-FFF2-40B4-BE49-F238E27FC236}">
+                  <a16:creationId xmlns:a16="http://schemas.microsoft.com/office/drawing/2014/main" id="{7A6B1112-EEBD-21AA-3321-692ED735351E}"/>
+                </a:ext>
+              </a:extLst>
+            </p:cNvPr>
+            <p:cNvSpPr/>
+            <p:nvPr/>
+          </p:nvSpPr>
+          <p:spPr>
+            <a:xfrm>
+              <a:off x="9154399" y="2938662"/>
+              <a:ext cx="1344168" cy="553989"/>
+            </a:xfrm>
+            <a:prstGeom prst="round2SameRect">
+              <a:avLst>
+                <a:gd name="adj1" fmla="val 0"/>
+                <a:gd name="adj2" fmla="val 11961"/>
+              </a:avLst>
+            </a:prstGeom>
+            <a:solidFill>
+              <a:srgbClr val="E5F1F8"/>
+            </a:solidFill>
+            <a:ln>
+              <a:solidFill>
+                <a:schemeClr val="tx1"/>
+              </a:solidFill>
+            </a:ln>
+          </p:spPr>
+          <p:style>
+            <a:lnRef idx="2">
+              <a:schemeClr val="accent1">
+                <a:shade val="15000"/>
+              </a:schemeClr>
+            </a:lnRef>
+            <a:fillRef idx="1">
+              <a:schemeClr val="accent1"/>
+            </a:fillRef>
+            <a:effectRef idx="0">
+              <a:schemeClr val="accent1"/>
+            </a:effectRef>
+            <a:fontRef idx="minor">
+              <a:schemeClr val="lt1"/>
+            </a:fontRef>
+          </p:style>
+          <p:txBody>
+            <a:bodyPr rtlCol="0" anchor="ctr"/>
+            <a:lstStyle/>
+            <a:p>
+              <a:pPr algn="ctr"/>
+              <a:r>
+                <a:rPr lang="en-US" dirty="0">
+                  <a:solidFill>
+                    <a:schemeClr val="tx1"/>
+                  </a:solidFill>
+                </a:rPr>
+                <a:t>Sandbox, read-only</a:t>
+              </a:r>
+            </a:p>
+          </p:txBody>
+        </p:sp>
+        <p:sp>
+          <p:nvSpPr>
+            <p:cNvPr id="27" name="Rectangle: Rounded Corners 26">
+              <a:extLst>
+                <a:ext uri="{FF2B5EF4-FFF2-40B4-BE49-F238E27FC236}">
+                  <a16:creationId xmlns:a16="http://schemas.microsoft.com/office/drawing/2014/main" id="{AB723828-D5F7-AD98-0255-8EF3A2D01ACD}"/>
+                </a:ext>
+              </a:extLst>
+            </p:cNvPr>
+            <p:cNvSpPr/>
+            <p:nvPr/>
+          </p:nvSpPr>
+          <p:spPr>
+            <a:xfrm>
+              <a:off x="9154399" y="2746626"/>
+              <a:ext cx="1344168" cy="230826"/>
+            </a:xfrm>
+            <a:prstGeom prst="roundRect">
+              <a:avLst/>
+            </a:prstGeom>
+            <a:solidFill>
+              <a:srgbClr val="B2D4EB"/>
+            </a:solidFill>
+            <a:ln>
+              <a:solidFill>
+                <a:schemeClr val="tx1"/>
+              </a:solidFill>
+            </a:ln>
+          </p:spPr>
+          <p:style>
+            <a:lnRef idx="2">
+              <a:schemeClr val="accent1">
+                <a:shade val="15000"/>
+              </a:schemeClr>
+            </a:lnRef>
+            <a:fillRef idx="1">
+              <a:schemeClr val="accent1"/>
+            </a:fillRef>
+            <a:effectRef idx="0">
+              <a:schemeClr val="accent1"/>
+            </a:effectRef>
+            <a:fontRef idx="minor">
+              <a:schemeClr val="lt1"/>
+            </a:fontRef>
+          </p:style>
+          <p:txBody>
+            <a:bodyPr rtlCol="0" anchor="ctr"/>
+            <a:lstStyle/>
+            <a:p>
+              <a:pPr algn="ctr"/>
+              <a:r>
+                <a:rPr lang="en-US" dirty="0">
+                  <a:solidFill>
+                    <a:schemeClr val="tx1"/>
+                  </a:solidFill>
+                </a:rPr>
+                <a:t>Untrusted</a:t>
+              </a:r>
+              <a:endParaRPr lang="en-US" i="1" dirty="0">
+                <a:solidFill>
+                  <a:schemeClr val="tx1"/>
+                </a:solidFill>
+              </a:endParaRPr>
+            </a:p>
+          </p:txBody>
+        </p:sp>
+      </p:grpSp>
+      <p:cxnSp>
+        <p:nvCxnSpPr>
+          <p:cNvPr id="29" name="Straight Arrow Connector 28">
+            <a:extLst>
+              <a:ext uri="{FF2B5EF4-FFF2-40B4-BE49-F238E27FC236}">
+                <a16:creationId xmlns:a16="http://schemas.microsoft.com/office/drawing/2014/main" id="{EDA9A562-A639-0290-4A8F-2191FEFD3543}"/>
+              </a:ext>
+            </a:extLst>
+          </p:cNvPr>
+          <p:cNvCxnSpPr>
+            <a:cxnSpLocks/>
+            <a:stCxn id="21" idx="1"/>
+            <a:endCxn id="9" idx="6"/>
+          </p:cNvCxnSpPr>
+          <p:nvPr/>
+        </p:nvCxnSpPr>
+        <p:spPr>
+          <a:xfrm flipH="1">
+            <a:off x="2780969" y="1596344"/>
+            <a:ext cx="2011680" cy="1713387"/>
+          </a:xfrm>
+          <a:prstGeom prst="straightConnector1">
+            <a:avLst/>
+          </a:prstGeom>
+          <a:ln>
+            <a:solidFill>
+              <a:schemeClr val="tx1"/>
+            </a:solidFill>
+            <a:prstDash val="solid"/>
+            <a:headEnd type="none" w="lg" len="lg"/>
+            <a:tailEnd type="triangle" w="lg" len="lg"/>
+          </a:ln>
+        </p:spPr>
+        <p:style>
+          <a:lnRef idx="2">
+            <a:schemeClr val="accent1"/>
+          </a:lnRef>
+          <a:fillRef idx="0">
+            <a:schemeClr val="accent1"/>
+          </a:fillRef>
+          <a:effectRef idx="1">
+            <a:schemeClr val="accent1"/>
+          </a:effectRef>
+          <a:fontRef idx="minor">
+            <a:schemeClr val="tx1"/>
+          </a:fontRef>
+        </p:style>
+      </p:cxnSp>
+      <p:cxnSp>
+        <p:nvCxnSpPr>
+          <p:cNvPr id="32" name="Straight Arrow Connector 31">
+            <a:extLst>
+              <a:ext uri="{FF2B5EF4-FFF2-40B4-BE49-F238E27FC236}">
+                <a16:creationId xmlns:a16="http://schemas.microsoft.com/office/drawing/2014/main" id="{9979D161-0A00-5FB8-B949-F291626722CB}"/>
+              </a:ext>
+            </a:extLst>
+          </p:cNvPr>
+          <p:cNvCxnSpPr>
+            <a:cxnSpLocks/>
+            <a:stCxn id="15" idx="1"/>
+            <a:endCxn id="10" idx="6"/>
+          </p:cNvCxnSpPr>
+          <p:nvPr/>
+        </p:nvCxnSpPr>
+        <p:spPr>
+          <a:xfrm flipH="1">
+            <a:off x="2780969" y="2440735"/>
+            <a:ext cx="2011679" cy="1554796"/>
+          </a:xfrm>
+          <a:prstGeom prst="straightConnector1">
+            <a:avLst/>
+          </a:prstGeom>
+          <a:ln>
+            <a:solidFill>
+              <a:schemeClr val="tx1"/>
+            </a:solidFill>
+            <a:prstDash val="solid"/>
+            <a:headEnd type="none" w="lg" len="lg"/>
+            <a:tailEnd type="triangle" w="lg" len="lg"/>
+          </a:ln>
+        </p:spPr>
+        <p:style>
+          <a:lnRef idx="2">
+            <a:schemeClr val="accent1"/>
+          </a:lnRef>
+          <a:fillRef idx="0">
+            <a:schemeClr val="accent1"/>
+          </a:fillRef>
+          <a:effectRef idx="1">
+            <a:schemeClr val="accent1"/>
+          </a:effectRef>
+          <a:fontRef idx="minor">
+            <a:schemeClr val="tx1"/>
+          </a:fontRef>
+        </p:style>
+      </p:cxnSp>
+      <p:cxnSp>
+        <p:nvCxnSpPr>
+          <p:cNvPr id="37" name="Straight Arrow Connector 36">
+            <a:extLst>
+              <a:ext uri="{FF2B5EF4-FFF2-40B4-BE49-F238E27FC236}">
+                <a16:creationId xmlns:a16="http://schemas.microsoft.com/office/drawing/2014/main" id="{B3C74887-A269-0023-3251-BF5F26080FE7}"/>
+              </a:ext>
+            </a:extLst>
+          </p:cNvPr>
+          <p:cNvCxnSpPr>
+            <a:cxnSpLocks/>
+            <a:stCxn id="24" idx="1"/>
+            <a:endCxn id="11" idx="6"/>
+          </p:cNvCxnSpPr>
+          <p:nvPr/>
+        </p:nvCxnSpPr>
+        <p:spPr>
+          <a:xfrm flipH="1">
+            <a:off x="2780969" y="3285127"/>
+            <a:ext cx="2011679" cy="1158276"/>
+          </a:xfrm>
+          <a:prstGeom prst="straightConnector1">
+            <a:avLst/>
+          </a:prstGeom>
+          <a:ln>
+            <a:solidFill>
+              <a:schemeClr val="tx1"/>
+            </a:solidFill>
+            <a:prstDash val="solid"/>
+            <a:headEnd type="none" w="lg" len="lg"/>
+            <a:tailEnd type="triangle" w="lg" len="lg"/>
+          </a:ln>
+        </p:spPr>
+        <p:style>
+          <a:lnRef idx="2">
+            <a:schemeClr val="accent1"/>
+          </a:lnRef>
+          <a:fillRef idx="0">
+            <a:schemeClr val="accent1"/>
+          </a:fillRef>
+          <a:effectRef idx="1">
+            <a:schemeClr val="accent1"/>
+          </a:effectRef>
+          <a:fontRef idx="minor">
+            <a:schemeClr val="tx1"/>
+          </a:fontRef>
+        </p:style>
+      </p:cxnSp>
+      <p:cxnSp>
+        <p:nvCxnSpPr>
+          <p:cNvPr id="40" name="Straight Arrow Connector 39">
+            <a:extLst>
+              <a:ext uri="{FF2B5EF4-FFF2-40B4-BE49-F238E27FC236}">
+                <a16:creationId xmlns:a16="http://schemas.microsoft.com/office/drawing/2014/main" id="{A2D1CCDD-6A9B-27D0-1997-3B216D317AAC}"/>
+              </a:ext>
+            </a:extLst>
+          </p:cNvPr>
+          <p:cNvCxnSpPr>
+            <a:cxnSpLocks/>
+            <a:stCxn id="27" idx="1"/>
+            <a:endCxn id="12" idx="6"/>
+          </p:cNvCxnSpPr>
+          <p:nvPr/>
+        </p:nvCxnSpPr>
+        <p:spPr>
+          <a:xfrm flipH="1">
+            <a:off x="2780969" y="4129518"/>
+            <a:ext cx="2011678" cy="771085"/>
+          </a:xfrm>
+          <a:prstGeom prst="straightConnector1">
+            <a:avLst/>
+          </a:prstGeom>
+          <a:ln>
+            <a:solidFill>
+              <a:schemeClr val="tx1"/>
+            </a:solidFill>
+            <a:prstDash val="solid"/>
+            <a:headEnd type="none" w="lg" len="lg"/>
+            <a:tailEnd type="triangle" w="lg" len="lg"/>
+          </a:ln>
+        </p:spPr>
+        <p:style>
+          <a:lnRef idx="2">
+            <a:schemeClr val="accent1"/>
+          </a:lnRef>
+          <a:fillRef idx="0">
+            <a:schemeClr val="accent1"/>
+          </a:fillRef>
+          <a:effectRef idx="1">
+            <a:schemeClr val="accent1"/>
+          </a:effectRef>
+          <a:fontRef idx="minor">
+            <a:schemeClr val="tx1"/>
+          </a:fontRef>
+        </p:style>
+      </p:cxnSp>
+    </p:spTree>
+    <p:extLst>
+      <p:ext uri="{BB962C8B-B14F-4D97-AF65-F5344CB8AC3E}">
+        <p14:creationId xmlns:p14="http://schemas.microsoft.com/office/powerpoint/2010/main" val="1019345337"/>
+      </p:ext>
+    </p:extLst>
+  </p:cSld>
+  <p:clrMapOvr>
+    <a:masterClrMapping/>
+  </p:clrMapOvr>
+</p:sld>
+</file>
+
+<file path=ppt/slides/slide27.xml><?xml version="1.0" encoding="utf-8"?>
+<p:sld xmlns:a="http://schemas.openxmlformats.org/drawingml/2006/main" xmlns:r="http://schemas.openxmlformats.org/officeDocument/2006/relationships" xmlns:p="http://schemas.openxmlformats.org/presentationml/2006/main">
+  <p:cSld>
+    <p:spTree>
+      <p:nvGrpSpPr>
+        <p:cNvPr id="1" name=""/>
+        <p:cNvGrpSpPr/>
+        <p:nvPr/>
+      </p:nvGrpSpPr>
+      <p:grpSpPr>
+        <a:xfrm>
+          <a:off x="0" y="0"/>
+          <a:ext cx="0" cy="0"/>
+          <a:chOff x="0" y="0"/>
+          <a:chExt cx="0" cy="0"/>
+        </a:xfrm>
+      </p:grpSpPr>
       <p:pic>
         <p:nvPicPr>
           <p:cNvPr id="1026" name="Picture 2">

--- a/figures/figures.pptx
+++ b/figures/figures.pptx
@@ -5,7 +5,7 @@
     <p:sldMasterId id="2147483660" r:id="rId1"/>
   </p:sldMasterIdLst>
   <p:notesMasterIdLst>
-    <p:notesMasterId r:id="rId29"/>
+    <p:notesMasterId r:id="rId30"/>
   </p:notesMasterIdLst>
   <p:sldIdLst>
     <p:sldId id="258" r:id="rId2"/>
@@ -34,7 +34,8 @@
     <p:sldId id="284" r:id="rId25"/>
     <p:sldId id="282" r:id="rId26"/>
     <p:sldId id="283" r:id="rId27"/>
-    <p:sldId id="257" r:id="rId28"/>
+    <p:sldId id="285" r:id="rId28"/>
+    <p:sldId id="257" r:id="rId29"/>
   </p:sldIdLst>
   <p:sldSz cx="12192000" cy="6858000"/>
   <p:notesSz cx="6858000" cy="9144000"/>
@@ -200,6 +201,7 @@
             <p14:sldId id="284"/>
             <p14:sldId id="282"/>
             <p14:sldId id="283"/>
+            <p14:sldId id="285"/>
           </p14:sldIdLst>
         </p14:section>
         <p14:section name="Examples" id="{2CEADF37-2C1D-4DE6-BB08-5D838E707A13}">
@@ -20953,6 +20955,909 @@
       </p:grpSpPr>
       <p:pic>
         <p:nvPicPr>
+          <p:cNvPr id="23" name="Graphic 22">
+            <a:extLst>
+              <a:ext uri="{FF2B5EF4-FFF2-40B4-BE49-F238E27FC236}">
+                <a16:creationId xmlns:a16="http://schemas.microsoft.com/office/drawing/2014/main" id="{DA88F6D7-4C9A-4185-3D36-7EB0922EE285}"/>
+              </a:ext>
+            </a:extLst>
+          </p:cNvPr>
+          <p:cNvPicPr>
+            <a:picLocks noChangeAspect="1"/>
+          </p:cNvPicPr>
+          <p:nvPr/>
+        </p:nvPicPr>
+        <p:blipFill>
+          <a:blip>
+            <a:extLst>
+              <a:ext uri="{96DAC541-7B7A-43D3-8B79-37D633B846F1}">
+                <asvg:svgBlip xmlns:asvg="http://schemas.microsoft.com/office/drawing/2016/SVG/main" r:embed="rId2"/>
+              </a:ext>
+            </a:extLst>
+          </a:blip>
+          <a:stretch>
+            <a:fillRect/>
+          </a:stretch>
+        </p:blipFill>
+        <p:spPr>
+          <a:xfrm>
+            <a:off x="6813470" y="1708181"/>
+            <a:ext cx="685800" cy="685800"/>
+          </a:xfrm>
+          <a:prstGeom prst="rect">
+            <a:avLst/>
+          </a:prstGeom>
+        </p:spPr>
+      </p:pic>
+      <p:pic>
+        <p:nvPicPr>
+          <p:cNvPr id="24" name="Graphic 23">
+            <a:extLst>
+              <a:ext uri="{FF2B5EF4-FFF2-40B4-BE49-F238E27FC236}">
+                <a16:creationId xmlns:a16="http://schemas.microsoft.com/office/drawing/2014/main" id="{726C5A85-790B-25A5-93E5-BFC1714EB9F1}"/>
+              </a:ext>
+            </a:extLst>
+          </p:cNvPr>
+          <p:cNvPicPr>
+            <a:picLocks noChangeAspect="1"/>
+          </p:cNvPicPr>
+          <p:nvPr/>
+        </p:nvPicPr>
+        <p:blipFill>
+          <a:blip>
+            <a:extLst>
+              <a:ext uri="{96DAC541-7B7A-43D3-8B79-37D633B846F1}">
+                <asvg:svgBlip xmlns:asvg="http://schemas.microsoft.com/office/drawing/2016/SVG/main" r:embed="rId3"/>
+              </a:ext>
+            </a:extLst>
+          </a:blip>
+          <a:stretch>
+            <a:fillRect/>
+          </a:stretch>
+        </p:blipFill>
+        <p:spPr>
+          <a:xfrm>
+            <a:off x="6813470" y="3522041"/>
+            <a:ext cx="685800" cy="685800"/>
+          </a:xfrm>
+          <a:prstGeom prst="rect">
+            <a:avLst/>
+          </a:prstGeom>
+        </p:spPr>
+      </p:pic>
+      <p:pic>
+        <p:nvPicPr>
+          <p:cNvPr id="26" name="Graphic 25">
+            <a:extLst>
+              <a:ext uri="{FF2B5EF4-FFF2-40B4-BE49-F238E27FC236}">
+                <a16:creationId xmlns:a16="http://schemas.microsoft.com/office/drawing/2014/main" id="{6F2CBAE6-3682-C7A5-095F-B47294275DAF}"/>
+              </a:ext>
+            </a:extLst>
+          </p:cNvPr>
+          <p:cNvPicPr>
+            <a:picLocks noChangeAspect="1"/>
+          </p:cNvPicPr>
+          <p:nvPr/>
+        </p:nvPicPr>
+        <p:blipFill>
+          <a:blip>
+            <a:extLst>
+              <a:ext uri="{96DAC541-7B7A-43D3-8B79-37D633B846F1}">
+                <asvg:svgBlip xmlns:asvg="http://schemas.microsoft.com/office/drawing/2016/SVG/main" r:embed="rId4"/>
+              </a:ext>
+            </a:extLst>
+          </a:blip>
+          <a:stretch>
+            <a:fillRect/>
+          </a:stretch>
+        </p:blipFill>
+        <p:spPr>
+          <a:xfrm>
+            <a:off x="4465557" y="3522041"/>
+            <a:ext cx="685800" cy="685800"/>
+          </a:xfrm>
+          <a:prstGeom prst="rect">
+            <a:avLst/>
+          </a:prstGeom>
+        </p:spPr>
+      </p:pic>
+      <p:sp>
+        <p:nvSpPr>
+          <p:cNvPr id="27" name="TextBox 26">
+            <a:extLst>
+              <a:ext uri="{FF2B5EF4-FFF2-40B4-BE49-F238E27FC236}">
+                <a16:creationId xmlns:a16="http://schemas.microsoft.com/office/drawing/2014/main" id="{F744DB5A-CC57-F1A8-E429-B66BEEC007AF}"/>
+              </a:ext>
+            </a:extLst>
+          </p:cNvPr>
+          <p:cNvSpPr txBox="1"/>
+          <p:nvPr/>
+        </p:nvSpPr>
+        <p:spPr>
+          <a:xfrm>
+            <a:off x="6659823" y="2473787"/>
+            <a:ext cx="993092" cy="492443"/>
+          </a:xfrm>
+          <a:prstGeom prst="rect">
+            <a:avLst/>
+          </a:prstGeom>
+          <a:noFill/>
+        </p:spPr>
+        <p:txBody>
+          <a:bodyPr wrap="none" lIns="0" tIns="0" rIns="0" bIns="0" rtlCol="0">
+            <a:spAutoFit/>
+          </a:bodyPr>
+          <a:lstStyle/>
+          <a:p>
+            <a:pPr algn="ctr" defTabSz="914400"/>
+            <a:r>
+              <a:rPr lang="en-US" sz="1600" dirty="0">
+                <a:latin typeface="+mj-lt"/>
+              </a:rPr>
+              <a:t>Cosmos DB</a:t>
+            </a:r>
+          </a:p>
+          <a:p>
+            <a:pPr algn="ctr" defTabSz="914400"/>
+            <a:r>
+              <a:rPr lang="en-US" sz="1600" dirty="0">
+                <a:latin typeface="+mj-lt"/>
+              </a:rPr>
+              <a:t>(Vector Data)</a:t>
+            </a:r>
+          </a:p>
+        </p:txBody>
+      </p:sp>
+      <p:sp>
+        <p:nvSpPr>
+          <p:cNvPr id="30" name="TextBox 29">
+            <a:extLst>
+              <a:ext uri="{FF2B5EF4-FFF2-40B4-BE49-F238E27FC236}">
+                <a16:creationId xmlns:a16="http://schemas.microsoft.com/office/drawing/2014/main" id="{C95D7447-BD22-D2C6-40B9-7995CB109180}"/>
+              </a:ext>
+            </a:extLst>
+          </p:cNvPr>
+          <p:cNvSpPr txBox="1"/>
+          <p:nvPr/>
+        </p:nvSpPr>
+        <p:spPr>
+          <a:xfrm>
+            <a:off x="6475765" y="4207841"/>
+            <a:ext cx="1361205" cy="492443"/>
+          </a:xfrm>
+          <a:prstGeom prst="rect">
+            <a:avLst/>
+          </a:prstGeom>
+          <a:noFill/>
+        </p:spPr>
+        <p:txBody>
+          <a:bodyPr wrap="none" lIns="0" tIns="0" rIns="0" bIns="0" rtlCol="0">
+            <a:spAutoFit/>
+          </a:bodyPr>
+          <a:lstStyle/>
+          <a:p>
+            <a:pPr algn="ctr" defTabSz="914400"/>
+            <a:r>
+              <a:rPr lang="en-US" sz="1600" dirty="0">
+                <a:latin typeface="+mj-lt"/>
+              </a:rPr>
+              <a:t>AI Search</a:t>
+            </a:r>
+          </a:p>
+          <a:p>
+            <a:pPr algn="ctr" defTabSz="914400"/>
+            <a:r>
+              <a:rPr lang="en-US" sz="1600" dirty="0">
+                <a:latin typeface="+mj-lt"/>
+              </a:rPr>
+              <a:t>(Indexed Content)</a:t>
+            </a:r>
+          </a:p>
+        </p:txBody>
+      </p:sp>
+      <p:sp>
+        <p:nvSpPr>
+          <p:cNvPr id="31" name="TextBox 30">
+            <a:extLst>
+              <a:ext uri="{FF2B5EF4-FFF2-40B4-BE49-F238E27FC236}">
+                <a16:creationId xmlns:a16="http://schemas.microsoft.com/office/drawing/2014/main" id="{8D88BA5D-AF5C-BD20-022B-994D0191FC68}"/>
+              </a:ext>
+            </a:extLst>
+          </p:cNvPr>
+          <p:cNvSpPr txBox="1"/>
+          <p:nvPr/>
+        </p:nvSpPr>
+        <p:spPr>
+          <a:xfrm>
+            <a:off x="4197584" y="4206755"/>
+            <a:ext cx="1221745" cy="492443"/>
+          </a:xfrm>
+          <a:prstGeom prst="rect">
+            <a:avLst/>
+          </a:prstGeom>
+          <a:noFill/>
+        </p:spPr>
+        <p:txBody>
+          <a:bodyPr wrap="none" lIns="0" tIns="0" rIns="0" bIns="0" rtlCol="0">
+            <a:spAutoFit/>
+          </a:bodyPr>
+          <a:lstStyle/>
+          <a:p>
+            <a:pPr algn="ctr" defTabSz="914400"/>
+            <a:r>
+              <a:rPr lang="en-US" sz="1600" dirty="0">
+                <a:latin typeface="+mj-lt"/>
+              </a:rPr>
+              <a:t>Storage Account</a:t>
+            </a:r>
+          </a:p>
+          <a:p>
+            <a:pPr algn="ctr" defTabSz="914400"/>
+            <a:r>
+              <a:rPr lang="en-US" sz="1600" dirty="0">
+                <a:latin typeface="+mj-lt"/>
+              </a:rPr>
+              <a:t>(Data Lake)</a:t>
+            </a:r>
+          </a:p>
+        </p:txBody>
+      </p:sp>
+      <p:cxnSp>
+        <p:nvCxnSpPr>
+          <p:cNvPr id="32" name="Straight Arrow Connector 31">
+            <a:extLst>
+              <a:ext uri="{FF2B5EF4-FFF2-40B4-BE49-F238E27FC236}">
+                <a16:creationId xmlns:a16="http://schemas.microsoft.com/office/drawing/2014/main" id="{4588F750-AAF4-DA5E-DD5C-8929A68CF8E7}"/>
+              </a:ext>
+            </a:extLst>
+          </p:cNvPr>
+          <p:cNvCxnSpPr>
+            <a:cxnSpLocks/>
+            <a:stCxn id="24" idx="0"/>
+            <a:endCxn id="27" idx="2"/>
+          </p:cNvCxnSpPr>
+          <p:nvPr/>
+        </p:nvCxnSpPr>
+        <p:spPr>
+          <a:xfrm flipH="1" flipV="1">
+            <a:off x="7156369" y="2966230"/>
+            <a:ext cx="1" cy="555811"/>
+          </a:xfrm>
+          <a:prstGeom prst="straightConnector1">
+            <a:avLst/>
+          </a:prstGeom>
+          <a:ln>
+            <a:solidFill>
+              <a:schemeClr val="tx1"/>
+            </a:solidFill>
+            <a:prstDash val="solid"/>
+            <a:headEnd type="triangle" w="lg" len="lg"/>
+            <a:tailEnd type="triangle" w="lg" len="lg"/>
+          </a:ln>
+        </p:spPr>
+        <p:style>
+          <a:lnRef idx="2">
+            <a:schemeClr val="accent1"/>
+          </a:lnRef>
+          <a:fillRef idx="0">
+            <a:schemeClr val="accent1"/>
+          </a:fillRef>
+          <a:effectRef idx="1">
+            <a:schemeClr val="accent1"/>
+          </a:effectRef>
+          <a:fontRef idx="minor">
+            <a:schemeClr val="tx1"/>
+          </a:fontRef>
+        </p:style>
+      </p:cxnSp>
+      <p:pic>
+        <p:nvPicPr>
+          <p:cNvPr id="33" name="Graphic 32">
+            <a:extLst>
+              <a:ext uri="{FF2B5EF4-FFF2-40B4-BE49-F238E27FC236}">
+                <a16:creationId xmlns:a16="http://schemas.microsoft.com/office/drawing/2014/main" id="{8F0C0947-C1EB-B5EF-FD9E-D7EF4D3625FE}"/>
+              </a:ext>
+            </a:extLst>
+          </p:cNvPr>
+          <p:cNvPicPr>
+            <a:picLocks noChangeAspect="1"/>
+          </p:cNvPicPr>
+          <p:nvPr/>
+        </p:nvPicPr>
+        <p:blipFill>
+          <a:blip>
+            <a:extLst>
+              <a:ext uri="{96DAC541-7B7A-43D3-8B79-37D633B846F1}">
+                <asvg:svgBlip xmlns:asvg="http://schemas.microsoft.com/office/drawing/2016/SVG/main" r:embed="rId5"/>
+              </a:ext>
+            </a:extLst>
+          </a:blip>
+          <a:srcRect/>
+          <a:stretch/>
+        </p:blipFill>
+        <p:spPr>
+          <a:xfrm>
+            <a:off x="2117644" y="3522041"/>
+            <a:ext cx="685800" cy="685800"/>
+          </a:xfrm>
+          <a:prstGeom prst="rect">
+            <a:avLst/>
+          </a:prstGeom>
+        </p:spPr>
+      </p:pic>
+      <p:sp>
+        <p:nvSpPr>
+          <p:cNvPr id="34" name="TextBox 33">
+            <a:extLst>
+              <a:ext uri="{FF2B5EF4-FFF2-40B4-BE49-F238E27FC236}">
+                <a16:creationId xmlns:a16="http://schemas.microsoft.com/office/drawing/2014/main" id="{C43E140A-36A7-4878-E24B-DCAA226DE6DF}"/>
+              </a:ext>
+            </a:extLst>
+          </p:cNvPr>
+          <p:cNvSpPr txBox="1"/>
+          <p:nvPr/>
+        </p:nvSpPr>
+        <p:spPr>
+          <a:xfrm>
+            <a:off x="1913952" y="4206755"/>
+            <a:ext cx="1093184" cy="492443"/>
+          </a:xfrm>
+          <a:prstGeom prst="rect">
+            <a:avLst/>
+          </a:prstGeom>
+          <a:noFill/>
+        </p:spPr>
+        <p:txBody>
+          <a:bodyPr wrap="none" lIns="0" tIns="0" rIns="0" bIns="0" rtlCol="0">
+            <a:spAutoFit/>
+          </a:bodyPr>
+          <a:lstStyle/>
+          <a:p>
+            <a:pPr algn="ctr" defTabSz="914400"/>
+            <a:r>
+              <a:rPr lang="en-US" sz="1600" dirty="0">
+                <a:latin typeface="+mj-lt"/>
+              </a:rPr>
+              <a:t>Data Factory</a:t>
+            </a:r>
+          </a:p>
+          <a:p>
+            <a:pPr algn="ctr" defTabSz="914400"/>
+            <a:r>
+              <a:rPr lang="en-US" sz="1600" dirty="0">
+                <a:latin typeface="+mj-lt"/>
+              </a:rPr>
+              <a:t>(ELT Pipelines)</a:t>
+            </a:r>
+          </a:p>
+        </p:txBody>
+      </p:sp>
+      <p:cxnSp>
+        <p:nvCxnSpPr>
+          <p:cNvPr id="35" name="Straight Arrow Connector 34">
+            <a:extLst>
+              <a:ext uri="{FF2B5EF4-FFF2-40B4-BE49-F238E27FC236}">
+                <a16:creationId xmlns:a16="http://schemas.microsoft.com/office/drawing/2014/main" id="{20B14887-F904-9314-8BE7-8163DAC58D11}"/>
+              </a:ext>
+            </a:extLst>
+          </p:cNvPr>
+          <p:cNvCxnSpPr>
+            <a:cxnSpLocks/>
+            <a:stCxn id="33" idx="3"/>
+            <a:endCxn id="26" idx="1"/>
+          </p:cNvCxnSpPr>
+          <p:nvPr/>
+        </p:nvCxnSpPr>
+        <p:spPr>
+          <a:xfrm>
+            <a:off x="2803444" y="3864941"/>
+            <a:ext cx="1662113" cy="0"/>
+          </a:xfrm>
+          <a:prstGeom prst="straightConnector1">
+            <a:avLst/>
+          </a:prstGeom>
+          <a:ln>
+            <a:solidFill>
+              <a:schemeClr val="tx1"/>
+            </a:solidFill>
+            <a:prstDash val="solid"/>
+            <a:headEnd type="none" w="lg" len="lg"/>
+            <a:tailEnd type="triangle" w="lg" len="lg"/>
+          </a:ln>
+        </p:spPr>
+        <p:style>
+          <a:lnRef idx="2">
+            <a:schemeClr val="accent1"/>
+          </a:lnRef>
+          <a:fillRef idx="0">
+            <a:schemeClr val="accent1"/>
+          </a:fillRef>
+          <a:effectRef idx="1">
+            <a:schemeClr val="accent1"/>
+          </a:effectRef>
+          <a:fontRef idx="minor">
+            <a:schemeClr val="tx1"/>
+          </a:fontRef>
+        </p:style>
+      </p:cxnSp>
+      <p:cxnSp>
+        <p:nvCxnSpPr>
+          <p:cNvPr id="36" name="Straight Arrow Connector 35">
+            <a:extLst>
+              <a:ext uri="{FF2B5EF4-FFF2-40B4-BE49-F238E27FC236}">
+                <a16:creationId xmlns:a16="http://schemas.microsoft.com/office/drawing/2014/main" id="{C477D93D-D115-B266-EB48-15C4DDE59387}"/>
+              </a:ext>
+            </a:extLst>
+          </p:cNvPr>
+          <p:cNvCxnSpPr>
+            <a:cxnSpLocks/>
+            <a:stCxn id="26" idx="3"/>
+            <a:endCxn id="24" idx="1"/>
+          </p:cNvCxnSpPr>
+          <p:nvPr/>
+        </p:nvCxnSpPr>
+        <p:spPr>
+          <a:xfrm>
+            <a:off x="5151357" y="3864941"/>
+            <a:ext cx="1662113" cy="0"/>
+          </a:xfrm>
+          <a:prstGeom prst="straightConnector1">
+            <a:avLst/>
+          </a:prstGeom>
+          <a:ln>
+            <a:solidFill>
+              <a:schemeClr val="tx1"/>
+            </a:solidFill>
+            <a:prstDash val="solid"/>
+            <a:headEnd type="none" w="lg" len="lg"/>
+            <a:tailEnd type="triangle" w="lg" len="lg"/>
+          </a:ln>
+        </p:spPr>
+        <p:style>
+          <a:lnRef idx="2">
+            <a:schemeClr val="accent1"/>
+          </a:lnRef>
+          <a:fillRef idx="0">
+            <a:schemeClr val="accent1"/>
+          </a:fillRef>
+          <a:effectRef idx="1">
+            <a:schemeClr val="accent1"/>
+          </a:effectRef>
+          <a:fontRef idx="minor">
+            <a:schemeClr val="tx1"/>
+          </a:fontRef>
+        </p:style>
+      </p:cxnSp>
+      <p:cxnSp>
+        <p:nvCxnSpPr>
+          <p:cNvPr id="37" name="Straight Arrow Connector 36">
+            <a:extLst>
+              <a:ext uri="{FF2B5EF4-FFF2-40B4-BE49-F238E27FC236}">
+                <a16:creationId xmlns:a16="http://schemas.microsoft.com/office/drawing/2014/main" id="{0217BDEA-C10B-A321-428F-0C1826880F36}"/>
+              </a:ext>
+            </a:extLst>
+          </p:cNvPr>
+          <p:cNvCxnSpPr>
+            <a:cxnSpLocks/>
+            <a:stCxn id="24" idx="3"/>
+            <a:endCxn id="48" idx="1"/>
+          </p:cNvCxnSpPr>
+          <p:nvPr/>
+        </p:nvCxnSpPr>
+        <p:spPr>
+          <a:xfrm>
+            <a:off x="7499270" y="3864941"/>
+            <a:ext cx="1499337" cy="0"/>
+          </a:xfrm>
+          <a:prstGeom prst="straightConnector1">
+            <a:avLst/>
+          </a:prstGeom>
+          <a:ln>
+            <a:solidFill>
+              <a:schemeClr val="tx1"/>
+            </a:solidFill>
+            <a:prstDash val="solid"/>
+            <a:headEnd type="triangle" w="lg" len="lg"/>
+            <a:tailEnd type="triangle" w="lg" len="lg"/>
+          </a:ln>
+        </p:spPr>
+        <p:style>
+          <a:lnRef idx="2">
+            <a:schemeClr val="accent1"/>
+          </a:lnRef>
+          <a:fillRef idx="0">
+            <a:schemeClr val="accent1"/>
+          </a:fillRef>
+          <a:effectRef idx="1">
+            <a:schemeClr val="accent1"/>
+          </a:effectRef>
+          <a:fontRef idx="minor">
+            <a:schemeClr val="tx1"/>
+          </a:fontRef>
+        </p:style>
+      </p:cxnSp>
+      <p:cxnSp>
+        <p:nvCxnSpPr>
+          <p:cNvPr id="38" name="Straight Arrow Connector 37">
+            <a:extLst>
+              <a:ext uri="{FF2B5EF4-FFF2-40B4-BE49-F238E27FC236}">
+                <a16:creationId xmlns:a16="http://schemas.microsoft.com/office/drawing/2014/main" id="{E158D239-5F5F-C9C7-726D-66FD0BA23F18}"/>
+              </a:ext>
+            </a:extLst>
+          </p:cNvPr>
+          <p:cNvCxnSpPr>
+            <a:cxnSpLocks/>
+          </p:cNvCxnSpPr>
+          <p:nvPr/>
+        </p:nvCxnSpPr>
+        <p:spPr>
+          <a:xfrm flipV="1">
+            <a:off x="9347120" y="2966230"/>
+            <a:ext cx="2" cy="555811"/>
+          </a:xfrm>
+          <a:prstGeom prst="straightConnector1">
+            <a:avLst/>
+          </a:prstGeom>
+          <a:ln>
+            <a:solidFill>
+              <a:schemeClr val="tx1"/>
+            </a:solidFill>
+            <a:prstDash val="solid"/>
+            <a:headEnd type="triangle" w="lg" len="lg"/>
+            <a:tailEnd type="triangle" w="lg" len="lg"/>
+          </a:ln>
+        </p:spPr>
+        <p:style>
+          <a:lnRef idx="2">
+            <a:schemeClr val="accent1"/>
+          </a:lnRef>
+          <a:fillRef idx="0">
+            <a:schemeClr val="accent1"/>
+          </a:fillRef>
+          <a:effectRef idx="1">
+            <a:schemeClr val="accent1"/>
+          </a:effectRef>
+          <a:fontRef idx="minor">
+            <a:schemeClr val="tx1"/>
+          </a:fontRef>
+        </p:style>
+      </p:cxnSp>
+      <p:sp>
+        <p:nvSpPr>
+          <p:cNvPr id="39" name="TextBox 38">
+            <a:extLst>
+              <a:ext uri="{FF2B5EF4-FFF2-40B4-BE49-F238E27FC236}">
+                <a16:creationId xmlns:a16="http://schemas.microsoft.com/office/drawing/2014/main" id="{7700DCB8-4817-4DCD-4A1A-A83089C25977}"/>
+              </a:ext>
+            </a:extLst>
+          </p:cNvPr>
+          <p:cNvSpPr txBox="1"/>
+          <p:nvPr/>
+        </p:nvSpPr>
+        <p:spPr>
+          <a:xfrm>
+            <a:off x="1884489" y="2473787"/>
+            <a:ext cx="1152110" cy="246221"/>
+          </a:xfrm>
+          <a:prstGeom prst="rect">
+            <a:avLst/>
+          </a:prstGeom>
+          <a:noFill/>
+        </p:spPr>
+        <p:txBody>
+          <a:bodyPr wrap="none" lIns="0" tIns="0" rIns="0" bIns="0" rtlCol="0">
+            <a:spAutoFit/>
+          </a:bodyPr>
+          <a:lstStyle/>
+          <a:p>
+            <a:pPr algn="ctr" defTabSz="914400"/>
+            <a:r>
+              <a:rPr lang="en-US" sz="1600" dirty="0">
+                <a:latin typeface="+mj-lt"/>
+              </a:rPr>
+              <a:t>Enterprise Data</a:t>
+            </a:r>
+          </a:p>
+        </p:txBody>
+      </p:sp>
+      <p:cxnSp>
+        <p:nvCxnSpPr>
+          <p:cNvPr id="40" name="Straight Arrow Connector 39">
+            <a:extLst>
+              <a:ext uri="{FF2B5EF4-FFF2-40B4-BE49-F238E27FC236}">
+                <a16:creationId xmlns:a16="http://schemas.microsoft.com/office/drawing/2014/main" id="{B381B268-3003-9E19-6433-B1769E5D8438}"/>
+              </a:ext>
+            </a:extLst>
+          </p:cNvPr>
+          <p:cNvCxnSpPr>
+            <a:cxnSpLocks/>
+            <a:stCxn id="39" idx="2"/>
+            <a:endCxn id="33" idx="0"/>
+          </p:cNvCxnSpPr>
+          <p:nvPr/>
+        </p:nvCxnSpPr>
+        <p:spPr>
+          <a:xfrm>
+            <a:off x="2460544" y="2720008"/>
+            <a:ext cx="0" cy="802033"/>
+          </a:xfrm>
+          <a:prstGeom prst="straightConnector1">
+            <a:avLst/>
+          </a:prstGeom>
+          <a:ln>
+            <a:solidFill>
+              <a:schemeClr val="tx1"/>
+            </a:solidFill>
+            <a:prstDash val="solid"/>
+            <a:headEnd type="none" w="lg" len="lg"/>
+            <a:tailEnd type="triangle" w="lg" len="lg"/>
+          </a:ln>
+        </p:spPr>
+        <p:style>
+          <a:lnRef idx="2">
+            <a:schemeClr val="accent1"/>
+          </a:lnRef>
+          <a:fillRef idx="0">
+            <a:schemeClr val="accent1"/>
+          </a:fillRef>
+          <a:effectRef idx="1">
+            <a:schemeClr val="accent1"/>
+          </a:effectRef>
+          <a:fontRef idx="minor">
+            <a:schemeClr val="tx1"/>
+          </a:fontRef>
+        </p:style>
+      </p:cxnSp>
+      <p:pic>
+        <p:nvPicPr>
+          <p:cNvPr id="41" name="Picture 40" descr="A blue paper with white text&#10;&#10;AI-generated content may be incorrect.">
+            <a:extLst>
+              <a:ext uri="{FF2B5EF4-FFF2-40B4-BE49-F238E27FC236}">
+                <a16:creationId xmlns:a16="http://schemas.microsoft.com/office/drawing/2014/main" id="{78714A7F-3440-9910-18BB-B2A338E04862}"/>
+              </a:ext>
+            </a:extLst>
+          </p:cNvPr>
+          <p:cNvPicPr>
+            <a:picLocks noChangeAspect="1"/>
+          </p:cNvPicPr>
+          <p:nvPr/>
+        </p:nvPicPr>
+        <p:blipFill>
+          <a:blip r:embed="rId6">
+            <a:duotone>
+              <a:srgbClr val="C03BC4">
+                <a:shade val="45000"/>
+                <a:satMod val="135000"/>
+              </a:srgbClr>
+              <a:prstClr val="white"/>
+            </a:duotone>
+            <a:extLst>
+              <a:ext uri="{28A0092B-C50C-407E-A947-70E740481C1C}">
+                <a14:useLocalDpi xmlns:a14="http://schemas.microsoft.com/office/drawing/2010/main" val="0"/>
+              </a:ext>
+            </a:extLst>
+          </a:blip>
+          <a:stretch>
+            <a:fillRect/>
+          </a:stretch>
+        </p:blipFill>
+        <p:spPr>
+          <a:xfrm>
+            <a:off x="2117644" y="1708181"/>
+            <a:ext cx="685800" cy="685800"/>
+          </a:xfrm>
+          <a:prstGeom prst="rect">
+            <a:avLst/>
+          </a:prstGeom>
+        </p:spPr>
+      </p:pic>
+      <p:pic>
+        <p:nvPicPr>
+          <p:cNvPr id="46" name="Graphic 45">
+            <a:extLst>
+              <a:ext uri="{FF2B5EF4-FFF2-40B4-BE49-F238E27FC236}">
+                <a16:creationId xmlns:a16="http://schemas.microsoft.com/office/drawing/2014/main" id="{AB28493D-0059-A8C8-7A3A-F22A5AB63EED}"/>
+              </a:ext>
+            </a:extLst>
+          </p:cNvPr>
+          <p:cNvPicPr>
+            <a:picLocks noChangeAspect="1"/>
+          </p:cNvPicPr>
+          <p:nvPr/>
+        </p:nvPicPr>
+        <p:blipFill>
+          <a:blip>
+            <a:extLst>
+              <a:ext uri="{96DAC541-7B7A-43D3-8B79-37D633B846F1}">
+                <asvg:svgBlip xmlns:asvg="http://schemas.microsoft.com/office/drawing/2016/SVG/main" r:embed="rId7"/>
+              </a:ext>
+            </a:extLst>
+          </a:blip>
+          <a:stretch>
+            <a:fillRect/>
+          </a:stretch>
+        </p:blipFill>
+        <p:spPr>
+          <a:xfrm>
+            <a:off x="9004220" y="1787987"/>
+            <a:ext cx="685800" cy="685800"/>
+          </a:xfrm>
+          <a:prstGeom prst="rect">
+            <a:avLst/>
+          </a:prstGeom>
+        </p:spPr>
+      </p:pic>
+      <p:sp>
+        <p:nvSpPr>
+          <p:cNvPr id="47" name="TextBox 46">
+            <a:extLst>
+              <a:ext uri="{FF2B5EF4-FFF2-40B4-BE49-F238E27FC236}">
+                <a16:creationId xmlns:a16="http://schemas.microsoft.com/office/drawing/2014/main" id="{A13B9753-C103-20D5-C8E5-2E3B09911743}"/>
+              </a:ext>
+            </a:extLst>
+          </p:cNvPr>
+          <p:cNvSpPr txBox="1"/>
+          <p:nvPr/>
+        </p:nvSpPr>
+        <p:spPr>
+          <a:xfrm>
+            <a:off x="8739902" y="2472701"/>
+            <a:ext cx="1214435" cy="492443"/>
+          </a:xfrm>
+          <a:prstGeom prst="rect">
+            <a:avLst/>
+          </a:prstGeom>
+          <a:noFill/>
+        </p:spPr>
+        <p:txBody>
+          <a:bodyPr wrap="none" lIns="0" tIns="0" rIns="0" bIns="0" rtlCol="0">
+            <a:spAutoFit/>
+          </a:bodyPr>
+          <a:lstStyle/>
+          <a:p>
+            <a:pPr algn="ctr" defTabSz="914400"/>
+            <a:r>
+              <a:rPr lang="en-US" sz="1600" dirty="0">
+                <a:latin typeface="+mj-lt"/>
+              </a:rPr>
+              <a:t>App Service</a:t>
+            </a:r>
+          </a:p>
+          <a:p>
+            <a:pPr algn="ctr" defTabSz="914400"/>
+            <a:r>
+              <a:rPr lang="en-US" sz="1600" dirty="0">
+                <a:latin typeface="+mj-lt"/>
+              </a:rPr>
+              <a:t>(Web Front End)</a:t>
+            </a:r>
+          </a:p>
+        </p:txBody>
+      </p:sp>
+      <p:pic>
+        <p:nvPicPr>
+          <p:cNvPr id="48" name="Picture 4">
+            <a:extLst>
+              <a:ext uri="{FF2B5EF4-FFF2-40B4-BE49-F238E27FC236}">
+                <a16:creationId xmlns:a16="http://schemas.microsoft.com/office/drawing/2014/main" id="{846CAA7C-59A7-6ED0-F3C6-FAC25B8BD9CF}"/>
+              </a:ext>
+            </a:extLst>
+          </p:cNvPr>
+          <p:cNvPicPr>
+            <a:picLocks noChangeAspect="1" noChangeArrowheads="1"/>
+          </p:cNvPicPr>
+          <p:nvPr/>
+        </p:nvPicPr>
+        <p:blipFill>
+          <a:blip r:embed="rId8">
+            <a:extLst>
+              <a:ext uri="{28A0092B-C50C-407E-A947-70E740481C1C}">
+                <a14:useLocalDpi xmlns:a14="http://schemas.microsoft.com/office/drawing/2010/main" val="0"/>
+              </a:ext>
+            </a:extLst>
+          </a:blip>
+          <a:srcRect/>
+          <a:stretch/>
+        </p:blipFill>
+        <p:spPr bwMode="auto">
+          <a:xfrm>
+            <a:off x="8998607" y="3551663"/>
+            <a:ext cx="685800" cy="626555"/>
+          </a:xfrm>
+          <a:prstGeom prst="rect">
+            <a:avLst/>
+          </a:prstGeom>
+          <a:noFill/>
+          <a:extLst>
+            <a:ext uri="{909E8E84-426E-40DD-AFC4-6F175D3DCCD1}">
+              <a14:hiddenFill xmlns:a14="http://schemas.microsoft.com/office/drawing/2010/main">
+                <a:solidFill>
+                  <a:srgbClr val="FFFFFF"/>
+                </a:solidFill>
+              </a14:hiddenFill>
+            </a:ext>
+          </a:extLst>
+        </p:spPr>
+      </p:pic>
+      <p:sp>
+        <p:nvSpPr>
+          <p:cNvPr id="49" name="TextBox 48">
+            <a:extLst>
+              <a:ext uri="{FF2B5EF4-FFF2-40B4-BE49-F238E27FC236}">
+                <a16:creationId xmlns:a16="http://schemas.microsoft.com/office/drawing/2014/main" id="{A2812E0E-399D-5F4A-E5DE-C3088B2B364D}"/>
+              </a:ext>
+            </a:extLst>
+          </p:cNvPr>
+          <p:cNvSpPr txBox="1"/>
+          <p:nvPr/>
+        </p:nvSpPr>
+        <p:spPr>
+          <a:xfrm>
+            <a:off x="8687482" y="4206754"/>
+            <a:ext cx="1308050" cy="492443"/>
+          </a:xfrm>
+          <a:prstGeom prst="rect">
+            <a:avLst/>
+          </a:prstGeom>
+          <a:noFill/>
+        </p:spPr>
+        <p:txBody>
+          <a:bodyPr wrap="none" lIns="0" tIns="0" rIns="0" bIns="0" rtlCol="0">
+            <a:spAutoFit/>
+          </a:bodyPr>
+          <a:lstStyle/>
+          <a:p>
+            <a:pPr algn="ctr" defTabSz="914400"/>
+            <a:r>
+              <a:rPr lang="en-US" sz="1600" dirty="0">
+                <a:latin typeface="+mj-lt"/>
+              </a:rPr>
+              <a:t>Foundry</a:t>
+            </a:r>
+          </a:p>
+          <a:p>
+            <a:pPr algn="ctr" defTabSz="914400"/>
+            <a:r>
+              <a:rPr lang="en-US" sz="1600" dirty="0">
+                <a:latin typeface="+mj-lt"/>
+              </a:rPr>
+              <a:t>(Model Endpoint)</a:t>
+            </a:r>
+          </a:p>
+        </p:txBody>
+      </p:sp>
+    </p:spTree>
+    <p:extLst>
+      <p:ext uri="{BB962C8B-B14F-4D97-AF65-F5344CB8AC3E}">
+        <p14:creationId xmlns:p14="http://schemas.microsoft.com/office/powerpoint/2010/main" val="3284386239"/>
+      </p:ext>
+    </p:extLst>
+  </p:cSld>
+  <p:clrMapOvr>
+    <a:masterClrMapping/>
+  </p:clrMapOvr>
+</p:sld>
+</file>
+
+<file path=ppt/slides/slide28.xml><?xml version="1.0" encoding="utf-8"?>
+<p:sld xmlns:a="http://schemas.openxmlformats.org/drawingml/2006/main" xmlns:r="http://schemas.openxmlformats.org/officeDocument/2006/relationships" xmlns:p="http://schemas.openxmlformats.org/presentationml/2006/main">
+  <p:cSld>
+    <p:spTree>
+      <p:nvGrpSpPr>
+        <p:cNvPr id="1" name=""/>
+        <p:cNvGrpSpPr/>
+        <p:nvPr/>
+      </p:nvGrpSpPr>
+      <p:grpSpPr>
+        <a:xfrm>
+          <a:off x="0" y="0"/>
+          <a:ext cx="0" cy="0"/>
+          <a:chOff x="0" y="0"/>
+          <a:chExt cx="0" cy="0"/>
+        </a:xfrm>
+      </p:grpSpPr>
+      <p:pic>
+        <p:nvPicPr>
           <p:cNvPr id="1026" name="Picture 2">
             <a:extLst>
               <a:ext uri="{FF2B5EF4-FFF2-40B4-BE49-F238E27FC236}">

--- a/figures/figures.pptx
+++ b/figures/figures.pptx
@@ -5,7 +5,7 @@
     <p:sldMasterId id="2147483660" r:id="rId1"/>
   </p:sldMasterIdLst>
   <p:notesMasterIdLst>
-    <p:notesMasterId r:id="rId30"/>
+    <p:notesMasterId r:id="rId32"/>
   </p:notesMasterIdLst>
   <p:sldIdLst>
     <p:sldId id="258" r:id="rId2"/>
@@ -34,8 +34,10 @@
     <p:sldId id="284" r:id="rId25"/>
     <p:sldId id="282" r:id="rId26"/>
     <p:sldId id="283" r:id="rId27"/>
-    <p:sldId id="285" r:id="rId28"/>
-    <p:sldId id="257" r:id="rId29"/>
+    <p:sldId id="287" r:id="rId28"/>
+    <p:sldId id="285" r:id="rId29"/>
+    <p:sldId id="286" r:id="rId30"/>
+    <p:sldId id="257" r:id="rId31"/>
   </p:sldIdLst>
   <p:sldSz cx="12192000" cy="6858000"/>
   <p:notesSz cx="6858000" cy="9144000"/>
@@ -201,7 +203,9 @@
             <p14:sldId id="284"/>
             <p14:sldId id="282"/>
             <p14:sldId id="283"/>
+            <p14:sldId id="287"/>
             <p14:sldId id="285"/>
+            <p14:sldId id="286"/>
           </p14:sldIdLst>
         </p14:section>
         <p14:section name="Examples" id="{2CEADF37-2C1D-4DE6-BB08-5D838E707A13}">
@@ -300,7 +304,7 @@
           <a:p>
             <a:fld id="{DAABB0E5-6D8D-4DEE-B75F-67010CF2307C}" type="datetimeFigureOut">
               <a:rPr lang="en-US" smtClean="0"/>
-              <a:t>4/23/2026</a:t>
+              <a:t>4/26/2026</a:t>
             </a:fld>
             <a:endParaRPr lang="en-US"/>
           </a:p>
@@ -985,7 +989,7 @@
           <a:p>
             <a:fld id="{B84C5C40-2055-49AF-9028-5DA79E75E391}" type="datetimeFigureOut">
               <a:rPr lang="en-US" smtClean="0"/>
-              <a:t>4/23/2026</a:t>
+              <a:t>4/26/2026</a:t>
             </a:fld>
             <a:endParaRPr lang="en-US"/>
           </a:p>
@@ -1155,7 +1159,7 @@
           <a:p>
             <a:fld id="{B84C5C40-2055-49AF-9028-5DA79E75E391}" type="datetimeFigureOut">
               <a:rPr lang="en-US" smtClean="0"/>
-              <a:t>4/23/2026</a:t>
+              <a:t>4/26/2026</a:t>
             </a:fld>
             <a:endParaRPr lang="en-US"/>
           </a:p>
@@ -1335,7 +1339,7 @@
           <a:p>
             <a:fld id="{B84C5C40-2055-49AF-9028-5DA79E75E391}" type="datetimeFigureOut">
               <a:rPr lang="en-US" smtClean="0"/>
-              <a:t>4/23/2026</a:t>
+              <a:t>4/26/2026</a:t>
             </a:fld>
             <a:endParaRPr lang="en-US"/>
           </a:p>
@@ -1505,7 +1509,7 @@
           <a:p>
             <a:fld id="{B84C5C40-2055-49AF-9028-5DA79E75E391}" type="datetimeFigureOut">
               <a:rPr lang="en-US" smtClean="0"/>
-              <a:t>4/23/2026</a:t>
+              <a:t>4/26/2026</a:t>
             </a:fld>
             <a:endParaRPr lang="en-US"/>
           </a:p>
@@ -1751,7 +1755,7 @@
           <a:p>
             <a:fld id="{B84C5C40-2055-49AF-9028-5DA79E75E391}" type="datetimeFigureOut">
               <a:rPr lang="en-US" smtClean="0"/>
-              <a:t>4/23/2026</a:t>
+              <a:t>4/26/2026</a:t>
             </a:fld>
             <a:endParaRPr lang="en-US"/>
           </a:p>
@@ -1983,7 +1987,7 @@
           <a:p>
             <a:fld id="{B84C5C40-2055-49AF-9028-5DA79E75E391}" type="datetimeFigureOut">
               <a:rPr lang="en-US" smtClean="0"/>
-              <a:t>4/23/2026</a:t>
+              <a:t>4/26/2026</a:t>
             </a:fld>
             <a:endParaRPr lang="en-US"/>
           </a:p>
@@ -2350,7 +2354,7 @@
           <a:p>
             <a:fld id="{B84C5C40-2055-49AF-9028-5DA79E75E391}" type="datetimeFigureOut">
               <a:rPr lang="en-US" smtClean="0"/>
-              <a:t>4/23/2026</a:t>
+              <a:t>4/26/2026</a:t>
             </a:fld>
             <a:endParaRPr lang="en-US"/>
           </a:p>
@@ -2468,7 +2472,7 @@
           <a:p>
             <a:fld id="{B84C5C40-2055-49AF-9028-5DA79E75E391}" type="datetimeFigureOut">
               <a:rPr lang="en-US" smtClean="0"/>
-              <a:t>4/23/2026</a:t>
+              <a:t>4/26/2026</a:t>
             </a:fld>
             <a:endParaRPr lang="en-US"/>
           </a:p>
@@ -2563,7 +2567,7 @@
           <a:p>
             <a:fld id="{B84C5C40-2055-49AF-9028-5DA79E75E391}" type="datetimeFigureOut">
               <a:rPr lang="en-US" smtClean="0"/>
-              <a:t>4/23/2026</a:t>
+              <a:t>4/26/2026</a:t>
             </a:fld>
             <a:endParaRPr lang="en-US"/>
           </a:p>
@@ -2840,7 +2844,7 @@
           <a:p>
             <a:fld id="{B84C5C40-2055-49AF-9028-5DA79E75E391}" type="datetimeFigureOut">
               <a:rPr lang="en-US" smtClean="0"/>
-              <a:t>4/23/2026</a:t>
+              <a:t>4/26/2026</a:t>
             </a:fld>
             <a:endParaRPr lang="en-US"/>
           </a:p>
@@ -3097,7 +3101,7 @@
           <a:p>
             <a:fld id="{B84C5C40-2055-49AF-9028-5DA79E75E391}" type="datetimeFigureOut">
               <a:rPr lang="en-US" smtClean="0"/>
-              <a:t>4/23/2026</a:t>
+              <a:t>4/26/2026</a:t>
             </a:fld>
             <a:endParaRPr lang="en-US"/>
           </a:p>
@@ -3310,7 +3314,7 @@
           <a:p>
             <a:fld id="{B84C5C40-2055-49AF-9028-5DA79E75E391}" type="datetimeFigureOut">
               <a:rPr lang="en-US" smtClean="0"/>
-              <a:t>4/23/2026</a:t>
+              <a:t>4/26/2026</a:t>
             </a:fld>
             <a:endParaRPr lang="en-US"/>
           </a:p>
@@ -20953,407 +20957,713 @@
           <a:chExt cx="0" cy="0"/>
         </a:xfrm>
       </p:grpSpPr>
-      <p:pic>
-        <p:nvPicPr>
-          <p:cNvPr id="23" name="Graphic 22">
-            <a:extLst>
-              <a:ext uri="{FF2B5EF4-FFF2-40B4-BE49-F238E27FC236}">
-                <a16:creationId xmlns:a16="http://schemas.microsoft.com/office/drawing/2014/main" id="{DA88F6D7-4C9A-4185-3D36-7EB0922EE285}"/>
-              </a:ext>
-            </a:extLst>
-          </p:cNvPr>
-          <p:cNvPicPr>
-            <a:picLocks noChangeAspect="1"/>
-          </p:cNvPicPr>
-          <p:nvPr/>
-        </p:nvPicPr>
-        <p:blipFill>
-          <a:blip>
-            <a:extLst>
-              <a:ext uri="{96DAC541-7B7A-43D3-8B79-37D633B846F1}">
-                <asvg:svgBlip xmlns:asvg="http://schemas.microsoft.com/office/drawing/2016/SVG/main" r:embed="rId2"/>
-              </a:ext>
-            </a:extLst>
-          </a:blip>
-          <a:stretch>
-            <a:fillRect/>
-          </a:stretch>
-        </p:blipFill>
-        <p:spPr>
-          <a:xfrm>
-            <a:off x="6813470" y="1708181"/>
-            <a:ext cx="685800" cy="685800"/>
-          </a:xfrm>
-          <a:prstGeom prst="rect">
-            <a:avLst/>
-          </a:prstGeom>
-        </p:spPr>
-      </p:pic>
-      <p:pic>
-        <p:nvPicPr>
-          <p:cNvPr id="24" name="Graphic 23">
-            <a:extLst>
-              <a:ext uri="{FF2B5EF4-FFF2-40B4-BE49-F238E27FC236}">
-                <a16:creationId xmlns:a16="http://schemas.microsoft.com/office/drawing/2014/main" id="{726C5A85-790B-25A5-93E5-BFC1714EB9F1}"/>
-              </a:ext>
-            </a:extLst>
-          </p:cNvPr>
-          <p:cNvPicPr>
-            <a:picLocks noChangeAspect="1"/>
-          </p:cNvPicPr>
-          <p:nvPr/>
-        </p:nvPicPr>
-        <p:blipFill>
-          <a:blip>
-            <a:extLst>
-              <a:ext uri="{96DAC541-7B7A-43D3-8B79-37D633B846F1}">
-                <asvg:svgBlip xmlns:asvg="http://schemas.microsoft.com/office/drawing/2016/SVG/main" r:embed="rId3"/>
-              </a:ext>
-            </a:extLst>
-          </a:blip>
-          <a:stretch>
-            <a:fillRect/>
-          </a:stretch>
-        </p:blipFill>
-        <p:spPr>
-          <a:xfrm>
-            <a:off x="6813470" y="3522041"/>
-            <a:ext cx="685800" cy="685800"/>
-          </a:xfrm>
-          <a:prstGeom prst="rect">
-            <a:avLst/>
-          </a:prstGeom>
-        </p:spPr>
-      </p:pic>
-      <p:pic>
-        <p:nvPicPr>
-          <p:cNvPr id="26" name="Graphic 25">
-            <a:extLst>
-              <a:ext uri="{FF2B5EF4-FFF2-40B4-BE49-F238E27FC236}">
-                <a16:creationId xmlns:a16="http://schemas.microsoft.com/office/drawing/2014/main" id="{6F2CBAE6-3682-C7A5-095F-B47294275DAF}"/>
-              </a:ext>
-            </a:extLst>
-          </p:cNvPr>
-          <p:cNvPicPr>
-            <a:picLocks noChangeAspect="1"/>
-          </p:cNvPicPr>
-          <p:nvPr/>
-        </p:nvPicPr>
-        <p:blipFill>
-          <a:blip>
-            <a:extLst>
-              <a:ext uri="{96DAC541-7B7A-43D3-8B79-37D633B846F1}">
-                <asvg:svgBlip xmlns:asvg="http://schemas.microsoft.com/office/drawing/2016/SVG/main" r:embed="rId4"/>
-              </a:ext>
-            </a:extLst>
-          </a:blip>
-          <a:stretch>
-            <a:fillRect/>
-          </a:stretch>
-        </p:blipFill>
-        <p:spPr>
-          <a:xfrm>
-            <a:off x="4465557" y="3522041"/>
-            <a:ext cx="685800" cy="685800"/>
-          </a:xfrm>
-          <a:prstGeom prst="rect">
-            <a:avLst/>
-          </a:prstGeom>
-        </p:spPr>
-      </p:pic>
       <p:sp>
         <p:nvSpPr>
-          <p:cNvPr id="27" name="TextBox 26">
-            <a:extLst>
-              <a:ext uri="{FF2B5EF4-FFF2-40B4-BE49-F238E27FC236}">
-                <a16:creationId xmlns:a16="http://schemas.microsoft.com/office/drawing/2014/main" id="{F744DB5A-CC57-F1A8-E429-B66BEEC007AF}"/>
-              </a:ext>
-            </a:extLst>
-          </p:cNvPr>
-          <p:cNvSpPr txBox="1"/>
+          <p:cNvPr id="34" name="Rectangle: Rounded Corners 33">
+            <a:extLst>
+              <a:ext uri="{FF2B5EF4-FFF2-40B4-BE49-F238E27FC236}">
+                <a16:creationId xmlns:a16="http://schemas.microsoft.com/office/drawing/2014/main" id="{A66B8ABE-2B67-AC7D-6923-61C571035515}"/>
+              </a:ext>
+            </a:extLst>
+          </p:cNvPr>
+          <p:cNvSpPr/>
           <p:nvPr/>
         </p:nvSpPr>
         <p:spPr>
           <a:xfrm>
-            <a:off x="6659823" y="2473787"/>
-            <a:ext cx="993092" cy="492443"/>
-          </a:xfrm>
-          <a:prstGeom prst="rect">
-            <a:avLst/>
-          </a:prstGeom>
-          <a:noFill/>
-        </p:spPr>
+            <a:off x="1846669" y="1616765"/>
+            <a:ext cx="7787661" cy="2908853"/>
+          </a:xfrm>
+          <a:prstGeom prst="roundRect">
+            <a:avLst>
+              <a:gd name="adj" fmla="val 9140"/>
+            </a:avLst>
+          </a:prstGeom>
+          <a:solidFill>
+            <a:srgbClr val="B2D4EB"/>
+          </a:solidFill>
+          <a:ln>
+            <a:solidFill>
+              <a:schemeClr val="tx1"/>
+            </a:solidFill>
+            <a:prstDash val="dash"/>
+          </a:ln>
+        </p:spPr>
+        <p:style>
+          <a:lnRef idx="2">
+            <a:schemeClr val="accent1">
+              <a:shade val="15000"/>
+            </a:schemeClr>
+          </a:lnRef>
+          <a:fillRef idx="1">
+            <a:schemeClr val="accent1"/>
+          </a:fillRef>
+          <a:effectRef idx="0">
+            <a:schemeClr val="accent1"/>
+          </a:effectRef>
+          <a:fontRef idx="minor">
+            <a:schemeClr val="lt1"/>
+          </a:fontRef>
+        </p:style>
         <p:txBody>
-          <a:bodyPr wrap="none" lIns="0" tIns="0" rIns="0" bIns="0" rtlCol="0">
-            <a:spAutoFit/>
-          </a:bodyPr>
+          <a:bodyPr rtlCol="0" anchor="ctr"/>
           <a:lstStyle/>
           <a:p>
-            <a:pPr algn="ctr" defTabSz="914400"/>
-            <a:r>
-              <a:rPr lang="en-US" sz="1600" dirty="0">
-                <a:latin typeface="+mj-lt"/>
-              </a:rPr>
-              <a:t>Cosmos DB</a:t>
-            </a:r>
-          </a:p>
-          <a:p>
-            <a:pPr algn="ctr" defTabSz="914400"/>
-            <a:r>
-              <a:rPr lang="en-US" sz="1600" dirty="0">
-                <a:latin typeface="+mj-lt"/>
-              </a:rPr>
-              <a:t>(Vector Data)</a:t>
-            </a:r>
+            <a:pPr algn="ctr"/>
+            <a:endParaRPr lang="en-US" dirty="0">
+              <a:solidFill>
+                <a:schemeClr val="tx1"/>
+              </a:solidFill>
+            </a:endParaRPr>
           </a:p>
         </p:txBody>
       </p:sp>
       <p:sp>
         <p:nvSpPr>
-          <p:cNvPr id="30" name="TextBox 29">
-            <a:extLst>
-              <a:ext uri="{FF2B5EF4-FFF2-40B4-BE49-F238E27FC236}">
-                <a16:creationId xmlns:a16="http://schemas.microsoft.com/office/drawing/2014/main" id="{C95D7447-BD22-D2C6-40B9-7995CB109180}"/>
-              </a:ext>
-            </a:extLst>
-          </p:cNvPr>
-          <p:cNvSpPr txBox="1"/>
+          <p:cNvPr id="10" name="Rectangle: Rounded Corners 9">
+            <a:extLst>
+              <a:ext uri="{FF2B5EF4-FFF2-40B4-BE49-F238E27FC236}">
+                <a16:creationId xmlns:a16="http://schemas.microsoft.com/office/drawing/2014/main" id="{6E532458-BFDC-B07D-0222-85A17E657629}"/>
+              </a:ext>
+            </a:extLst>
+          </p:cNvPr>
+          <p:cNvSpPr/>
           <p:nvPr/>
         </p:nvSpPr>
         <p:spPr>
           <a:xfrm>
-            <a:off x="6475765" y="4207841"/>
-            <a:ext cx="1361205" cy="492443"/>
-          </a:xfrm>
-          <a:prstGeom prst="rect">
+            <a:off x="5546035" y="1981200"/>
+            <a:ext cx="4300070" cy="4658139"/>
+          </a:xfrm>
+          <a:prstGeom prst="roundRect">
+            <a:avLst>
+              <a:gd name="adj" fmla="val 5234"/>
+            </a:avLst>
+          </a:prstGeom>
+          <a:solidFill>
+            <a:srgbClr val="FF99CC">
+              <a:alpha val="50196"/>
+            </a:srgbClr>
+          </a:solidFill>
+          <a:ln>
+            <a:solidFill>
+              <a:schemeClr val="tx1"/>
+            </a:solidFill>
+            <a:prstDash val="dash"/>
+          </a:ln>
+        </p:spPr>
+        <p:style>
+          <a:lnRef idx="2">
+            <a:schemeClr val="accent1">
+              <a:shade val="15000"/>
+            </a:schemeClr>
+          </a:lnRef>
+          <a:fillRef idx="1">
+            <a:schemeClr val="accent1"/>
+          </a:fillRef>
+          <a:effectRef idx="0">
+            <a:schemeClr val="accent1"/>
+          </a:effectRef>
+          <a:fontRef idx="minor">
+            <a:schemeClr val="lt1"/>
+          </a:fontRef>
+        </p:style>
+        <p:txBody>
+          <a:bodyPr rtlCol="0" anchor="ctr"/>
+          <a:lstStyle/>
+          <a:p>
+            <a:pPr algn="ctr"/>
+            <a:endParaRPr lang="en-US" dirty="0">
+              <a:solidFill>
+                <a:schemeClr val="tx1"/>
+              </a:solidFill>
+            </a:endParaRPr>
+          </a:p>
+        </p:txBody>
+      </p:sp>
+      <p:grpSp>
+        <p:nvGrpSpPr>
+          <p:cNvPr id="12" name="Group 11">
+            <a:extLst>
+              <a:ext uri="{FF2B5EF4-FFF2-40B4-BE49-F238E27FC236}">
+                <a16:creationId xmlns:a16="http://schemas.microsoft.com/office/drawing/2014/main" id="{BA9200CC-ABCB-F660-9889-A654C5A493AD}"/>
+              </a:ext>
+            </a:extLst>
+          </p:cNvPr>
+          <p:cNvGrpSpPr/>
+          <p:nvPr/>
+        </p:nvGrpSpPr>
+        <p:grpSpPr>
+          <a:xfrm>
+            <a:off x="5795275" y="2197807"/>
+            <a:ext cx="1619316" cy="965109"/>
+            <a:chOff x="5795275" y="2372220"/>
+            <a:chExt cx="1619316" cy="965109"/>
+          </a:xfrm>
+        </p:grpSpPr>
+        <p:pic>
+          <p:nvPicPr>
+            <p:cNvPr id="2" name="Picture 4">
+              <a:extLst>
+                <a:ext uri="{FF2B5EF4-FFF2-40B4-BE49-F238E27FC236}">
+                  <a16:creationId xmlns:a16="http://schemas.microsoft.com/office/drawing/2014/main" id="{C4B6F66F-F134-577E-D9A3-9F4AE662DD15}"/>
+                </a:ext>
+              </a:extLst>
+            </p:cNvPr>
+            <p:cNvPicPr>
+              <a:picLocks noChangeAspect="1" noChangeArrowheads="1"/>
+            </p:cNvPicPr>
+            <p:nvPr/>
+          </p:nvPicPr>
+          <p:blipFill>
+            <a:blip r:embed="rId2">
+              <a:extLst>
+                <a:ext uri="{28A0092B-C50C-407E-A947-70E740481C1C}">
+                  <a14:useLocalDpi xmlns:a14="http://schemas.microsoft.com/office/drawing/2010/main" val="0"/>
+                </a:ext>
+              </a:extLst>
+            </a:blip>
+            <a:srcRect/>
+            <a:stretch/>
+          </p:blipFill>
+          <p:spPr bwMode="auto">
+            <a:xfrm>
+              <a:off x="6262033" y="2372220"/>
+              <a:ext cx="685800" cy="626555"/>
+            </a:xfrm>
+            <a:prstGeom prst="rect">
+              <a:avLst/>
+            </a:prstGeom>
+            <a:noFill/>
+            <a:extLst>
+              <a:ext uri="{909E8E84-426E-40DD-AFC4-6F175D3DCCD1}">
+                <a14:hiddenFill xmlns:a14="http://schemas.microsoft.com/office/drawing/2010/main">
+                  <a:solidFill>
+                    <a:srgbClr val="FFFFFF"/>
+                  </a:solidFill>
+                </a14:hiddenFill>
+              </a:ext>
+            </a:extLst>
+          </p:spPr>
+        </p:pic>
+        <p:sp>
+          <p:nvSpPr>
+            <p:cNvPr id="4" name="TextBox 3">
+              <a:extLst>
+                <a:ext uri="{FF2B5EF4-FFF2-40B4-BE49-F238E27FC236}">
+                  <a16:creationId xmlns:a16="http://schemas.microsoft.com/office/drawing/2014/main" id="{793E8FB6-BD07-7C70-4F97-87F4182AA23A}"/>
+                </a:ext>
+              </a:extLst>
+            </p:cNvPr>
+            <p:cNvSpPr txBox="1"/>
+            <p:nvPr/>
+          </p:nvSpPr>
+          <p:spPr>
+            <a:xfrm>
+              <a:off x="5795275" y="2998775"/>
+              <a:ext cx="1619316" cy="338554"/>
+            </a:xfrm>
+            <a:prstGeom prst="rect">
+              <a:avLst/>
+            </a:prstGeom>
+            <a:noFill/>
+          </p:spPr>
+          <p:txBody>
+            <a:bodyPr wrap="square" rtlCol="0" anchor="ctr">
+              <a:spAutoFit/>
+            </a:bodyPr>
+            <a:lstStyle/>
+            <a:p>
+              <a:pPr algn="ctr"/>
+              <a:r>
+                <a:rPr lang="en-US" sz="1600" dirty="0"/>
+                <a:t>Foundry Project 1</a:t>
+              </a:r>
+            </a:p>
+          </p:txBody>
+        </p:sp>
+      </p:grpSp>
+      <p:grpSp>
+        <p:nvGrpSpPr>
+          <p:cNvPr id="11" name="Group 10">
+            <a:extLst>
+              <a:ext uri="{FF2B5EF4-FFF2-40B4-BE49-F238E27FC236}">
+                <a16:creationId xmlns:a16="http://schemas.microsoft.com/office/drawing/2014/main" id="{47F4A9C0-B188-0AC9-C825-2CFD10E6AA69}"/>
+              </a:ext>
+            </a:extLst>
+          </p:cNvPr>
+          <p:cNvGrpSpPr/>
+          <p:nvPr/>
+        </p:nvGrpSpPr>
+        <p:grpSpPr>
+          <a:xfrm>
+            <a:off x="5813927" y="3376020"/>
+            <a:ext cx="1619316" cy="965109"/>
+            <a:chOff x="5795275" y="3520672"/>
+            <a:chExt cx="1619316" cy="965109"/>
+          </a:xfrm>
+        </p:grpSpPr>
+        <p:pic>
+          <p:nvPicPr>
+            <p:cNvPr id="5" name="Picture 4">
+              <a:extLst>
+                <a:ext uri="{FF2B5EF4-FFF2-40B4-BE49-F238E27FC236}">
+                  <a16:creationId xmlns:a16="http://schemas.microsoft.com/office/drawing/2014/main" id="{82670C6B-0034-D45C-3CD3-1611D245FA9B}"/>
+                </a:ext>
+              </a:extLst>
+            </p:cNvPr>
+            <p:cNvPicPr>
+              <a:picLocks noChangeAspect="1" noChangeArrowheads="1"/>
+            </p:cNvPicPr>
+            <p:nvPr/>
+          </p:nvPicPr>
+          <p:blipFill>
+            <a:blip r:embed="rId2">
+              <a:extLst>
+                <a:ext uri="{28A0092B-C50C-407E-A947-70E740481C1C}">
+                  <a14:useLocalDpi xmlns:a14="http://schemas.microsoft.com/office/drawing/2010/main" val="0"/>
+                </a:ext>
+              </a:extLst>
+            </a:blip>
+            <a:srcRect/>
+            <a:stretch/>
+          </p:blipFill>
+          <p:spPr bwMode="auto">
+            <a:xfrm>
+              <a:off x="6262033" y="3520672"/>
+              <a:ext cx="685800" cy="626555"/>
+            </a:xfrm>
+            <a:prstGeom prst="rect">
+              <a:avLst/>
+            </a:prstGeom>
+            <a:noFill/>
+            <a:extLst>
+              <a:ext uri="{909E8E84-426E-40DD-AFC4-6F175D3DCCD1}">
+                <a14:hiddenFill xmlns:a14="http://schemas.microsoft.com/office/drawing/2010/main">
+                  <a:solidFill>
+                    <a:srgbClr val="FFFFFF"/>
+                  </a:solidFill>
+                </a14:hiddenFill>
+              </a:ext>
+            </a:extLst>
+          </p:spPr>
+        </p:pic>
+        <p:sp>
+          <p:nvSpPr>
+            <p:cNvPr id="6" name="TextBox 5">
+              <a:extLst>
+                <a:ext uri="{FF2B5EF4-FFF2-40B4-BE49-F238E27FC236}">
+                  <a16:creationId xmlns:a16="http://schemas.microsoft.com/office/drawing/2014/main" id="{E320AAFF-8E16-117F-1E79-66AFC254A79D}"/>
+                </a:ext>
+              </a:extLst>
+            </p:cNvPr>
+            <p:cNvSpPr txBox="1"/>
+            <p:nvPr/>
+          </p:nvSpPr>
+          <p:spPr>
+            <a:xfrm>
+              <a:off x="5795275" y="4147227"/>
+              <a:ext cx="1619316" cy="338554"/>
+            </a:xfrm>
+            <a:prstGeom prst="rect">
+              <a:avLst/>
+            </a:prstGeom>
+            <a:noFill/>
+          </p:spPr>
+          <p:txBody>
+            <a:bodyPr wrap="square" rtlCol="0" anchor="ctr">
+              <a:spAutoFit/>
+            </a:bodyPr>
+            <a:lstStyle/>
+            <a:p>
+              <a:pPr algn="ctr"/>
+              <a:r>
+                <a:rPr lang="en-US" sz="1600" dirty="0"/>
+                <a:t>Foundry Project 2</a:t>
+              </a:r>
+            </a:p>
+          </p:txBody>
+        </p:sp>
+      </p:grpSp>
+      <p:sp>
+        <p:nvSpPr>
+          <p:cNvPr id="7" name="Rectangle: Rounded Corners 6">
+            <a:extLst>
+              <a:ext uri="{FF2B5EF4-FFF2-40B4-BE49-F238E27FC236}">
+                <a16:creationId xmlns:a16="http://schemas.microsoft.com/office/drawing/2014/main" id="{1BF49BB0-EFDD-818F-030E-AA903BBBA84F}"/>
+              </a:ext>
+            </a:extLst>
+          </p:cNvPr>
+          <p:cNvSpPr/>
+          <p:nvPr/>
+        </p:nvSpPr>
+        <p:spPr>
+          <a:xfrm>
+            <a:off x="7663831" y="2367083"/>
+            <a:ext cx="1721162" cy="626556"/>
+          </a:xfrm>
+          <a:prstGeom prst="roundRect">
             <a:avLst/>
           </a:prstGeom>
-          <a:noFill/>
-        </p:spPr>
+          <a:solidFill>
+            <a:srgbClr val="E5F1F8"/>
+          </a:solidFill>
+          <a:ln>
+            <a:solidFill>
+              <a:schemeClr val="tx1"/>
+            </a:solidFill>
+          </a:ln>
+        </p:spPr>
+        <p:style>
+          <a:lnRef idx="2">
+            <a:schemeClr val="accent1">
+              <a:shade val="15000"/>
+            </a:schemeClr>
+          </a:lnRef>
+          <a:fillRef idx="1">
+            <a:schemeClr val="accent1"/>
+          </a:fillRef>
+          <a:effectRef idx="0">
+            <a:schemeClr val="accent1"/>
+          </a:effectRef>
+          <a:fontRef idx="minor">
+            <a:schemeClr val="lt1"/>
+          </a:fontRef>
+        </p:style>
         <p:txBody>
-          <a:bodyPr wrap="none" lIns="0" tIns="0" rIns="0" bIns="0" rtlCol="0">
-            <a:spAutoFit/>
-          </a:bodyPr>
+          <a:bodyPr rtlCol="0" anchor="ctr"/>
           <a:lstStyle/>
           <a:p>
-            <a:pPr algn="ctr" defTabSz="914400"/>
+            <a:pPr algn="ctr"/>
             <a:r>
-              <a:rPr lang="en-US" sz="1600" dirty="0">
-                <a:latin typeface="+mj-lt"/>
+              <a:rPr lang="en-US" dirty="0">
+                <a:solidFill>
+                  <a:schemeClr val="tx1"/>
+                </a:solidFill>
               </a:rPr>
-              <a:t>AI Search</a:t>
+              <a:t>Connections</a:t>
             </a:r>
-          </a:p>
-          <a:p>
-            <a:pPr algn="ctr" defTabSz="914400"/>
-            <a:r>
-              <a:rPr lang="en-US" sz="1600" dirty="0">
-                <a:latin typeface="+mj-lt"/>
-              </a:rPr>
-              <a:t>(Indexed Content)</a:t>
-            </a:r>
+            <a:endParaRPr lang="en-US" i="1" dirty="0">
+              <a:solidFill>
+                <a:schemeClr val="tx1"/>
+              </a:solidFill>
+            </a:endParaRPr>
           </a:p>
         </p:txBody>
       </p:sp>
       <p:sp>
         <p:nvSpPr>
-          <p:cNvPr id="31" name="TextBox 30">
-            <a:extLst>
-              <a:ext uri="{FF2B5EF4-FFF2-40B4-BE49-F238E27FC236}">
-                <a16:creationId xmlns:a16="http://schemas.microsoft.com/office/drawing/2014/main" id="{8D88BA5D-AF5C-BD20-022B-994D0191FC68}"/>
-              </a:ext>
-            </a:extLst>
-          </p:cNvPr>
-          <p:cNvSpPr txBox="1"/>
+          <p:cNvPr id="8" name="Rectangle: Rounded Corners 7">
+            <a:extLst>
+              <a:ext uri="{FF2B5EF4-FFF2-40B4-BE49-F238E27FC236}">
+                <a16:creationId xmlns:a16="http://schemas.microsoft.com/office/drawing/2014/main" id="{24E1DE3B-9DF7-2463-46AD-7F077C353A0D}"/>
+              </a:ext>
+            </a:extLst>
+          </p:cNvPr>
+          <p:cNvSpPr/>
           <p:nvPr/>
         </p:nvSpPr>
         <p:spPr>
           <a:xfrm>
-            <a:off x="4197584" y="4206755"/>
-            <a:ext cx="1221745" cy="492443"/>
-          </a:xfrm>
-          <a:prstGeom prst="rect">
+            <a:off x="7701135" y="3520671"/>
+            <a:ext cx="1721162" cy="626556"/>
+          </a:xfrm>
+          <a:prstGeom prst="roundRect">
             <a:avLst/>
           </a:prstGeom>
-          <a:noFill/>
-        </p:spPr>
-        <p:txBody>
-          <a:bodyPr wrap="none" lIns="0" tIns="0" rIns="0" bIns="0" rtlCol="0">
-            <a:spAutoFit/>
-          </a:bodyPr>
-          <a:lstStyle/>
-          <a:p>
-            <a:pPr algn="ctr" defTabSz="914400"/>
-            <a:r>
-              <a:rPr lang="en-US" sz="1600" dirty="0">
-                <a:latin typeface="+mj-lt"/>
-              </a:rPr>
-              <a:t>Storage Account</a:t>
-            </a:r>
-          </a:p>
-          <a:p>
-            <a:pPr algn="ctr" defTabSz="914400"/>
-            <a:r>
-              <a:rPr lang="en-US" sz="1600" dirty="0">
-                <a:latin typeface="+mj-lt"/>
-              </a:rPr>
-              <a:t>(Data Lake)</a:t>
-            </a:r>
-          </a:p>
-        </p:txBody>
-      </p:sp>
-      <p:cxnSp>
-        <p:nvCxnSpPr>
-          <p:cNvPr id="32" name="Straight Arrow Connector 31">
-            <a:extLst>
-              <a:ext uri="{FF2B5EF4-FFF2-40B4-BE49-F238E27FC236}">
-                <a16:creationId xmlns:a16="http://schemas.microsoft.com/office/drawing/2014/main" id="{4588F750-AAF4-DA5E-DD5C-8929A68CF8E7}"/>
-              </a:ext>
-            </a:extLst>
-          </p:cNvPr>
-          <p:cNvCxnSpPr>
-            <a:cxnSpLocks/>
-            <a:stCxn id="24" idx="0"/>
-            <a:endCxn id="27" idx="2"/>
-          </p:cNvCxnSpPr>
-          <p:nvPr/>
-        </p:nvCxnSpPr>
-        <p:spPr>
-          <a:xfrm flipH="1" flipV="1">
-            <a:off x="7156369" y="2966230"/>
-            <a:ext cx="1" cy="555811"/>
-          </a:xfrm>
-          <a:prstGeom prst="straightConnector1">
-            <a:avLst/>
-          </a:prstGeom>
+          <a:solidFill>
+            <a:srgbClr val="E5F1F8"/>
+          </a:solidFill>
           <a:ln>
             <a:solidFill>
               <a:schemeClr val="tx1"/>
             </a:solidFill>
-            <a:prstDash val="solid"/>
-            <a:headEnd type="triangle" w="lg" len="lg"/>
-            <a:tailEnd type="triangle" w="lg" len="lg"/>
           </a:ln>
         </p:spPr>
         <p:style>
           <a:lnRef idx="2">
-            <a:schemeClr val="accent1"/>
+            <a:schemeClr val="accent1">
+              <a:shade val="15000"/>
+            </a:schemeClr>
           </a:lnRef>
-          <a:fillRef idx="0">
+          <a:fillRef idx="1">
             <a:schemeClr val="accent1"/>
           </a:fillRef>
-          <a:effectRef idx="1">
+          <a:effectRef idx="0">
             <a:schemeClr val="accent1"/>
           </a:effectRef>
           <a:fontRef idx="minor">
-            <a:schemeClr val="tx1"/>
+            <a:schemeClr val="lt1"/>
           </a:fontRef>
         </p:style>
-      </p:cxnSp>
-      <p:pic>
-        <p:nvPicPr>
-          <p:cNvPr id="33" name="Graphic 32">
-            <a:extLst>
-              <a:ext uri="{FF2B5EF4-FFF2-40B4-BE49-F238E27FC236}">
-                <a16:creationId xmlns:a16="http://schemas.microsoft.com/office/drawing/2014/main" id="{8F0C0947-C1EB-B5EF-FD9E-D7EF4D3625FE}"/>
-              </a:ext>
-            </a:extLst>
-          </p:cNvPr>
-          <p:cNvPicPr>
-            <a:picLocks noChangeAspect="1"/>
-          </p:cNvPicPr>
-          <p:nvPr/>
-        </p:nvPicPr>
-        <p:blipFill>
-          <a:blip>
-            <a:extLst>
-              <a:ext uri="{96DAC541-7B7A-43D3-8B79-37D633B846F1}">
-                <asvg:svgBlip xmlns:asvg="http://schemas.microsoft.com/office/drawing/2016/SVG/main" r:embed="rId5"/>
-              </a:ext>
-            </a:extLst>
-          </a:blip>
-          <a:srcRect/>
-          <a:stretch/>
-        </p:blipFill>
-        <p:spPr>
-          <a:xfrm>
-            <a:off x="2117644" y="3522041"/>
-            <a:ext cx="685800" cy="685800"/>
-          </a:xfrm>
-          <a:prstGeom prst="rect">
-            <a:avLst/>
-          </a:prstGeom>
-        </p:spPr>
-      </p:pic>
+        <p:txBody>
+          <a:bodyPr rtlCol="0" anchor="ctr"/>
+          <a:lstStyle/>
+          <a:p>
+            <a:pPr algn="ctr"/>
+            <a:r>
+              <a:rPr lang="en-US" dirty="0">
+                <a:solidFill>
+                  <a:schemeClr val="tx1"/>
+                </a:solidFill>
+              </a:rPr>
+              <a:t>Model Deployments</a:t>
+            </a:r>
+            <a:endParaRPr lang="en-US" i="1" dirty="0">
+              <a:solidFill>
+                <a:schemeClr val="tx1"/>
+              </a:solidFill>
+            </a:endParaRPr>
+          </a:p>
+        </p:txBody>
+      </p:sp>
       <p:sp>
         <p:nvSpPr>
-          <p:cNvPr id="34" name="TextBox 33">
-            <a:extLst>
-              <a:ext uri="{FF2B5EF4-FFF2-40B4-BE49-F238E27FC236}">
-                <a16:creationId xmlns:a16="http://schemas.microsoft.com/office/drawing/2014/main" id="{C43E140A-36A7-4878-E24B-DCAA226DE6DF}"/>
-              </a:ext>
-            </a:extLst>
-          </p:cNvPr>
-          <p:cNvSpPr txBox="1"/>
+          <p:cNvPr id="9" name="Rectangle: Rounded Corners 8">
+            <a:extLst>
+              <a:ext uri="{FF2B5EF4-FFF2-40B4-BE49-F238E27FC236}">
+                <a16:creationId xmlns:a16="http://schemas.microsoft.com/office/drawing/2014/main" id="{53CC971B-2964-BC31-ADF8-6E40B1867783}"/>
+              </a:ext>
+            </a:extLst>
+          </p:cNvPr>
+          <p:cNvSpPr/>
           <p:nvPr/>
         </p:nvSpPr>
         <p:spPr>
           <a:xfrm>
-            <a:off x="1913952" y="4206755"/>
-            <a:ext cx="1093184" cy="492443"/>
-          </a:xfrm>
-          <a:prstGeom prst="rect">
+            <a:off x="7701135" y="4669123"/>
+            <a:ext cx="1721162" cy="626556"/>
+          </a:xfrm>
+          <a:prstGeom prst="roundRect">
             <a:avLst/>
           </a:prstGeom>
-          <a:noFill/>
-        </p:spPr>
+          <a:solidFill>
+            <a:srgbClr val="B2D4EB"/>
+          </a:solidFill>
+          <a:ln>
+            <a:solidFill>
+              <a:schemeClr val="tx1"/>
+            </a:solidFill>
+          </a:ln>
+        </p:spPr>
+        <p:style>
+          <a:lnRef idx="2">
+            <a:schemeClr val="accent1">
+              <a:shade val="15000"/>
+            </a:schemeClr>
+          </a:lnRef>
+          <a:fillRef idx="1">
+            <a:schemeClr val="accent1"/>
+          </a:fillRef>
+          <a:effectRef idx="0">
+            <a:schemeClr val="accent1"/>
+          </a:effectRef>
+          <a:fontRef idx="minor">
+            <a:schemeClr val="lt1"/>
+          </a:fontRef>
+        </p:style>
         <p:txBody>
-          <a:bodyPr wrap="none" lIns="0" tIns="0" rIns="0" bIns="0" rtlCol="0">
-            <a:spAutoFit/>
-          </a:bodyPr>
+          <a:bodyPr rtlCol="0" anchor="ctr"/>
           <a:lstStyle/>
           <a:p>
-            <a:pPr algn="ctr" defTabSz="914400"/>
+            <a:pPr algn="ctr"/>
             <a:r>
-              <a:rPr lang="en-US" sz="1600" dirty="0">
-                <a:latin typeface="+mj-lt"/>
+              <a:rPr lang="en-US" dirty="0">
+                <a:solidFill>
+                  <a:schemeClr val="tx1"/>
+                </a:solidFill>
               </a:rPr>
-              <a:t>Data Factory</a:t>
+              <a:t>Agents</a:t>
             </a:r>
-          </a:p>
-          <a:p>
-            <a:pPr algn="ctr" defTabSz="914400"/>
-            <a:r>
-              <a:rPr lang="en-US" sz="1600" dirty="0">
-                <a:latin typeface="+mj-lt"/>
-              </a:rPr>
-              <a:t>(ELT Pipelines)</a:t>
-            </a:r>
+            <a:endParaRPr lang="en-US" i="1" dirty="0">
+              <a:solidFill>
+                <a:schemeClr val="tx1"/>
+              </a:solidFill>
+            </a:endParaRPr>
           </a:p>
         </p:txBody>
       </p:sp>
+      <p:sp>
+        <p:nvSpPr>
+          <p:cNvPr id="14" name="Rectangle: Rounded Corners 13">
+            <a:extLst>
+              <a:ext uri="{FF2B5EF4-FFF2-40B4-BE49-F238E27FC236}">
+                <a16:creationId xmlns:a16="http://schemas.microsoft.com/office/drawing/2014/main" id="{7EAF7B14-9580-BEEA-DB52-19C266F7F4C7}"/>
+              </a:ext>
+            </a:extLst>
+          </p:cNvPr>
+          <p:cNvSpPr/>
+          <p:nvPr/>
+        </p:nvSpPr>
+        <p:spPr>
+          <a:xfrm>
+            <a:off x="7701135" y="5650866"/>
+            <a:ext cx="1721162" cy="626556"/>
+          </a:xfrm>
+          <a:prstGeom prst="roundRect">
+            <a:avLst/>
+          </a:prstGeom>
+          <a:solidFill>
+            <a:srgbClr val="B2D4EB"/>
+          </a:solidFill>
+          <a:ln>
+            <a:solidFill>
+              <a:schemeClr val="tx1"/>
+            </a:solidFill>
+          </a:ln>
+        </p:spPr>
+        <p:style>
+          <a:lnRef idx="2">
+            <a:schemeClr val="accent1">
+              <a:shade val="15000"/>
+            </a:schemeClr>
+          </a:lnRef>
+          <a:fillRef idx="1">
+            <a:schemeClr val="accent1"/>
+          </a:fillRef>
+          <a:effectRef idx="0">
+            <a:schemeClr val="accent1"/>
+          </a:effectRef>
+          <a:fontRef idx="minor">
+            <a:schemeClr val="lt1"/>
+          </a:fontRef>
+        </p:style>
+        <p:txBody>
+          <a:bodyPr rtlCol="0" anchor="ctr"/>
+          <a:lstStyle/>
+          <a:p>
+            <a:pPr algn="ctr"/>
+            <a:r>
+              <a:rPr lang="en-US" dirty="0">
+                <a:solidFill>
+                  <a:schemeClr val="tx1"/>
+                </a:solidFill>
+              </a:rPr>
+              <a:t>Evaluations</a:t>
+            </a:r>
+            <a:endParaRPr lang="en-US" i="1" dirty="0">
+              <a:solidFill>
+                <a:schemeClr val="tx1"/>
+              </a:solidFill>
+            </a:endParaRPr>
+          </a:p>
+        </p:txBody>
+      </p:sp>
+      <p:grpSp>
+        <p:nvGrpSpPr>
+          <p:cNvPr id="28" name="Group 27">
+            <a:extLst>
+              <a:ext uri="{FF2B5EF4-FFF2-40B4-BE49-F238E27FC236}">
+                <a16:creationId xmlns:a16="http://schemas.microsoft.com/office/drawing/2014/main" id="{4ED85371-8B51-CFF3-1FE0-265C42598090}"/>
+              </a:ext>
+            </a:extLst>
+          </p:cNvPr>
+          <p:cNvGrpSpPr/>
+          <p:nvPr/>
+        </p:nvGrpSpPr>
+        <p:grpSpPr>
+          <a:xfrm>
+            <a:off x="3568720" y="2168184"/>
+            <a:ext cx="1619316" cy="1024354"/>
+            <a:chOff x="3456299" y="1815962"/>
+            <a:chExt cx="1619316" cy="1024354"/>
+          </a:xfrm>
+        </p:grpSpPr>
+        <p:pic>
+          <p:nvPicPr>
+            <p:cNvPr id="16" name="Graphic 15">
+              <a:extLst>
+                <a:ext uri="{FF2B5EF4-FFF2-40B4-BE49-F238E27FC236}">
+                  <a16:creationId xmlns:a16="http://schemas.microsoft.com/office/drawing/2014/main" id="{1D15C520-2A59-A612-7125-A2143C011627}"/>
+                </a:ext>
+              </a:extLst>
+            </p:cNvPr>
+            <p:cNvPicPr>
+              <a:picLocks noChangeAspect="1"/>
+            </p:cNvPicPr>
+            <p:nvPr/>
+          </p:nvPicPr>
+          <p:blipFill>
+            <a:blip>
+              <a:extLst>
+                <a:ext uri="{96DAC541-7B7A-43D3-8B79-37D633B846F1}">
+                  <asvg:svgBlip xmlns:asvg="http://schemas.microsoft.com/office/drawing/2016/SVG/main" r:embed="rId3"/>
+                </a:ext>
+              </a:extLst>
+            </a:blip>
+            <a:stretch>
+              <a:fillRect/>
+            </a:stretch>
+          </p:blipFill>
+          <p:spPr>
+            <a:xfrm>
+              <a:off x="3923057" y="1815962"/>
+              <a:ext cx="685800" cy="685800"/>
+            </a:xfrm>
+            <a:prstGeom prst="rect">
+              <a:avLst/>
+            </a:prstGeom>
+          </p:spPr>
+        </p:pic>
+        <p:sp>
+          <p:nvSpPr>
+            <p:cNvPr id="17" name="TextBox 16">
+              <a:extLst>
+                <a:ext uri="{FF2B5EF4-FFF2-40B4-BE49-F238E27FC236}">
+                  <a16:creationId xmlns:a16="http://schemas.microsoft.com/office/drawing/2014/main" id="{1E8B6378-6E50-AFF7-1343-C163470BBC1B}"/>
+                </a:ext>
+              </a:extLst>
+            </p:cNvPr>
+            <p:cNvSpPr txBox="1"/>
+            <p:nvPr/>
+          </p:nvSpPr>
+          <p:spPr>
+            <a:xfrm>
+              <a:off x="3456299" y="2501762"/>
+              <a:ext cx="1619316" cy="338554"/>
+            </a:xfrm>
+            <a:prstGeom prst="rect">
+              <a:avLst/>
+            </a:prstGeom>
+            <a:noFill/>
+          </p:spPr>
+          <p:txBody>
+            <a:bodyPr wrap="square" rtlCol="0" anchor="ctr">
+              <a:spAutoFit/>
+            </a:bodyPr>
+            <a:lstStyle/>
+            <a:p>
+              <a:pPr algn="ctr"/>
+              <a:r>
+                <a:rPr lang="en-US" sz="1600" dirty="0"/>
+                <a:t>Resource Group</a:t>
+              </a:r>
+            </a:p>
+          </p:txBody>
+        </p:sp>
+      </p:grpSp>
       <p:cxnSp>
         <p:nvCxnSpPr>
-          <p:cNvPr id="35" name="Straight Arrow Connector 34">
-            <a:extLst>
-              <a:ext uri="{FF2B5EF4-FFF2-40B4-BE49-F238E27FC236}">
-                <a16:creationId xmlns:a16="http://schemas.microsoft.com/office/drawing/2014/main" id="{20B14887-F904-9314-8BE7-8163DAC58D11}"/>
+          <p:cNvPr id="22" name="Connector: Elbow 21">
+            <a:extLst>
+              <a:ext uri="{FF2B5EF4-FFF2-40B4-BE49-F238E27FC236}">
+                <a16:creationId xmlns:a16="http://schemas.microsoft.com/office/drawing/2014/main" id="{47CE8FD5-6872-1BC2-110D-1C7344092C1D}"/>
               </a:ext>
             </a:extLst>
           </p:cNvPr>
           <p:cNvCxnSpPr>
             <a:cxnSpLocks/>
-            <a:stCxn id="33" idx="3"/>
-            <a:endCxn id="26" idx="1"/>
+            <a:stCxn id="6" idx="2"/>
+            <a:endCxn id="9" idx="1"/>
           </p:cNvCxnSpPr>
           <p:nvPr/>
         </p:nvCxnSpPr>
         <p:spPr>
-          <a:xfrm>
-            <a:off x="2803444" y="3864941"/>
-            <a:ext cx="1662113" cy="0"/>
-          </a:xfrm>
-          <a:prstGeom prst="straightConnector1">
+          <a:xfrm rot="16200000" flipH="1">
+            <a:off x="6841724" y="4122990"/>
+            <a:ext cx="641272" cy="1077550"/>
+          </a:xfrm>
+          <a:prstGeom prst="bentConnector2">
             <a:avLst/>
           </a:prstGeom>
           <a:ln>
@@ -21382,26 +21692,26 @@
       </p:cxnSp>
       <p:cxnSp>
         <p:nvCxnSpPr>
-          <p:cNvPr id="36" name="Straight Arrow Connector 35">
-            <a:extLst>
-              <a:ext uri="{FF2B5EF4-FFF2-40B4-BE49-F238E27FC236}">
-                <a16:creationId xmlns:a16="http://schemas.microsoft.com/office/drawing/2014/main" id="{C477D93D-D115-B266-EB48-15C4DDE59387}"/>
+          <p:cNvPr id="25" name="Connector: Elbow 24">
+            <a:extLst>
+              <a:ext uri="{FF2B5EF4-FFF2-40B4-BE49-F238E27FC236}">
+                <a16:creationId xmlns:a16="http://schemas.microsoft.com/office/drawing/2014/main" id="{B2443EE5-4BDC-6790-A62C-D0CD27DC3092}"/>
               </a:ext>
             </a:extLst>
           </p:cNvPr>
           <p:cNvCxnSpPr>
             <a:cxnSpLocks/>
-            <a:stCxn id="26" idx="3"/>
-            <a:endCxn id="24" idx="1"/>
+            <a:stCxn id="6" idx="2"/>
+            <a:endCxn id="14" idx="1"/>
           </p:cNvCxnSpPr>
           <p:nvPr/>
         </p:nvCxnSpPr>
         <p:spPr>
-          <a:xfrm>
-            <a:off x="5151357" y="3864941"/>
-            <a:ext cx="1662113" cy="0"/>
-          </a:xfrm>
-          <a:prstGeom prst="straightConnector1">
+          <a:xfrm rot="16200000" flipH="1">
+            <a:off x="6350853" y="4613861"/>
+            <a:ext cx="1623015" cy="1077550"/>
+          </a:xfrm>
+          <a:prstGeom prst="bentConnector2">
             <a:avLst/>
           </a:prstGeom>
           <a:ln>
@@ -21428,28 +21738,121 @@
           </a:fontRef>
         </p:style>
       </p:cxnSp>
+      <p:grpSp>
+        <p:nvGrpSpPr>
+          <p:cNvPr id="30" name="Group 29">
+            <a:extLst>
+              <a:ext uri="{FF2B5EF4-FFF2-40B4-BE49-F238E27FC236}">
+                <a16:creationId xmlns:a16="http://schemas.microsoft.com/office/drawing/2014/main" id="{DAE83465-FA3A-3E3A-2550-D52B687C70B3}"/>
+              </a:ext>
+            </a:extLst>
+          </p:cNvPr>
+          <p:cNvGrpSpPr/>
+          <p:nvPr/>
+        </p:nvGrpSpPr>
+        <p:grpSpPr>
+          <a:xfrm>
+            <a:off x="1955050" y="2113286"/>
+            <a:ext cx="1619316" cy="1049630"/>
+            <a:chOff x="1187691" y="2307839"/>
+            <a:chExt cx="1619316" cy="1049630"/>
+          </a:xfrm>
+        </p:grpSpPr>
+        <p:pic>
+          <p:nvPicPr>
+            <p:cNvPr id="21" name="Graphic 20">
+              <a:extLst>
+                <a:ext uri="{FF2B5EF4-FFF2-40B4-BE49-F238E27FC236}">
+                  <a16:creationId xmlns:a16="http://schemas.microsoft.com/office/drawing/2014/main" id="{C6693CC7-0634-1865-F061-9CCBC05D57F3}"/>
+                </a:ext>
+              </a:extLst>
+            </p:cNvPr>
+            <p:cNvPicPr>
+              <a:picLocks noChangeAspect="1"/>
+            </p:cNvPicPr>
+            <p:nvPr/>
+          </p:nvPicPr>
+          <p:blipFill>
+            <a:blip>
+              <a:extLst>
+                <a:ext uri="{96DAC541-7B7A-43D3-8B79-37D633B846F1}">
+                  <asvg:svgBlip xmlns:asvg="http://schemas.microsoft.com/office/drawing/2016/SVG/main" r:embed="rId4"/>
+                </a:ext>
+              </a:extLst>
+            </a:blip>
+            <a:stretch>
+              <a:fillRect/>
+            </a:stretch>
+          </p:blipFill>
+          <p:spPr>
+            <a:xfrm>
+              <a:off x="1660095" y="2307839"/>
+              <a:ext cx="685800" cy="685800"/>
+            </a:xfrm>
+            <a:prstGeom prst="rect">
+              <a:avLst/>
+            </a:prstGeom>
+          </p:spPr>
+        </p:pic>
+        <p:sp>
+          <p:nvSpPr>
+            <p:cNvPr id="29" name="TextBox 28">
+              <a:extLst>
+                <a:ext uri="{FF2B5EF4-FFF2-40B4-BE49-F238E27FC236}">
+                  <a16:creationId xmlns:a16="http://schemas.microsoft.com/office/drawing/2014/main" id="{FC8BEB24-990C-9757-0671-D3DFE71C8EBE}"/>
+                </a:ext>
+              </a:extLst>
+            </p:cNvPr>
+            <p:cNvSpPr txBox="1"/>
+            <p:nvPr/>
+          </p:nvSpPr>
+          <p:spPr>
+            <a:xfrm>
+              <a:off x="1187691" y="3018915"/>
+              <a:ext cx="1619316" cy="338554"/>
+            </a:xfrm>
+            <a:prstGeom prst="rect">
+              <a:avLst/>
+            </a:prstGeom>
+            <a:noFill/>
+          </p:spPr>
+          <p:txBody>
+            <a:bodyPr wrap="square" rtlCol="0" anchor="ctr">
+              <a:spAutoFit/>
+            </a:bodyPr>
+            <a:lstStyle/>
+            <a:p>
+              <a:pPr algn="ctr"/>
+              <a:r>
+                <a:rPr lang="en-US" sz="1600" dirty="0"/>
+                <a:t>Subscription</a:t>
+              </a:r>
+            </a:p>
+          </p:txBody>
+        </p:sp>
+      </p:grpSp>
       <p:cxnSp>
         <p:nvCxnSpPr>
-          <p:cNvPr id="37" name="Straight Arrow Connector 36">
-            <a:extLst>
-              <a:ext uri="{FF2B5EF4-FFF2-40B4-BE49-F238E27FC236}">
-                <a16:creationId xmlns:a16="http://schemas.microsoft.com/office/drawing/2014/main" id="{0217BDEA-C10B-A321-428F-0C1826880F36}"/>
+          <p:cNvPr id="31" name="Connector: Elbow 30">
+            <a:extLst>
+              <a:ext uri="{FF2B5EF4-FFF2-40B4-BE49-F238E27FC236}">
+                <a16:creationId xmlns:a16="http://schemas.microsoft.com/office/drawing/2014/main" id="{CC386FB1-1774-DC5D-3765-16DF8A302B9D}"/>
               </a:ext>
             </a:extLst>
           </p:cNvPr>
           <p:cNvCxnSpPr>
             <a:cxnSpLocks/>
-            <a:stCxn id="24" idx="3"/>
-            <a:endCxn id="48" idx="1"/>
+            <a:stCxn id="17" idx="2"/>
+            <a:endCxn id="5" idx="1"/>
           </p:cNvCxnSpPr>
           <p:nvPr/>
         </p:nvCxnSpPr>
         <p:spPr>
-          <a:xfrm>
-            <a:off x="7499270" y="3864941"/>
-            <a:ext cx="1499337" cy="0"/>
-          </a:xfrm>
-          <a:prstGeom prst="straightConnector1">
+          <a:xfrm rot="16200000" flipH="1">
+            <a:off x="5081151" y="2489764"/>
+            <a:ext cx="496760" cy="1902307"/>
+          </a:xfrm>
+          <a:prstGeom prst="bentConnector2">
             <a:avLst/>
           </a:prstGeom>
           <a:ln>
@@ -21457,7 +21860,7 @@
               <a:schemeClr val="tx1"/>
             </a:solidFill>
             <a:prstDash val="solid"/>
-            <a:headEnd type="triangle" w="lg" len="lg"/>
+            <a:headEnd type="none" w="lg" len="lg"/>
             <a:tailEnd type="triangle" w="lg" len="lg"/>
           </a:ln>
         </p:spPr>
@@ -21478,22 +21881,23 @@
       </p:cxnSp>
       <p:cxnSp>
         <p:nvCxnSpPr>
-          <p:cNvPr id="38" name="Straight Arrow Connector 37">
-            <a:extLst>
-              <a:ext uri="{FF2B5EF4-FFF2-40B4-BE49-F238E27FC236}">
-                <a16:creationId xmlns:a16="http://schemas.microsoft.com/office/drawing/2014/main" id="{E158D239-5F5F-C9C7-726D-66FD0BA23F18}"/>
+          <p:cNvPr id="35" name="Straight Arrow Connector 34">
+            <a:extLst>
+              <a:ext uri="{FF2B5EF4-FFF2-40B4-BE49-F238E27FC236}">
+                <a16:creationId xmlns:a16="http://schemas.microsoft.com/office/drawing/2014/main" id="{0167C6D2-2F35-16D5-66CE-74B05D8B9E37}"/>
               </a:ext>
             </a:extLst>
           </p:cNvPr>
           <p:cNvCxnSpPr>
             <a:cxnSpLocks/>
+            <a:endCxn id="16" idx="1"/>
           </p:cNvCxnSpPr>
           <p:nvPr/>
         </p:nvCxnSpPr>
         <p:spPr>
-          <a:xfrm flipV="1">
-            <a:off x="9347120" y="2966230"/>
-            <a:ext cx="2" cy="555811"/>
+          <a:xfrm>
+            <a:off x="3092509" y="2511084"/>
+            <a:ext cx="942969" cy="0"/>
           </a:xfrm>
           <a:prstGeom prst="straightConnector1">
             <a:avLst/>
@@ -21503,7 +21907,7 @@
               <a:schemeClr val="tx1"/>
             </a:solidFill>
             <a:prstDash val="solid"/>
-            <a:headEnd type="triangle" w="lg" len="lg"/>
+            <a:headEnd type="none" w="lg" len="lg"/>
             <a:tailEnd type="triangle" w="lg" len="lg"/>
           </a:ln>
         </p:spPr>
@@ -21516,6 +21920,92 @@
           </a:fillRef>
           <a:effectRef idx="1">
             <a:schemeClr val="accent1"/>
+          </a:effectRef>
+          <a:fontRef idx="minor">
+            <a:schemeClr val="tx1"/>
+          </a:fontRef>
+        </p:style>
+      </p:cxnSp>
+      <p:cxnSp>
+        <p:nvCxnSpPr>
+          <p:cNvPr id="39" name="Straight Arrow Connector 38">
+            <a:extLst>
+              <a:ext uri="{FF2B5EF4-FFF2-40B4-BE49-F238E27FC236}">
+                <a16:creationId xmlns:a16="http://schemas.microsoft.com/office/drawing/2014/main" id="{150A9C6B-FC58-53EA-0D44-BC452807C6B9}"/>
+              </a:ext>
+            </a:extLst>
+          </p:cNvPr>
+          <p:cNvCxnSpPr>
+            <a:cxnSpLocks/>
+            <a:stCxn id="16" idx="3"/>
+            <a:endCxn id="2" idx="1"/>
+          </p:cNvCxnSpPr>
+          <p:nvPr/>
+        </p:nvCxnSpPr>
+        <p:spPr>
+          <a:xfrm>
+            <a:off x="4721278" y="2511084"/>
+            <a:ext cx="1540755" cy="1"/>
+          </a:xfrm>
+          <a:prstGeom prst="straightConnector1">
+            <a:avLst/>
+          </a:prstGeom>
+          <a:ln>
+            <a:solidFill>
+              <a:schemeClr val="tx1"/>
+            </a:solidFill>
+            <a:prstDash val="solid"/>
+            <a:headEnd type="none" w="lg" len="lg"/>
+            <a:tailEnd type="triangle" w="lg" len="lg"/>
+          </a:ln>
+        </p:spPr>
+        <p:style>
+          <a:lnRef idx="2">
+            <a:schemeClr val="accent1"/>
+          </a:lnRef>
+          <a:fillRef idx="0">
+            <a:schemeClr val="accent1"/>
+          </a:fillRef>
+          <a:effectRef idx="1">
+            <a:schemeClr val="accent1"/>
+          </a:effectRef>
+          <a:fontRef idx="minor">
+            <a:schemeClr val="tx1"/>
+          </a:fontRef>
+        </p:style>
+      </p:cxnSp>
+      <p:cxnSp>
+        <p:nvCxnSpPr>
+          <p:cNvPr id="44" name="Straight Connector 43">
+            <a:extLst>
+              <a:ext uri="{FF2B5EF4-FFF2-40B4-BE49-F238E27FC236}">
+                <a16:creationId xmlns:a16="http://schemas.microsoft.com/office/drawing/2014/main" id="{1259E1EA-D65C-1BDA-9D85-CD408A984AD3}"/>
+              </a:ext>
+            </a:extLst>
+          </p:cNvPr>
+          <p:cNvCxnSpPr>
+            <a:cxnSpLocks/>
+          </p:cNvCxnSpPr>
+          <p:nvPr/>
+        </p:nvCxnSpPr>
+        <p:spPr>
+          <a:xfrm>
+            <a:off x="679531" y="4596236"/>
+            <a:ext cx="9319234" cy="0"/>
+          </a:xfrm>
+          <a:prstGeom prst="line">
+            <a:avLst/>
+          </a:prstGeom>
+        </p:spPr>
+        <p:style>
+          <a:lnRef idx="2">
+            <a:schemeClr val="dk1"/>
+          </a:lnRef>
+          <a:fillRef idx="0">
+            <a:schemeClr val="dk1"/>
+          </a:fillRef>
+          <a:effectRef idx="1">
+            <a:schemeClr val="dk1"/>
           </a:effectRef>
           <a:fontRef idx="minor">
             <a:schemeClr val="tx1"/>
@@ -21524,10 +22014,10 @@
       </p:cxnSp>
       <p:sp>
         <p:nvSpPr>
-          <p:cNvPr id="39" name="TextBox 38">
-            <a:extLst>
-              <a:ext uri="{FF2B5EF4-FFF2-40B4-BE49-F238E27FC236}">
-                <a16:creationId xmlns:a16="http://schemas.microsoft.com/office/drawing/2014/main" id="{7700DCB8-4817-4DCD-4A1A-A83089C25977}"/>
+          <p:cNvPr id="46" name="TextBox 45">
+            <a:extLst>
+              <a:ext uri="{FF2B5EF4-FFF2-40B4-BE49-F238E27FC236}">
+                <a16:creationId xmlns:a16="http://schemas.microsoft.com/office/drawing/2014/main" id="{9CF41F89-FBE4-31C3-21F8-2349601FB996}"/>
               </a:ext>
             </a:extLst>
           </p:cNvPr>
@@ -21536,8 +22026,8 @@
         </p:nvSpPr>
         <p:spPr>
           <a:xfrm>
-            <a:off x="1884489" y="2473787"/>
-            <a:ext cx="1152110" cy="246221"/>
+            <a:off x="670455" y="4210072"/>
+            <a:ext cx="847138" cy="338554"/>
           </a:xfrm>
           <a:prstGeom prst="rect">
             <a:avLst/>
@@ -21545,52 +22035,279 @@
           <a:noFill/>
         </p:spPr>
         <p:txBody>
-          <a:bodyPr wrap="none" lIns="0" tIns="0" rIns="0" bIns="0" rtlCol="0">
+          <a:bodyPr wrap="square" rtlCol="0" anchor="ctr">
             <a:spAutoFit/>
           </a:bodyPr>
           <a:lstStyle/>
           <a:p>
-            <a:pPr algn="ctr" defTabSz="914400"/>
+            <a:pPr algn="ctr"/>
             <a:r>
-              <a:rPr lang="en-US" sz="1600" dirty="0">
-                <a:latin typeface="+mj-lt"/>
-              </a:rPr>
-              <a:t>Enterprise Data</a:t>
+              <a:rPr lang="en-US" sz="1600" dirty="0"/>
+              <a:t>Control</a:t>
             </a:r>
           </a:p>
         </p:txBody>
       </p:sp>
-      <p:cxnSp>
-        <p:nvCxnSpPr>
-          <p:cNvPr id="40" name="Straight Arrow Connector 39">
-            <a:extLst>
-              <a:ext uri="{FF2B5EF4-FFF2-40B4-BE49-F238E27FC236}">
-                <a16:creationId xmlns:a16="http://schemas.microsoft.com/office/drawing/2014/main" id="{B381B268-3003-9E19-6433-B1769E5D8438}"/>
-              </a:ext>
-            </a:extLst>
-          </p:cNvPr>
-          <p:cNvCxnSpPr>
-            <a:cxnSpLocks/>
-            <a:stCxn id="39" idx="2"/>
-            <a:endCxn id="33" idx="0"/>
-          </p:cNvCxnSpPr>
-          <p:nvPr/>
-        </p:nvCxnSpPr>
-        <p:spPr>
-          <a:xfrm>
-            <a:off x="2460544" y="2720008"/>
-            <a:ext cx="0" cy="802033"/>
-          </a:xfrm>
-          <a:prstGeom prst="straightConnector1">
+      <p:sp>
+        <p:nvSpPr>
+          <p:cNvPr id="49" name="TextBox 48">
+            <a:extLst>
+              <a:ext uri="{FF2B5EF4-FFF2-40B4-BE49-F238E27FC236}">
+                <a16:creationId xmlns:a16="http://schemas.microsoft.com/office/drawing/2014/main" id="{3EA63B99-8FF9-0529-4512-654151B9E77D}"/>
+              </a:ext>
+            </a:extLst>
+          </p:cNvPr>
+          <p:cNvSpPr txBox="1"/>
+          <p:nvPr/>
+        </p:nvSpPr>
+        <p:spPr>
+          <a:xfrm>
+            <a:off x="661137" y="4615720"/>
+            <a:ext cx="865775" cy="338554"/>
+          </a:xfrm>
+          <a:prstGeom prst="rect">
+            <a:avLst/>
+          </a:prstGeom>
+          <a:noFill/>
+        </p:spPr>
+        <p:txBody>
+          <a:bodyPr wrap="square" rtlCol="0" anchor="ctr">
+            <a:spAutoFit/>
+          </a:bodyPr>
+          <a:lstStyle/>
+          <a:p>
+            <a:pPr algn="ctr"/>
+            <a:r>
+              <a:rPr lang="en-US" sz="1600" dirty="0"/>
+              <a:t>Data</a:t>
+            </a:r>
+          </a:p>
+        </p:txBody>
+      </p:sp>
+      <p:grpSp>
+        <p:nvGrpSpPr>
+          <p:cNvPr id="54" name="Group 53">
+            <a:extLst>
+              <a:ext uri="{FF2B5EF4-FFF2-40B4-BE49-F238E27FC236}">
+                <a16:creationId xmlns:a16="http://schemas.microsoft.com/office/drawing/2014/main" id="{5C7ADF6B-003E-D6A7-9899-01FA53FDA457}"/>
+              </a:ext>
+            </a:extLst>
+          </p:cNvPr>
+          <p:cNvGrpSpPr/>
+          <p:nvPr/>
+        </p:nvGrpSpPr>
+        <p:grpSpPr>
+          <a:xfrm>
+            <a:off x="679531" y="2492529"/>
+            <a:ext cx="828988" cy="1157322"/>
+            <a:chOff x="331881" y="2824362"/>
+            <a:chExt cx="828988" cy="1157322"/>
+          </a:xfrm>
+        </p:grpSpPr>
+        <p:pic>
+          <p:nvPicPr>
+            <p:cNvPr id="52" name="Graphic 51" descr="User with solid fill">
+              <a:extLst>
+                <a:ext uri="{FF2B5EF4-FFF2-40B4-BE49-F238E27FC236}">
+                  <a16:creationId xmlns:a16="http://schemas.microsoft.com/office/drawing/2014/main" id="{B3D81693-BB64-A497-270E-9A2851ADE7AE}"/>
+                </a:ext>
+              </a:extLst>
+            </p:cNvPr>
+            <p:cNvPicPr>
+              <a:picLocks noChangeAspect="1"/>
+            </p:cNvPicPr>
+            <p:nvPr/>
+          </p:nvPicPr>
+          <p:blipFill>
+            <a:blip>
+              <a:extLst>
+                <a:ext uri="{96DAC541-7B7A-43D3-8B79-37D633B846F1}">
+                  <asvg:svgBlip xmlns:asvg="http://schemas.microsoft.com/office/drawing/2016/SVG/main" r:embed="rId5"/>
+                </a:ext>
+              </a:extLst>
+            </a:blip>
+            <a:stretch>
+              <a:fillRect/>
+            </a:stretch>
+          </p:blipFill>
+          <p:spPr>
+            <a:xfrm>
+              <a:off x="403475" y="2824362"/>
+              <a:ext cx="685800" cy="685800"/>
+            </a:xfrm>
+            <a:prstGeom prst="rect">
+              <a:avLst/>
+            </a:prstGeom>
+          </p:spPr>
+        </p:pic>
+        <p:sp>
+          <p:nvSpPr>
+            <p:cNvPr id="53" name="TextBox 52">
+              <a:extLst>
+                <a:ext uri="{FF2B5EF4-FFF2-40B4-BE49-F238E27FC236}">
+                  <a16:creationId xmlns:a16="http://schemas.microsoft.com/office/drawing/2014/main" id="{11939B83-E494-1DB5-C3F0-D5B7180AA5A1}"/>
+                </a:ext>
+              </a:extLst>
+            </p:cNvPr>
+            <p:cNvSpPr txBox="1"/>
+            <p:nvPr/>
+          </p:nvSpPr>
+          <p:spPr>
+            <a:xfrm>
+              <a:off x="331881" y="3396909"/>
+              <a:ext cx="828988" cy="584775"/>
+            </a:xfrm>
+            <a:prstGeom prst="rect">
+              <a:avLst/>
+            </a:prstGeom>
+            <a:noFill/>
+          </p:spPr>
+          <p:txBody>
+            <a:bodyPr wrap="square" rtlCol="0" anchor="ctr">
+              <a:spAutoFit/>
+            </a:bodyPr>
+            <a:lstStyle/>
+            <a:p>
+              <a:pPr algn="ctr"/>
+              <a:r>
+                <a:rPr lang="en-US" sz="1600" dirty="0"/>
+                <a:t>User 1</a:t>
+              </a:r>
+            </a:p>
+            <a:p>
+              <a:pPr algn="ctr"/>
+              <a:r>
+                <a:rPr lang="en-US" sz="1600" dirty="0"/>
+                <a:t>(Owner)</a:t>
+              </a:r>
+            </a:p>
+          </p:txBody>
+        </p:sp>
+      </p:grpSp>
+      <p:grpSp>
+        <p:nvGrpSpPr>
+          <p:cNvPr id="55" name="Group 54">
+            <a:extLst>
+              <a:ext uri="{FF2B5EF4-FFF2-40B4-BE49-F238E27FC236}">
+                <a16:creationId xmlns:a16="http://schemas.microsoft.com/office/drawing/2014/main" id="{C55BAA03-F96C-39F3-908F-71B7887ADDE8}"/>
+              </a:ext>
+            </a:extLst>
+          </p:cNvPr>
+          <p:cNvGrpSpPr/>
+          <p:nvPr/>
+        </p:nvGrpSpPr>
+        <p:grpSpPr>
+          <a:xfrm>
+            <a:off x="10184996" y="2492529"/>
+            <a:ext cx="1585164" cy="1157322"/>
+            <a:chOff x="-46207" y="2824362"/>
+            <a:chExt cx="1585164" cy="1157322"/>
+          </a:xfrm>
+        </p:grpSpPr>
+        <p:pic>
+          <p:nvPicPr>
+            <p:cNvPr id="56" name="Graphic 55" descr="User with solid fill">
+              <a:extLst>
+                <a:ext uri="{FF2B5EF4-FFF2-40B4-BE49-F238E27FC236}">
+                  <a16:creationId xmlns:a16="http://schemas.microsoft.com/office/drawing/2014/main" id="{5F5E7F59-1B23-5351-7FD4-E481C8237EC0}"/>
+                </a:ext>
+              </a:extLst>
+            </p:cNvPr>
+            <p:cNvPicPr>
+              <a:picLocks noChangeAspect="1"/>
+            </p:cNvPicPr>
+            <p:nvPr/>
+          </p:nvPicPr>
+          <p:blipFill>
+            <a:blip>
+              <a:extLst>
+                <a:ext uri="{96DAC541-7B7A-43D3-8B79-37D633B846F1}">
+                  <asvg:svgBlip xmlns:asvg="http://schemas.microsoft.com/office/drawing/2016/SVG/main" r:embed="rId5"/>
+                </a:ext>
+              </a:extLst>
+            </a:blip>
+            <a:stretch>
+              <a:fillRect/>
+            </a:stretch>
+          </p:blipFill>
+          <p:spPr>
+            <a:xfrm>
+              <a:off x="403475" y="2824362"/>
+              <a:ext cx="685800" cy="685800"/>
+            </a:xfrm>
+            <a:prstGeom prst="rect">
+              <a:avLst/>
+            </a:prstGeom>
+          </p:spPr>
+        </p:pic>
+        <p:sp>
+          <p:nvSpPr>
+            <p:cNvPr id="57" name="TextBox 56">
+              <a:extLst>
+                <a:ext uri="{FF2B5EF4-FFF2-40B4-BE49-F238E27FC236}">
+                  <a16:creationId xmlns:a16="http://schemas.microsoft.com/office/drawing/2014/main" id="{C2452159-F863-B515-5DCC-F19F9EBD4C36}"/>
+                </a:ext>
+              </a:extLst>
+            </p:cNvPr>
+            <p:cNvSpPr txBox="1"/>
+            <p:nvPr/>
+          </p:nvSpPr>
+          <p:spPr>
+            <a:xfrm>
+              <a:off x="-46207" y="3396909"/>
+              <a:ext cx="1585164" cy="584775"/>
+            </a:xfrm>
+            <a:prstGeom prst="rect">
+              <a:avLst/>
+            </a:prstGeom>
+            <a:noFill/>
+          </p:spPr>
+          <p:txBody>
+            <a:bodyPr wrap="square" rtlCol="0" anchor="ctr">
+              <a:spAutoFit/>
+            </a:bodyPr>
+            <a:lstStyle/>
+            <a:p>
+              <a:pPr algn="ctr"/>
+              <a:r>
+                <a:rPr lang="en-US" sz="1600" dirty="0"/>
+                <a:t>User 2</a:t>
+              </a:r>
+            </a:p>
+            <a:p>
+              <a:pPr algn="ctr"/>
+              <a:r>
+                <a:rPr lang="en-US" sz="1600" dirty="0"/>
+                <a:t>(Azure AI Owner)</a:t>
+              </a:r>
+            </a:p>
+          </p:txBody>
+        </p:sp>
+      </p:grpSp>
+      <p:sp>
+        <p:nvSpPr>
+          <p:cNvPr id="58" name="Left Brace 57">
+            <a:extLst>
+              <a:ext uri="{FF2B5EF4-FFF2-40B4-BE49-F238E27FC236}">
+                <a16:creationId xmlns:a16="http://schemas.microsoft.com/office/drawing/2014/main" id="{D8D78FC8-8AB6-8CAC-38AD-3B0EC572131E}"/>
+              </a:ext>
+            </a:extLst>
+          </p:cNvPr>
+          <p:cNvSpPr/>
+          <p:nvPr/>
+        </p:nvSpPr>
+        <p:spPr>
+          <a:xfrm>
+            <a:off x="1407362" y="1616764"/>
+            <a:ext cx="417906" cy="2908853"/>
+          </a:xfrm>
+          <a:prstGeom prst="leftBrace">
             <a:avLst/>
           </a:prstGeom>
           <a:ln>
             <a:solidFill>
               <a:schemeClr val="tx1"/>
             </a:solidFill>
-            <a:prstDash val="solid"/>
-            <a:headEnd type="none" w="lg" len="lg"/>
-            <a:tailEnd type="triangle" w="lg" len="lg"/>
           </a:ln>
         </p:spPr>
         <p:style>
@@ -21607,229 +22324,71 @@
             <a:schemeClr val="tx1"/>
           </a:fontRef>
         </p:style>
-      </p:cxnSp>
-      <p:pic>
-        <p:nvPicPr>
-          <p:cNvPr id="41" name="Picture 40" descr="A blue paper with white text&#10;&#10;AI-generated content may be incorrect.">
-            <a:extLst>
-              <a:ext uri="{FF2B5EF4-FFF2-40B4-BE49-F238E27FC236}">
-                <a16:creationId xmlns:a16="http://schemas.microsoft.com/office/drawing/2014/main" id="{78714A7F-3440-9910-18BB-B2A338E04862}"/>
-              </a:ext>
-            </a:extLst>
-          </p:cNvPr>
-          <p:cNvPicPr>
-            <a:picLocks noChangeAspect="1"/>
-          </p:cNvPicPr>
-          <p:nvPr/>
-        </p:nvPicPr>
-        <p:blipFill>
-          <a:blip r:embed="rId6">
-            <a:duotone>
-              <a:srgbClr val="C03BC4">
-                <a:shade val="45000"/>
-                <a:satMod val="135000"/>
-              </a:srgbClr>
-              <a:prstClr val="white"/>
-            </a:duotone>
-            <a:extLst>
-              <a:ext uri="{28A0092B-C50C-407E-A947-70E740481C1C}">
-                <a14:useLocalDpi xmlns:a14="http://schemas.microsoft.com/office/drawing/2010/main" val="0"/>
-              </a:ext>
-            </a:extLst>
-          </a:blip>
-          <a:stretch>
-            <a:fillRect/>
-          </a:stretch>
-        </p:blipFill>
-        <p:spPr>
-          <a:xfrm>
-            <a:off x="2117644" y="1708181"/>
-            <a:ext cx="685800" cy="685800"/>
-          </a:xfrm>
-          <a:prstGeom prst="rect">
-            <a:avLst/>
-          </a:prstGeom>
-        </p:spPr>
-      </p:pic>
-      <p:pic>
-        <p:nvPicPr>
-          <p:cNvPr id="46" name="Graphic 45">
-            <a:extLst>
-              <a:ext uri="{FF2B5EF4-FFF2-40B4-BE49-F238E27FC236}">
-                <a16:creationId xmlns:a16="http://schemas.microsoft.com/office/drawing/2014/main" id="{AB28493D-0059-A8C8-7A3A-F22A5AB63EED}"/>
-              </a:ext>
-            </a:extLst>
-          </p:cNvPr>
-          <p:cNvPicPr>
-            <a:picLocks noChangeAspect="1"/>
-          </p:cNvPicPr>
-          <p:nvPr/>
-        </p:nvPicPr>
-        <p:blipFill>
-          <a:blip>
-            <a:extLst>
-              <a:ext uri="{96DAC541-7B7A-43D3-8B79-37D633B846F1}">
-                <asvg:svgBlip xmlns:asvg="http://schemas.microsoft.com/office/drawing/2016/SVG/main" r:embed="rId7"/>
-              </a:ext>
-            </a:extLst>
-          </a:blip>
-          <a:stretch>
-            <a:fillRect/>
-          </a:stretch>
-        </p:blipFill>
-        <p:spPr>
-          <a:xfrm>
-            <a:off x="9004220" y="1787987"/>
-            <a:ext cx="685800" cy="685800"/>
-          </a:xfrm>
-          <a:prstGeom prst="rect">
-            <a:avLst/>
-          </a:prstGeom>
-        </p:spPr>
-      </p:pic>
+        <p:txBody>
+          <a:bodyPr rtlCol="0" anchor="ctr"/>
+          <a:lstStyle/>
+          <a:p>
+            <a:pPr algn="ctr"/>
+            <a:endParaRPr lang="en-US"/>
+          </a:p>
+        </p:txBody>
+      </p:sp>
       <p:sp>
         <p:nvSpPr>
-          <p:cNvPr id="47" name="TextBox 46">
-            <a:extLst>
-              <a:ext uri="{FF2B5EF4-FFF2-40B4-BE49-F238E27FC236}">
-                <a16:creationId xmlns:a16="http://schemas.microsoft.com/office/drawing/2014/main" id="{A13B9753-C103-20D5-C8E5-2E3B09911743}"/>
-              </a:ext>
-            </a:extLst>
-          </p:cNvPr>
-          <p:cNvSpPr txBox="1"/>
+          <p:cNvPr id="62" name="Left Brace 61">
+            <a:extLst>
+              <a:ext uri="{FF2B5EF4-FFF2-40B4-BE49-F238E27FC236}">
+                <a16:creationId xmlns:a16="http://schemas.microsoft.com/office/drawing/2014/main" id="{B88A8D39-724D-212D-169A-1301E4883DC0}"/>
+              </a:ext>
+            </a:extLst>
+          </p:cNvPr>
+          <p:cNvSpPr/>
           <p:nvPr/>
         </p:nvSpPr>
         <p:spPr>
-          <a:xfrm>
-            <a:off x="8739902" y="2472701"/>
-            <a:ext cx="1214435" cy="492443"/>
-          </a:xfrm>
-          <a:prstGeom prst="rect">
-            <a:avLst/>
-          </a:prstGeom>
-          <a:noFill/>
-        </p:spPr>
+          <a:xfrm rot="10800000">
+            <a:off x="9980051" y="1981200"/>
+            <a:ext cx="417906" cy="4658138"/>
+          </a:xfrm>
+          <a:prstGeom prst="leftBrace">
+            <a:avLst>
+              <a:gd name="adj1" fmla="val 8333"/>
+              <a:gd name="adj2" fmla="val 77058"/>
+            </a:avLst>
+          </a:prstGeom>
+          <a:ln>
+            <a:solidFill>
+              <a:schemeClr val="tx1"/>
+            </a:solidFill>
+          </a:ln>
+        </p:spPr>
+        <p:style>
+          <a:lnRef idx="2">
+            <a:schemeClr val="accent1"/>
+          </a:lnRef>
+          <a:fillRef idx="0">
+            <a:schemeClr val="accent1"/>
+          </a:fillRef>
+          <a:effectRef idx="1">
+            <a:schemeClr val="accent1"/>
+          </a:effectRef>
+          <a:fontRef idx="minor">
+            <a:schemeClr val="tx1"/>
+          </a:fontRef>
+        </p:style>
         <p:txBody>
-          <a:bodyPr wrap="none" lIns="0" tIns="0" rIns="0" bIns="0" rtlCol="0">
-            <a:spAutoFit/>
-          </a:bodyPr>
+          <a:bodyPr rtlCol="0" anchor="ctr"/>
           <a:lstStyle/>
           <a:p>
-            <a:pPr algn="ctr" defTabSz="914400"/>
-            <a:r>
-              <a:rPr lang="en-US" sz="1600" dirty="0">
-                <a:latin typeface="+mj-lt"/>
-              </a:rPr>
-              <a:t>App Service</a:t>
-            </a:r>
-          </a:p>
-          <a:p>
-            <a:pPr algn="ctr" defTabSz="914400"/>
-            <a:r>
-              <a:rPr lang="en-US" sz="1600" dirty="0">
-                <a:latin typeface="+mj-lt"/>
-              </a:rPr>
-              <a:t>(Web Front End)</a:t>
-            </a:r>
-          </a:p>
-        </p:txBody>
-      </p:sp>
-      <p:pic>
-        <p:nvPicPr>
-          <p:cNvPr id="48" name="Picture 4">
-            <a:extLst>
-              <a:ext uri="{FF2B5EF4-FFF2-40B4-BE49-F238E27FC236}">
-                <a16:creationId xmlns:a16="http://schemas.microsoft.com/office/drawing/2014/main" id="{846CAA7C-59A7-6ED0-F3C6-FAC25B8BD9CF}"/>
-              </a:ext>
-            </a:extLst>
-          </p:cNvPr>
-          <p:cNvPicPr>
-            <a:picLocks noChangeAspect="1" noChangeArrowheads="1"/>
-          </p:cNvPicPr>
-          <p:nvPr/>
-        </p:nvPicPr>
-        <p:blipFill>
-          <a:blip r:embed="rId8">
-            <a:extLst>
-              <a:ext uri="{28A0092B-C50C-407E-A947-70E740481C1C}">
-                <a14:useLocalDpi xmlns:a14="http://schemas.microsoft.com/office/drawing/2010/main" val="0"/>
-              </a:ext>
-            </a:extLst>
-          </a:blip>
-          <a:srcRect/>
-          <a:stretch/>
-        </p:blipFill>
-        <p:spPr bwMode="auto">
-          <a:xfrm>
-            <a:off x="8998607" y="3551663"/>
-            <a:ext cx="685800" cy="626555"/>
-          </a:xfrm>
-          <a:prstGeom prst="rect">
-            <a:avLst/>
-          </a:prstGeom>
-          <a:noFill/>
-          <a:extLst>
-            <a:ext uri="{909E8E84-426E-40DD-AFC4-6F175D3DCCD1}">
-              <a14:hiddenFill xmlns:a14="http://schemas.microsoft.com/office/drawing/2010/main">
-                <a:solidFill>
-                  <a:srgbClr val="FFFFFF"/>
-                </a:solidFill>
-              </a14:hiddenFill>
-            </a:ext>
-          </a:extLst>
-        </p:spPr>
-      </p:pic>
-      <p:sp>
-        <p:nvSpPr>
-          <p:cNvPr id="49" name="TextBox 48">
-            <a:extLst>
-              <a:ext uri="{FF2B5EF4-FFF2-40B4-BE49-F238E27FC236}">
-                <a16:creationId xmlns:a16="http://schemas.microsoft.com/office/drawing/2014/main" id="{A2812E0E-399D-5F4A-E5DE-C3088B2B364D}"/>
-              </a:ext>
-            </a:extLst>
-          </p:cNvPr>
-          <p:cNvSpPr txBox="1"/>
-          <p:nvPr/>
-        </p:nvSpPr>
-        <p:spPr>
-          <a:xfrm>
-            <a:off x="8687482" y="4206754"/>
-            <a:ext cx="1308050" cy="492443"/>
-          </a:xfrm>
-          <a:prstGeom prst="rect">
-            <a:avLst/>
-          </a:prstGeom>
-          <a:noFill/>
-        </p:spPr>
-        <p:txBody>
-          <a:bodyPr wrap="none" lIns="0" tIns="0" rIns="0" bIns="0" rtlCol="0">
-            <a:spAutoFit/>
-          </a:bodyPr>
-          <a:lstStyle/>
-          <a:p>
-            <a:pPr algn="ctr" defTabSz="914400"/>
-            <a:r>
-              <a:rPr lang="en-US" sz="1600" dirty="0">
-                <a:latin typeface="+mj-lt"/>
-              </a:rPr>
-              <a:t>Foundry</a:t>
-            </a:r>
-          </a:p>
-          <a:p>
-            <a:pPr algn="ctr" defTabSz="914400"/>
-            <a:r>
-              <a:rPr lang="en-US" sz="1600" dirty="0">
-                <a:latin typeface="+mj-lt"/>
-              </a:rPr>
-              <a:t>(Model Endpoint)</a:t>
-            </a:r>
+            <a:pPr algn="ctr"/>
+            <a:endParaRPr lang="en-US"/>
           </a:p>
         </p:txBody>
       </p:sp>
     </p:spTree>
     <p:extLst>
       <p:ext uri="{BB962C8B-B14F-4D97-AF65-F5344CB8AC3E}">
-        <p14:creationId xmlns:p14="http://schemas.microsoft.com/office/powerpoint/2010/main" val="3284386239"/>
+        <p14:creationId xmlns:p14="http://schemas.microsoft.com/office/powerpoint/2010/main" val="1988697002"/>
       </p:ext>
     </p:extLst>
   </p:cSld>
@@ -21858,35 +22417,814 @@
       </p:grpSpPr>
       <p:pic>
         <p:nvPicPr>
-          <p:cNvPr id="1026" name="Picture 2">
-            <a:extLst>
-              <a:ext uri="{FF2B5EF4-FFF2-40B4-BE49-F238E27FC236}">
-                <a16:creationId xmlns:a16="http://schemas.microsoft.com/office/drawing/2014/main" id="{5F0DECF4-D97F-50C4-2BC6-FF6779833085}"/>
+          <p:cNvPr id="23" name="Graphic 22">
+            <a:extLst>
+              <a:ext uri="{FF2B5EF4-FFF2-40B4-BE49-F238E27FC236}">
+                <a16:creationId xmlns:a16="http://schemas.microsoft.com/office/drawing/2014/main" id="{DA88F6D7-4C9A-4185-3D36-7EB0922EE285}"/>
               </a:ext>
             </a:extLst>
           </p:cNvPr>
           <p:cNvPicPr>
-            <a:picLocks noChangeAspect="1" noChangeArrowheads="1"/>
+            <a:picLocks noChangeAspect="1"/>
           </p:cNvPicPr>
           <p:nvPr/>
         </p:nvPicPr>
         <p:blipFill>
-          <a:blip r:embed="rId2">
-            <a:extLst>
-              <a:ext uri="{28A0092B-C50C-407E-A947-70E740481C1C}">
-                <a14:useLocalDpi xmlns:a14="http://schemas.microsoft.com/office/drawing/2010/main" val="0"/>
+          <a:blip>
+            <a:extLst>
+              <a:ext uri="{96DAC541-7B7A-43D3-8B79-37D633B846F1}">
+                <asvg:svgBlip xmlns:asvg="http://schemas.microsoft.com/office/drawing/2016/SVG/main" r:embed="rId2"/>
               </a:ext>
             </a:extLst>
           </a:blip>
-          <a:srcRect/>
           <a:stretch>
             <a:fillRect/>
           </a:stretch>
         </p:blipFill>
+        <p:spPr>
+          <a:xfrm>
+            <a:off x="6813470" y="1708181"/>
+            <a:ext cx="685800" cy="685800"/>
+          </a:xfrm>
+          <a:prstGeom prst="rect">
+            <a:avLst/>
+          </a:prstGeom>
+        </p:spPr>
+      </p:pic>
+      <p:pic>
+        <p:nvPicPr>
+          <p:cNvPr id="24" name="Graphic 23">
+            <a:extLst>
+              <a:ext uri="{FF2B5EF4-FFF2-40B4-BE49-F238E27FC236}">
+                <a16:creationId xmlns:a16="http://schemas.microsoft.com/office/drawing/2014/main" id="{726C5A85-790B-25A5-93E5-BFC1714EB9F1}"/>
+              </a:ext>
+            </a:extLst>
+          </p:cNvPr>
+          <p:cNvPicPr>
+            <a:picLocks noChangeAspect="1"/>
+          </p:cNvPicPr>
+          <p:nvPr/>
+        </p:nvPicPr>
+        <p:blipFill>
+          <a:blip>
+            <a:extLst>
+              <a:ext uri="{96DAC541-7B7A-43D3-8B79-37D633B846F1}">
+                <asvg:svgBlip xmlns:asvg="http://schemas.microsoft.com/office/drawing/2016/SVG/main" r:embed="rId3"/>
+              </a:ext>
+            </a:extLst>
+          </a:blip>
+          <a:stretch>
+            <a:fillRect/>
+          </a:stretch>
+        </p:blipFill>
+        <p:spPr>
+          <a:xfrm>
+            <a:off x="6813470" y="3522041"/>
+            <a:ext cx="685800" cy="685800"/>
+          </a:xfrm>
+          <a:prstGeom prst="rect">
+            <a:avLst/>
+          </a:prstGeom>
+        </p:spPr>
+      </p:pic>
+      <p:pic>
+        <p:nvPicPr>
+          <p:cNvPr id="26" name="Graphic 25">
+            <a:extLst>
+              <a:ext uri="{FF2B5EF4-FFF2-40B4-BE49-F238E27FC236}">
+                <a16:creationId xmlns:a16="http://schemas.microsoft.com/office/drawing/2014/main" id="{6F2CBAE6-3682-C7A5-095F-B47294275DAF}"/>
+              </a:ext>
+            </a:extLst>
+          </p:cNvPr>
+          <p:cNvPicPr>
+            <a:picLocks noChangeAspect="1"/>
+          </p:cNvPicPr>
+          <p:nvPr/>
+        </p:nvPicPr>
+        <p:blipFill>
+          <a:blip>
+            <a:extLst>
+              <a:ext uri="{96DAC541-7B7A-43D3-8B79-37D633B846F1}">
+                <asvg:svgBlip xmlns:asvg="http://schemas.microsoft.com/office/drawing/2016/SVG/main" r:embed="rId4"/>
+              </a:ext>
+            </a:extLst>
+          </a:blip>
+          <a:stretch>
+            <a:fillRect/>
+          </a:stretch>
+        </p:blipFill>
+        <p:spPr>
+          <a:xfrm>
+            <a:off x="4465557" y="3522041"/>
+            <a:ext cx="685800" cy="685800"/>
+          </a:xfrm>
+          <a:prstGeom prst="rect">
+            <a:avLst/>
+          </a:prstGeom>
+        </p:spPr>
+      </p:pic>
+      <p:sp>
+        <p:nvSpPr>
+          <p:cNvPr id="27" name="TextBox 26">
+            <a:extLst>
+              <a:ext uri="{FF2B5EF4-FFF2-40B4-BE49-F238E27FC236}">
+                <a16:creationId xmlns:a16="http://schemas.microsoft.com/office/drawing/2014/main" id="{F744DB5A-CC57-F1A8-E429-B66BEEC007AF}"/>
+              </a:ext>
+            </a:extLst>
+          </p:cNvPr>
+          <p:cNvSpPr txBox="1"/>
+          <p:nvPr/>
+        </p:nvSpPr>
+        <p:spPr>
+          <a:xfrm>
+            <a:off x="6659823" y="2473787"/>
+            <a:ext cx="993092" cy="492443"/>
+          </a:xfrm>
+          <a:prstGeom prst="rect">
+            <a:avLst/>
+          </a:prstGeom>
+          <a:noFill/>
+        </p:spPr>
+        <p:txBody>
+          <a:bodyPr wrap="none" lIns="0" tIns="0" rIns="0" bIns="0" rtlCol="0">
+            <a:spAutoFit/>
+          </a:bodyPr>
+          <a:lstStyle/>
+          <a:p>
+            <a:pPr algn="ctr" defTabSz="914400"/>
+            <a:r>
+              <a:rPr lang="en-US" sz="1600" dirty="0">
+                <a:latin typeface="+mj-lt"/>
+              </a:rPr>
+              <a:t>Cosmos DB</a:t>
+            </a:r>
+          </a:p>
+          <a:p>
+            <a:pPr algn="ctr" defTabSz="914400"/>
+            <a:r>
+              <a:rPr lang="en-US" sz="1600" dirty="0">
+                <a:latin typeface="+mj-lt"/>
+              </a:rPr>
+              <a:t>(Vector Data)</a:t>
+            </a:r>
+          </a:p>
+        </p:txBody>
+      </p:sp>
+      <p:sp>
+        <p:nvSpPr>
+          <p:cNvPr id="30" name="TextBox 29">
+            <a:extLst>
+              <a:ext uri="{FF2B5EF4-FFF2-40B4-BE49-F238E27FC236}">
+                <a16:creationId xmlns:a16="http://schemas.microsoft.com/office/drawing/2014/main" id="{C95D7447-BD22-D2C6-40B9-7995CB109180}"/>
+              </a:ext>
+            </a:extLst>
+          </p:cNvPr>
+          <p:cNvSpPr txBox="1"/>
+          <p:nvPr/>
+        </p:nvSpPr>
+        <p:spPr>
+          <a:xfrm>
+            <a:off x="6475765" y="4207841"/>
+            <a:ext cx="1361205" cy="492443"/>
+          </a:xfrm>
+          <a:prstGeom prst="rect">
+            <a:avLst/>
+          </a:prstGeom>
+          <a:noFill/>
+        </p:spPr>
+        <p:txBody>
+          <a:bodyPr wrap="none" lIns="0" tIns="0" rIns="0" bIns="0" rtlCol="0">
+            <a:spAutoFit/>
+          </a:bodyPr>
+          <a:lstStyle/>
+          <a:p>
+            <a:pPr algn="ctr" defTabSz="914400"/>
+            <a:r>
+              <a:rPr lang="en-US" sz="1600" dirty="0">
+                <a:latin typeface="+mj-lt"/>
+              </a:rPr>
+              <a:t>AI Search</a:t>
+            </a:r>
+          </a:p>
+          <a:p>
+            <a:pPr algn="ctr" defTabSz="914400"/>
+            <a:r>
+              <a:rPr lang="en-US" sz="1600" dirty="0">
+                <a:latin typeface="+mj-lt"/>
+              </a:rPr>
+              <a:t>(Indexed Content)</a:t>
+            </a:r>
+          </a:p>
+        </p:txBody>
+      </p:sp>
+      <p:sp>
+        <p:nvSpPr>
+          <p:cNvPr id="31" name="TextBox 30">
+            <a:extLst>
+              <a:ext uri="{FF2B5EF4-FFF2-40B4-BE49-F238E27FC236}">
+                <a16:creationId xmlns:a16="http://schemas.microsoft.com/office/drawing/2014/main" id="{8D88BA5D-AF5C-BD20-022B-994D0191FC68}"/>
+              </a:ext>
+            </a:extLst>
+          </p:cNvPr>
+          <p:cNvSpPr txBox="1"/>
+          <p:nvPr/>
+        </p:nvSpPr>
+        <p:spPr>
+          <a:xfrm>
+            <a:off x="4197584" y="4206755"/>
+            <a:ext cx="1221745" cy="492443"/>
+          </a:xfrm>
+          <a:prstGeom prst="rect">
+            <a:avLst/>
+          </a:prstGeom>
+          <a:noFill/>
+        </p:spPr>
+        <p:txBody>
+          <a:bodyPr wrap="none" lIns="0" tIns="0" rIns="0" bIns="0" rtlCol="0">
+            <a:spAutoFit/>
+          </a:bodyPr>
+          <a:lstStyle/>
+          <a:p>
+            <a:pPr algn="ctr" defTabSz="914400"/>
+            <a:r>
+              <a:rPr lang="en-US" sz="1600" dirty="0">
+                <a:latin typeface="+mj-lt"/>
+              </a:rPr>
+              <a:t>Storage Account</a:t>
+            </a:r>
+          </a:p>
+          <a:p>
+            <a:pPr algn="ctr" defTabSz="914400"/>
+            <a:r>
+              <a:rPr lang="en-US" sz="1600" dirty="0">
+                <a:latin typeface="+mj-lt"/>
+              </a:rPr>
+              <a:t>(Data Lake)</a:t>
+            </a:r>
+          </a:p>
+        </p:txBody>
+      </p:sp>
+      <p:cxnSp>
+        <p:nvCxnSpPr>
+          <p:cNvPr id="32" name="Straight Arrow Connector 31">
+            <a:extLst>
+              <a:ext uri="{FF2B5EF4-FFF2-40B4-BE49-F238E27FC236}">
+                <a16:creationId xmlns:a16="http://schemas.microsoft.com/office/drawing/2014/main" id="{4588F750-AAF4-DA5E-DD5C-8929A68CF8E7}"/>
+              </a:ext>
+            </a:extLst>
+          </p:cNvPr>
+          <p:cNvCxnSpPr>
+            <a:cxnSpLocks/>
+            <a:stCxn id="24" idx="0"/>
+            <a:endCxn id="27" idx="2"/>
+          </p:cNvCxnSpPr>
+          <p:nvPr/>
+        </p:nvCxnSpPr>
+        <p:spPr>
+          <a:xfrm flipH="1" flipV="1">
+            <a:off x="7156369" y="2966230"/>
+            <a:ext cx="1" cy="555811"/>
+          </a:xfrm>
+          <a:prstGeom prst="straightConnector1">
+            <a:avLst/>
+          </a:prstGeom>
+          <a:ln>
+            <a:solidFill>
+              <a:schemeClr val="tx1"/>
+            </a:solidFill>
+            <a:prstDash val="solid"/>
+            <a:headEnd type="triangle" w="lg" len="lg"/>
+            <a:tailEnd type="triangle" w="lg" len="lg"/>
+          </a:ln>
+        </p:spPr>
+        <p:style>
+          <a:lnRef idx="2">
+            <a:schemeClr val="accent1"/>
+          </a:lnRef>
+          <a:fillRef idx="0">
+            <a:schemeClr val="accent1"/>
+          </a:fillRef>
+          <a:effectRef idx="1">
+            <a:schemeClr val="accent1"/>
+          </a:effectRef>
+          <a:fontRef idx="minor">
+            <a:schemeClr val="tx1"/>
+          </a:fontRef>
+        </p:style>
+      </p:cxnSp>
+      <p:pic>
+        <p:nvPicPr>
+          <p:cNvPr id="33" name="Graphic 32">
+            <a:extLst>
+              <a:ext uri="{FF2B5EF4-FFF2-40B4-BE49-F238E27FC236}">
+                <a16:creationId xmlns:a16="http://schemas.microsoft.com/office/drawing/2014/main" id="{8F0C0947-C1EB-B5EF-FD9E-D7EF4D3625FE}"/>
+              </a:ext>
+            </a:extLst>
+          </p:cNvPr>
+          <p:cNvPicPr>
+            <a:picLocks noChangeAspect="1"/>
+          </p:cNvPicPr>
+          <p:nvPr/>
+        </p:nvPicPr>
+        <p:blipFill>
+          <a:blip>
+            <a:extLst>
+              <a:ext uri="{96DAC541-7B7A-43D3-8B79-37D633B846F1}">
+                <asvg:svgBlip xmlns:asvg="http://schemas.microsoft.com/office/drawing/2016/SVG/main" r:embed="rId5"/>
+              </a:ext>
+            </a:extLst>
+          </a:blip>
+          <a:srcRect/>
+          <a:stretch/>
+        </p:blipFill>
+        <p:spPr>
+          <a:xfrm>
+            <a:off x="2117644" y="3522041"/>
+            <a:ext cx="685800" cy="685800"/>
+          </a:xfrm>
+          <a:prstGeom prst="rect">
+            <a:avLst/>
+          </a:prstGeom>
+        </p:spPr>
+      </p:pic>
+      <p:sp>
+        <p:nvSpPr>
+          <p:cNvPr id="34" name="TextBox 33">
+            <a:extLst>
+              <a:ext uri="{FF2B5EF4-FFF2-40B4-BE49-F238E27FC236}">
+                <a16:creationId xmlns:a16="http://schemas.microsoft.com/office/drawing/2014/main" id="{C43E140A-36A7-4878-E24B-DCAA226DE6DF}"/>
+              </a:ext>
+            </a:extLst>
+          </p:cNvPr>
+          <p:cNvSpPr txBox="1"/>
+          <p:nvPr/>
+        </p:nvSpPr>
+        <p:spPr>
+          <a:xfrm>
+            <a:off x="1913952" y="4206755"/>
+            <a:ext cx="1093184" cy="492443"/>
+          </a:xfrm>
+          <a:prstGeom prst="rect">
+            <a:avLst/>
+          </a:prstGeom>
+          <a:noFill/>
+        </p:spPr>
+        <p:txBody>
+          <a:bodyPr wrap="none" lIns="0" tIns="0" rIns="0" bIns="0" rtlCol="0">
+            <a:spAutoFit/>
+          </a:bodyPr>
+          <a:lstStyle/>
+          <a:p>
+            <a:pPr algn="ctr" defTabSz="914400"/>
+            <a:r>
+              <a:rPr lang="en-US" sz="1600" dirty="0">
+                <a:latin typeface="+mj-lt"/>
+              </a:rPr>
+              <a:t>Data Factory</a:t>
+            </a:r>
+          </a:p>
+          <a:p>
+            <a:pPr algn="ctr" defTabSz="914400"/>
+            <a:r>
+              <a:rPr lang="en-US" sz="1600" dirty="0">
+                <a:latin typeface="+mj-lt"/>
+              </a:rPr>
+              <a:t>(ELT Pipelines)</a:t>
+            </a:r>
+          </a:p>
+        </p:txBody>
+      </p:sp>
+      <p:cxnSp>
+        <p:nvCxnSpPr>
+          <p:cNvPr id="35" name="Straight Arrow Connector 34">
+            <a:extLst>
+              <a:ext uri="{FF2B5EF4-FFF2-40B4-BE49-F238E27FC236}">
+                <a16:creationId xmlns:a16="http://schemas.microsoft.com/office/drawing/2014/main" id="{20B14887-F904-9314-8BE7-8163DAC58D11}"/>
+              </a:ext>
+            </a:extLst>
+          </p:cNvPr>
+          <p:cNvCxnSpPr>
+            <a:cxnSpLocks/>
+            <a:stCxn id="33" idx="3"/>
+            <a:endCxn id="26" idx="1"/>
+          </p:cNvCxnSpPr>
+          <p:nvPr/>
+        </p:nvCxnSpPr>
+        <p:spPr>
+          <a:xfrm>
+            <a:off x="2803444" y="3864941"/>
+            <a:ext cx="1662113" cy="0"/>
+          </a:xfrm>
+          <a:prstGeom prst="straightConnector1">
+            <a:avLst/>
+          </a:prstGeom>
+          <a:ln>
+            <a:solidFill>
+              <a:schemeClr val="tx1"/>
+            </a:solidFill>
+            <a:prstDash val="solid"/>
+            <a:headEnd type="none" w="lg" len="lg"/>
+            <a:tailEnd type="triangle" w="lg" len="lg"/>
+          </a:ln>
+        </p:spPr>
+        <p:style>
+          <a:lnRef idx="2">
+            <a:schemeClr val="accent1"/>
+          </a:lnRef>
+          <a:fillRef idx="0">
+            <a:schemeClr val="accent1"/>
+          </a:fillRef>
+          <a:effectRef idx="1">
+            <a:schemeClr val="accent1"/>
+          </a:effectRef>
+          <a:fontRef idx="minor">
+            <a:schemeClr val="tx1"/>
+          </a:fontRef>
+        </p:style>
+      </p:cxnSp>
+      <p:cxnSp>
+        <p:nvCxnSpPr>
+          <p:cNvPr id="36" name="Straight Arrow Connector 35">
+            <a:extLst>
+              <a:ext uri="{FF2B5EF4-FFF2-40B4-BE49-F238E27FC236}">
+                <a16:creationId xmlns:a16="http://schemas.microsoft.com/office/drawing/2014/main" id="{C477D93D-D115-B266-EB48-15C4DDE59387}"/>
+              </a:ext>
+            </a:extLst>
+          </p:cNvPr>
+          <p:cNvCxnSpPr>
+            <a:cxnSpLocks/>
+            <a:stCxn id="26" idx="3"/>
+            <a:endCxn id="24" idx="1"/>
+          </p:cNvCxnSpPr>
+          <p:nvPr/>
+        </p:nvCxnSpPr>
+        <p:spPr>
+          <a:xfrm>
+            <a:off x="5151357" y="3864941"/>
+            <a:ext cx="1662113" cy="0"/>
+          </a:xfrm>
+          <a:prstGeom prst="straightConnector1">
+            <a:avLst/>
+          </a:prstGeom>
+          <a:ln>
+            <a:solidFill>
+              <a:schemeClr val="tx1"/>
+            </a:solidFill>
+            <a:prstDash val="solid"/>
+            <a:headEnd type="none" w="lg" len="lg"/>
+            <a:tailEnd type="triangle" w="lg" len="lg"/>
+          </a:ln>
+        </p:spPr>
+        <p:style>
+          <a:lnRef idx="2">
+            <a:schemeClr val="accent1"/>
+          </a:lnRef>
+          <a:fillRef idx="0">
+            <a:schemeClr val="accent1"/>
+          </a:fillRef>
+          <a:effectRef idx="1">
+            <a:schemeClr val="accent1"/>
+          </a:effectRef>
+          <a:fontRef idx="minor">
+            <a:schemeClr val="tx1"/>
+          </a:fontRef>
+        </p:style>
+      </p:cxnSp>
+      <p:cxnSp>
+        <p:nvCxnSpPr>
+          <p:cNvPr id="37" name="Straight Arrow Connector 36">
+            <a:extLst>
+              <a:ext uri="{FF2B5EF4-FFF2-40B4-BE49-F238E27FC236}">
+                <a16:creationId xmlns:a16="http://schemas.microsoft.com/office/drawing/2014/main" id="{0217BDEA-C10B-A321-428F-0C1826880F36}"/>
+              </a:ext>
+            </a:extLst>
+          </p:cNvPr>
+          <p:cNvCxnSpPr>
+            <a:cxnSpLocks/>
+            <a:stCxn id="24" idx="3"/>
+            <a:endCxn id="48" idx="1"/>
+          </p:cNvCxnSpPr>
+          <p:nvPr/>
+        </p:nvCxnSpPr>
+        <p:spPr>
+          <a:xfrm>
+            <a:off x="7499270" y="3864941"/>
+            <a:ext cx="1499337" cy="0"/>
+          </a:xfrm>
+          <a:prstGeom prst="straightConnector1">
+            <a:avLst/>
+          </a:prstGeom>
+          <a:ln>
+            <a:solidFill>
+              <a:schemeClr val="tx1"/>
+            </a:solidFill>
+            <a:prstDash val="solid"/>
+            <a:headEnd type="triangle" w="lg" len="lg"/>
+            <a:tailEnd type="triangle" w="lg" len="lg"/>
+          </a:ln>
+        </p:spPr>
+        <p:style>
+          <a:lnRef idx="2">
+            <a:schemeClr val="accent1"/>
+          </a:lnRef>
+          <a:fillRef idx="0">
+            <a:schemeClr val="accent1"/>
+          </a:fillRef>
+          <a:effectRef idx="1">
+            <a:schemeClr val="accent1"/>
+          </a:effectRef>
+          <a:fontRef idx="minor">
+            <a:schemeClr val="tx1"/>
+          </a:fontRef>
+        </p:style>
+      </p:cxnSp>
+      <p:cxnSp>
+        <p:nvCxnSpPr>
+          <p:cNvPr id="38" name="Straight Arrow Connector 37">
+            <a:extLst>
+              <a:ext uri="{FF2B5EF4-FFF2-40B4-BE49-F238E27FC236}">
+                <a16:creationId xmlns:a16="http://schemas.microsoft.com/office/drawing/2014/main" id="{E158D239-5F5F-C9C7-726D-66FD0BA23F18}"/>
+              </a:ext>
+            </a:extLst>
+          </p:cNvPr>
+          <p:cNvCxnSpPr>
+            <a:cxnSpLocks/>
+          </p:cNvCxnSpPr>
+          <p:nvPr/>
+        </p:nvCxnSpPr>
+        <p:spPr>
+          <a:xfrm flipV="1">
+            <a:off x="9347120" y="2966230"/>
+            <a:ext cx="2" cy="555811"/>
+          </a:xfrm>
+          <a:prstGeom prst="straightConnector1">
+            <a:avLst/>
+          </a:prstGeom>
+          <a:ln>
+            <a:solidFill>
+              <a:schemeClr val="tx1"/>
+            </a:solidFill>
+            <a:prstDash val="solid"/>
+            <a:headEnd type="triangle" w="lg" len="lg"/>
+            <a:tailEnd type="triangle" w="lg" len="lg"/>
+          </a:ln>
+        </p:spPr>
+        <p:style>
+          <a:lnRef idx="2">
+            <a:schemeClr val="accent1"/>
+          </a:lnRef>
+          <a:fillRef idx="0">
+            <a:schemeClr val="accent1"/>
+          </a:fillRef>
+          <a:effectRef idx="1">
+            <a:schemeClr val="accent1"/>
+          </a:effectRef>
+          <a:fontRef idx="minor">
+            <a:schemeClr val="tx1"/>
+          </a:fontRef>
+        </p:style>
+      </p:cxnSp>
+      <p:sp>
+        <p:nvSpPr>
+          <p:cNvPr id="39" name="TextBox 38">
+            <a:extLst>
+              <a:ext uri="{FF2B5EF4-FFF2-40B4-BE49-F238E27FC236}">
+                <a16:creationId xmlns:a16="http://schemas.microsoft.com/office/drawing/2014/main" id="{7700DCB8-4817-4DCD-4A1A-A83089C25977}"/>
+              </a:ext>
+            </a:extLst>
+          </p:cNvPr>
+          <p:cNvSpPr txBox="1"/>
+          <p:nvPr/>
+        </p:nvSpPr>
+        <p:spPr>
+          <a:xfrm>
+            <a:off x="1884489" y="2473787"/>
+            <a:ext cx="1152110" cy="246221"/>
+          </a:xfrm>
+          <a:prstGeom prst="rect">
+            <a:avLst/>
+          </a:prstGeom>
+          <a:noFill/>
+        </p:spPr>
+        <p:txBody>
+          <a:bodyPr wrap="none" lIns="0" tIns="0" rIns="0" bIns="0" rtlCol="0">
+            <a:spAutoFit/>
+          </a:bodyPr>
+          <a:lstStyle/>
+          <a:p>
+            <a:pPr algn="ctr" defTabSz="914400"/>
+            <a:r>
+              <a:rPr lang="en-US" sz="1600" dirty="0">
+                <a:latin typeface="+mj-lt"/>
+              </a:rPr>
+              <a:t>Enterprise Data</a:t>
+            </a:r>
+          </a:p>
+        </p:txBody>
+      </p:sp>
+      <p:cxnSp>
+        <p:nvCxnSpPr>
+          <p:cNvPr id="40" name="Straight Arrow Connector 39">
+            <a:extLst>
+              <a:ext uri="{FF2B5EF4-FFF2-40B4-BE49-F238E27FC236}">
+                <a16:creationId xmlns:a16="http://schemas.microsoft.com/office/drawing/2014/main" id="{B381B268-3003-9E19-6433-B1769E5D8438}"/>
+              </a:ext>
+            </a:extLst>
+          </p:cNvPr>
+          <p:cNvCxnSpPr>
+            <a:cxnSpLocks/>
+            <a:stCxn id="39" idx="2"/>
+            <a:endCxn id="33" idx="0"/>
+          </p:cNvCxnSpPr>
+          <p:nvPr/>
+        </p:nvCxnSpPr>
+        <p:spPr>
+          <a:xfrm>
+            <a:off x="2460544" y="2720008"/>
+            <a:ext cx="0" cy="802033"/>
+          </a:xfrm>
+          <a:prstGeom prst="straightConnector1">
+            <a:avLst/>
+          </a:prstGeom>
+          <a:ln>
+            <a:solidFill>
+              <a:schemeClr val="tx1"/>
+            </a:solidFill>
+            <a:prstDash val="solid"/>
+            <a:headEnd type="none" w="lg" len="lg"/>
+            <a:tailEnd type="triangle" w="lg" len="lg"/>
+          </a:ln>
+        </p:spPr>
+        <p:style>
+          <a:lnRef idx="2">
+            <a:schemeClr val="accent1"/>
+          </a:lnRef>
+          <a:fillRef idx="0">
+            <a:schemeClr val="accent1"/>
+          </a:fillRef>
+          <a:effectRef idx="1">
+            <a:schemeClr val="accent1"/>
+          </a:effectRef>
+          <a:fontRef idx="minor">
+            <a:schemeClr val="tx1"/>
+          </a:fontRef>
+        </p:style>
+      </p:cxnSp>
+      <p:pic>
+        <p:nvPicPr>
+          <p:cNvPr id="41" name="Picture 40" descr="A blue paper with white text&#10;&#10;AI-generated content may be incorrect.">
+            <a:extLst>
+              <a:ext uri="{FF2B5EF4-FFF2-40B4-BE49-F238E27FC236}">
+                <a16:creationId xmlns:a16="http://schemas.microsoft.com/office/drawing/2014/main" id="{78714A7F-3440-9910-18BB-B2A338E04862}"/>
+              </a:ext>
+            </a:extLst>
+          </p:cNvPr>
+          <p:cNvPicPr>
+            <a:picLocks noChangeAspect="1"/>
+          </p:cNvPicPr>
+          <p:nvPr/>
+        </p:nvPicPr>
+        <p:blipFill>
+          <a:blip r:embed="rId6">
+            <a:duotone>
+              <a:srgbClr val="C03BC4">
+                <a:shade val="45000"/>
+                <a:satMod val="135000"/>
+              </a:srgbClr>
+              <a:prstClr val="white"/>
+            </a:duotone>
+            <a:extLst>
+              <a:ext uri="{28A0092B-C50C-407E-A947-70E740481C1C}">
+                <a14:useLocalDpi xmlns:a14="http://schemas.microsoft.com/office/drawing/2010/main" val="0"/>
+              </a:ext>
+            </a:extLst>
+          </a:blip>
+          <a:stretch>
+            <a:fillRect/>
+          </a:stretch>
+        </p:blipFill>
+        <p:spPr>
+          <a:xfrm>
+            <a:off x="2117644" y="1708181"/>
+            <a:ext cx="685800" cy="685800"/>
+          </a:xfrm>
+          <a:prstGeom prst="rect">
+            <a:avLst/>
+          </a:prstGeom>
+        </p:spPr>
+      </p:pic>
+      <p:pic>
+        <p:nvPicPr>
+          <p:cNvPr id="46" name="Graphic 45">
+            <a:extLst>
+              <a:ext uri="{FF2B5EF4-FFF2-40B4-BE49-F238E27FC236}">
+                <a16:creationId xmlns:a16="http://schemas.microsoft.com/office/drawing/2014/main" id="{AB28493D-0059-A8C8-7A3A-F22A5AB63EED}"/>
+              </a:ext>
+            </a:extLst>
+          </p:cNvPr>
+          <p:cNvPicPr>
+            <a:picLocks noChangeAspect="1"/>
+          </p:cNvPicPr>
+          <p:nvPr/>
+        </p:nvPicPr>
+        <p:blipFill>
+          <a:blip>
+            <a:extLst>
+              <a:ext uri="{96DAC541-7B7A-43D3-8B79-37D633B846F1}">
+                <asvg:svgBlip xmlns:asvg="http://schemas.microsoft.com/office/drawing/2016/SVG/main" r:embed="rId7"/>
+              </a:ext>
+            </a:extLst>
+          </a:blip>
+          <a:stretch>
+            <a:fillRect/>
+          </a:stretch>
+        </p:blipFill>
+        <p:spPr>
+          <a:xfrm>
+            <a:off x="9004220" y="1787987"/>
+            <a:ext cx="685800" cy="685800"/>
+          </a:xfrm>
+          <a:prstGeom prst="rect">
+            <a:avLst/>
+          </a:prstGeom>
+        </p:spPr>
+      </p:pic>
+      <p:sp>
+        <p:nvSpPr>
+          <p:cNvPr id="47" name="TextBox 46">
+            <a:extLst>
+              <a:ext uri="{FF2B5EF4-FFF2-40B4-BE49-F238E27FC236}">
+                <a16:creationId xmlns:a16="http://schemas.microsoft.com/office/drawing/2014/main" id="{A13B9753-C103-20D5-C8E5-2E3B09911743}"/>
+              </a:ext>
+            </a:extLst>
+          </p:cNvPr>
+          <p:cNvSpPr txBox="1"/>
+          <p:nvPr/>
+        </p:nvSpPr>
+        <p:spPr>
+          <a:xfrm>
+            <a:off x="8739902" y="2472701"/>
+            <a:ext cx="1214435" cy="492443"/>
+          </a:xfrm>
+          <a:prstGeom prst="rect">
+            <a:avLst/>
+          </a:prstGeom>
+          <a:noFill/>
+        </p:spPr>
+        <p:txBody>
+          <a:bodyPr wrap="none" lIns="0" tIns="0" rIns="0" bIns="0" rtlCol="0">
+            <a:spAutoFit/>
+          </a:bodyPr>
+          <a:lstStyle/>
+          <a:p>
+            <a:pPr algn="ctr" defTabSz="914400"/>
+            <a:r>
+              <a:rPr lang="en-US" sz="1600" dirty="0">
+                <a:latin typeface="+mj-lt"/>
+              </a:rPr>
+              <a:t>App Service</a:t>
+            </a:r>
+          </a:p>
+          <a:p>
+            <a:pPr algn="ctr" defTabSz="914400"/>
+            <a:r>
+              <a:rPr lang="en-US" sz="1600" dirty="0">
+                <a:latin typeface="+mj-lt"/>
+              </a:rPr>
+              <a:t>(Web Front End)</a:t>
+            </a:r>
+          </a:p>
+        </p:txBody>
+      </p:sp>
+      <p:pic>
+        <p:nvPicPr>
+          <p:cNvPr id="48" name="Picture 4">
+            <a:extLst>
+              <a:ext uri="{FF2B5EF4-FFF2-40B4-BE49-F238E27FC236}">
+                <a16:creationId xmlns:a16="http://schemas.microsoft.com/office/drawing/2014/main" id="{846CAA7C-59A7-6ED0-F3C6-FAC25B8BD9CF}"/>
+              </a:ext>
+            </a:extLst>
+          </p:cNvPr>
+          <p:cNvPicPr>
+            <a:picLocks noChangeAspect="1" noChangeArrowheads="1"/>
+          </p:cNvPicPr>
+          <p:nvPr/>
+        </p:nvPicPr>
+        <p:blipFill>
+          <a:blip r:embed="rId8">
+            <a:extLst>
+              <a:ext uri="{28A0092B-C50C-407E-A947-70E740481C1C}">
+                <a14:useLocalDpi xmlns:a14="http://schemas.microsoft.com/office/drawing/2010/main" val="0"/>
+              </a:ext>
+            </a:extLst>
+          </a:blip>
+          <a:srcRect/>
+          <a:stretch/>
+        </p:blipFill>
         <p:spPr bwMode="auto">
           <a:xfrm>
-            <a:off x="0" y="0"/>
-            <a:ext cx="5349875" cy="6858000"/>
+            <a:off x="8998607" y="3551663"/>
+            <a:ext cx="685800" cy="626555"/>
           </a:xfrm>
           <a:prstGeom prst="rect">
             <a:avLst/>
@@ -21905,10 +23243,10 @@
       </p:pic>
       <p:sp>
         <p:nvSpPr>
-          <p:cNvPr id="5" name="TextBox 4">
-            <a:extLst>
-              <a:ext uri="{FF2B5EF4-FFF2-40B4-BE49-F238E27FC236}">
-                <a16:creationId xmlns:a16="http://schemas.microsoft.com/office/drawing/2014/main" id="{BDD578BC-5D7D-5C4C-8F29-72399D893A54}"/>
+          <p:cNvPr id="49" name="TextBox 48">
+            <a:extLst>
+              <a:ext uri="{FF2B5EF4-FFF2-40B4-BE49-F238E27FC236}">
+                <a16:creationId xmlns:a16="http://schemas.microsoft.com/office/drawing/2014/main" id="{A2812E0E-399D-5F4A-E5DE-C3088B2B364D}"/>
               </a:ext>
             </a:extLst>
           </p:cNvPr>
@@ -21917,8 +23255,8 @@
         </p:nvSpPr>
         <p:spPr>
           <a:xfrm>
-            <a:off x="5920557" y="385224"/>
-            <a:ext cx="6097136" cy="646331"/>
+            <a:off x="8687482" y="4206754"/>
+            <a:ext cx="1308050" cy="492443"/>
           </a:xfrm>
           <a:prstGeom prst="rect">
             <a:avLst/>
@@ -21926,61 +23264,26 @@
           <a:noFill/>
         </p:spPr>
         <p:txBody>
-          <a:bodyPr wrap="square">
+          <a:bodyPr wrap="none" lIns="0" tIns="0" rIns="0" bIns="0" rtlCol="0">
             <a:spAutoFit/>
           </a:bodyPr>
           <a:lstStyle/>
           <a:p>
+            <a:pPr algn="ctr" defTabSz="914400"/>
             <a:r>
-              <a:rPr lang="en-US" dirty="0"/>
-              <a:t>Style Guide: </a:t>
+              <a:rPr lang="en-US" sz="1600" dirty="0">
+                <a:latin typeface="+mj-lt"/>
+              </a:rPr>
+              <a:t>Foundry</a:t>
             </a:r>
+          </a:p>
+          <a:p>
+            <a:pPr algn="ctr" defTabSz="914400"/>
             <a:r>
-              <a:rPr lang="en-US" dirty="0">
-                <a:hlinkClick r:id="rId3"/>
+              <a:rPr lang="en-US" sz="1600" dirty="0">
+                <a:latin typeface="+mj-lt"/>
               </a:rPr>
-              <a:t>https://oreillymedia.github.io/production-resources/illustrations/</a:t>
-            </a:r>
-            <a:r>
-              <a:rPr lang="en-US" dirty="0"/>
-              <a:t> </a:t>
-            </a:r>
-          </a:p>
-        </p:txBody>
-      </p:sp>
-      <p:sp>
-        <p:nvSpPr>
-          <p:cNvPr id="6" name="TextBox 5">
-            <a:extLst>
-              <a:ext uri="{FF2B5EF4-FFF2-40B4-BE49-F238E27FC236}">
-                <a16:creationId xmlns:a16="http://schemas.microsoft.com/office/drawing/2014/main" id="{73738677-70D9-CDFB-3CCB-A0A1A69FA2EC}"/>
-              </a:ext>
-            </a:extLst>
-          </p:cNvPr>
-          <p:cNvSpPr txBox="1"/>
-          <p:nvPr/>
-        </p:nvSpPr>
-        <p:spPr>
-          <a:xfrm>
-            <a:off x="7173532" y="1822360"/>
-            <a:ext cx="3167342" cy="369332"/>
-          </a:xfrm>
-          <a:prstGeom prst="rect">
-            <a:avLst/>
-          </a:prstGeom>
-          <a:noFill/>
-        </p:spPr>
-        <p:txBody>
-          <a:bodyPr wrap="none" rtlCol="0">
-            <a:spAutoFit/>
-          </a:bodyPr>
-          <a:lstStyle/>
-          <a:p>
-            <a:r>
-              <a:rPr lang="en-US" dirty="0">
-                <a:latin typeface="Guardian Sans Cond Medium" panose="020B0603030202060203" pitchFamily="34" charset="0"/>
-              </a:rPr>
-              <a:t>Fonts: Guardian Sans Cond Medium </a:t>
+              <a:t>(Model Endpoint)</a:t>
             </a:r>
           </a:p>
         </p:txBody>
@@ -21988,7 +23291,2883 @@
     </p:spTree>
     <p:extLst>
       <p:ext uri="{BB962C8B-B14F-4D97-AF65-F5344CB8AC3E}">
-        <p14:creationId xmlns:p14="http://schemas.microsoft.com/office/powerpoint/2010/main" val="1650268167"/>
+        <p14:creationId xmlns:p14="http://schemas.microsoft.com/office/powerpoint/2010/main" val="3284386239"/>
+      </p:ext>
+    </p:extLst>
+  </p:cSld>
+  <p:clrMapOvr>
+    <a:masterClrMapping/>
+  </p:clrMapOvr>
+</p:sld>
+</file>
+
+<file path=ppt/slides/slide29.xml><?xml version="1.0" encoding="utf-8"?>
+<p:sld xmlns:a="http://schemas.openxmlformats.org/drawingml/2006/main" xmlns:r="http://schemas.openxmlformats.org/officeDocument/2006/relationships" xmlns:p="http://schemas.openxmlformats.org/presentationml/2006/main">
+  <p:cSld>
+    <p:spTree>
+      <p:nvGrpSpPr>
+        <p:cNvPr id="1" name=""/>
+        <p:cNvGrpSpPr/>
+        <p:nvPr/>
+      </p:nvGrpSpPr>
+      <p:grpSpPr>
+        <a:xfrm>
+          <a:off x="0" y="0"/>
+          <a:ext cx="0" cy="0"/>
+          <a:chOff x="0" y="0"/>
+          <a:chExt cx="0" cy="0"/>
+        </a:xfrm>
+      </p:grpSpPr>
+      <p:sp>
+        <p:nvSpPr>
+          <p:cNvPr id="120" name="Rectangle: Rounded Corners 119">
+            <a:extLst>
+              <a:ext uri="{FF2B5EF4-FFF2-40B4-BE49-F238E27FC236}">
+                <a16:creationId xmlns:a16="http://schemas.microsoft.com/office/drawing/2014/main" id="{5B739FE7-2246-5963-2AC5-DF353DF80AF5}"/>
+              </a:ext>
+            </a:extLst>
+          </p:cNvPr>
+          <p:cNvSpPr/>
+          <p:nvPr/>
+        </p:nvSpPr>
+        <p:spPr>
+          <a:xfrm>
+            <a:off x="881270" y="583095"/>
+            <a:ext cx="8772939" cy="4346714"/>
+          </a:xfrm>
+          <a:prstGeom prst="roundRect">
+            <a:avLst>
+              <a:gd name="adj" fmla="val 5234"/>
+            </a:avLst>
+          </a:prstGeom>
+          <a:solidFill>
+            <a:schemeClr val="bg1"/>
+          </a:solidFill>
+          <a:ln>
+            <a:solidFill>
+              <a:schemeClr val="tx1"/>
+            </a:solidFill>
+          </a:ln>
+        </p:spPr>
+        <p:style>
+          <a:lnRef idx="2">
+            <a:schemeClr val="accent1">
+              <a:shade val="15000"/>
+            </a:schemeClr>
+          </a:lnRef>
+          <a:fillRef idx="1">
+            <a:schemeClr val="accent1"/>
+          </a:fillRef>
+          <a:effectRef idx="0">
+            <a:schemeClr val="accent1"/>
+          </a:effectRef>
+          <a:fontRef idx="minor">
+            <a:schemeClr val="lt1"/>
+          </a:fontRef>
+        </p:style>
+        <p:txBody>
+          <a:bodyPr rtlCol="0" anchor="ctr"/>
+          <a:lstStyle/>
+          <a:p>
+            <a:pPr algn="ctr"/>
+            <a:endParaRPr lang="en-US" dirty="0">
+              <a:solidFill>
+                <a:schemeClr val="tx1"/>
+              </a:solidFill>
+            </a:endParaRPr>
+          </a:p>
+        </p:txBody>
+      </p:sp>
+      <p:sp>
+        <p:nvSpPr>
+          <p:cNvPr id="125" name="Rectangle: Rounded Corners 124">
+            <a:extLst>
+              <a:ext uri="{FF2B5EF4-FFF2-40B4-BE49-F238E27FC236}">
+                <a16:creationId xmlns:a16="http://schemas.microsoft.com/office/drawing/2014/main" id="{B660B63C-09DD-0672-6A76-9FC031CC40AD}"/>
+              </a:ext>
+            </a:extLst>
+          </p:cNvPr>
+          <p:cNvSpPr/>
+          <p:nvPr/>
+        </p:nvSpPr>
+        <p:spPr>
+          <a:xfrm>
+            <a:off x="1186013" y="1276687"/>
+            <a:ext cx="2135650" cy="1113144"/>
+          </a:xfrm>
+          <a:prstGeom prst="roundRect">
+            <a:avLst>
+              <a:gd name="adj" fmla="val 7057"/>
+            </a:avLst>
+          </a:prstGeom>
+          <a:solidFill>
+            <a:srgbClr val="E5F1F8"/>
+          </a:solidFill>
+          <a:ln>
+            <a:solidFill>
+              <a:schemeClr val="tx1"/>
+            </a:solidFill>
+          </a:ln>
+        </p:spPr>
+        <p:style>
+          <a:lnRef idx="2">
+            <a:schemeClr val="accent1">
+              <a:shade val="15000"/>
+            </a:schemeClr>
+          </a:lnRef>
+          <a:fillRef idx="1">
+            <a:schemeClr val="accent1"/>
+          </a:fillRef>
+          <a:effectRef idx="0">
+            <a:schemeClr val="accent1"/>
+          </a:effectRef>
+          <a:fontRef idx="minor">
+            <a:schemeClr val="lt1"/>
+          </a:fontRef>
+        </p:style>
+        <p:txBody>
+          <a:bodyPr rtlCol="0" anchor="ctr"/>
+          <a:lstStyle/>
+          <a:p>
+            <a:pPr algn="ctr"/>
+            <a:endParaRPr lang="en-US" dirty="0">
+              <a:solidFill>
+                <a:schemeClr val="tx1"/>
+              </a:solidFill>
+            </a:endParaRPr>
+          </a:p>
+        </p:txBody>
+      </p:sp>
+      <p:sp>
+        <p:nvSpPr>
+          <p:cNvPr id="122" name="Rectangle: Rounded Corners 121">
+            <a:extLst>
+              <a:ext uri="{FF2B5EF4-FFF2-40B4-BE49-F238E27FC236}">
+                <a16:creationId xmlns:a16="http://schemas.microsoft.com/office/drawing/2014/main" id="{B256D0C8-6D5F-3DF0-974A-AC2D409C4C71}"/>
+              </a:ext>
+            </a:extLst>
+          </p:cNvPr>
+          <p:cNvSpPr/>
+          <p:nvPr/>
+        </p:nvSpPr>
+        <p:spPr>
+          <a:xfrm>
+            <a:off x="1190646" y="2857090"/>
+            <a:ext cx="2135650" cy="1844262"/>
+          </a:xfrm>
+          <a:prstGeom prst="roundRect">
+            <a:avLst>
+              <a:gd name="adj" fmla="val 7057"/>
+            </a:avLst>
+          </a:prstGeom>
+          <a:solidFill>
+            <a:srgbClr val="E5F1F8"/>
+          </a:solidFill>
+          <a:ln>
+            <a:solidFill>
+              <a:schemeClr val="tx1"/>
+            </a:solidFill>
+          </a:ln>
+        </p:spPr>
+        <p:style>
+          <a:lnRef idx="2">
+            <a:schemeClr val="accent1">
+              <a:shade val="15000"/>
+            </a:schemeClr>
+          </a:lnRef>
+          <a:fillRef idx="1">
+            <a:schemeClr val="accent1"/>
+          </a:fillRef>
+          <a:effectRef idx="0">
+            <a:schemeClr val="accent1"/>
+          </a:effectRef>
+          <a:fontRef idx="minor">
+            <a:schemeClr val="lt1"/>
+          </a:fontRef>
+        </p:style>
+        <p:txBody>
+          <a:bodyPr rtlCol="0" anchor="ctr"/>
+          <a:lstStyle/>
+          <a:p>
+            <a:pPr algn="ctr"/>
+            <a:endParaRPr lang="en-US" dirty="0">
+              <a:solidFill>
+                <a:schemeClr val="tx1"/>
+              </a:solidFill>
+            </a:endParaRPr>
+          </a:p>
+        </p:txBody>
+      </p:sp>
+      <p:sp>
+        <p:nvSpPr>
+          <p:cNvPr id="126" name="Rectangle: Rounded Corners 125">
+            <a:extLst>
+              <a:ext uri="{FF2B5EF4-FFF2-40B4-BE49-F238E27FC236}">
+                <a16:creationId xmlns:a16="http://schemas.microsoft.com/office/drawing/2014/main" id="{E00E257B-19AE-B887-3359-DF44D492371C}"/>
+              </a:ext>
+            </a:extLst>
+          </p:cNvPr>
+          <p:cNvSpPr/>
+          <p:nvPr/>
+        </p:nvSpPr>
+        <p:spPr>
+          <a:xfrm>
+            <a:off x="4131464" y="921026"/>
+            <a:ext cx="5158310" cy="3678939"/>
+          </a:xfrm>
+          <a:prstGeom prst="roundRect">
+            <a:avLst>
+              <a:gd name="adj" fmla="val 7057"/>
+            </a:avLst>
+          </a:prstGeom>
+          <a:solidFill>
+            <a:srgbClr val="E5F1F8"/>
+          </a:solidFill>
+          <a:ln>
+            <a:solidFill>
+              <a:schemeClr val="tx1"/>
+            </a:solidFill>
+          </a:ln>
+        </p:spPr>
+        <p:style>
+          <a:lnRef idx="2">
+            <a:schemeClr val="accent1">
+              <a:shade val="15000"/>
+            </a:schemeClr>
+          </a:lnRef>
+          <a:fillRef idx="1">
+            <a:schemeClr val="accent1"/>
+          </a:fillRef>
+          <a:effectRef idx="0">
+            <a:schemeClr val="accent1"/>
+          </a:effectRef>
+          <a:fontRef idx="minor">
+            <a:schemeClr val="lt1"/>
+          </a:fontRef>
+        </p:style>
+        <p:txBody>
+          <a:bodyPr rtlCol="0" anchor="ctr"/>
+          <a:lstStyle/>
+          <a:p>
+            <a:pPr algn="ctr"/>
+            <a:endParaRPr lang="en-US" dirty="0">
+              <a:solidFill>
+                <a:schemeClr val="tx1"/>
+              </a:solidFill>
+            </a:endParaRPr>
+          </a:p>
+        </p:txBody>
+      </p:sp>
+      <p:sp>
+        <p:nvSpPr>
+          <p:cNvPr id="121" name="Rectangle: Rounded Corners 120">
+            <a:extLst>
+              <a:ext uri="{FF2B5EF4-FFF2-40B4-BE49-F238E27FC236}">
+                <a16:creationId xmlns:a16="http://schemas.microsoft.com/office/drawing/2014/main" id="{0CFAD763-9ECE-AD01-238D-19C4ED35E331}"/>
+              </a:ext>
+            </a:extLst>
+          </p:cNvPr>
+          <p:cNvSpPr/>
+          <p:nvPr/>
+        </p:nvSpPr>
+        <p:spPr>
+          <a:xfrm>
+            <a:off x="1380090" y="396843"/>
+            <a:ext cx="1674544" cy="369332"/>
+          </a:xfrm>
+          <a:prstGeom prst="roundRect">
+            <a:avLst/>
+          </a:prstGeom>
+          <a:solidFill>
+            <a:srgbClr val="B2D4EB"/>
+          </a:solidFill>
+          <a:ln>
+            <a:solidFill>
+              <a:schemeClr val="tx1"/>
+            </a:solidFill>
+          </a:ln>
+        </p:spPr>
+        <p:style>
+          <a:lnRef idx="2">
+            <a:schemeClr val="accent1">
+              <a:shade val="15000"/>
+            </a:schemeClr>
+          </a:lnRef>
+          <a:fillRef idx="1">
+            <a:schemeClr val="accent1"/>
+          </a:fillRef>
+          <a:effectRef idx="0">
+            <a:schemeClr val="accent1"/>
+          </a:effectRef>
+          <a:fontRef idx="minor">
+            <a:schemeClr val="lt1"/>
+          </a:fontRef>
+        </p:style>
+        <p:txBody>
+          <a:bodyPr rtlCol="0" anchor="ctr"/>
+          <a:lstStyle/>
+          <a:p>
+            <a:pPr algn="ctr"/>
+            <a:endParaRPr lang="en-US" i="1" dirty="0">
+              <a:solidFill>
+                <a:schemeClr val="tx1"/>
+              </a:solidFill>
+            </a:endParaRPr>
+          </a:p>
+        </p:txBody>
+      </p:sp>
+      <p:pic>
+        <p:nvPicPr>
+          <p:cNvPr id="4" name="Graphic 3">
+            <a:extLst>
+              <a:ext uri="{FF2B5EF4-FFF2-40B4-BE49-F238E27FC236}">
+                <a16:creationId xmlns:a16="http://schemas.microsoft.com/office/drawing/2014/main" id="{F3B93B79-850C-6A6D-CBA3-A9171CE21DDE}"/>
+              </a:ext>
+            </a:extLst>
+          </p:cNvPr>
+          <p:cNvPicPr>
+            <a:picLocks noChangeAspect="1"/>
+          </p:cNvPicPr>
+          <p:nvPr/>
+        </p:nvPicPr>
+        <p:blipFill>
+          <a:blip>
+            <a:extLst>
+              <a:ext uri="{96DAC541-7B7A-43D3-8B79-37D633B846F1}">
+                <asvg:svgBlip xmlns:asvg="http://schemas.microsoft.com/office/drawing/2016/SVG/main" r:embed="rId2"/>
+              </a:ext>
+            </a:extLst>
+          </a:blip>
+          <a:stretch>
+            <a:fillRect/>
+          </a:stretch>
+        </p:blipFill>
+        <p:spPr>
+          <a:xfrm>
+            <a:off x="1481464" y="417295"/>
+            <a:ext cx="320040" cy="320040"/>
+          </a:xfrm>
+          <a:prstGeom prst="rect">
+            <a:avLst/>
+          </a:prstGeom>
+        </p:spPr>
+      </p:pic>
+      <p:sp>
+        <p:nvSpPr>
+          <p:cNvPr id="5" name="TextBox 4">
+            <a:extLst>
+              <a:ext uri="{FF2B5EF4-FFF2-40B4-BE49-F238E27FC236}">
+                <a16:creationId xmlns:a16="http://schemas.microsoft.com/office/drawing/2014/main" id="{CBFE259C-496D-FB7F-A56A-6611BF758BEB}"/>
+              </a:ext>
+            </a:extLst>
+          </p:cNvPr>
+          <p:cNvSpPr txBox="1"/>
+          <p:nvPr/>
+        </p:nvSpPr>
+        <p:spPr>
+          <a:xfrm>
+            <a:off x="1801504" y="423427"/>
+            <a:ext cx="1179425" cy="307777"/>
+          </a:xfrm>
+          <a:prstGeom prst="rect">
+            <a:avLst/>
+          </a:prstGeom>
+          <a:noFill/>
+        </p:spPr>
+        <p:txBody>
+          <a:bodyPr wrap="none" rtlCol="0" anchor="ctr">
+            <a:spAutoFit/>
+          </a:bodyPr>
+          <a:lstStyle/>
+          <a:p>
+            <a:pPr algn="ctr"/>
+            <a:r>
+              <a:rPr lang="en-US" sz="1400" dirty="0"/>
+              <a:t>Virtual Network</a:t>
+            </a:r>
+          </a:p>
+        </p:txBody>
+      </p:sp>
+      <p:pic>
+        <p:nvPicPr>
+          <p:cNvPr id="16" name="Picture 4">
+            <a:extLst>
+              <a:ext uri="{FF2B5EF4-FFF2-40B4-BE49-F238E27FC236}">
+                <a16:creationId xmlns:a16="http://schemas.microsoft.com/office/drawing/2014/main" id="{949EEC85-A237-5DF3-D606-80C2DF202C3C}"/>
+              </a:ext>
+            </a:extLst>
+          </p:cNvPr>
+          <p:cNvPicPr>
+            <a:picLocks noChangeAspect="1" noChangeArrowheads="1"/>
+          </p:cNvPicPr>
+          <p:nvPr/>
+        </p:nvPicPr>
+        <p:blipFill>
+          <a:blip r:embed="rId3">
+            <a:extLst>
+              <a:ext uri="{28A0092B-C50C-407E-A947-70E740481C1C}">
+                <a14:useLocalDpi xmlns:a14="http://schemas.microsoft.com/office/drawing/2010/main" val="0"/>
+              </a:ext>
+            </a:extLst>
+          </a:blip>
+          <a:srcRect/>
+          <a:stretch/>
+        </p:blipFill>
+        <p:spPr bwMode="auto">
+          <a:xfrm>
+            <a:off x="7510484" y="4110586"/>
+            <a:ext cx="320040" cy="292393"/>
+          </a:xfrm>
+          <a:prstGeom prst="rect">
+            <a:avLst/>
+          </a:prstGeom>
+          <a:noFill/>
+          <a:extLst>
+            <a:ext uri="{909E8E84-426E-40DD-AFC4-6F175D3DCCD1}">
+              <a14:hiddenFill xmlns:a14="http://schemas.microsoft.com/office/drawing/2010/main">
+                <a:solidFill>
+                  <a:srgbClr val="FFFFFF"/>
+                </a:solidFill>
+              </a14:hiddenFill>
+            </a:ext>
+          </a:extLst>
+        </p:spPr>
+      </p:pic>
+      <p:pic>
+        <p:nvPicPr>
+          <p:cNvPr id="18" name="Picture 17">
+            <a:extLst>
+              <a:ext uri="{FF2B5EF4-FFF2-40B4-BE49-F238E27FC236}">
+                <a16:creationId xmlns:a16="http://schemas.microsoft.com/office/drawing/2014/main" id="{D12003DF-998C-AD89-20DF-2AFA18ED40E6}"/>
+              </a:ext>
+            </a:extLst>
+          </p:cNvPr>
+          <p:cNvPicPr>
+            <a:picLocks noChangeAspect="1"/>
+          </p:cNvPicPr>
+          <p:nvPr/>
+        </p:nvPicPr>
+        <p:blipFill>
+          <a:blip r:embed="rId4"/>
+          <a:stretch>
+            <a:fillRect/>
+          </a:stretch>
+        </p:blipFill>
+        <p:spPr>
+          <a:xfrm>
+            <a:off x="1252864" y="1755719"/>
+            <a:ext cx="548640" cy="400930"/>
+          </a:xfrm>
+          <a:prstGeom prst="rect">
+            <a:avLst/>
+          </a:prstGeom>
+        </p:spPr>
+      </p:pic>
+      <p:grpSp>
+        <p:nvGrpSpPr>
+          <p:cNvPr id="137" name="Group 136">
+            <a:extLst>
+              <a:ext uri="{FF2B5EF4-FFF2-40B4-BE49-F238E27FC236}">
+                <a16:creationId xmlns:a16="http://schemas.microsoft.com/office/drawing/2014/main" id="{350C9520-3238-A9C3-3114-71C06533A119}"/>
+              </a:ext>
+            </a:extLst>
+          </p:cNvPr>
+          <p:cNvGrpSpPr/>
+          <p:nvPr/>
+        </p:nvGrpSpPr>
+        <p:grpSpPr>
+          <a:xfrm>
+            <a:off x="1321040" y="1028329"/>
+            <a:ext cx="1899240" cy="523220"/>
+            <a:chOff x="1321040" y="1028329"/>
+            <a:chExt cx="1899240" cy="523220"/>
+          </a:xfrm>
+        </p:grpSpPr>
+        <p:sp>
+          <p:nvSpPr>
+            <p:cNvPr id="131" name="Rectangle: Rounded Corners 130">
+              <a:extLst>
+                <a:ext uri="{FF2B5EF4-FFF2-40B4-BE49-F238E27FC236}">
+                  <a16:creationId xmlns:a16="http://schemas.microsoft.com/office/drawing/2014/main" id="{8D9BDFD9-F516-F6CB-048E-7C74A2CAF37B}"/>
+                </a:ext>
+              </a:extLst>
+            </p:cNvPr>
+            <p:cNvSpPr/>
+            <p:nvPr/>
+          </p:nvSpPr>
+          <p:spPr>
+            <a:xfrm>
+              <a:off x="1321040" y="1060941"/>
+              <a:ext cx="1871886" cy="467788"/>
+            </a:xfrm>
+            <a:prstGeom prst="roundRect">
+              <a:avLst/>
+            </a:prstGeom>
+            <a:solidFill>
+              <a:srgbClr val="B2D4EB"/>
+            </a:solidFill>
+            <a:ln>
+              <a:solidFill>
+                <a:schemeClr val="tx1"/>
+              </a:solidFill>
+            </a:ln>
+          </p:spPr>
+          <p:style>
+            <a:lnRef idx="2">
+              <a:schemeClr val="accent1">
+                <a:shade val="15000"/>
+              </a:schemeClr>
+            </a:lnRef>
+            <a:fillRef idx="1">
+              <a:schemeClr val="accent1"/>
+            </a:fillRef>
+            <a:effectRef idx="0">
+              <a:schemeClr val="accent1"/>
+            </a:effectRef>
+            <a:fontRef idx="minor">
+              <a:schemeClr val="lt1"/>
+            </a:fontRef>
+          </p:style>
+          <p:txBody>
+            <a:bodyPr rtlCol="0" anchor="ctr"/>
+            <a:lstStyle/>
+            <a:p>
+              <a:pPr algn="ctr"/>
+              <a:endParaRPr lang="en-US" i="1" dirty="0">
+                <a:solidFill>
+                  <a:schemeClr val="tx1"/>
+                </a:solidFill>
+              </a:endParaRPr>
+            </a:p>
+          </p:txBody>
+        </p:sp>
+        <p:grpSp>
+          <p:nvGrpSpPr>
+            <p:cNvPr id="24" name="Group 23">
+              <a:extLst>
+                <a:ext uri="{FF2B5EF4-FFF2-40B4-BE49-F238E27FC236}">
+                  <a16:creationId xmlns:a16="http://schemas.microsoft.com/office/drawing/2014/main" id="{1DF5D223-3A9A-5F8F-7A8A-4A08012768A8}"/>
+                </a:ext>
+              </a:extLst>
+            </p:cNvPr>
+            <p:cNvGrpSpPr/>
+            <p:nvPr/>
+          </p:nvGrpSpPr>
+          <p:grpSpPr>
+            <a:xfrm>
+              <a:off x="1375448" y="1028329"/>
+              <a:ext cx="1844832" cy="523220"/>
+              <a:chOff x="1481464" y="1015077"/>
+              <a:chExt cx="1844832" cy="523220"/>
+            </a:xfrm>
+          </p:grpSpPr>
+          <p:pic>
+            <p:nvPicPr>
+              <p:cNvPr id="7" name="Picture 6">
+                <a:extLst>
+                  <a:ext uri="{FF2B5EF4-FFF2-40B4-BE49-F238E27FC236}">
+                    <a16:creationId xmlns:a16="http://schemas.microsoft.com/office/drawing/2014/main" id="{9BE39DAF-719A-41C5-4FB7-FE18513C1EE3}"/>
+                  </a:ext>
+                </a:extLst>
+              </p:cNvPr>
+              <p:cNvPicPr>
+                <a:picLocks noChangeAspect="1"/>
+              </p:cNvPicPr>
+              <p:nvPr/>
+            </p:nvPicPr>
+            <p:blipFill>
+              <a:blip r:embed="rId5"/>
+              <a:stretch>
+                <a:fillRect/>
+              </a:stretch>
+            </p:blipFill>
+            <p:spPr>
+              <a:xfrm>
+                <a:off x="1481464" y="1175341"/>
+                <a:ext cx="320040" cy="202692"/>
+              </a:xfrm>
+              <a:prstGeom prst="rect">
+                <a:avLst/>
+              </a:prstGeom>
+            </p:spPr>
+          </p:pic>
+          <p:sp>
+            <p:nvSpPr>
+              <p:cNvPr id="19" name="TextBox 18">
+                <a:extLst>
+                  <a:ext uri="{FF2B5EF4-FFF2-40B4-BE49-F238E27FC236}">
+                    <a16:creationId xmlns:a16="http://schemas.microsoft.com/office/drawing/2014/main" id="{A8B90F55-759B-D4F8-4D5E-D83C999C2D9A}"/>
+                  </a:ext>
+                </a:extLst>
+              </p:cNvPr>
+              <p:cNvSpPr txBox="1"/>
+              <p:nvPr/>
+            </p:nvSpPr>
+            <p:spPr>
+              <a:xfrm>
+                <a:off x="1801504" y="1015077"/>
+                <a:ext cx="1524792" cy="523220"/>
+              </a:xfrm>
+              <a:prstGeom prst="rect">
+                <a:avLst/>
+              </a:prstGeom>
+              <a:noFill/>
+            </p:spPr>
+            <p:txBody>
+              <a:bodyPr wrap="square" rtlCol="0" anchor="ctr">
+                <a:spAutoFit/>
+              </a:bodyPr>
+              <a:lstStyle/>
+              <a:p>
+                <a:r>
+                  <a:rPr lang="en-US" sz="1400" dirty="0"/>
+                  <a:t>Application Gateway Subnet</a:t>
+                </a:r>
+              </a:p>
+            </p:txBody>
+          </p:sp>
+        </p:grpSp>
+      </p:grpSp>
+      <p:grpSp>
+        <p:nvGrpSpPr>
+          <p:cNvPr id="35" name="Group 34">
+            <a:extLst>
+              <a:ext uri="{FF2B5EF4-FFF2-40B4-BE49-F238E27FC236}">
+                <a16:creationId xmlns:a16="http://schemas.microsoft.com/office/drawing/2014/main" id="{B12903A7-FF51-7F77-6469-3FAF2CD8F4FC}"/>
+              </a:ext>
+            </a:extLst>
+          </p:cNvPr>
+          <p:cNvGrpSpPr/>
+          <p:nvPr/>
+        </p:nvGrpSpPr>
+        <p:grpSpPr>
+          <a:xfrm>
+            <a:off x="5452680" y="1045313"/>
+            <a:ext cx="1577340" cy="523220"/>
+            <a:chOff x="3712402" y="1745366"/>
+            <a:chExt cx="1577340" cy="523220"/>
+          </a:xfrm>
+        </p:grpSpPr>
+        <p:pic>
+          <p:nvPicPr>
+            <p:cNvPr id="30" name="Picture 29">
+              <a:extLst>
+                <a:ext uri="{FF2B5EF4-FFF2-40B4-BE49-F238E27FC236}">
+                  <a16:creationId xmlns:a16="http://schemas.microsoft.com/office/drawing/2014/main" id="{8D726B11-E696-8C2A-E8DC-2D9E68190972}"/>
+                </a:ext>
+              </a:extLst>
+            </p:cNvPr>
+            <p:cNvPicPr>
+              <a:picLocks noChangeAspect="1"/>
+            </p:cNvPicPr>
+            <p:nvPr/>
+          </p:nvPicPr>
+          <p:blipFill>
+            <a:blip r:embed="rId6"/>
+            <a:stretch>
+              <a:fillRect/>
+            </a:stretch>
+          </p:blipFill>
+          <p:spPr>
+            <a:xfrm>
+              <a:off x="3712402" y="1828721"/>
+              <a:ext cx="320040" cy="296037"/>
+            </a:xfrm>
+            <a:prstGeom prst="rect">
+              <a:avLst/>
+            </a:prstGeom>
+          </p:spPr>
+        </p:pic>
+        <p:sp>
+          <p:nvSpPr>
+            <p:cNvPr id="31" name="TextBox 30">
+              <a:extLst>
+                <a:ext uri="{FF2B5EF4-FFF2-40B4-BE49-F238E27FC236}">
+                  <a16:creationId xmlns:a16="http://schemas.microsoft.com/office/drawing/2014/main" id="{5EBCDBEC-8951-33D5-F902-ACE677199C41}"/>
+                </a:ext>
+              </a:extLst>
+            </p:cNvPr>
+            <p:cNvSpPr txBox="1"/>
+            <p:nvPr/>
+          </p:nvSpPr>
+          <p:spPr>
+            <a:xfrm>
+              <a:off x="3996856" y="1745366"/>
+              <a:ext cx="1292886" cy="523220"/>
+            </a:xfrm>
+            <a:prstGeom prst="rect">
+              <a:avLst/>
+            </a:prstGeom>
+            <a:noFill/>
+          </p:spPr>
+          <p:txBody>
+            <a:bodyPr wrap="square" rtlCol="0" anchor="ctr">
+              <a:spAutoFit/>
+            </a:bodyPr>
+            <a:lstStyle/>
+            <a:p>
+              <a:r>
+                <a:rPr lang="en-US" sz="1400" dirty="0"/>
+                <a:t>App Service Private Endpoint</a:t>
+              </a:r>
+            </a:p>
+          </p:txBody>
+        </p:sp>
+      </p:grpSp>
+      <p:grpSp>
+        <p:nvGrpSpPr>
+          <p:cNvPr id="39" name="Group 38">
+            <a:extLst>
+              <a:ext uri="{FF2B5EF4-FFF2-40B4-BE49-F238E27FC236}">
+                <a16:creationId xmlns:a16="http://schemas.microsoft.com/office/drawing/2014/main" id="{782D1C1E-5798-626B-E279-99CE7BDC53B6}"/>
+              </a:ext>
+            </a:extLst>
+          </p:cNvPr>
+          <p:cNvGrpSpPr/>
+          <p:nvPr/>
+        </p:nvGrpSpPr>
+        <p:grpSpPr>
+          <a:xfrm>
+            <a:off x="7510484" y="1137543"/>
+            <a:ext cx="1612926" cy="338759"/>
+            <a:chOff x="3714916" y="2625077"/>
+            <a:chExt cx="1612926" cy="338759"/>
+          </a:xfrm>
+        </p:grpSpPr>
+        <p:pic>
+          <p:nvPicPr>
+            <p:cNvPr id="15" name="Graphic 14">
+              <a:extLst>
+                <a:ext uri="{FF2B5EF4-FFF2-40B4-BE49-F238E27FC236}">
+                  <a16:creationId xmlns:a16="http://schemas.microsoft.com/office/drawing/2014/main" id="{2DF14C84-D88B-1359-B5A1-4876FDDFB7C9}"/>
+                </a:ext>
+              </a:extLst>
+            </p:cNvPr>
+            <p:cNvPicPr>
+              <a:picLocks noChangeAspect="1"/>
+            </p:cNvPicPr>
+            <p:nvPr/>
+          </p:nvPicPr>
+          <p:blipFill>
+            <a:blip>
+              <a:extLst>
+                <a:ext uri="{96DAC541-7B7A-43D3-8B79-37D633B846F1}">
+                  <asvg:svgBlip xmlns:asvg="http://schemas.microsoft.com/office/drawing/2016/SVG/main" r:embed="rId7"/>
+                </a:ext>
+              </a:extLst>
+            </a:blip>
+            <a:stretch>
+              <a:fillRect/>
+            </a:stretch>
+          </p:blipFill>
+          <p:spPr>
+            <a:xfrm>
+              <a:off x="3714916" y="2643796"/>
+              <a:ext cx="320040" cy="320040"/>
+            </a:xfrm>
+            <a:prstGeom prst="rect">
+              <a:avLst/>
+            </a:prstGeom>
+          </p:spPr>
+        </p:pic>
+        <p:sp>
+          <p:nvSpPr>
+            <p:cNvPr id="32" name="TextBox 31">
+              <a:extLst>
+                <a:ext uri="{FF2B5EF4-FFF2-40B4-BE49-F238E27FC236}">
+                  <a16:creationId xmlns:a16="http://schemas.microsoft.com/office/drawing/2014/main" id="{5E200700-B7B4-C541-1BF3-78D998CDBB95}"/>
+                </a:ext>
+              </a:extLst>
+            </p:cNvPr>
+            <p:cNvSpPr txBox="1"/>
+            <p:nvPr/>
+          </p:nvSpPr>
+          <p:spPr>
+            <a:xfrm>
+              <a:off x="4034956" y="2625077"/>
+              <a:ext cx="1292886" cy="307777"/>
+            </a:xfrm>
+            <a:prstGeom prst="rect">
+              <a:avLst/>
+            </a:prstGeom>
+            <a:noFill/>
+          </p:spPr>
+          <p:txBody>
+            <a:bodyPr wrap="square" rtlCol="0" anchor="ctr">
+              <a:spAutoFit/>
+            </a:bodyPr>
+            <a:lstStyle/>
+            <a:p>
+              <a:r>
+                <a:rPr lang="en-US" sz="1400" dirty="0"/>
+                <a:t>App Service</a:t>
+              </a:r>
+            </a:p>
+          </p:txBody>
+        </p:sp>
+      </p:grpSp>
+      <p:grpSp>
+        <p:nvGrpSpPr>
+          <p:cNvPr id="40" name="Group 39">
+            <a:extLst>
+              <a:ext uri="{FF2B5EF4-FFF2-40B4-BE49-F238E27FC236}">
+                <a16:creationId xmlns:a16="http://schemas.microsoft.com/office/drawing/2014/main" id="{70C045FD-6766-5A94-70B3-8DA9F8FEB0A4}"/>
+              </a:ext>
+            </a:extLst>
+          </p:cNvPr>
+          <p:cNvGrpSpPr/>
+          <p:nvPr/>
+        </p:nvGrpSpPr>
+        <p:grpSpPr>
+          <a:xfrm>
+            <a:off x="7510484" y="1905109"/>
+            <a:ext cx="1612926" cy="320040"/>
+            <a:chOff x="5589167" y="2647782"/>
+            <a:chExt cx="1612926" cy="320040"/>
+          </a:xfrm>
+        </p:grpSpPr>
+        <p:pic>
+          <p:nvPicPr>
+            <p:cNvPr id="12" name="Graphic 11">
+              <a:extLst>
+                <a:ext uri="{FF2B5EF4-FFF2-40B4-BE49-F238E27FC236}">
+                  <a16:creationId xmlns:a16="http://schemas.microsoft.com/office/drawing/2014/main" id="{50EDEDA9-E6B1-E607-8A92-92258869A503}"/>
+                </a:ext>
+              </a:extLst>
+            </p:cNvPr>
+            <p:cNvPicPr>
+              <a:picLocks noChangeAspect="1"/>
+            </p:cNvPicPr>
+            <p:nvPr/>
+          </p:nvPicPr>
+          <p:blipFill>
+            <a:blip>
+              <a:extLst>
+                <a:ext uri="{96DAC541-7B7A-43D3-8B79-37D633B846F1}">
+                  <asvg:svgBlip xmlns:asvg="http://schemas.microsoft.com/office/drawing/2016/SVG/main" r:embed="rId8"/>
+                </a:ext>
+              </a:extLst>
+            </a:blip>
+            <a:stretch>
+              <a:fillRect/>
+            </a:stretch>
+          </p:blipFill>
+          <p:spPr>
+            <a:xfrm>
+              <a:off x="5589167" y="2647782"/>
+              <a:ext cx="320040" cy="320040"/>
+            </a:xfrm>
+            <a:prstGeom prst="rect">
+              <a:avLst/>
+            </a:prstGeom>
+          </p:spPr>
+        </p:pic>
+        <p:sp>
+          <p:nvSpPr>
+            <p:cNvPr id="34" name="TextBox 33">
+              <a:extLst>
+                <a:ext uri="{FF2B5EF4-FFF2-40B4-BE49-F238E27FC236}">
+                  <a16:creationId xmlns:a16="http://schemas.microsoft.com/office/drawing/2014/main" id="{BFA524CA-1B60-B242-1324-3ED8896F2F2E}"/>
+                </a:ext>
+              </a:extLst>
+            </p:cNvPr>
+            <p:cNvSpPr txBox="1"/>
+            <p:nvPr/>
+          </p:nvSpPr>
+          <p:spPr>
+            <a:xfrm>
+              <a:off x="5909207" y="2650788"/>
+              <a:ext cx="1292886" cy="307777"/>
+            </a:xfrm>
+            <a:prstGeom prst="rect">
+              <a:avLst/>
+            </a:prstGeom>
+            <a:noFill/>
+          </p:spPr>
+          <p:txBody>
+            <a:bodyPr wrap="square" rtlCol="0" anchor="ctr">
+              <a:spAutoFit/>
+            </a:bodyPr>
+            <a:lstStyle/>
+            <a:p>
+              <a:r>
+                <a:rPr lang="en-US" sz="1400" dirty="0"/>
+                <a:t>Cosmos DB</a:t>
+              </a:r>
+            </a:p>
+          </p:txBody>
+        </p:sp>
+      </p:grpSp>
+      <p:grpSp>
+        <p:nvGrpSpPr>
+          <p:cNvPr id="36" name="Group 35">
+            <a:extLst>
+              <a:ext uri="{FF2B5EF4-FFF2-40B4-BE49-F238E27FC236}">
+                <a16:creationId xmlns:a16="http://schemas.microsoft.com/office/drawing/2014/main" id="{13B9BB4E-B905-0CB9-277B-85BAADA50989}"/>
+              </a:ext>
+            </a:extLst>
+          </p:cNvPr>
+          <p:cNvGrpSpPr/>
+          <p:nvPr/>
+        </p:nvGrpSpPr>
+        <p:grpSpPr>
+          <a:xfrm>
+            <a:off x="5452680" y="1792557"/>
+            <a:ext cx="1577340" cy="523220"/>
+            <a:chOff x="3615856" y="1719932"/>
+            <a:chExt cx="1577340" cy="523220"/>
+          </a:xfrm>
+        </p:grpSpPr>
+        <p:pic>
+          <p:nvPicPr>
+            <p:cNvPr id="37" name="Picture 36">
+              <a:extLst>
+                <a:ext uri="{FF2B5EF4-FFF2-40B4-BE49-F238E27FC236}">
+                  <a16:creationId xmlns:a16="http://schemas.microsoft.com/office/drawing/2014/main" id="{BFBF4AEB-38D6-4D48-0BFB-3F76E05117B6}"/>
+                </a:ext>
+              </a:extLst>
+            </p:cNvPr>
+            <p:cNvPicPr>
+              <a:picLocks noChangeAspect="1"/>
+            </p:cNvPicPr>
+            <p:nvPr/>
+          </p:nvPicPr>
+          <p:blipFill>
+            <a:blip r:embed="rId6"/>
+            <a:stretch>
+              <a:fillRect/>
+            </a:stretch>
+          </p:blipFill>
+          <p:spPr>
+            <a:xfrm>
+              <a:off x="3615856" y="1787987"/>
+              <a:ext cx="320040" cy="296037"/>
+            </a:xfrm>
+            <a:prstGeom prst="rect">
+              <a:avLst/>
+            </a:prstGeom>
+          </p:spPr>
+        </p:pic>
+        <p:sp>
+          <p:nvSpPr>
+            <p:cNvPr id="38" name="TextBox 37">
+              <a:extLst>
+                <a:ext uri="{FF2B5EF4-FFF2-40B4-BE49-F238E27FC236}">
+                  <a16:creationId xmlns:a16="http://schemas.microsoft.com/office/drawing/2014/main" id="{72D5FC44-2847-47B3-B5F0-A896DACABDF6}"/>
+                </a:ext>
+              </a:extLst>
+            </p:cNvPr>
+            <p:cNvSpPr txBox="1"/>
+            <p:nvPr/>
+          </p:nvSpPr>
+          <p:spPr>
+            <a:xfrm>
+              <a:off x="3900310" y="1719932"/>
+              <a:ext cx="1292886" cy="523220"/>
+            </a:xfrm>
+            <a:prstGeom prst="rect">
+              <a:avLst/>
+            </a:prstGeom>
+            <a:noFill/>
+          </p:spPr>
+          <p:txBody>
+            <a:bodyPr wrap="square" rtlCol="0" anchor="ctr">
+              <a:spAutoFit/>
+            </a:bodyPr>
+            <a:lstStyle/>
+            <a:p>
+              <a:r>
+                <a:rPr lang="en-US" sz="1400" dirty="0"/>
+                <a:t>Cosmos DB Private Endpoint</a:t>
+              </a:r>
+            </a:p>
+          </p:txBody>
+        </p:sp>
+      </p:grpSp>
+      <p:grpSp>
+        <p:nvGrpSpPr>
+          <p:cNvPr id="41" name="Group 40">
+            <a:extLst>
+              <a:ext uri="{FF2B5EF4-FFF2-40B4-BE49-F238E27FC236}">
+                <a16:creationId xmlns:a16="http://schemas.microsoft.com/office/drawing/2014/main" id="{AA476DF8-6561-67E7-3D89-D9B3FDF1242D}"/>
+              </a:ext>
+            </a:extLst>
+          </p:cNvPr>
+          <p:cNvGrpSpPr/>
+          <p:nvPr/>
+        </p:nvGrpSpPr>
+        <p:grpSpPr>
+          <a:xfrm>
+            <a:off x="5452680" y="2539801"/>
+            <a:ext cx="1577340" cy="523220"/>
+            <a:chOff x="3615856" y="1719932"/>
+            <a:chExt cx="1577340" cy="523220"/>
+          </a:xfrm>
+        </p:grpSpPr>
+        <p:pic>
+          <p:nvPicPr>
+            <p:cNvPr id="42" name="Picture 41">
+              <a:extLst>
+                <a:ext uri="{FF2B5EF4-FFF2-40B4-BE49-F238E27FC236}">
+                  <a16:creationId xmlns:a16="http://schemas.microsoft.com/office/drawing/2014/main" id="{177137F8-069A-FAF7-EE40-593E56D62B16}"/>
+                </a:ext>
+              </a:extLst>
+            </p:cNvPr>
+            <p:cNvPicPr>
+              <a:picLocks noChangeAspect="1"/>
+            </p:cNvPicPr>
+            <p:nvPr/>
+          </p:nvPicPr>
+          <p:blipFill>
+            <a:blip r:embed="rId6"/>
+            <a:stretch>
+              <a:fillRect/>
+            </a:stretch>
+          </p:blipFill>
+          <p:spPr>
+            <a:xfrm>
+              <a:off x="3615856" y="1787987"/>
+              <a:ext cx="320040" cy="296037"/>
+            </a:xfrm>
+            <a:prstGeom prst="rect">
+              <a:avLst/>
+            </a:prstGeom>
+          </p:spPr>
+        </p:pic>
+        <p:sp>
+          <p:nvSpPr>
+            <p:cNvPr id="43" name="TextBox 42">
+              <a:extLst>
+                <a:ext uri="{FF2B5EF4-FFF2-40B4-BE49-F238E27FC236}">
+                  <a16:creationId xmlns:a16="http://schemas.microsoft.com/office/drawing/2014/main" id="{60A341B5-23FE-4784-7CFC-D50BBF98410F}"/>
+                </a:ext>
+              </a:extLst>
+            </p:cNvPr>
+            <p:cNvSpPr txBox="1"/>
+            <p:nvPr/>
+          </p:nvSpPr>
+          <p:spPr>
+            <a:xfrm>
+              <a:off x="3900310" y="1719932"/>
+              <a:ext cx="1292886" cy="523220"/>
+            </a:xfrm>
+            <a:prstGeom prst="rect">
+              <a:avLst/>
+            </a:prstGeom>
+            <a:noFill/>
+          </p:spPr>
+          <p:txBody>
+            <a:bodyPr wrap="square" rtlCol="0" anchor="ctr">
+              <a:spAutoFit/>
+            </a:bodyPr>
+            <a:lstStyle/>
+            <a:p>
+              <a:r>
+                <a:rPr lang="en-US" sz="1400" dirty="0"/>
+                <a:t>AI Search</a:t>
+              </a:r>
+            </a:p>
+            <a:p>
+              <a:r>
+                <a:rPr lang="en-US" sz="1400" dirty="0"/>
+                <a:t>Private Endpoint</a:t>
+              </a:r>
+            </a:p>
+          </p:txBody>
+        </p:sp>
+      </p:grpSp>
+      <p:grpSp>
+        <p:nvGrpSpPr>
+          <p:cNvPr id="101" name="Group 100">
+            <a:extLst>
+              <a:ext uri="{FF2B5EF4-FFF2-40B4-BE49-F238E27FC236}">
+                <a16:creationId xmlns:a16="http://schemas.microsoft.com/office/drawing/2014/main" id="{C0978656-8144-5C7E-6597-3865724A0D0C}"/>
+              </a:ext>
+            </a:extLst>
+          </p:cNvPr>
+          <p:cNvGrpSpPr/>
+          <p:nvPr/>
+        </p:nvGrpSpPr>
+        <p:grpSpPr>
+          <a:xfrm>
+            <a:off x="7510484" y="2632270"/>
+            <a:ext cx="1612926" cy="327161"/>
+            <a:chOff x="7510484" y="2577492"/>
+            <a:chExt cx="1612926" cy="327161"/>
+          </a:xfrm>
+        </p:grpSpPr>
+        <p:pic>
+          <p:nvPicPr>
+            <p:cNvPr id="13" name="Graphic 12">
+              <a:extLst>
+                <a:ext uri="{FF2B5EF4-FFF2-40B4-BE49-F238E27FC236}">
+                  <a16:creationId xmlns:a16="http://schemas.microsoft.com/office/drawing/2014/main" id="{405487C9-3635-91C2-E2DC-89676C43AFB5}"/>
+                </a:ext>
+              </a:extLst>
+            </p:cNvPr>
+            <p:cNvPicPr>
+              <a:picLocks noChangeAspect="1"/>
+            </p:cNvPicPr>
+            <p:nvPr/>
+          </p:nvPicPr>
+          <p:blipFill>
+            <a:blip>
+              <a:extLst>
+                <a:ext uri="{96DAC541-7B7A-43D3-8B79-37D633B846F1}">
+                  <asvg:svgBlip xmlns:asvg="http://schemas.microsoft.com/office/drawing/2016/SVG/main" r:embed="rId9"/>
+                </a:ext>
+              </a:extLst>
+            </a:blip>
+            <a:stretch>
+              <a:fillRect/>
+            </a:stretch>
+          </p:blipFill>
+          <p:spPr>
+            <a:xfrm>
+              <a:off x="7510484" y="2584613"/>
+              <a:ext cx="320040" cy="320040"/>
+            </a:xfrm>
+            <a:prstGeom prst="rect">
+              <a:avLst/>
+            </a:prstGeom>
+          </p:spPr>
+        </p:pic>
+        <p:sp>
+          <p:nvSpPr>
+            <p:cNvPr id="44" name="TextBox 43">
+              <a:extLst>
+                <a:ext uri="{FF2B5EF4-FFF2-40B4-BE49-F238E27FC236}">
+                  <a16:creationId xmlns:a16="http://schemas.microsoft.com/office/drawing/2014/main" id="{77D756F6-F91A-9FCB-11D6-6A83ABFA5B43}"/>
+                </a:ext>
+              </a:extLst>
+            </p:cNvPr>
+            <p:cNvSpPr txBox="1"/>
+            <p:nvPr/>
+          </p:nvSpPr>
+          <p:spPr>
+            <a:xfrm>
+              <a:off x="7830524" y="2577492"/>
+              <a:ext cx="1292886" cy="307777"/>
+            </a:xfrm>
+            <a:prstGeom prst="rect">
+              <a:avLst/>
+            </a:prstGeom>
+            <a:noFill/>
+          </p:spPr>
+          <p:txBody>
+            <a:bodyPr wrap="square" rtlCol="0" anchor="ctr">
+              <a:spAutoFit/>
+            </a:bodyPr>
+            <a:lstStyle/>
+            <a:p>
+              <a:r>
+                <a:rPr lang="en-US" sz="1400" dirty="0"/>
+                <a:t>AI Search</a:t>
+              </a:r>
+            </a:p>
+          </p:txBody>
+        </p:sp>
+      </p:grpSp>
+      <p:grpSp>
+        <p:nvGrpSpPr>
+          <p:cNvPr id="97" name="Group 96">
+            <a:extLst>
+              <a:ext uri="{FF2B5EF4-FFF2-40B4-BE49-F238E27FC236}">
+                <a16:creationId xmlns:a16="http://schemas.microsoft.com/office/drawing/2014/main" id="{11B29D99-D83B-A626-8F89-0B77278B615F}"/>
+              </a:ext>
+            </a:extLst>
+          </p:cNvPr>
+          <p:cNvGrpSpPr/>
+          <p:nvPr/>
+        </p:nvGrpSpPr>
+        <p:grpSpPr>
+          <a:xfrm>
+            <a:off x="7518125" y="3388238"/>
+            <a:ext cx="1605285" cy="320040"/>
+            <a:chOff x="7518125" y="3342339"/>
+            <a:chExt cx="1605285" cy="320040"/>
+          </a:xfrm>
+        </p:grpSpPr>
+        <p:pic>
+          <p:nvPicPr>
+            <p:cNvPr id="14" name="Graphic 13">
+              <a:extLst>
+                <a:ext uri="{FF2B5EF4-FFF2-40B4-BE49-F238E27FC236}">
+                  <a16:creationId xmlns:a16="http://schemas.microsoft.com/office/drawing/2014/main" id="{8C8B4BEF-B87F-0A18-B81F-1548B1D604AB}"/>
+                </a:ext>
+              </a:extLst>
+            </p:cNvPr>
+            <p:cNvPicPr>
+              <a:picLocks noChangeAspect="1"/>
+            </p:cNvPicPr>
+            <p:nvPr/>
+          </p:nvPicPr>
+          <p:blipFill>
+            <a:blip>
+              <a:extLst>
+                <a:ext uri="{96DAC541-7B7A-43D3-8B79-37D633B846F1}">
+                  <asvg:svgBlip xmlns:asvg="http://schemas.microsoft.com/office/drawing/2016/SVG/main" r:embed="rId10"/>
+                </a:ext>
+              </a:extLst>
+            </a:blip>
+            <a:stretch>
+              <a:fillRect/>
+            </a:stretch>
+          </p:blipFill>
+          <p:spPr>
+            <a:xfrm>
+              <a:off x="7518125" y="3342339"/>
+              <a:ext cx="320040" cy="320040"/>
+            </a:xfrm>
+            <a:prstGeom prst="rect">
+              <a:avLst/>
+            </a:prstGeom>
+          </p:spPr>
+        </p:pic>
+        <p:sp>
+          <p:nvSpPr>
+            <p:cNvPr id="45" name="TextBox 44">
+              <a:extLst>
+                <a:ext uri="{FF2B5EF4-FFF2-40B4-BE49-F238E27FC236}">
+                  <a16:creationId xmlns:a16="http://schemas.microsoft.com/office/drawing/2014/main" id="{269AC331-30A4-E5F0-7C54-64CBFD64EA1C}"/>
+                </a:ext>
+              </a:extLst>
+            </p:cNvPr>
+            <p:cNvSpPr txBox="1"/>
+            <p:nvPr/>
+          </p:nvSpPr>
+          <p:spPr>
+            <a:xfrm>
+              <a:off x="7830524" y="3347105"/>
+              <a:ext cx="1292886" cy="307777"/>
+            </a:xfrm>
+            <a:prstGeom prst="rect">
+              <a:avLst/>
+            </a:prstGeom>
+            <a:noFill/>
+          </p:spPr>
+          <p:txBody>
+            <a:bodyPr wrap="square" rtlCol="0" anchor="ctr">
+              <a:spAutoFit/>
+            </a:bodyPr>
+            <a:lstStyle/>
+            <a:p>
+              <a:r>
+                <a:rPr lang="en-US" sz="1400" dirty="0"/>
+                <a:t>Storage</a:t>
+              </a:r>
+            </a:p>
+          </p:txBody>
+        </p:sp>
+      </p:grpSp>
+      <p:grpSp>
+        <p:nvGrpSpPr>
+          <p:cNvPr id="46" name="Group 45">
+            <a:extLst>
+              <a:ext uri="{FF2B5EF4-FFF2-40B4-BE49-F238E27FC236}">
+                <a16:creationId xmlns:a16="http://schemas.microsoft.com/office/drawing/2014/main" id="{D2ABDD84-A755-70A1-D347-AFE1DCC995A6}"/>
+              </a:ext>
+            </a:extLst>
+          </p:cNvPr>
+          <p:cNvGrpSpPr/>
+          <p:nvPr/>
+        </p:nvGrpSpPr>
+        <p:grpSpPr>
+          <a:xfrm>
+            <a:off x="5452680" y="3287045"/>
+            <a:ext cx="1577340" cy="523220"/>
+            <a:chOff x="3615856" y="1719932"/>
+            <a:chExt cx="1577340" cy="523220"/>
+          </a:xfrm>
+        </p:grpSpPr>
+        <p:pic>
+          <p:nvPicPr>
+            <p:cNvPr id="47" name="Picture 46">
+              <a:extLst>
+                <a:ext uri="{FF2B5EF4-FFF2-40B4-BE49-F238E27FC236}">
+                  <a16:creationId xmlns:a16="http://schemas.microsoft.com/office/drawing/2014/main" id="{30393C1C-23A1-2DAC-6E64-D1B3C5112067}"/>
+                </a:ext>
+              </a:extLst>
+            </p:cNvPr>
+            <p:cNvPicPr>
+              <a:picLocks noChangeAspect="1"/>
+            </p:cNvPicPr>
+            <p:nvPr/>
+          </p:nvPicPr>
+          <p:blipFill>
+            <a:blip r:embed="rId6"/>
+            <a:stretch>
+              <a:fillRect/>
+            </a:stretch>
+          </p:blipFill>
+          <p:spPr>
+            <a:xfrm>
+              <a:off x="3615856" y="1787987"/>
+              <a:ext cx="320040" cy="296037"/>
+            </a:xfrm>
+            <a:prstGeom prst="rect">
+              <a:avLst/>
+            </a:prstGeom>
+          </p:spPr>
+        </p:pic>
+        <p:sp>
+          <p:nvSpPr>
+            <p:cNvPr id="48" name="TextBox 47">
+              <a:extLst>
+                <a:ext uri="{FF2B5EF4-FFF2-40B4-BE49-F238E27FC236}">
+                  <a16:creationId xmlns:a16="http://schemas.microsoft.com/office/drawing/2014/main" id="{9294EA2D-1F0D-9D28-2C24-9FB6C779FC36}"/>
+                </a:ext>
+              </a:extLst>
+            </p:cNvPr>
+            <p:cNvSpPr txBox="1"/>
+            <p:nvPr/>
+          </p:nvSpPr>
+          <p:spPr>
+            <a:xfrm>
+              <a:off x="3900310" y="1719932"/>
+              <a:ext cx="1292886" cy="523220"/>
+            </a:xfrm>
+            <a:prstGeom prst="rect">
+              <a:avLst/>
+            </a:prstGeom>
+            <a:noFill/>
+          </p:spPr>
+          <p:txBody>
+            <a:bodyPr wrap="square" rtlCol="0" anchor="ctr">
+              <a:spAutoFit/>
+            </a:bodyPr>
+            <a:lstStyle/>
+            <a:p>
+              <a:r>
+                <a:rPr lang="en-US" sz="1400" dirty="0"/>
+                <a:t>Storage</a:t>
+              </a:r>
+            </a:p>
+            <a:p>
+              <a:r>
+                <a:rPr lang="en-US" sz="1400" dirty="0"/>
+                <a:t>Private Endpoint</a:t>
+              </a:r>
+            </a:p>
+          </p:txBody>
+        </p:sp>
+      </p:grpSp>
+      <p:grpSp>
+        <p:nvGrpSpPr>
+          <p:cNvPr id="53" name="Group 52">
+            <a:extLst>
+              <a:ext uri="{FF2B5EF4-FFF2-40B4-BE49-F238E27FC236}">
+                <a16:creationId xmlns:a16="http://schemas.microsoft.com/office/drawing/2014/main" id="{FDFE024C-DAB8-B72B-DC23-BA0686CDA72C}"/>
+              </a:ext>
+            </a:extLst>
+          </p:cNvPr>
+          <p:cNvGrpSpPr/>
+          <p:nvPr/>
+        </p:nvGrpSpPr>
+        <p:grpSpPr>
+          <a:xfrm>
+            <a:off x="5452680" y="3995172"/>
+            <a:ext cx="1577340" cy="523220"/>
+            <a:chOff x="3615856" y="1719932"/>
+            <a:chExt cx="1577340" cy="523220"/>
+          </a:xfrm>
+        </p:grpSpPr>
+        <p:pic>
+          <p:nvPicPr>
+            <p:cNvPr id="54" name="Picture 53">
+              <a:extLst>
+                <a:ext uri="{FF2B5EF4-FFF2-40B4-BE49-F238E27FC236}">
+                  <a16:creationId xmlns:a16="http://schemas.microsoft.com/office/drawing/2014/main" id="{D26523C4-F538-FF7C-C8DE-4F54FC817DA6}"/>
+                </a:ext>
+              </a:extLst>
+            </p:cNvPr>
+            <p:cNvPicPr>
+              <a:picLocks noChangeAspect="1"/>
+            </p:cNvPicPr>
+            <p:nvPr/>
+          </p:nvPicPr>
+          <p:blipFill>
+            <a:blip r:embed="rId6"/>
+            <a:stretch>
+              <a:fillRect/>
+            </a:stretch>
+          </p:blipFill>
+          <p:spPr>
+            <a:xfrm>
+              <a:off x="3615856" y="1787987"/>
+              <a:ext cx="320040" cy="296037"/>
+            </a:xfrm>
+            <a:prstGeom prst="rect">
+              <a:avLst/>
+            </a:prstGeom>
+          </p:spPr>
+        </p:pic>
+        <p:sp>
+          <p:nvSpPr>
+            <p:cNvPr id="55" name="TextBox 54">
+              <a:extLst>
+                <a:ext uri="{FF2B5EF4-FFF2-40B4-BE49-F238E27FC236}">
+                  <a16:creationId xmlns:a16="http://schemas.microsoft.com/office/drawing/2014/main" id="{31F74EB5-2B0A-82A1-6CFD-EA1768B3BF42}"/>
+                </a:ext>
+              </a:extLst>
+            </p:cNvPr>
+            <p:cNvSpPr txBox="1"/>
+            <p:nvPr/>
+          </p:nvSpPr>
+          <p:spPr>
+            <a:xfrm>
+              <a:off x="3900310" y="1719932"/>
+              <a:ext cx="1292886" cy="523220"/>
+            </a:xfrm>
+            <a:prstGeom prst="rect">
+              <a:avLst/>
+            </a:prstGeom>
+            <a:noFill/>
+          </p:spPr>
+          <p:txBody>
+            <a:bodyPr wrap="square" rtlCol="0" anchor="ctr">
+              <a:spAutoFit/>
+            </a:bodyPr>
+            <a:lstStyle/>
+            <a:p>
+              <a:r>
+                <a:rPr lang="en-US" sz="1400" dirty="0"/>
+                <a:t>Foundry Project</a:t>
+              </a:r>
+            </a:p>
+            <a:p>
+              <a:r>
+                <a:rPr lang="en-US" sz="1400" dirty="0"/>
+                <a:t>Private Endpoint</a:t>
+              </a:r>
+            </a:p>
+          </p:txBody>
+        </p:sp>
+      </p:grpSp>
+      <p:sp>
+        <p:nvSpPr>
+          <p:cNvPr id="56" name="TextBox 55">
+            <a:extLst>
+              <a:ext uri="{FF2B5EF4-FFF2-40B4-BE49-F238E27FC236}">
+                <a16:creationId xmlns:a16="http://schemas.microsoft.com/office/drawing/2014/main" id="{81DB0B48-F3FF-B288-EEE4-FB45743221CD}"/>
+              </a:ext>
+            </a:extLst>
+          </p:cNvPr>
+          <p:cNvSpPr txBox="1"/>
+          <p:nvPr/>
+        </p:nvSpPr>
+        <p:spPr>
+          <a:xfrm>
+            <a:off x="7830524" y="4077120"/>
+            <a:ext cx="1292886" cy="307777"/>
+          </a:xfrm>
+          <a:prstGeom prst="rect">
+            <a:avLst/>
+          </a:prstGeom>
+          <a:noFill/>
+        </p:spPr>
+        <p:txBody>
+          <a:bodyPr wrap="square" rtlCol="0" anchor="ctr">
+            <a:spAutoFit/>
+          </a:bodyPr>
+          <a:lstStyle/>
+          <a:p>
+            <a:r>
+              <a:rPr lang="en-US" sz="1400" dirty="0"/>
+              <a:t>Foundry Project</a:t>
+            </a:r>
+          </a:p>
+        </p:txBody>
+      </p:sp>
+      <p:sp>
+        <p:nvSpPr>
+          <p:cNvPr id="57" name="TextBox 56">
+            <a:extLst>
+              <a:ext uri="{FF2B5EF4-FFF2-40B4-BE49-F238E27FC236}">
+                <a16:creationId xmlns:a16="http://schemas.microsoft.com/office/drawing/2014/main" id="{EB331272-C744-E719-FBFC-75D17D396CDF}"/>
+              </a:ext>
+            </a:extLst>
+          </p:cNvPr>
+          <p:cNvSpPr txBox="1"/>
+          <p:nvPr/>
+        </p:nvSpPr>
+        <p:spPr>
+          <a:xfrm>
+            <a:off x="1801504" y="1694574"/>
+            <a:ext cx="1524792" cy="523220"/>
+          </a:xfrm>
+          <a:prstGeom prst="rect">
+            <a:avLst/>
+          </a:prstGeom>
+          <a:noFill/>
+        </p:spPr>
+        <p:txBody>
+          <a:bodyPr wrap="square" rtlCol="0" anchor="ctr">
+            <a:spAutoFit/>
+          </a:bodyPr>
+          <a:lstStyle/>
+          <a:p>
+            <a:r>
+              <a:rPr lang="en-US" sz="1400" dirty="0"/>
+              <a:t>Application Gateway with Azure WAF</a:t>
+            </a:r>
+          </a:p>
+        </p:txBody>
+      </p:sp>
+      <p:grpSp>
+        <p:nvGrpSpPr>
+          <p:cNvPr id="63" name="Group 62">
+            <a:extLst>
+              <a:ext uri="{FF2B5EF4-FFF2-40B4-BE49-F238E27FC236}">
+                <a16:creationId xmlns:a16="http://schemas.microsoft.com/office/drawing/2014/main" id="{11CAA6B5-AFBC-4CAE-643E-E2841AF5860D}"/>
+              </a:ext>
+            </a:extLst>
+          </p:cNvPr>
+          <p:cNvGrpSpPr/>
+          <p:nvPr/>
+        </p:nvGrpSpPr>
+        <p:grpSpPr>
+          <a:xfrm>
+            <a:off x="1481464" y="3355100"/>
+            <a:ext cx="1613710" cy="307777"/>
+            <a:chOff x="1481464" y="3470577"/>
+            <a:chExt cx="1613710" cy="307777"/>
+          </a:xfrm>
+        </p:grpSpPr>
+        <p:pic>
+          <p:nvPicPr>
+            <p:cNvPr id="59" name="Picture 58">
+              <a:extLst>
+                <a:ext uri="{FF2B5EF4-FFF2-40B4-BE49-F238E27FC236}">
+                  <a16:creationId xmlns:a16="http://schemas.microsoft.com/office/drawing/2014/main" id="{2890EEA4-94CB-A224-5AD4-1E74449876EF}"/>
+                </a:ext>
+              </a:extLst>
+            </p:cNvPr>
+            <p:cNvPicPr>
+              <a:picLocks noChangeAspect="1"/>
+            </p:cNvPicPr>
+            <p:nvPr/>
+          </p:nvPicPr>
+          <p:blipFill>
+            <a:blip r:embed="rId11"/>
+            <a:stretch>
+              <a:fillRect/>
+            </a:stretch>
+          </p:blipFill>
+          <p:spPr>
+            <a:xfrm>
+              <a:off x="1481464" y="3479448"/>
+              <a:ext cx="320040" cy="290036"/>
+            </a:xfrm>
+            <a:prstGeom prst="rect">
+              <a:avLst/>
+            </a:prstGeom>
+          </p:spPr>
+        </p:pic>
+        <p:sp>
+          <p:nvSpPr>
+            <p:cNvPr id="62" name="TextBox 61">
+              <a:extLst>
+                <a:ext uri="{FF2B5EF4-FFF2-40B4-BE49-F238E27FC236}">
+                  <a16:creationId xmlns:a16="http://schemas.microsoft.com/office/drawing/2014/main" id="{9D011512-C001-DA6B-3D45-3AB77D5C50B4}"/>
+                </a:ext>
+              </a:extLst>
+            </p:cNvPr>
+            <p:cNvSpPr txBox="1"/>
+            <p:nvPr/>
+          </p:nvSpPr>
+          <p:spPr>
+            <a:xfrm>
+              <a:off x="1802288" y="3470577"/>
+              <a:ext cx="1292886" cy="307777"/>
+            </a:xfrm>
+            <a:prstGeom prst="rect">
+              <a:avLst/>
+            </a:prstGeom>
+            <a:noFill/>
+          </p:spPr>
+          <p:txBody>
+            <a:bodyPr wrap="square" rtlCol="0" anchor="ctr">
+              <a:spAutoFit/>
+            </a:bodyPr>
+            <a:lstStyle/>
+            <a:p>
+              <a:r>
+                <a:rPr lang="en-US" sz="1400" dirty="0"/>
+                <a:t>Virtual Interface</a:t>
+              </a:r>
+            </a:p>
+          </p:txBody>
+        </p:sp>
+      </p:grpSp>
+      <p:grpSp>
+        <p:nvGrpSpPr>
+          <p:cNvPr id="65" name="Group 64">
+            <a:extLst>
+              <a:ext uri="{FF2B5EF4-FFF2-40B4-BE49-F238E27FC236}">
+                <a16:creationId xmlns:a16="http://schemas.microsoft.com/office/drawing/2014/main" id="{C466ECAD-3377-3465-2235-67AADAF4AEA3}"/>
+              </a:ext>
+            </a:extLst>
+          </p:cNvPr>
+          <p:cNvGrpSpPr/>
+          <p:nvPr/>
+        </p:nvGrpSpPr>
+        <p:grpSpPr>
+          <a:xfrm>
+            <a:off x="1481464" y="4059542"/>
+            <a:ext cx="1613710" cy="352044"/>
+            <a:chOff x="1481464" y="4110586"/>
+            <a:chExt cx="1613710" cy="352044"/>
+          </a:xfrm>
+        </p:grpSpPr>
+        <p:pic>
+          <p:nvPicPr>
+            <p:cNvPr id="61" name="Picture 60">
+              <a:extLst>
+                <a:ext uri="{FF2B5EF4-FFF2-40B4-BE49-F238E27FC236}">
+                  <a16:creationId xmlns:a16="http://schemas.microsoft.com/office/drawing/2014/main" id="{9D129243-6FC6-CBA6-8366-97EFE7718506}"/>
+                </a:ext>
+              </a:extLst>
+            </p:cNvPr>
+            <p:cNvPicPr>
+              <a:picLocks noChangeAspect="1"/>
+            </p:cNvPicPr>
+            <p:nvPr/>
+          </p:nvPicPr>
+          <p:blipFill>
+            <a:blip r:embed="rId12"/>
+            <a:stretch>
+              <a:fillRect/>
+            </a:stretch>
+          </p:blipFill>
+          <p:spPr>
+            <a:xfrm>
+              <a:off x="1481464" y="4110586"/>
+              <a:ext cx="320040" cy="352044"/>
+            </a:xfrm>
+            <a:prstGeom prst="rect">
+              <a:avLst/>
+            </a:prstGeom>
+          </p:spPr>
+        </p:pic>
+        <p:sp>
+          <p:nvSpPr>
+            <p:cNvPr id="64" name="TextBox 63">
+              <a:extLst>
+                <a:ext uri="{FF2B5EF4-FFF2-40B4-BE49-F238E27FC236}">
+                  <a16:creationId xmlns:a16="http://schemas.microsoft.com/office/drawing/2014/main" id="{966AB5E6-F7A0-094F-6817-3A1960CDF9B5}"/>
+                </a:ext>
+              </a:extLst>
+            </p:cNvPr>
+            <p:cNvSpPr txBox="1"/>
+            <p:nvPr/>
+          </p:nvSpPr>
+          <p:spPr>
+            <a:xfrm>
+              <a:off x="1802288" y="4127518"/>
+              <a:ext cx="1292886" cy="307777"/>
+            </a:xfrm>
+            <a:prstGeom prst="rect">
+              <a:avLst/>
+            </a:prstGeom>
+            <a:noFill/>
+          </p:spPr>
+          <p:txBody>
+            <a:bodyPr wrap="square" rtlCol="0" anchor="ctr">
+              <a:spAutoFit/>
+            </a:bodyPr>
+            <a:lstStyle/>
+            <a:p>
+              <a:r>
+                <a:rPr lang="en-US" sz="1400" dirty="0"/>
+                <a:t>Firewall</a:t>
+              </a:r>
+            </a:p>
+          </p:txBody>
+        </p:sp>
+      </p:grpSp>
+      <p:grpSp>
+        <p:nvGrpSpPr>
+          <p:cNvPr id="153" name="Group 152">
+            <a:extLst>
+              <a:ext uri="{FF2B5EF4-FFF2-40B4-BE49-F238E27FC236}">
+                <a16:creationId xmlns:a16="http://schemas.microsoft.com/office/drawing/2014/main" id="{114E9224-4836-8CD4-4580-B5C59A0E5DB0}"/>
+              </a:ext>
+            </a:extLst>
+          </p:cNvPr>
+          <p:cNvGrpSpPr/>
+          <p:nvPr/>
+        </p:nvGrpSpPr>
+        <p:grpSpPr>
+          <a:xfrm>
+            <a:off x="1481464" y="5145555"/>
+            <a:ext cx="1612926" cy="320040"/>
+            <a:chOff x="1481464" y="5049320"/>
+            <a:chExt cx="1612926" cy="320040"/>
+          </a:xfrm>
+        </p:grpSpPr>
+        <p:pic>
+          <p:nvPicPr>
+            <p:cNvPr id="67" name="Graphic 66" descr="World with solid fill">
+              <a:extLst>
+                <a:ext uri="{FF2B5EF4-FFF2-40B4-BE49-F238E27FC236}">
+                  <a16:creationId xmlns:a16="http://schemas.microsoft.com/office/drawing/2014/main" id="{B57D7265-5B7E-43FE-E7DE-F2EC08F025F7}"/>
+                </a:ext>
+              </a:extLst>
+            </p:cNvPr>
+            <p:cNvPicPr>
+              <a:picLocks noChangeAspect="1"/>
+            </p:cNvPicPr>
+            <p:nvPr/>
+          </p:nvPicPr>
+          <p:blipFill>
+            <a:blip>
+              <a:extLst>
+                <a:ext uri="{96DAC541-7B7A-43D3-8B79-37D633B846F1}">
+                  <asvg:svgBlip xmlns:asvg="http://schemas.microsoft.com/office/drawing/2016/SVG/main" r:embed="rId13"/>
+                </a:ext>
+              </a:extLst>
+            </a:blip>
+            <a:stretch>
+              <a:fillRect/>
+            </a:stretch>
+          </p:blipFill>
+          <p:spPr>
+            <a:xfrm>
+              <a:off x="1481464" y="5049320"/>
+              <a:ext cx="320040" cy="320040"/>
+            </a:xfrm>
+            <a:prstGeom prst="rect">
+              <a:avLst/>
+            </a:prstGeom>
+          </p:spPr>
+        </p:pic>
+        <p:sp>
+          <p:nvSpPr>
+            <p:cNvPr id="68" name="TextBox 67">
+              <a:extLst>
+                <a:ext uri="{FF2B5EF4-FFF2-40B4-BE49-F238E27FC236}">
+                  <a16:creationId xmlns:a16="http://schemas.microsoft.com/office/drawing/2014/main" id="{F7A14DAA-DCAA-FE52-2C67-BBE4B4C92F65}"/>
+                </a:ext>
+              </a:extLst>
+            </p:cNvPr>
+            <p:cNvSpPr txBox="1"/>
+            <p:nvPr/>
+          </p:nvSpPr>
+          <p:spPr>
+            <a:xfrm>
+              <a:off x="1801504" y="5049320"/>
+              <a:ext cx="1292886" cy="307777"/>
+            </a:xfrm>
+            <a:prstGeom prst="rect">
+              <a:avLst/>
+            </a:prstGeom>
+            <a:noFill/>
+          </p:spPr>
+          <p:txBody>
+            <a:bodyPr wrap="square" rtlCol="0" anchor="ctr">
+              <a:spAutoFit/>
+            </a:bodyPr>
+            <a:lstStyle/>
+            <a:p>
+              <a:r>
+                <a:rPr lang="en-US" sz="1400" dirty="0"/>
+                <a:t>Public Internet</a:t>
+              </a:r>
+            </a:p>
+          </p:txBody>
+        </p:sp>
+      </p:grpSp>
+      <p:cxnSp>
+        <p:nvCxnSpPr>
+          <p:cNvPr id="69" name="Straight Arrow Connector 68">
+            <a:extLst>
+              <a:ext uri="{FF2B5EF4-FFF2-40B4-BE49-F238E27FC236}">
+                <a16:creationId xmlns:a16="http://schemas.microsoft.com/office/drawing/2014/main" id="{F1EC634F-81EC-7565-6034-6FDE32B1092C}"/>
+              </a:ext>
+            </a:extLst>
+          </p:cNvPr>
+          <p:cNvCxnSpPr>
+            <a:cxnSpLocks/>
+            <a:stCxn id="59" idx="2"/>
+            <a:endCxn id="61" idx="0"/>
+          </p:cNvCxnSpPr>
+          <p:nvPr/>
+        </p:nvCxnSpPr>
+        <p:spPr>
+          <a:xfrm>
+            <a:off x="1641484" y="3654007"/>
+            <a:ext cx="0" cy="405535"/>
+          </a:xfrm>
+          <a:prstGeom prst="straightConnector1">
+            <a:avLst/>
+          </a:prstGeom>
+          <a:ln>
+            <a:solidFill>
+              <a:schemeClr val="tx1"/>
+            </a:solidFill>
+            <a:prstDash val="solid"/>
+            <a:headEnd type="none" w="lg" len="lg"/>
+            <a:tailEnd type="triangle" w="lg" len="lg"/>
+          </a:ln>
+        </p:spPr>
+        <p:style>
+          <a:lnRef idx="2">
+            <a:schemeClr val="accent1"/>
+          </a:lnRef>
+          <a:fillRef idx="0">
+            <a:schemeClr val="accent1"/>
+          </a:fillRef>
+          <a:effectRef idx="1">
+            <a:schemeClr val="accent1"/>
+          </a:effectRef>
+          <a:fontRef idx="minor">
+            <a:schemeClr val="tx1"/>
+          </a:fontRef>
+        </p:style>
+      </p:cxnSp>
+      <p:cxnSp>
+        <p:nvCxnSpPr>
+          <p:cNvPr id="75" name="Straight Arrow Connector 74">
+            <a:extLst>
+              <a:ext uri="{FF2B5EF4-FFF2-40B4-BE49-F238E27FC236}">
+                <a16:creationId xmlns:a16="http://schemas.microsoft.com/office/drawing/2014/main" id="{9C4A6C42-96DD-ED96-C600-CCCF5E1EC01C}"/>
+              </a:ext>
+            </a:extLst>
+          </p:cNvPr>
+          <p:cNvCxnSpPr>
+            <a:cxnSpLocks/>
+            <a:stCxn id="61" idx="2"/>
+            <a:endCxn id="67" idx="0"/>
+          </p:cNvCxnSpPr>
+          <p:nvPr/>
+        </p:nvCxnSpPr>
+        <p:spPr>
+          <a:xfrm>
+            <a:off x="1641484" y="4411586"/>
+            <a:ext cx="0" cy="733969"/>
+          </a:xfrm>
+          <a:prstGeom prst="straightConnector1">
+            <a:avLst/>
+          </a:prstGeom>
+          <a:ln>
+            <a:solidFill>
+              <a:schemeClr val="tx1"/>
+            </a:solidFill>
+            <a:prstDash val="solid"/>
+            <a:headEnd type="none" w="lg" len="lg"/>
+            <a:tailEnd type="triangle" w="lg" len="lg"/>
+          </a:ln>
+        </p:spPr>
+        <p:style>
+          <a:lnRef idx="2">
+            <a:schemeClr val="accent1"/>
+          </a:lnRef>
+          <a:fillRef idx="0">
+            <a:schemeClr val="accent1"/>
+          </a:fillRef>
+          <a:effectRef idx="1">
+            <a:schemeClr val="accent1"/>
+          </a:effectRef>
+          <a:fontRef idx="minor">
+            <a:schemeClr val="tx1"/>
+          </a:fontRef>
+        </p:style>
+      </p:cxnSp>
+      <p:cxnSp>
+        <p:nvCxnSpPr>
+          <p:cNvPr id="76" name="Connector: Elbow 75">
+            <a:extLst>
+              <a:ext uri="{FF2B5EF4-FFF2-40B4-BE49-F238E27FC236}">
+                <a16:creationId xmlns:a16="http://schemas.microsoft.com/office/drawing/2014/main" id="{6F3B745A-5E42-6A2F-AC94-C88D48DDC261}"/>
+              </a:ext>
+            </a:extLst>
+          </p:cNvPr>
+          <p:cNvCxnSpPr>
+            <a:cxnSpLocks/>
+            <a:stCxn id="139" idx="3"/>
+            <a:endCxn id="37" idx="1"/>
+          </p:cNvCxnSpPr>
+          <p:nvPr/>
+        </p:nvCxnSpPr>
+        <p:spPr>
+          <a:xfrm flipV="1">
+            <a:off x="4759350" y="2008631"/>
+            <a:ext cx="693330" cy="752010"/>
+          </a:xfrm>
+          <a:prstGeom prst="bentConnector3">
+            <a:avLst>
+              <a:gd name="adj1" fmla="val 50000"/>
+            </a:avLst>
+          </a:prstGeom>
+          <a:ln>
+            <a:solidFill>
+              <a:schemeClr val="tx1"/>
+            </a:solidFill>
+            <a:prstDash val="solid"/>
+            <a:headEnd type="none" w="lg" len="lg"/>
+            <a:tailEnd type="triangle" w="lg" len="lg"/>
+          </a:ln>
+        </p:spPr>
+        <p:style>
+          <a:lnRef idx="2">
+            <a:schemeClr val="accent1"/>
+          </a:lnRef>
+          <a:fillRef idx="0">
+            <a:schemeClr val="accent1"/>
+          </a:fillRef>
+          <a:effectRef idx="1">
+            <a:schemeClr val="accent1"/>
+          </a:effectRef>
+          <a:fontRef idx="minor">
+            <a:schemeClr val="tx1"/>
+          </a:fontRef>
+        </p:style>
+      </p:cxnSp>
+      <p:cxnSp>
+        <p:nvCxnSpPr>
+          <p:cNvPr id="80" name="Connector: Elbow 79">
+            <a:extLst>
+              <a:ext uri="{FF2B5EF4-FFF2-40B4-BE49-F238E27FC236}">
+                <a16:creationId xmlns:a16="http://schemas.microsoft.com/office/drawing/2014/main" id="{01315127-A472-6F6C-A811-9C83B98A9B0C}"/>
+              </a:ext>
+            </a:extLst>
+          </p:cNvPr>
+          <p:cNvCxnSpPr>
+            <a:cxnSpLocks/>
+            <a:stCxn id="139" idx="3"/>
+            <a:endCxn id="42" idx="1"/>
+          </p:cNvCxnSpPr>
+          <p:nvPr/>
+        </p:nvCxnSpPr>
+        <p:spPr>
+          <a:xfrm flipV="1">
+            <a:off x="4759350" y="2755875"/>
+            <a:ext cx="693330" cy="4766"/>
+          </a:xfrm>
+          <a:prstGeom prst="bentConnector3">
+            <a:avLst>
+              <a:gd name="adj1" fmla="val 50000"/>
+            </a:avLst>
+          </a:prstGeom>
+          <a:ln>
+            <a:solidFill>
+              <a:schemeClr val="tx1"/>
+            </a:solidFill>
+            <a:prstDash val="solid"/>
+            <a:headEnd type="none" w="lg" len="lg"/>
+            <a:tailEnd type="triangle" w="lg" len="lg"/>
+          </a:ln>
+        </p:spPr>
+        <p:style>
+          <a:lnRef idx="2">
+            <a:schemeClr val="accent1"/>
+          </a:lnRef>
+          <a:fillRef idx="0">
+            <a:schemeClr val="accent1"/>
+          </a:fillRef>
+          <a:effectRef idx="1">
+            <a:schemeClr val="accent1"/>
+          </a:effectRef>
+          <a:fontRef idx="minor">
+            <a:schemeClr val="tx1"/>
+          </a:fontRef>
+        </p:style>
+      </p:cxnSp>
+      <p:cxnSp>
+        <p:nvCxnSpPr>
+          <p:cNvPr id="83" name="Connector: Elbow 82">
+            <a:extLst>
+              <a:ext uri="{FF2B5EF4-FFF2-40B4-BE49-F238E27FC236}">
+                <a16:creationId xmlns:a16="http://schemas.microsoft.com/office/drawing/2014/main" id="{64DA150E-05B6-53AC-9CBC-9CA6F7A328A2}"/>
+              </a:ext>
+            </a:extLst>
+          </p:cNvPr>
+          <p:cNvCxnSpPr>
+            <a:cxnSpLocks/>
+            <a:stCxn id="139" idx="3"/>
+            <a:endCxn id="47" idx="1"/>
+          </p:cNvCxnSpPr>
+          <p:nvPr/>
+        </p:nvCxnSpPr>
+        <p:spPr>
+          <a:xfrm>
+            <a:off x="4759350" y="2760641"/>
+            <a:ext cx="693330" cy="742478"/>
+          </a:xfrm>
+          <a:prstGeom prst="bentConnector3">
+            <a:avLst>
+              <a:gd name="adj1" fmla="val 50000"/>
+            </a:avLst>
+          </a:prstGeom>
+          <a:ln>
+            <a:solidFill>
+              <a:schemeClr val="tx1"/>
+            </a:solidFill>
+            <a:prstDash val="solid"/>
+            <a:headEnd type="none" w="lg" len="lg"/>
+            <a:tailEnd type="triangle" w="lg" len="lg"/>
+          </a:ln>
+        </p:spPr>
+        <p:style>
+          <a:lnRef idx="2">
+            <a:schemeClr val="accent1"/>
+          </a:lnRef>
+          <a:fillRef idx="0">
+            <a:schemeClr val="accent1"/>
+          </a:fillRef>
+          <a:effectRef idx="1">
+            <a:schemeClr val="accent1"/>
+          </a:effectRef>
+          <a:fontRef idx="minor">
+            <a:schemeClr val="tx1"/>
+          </a:fontRef>
+        </p:style>
+      </p:cxnSp>
+      <p:cxnSp>
+        <p:nvCxnSpPr>
+          <p:cNvPr id="86" name="Connector: Elbow 85">
+            <a:extLst>
+              <a:ext uri="{FF2B5EF4-FFF2-40B4-BE49-F238E27FC236}">
+                <a16:creationId xmlns:a16="http://schemas.microsoft.com/office/drawing/2014/main" id="{075500B1-E35A-5F0A-E4D6-499293776931}"/>
+              </a:ext>
+            </a:extLst>
+          </p:cNvPr>
+          <p:cNvCxnSpPr>
+            <a:cxnSpLocks/>
+            <a:stCxn id="139" idx="3"/>
+            <a:endCxn id="54" idx="1"/>
+          </p:cNvCxnSpPr>
+          <p:nvPr/>
+        </p:nvCxnSpPr>
+        <p:spPr>
+          <a:xfrm>
+            <a:off x="4759350" y="2760641"/>
+            <a:ext cx="693330" cy="1450605"/>
+          </a:xfrm>
+          <a:prstGeom prst="bentConnector3">
+            <a:avLst>
+              <a:gd name="adj1" fmla="val 50000"/>
+            </a:avLst>
+          </a:prstGeom>
+          <a:ln>
+            <a:solidFill>
+              <a:schemeClr val="tx1"/>
+            </a:solidFill>
+            <a:prstDash val="solid"/>
+            <a:headEnd type="none" w="lg" len="lg"/>
+            <a:tailEnd type="triangle" w="lg" len="lg"/>
+          </a:ln>
+        </p:spPr>
+        <p:style>
+          <a:lnRef idx="2">
+            <a:schemeClr val="accent1"/>
+          </a:lnRef>
+          <a:fillRef idx="0">
+            <a:schemeClr val="accent1"/>
+          </a:fillRef>
+          <a:effectRef idx="1">
+            <a:schemeClr val="accent1"/>
+          </a:effectRef>
+          <a:fontRef idx="minor">
+            <a:schemeClr val="tx1"/>
+          </a:fontRef>
+        </p:style>
+      </p:cxnSp>
+      <p:cxnSp>
+        <p:nvCxnSpPr>
+          <p:cNvPr id="91" name="Straight Arrow Connector 90">
+            <a:extLst>
+              <a:ext uri="{FF2B5EF4-FFF2-40B4-BE49-F238E27FC236}">
+                <a16:creationId xmlns:a16="http://schemas.microsoft.com/office/drawing/2014/main" id="{B4C793B9-737A-1E5D-F2B5-8B59FA715B06}"/>
+              </a:ext>
+            </a:extLst>
+          </p:cNvPr>
+          <p:cNvCxnSpPr>
+            <a:cxnSpLocks/>
+            <a:stCxn id="55" idx="3"/>
+            <a:endCxn id="16" idx="1"/>
+          </p:cNvCxnSpPr>
+          <p:nvPr/>
+        </p:nvCxnSpPr>
+        <p:spPr>
+          <a:xfrm>
+            <a:off x="7030020" y="4256782"/>
+            <a:ext cx="480464" cy="1"/>
+          </a:xfrm>
+          <a:prstGeom prst="straightConnector1">
+            <a:avLst/>
+          </a:prstGeom>
+          <a:ln>
+            <a:solidFill>
+              <a:schemeClr val="tx1"/>
+            </a:solidFill>
+            <a:prstDash val="solid"/>
+            <a:headEnd type="none" w="lg" len="lg"/>
+            <a:tailEnd type="triangle" w="lg" len="lg"/>
+          </a:ln>
+        </p:spPr>
+        <p:style>
+          <a:lnRef idx="2">
+            <a:schemeClr val="accent1"/>
+          </a:lnRef>
+          <a:fillRef idx="0">
+            <a:schemeClr val="accent1"/>
+          </a:fillRef>
+          <a:effectRef idx="1">
+            <a:schemeClr val="accent1"/>
+          </a:effectRef>
+          <a:fontRef idx="minor">
+            <a:schemeClr val="tx1"/>
+          </a:fontRef>
+        </p:style>
+      </p:cxnSp>
+      <p:cxnSp>
+        <p:nvCxnSpPr>
+          <p:cNvPr id="94" name="Straight Arrow Connector 93">
+            <a:extLst>
+              <a:ext uri="{FF2B5EF4-FFF2-40B4-BE49-F238E27FC236}">
+                <a16:creationId xmlns:a16="http://schemas.microsoft.com/office/drawing/2014/main" id="{5C162AB1-9507-49E4-3B7C-2105CDE11F9B}"/>
+              </a:ext>
+            </a:extLst>
+          </p:cNvPr>
+          <p:cNvCxnSpPr>
+            <a:cxnSpLocks/>
+            <a:stCxn id="48" idx="3"/>
+            <a:endCxn id="14" idx="1"/>
+          </p:cNvCxnSpPr>
+          <p:nvPr/>
+        </p:nvCxnSpPr>
+        <p:spPr>
+          <a:xfrm flipV="1">
+            <a:off x="7030020" y="3548258"/>
+            <a:ext cx="488105" cy="397"/>
+          </a:xfrm>
+          <a:prstGeom prst="straightConnector1">
+            <a:avLst/>
+          </a:prstGeom>
+          <a:ln>
+            <a:solidFill>
+              <a:schemeClr val="tx1"/>
+            </a:solidFill>
+            <a:prstDash val="solid"/>
+            <a:headEnd type="none" w="lg" len="lg"/>
+            <a:tailEnd type="triangle" w="lg" len="lg"/>
+          </a:ln>
+        </p:spPr>
+        <p:style>
+          <a:lnRef idx="2">
+            <a:schemeClr val="accent1"/>
+          </a:lnRef>
+          <a:fillRef idx="0">
+            <a:schemeClr val="accent1"/>
+          </a:fillRef>
+          <a:effectRef idx="1">
+            <a:schemeClr val="accent1"/>
+          </a:effectRef>
+          <a:fontRef idx="minor">
+            <a:schemeClr val="tx1"/>
+          </a:fontRef>
+        </p:style>
+      </p:cxnSp>
+      <p:cxnSp>
+        <p:nvCxnSpPr>
+          <p:cNvPr id="98" name="Straight Arrow Connector 97">
+            <a:extLst>
+              <a:ext uri="{FF2B5EF4-FFF2-40B4-BE49-F238E27FC236}">
+                <a16:creationId xmlns:a16="http://schemas.microsoft.com/office/drawing/2014/main" id="{FA7A1A37-D98B-2431-45A6-B967BC5814A8}"/>
+              </a:ext>
+            </a:extLst>
+          </p:cNvPr>
+          <p:cNvCxnSpPr>
+            <a:cxnSpLocks/>
+            <a:stCxn id="43" idx="3"/>
+            <a:endCxn id="13" idx="1"/>
+          </p:cNvCxnSpPr>
+          <p:nvPr/>
+        </p:nvCxnSpPr>
+        <p:spPr>
+          <a:xfrm flipV="1">
+            <a:off x="7030020" y="2799411"/>
+            <a:ext cx="480464" cy="2000"/>
+          </a:xfrm>
+          <a:prstGeom prst="straightConnector1">
+            <a:avLst/>
+          </a:prstGeom>
+          <a:ln>
+            <a:solidFill>
+              <a:schemeClr val="tx1"/>
+            </a:solidFill>
+            <a:prstDash val="solid"/>
+            <a:headEnd type="none" w="lg" len="lg"/>
+            <a:tailEnd type="triangle" w="lg" len="lg"/>
+          </a:ln>
+        </p:spPr>
+        <p:style>
+          <a:lnRef idx="2">
+            <a:schemeClr val="accent1"/>
+          </a:lnRef>
+          <a:fillRef idx="0">
+            <a:schemeClr val="accent1"/>
+          </a:fillRef>
+          <a:effectRef idx="1">
+            <a:schemeClr val="accent1"/>
+          </a:effectRef>
+          <a:fontRef idx="minor">
+            <a:schemeClr val="tx1"/>
+          </a:fontRef>
+        </p:style>
+      </p:cxnSp>
+      <p:cxnSp>
+        <p:nvCxnSpPr>
+          <p:cNvPr id="102" name="Straight Arrow Connector 101">
+            <a:extLst>
+              <a:ext uri="{FF2B5EF4-FFF2-40B4-BE49-F238E27FC236}">
+                <a16:creationId xmlns:a16="http://schemas.microsoft.com/office/drawing/2014/main" id="{4CE3731F-69E5-07E3-AF09-F174CD210325}"/>
+              </a:ext>
+            </a:extLst>
+          </p:cNvPr>
+          <p:cNvCxnSpPr>
+            <a:cxnSpLocks/>
+            <a:stCxn id="38" idx="3"/>
+            <a:endCxn id="12" idx="1"/>
+          </p:cNvCxnSpPr>
+          <p:nvPr/>
+        </p:nvCxnSpPr>
+        <p:spPr>
+          <a:xfrm>
+            <a:off x="7030020" y="2054167"/>
+            <a:ext cx="480464" cy="10962"/>
+          </a:xfrm>
+          <a:prstGeom prst="straightConnector1">
+            <a:avLst/>
+          </a:prstGeom>
+          <a:ln>
+            <a:solidFill>
+              <a:schemeClr val="tx1"/>
+            </a:solidFill>
+            <a:prstDash val="solid"/>
+            <a:headEnd type="none" w="lg" len="lg"/>
+            <a:tailEnd type="triangle" w="lg" len="lg"/>
+          </a:ln>
+        </p:spPr>
+        <p:style>
+          <a:lnRef idx="2">
+            <a:schemeClr val="accent1"/>
+          </a:lnRef>
+          <a:fillRef idx="0">
+            <a:schemeClr val="accent1"/>
+          </a:fillRef>
+          <a:effectRef idx="1">
+            <a:schemeClr val="accent1"/>
+          </a:effectRef>
+          <a:fontRef idx="minor">
+            <a:schemeClr val="tx1"/>
+          </a:fontRef>
+        </p:style>
+      </p:cxnSp>
+      <p:cxnSp>
+        <p:nvCxnSpPr>
+          <p:cNvPr id="107" name="Straight Arrow Connector 106">
+            <a:extLst>
+              <a:ext uri="{FF2B5EF4-FFF2-40B4-BE49-F238E27FC236}">
+                <a16:creationId xmlns:a16="http://schemas.microsoft.com/office/drawing/2014/main" id="{CCD4ACBD-F7EE-76FC-1120-4DFB8E9DD351}"/>
+              </a:ext>
+            </a:extLst>
+          </p:cNvPr>
+          <p:cNvCxnSpPr>
+            <a:cxnSpLocks/>
+            <a:stCxn id="31" idx="3"/>
+            <a:endCxn id="15" idx="1"/>
+          </p:cNvCxnSpPr>
+          <p:nvPr/>
+        </p:nvCxnSpPr>
+        <p:spPr>
+          <a:xfrm>
+            <a:off x="7030020" y="1306923"/>
+            <a:ext cx="480464" cy="9359"/>
+          </a:xfrm>
+          <a:prstGeom prst="straightConnector1">
+            <a:avLst/>
+          </a:prstGeom>
+          <a:ln>
+            <a:solidFill>
+              <a:schemeClr val="tx1"/>
+            </a:solidFill>
+            <a:prstDash val="solid"/>
+            <a:headEnd type="none" w="lg" len="lg"/>
+            <a:tailEnd type="triangle" w="lg" len="lg"/>
+          </a:ln>
+        </p:spPr>
+        <p:style>
+          <a:lnRef idx="2">
+            <a:schemeClr val="accent1"/>
+          </a:lnRef>
+          <a:fillRef idx="0">
+            <a:schemeClr val="accent1"/>
+          </a:fillRef>
+          <a:effectRef idx="1">
+            <a:schemeClr val="accent1"/>
+          </a:effectRef>
+          <a:fontRef idx="minor">
+            <a:schemeClr val="tx1"/>
+          </a:fontRef>
+        </p:style>
+      </p:cxnSp>
+      <p:cxnSp>
+        <p:nvCxnSpPr>
+          <p:cNvPr id="110" name="Connector: Elbow 109">
+            <a:extLst>
+              <a:ext uri="{FF2B5EF4-FFF2-40B4-BE49-F238E27FC236}">
+                <a16:creationId xmlns:a16="http://schemas.microsoft.com/office/drawing/2014/main" id="{63358344-9742-3010-DD53-BC3788EAEBB6}"/>
+              </a:ext>
+            </a:extLst>
+          </p:cNvPr>
+          <p:cNvCxnSpPr>
+            <a:cxnSpLocks/>
+            <a:stCxn id="126" idx="2"/>
+            <a:endCxn id="122" idx="3"/>
+          </p:cNvCxnSpPr>
+          <p:nvPr/>
+        </p:nvCxnSpPr>
+        <p:spPr>
+          <a:xfrm rot="5400000" flipH="1">
+            <a:off x="4608086" y="2497432"/>
+            <a:ext cx="820744" cy="3384323"/>
+          </a:xfrm>
+          <a:prstGeom prst="bentConnector4">
+            <a:avLst>
+              <a:gd name="adj1" fmla="val -15743"/>
+              <a:gd name="adj2" fmla="val 88104"/>
+            </a:avLst>
+          </a:prstGeom>
+          <a:ln>
+            <a:solidFill>
+              <a:schemeClr val="tx1"/>
+            </a:solidFill>
+            <a:prstDash val="solid"/>
+            <a:headEnd type="none" w="lg" len="lg"/>
+            <a:tailEnd type="triangle" w="lg" len="lg"/>
+          </a:ln>
+        </p:spPr>
+        <p:style>
+          <a:lnRef idx="2">
+            <a:schemeClr val="accent1"/>
+          </a:lnRef>
+          <a:fillRef idx="0">
+            <a:schemeClr val="accent1"/>
+          </a:fillRef>
+          <a:effectRef idx="1">
+            <a:schemeClr val="accent1"/>
+          </a:effectRef>
+          <a:fontRef idx="minor">
+            <a:schemeClr val="tx1"/>
+          </a:fontRef>
+        </p:style>
+      </p:cxnSp>
+      <p:cxnSp>
+        <p:nvCxnSpPr>
+          <p:cNvPr id="114" name="Connector: Elbow 113">
+            <a:extLst>
+              <a:ext uri="{FF2B5EF4-FFF2-40B4-BE49-F238E27FC236}">
+                <a16:creationId xmlns:a16="http://schemas.microsoft.com/office/drawing/2014/main" id="{4F600B21-4F03-2F00-2223-C8FC118A72D1}"/>
+              </a:ext>
+            </a:extLst>
+          </p:cNvPr>
+          <p:cNvCxnSpPr>
+            <a:cxnSpLocks/>
+            <a:stCxn id="139" idx="3"/>
+            <a:endCxn id="30" idx="1"/>
+          </p:cNvCxnSpPr>
+          <p:nvPr/>
+        </p:nvCxnSpPr>
+        <p:spPr>
+          <a:xfrm flipV="1">
+            <a:off x="4759350" y="1276687"/>
+            <a:ext cx="693330" cy="1483954"/>
+          </a:xfrm>
+          <a:prstGeom prst="bentConnector3">
+            <a:avLst>
+              <a:gd name="adj1" fmla="val 50000"/>
+            </a:avLst>
+          </a:prstGeom>
+          <a:ln>
+            <a:solidFill>
+              <a:schemeClr val="tx1"/>
+            </a:solidFill>
+            <a:prstDash val="solid"/>
+            <a:headEnd type="none" w="lg" len="lg"/>
+            <a:tailEnd type="triangle" w="lg" len="lg"/>
+          </a:ln>
+        </p:spPr>
+        <p:style>
+          <a:lnRef idx="2">
+            <a:schemeClr val="accent1"/>
+          </a:lnRef>
+          <a:fillRef idx="0">
+            <a:schemeClr val="accent1"/>
+          </a:fillRef>
+          <a:effectRef idx="1">
+            <a:schemeClr val="accent1"/>
+          </a:effectRef>
+          <a:fontRef idx="minor">
+            <a:schemeClr val="tx1"/>
+          </a:fontRef>
+        </p:style>
+      </p:cxnSp>
+      <p:pic>
+        <p:nvPicPr>
+          <p:cNvPr id="118" name="Picture 117">
+            <a:extLst>
+              <a:ext uri="{FF2B5EF4-FFF2-40B4-BE49-F238E27FC236}">
+                <a16:creationId xmlns:a16="http://schemas.microsoft.com/office/drawing/2014/main" id="{9B2F920E-82BE-A7E1-ABA4-ED328DBA8665}"/>
+              </a:ext>
+            </a:extLst>
+          </p:cNvPr>
+          <p:cNvPicPr>
+            <a:picLocks noChangeAspect="1"/>
+          </p:cNvPicPr>
+          <p:nvPr/>
+        </p:nvPicPr>
+        <p:blipFill>
+          <a:blip r:embed="rId14"/>
+          <a:stretch>
+            <a:fillRect/>
+          </a:stretch>
+        </p:blipFill>
+        <p:spPr>
+          <a:xfrm>
+            <a:off x="8837660" y="4246138"/>
+            <a:ext cx="285750" cy="276225"/>
+          </a:xfrm>
+          <a:prstGeom prst="rect">
+            <a:avLst/>
+          </a:prstGeom>
+        </p:spPr>
+      </p:pic>
+      <p:pic>
+        <p:nvPicPr>
+          <p:cNvPr id="119" name="Picture 118">
+            <a:extLst>
+              <a:ext uri="{FF2B5EF4-FFF2-40B4-BE49-F238E27FC236}">
+                <a16:creationId xmlns:a16="http://schemas.microsoft.com/office/drawing/2014/main" id="{3BAE4344-8AEC-9BF7-00A4-BDE679BE10E8}"/>
+              </a:ext>
+            </a:extLst>
+          </p:cNvPr>
+          <p:cNvPicPr>
+            <a:picLocks noChangeAspect="1"/>
+          </p:cNvPicPr>
+          <p:nvPr/>
+        </p:nvPicPr>
+        <p:blipFill>
+          <a:blip r:embed="rId14"/>
+          <a:stretch>
+            <a:fillRect/>
+          </a:stretch>
+        </p:blipFill>
+        <p:spPr>
+          <a:xfrm>
+            <a:off x="8571077" y="1317045"/>
+            <a:ext cx="285750" cy="276225"/>
+          </a:xfrm>
+          <a:prstGeom prst="rect">
+            <a:avLst/>
+          </a:prstGeom>
+        </p:spPr>
+      </p:pic>
+      <p:grpSp>
+        <p:nvGrpSpPr>
+          <p:cNvPr id="136" name="Group 135">
+            <a:extLst>
+              <a:ext uri="{FF2B5EF4-FFF2-40B4-BE49-F238E27FC236}">
+                <a16:creationId xmlns:a16="http://schemas.microsoft.com/office/drawing/2014/main" id="{E750F6D1-582A-DA69-A264-A01C97220C43}"/>
+              </a:ext>
+            </a:extLst>
+          </p:cNvPr>
+          <p:cNvGrpSpPr/>
+          <p:nvPr/>
+        </p:nvGrpSpPr>
+        <p:grpSpPr>
+          <a:xfrm>
+            <a:off x="1321040" y="2593737"/>
+            <a:ext cx="1899240" cy="523220"/>
+            <a:chOff x="5303318" y="5780075"/>
+            <a:chExt cx="1899240" cy="523220"/>
+          </a:xfrm>
+        </p:grpSpPr>
+        <p:sp>
+          <p:nvSpPr>
+            <p:cNvPr id="132" name="Rectangle: Rounded Corners 131">
+              <a:extLst>
+                <a:ext uri="{FF2B5EF4-FFF2-40B4-BE49-F238E27FC236}">
+                  <a16:creationId xmlns:a16="http://schemas.microsoft.com/office/drawing/2014/main" id="{5C24D62E-8541-6F4A-247B-89180CF623B0}"/>
+                </a:ext>
+              </a:extLst>
+            </p:cNvPr>
+            <p:cNvSpPr/>
+            <p:nvPr/>
+          </p:nvSpPr>
+          <p:spPr>
+            <a:xfrm>
+              <a:off x="5303318" y="5812687"/>
+              <a:ext cx="1871886" cy="467788"/>
+            </a:xfrm>
+            <a:prstGeom prst="roundRect">
+              <a:avLst/>
+            </a:prstGeom>
+            <a:solidFill>
+              <a:srgbClr val="B2D4EB"/>
+            </a:solidFill>
+            <a:ln>
+              <a:solidFill>
+                <a:schemeClr val="tx1"/>
+              </a:solidFill>
+            </a:ln>
+          </p:spPr>
+          <p:style>
+            <a:lnRef idx="2">
+              <a:schemeClr val="accent1">
+                <a:shade val="15000"/>
+              </a:schemeClr>
+            </a:lnRef>
+            <a:fillRef idx="1">
+              <a:schemeClr val="accent1"/>
+            </a:fillRef>
+            <a:effectRef idx="0">
+              <a:schemeClr val="accent1"/>
+            </a:effectRef>
+            <a:fontRef idx="minor">
+              <a:schemeClr val="lt1"/>
+            </a:fontRef>
+          </p:style>
+          <p:txBody>
+            <a:bodyPr rtlCol="0" anchor="ctr"/>
+            <a:lstStyle/>
+            <a:p>
+              <a:pPr algn="ctr"/>
+              <a:endParaRPr lang="en-US" i="1" dirty="0">
+                <a:solidFill>
+                  <a:schemeClr val="tx1"/>
+                </a:solidFill>
+              </a:endParaRPr>
+            </a:p>
+          </p:txBody>
+        </p:sp>
+        <p:grpSp>
+          <p:nvGrpSpPr>
+            <p:cNvPr id="133" name="Group 132">
+              <a:extLst>
+                <a:ext uri="{FF2B5EF4-FFF2-40B4-BE49-F238E27FC236}">
+                  <a16:creationId xmlns:a16="http://schemas.microsoft.com/office/drawing/2014/main" id="{E76D97CA-1E05-395D-C479-7118FA28DFB3}"/>
+                </a:ext>
+              </a:extLst>
+            </p:cNvPr>
+            <p:cNvGrpSpPr/>
+            <p:nvPr/>
+          </p:nvGrpSpPr>
+          <p:grpSpPr>
+            <a:xfrm>
+              <a:off x="5357726" y="5780075"/>
+              <a:ext cx="1844832" cy="523220"/>
+              <a:chOff x="1481464" y="1015077"/>
+              <a:chExt cx="1844832" cy="523220"/>
+            </a:xfrm>
+          </p:grpSpPr>
+          <p:pic>
+            <p:nvPicPr>
+              <p:cNvPr id="134" name="Picture 133">
+                <a:extLst>
+                  <a:ext uri="{FF2B5EF4-FFF2-40B4-BE49-F238E27FC236}">
+                    <a16:creationId xmlns:a16="http://schemas.microsoft.com/office/drawing/2014/main" id="{64B82A41-9F17-B43B-1DDA-F7D796552CE8}"/>
+                  </a:ext>
+                </a:extLst>
+              </p:cNvPr>
+              <p:cNvPicPr>
+                <a:picLocks noChangeAspect="1"/>
+              </p:cNvPicPr>
+              <p:nvPr/>
+            </p:nvPicPr>
+            <p:blipFill>
+              <a:blip r:embed="rId5"/>
+              <a:stretch>
+                <a:fillRect/>
+              </a:stretch>
+            </p:blipFill>
+            <p:spPr>
+              <a:xfrm>
+                <a:off x="1481464" y="1175341"/>
+                <a:ext cx="320040" cy="202692"/>
+              </a:xfrm>
+              <a:prstGeom prst="rect">
+                <a:avLst/>
+              </a:prstGeom>
+            </p:spPr>
+          </p:pic>
+          <p:sp>
+            <p:nvSpPr>
+              <p:cNvPr id="135" name="TextBox 134">
+                <a:extLst>
+                  <a:ext uri="{FF2B5EF4-FFF2-40B4-BE49-F238E27FC236}">
+                    <a16:creationId xmlns:a16="http://schemas.microsoft.com/office/drawing/2014/main" id="{61769A20-9C78-F726-6A35-1E875B09D31F}"/>
+                  </a:ext>
+                </a:extLst>
+              </p:cNvPr>
+              <p:cNvSpPr txBox="1"/>
+              <p:nvPr/>
+            </p:nvSpPr>
+            <p:spPr>
+              <a:xfrm>
+                <a:off x="1801504" y="1015077"/>
+                <a:ext cx="1524792" cy="523220"/>
+              </a:xfrm>
+              <a:prstGeom prst="rect">
+                <a:avLst/>
+              </a:prstGeom>
+              <a:noFill/>
+            </p:spPr>
+            <p:txBody>
+              <a:bodyPr wrap="square" rtlCol="0" anchor="ctr">
+                <a:spAutoFit/>
+              </a:bodyPr>
+              <a:lstStyle/>
+              <a:p>
+                <a:r>
+                  <a:rPr lang="en-US" sz="1400" dirty="0"/>
+                  <a:t>Agent Integration</a:t>
+                </a:r>
+              </a:p>
+              <a:p>
+                <a:r>
+                  <a:rPr lang="en-US" sz="1400" dirty="0"/>
+                  <a:t>Subnet</a:t>
+                </a:r>
+              </a:p>
+            </p:txBody>
+          </p:sp>
+        </p:grpSp>
+      </p:grpSp>
+      <p:grpSp>
+        <p:nvGrpSpPr>
+          <p:cNvPr id="138" name="Group 137">
+            <a:extLst>
+              <a:ext uri="{FF2B5EF4-FFF2-40B4-BE49-F238E27FC236}">
+                <a16:creationId xmlns:a16="http://schemas.microsoft.com/office/drawing/2014/main" id="{45D67EF5-AEC1-087B-AF71-536B6BC5F225}"/>
+              </a:ext>
+            </a:extLst>
+          </p:cNvPr>
+          <p:cNvGrpSpPr/>
+          <p:nvPr/>
+        </p:nvGrpSpPr>
+        <p:grpSpPr>
+          <a:xfrm>
+            <a:off x="3494250" y="2494135"/>
+            <a:ext cx="1265100" cy="523220"/>
+            <a:chOff x="5303318" y="5780075"/>
+            <a:chExt cx="1265100" cy="523220"/>
+          </a:xfrm>
+        </p:grpSpPr>
+        <p:sp>
+          <p:nvSpPr>
+            <p:cNvPr id="139" name="Rectangle: Rounded Corners 138">
+              <a:extLst>
+                <a:ext uri="{FF2B5EF4-FFF2-40B4-BE49-F238E27FC236}">
+                  <a16:creationId xmlns:a16="http://schemas.microsoft.com/office/drawing/2014/main" id="{9C46303A-E37D-595C-2C4F-53396BA800A9}"/>
+                </a:ext>
+              </a:extLst>
+            </p:cNvPr>
+            <p:cNvSpPr/>
+            <p:nvPr/>
+          </p:nvSpPr>
+          <p:spPr>
+            <a:xfrm>
+              <a:off x="5303318" y="5812687"/>
+              <a:ext cx="1265100" cy="467788"/>
+            </a:xfrm>
+            <a:prstGeom prst="roundRect">
+              <a:avLst/>
+            </a:prstGeom>
+            <a:solidFill>
+              <a:srgbClr val="B2D4EB"/>
+            </a:solidFill>
+            <a:ln>
+              <a:solidFill>
+                <a:schemeClr val="tx1"/>
+              </a:solidFill>
+            </a:ln>
+          </p:spPr>
+          <p:style>
+            <a:lnRef idx="2">
+              <a:schemeClr val="accent1">
+                <a:shade val="15000"/>
+              </a:schemeClr>
+            </a:lnRef>
+            <a:fillRef idx="1">
+              <a:schemeClr val="accent1"/>
+            </a:fillRef>
+            <a:effectRef idx="0">
+              <a:schemeClr val="accent1"/>
+            </a:effectRef>
+            <a:fontRef idx="minor">
+              <a:schemeClr val="lt1"/>
+            </a:fontRef>
+          </p:style>
+          <p:txBody>
+            <a:bodyPr rtlCol="0" anchor="ctr"/>
+            <a:lstStyle/>
+            <a:p>
+              <a:pPr algn="ctr"/>
+              <a:endParaRPr lang="en-US" i="1" dirty="0">
+                <a:solidFill>
+                  <a:schemeClr val="tx1"/>
+                </a:solidFill>
+              </a:endParaRPr>
+            </a:p>
+          </p:txBody>
+        </p:sp>
+        <p:grpSp>
+          <p:nvGrpSpPr>
+            <p:cNvPr id="140" name="Group 139">
+              <a:extLst>
+                <a:ext uri="{FF2B5EF4-FFF2-40B4-BE49-F238E27FC236}">
+                  <a16:creationId xmlns:a16="http://schemas.microsoft.com/office/drawing/2014/main" id="{4C641854-6324-80DC-F090-6A6F68EFD060}"/>
+                </a:ext>
+              </a:extLst>
+            </p:cNvPr>
+            <p:cNvGrpSpPr/>
+            <p:nvPr/>
+          </p:nvGrpSpPr>
+          <p:grpSpPr>
+            <a:xfrm>
+              <a:off x="5357726" y="5780075"/>
+              <a:ext cx="1044328" cy="523220"/>
+              <a:chOff x="1481464" y="1015077"/>
+              <a:chExt cx="1044328" cy="523220"/>
+            </a:xfrm>
+          </p:grpSpPr>
+          <p:pic>
+            <p:nvPicPr>
+              <p:cNvPr id="141" name="Picture 140">
+                <a:extLst>
+                  <a:ext uri="{FF2B5EF4-FFF2-40B4-BE49-F238E27FC236}">
+                    <a16:creationId xmlns:a16="http://schemas.microsoft.com/office/drawing/2014/main" id="{A036AE5E-9B84-2AAF-F6C6-0FAD99557066}"/>
+                  </a:ext>
+                </a:extLst>
+              </p:cNvPr>
+              <p:cNvPicPr>
+                <a:picLocks noChangeAspect="1"/>
+              </p:cNvPicPr>
+              <p:nvPr/>
+            </p:nvPicPr>
+            <p:blipFill>
+              <a:blip r:embed="rId5"/>
+              <a:stretch>
+                <a:fillRect/>
+              </a:stretch>
+            </p:blipFill>
+            <p:spPr>
+              <a:xfrm>
+                <a:off x="1481464" y="1175341"/>
+                <a:ext cx="320040" cy="202692"/>
+              </a:xfrm>
+              <a:prstGeom prst="rect">
+                <a:avLst/>
+              </a:prstGeom>
+            </p:spPr>
+          </p:pic>
+          <p:sp>
+            <p:nvSpPr>
+              <p:cNvPr id="142" name="TextBox 141">
+                <a:extLst>
+                  <a:ext uri="{FF2B5EF4-FFF2-40B4-BE49-F238E27FC236}">
+                    <a16:creationId xmlns:a16="http://schemas.microsoft.com/office/drawing/2014/main" id="{CD93B747-454B-9E99-C007-067E6EBF6F88}"/>
+                  </a:ext>
+                </a:extLst>
+              </p:cNvPr>
+              <p:cNvSpPr txBox="1"/>
+              <p:nvPr/>
+            </p:nvSpPr>
+            <p:spPr>
+              <a:xfrm>
+                <a:off x="1801504" y="1015077"/>
+                <a:ext cx="724288" cy="523220"/>
+              </a:xfrm>
+              <a:prstGeom prst="rect">
+                <a:avLst/>
+              </a:prstGeom>
+              <a:noFill/>
+            </p:spPr>
+            <p:txBody>
+              <a:bodyPr wrap="square" rtlCol="0" anchor="ctr">
+                <a:spAutoFit/>
+              </a:bodyPr>
+              <a:lstStyle/>
+              <a:p>
+                <a:r>
+                  <a:rPr lang="en-US" sz="1400" dirty="0"/>
+                  <a:t>General</a:t>
+                </a:r>
+              </a:p>
+              <a:p>
+                <a:r>
+                  <a:rPr lang="en-US" sz="1400" dirty="0"/>
+                  <a:t>Subnet</a:t>
+                </a:r>
+              </a:p>
+            </p:txBody>
+          </p:sp>
+        </p:grpSp>
+      </p:grpSp>
+      <p:cxnSp>
+        <p:nvCxnSpPr>
+          <p:cNvPr id="150" name="Connector: Elbow 149">
+            <a:extLst>
+              <a:ext uri="{FF2B5EF4-FFF2-40B4-BE49-F238E27FC236}">
+                <a16:creationId xmlns:a16="http://schemas.microsoft.com/office/drawing/2014/main" id="{EC3D493D-09FE-16F4-C694-39FBCFBEAA0E}"/>
+              </a:ext>
+            </a:extLst>
+          </p:cNvPr>
+          <p:cNvCxnSpPr>
+            <a:cxnSpLocks/>
+            <a:stCxn id="57" idx="3"/>
+          </p:cNvCxnSpPr>
+          <p:nvPr/>
+        </p:nvCxnSpPr>
+        <p:spPr>
+          <a:xfrm>
+            <a:off x="3326296" y="1956184"/>
+            <a:ext cx="509475" cy="570563"/>
+          </a:xfrm>
+          <a:prstGeom prst="bentConnector2">
+            <a:avLst/>
+          </a:prstGeom>
+          <a:ln>
+            <a:solidFill>
+              <a:schemeClr val="tx1"/>
+            </a:solidFill>
+            <a:prstDash val="solid"/>
+            <a:headEnd type="none" w="lg" len="lg"/>
+            <a:tailEnd type="triangle" w="lg" len="lg"/>
+          </a:ln>
+        </p:spPr>
+        <p:style>
+          <a:lnRef idx="2">
+            <a:schemeClr val="accent1"/>
+          </a:lnRef>
+          <a:fillRef idx="0">
+            <a:schemeClr val="accent1"/>
+          </a:fillRef>
+          <a:effectRef idx="1">
+            <a:schemeClr val="accent1"/>
+          </a:effectRef>
+          <a:fontRef idx="minor">
+            <a:schemeClr val="tx1"/>
+          </a:fontRef>
+        </p:style>
+      </p:cxnSp>
+    </p:spTree>
+    <p:extLst>
+      <p:ext uri="{BB962C8B-B14F-4D97-AF65-F5344CB8AC3E}">
+        <p14:creationId xmlns:p14="http://schemas.microsoft.com/office/powerpoint/2010/main" val="2318429483"/>
       </p:ext>
     </p:extLst>
   </p:cSld>
@@ -23085,6 +27264,165 @@
     <p:extLst>
       <p:ext uri="{BB962C8B-B14F-4D97-AF65-F5344CB8AC3E}">
         <p14:creationId xmlns:p14="http://schemas.microsoft.com/office/powerpoint/2010/main" val="71902365"/>
+      </p:ext>
+    </p:extLst>
+  </p:cSld>
+  <p:clrMapOvr>
+    <a:masterClrMapping/>
+  </p:clrMapOvr>
+</p:sld>
+</file>
+
+<file path=ppt/slides/slide30.xml><?xml version="1.0" encoding="utf-8"?>
+<p:sld xmlns:a="http://schemas.openxmlformats.org/drawingml/2006/main" xmlns:r="http://schemas.openxmlformats.org/officeDocument/2006/relationships" xmlns:p="http://schemas.openxmlformats.org/presentationml/2006/main">
+  <p:cSld>
+    <p:spTree>
+      <p:nvGrpSpPr>
+        <p:cNvPr id="1" name=""/>
+        <p:cNvGrpSpPr/>
+        <p:nvPr/>
+      </p:nvGrpSpPr>
+      <p:grpSpPr>
+        <a:xfrm>
+          <a:off x="0" y="0"/>
+          <a:ext cx="0" cy="0"/>
+          <a:chOff x="0" y="0"/>
+          <a:chExt cx="0" cy="0"/>
+        </a:xfrm>
+      </p:grpSpPr>
+      <p:pic>
+        <p:nvPicPr>
+          <p:cNvPr id="1026" name="Picture 2">
+            <a:extLst>
+              <a:ext uri="{FF2B5EF4-FFF2-40B4-BE49-F238E27FC236}">
+                <a16:creationId xmlns:a16="http://schemas.microsoft.com/office/drawing/2014/main" id="{5F0DECF4-D97F-50C4-2BC6-FF6779833085}"/>
+              </a:ext>
+            </a:extLst>
+          </p:cNvPr>
+          <p:cNvPicPr>
+            <a:picLocks noChangeAspect="1" noChangeArrowheads="1"/>
+          </p:cNvPicPr>
+          <p:nvPr/>
+        </p:nvPicPr>
+        <p:blipFill>
+          <a:blip r:embed="rId2">
+            <a:extLst>
+              <a:ext uri="{28A0092B-C50C-407E-A947-70E740481C1C}">
+                <a14:useLocalDpi xmlns:a14="http://schemas.microsoft.com/office/drawing/2010/main" val="0"/>
+              </a:ext>
+            </a:extLst>
+          </a:blip>
+          <a:srcRect/>
+          <a:stretch>
+            <a:fillRect/>
+          </a:stretch>
+        </p:blipFill>
+        <p:spPr bwMode="auto">
+          <a:xfrm>
+            <a:off x="0" y="0"/>
+            <a:ext cx="5349875" cy="6858000"/>
+          </a:xfrm>
+          <a:prstGeom prst="rect">
+            <a:avLst/>
+          </a:prstGeom>
+          <a:noFill/>
+          <a:extLst>
+            <a:ext uri="{909E8E84-426E-40DD-AFC4-6F175D3DCCD1}">
+              <a14:hiddenFill xmlns:a14="http://schemas.microsoft.com/office/drawing/2010/main">
+                <a:solidFill>
+                  <a:srgbClr val="FFFFFF"/>
+                </a:solidFill>
+              </a14:hiddenFill>
+            </a:ext>
+          </a:extLst>
+        </p:spPr>
+      </p:pic>
+      <p:sp>
+        <p:nvSpPr>
+          <p:cNvPr id="5" name="TextBox 4">
+            <a:extLst>
+              <a:ext uri="{FF2B5EF4-FFF2-40B4-BE49-F238E27FC236}">
+                <a16:creationId xmlns:a16="http://schemas.microsoft.com/office/drawing/2014/main" id="{BDD578BC-5D7D-5C4C-8F29-72399D893A54}"/>
+              </a:ext>
+            </a:extLst>
+          </p:cNvPr>
+          <p:cNvSpPr txBox="1"/>
+          <p:nvPr/>
+        </p:nvSpPr>
+        <p:spPr>
+          <a:xfrm>
+            <a:off x="5920557" y="385224"/>
+            <a:ext cx="6097136" cy="646331"/>
+          </a:xfrm>
+          <a:prstGeom prst="rect">
+            <a:avLst/>
+          </a:prstGeom>
+          <a:noFill/>
+        </p:spPr>
+        <p:txBody>
+          <a:bodyPr wrap="square">
+            <a:spAutoFit/>
+          </a:bodyPr>
+          <a:lstStyle/>
+          <a:p>
+            <a:r>
+              <a:rPr lang="en-US" dirty="0"/>
+              <a:t>Style Guide: </a:t>
+            </a:r>
+            <a:r>
+              <a:rPr lang="en-US" dirty="0">
+                <a:hlinkClick r:id="rId3"/>
+              </a:rPr>
+              <a:t>https://oreillymedia.github.io/production-resources/illustrations/</a:t>
+            </a:r>
+            <a:r>
+              <a:rPr lang="en-US" dirty="0"/>
+              <a:t> </a:t>
+            </a:r>
+          </a:p>
+        </p:txBody>
+      </p:sp>
+      <p:sp>
+        <p:nvSpPr>
+          <p:cNvPr id="6" name="TextBox 5">
+            <a:extLst>
+              <a:ext uri="{FF2B5EF4-FFF2-40B4-BE49-F238E27FC236}">
+                <a16:creationId xmlns:a16="http://schemas.microsoft.com/office/drawing/2014/main" id="{73738677-70D9-CDFB-3CCB-A0A1A69FA2EC}"/>
+              </a:ext>
+            </a:extLst>
+          </p:cNvPr>
+          <p:cNvSpPr txBox="1"/>
+          <p:nvPr/>
+        </p:nvSpPr>
+        <p:spPr>
+          <a:xfrm>
+            <a:off x="7173532" y="1822360"/>
+            <a:ext cx="3167342" cy="369332"/>
+          </a:xfrm>
+          <a:prstGeom prst="rect">
+            <a:avLst/>
+          </a:prstGeom>
+          <a:noFill/>
+        </p:spPr>
+        <p:txBody>
+          <a:bodyPr wrap="none" rtlCol="0">
+            <a:spAutoFit/>
+          </a:bodyPr>
+          <a:lstStyle/>
+          <a:p>
+            <a:r>
+              <a:rPr lang="en-US" dirty="0">
+                <a:latin typeface="Guardian Sans Cond Medium" panose="020B0603030202060203" pitchFamily="34" charset="0"/>
+              </a:rPr>
+              <a:t>Fonts: Guardian Sans Cond Medium </a:t>
+            </a:r>
+          </a:p>
+        </p:txBody>
+      </p:sp>
+    </p:spTree>
+    <p:extLst>
+      <p:ext uri="{BB962C8B-B14F-4D97-AF65-F5344CB8AC3E}">
+        <p14:creationId xmlns:p14="http://schemas.microsoft.com/office/powerpoint/2010/main" val="1650268167"/>
       </p:ext>
     </p:extLst>
   </p:cSld>

--- a/figures/figures.pptx
+++ b/figures/figures.pptx
@@ -293,7 +293,7 @@
           <a:p>
             <a:fld id="{DAABB0E5-6D8D-4DEE-B75F-67010CF2307C}" type="datetimeFigureOut">
               <a:rPr lang="en-US" smtClean="0"/>
-              <a:t>6/17/2026</a:t>
+              <a:t>7/14/2026</a:t>
             </a:fld>
             <a:endParaRPr lang="en-US"/>
           </a:p>
@@ -1062,7 +1062,7 @@
           <a:p>
             <a:fld id="{B84C5C40-2055-49AF-9028-5DA79E75E391}" type="datetimeFigureOut">
               <a:rPr lang="en-US" smtClean="0"/>
-              <a:t>6/17/2026</a:t>
+              <a:t>7/14/2026</a:t>
             </a:fld>
             <a:endParaRPr lang="en-US"/>
           </a:p>
@@ -1232,7 +1232,7 @@
           <a:p>
             <a:fld id="{B84C5C40-2055-49AF-9028-5DA79E75E391}" type="datetimeFigureOut">
               <a:rPr lang="en-US" smtClean="0"/>
-              <a:t>6/17/2026</a:t>
+              <a:t>7/14/2026</a:t>
             </a:fld>
             <a:endParaRPr lang="en-US"/>
           </a:p>
@@ -1412,7 +1412,7 @@
           <a:p>
             <a:fld id="{B84C5C40-2055-49AF-9028-5DA79E75E391}" type="datetimeFigureOut">
               <a:rPr lang="en-US" smtClean="0"/>
-              <a:t>6/17/2026</a:t>
+              <a:t>7/14/2026</a:t>
             </a:fld>
             <a:endParaRPr lang="en-US"/>
           </a:p>
@@ -1582,7 +1582,7 @@
           <a:p>
             <a:fld id="{B84C5C40-2055-49AF-9028-5DA79E75E391}" type="datetimeFigureOut">
               <a:rPr lang="en-US" smtClean="0"/>
-              <a:t>6/17/2026</a:t>
+              <a:t>7/14/2026</a:t>
             </a:fld>
             <a:endParaRPr lang="en-US"/>
           </a:p>
@@ -1828,7 +1828,7 @@
           <a:p>
             <a:fld id="{B84C5C40-2055-49AF-9028-5DA79E75E391}" type="datetimeFigureOut">
               <a:rPr lang="en-US" smtClean="0"/>
-              <a:t>6/17/2026</a:t>
+              <a:t>7/14/2026</a:t>
             </a:fld>
             <a:endParaRPr lang="en-US"/>
           </a:p>
@@ -2060,7 +2060,7 @@
           <a:p>
             <a:fld id="{B84C5C40-2055-49AF-9028-5DA79E75E391}" type="datetimeFigureOut">
               <a:rPr lang="en-US" smtClean="0"/>
-              <a:t>6/17/2026</a:t>
+              <a:t>7/14/2026</a:t>
             </a:fld>
             <a:endParaRPr lang="en-US"/>
           </a:p>
@@ -2427,7 +2427,7 @@
           <a:p>
             <a:fld id="{B84C5C40-2055-49AF-9028-5DA79E75E391}" type="datetimeFigureOut">
               <a:rPr lang="en-US" smtClean="0"/>
-              <a:t>6/17/2026</a:t>
+              <a:t>7/14/2026</a:t>
             </a:fld>
             <a:endParaRPr lang="en-US"/>
           </a:p>
@@ -2545,7 +2545,7 @@
           <a:p>
             <a:fld id="{B84C5C40-2055-49AF-9028-5DA79E75E391}" type="datetimeFigureOut">
               <a:rPr lang="en-US" smtClean="0"/>
-              <a:t>6/17/2026</a:t>
+              <a:t>7/14/2026</a:t>
             </a:fld>
             <a:endParaRPr lang="en-US"/>
           </a:p>
@@ -2640,7 +2640,7 @@
           <a:p>
             <a:fld id="{B84C5C40-2055-49AF-9028-5DA79E75E391}" type="datetimeFigureOut">
               <a:rPr lang="en-US" smtClean="0"/>
-              <a:t>6/17/2026</a:t>
+              <a:t>7/14/2026</a:t>
             </a:fld>
             <a:endParaRPr lang="en-US"/>
           </a:p>
@@ -2917,7 +2917,7 @@
           <a:p>
             <a:fld id="{B84C5C40-2055-49AF-9028-5DA79E75E391}" type="datetimeFigureOut">
               <a:rPr lang="en-US" smtClean="0"/>
-              <a:t>6/17/2026</a:t>
+              <a:t>7/14/2026</a:t>
             </a:fld>
             <a:endParaRPr lang="en-US"/>
           </a:p>
@@ -3174,7 +3174,7 @@
           <a:p>
             <a:fld id="{B84C5C40-2055-49AF-9028-5DA79E75E391}" type="datetimeFigureOut">
               <a:rPr lang="en-US" smtClean="0"/>
-              <a:t>6/17/2026</a:t>
+              <a:t>7/14/2026</a:t>
             </a:fld>
             <a:endParaRPr lang="en-US"/>
           </a:p>
@@ -3387,7 +3387,7 @@
           <a:p>
             <a:fld id="{B84C5C40-2055-49AF-9028-5DA79E75E391}" type="datetimeFigureOut">
               <a:rPr lang="en-US" smtClean="0"/>
-              <a:t>6/17/2026</a:t>
+              <a:t>7/14/2026</a:t>
             </a:fld>
             <a:endParaRPr lang="en-US"/>
           </a:p>
@@ -34100,7 +34100,7 @@
         </p:blipFill>
         <p:spPr bwMode="auto">
           <a:xfrm>
-            <a:off x="-32280" y="4799453"/>
+            <a:off x="-228600" y="5077748"/>
             <a:ext cx="12192000" cy="3873500"/>
           </a:xfrm>
           <a:prstGeom prst="rect">
@@ -34267,7 +34267,7 @@
           <p:nvPr>
             <p:extLst>
               <p:ext uri="{D42A27DB-BD31-4B8C-83A1-F6EECF244321}">
-                <p14:modId xmlns:p14="http://schemas.microsoft.com/office/powerpoint/2010/main" val="4267279013"/>
+                <p14:modId xmlns:p14="http://schemas.microsoft.com/office/powerpoint/2010/main" val="2088363739"/>
               </p:ext>
             </p:extLst>
           </p:nvPr>
@@ -34406,7 +34406,7 @@
                             <a:sysClr val="windowText" lastClr="000000"/>
                           </a:solidFill>
                         </a:rPr>
-                        <a:t>Onelake</a:t>
+                        <a:t>OneLake</a:t>
                       </a:r>
                       <a:endParaRPr lang="en-US" b="0" dirty="0">
                         <a:solidFill>
@@ -35005,7 +35005,7 @@
           <p:nvPr>
             <p:extLst>
               <p:ext uri="{D42A27DB-BD31-4B8C-83A1-F6EECF244321}">
-                <p14:modId xmlns:p14="http://schemas.microsoft.com/office/powerpoint/2010/main" val="2690640093"/>
+                <p14:modId xmlns:p14="http://schemas.microsoft.com/office/powerpoint/2010/main" val="779357497"/>
               </p:ext>
             </p:extLst>
           </p:nvPr>

--- a/figures/figures.pptx
+++ b/figures/figures.pptx
@@ -293,7 +293,7 @@
           <a:p>
             <a:fld id="{DAABB0E5-6D8D-4DEE-B75F-67010CF2307C}" type="datetimeFigureOut">
               <a:rPr lang="en-US" smtClean="0"/>
-              <a:t>7/14/2026</a:t>
+              <a:t>7/15/2026</a:t>
             </a:fld>
             <a:endParaRPr lang="en-US"/>
           </a:p>
@@ -1062,7 +1062,7 @@
           <a:p>
             <a:fld id="{B84C5C40-2055-49AF-9028-5DA79E75E391}" type="datetimeFigureOut">
               <a:rPr lang="en-US" smtClean="0"/>
-              <a:t>7/14/2026</a:t>
+              <a:t>7/15/2026</a:t>
             </a:fld>
             <a:endParaRPr lang="en-US"/>
           </a:p>
@@ -1232,7 +1232,7 @@
           <a:p>
             <a:fld id="{B84C5C40-2055-49AF-9028-5DA79E75E391}" type="datetimeFigureOut">
               <a:rPr lang="en-US" smtClean="0"/>
-              <a:t>7/14/2026</a:t>
+              <a:t>7/15/2026</a:t>
             </a:fld>
             <a:endParaRPr lang="en-US"/>
           </a:p>
@@ -1412,7 +1412,7 @@
           <a:p>
             <a:fld id="{B84C5C40-2055-49AF-9028-5DA79E75E391}" type="datetimeFigureOut">
               <a:rPr lang="en-US" smtClean="0"/>
-              <a:t>7/14/2026</a:t>
+              <a:t>7/15/2026</a:t>
             </a:fld>
             <a:endParaRPr lang="en-US"/>
           </a:p>
@@ -1582,7 +1582,7 @@
           <a:p>
             <a:fld id="{B84C5C40-2055-49AF-9028-5DA79E75E391}" type="datetimeFigureOut">
               <a:rPr lang="en-US" smtClean="0"/>
-              <a:t>7/14/2026</a:t>
+              <a:t>7/15/2026</a:t>
             </a:fld>
             <a:endParaRPr lang="en-US"/>
           </a:p>
@@ -1828,7 +1828,7 @@
           <a:p>
             <a:fld id="{B84C5C40-2055-49AF-9028-5DA79E75E391}" type="datetimeFigureOut">
               <a:rPr lang="en-US" smtClean="0"/>
-              <a:t>7/14/2026</a:t>
+              <a:t>7/15/2026</a:t>
             </a:fld>
             <a:endParaRPr lang="en-US"/>
           </a:p>
@@ -2060,7 +2060,7 @@
           <a:p>
             <a:fld id="{B84C5C40-2055-49AF-9028-5DA79E75E391}" type="datetimeFigureOut">
               <a:rPr lang="en-US" smtClean="0"/>
-              <a:t>7/14/2026</a:t>
+              <a:t>7/15/2026</a:t>
             </a:fld>
             <a:endParaRPr lang="en-US"/>
           </a:p>
@@ -2427,7 +2427,7 @@
           <a:p>
             <a:fld id="{B84C5C40-2055-49AF-9028-5DA79E75E391}" type="datetimeFigureOut">
               <a:rPr lang="en-US" smtClean="0"/>
-              <a:t>7/14/2026</a:t>
+              <a:t>7/15/2026</a:t>
             </a:fld>
             <a:endParaRPr lang="en-US"/>
           </a:p>
@@ -2545,7 +2545,7 @@
           <a:p>
             <a:fld id="{B84C5C40-2055-49AF-9028-5DA79E75E391}" type="datetimeFigureOut">
               <a:rPr lang="en-US" smtClean="0"/>
-              <a:t>7/14/2026</a:t>
+              <a:t>7/15/2026</a:t>
             </a:fld>
             <a:endParaRPr lang="en-US"/>
           </a:p>
@@ -2640,7 +2640,7 @@
           <a:p>
             <a:fld id="{B84C5C40-2055-49AF-9028-5DA79E75E391}" type="datetimeFigureOut">
               <a:rPr lang="en-US" smtClean="0"/>
-              <a:t>7/14/2026</a:t>
+              <a:t>7/15/2026</a:t>
             </a:fld>
             <a:endParaRPr lang="en-US"/>
           </a:p>
@@ -2917,7 +2917,7 @@
           <a:p>
             <a:fld id="{B84C5C40-2055-49AF-9028-5DA79E75E391}" type="datetimeFigureOut">
               <a:rPr lang="en-US" smtClean="0"/>
-              <a:t>7/14/2026</a:t>
+              <a:t>7/15/2026</a:t>
             </a:fld>
             <a:endParaRPr lang="en-US"/>
           </a:p>
@@ -3174,7 +3174,7 @@
           <a:p>
             <a:fld id="{B84C5C40-2055-49AF-9028-5DA79E75E391}" type="datetimeFigureOut">
               <a:rPr lang="en-US" smtClean="0"/>
-              <a:t>7/14/2026</a:t>
+              <a:t>7/15/2026</a:t>
             </a:fld>
             <a:endParaRPr lang="en-US"/>
           </a:p>
@@ -3387,7 +3387,7 @@
           <a:p>
             <a:fld id="{B84C5C40-2055-49AF-9028-5DA79E75E391}" type="datetimeFigureOut">
               <a:rPr lang="en-US" smtClean="0"/>
-              <a:t>7/14/2026</a:t>
+              <a:t>7/15/2026</a:t>
             </a:fld>
             <a:endParaRPr lang="en-US"/>
           </a:p>
@@ -10815,7 +10815,7 @@
           <p:nvPr>
             <p:extLst>
               <p:ext uri="{D42A27DB-BD31-4B8C-83A1-F6EECF244321}">
-                <p14:modId xmlns:p14="http://schemas.microsoft.com/office/powerpoint/2010/main" val="2686571618"/>
+                <p14:modId xmlns:p14="http://schemas.microsoft.com/office/powerpoint/2010/main" val="3520250163"/>
               </p:ext>
             </p:extLst>
           </p:nvPr>
@@ -10946,7 +10946,7 @@
                             <a:sysClr val="windowText" lastClr="000000"/>
                           </a:solidFill>
                         </a:rPr>
-                        <a:t>Works Offline</a:t>
+                        <a:t>Works offline</a:t>
                       </a:r>
                     </a:p>
                   </a:txBody>
@@ -11125,7 +11125,7 @@
           <p:nvPr>
             <p:extLst>
               <p:ext uri="{D42A27DB-BD31-4B8C-83A1-F6EECF244321}">
-                <p14:modId xmlns:p14="http://schemas.microsoft.com/office/powerpoint/2010/main" val="3340926545"/>
+                <p14:modId xmlns:p14="http://schemas.microsoft.com/office/powerpoint/2010/main" val="2677451251"/>
               </p:ext>
             </p:extLst>
           </p:nvPr>
@@ -11435,7 +11435,7 @@
           <p:nvPr>
             <p:extLst>
               <p:ext uri="{D42A27DB-BD31-4B8C-83A1-F6EECF244321}">
-                <p14:modId xmlns:p14="http://schemas.microsoft.com/office/powerpoint/2010/main" val="1308394595"/>
+                <p14:modId xmlns:p14="http://schemas.microsoft.com/office/powerpoint/2010/main" val="2609140854"/>
               </p:ext>
             </p:extLst>
           </p:nvPr>
@@ -11486,23 +11486,7 @@
                             <a:sysClr val="windowText" lastClr="000000"/>
                           </a:solidFill>
                         </a:rPr>
-                        <a:t>SDKs for </a:t>
-                      </a:r>
-                      <a:r>
-                        <a:rPr lang="en-US" b="0" dirty="0" err="1">
-                          <a:solidFill>
-                            <a:sysClr val="windowText" lastClr="000000"/>
-                          </a:solidFill>
-                        </a:rPr>
-                        <a:t>Javascript</a:t>
-                      </a:r>
-                      <a:r>
-                        <a:rPr lang="en-US" b="0" dirty="0">
-                          <a:solidFill>
-                            <a:sysClr val="windowText" lastClr="000000"/>
-                          </a:solidFill>
-                        </a:rPr>
-                        <a:t>, Python, &amp; C#</a:t>
+                        <a:t>SDKs for JavaScript, Python, &amp; C#</a:t>
                       </a:r>
                     </a:p>
                   </a:txBody>
@@ -16814,7 +16798,7 @@
               <a:pPr algn="ctr"/>
               <a:r>
                 <a:rPr lang="en-US" sz="1600" dirty="0"/>
-                <a:t>Entities (nodes) are discreet objects of a domain.</a:t>
+                <a:t>Entities (nodes) are discrete objects of a domain.</a:t>
               </a:r>
             </a:p>
             <a:p>
@@ -22004,7 +21988,7 @@
             <a:pPr algn="ctr"/>
             <a:r>
               <a:rPr lang="en-US" dirty="0"/>
-              <a:t>1</a:t>
+              <a:t>0</a:t>
             </a:r>
           </a:p>
         </p:txBody>
@@ -22053,7 +22037,7 @@
             <a:pPr algn="ctr"/>
             <a:r>
               <a:rPr lang="en-US" dirty="0"/>
-              <a:t>2</a:t>
+              <a:t>1</a:t>
             </a:r>
           </a:p>
         </p:txBody>
@@ -22102,7 +22086,7 @@
             <a:pPr algn="ctr"/>
             <a:r>
               <a:rPr lang="en-US" dirty="0"/>
-              <a:t>3</a:t>
+              <a:t>2</a:t>
             </a:r>
           </a:p>
         </p:txBody>
@@ -22151,7 +22135,7 @@
             <a:pPr algn="ctr"/>
             <a:r>
               <a:rPr lang="en-US" dirty="0"/>
-              <a:t>4</a:t>
+              <a:t>3</a:t>
             </a:r>
           </a:p>
         </p:txBody>
